--- a/presentations/gen5_3_momentum_context_size_screen.pptx
+++ b/presentations/gen5_3_momentum_context_size_screen.pptx
@@ -2,23 +2,25 @@
 <file path=ppt/presentation.xml><?xml version="1.0" encoding="utf-8"?>
 <p:presentation xmlns:p="http://schemas.openxmlformats.org/presentationml/2006/main">
   <p:sldMasterIdLst>
-    <p:sldMasterId xmlns:r="http://schemas.openxmlformats.org/officeDocument/2006/relationships" id="2147483648" r:id="R0e43813055974d51"/>
+    <p:sldMasterId xmlns:r="http://schemas.openxmlformats.org/officeDocument/2006/relationships" id="2147483648" r:id="Rea60a39da2c34ff7"/>
   </p:sldMasterIdLst>
   <p:notesMasterIdLst>
-    <p:notesMasterId xmlns:r="http://schemas.openxmlformats.org/officeDocument/2006/relationships" r:id="R76e7a490e0034cab"/>
+    <p:notesMasterId xmlns:r="http://schemas.openxmlformats.org/officeDocument/2006/relationships" r:id="R47d0f5faffe944c1"/>
   </p:notesMasterIdLst>
   <p:sldIdLst>
-    <p:sldId xmlns:r="http://schemas.openxmlformats.org/officeDocument/2006/relationships" id="256" r:id="R70655a87746949e6"/>
-    <p:sldId xmlns:r="http://schemas.openxmlformats.org/officeDocument/2006/relationships" id="257" r:id="Rd7082de2ff414a1d"/>
-    <p:sldId xmlns:r="http://schemas.openxmlformats.org/officeDocument/2006/relationships" id="258" r:id="R5fc3a0c322594945"/>
-    <p:sldId xmlns:r="http://schemas.openxmlformats.org/officeDocument/2006/relationships" id="259" r:id="Ree967d8153a24915"/>
-    <p:sldId xmlns:r="http://schemas.openxmlformats.org/officeDocument/2006/relationships" id="260" r:id="Ra40f65b491304938"/>
-    <p:sldId xmlns:r="http://schemas.openxmlformats.org/officeDocument/2006/relationships" id="261" r:id="R7274204bc1e54d0b"/>
-    <p:sldId xmlns:r="http://schemas.openxmlformats.org/officeDocument/2006/relationships" id="262" r:id="R46055a6855bd4467"/>
-    <p:sldId xmlns:r="http://schemas.openxmlformats.org/officeDocument/2006/relationships" id="263" r:id="R3e4e85b35d164f71"/>
-    <p:sldId xmlns:r="http://schemas.openxmlformats.org/officeDocument/2006/relationships" id="264" r:id="R8228526393494ddc"/>
-    <p:sldId xmlns:r="http://schemas.openxmlformats.org/officeDocument/2006/relationships" id="265" r:id="R924d52b959dc4167"/>
-    <p:sldId xmlns:r="http://schemas.openxmlformats.org/officeDocument/2006/relationships" id="266" r:id="Re190f9dc39e24876"/>
+    <p:sldId xmlns:r="http://schemas.openxmlformats.org/officeDocument/2006/relationships" id="256" r:id="R916842fff5094def"/>
+    <p:sldId xmlns:r="http://schemas.openxmlformats.org/officeDocument/2006/relationships" id="257" r:id="R3abcdd5f5d064c3d"/>
+    <p:sldId xmlns:r="http://schemas.openxmlformats.org/officeDocument/2006/relationships" id="258" r:id="Rf8fd5b3e3d354674"/>
+    <p:sldId xmlns:r="http://schemas.openxmlformats.org/officeDocument/2006/relationships" id="259" r:id="R29dc9029b61348be"/>
+    <p:sldId xmlns:r="http://schemas.openxmlformats.org/officeDocument/2006/relationships" id="260" r:id="R52b23a7171244bcf"/>
+    <p:sldId xmlns:r="http://schemas.openxmlformats.org/officeDocument/2006/relationships" id="261" r:id="R946ffc6d0e7b4c1c"/>
+    <p:sldId xmlns:r="http://schemas.openxmlformats.org/officeDocument/2006/relationships" id="262" r:id="Rde2ecd2b77a74e92"/>
+    <p:sldId xmlns:r="http://schemas.openxmlformats.org/officeDocument/2006/relationships" id="263" r:id="Rbe443aade0ab4ca1"/>
+    <p:sldId xmlns:r="http://schemas.openxmlformats.org/officeDocument/2006/relationships" id="264" r:id="R9fe9d1a9ebad4f08"/>
+    <p:sldId xmlns:r="http://schemas.openxmlformats.org/officeDocument/2006/relationships" id="265" r:id="Rb7d1cae3fecb41c2"/>
+    <p:sldId xmlns:r="http://schemas.openxmlformats.org/officeDocument/2006/relationships" id="266" r:id="R6375943c454b4ba1"/>
+    <p:sldId xmlns:r="http://schemas.openxmlformats.org/officeDocument/2006/relationships" id="267" r:id="R8889e82af2f6416c"/>
+    <p:sldId xmlns:r="http://schemas.openxmlformats.org/officeDocument/2006/relationships" id="268" r:id="Rda487666badd4cff"/>
   </p:sldIdLst>
   <p:sldSz cx="12192000" cy="6858000"/>
   <p:notesSz cx="6858000" cy="9144000"/>
@@ -705,6 +707,138 @@
 </p:notes>
 </file>
 
+<file path=ppt/notesSlides/notesSlide12.xml><?xml version="1.0" encoding="utf-8"?>
+<p:notes xmlns:p="http://schemas.openxmlformats.org/presentationml/2006/main">
+  <p:cSld>
+    <p:spTree>
+      <p:nvGrpSpPr>
+        <p:cNvPr id="1" name=""/>
+        <p:cNvGrpSpPr/>
+        <p:nvPr/>
+      </p:nvGrpSpPr>
+      <p:grpSpPr>
+        <a:xfrm xmlns:a="http://schemas.openxmlformats.org/drawingml/2006/main"/>
+      </p:grpSpPr>
+      <p:sp>
+        <p:nvSpPr>
+          <p:cNvPr id="2" name="Slide Image Placeholder 1"/>
+          <p:cNvSpPr>
+            <a:spLocks xmlns:a="http://schemas.openxmlformats.org/drawingml/2006/main" noGrp="1"/>
+          </p:cNvSpPr>
+          <p:nvPr>
+            <p:ph type="sldImg" idx="0"/>
+          </p:nvPr>
+        </p:nvSpPr>
+        <p:spPr/>
+      </p:sp>
+      <p:sp>
+        <p:nvSpPr>
+          <p:cNvPr id="3" name="Notes Placeholder 2"/>
+          <p:cNvSpPr>
+            <a:spLocks xmlns:a="http://schemas.openxmlformats.org/drawingml/2006/main" noGrp="1"/>
+          </p:cNvSpPr>
+          <p:nvPr>
+            <p:ph type="body" idx="1"/>
+          </p:nvPr>
+        </p:nvSpPr>
+        <p:spPr/>
+        <p:txBody>
+          <a:bodyPr xmlns:a="http://schemas.openxmlformats.org/drawingml/2006/main"/>
+          <a:lstStyle xmlns:a="http://schemas.openxmlformats.org/drawingml/2006/main"/>
+          <a:p xmlns:a="http://schemas.openxmlformats.org/drawingml/2006/main"/>
+        </p:txBody>
+      </p:sp>
+      <p:sp>
+        <p:nvSpPr>
+          <p:cNvPr id="4" name="Slide Number Placeholder 3"/>
+          <p:cNvSpPr>
+            <a:spLocks xmlns:a="http://schemas.openxmlformats.org/drawingml/2006/main" noGrp="1"/>
+          </p:cNvSpPr>
+          <p:nvPr>
+            <p:ph type="sldNum" idx="5"/>
+          </p:nvPr>
+        </p:nvSpPr>
+        <p:spPr/>
+        <p:txBody>
+          <a:bodyPr xmlns:a="http://schemas.openxmlformats.org/drawingml/2006/main"/>
+          <a:lstStyle xmlns:a="http://schemas.openxmlformats.org/drawingml/2006/main"/>
+          <a:p xmlns:a="http://schemas.openxmlformats.org/drawingml/2006/main"/>
+        </p:txBody>
+      </p:sp>
+    </p:spTree>
+  </p:cSld>
+  <p:clrMapOvr>
+    <a:masterClrMapping xmlns:a="http://schemas.openxmlformats.org/drawingml/2006/main"/>
+  </p:clrMapOvr>
+</p:notes>
+</file>
+
+<file path=ppt/notesSlides/notesSlide13.xml><?xml version="1.0" encoding="utf-8"?>
+<p:notes xmlns:p="http://schemas.openxmlformats.org/presentationml/2006/main">
+  <p:cSld>
+    <p:spTree>
+      <p:nvGrpSpPr>
+        <p:cNvPr id="1" name=""/>
+        <p:cNvGrpSpPr/>
+        <p:nvPr/>
+      </p:nvGrpSpPr>
+      <p:grpSpPr>
+        <a:xfrm xmlns:a="http://schemas.openxmlformats.org/drawingml/2006/main"/>
+      </p:grpSpPr>
+      <p:sp>
+        <p:nvSpPr>
+          <p:cNvPr id="2" name="Slide Image Placeholder 1"/>
+          <p:cNvSpPr>
+            <a:spLocks xmlns:a="http://schemas.openxmlformats.org/drawingml/2006/main" noGrp="1"/>
+          </p:cNvSpPr>
+          <p:nvPr>
+            <p:ph type="sldImg" idx="0"/>
+          </p:nvPr>
+        </p:nvSpPr>
+        <p:spPr/>
+      </p:sp>
+      <p:sp>
+        <p:nvSpPr>
+          <p:cNvPr id="3" name="Notes Placeholder 2"/>
+          <p:cNvSpPr>
+            <a:spLocks xmlns:a="http://schemas.openxmlformats.org/drawingml/2006/main" noGrp="1"/>
+          </p:cNvSpPr>
+          <p:nvPr>
+            <p:ph type="body" idx="1"/>
+          </p:nvPr>
+        </p:nvSpPr>
+        <p:spPr/>
+        <p:txBody>
+          <a:bodyPr xmlns:a="http://schemas.openxmlformats.org/drawingml/2006/main"/>
+          <a:lstStyle xmlns:a="http://schemas.openxmlformats.org/drawingml/2006/main"/>
+          <a:p xmlns:a="http://schemas.openxmlformats.org/drawingml/2006/main"/>
+        </p:txBody>
+      </p:sp>
+      <p:sp>
+        <p:nvSpPr>
+          <p:cNvPr id="4" name="Slide Number Placeholder 3"/>
+          <p:cNvSpPr>
+            <a:spLocks xmlns:a="http://schemas.openxmlformats.org/drawingml/2006/main" noGrp="1"/>
+          </p:cNvSpPr>
+          <p:nvPr>
+            <p:ph type="sldNum" idx="5"/>
+          </p:nvPr>
+        </p:nvSpPr>
+        <p:spPr/>
+        <p:txBody>
+          <a:bodyPr xmlns:a="http://schemas.openxmlformats.org/drawingml/2006/main"/>
+          <a:lstStyle xmlns:a="http://schemas.openxmlformats.org/drawingml/2006/main"/>
+          <a:p xmlns:a="http://schemas.openxmlformats.org/drawingml/2006/main"/>
+        </p:txBody>
+      </p:sp>
+    </p:spTree>
+  </p:cSld>
+  <p:clrMapOvr>
+    <a:masterClrMapping xmlns:a="http://schemas.openxmlformats.org/drawingml/2006/main"/>
+  </p:clrMapOvr>
+</p:notes>
+</file>
+
 <file path=ppt/notesSlides/notesSlide2.xml><?xml version="1.0" encoding="utf-8"?>
 <p:notes xmlns:p="http://schemas.openxmlformats.org/presentationml/2006/main">
   <p:cSld>
@@ -1271,7 +1405,7 @@
   </p:cSld>
   <p:clrMap bg1="lt1" tx1="dk1" bg2="lt2" tx2="dk2" accent1="accent1" accent2="accent2" accent3="accent3" accent4="accent4" accent5="accent5" accent6="accent6" hlink="hlink" folHlink="folHlink"/>
   <p:sldLayoutIdLst>
-    <p:sldLayoutId xmlns:r="http://schemas.openxmlformats.org/officeDocument/2006/relationships" id="2147483649" r:id="R03e67c147021463a"/>
+    <p:sldLayoutId xmlns:r="http://schemas.openxmlformats.org/officeDocument/2006/relationships" id="2147483649" r:id="R44a25fc431d949d7"/>
   </p:sldLayoutIdLst>
   <p:txStyles>
     <p:titleStyle>
@@ -1842,16 +1976,16 @@
               <c:formatCode>General</c:formatCode>
               <c:ptCount val="4"/>
               <c:pt idx="0">
-                <c:v>32.7121250932126</c:v>
+                <c:v>2.23827026790857</c:v>
               </c:pt>
               <c:pt idx="1">
-                <c:v>158.321348341353</c:v>
+                <c:v>105.99847113368699</c:v>
               </c:pt>
               <c:pt idx="2">
-                <c:v>-36.051818270429195</c:v>
+                <c:v>-22.6109990928716</c:v>
               </c:pt>
               <c:pt idx="3">
-                <c:v>171.795901572598</c:v>
+                <c:v>138.140043213633</c:v>
               </c:pt>
             </c:numLit>
           </c:val>
@@ -1867,6 +2001,7 @@
               <a:srgbClr val="000000"/>
             </a:solidFill>
           </c:spPr>
+          <c:invertIfNegative val="0"/>
           <c:dLbls/>
           <c:cat>
             <c:numLit>
@@ -1891,16 +2026,16 @@
               <c:formatCode>General</c:formatCode>
               <c:ptCount val="4"/>
               <c:pt idx="0">
-                <c:v>NaN</c:v>
+                <c:v>58.442044682227504</c:v>
               </c:pt>
               <c:pt idx="1">
-                <c:v>NaN</c:v>
+                <c:v>227.277921974783</c:v>
               </c:pt>
               <c:pt idx="2">
-                <c:v>NaN</c:v>
+                <c:v>-53.0417801301569</c:v>
               </c:pt>
               <c:pt idx="3">
-                <c:v>NaN</c:v>
+                <c:v>133.45555861176902</c:v>
               </c:pt>
             </c:numLit>
           </c:val>
@@ -2028,7 +2163,7 @@
           <p:cNvPr id="1" name="">
             <a:extLst xmlns:a="http://schemas.openxmlformats.org/drawingml/2006/main">
               <a:ext uri="{FF2B5EF4-FFF2-40B4-BE49-F238E27FC236}">
-                <a16:creationId xmlns:a16="http://schemas.microsoft.com/office/drawing/2014/main" id="{C165151F-C2D3-4E83-B867-E20034E580D6}"/>
+                <a16:creationId xmlns:a16="http://schemas.microsoft.com/office/drawing/2014/main" id="{79D22403-7E5E-4549-ADF7-27616952FDEE}"/>
               </a:ext>
             </a:extLst>
           </p:cNvPr>
@@ -2078,7 +2213,7 @@
           <p:cNvPr id="2" name="">
             <a:extLst xmlns:a="http://schemas.openxmlformats.org/drawingml/2006/main">
               <a:ext uri="{FF2B5EF4-FFF2-40B4-BE49-F238E27FC236}">
-                <a16:creationId xmlns:a16="http://schemas.microsoft.com/office/drawing/2014/main" id="{F7977F0B-6AC8-4CF5-96A5-ACE76A373923}"/>
+                <a16:creationId xmlns:a16="http://schemas.microsoft.com/office/drawing/2014/main" id="{275BB50D-7C29-495E-B22B-0341D858B7FE}"/>
               </a:ext>
             </a:extLst>
           </p:cNvPr>
@@ -2090,35 +2225,35 @@
         <p:spPr>
           <a:xfrm xmlns:a="http://schemas.openxmlformats.org/drawingml/2006/main">
             <a:off x="571500" y="1238250"/>
-            <a:ext cx="8572500" cy="1200150"/>
-          </a:xfrm>
-          <a:prstGeom xmlns:a="http://schemas.openxmlformats.org/drawingml/2006/main" prst="rect">
-            <a:avLst/>
-          </a:prstGeom>
-          <a:noFill xmlns:a="http://schemas.openxmlformats.org/drawingml/2006/main"/>
-          <a:ln xmlns:a="http://schemas.openxmlformats.org/drawingml/2006/main" w="0">
-            <a:noFill/>
-            <a:prstDash val="solid"/>
-          </a:ln>
-        </p:spPr>
-        <p:txBody>
-          <a:bodyPr xmlns:a="http://schemas.openxmlformats.org/drawingml/2006/main"/>
-          <a:lstStyle xmlns:a="http://schemas.openxmlformats.org/drawingml/2006/main"/>
-          <a:p xmlns:a="http://schemas.openxmlformats.org/drawingml/2006/main">
-            <a:pPr>
-              <a:defRPr sz="4050" b="1">
-                <a:solidFill>
-                  <a:srgbClr val="000000"/>
-                </a:solidFill>
-              </a:defRPr>
-            </a:pPr>
-            <a:r>
-              <a:rPr sz="4050" b="1">
-                <a:solidFill>
-                  <a:srgbClr val="000000"/>
-                </a:solidFill>
-              </a:rPr>
-              <a:t>Annual windows made the momentum-specialist question sharper</a:t>
+            <a:ext cx="9334500" cy="1200150"/>
+          </a:xfrm>
+          <a:prstGeom xmlns:a="http://schemas.openxmlformats.org/drawingml/2006/main" prst="rect">
+            <a:avLst/>
+          </a:prstGeom>
+          <a:noFill xmlns:a="http://schemas.openxmlformats.org/drawingml/2006/main"/>
+          <a:ln xmlns:a="http://schemas.openxmlformats.org/drawingml/2006/main" w="0">
+            <a:noFill/>
+            <a:prstDash val="solid"/>
+          </a:ln>
+        </p:spPr>
+        <p:txBody>
+          <a:bodyPr xmlns:a="http://schemas.openxmlformats.org/drawingml/2006/main"/>
+          <a:lstStyle xmlns:a="http://schemas.openxmlformats.org/drawingml/2006/main"/>
+          <a:p xmlns:a="http://schemas.openxmlformats.org/drawingml/2006/main">
+            <a:pPr>
+              <a:defRPr sz="3900" b="1">
+                <a:solidFill>
+                  <a:srgbClr val="000000"/>
+                </a:solidFill>
+              </a:defRPr>
+            </a:pPr>
+            <a:r>
+              <a:rPr sz="3900" b="1">
+                <a:solidFill>
+                  <a:srgbClr val="000000"/>
+                </a:solidFill>
+              </a:rPr>
+              <a:t>Annual continuity replay made the next strategy question sharper</a:t>
             </a:r>
           </a:p>
         </p:txBody>
@@ -2128,7 +2263,7 @@
           <p:cNvPr id="3" name="">
             <a:extLst xmlns:a="http://schemas.openxmlformats.org/drawingml/2006/main">
               <a:ext uri="{FF2B5EF4-FFF2-40B4-BE49-F238E27FC236}">
-                <a16:creationId xmlns:a16="http://schemas.microsoft.com/office/drawing/2014/main" id="{8F4E4030-5AF8-42E4-9A65-4DF8055B5443}"/>
+                <a16:creationId xmlns:a16="http://schemas.microsoft.com/office/drawing/2014/main" id="{23C56E5B-01B5-4358-BBEA-BFDA0580A37D}"/>
               </a:ext>
             </a:extLst>
           </p:cNvPr>
@@ -2140,35 +2275,35 @@
         <p:spPr>
           <a:xfrm xmlns:a="http://schemas.openxmlformats.org/drawingml/2006/main">
             <a:off x="609600" y="2952750"/>
-            <a:ext cx="7810500" cy="876300"/>
-          </a:xfrm>
-          <a:prstGeom xmlns:a="http://schemas.openxmlformats.org/drawingml/2006/main" prst="rect">
-            <a:avLst/>
-          </a:prstGeom>
-          <a:noFill xmlns:a="http://schemas.openxmlformats.org/drawingml/2006/main"/>
-          <a:ln xmlns:a="http://schemas.openxmlformats.org/drawingml/2006/main" w="0">
-            <a:noFill/>
-            <a:prstDash val="solid"/>
-          </a:ln>
-        </p:spPr>
-        <p:txBody>
-          <a:bodyPr xmlns:a="http://schemas.openxmlformats.org/drawingml/2006/main"/>
-          <a:lstStyle xmlns:a="http://schemas.openxmlformats.org/drawingml/2006/main"/>
-          <a:p xmlns:a="http://schemas.openxmlformats.org/drawingml/2006/main">
-            <a:pPr>
-              <a:defRPr sz="1875" b="0">
+            <a:ext cx="8191500" cy="990600"/>
+          </a:xfrm>
+          <a:prstGeom xmlns:a="http://schemas.openxmlformats.org/drawingml/2006/main" prst="rect">
+            <a:avLst/>
+          </a:prstGeom>
+          <a:noFill xmlns:a="http://schemas.openxmlformats.org/drawingml/2006/main"/>
+          <a:ln xmlns:a="http://schemas.openxmlformats.org/drawingml/2006/main" w="0">
+            <a:noFill/>
+            <a:prstDash val="solid"/>
+          </a:ln>
+        </p:spPr>
+        <p:txBody>
+          <a:bodyPr xmlns:a="http://schemas.openxmlformats.org/drawingml/2006/main"/>
+          <a:lstStyle xmlns:a="http://schemas.openxmlformats.org/drawingml/2006/main"/>
+          <a:p xmlns:a="http://schemas.openxmlformats.org/drawingml/2006/main">
+            <a:pPr>
+              <a:defRPr sz="1800" b="0">
                 <a:solidFill>
                   <a:srgbClr val="555555"/>
                 </a:solidFill>
               </a:defRPr>
             </a:pPr>
             <a:r>
-              <a:rPr sz="1875" b="0">
+              <a:rPr sz="1800" b="0">
                 <a:solidFill>
                   <a:srgbClr val="555555"/>
                 </a:solidFill>
               </a:rPr>
-              <a:t>The first one-year context-size screen suggests the best current lane is not the newest feature set. It is broader risk-aware context, the existing workhorse PCA surface, and continuation replay.</a:t>
+              <a:t>The corrected one-year screen keeps risk-aware context, the workhorse PCA surface, and continuation replay as the control lane. It also shows that the EMA-only pool may be too narrow to judge the broader hypothesis.</a:t>
             </a:r>
           </a:p>
         </p:txBody>
@@ -2178,7 +2313,7 @@
           <p:cNvPr id="4" name="">
             <a:extLst xmlns:a="http://schemas.openxmlformats.org/drawingml/2006/main">
               <a:ext uri="{FF2B5EF4-FFF2-40B4-BE49-F238E27FC236}">
-                <a16:creationId xmlns:a16="http://schemas.microsoft.com/office/drawing/2014/main" id="{A1A4301D-874D-42B2-B76B-3161D35EECA2}"/>
+                <a16:creationId xmlns:a16="http://schemas.microsoft.com/office/drawing/2014/main" id="{13AF9497-B72A-48B6-9B47-AC273CEABF3C}"/>
               </a:ext>
             </a:extLst>
           </p:cNvPr>
@@ -2211,7 +2346,7 @@
           <p:cNvPr id="5" name="">
             <a:extLst xmlns:a="http://schemas.openxmlformats.org/drawingml/2006/main">
               <a:ext uri="{FF2B5EF4-FFF2-40B4-BE49-F238E27FC236}">
-                <a16:creationId xmlns:a16="http://schemas.microsoft.com/office/drawing/2014/main" id="{A24BA6B5-6300-4233-B98D-1FF576828061}"/>
+                <a16:creationId xmlns:a16="http://schemas.microsoft.com/office/drawing/2014/main" id="{63C516A2-8EA1-41C4-9E64-918F29C4F143}"/>
               </a:ext>
             </a:extLst>
           </p:cNvPr>
@@ -2223,7 +2358,7 @@
         <p:spPr>
           <a:xfrm xmlns:a="http://schemas.openxmlformats.org/drawingml/2006/main">
             <a:off x="609600" y="5162550"/>
-            <a:ext cx="9429750" cy="266700"/>
+            <a:ext cx="9906000" cy="266700"/>
           </a:xfrm>
           <a:prstGeom xmlns:a="http://schemas.openxmlformats.org/drawingml/2006/main" prst="rect">
             <a:avLst/>
@@ -2251,7 +2386,7 @@
                   <a:srgbClr val="555555"/>
                 </a:solidFill>
               </a:rPr>
-              <a:t>Packet: runs/research_workbench/gen53_momentum_context_size/g53_momctx_20260710ctxsize</a:t>
+              <a:t>Continuity packet: runs/research_workbench/gen53_momentum_context_size/g53_momctx_20260711continuity</a:t>
             </a:r>
           </a:p>
         </p:txBody>
@@ -2261,7 +2396,7 @@
           <p:cNvPr id="6" name="">
             <a:extLst xmlns:a="http://schemas.openxmlformats.org/drawingml/2006/main">
               <a:ext uri="{FF2B5EF4-FFF2-40B4-BE49-F238E27FC236}">
-                <a16:creationId xmlns:a16="http://schemas.microsoft.com/office/drawing/2014/main" id="{B6D1D0D9-3E99-48BC-A742-68668DE1E11E}"/>
+                <a16:creationId xmlns:a16="http://schemas.microsoft.com/office/drawing/2014/main" id="{193E7B3F-880C-43C5-9D9B-447062C3C792}"/>
               </a:ext>
             </a:extLst>
           </p:cNvPr>
@@ -2309,7 +2444,7 @@
     </p:spTree>
     <p:extLst>
       <p:ext uri="{BB962C8B-B14F-4D97-AF65-F5344CB8AC3E}">
-        <p14:creationId xmlns:p14="http://schemas.microsoft.com/office/powerpoint/2010/main" val="474546601"/>
+        <p14:creationId xmlns:p14="http://schemas.microsoft.com/office/powerpoint/2010/main" val="72612694"/>
       </p:ext>
     </p:extLst>
   </p:cSld>
@@ -2340,7 +2475,7 @@
           <p:cNvPr id="1" name="">
             <a:extLst xmlns:a="http://schemas.openxmlformats.org/drawingml/2006/main">
               <a:ext uri="{FF2B5EF4-FFF2-40B4-BE49-F238E27FC236}">
-                <a16:creationId xmlns:a16="http://schemas.microsoft.com/office/drawing/2014/main" id="{027C7738-D8E9-41A1-8C61-B1290F9A7259}"/>
+                <a16:creationId xmlns:a16="http://schemas.microsoft.com/office/drawing/2014/main" id="{D7D3DB81-3CCE-4C32-BC6B-E0F7C240A265}"/>
               </a:ext>
             </a:extLst>
           </p:cNvPr>
@@ -2390,7 +2525,7 @@
           <p:cNvPr id="2" name="">
             <a:extLst xmlns:a="http://schemas.openxmlformats.org/drawingml/2006/main">
               <a:ext uri="{FF2B5EF4-FFF2-40B4-BE49-F238E27FC236}">
-                <a16:creationId xmlns:a16="http://schemas.microsoft.com/office/drawing/2014/main" id="{0E8750A1-51FD-4AA4-BF54-E529EC9FDCF7}"/>
+                <a16:creationId xmlns:a16="http://schemas.microsoft.com/office/drawing/2014/main" id="{909FD28B-E84C-477B-9384-02A7C4C4F494}"/>
               </a:ext>
             </a:extLst>
           </p:cNvPr>
@@ -2430,7 +2565,7 @@
                   <a:srgbClr val="000000"/>
                 </a:solidFill>
               </a:rPr>
-              <a:t>Representative tapes show both the promise and the weakness</a:t>
+              <a:t>The authority map is cash-dominant, which explains part of the underparticipation</a:t>
             </a:r>
           </a:p>
         </p:txBody>
@@ -2440,7 +2575,7 @@
           <p:cNvPr id="3" name="">
             <a:extLst xmlns:a="http://schemas.openxmlformats.org/drawingml/2006/main">
               <a:ext uri="{FF2B5EF4-FFF2-40B4-BE49-F238E27FC236}">
-                <a16:creationId xmlns:a16="http://schemas.microsoft.com/office/drawing/2014/main" id="{4366BF45-A20C-45D6-BE3A-542B33EBF307}"/>
+                <a16:creationId xmlns:a16="http://schemas.microsoft.com/office/drawing/2014/main" id="{AA38EA12-0465-44A6-B1D4-98B5A88FD190}"/>
               </a:ext>
             </a:extLst>
           </p:cNvPr>
@@ -2470,20 +2605,20 @@
       </p:sp>
       <p:pic>
         <p:nvPicPr>
-          <p:cNvPr id="17" name=""/>
+          <p:cNvPr id="12" name=""/>
           <p:cNvPicPr>
             <a:picLocks xmlns:a="http://schemas.openxmlformats.org/drawingml/2006/main" noChangeAspect="1"/>
           </p:cNvPicPr>
           <p:nvPr/>
         </p:nvPicPr>
         <p:blipFill>
-          <a:blip xmlns:r="http://schemas.openxmlformats.org/officeDocument/2006/relationships" xmlns:a="http://schemas.openxmlformats.org/drawingml/2006/main" r:embed="R0d6363c9cd6e4f2f"/>
+          <a:blip xmlns:r="http://schemas.openxmlformats.org/officeDocument/2006/relationships" xmlns:a="http://schemas.openxmlformats.org/drawingml/2006/main" r:embed="R45491865c7d74dae"/>
           <a:stretch xmlns:a="http://schemas.openxmlformats.org/drawingml/2006/main"/>
         </p:blipFill>
         <p:spPr>
           <a:xfrm xmlns:a="http://schemas.openxmlformats.org/drawingml/2006/main">
-            <a:off x="856247" y="1638300"/>
-            <a:ext cx="6517105" cy="4762500"/>
+            <a:off x="792256" y="1790700"/>
+            <a:ext cx="6264088" cy="4095750"/>
           </a:xfrm>
           <a:prstGeom xmlns:a="http://schemas.openxmlformats.org/drawingml/2006/main" prst="rect">
             <a:avLst/>
@@ -2495,19 +2630,19 @@
           <p:cNvPr id="5" name="">
             <a:extLst xmlns:a="http://schemas.openxmlformats.org/drawingml/2006/main">
               <a:ext uri="{FF2B5EF4-FFF2-40B4-BE49-F238E27FC236}">
-                <a16:creationId xmlns:a16="http://schemas.microsoft.com/office/drawing/2014/main" id="{9F0DA56F-C307-43A1-A5CC-BAA6E3E6C034}"/>
-              </a:ext>
-            </a:extLst>
-          </p:cNvPr>
-          <p:cNvSpPr>
-            <a:spLocks xmlns:a="http://schemas.openxmlformats.org/drawingml/2006/main" noGrp="1"/>
-          </p:cNvSpPr>
-          <p:nvPr/>
-        </p:nvSpPr>
-        <p:spPr>
-          <a:xfrm xmlns:a="http://schemas.openxmlformats.org/drawingml/2006/main">
-            <a:off x="8248650" y="2000250"/>
-            <a:ext cx="2857500" cy="3200400"/>
+                <a16:creationId xmlns:a16="http://schemas.microsoft.com/office/drawing/2014/main" id="{7CFDE43E-1D9E-4D93-83DB-68A9EE133765}"/>
+              </a:ext>
+            </a:extLst>
+          </p:cNvPr>
+          <p:cNvSpPr>
+            <a:spLocks xmlns:a="http://schemas.openxmlformats.org/drawingml/2006/main" noGrp="1"/>
+          </p:cNvSpPr>
+          <p:nvPr/>
+        </p:nvSpPr>
+        <p:spPr>
+          <a:xfrm xmlns:a="http://schemas.openxmlformats.org/drawingml/2006/main">
+            <a:off x="7734300" y="2171700"/>
+            <a:ext cx="3219450" cy="2552700"/>
           </a:xfrm>
           <a:prstGeom xmlns:a="http://schemas.openxmlformats.org/drawingml/2006/main" prst="rect">
             <a:avLst/>
@@ -2528,19 +2663,19 @@
           <p:cNvPr id="6" name="">
             <a:extLst xmlns:a="http://schemas.openxmlformats.org/drawingml/2006/main">
               <a:ext uri="{FF2B5EF4-FFF2-40B4-BE49-F238E27FC236}">
-                <a16:creationId xmlns:a16="http://schemas.microsoft.com/office/drawing/2014/main" id="{BE0F0EC8-ECAD-4529-8B1E-46EE2EAA42AC}"/>
-              </a:ext>
-            </a:extLst>
-          </p:cNvPr>
-          <p:cNvSpPr>
-            <a:spLocks xmlns:a="http://schemas.openxmlformats.org/drawingml/2006/main" noGrp="1"/>
-          </p:cNvSpPr>
-          <p:nvPr/>
-        </p:nvSpPr>
-        <p:spPr>
-          <a:xfrm xmlns:a="http://schemas.openxmlformats.org/drawingml/2006/main">
-            <a:off x="8534400" y="2286000"/>
-            <a:ext cx="2095500" cy="304800"/>
+                <a16:creationId xmlns:a16="http://schemas.microsoft.com/office/drawing/2014/main" id="{69B52AF1-02A1-4CAF-9EC9-FDD0D34A2D23}"/>
+              </a:ext>
+            </a:extLst>
+          </p:cNvPr>
+          <p:cNvSpPr>
+            <a:spLocks xmlns:a="http://schemas.openxmlformats.org/drawingml/2006/main" noGrp="1"/>
+          </p:cNvSpPr>
+          <p:nvPr/>
+        </p:nvSpPr>
+        <p:spPr>
+          <a:xfrm xmlns:a="http://schemas.openxmlformats.org/drawingml/2006/main">
+            <a:off x="8020050" y="2457450"/>
+            <a:ext cx="2286000" cy="304800"/>
           </a:xfrm>
           <a:prstGeom xmlns:a="http://schemas.openxmlformats.org/drawingml/2006/main" prst="rect">
             <a:avLst/>
@@ -2568,7 +2703,7 @@
                   <a:srgbClr val="000000"/>
                 </a:solidFill>
               </a:rPr>
-              <a:t>Visual audit</a:t>
+              <a:t>Sanity check</a:t>
             </a:r>
           </a:p>
         </p:txBody>
@@ -2578,256 +2713,57 @@
           <p:cNvPr id="7" name="">
             <a:extLst xmlns:a="http://schemas.openxmlformats.org/drawingml/2006/main">
               <a:ext uri="{FF2B5EF4-FFF2-40B4-BE49-F238E27FC236}">
-                <a16:creationId xmlns:a16="http://schemas.microsoft.com/office/drawing/2014/main" id="{B7B1CC8C-C9F7-4AE8-8EAC-28C85B5F4402}"/>
-              </a:ext>
-            </a:extLst>
-          </p:cNvPr>
-          <p:cNvSpPr>
-            <a:spLocks xmlns:a="http://schemas.openxmlformats.org/drawingml/2006/main" noGrp="1"/>
-          </p:cNvSpPr>
-          <p:nvPr/>
-        </p:nvSpPr>
-        <p:spPr>
-          <a:xfrm xmlns:a="http://schemas.openxmlformats.org/drawingml/2006/main">
-            <a:off x="8553450" y="3009900"/>
-            <a:ext cx="76200" cy="76200"/>
-          </a:xfrm>
-          <a:prstGeom xmlns:a="http://schemas.openxmlformats.org/drawingml/2006/main" prst="rect">
-            <a:avLst/>
-          </a:prstGeom>
-          <a:solidFill xmlns:a="http://schemas.openxmlformats.org/drawingml/2006/main">
-            <a:srgbClr val="FF6B35"/>
-          </a:solidFill>
-          <a:ln xmlns:a="http://schemas.openxmlformats.org/drawingml/2006/main" w="9525">
-            <a:solidFill>
-              <a:srgbClr val="FF6B35"/>
-            </a:solidFill>
-            <a:prstDash val="solid"/>
-          </a:ln>
-        </p:spPr>
+                <a16:creationId xmlns:a16="http://schemas.microsoft.com/office/drawing/2014/main" id="{9155DF38-5143-4B2E-BB67-DFEA1A045FB9}"/>
+              </a:ext>
+            </a:extLst>
+          </p:cNvPr>
+          <p:cNvSpPr>
+            <a:spLocks xmlns:a="http://schemas.openxmlformats.org/drawingml/2006/main" noGrp="1"/>
+          </p:cNvSpPr>
+          <p:nvPr/>
+        </p:nvSpPr>
+        <p:spPr>
+          <a:xfrm xmlns:a="http://schemas.openxmlformats.org/drawingml/2006/main">
+            <a:off x="8020050" y="3048000"/>
+            <a:ext cx="2571750" cy="1219200"/>
+          </a:xfrm>
+          <a:prstGeom xmlns:a="http://schemas.openxmlformats.org/drawingml/2006/main" prst="rect">
+            <a:avLst/>
+          </a:prstGeom>
+          <a:noFill xmlns:a="http://schemas.openxmlformats.org/drawingml/2006/main"/>
+          <a:ln xmlns:a="http://schemas.openxmlformats.org/drawingml/2006/main" w="0">
+            <a:noFill/>
+            <a:prstDash val="solid"/>
+          </a:ln>
+        </p:spPr>
+        <p:txBody>
+          <a:bodyPr xmlns:a="http://schemas.openxmlformats.org/drawingml/2006/main"/>
+          <a:lstStyle xmlns:a="http://schemas.openxmlformats.org/drawingml/2006/main"/>
+          <a:p xmlns:a="http://schemas.openxmlformats.org/drawingml/2006/main">
+            <a:pPr>
+              <a:defRPr sz="1425" b="0">
+                <a:solidFill>
+                  <a:srgbClr val="555555"/>
+                </a:solidFill>
+              </a:defRPr>
+            </a:pPr>
+            <a:r>
+              <a:rPr sz="1425" b="0">
+                <a:solidFill>
+                  <a:srgbClr val="555555"/>
+                </a:solidFill>
+              </a:rPr>
+              <a:t>Across the full annual screen, no-trade remains the dominant selected authority in many asset-state cells. That is philosophically clean for a specialist, but it also means missed upside is expected unless the favorable states are timely and persistent.</a:t>
+            </a:r>
+          </a:p>
+        </p:txBody>
       </p:sp>
       <p:sp>
         <p:nvSpPr>
           <p:cNvPr id="8" name="">
             <a:extLst xmlns:a="http://schemas.openxmlformats.org/drawingml/2006/main">
               <a:ext uri="{FF2B5EF4-FFF2-40B4-BE49-F238E27FC236}">
-                <a16:creationId xmlns:a16="http://schemas.microsoft.com/office/drawing/2014/main" id="{229AD182-A043-479B-A327-62065A771AAF}"/>
-              </a:ext>
-            </a:extLst>
-          </p:cNvPr>
-          <p:cNvSpPr>
-            <a:spLocks xmlns:a="http://schemas.openxmlformats.org/drawingml/2006/main" noGrp="1"/>
-          </p:cNvSpPr>
-          <p:nvPr/>
-        </p:nvSpPr>
-        <p:spPr>
-          <a:xfrm xmlns:a="http://schemas.openxmlformats.org/drawingml/2006/main">
-            <a:off x="8763000" y="2914650"/>
-            <a:ext cx="2038350" cy="571500"/>
-          </a:xfrm>
-          <a:prstGeom xmlns:a="http://schemas.openxmlformats.org/drawingml/2006/main" prst="rect">
-            <a:avLst/>
-          </a:prstGeom>
-          <a:noFill xmlns:a="http://schemas.openxmlformats.org/drawingml/2006/main"/>
-          <a:ln xmlns:a="http://schemas.openxmlformats.org/drawingml/2006/main" w="0">
-            <a:noFill/>
-            <a:prstDash val="solid"/>
-          </a:ln>
-        </p:spPr>
-        <p:txBody>
-          <a:bodyPr xmlns:a="http://schemas.openxmlformats.org/drawingml/2006/main"/>
-          <a:lstStyle xmlns:a="http://schemas.openxmlformats.org/drawingml/2006/main"/>
-          <a:p xmlns:a="http://schemas.openxmlformats.org/drawingml/2006/main">
-            <a:pPr>
-              <a:defRPr sz="1200" b="0">
-                <a:solidFill>
-                  <a:srgbClr val="000000"/>
-                </a:solidFill>
-              </a:defRPr>
-            </a:pPr>
-            <a:r>
-              <a:rPr sz="1200" b="0">
-                <a:solidFill>
-                  <a:srgbClr val="000000"/>
-                </a:solidFill>
-              </a:rPr>
-              <a:t>AMD shows churn and missed/stopped participation.</a:t>
-            </a:r>
-          </a:p>
-        </p:txBody>
-      </p:sp>
-      <p:sp>
-        <p:nvSpPr>
-          <p:cNvPr id="9" name="">
-            <a:extLst xmlns:a="http://schemas.openxmlformats.org/drawingml/2006/main">
-              <a:ext uri="{FF2B5EF4-FFF2-40B4-BE49-F238E27FC236}">
-                <a16:creationId xmlns:a16="http://schemas.microsoft.com/office/drawing/2014/main" id="{6F102D9F-F774-4023-A18C-8CB167FA4D02}"/>
-              </a:ext>
-            </a:extLst>
-          </p:cNvPr>
-          <p:cNvSpPr>
-            <a:spLocks xmlns:a="http://schemas.openxmlformats.org/drawingml/2006/main" noGrp="1"/>
-          </p:cNvSpPr>
-          <p:nvPr/>
-        </p:nvSpPr>
-        <p:spPr>
-          <a:xfrm xmlns:a="http://schemas.openxmlformats.org/drawingml/2006/main">
-            <a:off x="8553450" y="3524250"/>
-            <a:ext cx="76200" cy="76200"/>
-          </a:xfrm>
-          <a:prstGeom xmlns:a="http://schemas.openxmlformats.org/drawingml/2006/main" prst="rect">
-            <a:avLst/>
-          </a:prstGeom>
-          <a:solidFill xmlns:a="http://schemas.openxmlformats.org/drawingml/2006/main">
-            <a:srgbClr val="FF6B35"/>
-          </a:solidFill>
-          <a:ln xmlns:a="http://schemas.openxmlformats.org/drawingml/2006/main" w="9525">
-            <a:solidFill>
-              <a:srgbClr val="FF6B35"/>
-            </a:solidFill>
-            <a:prstDash val="solid"/>
-          </a:ln>
-        </p:spPr>
-      </p:sp>
-      <p:sp>
-        <p:nvSpPr>
-          <p:cNvPr id="10" name="">
-            <a:extLst xmlns:a="http://schemas.openxmlformats.org/drawingml/2006/main">
-              <a:ext uri="{FF2B5EF4-FFF2-40B4-BE49-F238E27FC236}">
-                <a16:creationId xmlns:a16="http://schemas.microsoft.com/office/drawing/2014/main" id="{DD955F49-F3A4-47FE-A88B-E8BDD29F9D19}"/>
-              </a:ext>
-            </a:extLst>
-          </p:cNvPr>
-          <p:cNvSpPr>
-            <a:spLocks xmlns:a="http://schemas.openxmlformats.org/drawingml/2006/main" noGrp="1"/>
-          </p:cNvSpPr>
-          <p:nvPr/>
-        </p:nvSpPr>
-        <p:spPr>
-          <a:xfrm xmlns:a="http://schemas.openxmlformats.org/drawingml/2006/main">
-            <a:off x="8763000" y="3429000"/>
-            <a:ext cx="2038350" cy="571500"/>
-          </a:xfrm>
-          <a:prstGeom xmlns:a="http://schemas.openxmlformats.org/drawingml/2006/main" prst="rect">
-            <a:avLst/>
-          </a:prstGeom>
-          <a:noFill xmlns:a="http://schemas.openxmlformats.org/drawingml/2006/main"/>
-          <a:ln xmlns:a="http://schemas.openxmlformats.org/drawingml/2006/main" w="0">
-            <a:noFill/>
-            <a:prstDash val="solid"/>
-          </a:ln>
-        </p:spPr>
-        <p:txBody>
-          <a:bodyPr xmlns:a="http://schemas.openxmlformats.org/drawingml/2006/main"/>
-          <a:lstStyle xmlns:a="http://schemas.openxmlformats.org/drawingml/2006/main"/>
-          <a:p xmlns:a="http://schemas.openxmlformats.org/drawingml/2006/main">
-            <a:pPr>
-              <a:defRPr sz="1200" b="0">
-                <a:solidFill>
-                  <a:srgbClr val="000000"/>
-                </a:solidFill>
-              </a:defRPr>
-            </a:pPr>
-            <a:r>
-              <a:rPr sz="1200" b="0">
-                <a:solidFill>
-                  <a:srgbClr val="000000"/>
-                </a:solidFill>
-              </a:rPr>
-              <a:t>NVDA, TSLA, and MSTR show the lane can ride substantial trends.</a:t>
-            </a:r>
-          </a:p>
-        </p:txBody>
-      </p:sp>
-      <p:sp>
-        <p:nvSpPr>
-          <p:cNvPr id="11" name="">
-            <a:extLst xmlns:a="http://schemas.openxmlformats.org/drawingml/2006/main">
-              <a:ext uri="{FF2B5EF4-FFF2-40B4-BE49-F238E27FC236}">
-                <a16:creationId xmlns:a16="http://schemas.microsoft.com/office/drawing/2014/main" id="{BC8610B5-23DF-4190-83D7-2C140F5869E4}"/>
-              </a:ext>
-            </a:extLst>
-          </p:cNvPr>
-          <p:cNvSpPr>
-            <a:spLocks xmlns:a="http://schemas.openxmlformats.org/drawingml/2006/main" noGrp="1"/>
-          </p:cNvSpPr>
-          <p:nvPr/>
-        </p:nvSpPr>
-        <p:spPr>
-          <a:xfrm xmlns:a="http://schemas.openxmlformats.org/drawingml/2006/main">
-            <a:off x="8553450" y="4038600"/>
-            <a:ext cx="76200" cy="76200"/>
-          </a:xfrm>
-          <a:prstGeom xmlns:a="http://schemas.openxmlformats.org/drawingml/2006/main" prst="rect">
-            <a:avLst/>
-          </a:prstGeom>
-          <a:solidFill xmlns:a="http://schemas.openxmlformats.org/drawingml/2006/main">
-            <a:srgbClr val="FF6B35"/>
-          </a:solidFill>
-          <a:ln xmlns:a="http://schemas.openxmlformats.org/drawingml/2006/main" w="9525">
-            <a:solidFill>
-              <a:srgbClr val="FF6B35"/>
-            </a:solidFill>
-            <a:prstDash val="solid"/>
-          </a:ln>
-        </p:spPr>
-      </p:sp>
-      <p:sp>
-        <p:nvSpPr>
-          <p:cNvPr id="12" name="">
-            <a:extLst xmlns:a="http://schemas.openxmlformats.org/drawingml/2006/main">
-              <a:ext uri="{FF2B5EF4-FFF2-40B4-BE49-F238E27FC236}">
-                <a16:creationId xmlns:a16="http://schemas.microsoft.com/office/drawing/2014/main" id="{F638F539-6703-48A0-8952-72505AEF4ABA}"/>
-              </a:ext>
-            </a:extLst>
-          </p:cNvPr>
-          <p:cNvSpPr>
-            <a:spLocks xmlns:a="http://schemas.openxmlformats.org/drawingml/2006/main" noGrp="1"/>
-          </p:cNvSpPr>
-          <p:nvPr/>
-        </p:nvSpPr>
-        <p:spPr>
-          <a:xfrm xmlns:a="http://schemas.openxmlformats.org/drawingml/2006/main">
-            <a:off x="8763000" y="3943350"/>
-            <a:ext cx="2038350" cy="571500"/>
-          </a:xfrm>
-          <a:prstGeom xmlns:a="http://schemas.openxmlformats.org/drawingml/2006/main" prst="rect">
-            <a:avLst/>
-          </a:prstGeom>
-          <a:noFill xmlns:a="http://schemas.openxmlformats.org/drawingml/2006/main"/>
-          <a:ln xmlns:a="http://schemas.openxmlformats.org/drawingml/2006/main" w="0">
-            <a:noFill/>
-            <a:prstDash val="solid"/>
-          </a:ln>
-        </p:spPr>
-        <p:txBody>
-          <a:bodyPr xmlns:a="http://schemas.openxmlformats.org/drawingml/2006/main"/>
-          <a:lstStyle xmlns:a="http://schemas.openxmlformats.org/drawingml/2006/main"/>
-          <a:p xmlns:a="http://schemas.openxmlformats.org/drawingml/2006/main">
-            <a:pPr>
-              <a:defRPr sz="1200" b="0">
-                <a:solidFill>
-                  <a:srgbClr val="000000"/>
-                </a:solidFill>
-              </a:defRPr>
-            </a:pPr>
-            <a:r>
-              <a:rPr sz="1200" b="0">
-                <a:solidFill>
-                  <a:srgbClr val="000000"/>
-                </a:solidFill>
-              </a:rPr>
-              <a:t>Open exit signals at year end should be inspected in the next tape audit.</a:t>
-            </a:r>
-          </a:p>
-        </p:txBody>
-      </p:sp>
-      <p:sp>
-        <p:nvSpPr>
-          <p:cNvPr id="13" name="">
-            <a:extLst xmlns:a="http://schemas.openxmlformats.org/drawingml/2006/main">
-              <a:ext uri="{FF2B5EF4-FFF2-40B4-BE49-F238E27FC236}">
-                <a16:creationId xmlns:a16="http://schemas.microsoft.com/office/drawing/2014/main" id="{F3DA6DF1-DFD5-431E-A6A0-CF7745698966}"/>
+                <a16:creationId xmlns:a16="http://schemas.microsoft.com/office/drawing/2014/main" id="{A52DE713-882B-4E4B-91E0-D60E6BED5811}"/>
               </a:ext>
             </a:extLst>
           </p:cNvPr>
@@ -2875,7 +2811,7 @@
     </p:spTree>
     <p:extLst>
       <p:ext uri="{BB962C8B-B14F-4D97-AF65-F5344CB8AC3E}">
-        <p14:creationId xmlns:p14="http://schemas.microsoft.com/office/powerpoint/2010/main" val="1965946512"/>
+        <p14:creationId xmlns:p14="http://schemas.microsoft.com/office/powerpoint/2010/main" val="1676005313"/>
       </p:ext>
     </p:extLst>
   </p:cSld>
@@ -2906,7 +2842,7 @@
           <p:cNvPr id="1" name="">
             <a:extLst xmlns:a="http://schemas.openxmlformats.org/drawingml/2006/main">
               <a:ext uri="{FF2B5EF4-FFF2-40B4-BE49-F238E27FC236}">
-                <a16:creationId xmlns:a16="http://schemas.microsoft.com/office/drawing/2014/main" id="{7A62E9E6-7BC2-4A8F-8051-710F2AEF2EBB}"/>
+                <a16:creationId xmlns:a16="http://schemas.microsoft.com/office/drawing/2014/main" id="{5B68C056-1D0B-492A-825C-F526F357B09C}"/>
               </a:ext>
             </a:extLst>
           </p:cNvPr>
@@ -2956,7 +2892,7 @@
           <p:cNvPr id="2" name="">
             <a:extLst xmlns:a="http://schemas.openxmlformats.org/drawingml/2006/main">
               <a:ext uri="{FF2B5EF4-FFF2-40B4-BE49-F238E27FC236}">
-                <a16:creationId xmlns:a16="http://schemas.microsoft.com/office/drawing/2014/main" id="{1B2B571D-D9E1-401D-80F0-6491A81766EF}"/>
+                <a16:creationId xmlns:a16="http://schemas.microsoft.com/office/drawing/2014/main" id="{68C769EF-C02D-43EF-9302-7E4B387E91B6}"/>
               </a:ext>
             </a:extLst>
           </p:cNvPr>
@@ -2996,7 +2932,7 @@
                   <a:srgbClr val="000000"/>
                 </a:solidFill>
               </a:rPr>
-              <a:t>The annual screen changes the next research question</a:t>
+              <a:t>Representative tapes show both the promise and the weakness</a:t>
             </a:r>
           </a:p>
         </p:txBody>
@@ -3006,7 +2942,7 @@
           <p:cNvPr id="3" name="">
             <a:extLst xmlns:a="http://schemas.openxmlformats.org/drawingml/2006/main">
               <a:ext uri="{FF2B5EF4-FFF2-40B4-BE49-F238E27FC236}">
-                <a16:creationId xmlns:a16="http://schemas.microsoft.com/office/drawing/2014/main" id="{362D25D8-9E88-4329-A6BD-FCEC1527B65E}"/>
+                <a16:creationId xmlns:a16="http://schemas.microsoft.com/office/drawing/2014/main" id="{44690A02-D738-44CD-BBFC-220926C20018}"/>
               </a:ext>
             </a:extLst>
           </p:cNvPr>
@@ -3034,24 +2970,46 @@
           </a:ln>
         </p:spPr>
       </p:sp>
-      <p:sp>
-        <p:nvSpPr>
-          <p:cNvPr id="4" name="">
-            <a:extLst xmlns:a="http://schemas.openxmlformats.org/drawingml/2006/main">
-              <a:ext uri="{FF2B5EF4-FFF2-40B4-BE49-F238E27FC236}">
-                <a16:creationId xmlns:a16="http://schemas.microsoft.com/office/drawing/2014/main" id="{93E49071-F950-4A87-B7CF-F2164A7EE8E6}"/>
-              </a:ext>
-            </a:extLst>
-          </p:cNvPr>
-          <p:cNvSpPr>
-            <a:spLocks xmlns:a="http://schemas.openxmlformats.org/drawingml/2006/main" noGrp="1"/>
-          </p:cNvSpPr>
-          <p:nvPr/>
-        </p:nvSpPr>
-        <p:spPr>
-          <a:xfrm xmlns:a="http://schemas.openxmlformats.org/drawingml/2006/main">
-            <a:off x="819150" y="2000250"/>
-            <a:ext cx="4476750" cy="2724150"/>
+      <p:pic>
+        <p:nvPicPr>
+          <p:cNvPr id="17" name=""/>
+          <p:cNvPicPr>
+            <a:picLocks xmlns:a="http://schemas.openxmlformats.org/drawingml/2006/main" noChangeAspect="1"/>
+          </p:cNvPicPr>
+          <p:nvPr/>
+        </p:nvPicPr>
+        <p:blipFill>
+          <a:blip xmlns:r="http://schemas.openxmlformats.org/officeDocument/2006/relationships" xmlns:a="http://schemas.openxmlformats.org/drawingml/2006/main" r:embed="R0e05d26e70cb4fa9"/>
+          <a:stretch xmlns:a="http://schemas.openxmlformats.org/drawingml/2006/main"/>
+        </p:blipFill>
+        <p:spPr>
+          <a:xfrm xmlns:a="http://schemas.openxmlformats.org/drawingml/2006/main">
+            <a:off x="2237466" y="1638300"/>
+            <a:ext cx="3754668" cy="4762500"/>
+          </a:xfrm>
+          <a:prstGeom xmlns:a="http://schemas.openxmlformats.org/drawingml/2006/main" prst="rect">
+            <a:avLst/>
+          </a:prstGeom>
+        </p:spPr>
+      </p:pic>
+      <p:sp>
+        <p:nvSpPr>
+          <p:cNvPr id="5" name="">
+            <a:extLst xmlns:a="http://schemas.openxmlformats.org/drawingml/2006/main">
+              <a:ext uri="{FF2B5EF4-FFF2-40B4-BE49-F238E27FC236}">
+                <a16:creationId xmlns:a16="http://schemas.microsoft.com/office/drawing/2014/main" id="{D39B2A49-D311-46A4-B6EC-52F10C8E6FD7}"/>
+              </a:ext>
+            </a:extLst>
+          </p:cNvPr>
+          <p:cNvSpPr>
+            <a:spLocks xmlns:a="http://schemas.openxmlformats.org/drawingml/2006/main" noGrp="1"/>
+          </p:cNvSpPr>
+          <p:nvPr/>
+        </p:nvSpPr>
+        <p:spPr>
+          <a:xfrm xmlns:a="http://schemas.openxmlformats.org/drawingml/2006/main">
+            <a:off x="8248650" y="2000250"/>
+            <a:ext cx="2857500" cy="3200400"/>
           </a:xfrm>
           <a:prstGeom xmlns:a="http://schemas.openxmlformats.org/drawingml/2006/main" prst="rect">
             <a:avLst/>
@@ -3069,21 +3027,532 @@
       </p:sp>
       <p:sp>
         <p:nvSpPr>
-          <p:cNvPr id="5" name="">
-            <a:extLst xmlns:a="http://schemas.openxmlformats.org/drawingml/2006/main">
-              <a:ext uri="{FF2B5EF4-FFF2-40B4-BE49-F238E27FC236}">
-                <a16:creationId xmlns:a16="http://schemas.microsoft.com/office/drawing/2014/main" id="{B3C41E95-BF1E-4026-BA2A-3B96C0B885C0}"/>
-              </a:ext>
-            </a:extLst>
-          </p:cNvPr>
-          <p:cNvSpPr>
-            <a:spLocks xmlns:a="http://schemas.openxmlformats.org/drawingml/2006/main" noGrp="1"/>
-          </p:cNvSpPr>
-          <p:nvPr/>
-        </p:nvSpPr>
-        <p:spPr>
-          <a:xfrm xmlns:a="http://schemas.openxmlformats.org/drawingml/2006/main">
-            <a:off x="6438900" y="2000250"/>
+          <p:cNvPr id="6" name="">
+            <a:extLst xmlns:a="http://schemas.openxmlformats.org/drawingml/2006/main">
+              <a:ext uri="{FF2B5EF4-FFF2-40B4-BE49-F238E27FC236}">
+                <a16:creationId xmlns:a16="http://schemas.microsoft.com/office/drawing/2014/main" id="{05A812E3-7FAA-45EA-815C-1672293DC8D1}"/>
+              </a:ext>
+            </a:extLst>
+          </p:cNvPr>
+          <p:cNvSpPr>
+            <a:spLocks xmlns:a="http://schemas.openxmlformats.org/drawingml/2006/main" noGrp="1"/>
+          </p:cNvSpPr>
+          <p:nvPr/>
+        </p:nvSpPr>
+        <p:spPr>
+          <a:xfrm xmlns:a="http://schemas.openxmlformats.org/drawingml/2006/main">
+            <a:off x="8534400" y="2286000"/>
+            <a:ext cx="2095500" cy="304800"/>
+          </a:xfrm>
+          <a:prstGeom xmlns:a="http://schemas.openxmlformats.org/drawingml/2006/main" prst="rect">
+            <a:avLst/>
+          </a:prstGeom>
+          <a:noFill xmlns:a="http://schemas.openxmlformats.org/drawingml/2006/main"/>
+          <a:ln xmlns:a="http://schemas.openxmlformats.org/drawingml/2006/main" w="0">
+            <a:noFill/>
+            <a:prstDash val="solid"/>
+          </a:ln>
+        </p:spPr>
+        <p:txBody>
+          <a:bodyPr xmlns:a="http://schemas.openxmlformats.org/drawingml/2006/main"/>
+          <a:lstStyle xmlns:a="http://schemas.openxmlformats.org/drawingml/2006/main"/>
+          <a:p xmlns:a="http://schemas.openxmlformats.org/drawingml/2006/main">
+            <a:pPr>
+              <a:defRPr sz="1950" b="1">
+                <a:solidFill>
+                  <a:srgbClr val="000000"/>
+                </a:solidFill>
+              </a:defRPr>
+            </a:pPr>
+            <a:r>
+              <a:rPr sz="1950" b="1">
+                <a:solidFill>
+                  <a:srgbClr val="000000"/>
+                </a:solidFill>
+              </a:rPr>
+              <a:t>Visual audit</a:t>
+            </a:r>
+          </a:p>
+        </p:txBody>
+      </p:sp>
+      <p:sp>
+        <p:nvSpPr>
+          <p:cNvPr id="7" name="">
+            <a:extLst xmlns:a="http://schemas.openxmlformats.org/drawingml/2006/main">
+              <a:ext uri="{FF2B5EF4-FFF2-40B4-BE49-F238E27FC236}">
+                <a16:creationId xmlns:a16="http://schemas.microsoft.com/office/drawing/2014/main" id="{C52BE384-2EA7-4C53-A5BC-39ED3834B9FC}"/>
+              </a:ext>
+            </a:extLst>
+          </p:cNvPr>
+          <p:cNvSpPr>
+            <a:spLocks xmlns:a="http://schemas.openxmlformats.org/drawingml/2006/main" noGrp="1"/>
+          </p:cNvSpPr>
+          <p:nvPr/>
+        </p:nvSpPr>
+        <p:spPr>
+          <a:xfrm xmlns:a="http://schemas.openxmlformats.org/drawingml/2006/main">
+            <a:off x="8553450" y="3009900"/>
+            <a:ext cx="76200" cy="76200"/>
+          </a:xfrm>
+          <a:prstGeom xmlns:a="http://schemas.openxmlformats.org/drawingml/2006/main" prst="rect">
+            <a:avLst/>
+          </a:prstGeom>
+          <a:solidFill xmlns:a="http://schemas.openxmlformats.org/drawingml/2006/main">
+            <a:srgbClr val="FF6B35"/>
+          </a:solidFill>
+          <a:ln xmlns:a="http://schemas.openxmlformats.org/drawingml/2006/main" w="9525">
+            <a:solidFill>
+              <a:srgbClr val="FF6B35"/>
+            </a:solidFill>
+            <a:prstDash val="solid"/>
+          </a:ln>
+        </p:spPr>
+      </p:sp>
+      <p:sp>
+        <p:nvSpPr>
+          <p:cNvPr id="8" name="">
+            <a:extLst xmlns:a="http://schemas.openxmlformats.org/drawingml/2006/main">
+              <a:ext uri="{FF2B5EF4-FFF2-40B4-BE49-F238E27FC236}">
+                <a16:creationId xmlns:a16="http://schemas.microsoft.com/office/drawing/2014/main" id="{0C2D0AA4-BF7C-49D1-9824-3242155FC8B4}"/>
+              </a:ext>
+            </a:extLst>
+          </p:cNvPr>
+          <p:cNvSpPr>
+            <a:spLocks xmlns:a="http://schemas.openxmlformats.org/drawingml/2006/main" noGrp="1"/>
+          </p:cNvSpPr>
+          <p:nvPr/>
+        </p:nvSpPr>
+        <p:spPr>
+          <a:xfrm xmlns:a="http://schemas.openxmlformats.org/drawingml/2006/main">
+            <a:off x="8763000" y="2914650"/>
+            <a:ext cx="2038350" cy="571500"/>
+          </a:xfrm>
+          <a:prstGeom xmlns:a="http://schemas.openxmlformats.org/drawingml/2006/main" prst="rect">
+            <a:avLst/>
+          </a:prstGeom>
+          <a:noFill xmlns:a="http://schemas.openxmlformats.org/drawingml/2006/main"/>
+          <a:ln xmlns:a="http://schemas.openxmlformats.org/drawingml/2006/main" w="0">
+            <a:noFill/>
+            <a:prstDash val="solid"/>
+          </a:ln>
+        </p:spPr>
+        <p:txBody>
+          <a:bodyPr xmlns:a="http://schemas.openxmlformats.org/drawingml/2006/main"/>
+          <a:lstStyle xmlns:a="http://schemas.openxmlformats.org/drawingml/2006/main"/>
+          <a:p xmlns:a="http://schemas.openxmlformats.org/drawingml/2006/main">
+            <a:pPr>
+              <a:defRPr sz="1200" b="0">
+                <a:solidFill>
+                  <a:srgbClr val="000000"/>
+                </a:solidFill>
+              </a:defRPr>
+            </a:pPr>
+            <a:r>
+              <a:rPr sz="1200" b="0">
+                <a:solidFill>
+                  <a:srgbClr val="000000"/>
+                </a:solidFill>
+              </a:rPr>
+              <a:t>AMD shows churn and missed/stopped participation.</a:t>
+            </a:r>
+          </a:p>
+        </p:txBody>
+      </p:sp>
+      <p:sp>
+        <p:nvSpPr>
+          <p:cNvPr id="9" name="">
+            <a:extLst xmlns:a="http://schemas.openxmlformats.org/drawingml/2006/main">
+              <a:ext uri="{FF2B5EF4-FFF2-40B4-BE49-F238E27FC236}">
+                <a16:creationId xmlns:a16="http://schemas.microsoft.com/office/drawing/2014/main" id="{CECA6E6C-03B9-4DF8-BC9A-13FB548727BB}"/>
+              </a:ext>
+            </a:extLst>
+          </p:cNvPr>
+          <p:cNvSpPr>
+            <a:spLocks xmlns:a="http://schemas.openxmlformats.org/drawingml/2006/main" noGrp="1"/>
+          </p:cNvSpPr>
+          <p:nvPr/>
+        </p:nvSpPr>
+        <p:spPr>
+          <a:xfrm xmlns:a="http://schemas.openxmlformats.org/drawingml/2006/main">
+            <a:off x="8553450" y="3524250"/>
+            <a:ext cx="76200" cy="76200"/>
+          </a:xfrm>
+          <a:prstGeom xmlns:a="http://schemas.openxmlformats.org/drawingml/2006/main" prst="rect">
+            <a:avLst/>
+          </a:prstGeom>
+          <a:solidFill xmlns:a="http://schemas.openxmlformats.org/drawingml/2006/main">
+            <a:srgbClr val="FF6B35"/>
+          </a:solidFill>
+          <a:ln xmlns:a="http://schemas.openxmlformats.org/drawingml/2006/main" w="9525">
+            <a:solidFill>
+              <a:srgbClr val="FF6B35"/>
+            </a:solidFill>
+            <a:prstDash val="solid"/>
+          </a:ln>
+        </p:spPr>
+      </p:sp>
+      <p:sp>
+        <p:nvSpPr>
+          <p:cNvPr id="10" name="">
+            <a:extLst xmlns:a="http://schemas.openxmlformats.org/drawingml/2006/main">
+              <a:ext uri="{FF2B5EF4-FFF2-40B4-BE49-F238E27FC236}">
+                <a16:creationId xmlns:a16="http://schemas.microsoft.com/office/drawing/2014/main" id="{5394EEFE-0ED1-439D-850E-C6DA00A982C9}"/>
+              </a:ext>
+            </a:extLst>
+          </p:cNvPr>
+          <p:cNvSpPr>
+            <a:spLocks xmlns:a="http://schemas.openxmlformats.org/drawingml/2006/main" noGrp="1"/>
+          </p:cNvSpPr>
+          <p:nvPr/>
+        </p:nvSpPr>
+        <p:spPr>
+          <a:xfrm xmlns:a="http://schemas.openxmlformats.org/drawingml/2006/main">
+            <a:off x="8763000" y="3429000"/>
+            <a:ext cx="2038350" cy="571500"/>
+          </a:xfrm>
+          <a:prstGeom xmlns:a="http://schemas.openxmlformats.org/drawingml/2006/main" prst="rect">
+            <a:avLst/>
+          </a:prstGeom>
+          <a:noFill xmlns:a="http://schemas.openxmlformats.org/drawingml/2006/main"/>
+          <a:ln xmlns:a="http://schemas.openxmlformats.org/drawingml/2006/main" w="0">
+            <a:noFill/>
+            <a:prstDash val="solid"/>
+          </a:ln>
+        </p:spPr>
+        <p:txBody>
+          <a:bodyPr xmlns:a="http://schemas.openxmlformats.org/drawingml/2006/main"/>
+          <a:lstStyle xmlns:a="http://schemas.openxmlformats.org/drawingml/2006/main"/>
+          <a:p xmlns:a="http://schemas.openxmlformats.org/drawingml/2006/main">
+            <a:pPr>
+              <a:defRPr sz="1200" b="0">
+                <a:solidFill>
+                  <a:srgbClr val="000000"/>
+                </a:solidFill>
+              </a:defRPr>
+            </a:pPr>
+            <a:r>
+              <a:rPr sz="1200" b="0">
+                <a:solidFill>
+                  <a:srgbClr val="000000"/>
+                </a:solidFill>
+              </a:rPr>
+              <a:t>NVDA, TSLA, and MSTR show the lane can ride substantial trends.</a:t>
+            </a:r>
+          </a:p>
+        </p:txBody>
+      </p:sp>
+      <p:sp>
+        <p:nvSpPr>
+          <p:cNvPr id="11" name="">
+            <a:extLst xmlns:a="http://schemas.openxmlformats.org/drawingml/2006/main">
+              <a:ext uri="{FF2B5EF4-FFF2-40B4-BE49-F238E27FC236}">
+                <a16:creationId xmlns:a16="http://schemas.microsoft.com/office/drawing/2014/main" id="{EEE698A0-8786-4AE9-B067-D5CD3A34A679}"/>
+              </a:ext>
+            </a:extLst>
+          </p:cNvPr>
+          <p:cNvSpPr>
+            <a:spLocks xmlns:a="http://schemas.openxmlformats.org/drawingml/2006/main" noGrp="1"/>
+          </p:cNvSpPr>
+          <p:nvPr/>
+        </p:nvSpPr>
+        <p:spPr>
+          <a:xfrm xmlns:a="http://schemas.openxmlformats.org/drawingml/2006/main">
+            <a:off x="8553450" y="4038600"/>
+            <a:ext cx="76200" cy="76200"/>
+          </a:xfrm>
+          <a:prstGeom xmlns:a="http://schemas.openxmlformats.org/drawingml/2006/main" prst="rect">
+            <a:avLst/>
+          </a:prstGeom>
+          <a:solidFill xmlns:a="http://schemas.openxmlformats.org/drawingml/2006/main">
+            <a:srgbClr val="FF6B35"/>
+          </a:solidFill>
+          <a:ln xmlns:a="http://schemas.openxmlformats.org/drawingml/2006/main" w="9525">
+            <a:solidFill>
+              <a:srgbClr val="FF6B35"/>
+            </a:solidFill>
+            <a:prstDash val="solid"/>
+          </a:ln>
+        </p:spPr>
+      </p:sp>
+      <p:sp>
+        <p:nvSpPr>
+          <p:cNvPr id="12" name="">
+            <a:extLst xmlns:a="http://schemas.openxmlformats.org/drawingml/2006/main">
+              <a:ext uri="{FF2B5EF4-FFF2-40B4-BE49-F238E27FC236}">
+                <a16:creationId xmlns:a16="http://schemas.microsoft.com/office/drawing/2014/main" id="{92F892EC-58AB-46F5-B05D-DCDD1696A8D3}"/>
+              </a:ext>
+            </a:extLst>
+          </p:cNvPr>
+          <p:cNvSpPr>
+            <a:spLocks xmlns:a="http://schemas.openxmlformats.org/drawingml/2006/main" noGrp="1"/>
+          </p:cNvSpPr>
+          <p:nvPr/>
+        </p:nvSpPr>
+        <p:spPr>
+          <a:xfrm xmlns:a="http://schemas.openxmlformats.org/drawingml/2006/main">
+            <a:off x="8763000" y="3943350"/>
+            <a:ext cx="2038350" cy="571500"/>
+          </a:xfrm>
+          <a:prstGeom xmlns:a="http://schemas.openxmlformats.org/drawingml/2006/main" prst="rect">
+            <a:avLst/>
+          </a:prstGeom>
+          <a:noFill xmlns:a="http://schemas.openxmlformats.org/drawingml/2006/main"/>
+          <a:ln xmlns:a="http://schemas.openxmlformats.org/drawingml/2006/main" w="0">
+            <a:noFill/>
+            <a:prstDash val="solid"/>
+          </a:ln>
+        </p:spPr>
+        <p:txBody>
+          <a:bodyPr xmlns:a="http://schemas.openxmlformats.org/drawingml/2006/main"/>
+          <a:lstStyle xmlns:a="http://schemas.openxmlformats.org/drawingml/2006/main"/>
+          <a:p xmlns:a="http://schemas.openxmlformats.org/drawingml/2006/main">
+            <a:pPr>
+              <a:defRPr sz="1200" b="0">
+                <a:solidFill>
+                  <a:srgbClr val="000000"/>
+                </a:solidFill>
+              </a:defRPr>
+            </a:pPr>
+            <a:r>
+              <a:rPr sz="1200" b="0">
+                <a:solidFill>
+                  <a:srgbClr val="000000"/>
+                </a:solidFill>
+              </a:rPr>
+              <a:t>Open exit signals at year end should be inspected in the next tape audit.</a:t>
+            </a:r>
+          </a:p>
+        </p:txBody>
+      </p:sp>
+      <p:sp>
+        <p:nvSpPr>
+          <p:cNvPr id="13" name="">
+            <a:extLst xmlns:a="http://schemas.openxmlformats.org/drawingml/2006/main">
+              <a:ext uri="{FF2B5EF4-FFF2-40B4-BE49-F238E27FC236}">
+                <a16:creationId xmlns:a16="http://schemas.microsoft.com/office/drawing/2014/main" id="{55077AAB-06DD-4DE4-A339-3B5438BDA8D6}"/>
+              </a:ext>
+            </a:extLst>
+          </p:cNvPr>
+          <p:cNvSpPr>
+            <a:spLocks xmlns:a="http://schemas.openxmlformats.org/drawingml/2006/main" noGrp="1"/>
+          </p:cNvSpPr>
+          <p:nvPr/>
+        </p:nvSpPr>
+        <p:spPr>
+          <a:xfrm xmlns:a="http://schemas.openxmlformats.org/drawingml/2006/main">
+            <a:off x="514350" y="6477000"/>
+            <a:ext cx="11163300" cy="209550"/>
+          </a:xfrm>
+          <a:prstGeom xmlns:a="http://schemas.openxmlformats.org/drawingml/2006/main" prst="rect">
+            <a:avLst/>
+          </a:prstGeom>
+          <a:noFill xmlns:a="http://schemas.openxmlformats.org/drawingml/2006/main"/>
+          <a:ln xmlns:a="http://schemas.openxmlformats.org/drawingml/2006/main" w="0">
+            <a:noFill/>
+            <a:prstDash val="solid"/>
+          </a:ln>
+        </p:spPr>
+        <p:txBody>
+          <a:bodyPr xmlns:a="http://schemas.openxmlformats.org/drawingml/2006/main"/>
+          <a:lstStyle xmlns:a="http://schemas.openxmlformats.org/drawingml/2006/main"/>
+          <a:p xmlns:a="http://schemas.openxmlformats.org/drawingml/2006/main">
+            <a:pPr>
+              <a:defRPr sz="900" b="0">
+                <a:solidFill>
+                  <a:srgbClr val="555555"/>
+                </a:solidFill>
+              </a:defRPr>
+            </a:pPr>
+            <a:r>
+              <a:rPr sz="900" b="0">
+                <a:solidFill>
+                  <a:srgbClr val="555555"/>
+                </a:solidFill>
+              </a:rPr>
+              <a:t>Research/inspection only. Not allocation evidence or live-advice behavior.</a:t>
+            </a:r>
+          </a:p>
+        </p:txBody>
+      </p:sp>
+    </p:spTree>
+    <p:extLst>
+      <p:ext uri="{BB962C8B-B14F-4D97-AF65-F5344CB8AC3E}">
+        <p14:creationId xmlns:p14="http://schemas.microsoft.com/office/powerpoint/2010/main" val="1315981939"/>
+      </p:ext>
+    </p:extLst>
+  </p:cSld>
+</p:sld>
+</file>
+
+<file path=ppt/slides/slide12.xml><?xml version="1.0" encoding="utf-8"?>
+<p:sld xmlns:p="http://schemas.openxmlformats.org/presentationml/2006/main">
+  <p:cSld>
+    <p:bg>
+      <p:bgPr>
+        <a:solidFill xmlns:a="http://schemas.openxmlformats.org/drawingml/2006/main">
+          <a:srgbClr val="FFFFFF"/>
+        </a:solidFill>
+      </p:bgPr>
+    </p:bg>
+    <p:spTree>
+      <p:nvGrpSpPr>
+        <p:cNvPr id="1" name=""/>
+        <p:cNvGrpSpPr/>
+        <p:nvPr/>
+      </p:nvGrpSpPr>
+      <p:grpSpPr>
+        <a:xfrm xmlns:a="http://schemas.openxmlformats.org/drawingml/2006/main"/>
+      </p:grpSpPr>
+      <p:sp>
+        <p:nvSpPr>
+          <p:cNvPr id="1" name="">
+            <a:extLst xmlns:a="http://schemas.openxmlformats.org/drawingml/2006/main">
+              <a:ext uri="{FF2B5EF4-FFF2-40B4-BE49-F238E27FC236}">
+                <a16:creationId xmlns:a16="http://schemas.microsoft.com/office/drawing/2014/main" id="{D8565518-5C75-4B63-B7F3-89DC3DA80CB3}"/>
+              </a:ext>
+            </a:extLst>
+          </p:cNvPr>
+          <p:cNvSpPr>
+            <a:spLocks xmlns:a="http://schemas.openxmlformats.org/drawingml/2006/main" noGrp="1"/>
+          </p:cNvSpPr>
+          <p:nvPr/>
+        </p:nvSpPr>
+        <p:spPr>
+          <a:xfrm xmlns:a="http://schemas.openxmlformats.org/drawingml/2006/main">
+            <a:off x="514350" y="266700"/>
+            <a:ext cx="5905500" cy="228600"/>
+          </a:xfrm>
+          <a:prstGeom xmlns:a="http://schemas.openxmlformats.org/drawingml/2006/main" prst="rect">
+            <a:avLst/>
+          </a:prstGeom>
+          <a:noFill xmlns:a="http://schemas.openxmlformats.org/drawingml/2006/main"/>
+          <a:ln xmlns:a="http://schemas.openxmlformats.org/drawingml/2006/main" w="0">
+            <a:noFill/>
+            <a:prstDash val="solid"/>
+          </a:ln>
+        </p:spPr>
+        <p:txBody>
+          <a:bodyPr xmlns:a="http://schemas.openxmlformats.org/drawingml/2006/main"/>
+          <a:lstStyle xmlns:a="http://schemas.openxmlformats.org/drawingml/2006/main"/>
+          <a:p xmlns:a="http://schemas.openxmlformats.org/drawingml/2006/main">
+            <a:pPr>
+              <a:defRPr sz="1050" b="1">
+                <a:solidFill>
+                  <a:srgbClr val="555555"/>
+                </a:solidFill>
+              </a:defRPr>
+            </a:pPr>
+            <a:r>
+              <a:rPr sz="1050" b="1">
+                <a:solidFill>
+                  <a:srgbClr val="555555"/>
+                </a:solidFill>
+              </a:rPr>
+              <a:t>GEN5.3 MOMENTUM CONTEXT-SIZE SCREEN</a:t>
+            </a:r>
+          </a:p>
+        </p:txBody>
+      </p:sp>
+      <p:sp>
+        <p:nvSpPr>
+          <p:cNvPr id="2" name="">
+            <a:extLst xmlns:a="http://schemas.openxmlformats.org/drawingml/2006/main">
+              <a:ext uri="{FF2B5EF4-FFF2-40B4-BE49-F238E27FC236}">
+                <a16:creationId xmlns:a16="http://schemas.microsoft.com/office/drawing/2014/main" id="{4C72CB12-8ABC-4C36-933A-407BC54D4BF3}"/>
+              </a:ext>
+            </a:extLst>
+          </p:cNvPr>
+          <p:cNvSpPr>
+            <a:spLocks xmlns:a="http://schemas.openxmlformats.org/drawingml/2006/main" noGrp="1"/>
+          </p:cNvSpPr>
+          <p:nvPr/>
+        </p:nvSpPr>
+        <p:spPr>
+          <a:xfrm xmlns:a="http://schemas.openxmlformats.org/drawingml/2006/main">
+            <a:off x="514350" y="628650"/>
+            <a:ext cx="10287000" cy="990600"/>
+          </a:xfrm>
+          <a:prstGeom xmlns:a="http://schemas.openxmlformats.org/drawingml/2006/main" prst="rect">
+            <a:avLst/>
+          </a:prstGeom>
+          <a:noFill xmlns:a="http://schemas.openxmlformats.org/drawingml/2006/main"/>
+          <a:ln xmlns:a="http://schemas.openxmlformats.org/drawingml/2006/main" w="0">
+            <a:noFill/>
+            <a:prstDash val="solid"/>
+          </a:ln>
+        </p:spPr>
+        <p:txBody>
+          <a:bodyPr xmlns:a="http://schemas.openxmlformats.org/drawingml/2006/main"/>
+          <a:lstStyle xmlns:a="http://schemas.openxmlformats.org/drawingml/2006/main"/>
+          <a:p xmlns:a="http://schemas.openxmlformats.org/drawingml/2006/main">
+            <a:pPr>
+              <a:defRPr sz="2850" b="1">
+                <a:solidFill>
+                  <a:srgbClr val="000000"/>
+                </a:solidFill>
+              </a:defRPr>
+            </a:pPr>
+            <a:r>
+              <a:rPr sz="2850" b="1">
+                <a:solidFill>
+                  <a:srgbClr val="000000"/>
+                </a:solidFill>
+              </a:rPr>
+              <a:t>The next narrow screen should reopen strategy diversity carefully</a:t>
+            </a:r>
+          </a:p>
+        </p:txBody>
+      </p:sp>
+      <p:sp>
+        <p:nvSpPr>
+          <p:cNvPr id="3" name="">
+            <a:extLst xmlns:a="http://schemas.openxmlformats.org/drawingml/2006/main">
+              <a:ext uri="{FF2B5EF4-FFF2-40B4-BE49-F238E27FC236}">
+                <a16:creationId xmlns:a16="http://schemas.microsoft.com/office/drawing/2014/main" id="{B41EDC4E-848E-485E-9087-BD0CF5E161DD}"/>
+              </a:ext>
+            </a:extLst>
+          </p:cNvPr>
+          <p:cNvSpPr>
+            <a:spLocks xmlns:a="http://schemas.openxmlformats.org/drawingml/2006/main" noGrp="1"/>
+          </p:cNvSpPr>
+          <p:nvPr/>
+        </p:nvSpPr>
+        <p:spPr>
+          <a:xfrm xmlns:a="http://schemas.openxmlformats.org/drawingml/2006/main">
+            <a:off x="514350" y="1619250"/>
+            <a:ext cx="11163300" cy="9525"/>
+          </a:xfrm>
+          <a:prstGeom xmlns:a="http://schemas.openxmlformats.org/drawingml/2006/main" prst="rect">
+            <a:avLst/>
+          </a:prstGeom>
+          <a:solidFill xmlns:a="http://schemas.openxmlformats.org/drawingml/2006/main">
+            <a:srgbClr val="B8BCC4"/>
+          </a:solidFill>
+          <a:ln xmlns:a="http://schemas.openxmlformats.org/drawingml/2006/main" w="9525">
+            <a:solidFill>
+              <a:srgbClr val="B8BCC4"/>
+            </a:solidFill>
+            <a:prstDash val="solid"/>
+          </a:ln>
+        </p:spPr>
+      </p:sp>
+      <p:sp>
+        <p:nvSpPr>
+          <p:cNvPr id="4" name="">
+            <a:extLst xmlns:a="http://schemas.openxmlformats.org/drawingml/2006/main">
+              <a:ext uri="{FF2B5EF4-FFF2-40B4-BE49-F238E27FC236}">
+                <a16:creationId xmlns:a16="http://schemas.microsoft.com/office/drawing/2014/main" id="{47D16929-0636-4198-B332-265F45E139E0}"/>
+              </a:ext>
+            </a:extLst>
+          </p:cNvPr>
+          <p:cNvSpPr>
+            <a:spLocks xmlns:a="http://schemas.openxmlformats.org/drawingml/2006/main" noGrp="1"/>
+          </p:cNvSpPr>
+          <p:nvPr/>
+        </p:nvSpPr>
+        <p:spPr>
+          <a:xfrm xmlns:a="http://schemas.openxmlformats.org/drawingml/2006/main">
+            <a:off x="819150" y="2000250"/>
             <a:ext cx="4476750" cy="2724150"/>
           </a:xfrm>
           <a:prstGeom xmlns:a="http://schemas.openxmlformats.org/drawingml/2006/main" prst="rect">
@@ -3102,10 +3571,43 @@
       </p:sp>
       <p:sp>
         <p:nvSpPr>
+          <p:cNvPr id="5" name="">
+            <a:extLst xmlns:a="http://schemas.openxmlformats.org/drawingml/2006/main">
+              <a:ext uri="{FF2B5EF4-FFF2-40B4-BE49-F238E27FC236}">
+                <a16:creationId xmlns:a16="http://schemas.microsoft.com/office/drawing/2014/main" id="{195DABB3-A0F0-4C35-9E97-03682CAC7C4D}"/>
+              </a:ext>
+            </a:extLst>
+          </p:cNvPr>
+          <p:cNvSpPr>
+            <a:spLocks xmlns:a="http://schemas.openxmlformats.org/drawingml/2006/main" noGrp="1"/>
+          </p:cNvSpPr>
+          <p:nvPr/>
+        </p:nvSpPr>
+        <p:spPr>
+          <a:xfrm xmlns:a="http://schemas.openxmlformats.org/drawingml/2006/main">
+            <a:off x="6438900" y="2000250"/>
+            <a:ext cx="4476750" cy="2724150"/>
+          </a:xfrm>
+          <a:prstGeom xmlns:a="http://schemas.openxmlformats.org/drawingml/2006/main" prst="rect">
+            <a:avLst/>
+          </a:prstGeom>
+          <a:solidFill xmlns:a="http://schemas.openxmlformats.org/drawingml/2006/main">
+            <a:srgbClr val="EDEDED"/>
+          </a:solidFill>
+          <a:ln xmlns:a="http://schemas.openxmlformats.org/drawingml/2006/main" w="9525">
+            <a:solidFill>
+              <a:srgbClr val="B8BCC4"/>
+            </a:solidFill>
+            <a:prstDash val="solid"/>
+          </a:ln>
+        </p:spPr>
+      </p:sp>
+      <p:sp>
+        <p:nvSpPr>
           <p:cNvPr id="6" name="">
             <a:extLst xmlns:a="http://schemas.openxmlformats.org/drawingml/2006/main">
               <a:ext uri="{FF2B5EF4-FFF2-40B4-BE49-F238E27FC236}">
-                <a16:creationId xmlns:a16="http://schemas.microsoft.com/office/drawing/2014/main" id="{0C3FB33F-AA17-4805-84F2-300D2D024C77}"/>
+                <a16:creationId xmlns:a16="http://schemas.microsoft.com/office/drawing/2014/main" id="{0D4CFFB9-2B14-43FA-8C5C-F1EE2FA02982}"/>
               </a:ext>
             </a:extLst>
           </p:cNvPr>
@@ -3145,7 +3647,7 @@
                   <a:srgbClr val="B42318"/>
                 </a:solidFill>
               </a:rPr>
-              <a:t>Do not chase yet</a:t>
+              <a:t>Hold fixed</a:t>
             </a:r>
           </a:p>
         </p:txBody>
@@ -3155,7 +3657,7 @@
           <p:cNvPr id="7" name="">
             <a:extLst xmlns:a="http://schemas.openxmlformats.org/drawingml/2006/main">
               <a:ext uri="{FF2B5EF4-FFF2-40B4-BE49-F238E27FC236}">
-                <a16:creationId xmlns:a16="http://schemas.microsoft.com/office/drawing/2014/main" id="{9DCBB7D9-1858-48E2-AED3-3D027D28A85D}"/>
+                <a16:creationId xmlns:a16="http://schemas.microsoft.com/office/drawing/2014/main" id="{7632D407-8A34-4795-9D1A-3CDFEC117800}"/>
               </a:ext>
             </a:extLst>
           </p:cNvPr>
@@ -3188,7 +3690,7 @@
           <p:cNvPr id="8" name="">
             <a:extLst xmlns:a="http://schemas.openxmlformats.org/drawingml/2006/main">
               <a:ext uri="{FF2B5EF4-FFF2-40B4-BE49-F238E27FC236}">
-                <a16:creationId xmlns:a16="http://schemas.microsoft.com/office/drawing/2014/main" id="{F25AFCE4-CCC0-4130-B1CE-9BEB019427BB}"/>
+                <a16:creationId xmlns:a16="http://schemas.microsoft.com/office/drawing/2014/main" id="{E5513D1F-1577-4F0E-BDEB-E42388C82F87}"/>
               </a:ext>
             </a:extLst>
           </p:cNvPr>
@@ -3200,7 +3702,7 @@
         <p:spPr>
           <a:xfrm xmlns:a="http://schemas.openxmlformats.org/drawingml/2006/main">
             <a:off x="1390650" y="2952750"/>
-            <a:ext cx="3219450" cy="476250"/>
+            <a:ext cx="3219450" cy="438150"/>
           </a:xfrm>
           <a:prstGeom xmlns:a="http://schemas.openxmlformats.org/drawingml/2006/main" prst="rect">
             <a:avLst/>
@@ -3228,7 +3730,7 @@
                   <a:srgbClr val="000000"/>
                 </a:solidFill>
               </a:rPr>
-              <a:t>Do not promote the new momentum feature sets as defaults.</a:t>
+              <a:t>Context: hb_risk_aware_18.</a:t>
             </a:r>
           </a:p>
         </p:txBody>
@@ -3238,18 +3740,18 @@
           <p:cNvPr id="9" name="">
             <a:extLst xmlns:a="http://schemas.openxmlformats.org/drawingml/2006/main">
               <a:ext uri="{FF2B5EF4-FFF2-40B4-BE49-F238E27FC236}">
-                <a16:creationId xmlns:a16="http://schemas.microsoft.com/office/drawing/2014/main" id="{F1F403AB-6EB5-47F7-A873-5EEF95B14BC3}"/>
-              </a:ext>
-            </a:extLst>
-          </p:cNvPr>
-          <p:cNvSpPr>
-            <a:spLocks xmlns:a="http://schemas.openxmlformats.org/drawingml/2006/main" noGrp="1"/>
-          </p:cNvSpPr>
-          <p:nvPr/>
-        </p:nvSpPr>
-        <p:spPr>
-          <a:xfrm xmlns:a="http://schemas.openxmlformats.org/drawingml/2006/main">
-            <a:off x="1181100" y="3467100"/>
+                <a16:creationId xmlns:a16="http://schemas.microsoft.com/office/drawing/2014/main" id="{BF7148A6-F95F-4BB2-8F02-855C98CF26D8}"/>
+              </a:ext>
+            </a:extLst>
+          </p:cNvPr>
+          <p:cNvSpPr>
+            <a:spLocks xmlns:a="http://schemas.openxmlformats.org/drawingml/2006/main" noGrp="1"/>
+          </p:cNvSpPr>
+          <p:nvPr/>
+        </p:nvSpPr>
+        <p:spPr>
+          <a:xfrm xmlns:a="http://schemas.openxmlformats.org/drawingml/2006/main">
+            <a:off x="1181100" y="3429000"/>
             <a:ext cx="76200" cy="76200"/>
           </a:xfrm>
           <a:prstGeom xmlns:a="http://schemas.openxmlformats.org/drawingml/2006/main" prst="rect">
@@ -3271,19 +3773,19 @@
           <p:cNvPr id="10" name="">
             <a:extLst xmlns:a="http://schemas.openxmlformats.org/drawingml/2006/main">
               <a:ext uri="{FF2B5EF4-FFF2-40B4-BE49-F238E27FC236}">
-                <a16:creationId xmlns:a16="http://schemas.microsoft.com/office/drawing/2014/main" id="{79B5031F-1089-4135-80C7-1070B382B04C}"/>
-              </a:ext>
-            </a:extLst>
-          </p:cNvPr>
-          <p:cNvSpPr>
-            <a:spLocks xmlns:a="http://schemas.openxmlformats.org/drawingml/2006/main" noGrp="1"/>
-          </p:cNvSpPr>
-          <p:nvPr/>
-        </p:nvSpPr>
-        <p:spPr>
-          <a:xfrm xmlns:a="http://schemas.openxmlformats.org/drawingml/2006/main">
-            <a:off x="1390650" y="3371850"/>
-            <a:ext cx="3219450" cy="476250"/>
+                <a16:creationId xmlns:a16="http://schemas.microsoft.com/office/drawing/2014/main" id="{EE34E1D7-2A83-4650-912A-ECC280984179}"/>
+              </a:ext>
+            </a:extLst>
+          </p:cNvPr>
+          <p:cNvSpPr>
+            <a:spLocks xmlns:a="http://schemas.openxmlformats.org/drawingml/2006/main" noGrp="1"/>
+          </p:cNvSpPr>
+          <p:nvPr/>
+        </p:nvSpPr>
+        <p:spPr>
+          <a:xfrm xmlns:a="http://schemas.openxmlformats.org/drawingml/2006/main">
+            <a:off x="1390650" y="3333750"/>
+            <a:ext cx="3219450" cy="438150"/>
           </a:xfrm>
           <a:prstGeom xmlns:a="http://schemas.openxmlformats.org/drawingml/2006/main" prst="rect">
             <a:avLst/>
@@ -3311,7 +3813,7 @@
                   <a:srgbClr val="000000"/>
                 </a:solidFill>
               </a:rPr>
-              <a:t>Do not treat positive 2024 alpha as allocation evidence.</a:t>
+              <a:t>Feature control: workhorse_enriched.</a:t>
             </a:r>
           </a:p>
         </p:txBody>
@@ -3321,18 +3823,18 @@
           <p:cNvPr id="11" name="">
             <a:extLst xmlns:a="http://schemas.openxmlformats.org/drawingml/2006/main">
               <a:ext uri="{FF2B5EF4-FFF2-40B4-BE49-F238E27FC236}">
-                <a16:creationId xmlns:a16="http://schemas.microsoft.com/office/drawing/2014/main" id="{D3820B86-A4E3-46C4-A81B-C3A5ADBF8687}"/>
-              </a:ext>
-            </a:extLst>
-          </p:cNvPr>
-          <p:cNvSpPr>
-            <a:spLocks xmlns:a="http://schemas.openxmlformats.org/drawingml/2006/main" noGrp="1"/>
-          </p:cNvSpPr>
-          <p:nvPr/>
-        </p:nvSpPr>
-        <p:spPr>
-          <a:xfrm xmlns:a="http://schemas.openxmlformats.org/drawingml/2006/main">
-            <a:off x="1181100" y="3886200"/>
+                <a16:creationId xmlns:a16="http://schemas.microsoft.com/office/drawing/2014/main" id="{1D69CB7B-2C4E-4CC0-A252-37FF467AB2BE}"/>
+              </a:ext>
+            </a:extLst>
+          </p:cNvPr>
+          <p:cNvSpPr>
+            <a:spLocks xmlns:a="http://schemas.openxmlformats.org/drawingml/2006/main" noGrp="1"/>
+          </p:cNvSpPr>
+          <p:nvPr/>
+        </p:nvSpPr>
+        <p:spPr>
+          <a:xfrm xmlns:a="http://schemas.openxmlformats.org/drawingml/2006/main">
+            <a:off x="1181100" y="3810000"/>
             <a:ext cx="76200" cy="76200"/>
           </a:xfrm>
           <a:prstGeom xmlns:a="http://schemas.openxmlformats.org/drawingml/2006/main" prst="rect">
@@ -3354,19 +3856,19 @@
           <p:cNvPr id="12" name="">
             <a:extLst xmlns:a="http://schemas.openxmlformats.org/drawingml/2006/main">
               <a:ext uri="{FF2B5EF4-FFF2-40B4-BE49-F238E27FC236}">
-                <a16:creationId xmlns:a16="http://schemas.microsoft.com/office/drawing/2014/main" id="{3B2CDD5F-7CED-4FAB-AA1A-ECD813EB3E56}"/>
-              </a:ext>
-            </a:extLst>
-          </p:cNvPr>
-          <p:cNvSpPr>
-            <a:spLocks xmlns:a="http://schemas.openxmlformats.org/drawingml/2006/main" noGrp="1"/>
-          </p:cNvSpPr>
-          <p:nvPr/>
-        </p:nvSpPr>
-        <p:spPr>
-          <a:xfrm xmlns:a="http://schemas.openxmlformats.org/drawingml/2006/main">
-            <a:off x="1390650" y="3790950"/>
-            <a:ext cx="3219450" cy="476250"/>
+                <a16:creationId xmlns:a16="http://schemas.microsoft.com/office/drawing/2014/main" id="{D5299CD2-8001-408B-9501-A17BCEC770F2}"/>
+              </a:ext>
+            </a:extLst>
+          </p:cNvPr>
+          <p:cNvSpPr>
+            <a:spLocks xmlns:a="http://schemas.openxmlformats.org/drawingml/2006/main" noGrp="1"/>
+          </p:cNvSpPr>
+          <p:nvPr/>
+        </p:nvSpPr>
+        <p:spPr>
+          <a:xfrm xmlns:a="http://schemas.openxmlformats.org/drawingml/2006/main">
+            <a:off x="1390650" y="3714750"/>
+            <a:ext cx="3219450" cy="438150"/>
           </a:xfrm>
           <a:prstGeom xmlns:a="http://schemas.openxmlformats.org/drawingml/2006/main" prst="rect">
             <a:avLst/>
@@ -3394,7 +3896,7 @@
                   <a:srgbClr val="000000"/>
                 </a:solidFill>
               </a:rPr>
-              <a:t>Do not widen the strategy grid until the state layer looks cleaner.</a:t>
+              <a:t>Replay: quarter_continuity_replay plus state-switch continuation.</a:t>
             </a:r>
           </a:p>
         </p:txBody>
@@ -3404,7 +3906,90 @@
           <p:cNvPr id="13" name="">
             <a:extLst xmlns:a="http://schemas.openxmlformats.org/drawingml/2006/main">
               <a:ext uri="{FF2B5EF4-FFF2-40B4-BE49-F238E27FC236}">
-                <a16:creationId xmlns:a16="http://schemas.microsoft.com/office/drawing/2014/main" id="{9D3C796D-88A1-4601-89DE-E17326E87758}"/>
+                <a16:creationId xmlns:a16="http://schemas.microsoft.com/office/drawing/2014/main" id="{6447F585-DD4B-4636-A965-9C7DC841AFF8}"/>
+              </a:ext>
+            </a:extLst>
+          </p:cNvPr>
+          <p:cNvSpPr>
+            <a:spLocks xmlns:a="http://schemas.openxmlformats.org/drawingml/2006/main" noGrp="1"/>
+          </p:cNvSpPr>
+          <p:nvPr/>
+        </p:nvSpPr>
+        <p:spPr>
+          <a:xfrm xmlns:a="http://schemas.openxmlformats.org/drawingml/2006/main">
+            <a:off x="1181100" y="4191000"/>
+            <a:ext cx="76200" cy="76200"/>
+          </a:xfrm>
+          <a:prstGeom xmlns:a="http://schemas.openxmlformats.org/drawingml/2006/main" prst="rect">
+            <a:avLst/>
+          </a:prstGeom>
+          <a:solidFill xmlns:a="http://schemas.openxmlformats.org/drawingml/2006/main">
+            <a:srgbClr val="B42318"/>
+          </a:solidFill>
+          <a:ln xmlns:a="http://schemas.openxmlformats.org/drawingml/2006/main" w="9525">
+            <a:solidFill>
+              <a:srgbClr val="B42318"/>
+            </a:solidFill>
+            <a:prstDash val="solid"/>
+          </a:ln>
+        </p:spPr>
+      </p:sp>
+      <p:sp>
+        <p:nvSpPr>
+          <p:cNvPr id="14" name="">
+            <a:extLst xmlns:a="http://schemas.openxmlformats.org/drawingml/2006/main">
+              <a:ext uri="{FF2B5EF4-FFF2-40B4-BE49-F238E27FC236}">
+                <a16:creationId xmlns:a16="http://schemas.microsoft.com/office/drawing/2014/main" id="{5523250E-0F6D-4BCF-A1ED-6EA7E6EE2636}"/>
+              </a:ext>
+            </a:extLst>
+          </p:cNvPr>
+          <p:cNvSpPr>
+            <a:spLocks xmlns:a="http://schemas.openxmlformats.org/drawingml/2006/main" noGrp="1"/>
+          </p:cNvSpPr>
+          <p:nvPr/>
+        </p:nvSpPr>
+        <p:spPr>
+          <a:xfrm xmlns:a="http://schemas.openxmlformats.org/drawingml/2006/main">
+            <a:off x="1390650" y="4095750"/>
+            <a:ext cx="3219450" cy="438150"/>
+          </a:xfrm>
+          <a:prstGeom xmlns:a="http://schemas.openxmlformats.org/drawingml/2006/main" prst="rect">
+            <a:avLst/>
+          </a:prstGeom>
+          <a:noFill xmlns:a="http://schemas.openxmlformats.org/drawingml/2006/main"/>
+          <a:ln xmlns:a="http://schemas.openxmlformats.org/drawingml/2006/main" w="0">
+            <a:noFill/>
+            <a:prstDash val="solid"/>
+          </a:ln>
+        </p:spPr>
+        <p:txBody>
+          <a:bodyPr xmlns:a="http://schemas.openxmlformats.org/drawingml/2006/main"/>
+          <a:lstStyle xmlns:a="http://schemas.openxmlformats.org/drawingml/2006/main"/>
+          <a:p xmlns:a="http://schemas.openxmlformats.org/drawingml/2006/main">
+            <a:pPr>
+              <a:defRPr sz="1350" b="0">
+                <a:solidFill>
+                  <a:srgbClr val="000000"/>
+                </a:solidFill>
+              </a:defRPr>
+            </a:pPr>
+            <a:r>
+              <a:rPr sz="1350" b="0">
+                <a:solidFill>
+                  <a:srgbClr val="000000"/>
+                </a:solidFill>
+              </a:rPr>
+              <a:t>Benchmark: equal-weight high-beta basket hold.</a:t>
+            </a:r>
+          </a:p>
+        </p:txBody>
+      </p:sp>
+      <p:sp>
+        <p:nvSpPr>
+          <p:cNvPr id="15" name="">
+            <a:extLst xmlns:a="http://schemas.openxmlformats.org/drawingml/2006/main">
+              <a:ext uri="{FF2B5EF4-FFF2-40B4-BE49-F238E27FC236}">
+                <a16:creationId xmlns:a16="http://schemas.microsoft.com/office/drawing/2014/main" id="{FF054089-BEBE-4735-A582-EC4625B61CEA}"/>
               </a:ext>
             </a:extLst>
           </p:cNvPr>
@@ -3444,17 +4029,17 @@
                   <a:srgbClr val="067647"/>
                 </a:solidFill>
               </a:rPr>
-              <a:t>Do probe next</a:t>
-            </a:r>
-          </a:p>
-        </p:txBody>
-      </p:sp>
-      <p:sp>
-        <p:nvSpPr>
-          <p:cNvPr id="14" name="">
-            <a:extLst xmlns:a="http://schemas.openxmlformats.org/drawingml/2006/main">
-              <a:ext uri="{FF2B5EF4-FFF2-40B4-BE49-F238E27FC236}">
-                <a16:creationId xmlns:a16="http://schemas.microsoft.com/office/drawing/2014/main" id="{0CF017D5-91CC-442A-989D-191E08962E49}"/>
+              <a:t>Vary first</a:t>
+            </a:r>
+          </a:p>
+        </p:txBody>
+      </p:sp>
+      <p:sp>
+        <p:nvSpPr>
+          <p:cNvPr id="16" name="">
+            <a:extLst xmlns:a="http://schemas.openxmlformats.org/drawingml/2006/main">
+              <a:ext uri="{FF2B5EF4-FFF2-40B4-BE49-F238E27FC236}">
+                <a16:creationId xmlns:a16="http://schemas.microsoft.com/office/drawing/2014/main" id="{1AA01C27-CC1B-4195-B350-6BEEF9B0BB17}"/>
               </a:ext>
             </a:extLst>
           </p:cNvPr>
@@ -3484,10 +4069,10 @@
       </p:sp>
       <p:sp>
         <p:nvSpPr>
-          <p:cNvPr id="15" name="">
-            <a:extLst xmlns:a="http://schemas.openxmlformats.org/drawingml/2006/main">
-              <a:ext uri="{FF2B5EF4-FFF2-40B4-BE49-F238E27FC236}">
-                <a16:creationId xmlns:a16="http://schemas.microsoft.com/office/drawing/2014/main" id="{0DB4DC2D-55B4-4359-A3ED-68AF0C91CB51}"/>
+          <p:cNvPr id="17" name="">
+            <a:extLst xmlns:a="http://schemas.openxmlformats.org/drawingml/2006/main">
+              <a:ext uri="{FF2B5EF4-FFF2-40B4-BE49-F238E27FC236}">
+                <a16:creationId xmlns:a16="http://schemas.microsoft.com/office/drawing/2014/main" id="{34975130-C04B-4D8C-B122-11D99EA44BE7}"/>
               </a:ext>
             </a:extLst>
           </p:cNvPr>
@@ -3499,7 +4084,7 @@
         <p:spPr>
           <a:xfrm xmlns:a="http://schemas.openxmlformats.org/drawingml/2006/main">
             <a:off x="7010400" y="2952750"/>
-            <a:ext cx="3219450" cy="476250"/>
+            <a:ext cx="3219450" cy="438150"/>
           </a:xfrm>
           <a:prstGeom xmlns:a="http://schemas.openxmlformats.org/drawingml/2006/main" prst="rect">
             <a:avLst/>
@@ -3527,28 +4112,28 @@
                   <a:srgbClr val="000000"/>
                 </a:solidFill>
               </a:rPr>
-              <a:t>Use risk-aware context plus workhorse as the near-term control.</a:t>
-            </a:r>
-          </a:p>
-        </p:txBody>
-      </p:sp>
-      <p:sp>
-        <p:nvSpPr>
-          <p:cNvPr id="16" name="">
-            <a:extLst xmlns:a="http://schemas.openxmlformats.org/drawingml/2006/main">
-              <a:ext uri="{FF2B5EF4-FFF2-40B4-BE49-F238E27FC236}">
-                <a16:creationId xmlns:a16="http://schemas.microsoft.com/office/drawing/2014/main" id="{2FFE867A-BED9-4CA4-8FE3-80E2F1D2FB1E}"/>
-              </a:ext>
-            </a:extLst>
-          </p:cNvPr>
-          <p:cNvSpPr>
-            <a:spLocks xmlns:a="http://schemas.openxmlformats.org/drawingml/2006/main" noGrp="1"/>
-          </p:cNvSpPr>
-          <p:nvPr/>
-        </p:nvSpPr>
-        <p:spPr>
-          <a:xfrm xmlns:a="http://schemas.openxmlformats.org/drawingml/2006/main">
-            <a:off x="6800850" y="3467100"/>
+              <a:t>EMA-only momentum control.</a:t>
+            </a:r>
+          </a:p>
+        </p:txBody>
+      </p:sp>
+      <p:sp>
+        <p:nvSpPr>
+          <p:cNvPr id="18" name="">
+            <a:extLst xmlns:a="http://schemas.openxmlformats.org/drawingml/2006/main">
+              <a:ext uri="{FF2B5EF4-FFF2-40B4-BE49-F238E27FC236}">
+                <a16:creationId xmlns:a16="http://schemas.microsoft.com/office/drawing/2014/main" id="{18736134-3B07-418F-84AF-528740DB204A}"/>
+              </a:ext>
+            </a:extLst>
+          </p:cNvPr>
+          <p:cNvSpPr>
+            <a:spLocks xmlns:a="http://schemas.openxmlformats.org/drawingml/2006/main" noGrp="1"/>
+          </p:cNvSpPr>
+          <p:nvPr/>
+        </p:nvSpPr>
+        <p:spPr>
+          <a:xfrm xmlns:a="http://schemas.openxmlformats.org/drawingml/2006/main">
+            <a:off x="6800850" y="3429000"/>
             <a:ext cx="76200" cy="76200"/>
           </a:xfrm>
           <a:prstGeom xmlns:a="http://schemas.openxmlformats.org/drawingml/2006/main" prst="rect">
@@ -3567,22 +4152,22 @@
       </p:sp>
       <p:sp>
         <p:nvSpPr>
-          <p:cNvPr id="17" name="">
-            <a:extLst xmlns:a="http://schemas.openxmlformats.org/drawingml/2006/main">
-              <a:ext uri="{FF2B5EF4-FFF2-40B4-BE49-F238E27FC236}">
-                <a16:creationId xmlns:a16="http://schemas.microsoft.com/office/drawing/2014/main" id="{694A779A-281B-4BF7-9E14-C94588A3D43B}"/>
-              </a:ext>
-            </a:extLst>
-          </p:cNvPr>
-          <p:cNvSpPr>
-            <a:spLocks xmlns:a="http://schemas.openxmlformats.org/drawingml/2006/main" noGrp="1"/>
-          </p:cNvSpPr>
-          <p:nvPr/>
-        </p:nvSpPr>
-        <p:spPr>
-          <a:xfrm xmlns:a="http://schemas.openxmlformats.org/drawingml/2006/main">
-            <a:off x="7010400" y="3371850"/>
-            <a:ext cx="3219450" cy="476250"/>
+          <p:cNvPr id="19" name="">
+            <a:extLst xmlns:a="http://schemas.openxmlformats.org/drawingml/2006/main">
+              <a:ext uri="{FF2B5EF4-FFF2-40B4-BE49-F238E27FC236}">
+                <a16:creationId xmlns:a16="http://schemas.microsoft.com/office/drawing/2014/main" id="{1EBE9628-620F-4944-901C-421AF9CE11DA}"/>
+              </a:ext>
+            </a:extLst>
+          </p:cNvPr>
+          <p:cNvSpPr>
+            <a:spLocks xmlns:a="http://schemas.openxmlformats.org/drawingml/2006/main" noGrp="1"/>
+          </p:cNvSpPr>
+          <p:nvPr/>
+        </p:nvSpPr>
+        <p:spPr>
+          <a:xfrm xmlns:a="http://schemas.openxmlformats.org/drawingml/2006/main">
+            <a:off x="7010400" y="3333750"/>
+            <a:ext cx="3219450" cy="438150"/>
           </a:xfrm>
           <a:prstGeom xmlns:a="http://schemas.openxmlformats.org/drawingml/2006/main" prst="rect">
             <a:avLst/>
@@ -3610,28 +4195,28 @@
                   <a:srgbClr val="000000"/>
                 </a:solidFill>
               </a:rPr>
-              <a:t>Audit full trade tapes for 2024 and missed upside in 2020.</a:t>
-            </a:r>
-          </a:p>
-        </p:txBody>
-      </p:sp>
-      <p:sp>
-        <p:nvSpPr>
-          <p:cNvPr id="18" name="">
-            <a:extLst xmlns:a="http://schemas.openxmlformats.org/drawingml/2006/main">
-              <a:ext uri="{FF2B5EF4-FFF2-40B4-BE49-F238E27FC236}">
-                <a16:creationId xmlns:a16="http://schemas.microsoft.com/office/drawing/2014/main" id="{84C63AE5-FD23-450F-B562-FB238C03025F}"/>
-              </a:ext>
-            </a:extLst>
-          </p:cNvPr>
-          <p:cNvSpPr>
-            <a:spLocks xmlns:a="http://schemas.openxmlformats.org/drawingml/2006/main" noGrp="1"/>
-          </p:cNvSpPr>
-          <p:nvPr/>
-        </p:nvSpPr>
-        <p:spPr>
-          <a:xfrm xmlns:a="http://schemas.openxmlformats.org/drawingml/2006/main">
-            <a:off x="6800850" y="3886200"/>
+              <a:t>Trend plus breakout expansion.</a:t>
+            </a:r>
+          </a:p>
+        </p:txBody>
+      </p:sp>
+      <p:sp>
+        <p:nvSpPr>
+          <p:cNvPr id="20" name="">
+            <a:extLst xmlns:a="http://schemas.openxmlformats.org/drawingml/2006/main">
+              <a:ext uri="{FF2B5EF4-FFF2-40B4-BE49-F238E27FC236}">
+                <a16:creationId xmlns:a16="http://schemas.microsoft.com/office/drawing/2014/main" id="{8149E41A-E192-4AC0-B633-779DFB10C686}"/>
+              </a:ext>
+            </a:extLst>
+          </p:cNvPr>
+          <p:cNvSpPr>
+            <a:spLocks xmlns:a="http://schemas.openxmlformats.org/drawingml/2006/main" noGrp="1"/>
+          </p:cNvSpPr>
+          <p:nvPr/>
+        </p:nvSpPr>
+        <p:spPr>
+          <a:xfrm xmlns:a="http://schemas.openxmlformats.org/drawingml/2006/main">
+            <a:off x="6800850" y="3810000"/>
             <a:ext cx="76200" cy="76200"/>
           </a:xfrm>
           <a:prstGeom xmlns:a="http://schemas.openxmlformats.org/drawingml/2006/main" prst="rect">
@@ -3650,22 +4235,22 @@
       </p:sp>
       <p:sp>
         <p:nvSpPr>
-          <p:cNvPr id="19" name="">
-            <a:extLst xmlns:a="http://schemas.openxmlformats.org/drawingml/2006/main">
-              <a:ext uri="{FF2B5EF4-FFF2-40B4-BE49-F238E27FC236}">
-                <a16:creationId xmlns:a16="http://schemas.microsoft.com/office/drawing/2014/main" id="{30ED9828-A96E-4FF8-8021-7091E5F4D166}"/>
-              </a:ext>
-            </a:extLst>
-          </p:cNvPr>
-          <p:cNvSpPr>
-            <a:spLocks xmlns:a="http://schemas.openxmlformats.org/drawingml/2006/main" noGrp="1"/>
-          </p:cNvSpPr>
-          <p:nvPr/>
-        </p:nvSpPr>
-        <p:spPr>
-          <a:xfrm xmlns:a="http://schemas.openxmlformats.org/drawingml/2006/main">
-            <a:off x="7010400" y="3790950"/>
-            <a:ext cx="3219450" cy="476250"/>
+          <p:cNvPr id="21" name="">
+            <a:extLst xmlns:a="http://schemas.openxmlformats.org/drawingml/2006/main">
+              <a:ext uri="{FF2B5EF4-FFF2-40B4-BE49-F238E27FC236}">
+                <a16:creationId xmlns:a16="http://schemas.microsoft.com/office/drawing/2014/main" id="{299A6EEA-5B80-4BC8-9332-FBEBDE51A8B1}"/>
+              </a:ext>
+            </a:extLst>
+          </p:cNvPr>
+          <p:cNvSpPr>
+            <a:spLocks xmlns:a="http://schemas.openxmlformats.org/drawingml/2006/main" noGrp="1"/>
+          </p:cNvSpPr>
+          <p:nvPr/>
+        </p:nvSpPr>
+        <p:spPr>
+          <a:xfrm xmlns:a="http://schemas.openxmlformats.org/drawingml/2006/main">
+            <a:off x="7010400" y="3714750"/>
+            <a:ext cx="3219450" cy="438150"/>
           </a:xfrm>
           <a:prstGeom xmlns:a="http://schemas.openxmlformats.org/drawingml/2006/main" prst="rect">
             <a:avLst/>
@@ -3693,17 +4278,100 @@
                   <a:srgbClr val="000000"/>
                 </a:solidFill>
               </a:rPr>
-              <a:t>Test whether annual windows need true cross-quarter continuity, not only stitched quarterly authorities.</a:t>
-            </a:r>
-          </a:p>
-        </p:txBody>
-      </p:sp>
-      <p:sp>
-        <p:nvSpPr>
-          <p:cNvPr id="20" name="">
-            <a:extLst xmlns:a="http://schemas.openxmlformats.org/drawingml/2006/main">
-              <a:ext uri="{FF2B5EF4-FFF2-40B4-BE49-F238E27FC236}">
-                <a16:creationId xmlns:a16="http://schemas.microsoft.com/office/drawing/2014/main" id="{E25CA133-A7ED-4740-8848-5BA879968106}"/>
+              <a:t>Mean-reversion diagnostic pool.</a:t>
+            </a:r>
+          </a:p>
+        </p:txBody>
+      </p:sp>
+      <p:sp>
+        <p:nvSpPr>
+          <p:cNvPr id="22" name="">
+            <a:extLst xmlns:a="http://schemas.openxmlformats.org/drawingml/2006/main">
+              <a:ext uri="{FF2B5EF4-FFF2-40B4-BE49-F238E27FC236}">
+                <a16:creationId xmlns:a16="http://schemas.microsoft.com/office/drawing/2014/main" id="{EEF84DBE-5DCA-44B3-A45F-DCADDCE488AA}"/>
+              </a:ext>
+            </a:extLst>
+          </p:cNvPr>
+          <p:cNvSpPr>
+            <a:spLocks xmlns:a="http://schemas.openxmlformats.org/drawingml/2006/main" noGrp="1"/>
+          </p:cNvSpPr>
+          <p:nvPr/>
+        </p:nvSpPr>
+        <p:spPr>
+          <a:xfrm xmlns:a="http://schemas.openxmlformats.org/drawingml/2006/main">
+            <a:off x="6800850" y="4191000"/>
+            <a:ext cx="76200" cy="76200"/>
+          </a:xfrm>
+          <a:prstGeom xmlns:a="http://schemas.openxmlformats.org/drawingml/2006/main" prst="rect">
+            <a:avLst/>
+          </a:prstGeom>
+          <a:solidFill xmlns:a="http://schemas.openxmlformats.org/drawingml/2006/main">
+            <a:srgbClr val="067647"/>
+          </a:solidFill>
+          <a:ln xmlns:a="http://schemas.openxmlformats.org/drawingml/2006/main" w="9525">
+            <a:solidFill>
+              <a:srgbClr val="067647"/>
+            </a:solidFill>
+            <a:prstDash val="solid"/>
+          </a:ln>
+        </p:spPr>
+      </p:sp>
+      <p:sp>
+        <p:nvSpPr>
+          <p:cNvPr id="23" name="">
+            <a:extLst xmlns:a="http://schemas.openxmlformats.org/drawingml/2006/main">
+              <a:ext uri="{FF2B5EF4-FFF2-40B4-BE49-F238E27FC236}">
+                <a16:creationId xmlns:a16="http://schemas.microsoft.com/office/drawing/2014/main" id="{EB9EE5D9-4895-4A83-BE18-A921C2F276A2}"/>
+              </a:ext>
+            </a:extLst>
+          </p:cNvPr>
+          <p:cNvSpPr>
+            <a:spLocks xmlns:a="http://schemas.openxmlformats.org/drawingml/2006/main" noGrp="1"/>
+          </p:cNvSpPr>
+          <p:nvPr/>
+        </p:nvSpPr>
+        <p:spPr>
+          <a:xfrm xmlns:a="http://schemas.openxmlformats.org/drawingml/2006/main">
+            <a:off x="7010400" y="4095750"/>
+            <a:ext cx="3219450" cy="438150"/>
+          </a:xfrm>
+          <a:prstGeom xmlns:a="http://schemas.openxmlformats.org/drawingml/2006/main" prst="rect">
+            <a:avLst/>
+          </a:prstGeom>
+          <a:noFill xmlns:a="http://schemas.openxmlformats.org/drawingml/2006/main"/>
+          <a:ln xmlns:a="http://schemas.openxmlformats.org/drawingml/2006/main" w="0">
+            <a:noFill/>
+            <a:prstDash val="solid"/>
+          </a:ln>
+        </p:spPr>
+        <p:txBody>
+          <a:bodyPr xmlns:a="http://schemas.openxmlformats.org/drawingml/2006/main"/>
+          <a:lstStyle xmlns:a="http://schemas.openxmlformats.org/drawingml/2006/main"/>
+          <a:p xmlns:a="http://schemas.openxmlformats.org/drawingml/2006/main">
+            <a:pPr>
+              <a:defRPr sz="1350" b="0">
+                <a:solidFill>
+                  <a:srgbClr val="000000"/>
+                </a:solidFill>
+              </a:defRPr>
+            </a:pPr>
+            <a:r>
+              <a:rPr sz="1350" b="0">
+                <a:solidFill>
+                  <a:srgbClr val="000000"/>
+                </a:solidFill>
+              </a:rPr>
+              <a:t>Classical full reopened pool.</a:t>
+            </a:r>
+          </a:p>
+        </p:txBody>
+      </p:sp>
+      <p:sp>
+        <p:nvSpPr>
+          <p:cNvPr id="24" name="">
+            <a:extLst xmlns:a="http://schemas.openxmlformats.org/drawingml/2006/main">
+              <a:ext uri="{FF2B5EF4-FFF2-40B4-BE49-F238E27FC236}">
+                <a16:creationId xmlns:a16="http://schemas.microsoft.com/office/drawing/2014/main" id="{4943A2AD-C043-482C-B8DF-E0E70897CA64}"/>
               </a:ext>
             </a:extLst>
           </p:cNvPr>
@@ -3743,17 +4411,17 @@
                   <a:srgbClr val="000000"/>
                 </a:solidFill>
               </a:rPr>
-              <a:t>The core lesson is methodological: longer OOS windows are now the default for alpha-oriented screens because sparse one-quarter results were too easy to overread.</a:t>
-            </a:r>
-          </a:p>
-        </p:txBody>
-      </p:sp>
-      <p:sp>
-        <p:nvSpPr>
-          <p:cNvPr id="21" name="">
-            <a:extLst xmlns:a="http://schemas.openxmlformats.org/drawingml/2006/main">
-              <a:ext uri="{FF2B5EF4-FFF2-40B4-BE49-F238E27FC236}">
-                <a16:creationId xmlns:a16="http://schemas.microsoft.com/office/drawing/2014/main" id="{C4ABD717-C139-4D32-9CBC-8AF64DB1650D}"/>
+              <a:t>The cleanest next question is whether the strategy pool was too narrow under the now-correct annual continuity surface.</a:t>
+            </a:r>
+          </a:p>
+        </p:txBody>
+      </p:sp>
+      <p:sp>
+        <p:nvSpPr>
+          <p:cNvPr id="25" name="">
+            <a:extLst xmlns:a="http://schemas.openxmlformats.org/drawingml/2006/main">
+              <a:ext uri="{FF2B5EF4-FFF2-40B4-BE49-F238E27FC236}">
+                <a16:creationId xmlns:a16="http://schemas.microsoft.com/office/drawing/2014/main" id="{D46A643E-005F-4243-901B-E3BA00ECAB24}"/>
               </a:ext>
             </a:extLst>
           </p:cNvPr>
@@ -3801,7 +4469,818 @@
     </p:spTree>
     <p:extLst>
       <p:ext uri="{BB962C8B-B14F-4D97-AF65-F5344CB8AC3E}">
-        <p14:creationId xmlns:p14="http://schemas.microsoft.com/office/powerpoint/2010/main" val="1784847551"/>
+        <p14:creationId xmlns:p14="http://schemas.microsoft.com/office/powerpoint/2010/main" val="109791574"/>
+      </p:ext>
+    </p:extLst>
+  </p:cSld>
+</p:sld>
+</file>
+
+<file path=ppt/slides/slide13.xml><?xml version="1.0" encoding="utf-8"?>
+<p:sld xmlns:p="http://schemas.openxmlformats.org/presentationml/2006/main">
+  <p:cSld>
+    <p:bg>
+      <p:bgPr>
+        <a:solidFill xmlns:a="http://schemas.openxmlformats.org/drawingml/2006/main">
+          <a:srgbClr val="FFFFFF"/>
+        </a:solidFill>
+      </p:bgPr>
+    </p:bg>
+    <p:spTree>
+      <p:nvGrpSpPr>
+        <p:cNvPr id="1" name=""/>
+        <p:cNvGrpSpPr/>
+        <p:nvPr/>
+      </p:nvGrpSpPr>
+      <p:grpSpPr>
+        <a:xfrm xmlns:a="http://schemas.openxmlformats.org/drawingml/2006/main"/>
+      </p:grpSpPr>
+      <p:sp>
+        <p:nvSpPr>
+          <p:cNvPr id="1" name="">
+            <a:extLst xmlns:a="http://schemas.openxmlformats.org/drawingml/2006/main">
+              <a:ext uri="{FF2B5EF4-FFF2-40B4-BE49-F238E27FC236}">
+                <a16:creationId xmlns:a16="http://schemas.microsoft.com/office/drawing/2014/main" id="{1CC6A94F-31C5-44F3-BE9D-DFEA3CD26A7C}"/>
+              </a:ext>
+            </a:extLst>
+          </p:cNvPr>
+          <p:cNvSpPr>
+            <a:spLocks xmlns:a="http://schemas.openxmlformats.org/drawingml/2006/main" noGrp="1"/>
+          </p:cNvSpPr>
+          <p:nvPr/>
+        </p:nvSpPr>
+        <p:spPr>
+          <a:xfrm xmlns:a="http://schemas.openxmlformats.org/drawingml/2006/main">
+            <a:off x="514350" y="266700"/>
+            <a:ext cx="5905500" cy="228600"/>
+          </a:xfrm>
+          <a:prstGeom xmlns:a="http://schemas.openxmlformats.org/drawingml/2006/main" prst="rect">
+            <a:avLst/>
+          </a:prstGeom>
+          <a:noFill xmlns:a="http://schemas.openxmlformats.org/drawingml/2006/main"/>
+          <a:ln xmlns:a="http://schemas.openxmlformats.org/drawingml/2006/main" w="0">
+            <a:noFill/>
+            <a:prstDash val="solid"/>
+          </a:ln>
+        </p:spPr>
+        <p:txBody>
+          <a:bodyPr xmlns:a="http://schemas.openxmlformats.org/drawingml/2006/main"/>
+          <a:lstStyle xmlns:a="http://schemas.openxmlformats.org/drawingml/2006/main"/>
+          <a:p xmlns:a="http://schemas.openxmlformats.org/drawingml/2006/main">
+            <a:pPr>
+              <a:defRPr sz="1050" b="1">
+                <a:solidFill>
+                  <a:srgbClr val="555555"/>
+                </a:solidFill>
+              </a:defRPr>
+            </a:pPr>
+            <a:r>
+              <a:rPr sz="1050" b="1">
+                <a:solidFill>
+                  <a:srgbClr val="555555"/>
+                </a:solidFill>
+              </a:rPr>
+              <a:t>GEN5.3 MOMENTUM CONTEXT-SIZE SCREEN</a:t>
+            </a:r>
+          </a:p>
+        </p:txBody>
+      </p:sp>
+      <p:sp>
+        <p:nvSpPr>
+          <p:cNvPr id="2" name="">
+            <a:extLst xmlns:a="http://schemas.openxmlformats.org/drawingml/2006/main">
+              <a:ext uri="{FF2B5EF4-FFF2-40B4-BE49-F238E27FC236}">
+                <a16:creationId xmlns:a16="http://schemas.microsoft.com/office/drawing/2014/main" id="{190BA639-B96E-4B1A-B96D-9DB440A72392}"/>
+              </a:ext>
+            </a:extLst>
+          </p:cNvPr>
+          <p:cNvSpPr>
+            <a:spLocks xmlns:a="http://schemas.openxmlformats.org/drawingml/2006/main" noGrp="1"/>
+          </p:cNvSpPr>
+          <p:nvPr/>
+        </p:nvSpPr>
+        <p:spPr>
+          <a:xfrm xmlns:a="http://schemas.openxmlformats.org/drawingml/2006/main">
+            <a:off x="514350" y="628650"/>
+            <a:ext cx="10287000" cy="990600"/>
+          </a:xfrm>
+          <a:prstGeom xmlns:a="http://schemas.openxmlformats.org/drawingml/2006/main" prst="rect">
+            <a:avLst/>
+          </a:prstGeom>
+          <a:noFill xmlns:a="http://schemas.openxmlformats.org/drawingml/2006/main"/>
+          <a:ln xmlns:a="http://schemas.openxmlformats.org/drawingml/2006/main" w="0">
+            <a:noFill/>
+            <a:prstDash val="solid"/>
+          </a:ln>
+        </p:spPr>
+        <p:txBody>
+          <a:bodyPr xmlns:a="http://schemas.openxmlformats.org/drawingml/2006/main"/>
+          <a:lstStyle xmlns:a="http://schemas.openxmlformats.org/drawingml/2006/main"/>
+          <a:p xmlns:a="http://schemas.openxmlformats.org/drawingml/2006/main">
+            <a:pPr>
+              <a:defRPr sz="2850" b="1">
+                <a:solidFill>
+                  <a:srgbClr val="000000"/>
+                </a:solidFill>
+              </a:defRPr>
+            </a:pPr>
+            <a:r>
+              <a:rPr sz="2850" b="1">
+                <a:solidFill>
+                  <a:srgbClr val="000000"/>
+                </a:solidFill>
+              </a:rPr>
+              <a:t>Feature sets should support the strategy question, not explode the grid</a:t>
+            </a:r>
+          </a:p>
+        </p:txBody>
+      </p:sp>
+      <p:sp>
+        <p:nvSpPr>
+          <p:cNvPr id="3" name="">
+            <a:extLst xmlns:a="http://schemas.openxmlformats.org/drawingml/2006/main">
+              <a:ext uri="{FF2B5EF4-FFF2-40B4-BE49-F238E27FC236}">
+                <a16:creationId xmlns:a16="http://schemas.microsoft.com/office/drawing/2014/main" id="{E6E47B67-AF29-4576-8AC0-75CDAEB8F6D6}"/>
+              </a:ext>
+            </a:extLst>
+          </p:cNvPr>
+          <p:cNvSpPr>
+            <a:spLocks xmlns:a="http://schemas.openxmlformats.org/drawingml/2006/main" noGrp="1"/>
+          </p:cNvSpPr>
+          <p:nvPr/>
+        </p:nvSpPr>
+        <p:spPr>
+          <a:xfrm xmlns:a="http://schemas.openxmlformats.org/drawingml/2006/main">
+            <a:off x="514350" y="1619250"/>
+            <a:ext cx="11163300" cy="9525"/>
+          </a:xfrm>
+          <a:prstGeom xmlns:a="http://schemas.openxmlformats.org/drawingml/2006/main" prst="rect">
+            <a:avLst/>
+          </a:prstGeom>
+          <a:solidFill xmlns:a="http://schemas.openxmlformats.org/drawingml/2006/main">
+            <a:srgbClr val="B8BCC4"/>
+          </a:solidFill>
+          <a:ln xmlns:a="http://schemas.openxmlformats.org/drawingml/2006/main" w="9525">
+            <a:solidFill>
+              <a:srgbClr val="B8BCC4"/>
+            </a:solidFill>
+            <a:prstDash val="solid"/>
+          </a:ln>
+        </p:spPr>
+      </p:sp>
+      <p:sp>
+        <p:nvSpPr>
+          <p:cNvPr id="4" name="">
+            <a:extLst xmlns:a="http://schemas.openxmlformats.org/drawingml/2006/main">
+              <a:ext uri="{FF2B5EF4-FFF2-40B4-BE49-F238E27FC236}">
+                <a16:creationId xmlns:a16="http://schemas.microsoft.com/office/drawing/2014/main" id="{E4532C3B-D878-4F3F-AADE-D8518CDB0030}"/>
+              </a:ext>
+            </a:extLst>
+          </p:cNvPr>
+          <p:cNvSpPr>
+            <a:spLocks xmlns:a="http://schemas.openxmlformats.org/drawingml/2006/main" noGrp="1"/>
+          </p:cNvSpPr>
+          <p:nvPr/>
+        </p:nvSpPr>
+        <p:spPr>
+          <a:xfrm xmlns:a="http://schemas.openxmlformats.org/drawingml/2006/main">
+            <a:off x="819150" y="2152650"/>
+            <a:ext cx="2914650" cy="2476500"/>
+          </a:xfrm>
+          <a:prstGeom xmlns:a="http://schemas.openxmlformats.org/drawingml/2006/main" prst="rect">
+            <a:avLst/>
+          </a:prstGeom>
+          <a:solidFill xmlns:a="http://schemas.openxmlformats.org/drawingml/2006/main">
+            <a:srgbClr val="EDEDED"/>
+          </a:solidFill>
+          <a:ln xmlns:a="http://schemas.openxmlformats.org/drawingml/2006/main" w="9525">
+            <a:solidFill>
+              <a:srgbClr val="B8BCC4"/>
+            </a:solidFill>
+            <a:prstDash val="solid"/>
+          </a:ln>
+        </p:spPr>
+      </p:sp>
+      <p:sp>
+        <p:nvSpPr>
+          <p:cNvPr id="5" name="">
+            <a:extLst xmlns:a="http://schemas.openxmlformats.org/drawingml/2006/main">
+              <a:ext uri="{FF2B5EF4-FFF2-40B4-BE49-F238E27FC236}">
+                <a16:creationId xmlns:a16="http://schemas.microsoft.com/office/drawing/2014/main" id="{8BD31815-7082-49EE-B29C-A9AF3C515548}"/>
+              </a:ext>
+            </a:extLst>
+          </p:cNvPr>
+          <p:cNvSpPr>
+            <a:spLocks xmlns:a="http://schemas.openxmlformats.org/drawingml/2006/main" noGrp="1"/>
+          </p:cNvSpPr>
+          <p:nvPr/>
+        </p:nvSpPr>
+        <p:spPr>
+          <a:xfrm xmlns:a="http://schemas.openxmlformats.org/drawingml/2006/main">
+            <a:off x="1047750" y="2400300"/>
+            <a:ext cx="2343150" cy="285750"/>
+          </a:xfrm>
+          <a:prstGeom xmlns:a="http://schemas.openxmlformats.org/drawingml/2006/main" prst="rect">
+            <a:avLst/>
+          </a:prstGeom>
+          <a:noFill xmlns:a="http://schemas.openxmlformats.org/drawingml/2006/main"/>
+          <a:ln xmlns:a="http://schemas.openxmlformats.org/drawingml/2006/main" w="0">
+            <a:noFill/>
+            <a:prstDash val="solid"/>
+          </a:ln>
+        </p:spPr>
+        <p:txBody>
+          <a:bodyPr xmlns:a="http://schemas.openxmlformats.org/drawingml/2006/main"/>
+          <a:lstStyle xmlns:a="http://schemas.openxmlformats.org/drawingml/2006/main"/>
+          <a:p xmlns:a="http://schemas.openxmlformats.org/drawingml/2006/main">
+            <a:pPr>
+              <a:defRPr sz="1800" b="1">
+                <a:solidFill>
+                  <a:srgbClr val="000000"/>
+                </a:solidFill>
+              </a:defRPr>
+            </a:pPr>
+            <a:r>
+              <a:rPr sz="1800" b="1">
+                <a:solidFill>
+                  <a:srgbClr val="000000"/>
+                </a:solidFill>
+              </a:rPr>
+              <a:t>Control</a:t>
+            </a:r>
+          </a:p>
+        </p:txBody>
+      </p:sp>
+      <p:sp>
+        <p:nvSpPr>
+          <p:cNvPr id="6" name="">
+            <a:extLst xmlns:a="http://schemas.openxmlformats.org/drawingml/2006/main">
+              <a:ext uri="{FF2B5EF4-FFF2-40B4-BE49-F238E27FC236}">
+                <a16:creationId xmlns:a16="http://schemas.microsoft.com/office/drawing/2014/main" id="{AD481D2E-620C-4AD4-81FA-B9F4637022A2}"/>
+              </a:ext>
+            </a:extLst>
+          </p:cNvPr>
+          <p:cNvSpPr>
+            <a:spLocks xmlns:a="http://schemas.openxmlformats.org/drawingml/2006/main" noGrp="1"/>
+          </p:cNvSpPr>
+          <p:nvPr/>
+        </p:nvSpPr>
+        <p:spPr>
+          <a:xfrm xmlns:a="http://schemas.openxmlformats.org/drawingml/2006/main">
+            <a:off x="1047750" y="2933700"/>
+            <a:ext cx="2343150" cy="285750"/>
+          </a:xfrm>
+          <a:prstGeom xmlns:a="http://schemas.openxmlformats.org/drawingml/2006/main" prst="rect">
+            <a:avLst/>
+          </a:prstGeom>
+          <a:noFill xmlns:a="http://schemas.openxmlformats.org/drawingml/2006/main"/>
+          <a:ln xmlns:a="http://schemas.openxmlformats.org/drawingml/2006/main" w="0">
+            <a:noFill/>
+            <a:prstDash val="solid"/>
+          </a:ln>
+        </p:spPr>
+        <p:txBody>
+          <a:bodyPr xmlns:a="http://schemas.openxmlformats.org/drawingml/2006/main"/>
+          <a:lstStyle xmlns:a="http://schemas.openxmlformats.org/drawingml/2006/main"/>
+          <a:p xmlns:a="http://schemas.openxmlformats.org/drawingml/2006/main">
+            <a:pPr>
+              <a:defRPr sz="1425" b="1">
+                <a:solidFill>
+                  <a:srgbClr val="FF6B35"/>
+                </a:solidFill>
+              </a:defRPr>
+            </a:pPr>
+            <a:r>
+              <a:rPr sz="1425" b="1">
+                <a:solidFill>
+                  <a:srgbClr val="FF6B35"/>
+                </a:solidFill>
+              </a:rPr>
+              <a:t>workhorse_enriched</a:t>
+            </a:r>
+          </a:p>
+        </p:txBody>
+      </p:sp>
+      <p:sp>
+        <p:nvSpPr>
+          <p:cNvPr id="7" name="">
+            <a:extLst xmlns:a="http://schemas.openxmlformats.org/drawingml/2006/main">
+              <a:ext uri="{FF2B5EF4-FFF2-40B4-BE49-F238E27FC236}">
+                <a16:creationId xmlns:a16="http://schemas.microsoft.com/office/drawing/2014/main" id="{F4FCA19F-2F25-43F3-AAA1-6C6E77BA1C58}"/>
+              </a:ext>
+            </a:extLst>
+          </p:cNvPr>
+          <p:cNvSpPr>
+            <a:spLocks xmlns:a="http://schemas.openxmlformats.org/drawingml/2006/main" noGrp="1"/>
+          </p:cNvSpPr>
+          <p:nvPr/>
+        </p:nvSpPr>
+        <p:spPr>
+          <a:xfrm xmlns:a="http://schemas.openxmlformats.org/drawingml/2006/main">
+            <a:off x="1047750" y="3505200"/>
+            <a:ext cx="2266950" cy="819150"/>
+          </a:xfrm>
+          <a:prstGeom xmlns:a="http://schemas.openxmlformats.org/drawingml/2006/main" prst="rect">
+            <a:avLst/>
+          </a:prstGeom>
+          <a:noFill xmlns:a="http://schemas.openxmlformats.org/drawingml/2006/main"/>
+          <a:ln xmlns:a="http://schemas.openxmlformats.org/drawingml/2006/main" w="0">
+            <a:noFill/>
+            <a:prstDash val="solid"/>
+          </a:ln>
+        </p:spPr>
+        <p:txBody>
+          <a:bodyPr xmlns:a="http://schemas.openxmlformats.org/drawingml/2006/main"/>
+          <a:lstStyle xmlns:a="http://schemas.openxmlformats.org/drawingml/2006/main"/>
+          <a:p xmlns:a="http://schemas.openxmlformats.org/drawingml/2006/main">
+            <a:pPr>
+              <a:defRPr sz="1350" b="0">
+                <a:solidFill>
+                  <a:srgbClr val="555555"/>
+                </a:solidFill>
+              </a:defRPr>
+            </a:pPr>
+            <a:r>
+              <a:rPr sz="1350" b="0">
+                <a:solidFill>
+                  <a:srgbClr val="555555"/>
+                </a:solidFill>
+              </a:rPr>
+              <a:t>Keeps the best observed continuity lane intact.</a:t>
+            </a:r>
+          </a:p>
+        </p:txBody>
+      </p:sp>
+      <p:sp>
+        <p:nvSpPr>
+          <p:cNvPr id="8" name="">
+            <a:extLst xmlns:a="http://schemas.openxmlformats.org/drawingml/2006/main">
+              <a:ext uri="{FF2B5EF4-FFF2-40B4-BE49-F238E27FC236}">
+                <a16:creationId xmlns:a16="http://schemas.microsoft.com/office/drawing/2014/main" id="{18B59DCE-7D93-4077-9E1A-549E0B8BE9C7}"/>
+              </a:ext>
+            </a:extLst>
+          </p:cNvPr>
+          <p:cNvSpPr>
+            <a:spLocks xmlns:a="http://schemas.openxmlformats.org/drawingml/2006/main" noGrp="1"/>
+          </p:cNvSpPr>
+          <p:nvPr/>
+        </p:nvSpPr>
+        <p:spPr>
+          <a:xfrm xmlns:a="http://schemas.openxmlformats.org/drawingml/2006/main">
+            <a:off x="4248150" y="2152650"/>
+            <a:ext cx="2914650" cy="2476500"/>
+          </a:xfrm>
+          <a:prstGeom xmlns:a="http://schemas.openxmlformats.org/drawingml/2006/main" prst="rect">
+            <a:avLst/>
+          </a:prstGeom>
+          <a:solidFill xmlns:a="http://schemas.openxmlformats.org/drawingml/2006/main">
+            <a:srgbClr val="EDEDED"/>
+          </a:solidFill>
+          <a:ln xmlns:a="http://schemas.openxmlformats.org/drawingml/2006/main" w="9525">
+            <a:solidFill>
+              <a:srgbClr val="B8BCC4"/>
+            </a:solidFill>
+            <a:prstDash val="solid"/>
+          </a:ln>
+        </p:spPr>
+      </p:sp>
+      <p:sp>
+        <p:nvSpPr>
+          <p:cNvPr id="9" name="">
+            <a:extLst xmlns:a="http://schemas.openxmlformats.org/drawingml/2006/main">
+              <a:ext uri="{FF2B5EF4-FFF2-40B4-BE49-F238E27FC236}">
+                <a16:creationId xmlns:a16="http://schemas.microsoft.com/office/drawing/2014/main" id="{49AD7065-04C7-4B86-8F15-A05A09D91671}"/>
+              </a:ext>
+            </a:extLst>
+          </p:cNvPr>
+          <p:cNvSpPr>
+            <a:spLocks xmlns:a="http://schemas.openxmlformats.org/drawingml/2006/main" noGrp="1"/>
+          </p:cNvSpPr>
+          <p:nvPr/>
+        </p:nvSpPr>
+        <p:spPr>
+          <a:xfrm xmlns:a="http://schemas.openxmlformats.org/drawingml/2006/main">
+            <a:off x="4476750" y="2400300"/>
+            <a:ext cx="2343150" cy="285750"/>
+          </a:xfrm>
+          <a:prstGeom xmlns:a="http://schemas.openxmlformats.org/drawingml/2006/main" prst="rect">
+            <a:avLst/>
+          </a:prstGeom>
+          <a:noFill xmlns:a="http://schemas.openxmlformats.org/drawingml/2006/main"/>
+          <a:ln xmlns:a="http://schemas.openxmlformats.org/drawingml/2006/main" w="0">
+            <a:noFill/>
+            <a:prstDash val="solid"/>
+          </a:ln>
+        </p:spPr>
+        <p:txBody>
+          <a:bodyPr xmlns:a="http://schemas.openxmlformats.org/drawingml/2006/main"/>
+          <a:lstStyle xmlns:a="http://schemas.openxmlformats.org/drawingml/2006/main"/>
+          <a:p xmlns:a="http://schemas.openxmlformats.org/drawingml/2006/main">
+            <a:pPr>
+              <a:defRPr sz="1800" b="1">
+                <a:solidFill>
+                  <a:srgbClr val="000000"/>
+                </a:solidFill>
+              </a:defRPr>
+            </a:pPr>
+            <a:r>
+              <a:rPr sz="1800" b="1">
+                <a:solidFill>
+                  <a:srgbClr val="000000"/>
+                </a:solidFill>
+              </a:rPr>
+              <a:t>Momentum challenger</a:t>
+            </a:r>
+          </a:p>
+        </p:txBody>
+      </p:sp>
+      <p:sp>
+        <p:nvSpPr>
+          <p:cNvPr id="10" name="">
+            <a:extLst xmlns:a="http://schemas.openxmlformats.org/drawingml/2006/main">
+              <a:ext uri="{FF2B5EF4-FFF2-40B4-BE49-F238E27FC236}">
+                <a16:creationId xmlns:a16="http://schemas.microsoft.com/office/drawing/2014/main" id="{67F06C08-580F-4381-A25E-137D003D28CF}"/>
+              </a:ext>
+            </a:extLst>
+          </p:cNvPr>
+          <p:cNvSpPr>
+            <a:spLocks xmlns:a="http://schemas.openxmlformats.org/drawingml/2006/main" noGrp="1"/>
+          </p:cNvSpPr>
+          <p:nvPr/>
+        </p:nvSpPr>
+        <p:spPr>
+          <a:xfrm xmlns:a="http://schemas.openxmlformats.org/drawingml/2006/main">
+            <a:off x="4476750" y="2933700"/>
+            <a:ext cx="2343150" cy="285750"/>
+          </a:xfrm>
+          <a:prstGeom xmlns:a="http://schemas.openxmlformats.org/drawingml/2006/main" prst="rect">
+            <a:avLst/>
+          </a:prstGeom>
+          <a:noFill xmlns:a="http://schemas.openxmlformats.org/drawingml/2006/main"/>
+          <a:ln xmlns:a="http://schemas.openxmlformats.org/drawingml/2006/main" w="0">
+            <a:noFill/>
+            <a:prstDash val="solid"/>
+          </a:ln>
+        </p:spPr>
+        <p:txBody>
+          <a:bodyPr xmlns:a="http://schemas.openxmlformats.org/drawingml/2006/main"/>
+          <a:lstStyle xmlns:a="http://schemas.openxmlformats.org/drawingml/2006/main"/>
+          <a:p xmlns:a="http://schemas.openxmlformats.org/drawingml/2006/main">
+            <a:pPr>
+              <a:defRPr sz="1425" b="1">
+                <a:solidFill>
+                  <a:srgbClr val="FF6B35"/>
+                </a:solidFill>
+              </a:defRPr>
+            </a:pPr>
+            <a:r>
+              <a:rPr sz="1425" b="1">
+                <a:solidFill>
+                  <a:srgbClr val="FF6B35"/>
+                </a:solidFill>
+              </a:rPr>
+              <a:t>momentum_plus_stress</a:t>
+            </a:r>
+          </a:p>
+        </p:txBody>
+      </p:sp>
+      <p:sp>
+        <p:nvSpPr>
+          <p:cNvPr id="11" name="">
+            <a:extLst xmlns:a="http://schemas.openxmlformats.org/drawingml/2006/main">
+              <a:ext uri="{FF2B5EF4-FFF2-40B4-BE49-F238E27FC236}">
+                <a16:creationId xmlns:a16="http://schemas.microsoft.com/office/drawing/2014/main" id="{31A73D57-1B98-4E1E-9AAD-B92500B87BE5}"/>
+              </a:ext>
+            </a:extLst>
+          </p:cNvPr>
+          <p:cNvSpPr>
+            <a:spLocks xmlns:a="http://schemas.openxmlformats.org/drawingml/2006/main" noGrp="1"/>
+          </p:cNvSpPr>
+          <p:nvPr/>
+        </p:nvSpPr>
+        <p:spPr>
+          <a:xfrm xmlns:a="http://schemas.openxmlformats.org/drawingml/2006/main">
+            <a:off x="4476750" y="3505200"/>
+            <a:ext cx="2266950" cy="819150"/>
+          </a:xfrm>
+          <a:prstGeom xmlns:a="http://schemas.openxmlformats.org/drawingml/2006/main" prst="rect">
+            <a:avLst/>
+          </a:prstGeom>
+          <a:noFill xmlns:a="http://schemas.openxmlformats.org/drawingml/2006/main"/>
+          <a:ln xmlns:a="http://schemas.openxmlformats.org/drawingml/2006/main" w="0">
+            <a:noFill/>
+            <a:prstDash val="solid"/>
+          </a:ln>
+        </p:spPr>
+        <p:txBody>
+          <a:bodyPr xmlns:a="http://schemas.openxmlformats.org/drawingml/2006/main"/>
+          <a:lstStyle xmlns:a="http://schemas.openxmlformats.org/drawingml/2006/main"/>
+          <a:p xmlns:a="http://schemas.openxmlformats.org/drawingml/2006/main">
+            <a:pPr>
+              <a:defRPr sz="1350" b="0">
+                <a:solidFill>
+                  <a:srgbClr val="555555"/>
+                </a:solidFill>
+              </a:defRPr>
+            </a:pPr>
+            <a:r>
+              <a:rPr sz="1350" b="0">
+                <a:solidFill>
+                  <a:srgbClr val="555555"/>
+                </a:solidFill>
+              </a:rPr>
+              <a:t>Checks whether richer trend and stress descriptors help once strategies are reopened.</a:t>
+            </a:r>
+          </a:p>
+        </p:txBody>
+      </p:sp>
+      <p:sp>
+        <p:nvSpPr>
+          <p:cNvPr id="12" name="">
+            <a:extLst xmlns:a="http://schemas.openxmlformats.org/drawingml/2006/main">
+              <a:ext uri="{FF2B5EF4-FFF2-40B4-BE49-F238E27FC236}">
+                <a16:creationId xmlns:a16="http://schemas.microsoft.com/office/drawing/2014/main" id="{5F1C5822-6FCB-4395-AD4E-A5447DBA1244}"/>
+              </a:ext>
+            </a:extLst>
+          </p:cNvPr>
+          <p:cNvSpPr>
+            <a:spLocks xmlns:a="http://schemas.openxmlformats.org/drawingml/2006/main" noGrp="1"/>
+          </p:cNvSpPr>
+          <p:nvPr/>
+        </p:nvSpPr>
+        <p:spPr>
+          <a:xfrm xmlns:a="http://schemas.openxmlformats.org/drawingml/2006/main">
+            <a:off x="7677150" y="2152650"/>
+            <a:ext cx="2914650" cy="2476500"/>
+          </a:xfrm>
+          <a:prstGeom xmlns:a="http://schemas.openxmlformats.org/drawingml/2006/main" prst="rect">
+            <a:avLst/>
+          </a:prstGeom>
+          <a:solidFill xmlns:a="http://schemas.openxmlformats.org/drawingml/2006/main">
+            <a:srgbClr val="EDEDED"/>
+          </a:solidFill>
+          <a:ln xmlns:a="http://schemas.openxmlformats.org/drawingml/2006/main" w="9525">
+            <a:solidFill>
+              <a:srgbClr val="B8BCC4"/>
+            </a:solidFill>
+            <a:prstDash val="solid"/>
+          </a:ln>
+        </p:spPr>
+      </p:sp>
+      <p:sp>
+        <p:nvSpPr>
+          <p:cNvPr id="13" name="">
+            <a:extLst xmlns:a="http://schemas.openxmlformats.org/drawingml/2006/main">
+              <a:ext uri="{FF2B5EF4-FFF2-40B4-BE49-F238E27FC236}">
+                <a16:creationId xmlns:a16="http://schemas.microsoft.com/office/drawing/2014/main" id="{81DBF7BB-A9A0-4EE3-93A8-69292F29A5CF}"/>
+              </a:ext>
+            </a:extLst>
+          </p:cNvPr>
+          <p:cNvSpPr>
+            <a:spLocks xmlns:a="http://schemas.openxmlformats.org/drawingml/2006/main" noGrp="1"/>
+          </p:cNvSpPr>
+          <p:nvPr/>
+        </p:nvSpPr>
+        <p:spPr>
+          <a:xfrm xmlns:a="http://schemas.openxmlformats.org/drawingml/2006/main">
+            <a:off x="7905750" y="2400300"/>
+            <a:ext cx="2343150" cy="285750"/>
+          </a:xfrm>
+          <a:prstGeom xmlns:a="http://schemas.openxmlformats.org/drawingml/2006/main" prst="rect">
+            <a:avLst/>
+          </a:prstGeom>
+          <a:noFill xmlns:a="http://schemas.openxmlformats.org/drawingml/2006/main"/>
+          <a:ln xmlns:a="http://schemas.openxmlformats.org/drawingml/2006/main" w="0">
+            <a:noFill/>
+            <a:prstDash val="solid"/>
+          </a:ln>
+        </p:spPr>
+        <p:txBody>
+          <a:bodyPr xmlns:a="http://schemas.openxmlformats.org/drawingml/2006/main"/>
+          <a:lstStyle xmlns:a="http://schemas.openxmlformats.org/drawingml/2006/main"/>
+          <a:p xmlns:a="http://schemas.openxmlformats.org/drawingml/2006/main">
+            <a:pPr>
+              <a:defRPr sz="1800" b="1">
+                <a:solidFill>
+                  <a:srgbClr val="000000"/>
+                </a:solidFill>
+              </a:defRPr>
+            </a:pPr>
+            <a:r>
+              <a:rPr sz="1800" b="1">
+                <a:solidFill>
+                  <a:srgbClr val="000000"/>
+                </a:solidFill>
+              </a:rPr>
+              <a:t>New diagnostic</a:t>
+            </a:r>
+          </a:p>
+        </p:txBody>
+      </p:sp>
+      <p:sp>
+        <p:nvSpPr>
+          <p:cNvPr id="14" name="">
+            <a:extLst xmlns:a="http://schemas.openxmlformats.org/drawingml/2006/main">
+              <a:ext uri="{FF2B5EF4-FFF2-40B4-BE49-F238E27FC236}">
+                <a16:creationId xmlns:a16="http://schemas.microsoft.com/office/drawing/2014/main" id="{CF2FFD9D-8D6E-4525-8DDB-59DB85C08C53}"/>
+              </a:ext>
+            </a:extLst>
+          </p:cNvPr>
+          <p:cNvSpPr>
+            <a:spLocks xmlns:a="http://schemas.openxmlformats.org/drawingml/2006/main" noGrp="1"/>
+          </p:cNvSpPr>
+          <p:nvPr/>
+        </p:nvSpPr>
+        <p:spPr>
+          <a:xfrm xmlns:a="http://schemas.openxmlformats.org/drawingml/2006/main">
+            <a:off x="7905750" y="2933700"/>
+            <a:ext cx="2343150" cy="285750"/>
+          </a:xfrm>
+          <a:prstGeom xmlns:a="http://schemas.openxmlformats.org/drawingml/2006/main" prst="rect">
+            <a:avLst/>
+          </a:prstGeom>
+          <a:noFill xmlns:a="http://schemas.openxmlformats.org/drawingml/2006/main"/>
+          <a:ln xmlns:a="http://schemas.openxmlformats.org/drawingml/2006/main" w="0">
+            <a:noFill/>
+            <a:prstDash val="solid"/>
+          </a:ln>
+        </p:spPr>
+        <p:txBody>
+          <a:bodyPr xmlns:a="http://schemas.openxmlformats.org/drawingml/2006/main"/>
+          <a:lstStyle xmlns:a="http://schemas.openxmlformats.org/drawingml/2006/main"/>
+          <a:p xmlns:a="http://schemas.openxmlformats.org/drawingml/2006/main">
+            <a:pPr>
+              <a:defRPr sz="1425" b="1">
+                <a:solidFill>
+                  <a:srgbClr val="FF6B35"/>
+                </a:solidFill>
+              </a:defRPr>
+            </a:pPr>
+            <a:r>
+              <a:rPr sz="1425" b="1">
+                <a:solidFill>
+                  <a:srgbClr val="FF6B35"/>
+                </a:solidFill>
+              </a:rPr>
+              <a:t>reversion_breakout_context</a:t>
+            </a:r>
+          </a:p>
+        </p:txBody>
+      </p:sp>
+      <p:sp>
+        <p:nvSpPr>
+          <p:cNvPr id="15" name="">
+            <a:extLst xmlns:a="http://schemas.openxmlformats.org/drawingml/2006/main">
+              <a:ext uri="{FF2B5EF4-FFF2-40B4-BE49-F238E27FC236}">
+                <a16:creationId xmlns:a16="http://schemas.microsoft.com/office/drawing/2014/main" id="{CA1BAA20-603D-45C4-A92B-80A1D8C65FFA}"/>
+              </a:ext>
+            </a:extLst>
+          </p:cNvPr>
+          <p:cNvSpPr>
+            <a:spLocks xmlns:a="http://schemas.openxmlformats.org/drawingml/2006/main" noGrp="1"/>
+          </p:cNvSpPr>
+          <p:nvPr/>
+        </p:nvSpPr>
+        <p:spPr>
+          <a:xfrm xmlns:a="http://schemas.openxmlformats.org/drawingml/2006/main">
+            <a:off x="7905750" y="3505200"/>
+            <a:ext cx="2266950" cy="819150"/>
+          </a:xfrm>
+          <a:prstGeom xmlns:a="http://schemas.openxmlformats.org/drawingml/2006/main" prst="rect">
+            <a:avLst/>
+          </a:prstGeom>
+          <a:noFill xmlns:a="http://schemas.openxmlformats.org/drawingml/2006/main"/>
+          <a:ln xmlns:a="http://schemas.openxmlformats.org/drawingml/2006/main" w="0">
+            <a:noFill/>
+            <a:prstDash val="solid"/>
+          </a:ln>
+        </p:spPr>
+        <p:txBody>
+          <a:bodyPr xmlns:a="http://schemas.openxmlformats.org/drawingml/2006/main"/>
+          <a:lstStyle xmlns:a="http://schemas.openxmlformats.org/drawingml/2006/main"/>
+          <a:p xmlns:a="http://schemas.openxmlformats.org/drawingml/2006/main">
+            <a:pPr>
+              <a:defRPr sz="1350" b="0">
+                <a:solidFill>
+                  <a:srgbClr val="555555"/>
+                </a:solidFill>
+              </a:defRPr>
+            </a:pPr>
+            <a:r>
+              <a:rPr sz="1350" b="0">
+                <a:solidFill>
+                  <a:srgbClr val="555555"/>
+                </a:solidFill>
+              </a:rPr>
+              <a:t>Adds range location, volatility compression, stretch, chop, impulse, and recovery cues for non-EMA families.</a:t>
+            </a:r>
+          </a:p>
+        </p:txBody>
+      </p:sp>
+      <p:sp>
+        <p:nvSpPr>
+          <p:cNvPr id="16" name="">
+            <a:extLst xmlns:a="http://schemas.openxmlformats.org/drawingml/2006/main">
+              <a:ext uri="{FF2B5EF4-FFF2-40B4-BE49-F238E27FC236}">
+                <a16:creationId xmlns:a16="http://schemas.microsoft.com/office/drawing/2014/main" id="{0EA4AA0D-A4A7-48DC-BA7E-EEE6EB09CF7D}"/>
+              </a:ext>
+            </a:extLst>
+          </p:cNvPr>
+          <p:cNvSpPr>
+            <a:spLocks xmlns:a="http://schemas.openxmlformats.org/drawingml/2006/main" noGrp="1"/>
+          </p:cNvSpPr>
+          <p:nvPr/>
+        </p:nvSpPr>
+        <p:spPr>
+          <a:xfrm xmlns:a="http://schemas.openxmlformats.org/drawingml/2006/main">
+            <a:off x="1104900" y="5467350"/>
+            <a:ext cx="9715500" cy="552450"/>
+          </a:xfrm>
+          <a:prstGeom xmlns:a="http://schemas.openxmlformats.org/drawingml/2006/main" prst="rect">
+            <a:avLst/>
+          </a:prstGeom>
+          <a:noFill xmlns:a="http://schemas.openxmlformats.org/drawingml/2006/main"/>
+          <a:ln xmlns:a="http://schemas.openxmlformats.org/drawingml/2006/main" w="0">
+            <a:noFill/>
+            <a:prstDash val="solid"/>
+          </a:ln>
+        </p:spPr>
+        <p:txBody>
+          <a:bodyPr xmlns:a="http://schemas.openxmlformats.org/drawingml/2006/main"/>
+          <a:lstStyle xmlns:a="http://schemas.openxmlformats.org/drawingml/2006/main"/>
+          <a:p xmlns:a="http://schemas.openxmlformats.org/drawingml/2006/main">
+            <a:pPr algn="ctr">
+              <a:defRPr sz="1650" b="1">
+                <a:solidFill>
+                  <a:srgbClr val="000000"/>
+                </a:solidFill>
+              </a:defRPr>
+            </a:pPr>
+            <a:r>
+              <a:rPr sz="1650" b="1">
+                <a:solidFill>
+                  <a:srgbClr val="000000"/>
+                </a:solidFill>
+              </a:rPr>
+              <a:t>If the reopened strategy pools do not help under these feature sets, the next problem is probably state timing/exposure design rather than missing mean-reversion or breakout families.</a:t>
+            </a:r>
+          </a:p>
+        </p:txBody>
+      </p:sp>
+      <p:sp>
+        <p:nvSpPr>
+          <p:cNvPr id="17" name="">
+            <a:extLst xmlns:a="http://schemas.openxmlformats.org/drawingml/2006/main">
+              <a:ext uri="{FF2B5EF4-FFF2-40B4-BE49-F238E27FC236}">
+                <a16:creationId xmlns:a16="http://schemas.microsoft.com/office/drawing/2014/main" id="{D2F03BBD-1D5B-434F-B67D-3741ABC2B5CC}"/>
+              </a:ext>
+            </a:extLst>
+          </p:cNvPr>
+          <p:cNvSpPr>
+            <a:spLocks xmlns:a="http://schemas.openxmlformats.org/drawingml/2006/main" noGrp="1"/>
+          </p:cNvSpPr>
+          <p:nvPr/>
+        </p:nvSpPr>
+        <p:spPr>
+          <a:xfrm xmlns:a="http://schemas.openxmlformats.org/drawingml/2006/main">
+            <a:off x="514350" y="6477000"/>
+            <a:ext cx="11163300" cy="209550"/>
+          </a:xfrm>
+          <a:prstGeom xmlns:a="http://schemas.openxmlformats.org/drawingml/2006/main" prst="rect">
+            <a:avLst/>
+          </a:prstGeom>
+          <a:noFill xmlns:a="http://schemas.openxmlformats.org/drawingml/2006/main"/>
+          <a:ln xmlns:a="http://schemas.openxmlformats.org/drawingml/2006/main" w="0">
+            <a:noFill/>
+            <a:prstDash val="solid"/>
+          </a:ln>
+        </p:spPr>
+        <p:txBody>
+          <a:bodyPr xmlns:a="http://schemas.openxmlformats.org/drawingml/2006/main"/>
+          <a:lstStyle xmlns:a="http://schemas.openxmlformats.org/drawingml/2006/main"/>
+          <a:p xmlns:a="http://schemas.openxmlformats.org/drawingml/2006/main">
+            <a:pPr>
+              <a:defRPr sz="900" b="0">
+                <a:solidFill>
+                  <a:srgbClr val="555555"/>
+                </a:solidFill>
+              </a:defRPr>
+            </a:pPr>
+            <a:r>
+              <a:rPr sz="900" b="0">
+                <a:solidFill>
+                  <a:srgbClr val="555555"/>
+                </a:solidFill>
+              </a:rPr>
+              <a:t>Research/inspection only. Not allocation evidence or live-advice behavior.</a:t>
+            </a:r>
+          </a:p>
+        </p:txBody>
+      </p:sp>
+    </p:spTree>
+    <p:extLst>
+      <p:ext uri="{BB962C8B-B14F-4D97-AF65-F5344CB8AC3E}">
+        <p14:creationId xmlns:p14="http://schemas.microsoft.com/office/powerpoint/2010/main" val="960238051"/>
       </p:ext>
     </p:extLst>
   </p:cSld>
@@ -3832,7 +5311,7 @@
           <p:cNvPr id="1" name="">
             <a:extLst xmlns:a="http://schemas.openxmlformats.org/drawingml/2006/main">
               <a:ext uri="{FF2B5EF4-FFF2-40B4-BE49-F238E27FC236}">
-                <a16:creationId xmlns:a16="http://schemas.microsoft.com/office/drawing/2014/main" id="{81393E2F-C0F2-42AA-B9FC-81DFF87E1F7C}"/>
+                <a16:creationId xmlns:a16="http://schemas.microsoft.com/office/drawing/2014/main" id="{C1C59D45-82FD-44D0-9142-512574ECA6CB}"/>
               </a:ext>
             </a:extLst>
           </p:cNvPr>
@@ -3882,7 +5361,7 @@
           <p:cNvPr id="2" name="">
             <a:extLst xmlns:a="http://schemas.openxmlformats.org/drawingml/2006/main">
               <a:ext uri="{FF2B5EF4-FFF2-40B4-BE49-F238E27FC236}">
-                <a16:creationId xmlns:a16="http://schemas.microsoft.com/office/drawing/2014/main" id="{6F0D3F80-940B-44B6-A046-E75880734B27}"/>
+                <a16:creationId xmlns:a16="http://schemas.microsoft.com/office/drawing/2014/main" id="{ECC8B7D8-6B45-4AA8-B543-A2016C0ECFB8}"/>
               </a:ext>
             </a:extLst>
           </p:cNvPr>
@@ -3932,7 +5411,7 @@
           <p:cNvPr id="3" name="">
             <a:extLst xmlns:a="http://schemas.openxmlformats.org/drawingml/2006/main">
               <a:ext uri="{FF2B5EF4-FFF2-40B4-BE49-F238E27FC236}">
-                <a16:creationId xmlns:a16="http://schemas.microsoft.com/office/drawing/2014/main" id="{4F811306-2B26-42B4-89F2-50FF6AA03EDD}"/>
+                <a16:creationId xmlns:a16="http://schemas.microsoft.com/office/drawing/2014/main" id="{F64A1D94-BEBC-4789-BFB8-7E9AFBD46527}"/>
               </a:ext>
             </a:extLst>
           </p:cNvPr>
@@ -3965,7 +5444,7 @@
           <p:cNvPr id="4" name="">
             <a:extLst xmlns:a="http://schemas.openxmlformats.org/drawingml/2006/main">
               <a:ext uri="{FF2B5EF4-FFF2-40B4-BE49-F238E27FC236}">
-                <a16:creationId xmlns:a16="http://schemas.microsoft.com/office/drawing/2014/main" id="{875F4214-B7F0-4A9B-9372-BEB20C307E98}"/>
+                <a16:creationId xmlns:a16="http://schemas.microsoft.com/office/drawing/2014/main" id="{00C96D9C-BC95-40DA-95B1-FF7D92CEFD78}"/>
               </a:ext>
             </a:extLst>
           </p:cNvPr>
@@ -4015,7 +5494,7 @@
           <p:cNvPr id="5" name="">
             <a:extLst xmlns:a="http://schemas.openxmlformats.org/drawingml/2006/main">
               <a:ext uri="{FF2B5EF4-FFF2-40B4-BE49-F238E27FC236}">
-                <a16:creationId xmlns:a16="http://schemas.microsoft.com/office/drawing/2014/main" id="{5CAC7CE0-B386-4975-A061-DFFB34112414}"/>
+                <a16:creationId xmlns:a16="http://schemas.microsoft.com/office/drawing/2014/main" id="{F3F0BA2D-0727-45EA-92F6-EB49082BBB45}"/>
               </a:ext>
             </a:extLst>
           </p:cNvPr>
@@ -4048,7 +5527,7 @@
           <p:cNvPr id="6" name="">
             <a:extLst xmlns:a="http://schemas.openxmlformats.org/drawingml/2006/main">
               <a:ext uri="{FF2B5EF4-FFF2-40B4-BE49-F238E27FC236}">
-                <a16:creationId xmlns:a16="http://schemas.microsoft.com/office/drawing/2014/main" id="{EBD380F0-F0C3-4B62-B3E4-B5743EE87639}"/>
+                <a16:creationId xmlns:a16="http://schemas.microsoft.com/office/drawing/2014/main" id="{36851A81-B8DD-4AF0-8F3E-93F18E319518}"/>
               </a:ext>
             </a:extLst>
           </p:cNvPr>
@@ -4081,7 +5560,7 @@
           <p:cNvPr id="7" name="">
             <a:extLst xmlns:a="http://schemas.openxmlformats.org/drawingml/2006/main">
               <a:ext uri="{FF2B5EF4-FFF2-40B4-BE49-F238E27FC236}">
-                <a16:creationId xmlns:a16="http://schemas.microsoft.com/office/drawing/2014/main" id="{196C9960-B395-4F0C-9033-5006E3D45B57}"/>
+                <a16:creationId xmlns:a16="http://schemas.microsoft.com/office/drawing/2014/main" id="{419AB7A9-437E-4B77-83BC-F44BF673483E}"/>
               </a:ext>
             </a:extLst>
           </p:cNvPr>
@@ -4131,7 +5610,7 @@
           <p:cNvPr id="8" name="">
             <a:extLst xmlns:a="http://schemas.openxmlformats.org/drawingml/2006/main">
               <a:ext uri="{FF2B5EF4-FFF2-40B4-BE49-F238E27FC236}">
-                <a16:creationId xmlns:a16="http://schemas.microsoft.com/office/drawing/2014/main" id="{FAD8328E-09BF-40AA-90C1-DA2DB7263C10}"/>
+                <a16:creationId xmlns:a16="http://schemas.microsoft.com/office/drawing/2014/main" id="{4BD3CE15-03D3-474B-837A-D230B4C0CBB3}"/>
               </a:ext>
             </a:extLst>
           </p:cNvPr>
@@ -4181,7 +5660,7 @@
           <p:cNvPr id="9" name="">
             <a:extLst xmlns:a="http://schemas.openxmlformats.org/drawingml/2006/main">
               <a:ext uri="{FF2B5EF4-FFF2-40B4-BE49-F238E27FC236}">
-                <a16:creationId xmlns:a16="http://schemas.microsoft.com/office/drawing/2014/main" id="{F2A7FC08-04E4-4833-B207-8E5CF70A7482}"/>
+                <a16:creationId xmlns:a16="http://schemas.microsoft.com/office/drawing/2014/main" id="{AEF8BFED-C696-4B80-ADE2-9006F17612AE}"/>
               </a:ext>
             </a:extLst>
           </p:cNvPr>
@@ -4231,7 +5710,7 @@
           <p:cNvPr id="10" name="">
             <a:extLst xmlns:a="http://schemas.openxmlformats.org/drawingml/2006/main">
               <a:ext uri="{FF2B5EF4-FFF2-40B4-BE49-F238E27FC236}">
-                <a16:creationId xmlns:a16="http://schemas.microsoft.com/office/drawing/2014/main" id="{F6CC7B82-9E3E-4DEB-97BE-FF3699B41FDC}"/>
+                <a16:creationId xmlns:a16="http://schemas.microsoft.com/office/drawing/2014/main" id="{5B3AC8CE-041E-4D43-A770-5B1BBF89266A}"/>
               </a:ext>
             </a:extLst>
           </p:cNvPr>
@@ -4243,7 +5722,7 @@
         <p:spPr>
           <a:xfrm xmlns:a="http://schemas.openxmlformats.org/drawingml/2006/main">
             <a:off x="6972300" y="3962400"/>
-            <a:ext cx="3333750" cy="495300"/>
+            <a:ext cx="3333750" cy="666750"/>
           </a:xfrm>
           <a:prstGeom xmlns:a="http://schemas.openxmlformats.org/drawingml/2006/main" prst="rect">
             <a:avLst/>
@@ -4271,7 +5750,7 @@
                   <a:srgbClr val="555555"/>
                 </a:solidFill>
               </a:rPr>
-              <a:t>Four independent quarterly TRAIN authorities stitched into a one-year OOS/accounting window.</a:t>
+              <a:t>Four independent quarterly TRAIN authorities replayed across one year, with open trades carrying until flat.</a:t>
             </a:r>
           </a:p>
         </p:txBody>
@@ -4281,7 +5760,7 @@
           <p:cNvPr id="11" name="">
             <a:extLst xmlns:a="http://schemas.openxmlformats.org/drawingml/2006/main">
               <a:ext uri="{FF2B5EF4-FFF2-40B4-BE49-F238E27FC236}">
-                <a16:creationId xmlns:a16="http://schemas.microsoft.com/office/drawing/2014/main" id="{CA70E6F7-BD63-47D7-9A70-65FF7169DBDC}"/>
+                <a16:creationId xmlns:a16="http://schemas.microsoft.com/office/drawing/2014/main" id="{29F6FCC2-E83A-4C06-A0D6-7023F6BFDB46}"/>
               </a:ext>
             </a:extLst>
           </p:cNvPr>
@@ -4321,7 +5800,7 @@
                   <a:srgbClr val="000000"/>
                 </a:solidFill>
               </a:rPr>
-              <a:t>This keeps the leakage boundary while making each condition easier to judge.</a:t>
+              <a:t>This keeps the leakage boundary and avoids artificial quarter-end trade resets.</a:t>
             </a:r>
           </a:p>
         </p:txBody>
@@ -4331,7 +5810,7 @@
           <p:cNvPr id="12" name="">
             <a:extLst xmlns:a="http://schemas.openxmlformats.org/drawingml/2006/main">
               <a:ext uri="{FF2B5EF4-FFF2-40B4-BE49-F238E27FC236}">
-                <a16:creationId xmlns:a16="http://schemas.microsoft.com/office/drawing/2014/main" id="{ED18C44A-F994-44A0-989B-7ECD49AE6D1F}"/>
+                <a16:creationId xmlns:a16="http://schemas.microsoft.com/office/drawing/2014/main" id="{83D301FD-31BF-46C2-B8A9-1FC2836F0262}"/>
               </a:ext>
             </a:extLst>
           </p:cNvPr>
@@ -4379,7 +5858,7 @@
     </p:spTree>
     <p:extLst>
       <p:ext uri="{BB962C8B-B14F-4D97-AF65-F5344CB8AC3E}">
-        <p14:creationId xmlns:p14="http://schemas.microsoft.com/office/powerpoint/2010/main" val="1640666280"/>
+        <p14:creationId xmlns:p14="http://schemas.microsoft.com/office/powerpoint/2010/main" val="1555691869"/>
       </p:ext>
     </p:extLst>
   </p:cSld>
@@ -4410,7 +5889,7 @@
           <p:cNvPr id="1" name="">
             <a:extLst xmlns:a="http://schemas.openxmlformats.org/drawingml/2006/main">
               <a:ext uri="{FF2B5EF4-FFF2-40B4-BE49-F238E27FC236}">
-                <a16:creationId xmlns:a16="http://schemas.microsoft.com/office/drawing/2014/main" id="{928C2F5B-6106-481A-9437-63E0E2893DC8}"/>
+                <a16:creationId xmlns:a16="http://schemas.microsoft.com/office/drawing/2014/main" id="{52D19D86-1D6F-438F-B302-DC611311E255}"/>
               </a:ext>
             </a:extLst>
           </p:cNvPr>
@@ -4460,7 +5939,7 @@
           <p:cNvPr id="2" name="">
             <a:extLst xmlns:a="http://schemas.openxmlformats.org/drawingml/2006/main">
               <a:ext uri="{FF2B5EF4-FFF2-40B4-BE49-F238E27FC236}">
-                <a16:creationId xmlns:a16="http://schemas.microsoft.com/office/drawing/2014/main" id="{25472333-49ED-497A-A276-6DFC8515961C}"/>
+                <a16:creationId xmlns:a16="http://schemas.microsoft.com/office/drawing/2014/main" id="{528AA793-7D43-411D-8FBC-2A8E48F295CB}"/>
               </a:ext>
             </a:extLst>
           </p:cNvPr>
@@ -4510,7 +5989,7 @@
           <p:cNvPr id="3" name="">
             <a:extLst xmlns:a="http://schemas.openxmlformats.org/drawingml/2006/main">
               <a:ext uri="{FF2B5EF4-FFF2-40B4-BE49-F238E27FC236}">
-                <a16:creationId xmlns:a16="http://schemas.microsoft.com/office/drawing/2014/main" id="{6858C69C-C852-453F-A810-972680199741}"/>
+                <a16:creationId xmlns:a16="http://schemas.microsoft.com/office/drawing/2014/main" id="{B192E757-0E4B-48BA-BB68-732725B8D1E2}"/>
               </a:ext>
             </a:extLst>
           </p:cNvPr>
@@ -4543,7 +6022,7 @@
           <p:cNvPr id="4" name="">
             <a:extLst xmlns:a="http://schemas.openxmlformats.org/drawingml/2006/main">
               <a:ext uri="{FF2B5EF4-FFF2-40B4-BE49-F238E27FC236}">
-                <a16:creationId xmlns:a16="http://schemas.microsoft.com/office/drawing/2014/main" id="{BBF95EAC-2436-4ADD-A86E-760E8E63A1AB}"/>
+                <a16:creationId xmlns:a16="http://schemas.microsoft.com/office/drawing/2014/main" id="{556D12D5-4DDB-4208-8EE0-5443C9294E93}"/>
               </a:ext>
             </a:extLst>
           </p:cNvPr>
@@ -4576,7 +6055,7 @@
           <p:cNvPr id="5" name="">
             <a:extLst xmlns:a="http://schemas.openxmlformats.org/drawingml/2006/main">
               <a:ext uri="{FF2B5EF4-FFF2-40B4-BE49-F238E27FC236}">
-                <a16:creationId xmlns:a16="http://schemas.microsoft.com/office/drawing/2014/main" id="{8E147E0F-3803-433E-BF84-D43A15DA4233}"/>
+                <a16:creationId xmlns:a16="http://schemas.microsoft.com/office/drawing/2014/main" id="{AE42E73D-8E07-43A4-933E-43E1F1F04533}"/>
               </a:ext>
             </a:extLst>
           </p:cNvPr>
@@ -4626,7 +6105,7 @@
           <p:cNvPr id="6" name="">
             <a:extLst xmlns:a="http://schemas.openxmlformats.org/drawingml/2006/main">
               <a:ext uri="{FF2B5EF4-FFF2-40B4-BE49-F238E27FC236}">
-                <a16:creationId xmlns:a16="http://schemas.microsoft.com/office/drawing/2014/main" id="{79CD7242-BCCB-472B-AE95-AD3FB526F42F}"/>
+                <a16:creationId xmlns:a16="http://schemas.microsoft.com/office/drawing/2014/main" id="{BD967D36-4619-47F1-87C0-D1D342B4352D}"/>
               </a:ext>
             </a:extLst>
           </p:cNvPr>
@@ -4676,7 +6155,7 @@
           <p:cNvPr id="7" name="">
             <a:extLst xmlns:a="http://schemas.openxmlformats.org/drawingml/2006/main">
               <a:ext uri="{FF2B5EF4-FFF2-40B4-BE49-F238E27FC236}">
-                <a16:creationId xmlns:a16="http://schemas.microsoft.com/office/drawing/2014/main" id="{0E7B934E-17A6-40BD-8605-6B8B167CED79}"/>
+                <a16:creationId xmlns:a16="http://schemas.microsoft.com/office/drawing/2014/main" id="{AE192B3C-6BE0-4693-AD27-E2B959BF6654}"/>
               </a:ext>
             </a:extLst>
           </p:cNvPr>
@@ -4709,7 +6188,7 @@
           <p:cNvPr id="8" name="">
             <a:extLst xmlns:a="http://schemas.openxmlformats.org/drawingml/2006/main">
               <a:ext uri="{FF2B5EF4-FFF2-40B4-BE49-F238E27FC236}">
-                <a16:creationId xmlns:a16="http://schemas.microsoft.com/office/drawing/2014/main" id="{027579A1-8A85-4737-94F2-9A34A2396B4C}"/>
+                <a16:creationId xmlns:a16="http://schemas.microsoft.com/office/drawing/2014/main" id="{AE2D0C5A-E41A-4014-8B6A-A677665E8104}"/>
               </a:ext>
             </a:extLst>
           </p:cNvPr>
@@ -4759,7 +6238,7 @@
           <p:cNvPr id="9" name="">
             <a:extLst xmlns:a="http://schemas.openxmlformats.org/drawingml/2006/main">
               <a:ext uri="{FF2B5EF4-FFF2-40B4-BE49-F238E27FC236}">
-                <a16:creationId xmlns:a16="http://schemas.microsoft.com/office/drawing/2014/main" id="{20FE4166-824A-4DD9-8EDF-8608533274D0}"/>
+                <a16:creationId xmlns:a16="http://schemas.microsoft.com/office/drawing/2014/main" id="{1E36B600-EDE1-4D35-8E3D-A0B6DEFA03EB}"/>
               </a:ext>
             </a:extLst>
           </p:cNvPr>
@@ -4809,7 +6288,7 @@
           <p:cNvPr id="10" name="">
             <a:extLst xmlns:a="http://schemas.openxmlformats.org/drawingml/2006/main">
               <a:ext uri="{FF2B5EF4-FFF2-40B4-BE49-F238E27FC236}">
-                <a16:creationId xmlns:a16="http://schemas.microsoft.com/office/drawing/2014/main" id="{DEFCA586-D551-450B-B4FC-757D89967D17}"/>
+                <a16:creationId xmlns:a16="http://schemas.microsoft.com/office/drawing/2014/main" id="{D04C022F-CEB2-447B-82B0-CBC59CA87048}"/>
               </a:ext>
             </a:extLst>
           </p:cNvPr>
@@ -4842,7 +6321,7 @@
           <p:cNvPr id="11" name="">
             <a:extLst xmlns:a="http://schemas.openxmlformats.org/drawingml/2006/main">
               <a:ext uri="{FF2B5EF4-FFF2-40B4-BE49-F238E27FC236}">
-                <a16:creationId xmlns:a16="http://schemas.microsoft.com/office/drawing/2014/main" id="{D1FD038F-E7FB-4EAF-AA11-18869B0B4D6E}"/>
+                <a16:creationId xmlns:a16="http://schemas.microsoft.com/office/drawing/2014/main" id="{3A26C2B4-B57B-4B7F-A367-E175B2291EAC}"/>
               </a:ext>
             </a:extLst>
           </p:cNvPr>
@@ -4892,7 +6371,7 @@
           <p:cNvPr id="12" name="">
             <a:extLst xmlns:a="http://schemas.openxmlformats.org/drawingml/2006/main">
               <a:ext uri="{FF2B5EF4-FFF2-40B4-BE49-F238E27FC236}">
-                <a16:creationId xmlns:a16="http://schemas.microsoft.com/office/drawing/2014/main" id="{E322B3B5-C3C8-433E-BA7F-D2AD9B942761}"/>
+                <a16:creationId xmlns:a16="http://schemas.microsoft.com/office/drawing/2014/main" id="{EBD01C38-DDFB-454D-938E-0767A5BF633F}"/>
               </a:ext>
             </a:extLst>
           </p:cNvPr>
@@ -4942,7 +6421,7 @@
           <p:cNvPr id="13" name="">
             <a:extLst xmlns:a="http://schemas.openxmlformats.org/drawingml/2006/main">
               <a:ext uri="{FF2B5EF4-FFF2-40B4-BE49-F238E27FC236}">
-                <a16:creationId xmlns:a16="http://schemas.microsoft.com/office/drawing/2014/main" id="{44025CDA-4C48-4FDC-94D3-4600C83109BA}"/>
+                <a16:creationId xmlns:a16="http://schemas.microsoft.com/office/drawing/2014/main" id="{B39DF746-37D5-49F5-80FA-DBFE51C9C13D}"/>
               </a:ext>
             </a:extLst>
           </p:cNvPr>
@@ -4975,7 +6454,7 @@
           <p:cNvPr id="14" name="">
             <a:extLst xmlns:a="http://schemas.openxmlformats.org/drawingml/2006/main">
               <a:ext uri="{FF2B5EF4-FFF2-40B4-BE49-F238E27FC236}">
-                <a16:creationId xmlns:a16="http://schemas.microsoft.com/office/drawing/2014/main" id="{94FD495D-5212-4750-95D3-0C2613A02F99}"/>
+                <a16:creationId xmlns:a16="http://schemas.microsoft.com/office/drawing/2014/main" id="{10902006-2088-46FB-BABC-3C4A28A9C6B4}"/>
               </a:ext>
             </a:extLst>
           </p:cNvPr>
@@ -5025,7 +6504,7 @@
           <p:cNvPr id="15" name="">
             <a:extLst xmlns:a="http://schemas.openxmlformats.org/drawingml/2006/main">
               <a:ext uri="{FF2B5EF4-FFF2-40B4-BE49-F238E27FC236}">
-                <a16:creationId xmlns:a16="http://schemas.microsoft.com/office/drawing/2014/main" id="{86417B73-912F-4383-AF6D-E908F78DD28A}"/>
+                <a16:creationId xmlns:a16="http://schemas.microsoft.com/office/drawing/2014/main" id="{8E51B26F-61FE-4E4E-A214-E8725664778C}"/>
               </a:ext>
             </a:extLst>
           </p:cNvPr>
@@ -5075,7 +6554,7 @@
           <p:cNvPr id="16" name="">
             <a:extLst xmlns:a="http://schemas.openxmlformats.org/drawingml/2006/main">
               <a:ext uri="{FF2B5EF4-FFF2-40B4-BE49-F238E27FC236}">
-                <a16:creationId xmlns:a16="http://schemas.microsoft.com/office/drawing/2014/main" id="{E42F7B7F-5E21-4CF2-A39C-B2C4AFA4DFD7}"/>
+                <a16:creationId xmlns:a16="http://schemas.microsoft.com/office/drawing/2014/main" id="{57D22C5E-2987-44C0-AB09-EAF185BBC4BD}"/>
               </a:ext>
             </a:extLst>
           </p:cNvPr>
@@ -5125,7 +6604,7 @@
           <p:cNvPr id="17" name="">
             <a:extLst xmlns:a="http://schemas.openxmlformats.org/drawingml/2006/main">
               <a:ext uri="{FF2B5EF4-FFF2-40B4-BE49-F238E27FC236}">
-                <a16:creationId xmlns:a16="http://schemas.microsoft.com/office/drawing/2014/main" id="{2035EB82-3DB3-4A66-9D81-D8C3988DF6AB}"/>
+                <a16:creationId xmlns:a16="http://schemas.microsoft.com/office/drawing/2014/main" id="{BB35D5EE-A863-443B-A79D-958672B0C05F}"/>
               </a:ext>
             </a:extLst>
           </p:cNvPr>
@@ -5173,7 +6652,7 @@
     </p:spTree>
     <p:extLst>
       <p:ext uri="{BB962C8B-B14F-4D97-AF65-F5344CB8AC3E}">
-        <p14:creationId xmlns:p14="http://schemas.microsoft.com/office/powerpoint/2010/main" val="53752317"/>
+        <p14:creationId xmlns:p14="http://schemas.microsoft.com/office/powerpoint/2010/main" val="106985917"/>
       </p:ext>
     </p:extLst>
   </p:cSld>
@@ -5204,7 +6683,7 @@
           <p:cNvPr id="1" name="">
             <a:extLst xmlns:a="http://schemas.openxmlformats.org/drawingml/2006/main">
               <a:ext uri="{FF2B5EF4-FFF2-40B4-BE49-F238E27FC236}">
-                <a16:creationId xmlns:a16="http://schemas.microsoft.com/office/drawing/2014/main" id="{6F3BDD6B-A679-49D7-B36B-5276DB452754}"/>
+                <a16:creationId xmlns:a16="http://schemas.microsoft.com/office/drawing/2014/main" id="{6B8F85C5-9D09-4D39-8392-7150B08F09D5}"/>
               </a:ext>
             </a:extLst>
           </p:cNvPr>
@@ -5254,7 +6733,7 @@
           <p:cNvPr id="2" name="">
             <a:extLst xmlns:a="http://schemas.openxmlformats.org/drawingml/2006/main">
               <a:ext uri="{FF2B5EF4-FFF2-40B4-BE49-F238E27FC236}">
-                <a16:creationId xmlns:a16="http://schemas.microsoft.com/office/drawing/2014/main" id="{E0996F70-2169-4F7B-8D71-88ED84E542A9}"/>
+                <a16:creationId xmlns:a16="http://schemas.microsoft.com/office/drawing/2014/main" id="{6C93A69E-6379-438A-9B02-8BAC66182188}"/>
               </a:ext>
             </a:extLst>
           </p:cNvPr>
@@ -5304,7 +6783,7 @@
           <p:cNvPr id="3" name="">
             <a:extLst xmlns:a="http://schemas.openxmlformats.org/drawingml/2006/main">
               <a:ext uri="{FF2B5EF4-FFF2-40B4-BE49-F238E27FC236}">
-                <a16:creationId xmlns:a16="http://schemas.microsoft.com/office/drawing/2014/main" id="{D82B7A55-B566-4423-AF23-7D9A08C095D6}"/>
+                <a16:creationId xmlns:a16="http://schemas.microsoft.com/office/drawing/2014/main" id="{136ACA8E-35CC-446F-864E-1FD669E3DE36}"/>
               </a:ext>
             </a:extLst>
           </p:cNvPr>
@@ -5337,7 +6816,7 @@
           <p:cNvPr id="4" name="">
             <a:extLst xmlns:a="http://schemas.openxmlformats.org/drawingml/2006/main">
               <a:ext uri="{FF2B5EF4-FFF2-40B4-BE49-F238E27FC236}">
-                <a16:creationId xmlns:a16="http://schemas.microsoft.com/office/drawing/2014/main" id="{E9720547-9D7B-46C1-B2B6-2A8E5964776F}"/>
+                <a16:creationId xmlns:a16="http://schemas.microsoft.com/office/drawing/2014/main" id="{684B19C6-526B-4987-A378-45B0E3A9A2F3}"/>
               </a:ext>
             </a:extLst>
           </p:cNvPr>
@@ -5370,7 +6849,7 @@
           <p:cNvPr id="5" name="">
             <a:extLst xmlns:a="http://schemas.openxmlformats.org/drawingml/2006/main">
               <a:ext uri="{FF2B5EF4-FFF2-40B4-BE49-F238E27FC236}">
-                <a16:creationId xmlns:a16="http://schemas.microsoft.com/office/drawing/2014/main" id="{30A3A783-8245-4B25-A3FF-00A2CBBD20DD}"/>
+                <a16:creationId xmlns:a16="http://schemas.microsoft.com/office/drawing/2014/main" id="{4B2950D6-F4F4-4156-8F34-D529AF5FA28E}"/>
               </a:ext>
             </a:extLst>
           </p:cNvPr>
@@ -5410,7 +6889,7 @@
                   <a:srgbClr val="000000"/>
                 </a:solidFill>
               </a:rPr>
-              <a:t>Best lane: Live + peers + risk anchors + Workhorse enriched + continuation. Mean return 81.7%, mean alpha -9.8 pp, exposure 64.6%.</a:t>
+              <a:t>Best lane: Live + peers + risk anchors + Workhorse enriched + continuation. Mean return 55.9%, mean alpha -35.6 pp, exposure 40.3%.</a:t>
             </a:r>
           </a:p>
         </p:txBody>
@@ -5420,7 +6899,7 @@
           <p:cNvPr id="6" name="">
             <a:extLst xmlns:a="http://schemas.openxmlformats.org/drawingml/2006/main">
               <a:ext uri="{FF2B5EF4-FFF2-40B4-BE49-F238E27FC236}">
-                <a16:creationId xmlns:a16="http://schemas.microsoft.com/office/drawing/2014/main" id="{473B8155-BBC3-4A19-9893-09CCD1084558}"/>
+                <a16:creationId xmlns:a16="http://schemas.microsoft.com/office/drawing/2014/main" id="{EB850792-14BB-4AEF-9160-726685D3193B}"/>
               </a:ext>
             </a:extLst>
           </p:cNvPr>
@@ -5453,7 +6932,7 @@
           <p:cNvPr id="7" name="">
             <a:extLst xmlns:a="http://schemas.openxmlformats.org/drawingml/2006/main">
               <a:ext uri="{FF2B5EF4-FFF2-40B4-BE49-F238E27FC236}">
-                <a16:creationId xmlns:a16="http://schemas.microsoft.com/office/drawing/2014/main" id="{1AD8DFE3-A655-4F32-BA13-F4EA0359557D}"/>
+                <a16:creationId xmlns:a16="http://schemas.microsoft.com/office/drawing/2014/main" id="{D61D05A2-FCD8-43D6-A803-7095564D984F}"/>
               </a:ext>
             </a:extLst>
           </p:cNvPr>
@@ -5503,7 +6982,7 @@
           <p:cNvPr id="8" name="">
             <a:extLst xmlns:a="http://schemas.openxmlformats.org/drawingml/2006/main">
               <a:ext uri="{FF2B5EF4-FFF2-40B4-BE49-F238E27FC236}">
-                <a16:creationId xmlns:a16="http://schemas.microsoft.com/office/drawing/2014/main" id="{54B3505B-4A48-4BAD-89F7-077128CE422A}"/>
+                <a16:creationId xmlns:a16="http://schemas.microsoft.com/office/drawing/2014/main" id="{D3395D69-3A0B-4088-B7CD-987228B13846}"/>
               </a:ext>
             </a:extLst>
           </p:cNvPr>
@@ -5536,7 +7015,7 @@
           <p:cNvPr id="9" name="">
             <a:extLst xmlns:a="http://schemas.openxmlformats.org/drawingml/2006/main">
               <a:ext uri="{FF2B5EF4-FFF2-40B4-BE49-F238E27FC236}">
-                <a16:creationId xmlns:a16="http://schemas.microsoft.com/office/drawing/2014/main" id="{15A72BAB-ECEE-4E77-A980-50F7BEC520B3}"/>
+                <a16:creationId xmlns:a16="http://schemas.microsoft.com/office/drawing/2014/main" id="{5013A2CE-0C9B-475E-8498-20BDD3BABF79}"/>
               </a:ext>
             </a:extLst>
           </p:cNvPr>
@@ -5586,7 +7065,7 @@
           <p:cNvPr id="10" name="">
             <a:extLst xmlns:a="http://schemas.openxmlformats.org/drawingml/2006/main">
               <a:ext uri="{FF2B5EF4-FFF2-40B4-BE49-F238E27FC236}">
-                <a16:creationId xmlns:a16="http://schemas.microsoft.com/office/drawing/2014/main" id="{8FFB623F-27EA-4C53-8642-BAB0DCC7F3AB}"/>
+                <a16:creationId xmlns:a16="http://schemas.microsoft.com/office/drawing/2014/main" id="{9AD85E15-718B-4A7E-BB34-B4EB6B312638}"/>
               </a:ext>
             </a:extLst>
           </p:cNvPr>
@@ -5619,7 +7098,7 @@
           <p:cNvPr id="11" name="">
             <a:extLst xmlns:a="http://schemas.openxmlformats.org/drawingml/2006/main">
               <a:ext uri="{FF2B5EF4-FFF2-40B4-BE49-F238E27FC236}">
-                <a16:creationId xmlns:a16="http://schemas.microsoft.com/office/drawing/2014/main" id="{42D72470-92D2-4F73-B867-88314133609A}"/>
+                <a16:creationId xmlns:a16="http://schemas.microsoft.com/office/drawing/2014/main" id="{143C48CF-FE2B-4EE0-AE62-3DD80864DACF}"/>
               </a:ext>
             </a:extLst>
           </p:cNvPr>
@@ -5669,7 +7148,7 @@
           <p:cNvPr id="12" name="">
             <a:extLst xmlns:a="http://schemas.openxmlformats.org/drawingml/2006/main">
               <a:ext uri="{FF2B5EF4-FFF2-40B4-BE49-F238E27FC236}">
-                <a16:creationId xmlns:a16="http://schemas.microsoft.com/office/drawing/2014/main" id="{23855D59-B894-471E-866A-F37ECB202C31}"/>
+                <a16:creationId xmlns:a16="http://schemas.microsoft.com/office/drawing/2014/main" id="{A9B70A9A-45F7-41F5-B9D6-DBF8F24FA75F}"/>
               </a:ext>
             </a:extLst>
           </p:cNvPr>
@@ -5702,7 +7181,7 @@
           <p:cNvPr id="13" name="">
             <a:extLst xmlns:a="http://schemas.openxmlformats.org/drawingml/2006/main">
               <a:ext uri="{FF2B5EF4-FFF2-40B4-BE49-F238E27FC236}">
-                <a16:creationId xmlns:a16="http://schemas.microsoft.com/office/drawing/2014/main" id="{3FD500B3-55E2-4FE5-815F-CE3C4935ADF9}"/>
+                <a16:creationId xmlns:a16="http://schemas.microsoft.com/office/drawing/2014/main" id="{47E4851C-09C3-448C-A8EE-20C0C2866076}"/>
               </a:ext>
             </a:extLst>
           </p:cNvPr>
@@ -5752,7 +7231,7 @@
           <p:cNvPr id="14" name="">
             <a:extLst xmlns:a="http://schemas.openxmlformats.org/drawingml/2006/main">
               <a:ext uri="{FF2B5EF4-FFF2-40B4-BE49-F238E27FC236}">
-                <a16:creationId xmlns:a16="http://schemas.microsoft.com/office/drawing/2014/main" id="{24B1C63A-B1C7-4001-824F-32D8A38390FD}"/>
+                <a16:creationId xmlns:a16="http://schemas.microsoft.com/office/drawing/2014/main" id="{29783D2E-B25E-40B7-A7A1-A100B4068CB7}"/>
               </a:ext>
             </a:extLst>
           </p:cNvPr>
@@ -5785,7 +7264,7 @@
           <p:cNvPr id="15" name="">
             <a:extLst xmlns:a="http://schemas.openxmlformats.org/drawingml/2006/main">
               <a:ext uri="{FF2B5EF4-FFF2-40B4-BE49-F238E27FC236}">
-                <a16:creationId xmlns:a16="http://schemas.microsoft.com/office/drawing/2014/main" id="{FFE02D70-3305-48C8-974C-A4201417D1B1}"/>
+                <a16:creationId xmlns:a16="http://schemas.microsoft.com/office/drawing/2014/main" id="{EC74134B-263A-4109-9AF5-034B391635FD}"/>
               </a:ext>
             </a:extLst>
           </p:cNvPr>
@@ -5835,7 +7314,7 @@
           <p:cNvPr id="16" name="">
             <a:extLst xmlns:a="http://schemas.openxmlformats.org/drawingml/2006/main">
               <a:ext uri="{FF2B5EF4-FFF2-40B4-BE49-F238E27FC236}">
-                <a16:creationId xmlns:a16="http://schemas.microsoft.com/office/drawing/2014/main" id="{293DFE90-CED7-4EB6-9E7C-B090480096DF}"/>
+                <a16:creationId xmlns:a16="http://schemas.microsoft.com/office/drawing/2014/main" id="{0F15E294-9D39-4DB5-8551-BA98E3F62FA7}"/>
               </a:ext>
             </a:extLst>
           </p:cNvPr>
@@ -5868,7 +7347,7 @@
           <p:cNvPr id="17" name="">
             <a:extLst xmlns:a="http://schemas.openxmlformats.org/drawingml/2006/main">
               <a:ext uri="{FF2B5EF4-FFF2-40B4-BE49-F238E27FC236}">
-                <a16:creationId xmlns:a16="http://schemas.microsoft.com/office/drawing/2014/main" id="{B168155B-7A5E-4364-8092-B0238838EB3D}"/>
+                <a16:creationId xmlns:a16="http://schemas.microsoft.com/office/drawing/2014/main" id="{FD4D1F35-87B7-47A9-8703-48D37CCECBBA}"/>
               </a:ext>
             </a:extLst>
           </p:cNvPr>
@@ -5918,7 +7397,7 @@
           <p:cNvPr id="18" name="">
             <a:extLst xmlns:a="http://schemas.openxmlformats.org/drawingml/2006/main">
               <a:ext uri="{FF2B5EF4-FFF2-40B4-BE49-F238E27FC236}">
-                <a16:creationId xmlns:a16="http://schemas.microsoft.com/office/drawing/2014/main" id="{A76DD0F3-5D67-4A70-B49E-05CC3FAFF317}"/>
+                <a16:creationId xmlns:a16="http://schemas.microsoft.com/office/drawing/2014/main" id="{C386923A-52B9-42FA-B8B2-0ED1431DCA77}"/>
               </a:ext>
             </a:extLst>
           </p:cNvPr>
@@ -5951,7 +7430,7 @@
           <p:cNvPr id="19" name="">
             <a:extLst xmlns:a="http://schemas.openxmlformats.org/drawingml/2006/main">
               <a:ext uri="{FF2B5EF4-FFF2-40B4-BE49-F238E27FC236}">
-                <a16:creationId xmlns:a16="http://schemas.microsoft.com/office/drawing/2014/main" id="{000AD51F-4072-4F89-B1E2-23D49B17CB40}"/>
+                <a16:creationId xmlns:a16="http://schemas.microsoft.com/office/drawing/2014/main" id="{F4E5A860-BD5A-426B-8535-126239D0D923}"/>
               </a:ext>
             </a:extLst>
           </p:cNvPr>
@@ -6001,7 +7480,7 @@
           <p:cNvPr id="20" name="">
             <a:extLst xmlns:a="http://schemas.openxmlformats.org/drawingml/2006/main">
               <a:ext uri="{FF2B5EF4-FFF2-40B4-BE49-F238E27FC236}">
-                <a16:creationId xmlns:a16="http://schemas.microsoft.com/office/drawing/2014/main" id="{8E45EC66-7715-4440-94E8-A458817FF304}"/>
+                <a16:creationId xmlns:a16="http://schemas.microsoft.com/office/drawing/2014/main" id="{6616498E-73A3-4EDB-B9ED-1B3779DA5C81}"/>
               </a:ext>
             </a:extLst>
           </p:cNvPr>
@@ -6034,7 +7513,7 @@
           <p:cNvPr id="21" name="">
             <a:extLst xmlns:a="http://schemas.openxmlformats.org/drawingml/2006/main">
               <a:ext uri="{FF2B5EF4-FFF2-40B4-BE49-F238E27FC236}">
-                <a16:creationId xmlns:a16="http://schemas.microsoft.com/office/drawing/2014/main" id="{1EDC6CE3-5E6A-4FFF-803D-CD930C76488B}"/>
+                <a16:creationId xmlns:a16="http://schemas.microsoft.com/office/drawing/2014/main" id="{F08A2618-8DBE-4698-9219-955D185ED005}"/>
               </a:ext>
             </a:extLst>
           </p:cNvPr>
@@ -6084,7 +7563,7 @@
           <p:cNvPr id="22" name="">
             <a:extLst xmlns:a="http://schemas.openxmlformats.org/drawingml/2006/main">
               <a:ext uri="{FF2B5EF4-FFF2-40B4-BE49-F238E27FC236}">
-                <a16:creationId xmlns:a16="http://schemas.microsoft.com/office/drawing/2014/main" id="{8AB05256-DCED-4A2E-BD17-59823FF7E81E}"/>
+                <a16:creationId xmlns:a16="http://schemas.microsoft.com/office/drawing/2014/main" id="{9B36FA75-C0CD-4173-B656-C7C7B620D77F}"/>
               </a:ext>
             </a:extLst>
           </p:cNvPr>
@@ -6117,7 +7596,7 @@
           <p:cNvPr id="23" name="">
             <a:extLst xmlns:a="http://schemas.openxmlformats.org/drawingml/2006/main">
               <a:ext uri="{FF2B5EF4-FFF2-40B4-BE49-F238E27FC236}">
-                <a16:creationId xmlns:a16="http://schemas.microsoft.com/office/drawing/2014/main" id="{914ACDEB-E7E0-48AA-A5F5-743D1BF27968}"/>
+                <a16:creationId xmlns:a16="http://schemas.microsoft.com/office/drawing/2014/main" id="{1EF76113-35E0-42BC-BEE7-408999BF6327}"/>
               </a:ext>
             </a:extLst>
           </p:cNvPr>
@@ -6167,7 +7646,7 @@
           <p:cNvPr id="24" name="">
             <a:extLst xmlns:a="http://schemas.openxmlformats.org/drawingml/2006/main">
               <a:ext uri="{FF2B5EF4-FFF2-40B4-BE49-F238E27FC236}">
-                <a16:creationId xmlns:a16="http://schemas.microsoft.com/office/drawing/2014/main" id="{3DF23471-4E2E-4EE2-9C12-3BAA57094712}"/>
+                <a16:creationId xmlns:a16="http://schemas.microsoft.com/office/drawing/2014/main" id="{1A9EE314-E813-4BBA-8063-C277B534C8A6}"/>
               </a:ext>
             </a:extLst>
           </p:cNvPr>
@@ -6200,7 +7679,7 @@
           <p:cNvPr id="25" name="">
             <a:extLst xmlns:a="http://schemas.openxmlformats.org/drawingml/2006/main">
               <a:ext uri="{FF2B5EF4-FFF2-40B4-BE49-F238E27FC236}">
-                <a16:creationId xmlns:a16="http://schemas.microsoft.com/office/drawing/2014/main" id="{08A28075-2E73-485C-8748-071275DD0EAF}"/>
+                <a16:creationId xmlns:a16="http://schemas.microsoft.com/office/drawing/2014/main" id="{817FAAE0-25E9-4BDE-A68B-0BAD9D550C93}"/>
               </a:ext>
             </a:extLst>
           </p:cNvPr>
@@ -6250,7 +7729,7 @@
           <p:cNvPr id="26" name="">
             <a:extLst xmlns:a="http://schemas.openxmlformats.org/drawingml/2006/main">
               <a:ext uri="{FF2B5EF4-FFF2-40B4-BE49-F238E27FC236}">
-                <a16:creationId xmlns:a16="http://schemas.microsoft.com/office/drawing/2014/main" id="{62D97AB4-50EB-4BDA-BC45-62AF11C8D566}"/>
+                <a16:creationId xmlns:a16="http://schemas.microsoft.com/office/drawing/2014/main" id="{7B18EAC4-AAE4-409D-951F-99BD8EA166DE}"/>
               </a:ext>
             </a:extLst>
           </p:cNvPr>
@@ -6283,7 +7762,7 @@
           <p:cNvPr id="27" name="">
             <a:extLst xmlns:a="http://schemas.openxmlformats.org/drawingml/2006/main">
               <a:ext uri="{FF2B5EF4-FFF2-40B4-BE49-F238E27FC236}">
-                <a16:creationId xmlns:a16="http://schemas.microsoft.com/office/drawing/2014/main" id="{DDB489FB-A854-40D1-9EE1-C761DD4E35CA}"/>
+                <a16:creationId xmlns:a16="http://schemas.microsoft.com/office/drawing/2014/main" id="{90B812D2-4030-43CF-9844-C003986CFFB9}"/>
               </a:ext>
             </a:extLst>
           </p:cNvPr>
@@ -6333,7 +7812,7 @@
           <p:cNvPr id="28" name="">
             <a:extLst xmlns:a="http://schemas.openxmlformats.org/drawingml/2006/main">
               <a:ext uri="{FF2B5EF4-FFF2-40B4-BE49-F238E27FC236}">
-                <a16:creationId xmlns:a16="http://schemas.microsoft.com/office/drawing/2014/main" id="{28241844-2186-46A2-8D5F-44741D72186C}"/>
+                <a16:creationId xmlns:a16="http://schemas.microsoft.com/office/drawing/2014/main" id="{A4614C68-97C7-4048-958B-E9CAB8193511}"/>
               </a:ext>
             </a:extLst>
           </p:cNvPr>
@@ -6366,7 +7845,7 @@
           <p:cNvPr id="29" name="">
             <a:extLst xmlns:a="http://schemas.openxmlformats.org/drawingml/2006/main">
               <a:ext uri="{FF2B5EF4-FFF2-40B4-BE49-F238E27FC236}">
-                <a16:creationId xmlns:a16="http://schemas.microsoft.com/office/drawing/2014/main" id="{C93CD4A4-4A69-4A85-9906-5F6C1BC9B661}"/>
+                <a16:creationId xmlns:a16="http://schemas.microsoft.com/office/drawing/2014/main" id="{723FB996-3122-46DF-A14B-C52C5E217823}"/>
               </a:ext>
             </a:extLst>
           </p:cNvPr>
@@ -6406,7 +7885,7 @@
                   <a:srgbClr val="000000"/>
                 </a:solidFill>
               </a:rPr>
-              <a:t>81.7%</a:t>
+              <a:t>55.9%</a:t>
             </a:r>
           </a:p>
         </p:txBody>
@@ -6416,7 +7895,7 @@
           <p:cNvPr id="30" name="">
             <a:extLst xmlns:a="http://schemas.openxmlformats.org/drawingml/2006/main">
               <a:ext uri="{FF2B5EF4-FFF2-40B4-BE49-F238E27FC236}">
-                <a16:creationId xmlns:a16="http://schemas.microsoft.com/office/drawing/2014/main" id="{79AF4122-831E-4327-833D-ECC1A82F00F0}"/>
+                <a16:creationId xmlns:a16="http://schemas.microsoft.com/office/drawing/2014/main" id="{E98CBC80-5F6C-40CF-B19A-661347E104DE}"/>
               </a:ext>
             </a:extLst>
           </p:cNvPr>
@@ -6449,7 +7928,7 @@
           <p:cNvPr id="31" name="">
             <a:extLst xmlns:a="http://schemas.openxmlformats.org/drawingml/2006/main">
               <a:ext uri="{FF2B5EF4-FFF2-40B4-BE49-F238E27FC236}">
-                <a16:creationId xmlns:a16="http://schemas.microsoft.com/office/drawing/2014/main" id="{76DADD2A-13D5-4026-ADA1-3D5AF6823B3F}"/>
+                <a16:creationId xmlns:a16="http://schemas.microsoft.com/office/drawing/2014/main" id="{66402564-5620-4E81-987C-87F6E6569650}"/>
               </a:ext>
             </a:extLst>
           </p:cNvPr>
@@ -6489,7 +7968,7 @@
                   <a:srgbClr val="B42318"/>
                 </a:solidFill>
               </a:rPr>
-              <a:t>-9.8 pp</a:t>
+              <a:t>-35.6 pp</a:t>
             </a:r>
           </a:p>
         </p:txBody>
@@ -6499,7 +7978,7 @@
           <p:cNvPr id="32" name="">
             <a:extLst xmlns:a="http://schemas.openxmlformats.org/drawingml/2006/main">
               <a:ext uri="{FF2B5EF4-FFF2-40B4-BE49-F238E27FC236}">
-                <a16:creationId xmlns:a16="http://schemas.microsoft.com/office/drawing/2014/main" id="{B1543588-7060-4D78-A9EE-270BD762A261}"/>
+                <a16:creationId xmlns:a16="http://schemas.microsoft.com/office/drawing/2014/main" id="{C0DCBCAB-02C6-4F17-A9C9-B1559BC00D09}"/>
               </a:ext>
             </a:extLst>
           </p:cNvPr>
@@ -6532,7 +8011,7 @@
           <p:cNvPr id="33" name="">
             <a:extLst xmlns:a="http://schemas.openxmlformats.org/drawingml/2006/main">
               <a:ext uri="{FF2B5EF4-FFF2-40B4-BE49-F238E27FC236}">
-                <a16:creationId xmlns:a16="http://schemas.microsoft.com/office/drawing/2014/main" id="{8F54EACA-58E8-4015-972B-BD8845D3CDBC}"/>
+                <a16:creationId xmlns:a16="http://schemas.microsoft.com/office/drawing/2014/main" id="{7BB1DA72-B7A2-445B-B642-46067B997972}"/>
               </a:ext>
             </a:extLst>
           </p:cNvPr>
@@ -6572,7 +8051,7 @@
                   <a:srgbClr val="000000"/>
                 </a:solidFill>
               </a:rPr>
-              <a:t>64.6%</a:t>
+              <a:t>40.3%</a:t>
             </a:r>
           </a:p>
         </p:txBody>
@@ -6582,7 +8061,7 @@
           <p:cNvPr id="34" name="">
             <a:extLst xmlns:a="http://schemas.openxmlformats.org/drawingml/2006/main">
               <a:ext uri="{FF2B5EF4-FFF2-40B4-BE49-F238E27FC236}">
-                <a16:creationId xmlns:a16="http://schemas.microsoft.com/office/drawing/2014/main" id="{54CA2047-5A72-4185-B251-919997DD689E}"/>
+                <a16:creationId xmlns:a16="http://schemas.microsoft.com/office/drawing/2014/main" id="{9096392D-3711-4EF8-93D1-7AC97BFE3446}"/>
               </a:ext>
             </a:extLst>
           </p:cNvPr>
@@ -6615,7 +8094,7 @@
           <p:cNvPr id="35" name="">
             <a:extLst xmlns:a="http://schemas.openxmlformats.org/drawingml/2006/main">
               <a:ext uri="{FF2B5EF4-FFF2-40B4-BE49-F238E27FC236}">
-                <a16:creationId xmlns:a16="http://schemas.microsoft.com/office/drawing/2014/main" id="{166C665B-EA3E-4D2F-A80D-2124EC91BF29}"/>
+                <a16:creationId xmlns:a16="http://schemas.microsoft.com/office/drawing/2014/main" id="{02096796-87DD-42FF-B539-AA607BA0C976}"/>
               </a:ext>
             </a:extLst>
           </p:cNvPr>
@@ -6655,7 +8134,7 @@
                   <a:srgbClr val="000000"/>
                 </a:solidFill>
               </a:rPr>
-              <a:t>Live basket only</a:t>
+              <a:t>Live + peers + risk anchors</a:t>
             </a:r>
           </a:p>
         </p:txBody>
@@ -6665,7 +8144,7 @@
           <p:cNvPr id="36" name="">
             <a:extLst xmlns:a="http://schemas.openxmlformats.org/drawingml/2006/main">
               <a:ext uri="{FF2B5EF4-FFF2-40B4-BE49-F238E27FC236}">
-                <a16:creationId xmlns:a16="http://schemas.microsoft.com/office/drawing/2014/main" id="{F7E60250-B16D-4916-A801-BED0B3255F04}"/>
+                <a16:creationId xmlns:a16="http://schemas.microsoft.com/office/drawing/2014/main" id="{8DCD422D-55E2-4C39-A3AA-425AE6D11B32}"/>
               </a:ext>
             </a:extLst>
           </p:cNvPr>
@@ -6698,7 +8177,7 @@
           <p:cNvPr id="37" name="">
             <a:extLst xmlns:a="http://schemas.openxmlformats.org/drawingml/2006/main">
               <a:ext uri="{FF2B5EF4-FFF2-40B4-BE49-F238E27FC236}">
-                <a16:creationId xmlns:a16="http://schemas.microsoft.com/office/drawing/2014/main" id="{D0FACB41-6A25-4E12-BC9C-35CF603CAB36}"/>
+                <a16:creationId xmlns:a16="http://schemas.microsoft.com/office/drawing/2014/main" id="{7866ED3F-42D3-41E1-AC9E-83C5B281BD25}"/>
               </a:ext>
             </a:extLst>
           </p:cNvPr>
@@ -6738,7 +8217,7 @@
                   <a:srgbClr val="000000"/>
                 </a:solidFill>
               </a:rPr>
-              <a:t>Market-relative momentum</a:t>
+              <a:t>Workhorse enriched</a:t>
             </a:r>
           </a:p>
         </p:txBody>
@@ -6748,7 +8227,7 @@
           <p:cNvPr id="38" name="">
             <a:extLst xmlns:a="http://schemas.openxmlformats.org/drawingml/2006/main">
               <a:ext uri="{FF2B5EF4-FFF2-40B4-BE49-F238E27FC236}">
-                <a16:creationId xmlns:a16="http://schemas.microsoft.com/office/drawing/2014/main" id="{980C6AC0-42B0-4E8D-BA1E-A0D5D0CB5F44}"/>
+                <a16:creationId xmlns:a16="http://schemas.microsoft.com/office/drawing/2014/main" id="{C33D09F1-1112-4D31-AAE1-20AF44B41FE3}"/>
               </a:ext>
             </a:extLst>
           </p:cNvPr>
@@ -6781,7 +8260,7 @@
           <p:cNvPr id="39" name="">
             <a:extLst xmlns:a="http://schemas.openxmlformats.org/drawingml/2006/main">
               <a:ext uri="{FF2B5EF4-FFF2-40B4-BE49-F238E27FC236}">
-                <a16:creationId xmlns:a16="http://schemas.microsoft.com/office/drawing/2014/main" id="{DF838DC0-C1C5-46CC-8418-E53F7275D5C8}"/>
+                <a16:creationId xmlns:a16="http://schemas.microsoft.com/office/drawing/2014/main" id="{D40D3463-3882-40CB-823C-FCE2FF3DBD5B}"/>
               </a:ext>
             </a:extLst>
           </p:cNvPr>
@@ -6821,7 +8300,7 @@
                   <a:srgbClr val="000000"/>
                 </a:solidFill>
               </a:rPr>
-              <a:t>continuation</a:t>
+              <a:t>fresh</a:t>
             </a:r>
           </a:p>
         </p:txBody>
@@ -6831,7 +8310,7 @@
           <p:cNvPr id="40" name="">
             <a:extLst xmlns:a="http://schemas.openxmlformats.org/drawingml/2006/main">
               <a:ext uri="{FF2B5EF4-FFF2-40B4-BE49-F238E27FC236}">
-                <a16:creationId xmlns:a16="http://schemas.microsoft.com/office/drawing/2014/main" id="{56484E92-7AA8-4194-AF53-662B9AA6E848}"/>
+                <a16:creationId xmlns:a16="http://schemas.microsoft.com/office/drawing/2014/main" id="{CEBAB944-B9D9-4E63-804E-96A826D8492B}"/>
               </a:ext>
             </a:extLst>
           </p:cNvPr>
@@ -6864,7 +8343,7 @@
           <p:cNvPr id="41" name="">
             <a:extLst xmlns:a="http://schemas.openxmlformats.org/drawingml/2006/main">
               <a:ext uri="{FF2B5EF4-FFF2-40B4-BE49-F238E27FC236}">
-                <a16:creationId xmlns:a16="http://schemas.microsoft.com/office/drawing/2014/main" id="{9F3BC5F4-7FD8-46AE-81C5-E20AAE657917}"/>
+                <a16:creationId xmlns:a16="http://schemas.microsoft.com/office/drawing/2014/main" id="{E5E0A8DC-8C4B-43F0-8CF1-9BFD2BE57933}"/>
               </a:ext>
             </a:extLst>
           </p:cNvPr>
@@ -6914,7 +8393,7 @@
           <p:cNvPr id="42" name="">
             <a:extLst xmlns:a="http://schemas.openxmlformats.org/drawingml/2006/main">
               <a:ext uri="{FF2B5EF4-FFF2-40B4-BE49-F238E27FC236}">
-                <a16:creationId xmlns:a16="http://schemas.microsoft.com/office/drawing/2014/main" id="{B42CAAFA-DECF-4882-BA9E-509F94225109}"/>
+                <a16:creationId xmlns:a16="http://schemas.microsoft.com/office/drawing/2014/main" id="{0E08EF5B-AA3B-4C2E-A08A-FF9921A89B79}"/>
               </a:ext>
             </a:extLst>
           </p:cNvPr>
@@ -6947,7 +8426,7 @@
           <p:cNvPr id="43" name="">
             <a:extLst xmlns:a="http://schemas.openxmlformats.org/drawingml/2006/main">
               <a:ext uri="{FF2B5EF4-FFF2-40B4-BE49-F238E27FC236}">
-                <a16:creationId xmlns:a16="http://schemas.microsoft.com/office/drawing/2014/main" id="{098B187A-36C4-4898-802F-BDB12F6A0DDE}"/>
+                <a16:creationId xmlns:a16="http://schemas.microsoft.com/office/drawing/2014/main" id="{C570F2D8-79F3-4879-BA3C-59FF56691590}"/>
               </a:ext>
             </a:extLst>
           </p:cNvPr>
@@ -6987,7 +8466,7 @@
                   <a:srgbClr val="000000"/>
                 </a:solidFill>
               </a:rPr>
-              <a:t>69.3%</a:t>
+              <a:t>38.6%</a:t>
             </a:r>
           </a:p>
         </p:txBody>
@@ -6997,7 +8476,7 @@
           <p:cNvPr id="44" name="">
             <a:extLst xmlns:a="http://schemas.openxmlformats.org/drawingml/2006/main">
               <a:ext uri="{FF2B5EF4-FFF2-40B4-BE49-F238E27FC236}">
-                <a16:creationId xmlns:a16="http://schemas.microsoft.com/office/drawing/2014/main" id="{DE2309D4-53E9-4A9B-988B-4C66E5A4C5E2}"/>
+                <a16:creationId xmlns:a16="http://schemas.microsoft.com/office/drawing/2014/main" id="{7737B45B-9E10-4F06-B2FA-2989D96CA150}"/>
               </a:ext>
             </a:extLst>
           </p:cNvPr>
@@ -7030,7 +8509,7 @@
           <p:cNvPr id="45" name="">
             <a:extLst xmlns:a="http://schemas.openxmlformats.org/drawingml/2006/main">
               <a:ext uri="{FF2B5EF4-FFF2-40B4-BE49-F238E27FC236}">
-                <a16:creationId xmlns:a16="http://schemas.microsoft.com/office/drawing/2014/main" id="{0468992A-3F41-4FE1-8F2B-76F65F031F0B}"/>
+                <a16:creationId xmlns:a16="http://schemas.microsoft.com/office/drawing/2014/main" id="{68F9BF02-818F-4384-B792-EF1BA0EF5787}"/>
               </a:ext>
             </a:extLst>
           </p:cNvPr>
@@ -7070,7 +8549,7 @@
                   <a:srgbClr val="B42318"/>
                 </a:solidFill>
               </a:rPr>
-              <a:t>-22.3 pp</a:t>
+              <a:t>-52.9 pp</a:t>
             </a:r>
           </a:p>
         </p:txBody>
@@ -7080,7 +8559,7 @@
           <p:cNvPr id="46" name="">
             <a:extLst xmlns:a="http://schemas.openxmlformats.org/drawingml/2006/main">
               <a:ext uri="{FF2B5EF4-FFF2-40B4-BE49-F238E27FC236}">
-                <a16:creationId xmlns:a16="http://schemas.microsoft.com/office/drawing/2014/main" id="{568AA997-180D-429B-93C3-2BEAAD79CC42}"/>
+                <a16:creationId xmlns:a16="http://schemas.microsoft.com/office/drawing/2014/main" id="{3A3AF95E-D2A0-4153-AF15-D1BEF1912DBE}"/>
               </a:ext>
             </a:extLst>
           </p:cNvPr>
@@ -7113,7 +8592,7 @@
           <p:cNvPr id="47" name="">
             <a:extLst xmlns:a="http://schemas.openxmlformats.org/drawingml/2006/main">
               <a:ext uri="{FF2B5EF4-FFF2-40B4-BE49-F238E27FC236}">
-                <a16:creationId xmlns:a16="http://schemas.microsoft.com/office/drawing/2014/main" id="{FEA717CB-F777-42D5-9433-FE9C1D6650D5}"/>
+                <a16:creationId xmlns:a16="http://schemas.microsoft.com/office/drawing/2014/main" id="{7DDEC44B-87E4-4E4A-A697-56463A2E5264}"/>
               </a:ext>
             </a:extLst>
           </p:cNvPr>
@@ -7153,7 +8632,7 @@
                   <a:srgbClr val="000000"/>
                 </a:solidFill>
               </a:rPr>
-              <a:t>57.1%</a:t>
+              <a:t>26.3%</a:t>
             </a:r>
           </a:p>
         </p:txBody>
@@ -7163,7 +8642,7 @@
           <p:cNvPr id="48" name="">
             <a:extLst xmlns:a="http://schemas.openxmlformats.org/drawingml/2006/main">
               <a:ext uri="{FF2B5EF4-FFF2-40B4-BE49-F238E27FC236}">
-                <a16:creationId xmlns:a16="http://schemas.microsoft.com/office/drawing/2014/main" id="{D5B5D771-1C6B-4342-9A2E-31C104DF6748}"/>
+                <a16:creationId xmlns:a16="http://schemas.microsoft.com/office/drawing/2014/main" id="{FDA633F0-753B-4F15-860A-350A13FE4700}"/>
               </a:ext>
             </a:extLst>
           </p:cNvPr>
@@ -7196,7 +8675,7 @@
           <p:cNvPr id="49" name="">
             <a:extLst xmlns:a="http://schemas.openxmlformats.org/drawingml/2006/main">
               <a:ext uri="{FF2B5EF4-FFF2-40B4-BE49-F238E27FC236}">
-                <a16:creationId xmlns:a16="http://schemas.microsoft.com/office/drawing/2014/main" id="{0F08DD35-E0E1-4103-BD6B-D9CDA6F3C833}"/>
+                <a16:creationId xmlns:a16="http://schemas.microsoft.com/office/drawing/2014/main" id="{C1655425-664F-4475-9F8C-F8E97934B4D9}"/>
               </a:ext>
             </a:extLst>
           </p:cNvPr>
@@ -7246,7 +8725,7 @@
           <p:cNvPr id="50" name="">
             <a:extLst xmlns:a="http://schemas.openxmlformats.org/drawingml/2006/main">
               <a:ext uri="{FF2B5EF4-FFF2-40B4-BE49-F238E27FC236}">
-                <a16:creationId xmlns:a16="http://schemas.microsoft.com/office/drawing/2014/main" id="{36158B16-BAEE-4631-BB94-7E6447279073}"/>
+                <a16:creationId xmlns:a16="http://schemas.microsoft.com/office/drawing/2014/main" id="{0007713E-2A37-42AA-88D9-3D6A98BD43AA}"/>
               </a:ext>
             </a:extLst>
           </p:cNvPr>
@@ -7279,7 +8758,7 @@
           <p:cNvPr id="51" name="">
             <a:extLst xmlns:a="http://schemas.openxmlformats.org/drawingml/2006/main">
               <a:ext uri="{FF2B5EF4-FFF2-40B4-BE49-F238E27FC236}">
-                <a16:creationId xmlns:a16="http://schemas.microsoft.com/office/drawing/2014/main" id="{7340C102-D83E-4BEF-843B-1E7DA4A0F26F}"/>
+                <a16:creationId xmlns:a16="http://schemas.microsoft.com/office/drawing/2014/main" id="{1F599373-36A1-4872-8588-A6C602BFA13B}"/>
               </a:ext>
             </a:extLst>
           </p:cNvPr>
@@ -7319,7 +8798,7 @@
                   <a:srgbClr val="000000"/>
                 </a:solidFill>
               </a:rPr>
-              <a:t>Workhorse enriched</a:t>
+              <a:t>Momentum plus stress</a:t>
             </a:r>
           </a:p>
         </p:txBody>
@@ -7329,7 +8808,7 @@
           <p:cNvPr id="52" name="">
             <a:extLst xmlns:a="http://schemas.openxmlformats.org/drawingml/2006/main">
               <a:ext uri="{FF2B5EF4-FFF2-40B4-BE49-F238E27FC236}">
-                <a16:creationId xmlns:a16="http://schemas.microsoft.com/office/drawing/2014/main" id="{1CC0A1C1-97FA-437D-A603-B57EA62BFD9C}"/>
+                <a16:creationId xmlns:a16="http://schemas.microsoft.com/office/drawing/2014/main" id="{D3807127-625B-44EE-ABED-7C8E4E23ABC1}"/>
               </a:ext>
             </a:extLst>
           </p:cNvPr>
@@ -7362,7 +8841,7 @@
           <p:cNvPr id="53" name="">
             <a:extLst xmlns:a="http://schemas.openxmlformats.org/drawingml/2006/main">
               <a:ext uri="{FF2B5EF4-FFF2-40B4-BE49-F238E27FC236}">
-                <a16:creationId xmlns:a16="http://schemas.microsoft.com/office/drawing/2014/main" id="{2151B15F-83E4-42B9-9D57-2EA3D4F63F38}"/>
+                <a16:creationId xmlns:a16="http://schemas.microsoft.com/office/drawing/2014/main" id="{2DCA4250-00EF-404C-A0CE-E03E25D2CC70}"/>
               </a:ext>
             </a:extLst>
           </p:cNvPr>
@@ -7402,7 +8881,7 @@
                   <a:srgbClr val="000000"/>
                 </a:solidFill>
               </a:rPr>
-              <a:t>fresh</a:t>
+              <a:t>continuation</a:t>
             </a:r>
           </a:p>
         </p:txBody>
@@ -7412,7 +8891,7 @@
           <p:cNvPr id="54" name="">
             <a:extLst xmlns:a="http://schemas.openxmlformats.org/drawingml/2006/main">
               <a:ext uri="{FF2B5EF4-FFF2-40B4-BE49-F238E27FC236}">
-                <a16:creationId xmlns:a16="http://schemas.microsoft.com/office/drawing/2014/main" id="{F9846874-BAB9-48F6-9183-F61CE2871EB3}"/>
+                <a16:creationId xmlns:a16="http://schemas.microsoft.com/office/drawing/2014/main" id="{FE710EB5-11E3-419E-A435-16F7F266C8D3}"/>
               </a:ext>
             </a:extLst>
           </p:cNvPr>
@@ -7445,7 +8924,7 @@
           <p:cNvPr id="55" name="">
             <a:extLst xmlns:a="http://schemas.openxmlformats.org/drawingml/2006/main">
               <a:ext uri="{FF2B5EF4-FFF2-40B4-BE49-F238E27FC236}">
-                <a16:creationId xmlns:a16="http://schemas.microsoft.com/office/drawing/2014/main" id="{54806900-AD7B-4DA1-BC3B-C0D111CFA3A3}"/>
+                <a16:creationId xmlns:a16="http://schemas.microsoft.com/office/drawing/2014/main" id="{6FFB7DCC-39A5-4823-A78B-2E44FCE1AFCB}"/>
               </a:ext>
             </a:extLst>
           </p:cNvPr>
@@ -7485,7 +8964,7 @@
                   <a:srgbClr val="000000"/>
                 </a:solidFill>
               </a:rPr>
-              <a:t>2/4</a:t>
+              <a:t>1/4</a:t>
             </a:r>
           </a:p>
         </p:txBody>
@@ -7495,7 +8974,7 @@
           <p:cNvPr id="56" name="">
             <a:extLst xmlns:a="http://schemas.openxmlformats.org/drawingml/2006/main">
               <a:ext uri="{FF2B5EF4-FFF2-40B4-BE49-F238E27FC236}">
-                <a16:creationId xmlns:a16="http://schemas.microsoft.com/office/drawing/2014/main" id="{EBF2D9BF-DE23-4882-89F8-73A776E5E04F}"/>
+                <a16:creationId xmlns:a16="http://schemas.microsoft.com/office/drawing/2014/main" id="{A8B45FE4-3194-455C-8D11-C1C88750A4DA}"/>
               </a:ext>
             </a:extLst>
           </p:cNvPr>
@@ -7528,7 +9007,7 @@
           <p:cNvPr id="57" name="">
             <a:extLst xmlns:a="http://schemas.openxmlformats.org/drawingml/2006/main">
               <a:ext uri="{FF2B5EF4-FFF2-40B4-BE49-F238E27FC236}">
-                <a16:creationId xmlns:a16="http://schemas.microsoft.com/office/drawing/2014/main" id="{9BCCF07C-9C57-4DF4-B9E8-D99DD9546BA8}"/>
+                <a16:creationId xmlns:a16="http://schemas.microsoft.com/office/drawing/2014/main" id="{AB84C99C-438F-4650-964E-CC8EE47E4A8F}"/>
               </a:ext>
             </a:extLst>
           </p:cNvPr>
@@ -7568,7 +9047,7 @@
                   <a:srgbClr val="000000"/>
                 </a:solidFill>
               </a:rPr>
-              <a:t>68.5%</a:t>
+              <a:t>33.1%</a:t>
             </a:r>
           </a:p>
         </p:txBody>
@@ -7578,7 +9057,7 @@
           <p:cNvPr id="58" name="">
             <a:extLst xmlns:a="http://schemas.openxmlformats.org/drawingml/2006/main">
               <a:ext uri="{FF2B5EF4-FFF2-40B4-BE49-F238E27FC236}">
-                <a16:creationId xmlns:a16="http://schemas.microsoft.com/office/drawing/2014/main" id="{64937464-94EA-4E6C-8860-45C681DBFB13}"/>
+                <a16:creationId xmlns:a16="http://schemas.microsoft.com/office/drawing/2014/main" id="{6C306BA1-1D9C-4A09-AFFA-2A488010A5DF}"/>
               </a:ext>
             </a:extLst>
           </p:cNvPr>
@@ -7611,7 +9090,7 @@
           <p:cNvPr id="59" name="">
             <a:extLst xmlns:a="http://schemas.openxmlformats.org/drawingml/2006/main">
               <a:ext uri="{FF2B5EF4-FFF2-40B4-BE49-F238E27FC236}">
-                <a16:creationId xmlns:a16="http://schemas.microsoft.com/office/drawing/2014/main" id="{4A42E738-E24D-47D4-9413-EBCF9531EE4F}"/>
+                <a16:creationId xmlns:a16="http://schemas.microsoft.com/office/drawing/2014/main" id="{B509C660-2DFE-47E5-8A53-878CA2AF5E61}"/>
               </a:ext>
             </a:extLst>
           </p:cNvPr>
@@ -7651,7 +9130,7 @@
                   <a:srgbClr val="B42318"/>
                 </a:solidFill>
               </a:rPr>
-              <a:t>-23.1 pp</a:t>
+              <a:t>-58.5 pp</a:t>
             </a:r>
           </a:p>
         </p:txBody>
@@ -7661,7 +9140,7 @@
           <p:cNvPr id="60" name="">
             <a:extLst xmlns:a="http://schemas.openxmlformats.org/drawingml/2006/main">
               <a:ext uri="{FF2B5EF4-FFF2-40B4-BE49-F238E27FC236}">
-                <a16:creationId xmlns:a16="http://schemas.microsoft.com/office/drawing/2014/main" id="{296880C2-0AA6-41AA-8EAD-8563F72C67D8}"/>
+                <a16:creationId xmlns:a16="http://schemas.microsoft.com/office/drawing/2014/main" id="{7797FC3D-2F62-4BA6-8DB0-8F91193326B6}"/>
               </a:ext>
             </a:extLst>
           </p:cNvPr>
@@ -7694,7 +9173,7 @@
           <p:cNvPr id="61" name="">
             <a:extLst xmlns:a="http://schemas.openxmlformats.org/drawingml/2006/main">
               <a:ext uri="{FF2B5EF4-FFF2-40B4-BE49-F238E27FC236}">
-                <a16:creationId xmlns:a16="http://schemas.microsoft.com/office/drawing/2014/main" id="{E3BA2CE1-CCFE-48BD-AAA3-A8D843118BAE}"/>
+                <a16:creationId xmlns:a16="http://schemas.microsoft.com/office/drawing/2014/main" id="{E97146DC-BBD9-4D41-949B-87E50D675F31}"/>
               </a:ext>
             </a:extLst>
           </p:cNvPr>
@@ -7734,7 +9213,7 @@
                   <a:srgbClr val="000000"/>
                 </a:solidFill>
               </a:rPr>
-              <a:t>49.2%</a:t>
+              <a:t>35.0%</a:t>
             </a:r>
           </a:p>
         </p:txBody>
@@ -7744,7 +9223,7 @@
           <p:cNvPr id="62" name="">
             <a:extLst xmlns:a="http://schemas.openxmlformats.org/drawingml/2006/main">
               <a:ext uri="{FF2B5EF4-FFF2-40B4-BE49-F238E27FC236}">
-                <a16:creationId xmlns:a16="http://schemas.microsoft.com/office/drawing/2014/main" id="{38CC2ABB-1E9F-4D12-A7B9-5B778A25F366}"/>
+                <a16:creationId xmlns:a16="http://schemas.microsoft.com/office/drawing/2014/main" id="{358C7435-ACBA-4348-B1A2-7471D0E66404}"/>
               </a:ext>
             </a:extLst>
           </p:cNvPr>
@@ -7777,7 +9256,7 @@
           <p:cNvPr id="63" name="">
             <a:extLst xmlns:a="http://schemas.openxmlformats.org/drawingml/2006/main">
               <a:ext uri="{FF2B5EF4-FFF2-40B4-BE49-F238E27FC236}">
-                <a16:creationId xmlns:a16="http://schemas.microsoft.com/office/drawing/2014/main" id="{9DBEC12E-83EB-47FA-A3D6-363753A25FAA}"/>
+                <a16:creationId xmlns:a16="http://schemas.microsoft.com/office/drawing/2014/main" id="{FA4301B9-F0D9-409D-BBCC-D8D0C34D615A}"/>
               </a:ext>
             </a:extLst>
           </p:cNvPr>
@@ -7817,7 +9296,7 @@
                   <a:srgbClr val="000000"/>
                 </a:solidFill>
               </a:rPr>
-              <a:t>Live + high-beta peers</a:t>
+              <a:t>Live basket only</a:t>
             </a:r>
           </a:p>
         </p:txBody>
@@ -7827,7 +9306,7 @@
           <p:cNvPr id="64" name="">
             <a:extLst xmlns:a="http://schemas.openxmlformats.org/drawingml/2006/main">
               <a:ext uri="{FF2B5EF4-FFF2-40B4-BE49-F238E27FC236}">
-                <a16:creationId xmlns:a16="http://schemas.microsoft.com/office/drawing/2014/main" id="{A78ECAA2-D863-450C-8DB3-C13E09F03F5A}"/>
+                <a16:creationId xmlns:a16="http://schemas.microsoft.com/office/drawing/2014/main" id="{C8C5AF10-C0B5-4571-8CB0-00A66C343D88}"/>
               </a:ext>
             </a:extLst>
           </p:cNvPr>
@@ -7860,7 +9339,7 @@
           <p:cNvPr id="65" name="">
             <a:extLst xmlns:a="http://schemas.openxmlformats.org/drawingml/2006/main">
               <a:ext uri="{FF2B5EF4-FFF2-40B4-BE49-F238E27FC236}">
-                <a16:creationId xmlns:a16="http://schemas.microsoft.com/office/drawing/2014/main" id="{F9BCA651-DC09-4AAD-BF50-B3F1615EA495}"/>
+                <a16:creationId xmlns:a16="http://schemas.microsoft.com/office/drawing/2014/main" id="{BE03BFD7-CA2D-46E7-B9A7-F0808D3CF79B}"/>
               </a:ext>
             </a:extLst>
           </p:cNvPr>
@@ -7900,7 +9379,7 @@
                   <a:srgbClr val="000000"/>
                 </a:solidFill>
               </a:rPr>
-              <a:t>Momentum plus stress</a:t>
+              <a:t>Momentum participation</a:t>
             </a:r>
           </a:p>
         </p:txBody>
@@ -7910,7 +9389,7 @@
           <p:cNvPr id="66" name="">
             <a:extLst xmlns:a="http://schemas.openxmlformats.org/drawingml/2006/main">
               <a:ext uri="{FF2B5EF4-FFF2-40B4-BE49-F238E27FC236}">
-                <a16:creationId xmlns:a16="http://schemas.microsoft.com/office/drawing/2014/main" id="{4637CEAF-EF63-4220-90EF-3D6407857D0C}"/>
+                <a16:creationId xmlns:a16="http://schemas.microsoft.com/office/drawing/2014/main" id="{F3D88FAC-B710-4214-ABC1-6F2B5BD8C9E4}"/>
               </a:ext>
             </a:extLst>
           </p:cNvPr>
@@ -7943,7 +9422,7 @@
           <p:cNvPr id="67" name="">
             <a:extLst xmlns:a="http://schemas.openxmlformats.org/drawingml/2006/main">
               <a:ext uri="{FF2B5EF4-FFF2-40B4-BE49-F238E27FC236}">
-                <a16:creationId xmlns:a16="http://schemas.microsoft.com/office/drawing/2014/main" id="{B0527532-EDA9-420D-A757-B293A336C24D}"/>
+                <a16:creationId xmlns:a16="http://schemas.microsoft.com/office/drawing/2014/main" id="{553FCD06-B490-480E-B8CC-D89F69437553}"/>
               </a:ext>
             </a:extLst>
           </p:cNvPr>
@@ -7993,7 +9472,7 @@
           <p:cNvPr id="68" name="">
             <a:extLst xmlns:a="http://schemas.openxmlformats.org/drawingml/2006/main">
               <a:ext uri="{FF2B5EF4-FFF2-40B4-BE49-F238E27FC236}">
-                <a16:creationId xmlns:a16="http://schemas.microsoft.com/office/drawing/2014/main" id="{22DD4F3F-EE58-4451-82B8-0060B0D00B86}"/>
+                <a16:creationId xmlns:a16="http://schemas.microsoft.com/office/drawing/2014/main" id="{F56E5861-4948-480E-8F07-A62C94747EC9}"/>
               </a:ext>
             </a:extLst>
           </p:cNvPr>
@@ -8026,7 +9505,7 @@
           <p:cNvPr id="69" name="">
             <a:extLst xmlns:a="http://schemas.openxmlformats.org/drawingml/2006/main">
               <a:ext uri="{FF2B5EF4-FFF2-40B4-BE49-F238E27FC236}">
-                <a16:creationId xmlns:a16="http://schemas.microsoft.com/office/drawing/2014/main" id="{FD8019DD-56FD-452C-BC06-98DD19888030}"/>
+                <a16:creationId xmlns:a16="http://schemas.microsoft.com/office/drawing/2014/main" id="{433F8892-A149-4F46-BC38-46691BD9E041}"/>
               </a:ext>
             </a:extLst>
           </p:cNvPr>
@@ -8076,7 +9555,7 @@
           <p:cNvPr id="70" name="">
             <a:extLst xmlns:a="http://schemas.openxmlformats.org/drawingml/2006/main">
               <a:ext uri="{FF2B5EF4-FFF2-40B4-BE49-F238E27FC236}">
-                <a16:creationId xmlns:a16="http://schemas.microsoft.com/office/drawing/2014/main" id="{053C2439-4A3B-43D6-874A-83F1E66D9E9A}"/>
+                <a16:creationId xmlns:a16="http://schemas.microsoft.com/office/drawing/2014/main" id="{3B68B7E5-4440-4F77-9583-812785910FE1}"/>
               </a:ext>
             </a:extLst>
           </p:cNvPr>
@@ -8109,7 +9588,7 @@
           <p:cNvPr id="71" name="">
             <a:extLst xmlns:a="http://schemas.openxmlformats.org/drawingml/2006/main">
               <a:ext uri="{FF2B5EF4-FFF2-40B4-BE49-F238E27FC236}">
-                <a16:creationId xmlns:a16="http://schemas.microsoft.com/office/drawing/2014/main" id="{05611BF1-BDEE-44BA-B849-46336C68D00C}"/>
+                <a16:creationId xmlns:a16="http://schemas.microsoft.com/office/drawing/2014/main" id="{40167947-70A2-4A80-BEB8-C20AAB49FA52}"/>
               </a:ext>
             </a:extLst>
           </p:cNvPr>
@@ -8149,7 +9628,7 @@
                   <a:srgbClr val="000000"/>
                 </a:solidFill>
               </a:rPr>
-              <a:t>64.1%</a:t>
+              <a:t>30.9%</a:t>
             </a:r>
           </a:p>
         </p:txBody>
@@ -8159,7 +9638,7 @@
           <p:cNvPr id="72" name="">
             <a:extLst xmlns:a="http://schemas.openxmlformats.org/drawingml/2006/main">
               <a:ext uri="{FF2B5EF4-FFF2-40B4-BE49-F238E27FC236}">
-                <a16:creationId xmlns:a16="http://schemas.microsoft.com/office/drawing/2014/main" id="{29D03FB4-087F-411D-8554-E95455543402}"/>
+                <a16:creationId xmlns:a16="http://schemas.microsoft.com/office/drawing/2014/main" id="{FE4C1AFB-3255-44FB-B741-B46CB581C2A6}"/>
               </a:ext>
             </a:extLst>
           </p:cNvPr>
@@ -8192,7 +9671,7 @@
           <p:cNvPr id="73" name="">
             <a:extLst xmlns:a="http://schemas.openxmlformats.org/drawingml/2006/main">
               <a:ext uri="{FF2B5EF4-FFF2-40B4-BE49-F238E27FC236}">
-                <a16:creationId xmlns:a16="http://schemas.microsoft.com/office/drawing/2014/main" id="{5F597093-85D7-4F57-8729-AB242A1FA33D}"/>
+                <a16:creationId xmlns:a16="http://schemas.microsoft.com/office/drawing/2014/main" id="{528D522F-3959-41B1-A52E-8B4454DBD98A}"/>
               </a:ext>
             </a:extLst>
           </p:cNvPr>
@@ -8232,7 +9711,7 @@
                   <a:srgbClr val="B42318"/>
                 </a:solidFill>
               </a:rPr>
-              <a:t>-27.4 pp</a:t>
+              <a:t>-60.6 pp</a:t>
             </a:r>
           </a:p>
         </p:txBody>
@@ -8242,7 +9721,7 @@
           <p:cNvPr id="74" name="">
             <a:extLst xmlns:a="http://schemas.openxmlformats.org/drawingml/2006/main">
               <a:ext uri="{FF2B5EF4-FFF2-40B4-BE49-F238E27FC236}">
-                <a16:creationId xmlns:a16="http://schemas.microsoft.com/office/drawing/2014/main" id="{D6053F65-EFB7-4CC8-A328-E87B4CF1AD08}"/>
+                <a16:creationId xmlns:a16="http://schemas.microsoft.com/office/drawing/2014/main" id="{7ED474BF-AB2C-45BB-921C-B49AC1A3D8E4}"/>
               </a:ext>
             </a:extLst>
           </p:cNvPr>
@@ -8275,7 +9754,7 @@
           <p:cNvPr id="75" name="">
             <a:extLst xmlns:a="http://schemas.openxmlformats.org/drawingml/2006/main">
               <a:ext uri="{FF2B5EF4-FFF2-40B4-BE49-F238E27FC236}">
-                <a16:creationId xmlns:a16="http://schemas.microsoft.com/office/drawing/2014/main" id="{482D1FE9-E430-4C74-AE22-5379DBDF7DF8}"/>
+                <a16:creationId xmlns:a16="http://schemas.microsoft.com/office/drawing/2014/main" id="{CCCED6FF-2BAE-49D8-AB09-6397B5917A90}"/>
               </a:ext>
             </a:extLst>
           </p:cNvPr>
@@ -8315,7 +9794,7 @@
                   <a:srgbClr val="000000"/>
                 </a:solidFill>
               </a:rPr>
-              <a:t>68.5%</a:t>
+              <a:t>39.3%</a:t>
             </a:r>
           </a:p>
         </p:txBody>
@@ -8325,7 +9804,7 @@
           <p:cNvPr id="76" name="">
             <a:extLst xmlns:a="http://schemas.openxmlformats.org/drawingml/2006/main">
               <a:ext uri="{FF2B5EF4-FFF2-40B4-BE49-F238E27FC236}">
-                <a16:creationId xmlns:a16="http://schemas.microsoft.com/office/drawing/2014/main" id="{03976F42-142E-487D-B5C4-D714C8C71FC7}"/>
+                <a16:creationId xmlns:a16="http://schemas.microsoft.com/office/drawing/2014/main" id="{D16809E4-3152-4B67-A078-3624D05B2B7A}"/>
               </a:ext>
             </a:extLst>
           </p:cNvPr>
@@ -8358,7 +9837,7 @@
           <p:cNvPr id="77" name="">
             <a:extLst xmlns:a="http://schemas.openxmlformats.org/drawingml/2006/main">
               <a:ext uri="{FF2B5EF4-FFF2-40B4-BE49-F238E27FC236}">
-                <a16:creationId xmlns:a16="http://schemas.microsoft.com/office/drawing/2014/main" id="{94FABCCE-68F6-4AC7-9D31-A05432AC846C}"/>
+                <a16:creationId xmlns:a16="http://schemas.microsoft.com/office/drawing/2014/main" id="{11AE70D1-5862-4F0A-9E1E-7830F787DCDC}"/>
               </a:ext>
             </a:extLst>
           </p:cNvPr>
@@ -8408,7 +9887,7 @@
           <p:cNvPr id="78" name="">
             <a:extLst xmlns:a="http://schemas.openxmlformats.org/drawingml/2006/main">
               <a:ext uri="{FF2B5EF4-FFF2-40B4-BE49-F238E27FC236}">
-                <a16:creationId xmlns:a16="http://schemas.microsoft.com/office/drawing/2014/main" id="{7145E35F-ED28-42DA-8823-91DFF2043C1D}"/>
+                <a16:creationId xmlns:a16="http://schemas.microsoft.com/office/drawing/2014/main" id="{1CC93FB8-AC91-47A7-9E8E-C7BF7D3B5A2E}"/>
               </a:ext>
             </a:extLst>
           </p:cNvPr>
@@ -8441,7 +9920,7 @@
           <p:cNvPr id="79" name="">
             <a:extLst xmlns:a="http://schemas.openxmlformats.org/drawingml/2006/main">
               <a:ext uri="{FF2B5EF4-FFF2-40B4-BE49-F238E27FC236}">
-                <a16:creationId xmlns:a16="http://schemas.microsoft.com/office/drawing/2014/main" id="{6F41A4F2-260D-4C74-B3C8-108D816CCD61}"/>
+                <a16:creationId xmlns:a16="http://schemas.microsoft.com/office/drawing/2014/main" id="{6EE82E63-369F-4169-AC54-2BDCFB019A32}"/>
               </a:ext>
             </a:extLst>
           </p:cNvPr>
@@ -8481,7 +9960,7 @@
                   <a:srgbClr val="000000"/>
                 </a:solidFill>
               </a:rPr>
-              <a:t>Market-relative momentum</a:t>
+              <a:t>Momentum plus stress</a:t>
             </a:r>
           </a:p>
         </p:txBody>
@@ -8491,7 +9970,7 @@
           <p:cNvPr id="80" name="">
             <a:extLst xmlns:a="http://schemas.openxmlformats.org/drawingml/2006/main">
               <a:ext uri="{FF2B5EF4-FFF2-40B4-BE49-F238E27FC236}">
-                <a16:creationId xmlns:a16="http://schemas.microsoft.com/office/drawing/2014/main" id="{1E88E74B-990A-4C89-9F72-620CCDB42A52}"/>
+                <a16:creationId xmlns:a16="http://schemas.microsoft.com/office/drawing/2014/main" id="{45F91FDB-03B5-43F4-913D-3D4B156CD36A}"/>
               </a:ext>
             </a:extLst>
           </p:cNvPr>
@@ -8524,7 +10003,7 @@
           <p:cNvPr id="81" name="">
             <a:extLst xmlns:a="http://schemas.openxmlformats.org/drawingml/2006/main">
               <a:ext uri="{FF2B5EF4-FFF2-40B4-BE49-F238E27FC236}">
-                <a16:creationId xmlns:a16="http://schemas.microsoft.com/office/drawing/2014/main" id="{43553375-7DF0-495C-928A-8A951968628D}"/>
+                <a16:creationId xmlns:a16="http://schemas.microsoft.com/office/drawing/2014/main" id="{581EBAD5-D970-45C2-9164-4EE92A61D5D1}"/>
               </a:ext>
             </a:extLst>
           </p:cNvPr>
@@ -8574,7 +10053,7 @@
           <p:cNvPr id="82" name="">
             <a:extLst xmlns:a="http://schemas.openxmlformats.org/drawingml/2006/main">
               <a:ext uri="{FF2B5EF4-FFF2-40B4-BE49-F238E27FC236}">
-                <a16:creationId xmlns:a16="http://schemas.microsoft.com/office/drawing/2014/main" id="{BD7D9BD1-2963-453C-8294-B828D0ABBCA1}"/>
+                <a16:creationId xmlns:a16="http://schemas.microsoft.com/office/drawing/2014/main" id="{DB209CC0-D4CD-40B2-96C5-8F678A7B3EF4}"/>
               </a:ext>
             </a:extLst>
           </p:cNvPr>
@@ -8607,7 +10086,7 @@
           <p:cNvPr id="83" name="">
             <a:extLst xmlns:a="http://schemas.openxmlformats.org/drawingml/2006/main">
               <a:ext uri="{FF2B5EF4-FFF2-40B4-BE49-F238E27FC236}">
-                <a16:creationId xmlns:a16="http://schemas.microsoft.com/office/drawing/2014/main" id="{975FD7C4-A76D-447A-B3C5-00CBA718DF76}"/>
+                <a16:creationId xmlns:a16="http://schemas.microsoft.com/office/drawing/2014/main" id="{3B7F00D3-07B8-4ADB-AEB1-C94732D00731}"/>
               </a:ext>
             </a:extLst>
           </p:cNvPr>
@@ -8657,7 +10136,7 @@
           <p:cNvPr id="84" name="">
             <a:extLst xmlns:a="http://schemas.openxmlformats.org/drawingml/2006/main">
               <a:ext uri="{FF2B5EF4-FFF2-40B4-BE49-F238E27FC236}">
-                <a16:creationId xmlns:a16="http://schemas.microsoft.com/office/drawing/2014/main" id="{09C58F38-53D8-4556-A79E-619601B53D46}"/>
+                <a16:creationId xmlns:a16="http://schemas.microsoft.com/office/drawing/2014/main" id="{2F1BD8F3-533E-44E8-91C4-42E21BA9CB50}"/>
               </a:ext>
             </a:extLst>
           </p:cNvPr>
@@ -8690,7 +10169,7 @@
           <p:cNvPr id="85" name="">
             <a:extLst xmlns:a="http://schemas.openxmlformats.org/drawingml/2006/main">
               <a:ext uri="{FF2B5EF4-FFF2-40B4-BE49-F238E27FC236}">
-                <a16:creationId xmlns:a16="http://schemas.microsoft.com/office/drawing/2014/main" id="{D8BC0279-434F-4387-8820-CA1EA56D9EA9}"/>
+                <a16:creationId xmlns:a16="http://schemas.microsoft.com/office/drawing/2014/main" id="{E9E8B8EE-F864-4B95-A020-665EE8541361}"/>
               </a:ext>
             </a:extLst>
           </p:cNvPr>
@@ -8730,7 +10209,7 @@
                   <a:srgbClr val="000000"/>
                 </a:solidFill>
               </a:rPr>
-              <a:t>61.8%</a:t>
+              <a:t>29.8%</a:t>
             </a:r>
           </a:p>
         </p:txBody>
@@ -8740,7 +10219,7 @@
           <p:cNvPr id="86" name="">
             <a:extLst xmlns:a="http://schemas.openxmlformats.org/drawingml/2006/main">
               <a:ext uri="{FF2B5EF4-FFF2-40B4-BE49-F238E27FC236}">
-                <a16:creationId xmlns:a16="http://schemas.microsoft.com/office/drawing/2014/main" id="{D9B65593-5DCB-4C0C-BD13-8E5E62C21A12}"/>
+                <a16:creationId xmlns:a16="http://schemas.microsoft.com/office/drawing/2014/main" id="{BF36E7FD-7E27-4EE4-A0C0-FBCAEEDA76B6}"/>
               </a:ext>
             </a:extLst>
           </p:cNvPr>
@@ -8773,7 +10252,7 @@
           <p:cNvPr id="87" name="">
             <a:extLst xmlns:a="http://schemas.openxmlformats.org/drawingml/2006/main">
               <a:ext uri="{FF2B5EF4-FFF2-40B4-BE49-F238E27FC236}">
-                <a16:creationId xmlns:a16="http://schemas.microsoft.com/office/drawing/2014/main" id="{682367DB-0B2D-4AA5-8210-EF13B4BD009B}"/>
+                <a16:creationId xmlns:a16="http://schemas.microsoft.com/office/drawing/2014/main" id="{9C9AA3C8-9CAD-4B85-8312-2FC6DB1114E9}"/>
               </a:ext>
             </a:extLst>
           </p:cNvPr>
@@ -8813,7 +10292,7 @@
                   <a:srgbClr val="B42318"/>
                 </a:solidFill>
               </a:rPr>
-              <a:t>-29.8 pp</a:t>
+              <a:t>-61.8 pp</a:t>
             </a:r>
           </a:p>
         </p:txBody>
@@ -8823,7 +10302,7 @@
           <p:cNvPr id="88" name="">
             <a:extLst xmlns:a="http://schemas.openxmlformats.org/drawingml/2006/main">
               <a:ext uri="{FF2B5EF4-FFF2-40B4-BE49-F238E27FC236}">
-                <a16:creationId xmlns:a16="http://schemas.microsoft.com/office/drawing/2014/main" id="{90A6A8C3-E67D-4A8B-B5FF-F5BB2DD75CB6}"/>
+                <a16:creationId xmlns:a16="http://schemas.microsoft.com/office/drawing/2014/main" id="{67BEFE44-884A-4F1B-9ED0-8389928D3D10}"/>
               </a:ext>
             </a:extLst>
           </p:cNvPr>
@@ -8856,7 +10335,7 @@
           <p:cNvPr id="89" name="">
             <a:extLst xmlns:a="http://schemas.openxmlformats.org/drawingml/2006/main">
               <a:ext uri="{FF2B5EF4-FFF2-40B4-BE49-F238E27FC236}">
-                <a16:creationId xmlns:a16="http://schemas.microsoft.com/office/drawing/2014/main" id="{58AD78AE-E469-491D-BB92-C61021DC4262}"/>
+                <a16:creationId xmlns:a16="http://schemas.microsoft.com/office/drawing/2014/main" id="{4A6DD308-2C68-433C-8F3A-A3B3350ADB21}"/>
               </a:ext>
             </a:extLst>
           </p:cNvPr>
@@ -8896,7 +10375,7 @@
                   <a:srgbClr val="000000"/>
                 </a:solidFill>
               </a:rPr>
-              <a:t>54.8%</a:t>
+              <a:t>34.0%</a:t>
             </a:r>
           </a:p>
         </p:txBody>
@@ -8906,7 +10385,7 @@
           <p:cNvPr id="90" name="">
             <a:extLst xmlns:a="http://schemas.openxmlformats.org/drawingml/2006/main">
               <a:ext uri="{FF2B5EF4-FFF2-40B4-BE49-F238E27FC236}">
-                <a16:creationId xmlns:a16="http://schemas.microsoft.com/office/drawing/2014/main" id="{4FA03C00-F97E-40F3-867D-38E80F104E97}"/>
+                <a16:creationId xmlns:a16="http://schemas.microsoft.com/office/drawing/2014/main" id="{39B4019A-2A8B-46A5-822F-1C321BE38D3D}"/>
               </a:ext>
             </a:extLst>
           </p:cNvPr>
@@ -8956,7 +10435,7 @@
           <p:cNvPr id="91" name="">
             <a:extLst xmlns:a="http://schemas.openxmlformats.org/drawingml/2006/main">
               <a:ext uri="{FF2B5EF4-FFF2-40B4-BE49-F238E27FC236}">
-                <a16:creationId xmlns:a16="http://schemas.microsoft.com/office/drawing/2014/main" id="{0E8D6904-531E-4F25-9E46-B8C0102C8070}"/>
+                <a16:creationId xmlns:a16="http://schemas.microsoft.com/office/drawing/2014/main" id="{31B4B882-5DA1-43DE-82B4-314CBCAFB357}"/>
               </a:ext>
             </a:extLst>
           </p:cNvPr>
@@ -9004,7 +10483,7 @@
     </p:spTree>
     <p:extLst>
       <p:ext uri="{BB962C8B-B14F-4D97-AF65-F5344CB8AC3E}">
-        <p14:creationId xmlns:p14="http://schemas.microsoft.com/office/powerpoint/2010/main" val="2137444666"/>
+        <p14:creationId xmlns:p14="http://schemas.microsoft.com/office/powerpoint/2010/main" val="1864194922"/>
       </p:ext>
     </p:extLst>
   </p:cSld>
@@ -9035,7 +10514,7 @@
           <p:cNvPr id="1" name="">
             <a:extLst xmlns:a="http://schemas.openxmlformats.org/drawingml/2006/main">
               <a:ext uri="{FF2B5EF4-FFF2-40B4-BE49-F238E27FC236}">
-                <a16:creationId xmlns:a16="http://schemas.microsoft.com/office/drawing/2014/main" id="{3B919C56-047B-4334-9FB6-D445099DB48C}"/>
+                <a16:creationId xmlns:a16="http://schemas.microsoft.com/office/drawing/2014/main" id="{A5356A93-56B2-44CB-95A7-4DF458ADF348}"/>
               </a:ext>
             </a:extLst>
           </p:cNvPr>
@@ -9085,7 +10564,7 @@
           <p:cNvPr id="2" name="">
             <a:extLst xmlns:a="http://schemas.openxmlformats.org/drawingml/2006/main">
               <a:ext uri="{FF2B5EF4-FFF2-40B4-BE49-F238E27FC236}">
-                <a16:creationId xmlns:a16="http://schemas.microsoft.com/office/drawing/2014/main" id="{C86684EA-4A0E-4317-B8B5-942ABD32FDEF}"/>
+                <a16:creationId xmlns:a16="http://schemas.microsoft.com/office/drawing/2014/main" id="{58CAB48A-3999-45F6-BB91-6E98013FAF8F}"/>
               </a:ext>
             </a:extLst>
           </p:cNvPr>
@@ -9125,7 +10604,7 @@
                   <a:srgbClr val="000000"/>
                 </a:solidFill>
               </a:rPr>
-              <a:t>The annual heatmap shows why this is not a simple feature-set win</a:t>
+              <a:t>Continuity replay corrected the optimistic annual readout</a:t>
             </a:r>
           </a:p>
         </p:txBody>
@@ -9135,7 +10614,7 @@
           <p:cNvPr id="3" name="">
             <a:extLst xmlns:a="http://schemas.openxmlformats.org/drawingml/2006/main">
               <a:ext uri="{FF2B5EF4-FFF2-40B4-BE49-F238E27FC236}">
-                <a16:creationId xmlns:a16="http://schemas.microsoft.com/office/drawing/2014/main" id="{9307679E-D8C6-4C5A-955B-025458B88954}"/>
+                <a16:creationId xmlns:a16="http://schemas.microsoft.com/office/drawing/2014/main" id="{F2E0E6CB-AE91-4934-9784-89B3A6233EED}"/>
               </a:ext>
             </a:extLst>
           </p:cNvPr>
@@ -9163,46 +10642,74 @@
           </a:ln>
         </p:spPr>
       </p:sp>
-      <p:pic>
-        <p:nvPicPr>
-          <p:cNvPr id="19" name=""/>
-          <p:cNvPicPr>
-            <a:picLocks xmlns:a="http://schemas.openxmlformats.org/drawingml/2006/main" noChangeAspect="1"/>
-          </p:cNvPicPr>
-          <p:nvPr/>
-        </p:nvPicPr>
-        <p:blipFill>
-          <a:blip xmlns:r="http://schemas.openxmlformats.org/officeDocument/2006/relationships" xmlns:a="http://schemas.openxmlformats.org/drawingml/2006/main" r:embed="R43ffe0550bc64783"/>
-          <a:stretch xmlns:a="http://schemas.openxmlformats.org/drawingml/2006/main"/>
-        </p:blipFill>
-        <p:spPr>
-          <a:xfrm xmlns:a="http://schemas.openxmlformats.org/drawingml/2006/main">
-            <a:off x="2659700" y="1695450"/>
-            <a:ext cx="2091049" cy="4629150"/>
-          </a:xfrm>
-          <a:prstGeom xmlns:a="http://schemas.openxmlformats.org/drawingml/2006/main" prst="rect">
-            <a:avLst/>
-          </a:prstGeom>
-        </p:spPr>
-      </p:pic>
+      <p:sp>
+        <p:nvSpPr>
+          <p:cNvPr id="4" name="">
+            <a:extLst xmlns:a="http://schemas.openxmlformats.org/drawingml/2006/main">
+              <a:ext uri="{FF2B5EF4-FFF2-40B4-BE49-F238E27FC236}">
+                <a16:creationId xmlns:a16="http://schemas.microsoft.com/office/drawing/2014/main" id="{DACD0FE0-AAE7-43FD-8F83-83FC2FEC82D5}"/>
+              </a:ext>
+            </a:extLst>
+          </p:cNvPr>
+          <p:cNvSpPr>
+            <a:spLocks xmlns:a="http://schemas.openxmlformats.org/drawingml/2006/main" noGrp="1"/>
+          </p:cNvSpPr>
+          <p:nvPr/>
+        </p:nvSpPr>
+        <p:spPr>
+          <a:xfrm xmlns:a="http://schemas.openxmlformats.org/drawingml/2006/main">
+            <a:off x="762000" y="1924050"/>
+            <a:ext cx="9906000" cy="742950"/>
+          </a:xfrm>
+          <a:prstGeom xmlns:a="http://schemas.openxmlformats.org/drawingml/2006/main" prst="rect">
+            <a:avLst/>
+          </a:prstGeom>
+          <a:noFill xmlns:a="http://schemas.openxmlformats.org/drawingml/2006/main"/>
+          <a:ln xmlns:a="http://schemas.openxmlformats.org/drawingml/2006/main" w="0">
+            <a:noFill/>
+            <a:prstDash val="solid"/>
+          </a:ln>
+        </p:spPr>
+        <p:txBody>
+          <a:bodyPr xmlns:a="http://schemas.openxmlformats.org/drawingml/2006/main"/>
+          <a:lstStyle xmlns:a="http://schemas.openxmlformats.org/drawingml/2006/main"/>
+          <a:p xmlns:a="http://schemas.openxmlformats.org/drawingml/2006/main">
+            <a:pPr>
+              <a:defRPr sz="1650" b="0">
+                <a:solidFill>
+                  <a:srgbClr val="000000"/>
+                </a:solidFill>
+              </a:defRPr>
+            </a:pPr>
+            <a:r>
+              <a:rPr sz="1650" b="0">
+                <a:solidFill>
+                  <a:srgbClr val="000000"/>
+                </a:solidFill>
+              </a:rPr>
+              <a:t>The independent-stitch packet was useful as a first annual inspection, but it could reset open trades at quarter boundaries. The continuity packet asks the live-like question: keep the quarterly authorities independent, but let open trades carry until flat.</a:t>
+            </a:r>
+          </a:p>
+        </p:txBody>
+      </p:sp>
       <p:sp>
         <p:nvSpPr>
           <p:cNvPr id="5" name="">
             <a:extLst xmlns:a="http://schemas.openxmlformats.org/drawingml/2006/main">
               <a:ext uri="{FF2B5EF4-FFF2-40B4-BE49-F238E27FC236}">
-                <a16:creationId xmlns:a16="http://schemas.microsoft.com/office/drawing/2014/main" id="{E920C58D-6702-48BC-A35D-A8D299527815}"/>
-              </a:ext>
-            </a:extLst>
-          </p:cNvPr>
-          <p:cNvSpPr>
-            <a:spLocks xmlns:a="http://schemas.openxmlformats.org/drawingml/2006/main" noGrp="1"/>
-          </p:cNvSpPr>
-          <p:nvPr/>
-        </p:nvSpPr>
-        <p:spPr>
-          <a:xfrm xmlns:a="http://schemas.openxmlformats.org/drawingml/2006/main">
-            <a:off x="7524750" y="2038350"/>
-            <a:ext cx="3429000" cy="2705100"/>
+                <a16:creationId xmlns:a16="http://schemas.microsoft.com/office/drawing/2014/main" id="{CF955838-C397-4473-A8A2-32058FA29D2D}"/>
+              </a:ext>
+            </a:extLst>
+          </p:cNvPr>
+          <p:cNvSpPr>
+            <a:spLocks xmlns:a="http://schemas.openxmlformats.org/drawingml/2006/main" noGrp="1"/>
+          </p:cNvSpPr>
+          <p:nvPr/>
+        </p:nvSpPr>
+        <p:spPr>
+          <a:xfrm xmlns:a="http://schemas.openxmlformats.org/drawingml/2006/main">
+            <a:off x="876300" y="3162300"/>
+            <a:ext cx="2190750" cy="1638300"/>
           </a:xfrm>
           <a:prstGeom xmlns:a="http://schemas.openxmlformats.org/drawingml/2006/main" prst="rect">
             <a:avLst/>
@@ -9223,47 +10730,47 @@
           <p:cNvPr id="6" name="">
             <a:extLst xmlns:a="http://schemas.openxmlformats.org/drawingml/2006/main">
               <a:ext uri="{FF2B5EF4-FFF2-40B4-BE49-F238E27FC236}">
-                <a16:creationId xmlns:a16="http://schemas.microsoft.com/office/drawing/2014/main" id="{9C53F7CA-8ED3-441D-8EB9-251334837A86}"/>
-              </a:ext>
-            </a:extLst>
-          </p:cNvPr>
-          <p:cNvSpPr>
-            <a:spLocks xmlns:a="http://schemas.openxmlformats.org/drawingml/2006/main" noGrp="1"/>
-          </p:cNvSpPr>
-          <p:nvPr/>
-        </p:nvSpPr>
-        <p:spPr>
-          <a:xfrm xmlns:a="http://schemas.openxmlformats.org/drawingml/2006/main">
-            <a:off x="7829550" y="2305050"/>
-            <a:ext cx="2476500" cy="304800"/>
-          </a:xfrm>
-          <a:prstGeom xmlns:a="http://schemas.openxmlformats.org/drawingml/2006/main" prst="rect">
-            <a:avLst/>
-          </a:prstGeom>
-          <a:noFill xmlns:a="http://schemas.openxmlformats.org/drawingml/2006/main"/>
-          <a:ln xmlns:a="http://schemas.openxmlformats.org/drawingml/2006/main" w="0">
-            <a:noFill/>
-            <a:prstDash val="solid"/>
-          </a:ln>
-        </p:spPr>
-        <p:txBody>
-          <a:bodyPr xmlns:a="http://schemas.openxmlformats.org/drawingml/2006/main"/>
-          <a:lstStyle xmlns:a="http://schemas.openxmlformats.org/drawingml/2006/main"/>
-          <a:p xmlns:a="http://schemas.openxmlformats.org/drawingml/2006/main">
-            <a:pPr>
-              <a:defRPr sz="1950" b="1">
-                <a:solidFill>
-                  <a:srgbClr val="000000"/>
-                </a:solidFill>
-              </a:defRPr>
-            </a:pPr>
-            <a:r>
-              <a:rPr sz="1950" b="1">
-                <a:solidFill>
-                  <a:srgbClr val="000000"/>
-                </a:solidFill>
-              </a:rPr>
-              <a:t>What matters</a:t>
+                <a16:creationId xmlns:a16="http://schemas.microsoft.com/office/drawing/2014/main" id="{C3AAAD3A-61DD-4A34-9D1C-61CDC6CAFDA2}"/>
+              </a:ext>
+            </a:extLst>
+          </p:cNvPr>
+          <p:cNvSpPr>
+            <a:spLocks xmlns:a="http://schemas.openxmlformats.org/drawingml/2006/main" noGrp="1"/>
+          </p:cNvSpPr>
+          <p:nvPr/>
+        </p:nvSpPr>
+        <p:spPr>
+          <a:xfrm xmlns:a="http://schemas.openxmlformats.org/drawingml/2006/main">
+            <a:off x="1047750" y="3371850"/>
+            <a:ext cx="1809750" cy="228600"/>
+          </a:xfrm>
+          <a:prstGeom xmlns:a="http://schemas.openxmlformats.org/drawingml/2006/main" prst="rect">
+            <a:avLst/>
+          </a:prstGeom>
+          <a:noFill xmlns:a="http://schemas.openxmlformats.org/drawingml/2006/main"/>
+          <a:ln xmlns:a="http://schemas.openxmlformats.org/drawingml/2006/main" w="0">
+            <a:noFill/>
+            <a:prstDash val="solid"/>
+          </a:ln>
+        </p:spPr>
+        <p:txBody>
+          <a:bodyPr xmlns:a="http://schemas.openxmlformats.org/drawingml/2006/main"/>
+          <a:lstStyle xmlns:a="http://schemas.openxmlformats.org/drawingml/2006/main"/>
+          <a:p xmlns:a="http://schemas.openxmlformats.org/drawingml/2006/main">
+            <a:pPr algn="ctr">
+              <a:defRPr sz="1350" b="1">
+                <a:solidFill>
+                  <a:srgbClr val="000000"/>
+                </a:solidFill>
+              </a:defRPr>
+            </a:pPr>
+            <a:r>
+              <a:rPr sz="1350" b="1">
+                <a:solidFill>
+                  <a:srgbClr val="000000"/>
+                </a:solidFill>
+              </a:rPr>
+              <a:t>Mean return</a:t>
             </a:r>
           </a:p>
         </p:txBody>
@@ -9273,29 +10780,179 @@
           <p:cNvPr id="7" name="">
             <a:extLst xmlns:a="http://schemas.openxmlformats.org/drawingml/2006/main">
               <a:ext uri="{FF2B5EF4-FFF2-40B4-BE49-F238E27FC236}">
-                <a16:creationId xmlns:a16="http://schemas.microsoft.com/office/drawing/2014/main" id="{FD8C3BF9-F133-4008-886C-119CB33E41B4}"/>
-              </a:ext>
-            </a:extLst>
-          </p:cNvPr>
-          <p:cNvSpPr>
-            <a:spLocks xmlns:a="http://schemas.openxmlformats.org/drawingml/2006/main" noGrp="1"/>
-          </p:cNvSpPr>
-          <p:nvPr/>
-        </p:nvSpPr>
-        <p:spPr>
-          <a:xfrm xmlns:a="http://schemas.openxmlformats.org/drawingml/2006/main">
-            <a:off x="7848600" y="2971800"/>
-            <a:ext cx="76200" cy="76200"/>
+                <a16:creationId xmlns:a16="http://schemas.microsoft.com/office/drawing/2014/main" id="{9E5A0CFA-4D90-41E1-AEA5-E6783EFB504D}"/>
+              </a:ext>
+            </a:extLst>
+          </p:cNvPr>
+          <p:cNvSpPr>
+            <a:spLocks xmlns:a="http://schemas.openxmlformats.org/drawingml/2006/main" noGrp="1"/>
+          </p:cNvSpPr>
+          <p:nvPr/>
+        </p:nvSpPr>
+        <p:spPr>
+          <a:xfrm xmlns:a="http://schemas.openxmlformats.org/drawingml/2006/main">
+            <a:off x="1047750" y="3733800"/>
+            <a:ext cx="1809750" cy="323850"/>
+          </a:xfrm>
+          <a:prstGeom xmlns:a="http://schemas.openxmlformats.org/drawingml/2006/main" prst="rect">
+            <a:avLst/>
+          </a:prstGeom>
+          <a:noFill xmlns:a="http://schemas.openxmlformats.org/drawingml/2006/main"/>
+          <a:ln xmlns:a="http://schemas.openxmlformats.org/drawingml/2006/main" w="0">
+            <a:noFill/>
+            <a:prstDash val="solid"/>
+          </a:ln>
+        </p:spPr>
+        <p:txBody>
+          <a:bodyPr xmlns:a="http://schemas.openxmlformats.org/drawingml/2006/main"/>
+          <a:lstStyle xmlns:a="http://schemas.openxmlformats.org/drawingml/2006/main"/>
+          <a:p xmlns:a="http://schemas.openxmlformats.org/drawingml/2006/main">
+            <a:pPr algn="ctr">
+              <a:defRPr sz="1875" b="0">
+                <a:solidFill>
+                  <a:srgbClr val="555555"/>
+                </a:solidFill>
+              </a:defRPr>
+            </a:pPr>
+            <a:r>
+              <a:rPr sz="1875" b="0">
+                <a:solidFill>
+                  <a:srgbClr val="555555"/>
+                </a:solidFill>
+              </a:rPr>
+              <a:t>81.7%</a:t>
+            </a:r>
+          </a:p>
+        </p:txBody>
+      </p:sp>
+      <p:sp>
+        <p:nvSpPr>
+          <p:cNvPr id="8" name="">
+            <a:extLst xmlns:a="http://schemas.openxmlformats.org/drawingml/2006/main">
+              <a:ext uri="{FF2B5EF4-FFF2-40B4-BE49-F238E27FC236}">
+                <a16:creationId xmlns:a16="http://schemas.microsoft.com/office/drawing/2014/main" id="{EAC98E04-C015-4430-80F2-6287E8181527}"/>
+              </a:ext>
+            </a:extLst>
+          </p:cNvPr>
+          <p:cNvSpPr>
+            <a:spLocks xmlns:a="http://schemas.openxmlformats.org/drawingml/2006/main" noGrp="1"/>
+          </p:cNvSpPr>
+          <p:nvPr/>
+        </p:nvSpPr>
+        <p:spPr>
+          <a:xfrm xmlns:a="http://schemas.openxmlformats.org/drawingml/2006/main">
+            <a:off x="1047750" y="4076700"/>
+            <a:ext cx="1809750" cy="228600"/>
+          </a:xfrm>
+          <a:prstGeom xmlns:a="http://schemas.openxmlformats.org/drawingml/2006/main" prst="rect">
+            <a:avLst/>
+          </a:prstGeom>
+          <a:noFill xmlns:a="http://schemas.openxmlformats.org/drawingml/2006/main"/>
+          <a:ln xmlns:a="http://schemas.openxmlformats.org/drawingml/2006/main" w="0">
+            <a:noFill/>
+            <a:prstDash val="solid"/>
+          </a:ln>
+        </p:spPr>
+        <p:txBody>
+          <a:bodyPr xmlns:a="http://schemas.openxmlformats.org/drawingml/2006/main"/>
+          <a:lstStyle xmlns:a="http://schemas.openxmlformats.org/drawingml/2006/main"/>
+          <a:p xmlns:a="http://schemas.openxmlformats.org/drawingml/2006/main">
+            <a:pPr algn="ctr">
+              <a:defRPr sz="975" b="0">
+                <a:solidFill>
+                  <a:srgbClr val="555555"/>
+                </a:solidFill>
+              </a:defRPr>
+            </a:pPr>
+            <a:r>
+              <a:rPr sz="975" b="0">
+                <a:solidFill>
+                  <a:srgbClr val="555555"/>
+                </a:solidFill>
+              </a:rPr>
+              <a:t>independent stitch</a:t>
+            </a:r>
+          </a:p>
+        </p:txBody>
+      </p:sp>
+      <p:sp>
+        <p:nvSpPr>
+          <p:cNvPr id="9" name="">
+            <a:extLst xmlns:a="http://schemas.openxmlformats.org/drawingml/2006/main">
+              <a:ext uri="{FF2B5EF4-FFF2-40B4-BE49-F238E27FC236}">
+                <a16:creationId xmlns:a16="http://schemas.microsoft.com/office/drawing/2014/main" id="{BD6DAACA-9F26-40EB-A8F9-268CD10D2239}"/>
+              </a:ext>
+            </a:extLst>
+          </p:cNvPr>
+          <p:cNvSpPr>
+            <a:spLocks xmlns:a="http://schemas.openxmlformats.org/drawingml/2006/main" noGrp="1"/>
+          </p:cNvSpPr>
+          <p:nvPr/>
+        </p:nvSpPr>
+        <p:spPr>
+          <a:xfrm xmlns:a="http://schemas.openxmlformats.org/drawingml/2006/main">
+            <a:off x="1047750" y="4400550"/>
+            <a:ext cx="1809750" cy="361950"/>
+          </a:xfrm>
+          <a:prstGeom xmlns:a="http://schemas.openxmlformats.org/drawingml/2006/main" prst="rect">
+            <a:avLst/>
+          </a:prstGeom>
+          <a:noFill xmlns:a="http://schemas.openxmlformats.org/drawingml/2006/main"/>
+          <a:ln xmlns:a="http://schemas.openxmlformats.org/drawingml/2006/main" w="0">
+            <a:noFill/>
+            <a:prstDash val="solid"/>
+          </a:ln>
+        </p:spPr>
+        <p:txBody>
+          <a:bodyPr xmlns:a="http://schemas.openxmlformats.org/drawingml/2006/main"/>
+          <a:lstStyle xmlns:a="http://schemas.openxmlformats.org/drawingml/2006/main"/>
+          <a:p xmlns:a="http://schemas.openxmlformats.org/drawingml/2006/main">
+            <a:pPr algn="ctr">
+              <a:defRPr sz="2175" b="1">
+                <a:solidFill>
+                  <a:srgbClr val="B42318"/>
+                </a:solidFill>
+              </a:defRPr>
+            </a:pPr>
+            <a:r>
+              <a:rPr sz="2175" b="1">
+                <a:solidFill>
+                  <a:srgbClr val="B42318"/>
+                </a:solidFill>
+              </a:rPr>
+              <a:t>55.9%</a:t>
+            </a:r>
+          </a:p>
+        </p:txBody>
+      </p:sp>
+      <p:sp>
+        <p:nvSpPr>
+          <p:cNvPr id="10" name="">
+            <a:extLst xmlns:a="http://schemas.openxmlformats.org/drawingml/2006/main">
+              <a:ext uri="{FF2B5EF4-FFF2-40B4-BE49-F238E27FC236}">
+                <a16:creationId xmlns:a16="http://schemas.microsoft.com/office/drawing/2014/main" id="{F2621716-5028-4494-BB5D-6AA3B233D33A}"/>
+              </a:ext>
+            </a:extLst>
+          </p:cNvPr>
+          <p:cNvSpPr>
+            <a:spLocks xmlns:a="http://schemas.openxmlformats.org/drawingml/2006/main" noGrp="1"/>
+          </p:cNvSpPr>
+          <p:nvPr/>
+        </p:nvSpPr>
+        <p:spPr>
+          <a:xfrm xmlns:a="http://schemas.openxmlformats.org/drawingml/2006/main">
+            <a:off x="3524250" y="3162300"/>
+            <a:ext cx="2190750" cy="1638300"/>
           </a:xfrm>
           <a:prstGeom xmlns:a="http://schemas.openxmlformats.org/drawingml/2006/main" prst="rect">
             <a:avLst/>
           </a:prstGeom>
           <a:solidFill xmlns:a="http://schemas.openxmlformats.org/drawingml/2006/main">
-            <a:srgbClr val="FF6B35"/>
+            <a:srgbClr val="EDEDED"/>
           </a:solidFill>
           <a:ln xmlns:a="http://schemas.openxmlformats.org/drawingml/2006/main" w="9525">
             <a:solidFill>
-              <a:srgbClr val="FF6B35"/>
+              <a:srgbClr val="B8BCC4"/>
             </a:solidFill>
             <a:prstDash val="solid"/>
           </a:ln>
@@ -9303,82 +10960,232 @@
       </p:sp>
       <p:sp>
         <p:nvSpPr>
-          <p:cNvPr id="8" name="">
-            <a:extLst xmlns:a="http://schemas.openxmlformats.org/drawingml/2006/main">
-              <a:ext uri="{FF2B5EF4-FFF2-40B4-BE49-F238E27FC236}">
-                <a16:creationId xmlns:a16="http://schemas.microsoft.com/office/drawing/2014/main" id="{756EFF2D-80E0-4734-9550-72A2A3895345}"/>
-              </a:ext>
-            </a:extLst>
-          </p:cNvPr>
-          <p:cNvSpPr>
-            <a:spLocks xmlns:a="http://schemas.openxmlformats.org/drawingml/2006/main" noGrp="1"/>
-          </p:cNvSpPr>
-          <p:nvPr/>
-        </p:nvSpPr>
-        <p:spPr>
-          <a:xfrm xmlns:a="http://schemas.openxmlformats.org/drawingml/2006/main">
-            <a:off x="8058150" y="2876550"/>
-            <a:ext cx="2514600" cy="476250"/>
-          </a:xfrm>
-          <a:prstGeom xmlns:a="http://schemas.openxmlformats.org/drawingml/2006/main" prst="rect">
-            <a:avLst/>
-          </a:prstGeom>
-          <a:noFill xmlns:a="http://schemas.openxmlformats.org/drawingml/2006/main"/>
-          <a:ln xmlns:a="http://schemas.openxmlformats.org/drawingml/2006/main" w="0">
-            <a:noFill/>
-            <a:prstDash val="solid"/>
-          </a:ln>
-        </p:spPr>
-        <p:txBody>
-          <a:bodyPr xmlns:a="http://schemas.openxmlformats.org/drawingml/2006/main"/>
-          <a:lstStyle xmlns:a="http://schemas.openxmlformats.org/drawingml/2006/main"/>
-          <a:p xmlns:a="http://schemas.openxmlformats.org/drawingml/2006/main">
-            <a:pPr>
-              <a:defRPr sz="1200" b="0">
-                <a:solidFill>
-                  <a:srgbClr val="000000"/>
-                </a:solidFill>
-              </a:defRPr>
-            </a:pPr>
-            <a:r>
-              <a:rPr sz="1200" b="0">
-                <a:solidFill>
-                  <a:srgbClr val="000000"/>
-                </a:solidFill>
-              </a:rPr>
-              <a:t>2020 remains punishing because basket hold returned about 227%.</a:t>
-            </a:r>
-          </a:p>
-        </p:txBody>
-      </p:sp>
-      <p:sp>
-        <p:nvSpPr>
-          <p:cNvPr id="9" name="">
-            <a:extLst xmlns:a="http://schemas.openxmlformats.org/drawingml/2006/main">
-              <a:ext uri="{FF2B5EF4-FFF2-40B4-BE49-F238E27FC236}">
-                <a16:creationId xmlns:a16="http://schemas.microsoft.com/office/drawing/2014/main" id="{501EA233-735D-41BF-836E-20994761D774}"/>
-              </a:ext>
-            </a:extLst>
-          </p:cNvPr>
-          <p:cNvSpPr>
-            <a:spLocks xmlns:a="http://schemas.openxmlformats.org/drawingml/2006/main" noGrp="1"/>
-          </p:cNvSpPr>
-          <p:nvPr/>
-        </p:nvSpPr>
-        <p:spPr>
-          <a:xfrm xmlns:a="http://schemas.openxmlformats.org/drawingml/2006/main">
-            <a:off x="7848600" y="3390900"/>
-            <a:ext cx="76200" cy="76200"/>
+          <p:cNvPr id="11" name="">
+            <a:extLst xmlns:a="http://schemas.openxmlformats.org/drawingml/2006/main">
+              <a:ext uri="{FF2B5EF4-FFF2-40B4-BE49-F238E27FC236}">
+                <a16:creationId xmlns:a16="http://schemas.microsoft.com/office/drawing/2014/main" id="{002B8D39-C5A5-456C-8550-F276002DF410}"/>
+              </a:ext>
+            </a:extLst>
+          </p:cNvPr>
+          <p:cNvSpPr>
+            <a:spLocks xmlns:a="http://schemas.openxmlformats.org/drawingml/2006/main" noGrp="1"/>
+          </p:cNvSpPr>
+          <p:nvPr/>
+        </p:nvSpPr>
+        <p:spPr>
+          <a:xfrm xmlns:a="http://schemas.openxmlformats.org/drawingml/2006/main">
+            <a:off x="3695700" y="3371850"/>
+            <a:ext cx="1809750" cy="228600"/>
+          </a:xfrm>
+          <a:prstGeom xmlns:a="http://schemas.openxmlformats.org/drawingml/2006/main" prst="rect">
+            <a:avLst/>
+          </a:prstGeom>
+          <a:noFill xmlns:a="http://schemas.openxmlformats.org/drawingml/2006/main"/>
+          <a:ln xmlns:a="http://schemas.openxmlformats.org/drawingml/2006/main" w="0">
+            <a:noFill/>
+            <a:prstDash val="solid"/>
+          </a:ln>
+        </p:spPr>
+        <p:txBody>
+          <a:bodyPr xmlns:a="http://schemas.openxmlformats.org/drawingml/2006/main"/>
+          <a:lstStyle xmlns:a="http://schemas.openxmlformats.org/drawingml/2006/main"/>
+          <a:p xmlns:a="http://schemas.openxmlformats.org/drawingml/2006/main">
+            <a:pPr algn="ctr">
+              <a:defRPr sz="1350" b="1">
+                <a:solidFill>
+                  <a:srgbClr val="000000"/>
+                </a:solidFill>
+              </a:defRPr>
+            </a:pPr>
+            <a:r>
+              <a:rPr sz="1350" b="1">
+                <a:solidFill>
+                  <a:srgbClr val="000000"/>
+                </a:solidFill>
+              </a:rPr>
+              <a:t>Alpha vs basket</a:t>
+            </a:r>
+          </a:p>
+        </p:txBody>
+      </p:sp>
+      <p:sp>
+        <p:nvSpPr>
+          <p:cNvPr id="12" name="">
+            <a:extLst xmlns:a="http://schemas.openxmlformats.org/drawingml/2006/main">
+              <a:ext uri="{FF2B5EF4-FFF2-40B4-BE49-F238E27FC236}">
+                <a16:creationId xmlns:a16="http://schemas.microsoft.com/office/drawing/2014/main" id="{9A160EDA-7075-49A2-8433-F8C79A7B00C2}"/>
+              </a:ext>
+            </a:extLst>
+          </p:cNvPr>
+          <p:cNvSpPr>
+            <a:spLocks xmlns:a="http://schemas.openxmlformats.org/drawingml/2006/main" noGrp="1"/>
+          </p:cNvSpPr>
+          <p:nvPr/>
+        </p:nvSpPr>
+        <p:spPr>
+          <a:xfrm xmlns:a="http://schemas.openxmlformats.org/drawingml/2006/main">
+            <a:off x="3695700" y="3733800"/>
+            <a:ext cx="1809750" cy="323850"/>
+          </a:xfrm>
+          <a:prstGeom xmlns:a="http://schemas.openxmlformats.org/drawingml/2006/main" prst="rect">
+            <a:avLst/>
+          </a:prstGeom>
+          <a:noFill xmlns:a="http://schemas.openxmlformats.org/drawingml/2006/main"/>
+          <a:ln xmlns:a="http://schemas.openxmlformats.org/drawingml/2006/main" w="0">
+            <a:noFill/>
+            <a:prstDash val="solid"/>
+          </a:ln>
+        </p:spPr>
+        <p:txBody>
+          <a:bodyPr xmlns:a="http://schemas.openxmlformats.org/drawingml/2006/main"/>
+          <a:lstStyle xmlns:a="http://schemas.openxmlformats.org/drawingml/2006/main"/>
+          <a:p xmlns:a="http://schemas.openxmlformats.org/drawingml/2006/main">
+            <a:pPr algn="ctr">
+              <a:defRPr sz="1875" b="0">
+                <a:solidFill>
+                  <a:srgbClr val="555555"/>
+                </a:solidFill>
+              </a:defRPr>
+            </a:pPr>
+            <a:r>
+              <a:rPr sz="1875" b="0">
+                <a:solidFill>
+                  <a:srgbClr val="555555"/>
+                </a:solidFill>
+              </a:rPr>
+              <a:t>-9.8 pp</a:t>
+            </a:r>
+          </a:p>
+        </p:txBody>
+      </p:sp>
+      <p:sp>
+        <p:nvSpPr>
+          <p:cNvPr id="13" name="">
+            <a:extLst xmlns:a="http://schemas.openxmlformats.org/drawingml/2006/main">
+              <a:ext uri="{FF2B5EF4-FFF2-40B4-BE49-F238E27FC236}">
+                <a16:creationId xmlns:a16="http://schemas.microsoft.com/office/drawing/2014/main" id="{75ED31A8-1F6A-4F82-A5BC-B810373AD23F}"/>
+              </a:ext>
+            </a:extLst>
+          </p:cNvPr>
+          <p:cNvSpPr>
+            <a:spLocks xmlns:a="http://schemas.openxmlformats.org/drawingml/2006/main" noGrp="1"/>
+          </p:cNvSpPr>
+          <p:nvPr/>
+        </p:nvSpPr>
+        <p:spPr>
+          <a:xfrm xmlns:a="http://schemas.openxmlformats.org/drawingml/2006/main">
+            <a:off x="3695700" y="4076700"/>
+            <a:ext cx="1809750" cy="228600"/>
+          </a:xfrm>
+          <a:prstGeom xmlns:a="http://schemas.openxmlformats.org/drawingml/2006/main" prst="rect">
+            <a:avLst/>
+          </a:prstGeom>
+          <a:noFill xmlns:a="http://schemas.openxmlformats.org/drawingml/2006/main"/>
+          <a:ln xmlns:a="http://schemas.openxmlformats.org/drawingml/2006/main" w="0">
+            <a:noFill/>
+            <a:prstDash val="solid"/>
+          </a:ln>
+        </p:spPr>
+        <p:txBody>
+          <a:bodyPr xmlns:a="http://schemas.openxmlformats.org/drawingml/2006/main"/>
+          <a:lstStyle xmlns:a="http://schemas.openxmlformats.org/drawingml/2006/main"/>
+          <a:p xmlns:a="http://schemas.openxmlformats.org/drawingml/2006/main">
+            <a:pPr algn="ctr">
+              <a:defRPr sz="975" b="0">
+                <a:solidFill>
+                  <a:srgbClr val="555555"/>
+                </a:solidFill>
+              </a:defRPr>
+            </a:pPr>
+            <a:r>
+              <a:rPr sz="975" b="0">
+                <a:solidFill>
+                  <a:srgbClr val="555555"/>
+                </a:solidFill>
+              </a:rPr>
+              <a:t>independent stitch</a:t>
+            </a:r>
+          </a:p>
+        </p:txBody>
+      </p:sp>
+      <p:sp>
+        <p:nvSpPr>
+          <p:cNvPr id="14" name="">
+            <a:extLst xmlns:a="http://schemas.openxmlformats.org/drawingml/2006/main">
+              <a:ext uri="{FF2B5EF4-FFF2-40B4-BE49-F238E27FC236}">
+                <a16:creationId xmlns:a16="http://schemas.microsoft.com/office/drawing/2014/main" id="{CDD1D59B-72AD-4544-80F8-B3D809089F9D}"/>
+              </a:ext>
+            </a:extLst>
+          </p:cNvPr>
+          <p:cNvSpPr>
+            <a:spLocks xmlns:a="http://schemas.openxmlformats.org/drawingml/2006/main" noGrp="1"/>
+          </p:cNvSpPr>
+          <p:nvPr/>
+        </p:nvSpPr>
+        <p:spPr>
+          <a:xfrm xmlns:a="http://schemas.openxmlformats.org/drawingml/2006/main">
+            <a:off x="3695700" y="4400550"/>
+            <a:ext cx="1809750" cy="361950"/>
+          </a:xfrm>
+          <a:prstGeom xmlns:a="http://schemas.openxmlformats.org/drawingml/2006/main" prst="rect">
+            <a:avLst/>
+          </a:prstGeom>
+          <a:noFill xmlns:a="http://schemas.openxmlformats.org/drawingml/2006/main"/>
+          <a:ln xmlns:a="http://schemas.openxmlformats.org/drawingml/2006/main" w="0">
+            <a:noFill/>
+            <a:prstDash val="solid"/>
+          </a:ln>
+        </p:spPr>
+        <p:txBody>
+          <a:bodyPr xmlns:a="http://schemas.openxmlformats.org/drawingml/2006/main"/>
+          <a:lstStyle xmlns:a="http://schemas.openxmlformats.org/drawingml/2006/main"/>
+          <a:p xmlns:a="http://schemas.openxmlformats.org/drawingml/2006/main">
+            <a:pPr algn="ctr">
+              <a:defRPr sz="2175" b="1">
+                <a:solidFill>
+                  <a:srgbClr val="B42318"/>
+                </a:solidFill>
+              </a:defRPr>
+            </a:pPr>
+            <a:r>
+              <a:rPr sz="2175" b="1">
+                <a:solidFill>
+                  <a:srgbClr val="B42318"/>
+                </a:solidFill>
+              </a:rPr>
+              <a:t>-35.6 pp</a:t>
+            </a:r>
+          </a:p>
+        </p:txBody>
+      </p:sp>
+      <p:sp>
+        <p:nvSpPr>
+          <p:cNvPr id="15" name="">
+            <a:extLst xmlns:a="http://schemas.openxmlformats.org/drawingml/2006/main">
+              <a:ext uri="{FF2B5EF4-FFF2-40B4-BE49-F238E27FC236}">
+                <a16:creationId xmlns:a16="http://schemas.microsoft.com/office/drawing/2014/main" id="{2CA2FF87-5602-46FB-ACCD-DA0F322FBB6F}"/>
+              </a:ext>
+            </a:extLst>
+          </p:cNvPr>
+          <p:cNvSpPr>
+            <a:spLocks xmlns:a="http://schemas.openxmlformats.org/drawingml/2006/main" noGrp="1"/>
+          </p:cNvSpPr>
+          <p:nvPr/>
+        </p:nvSpPr>
+        <p:spPr>
+          <a:xfrm xmlns:a="http://schemas.openxmlformats.org/drawingml/2006/main">
+            <a:off x="6172200" y="3162300"/>
+            <a:ext cx="2190750" cy="1638300"/>
           </a:xfrm>
           <a:prstGeom xmlns:a="http://schemas.openxmlformats.org/drawingml/2006/main" prst="rect">
             <a:avLst/>
           </a:prstGeom>
           <a:solidFill xmlns:a="http://schemas.openxmlformats.org/drawingml/2006/main">
-            <a:srgbClr val="FF6B35"/>
+            <a:srgbClr val="EDEDED"/>
           </a:solidFill>
           <a:ln xmlns:a="http://schemas.openxmlformats.org/drawingml/2006/main" w="9525">
             <a:solidFill>
-              <a:srgbClr val="FF6B35"/>
+              <a:srgbClr val="B8BCC4"/>
             </a:solidFill>
             <a:prstDash val="solid"/>
           </a:ln>
@@ -9386,82 +11193,232 @@
       </p:sp>
       <p:sp>
         <p:nvSpPr>
-          <p:cNvPr id="10" name="">
-            <a:extLst xmlns:a="http://schemas.openxmlformats.org/drawingml/2006/main">
-              <a:ext uri="{FF2B5EF4-FFF2-40B4-BE49-F238E27FC236}">
-                <a16:creationId xmlns:a16="http://schemas.microsoft.com/office/drawing/2014/main" id="{6B62BE41-C874-4D91-9027-C69766B720B4}"/>
-              </a:ext>
-            </a:extLst>
-          </p:cNvPr>
-          <p:cNvSpPr>
-            <a:spLocks xmlns:a="http://schemas.openxmlformats.org/drawingml/2006/main" noGrp="1"/>
-          </p:cNvSpPr>
-          <p:nvPr/>
-        </p:nvSpPr>
-        <p:spPr>
-          <a:xfrm xmlns:a="http://schemas.openxmlformats.org/drawingml/2006/main">
-            <a:off x="8058150" y="3295650"/>
-            <a:ext cx="2514600" cy="476250"/>
-          </a:xfrm>
-          <a:prstGeom xmlns:a="http://schemas.openxmlformats.org/drawingml/2006/main" prst="rect">
-            <a:avLst/>
-          </a:prstGeom>
-          <a:noFill xmlns:a="http://schemas.openxmlformats.org/drawingml/2006/main"/>
-          <a:ln xmlns:a="http://schemas.openxmlformats.org/drawingml/2006/main" w="0">
-            <a:noFill/>
-            <a:prstDash val="solid"/>
-          </a:ln>
-        </p:spPr>
-        <p:txBody>
-          <a:bodyPr xmlns:a="http://schemas.openxmlformats.org/drawingml/2006/main"/>
-          <a:lstStyle xmlns:a="http://schemas.openxmlformats.org/drawingml/2006/main"/>
-          <a:p xmlns:a="http://schemas.openxmlformats.org/drawingml/2006/main">
-            <a:pPr>
-              <a:defRPr sz="1200" b="0">
-                <a:solidFill>
-                  <a:srgbClr val="000000"/>
-                </a:solidFill>
-              </a:defRPr>
-            </a:pPr>
-            <a:r>
-              <a:rPr sz="1200" b="0">
-                <a:solidFill>
-                  <a:srgbClr val="000000"/>
-                </a:solidFill>
-              </a:rPr>
-              <a:t>2022 rewards staying out of a falling high-beta basket.</a:t>
-            </a:r>
-          </a:p>
-        </p:txBody>
-      </p:sp>
-      <p:sp>
-        <p:nvSpPr>
-          <p:cNvPr id="11" name="">
-            <a:extLst xmlns:a="http://schemas.openxmlformats.org/drawingml/2006/main">
-              <a:ext uri="{FF2B5EF4-FFF2-40B4-BE49-F238E27FC236}">
-                <a16:creationId xmlns:a16="http://schemas.microsoft.com/office/drawing/2014/main" id="{9A55126C-9387-441E-A3EE-6EFB3CE83A2C}"/>
-              </a:ext>
-            </a:extLst>
-          </p:cNvPr>
-          <p:cNvSpPr>
-            <a:spLocks xmlns:a="http://schemas.openxmlformats.org/drawingml/2006/main" noGrp="1"/>
-          </p:cNvSpPr>
-          <p:nvPr/>
-        </p:nvSpPr>
-        <p:spPr>
-          <a:xfrm xmlns:a="http://schemas.openxmlformats.org/drawingml/2006/main">
-            <a:off x="7848600" y="3810000"/>
-            <a:ext cx="76200" cy="76200"/>
+          <p:cNvPr id="16" name="">
+            <a:extLst xmlns:a="http://schemas.openxmlformats.org/drawingml/2006/main">
+              <a:ext uri="{FF2B5EF4-FFF2-40B4-BE49-F238E27FC236}">
+                <a16:creationId xmlns:a16="http://schemas.microsoft.com/office/drawing/2014/main" id="{149DAFAE-0EDC-4706-8566-B305C9C394A1}"/>
+              </a:ext>
+            </a:extLst>
+          </p:cNvPr>
+          <p:cNvSpPr>
+            <a:spLocks xmlns:a="http://schemas.openxmlformats.org/drawingml/2006/main" noGrp="1"/>
+          </p:cNvSpPr>
+          <p:nvPr/>
+        </p:nvSpPr>
+        <p:spPr>
+          <a:xfrm xmlns:a="http://schemas.openxmlformats.org/drawingml/2006/main">
+            <a:off x="6343650" y="3371850"/>
+            <a:ext cx="1809750" cy="228600"/>
+          </a:xfrm>
+          <a:prstGeom xmlns:a="http://schemas.openxmlformats.org/drawingml/2006/main" prst="rect">
+            <a:avLst/>
+          </a:prstGeom>
+          <a:noFill xmlns:a="http://schemas.openxmlformats.org/drawingml/2006/main"/>
+          <a:ln xmlns:a="http://schemas.openxmlformats.org/drawingml/2006/main" w="0">
+            <a:noFill/>
+            <a:prstDash val="solid"/>
+          </a:ln>
+        </p:spPr>
+        <p:txBody>
+          <a:bodyPr xmlns:a="http://schemas.openxmlformats.org/drawingml/2006/main"/>
+          <a:lstStyle xmlns:a="http://schemas.openxmlformats.org/drawingml/2006/main"/>
+          <a:p xmlns:a="http://schemas.openxmlformats.org/drawingml/2006/main">
+            <a:pPr algn="ctr">
+              <a:defRPr sz="1350" b="1">
+                <a:solidFill>
+                  <a:srgbClr val="000000"/>
+                </a:solidFill>
+              </a:defRPr>
+            </a:pPr>
+            <a:r>
+              <a:rPr sz="1350" b="1">
+                <a:solidFill>
+                  <a:srgbClr val="000000"/>
+                </a:solidFill>
+              </a:rPr>
+              <a:t>Mean exposure</a:t>
+            </a:r>
+          </a:p>
+        </p:txBody>
+      </p:sp>
+      <p:sp>
+        <p:nvSpPr>
+          <p:cNvPr id="17" name="">
+            <a:extLst xmlns:a="http://schemas.openxmlformats.org/drawingml/2006/main">
+              <a:ext uri="{FF2B5EF4-FFF2-40B4-BE49-F238E27FC236}">
+                <a16:creationId xmlns:a16="http://schemas.microsoft.com/office/drawing/2014/main" id="{1BBB7CDE-9720-438B-9E84-865E852C911B}"/>
+              </a:ext>
+            </a:extLst>
+          </p:cNvPr>
+          <p:cNvSpPr>
+            <a:spLocks xmlns:a="http://schemas.openxmlformats.org/drawingml/2006/main" noGrp="1"/>
+          </p:cNvSpPr>
+          <p:nvPr/>
+        </p:nvSpPr>
+        <p:spPr>
+          <a:xfrm xmlns:a="http://schemas.openxmlformats.org/drawingml/2006/main">
+            <a:off x="6343650" y="3733800"/>
+            <a:ext cx="1809750" cy="323850"/>
+          </a:xfrm>
+          <a:prstGeom xmlns:a="http://schemas.openxmlformats.org/drawingml/2006/main" prst="rect">
+            <a:avLst/>
+          </a:prstGeom>
+          <a:noFill xmlns:a="http://schemas.openxmlformats.org/drawingml/2006/main"/>
+          <a:ln xmlns:a="http://schemas.openxmlformats.org/drawingml/2006/main" w="0">
+            <a:noFill/>
+            <a:prstDash val="solid"/>
+          </a:ln>
+        </p:spPr>
+        <p:txBody>
+          <a:bodyPr xmlns:a="http://schemas.openxmlformats.org/drawingml/2006/main"/>
+          <a:lstStyle xmlns:a="http://schemas.openxmlformats.org/drawingml/2006/main"/>
+          <a:p xmlns:a="http://schemas.openxmlformats.org/drawingml/2006/main">
+            <a:pPr algn="ctr">
+              <a:defRPr sz="1875" b="0">
+                <a:solidFill>
+                  <a:srgbClr val="555555"/>
+                </a:solidFill>
+              </a:defRPr>
+            </a:pPr>
+            <a:r>
+              <a:rPr sz="1875" b="0">
+                <a:solidFill>
+                  <a:srgbClr val="555555"/>
+                </a:solidFill>
+              </a:rPr>
+              <a:t>64.6%</a:t>
+            </a:r>
+          </a:p>
+        </p:txBody>
+      </p:sp>
+      <p:sp>
+        <p:nvSpPr>
+          <p:cNvPr id="18" name="">
+            <a:extLst xmlns:a="http://schemas.openxmlformats.org/drawingml/2006/main">
+              <a:ext uri="{FF2B5EF4-FFF2-40B4-BE49-F238E27FC236}">
+                <a16:creationId xmlns:a16="http://schemas.microsoft.com/office/drawing/2014/main" id="{C72BD65B-006D-45F0-8453-C5E6D1447233}"/>
+              </a:ext>
+            </a:extLst>
+          </p:cNvPr>
+          <p:cNvSpPr>
+            <a:spLocks xmlns:a="http://schemas.openxmlformats.org/drawingml/2006/main" noGrp="1"/>
+          </p:cNvSpPr>
+          <p:nvPr/>
+        </p:nvSpPr>
+        <p:spPr>
+          <a:xfrm xmlns:a="http://schemas.openxmlformats.org/drawingml/2006/main">
+            <a:off x="6343650" y="4076700"/>
+            <a:ext cx="1809750" cy="228600"/>
+          </a:xfrm>
+          <a:prstGeom xmlns:a="http://schemas.openxmlformats.org/drawingml/2006/main" prst="rect">
+            <a:avLst/>
+          </a:prstGeom>
+          <a:noFill xmlns:a="http://schemas.openxmlformats.org/drawingml/2006/main"/>
+          <a:ln xmlns:a="http://schemas.openxmlformats.org/drawingml/2006/main" w="0">
+            <a:noFill/>
+            <a:prstDash val="solid"/>
+          </a:ln>
+        </p:spPr>
+        <p:txBody>
+          <a:bodyPr xmlns:a="http://schemas.openxmlformats.org/drawingml/2006/main"/>
+          <a:lstStyle xmlns:a="http://schemas.openxmlformats.org/drawingml/2006/main"/>
+          <a:p xmlns:a="http://schemas.openxmlformats.org/drawingml/2006/main">
+            <a:pPr algn="ctr">
+              <a:defRPr sz="975" b="0">
+                <a:solidFill>
+                  <a:srgbClr val="555555"/>
+                </a:solidFill>
+              </a:defRPr>
+            </a:pPr>
+            <a:r>
+              <a:rPr sz="975" b="0">
+                <a:solidFill>
+                  <a:srgbClr val="555555"/>
+                </a:solidFill>
+              </a:rPr>
+              <a:t>independent stitch</a:t>
+            </a:r>
+          </a:p>
+        </p:txBody>
+      </p:sp>
+      <p:sp>
+        <p:nvSpPr>
+          <p:cNvPr id="19" name="">
+            <a:extLst xmlns:a="http://schemas.openxmlformats.org/drawingml/2006/main">
+              <a:ext uri="{FF2B5EF4-FFF2-40B4-BE49-F238E27FC236}">
+                <a16:creationId xmlns:a16="http://schemas.microsoft.com/office/drawing/2014/main" id="{0209BCE6-6DDB-47B5-B970-D8608C59790E}"/>
+              </a:ext>
+            </a:extLst>
+          </p:cNvPr>
+          <p:cNvSpPr>
+            <a:spLocks xmlns:a="http://schemas.openxmlformats.org/drawingml/2006/main" noGrp="1"/>
+          </p:cNvSpPr>
+          <p:nvPr/>
+        </p:nvSpPr>
+        <p:spPr>
+          <a:xfrm xmlns:a="http://schemas.openxmlformats.org/drawingml/2006/main">
+            <a:off x="6343650" y="4400550"/>
+            <a:ext cx="1809750" cy="361950"/>
+          </a:xfrm>
+          <a:prstGeom xmlns:a="http://schemas.openxmlformats.org/drawingml/2006/main" prst="rect">
+            <a:avLst/>
+          </a:prstGeom>
+          <a:noFill xmlns:a="http://schemas.openxmlformats.org/drawingml/2006/main"/>
+          <a:ln xmlns:a="http://schemas.openxmlformats.org/drawingml/2006/main" w="0">
+            <a:noFill/>
+            <a:prstDash val="solid"/>
+          </a:ln>
+        </p:spPr>
+        <p:txBody>
+          <a:bodyPr xmlns:a="http://schemas.openxmlformats.org/drawingml/2006/main"/>
+          <a:lstStyle xmlns:a="http://schemas.openxmlformats.org/drawingml/2006/main"/>
+          <a:p xmlns:a="http://schemas.openxmlformats.org/drawingml/2006/main">
+            <a:pPr algn="ctr">
+              <a:defRPr sz="2175" b="1">
+                <a:solidFill>
+                  <a:srgbClr val="B42318"/>
+                </a:solidFill>
+              </a:defRPr>
+            </a:pPr>
+            <a:r>
+              <a:rPr sz="2175" b="1">
+                <a:solidFill>
+                  <a:srgbClr val="B42318"/>
+                </a:solidFill>
+              </a:rPr>
+              <a:t>40.3%</a:t>
+            </a:r>
+          </a:p>
+        </p:txBody>
+      </p:sp>
+      <p:sp>
+        <p:nvSpPr>
+          <p:cNvPr id="20" name="">
+            <a:extLst xmlns:a="http://schemas.openxmlformats.org/drawingml/2006/main">
+              <a:ext uri="{FF2B5EF4-FFF2-40B4-BE49-F238E27FC236}">
+                <a16:creationId xmlns:a16="http://schemas.microsoft.com/office/drawing/2014/main" id="{B4501158-D579-47A0-B015-53086A8CCFA0}"/>
+              </a:ext>
+            </a:extLst>
+          </p:cNvPr>
+          <p:cNvSpPr>
+            <a:spLocks xmlns:a="http://schemas.openxmlformats.org/drawingml/2006/main" noGrp="1"/>
+          </p:cNvSpPr>
+          <p:nvPr/>
+        </p:nvSpPr>
+        <p:spPr>
+          <a:xfrm xmlns:a="http://schemas.openxmlformats.org/drawingml/2006/main">
+            <a:off x="8820150" y="3162300"/>
+            <a:ext cx="2190750" cy="1638300"/>
           </a:xfrm>
           <a:prstGeom xmlns:a="http://schemas.openxmlformats.org/drawingml/2006/main" prst="rect">
             <a:avLst/>
           </a:prstGeom>
           <a:solidFill xmlns:a="http://schemas.openxmlformats.org/drawingml/2006/main">
-            <a:srgbClr val="FF6B35"/>
+            <a:srgbClr val="EDEDED"/>
           </a:solidFill>
           <a:ln xmlns:a="http://schemas.openxmlformats.org/drawingml/2006/main" w="9525">
             <a:solidFill>
-              <a:srgbClr val="FF6B35"/>
+              <a:srgbClr val="B8BCC4"/>
             </a:solidFill>
             <a:prstDash val="solid"/>
           </a:ln>
@@ -9469,143 +11426,260 @@
       </p:sp>
       <p:sp>
         <p:nvSpPr>
-          <p:cNvPr id="12" name="">
-            <a:extLst xmlns:a="http://schemas.openxmlformats.org/drawingml/2006/main">
-              <a:ext uri="{FF2B5EF4-FFF2-40B4-BE49-F238E27FC236}">
-                <a16:creationId xmlns:a16="http://schemas.microsoft.com/office/drawing/2014/main" id="{1C4B076C-0A0F-43A6-B604-A43A85DD0628}"/>
-              </a:ext>
-            </a:extLst>
-          </p:cNvPr>
-          <p:cNvSpPr>
-            <a:spLocks xmlns:a="http://schemas.openxmlformats.org/drawingml/2006/main" noGrp="1"/>
-          </p:cNvSpPr>
-          <p:nvPr/>
-        </p:nvSpPr>
-        <p:spPr>
-          <a:xfrm xmlns:a="http://schemas.openxmlformats.org/drawingml/2006/main">
-            <a:off x="8058150" y="3714750"/>
-            <a:ext cx="2514600" cy="476250"/>
-          </a:xfrm>
-          <a:prstGeom xmlns:a="http://schemas.openxmlformats.org/drawingml/2006/main" prst="rect">
-            <a:avLst/>
-          </a:prstGeom>
-          <a:noFill xmlns:a="http://schemas.openxmlformats.org/drawingml/2006/main"/>
-          <a:ln xmlns:a="http://schemas.openxmlformats.org/drawingml/2006/main" w="0">
-            <a:noFill/>
-            <a:prstDash val="solid"/>
-          </a:ln>
-        </p:spPr>
-        <p:txBody>
-          <a:bodyPr xmlns:a="http://schemas.openxmlformats.org/drawingml/2006/main"/>
-          <a:lstStyle xmlns:a="http://schemas.openxmlformats.org/drawingml/2006/main"/>
-          <a:p xmlns:a="http://schemas.openxmlformats.org/drawingml/2006/main">
-            <a:pPr>
-              <a:defRPr sz="1200" b="0">
-                <a:solidFill>
-                  <a:srgbClr val="000000"/>
-                </a:solidFill>
-              </a:defRPr>
-            </a:pPr>
-            <a:r>
-              <a:rPr sz="1200" b="0">
-                <a:solidFill>
-                  <a:srgbClr val="000000"/>
-                </a:solidFill>
-              </a:rPr>
-              <a:t>2024 is the clean positive clue for risk-aware workhorse continuation.</a:t>
-            </a:r>
-          </a:p>
-        </p:txBody>
-      </p:sp>
-      <p:sp>
-        <p:nvSpPr>
-          <p:cNvPr id="13" name="">
-            <a:extLst xmlns:a="http://schemas.openxmlformats.org/drawingml/2006/main">
-              <a:ext uri="{FF2B5EF4-FFF2-40B4-BE49-F238E27FC236}">
-                <a16:creationId xmlns:a16="http://schemas.microsoft.com/office/drawing/2014/main" id="{4D620F29-BF24-4130-B2C3-4613E619F69E}"/>
-              </a:ext>
-            </a:extLst>
-          </p:cNvPr>
-          <p:cNvSpPr>
-            <a:spLocks xmlns:a="http://schemas.openxmlformats.org/drawingml/2006/main" noGrp="1"/>
-          </p:cNvSpPr>
-          <p:nvPr/>
-        </p:nvSpPr>
-        <p:spPr>
-          <a:xfrm xmlns:a="http://schemas.openxmlformats.org/drawingml/2006/main">
-            <a:off x="7848600" y="4229100"/>
-            <a:ext cx="76200" cy="76200"/>
-          </a:xfrm>
-          <a:prstGeom xmlns:a="http://schemas.openxmlformats.org/drawingml/2006/main" prst="rect">
-            <a:avLst/>
-          </a:prstGeom>
-          <a:solidFill xmlns:a="http://schemas.openxmlformats.org/drawingml/2006/main">
-            <a:srgbClr val="FF6B35"/>
-          </a:solidFill>
-          <a:ln xmlns:a="http://schemas.openxmlformats.org/drawingml/2006/main" w="9525">
-            <a:solidFill>
-              <a:srgbClr val="FF6B35"/>
-            </a:solidFill>
-            <a:prstDash val="solid"/>
-          </a:ln>
-        </p:spPr>
-      </p:sp>
-      <p:sp>
-        <p:nvSpPr>
-          <p:cNvPr id="14" name="">
-            <a:extLst xmlns:a="http://schemas.openxmlformats.org/drawingml/2006/main">
-              <a:ext uri="{FF2B5EF4-FFF2-40B4-BE49-F238E27FC236}">
-                <a16:creationId xmlns:a16="http://schemas.microsoft.com/office/drawing/2014/main" id="{50C14080-3FFD-431A-BB4A-6ADAE9FA8AC7}"/>
-              </a:ext>
-            </a:extLst>
-          </p:cNvPr>
-          <p:cNvSpPr>
-            <a:spLocks xmlns:a="http://schemas.openxmlformats.org/drawingml/2006/main" noGrp="1"/>
-          </p:cNvSpPr>
-          <p:nvPr/>
-        </p:nvSpPr>
-        <p:spPr>
-          <a:xfrm xmlns:a="http://schemas.openxmlformats.org/drawingml/2006/main">
-            <a:off x="8058150" y="4133850"/>
-            <a:ext cx="2514600" cy="476250"/>
-          </a:xfrm>
-          <a:prstGeom xmlns:a="http://schemas.openxmlformats.org/drawingml/2006/main" prst="rect">
-            <a:avLst/>
-          </a:prstGeom>
-          <a:noFill xmlns:a="http://schemas.openxmlformats.org/drawingml/2006/main"/>
-          <a:ln xmlns:a="http://schemas.openxmlformats.org/drawingml/2006/main" w="0">
-            <a:noFill/>
-            <a:prstDash val="solid"/>
-          </a:ln>
-        </p:spPr>
-        <p:txBody>
-          <a:bodyPr xmlns:a="http://schemas.openxmlformats.org/drawingml/2006/main"/>
-          <a:lstStyle xmlns:a="http://schemas.openxmlformats.org/drawingml/2006/main"/>
-          <a:p xmlns:a="http://schemas.openxmlformats.org/drawingml/2006/main">
-            <a:pPr>
-              <a:defRPr sz="1200" b="0">
-                <a:solidFill>
-                  <a:srgbClr val="000000"/>
-                </a:solidFill>
-              </a:defRPr>
-            </a:pPr>
-            <a:r>
-              <a:rPr sz="1200" b="0">
-                <a:solidFill>
-                  <a:srgbClr val="000000"/>
-                </a:solidFill>
-              </a:rPr>
-              <a:t>New momentum feature sets did not become the aggregate default.</a:t>
-            </a:r>
-          </a:p>
-        </p:txBody>
-      </p:sp>
-      <p:sp>
-        <p:nvSpPr>
-          <p:cNvPr id="15" name="">
-            <a:extLst xmlns:a="http://schemas.openxmlformats.org/drawingml/2006/main">
-              <a:ext uri="{FF2B5EF4-FFF2-40B4-BE49-F238E27FC236}">
-                <a16:creationId xmlns:a16="http://schemas.microsoft.com/office/drawing/2014/main" id="{1316AD7F-37A7-499D-9E74-28D762DEE87A}"/>
+          <p:cNvPr id="21" name="">
+            <a:extLst xmlns:a="http://schemas.openxmlformats.org/drawingml/2006/main">
+              <a:ext uri="{FF2B5EF4-FFF2-40B4-BE49-F238E27FC236}">
+                <a16:creationId xmlns:a16="http://schemas.microsoft.com/office/drawing/2014/main" id="{22BA8A57-E475-4E5B-B5FE-2A3FA69F4FF3}"/>
+              </a:ext>
+            </a:extLst>
+          </p:cNvPr>
+          <p:cNvSpPr>
+            <a:spLocks xmlns:a="http://schemas.openxmlformats.org/drawingml/2006/main" noGrp="1"/>
+          </p:cNvSpPr>
+          <p:nvPr/>
+        </p:nvSpPr>
+        <p:spPr>
+          <a:xfrm xmlns:a="http://schemas.openxmlformats.org/drawingml/2006/main">
+            <a:off x="8991600" y="3371850"/>
+            <a:ext cx="1809750" cy="228600"/>
+          </a:xfrm>
+          <a:prstGeom xmlns:a="http://schemas.openxmlformats.org/drawingml/2006/main" prst="rect">
+            <a:avLst/>
+          </a:prstGeom>
+          <a:noFill xmlns:a="http://schemas.openxmlformats.org/drawingml/2006/main"/>
+          <a:ln xmlns:a="http://schemas.openxmlformats.org/drawingml/2006/main" w="0">
+            <a:noFill/>
+            <a:prstDash val="solid"/>
+          </a:ln>
+        </p:spPr>
+        <p:txBody>
+          <a:bodyPr xmlns:a="http://schemas.openxmlformats.org/drawingml/2006/main"/>
+          <a:lstStyle xmlns:a="http://schemas.openxmlformats.org/drawingml/2006/main"/>
+          <a:p xmlns:a="http://schemas.openxmlformats.org/drawingml/2006/main">
+            <a:pPr algn="ctr">
+              <a:defRPr sz="1350" b="1">
+                <a:solidFill>
+                  <a:srgbClr val="000000"/>
+                </a:solidFill>
+              </a:defRPr>
+            </a:pPr>
+            <a:r>
+              <a:rPr sz="1350" b="1">
+                <a:solidFill>
+                  <a:srgbClr val="000000"/>
+                </a:solidFill>
+              </a:rPr>
+              <a:t>Win years</a:t>
+            </a:r>
+          </a:p>
+        </p:txBody>
+      </p:sp>
+      <p:sp>
+        <p:nvSpPr>
+          <p:cNvPr id="22" name="">
+            <a:extLst xmlns:a="http://schemas.openxmlformats.org/drawingml/2006/main">
+              <a:ext uri="{FF2B5EF4-FFF2-40B4-BE49-F238E27FC236}">
+                <a16:creationId xmlns:a16="http://schemas.microsoft.com/office/drawing/2014/main" id="{A0A9326B-CFA0-4D69-9A7B-A53D54E143D3}"/>
+              </a:ext>
+            </a:extLst>
+          </p:cNvPr>
+          <p:cNvSpPr>
+            <a:spLocks xmlns:a="http://schemas.openxmlformats.org/drawingml/2006/main" noGrp="1"/>
+          </p:cNvSpPr>
+          <p:nvPr/>
+        </p:nvSpPr>
+        <p:spPr>
+          <a:xfrm xmlns:a="http://schemas.openxmlformats.org/drawingml/2006/main">
+            <a:off x="8991600" y="3733800"/>
+            <a:ext cx="1809750" cy="323850"/>
+          </a:xfrm>
+          <a:prstGeom xmlns:a="http://schemas.openxmlformats.org/drawingml/2006/main" prst="rect">
+            <a:avLst/>
+          </a:prstGeom>
+          <a:noFill xmlns:a="http://schemas.openxmlformats.org/drawingml/2006/main"/>
+          <a:ln xmlns:a="http://schemas.openxmlformats.org/drawingml/2006/main" w="0">
+            <a:noFill/>
+            <a:prstDash val="solid"/>
+          </a:ln>
+        </p:spPr>
+        <p:txBody>
+          <a:bodyPr xmlns:a="http://schemas.openxmlformats.org/drawingml/2006/main"/>
+          <a:lstStyle xmlns:a="http://schemas.openxmlformats.org/drawingml/2006/main"/>
+          <a:p xmlns:a="http://schemas.openxmlformats.org/drawingml/2006/main">
+            <a:pPr algn="ctr">
+              <a:defRPr sz="1875" b="0">
+                <a:solidFill>
+                  <a:srgbClr val="555555"/>
+                </a:solidFill>
+              </a:defRPr>
+            </a:pPr>
+            <a:r>
+              <a:rPr sz="1875" b="0">
+                <a:solidFill>
+                  <a:srgbClr val="555555"/>
+                </a:solidFill>
+              </a:rPr>
+              <a:t>2/4</a:t>
+            </a:r>
+          </a:p>
+        </p:txBody>
+      </p:sp>
+      <p:sp>
+        <p:nvSpPr>
+          <p:cNvPr id="23" name="">
+            <a:extLst xmlns:a="http://schemas.openxmlformats.org/drawingml/2006/main">
+              <a:ext uri="{FF2B5EF4-FFF2-40B4-BE49-F238E27FC236}">
+                <a16:creationId xmlns:a16="http://schemas.microsoft.com/office/drawing/2014/main" id="{DEB7F145-8C14-4A39-A529-F5C44657890F}"/>
+              </a:ext>
+            </a:extLst>
+          </p:cNvPr>
+          <p:cNvSpPr>
+            <a:spLocks xmlns:a="http://schemas.openxmlformats.org/drawingml/2006/main" noGrp="1"/>
+          </p:cNvSpPr>
+          <p:nvPr/>
+        </p:nvSpPr>
+        <p:spPr>
+          <a:xfrm xmlns:a="http://schemas.openxmlformats.org/drawingml/2006/main">
+            <a:off x="8991600" y="4076700"/>
+            <a:ext cx="1809750" cy="228600"/>
+          </a:xfrm>
+          <a:prstGeom xmlns:a="http://schemas.openxmlformats.org/drawingml/2006/main" prst="rect">
+            <a:avLst/>
+          </a:prstGeom>
+          <a:noFill xmlns:a="http://schemas.openxmlformats.org/drawingml/2006/main"/>
+          <a:ln xmlns:a="http://schemas.openxmlformats.org/drawingml/2006/main" w="0">
+            <a:noFill/>
+            <a:prstDash val="solid"/>
+          </a:ln>
+        </p:spPr>
+        <p:txBody>
+          <a:bodyPr xmlns:a="http://schemas.openxmlformats.org/drawingml/2006/main"/>
+          <a:lstStyle xmlns:a="http://schemas.openxmlformats.org/drawingml/2006/main"/>
+          <a:p xmlns:a="http://schemas.openxmlformats.org/drawingml/2006/main">
+            <a:pPr algn="ctr">
+              <a:defRPr sz="975" b="0">
+                <a:solidFill>
+                  <a:srgbClr val="555555"/>
+                </a:solidFill>
+              </a:defRPr>
+            </a:pPr>
+            <a:r>
+              <a:rPr sz="975" b="0">
+                <a:solidFill>
+                  <a:srgbClr val="555555"/>
+                </a:solidFill>
+              </a:rPr>
+              <a:t>independent stitch</a:t>
+            </a:r>
+          </a:p>
+        </p:txBody>
+      </p:sp>
+      <p:sp>
+        <p:nvSpPr>
+          <p:cNvPr id="24" name="">
+            <a:extLst xmlns:a="http://schemas.openxmlformats.org/drawingml/2006/main">
+              <a:ext uri="{FF2B5EF4-FFF2-40B4-BE49-F238E27FC236}">
+                <a16:creationId xmlns:a16="http://schemas.microsoft.com/office/drawing/2014/main" id="{2098B29C-01A0-4C94-B344-AE41A469124F}"/>
+              </a:ext>
+            </a:extLst>
+          </p:cNvPr>
+          <p:cNvSpPr>
+            <a:spLocks xmlns:a="http://schemas.openxmlformats.org/drawingml/2006/main" noGrp="1"/>
+          </p:cNvSpPr>
+          <p:nvPr/>
+        </p:nvSpPr>
+        <p:spPr>
+          <a:xfrm xmlns:a="http://schemas.openxmlformats.org/drawingml/2006/main">
+            <a:off x="8991600" y="4400550"/>
+            <a:ext cx="1809750" cy="361950"/>
+          </a:xfrm>
+          <a:prstGeom xmlns:a="http://schemas.openxmlformats.org/drawingml/2006/main" prst="rect">
+            <a:avLst/>
+          </a:prstGeom>
+          <a:noFill xmlns:a="http://schemas.openxmlformats.org/drawingml/2006/main"/>
+          <a:ln xmlns:a="http://schemas.openxmlformats.org/drawingml/2006/main" w="0">
+            <a:noFill/>
+            <a:prstDash val="solid"/>
+          </a:ln>
+        </p:spPr>
+        <p:txBody>
+          <a:bodyPr xmlns:a="http://schemas.openxmlformats.org/drawingml/2006/main"/>
+          <a:lstStyle xmlns:a="http://schemas.openxmlformats.org/drawingml/2006/main"/>
+          <a:p xmlns:a="http://schemas.openxmlformats.org/drawingml/2006/main">
+            <a:pPr algn="ctr">
+              <a:defRPr sz="2175" b="1">
+                <a:solidFill>
+                  <a:srgbClr val="000000"/>
+                </a:solidFill>
+              </a:defRPr>
+            </a:pPr>
+            <a:r>
+              <a:rPr sz="2175" b="1">
+                <a:solidFill>
+                  <a:srgbClr val="000000"/>
+                </a:solidFill>
+              </a:rPr>
+              <a:t>2/4</a:t>
+            </a:r>
+          </a:p>
+        </p:txBody>
+      </p:sp>
+      <p:sp>
+        <p:nvSpPr>
+          <p:cNvPr id="25" name="">
+            <a:extLst xmlns:a="http://schemas.openxmlformats.org/drawingml/2006/main">
+              <a:ext uri="{FF2B5EF4-FFF2-40B4-BE49-F238E27FC236}">
+                <a16:creationId xmlns:a16="http://schemas.microsoft.com/office/drawing/2014/main" id="{EE5757E2-1939-4675-8362-D8B2AA33352C}"/>
+              </a:ext>
+            </a:extLst>
+          </p:cNvPr>
+          <p:cNvSpPr>
+            <a:spLocks xmlns:a="http://schemas.openxmlformats.org/drawingml/2006/main" noGrp="1"/>
+          </p:cNvSpPr>
+          <p:nvPr/>
+        </p:nvSpPr>
+        <p:spPr>
+          <a:xfrm xmlns:a="http://schemas.openxmlformats.org/drawingml/2006/main">
+            <a:off x="1047750" y="5543550"/>
+            <a:ext cx="9620250" cy="514350"/>
+          </a:xfrm>
+          <a:prstGeom xmlns:a="http://schemas.openxmlformats.org/drawingml/2006/main" prst="rect">
+            <a:avLst/>
+          </a:prstGeom>
+          <a:noFill xmlns:a="http://schemas.openxmlformats.org/drawingml/2006/main"/>
+          <a:ln xmlns:a="http://schemas.openxmlformats.org/drawingml/2006/main" w="0">
+            <a:noFill/>
+            <a:prstDash val="solid"/>
+          </a:ln>
+        </p:spPr>
+        <p:txBody>
+          <a:bodyPr xmlns:a="http://schemas.openxmlformats.org/drawingml/2006/main"/>
+          <a:lstStyle xmlns:a="http://schemas.openxmlformats.org/drawingml/2006/main"/>
+          <a:p xmlns:a="http://schemas.openxmlformats.org/drawingml/2006/main">
+            <a:pPr algn="ctr">
+              <a:defRPr sz="1650" b="1">
+                <a:solidFill>
+                  <a:srgbClr val="000000"/>
+                </a:solidFill>
+              </a:defRPr>
+            </a:pPr>
+            <a:r>
+              <a:rPr sz="1650" b="1">
+                <a:solidFill>
+                  <a:srgbClr val="000000"/>
+                </a:solidFill>
+              </a:rPr>
+              <a:t>448 symbol/boundary cases carried prior authority until flat, and 4 carried through annual as-of. The boundary mechanic materially changed the evidence.</a:t>
+            </a:r>
+          </a:p>
+        </p:txBody>
+      </p:sp>
+      <p:sp>
+        <p:nvSpPr>
+          <p:cNvPr id="26" name="">
+            <a:extLst xmlns:a="http://schemas.openxmlformats.org/drawingml/2006/main">
+              <a:ext uri="{FF2B5EF4-FFF2-40B4-BE49-F238E27FC236}">
+                <a16:creationId xmlns:a16="http://schemas.microsoft.com/office/drawing/2014/main" id="{893F674D-DEAE-486A-AC78-9BBA3B8051A8}"/>
               </a:ext>
             </a:extLst>
           </p:cNvPr>
@@ -9653,7 +11727,7 @@
     </p:spTree>
     <p:extLst>
       <p:ext uri="{BB962C8B-B14F-4D97-AF65-F5344CB8AC3E}">
-        <p14:creationId xmlns:p14="http://schemas.microsoft.com/office/powerpoint/2010/main" val="288565210"/>
+        <p14:creationId xmlns:p14="http://schemas.microsoft.com/office/powerpoint/2010/main" val="89678040"/>
       </p:ext>
     </p:extLst>
   </p:cSld>
@@ -9684,7 +11758,7 @@
           <p:cNvPr id="1" name="">
             <a:extLst xmlns:a="http://schemas.openxmlformats.org/drawingml/2006/main">
               <a:ext uri="{FF2B5EF4-FFF2-40B4-BE49-F238E27FC236}">
-                <a16:creationId xmlns:a16="http://schemas.microsoft.com/office/drawing/2014/main" id="{0E53526F-8503-4CCA-91CA-018A6AED7EAB}"/>
+                <a16:creationId xmlns:a16="http://schemas.microsoft.com/office/drawing/2014/main" id="{77F2A3F0-A1AA-4151-B86E-9410C9BBF8F1}"/>
               </a:ext>
             </a:extLst>
           </p:cNvPr>
@@ -9734,7 +11808,7 @@
           <p:cNvPr id="2" name="">
             <a:extLst xmlns:a="http://schemas.openxmlformats.org/drawingml/2006/main">
               <a:ext uri="{FF2B5EF4-FFF2-40B4-BE49-F238E27FC236}">
-                <a16:creationId xmlns:a16="http://schemas.microsoft.com/office/drawing/2014/main" id="{BFCEC682-7AE1-4313-8722-B9FC0EB7733E}"/>
+                <a16:creationId xmlns:a16="http://schemas.microsoft.com/office/drawing/2014/main" id="{98497677-A27F-49DB-A119-1F67E05CE616}"/>
               </a:ext>
             </a:extLst>
           </p:cNvPr>
@@ -9774,7 +11848,7 @@
                   <a:srgbClr val="000000"/>
                 </a:solidFill>
               </a:rPr>
-              <a:t>The best lane still tells a mixed window-by-window story</a:t>
+              <a:t>The annual heatmap shows why this is not a simple feature-set win</a:t>
             </a:r>
           </a:p>
         </p:txBody>
@@ -9784,7 +11858,7 @@
           <p:cNvPr id="3" name="">
             <a:extLst xmlns:a="http://schemas.openxmlformats.org/drawingml/2006/main">
               <a:ext uri="{FF2B5EF4-FFF2-40B4-BE49-F238E27FC236}">
-                <a16:creationId xmlns:a16="http://schemas.microsoft.com/office/drawing/2014/main" id="{5E45AD62-78F2-45F3-A64E-821043866D9F}"/>
+                <a16:creationId xmlns:a16="http://schemas.microsoft.com/office/drawing/2014/main" id="{A5B9DBB0-5206-48D6-B01E-1E5DCC6B8F33}"/>
               </a:ext>
             </a:extLst>
           </p:cNvPr>
@@ -9812,24 +11886,46 @@
           </a:ln>
         </p:spPr>
       </p:sp>
-      <p:sp>
-        <p:nvSpPr>
-          <p:cNvPr id="4" name="">
-            <a:extLst xmlns:a="http://schemas.openxmlformats.org/drawingml/2006/main">
-              <a:ext uri="{FF2B5EF4-FFF2-40B4-BE49-F238E27FC236}">
-                <a16:creationId xmlns:a16="http://schemas.microsoft.com/office/drawing/2014/main" id="{2E2242A3-0097-42E9-BA45-034A7119F6DC}"/>
-              </a:ext>
-            </a:extLst>
-          </p:cNvPr>
-          <p:cNvSpPr>
-            <a:spLocks xmlns:a="http://schemas.openxmlformats.org/drawingml/2006/main" noGrp="1"/>
-          </p:cNvSpPr>
-          <p:nvPr/>
-        </p:nvSpPr>
-        <p:spPr>
-          <a:xfrm xmlns:a="http://schemas.openxmlformats.org/drawingml/2006/main">
-            <a:off x="819150" y="2095500"/>
-            <a:ext cx="2305050" cy="2286000"/>
+      <p:pic>
+        <p:nvPicPr>
+          <p:cNvPr id="19" name=""/>
+          <p:cNvPicPr>
+            <a:picLocks xmlns:a="http://schemas.openxmlformats.org/drawingml/2006/main" noChangeAspect="1"/>
+          </p:cNvPicPr>
+          <p:nvPr/>
+        </p:nvPicPr>
+        <p:blipFill>
+          <a:blip xmlns:r="http://schemas.openxmlformats.org/officeDocument/2006/relationships" xmlns:a="http://schemas.openxmlformats.org/drawingml/2006/main" r:embed="Rdf11fe93aa9a4736"/>
+          <a:stretch xmlns:a="http://schemas.openxmlformats.org/drawingml/2006/main"/>
+        </p:blipFill>
+        <p:spPr>
+          <a:xfrm xmlns:a="http://schemas.openxmlformats.org/drawingml/2006/main">
+            <a:off x="2659700" y="1695450"/>
+            <a:ext cx="2091049" cy="4629150"/>
+          </a:xfrm>
+          <a:prstGeom xmlns:a="http://schemas.openxmlformats.org/drawingml/2006/main" prst="rect">
+            <a:avLst/>
+          </a:prstGeom>
+        </p:spPr>
+      </p:pic>
+      <p:sp>
+        <p:nvSpPr>
+          <p:cNvPr id="5" name="">
+            <a:extLst xmlns:a="http://schemas.openxmlformats.org/drawingml/2006/main">
+              <a:ext uri="{FF2B5EF4-FFF2-40B4-BE49-F238E27FC236}">
+                <a16:creationId xmlns:a16="http://schemas.microsoft.com/office/drawing/2014/main" id="{DAEBDE69-05B1-4703-A71E-E832F3EA6382}"/>
+              </a:ext>
+            </a:extLst>
+          </p:cNvPr>
+          <p:cNvSpPr>
+            <a:spLocks xmlns:a="http://schemas.openxmlformats.org/drawingml/2006/main" noGrp="1"/>
+          </p:cNvSpPr>
+          <p:nvPr/>
+        </p:nvSpPr>
+        <p:spPr>
+          <a:xfrm xmlns:a="http://schemas.openxmlformats.org/drawingml/2006/main">
+            <a:off x="7524750" y="2038350"/>
+            <a:ext cx="3429000" cy="2705100"/>
           </a:xfrm>
           <a:prstGeom xmlns:a="http://schemas.openxmlformats.org/drawingml/2006/main" prst="rect">
             <a:avLst/>
@@ -9847,100 +11943,50 @@
       </p:sp>
       <p:sp>
         <p:nvSpPr>
-          <p:cNvPr id="5" name="">
-            <a:extLst xmlns:a="http://schemas.openxmlformats.org/drawingml/2006/main">
-              <a:ext uri="{FF2B5EF4-FFF2-40B4-BE49-F238E27FC236}">
-                <a16:creationId xmlns:a16="http://schemas.microsoft.com/office/drawing/2014/main" id="{E003AC39-4F09-4584-807A-B0FDD1BD2AA6}"/>
-              </a:ext>
-            </a:extLst>
-          </p:cNvPr>
-          <p:cNvSpPr>
-            <a:spLocks xmlns:a="http://schemas.openxmlformats.org/drawingml/2006/main" noGrp="1"/>
-          </p:cNvSpPr>
-          <p:nvPr/>
-        </p:nvSpPr>
-        <p:spPr>
-          <a:xfrm xmlns:a="http://schemas.openxmlformats.org/drawingml/2006/main">
-            <a:off x="1028700" y="2324100"/>
-            <a:ext cx="1714500" cy="361950"/>
-          </a:xfrm>
-          <a:prstGeom xmlns:a="http://schemas.openxmlformats.org/drawingml/2006/main" prst="rect">
-            <a:avLst/>
-          </a:prstGeom>
-          <a:noFill xmlns:a="http://schemas.openxmlformats.org/drawingml/2006/main"/>
-          <a:ln xmlns:a="http://schemas.openxmlformats.org/drawingml/2006/main" w="0">
-            <a:noFill/>
-            <a:prstDash val="solid"/>
-          </a:ln>
-        </p:spPr>
-        <p:txBody>
-          <a:bodyPr xmlns:a="http://schemas.openxmlformats.org/drawingml/2006/main"/>
-          <a:lstStyle xmlns:a="http://schemas.openxmlformats.org/drawingml/2006/main"/>
-          <a:p xmlns:a="http://schemas.openxmlformats.org/drawingml/2006/main">
-            <a:pPr>
-              <a:defRPr sz="2400" b="1">
-                <a:solidFill>
-                  <a:srgbClr val="000000"/>
-                </a:solidFill>
-              </a:defRPr>
-            </a:pPr>
-            <a:r>
-              <a:rPr sz="2400" b="1">
-                <a:solidFill>
-                  <a:srgbClr val="000000"/>
-                </a:solidFill>
-              </a:rPr>
-              <a:t>2019</a:t>
-            </a:r>
-          </a:p>
-        </p:txBody>
-      </p:sp>
-      <p:sp>
-        <p:nvSpPr>
           <p:cNvPr id="6" name="">
             <a:extLst xmlns:a="http://schemas.openxmlformats.org/drawingml/2006/main">
               <a:ext uri="{FF2B5EF4-FFF2-40B4-BE49-F238E27FC236}">
-                <a16:creationId xmlns:a16="http://schemas.microsoft.com/office/drawing/2014/main" id="{0FC5A84F-AD26-474F-957D-F4504A2C877F}"/>
-              </a:ext>
-            </a:extLst>
-          </p:cNvPr>
-          <p:cNvSpPr>
-            <a:spLocks xmlns:a="http://schemas.openxmlformats.org/drawingml/2006/main" noGrp="1"/>
-          </p:cNvSpPr>
-          <p:nvPr/>
-        </p:nvSpPr>
-        <p:spPr>
-          <a:xfrm xmlns:a="http://schemas.openxmlformats.org/drawingml/2006/main">
-            <a:off x="1028700" y="2914650"/>
-            <a:ext cx="1809750" cy="419100"/>
-          </a:xfrm>
-          <a:prstGeom xmlns:a="http://schemas.openxmlformats.org/drawingml/2006/main" prst="rect">
-            <a:avLst/>
-          </a:prstGeom>
-          <a:noFill xmlns:a="http://schemas.openxmlformats.org/drawingml/2006/main"/>
-          <a:ln xmlns:a="http://schemas.openxmlformats.org/drawingml/2006/main" w="0">
-            <a:noFill/>
-            <a:prstDash val="solid"/>
-          </a:ln>
-        </p:spPr>
-        <p:txBody>
-          <a:bodyPr xmlns:a="http://schemas.openxmlformats.org/drawingml/2006/main"/>
-          <a:lstStyle xmlns:a="http://schemas.openxmlformats.org/drawingml/2006/main"/>
-          <a:p xmlns:a="http://schemas.openxmlformats.org/drawingml/2006/main">
-            <a:pPr>
-              <a:defRPr sz="2325" b="1">
-                <a:solidFill>
-                  <a:srgbClr val="B42318"/>
-                </a:solidFill>
-              </a:defRPr>
-            </a:pPr>
-            <a:r>
-              <a:rPr sz="2325" b="1">
-                <a:solidFill>
-                  <a:srgbClr val="B42318"/>
-                </a:solidFill>
-              </a:rPr>
-              <a:t>-25.7 pp</a:t>
+                <a16:creationId xmlns:a16="http://schemas.microsoft.com/office/drawing/2014/main" id="{1CBA1087-AC0D-40C5-96C2-84A14DC522B8}"/>
+              </a:ext>
+            </a:extLst>
+          </p:cNvPr>
+          <p:cNvSpPr>
+            <a:spLocks xmlns:a="http://schemas.openxmlformats.org/drawingml/2006/main" noGrp="1"/>
+          </p:cNvSpPr>
+          <p:nvPr/>
+        </p:nvSpPr>
+        <p:spPr>
+          <a:xfrm xmlns:a="http://schemas.openxmlformats.org/drawingml/2006/main">
+            <a:off x="7829550" y="2305050"/>
+            <a:ext cx="2476500" cy="304800"/>
+          </a:xfrm>
+          <a:prstGeom xmlns:a="http://schemas.openxmlformats.org/drawingml/2006/main" prst="rect">
+            <a:avLst/>
+          </a:prstGeom>
+          <a:noFill xmlns:a="http://schemas.openxmlformats.org/drawingml/2006/main"/>
+          <a:ln xmlns:a="http://schemas.openxmlformats.org/drawingml/2006/main" w="0">
+            <a:noFill/>
+            <a:prstDash val="solid"/>
+          </a:ln>
+        </p:spPr>
+        <p:txBody>
+          <a:bodyPr xmlns:a="http://schemas.openxmlformats.org/drawingml/2006/main"/>
+          <a:lstStyle xmlns:a="http://schemas.openxmlformats.org/drawingml/2006/main"/>
+          <a:p xmlns:a="http://schemas.openxmlformats.org/drawingml/2006/main">
+            <a:pPr>
+              <a:defRPr sz="1950" b="1">
+                <a:solidFill>
+                  <a:srgbClr val="000000"/>
+                </a:solidFill>
+              </a:defRPr>
+            </a:pPr>
+            <a:r>
+              <a:rPr sz="1950" b="1">
+                <a:solidFill>
+                  <a:srgbClr val="000000"/>
+                </a:solidFill>
+              </a:rPr>
+              <a:t>What matters</a:t>
             </a:r>
           </a:p>
         </p:txBody>
@@ -9950,179 +11996,29 @@
           <p:cNvPr id="7" name="">
             <a:extLst xmlns:a="http://schemas.openxmlformats.org/drawingml/2006/main">
               <a:ext uri="{FF2B5EF4-FFF2-40B4-BE49-F238E27FC236}">
-                <a16:creationId xmlns:a16="http://schemas.microsoft.com/office/drawing/2014/main" id="{B64C1F95-69DC-4E83-8A60-214B28A39B97}"/>
-              </a:ext>
-            </a:extLst>
-          </p:cNvPr>
-          <p:cNvSpPr>
-            <a:spLocks xmlns:a="http://schemas.openxmlformats.org/drawingml/2006/main" noGrp="1"/>
-          </p:cNvSpPr>
-          <p:nvPr/>
-        </p:nvSpPr>
-        <p:spPr>
-          <a:xfrm xmlns:a="http://schemas.openxmlformats.org/drawingml/2006/main">
-            <a:off x="1047750" y="3390900"/>
-            <a:ext cx="1619250" cy="228600"/>
-          </a:xfrm>
-          <a:prstGeom xmlns:a="http://schemas.openxmlformats.org/drawingml/2006/main" prst="rect">
-            <a:avLst/>
-          </a:prstGeom>
-          <a:noFill xmlns:a="http://schemas.openxmlformats.org/drawingml/2006/main"/>
-          <a:ln xmlns:a="http://schemas.openxmlformats.org/drawingml/2006/main" w="0">
-            <a:noFill/>
-            <a:prstDash val="solid"/>
-          </a:ln>
-        </p:spPr>
-        <p:txBody>
-          <a:bodyPr xmlns:a="http://schemas.openxmlformats.org/drawingml/2006/main"/>
-          <a:lstStyle xmlns:a="http://schemas.openxmlformats.org/drawingml/2006/main"/>
-          <a:p xmlns:a="http://schemas.openxmlformats.org/drawingml/2006/main">
-            <a:pPr>
-              <a:defRPr sz="1125" b="0">
-                <a:solidFill>
-                  <a:srgbClr val="555555"/>
-                </a:solidFill>
-              </a:defRPr>
-            </a:pPr>
-            <a:r>
-              <a:rPr sz="1125" b="0">
-                <a:solidFill>
-                  <a:srgbClr val="555555"/>
-                </a:solidFill>
-              </a:rPr>
-              <a:t>alpha vs basket</a:t>
-            </a:r>
-          </a:p>
-        </p:txBody>
-      </p:sp>
-      <p:sp>
-        <p:nvSpPr>
-          <p:cNvPr id="8" name="">
-            <a:extLst xmlns:a="http://schemas.openxmlformats.org/drawingml/2006/main">
-              <a:ext uri="{FF2B5EF4-FFF2-40B4-BE49-F238E27FC236}">
-                <a16:creationId xmlns:a16="http://schemas.microsoft.com/office/drawing/2014/main" id="{8352ECCB-F1BA-4AD1-88F8-E05A94F69B39}"/>
-              </a:ext>
-            </a:extLst>
-          </p:cNvPr>
-          <p:cNvSpPr>
-            <a:spLocks xmlns:a="http://schemas.openxmlformats.org/drawingml/2006/main" noGrp="1"/>
-          </p:cNvSpPr>
-          <p:nvPr/>
-        </p:nvSpPr>
-        <p:spPr>
-          <a:xfrm xmlns:a="http://schemas.openxmlformats.org/drawingml/2006/main">
-            <a:off x="1047750" y="3829050"/>
-            <a:ext cx="1619250" cy="228600"/>
-          </a:xfrm>
-          <a:prstGeom xmlns:a="http://schemas.openxmlformats.org/drawingml/2006/main" prst="rect">
-            <a:avLst/>
-          </a:prstGeom>
-          <a:noFill xmlns:a="http://schemas.openxmlformats.org/drawingml/2006/main"/>
-          <a:ln xmlns:a="http://schemas.openxmlformats.org/drawingml/2006/main" w="0">
-            <a:noFill/>
-            <a:prstDash val="solid"/>
-          </a:ln>
-        </p:spPr>
-        <p:txBody>
-          <a:bodyPr xmlns:a="http://schemas.openxmlformats.org/drawingml/2006/main"/>
-          <a:lstStyle xmlns:a="http://schemas.openxmlformats.org/drawingml/2006/main"/>
-          <a:p xmlns:a="http://schemas.openxmlformats.org/drawingml/2006/main">
-            <a:pPr>
-              <a:defRPr sz="1275" b="0">
-                <a:solidFill>
-                  <a:srgbClr val="000000"/>
-                </a:solidFill>
-              </a:defRPr>
-            </a:pPr>
-            <a:r>
-              <a:rPr sz="1275" b="0">
-                <a:solidFill>
-                  <a:srgbClr val="000000"/>
-                </a:solidFill>
-              </a:rPr>
-              <a:t>strategy 32.7%</a:t>
-            </a:r>
-          </a:p>
-        </p:txBody>
-      </p:sp>
-      <p:sp>
-        <p:nvSpPr>
-          <p:cNvPr id="9" name="">
-            <a:extLst xmlns:a="http://schemas.openxmlformats.org/drawingml/2006/main">
-              <a:ext uri="{FF2B5EF4-FFF2-40B4-BE49-F238E27FC236}">
-                <a16:creationId xmlns:a16="http://schemas.microsoft.com/office/drawing/2014/main" id="{06284555-FD5F-40DA-B557-572912D3E4CC}"/>
-              </a:ext>
-            </a:extLst>
-          </p:cNvPr>
-          <p:cNvSpPr>
-            <a:spLocks xmlns:a="http://schemas.openxmlformats.org/drawingml/2006/main" noGrp="1"/>
-          </p:cNvSpPr>
-          <p:nvPr/>
-        </p:nvSpPr>
-        <p:spPr>
-          <a:xfrm xmlns:a="http://schemas.openxmlformats.org/drawingml/2006/main">
-            <a:off x="1047750" y="4095750"/>
-            <a:ext cx="1619250" cy="228600"/>
-          </a:xfrm>
-          <a:prstGeom xmlns:a="http://schemas.openxmlformats.org/drawingml/2006/main" prst="rect">
-            <a:avLst/>
-          </a:prstGeom>
-          <a:noFill xmlns:a="http://schemas.openxmlformats.org/drawingml/2006/main"/>
-          <a:ln xmlns:a="http://schemas.openxmlformats.org/drawingml/2006/main" w="0">
-            <a:noFill/>
-            <a:prstDash val="solid"/>
-          </a:ln>
-        </p:spPr>
-        <p:txBody>
-          <a:bodyPr xmlns:a="http://schemas.openxmlformats.org/drawingml/2006/main"/>
-          <a:lstStyle xmlns:a="http://schemas.openxmlformats.org/drawingml/2006/main"/>
-          <a:p xmlns:a="http://schemas.openxmlformats.org/drawingml/2006/main">
-            <a:pPr>
-              <a:defRPr sz="1275" b="0">
-                <a:solidFill>
-                  <a:srgbClr val="555555"/>
-                </a:solidFill>
-              </a:defRPr>
-            </a:pPr>
-            <a:r>
-              <a:rPr sz="1275" b="0">
-                <a:solidFill>
-                  <a:srgbClr val="555555"/>
-                </a:solidFill>
-              </a:rPr>
-              <a:t>basket NA</a:t>
-            </a:r>
-          </a:p>
-        </p:txBody>
-      </p:sp>
-      <p:sp>
-        <p:nvSpPr>
-          <p:cNvPr id="10" name="">
-            <a:extLst xmlns:a="http://schemas.openxmlformats.org/drawingml/2006/main">
-              <a:ext uri="{FF2B5EF4-FFF2-40B4-BE49-F238E27FC236}">
-                <a16:creationId xmlns:a16="http://schemas.microsoft.com/office/drawing/2014/main" id="{DA604946-DD5B-46E2-8CB5-3A5336CECAC3}"/>
-              </a:ext>
-            </a:extLst>
-          </p:cNvPr>
-          <p:cNvSpPr>
-            <a:spLocks xmlns:a="http://schemas.openxmlformats.org/drawingml/2006/main" noGrp="1"/>
-          </p:cNvSpPr>
-          <p:nvPr/>
-        </p:nvSpPr>
-        <p:spPr>
-          <a:xfrm xmlns:a="http://schemas.openxmlformats.org/drawingml/2006/main">
-            <a:off x="3543300" y="2095500"/>
-            <a:ext cx="2305050" cy="2286000"/>
+                <a16:creationId xmlns:a16="http://schemas.microsoft.com/office/drawing/2014/main" id="{BF600BCE-48AA-4807-A64A-CC5E18C3969D}"/>
+              </a:ext>
+            </a:extLst>
+          </p:cNvPr>
+          <p:cNvSpPr>
+            <a:spLocks xmlns:a="http://schemas.openxmlformats.org/drawingml/2006/main" noGrp="1"/>
+          </p:cNvSpPr>
+          <p:nvPr/>
+        </p:nvSpPr>
+        <p:spPr>
+          <a:xfrm xmlns:a="http://schemas.openxmlformats.org/drawingml/2006/main">
+            <a:off x="7848600" y="2971800"/>
+            <a:ext cx="76200" cy="76200"/>
           </a:xfrm>
           <a:prstGeom xmlns:a="http://schemas.openxmlformats.org/drawingml/2006/main" prst="rect">
             <a:avLst/>
           </a:prstGeom>
           <a:solidFill xmlns:a="http://schemas.openxmlformats.org/drawingml/2006/main">
-            <a:srgbClr val="EDEDED"/>
+            <a:srgbClr val="FF6B35"/>
           </a:solidFill>
           <a:ln xmlns:a="http://schemas.openxmlformats.org/drawingml/2006/main" w="9525">
             <a:solidFill>
-              <a:srgbClr val="B8BCC4"/>
+              <a:srgbClr val="FF6B35"/>
             </a:solidFill>
             <a:prstDash val="solid"/>
           </a:ln>
@@ -10130,282 +12026,82 @@
       </p:sp>
       <p:sp>
         <p:nvSpPr>
-          <p:cNvPr id="11" name="">
-            <a:extLst xmlns:a="http://schemas.openxmlformats.org/drawingml/2006/main">
-              <a:ext uri="{FF2B5EF4-FFF2-40B4-BE49-F238E27FC236}">
-                <a16:creationId xmlns:a16="http://schemas.microsoft.com/office/drawing/2014/main" id="{FF61DA9D-EC39-4A2D-90A4-1606A30F2DAA}"/>
-              </a:ext>
-            </a:extLst>
-          </p:cNvPr>
-          <p:cNvSpPr>
-            <a:spLocks xmlns:a="http://schemas.openxmlformats.org/drawingml/2006/main" noGrp="1"/>
-          </p:cNvSpPr>
-          <p:nvPr/>
-        </p:nvSpPr>
-        <p:spPr>
-          <a:xfrm xmlns:a="http://schemas.openxmlformats.org/drawingml/2006/main">
-            <a:off x="3752850" y="2324100"/>
-            <a:ext cx="1714500" cy="361950"/>
-          </a:xfrm>
-          <a:prstGeom xmlns:a="http://schemas.openxmlformats.org/drawingml/2006/main" prst="rect">
-            <a:avLst/>
-          </a:prstGeom>
-          <a:noFill xmlns:a="http://schemas.openxmlformats.org/drawingml/2006/main"/>
-          <a:ln xmlns:a="http://schemas.openxmlformats.org/drawingml/2006/main" w="0">
-            <a:noFill/>
-            <a:prstDash val="solid"/>
-          </a:ln>
-        </p:spPr>
-        <p:txBody>
-          <a:bodyPr xmlns:a="http://schemas.openxmlformats.org/drawingml/2006/main"/>
-          <a:lstStyle xmlns:a="http://schemas.openxmlformats.org/drawingml/2006/main"/>
-          <a:p xmlns:a="http://schemas.openxmlformats.org/drawingml/2006/main">
-            <a:pPr>
-              <a:defRPr sz="2400" b="1">
-                <a:solidFill>
-                  <a:srgbClr val="000000"/>
-                </a:solidFill>
-              </a:defRPr>
-            </a:pPr>
-            <a:r>
-              <a:rPr sz="2400" b="1">
-                <a:solidFill>
-                  <a:srgbClr val="000000"/>
-                </a:solidFill>
-              </a:rPr>
-              <a:t>2020</a:t>
-            </a:r>
-          </a:p>
-        </p:txBody>
-      </p:sp>
-      <p:sp>
-        <p:nvSpPr>
-          <p:cNvPr id="12" name="">
-            <a:extLst xmlns:a="http://schemas.openxmlformats.org/drawingml/2006/main">
-              <a:ext uri="{FF2B5EF4-FFF2-40B4-BE49-F238E27FC236}">
-                <a16:creationId xmlns:a16="http://schemas.microsoft.com/office/drawing/2014/main" id="{22E1C757-9B09-4A14-8217-E55DE9B711E7}"/>
-              </a:ext>
-            </a:extLst>
-          </p:cNvPr>
-          <p:cNvSpPr>
-            <a:spLocks xmlns:a="http://schemas.openxmlformats.org/drawingml/2006/main" noGrp="1"/>
-          </p:cNvSpPr>
-          <p:nvPr/>
-        </p:nvSpPr>
-        <p:spPr>
-          <a:xfrm xmlns:a="http://schemas.openxmlformats.org/drawingml/2006/main">
-            <a:off x="3752850" y="2914650"/>
-            <a:ext cx="1809750" cy="419100"/>
-          </a:xfrm>
-          <a:prstGeom xmlns:a="http://schemas.openxmlformats.org/drawingml/2006/main" prst="rect">
-            <a:avLst/>
-          </a:prstGeom>
-          <a:noFill xmlns:a="http://schemas.openxmlformats.org/drawingml/2006/main"/>
-          <a:ln xmlns:a="http://schemas.openxmlformats.org/drawingml/2006/main" w="0">
-            <a:noFill/>
-            <a:prstDash val="solid"/>
-          </a:ln>
-        </p:spPr>
-        <p:txBody>
-          <a:bodyPr xmlns:a="http://schemas.openxmlformats.org/drawingml/2006/main"/>
-          <a:lstStyle xmlns:a="http://schemas.openxmlformats.org/drawingml/2006/main"/>
-          <a:p xmlns:a="http://schemas.openxmlformats.org/drawingml/2006/main">
-            <a:pPr>
-              <a:defRPr sz="2325" b="1">
-                <a:solidFill>
-                  <a:srgbClr val="B42318"/>
-                </a:solidFill>
-              </a:defRPr>
-            </a:pPr>
-            <a:r>
-              <a:rPr sz="2325" b="1">
-                <a:solidFill>
-                  <a:srgbClr val="B42318"/>
-                </a:solidFill>
-              </a:rPr>
-              <a:t>-69.0 pp</a:t>
-            </a:r>
-          </a:p>
-        </p:txBody>
-      </p:sp>
-      <p:sp>
-        <p:nvSpPr>
-          <p:cNvPr id="13" name="">
-            <a:extLst xmlns:a="http://schemas.openxmlformats.org/drawingml/2006/main">
-              <a:ext uri="{FF2B5EF4-FFF2-40B4-BE49-F238E27FC236}">
-                <a16:creationId xmlns:a16="http://schemas.microsoft.com/office/drawing/2014/main" id="{522CF239-CE2D-4AF8-B2B7-0459FCBD612E}"/>
-              </a:ext>
-            </a:extLst>
-          </p:cNvPr>
-          <p:cNvSpPr>
-            <a:spLocks xmlns:a="http://schemas.openxmlformats.org/drawingml/2006/main" noGrp="1"/>
-          </p:cNvSpPr>
-          <p:nvPr/>
-        </p:nvSpPr>
-        <p:spPr>
-          <a:xfrm xmlns:a="http://schemas.openxmlformats.org/drawingml/2006/main">
-            <a:off x="3771900" y="3390900"/>
-            <a:ext cx="1619250" cy="228600"/>
-          </a:xfrm>
-          <a:prstGeom xmlns:a="http://schemas.openxmlformats.org/drawingml/2006/main" prst="rect">
-            <a:avLst/>
-          </a:prstGeom>
-          <a:noFill xmlns:a="http://schemas.openxmlformats.org/drawingml/2006/main"/>
-          <a:ln xmlns:a="http://schemas.openxmlformats.org/drawingml/2006/main" w="0">
-            <a:noFill/>
-            <a:prstDash val="solid"/>
-          </a:ln>
-        </p:spPr>
-        <p:txBody>
-          <a:bodyPr xmlns:a="http://schemas.openxmlformats.org/drawingml/2006/main"/>
-          <a:lstStyle xmlns:a="http://schemas.openxmlformats.org/drawingml/2006/main"/>
-          <a:p xmlns:a="http://schemas.openxmlformats.org/drawingml/2006/main">
-            <a:pPr>
-              <a:defRPr sz="1125" b="0">
-                <a:solidFill>
-                  <a:srgbClr val="555555"/>
-                </a:solidFill>
-              </a:defRPr>
-            </a:pPr>
-            <a:r>
-              <a:rPr sz="1125" b="0">
-                <a:solidFill>
-                  <a:srgbClr val="555555"/>
-                </a:solidFill>
-              </a:rPr>
-              <a:t>alpha vs basket</a:t>
-            </a:r>
-          </a:p>
-        </p:txBody>
-      </p:sp>
-      <p:sp>
-        <p:nvSpPr>
-          <p:cNvPr id="14" name="">
-            <a:extLst xmlns:a="http://schemas.openxmlformats.org/drawingml/2006/main">
-              <a:ext uri="{FF2B5EF4-FFF2-40B4-BE49-F238E27FC236}">
-                <a16:creationId xmlns:a16="http://schemas.microsoft.com/office/drawing/2014/main" id="{FEC45CE6-DC88-4371-AAB7-20506C80B7B6}"/>
-              </a:ext>
-            </a:extLst>
-          </p:cNvPr>
-          <p:cNvSpPr>
-            <a:spLocks xmlns:a="http://schemas.openxmlformats.org/drawingml/2006/main" noGrp="1"/>
-          </p:cNvSpPr>
-          <p:nvPr/>
-        </p:nvSpPr>
-        <p:spPr>
-          <a:xfrm xmlns:a="http://schemas.openxmlformats.org/drawingml/2006/main">
-            <a:off x="3771900" y="3829050"/>
-            <a:ext cx="1619250" cy="228600"/>
-          </a:xfrm>
-          <a:prstGeom xmlns:a="http://schemas.openxmlformats.org/drawingml/2006/main" prst="rect">
-            <a:avLst/>
-          </a:prstGeom>
-          <a:noFill xmlns:a="http://schemas.openxmlformats.org/drawingml/2006/main"/>
-          <a:ln xmlns:a="http://schemas.openxmlformats.org/drawingml/2006/main" w="0">
-            <a:noFill/>
-            <a:prstDash val="solid"/>
-          </a:ln>
-        </p:spPr>
-        <p:txBody>
-          <a:bodyPr xmlns:a="http://schemas.openxmlformats.org/drawingml/2006/main"/>
-          <a:lstStyle xmlns:a="http://schemas.openxmlformats.org/drawingml/2006/main"/>
-          <a:p xmlns:a="http://schemas.openxmlformats.org/drawingml/2006/main">
-            <a:pPr>
-              <a:defRPr sz="1275" b="0">
-                <a:solidFill>
-                  <a:srgbClr val="000000"/>
-                </a:solidFill>
-              </a:defRPr>
-            </a:pPr>
-            <a:r>
-              <a:rPr sz="1275" b="0">
-                <a:solidFill>
-                  <a:srgbClr val="000000"/>
-                </a:solidFill>
-              </a:rPr>
-              <a:t>strategy 158.3%</a:t>
-            </a:r>
-          </a:p>
-        </p:txBody>
-      </p:sp>
-      <p:sp>
-        <p:nvSpPr>
-          <p:cNvPr id="15" name="">
-            <a:extLst xmlns:a="http://schemas.openxmlformats.org/drawingml/2006/main">
-              <a:ext uri="{FF2B5EF4-FFF2-40B4-BE49-F238E27FC236}">
-                <a16:creationId xmlns:a16="http://schemas.microsoft.com/office/drawing/2014/main" id="{C5361DA6-FF35-411D-994E-E1B0D5F68789}"/>
-              </a:ext>
-            </a:extLst>
-          </p:cNvPr>
-          <p:cNvSpPr>
-            <a:spLocks xmlns:a="http://schemas.openxmlformats.org/drawingml/2006/main" noGrp="1"/>
-          </p:cNvSpPr>
-          <p:nvPr/>
-        </p:nvSpPr>
-        <p:spPr>
-          <a:xfrm xmlns:a="http://schemas.openxmlformats.org/drawingml/2006/main">
-            <a:off x="3771900" y="4095750"/>
-            <a:ext cx="1619250" cy="228600"/>
-          </a:xfrm>
-          <a:prstGeom xmlns:a="http://schemas.openxmlformats.org/drawingml/2006/main" prst="rect">
-            <a:avLst/>
-          </a:prstGeom>
-          <a:noFill xmlns:a="http://schemas.openxmlformats.org/drawingml/2006/main"/>
-          <a:ln xmlns:a="http://schemas.openxmlformats.org/drawingml/2006/main" w="0">
-            <a:noFill/>
-            <a:prstDash val="solid"/>
-          </a:ln>
-        </p:spPr>
-        <p:txBody>
-          <a:bodyPr xmlns:a="http://schemas.openxmlformats.org/drawingml/2006/main"/>
-          <a:lstStyle xmlns:a="http://schemas.openxmlformats.org/drawingml/2006/main"/>
-          <a:p xmlns:a="http://schemas.openxmlformats.org/drawingml/2006/main">
-            <a:pPr>
-              <a:defRPr sz="1275" b="0">
-                <a:solidFill>
-                  <a:srgbClr val="555555"/>
-                </a:solidFill>
-              </a:defRPr>
-            </a:pPr>
-            <a:r>
-              <a:rPr sz="1275" b="0">
-                <a:solidFill>
-                  <a:srgbClr val="555555"/>
-                </a:solidFill>
-              </a:rPr>
-              <a:t>basket NA</a:t>
-            </a:r>
-          </a:p>
-        </p:txBody>
-      </p:sp>
-      <p:sp>
-        <p:nvSpPr>
-          <p:cNvPr id="16" name="">
-            <a:extLst xmlns:a="http://schemas.openxmlformats.org/drawingml/2006/main">
-              <a:ext uri="{FF2B5EF4-FFF2-40B4-BE49-F238E27FC236}">
-                <a16:creationId xmlns:a16="http://schemas.microsoft.com/office/drawing/2014/main" id="{2A220996-5ACF-4AC4-8A9F-4AE37388FCA0}"/>
-              </a:ext>
-            </a:extLst>
-          </p:cNvPr>
-          <p:cNvSpPr>
-            <a:spLocks xmlns:a="http://schemas.openxmlformats.org/drawingml/2006/main" noGrp="1"/>
-          </p:cNvSpPr>
-          <p:nvPr/>
-        </p:nvSpPr>
-        <p:spPr>
-          <a:xfrm xmlns:a="http://schemas.openxmlformats.org/drawingml/2006/main">
-            <a:off x="6267450" y="2095500"/>
-            <a:ext cx="2305050" cy="2286000"/>
+          <p:cNvPr id="8" name="">
+            <a:extLst xmlns:a="http://schemas.openxmlformats.org/drawingml/2006/main">
+              <a:ext uri="{FF2B5EF4-FFF2-40B4-BE49-F238E27FC236}">
+                <a16:creationId xmlns:a16="http://schemas.microsoft.com/office/drawing/2014/main" id="{E6A6B2F2-893C-41EB-8D92-6A827692B1CA}"/>
+              </a:ext>
+            </a:extLst>
+          </p:cNvPr>
+          <p:cNvSpPr>
+            <a:spLocks xmlns:a="http://schemas.openxmlformats.org/drawingml/2006/main" noGrp="1"/>
+          </p:cNvSpPr>
+          <p:nvPr/>
+        </p:nvSpPr>
+        <p:spPr>
+          <a:xfrm xmlns:a="http://schemas.openxmlformats.org/drawingml/2006/main">
+            <a:off x="8058150" y="2876550"/>
+            <a:ext cx="2514600" cy="476250"/>
+          </a:xfrm>
+          <a:prstGeom xmlns:a="http://schemas.openxmlformats.org/drawingml/2006/main" prst="rect">
+            <a:avLst/>
+          </a:prstGeom>
+          <a:noFill xmlns:a="http://schemas.openxmlformats.org/drawingml/2006/main"/>
+          <a:ln xmlns:a="http://schemas.openxmlformats.org/drawingml/2006/main" w="0">
+            <a:noFill/>
+            <a:prstDash val="solid"/>
+          </a:ln>
+        </p:spPr>
+        <p:txBody>
+          <a:bodyPr xmlns:a="http://schemas.openxmlformats.org/drawingml/2006/main"/>
+          <a:lstStyle xmlns:a="http://schemas.openxmlformats.org/drawingml/2006/main"/>
+          <a:p xmlns:a="http://schemas.openxmlformats.org/drawingml/2006/main">
+            <a:pPr>
+              <a:defRPr sz="1200" b="0">
+                <a:solidFill>
+                  <a:srgbClr val="000000"/>
+                </a:solidFill>
+              </a:defRPr>
+            </a:pPr>
+            <a:r>
+              <a:rPr sz="1200" b="0">
+                <a:solidFill>
+                  <a:srgbClr val="000000"/>
+                </a:solidFill>
+              </a:rPr>
+              <a:t>2020 remains punishing because basket hold returned about 227%.</a:t>
+            </a:r>
+          </a:p>
+        </p:txBody>
+      </p:sp>
+      <p:sp>
+        <p:nvSpPr>
+          <p:cNvPr id="9" name="">
+            <a:extLst xmlns:a="http://schemas.openxmlformats.org/drawingml/2006/main">
+              <a:ext uri="{FF2B5EF4-FFF2-40B4-BE49-F238E27FC236}">
+                <a16:creationId xmlns:a16="http://schemas.microsoft.com/office/drawing/2014/main" id="{B72F9C5A-DBD0-4CBE-813E-E53416C4FFA9}"/>
+              </a:ext>
+            </a:extLst>
+          </p:cNvPr>
+          <p:cNvSpPr>
+            <a:spLocks xmlns:a="http://schemas.openxmlformats.org/drawingml/2006/main" noGrp="1"/>
+          </p:cNvSpPr>
+          <p:nvPr/>
+        </p:nvSpPr>
+        <p:spPr>
+          <a:xfrm xmlns:a="http://schemas.openxmlformats.org/drawingml/2006/main">
+            <a:off x="7848600" y="3390900"/>
+            <a:ext cx="76200" cy="76200"/>
           </a:xfrm>
           <a:prstGeom xmlns:a="http://schemas.openxmlformats.org/drawingml/2006/main" prst="rect">
             <a:avLst/>
           </a:prstGeom>
           <a:solidFill xmlns:a="http://schemas.openxmlformats.org/drawingml/2006/main">
-            <a:srgbClr val="EDEDED"/>
+            <a:srgbClr val="FF6B35"/>
           </a:solidFill>
           <a:ln xmlns:a="http://schemas.openxmlformats.org/drawingml/2006/main" w="9525">
             <a:solidFill>
-              <a:srgbClr val="B8BCC4"/>
+              <a:srgbClr val="FF6B35"/>
             </a:solidFill>
             <a:prstDash val="solid"/>
           </a:ln>
@@ -10413,282 +12109,82 @@
       </p:sp>
       <p:sp>
         <p:nvSpPr>
-          <p:cNvPr id="17" name="">
-            <a:extLst xmlns:a="http://schemas.openxmlformats.org/drawingml/2006/main">
-              <a:ext uri="{FF2B5EF4-FFF2-40B4-BE49-F238E27FC236}">
-                <a16:creationId xmlns:a16="http://schemas.microsoft.com/office/drawing/2014/main" id="{A180EE10-BC01-4320-BDF3-49B03D3BCA29}"/>
-              </a:ext>
-            </a:extLst>
-          </p:cNvPr>
-          <p:cNvSpPr>
-            <a:spLocks xmlns:a="http://schemas.openxmlformats.org/drawingml/2006/main" noGrp="1"/>
-          </p:cNvSpPr>
-          <p:nvPr/>
-        </p:nvSpPr>
-        <p:spPr>
-          <a:xfrm xmlns:a="http://schemas.openxmlformats.org/drawingml/2006/main">
-            <a:off x="6477000" y="2324100"/>
-            <a:ext cx="1714500" cy="361950"/>
-          </a:xfrm>
-          <a:prstGeom xmlns:a="http://schemas.openxmlformats.org/drawingml/2006/main" prst="rect">
-            <a:avLst/>
-          </a:prstGeom>
-          <a:noFill xmlns:a="http://schemas.openxmlformats.org/drawingml/2006/main"/>
-          <a:ln xmlns:a="http://schemas.openxmlformats.org/drawingml/2006/main" w="0">
-            <a:noFill/>
-            <a:prstDash val="solid"/>
-          </a:ln>
-        </p:spPr>
-        <p:txBody>
-          <a:bodyPr xmlns:a="http://schemas.openxmlformats.org/drawingml/2006/main"/>
-          <a:lstStyle xmlns:a="http://schemas.openxmlformats.org/drawingml/2006/main"/>
-          <a:p xmlns:a="http://schemas.openxmlformats.org/drawingml/2006/main">
-            <a:pPr>
-              <a:defRPr sz="2400" b="1">
-                <a:solidFill>
-                  <a:srgbClr val="000000"/>
-                </a:solidFill>
-              </a:defRPr>
-            </a:pPr>
-            <a:r>
-              <a:rPr sz="2400" b="1">
-                <a:solidFill>
-                  <a:srgbClr val="000000"/>
-                </a:solidFill>
-              </a:rPr>
-              <a:t>2022</a:t>
-            </a:r>
-          </a:p>
-        </p:txBody>
-      </p:sp>
-      <p:sp>
-        <p:nvSpPr>
-          <p:cNvPr id="18" name="">
-            <a:extLst xmlns:a="http://schemas.openxmlformats.org/drawingml/2006/main">
-              <a:ext uri="{FF2B5EF4-FFF2-40B4-BE49-F238E27FC236}">
-                <a16:creationId xmlns:a16="http://schemas.microsoft.com/office/drawing/2014/main" id="{FCA26A24-7CEF-42B0-A8CF-98E8BE78151C}"/>
-              </a:ext>
-            </a:extLst>
-          </p:cNvPr>
-          <p:cNvSpPr>
-            <a:spLocks xmlns:a="http://schemas.openxmlformats.org/drawingml/2006/main" noGrp="1"/>
-          </p:cNvSpPr>
-          <p:nvPr/>
-        </p:nvSpPr>
-        <p:spPr>
-          <a:xfrm xmlns:a="http://schemas.openxmlformats.org/drawingml/2006/main">
-            <a:off x="6477000" y="2914650"/>
-            <a:ext cx="1809750" cy="419100"/>
-          </a:xfrm>
-          <a:prstGeom xmlns:a="http://schemas.openxmlformats.org/drawingml/2006/main" prst="rect">
-            <a:avLst/>
-          </a:prstGeom>
-          <a:noFill xmlns:a="http://schemas.openxmlformats.org/drawingml/2006/main"/>
-          <a:ln xmlns:a="http://schemas.openxmlformats.org/drawingml/2006/main" w="0">
-            <a:noFill/>
-            <a:prstDash val="solid"/>
-          </a:ln>
-        </p:spPr>
-        <p:txBody>
-          <a:bodyPr xmlns:a="http://schemas.openxmlformats.org/drawingml/2006/main"/>
-          <a:lstStyle xmlns:a="http://schemas.openxmlformats.org/drawingml/2006/main"/>
-          <a:p xmlns:a="http://schemas.openxmlformats.org/drawingml/2006/main">
-            <a:pPr>
-              <a:defRPr sz="2325" b="1">
-                <a:solidFill>
-                  <a:srgbClr val="067647"/>
-                </a:solidFill>
-              </a:defRPr>
-            </a:pPr>
-            <a:r>
-              <a:rPr sz="2325" b="1">
-                <a:solidFill>
-                  <a:srgbClr val="067647"/>
-                </a:solidFill>
-              </a:rPr>
-              <a:t>+17.0 pp</a:t>
-            </a:r>
-          </a:p>
-        </p:txBody>
-      </p:sp>
-      <p:sp>
-        <p:nvSpPr>
-          <p:cNvPr id="19" name="">
-            <a:extLst xmlns:a="http://schemas.openxmlformats.org/drawingml/2006/main">
-              <a:ext uri="{FF2B5EF4-FFF2-40B4-BE49-F238E27FC236}">
-                <a16:creationId xmlns:a16="http://schemas.microsoft.com/office/drawing/2014/main" id="{A1ABE092-4230-40E5-A8B4-C7C32DD64B66}"/>
-              </a:ext>
-            </a:extLst>
-          </p:cNvPr>
-          <p:cNvSpPr>
-            <a:spLocks xmlns:a="http://schemas.openxmlformats.org/drawingml/2006/main" noGrp="1"/>
-          </p:cNvSpPr>
-          <p:nvPr/>
-        </p:nvSpPr>
-        <p:spPr>
-          <a:xfrm xmlns:a="http://schemas.openxmlformats.org/drawingml/2006/main">
-            <a:off x="6496050" y="3390900"/>
-            <a:ext cx="1619250" cy="228600"/>
-          </a:xfrm>
-          <a:prstGeom xmlns:a="http://schemas.openxmlformats.org/drawingml/2006/main" prst="rect">
-            <a:avLst/>
-          </a:prstGeom>
-          <a:noFill xmlns:a="http://schemas.openxmlformats.org/drawingml/2006/main"/>
-          <a:ln xmlns:a="http://schemas.openxmlformats.org/drawingml/2006/main" w="0">
-            <a:noFill/>
-            <a:prstDash val="solid"/>
-          </a:ln>
-        </p:spPr>
-        <p:txBody>
-          <a:bodyPr xmlns:a="http://schemas.openxmlformats.org/drawingml/2006/main"/>
-          <a:lstStyle xmlns:a="http://schemas.openxmlformats.org/drawingml/2006/main"/>
-          <a:p xmlns:a="http://schemas.openxmlformats.org/drawingml/2006/main">
-            <a:pPr>
-              <a:defRPr sz="1125" b="0">
-                <a:solidFill>
-                  <a:srgbClr val="555555"/>
-                </a:solidFill>
-              </a:defRPr>
-            </a:pPr>
-            <a:r>
-              <a:rPr sz="1125" b="0">
-                <a:solidFill>
-                  <a:srgbClr val="555555"/>
-                </a:solidFill>
-              </a:rPr>
-              <a:t>alpha vs basket</a:t>
-            </a:r>
-          </a:p>
-        </p:txBody>
-      </p:sp>
-      <p:sp>
-        <p:nvSpPr>
-          <p:cNvPr id="20" name="">
-            <a:extLst xmlns:a="http://schemas.openxmlformats.org/drawingml/2006/main">
-              <a:ext uri="{FF2B5EF4-FFF2-40B4-BE49-F238E27FC236}">
-                <a16:creationId xmlns:a16="http://schemas.microsoft.com/office/drawing/2014/main" id="{68123003-3C5F-45C4-B037-40200356EB65}"/>
-              </a:ext>
-            </a:extLst>
-          </p:cNvPr>
-          <p:cNvSpPr>
-            <a:spLocks xmlns:a="http://schemas.openxmlformats.org/drawingml/2006/main" noGrp="1"/>
-          </p:cNvSpPr>
-          <p:nvPr/>
-        </p:nvSpPr>
-        <p:spPr>
-          <a:xfrm xmlns:a="http://schemas.openxmlformats.org/drawingml/2006/main">
-            <a:off x="6496050" y="3829050"/>
-            <a:ext cx="1619250" cy="228600"/>
-          </a:xfrm>
-          <a:prstGeom xmlns:a="http://schemas.openxmlformats.org/drawingml/2006/main" prst="rect">
-            <a:avLst/>
-          </a:prstGeom>
-          <a:noFill xmlns:a="http://schemas.openxmlformats.org/drawingml/2006/main"/>
-          <a:ln xmlns:a="http://schemas.openxmlformats.org/drawingml/2006/main" w="0">
-            <a:noFill/>
-            <a:prstDash val="solid"/>
-          </a:ln>
-        </p:spPr>
-        <p:txBody>
-          <a:bodyPr xmlns:a="http://schemas.openxmlformats.org/drawingml/2006/main"/>
-          <a:lstStyle xmlns:a="http://schemas.openxmlformats.org/drawingml/2006/main"/>
-          <a:p xmlns:a="http://schemas.openxmlformats.org/drawingml/2006/main">
-            <a:pPr>
-              <a:defRPr sz="1275" b="0">
-                <a:solidFill>
-                  <a:srgbClr val="000000"/>
-                </a:solidFill>
-              </a:defRPr>
-            </a:pPr>
-            <a:r>
-              <a:rPr sz="1275" b="0">
-                <a:solidFill>
-                  <a:srgbClr val="000000"/>
-                </a:solidFill>
-              </a:rPr>
-              <a:t>strategy -36.1%</a:t>
-            </a:r>
-          </a:p>
-        </p:txBody>
-      </p:sp>
-      <p:sp>
-        <p:nvSpPr>
-          <p:cNvPr id="21" name="">
-            <a:extLst xmlns:a="http://schemas.openxmlformats.org/drawingml/2006/main">
-              <a:ext uri="{FF2B5EF4-FFF2-40B4-BE49-F238E27FC236}">
-                <a16:creationId xmlns:a16="http://schemas.microsoft.com/office/drawing/2014/main" id="{7BCF63F6-C479-47EE-AAFE-8C0034296542}"/>
-              </a:ext>
-            </a:extLst>
-          </p:cNvPr>
-          <p:cNvSpPr>
-            <a:spLocks xmlns:a="http://schemas.openxmlformats.org/drawingml/2006/main" noGrp="1"/>
-          </p:cNvSpPr>
-          <p:nvPr/>
-        </p:nvSpPr>
-        <p:spPr>
-          <a:xfrm xmlns:a="http://schemas.openxmlformats.org/drawingml/2006/main">
-            <a:off x="6496050" y="4095750"/>
-            <a:ext cx="1619250" cy="228600"/>
-          </a:xfrm>
-          <a:prstGeom xmlns:a="http://schemas.openxmlformats.org/drawingml/2006/main" prst="rect">
-            <a:avLst/>
-          </a:prstGeom>
-          <a:noFill xmlns:a="http://schemas.openxmlformats.org/drawingml/2006/main"/>
-          <a:ln xmlns:a="http://schemas.openxmlformats.org/drawingml/2006/main" w="0">
-            <a:noFill/>
-            <a:prstDash val="solid"/>
-          </a:ln>
-        </p:spPr>
-        <p:txBody>
-          <a:bodyPr xmlns:a="http://schemas.openxmlformats.org/drawingml/2006/main"/>
-          <a:lstStyle xmlns:a="http://schemas.openxmlformats.org/drawingml/2006/main"/>
-          <a:p xmlns:a="http://schemas.openxmlformats.org/drawingml/2006/main">
-            <a:pPr>
-              <a:defRPr sz="1275" b="0">
-                <a:solidFill>
-                  <a:srgbClr val="555555"/>
-                </a:solidFill>
-              </a:defRPr>
-            </a:pPr>
-            <a:r>
-              <a:rPr sz="1275" b="0">
-                <a:solidFill>
-                  <a:srgbClr val="555555"/>
-                </a:solidFill>
-              </a:rPr>
-              <a:t>basket NA</a:t>
-            </a:r>
-          </a:p>
-        </p:txBody>
-      </p:sp>
-      <p:sp>
-        <p:nvSpPr>
-          <p:cNvPr id="22" name="">
-            <a:extLst xmlns:a="http://schemas.openxmlformats.org/drawingml/2006/main">
-              <a:ext uri="{FF2B5EF4-FFF2-40B4-BE49-F238E27FC236}">
-                <a16:creationId xmlns:a16="http://schemas.microsoft.com/office/drawing/2014/main" id="{99A8BEC3-3801-4C20-A446-735110988EB4}"/>
-              </a:ext>
-            </a:extLst>
-          </p:cNvPr>
-          <p:cNvSpPr>
-            <a:spLocks xmlns:a="http://schemas.openxmlformats.org/drawingml/2006/main" noGrp="1"/>
-          </p:cNvSpPr>
-          <p:nvPr/>
-        </p:nvSpPr>
-        <p:spPr>
-          <a:xfrm xmlns:a="http://schemas.openxmlformats.org/drawingml/2006/main">
-            <a:off x="8991600" y="2095500"/>
-            <a:ext cx="2305050" cy="2286000"/>
+          <p:cNvPr id="10" name="">
+            <a:extLst xmlns:a="http://schemas.openxmlformats.org/drawingml/2006/main">
+              <a:ext uri="{FF2B5EF4-FFF2-40B4-BE49-F238E27FC236}">
+                <a16:creationId xmlns:a16="http://schemas.microsoft.com/office/drawing/2014/main" id="{E267FCD1-C28E-46E7-953B-D1F33ECA3FF8}"/>
+              </a:ext>
+            </a:extLst>
+          </p:cNvPr>
+          <p:cNvSpPr>
+            <a:spLocks xmlns:a="http://schemas.openxmlformats.org/drawingml/2006/main" noGrp="1"/>
+          </p:cNvSpPr>
+          <p:nvPr/>
+        </p:nvSpPr>
+        <p:spPr>
+          <a:xfrm xmlns:a="http://schemas.openxmlformats.org/drawingml/2006/main">
+            <a:off x="8058150" y="3295650"/>
+            <a:ext cx="2514600" cy="476250"/>
+          </a:xfrm>
+          <a:prstGeom xmlns:a="http://schemas.openxmlformats.org/drawingml/2006/main" prst="rect">
+            <a:avLst/>
+          </a:prstGeom>
+          <a:noFill xmlns:a="http://schemas.openxmlformats.org/drawingml/2006/main"/>
+          <a:ln xmlns:a="http://schemas.openxmlformats.org/drawingml/2006/main" w="0">
+            <a:noFill/>
+            <a:prstDash val="solid"/>
+          </a:ln>
+        </p:spPr>
+        <p:txBody>
+          <a:bodyPr xmlns:a="http://schemas.openxmlformats.org/drawingml/2006/main"/>
+          <a:lstStyle xmlns:a="http://schemas.openxmlformats.org/drawingml/2006/main"/>
+          <a:p xmlns:a="http://schemas.openxmlformats.org/drawingml/2006/main">
+            <a:pPr>
+              <a:defRPr sz="1200" b="0">
+                <a:solidFill>
+                  <a:srgbClr val="000000"/>
+                </a:solidFill>
+              </a:defRPr>
+            </a:pPr>
+            <a:r>
+              <a:rPr sz="1200" b="0">
+                <a:solidFill>
+                  <a:srgbClr val="000000"/>
+                </a:solidFill>
+              </a:rPr>
+              <a:t>2022 rewards staying out of a falling high-beta basket.</a:t>
+            </a:r>
+          </a:p>
+        </p:txBody>
+      </p:sp>
+      <p:sp>
+        <p:nvSpPr>
+          <p:cNvPr id="11" name="">
+            <a:extLst xmlns:a="http://schemas.openxmlformats.org/drawingml/2006/main">
+              <a:ext uri="{FF2B5EF4-FFF2-40B4-BE49-F238E27FC236}">
+                <a16:creationId xmlns:a16="http://schemas.microsoft.com/office/drawing/2014/main" id="{8750E445-FF43-476B-B410-92F776B12AAD}"/>
+              </a:ext>
+            </a:extLst>
+          </p:cNvPr>
+          <p:cNvSpPr>
+            <a:spLocks xmlns:a="http://schemas.openxmlformats.org/drawingml/2006/main" noGrp="1"/>
+          </p:cNvSpPr>
+          <p:nvPr/>
+        </p:nvSpPr>
+        <p:spPr>
+          <a:xfrm xmlns:a="http://schemas.openxmlformats.org/drawingml/2006/main">
+            <a:off x="7848600" y="3810000"/>
+            <a:ext cx="76200" cy="76200"/>
           </a:xfrm>
           <a:prstGeom xmlns:a="http://schemas.openxmlformats.org/drawingml/2006/main" prst="rect">
             <a:avLst/>
           </a:prstGeom>
           <a:solidFill xmlns:a="http://schemas.openxmlformats.org/drawingml/2006/main">
-            <a:srgbClr val="EDEDED"/>
+            <a:srgbClr val="FF6B35"/>
           </a:solidFill>
           <a:ln xmlns:a="http://schemas.openxmlformats.org/drawingml/2006/main" w="9525">
             <a:solidFill>
-              <a:srgbClr val="B8BCC4"/>
+              <a:srgbClr val="FF6B35"/>
             </a:solidFill>
             <a:prstDash val="solid"/>
           </a:ln>
@@ -10696,310 +12192,143 @@
       </p:sp>
       <p:sp>
         <p:nvSpPr>
-          <p:cNvPr id="23" name="">
-            <a:extLst xmlns:a="http://schemas.openxmlformats.org/drawingml/2006/main">
-              <a:ext uri="{FF2B5EF4-FFF2-40B4-BE49-F238E27FC236}">
-                <a16:creationId xmlns:a16="http://schemas.microsoft.com/office/drawing/2014/main" id="{C65706CF-9C0F-4370-A9B1-34CD7ACBF056}"/>
-              </a:ext>
-            </a:extLst>
-          </p:cNvPr>
-          <p:cNvSpPr>
-            <a:spLocks xmlns:a="http://schemas.openxmlformats.org/drawingml/2006/main" noGrp="1"/>
-          </p:cNvSpPr>
-          <p:nvPr/>
-        </p:nvSpPr>
-        <p:spPr>
-          <a:xfrm xmlns:a="http://schemas.openxmlformats.org/drawingml/2006/main">
-            <a:off x="9201150" y="2324100"/>
-            <a:ext cx="1714500" cy="361950"/>
-          </a:xfrm>
-          <a:prstGeom xmlns:a="http://schemas.openxmlformats.org/drawingml/2006/main" prst="rect">
-            <a:avLst/>
-          </a:prstGeom>
-          <a:noFill xmlns:a="http://schemas.openxmlformats.org/drawingml/2006/main"/>
-          <a:ln xmlns:a="http://schemas.openxmlformats.org/drawingml/2006/main" w="0">
-            <a:noFill/>
-            <a:prstDash val="solid"/>
-          </a:ln>
-        </p:spPr>
-        <p:txBody>
-          <a:bodyPr xmlns:a="http://schemas.openxmlformats.org/drawingml/2006/main"/>
-          <a:lstStyle xmlns:a="http://schemas.openxmlformats.org/drawingml/2006/main"/>
-          <a:p xmlns:a="http://schemas.openxmlformats.org/drawingml/2006/main">
-            <a:pPr>
-              <a:defRPr sz="2400" b="1">
-                <a:solidFill>
-                  <a:srgbClr val="000000"/>
-                </a:solidFill>
-              </a:defRPr>
-            </a:pPr>
-            <a:r>
-              <a:rPr sz="2400" b="1">
-                <a:solidFill>
-                  <a:srgbClr val="000000"/>
-                </a:solidFill>
-              </a:rPr>
-              <a:t>2024</a:t>
-            </a:r>
-          </a:p>
-        </p:txBody>
-      </p:sp>
-      <p:sp>
-        <p:nvSpPr>
-          <p:cNvPr id="24" name="">
-            <a:extLst xmlns:a="http://schemas.openxmlformats.org/drawingml/2006/main">
-              <a:ext uri="{FF2B5EF4-FFF2-40B4-BE49-F238E27FC236}">
-                <a16:creationId xmlns:a16="http://schemas.microsoft.com/office/drawing/2014/main" id="{67D9EF96-6650-4DF7-B600-B8EF56CD98BB}"/>
-              </a:ext>
-            </a:extLst>
-          </p:cNvPr>
-          <p:cNvSpPr>
-            <a:spLocks xmlns:a="http://schemas.openxmlformats.org/drawingml/2006/main" noGrp="1"/>
-          </p:cNvSpPr>
-          <p:nvPr/>
-        </p:nvSpPr>
-        <p:spPr>
-          <a:xfrm xmlns:a="http://schemas.openxmlformats.org/drawingml/2006/main">
-            <a:off x="9201150" y="2914650"/>
-            <a:ext cx="1809750" cy="419100"/>
-          </a:xfrm>
-          <a:prstGeom xmlns:a="http://schemas.openxmlformats.org/drawingml/2006/main" prst="rect">
-            <a:avLst/>
-          </a:prstGeom>
-          <a:noFill xmlns:a="http://schemas.openxmlformats.org/drawingml/2006/main"/>
-          <a:ln xmlns:a="http://schemas.openxmlformats.org/drawingml/2006/main" w="0">
-            <a:noFill/>
-            <a:prstDash val="solid"/>
-          </a:ln>
-        </p:spPr>
-        <p:txBody>
-          <a:bodyPr xmlns:a="http://schemas.openxmlformats.org/drawingml/2006/main"/>
-          <a:lstStyle xmlns:a="http://schemas.openxmlformats.org/drawingml/2006/main"/>
-          <a:p xmlns:a="http://schemas.openxmlformats.org/drawingml/2006/main">
-            <a:pPr>
-              <a:defRPr sz="2325" b="1">
-                <a:solidFill>
-                  <a:srgbClr val="067647"/>
-                </a:solidFill>
-              </a:defRPr>
-            </a:pPr>
-            <a:r>
-              <a:rPr sz="2325" b="1">
-                <a:solidFill>
-                  <a:srgbClr val="067647"/>
-                </a:solidFill>
-              </a:rPr>
-              <a:t>+38.3 pp</a:t>
-            </a:r>
-          </a:p>
-        </p:txBody>
-      </p:sp>
-      <p:sp>
-        <p:nvSpPr>
-          <p:cNvPr id="25" name="">
-            <a:extLst xmlns:a="http://schemas.openxmlformats.org/drawingml/2006/main">
-              <a:ext uri="{FF2B5EF4-FFF2-40B4-BE49-F238E27FC236}">
-                <a16:creationId xmlns:a16="http://schemas.microsoft.com/office/drawing/2014/main" id="{B595F61B-CE01-4C78-ABC1-CCA1E29D438E}"/>
-              </a:ext>
-            </a:extLst>
-          </p:cNvPr>
-          <p:cNvSpPr>
-            <a:spLocks xmlns:a="http://schemas.openxmlformats.org/drawingml/2006/main" noGrp="1"/>
-          </p:cNvSpPr>
-          <p:nvPr/>
-        </p:nvSpPr>
-        <p:spPr>
-          <a:xfrm xmlns:a="http://schemas.openxmlformats.org/drawingml/2006/main">
-            <a:off x="9220200" y="3390900"/>
-            <a:ext cx="1619250" cy="228600"/>
-          </a:xfrm>
-          <a:prstGeom xmlns:a="http://schemas.openxmlformats.org/drawingml/2006/main" prst="rect">
-            <a:avLst/>
-          </a:prstGeom>
-          <a:noFill xmlns:a="http://schemas.openxmlformats.org/drawingml/2006/main"/>
-          <a:ln xmlns:a="http://schemas.openxmlformats.org/drawingml/2006/main" w="0">
-            <a:noFill/>
-            <a:prstDash val="solid"/>
-          </a:ln>
-        </p:spPr>
-        <p:txBody>
-          <a:bodyPr xmlns:a="http://schemas.openxmlformats.org/drawingml/2006/main"/>
-          <a:lstStyle xmlns:a="http://schemas.openxmlformats.org/drawingml/2006/main"/>
-          <a:p xmlns:a="http://schemas.openxmlformats.org/drawingml/2006/main">
-            <a:pPr>
-              <a:defRPr sz="1125" b="0">
-                <a:solidFill>
-                  <a:srgbClr val="555555"/>
-                </a:solidFill>
-              </a:defRPr>
-            </a:pPr>
-            <a:r>
-              <a:rPr sz="1125" b="0">
-                <a:solidFill>
-                  <a:srgbClr val="555555"/>
-                </a:solidFill>
-              </a:rPr>
-              <a:t>alpha vs basket</a:t>
-            </a:r>
-          </a:p>
-        </p:txBody>
-      </p:sp>
-      <p:sp>
-        <p:nvSpPr>
-          <p:cNvPr id="26" name="">
-            <a:extLst xmlns:a="http://schemas.openxmlformats.org/drawingml/2006/main">
-              <a:ext uri="{FF2B5EF4-FFF2-40B4-BE49-F238E27FC236}">
-                <a16:creationId xmlns:a16="http://schemas.microsoft.com/office/drawing/2014/main" id="{12838D63-E4C6-4F5F-92D8-7F5181D4D9D5}"/>
-              </a:ext>
-            </a:extLst>
-          </p:cNvPr>
-          <p:cNvSpPr>
-            <a:spLocks xmlns:a="http://schemas.openxmlformats.org/drawingml/2006/main" noGrp="1"/>
-          </p:cNvSpPr>
-          <p:nvPr/>
-        </p:nvSpPr>
-        <p:spPr>
-          <a:xfrm xmlns:a="http://schemas.openxmlformats.org/drawingml/2006/main">
-            <a:off x="9220200" y="3829050"/>
-            <a:ext cx="1619250" cy="228600"/>
-          </a:xfrm>
-          <a:prstGeom xmlns:a="http://schemas.openxmlformats.org/drawingml/2006/main" prst="rect">
-            <a:avLst/>
-          </a:prstGeom>
-          <a:noFill xmlns:a="http://schemas.openxmlformats.org/drawingml/2006/main"/>
-          <a:ln xmlns:a="http://schemas.openxmlformats.org/drawingml/2006/main" w="0">
-            <a:noFill/>
-            <a:prstDash val="solid"/>
-          </a:ln>
-        </p:spPr>
-        <p:txBody>
-          <a:bodyPr xmlns:a="http://schemas.openxmlformats.org/drawingml/2006/main"/>
-          <a:lstStyle xmlns:a="http://schemas.openxmlformats.org/drawingml/2006/main"/>
-          <a:p xmlns:a="http://schemas.openxmlformats.org/drawingml/2006/main">
-            <a:pPr>
-              <a:defRPr sz="1275" b="0">
-                <a:solidFill>
-                  <a:srgbClr val="000000"/>
-                </a:solidFill>
-              </a:defRPr>
-            </a:pPr>
-            <a:r>
-              <a:rPr sz="1275" b="0">
-                <a:solidFill>
-                  <a:srgbClr val="000000"/>
-                </a:solidFill>
-              </a:rPr>
-              <a:t>strategy 171.8%</a:t>
-            </a:r>
-          </a:p>
-        </p:txBody>
-      </p:sp>
-      <p:sp>
-        <p:nvSpPr>
-          <p:cNvPr id="27" name="">
-            <a:extLst xmlns:a="http://schemas.openxmlformats.org/drawingml/2006/main">
-              <a:ext uri="{FF2B5EF4-FFF2-40B4-BE49-F238E27FC236}">
-                <a16:creationId xmlns:a16="http://schemas.microsoft.com/office/drawing/2014/main" id="{5A80B485-5983-49D4-8A8F-0DB2496AED6A}"/>
-              </a:ext>
-            </a:extLst>
-          </p:cNvPr>
-          <p:cNvSpPr>
-            <a:spLocks xmlns:a="http://schemas.openxmlformats.org/drawingml/2006/main" noGrp="1"/>
-          </p:cNvSpPr>
-          <p:nvPr/>
-        </p:nvSpPr>
-        <p:spPr>
-          <a:xfrm xmlns:a="http://schemas.openxmlformats.org/drawingml/2006/main">
-            <a:off x="9220200" y="4095750"/>
-            <a:ext cx="1619250" cy="228600"/>
-          </a:xfrm>
-          <a:prstGeom xmlns:a="http://schemas.openxmlformats.org/drawingml/2006/main" prst="rect">
-            <a:avLst/>
-          </a:prstGeom>
-          <a:noFill xmlns:a="http://schemas.openxmlformats.org/drawingml/2006/main"/>
-          <a:ln xmlns:a="http://schemas.openxmlformats.org/drawingml/2006/main" w="0">
-            <a:noFill/>
-            <a:prstDash val="solid"/>
-          </a:ln>
-        </p:spPr>
-        <p:txBody>
-          <a:bodyPr xmlns:a="http://schemas.openxmlformats.org/drawingml/2006/main"/>
-          <a:lstStyle xmlns:a="http://schemas.openxmlformats.org/drawingml/2006/main"/>
-          <a:p xmlns:a="http://schemas.openxmlformats.org/drawingml/2006/main">
-            <a:pPr>
-              <a:defRPr sz="1275" b="0">
-                <a:solidFill>
-                  <a:srgbClr val="555555"/>
-                </a:solidFill>
-              </a:defRPr>
-            </a:pPr>
-            <a:r>
-              <a:rPr sz="1275" b="0">
-                <a:solidFill>
-                  <a:srgbClr val="555555"/>
-                </a:solidFill>
-              </a:rPr>
-              <a:t>basket NA</a:t>
-            </a:r>
-          </a:p>
-        </p:txBody>
-      </p:sp>
-      <p:sp>
-        <p:nvSpPr>
-          <p:cNvPr id="28" name="">
-            <a:extLst xmlns:a="http://schemas.openxmlformats.org/drawingml/2006/main">
-              <a:ext uri="{FF2B5EF4-FFF2-40B4-BE49-F238E27FC236}">
-                <a16:creationId xmlns:a16="http://schemas.microsoft.com/office/drawing/2014/main" id="{7A91230D-3CD6-4581-B3A9-E6BA6F63FE47}"/>
-              </a:ext>
-            </a:extLst>
-          </p:cNvPr>
-          <p:cNvSpPr>
-            <a:spLocks xmlns:a="http://schemas.openxmlformats.org/drawingml/2006/main" noGrp="1"/>
-          </p:cNvSpPr>
-          <p:nvPr/>
-        </p:nvSpPr>
-        <p:spPr>
-          <a:xfrm xmlns:a="http://schemas.openxmlformats.org/drawingml/2006/main">
-            <a:off x="1123950" y="5429250"/>
-            <a:ext cx="9620250" cy="533400"/>
-          </a:xfrm>
-          <a:prstGeom xmlns:a="http://schemas.openxmlformats.org/drawingml/2006/main" prst="rect">
-            <a:avLst/>
-          </a:prstGeom>
-          <a:noFill xmlns:a="http://schemas.openxmlformats.org/drawingml/2006/main"/>
-          <a:ln xmlns:a="http://schemas.openxmlformats.org/drawingml/2006/main" w="0">
-            <a:noFill/>
-            <a:prstDash val="solid"/>
-          </a:ln>
-        </p:spPr>
-        <p:txBody>
-          <a:bodyPr xmlns:a="http://schemas.openxmlformats.org/drawingml/2006/main"/>
-          <a:lstStyle xmlns:a="http://schemas.openxmlformats.org/drawingml/2006/main"/>
-          <a:p xmlns:a="http://schemas.openxmlformats.org/drawingml/2006/main">
-            <a:pPr algn="ctr">
-              <a:defRPr sz="1725" b="1">
-                <a:solidFill>
-                  <a:srgbClr val="000000"/>
-                </a:solidFill>
-              </a:defRPr>
-            </a:pPr>
-            <a:r>
-              <a:rPr sz="1725" b="1">
-                <a:solidFill>
-                  <a:srgbClr val="000000"/>
-                </a:solidFill>
-              </a:rPr>
-              <a:t>Annual windows reveal a useful profile: strong 2024 participation and decent 2022 defense, but still serious undercapture in 2019 and 2020 high-beta upside.</a:t>
-            </a:r>
-          </a:p>
-        </p:txBody>
-      </p:sp>
-      <p:sp>
-        <p:nvSpPr>
-          <p:cNvPr id="29" name="">
-            <a:extLst xmlns:a="http://schemas.openxmlformats.org/drawingml/2006/main">
-              <a:ext uri="{FF2B5EF4-FFF2-40B4-BE49-F238E27FC236}">
-                <a16:creationId xmlns:a16="http://schemas.microsoft.com/office/drawing/2014/main" id="{CA03FC6E-DAFA-4789-A9EE-B8E2D368CADB}"/>
+          <p:cNvPr id="12" name="">
+            <a:extLst xmlns:a="http://schemas.openxmlformats.org/drawingml/2006/main">
+              <a:ext uri="{FF2B5EF4-FFF2-40B4-BE49-F238E27FC236}">
+                <a16:creationId xmlns:a16="http://schemas.microsoft.com/office/drawing/2014/main" id="{69514BF9-88E5-457B-B031-DAA903A0ACD0}"/>
+              </a:ext>
+            </a:extLst>
+          </p:cNvPr>
+          <p:cNvSpPr>
+            <a:spLocks xmlns:a="http://schemas.openxmlformats.org/drawingml/2006/main" noGrp="1"/>
+          </p:cNvSpPr>
+          <p:nvPr/>
+        </p:nvSpPr>
+        <p:spPr>
+          <a:xfrm xmlns:a="http://schemas.openxmlformats.org/drawingml/2006/main">
+            <a:off x="8058150" y="3714750"/>
+            <a:ext cx="2514600" cy="476250"/>
+          </a:xfrm>
+          <a:prstGeom xmlns:a="http://schemas.openxmlformats.org/drawingml/2006/main" prst="rect">
+            <a:avLst/>
+          </a:prstGeom>
+          <a:noFill xmlns:a="http://schemas.openxmlformats.org/drawingml/2006/main"/>
+          <a:ln xmlns:a="http://schemas.openxmlformats.org/drawingml/2006/main" w="0">
+            <a:noFill/>
+            <a:prstDash val="solid"/>
+          </a:ln>
+        </p:spPr>
+        <p:txBody>
+          <a:bodyPr xmlns:a="http://schemas.openxmlformats.org/drawingml/2006/main"/>
+          <a:lstStyle xmlns:a="http://schemas.openxmlformats.org/drawingml/2006/main"/>
+          <a:p xmlns:a="http://schemas.openxmlformats.org/drawingml/2006/main">
+            <a:pPr>
+              <a:defRPr sz="1200" b="0">
+                <a:solidFill>
+                  <a:srgbClr val="000000"/>
+                </a:solidFill>
+              </a:defRPr>
+            </a:pPr>
+            <a:r>
+              <a:rPr sz="1200" b="0">
+                <a:solidFill>
+                  <a:srgbClr val="000000"/>
+                </a:solidFill>
+              </a:rPr>
+              <a:t>2024 is the clean positive clue for risk-aware workhorse continuation.</a:t>
+            </a:r>
+          </a:p>
+        </p:txBody>
+      </p:sp>
+      <p:sp>
+        <p:nvSpPr>
+          <p:cNvPr id="13" name="">
+            <a:extLst xmlns:a="http://schemas.openxmlformats.org/drawingml/2006/main">
+              <a:ext uri="{FF2B5EF4-FFF2-40B4-BE49-F238E27FC236}">
+                <a16:creationId xmlns:a16="http://schemas.microsoft.com/office/drawing/2014/main" id="{459DB658-1F41-412A-8B8F-6FF00E79C3AE}"/>
+              </a:ext>
+            </a:extLst>
+          </p:cNvPr>
+          <p:cNvSpPr>
+            <a:spLocks xmlns:a="http://schemas.openxmlformats.org/drawingml/2006/main" noGrp="1"/>
+          </p:cNvSpPr>
+          <p:nvPr/>
+        </p:nvSpPr>
+        <p:spPr>
+          <a:xfrm xmlns:a="http://schemas.openxmlformats.org/drawingml/2006/main">
+            <a:off x="7848600" y="4229100"/>
+            <a:ext cx="76200" cy="76200"/>
+          </a:xfrm>
+          <a:prstGeom xmlns:a="http://schemas.openxmlformats.org/drawingml/2006/main" prst="rect">
+            <a:avLst/>
+          </a:prstGeom>
+          <a:solidFill xmlns:a="http://schemas.openxmlformats.org/drawingml/2006/main">
+            <a:srgbClr val="FF6B35"/>
+          </a:solidFill>
+          <a:ln xmlns:a="http://schemas.openxmlformats.org/drawingml/2006/main" w="9525">
+            <a:solidFill>
+              <a:srgbClr val="FF6B35"/>
+            </a:solidFill>
+            <a:prstDash val="solid"/>
+          </a:ln>
+        </p:spPr>
+      </p:sp>
+      <p:sp>
+        <p:nvSpPr>
+          <p:cNvPr id="14" name="">
+            <a:extLst xmlns:a="http://schemas.openxmlformats.org/drawingml/2006/main">
+              <a:ext uri="{FF2B5EF4-FFF2-40B4-BE49-F238E27FC236}">
+                <a16:creationId xmlns:a16="http://schemas.microsoft.com/office/drawing/2014/main" id="{29521193-B44A-4539-B997-C3F450381A60}"/>
+              </a:ext>
+            </a:extLst>
+          </p:cNvPr>
+          <p:cNvSpPr>
+            <a:spLocks xmlns:a="http://schemas.openxmlformats.org/drawingml/2006/main" noGrp="1"/>
+          </p:cNvSpPr>
+          <p:nvPr/>
+        </p:nvSpPr>
+        <p:spPr>
+          <a:xfrm xmlns:a="http://schemas.openxmlformats.org/drawingml/2006/main">
+            <a:off x="8058150" y="4133850"/>
+            <a:ext cx="2514600" cy="476250"/>
+          </a:xfrm>
+          <a:prstGeom xmlns:a="http://schemas.openxmlformats.org/drawingml/2006/main" prst="rect">
+            <a:avLst/>
+          </a:prstGeom>
+          <a:noFill xmlns:a="http://schemas.openxmlformats.org/drawingml/2006/main"/>
+          <a:ln xmlns:a="http://schemas.openxmlformats.org/drawingml/2006/main" w="0">
+            <a:noFill/>
+            <a:prstDash val="solid"/>
+          </a:ln>
+        </p:spPr>
+        <p:txBody>
+          <a:bodyPr xmlns:a="http://schemas.openxmlformats.org/drawingml/2006/main"/>
+          <a:lstStyle xmlns:a="http://schemas.openxmlformats.org/drawingml/2006/main"/>
+          <a:p xmlns:a="http://schemas.openxmlformats.org/drawingml/2006/main">
+            <a:pPr>
+              <a:defRPr sz="1200" b="0">
+                <a:solidFill>
+                  <a:srgbClr val="000000"/>
+                </a:solidFill>
+              </a:defRPr>
+            </a:pPr>
+            <a:r>
+              <a:rPr sz="1200" b="0">
+                <a:solidFill>
+                  <a:srgbClr val="000000"/>
+                </a:solidFill>
+              </a:rPr>
+              <a:t>New momentum feature sets did not become the aggregate default.</a:t>
+            </a:r>
+          </a:p>
+        </p:txBody>
+      </p:sp>
+      <p:sp>
+        <p:nvSpPr>
+          <p:cNvPr id="15" name="">
+            <a:extLst xmlns:a="http://schemas.openxmlformats.org/drawingml/2006/main">
+              <a:ext uri="{FF2B5EF4-FFF2-40B4-BE49-F238E27FC236}">
+                <a16:creationId xmlns:a16="http://schemas.microsoft.com/office/drawing/2014/main" id="{DD8975FE-03D2-4A13-A9B7-B6D9B942526E}"/>
               </a:ext>
             </a:extLst>
           </p:cNvPr>
@@ -11047,7 +12376,7 @@
     </p:spTree>
     <p:extLst>
       <p:ext uri="{BB962C8B-B14F-4D97-AF65-F5344CB8AC3E}">
-        <p14:creationId xmlns:p14="http://schemas.microsoft.com/office/powerpoint/2010/main" val="47606489"/>
+        <p14:creationId xmlns:p14="http://schemas.microsoft.com/office/powerpoint/2010/main" val="184354497"/>
       </p:ext>
     </p:extLst>
   </p:cSld>
@@ -11078,7 +12407,7 @@
           <p:cNvPr id="1" name="">
             <a:extLst xmlns:a="http://schemas.openxmlformats.org/drawingml/2006/main">
               <a:ext uri="{FF2B5EF4-FFF2-40B4-BE49-F238E27FC236}">
-                <a16:creationId xmlns:a16="http://schemas.microsoft.com/office/drawing/2014/main" id="{BB1A187F-74A5-4ED0-9453-FEDDFDF6200A}"/>
+                <a16:creationId xmlns:a16="http://schemas.microsoft.com/office/drawing/2014/main" id="{2E7B2F40-6D99-491A-814E-2D38CCCC87F4}"/>
               </a:ext>
             </a:extLst>
           </p:cNvPr>
@@ -11128,7 +12457,7 @@
           <p:cNvPr id="2" name="">
             <a:extLst xmlns:a="http://schemas.openxmlformats.org/drawingml/2006/main">
               <a:ext uri="{FF2B5EF4-FFF2-40B4-BE49-F238E27FC236}">
-                <a16:creationId xmlns:a16="http://schemas.microsoft.com/office/drawing/2014/main" id="{7041A408-5388-4EC3-9C89-8F04C591688A}"/>
+                <a16:creationId xmlns:a16="http://schemas.microsoft.com/office/drawing/2014/main" id="{6607F67F-73BC-40D0-A23C-A0E8C829C87C}"/>
               </a:ext>
             </a:extLst>
           </p:cNvPr>
@@ -11168,7 +12497,7 @@
                   <a:srgbClr val="000000"/>
                 </a:solidFill>
               </a:rPr>
-              <a:t>Exposure helps, but simply being long more is not the whole answer</a:t>
+              <a:t>The best lane still tells a mixed window-by-window story</a:t>
             </a:r>
           </a:p>
         </p:txBody>
@@ -11178,7 +12507,7 @@
           <p:cNvPr id="3" name="">
             <a:extLst xmlns:a="http://schemas.openxmlformats.org/drawingml/2006/main">
               <a:ext uri="{FF2B5EF4-FFF2-40B4-BE49-F238E27FC236}">
-                <a16:creationId xmlns:a16="http://schemas.microsoft.com/office/drawing/2014/main" id="{37C35DBC-6955-42C2-BB4A-86DFD23790E6}"/>
+                <a16:creationId xmlns:a16="http://schemas.microsoft.com/office/drawing/2014/main" id="{BBB6B3AF-09C5-434A-8C87-EBACB03FBD4C}"/>
               </a:ext>
             </a:extLst>
           </p:cNvPr>
@@ -11206,46 +12535,24 @@
           </a:ln>
         </p:spPr>
       </p:sp>
-      <p:pic>
-        <p:nvPicPr>
-          <p:cNvPr id="12" name=""/>
-          <p:cNvPicPr>
-            <a:picLocks xmlns:a="http://schemas.openxmlformats.org/drawingml/2006/main" noChangeAspect="1"/>
-          </p:cNvPicPr>
-          <p:nvPr/>
-        </p:nvPicPr>
-        <p:blipFill>
-          <a:blip xmlns:r="http://schemas.openxmlformats.org/officeDocument/2006/relationships" xmlns:a="http://schemas.openxmlformats.org/drawingml/2006/main" r:embed="R8604684fc9f3425b"/>
-          <a:stretch xmlns:a="http://schemas.openxmlformats.org/drawingml/2006/main"/>
-        </p:blipFill>
-        <p:spPr>
-          <a:xfrm xmlns:a="http://schemas.openxmlformats.org/drawingml/2006/main">
-            <a:off x="967154" y="1695450"/>
-            <a:ext cx="6066692" cy="4381500"/>
-          </a:xfrm>
-          <a:prstGeom xmlns:a="http://schemas.openxmlformats.org/drawingml/2006/main" prst="rect">
-            <a:avLst/>
-          </a:prstGeom>
-        </p:spPr>
-      </p:pic>
-      <p:sp>
-        <p:nvSpPr>
-          <p:cNvPr id="5" name="">
-            <a:extLst xmlns:a="http://schemas.openxmlformats.org/drawingml/2006/main">
-              <a:ext uri="{FF2B5EF4-FFF2-40B4-BE49-F238E27FC236}">
-                <a16:creationId xmlns:a16="http://schemas.microsoft.com/office/drawing/2014/main" id="{FC088F76-92DD-4496-9943-5A44C1E8B869}"/>
-              </a:ext>
-            </a:extLst>
-          </p:cNvPr>
-          <p:cNvSpPr>
-            <a:spLocks xmlns:a="http://schemas.openxmlformats.org/drawingml/2006/main" noGrp="1"/>
-          </p:cNvSpPr>
-          <p:nvPr/>
-        </p:nvSpPr>
-        <p:spPr>
-          <a:xfrm xmlns:a="http://schemas.openxmlformats.org/drawingml/2006/main">
-            <a:off x="7886700" y="2266950"/>
-            <a:ext cx="3143250" cy="2438400"/>
+      <p:sp>
+        <p:nvSpPr>
+          <p:cNvPr id="4" name="">
+            <a:extLst xmlns:a="http://schemas.openxmlformats.org/drawingml/2006/main">
+              <a:ext uri="{FF2B5EF4-FFF2-40B4-BE49-F238E27FC236}">
+                <a16:creationId xmlns:a16="http://schemas.microsoft.com/office/drawing/2014/main" id="{B1DD14D2-0430-4589-AE7D-FCC626B9E956}"/>
+              </a:ext>
+            </a:extLst>
+          </p:cNvPr>
+          <p:cNvSpPr>
+            <a:spLocks xmlns:a="http://schemas.openxmlformats.org/drawingml/2006/main" noGrp="1"/>
+          </p:cNvSpPr>
+          <p:nvPr/>
+        </p:nvSpPr>
+        <p:spPr>
+          <a:xfrm xmlns:a="http://schemas.openxmlformats.org/drawingml/2006/main">
+            <a:off x="819150" y="2095500"/>
+            <a:ext cx="2305050" cy="2286000"/>
           </a:xfrm>
           <a:prstGeom xmlns:a="http://schemas.openxmlformats.org/drawingml/2006/main" prst="rect">
             <a:avLst/>
@@ -11263,50 +12570,100 @@
       </p:sp>
       <p:sp>
         <p:nvSpPr>
+          <p:cNvPr id="5" name="">
+            <a:extLst xmlns:a="http://schemas.openxmlformats.org/drawingml/2006/main">
+              <a:ext uri="{FF2B5EF4-FFF2-40B4-BE49-F238E27FC236}">
+                <a16:creationId xmlns:a16="http://schemas.microsoft.com/office/drawing/2014/main" id="{E79B1694-2AC7-4DB2-A232-85BEE6E2BB1B}"/>
+              </a:ext>
+            </a:extLst>
+          </p:cNvPr>
+          <p:cNvSpPr>
+            <a:spLocks xmlns:a="http://schemas.openxmlformats.org/drawingml/2006/main" noGrp="1"/>
+          </p:cNvSpPr>
+          <p:nvPr/>
+        </p:nvSpPr>
+        <p:spPr>
+          <a:xfrm xmlns:a="http://schemas.openxmlformats.org/drawingml/2006/main">
+            <a:off x="1028700" y="2324100"/>
+            <a:ext cx="1714500" cy="361950"/>
+          </a:xfrm>
+          <a:prstGeom xmlns:a="http://schemas.openxmlformats.org/drawingml/2006/main" prst="rect">
+            <a:avLst/>
+          </a:prstGeom>
+          <a:noFill xmlns:a="http://schemas.openxmlformats.org/drawingml/2006/main"/>
+          <a:ln xmlns:a="http://schemas.openxmlformats.org/drawingml/2006/main" w="0">
+            <a:noFill/>
+            <a:prstDash val="solid"/>
+          </a:ln>
+        </p:spPr>
+        <p:txBody>
+          <a:bodyPr xmlns:a="http://schemas.openxmlformats.org/drawingml/2006/main"/>
+          <a:lstStyle xmlns:a="http://schemas.openxmlformats.org/drawingml/2006/main"/>
+          <a:p xmlns:a="http://schemas.openxmlformats.org/drawingml/2006/main">
+            <a:pPr>
+              <a:defRPr sz="2400" b="1">
+                <a:solidFill>
+                  <a:srgbClr val="000000"/>
+                </a:solidFill>
+              </a:defRPr>
+            </a:pPr>
+            <a:r>
+              <a:rPr sz="2400" b="1">
+                <a:solidFill>
+                  <a:srgbClr val="000000"/>
+                </a:solidFill>
+              </a:rPr>
+              <a:t>2019</a:t>
+            </a:r>
+          </a:p>
+        </p:txBody>
+      </p:sp>
+      <p:sp>
+        <p:nvSpPr>
           <p:cNvPr id="6" name="">
             <a:extLst xmlns:a="http://schemas.openxmlformats.org/drawingml/2006/main">
               <a:ext uri="{FF2B5EF4-FFF2-40B4-BE49-F238E27FC236}">
-                <a16:creationId xmlns:a16="http://schemas.microsoft.com/office/drawing/2014/main" id="{EB9E4D66-4E7F-4D75-9D00-3D0F1C5DADCE}"/>
-              </a:ext>
-            </a:extLst>
-          </p:cNvPr>
-          <p:cNvSpPr>
-            <a:spLocks xmlns:a="http://schemas.openxmlformats.org/drawingml/2006/main" noGrp="1"/>
-          </p:cNvSpPr>
-          <p:nvPr/>
-        </p:nvSpPr>
-        <p:spPr>
-          <a:xfrm xmlns:a="http://schemas.openxmlformats.org/drawingml/2006/main">
-            <a:off x="8172450" y="2552700"/>
-            <a:ext cx="2286000" cy="304800"/>
-          </a:xfrm>
-          <a:prstGeom xmlns:a="http://schemas.openxmlformats.org/drawingml/2006/main" prst="rect">
-            <a:avLst/>
-          </a:prstGeom>
-          <a:noFill xmlns:a="http://schemas.openxmlformats.org/drawingml/2006/main"/>
-          <a:ln xmlns:a="http://schemas.openxmlformats.org/drawingml/2006/main" w="0">
-            <a:noFill/>
-            <a:prstDash val="solid"/>
-          </a:ln>
-        </p:spPr>
-        <p:txBody>
-          <a:bodyPr xmlns:a="http://schemas.openxmlformats.org/drawingml/2006/main"/>
-          <a:lstStyle xmlns:a="http://schemas.openxmlformats.org/drawingml/2006/main"/>
-          <a:p xmlns:a="http://schemas.openxmlformats.org/drawingml/2006/main">
-            <a:pPr>
-              <a:defRPr sz="1950" b="1">
-                <a:solidFill>
-                  <a:srgbClr val="000000"/>
-                </a:solidFill>
-              </a:defRPr>
-            </a:pPr>
-            <a:r>
-              <a:rPr sz="1950" b="1">
-                <a:solidFill>
-                  <a:srgbClr val="000000"/>
-                </a:solidFill>
-              </a:rPr>
-              <a:t>Readout</a:t>
+                <a16:creationId xmlns:a16="http://schemas.microsoft.com/office/drawing/2014/main" id="{2809BBCC-37F7-4AD7-9503-EBFDE4E94D5B}"/>
+              </a:ext>
+            </a:extLst>
+          </p:cNvPr>
+          <p:cNvSpPr>
+            <a:spLocks xmlns:a="http://schemas.openxmlformats.org/drawingml/2006/main" noGrp="1"/>
+          </p:cNvSpPr>
+          <p:nvPr/>
+        </p:nvSpPr>
+        <p:spPr>
+          <a:xfrm xmlns:a="http://schemas.openxmlformats.org/drawingml/2006/main">
+            <a:off x="1028700" y="2914650"/>
+            <a:ext cx="1809750" cy="419100"/>
+          </a:xfrm>
+          <a:prstGeom xmlns:a="http://schemas.openxmlformats.org/drawingml/2006/main" prst="rect">
+            <a:avLst/>
+          </a:prstGeom>
+          <a:noFill xmlns:a="http://schemas.openxmlformats.org/drawingml/2006/main"/>
+          <a:ln xmlns:a="http://schemas.openxmlformats.org/drawingml/2006/main" w="0">
+            <a:noFill/>
+            <a:prstDash val="solid"/>
+          </a:ln>
+        </p:spPr>
+        <p:txBody>
+          <a:bodyPr xmlns:a="http://schemas.openxmlformats.org/drawingml/2006/main"/>
+          <a:lstStyle xmlns:a="http://schemas.openxmlformats.org/drawingml/2006/main"/>
+          <a:p xmlns:a="http://schemas.openxmlformats.org/drawingml/2006/main">
+            <a:pPr>
+              <a:defRPr sz="2325" b="1">
+                <a:solidFill>
+                  <a:srgbClr val="B42318"/>
+                </a:solidFill>
+              </a:defRPr>
+            </a:pPr>
+            <a:r>
+              <a:rPr sz="2325" b="1">
+                <a:solidFill>
+                  <a:srgbClr val="B42318"/>
+                </a:solidFill>
+              </a:rPr>
+              <a:t>-56.2 pp</a:t>
             </a:r>
           </a:p>
         </p:txBody>
@@ -11316,47 +12673,47 @@
           <p:cNvPr id="7" name="">
             <a:extLst xmlns:a="http://schemas.openxmlformats.org/drawingml/2006/main">
               <a:ext uri="{FF2B5EF4-FFF2-40B4-BE49-F238E27FC236}">
-                <a16:creationId xmlns:a16="http://schemas.microsoft.com/office/drawing/2014/main" id="{47685095-4FE4-4953-8317-A8CFAFE76FF5}"/>
-              </a:ext>
-            </a:extLst>
-          </p:cNvPr>
-          <p:cNvSpPr>
-            <a:spLocks xmlns:a="http://schemas.openxmlformats.org/drawingml/2006/main" noGrp="1"/>
-          </p:cNvSpPr>
-          <p:nvPr/>
-        </p:nvSpPr>
-        <p:spPr>
-          <a:xfrm xmlns:a="http://schemas.openxmlformats.org/drawingml/2006/main">
-            <a:off x="8172450" y="3105150"/>
-            <a:ext cx="2476500" cy="1123950"/>
-          </a:xfrm>
-          <a:prstGeom xmlns:a="http://schemas.openxmlformats.org/drawingml/2006/main" prst="rect">
-            <a:avLst/>
-          </a:prstGeom>
-          <a:noFill xmlns:a="http://schemas.openxmlformats.org/drawingml/2006/main"/>
-          <a:ln xmlns:a="http://schemas.openxmlformats.org/drawingml/2006/main" w="0">
-            <a:noFill/>
-            <a:prstDash val="solid"/>
-          </a:ln>
-        </p:spPr>
-        <p:txBody>
-          <a:bodyPr xmlns:a="http://schemas.openxmlformats.org/drawingml/2006/main"/>
-          <a:lstStyle xmlns:a="http://schemas.openxmlformats.org/drawingml/2006/main"/>
-          <a:p xmlns:a="http://schemas.openxmlformats.org/drawingml/2006/main">
-            <a:pPr>
-              <a:defRPr sz="1425" b="0">
+                <a16:creationId xmlns:a16="http://schemas.microsoft.com/office/drawing/2014/main" id="{918D6998-2C87-42A7-B1D0-D8F0D27E540C}"/>
+              </a:ext>
+            </a:extLst>
+          </p:cNvPr>
+          <p:cNvSpPr>
+            <a:spLocks xmlns:a="http://schemas.openxmlformats.org/drawingml/2006/main" noGrp="1"/>
+          </p:cNvSpPr>
+          <p:nvPr/>
+        </p:nvSpPr>
+        <p:spPr>
+          <a:xfrm xmlns:a="http://schemas.openxmlformats.org/drawingml/2006/main">
+            <a:off x="1047750" y="3390900"/>
+            <a:ext cx="1619250" cy="228600"/>
+          </a:xfrm>
+          <a:prstGeom xmlns:a="http://schemas.openxmlformats.org/drawingml/2006/main" prst="rect">
+            <a:avLst/>
+          </a:prstGeom>
+          <a:noFill xmlns:a="http://schemas.openxmlformats.org/drawingml/2006/main"/>
+          <a:ln xmlns:a="http://schemas.openxmlformats.org/drawingml/2006/main" w="0">
+            <a:noFill/>
+            <a:prstDash val="solid"/>
+          </a:ln>
+        </p:spPr>
+        <p:txBody>
+          <a:bodyPr xmlns:a="http://schemas.openxmlformats.org/drawingml/2006/main"/>
+          <a:lstStyle xmlns:a="http://schemas.openxmlformats.org/drawingml/2006/main"/>
+          <a:p xmlns:a="http://schemas.openxmlformats.org/drawingml/2006/main">
+            <a:pPr>
+              <a:defRPr sz="1125" b="0">
                 <a:solidFill>
                   <a:srgbClr val="555555"/>
                 </a:solidFill>
               </a:defRPr>
             </a:pPr>
             <a:r>
-              <a:rPr sz="1425" b="0">
+              <a:rPr sz="1125" b="0">
                 <a:solidFill>
                   <a:srgbClr val="555555"/>
                 </a:solidFill>
               </a:rPr>
-              <a:t>Continuation generally lifts exposure, and the better lanes cluster at moderate-to-high participation. But many high-exposure points are still deeply negative versus basket hold, so timing and state discrimination still matter.</a:t>
+              <a:t>alpha vs basket</a:t>
             </a:r>
           </a:p>
         </p:txBody>
@@ -11366,7 +12723,1006 @@
           <p:cNvPr id="8" name="">
             <a:extLst xmlns:a="http://schemas.openxmlformats.org/drawingml/2006/main">
               <a:ext uri="{FF2B5EF4-FFF2-40B4-BE49-F238E27FC236}">
-                <a16:creationId xmlns:a16="http://schemas.microsoft.com/office/drawing/2014/main" id="{97150894-7AB7-494B-8734-AACC5CF8915B}"/>
+                <a16:creationId xmlns:a16="http://schemas.microsoft.com/office/drawing/2014/main" id="{B1AD801A-7B5C-4492-8E5B-16355C4695EE}"/>
+              </a:ext>
+            </a:extLst>
+          </p:cNvPr>
+          <p:cNvSpPr>
+            <a:spLocks xmlns:a="http://schemas.openxmlformats.org/drawingml/2006/main" noGrp="1"/>
+          </p:cNvSpPr>
+          <p:nvPr/>
+        </p:nvSpPr>
+        <p:spPr>
+          <a:xfrm xmlns:a="http://schemas.openxmlformats.org/drawingml/2006/main">
+            <a:off x="1047750" y="3829050"/>
+            <a:ext cx="1619250" cy="228600"/>
+          </a:xfrm>
+          <a:prstGeom xmlns:a="http://schemas.openxmlformats.org/drawingml/2006/main" prst="rect">
+            <a:avLst/>
+          </a:prstGeom>
+          <a:noFill xmlns:a="http://schemas.openxmlformats.org/drawingml/2006/main"/>
+          <a:ln xmlns:a="http://schemas.openxmlformats.org/drawingml/2006/main" w="0">
+            <a:noFill/>
+            <a:prstDash val="solid"/>
+          </a:ln>
+        </p:spPr>
+        <p:txBody>
+          <a:bodyPr xmlns:a="http://schemas.openxmlformats.org/drawingml/2006/main"/>
+          <a:lstStyle xmlns:a="http://schemas.openxmlformats.org/drawingml/2006/main"/>
+          <a:p xmlns:a="http://schemas.openxmlformats.org/drawingml/2006/main">
+            <a:pPr>
+              <a:defRPr sz="1275" b="0">
+                <a:solidFill>
+                  <a:srgbClr val="000000"/>
+                </a:solidFill>
+              </a:defRPr>
+            </a:pPr>
+            <a:r>
+              <a:rPr sz="1275" b="0">
+                <a:solidFill>
+                  <a:srgbClr val="000000"/>
+                </a:solidFill>
+              </a:rPr>
+              <a:t>strategy 2.2%</a:t>
+            </a:r>
+          </a:p>
+        </p:txBody>
+      </p:sp>
+      <p:sp>
+        <p:nvSpPr>
+          <p:cNvPr id="9" name="">
+            <a:extLst xmlns:a="http://schemas.openxmlformats.org/drawingml/2006/main">
+              <a:ext uri="{FF2B5EF4-FFF2-40B4-BE49-F238E27FC236}">
+                <a16:creationId xmlns:a16="http://schemas.microsoft.com/office/drawing/2014/main" id="{0A45AF08-67AB-4B1B-9C44-B7E983313E00}"/>
+              </a:ext>
+            </a:extLst>
+          </p:cNvPr>
+          <p:cNvSpPr>
+            <a:spLocks xmlns:a="http://schemas.openxmlformats.org/drawingml/2006/main" noGrp="1"/>
+          </p:cNvSpPr>
+          <p:nvPr/>
+        </p:nvSpPr>
+        <p:spPr>
+          <a:xfrm xmlns:a="http://schemas.openxmlformats.org/drawingml/2006/main">
+            <a:off x="1047750" y="4095750"/>
+            <a:ext cx="1619250" cy="228600"/>
+          </a:xfrm>
+          <a:prstGeom xmlns:a="http://schemas.openxmlformats.org/drawingml/2006/main" prst="rect">
+            <a:avLst/>
+          </a:prstGeom>
+          <a:noFill xmlns:a="http://schemas.openxmlformats.org/drawingml/2006/main"/>
+          <a:ln xmlns:a="http://schemas.openxmlformats.org/drawingml/2006/main" w="0">
+            <a:noFill/>
+            <a:prstDash val="solid"/>
+          </a:ln>
+        </p:spPr>
+        <p:txBody>
+          <a:bodyPr xmlns:a="http://schemas.openxmlformats.org/drawingml/2006/main"/>
+          <a:lstStyle xmlns:a="http://schemas.openxmlformats.org/drawingml/2006/main"/>
+          <a:p xmlns:a="http://schemas.openxmlformats.org/drawingml/2006/main">
+            <a:pPr>
+              <a:defRPr sz="1275" b="0">
+                <a:solidFill>
+                  <a:srgbClr val="555555"/>
+                </a:solidFill>
+              </a:defRPr>
+            </a:pPr>
+            <a:r>
+              <a:rPr sz="1275" b="0">
+                <a:solidFill>
+                  <a:srgbClr val="555555"/>
+                </a:solidFill>
+              </a:rPr>
+              <a:t>basket 58.4%</a:t>
+            </a:r>
+          </a:p>
+        </p:txBody>
+      </p:sp>
+      <p:sp>
+        <p:nvSpPr>
+          <p:cNvPr id="10" name="">
+            <a:extLst xmlns:a="http://schemas.openxmlformats.org/drawingml/2006/main">
+              <a:ext uri="{FF2B5EF4-FFF2-40B4-BE49-F238E27FC236}">
+                <a16:creationId xmlns:a16="http://schemas.microsoft.com/office/drawing/2014/main" id="{D3C77CA1-9F53-444E-9837-8D69EB5CCD1E}"/>
+              </a:ext>
+            </a:extLst>
+          </p:cNvPr>
+          <p:cNvSpPr>
+            <a:spLocks xmlns:a="http://schemas.openxmlformats.org/drawingml/2006/main" noGrp="1"/>
+          </p:cNvSpPr>
+          <p:nvPr/>
+        </p:nvSpPr>
+        <p:spPr>
+          <a:xfrm xmlns:a="http://schemas.openxmlformats.org/drawingml/2006/main">
+            <a:off x="3543300" y="2095500"/>
+            <a:ext cx="2305050" cy="2286000"/>
+          </a:xfrm>
+          <a:prstGeom xmlns:a="http://schemas.openxmlformats.org/drawingml/2006/main" prst="rect">
+            <a:avLst/>
+          </a:prstGeom>
+          <a:solidFill xmlns:a="http://schemas.openxmlformats.org/drawingml/2006/main">
+            <a:srgbClr val="EDEDED"/>
+          </a:solidFill>
+          <a:ln xmlns:a="http://schemas.openxmlformats.org/drawingml/2006/main" w="9525">
+            <a:solidFill>
+              <a:srgbClr val="B8BCC4"/>
+            </a:solidFill>
+            <a:prstDash val="solid"/>
+          </a:ln>
+        </p:spPr>
+      </p:sp>
+      <p:sp>
+        <p:nvSpPr>
+          <p:cNvPr id="11" name="">
+            <a:extLst xmlns:a="http://schemas.openxmlformats.org/drawingml/2006/main">
+              <a:ext uri="{FF2B5EF4-FFF2-40B4-BE49-F238E27FC236}">
+                <a16:creationId xmlns:a16="http://schemas.microsoft.com/office/drawing/2014/main" id="{43AFDB2D-B5AE-46DC-9AEE-70516058EC70}"/>
+              </a:ext>
+            </a:extLst>
+          </p:cNvPr>
+          <p:cNvSpPr>
+            <a:spLocks xmlns:a="http://schemas.openxmlformats.org/drawingml/2006/main" noGrp="1"/>
+          </p:cNvSpPr>
+          <p:nvPr/>
+        </p:nvSpPr>
+        <p:spPr>
+          <a:xfrm xmlns:a="http://schemas.openxmlformats.org/drawingml/2006/main">
+            <a:off x="3752850" y="2324100"/>
+            <a:ext cx="1714500" cy="361950"/>
+          </a:xfrm>
+          <a:prstGeom xmlns:a="http://schemas.openxmlformats.org/drawingml/2006/main" prst="rect">
+            <a:avLst/>
+          </a:prstGeom>
+          <a:noFill xmlns:a="http://schemas.openxmlformats.org/drawingml/2006/main"/>
+          <a:ln xmlns:a="http://schemas.openxmlformats.org/drawingml/2006/main" w="0">
+            <a:noFill/>
+            <a:prstDash val="solid"/>
+          </a:ln>
+        </p:spPr>
+        <p:txBody>
+          <a:bodyPr xmlns:a="http://schemas.openxmlformats.org/drawingml/2006/main"/>
+          <a:lstStyle xmlns:a="http://schemas.openxmlformats.org/drawingml/2006/main"/>
+          <a:p xmlns:a="http://schemas.openxmlformats.org/drawingml/2006/main">
+            <a:pPr>
+              <a:defRPr sz="2400" b="1">
+                <a:solidFill>
+                  <a:srgbClr val="000000"/>
+                </a:solidFill>
+              </a:defRPr>
+            </a:pPr>
+            <a:r>
+              <a:rPr sz="2400" b="1">
+                <a:solidFill>
+                  <a:srgbClr val="000000"/>
+                </a:solidFill>
+              </a:rPr>
+              <a:t>2020</a:t>
+            </a:r>
+          </a:p>
+        </p:txBody>
+      </p:sp>
+      <p:sp>
+        <p:nvSpPr>
+          <p:cNvPr id="12" name="">
+            <a:extLst xmlns:a="http://schemas.openxmlformats.org/drawingml/2006/main">
+              <a:ext uri="{FF2B5EF4-FFF2-40B4-BE49-F238E27FC236}">
+                <a16:creationId xmlns:a16="http://schemas.microsoft.com/office/drawing/2014/main" id="{44E6C7AD-D6F8-4788-936F-E8221FCE7651}"/>
+              </a:ext>
+            </a:extLst>
+          </p:cNvPr>
+          <p:cNvSpPr>
+            <a:spLocks xmlns:a="http://schemas.openxmlformats.org/drawingml/2006/main" noGrp="1"/>
+          </p:cNvSpPr>
+          <p:nvPr/>
+        </p:nvSpPr>
+        <p:spPr>
+          <a:xfrm xmlns:a="http://schemas.openxmlformats.org/drawingml/2006/main">
+            <a:off x="3752850" y="2914650"/>
+            <a:ext cx="1809750" cy="419100"/>
+          </a:xfrm>
+          <a:prstGeom xmlns:a="http://schemas.openxmlformats.org/drawingml/2006/main" prst="rect">
+            <a:avLst/>
+          </a:prstGeom>
+          <a:noFill xmlns:a="http://schemas.openxmlformats.org/drawingml/2006/main"/>
+          <a:ln xmlns:a="http://schemas.openxmlformats.org/drawingml/2006/main" w="0">
+            <a:noFill/>
+            <a:prstDash val="solid"/>
+          </a:ln>
+        </p:spPr>
+        <p:txBody>
+          <a:bodyPr xmlns:a="http://schemas.openxmlformats.org/drawingml/2006/main"/>
+          <a:lstStyle xmlns:a="http://schemas.openxmlformats.org/drawingml/2006/main"/>
+          <a:p xmlns:a="http://schemas.openxmlformats.org/drawingml/2006/main">
+            <a:pPr>
+              <a:defRPr sz="2325" b="1">
+                <a:solidFill>
+                  <a:srgbClr val="B42318"/>
+                </a:solidFill>
+              </a:defRPr>
+            </a:pPr>
+            <a:r>
+              <a:rPr sz="2325" b="1">
+                <a:solidFill>
+                  <a:srgbClr val="B42318"/>
+                </a:solidFill>
+              </a:rPr>
+              <a:t>-121.3 pp</a:t>
+            </a:r>
+          </a:p>
+        </p:txBody>
+      </p:sp>
+      <p:sp>
+        <p:nvSpPr>
+          <p:cNvPr id="13" name="">
+            <a:extLst xmlns:a="http://schemas.openxmlformats.org/drawingml/2006/main">
+              <a:ext uri="{FF2B5EF4-FFF2-40B4-BE49-F238E27FC236}">
+                <a16:creationId xmlns:a16="http://schemas.microsoft.com/office/drawing/2014/main" id="{A5EFEB06-8402-4FD3-B0F2-7EC85168A95C}"/>
+              </a:ext>
+            </a:extLst>
+          </p:cNvPr>
+          <p:cNvSpPr>
+            <a:spLocks xmlns:a="http://schemas.openxmlformats.org/drawingml/2006/main" noGrp="1"/>
+          </p:cNvSpPr>
+          <p:nvPr/>
+        </p:nvSpPr>
+        <p:spPr>
+          <a:xfrm xmlns:a="http://schemas.openxmlformats.org/drawingml/2006/main">
+            <a:off x="3771900" y="3390900"/>
+            <a:ext cx="1619250" cy="228600"/>
+          </a:xfrm>
+          <a:prstGeom xmlns:a="http://schemas.openxmlformats.org/drawingml/2006/main" prst="rect">
+            <a:avLst/>
+          </a:prstGeom>
+          <a:noFill xmlns:a="http://schemas.openxmlformats.org/drawingml/2006/main"/>
+          <a:ln xmlns:a="http://schemas.openxmlformats.org/drawingml/2006/main" w="0">
+            <a:noFill/>
+            <a:prstDash val="solid"/>
+          </a:ln>
+        </p:spPr>
+        <p:txBody>
+          <a:bodyPr xmlns:a="http://schemas.openxmlformats.org/drawingml/2006/main"/>
+          <a:lstStyle xmlns:a="http://schemas.openxmlformats.org/drawingml/2006/main"/>
+          <a:p xmlns:a="http://schemas.openxmlformats.org/drawingml/2006/main">
+            <a:pPr>
+              <a:defRPr sz="1125" b="0">
+                <a:solidFill>
+                  <a:srgbClr val="555555"/>
+                </a:solidFill>
+              </a:defRPr>
+            </a:pPr>
+            <a:r>
+              <a:rPr sz="1125" b="0">
+                <a:solidFill>
+                  <a:srgbClr val="555555"/>
+                </a:solidFill>
+              </a:rPr>
+              <a:t>alpha vs basket</a:t>
+            </a:r>
+          </a:p>
+        </p:txBody>
+      </p:sp>
+      <p:sp>
+        <p:nvSpPr>
+          <p:cNvPr id="14" name="">
+            <a:extLst xmlns:a="http://schemas.openxmlformats.org/drawingml/2006/main">
+              <a:ext uri="{FF2B5EF4-FFF2-40B4-BE49-F238E27FC236}">
+                <a16:creationId xmlns:a16="http://schemas.microsoft.com/office/drawing/2014/main" id="{AADDD5D6-D990-40AF-96A9-58A029E38C7D}"/>
+              </a:ext>
+            </a:extLst>
+          </p:cNvPr>
+          <p:cNvSpPr>
+            <a:spLocks xmlns:a="http://schemas.openxmlformats.org/drawingml/2006/main" noGrp="1"/>
+          </p:cNvSpPr>
+          <p:nvPr/>
+        </p:nvSpPr>
+        <p:spPr>
+          <a:xfrm xmlns:a="http://schemas.openxmlformats.org/drawingml/2006/main">
+            <a:off x="3771900" y="3829050"/>
+            <a:ext cx="1619250" cy="228600"/>
+          </a:xfrm>
+          <a:prstGeom xmlns:a="http://schemas.openxmlformats.org/drawingml/2006/main" prst="rect">
+            <a:avLst/>
+          </a:prstGeom>
+          <a:noFill xmlns:a="http://schemas.openxmlformats.org/drawingml/2006/main"/>
+          <a:ln xmlns:a="http://schemas.openxmlformats.org/drawingml/2006/main" w="0">
+            <a:noFill/>
+            <a:prstDash val="solid"/>
+          </a:ln>
+        </p:spPr>
+        <p:txBody>
+          <a:bodyPr xmlns:a="http://schemas.openxmlformats.org/drawingml/2006/main"/>
+          <a:lstStyle xmlns:a="http://schemas.openxmlformats.org/drawingml/2006/main"/>
+          <a:p xmlns:a="http://schemas.openxmlformats.org/drawingml/2006/main">
+            <a:pPr>
+              <a:defRPr sz="1275" b="0">
+                <a:solidFill>
+                  <a:srgbClr val="000000"/>
+                </a:solidFill>
+              </a:defRPr>
+            </a:pPr>
+            <a:r>
+              <a:rPr sz="1275" b="0">
+                <a:solidFill>
+                  <a:srgbClr val="000000"/>
+                </a:solidFill>
+              </a:rPr>
+              <a:t>strategy 106.0%</a:t>
+            </a:r>
+          </a:p>
+        </p:txBody>
+      </p:sp>
+      <p:sp>
+        <p:nvSpPr>
+          <p:cNvPr id="15" name="">
+            <a:extLst xmlns:a="http://schemas.openxmlformats.org/drawingml/2006/main">
+              <a:ext uri="{FF2B5EF4-FFF2-40B4-BE49-F238E27FC236}">
+                <a16:creationId xmlns:a16="http://schemas.microsoft.com/office/drawing/2014/main" id="{7D3EC539-E5E4-4751-A330-C64EA4CB6771}"/>
+              </a:ext>
+            </a:extLst>
+          </p:cNvPr>
+          <p:cNvSpPr>
+            <a:spLocks xmlns:a="http://schemas.openxmlformats.org/drawingml/2006/main" noGrp="1"/>
+          </p:cNvSpPr>
+          <p:nvPr/>
+        </p:nvSpPr>
+        <p:spPr>
+          <a:xfrm xmlns:a="http://schemas.openxmlformats.org/drawingml/2006/main">
+            <a:off x="3771900" y="4095750"/>
+            <a:ext cx="1619250" cy="228600"/>
+          </a:xfrm>
+          <a:prstGeom xmlns:a="http://schemas.openxmlformats.org/drawingml/2006/main" prst="rect">
+            <a:avLst/>
+          </a:prstGeom>
+          <a:noFill xmlns:a="http://schemas.openxmlformats.org/drawingml/2006/main"/>
+          <a:ln xmlns:a="http://schemas.openxmlformats.org/drawingml/2006/main" w="0">
+            <a:noFill/>
+            <a:prstDash val="solid"/>
+          </a:ln>
+        </p:spPr>
+        <p:txBody>
+          <a:bodyPr xmlns:a="http://schemas.openxmlformats.org/drawingml/2006/main"/>
+          <a:lstStyle xmlns:a="http://schemas.openxmlformats.org/drawingml/2006/main"/>
+          <a:p xmlns:a="http://schemas.openxmlformats.org/drawingml/2006/main">
+            <a:pPr>
+              <a:defRPr sz="1275" b="0">
+                <a:solidFill>
+                  <a:srgbClr val="555555"/>
+                </a:solidFill>
+              </a:defRPr>
+            </a:pPr>
+            <a:r>
+              <a:rPr sz="1275" b="0">
+                <a:solidFill>
+                  <a:srgbClr val="555555"/>
+                </a:solidFill>
+              </a:rPr>
+              <a:t>basket 227.3%</a:t>
+            </a:r>
+          </a:p>
+        </p:txBody>
+      </p:sp>
+      <p:sp>
+        <p:nvSpPr>
+          <p:cNvPr id="16" name="">
+            <a:extLst xmlns:a="http://schemas.openxmlformats.org/drawingml/2006/main">
+              <a:ext uri="{FF2B5EF4-FFF2-40B4-BE49-F238E27FC236}">
+                <a16:creationId xmlns:a16="http://schemas.microsoft.com/office/drawing/2014/main" id="{3A51F2C1-454E-4AA8-A800-9B8D19105488}"/>
+              </a:ext>
+            </a:extLst>
+          </p:cNvPr>
+          <p:cNvSpPr>
+            <a:spLocks xmlns:a="http://schemas.openxmlformats.org/drawingml/2006/main" noGrp="1"/>
+          </p:cNvSpPr>
+          <p:nvPr/>
+        </p:nvSpPr>
+        <p:spPr>
+          <a:xfrm xmlns:a="http://schemas.openxmlformats.org/drawingml/2006/main">
+            <a:off x="6267450" y="2095500"/>
+            <a:ext cx="2305050" cy="2286000"/>
+          </a:xfrm>
+          <a:prstGeom xmlns:a="http://schemas.openxmlformats.org/drawingml/2006/main" prst="rect">
+            <a:avLst/>
+          </a:prstGeom>
+          <a:solidFill xmlns:a="http://schemas.openxmlformats.org/drawingml/2006/main">
+            <a:srgbClr val="EDEDED"/>
+          </a:solidFill>
+          <a:ln xmlns:a="http://schemas.openxmlformats.org/drawingml/2006/main" w="9525">
+            <a:solidFill>
+              <a:srgbClr val="B8BCC4"/>
+            </a:solidFill>
+            <a:prstDash val="solid"/>
+          </a:ln>
+        </p:spPr>
+      </p:sp>
+      <p:sp>
+        <p:nvSpPr>
+          <p:cNvPr id="17" name="">
+            <a:extLst xmlns:a="http://schemas.openxmlformats.org/drawingml/2006/main">
+              <a:ext uri="{FF2B5EF4-FFF2-40B4-BE49-F238E27FC236}">
+                <a16:creationId xmlns:a16="http://schemas.microsoft.com/office/drawing/2014/main" id="{3375A92A-0F94-46B7-B2F3-A25F8A57D265}"/>
+              </a:ext>
+            </a:extLst>
+          </p:cNvPr>
+          <p:cNvSpPr>
+            <a:spLocks xmlns:a="http://schemas.openxmlformats.org/drawingml/2006/main" noGrp="1"/>
+          </p:cNvSpPr>
+          <p:nvPr/>
+        </p:nvSpPr>
+        <p:spPr>
+          <a:xfrm xmlns:a="http://schemas.openxmlformats.org/drawingml/2006/main">
+            <a:off x="6477000" y="2324100"/>
+            <a:ext cx="1714500" cy="361950"/>
+          </a:xfrm>
+          <a:prstGeom xmlns:a="http://schemas.openxmlformats.org/drawingml/2006/main" prst="rect">
+            <a:avLst/>
+          </a:prstGeom>
+          <a:noFill xmlns:a="http://schemas.openxmlformats.org/drawingml/2006/main"/>
+          <a:ln xmlns:a="http://schemas.openxmlformats.org/drawingml/2006/main" w="0">
+            <a:noFill/>
+            <a:prstDash val="solid"/>
+          </a:ln>
+        </p:spPr>
+        <p:txBody>
+          <a:bodyPr xmlns:a="http://schemas.openxmlformats.org/drawingml/2006/main"/>
+          <a:lstStyle xmlns:a="http://schemas.openxmlformats.org/drawingml/2006/main"/>
+          <a:p xmlns:a="http://schemas.openxmlformats.org/drawingml/2006/main">
+            <a:pPr>
+              <a:defRPr sz="2400" b="1">
+                <a:solidFill>
+                  <a:srgbClr val="000000"/>
+                </a:solidFill>
+              </a:defRPr>
+            </a:pPr>
+            <a:r>
+              <a:rPr sz="2400" b="1">
+                <a:solidFill>
+                  <a:srgbClr val="000000"/>
+                </a:solidFill>
+              </a:rPr>
+              <a:t>2022</a:t>
+            </a:r>
+          </a:p>
+        </p:txBody>
+      </p:sp>
+      <p:sp>
+        <p:nvSpPr>
+          <p:cNvPr id="18" name="">
+            <a:extLst xmlns:a="http://schemas.openxmlformats.org/drawingml/2006/main">
+              <a:ext uri="{FF2B5EF4-FFF2-40B4-BE49-F238E27FC236}">
+                <a16:creationId xmlns:a16="http://schemas.microsoft.com/office/drawing/2014/main" id="{35524D6F-D1E3-45A8-B7F4-5452F82E9E31}"/>
+              </a:ext>
+            </a:extLst>
+          </p:cNvPr>
+          <p:cNvSpPr>
+            <a:spLocks xmlns:a="http://schemas.openxmlformats.org/drawingml/2006/main" noGrp="1"/>
+          </p:cNvSpPr>
+          <p:nvPr/>
+        </p:nvSpPr>
+        <p:spPr>
+          <a:xfrm xmlns:a="http://schemas.openxmlformats.org/drawingml/2006/main">
+            <a:off x="6477000" y="2914650"/>
+            <a:ext cx="1809750" cy="419100"/>
+          </a:xfrm>
+          <a:prstGeom xmlns:a="http://schemas.openxmlformats.org/drawingml/2006/main" prst="rect">
+            <a:avLst/>
+          </a:prstGeom>
+          <a:noFill xmlns:a="http://schemas.openxmlformats.org/drawingml/2006/main"/>
+          <a:ln xmlns:a="http://schemas.openxmlformats.org/drawingml/2006/main" w="0">
+            <a:noFill/>
+            <a:prstDash val="solid"/>
+          </a:ln>
+        </p:spPr>
+        <p:txBody>
+          <a:bodyPr xmlns:a="http://schemas.openxmlformats.org/drawingml/2006/main"/>
+          <a:lstStyle xmlns:a="http://schemas.openxmlformats.org/drawingml/2006/main"/>
+          <a:p xmlns:a="http://schemas.openxmlformats.org/drawingml/2006/main">
+            <a:pPr>
+              <a:defRPr sz="2325" b="1">
+                <a:solidFill>
+                  <a:srgbClr val="067647"/>
+                </a:solidFill>
+              </a:defRPr>
+            </a:pPr>
+            <a:r>
+              <a:rPr sz="2325" b="1">
+                <a:solidFill>
+                  <a:srgbClr val="067647"/>
+                </a:solidFill>
+              </a:rPr>
+              <a:t>+30.4 pp</a:t>
+            </a:r>
+          </a:p>
+        </p:txBody>
+      </p:sp>
+      <p:sp>
+        <p:nvSpPr>
+          <p:cNvPr id="19" name="">
+            <a:extLst xmlns:a="http://schemas.openxmlformats.org/drawingml/2006/main">
+              <a:ext uri="{FF2B5EF4-FFF2-40B4-BE49-F238E27FC236}">
+                <a16:creationId xmlns:a16="http://schemas.microsoft.com/office/drawing/2014/main" id="{0FE57E83-2AC8-48A9-8741-9E41174DF581}"/>
+              </a:ext>
+            </a:extLst>
+          </p:cNvPr>
+          <p:cNvSpPr>
+            <a:spLocks xmlns:a="http://schemas.openxmlformats.org/drawingml/2006/main" noGrp="1"/>
+          </p:cNvSpPr>
+          <p:nvPr/>
+        </p:nvSpPr>
+        <p:spPr>
+          <a:xfrm xmlns:a="http://schemas.openxmlformats.org/drawingml/2006/main">
+            <a:off x="6496050" y="3390900"/>
+            <a:ext cx="1619250" cy="228600"/>
+          </a:xfrm>
+          <a:prstGeom xmlns:a="http://schemas.openxmlformats.org/drawingml/2006/main" prst="rect">
+            <a:avLst/>
+          </a:prstGeom>
+          <a:noFill xmlns:a="http://schemas.openxmlformats.org/drawingml/2006/main"/>
+          <a:ln xmlns:a="http://schemas.openxmlformats.org/drawingml/2006/main" w="0">
+            <a:noFill/>
+            <a:prstDash val="solid"/>
+          </a:ln>
+        </p:spPr>
+        <p:txBody>
+          <a:bodyPr xmlns:a="http://schemas.openxmlformats.org/drawingml/2006/main"/>
+          <a:lstStyle xmlns:a="http://schemas.openxmlformats.org/drawingml/2006/main"/>
+          <a:p xmlns:a="http://schemas.openxmlformats.org/drawingml/2006/main">
+            <a:pPr>
+              <a:defRPr sz="1125" b="0">
+                <a:solidFill>
+                  <a:srgbClr val="555555"/>
+                </a:solidFill>
+              </a:defRPr>
+            </a:pPr>
+            <a:r>
+              <a:rPr sz="1125" b="0">
+                <a:solidFill>
+                  <a:srgbClr val="555555"/>
+                </a:solidFill>
+              </a:rPr>
+              <a:t>alpha vs basket</a:t>
+            </a:r>
+          </a:p>
+        </p:txBody>
+      </p:sp>
+      <p:sp>
+        <p:nvSpPr>
+          <p:cNvPr id="20" name="">
+            <a:extLst xmlns:a="http://schemas.openxmlformats.org/drawingml/2006/main">
+              <a:ext uri="{FF2B5EF4-FFF2-40B4-BE49-F238E27FC236}">
+                <a16:creationId xmlns:a16="http://schemas.microsoft.com/office/drawing/2014/main" id="{5CC2565F-2F8E-4E5F-A5D0-2221BF78CA07}"/>
+              </a:ext>
+            </a:extLst>
+          </p:cNvPr>
+          <p:cNvSpPr>
+            <a:spLocks xmlns:a="http://schemas.openxmlformats.org/drawingml/2006/main" noGrp="1"/>
+          </p:cNvSpPr>
+          <p:nvPr/>
+        </p:nvSpPr>
+        <p:spPr>
+          <a:xfrm xmlns:a="http://schemas.openxmlformats.org/drawingml/2006/main">
+            <a:off x="6496050" y="3829050"/>
+            <a:ext cx="1619250" cy="228600"/>
+          </a:xfrm>
+          <a:prstGeom xmlns:a="http://schemas.openxmlformats.org/drawingml/2006/main" prst="rect">
+            <a:avLst/>
+          </a:prstGeom>
+          <a:noFill xmlns:a="http://schemas.openxmlformats.org/drawingml/2006/main"/>
+          <a:ln xmlns:a="http://schemas.openxmlformats.org/drawingml/2006/main" w="0">
+            <a:noFill/>
+            <a:prstDash val="solid"/>
+          </a:ln>
+        </p:spPr>
+        <p:txBody>
+          <a:bodyPr xmlns:a="http://schemas.openxmlformats.org/drawingml/2006/main"/>
+          <a:lstStyle xmlns:a="http://schemas.openxmlformats.org/drawingml/2006/main"/>
+          <a:p xmlns:a="http://schemas.openxmlformats.org/drawingml/2006/main">
+            <a:pPr>
+              <a:defRPr sz="1275" b="0">
+                <a:solidFill>
+                  <a:srgbClr val="000000"/>
+                </a:solidFill>
+              </a:defRPr>
+            </a:pPr>
+            <a:r>
+              <a:rPr sz="1275" b="0">
+                <a:solidFill>
+                  <a:srgbClr val="000000"/>
+                </a:solidFill>
+              </a:rPr>
+              <a:t>strategy -22.6%</a:t>
+            </a:r>
+          </a:p>
+        </p:txBody>
+      </p:sp>
+      <p:sp>
+        <p:nvSpPr>
+          <p:cNvPr id="21" name="">
+            <a:extLst xmlns:a="http://schemas.openxmlformats.org/drawingml/2006/main">
+              <a:ext uri="{FF2B5EF4-FFF2-40B4-BE49-F238E27FC236}">
+                <a16:creationId xmlns:a16="http://schemas.microsoft.com/office/drawing/2014/main" id="{C3F21EDD-ACB0-4631-8FB5-0AB0B9708367}"/>
+              </a:ext>
+            </a:extLst>
+          </p:cNvPr>
+          <p:cNvSpPr>
+            <a:spLocks xmlns:a="http://schemas.openxmlformats.org/drawingml/2006/main" noGrp="1"/>
+          </p:cNvSpPr>
+          <p:nvPr/>
+        </p:nvSpPr>
+        <p:spPr>
+          <a:xfrm xmlns:a="http://schemas.openxmlformats.org/drawingml/2006/main">
+            <a:off x="6496050" y="4095750"/>
+            <a:ext cx="1619250" cy="228600"/>
+          </a:xfrm>
+          <a:prstGeom xmlns:a="http://schemas.openxmlformats.org/drawingml/2006/main" prst="rect">
+            <a:avLst/>
+          </a:prstGeom>
+          <a:noFill xmlns:a="http://schemas.openxmlformats.org/drawingml/2006/main"/>
+          <a:ln xmlns:a="http://schemas.openxmlformats.org/drawingml/2006/main" w="0">
+            <a:noFill/>
+            <a:prstDash val="solid"/>
+          </a:ln>
+        </p:spPr>
+        <p:txBody>
+          <a:bodyPr xmlns:a="http://schemas.openxmlformats.org/drawingml/2006/main"/>
+          <a:lstStyle xmlns:a="http://schemas.openxmlformats.org/drawingml/2006/main"/>
+          <a:p xmlns:a="http://schemas.openxmlformats.org/drawingml/2006/main">
+            <a:pPr>
+              <a:defRPr sz="1275" b="0">
+                <a:solidFill>
+                  <a:srgbClr val="555555"/>
+                </a:solidFill>
+              </a:defRPr>
+            </a:pPr>
+            <a:r>
+              <a:rPr sz="1275" b="0">
+                <a:solidFill>
+                  <a:srgbClr val="555555"/>
+                </a:solidFill>
+              </a:rPr>
+              <a:t>basket -53.0%</a:t>
+            </a:r>
+          </a:p>
+        </p:txBody>
+      </p:sp>
+      <p:sp>
+        <p:nvSpPr>
+          <p:cNvPr id="22" name="">
+            <a:extLst xmlns:a="http://schemas.openxmlformats.org/drawingml/2006/main">
+              <a:ext uri="{FF2B5EF4-FFF2-40B4-BE49-F238E27FC236}">
+                <a16:creationId xmlns:a16="http://schemas.microsoft.com/office/drawing/2014/main" id="{FE6B2F00-593F-49A8-8726-9B9E5CB32647}"/>
+              </a:ext>
+            </a:extLst>
+          </p:cNvPr>
+          <p:cNvSpPr>
+            <a:spLocks xmlns:a="http://schemas.openxmlformats.org/drawingml/2006/main" noGrp="1"/>
+          </p:cNvSpPr>
+          <p:nvPr/>
+        </p:nvSpPr>
+        <p:spPr>
+          <a:xfrm xmlns:a="http://schemas.openxmlformats.org/drawingml/2006/main">
+            <a:off x="8991600" y="2095500"/>
+            <a:ext cx="2305050" cy="2286000"/>
+          </a:xfrm>
+          <a:prstGeom xmlns:a="http://schemas.openxmlformats.org/drawingml/2006/main" prst="rect">
+            <a:avLst/>
+          </a:prstGeom>
+          <a:solidFill xmlns:a="http://schemas.openxmlformats.org/drawingml/2006/main">
+            <a:srgbClr val="EDEDED"/>
+          </a:solidFill>
+          <a:ln xmlns:a="http://schemas.openxmlformats.org/drawingml/2006/main" w="9525">
+            <a:solidFill>
+              <a:srgbClr val="B8BCC4"/>
+            </a:solidFill>
+            <a:prstDash val="solid"/>
+          </a:ln>
+        </p:spPr>
+      </p:sp>
+      <p:sp>
+        <p:nvSpPr>
+          <p:cNvPr id="23" name="">
+            <a:extLst xmlns:a="http://schemas.openxmlformats.org/drawingml/2006/main">
+              <a:ext uri="{FF2B5EF4-FFF2-40B4-BE49-F238E27FC236}">
+                <a16:creationId xmlns:a16="http://schemas.microsoft.com/office/drawing/2014/main" id="{88DB4A9B-809D-4F14-92EB-E6CE5060FBB7}"/>
+              </a:ext>
+            </a:extLst>
+          </p:cNvPr>
+          <p:cNvSpPr>
+            <a:spLocks xmlns:a="http://schemas.openxmlformats.org/drawingml/2006/main" noGrp="1"/>
+          </p:cNvSpPr>
+          <p:nvPr/>
+        </p:nvSpPr>
+        <p:spPr>
+          <a:xfrm xmlns:a="http://schemas.openxmlformats.org/drawingml/2006/main">
+            <a:off x="9201150" y="2324100"/>
+            <a:ext cx="1714500" cy="361950"/>
+          </a:xfrm>
+          <a:prstGeom xmlns:a="http://schemas.openxmlformats.org/drawingml/2006/main" prst="rect">
+            <a:avLst/>
+          </a:prstGeom>
+          <a:noFill xmlns:a="http://schemas.openxmlformats.org/drawingml/2006/main"/>
+          <a:ln xmlns:a="http://schemas.openxmlformats.org/drawingml/2006/main" w="0">
+            <a:noFill/>
+            <a:prstDash val="solid"/>
+          </a:ln>
+        </p:spPr>
+        <p:txBody>
+          <a:bodyPr xmlns:a="http://schemas.openxmlformats.org/drawingml/2006/main"/>
+          <a:lstStyle xmlns:a="http://schemas.openxmlformats.org/drawingml/2006/main"/>
+          <a:p xmlns:a="http://schemas.openxmlformats.org/drawingml/2006/main">
+            <a:pPr>
+              <a:defRPr sz="2400" b="1">
+                <a:solidFill>
+                  <a:srgbClr val="000000"/>
+                </a:solidFill>
+              </a:defRPr>
+            </a:pPr>
+            <a:r>
+              <a:rPr sz="2400" b="1">
+                <a:solidFill>
+                  <a:srgbClr val="000000"/>
+                </a:solidFill>
+              </a:rPr>
+              <a:t>2024</a:t>
+            </a:r>
+          </a:p>
+        </p:txBody>
+      </p:sp>
+      <p:sp>
+        <p:nvSpPr>
+          <p:cNvPr id="24" name="">
+            <a:extLst xmlns:a="http://schemas.openxmlformats.org/drawingml/2006/main">
+              <a:ext uri="{FF2B5EF4-FFF2-40B4-BE49-F238E27FC236}">
+                <a16:creationId xmlns:a16="http://schemas.microsoft.com/office/drawing/2014/main" id="{BB460776-47C4-420F-A32F-A836C3FF2850}"/>
+              </a:ext>
+            </a:extLst>
+          </p:cNvPr>
+          <p:cNvSpPr>
+            <a:spLocks xmlns:a="http://schemas.openxmlformats.org/drawingml/2006/main" noGrp="1"/>
+          </p:cNvSpPr>
+          <p:nvPr/>
+        </p:nvSpPr>
+        <p:spPr>
+          <a:xfrm xmlns:a="http://schemas.openxmlformats.org/drawingml/2006/main">
+            <a:off x="9201150" y="2914650"/>
+            <a:ext cx="1809750" cy="419100"/>
+          </a:xfrm>
+          <a:prstGeom xmlns:a="http://schemas.openxmlformats.org/drawingml/2006/main" prst="rect">
+            <a:avLst/>
+          </a:prstGeom>
+          <a:noFill xmlns:a="http://schemas.openxmlformats.org/drawingml/2006/main"/>
+          <a:ln xmlns:a="http://schemas.openxmlformats.org/drawingml/2006/main" w="0">
+            <a:noFill/>
+            <a:prstDash val="solid"/>
+          </a:ln>
+        </p:spPr>
+        <p:txBody>
+          <a:bodyPr xmlns:a="http://schemas.openxmlformats.org/drawingml/2006/main"/>
+          <a:lstStyle xmlns:a="http://schemas.openxmlformats.org/drawingml/2006/main"/>
+          <a:p xmlns:a="http://schemas.openxmlformats.org/drawingml/2006/main">
+            <a:pPr>
+              <a:defRPr sz="2325" b="1">
+                <a:solidFill>
+                  <a:srgbClr val="067647"/>
+                </a:solidFill>
+              </a:defRPr>
+            </a:pPr>
+            <a:r>
+              <a:rPr sz="2325" b="1">
+                <a:solidFill>
+                  <a:srgbClr val="067647"/>
+                </a:solidFill>
+              </a:rPr>
+              <a:t>+4.7 pp</a:t>
+            </a:r>
+          </a:p>
+        </p:txBody>
+      </p:sp>
+      <p:sp>
+        <p:nvSpPr>
+          <p:cNvPr id="25" name="">
+            <a:extLst xmlns:a="http://schemas.openxmlformats.org/drawingml/2006/main">
+              <a:ext uri="{FF2B5EF4-FFF2-40B4-BE49-F238E27FC236}">
+                <a16:creationId xmlns:a16="http://schemas.microsoft.com/office/drawing/2014/main" id="{F6F2C9DB-4A5D-4018-BA40-970E993212B2}"/>
+              </a:ext>
+            </a:extLst>
+          </p:cNvPr>
+          <p:cNvSpPr>
+            <a:spLocks xmlns:a="http://schemas.openxmlformats.org/drawingml/2006/main" noGrp="1"/>
+          </p:cNvSpPr>
+          <p:nvPr/>
+        </p:nvSpPr>
+        <p:spPr>
+          <a:xfrm xmlns:a="http://schemas.openxmlformats.org/drawingml/2006/main">
+            <a:off x="9220200" y="3390900"/>
+            <a:ext cx="1619250" cy="228600"/>
+          </a:xfrm>
+          <a:prstGeom xmlns:a="http://schemas.openxmlformats.org/drawingml/2006/main" prst="rect">
+            <a:avLst/>
+          </a:prstGeom>
+          <a:noFill xmlns:a="http://schemas.openxmlformats.org/drawingml/2006/main"/>
+          <a:ln xmlns:a="http://schemas.openxmlformats.org/drawingml/2006/main" w="0">
+            <a:noFill/>
+            <a:prstDash val="solid"/>
+          </a:ln>
+        </p:spPr>
+        <p:txBody>
+          <a:bodyPr xmlns:a="http://schemas.openxmlformats.org/drawingml/2006/main"/>
+          <a:lstStyle xmlns:a="http://schemas.openxmlformats.org/drawingml/2006/main"/>
+          <a:p xmlns:a="http://schemas.openxmlformats.org/drawingml/2006/main">
+            <a:pPr>
+              <a:defRPr sz="1125" b="0">
+                <a:solidFill>
+                  <a:srgbClr val="555555"/>
+                </a:solidFill>
+              </a:defRPr>
+            </a:pPr>
+            <a:r>
+              <a:rPr sz="1125" b="0">
+                <a:solidFill>
+                  <a:srgbClr val="555555"/>
+                </a:solidFill>
+              </a:rPr>
+              <a:t>alpha vs basket</a:t>
+            </a:r>
+          </a:p>
+        </p:txBody>
+      </p:sp>
+      <p:sp>
+        <p:nvSpPr>
+          <p:cNvPr id="26" name="">
+            <a:extLst xmlns:a="http://schemas.openxmlformats.org/drawingml/2006/main">
+              <a:ext uri="{FF2B5EF4-FFF2-40B4-BE49-F238E27FC236}">
+                <a16:creationId xmlns:a16="http://schemas.microsoft.com/office/drawing/2014/main" id="{3FB9619D-64B9-417D-B850-1CEF79D4869C}"/>
+              </a:ext>
+            </a:extLst>
+          </p:cNvPr>
+          <p:cNvSpPr>
+            <a:spLocks xmlns:a="http://schemas.openxmlformats.org/drawingml/2006/main" noGrp="1"/>
+          </p:cNvSpPr>
+          <p:nvPr/>
+        </p:nvSpPr>
+        <p:spPr>
+          <a:xfrm xmlns:a="http://schemas.openxmlformats.org/drawingml/2006/main">
+            <a:off x="9220200" y="3829050"/>
+            <a:ext cx="1619250" cy="228600"/>
+          </a:xfrm>
+          <a:prstGeom xmlns:a="http://schemas.openxmlformats.org/drawingml/2006/main" prst="rect">
+            <a:avLst/>
+          </a:prstGeom>
+          <a:noFill xmlns:a="http://schemas.openxmlformats.org/drawingml/2006/main"/>
+          <a:ln xmlns:a="http://schemas.openxmlformats.org/drawingml/2006/main" w="0">
+            <a:noFill/>
+            <a:prstDash val="solid"/>
+          </a:ln>
+        </p:spPr>
+        <p:txBody>
+          <a:bodyPr xmlns:a="http://schemas.openxmlformats.org/drawingml/2006/main"/>
+          <a:lstStyle xmlns:a="http://schemas.openxmlformats.org/drawingml/2006/main"/>
+          <a:p xmlns:a="http://schemas.openxmlformats.org/drawingml/2006/main">
+            <a:pPr>
+              <a:defRPr sz="1275" b="0">
+                <a:solidFill>
+                  <a:srgbClr val="000000"/>
+                </a:solidFill>
+              </a:defRPr>
+            </a:pPr>
+            <a:r>
+              <a:rPr sz="1275" b="0">
+                <a:solidFill>
+                  <a:srgbClr val="000000"/>
+                </a:solidFill>
+              </a:rPr>
+              <a:t>strategy 138.1%</a:t>
+            </a:r>
+          </a:p>
+        </p:txBody>
+      </p:sp>
+      <p:sp>
+        <p:nvSpPr>
+          <p:cNvPr id="27" name="">
+            <a:extLst xmlns:a="http://schemas.openxmlformats.org/drawingml/2006/main">
+              <a:ext uri="{FF2B5EF4-FFF2-40B4-BE49-F238E27FC236}">
+                <a16:creationId xmlns:a16="http://schemas.microsoft.com/office/drawing/2014/main" id="{803D6D28-29B8-4552-BCBC-0A03F233385D}"/>
+              </a:ext>
+            </a:extLst>
+          </p:cNvPr>
+          <p:cNvSpPr>
+            <a:spLocks xmlns:a="http://schemas.openxmlformats.org/drawingml/2006/main" noGrp="1"/>
+          </p:cNvSpPr>
+          <p:nvPr/>
+        </p:nvSpPr>
+        <p:spPr>
+          <a:xfrm xmlns:a="http://schemas.openxmlformats.org/drawingml/2006/main">
+            <a:off x="9220200" y="4095750"/>
+            <a:ext cx="1619250" cy="228600"/>
+          </a:xfrm>
+          <a:prstGeom xmlns:a="http://schemas.openxmlformats.org/drawingml/2006/main" prst="rect">
+            <a:avLst/>
+          </a:prstGeom>
+          <a:noFill xmlns:a="http://schemas.openxmlformats.org/drawingml/2006/main"/>
+          <a:ln xmlns:a="http://schemas.openxmlformats.org/drawingml/2006/main" w="0">
+            <a:noFill/>
+            <a:prstDash val="solid"/>
+          </a:ln>
+        </p:spPr>
+        <p:txBody>
+          <a:bodyPr xmlns:a="http://schemas.openxmlformats.org/drawingml/2006/main"/>
+          <a:lstStyle xmlns:a="http://schemas.openxmlformats.org/drawingml/2006/main"/>
+          <a:p xmlns:a="http://schemas.openxmlformats.org/drawingml/2006/main">
+            <a:pPr>
+              <a:defRPr sz="1275" b="0">
+                <a:solidFill>
+                  <a:srgbClr val="555555"/>
+                </a:solidFill>
+              </a:defRPr>
+            </a:pPr>
+            <a:r>
+              <a:rPr sz="1275" b="0">
+                <a:solidFill>
+                  <a:srgbClr val="555555"/>
+                </a:solidFill>
+              </a:rPr>
+              <a:t>basket 133.5%</a:t>
+            </a:r>
+          </a:p>
+        </p:txBody>
+      </p:sp>
+      <p:sp>
+        <p:nvSpPr>
+          <p:cNvPr id="28" name="">
+            <a:extLst xmlns:a="http://schemas.openxmlformats.org/drawingml/2006/main">
+              <a:ext uri="{FF2B5EF4-FFF2-40B4-BE49-F238E27FC236}">
+                <a16:creationId xmlns:a16="http://schemas.microsoft.com/office/drawing/2014/main" id="{5904C76F-415B-40B0-BD47-348C52B9B7CC}"/>
+              </a:ext>
+            </a:extLst>
+          </p:cNvPr>
+          <p:cNvSpPr>
+            <a:spLocks xmlns:a="http://schemas.openxmlformats.org/drawingml/2006/main" noGrp="1"/>
+          </p:cNvSpPr>
+          <p:nvPr/>
+        </p:nvSpPr>
+        <p:spPr>
+          <a:xfrm xmlns:a="http://schemas.openxmlformats.org/drawingml/2006/main">
+            <a:off x="1123950" y="5429250"/>
+            <a:ext cx="9620250" cy="533400"/>
+          </a:xfrm>
+          <a:prstGeom xmlns:a="http://schemas.openxmlformats.org/drawingml/2006/main" prst="rect">
+            <a:avLst/>
+          </a:prstGeom>
+          <a:noFill xmlns:a="http://schemas.openxmlformats.org/drawingml/2006/main"/>
+          <a:ln xmlns:a="http://schemas.openxmlformats.org/drawingml/2006/main" w="0">
+            <a:noFill/>
+            <a:prstDash val="solid"/>
+          </a:ln>
+        </p:spPr>
+        <p:txBody>
+          <a:bodyPr xmlns:a="http://schemas.openxmlformats.org/drawingml/2006/main"/>
+          <a:lstStyle xmlns:a="http://schemas.openxmlformats.org/drawingml/2006/main"/>
+          <a:p xmlns:a="http://schemas.openxmlformats.org/drawingml/2006/main">
+            <a:pPr algn="ctr">
+              <a:defRPr sz="1725" b="1">
+                <a:solidFill>
+                  <a:srgbClr val="000000"/>
+                </a:solidFill>
+              </a:defRPr>
+            </a:pPr>
+            <a:r>
+              <a:rPr sz="1725" b="1">
+                <a:solidFill>
+                  <a:srgbClr val="000000"/>
+                </a:solidFill>
+              </a:rPr>
+              <a:t>Annual windows reveal a useful profile: strong 2024 participation and decent 2022 defense, but still serious undercapture in 2019 and 2020 high-beta upside.</a:t>
+            </a:r>
+          </a:p>
+        </p:txBody>
+      </p:sp>
+      <p:sp>
+        <p:nvSpPr>
+          <p:cNvPr id="29" name="">
+            <a:extLst xmlns:a="http://schemas.openxmlformats.org/drawingml/2006/main">
+              <a:ext uri="{FF2B5EF4-FFF2-40B4-BE49-F238E27FC236}">
+                <a16:creationId xmlns:a16="http://schemas.microsoft.com/office/drawing/2014/main" id="{05290D1F-573A-4461-8268-2278B1C744AE}"/>
               </a:ext>
             </a:extLst>
           </p:cNvPr>
@@ -11414,7 +13770,7 @@
     </p:spTree>
     <p:extLst>
       <p:ext uri="{BB962C8B-B14F-4D97-AF65-F5344CB8AC3E}">
-        <p14:creationId xmlns:p14="http://schemas.microsoft.com/office/powerpoint/2010/main" val="1657604065"/>
+        <p14:creationId xmlns:p14="http://schemas.microsoft.com/office/powerpoint/2010/main" val="1560219045"/>
       </p:ext>
     </p:extLst>
   </p:cSld>
@@ -11445,7 +13801,7 @@
           <p:cNvPr id="1" name="">
             <a:extLst xmlns:a="http://schemas.openxmlformats.org/drawingml/2006/main">
               <a:ext uri="{FF2B5EF4-FFF2-40B4-BE49-F238E27FC236}">
-                <a16:creationId xmlns:a16="http://schemas.microsoft.com/office/drawing/2014/main" id="{4E559825-AB82-465D-AB92-A7C044BDAEFD}"/>
+                <a16:creationId xmlns:a16="http://schemas.microsoft.com/office/drawing/2014/main" id="{E2056F30-BEF5-4161-9E57-A25178E6BC7D}"/>
               </a:ext>
             </a:extLst>
           </p:cNvPr>
@@ -11495,7 +13851,7 @@
           <p:cNvPr id="2" name="">
             <a:extLst xmlns:a="http://schemas.openxmlformats.org/drawingml/2006/main">
               <a:ext uri="{FF2B5EF4-FFF2-40B4-BE49-F238E27FC236}">
-                <a16:creationId xmlns:a16="http://schemas.microsoft.com/office/drawing/2014/main" id="{8CBBF852-2AF3-4431-A3D4-252D274CB942}"/>
+                <a16:creationId xmlns:a16="http://schemas.microsoft.com/office/drawing/2014/main" id="{588D604E-D1F6-4A89-90FD-23DBDCFD7DDB}"/>
               </a:ext>
             </a:extLst>
           </p:cNvPr>
@@ -11535,7 +13891,7 @@
                   <a:srgbClr val="000000"/>
                 </a:solidFill>
               </a:rPr>
-              <a:t>The best lane beats in 2022 and 2024, but misses the big upside years</a:t>
+              <a:t>Exposure helps, but simply being long more is not the whole answer</a:t>
             </a:r>
           </a:p>
         </p:txBody>
@@ -11545,7 +13901,7 @@
           <p:cNvPr id="3" name="">
             <a:extLst xmlns:a="http://schemas.openxmlformats.org/drawingml/2006/main">
               <a:ext uri="{FF2B5EF4-FFF2-40B4-BE49-F238E27FC236}">
-                <a16:creationId xmlns:a16="http://schemas.microsoft.com/office/drawing/2014/main" id="{D5919DCB-87C0-4D06-A08C-C7E0FC74C2A2}"/>
+                <a16:creationId xmlns:a16="http://schemas.microsoft.com/office/drawing/2014/main" id="{E4401012-A447-4798-B42F-33A2F58F697D}"/>
               </a:ext>
             </a:extLst>
           </p:cNvPr>
@@ -11573,40 +13929,46 @@
           </a:ln>
         </p:spPr>
       </p:sp>
-      <p:graphicFrame>
-        <p:nvGraphicFramePr>
-          <p:cNvPr id="17" name="Chart"/>
-          <p:cNvGraphicFramePr/>
-          <p:nvPr/>
-        </p:nvGraphicFramePr>
-        <p:xfrm>
-          <a:off xmlns:a="http://schemas.openxmlformats.org/drawingml/2006/main" x="838200" y="2000250"/>
-          <a:ext xmlns:a="http://schemas.openxmlformats.org/drawingml/2006/main" cx="6572250" cy="3600450"/>
-        </p:xfrm>
-        <a:graphic xmlns:a="http://schemas.openxmlformats.org/drawingml/2006/main">
-          <a:graphicData uri="http://schemas.openxmlformats.org/drawingml/2006/chart">
-            <c:chart xmlns:r="http://schemas.openxmlformats.org/officeDocument/2006/relationships" xmlns:c="http://schemas.openxmlformats.org/drawingml/2006/chart" r:id="R861561e19b344a77"/>
-          </a:graphicData>
-        </a:graphic>
-      </p:graphicFrame>
+      <p:pic>
+        <p:nvPicPr>
+          <p:cNvPr id="12" name=""/>
+          <p:cNvPicPr>
+            <a:picLocks xmlns:a="http://schemas.openxmlformats.org/drawingml/2006/main" noChangeAspect="1"/>
+          </p:cNvPicPr>
+          <p:nvPr/>
+        </p:nvPicPr>
+        <p:blipFill>
+          <a:blip xmlns:r="http://schemas.openxmlformats.org/officeDocument/2006/relationships" xmlns:a="http://schemas.openxmlformats.org/drawingml/2006/main" r:embed="Rb2f8a942c5494631"/>
+          <a:stretch xmlns:a="http://schemas.openxmlformats.org/drawingml/2006/main"/>
+        </p:blipFill>
+        <p:spPr>
+          <a:xfrm xmlns:a="http://schemas.openxmlformats.org/drawingml/2006/main">
+            <a:off x="967154" y="1695450"/>
+            <a:ext cx="6066692" cy="4381500"/>
+          </a:xfrm>
+          <a:prstGeom xmlns:a="http://schemas.openxmlformats.org/drawingml/2006/main" prst="rect">
+            <a:avLst/>
+          </a:prstGeom>
+        </p:spPr>
+      </p:pic>
       <p:sp>
         <p:nvSpPr>
           <p:cNvPr id="5" name="">
             <a:extLst xmlns:a="http://schemas.openxmlformats.org/drawingml/2006/main">
               <a:ext uri="{FF2B5EF4-FFF2-40B4-BE49-F238E27FC236}">
-                <a16:creationId xmlns:a16="http://schemas.microsoft.com/office/drawing/2014/main" id="{492C3EBB-70C3-435F-B505-5324C1271D92}"/>
-              </a:ext>
-            </a:extLst>
-          </p:cNvPr>
-          <p:cNvSpPr>
-            <a:spLocks xmlns:a="http://schemas.openxmlformats.org/drawingml/2006/main" noGrp="1"/>
-          </p:cNvSpPr>
-          <p:nvPr/>
-        </p:nvSpPr>
-        <p:spPr>
-          <a:xfrm xmlns:a="http://schemas.openxmlformats.org/drawingml/2006/main">
-            <a:off x="8058150" y="2152650"/>
-            <a:ext cx="2914650" cy="2781300"/>
+                <a16:creationId xmlns:a16="http://schemas.microsoft.com/office/drawing/2014/main" id="{E37892FC-64B9-4FCB-8A48-1AB456BA2479}"/>
+              </a:ext>
+            </a:extLst>
+          </p:cNvPr>
+          <p:cNvSpPr>
+            <a:spLocks xmlns:a="http://schemas.openxmlformats.org/drawingml/2006/main" noGrp="1"/>
+          </p:cNvSpPr>
+          <p:nvPr/>
+        </p:nvSpPr>
+        <p:spPr>
+          <a:xfrm xmlns:a="http://schemas.openxmlformats.org/drawingml/2006/main">
+            <a:off x="7886700" y="2266950"/>
+            <a:ext cx="3143250" cy="2438400"/>
           </a:xfrm>
           <a:prstGeom xmlns:a="http://schemas.openxmlformats.org/drawingml/2006/main" prst="rect">
             <a:avLst/>
@@ -11627,18 +13989,18 @@
           <p:cNvPr id="6" name="">
             <a:extLst xmlns:a="http://schemas.openxmlformats.org/drawingml/2006/main">
               <a:ext uri="{FF2B5EF4-FFF2-40B4-BE49-F238E27FC236}">
-                <a16:creationId xmlns:a16="http://schemas.microsoft.com/office/drawing/2014/main" id="{9795746C-3D3B-48B0-BBA2-8E37D76938C1}"/>
-              </a:ext>
-            </a:extLst>
-          </p:cNvPr>
-          <p:cNvSpPr>
-            <a:spLocks xmlns:a="http://schemas.openxmlformats.org/drawingml/2006/main" noGrp="1"/>
-          </p:cNvSpPr>
-          <p:nvPr/>
-        </p:nvSpPr>
-        <p:spPr>
-          <a:xfrm xmlns:a="http://schemas.openxmlformats.org/drawingml/2006/main">
-            <a:off x="8343900" y="2438400"/>
+                <a16:creationId xmlns:a16="http://schemas.microsoft.com/office/drawing/2014/main" id="{0148C82E-58C7-4A12-A35C-85B4066B037A}"/>
+              </a:ext>
+            </a:extLst>
+          </p:cNvPr>
+          <p:cNvSpPr>
+            <a:spLocks xmlns:a="http://schemas.openxmlformats.org/drawingml/2006/main" noGrp="1"/>
+          </p:cNvSpPr>
+          <p:nvPr/>
+        </p:nvSpPr>
+        <p:spPr>
+          <a:xfrm xmlns:a="http://schemas.openxmlformats.org/drawingml/2006/main">
+            <a:off x="8172450" y="2552700"/>
             <a:ext cx="2286000" cy="304800"/>
           </a:xfrm>
           <a:prstGeom xmlns:a="http://schemas.openxmlformats.org/drawingml/2006/main" prst="rect">
@@ -11655,19 +14017,19 @@
           <a:lstStyle xmlns:a="http://schemas.openxmlformats.org/drawingml/2006/main"/>
           <a:p xmlns:a="http://schemas.openxmlformats.org/drawingml/2006/main">
             <a:pPr>
-              <a:defRPr sz="1800" b="1">
-                <a:solidFill>
-                  <a:srgbClr val="000000"/>
-                </a:solidFill>
-              </a:defRPr>
-            </a:pPr>
-            <a:r>
-              <a:rPr sz="1800" b="1">
-                <a:solidFill>
-                  <a:srgbClr val="000000"/>
-                </a:solidFill>
-              </a:rPr>
-              <a:t>What the chart adds</a:t>
+              <a:defRPr sz="1950" b="1">
+                <a:solidFill>
+                  <a:srgbClr val="000000"/>
+                </a:solidFill>
+              </a:defRPr>
+            </a:pPr>
+            <a:r>
+              <a:rPr sz="1950" b="1">
+                <a:solidFill>
+                  <a:srgbClr val="000000"/>
+                </a:solidFill>
+              </a:rPr>
+              <a:t>Readout</a:t>
             </a:r>
           </a:p>
         </p:txBody>
@@ -11677,256 +14039,57 @@
           <p:cNvPr id="7" name="">
             <a:extLst xmlns:a="http://schemas.openxmlformats.org/drawingml/2006/main">
               <a:ext uri="{FF2B5EF4-FFF2-40B4-BE49-F238E27FC236}">
-                <a16:creationId xmlns:a16="http://schemas.microsoft.com/office/drawing/2014/main" id="{1637CC1F-CC18-4701-8052-371D8E7A3A4F}"/>
-              </a:ext>
-            </a:extLst>
-          </p:cNvPr>
-          <p:cNvSpPr>
-            <a:spLocks xmlns:a="http://schemas.openxmlformats.org/drawingml/2006/main" noGrp="1"/>
-          </p:cNvSpPr>
-          <p:nvPr/>
-        </p:nvSpPr>
-        <p:spPr>
-          <a:xfrm xmlns:a="http://schemas.openxmlformats.org/drawingml/2006/main">
-            <a:off x="8362950" y="3124200"/>
-            <a:ext cx="76200" cy="76200"/>
-          </a:xfrm>
-          <a:prstGeom xmlns:a="http://schemas.openxmlformats.org/drawingml/2006/main" prst="rect">
-            <a:avLst/>
-          </a:prstGeom>
-          <a:solidFill xmlns:a="http://schemas.openxmlformats.org/drawingml/2006/main">
-            <a:srgbClr val="FF6B35"/>
-          </a:solidFill>
-          <a:ln xmlns:a="http://schemas.openxmlformats.org/drawingml/2006/main" w="9525">
-            <a:solidFill>
-              <a:srgbClr val="FF6B35"/>
-            </a:solidFill>
-            <a:prstDash val="solid"/>
-          </a:ln>
-        </p:spPr>
+                <a16:creationId xmlns:a16="http://schemas.microsoft.com/office/drawing/2014/main" id="{C6447EF6-5254-4ADF-BBEE-72B413EEF201}"/>
+              </a:ext>
+            </a:extLst>
+          </p:cNvPr>
+          <p:cNvSpPr>
+            <a:spLocks xmlns:a="http://schemas.openxmlformats.org/drawingml/2006/main" noGrp="1"/>
+          </p:cNvSpPr>
+          <p:nvPr/>
+        </p:nvSpPr>
+        <p:spPr>
+          <a:xfrm xmlns:a="http://schemas.openxmlformats.org/drawingml/2006/main">
+            <a:off x="8172450" y="3105150"/>
+            <a:ext cx="2476500" cy="1123950"/>
+          </a:xfrm>
+          <a:prstGeom xmlns:a="http://schemas.openxmlformats.org/drawingml/2006/main" prst="rect">
+            <a:avLst/>
+          </a:prstGeom>
+          <a:noFill xmlns:a="http://schemas.openxmlformats.org/drawingml/2006/main"/>
+          <a:ln xmlns:a="http://schemas.openxmlformats.org/drawingml/2006/main" w="0">
+            <a:noFill/>
+            <a:prstDash val="solid"/>
+          </a:ln>
+        </p:spPr>
+        <p:txBody>
+          <a:bodyPr xmlns:a="http://schemas.openxmlformats.org/drawingml/2006/main"/>
+          <a:lstStyle xmlns:a="http://schemas.openxmlformats.org/drawingml/2006/main"/>
+          <a:p xmlns:a="http://schemas.openxmlformats.org/drawingml/2006/main">
+            <a:pPr>
+              <a:defRPr sz="1425" b="0">
+                <a:solidFill>
+                  <a:srgbClr val="555555"/>
+                </a:solidFill>
+              </a:defRPr>
+            </a:pPr>
+            <a:r>
+              <a:rPr sz="1425" b="0">
+                <a:solidFill>
+                  <a:srgbClr val="555555"/>
+                </a:solidFill>
+              </a:rPr>
+              <a:t>Continuation generally lifts exposure, and the better lanes cluster at moderate-to-high participation. But many high-exposure points are still deeply negative versus basket hold, so timing and state discrimination still matter.</a:t>
+            </a:r>
+          </a:p>
+        </p:txBody>
       </p:sp>
       <p:sp>
         <p:nvSpPr>
           <p:cNvPr id="8" name="">
             <a:extLst xmlns:a="http://schemas.openxmlformats.org/drawingml/2006/main">
               <a:ext uri="{FF2B5EF4-FFF2-40B4-BE49-F238E27FC236}">
-                <a16:creationId xmlns:a16="http://schemas.microsoft.com/office/drawing/2014/main" id="{07D69CE2-4095-4F2F-9C25-2FCA70F0608B}"/>
-              </a:ext>
-            </a:extLst>
-          </p:cNvPr>
-          <p:cNvSpPr>
-            <a:spLocks xmlns:a="http://schemas.openxmlformats.org/drawingml/2006/main" noGrp="1"/>
-          </p:cNvSpPr>
-          <p:nvPr/>
-        </p:nvSpPr>
-        <p:spPr>
-          <a:xfrm xmlns:a="http://schemas.openxmlformats.org/drawingml/2006/main">
-            <a:off x="8572500" y="3028950"/>
-            <a:ext cx="2000250" cy="533400"/>
-          </a:xfrm>
-          <a:prstGeom xmlns:a="http://schemas.openxmlformats.org/drawingml/2006/main" prst="rect">
-            <a:avLst/>
-          </a:prstGeom>
-          <a:noFill xmlns:a="http://schemas.openxmlformats.org/drawingml/2006/main"/>
-          <a:ln xmlns:a="http://schemas.openxmlformats.org/drawingml/2006/main" w="0">
-            <a:noFill/>
-            <a:prstDash val="solid"/>
-          </a:ln>
-        </p:spPr>
-        <p:txBody>
-          <a:bodyPr xmlns:a="http://schemas.openxmlformats.org/drawingml/2006/main"/>
-          <a:lstStyle xmlns:a="http://schemas.openxmlformats.org/drawingml/2006/main"/>
-          <a:p xmlns:a="http://schemas.openxmlformats.org/drawingml/2006/main">
-            <a:pPr>
-              <a:defRPr sz="1200" b="0">
-                <a:solidFill>
-                  <a:srgbClr val="000000"/>
-                </a:solidFill>
-              </a:defRPr>
-            </a:pPr>
-            <a:r>
-              <a:rPr sz="1200" b="0">
-                <a:solidFill>
-                  <a:srgbClr val="000000"/>
-                </a:solidFill>
-              </a:rPr>
-              <a:t>In 2020, the benchmark was too strong for a timing layer to catch.</a:t>
-            </a:r>
-          </a:p>
-        </p:txBody>
-      </p:sp>
-      <p:sp>
-        <p:nvSpPr>
-          <p:cNvPr id="9" name="">
-            <a:extLst xmlns:a="http://schemas.openxmlformats.org/drawingml/2006/main">
-              <a:ext uri="{FF2B5EF4-FFF2-40B4-BE49-F238E27FC236}">
-                <a16:creationId xmlns:a16="http://schemas.microsoft.com/office/drawing/2014/main" id="{59CCDAC3-28DD-4693-9C1E-2E8082531424}"/>
-              </a:ext>
-            </a:extLst>
-          </p:cNvPr>
-          <p:cNvSpPr>
-            <a:spLocks xmlns:a="http://schemas.openxmlformats.org/drawingml/2006/main" noGrp="1"/>
-          </p:cNvSpPr>
-          <p:nvPr/>
-        </p:nvSpPr>
-        <p:spPr>
-          <a:xfrm xmlns:a="http://schemas.openxmlformats.org/drawingml/2006/main">
-            <a:off x="8362950" y="3600450"/>
-            <a:ext cx="76200" cy="76200"/>
-          </a:xfrm>
-          <a:prstGeom xmlns:a="http://schemas.openxmlformats.org/drawingml/2006/main" prst="rect">
-            <a:avLst/>
-          </a:prstGeom>
-          <a:solidFill xmlns:a="http://schemas.openxmlformats.org/drawingml/2006/main">
-            <a:srgbClr val="FF6B35"/>
-          </a:solidFill>
-          <a:ln xmlns:a="http://schemas.openxmlformats.org/drawingml/2006/main" w="9525">
-            <a:solidFill>
-              <a:srgbClr val="FF6B35"/>
-            </a:solidFill>
-            <a:prstDash val="solid"/>
-          </a:ln>
-        </p:spPr>
-      </p:sp>
-      <p:sp>
-        <p:nvSpPr>
-          <p:cNvPr id="10" name="">
-            <a:extLst xmlns:a="http://schemas.openxmlformats.org/drawingml/2006/main">
-              <a:ext uri="{FF2B5EF4-FFF2-40B4-BE49-F238E27FC236}">
-                <a16:creationId xmlns:a16="http://schemas.microsoft.com/office/drawing/2014/main" id="{43B853BD-4A76-4C81-B1C9-6847EDE933E0}"/>
-              </a:ext>
-            </a:extLst>
-          </p:cNvPr>
-          <p:cNvSpPr>
-            <a:spLocks xmlns:a="http://schemas.openxmlformats.org/drawingml/2006/main" noGrp="1"/>
-          </p:cNvSpPr>
-          <p:nvPr/>
-        </p:nvSpPr>
-        <p:spPr>
-          <a:xfrm xmlns:a="http://schemas.openxmlformats.org/drawingml/2006/main">
-            <a:off x="8572500" y="3505200"/>
-            <a:ext cx="2000250" cy="533400"/>
-          </a:xfrm>
-          <a:prstGeom xmlns:a="http://schemas.openxmlformats.org/drawingml/2006/main" prst="rect">
-            <a:avLst/>
-          </a:prstGeom>
-          <a:noFill xmlns:a="http://schemas.openxmlformats.org/drawingml/2006/main"/>
-          <a:ln xmlns:a="http://schemas.openxmlformats.org/drawingml/2006/main" w="0">
-            <a:noFill/>
-            <a:prstDash val="solid"/>
-          </a:ln>
-        </p:spPr>
-        <p:txBody>
-          <a:bodyPr xmlns:a="http://schemas.openxmlformats.org/drawingml/2006/main"/>
-          <a:lstStyle xmlns:a="http://schemas.openxmlformats.org/drawingml/2006/main"/>
-          <a:p xmlns:a="http://schemas.openxmlformats.org/drawingml/2006/main">
-            <a:pPr>
-              <a:defRPr sz="1200" b="0">
-                <a:solidFill>
-                  <a:srgbClr val="000000"/>
-                </a:solidFill>
-              </a:defRPr>
-            </a:pPr>
-            <a:r>
-              <a:rPr sz="1200" b="0">
-                <a:solidFill>
-                  <a:srgbClr val="000000"/>
-                </a:solidFill>
-              </a:rPr>
-              <a:t>In 2022, the system's partial exposure was valuable.</a:t>
-            </a:r>
-          </a:p>
-        </p:txBody>
-      </p:sp>
-      <p:sp>
-        <p:nvSpPr>
-          <p:cNvPr id="11" name="">
-            <a:extLst xmlns:a="http://schemas.openxmlformats.org/drawingml/2006/main">
-              <a:ext uri="{FF2B5EF4-FFF2-40B4-BE49-F238E27FC236}">
-                <a16:creationId xmlns:a16="http://schemas.microsoft.com/office/drawing/2014/main" id="{9E319E14-D254-4309-9B9B-A0A5BC6E7BAA}"/>
-              </a:ext>
-            </a:extLst>
-          </p:cNvPr>
-          <p:cNvSpPr>
-            <a:spLocks xmlns:a="http://schemas.openxmlformats.org/drawingml/2006/main" noGrp="1"/>
-          </p:cNvSpPr>
-          <p:nvPr/>
-        </p:nvSpPr>
-        <p:spPr>
-          <a:xfrm xmlns:a="http://schemas.openxmlformats.org/drawingml/2006/main">
-            <a:off x="8362950" y="4076700"/>
-            <a:ext cx="76200" cy="76200"/>
-          </a:xfrm>
-          <a:prstGeom xmlns:a="http://schemas.openxmlformats.org/drawingml/2006/main" prst="rect">
-            <a:avLst/>
-          </a:prstGeom>
-          <a:solidFill xmlns:a="http://schemas.openxmlformats.org/drawingml/2006/main">
-            <a:srgbClr val="FF6B35"/>
-          </a:solidFill>
-          <a:ln xmlns:a="http://schemas.openxmlformats.org/drawingml/2006/main" w="9525">
-            <a:solidFill>
-              <a:srgbClr val="FF6B35"/>
-            </a:solidFill>
-            <a:prstDash val="solid"/>
-          </a:ln>
-        </p:spPr>
-      </p:sp>
-      <p:sp>
-        <p:nvSpPr>
-          <p:cNvPr id="12" name="">
-            <a:extLst xmlns:a="http://schemas.openxmlformats.org/drawingml/2006/main">
-              <a:ext uri="{FF2B5EF4-FFF2-40B4-BE49-F238E27FC236}">
-                <a16:creationId xmlns:a16="http://schemas.microsoft.com/office/drawing/2014/main" id="{72D4E592-4957-4E35-9523-47CCB44CF89A}"/>
-              </a:ext>
-            </a:extLst>
-          </p:cNvPr>
-          <p:cNvSpPr>
-            <a:spLocks xmlns:a="http://schemas.openxmlformats.org/drawingml/2006/main" noGrp="1"/>
-          </p:cNvSpPr>
-          <p:nvPr/>
-        </p:nvSpPr>
-        <p:spPr>
-          <a:xfrm xmlns:a="http://schemas.openxmlformats.org/drawingml/2006/main">
-            <a:off x="8572500" y="3981450"/>
-            <a:ext cx="2000250" cy="533400"/>
-          </a:xfrm>
-          <a:prstGeom xmlns:a="http://schemas.openxmlformats.org/drawingml/2006/main" prst="rect">
-            <a:avLst/>
-          </a:prstGeom>
-          <a:noFill xmlns:a="http://schemas.openxmlformats.org/drawingml/2006/main"/>
-          <a:ln xmlns:a="http://schemas.openxmlformats.org/drawingml/2006/main" w="0">
-            <a:noFill/>
-            <a:prstDash val="solid"/>
-          </a:ln>
-        </p:spPr>
-        <p:txBody>
-          <a:bodyPr xmlns:a="http://schemas.openxmlformats.org/drawingml/2006/main"/>
-          <a:lstStyle xmlns:a="http://schemas.openxmlformats.org/drawingml/2006/main"/>
-          <a:p xmlns:a="http://schemas.openxmlformats.org/drawingml/2006/main">
-            <a:pPr>
-              <a:defRPr sz="1200" b="0">
-                <a:solidFill>
-                  <a:srgbClr val="000000"/>
-                </a:solidFill>
-              </a:defRPr>
-            </a:pPr>
-            <a:r>
-              <a:rPr sz="1200" b="0">
-                <a:solidFill>
-                  <a:srgbClr val="000000"/>
-                </a:solidFill>
-              </a:rPr>
-              <a:t>In 2024, the same lane finally beat the high-beta basket while still trading selectively.</a:t>
-            </a:r>
-          </a:p>
-        </p:txBody>
-      </p:sp>
-      <p:sp>
-        <p:nvSpPr>
-          <p:cNvPr id="13" name="">
-            <a:extLst xmlns:a="http://schemas.openxmlformats.org/drawingml/2006/main">
-              <a:ext uri="{FF2B5EF4-FFF2-40B4-BE49-F238E27FC236}">
-                <a16:creationId xmlns:a16="http://schemas.microsoft.com/office/drawing/2014/main" id="{1080D16E-B6FE-40C9-B334-81C0184E196B}"/>
+                <a16:creationId xmlns:a16="http://schemas.microsoft.com/office/drawing/2014/main" id="{CC9B898D-5932-4148-8D9E-F8AC70E8F77A}"/>
               </a:ext>
             </a:extLst>
           </p:cNvPr>
@@ -11974,7 +14137,7 @@
     </p:spTree>
     <p:extLst>
       <p:ext uri="{BB962C8B-B14F-4D97-AF65-F5344CB8AC3E}">
-        <p14:creationId xmlns:p14="http://schemas.microsoft.com/office/powerpoint/2010/main" val="1119256132"/>
+        <p14:creationId xmlns:p14="http://schemas.microsoft.com/office/powerpoint/2010/main" val="378239360"/>
       </p:ext>
     </p:extLst>
   </p:cSld>
@@ -12005,7 +14168,7 @@
           <p:cNvPr id="1" name="">
             <a:extLst xmlns:a="http://schemas.openxmlformats.org/drawingml/2006/main">
               <a:ext uri="{FF2B5EF4-FFF2-40B4-BE49-F238E27FC236}">
-                <a16:creationId xmlns:a16="http://schemas.microsoft.com/office/drawing/2014/main" id="{E3CC8622-7A6A-4C80-8392-65370526702E}"/>
+                <a16:creationId xmlns:a16="http://schemas.microsoft.com/office/drawing/2014/main" id="{5CFD369B-1CCC-47A7-A8B4-1B1949F10682}"/>
               </a:ext>
             </a:extLst>
           </p:cNvPr>
@@ -12055,7 +14218,7 @@
           <p:cNvPr id="2" name="">
             <a:extLst xmlns:a="http://schemas.openxmlformats.org/drawingml/2006/main">
               <a:ext uri="{FF2B5EF4-FFF2-40B4-BE49-F238E27FC236}">
-                <a16:creationId xmlns:a16="http://schemas.microsoft.com/office/drawing/2014/main" id="{B57FD8AE-8232-4CE8-8E3C-83A0B2CC85A7}"/>
+                <a16:creationId xmlns:a16="http://schemas.microsoft.com/office/drawing/2014/main" id="{826E2129-01D6-4311-A19E-218E5E050655}"/>
               </a:ext>
             </a:extLst>
           </p:cNvPr>
@@ -12095,7 +14258,7 @@
                   <a:srgbClr val="000000"/>
                 </a:solidFill>
               </a:rPr>
-              <a:t>The authority map is cash-dominant, which explains part of the underparticipation</a:t>
+              <a:t>The best lane beats in 2022 and 2024, but misses the big upside years</a:t>
             </a:r>
           </a:p>
         </p:txBody>
@@ -12105,7 +14268,7 @@
           <p:cNvPr id="3" name="">
             <a:extLst xmlns:a="http://schemas.openxmlformats.org/drawingml/2006/main">
               <a:ext uri="{FF2B5EF4-FFF2-40B4-BE49-F238E27FC236}">
-                <a16:creationId xmlns:a16="http://schemas.microsoft.com/office/drawing/2014/main" id="{32779CF6-5C4A-4A75-BA50-D92C173A79D8}"/>
+                <a16:creationId xmlns:a16="http://schemas.microsoft.com/office/drawing/2014/main" id="{2843EE14-CBE2-4D6C-A9D2-F56206CC5E62}"/>
               </a:ext>
             </a:extLst>
           </p:cNvPr>
@@ -12133,46 +14296,40 @@
           </a:ln>
         </p:spPr>
       </p:sp>
-      <p:pic>
-        <p:nvPicPr>
-          <p:cNvPr id="12" name=""/>
-          <p:cNvPicPr>
-            <a:picLocks xmlns:a="http://schemas.openxmlformats.org/drawingml/2006/main" noChangeAspect="1"/>
-          </p:cNvPicPr>
-          <p:nvPr/>
-        </p:nvPicPr>
-        <p:blipFill>
-          <a:blip xmlns:r="http://schemas.openxmlformats.org/officeDocument/2006/relationships" xmlns:a="http://schemas.openxmlformats.org/drawingml/2006/main" r:embed="Rd961abb0711142e2"/>
-          <a:stretch xmlns:a="http://schemas.openxmlformats.org/drawingml/2006/main"/>
-        </p:blipFill>
-        <p:spPr>
-          <a:xfrm xmlns:a="http://schemas.openxmlformats.org/drawingml/2006/main">
-            <a:off x="792256" y="1790700"/>
-            <a:ext cx="6264088" cy="4095750"/>
-          </a:xfrm>
-          <a:prstGeom xmlns:a="http://schemas.openxmlformats.org/drawingml/2006/main" prst="rect">
-            <a:avLst/>
-          </a:prstGeom>
-        </p:spPr>
-      </p:pic>
+      <p:graphicFrame>
+        <p:nvGraphicFramePr>
+          <p:cNvPr id="17" name="Chart"/>
+          <p:cNvGraphicFramePr/>
+          <p:nvPr/>
+        </p:nvGraphicFramePr>
+        <p:xfrm>
+          <a:off xmlns:a="http://schemas.openxmlformats.org/drawingml/2006/main" x="838200" y="2000250"/>
+          <a:ext xmlns:a="http://schemas.openxmlformats.org/drawingml/2006/main" cx="6572250" cy="3600450"/>
+        </p:xfrm>
+        <a:graphic xmlns:a="http://schemas.openxmlformats.org/drawingml/2006/main">
+          <a:graphicData uri="http://schemas.openxmlformats.org/drawingml/2006/chart">
+            <c:chart xmlns:r="http://schemas.openxmlformats.org/officeDocument/2006/relationships" xmlns:c="http://schemas.openxmlformats.org/drawingml/2006/chart" r:id="R8eded367f43d46c3"/>
+          </a:graphicData>
+        </a:graphic>
+      </p:graphicFrame>
       <p:sp>
         <p:nvSpPr>
           <p:cNvPr id="5" name="">
             <a:extLst xmlns:a="http://schemas.openxmlformats.org/drawingml/2006/main">
               <a:ext uri="{FF2B5EF4-FFF2-40B4-BE49-F238E27FC236}">
-                <a16:creationId xmlns:a16="http://schemas.microsoft.com/office/drawing/2014/main" id="{8D66A497-D6F2-4AF5-B473-59A11D6CBA88}"/>
-              </a:ext>
-            </a:extLst>
-          </p:cNvPr>
-          <p:cNvSpPr>
-            <a:spLocks xmlns:a="http://schemas.openxmlformats.org/drawingml/2006/main" noGrp="1"/>
-          </p:cNvSpPr>
-          <p:nvPr/>
-        </p:nvSpPr>
-        <p:spPr>
-          <a:xfrm xmlns:a="http://schemas.openxmlformats.org/drawingml/2006/main">
-            <a:off x="7734300" y="2171700"/>
-            <a:ext cx="3219450" cy="2552700"/>
+                <a16:creationId xmlns:a16="http://schemas.microsoft.com/office/drawing/2014/main" id="{69A7093B-F540-4ACB-9F6B-182FAA10F220}"/>
+              </a:ext>
+            </a:extLst>
+          </p:cNvPr>
+          <p:cNvSpPr>
+            <a:spLocks xmlns:a="http://schemas.openxmlformats.org/drawingml/2006/main" noGrp="1"/>
+          </p:cNvSpPr>
+          <p:nvPr/>
+        </p:nvSpPr>
+        <p:spPr>
+          <a:xfrm xmlns:a="http://schemas.openxmlformats.org/drawingml/2006/main">
+            <a:off x="8058150" y="2152650"/>
+            <a:ext cx="2914650" cy="2781300"/>
           </a:xfrm>
           <a:prstGeom xmlns:a="http://schemas.openxmlformats.org/drawingml/2006/main" prst="rect">
             <a:avLst/>
@@ -12193,18 +14350,18 @@
           <p:cNvPr id="6" name="">
             <a:extLst xmlns:a="http://schemas.openxmlformats.org/drawingml/2006/main">
               <a:ext uri="{FF2B5EF4-FFF2-40B4-BE49-F238E27FC236}">
-                <a16:creationId xmlns:a16="http://schemas.microsoft.com/office/drawing/2014/main" id="{E2DEC0BC-D7BB-406A-B763-58D5CEFA3177}"/>
-              </a:ext>
-            </a:extLst>
-          </p:cNvPr>
-          <p:cNvSpPr>
-            <a:spLocks xmlns:a="http://schemas.openxmlformats.org/drawingml/2006/main" noGrp="1"/>
-          </p:cNvSpPr>
-          <p:nvPr/>
-        </p:nvSpPr>
-        <p:spPr>
-          <a:xfrm xmlns:a="http://schemas.openxmlformats.org/drawingml/2006/main">
-            <a:off x="8020050" y="2457450"/>
+                <a16:creationId xmlns:a16="http://schemas.microsoft.com/office/drawing/2014/main" id="{54BBF068-65CB-434E-82A5-152DBEE0EACA}"/>
+              </a:ext>
+            </a:extLst>
+          </p:cNvPr>
+          <p:cNvSpPr>
+            <a:spLocks xmlns:a="http://schemas.openxmlformats.org/drawingml/2006/main" noGrp="1"/>
+          </p:cNvSpPr>
+          <p:nvPr/>
+        </p:nvSpPr>
+        <p:spPr>
+          <a:xfrm xmlns:a="http://schemas.openxmlformats.org/drawingml/2006/main">
+            <a:off x="8343900" y="2438400"/>
             <a:ext cx="2286000" cy="304800"/>
           </a:xfrm>
           <a:prstGeom xmlns:a="http://schemas.openxmlformats.org/drawingml/2006/main" prst="rect">
@@ -12221,19 +14378,19 @@
           <a:lstStyle xmlns:a="http://schemas.openxmlformats.org/drawingml/2006/main"/>
           <a:p xmlns:a="http://schemas.openxmlformats.org/drawingml/2006/main">
             <a:pPr>
-              <a:defRPr sz="1950" b="1">
-                <a:solidFill>
-                  <a:srgbClr val="000000"/>
-                </a:solidFill>
-              </a:defRPr>
-            </a:pPr>
-            <a:r>
-              <a:rPr sz="1950" b="1">
-                <a:solidFill>
-                  <a:srgbClr val="000000"/>
-                </a:solidFill>
-              </a:rPr>
-              <a:t>Sanity check</a:t>
+              <a:defRPr sz="1800" b="1">
+                <a:solidFill>
+                  <a:srgbClr val="000000"/>
+                </a:solidFill>
+              </a:defRPr>
+            </a:pPr>
+            <a:r>
+              <a:rPr sz="1800" b="1">
+                <a:solidFill>
+                  <a:srgbClr val="000000"/>
+                </a:solidFill>
+              </a:rPr>
+              <a:t>What the chart adds</a:t>
             </a:r>
           </a:p>
         </p:txBody>
@@ -12243,57 +14400,256 @@
           <p:cNvPr id="7" name="">
             <a:extLst xmlns:a="http://schemas.openxmlformats.org/drawingml/2006/main">
               <a:ext uri="{FF2B5EF4-FFF2-40B4-BE49-F238E27FC236}">
-                <a16:creationId xmlns:a16="http://schemas.microsoft.com/office/drawing/2014/main" id="{7B91159D-DEB2-4AD0-8167-F3B28CE91875}"/>
-              </a:ext>
-            </a:extLst>
-          </p:cNvPr>
-          <p:cNvSpPr>
-            <a:spLocks xmlns:a="http://schemas.openxmlformats.org/drawingml/2006/main" noGrp="1"/>
-          </p:cNvSpPr>
-          <p:nvPr/>
-        </p:nvSpPr>
-        <p:spPr>
-          <a:xfrm xmlns:a="http://schemas.openxmlformats.org/drawingml/2006/main">
-            <a:off x="8020050" y="3048000"/>
-            <a:ext cx="2571750" cy="1219200"/>
-          </a:xfrm>
-          <a:prstGeom xmlns:a="http://schemas.openxmlformats.org/drawingml/2006/main" prst="rect">
-            <a:avLst/>
-          </a:prstGeom>
-          <a:noFill xmlns:a="http://schemas.openxmlformats.org/drawingml/2006/main"/>
-          <a:ln xmlns:a="http://schemas.openxmlformats.org/drawingml/2006/main" w="0">
-            <a:noFill/>
-            <a:prstDash val="solid"/>
-          </a:ln>
-        </p:spPr>
-        <p:txBody>
-          <a:bodyPr xmlns:a="http://schemas.openxmlformats.org/drawingml/2006/main"/>
-          <a:lstStyle xmlns:a="http://schemas.openxmlformats.org/drawingml/2006/main"/>
-          <a:p xmlns:a="http://schemas.openxmlformats.org/drawingml/2006/main">
-            <a:pPr>
-              <a:defRPr sz="1425" b="0">
-                <a:solidFill>
-                  <a:srgbClr val="555555"/>
-                </a:solidFill>
-              </a:defRPr>
-            </a:pPr>
-            <a:r>
-              <a:rPr sz="1425" b="0">
-                <a:solidFill>
-                  <a:srgbClr val="555555"/>
-                </a:solidFill>
-              </a:rPr>
-              <a:t>Across the full annual screen, no-trade remains the dominant selected authority in many asset-state cells. That is philosophically clean for a specialist, but it also means missed upside is expected unless the favorable states are timely and persistent.</a:t>
-            </a:r>
-          </a:p>
-        </p:txBody>
+                <a16:creationId xmlns:a16="http://schemas.microsoft.com/office/drawing/2014/main" id="{8994F072-21C3-494E-B5FD-660C7C2C1028}"/>
+              </a:ext>
+            </a:extLst>
+          </p:cNvPr>
+          <p:cNvSpPr>
+            <a:spLocks xmlns:a="http://schemas.openxmlformats.org/drawingml/2006/main" noGrp="1"/>
+          </p:cNvSpPr>
+          <p:nvPr/>
+        </p:nvSpPr>
+        <p:spPr>
+          <a:xfrm xmlns:a="http://schemas.openxmlformats.org/drawingml/2006/main">
+            <a:off x="8362950" y="3124200"/>
+            <a:ext cx="76200" cy="76200"/>
+          </a:xfrm>
+          <a:prstGeom xmlns:a="http://schemas.openxmlformats.org/drawingml/2006/main" prst="rect">
+            <a:avLst/>
+          </a:prstGeom>
+          <a:solidFill xmlns:a="http://schemas.openxmlformats.org/drawingml/2006/main">
+            <a:srgbClr val="FF6B35"/>
+          </a:solidFill>
+          <a:ln xmlns:a="http://schemas.openxmlformats.org/drawingml/2006/main" w="9525">
+            <a:solidFill>
+              <a:srgbClr val="FF6B35"/>
+            </a:solidFill>
+            <a:prstDash val="solid"/>
+          </a:ln>
+        </p:spPr>
       </p:sp>
       <p:sp>
         <p:nvSpPr>
           <p:cNvPr id="8" name="">
             <a:extLst xmlns:a="http://schemas.openxmlformats.org/drawingml/2006/main">
               <a:ext uri="{FF2B5EF4-FFF2-40B4-BE49-F238E27FC236}">
-                <a16:creationId xmlns:a16="http://schemas.microsoft.com/office/drawing/2014/main" id="{E3D524F7-9FCC-4FFB-AEF1-D48426122493}"/>
+                <a16:creationId xmlns:a16="http://schemas.microsoft.com/office/drawing/2014/main" id="{02434202-47EA-4144-8D00-78C9F8412570}"/>
+              </a:ext>
+            </a:extLst>
+          </p:cNvPr>
+          <p:cNvSpPr>
+            <a:spLocks xmlns:a="http://schemas.openxmlformats.org/drawingml/2006/main" noGrp="1"/>
+          </p:cNvSpPr>
+          <p:nvPr/>
+        </p:nvSpPr>
+        <p:spPr>
+          <a:xfrm xmlns:a="http://schemas.openxmlformats.org/drawingml/2006/main">
+            <a:off x="8572500" y="3028950"/>
+            <a:ext cx="2000250" cy="533400"/>
+          </a:xfrm>
+          <a:prstGeom xmlns:a="http://schemas.openxmlformats.org/drawingml/2006/main" prst="rect">
+            <a:avLst/>
+          </a:prstGeom>
+          <a:noFill xmlns:a="http://schemas.openxmlformats.org/drawingml/2006/main"/>
+          <a:ln xmlns:a="http://schemas.openxmlformats.org/drawingml/2006/main" w="0">
+            <a:noFill/>
+            <a:prstDash val="solid"/>
+          </a:ln>
+        </p:spPr>
+        <p:txBody>
+          <a:bodyPr xmlns:a="http://schemas.openxmlformats.org/drawingml/2006/main"/>
+          <a:lstStyle xmlns:a="http://schemas.openxmlformats.org/drawingml/2006/main"/>
+          <a:p xmlns:a="http://schemas.openxmlformats.org/drawingml/2006/main">
+            <a:pPr>
+              <a:defRPr sz="1200" b="0">
+                <a:solidFill>
+                  <a:srgbClr val="000000"/>
+                </a:solidFill>
+              </a:defRPr>
+            </a:pPr>
+            <a:r>
+              <a:rPr sz="1200" b="0">
+                <a:solidFill>
+                  <a:srgbClr val="000000"/>
+                </a:solidFill>
+              </a:rPr>
+              <a:t>In 2020, the benchmark was too strong for a timing layer to catch.</a:t>
+            </a:r>
+          </a:p>
+        </p:txBody>
+      </p:sp>
+      <p:sp>
+        <p:nvSpPr>
+          <p:cNvPr id="9" name="">
+            <a:extLst xmlns:a="http://schemas.openxmlformats.org/drawingml/2006/main">
+              <a:ext uri="{FF2B5EF4-FFF2-40B4-BE49-F238E27FC236}">
+                <a16:creationId xmlns:a16="http://schemas.microsoft.com/office/drawing/2014/main" id="{CE9002FB-A87C-4233-9060-36F887C79CB1}"/>
+              </a:ext>
+            </a:extLst>
+          </p:cNvPr>
+          <p:cNvSpPr>
+            <a:spLocks xmlns:a="http://schemas.openxmlformats.org/drawingml/2006/main" noGrp="1"/>
+          </p:cNvSpPr>
+          <p:nvPr/>
+        </p:nvSpPr>
+        <p:spPr>
+          <a:xfrm xmlns:a="http://schemas.openxmlformats.org/drawingml/2006/main">
+            <a:off x="8362950" y="3600450"/>
+            <a:ext cx="76200" cy="76200"/>
+          </a:xfrm>
+          <a:prstGeom xmlns:a="http://schemas.openxmlformats.org/drawingml/2006/main" prst="rect">
+            <a:avLst/>
+          </a:prstGeom>
+          <a:solidFill xmlns:a="http://schemas.openxmlformats.org/drawingml/2006/main">
+            <a:srgbClr val="FF6B35"/>
+          </a:solidFill>
+          <a:ln xmlns:a="http://schemas.openxmlformats.org/drawingml/2006/main" w="9525">
+            <a:solidFill>
+              <a:srgbClr val="FF6B35"/>
+            </a:solidFill>
+            <a:prstDash val="solid"/>
+          </a:ln>
+        </p:spPr>
+      </p:sp>
+      <p:sp>
+        <p:nvSpPr>
+          <p:cNvPr id="10" name="">
+            <a:extLst xmlns:a="http://schemas.openxmlformats.org/drawingml/2006/main">
+              <a:ext uri="{FF2B5EF4-FFF2-40B4-BE49-F238E27FC236}">
+                <a16:creationId xmlns:a16="http://schemas.microsoft.com/office/drawing/2014/main" id="{8EBBFD8D-5D24-4A2F-ADAC-ED5345CC6DC1}"/>
+              </a:ext>
+            </a:extLst>
+          </p:cNvPr>
+          <p:cNvSpPr>
+            <a:spLocks xmlns:a="http://schemas.openxmlformats.org/drawingml/2006/main" noGrp="1"/>
+          </p:cNvSpPr>
+          <p:nvPr/>
+        </p:nvSpPr>
+        <p:spPr>
+          <a:xfrm xmlns:a="http://schemas.openxmlformats.org/drawingml/2006/main">
+            <a:off x="8572500" y="3505200"/>
+            <a:ext cx="2000250" cy="533400"/>
+          </a:xfrm>
+          <a:prstGeom xmlns:a="http://schemas.openxmlformats.org/drawingml/2006/main" prst="rect">
+            <a:avLst/>
+          </a:prstGeom>
+          <a:noFill xmlns:a="http://schemas.openxmlformats.org/drawingml/2006/main"/>
+          <a:ln xmlns:a="http://schemas.openxmlformats.org/drawingml/2006/main" w="0">
+            <a:noFill/>
+            <a:prstDash val="solid"/>
+          </a:ln>
+        </p:spPr>
+        <p:txBody>
+          <a:bodyPr xmlns:a="http://schemas.openxmlformats.org/drawingml/2006/main"/>
+          <a:lstStyle xmlns:a="http://schemas.openxmlformats.org/drawingml/2006/main"/>
+          <a:p xmlns:a="http://schemas.openxmlformats.org/drawingml/2006/main">
+            <a:pPr>
+              <a:defRPr sz="1200" b="0">
+                <a:solidFill>
+                  <a:srgbClr val="000000"/>
+                </a:solidFill>
+              </a:defRPr>
+            </a:pPr>
+            <a:r>
+              <a:rPr sz="1200" b="0">
+                <a:solidFill>
+                  <a:srgbClr val="000000"/>
+                </a:solidFill>
+              </a:rPr>
+              <a:t>In 2022, the system's partial exposure was valuable.</a:t>
+            </a:r>
+          </a:p>
+        </p:txBody>
+      </p:sp>
+      <p:sp>
+        <p:nvSpPr>
+          <p:cNvPr id="11" name="">
+            <a:extLst xmlns:a="http://schemas.openxmlformats.org/drawingml/2006/main">
+              <a:ext uri="{FF2B5EF4-FFF2-40B4-BE49-F238E27FC236}">
+                <a16:creationId xmlns:a16="http://schemas.microsoft.com/office/drawing/2014/main" id="{BE6ABE53-E6CF-442F-8415-181ED471832C}"/>
+              </a:ext>
+            </a:extLst>
+          </p:cNvPr>
+          <p:cNvSpPr>
+            <a:spLocks xmlns:a="http://schemas.openxmlformats.org/drawingml/2006/main" noGrp="1"/>
+          </p:cNvSpPr>
+          <p:nvPr/>
+        </p:nvSpPr>
+        <p:spPr>
+          <a:xfrm xmlns:a="http://schemas.openxmlformats.org/drawingml/2006/main">
+            <a:off x="8362950" y="4076700"/>
+            <a:ext cx="76200" cy="76200"/>
+          </a:xfrm>
+          <a:prstGeom xmlns:a="http://schemas.openxmlformats.org/drawingml/2006/main" prst="rect">
+            <a:avLst/>
+          </a:prstGeom>
+          <a:solidFill xmlns:a="http://schemas.openxmlformats.org/drawingml/2006/main">
+            <a:srgbClr val="FF6B35"/>
+          </a:solidFill>
+          <a:ln xmlns:a="http://schemas.openxmlformats.org/drawingml/2006/main" w="9525">
+            <a:solidFill>
+              <a:srgbClr val="FF6B35"/>
+            </a:solidFill>
+            <a:prstDash val="solid"/>
+          </a:ln>
+        </p:spPr>
+      </p:sp>
+      <p:sp>
+        <p:nvSpPr>
+          <p:cNvPr id="12" name="">
+            <a:extLst xmlns:a="http://schemas.openxmlformats.org/drawingml/2006/main">
+              <a:ext uri="{FF2B5EF4-FFF2-40B4-BE49-F238E27FC236}">
+                <a16:creationId xmlns:a16="http://schemas.microsoft.com/office/drawing/2014/main" id="{63B6F0C3-DDC3-4B8B-9164-3AA5D6399D99}"/>
+              </a:ext>
+            </a:extLst>
+          </p:cNvPr>
+          <p:cNvSpPr>
+            <a:spLocks xmlns:a="http://schemas.openxmlformats.org/drawingml/2006/main" noGrp="1"/>
+          </p:cNvSpPr>
+          <p:nvPr/>
+        </p:nvSpPr>
+        <p:spPr>
+          <a:xfrm xmlns:a="http://schemas.openxmlformats.org/drawingml/2006/main">
+            <a:off x="8572500" y="3981450"/>
+            <a:ext cx="2000250" cy="533400"/>
+          </a:xfrm>
+          <a:prstGeom xmlns:a="http://schemas.openxmlformats.org/drawingml/2006/main" prst="rect">
+            <a:avLst/>
+          </a:prstGeom>
+          <a:noFill xmlns:a="http://schemas.openxmlformats.org/drawingml/2006/main"/>
+          <a:ln xmlns:a="http://schemas.openxmlformats.org/drawingml/2006/main" w="0">
+            <a:noFill/>
+            <a:prstDash val="solid"/>
+          </a:ln>
+        </p:spPr>
+        <p:txBody>
+          <a:bodyPr xmlns:a="http://schemas.openxmlformats.org/drawingml/2006/main"/>
+          <a:lstStyle xmlns:a="http://schemas.openxmlformats.org/drawingml/2006/main"/>
+          <a:p xmlns:a="http://schemas.openxmlformats.org/drawingml/2006/main">
+            <a:pPr>
+              <a:defRPr sz="1200" b="0">
+                <a:solidFill>
+                  <a:srgbClr val="000000"/>
+                </a:solidFill>
+              </a:defRPr>
+            </a:pPr>
+            <a:r>
+              <a:rPr sz="1200" b="0">
+                <a:solidFill>
+                  <a:srgbClr val="000000"/>
+                </a:solidFill>
+              </a:rPr>
+              <a:t>In 2024, the same lane finally beat the high-beta basket while still trading selectively.</a:t>
+            </a:r>
+          </a:p>
+        </p:txBody>
+      </p:sp>
+      <p:sp>
+        <p:nvSpPr>
+          <p:cNvPr id="13" name="">
+            <a:extLst xmlns:a="http://schemas.openxmlformats.org/drawingml/2006/main">
+              <a:ext uri="{FF2B5EF4-FFF2-40B4-BE49-F238E27FC236}">
+                <a16:creationId xmlns:a16="http://schemas.microsoft.com/office/drawing/2014/main" id="{22FE5118-5687-4501-B3B6-5BCEDFDA081D}"/>
               </a:ext>
             </a:extLst>
           </p:cNvPr>
@@ -12341,7 +14697,7 @@
     </p:spTree>
     <p:extLst>
       <p:ext uri="{BB962C8B-B14F-4D97-AF65-F5344CB8AC3E}">
-        <p14:creationId xmlns:p14="http://schemas.microsoft.com/office/powerpoint/2010/main" val="2132640957"/>
+        <p14:creationId xmlns:p14="http://schemas.microsoft.com/office/powerpoint/2010/main" val="340282812"/>
       </p:ext>
     </p:extLst>
   </p:cSld>

--- a/presentations/gen5_3_momentum_context_size_screen.pptx
+++ b/presentations/gen5_3_momentum_context_size_screen.pptx
@@ -2,25 +2,28 @@
 <file path=ppt/presentation.xml><?xml version="1.0" encoding="utf-8"?>
 <p:presentation xmlns:p="http://schemas.openxmlformats.org/presentationml/2006/main">
   <p:sldMasterIdLst>
-    <p:sldMasterId xmlns:r="http://schemas.openxmlformats.org/officeDocument/2006/relationships" id="2147483648" r:id="Rea60a39da2c34ff7"/>
+    <p:sldMasterId xmlns:r="http://schemas.openxmlformats.org/officeDocument/2006/relationships" id="2147483648" r:id="Re1567775fd484e45"/>
   </p:sldMasterIdLst>
   <p:notesMasterIdLst>
-    <p:notesMasterId xmlns:r="http://schemas.openxmlformats.org/officeDocument/2006/relationships" r:id="R47d0f5faffe944c1"/>
+    <p:notesMasterId xmlns:r="http://schemas.openxmlformats.org/officeDocument/2006/relationships" r:id="R2e9bbcecb6664dfd"/>
   </p:notesMasterIdLst>
   <p:sldIdLst>
-    <p:sldId xmlns:r="http://schemas.openxmlformats.org/officeDocument/2006/relationships" id="256" r:id="R916842fff5094def"/>
-    <p:sldId xmlns:r="http://schemas.openxmlformats.org/officeDocument/2006/relationships" id="257" r:id="R3abcdd5f5d064c3d"/>
-    <p:sldId xmlns:r="http://schemas.openxmlformats.org/officeDocument/2006/relationships" id="258" r:id="Rf8fd5b3e3d354674"/>
-    <p:sldId xmlns:r="http://schemas.openxmlformats.org/officeDocument/2006/relationships" id="259" r:id="R29dc9029b61348be"/>
-    <p:sldId xmlns:r="http://schemas.openxmlformats.org/officeDocument/2006/relationships" id="260" r:id="R52b23a7171244bcf"/>
-    <p:sldId xmlns:r="http://schemas.openxmlformats.org/officeDocument/2006/relationships" id="261" r:id="R946ffc6d0e7b4c1c"/>
-    <p:sldId xmlns:r="http://schemas.openxmlformats.org/officeDocument/2006/relationships" id="262" r:id="Rde2ecd2b77a74e92"/>
-    <p:sldId xmlns:r="http://schemas.openxmlformats.org/officeDocument/2006/relationships" id="263" r:id="Rbe443aade0ab4ca1"/>
-    <p:sldId xmlns:r="http://schemas.openxmlformats.org/officeDocument/2006/relationships" id="264" r:id="R9fe9d1a9ebad4f08"/>
-    <p:sldId xmlns:r="http://schemas.openxmlformats.org/officeDocument/2006/relationships" id="265" r:id="Rb7d1cae3fecb41c2"/>
-    <p:sldId xmlns:r="http://schemas.openxmlformats.org/officeDocument/2006/relationships" id="266" r:id="R6375943c454b4ba1"/>
-    <p:sldId xmlns:r="http://schemas.openxmlformats.org/officeDocument/2006/relationships" id="267" r:id="R8889e82af2f6416c"/>
-    <p:sldId xmlns:r="http://schemas.openxmlformats.org/officeDocument/2006/relationships" id="268" r:id="Rda487666badd4cff"/>
+    <p:sldId xmlns:r="http://schemas.openxmlformats.org/officeDocument/2006/relationships" id="256" r:id="Re4eab6e9026c457d"/>
+    <p:sldId xmlns:r="http://schemas.openxmlformats.org/officeDocument/2006/relationships" id="257" r:id="Rf9e91935d25c4c05"/>
+    <p:sldId xmlns:r="http://schemas.openxmlformats.org/officeDocument/2006/relationships" id="258" r:id="R4dd7eec44539465d"/>
+    <p:sldId xmlns:r="http://schemas.openxmlformats.org/officeDocument/2006/relationships" id="259" r:id="R8313c91c95a64b0d"/>
+    <p:sldId xmlns:r="http://schemas.openxmlformats.org/officeDocument/2006/relationships" id="260" r:id="R1f059701aef44d36"/>
+    <p:sldId xmlns:r="http://schemas.openxmlformats.org/officeDocument/2006/relationships" id="261" r:id="R4d236f9f57b540dc"/>
+    <p:sldId xmlns:r="http://schemas.openxmlformats.org/officeDocument/2006/relationships" id="262" r:id="R3ba3421b67d1494c"/>
+    <p:sldId xmlns:r="http://schemas.openxmlformats.org/officeDocument/2006/relationships" id="263" r:id="R633e6510fa7047ef"/>
+    <p:sldId xmlns:r="http://schemas.openxmlformats.org/officeDocument/2006/relationships" id="264" r:id="R4993a15088d44a7b"/>
+    <p:sldId xmlns:r="http://schemas.openxmlformats.org/officeDocument/2006/relationships" id="265" r:id="R1c2d1f35c5df4961"/>
+    <p:sldId xmlns:r="http://schemas.openxmlformats.org/officeDocument/2006/relationships" id="266" r:id="R7fce26ad23d2477b"/>
+    <p:sldId xmlns:r="http://schemas.openxmlformats.org/officeDocument/2006/relationships" id="267" r:id="R09830085a1684328"/>
+    <p:sldId xmlns:r="http://schemas.openxmlformats.org/officeDocument/2006/relationships" id="268" r:id="R14e7bb8e026d4df4"/>
+    <p:sldId xmlns:r="http://schemas.openxmlformats.org/officeDocument/2006/relationships" id="269" r:id="Re719ff7647f54cf6"/>
+    <p:sldId xmlns:r="http://schemas.openxmlformats.org/officeDocument/2006/relationships" id="270" r:id="R262641f1ebb944d7"/>
+    <p:sldId xmlns:r="http://schemas.openxmlformats.org/officeDocument/2006/relationships" id="271" r:id="R905bc4e26fc44d35"/>
   </p:sldIdLst>
   <p:sldSz cx="12192000" cy="6858000"/>
   <p:notesSz cx="6858000" cy="9144000"/>
@@ -839,6 +842,204 @@
 </p:notes>
 </file>
 
+<file path=ppt/notesSlides/notesSlide14.xml><?xml version="1.0" encoding="utf-8"?>
+<p:notes xmlns:p="http://schemas.openxmlformats.org/presentationml/2006/main">
+  <p:cSld>
+    <p:spTree>
+      <p:nvGrpSpPr>
+        <p:cNvPr id="1" name=""/>
+        <p:cNvGrpSpPr/>
+        <p:nvPr/>
+      </p:nvGrpSpPr>
+      <p:grpSpPr>
+        <a:xfrm xmlns:a="http://schemas.openxmlformats.org/drawingml/2006/main"/>
+      </p:grpSpPr>
+      <p:sp>
+        <p:nvSpPr>
+          <p:cNvPr id="2" name="Slide Image Placeholder 1"/>
+          <p:cNvSpPr>
+            <a:spLocks xmlns:a="http://schemas.openxmlformats.org/drawingml/2006/main" noGrp="1"/>
+          </p:cNvSpPr>
+          <p:nvPr>
+            <p:ph type="sldImg" idx="0"/>
+          </p:nvPr>
+        </p:nvSpPr>
+        <p:spPr/>
+      </p:sp>
+      <p:sp>
+        <p:nvSpPr>
+          <p:cNvPr id="3" name="Notes Placeholder 2"/>
+          <p:cNvSpPr>
+            <a:spLocks xmlns:a="http://schemas.openxmlformats.org/drawingml/2006/main" noGrp="1"/>
+          </p:cNvSpPr>
+          <p:nvPr>
+            <p:ph type="body" idx="1"/>
+          </p:nvPr>
+        </p:nvSpPr>
+        <p:spPr/>
+        <p:txBody>
+          <a:bodyPr xmlns:a="http://schemas.openxmlformats.org/drawingml/2006/main"/>
+          <a:lstStyle xmlns:a="http://schemas.openxmlformats.org/drawingml/2006/main"/>
+          <a:p xmlns:a="http://schemas.openxmlformats.org/drawingml/2006/main"/>
+        </p:txBody>
+      </p:sp>
+      <p:sp>
+        <p:nvSpPr>
+          <p:cNvPr id="4" name="Slide Number Placeholder 3"/>
+          <p:cNvSpPr>
+            <a:spLocks xmlns:a="http://schemas.openxmlformats.org/drawingml/2006/main" noGrp="1"/>
+          </p:cNvSpPr>
+          <p:nvPr>
+            <p:ph type="sldNum" idx="5"/>
+          </p:nvPr>
+        </p:nvSpPr>
+        <p:spPr/>
+        <p:txBody>
+          <a:bodyPr xmlns:a="http://schemas.openxmlformats.org/drawingml/2006/main"/>
+          <a:lstStyle xmlns:a="http://schemas.openxmlformats.org/drawingml/2006/main"/>
+          <a:p xmlns:a="http://schemas.openxmlformats.org/drawingml/2006/main"/>
+        </p:txBody>
+      </p:sp>
+    </p:spTree>
+  </p:cSld>
+  <p:clrMapOvr>
+    <a:masterClrMapping xmlns:a="http://schemas.openxmlformats.org/drawingml/2006/main"/>
+  </p:clrMapOvr>
+</p:notes>
+</file>
+
+<file path=ppt/notesSlides/notesSlide15.xml><?xml version="1.0" encoding="utf-8"?>
+<p:notes xmlns:p="http://schemas.openxmlformats.org/presentationml/2006/main">
+  <p:cSld>
+    <p:spTree>
+      <p:nvGrpSpPr>
+        <p:cNvPr id="1" name=""/>
+        <p:cNvGrpSpPr/>
+        <p:nvPr/>
+      </p:nvGrpSpPr>
+      <p:grpSpPr>
+        <a:xfrm xmlns:a="http://schemas.openxmlformats.org/drawingml/2006/main"/>
+      </p:grpSpPr>
+      <p:sp>
+        <p:nvSpPr>
+          <p:cNvPr id="2" name="Slide Image Placeholder 1"/>
+          <p:cNvSpPr>
+            <a:spLocks xmlns:a="http://schemas.openxmlformats.org/drawingml/2006/main" noGrp="1"/>
+          </p:cNvSpPr>
+          <p:nvPr>
+            <p:ph type="sldImg" idx="0"/>
+          </p:nvPr>
+        </p:nvSpPr>
+        <p:spPr/>
+      </p:sp>
+      <p:sp>
+        <p:nvSpPr>
+          <p:cNvPr id="3" name="Notes Placeholder 2"/>
+          <p:cNvSpPr>
+            <a:spLocks xmlns:a="http://schemas.openxmlformats.org/drawingml/2006/main" noGrp="1"/>
+          </p:cNvSpPr>
+          <p:nvPr>
+            <p:ph type="body" idx="1"/>
+          </p:nvPr>
+        </p:nvSpPr>
+        <p:spPr/>
+        <p:txBody>
+          <a:bodyPr xmlns:a="http://schemas.openxmlformats.org/drawingml/2006/main"/>
+          <a:lstStyle xmlns:a="http://schemas.openxmlformats.org/drawingml/2006/main"/>
+          <a:p xmlns:a="http://schemas.openxmlformats.org/drawingml/2006/main"/>
+        </p:txBody>
+      </p:sp>
+      <p:sp>
+        <p:nvSpPr>
+          <p:cNvPr id="4" name="Slide Number Placeholder 3"/>
+          <p:cNvSpPr>
+            <a:spLocks xmlns:a="http://schemas.openxmlformats.org/drawingml/2006/main" noGrp="1"/>
+          </p:cNvSpPr>
+          <p:nvPr>
+            <p:ph type="sldNum" idx="5"/>
+          </p:nvPr>
+        </p:nvSpPr>
+        <p:spPr/>
+        <p:txBody>
+          <a:bodyPr xmlns:a="http://schemas.openxmlformats.org/drawingml/2006/main"/>
+          <a:lstStyle xmlns:a="http://schemas.openxmlformats.org/drawingml/2006/main"/>
+          <a:p xmlns:a="http://schemas.openxmlformats.org/drawingml/2006/main"/>
+        </p:txBody>
+      </p:sp>
+    </p:spTree>
+  </p:cSld>
+  <p:clrMapOvr>
+    <a:masterClrMapping xmlns:a="http://schemas.openxmlformats.org/drawingml/2006/main"/>
+  </p:clrMapOvr>
+</p:notes>
+</file>
+
+<file path=ppt/notesSlides/notesSlide16.xml><?xml version="1.0" encoding="utf-8"?>
+<p:notes xmlns:p="http://schemas.openxmlformats.org/presentationml/2006/main">
+  <p:cSld>
+    <p:spTree>
+      <p:nvGrpSpPr>
+        <p:cNvPr id="1" name=""/>
+        <p:cNvGrpSpPr/>
+        <p:nvPr/>
+      </p:nvGrpSpPr>
+      <p:grpSpPr>
+        <a:xfrm xmlns:a="http://schemas.openxmlformats.org/drawingml/2006/main"/>
+      </p:grpSpPr>
+      <p:sp>
+        <p:nvSpPr>
+          <p:cNvPr id="2" name="Slide Image Placeholder 1"/>
+          <p:cNvSpPr>
+            <a:spLocks xmlns:a="http://schemas.openxmlformats.org/drawingml/2006/main" noGrp="1"/>
+          </p:cNvSpPr>
+          <p:nvPr>
+            <p:ph type="sldImg" idx="0"/>
+          </p:nvPr>
+        </p:nvSpPr>
+        <p:spPr/>
+      </p:sp>
+      <p:sp>
+        <p:nvSpPr>
+          <p:cNvPr id="3" name="Notes Placeholder 2"/>
+          <p:cNvSpPr>
+            <a:spLocks xmlns:a="http://schemas.openxmlformats.org/drawingml/2006/main" noGrp="1"/>
+          </p:cNvSpPr>
+          <p:nvPr>
+            <p:ph type="body" idx="1"/>
+          </p:nvPr>
+        </p:nvSpPr>
+        <p:spPr/>
+        <p:txBody>
+          <a:bodyPr xmlns:a="http://schemas.openxmlformats.org/drawingml/2006/main"/>
+          <a:lstStyle xmlns:a="http://schemas.openxmlformats.org/drawingml/2006/main"/>
+          <a:p xmlns:a="http://schemas.openxmlformats.org/drawingml/2006/main"/>
+        </p:txBody>
+      </p:sp>
+      <p:sp>
+        <p:nvSpPr>
+          <p:cNvPr id="4" name="Slide Number Placeholder 3"/>
+          <p:cNvSpPr>
+            <a:spLocks xmlns:a="http://schemas.openxmlformats.org/drawingml/2006/main" noGrp="1"/>
+          </p:cNvSpPr>
+          <p:nvPr>
+            <p:ph type="sldNum" idx="5"/>
+          </p:nvPr>
+        </p:nvSpPr>
+        <p:spPr/>
+        <p:txBody>
+          <a:bodyPr xmlns:a="http://schemas.openxmlformats.org/drawingml/2006/main"/>
+          <a:lstStyle xmlns:a="http://schemas.openxmlformats.org/drawingml/2006/main"/>
+          <a:p xmlns:a="http://schemas.openxmlformats.org/drawingml/2006/main"/>
+        </p:txBody>
+      </p:sp>
+    </p:spTree>
+  </p:cSld>
+  <p:clrMapOvr>
+    <a:masterClrMapping xmlns:a="http://schemas.openxmlformats.org/drawingml/2006/main"/>
+  </p:clrMapOvr>
+</p:notes>
+</file>
+
 <file path=ppt/notesSlides/notesSlide2.xml><?xml version="1.0" encoding="utf-8"?>
 <p:notes xmlns:p="http://schemas.openxmlformats.org/presentationml/2006/main">
   <p:cSld>
@@ -1405,7 +1606,7 @@
   </p:cSld>
   <p:clrMap bg1="lt1" tx1="dk1" bg2="lt2" tx2="dk2" accent1="accent1" accent2="accent2" accent3="accent3" accent4="accent4" accent5="accent5" accent6="accent6" hlink="hlink" folHlink="folHlink"/>
   <p:sldLayoutIdLst>
-    <p:sldLayoutId xmlns:r="http://schemas.openxmlformats.org/officeDocument/2006/relationships" id="2147483649" r:id="R44a25fc431d949d7"/>
+    <p:sldLayoutId xmlns:r="http://schemas.openxmlformats.org/officeDocument/2006/relationships" id="2147483649" r:id="R8928f2350802420d"/>
   </p:sldLayoutIdLst>
   <p:txStyles>
     <p:titleStyle>
@@ -2163,7 +2364,7 @@
           <p:cNvPr id="1" name="">
             <a:extLst xmlns:a="http://schemas.openxmlformats.org/drawingml/2006/main">
               <a:ext uri="{FF2B5EF4-FFF2-40B4-BE49-F238E27FC236}">
-                <a16:creationId xmlns:a16="http://schemas.microsoft.com/office/drawing/2014/main" id="{79D22403-7E5E-4549-ADF7-27616952FDEE}"/>
+                <a16:creationId xmlns:a16="http://schemas.microsoft.com/office/drawing/2014/main" id="{22D69BE1-E624-4616-80CF-7B6ACA54DA48}"/>
               </a:ext>
             </a:extLst>
           </p:cNvPr>
@@ -2213,7 +2414,7 @@
           <p:cNvPr id="2" name="">
             <a:extLst xmlns:a="http://schemas.openxmlformats.org/drawingml/2006/main">
               <a:ext uri="{FF2B5EF4-FFF2-40B4-BE49-F238E27FC236}">
-                <a16:creationId xmlns:a16="http://schemas.microsoft.com/office/drawing/2014/main" id="{275BB50D-7C29-495E-B22B-0341D858B7FE}"/>
+                <a16:creationId xmlns:a16="http://schemas.microsoft.com/office/drawing/2014/main" id="{224852A1-7751-449C-98F5-D0E6201F701C}"/>
               </a:ext>
             </a:extLst>
           </p:cNvPr>
@@ -2263,7 +2464,7 @@
           <p:cNvPr id="3" name="">
             <a:extLst xmlns:a="http://schemas.openxmlformats.org/drawingml/2006/main">
               <a:ext uri="{FF2B5EF4-FFF2-40B4-BE49-F238E27FC236}">
-                <a16:creationId xmlns:a16="http://schemas.microsoft.com/office/drawing/2014/main" id="{23C56E5B-01B5-4358-BBEA-BFDA0580A37D}"/>
+                <a16:creationId xmlns:a16="http://schemas.microsoft.com/office/drawing/2014/main" id="{F4BBACA5-AF3E-43D1-AF65-9167987AEF15}"/>
               </a:ext>
             </a:extLst>
           </p:cNvPr>
@@ -2313,7 +2514,7 @@
           <p:cNvPr id="4" name="">
             <a:extLst xmlns:a="http://schemas.openxmlformats.org/drawingml/2006/main">
               <a:ext uri="{FF2B5EF4-FFF2-40B4-BE49-F238E27FC236}">
-                <a16:creationId xmlns:a16="http://schemas.microsoft.com/office/drawing/2014/main" id="{13AF9497-B72A-48B6-9B47-AC273CEABF3C}"/>
+                <a16:creationId xmlns:a16="http://schemas.microsoft.com/office/drawing/2014/main" id="{BEFC5E41-DA5C-43AF-8084-DE2E7A114C1B}"/>
               </a:ext>
             </a:extLst>
           </p:cNvPr>
@@ -2346,7 +2547,7 @@
           <p:cNvPr id="5" name="">
             <a:extLst xmlns:a="http://schemas.openxmlformats.org/drawingml/2006/main">
               <a:ext uri="{FF2B5EF4-FFF2-40B4-BE49-F238E27FC236}">
-                <a16:creationId xmlns:a16="http://schemas.microsoft.com/office/drawing/2014/main" id="{63C516A2-8EA1-41C4-9E64-918F29C4F143}"/>
+                <a16:creationId xmlns:a16="http://schemas.microsoft.com/office/drawing/2014/main" id="{96772012-220B-4428-9FA4-8FBE6D8112AA}"/>
               </a:ext>
             </a:extLst>
           </p:cNvPr>
@@ -2396,7 +2597,7 @@
           <p:cNvPr id="6" name="">
             <a:extLst xmlns:a="http://schemas.openxmlformats.org/drawingml/2006/main">
               <a:ext uri="{FF2B5EF4-FFF2-40B4-BE49-F238E27FC236}">
-                <a16:creationId xmlns:a16="http://schemas.microsoft.com/office/drawing/2014/main" id="{193E7B3F-880C-43C5-9D9B-447062C3C792}"/>
+                <a16:creationId xmlns:a16="http://schemas.microsoft.com/office/drawing/2014/main" id="{7F1529E8-84E3-4C00-938F-A2D99F640EB3}"/>
               </a:ext>
             </a:extLst>
           </p:cNvPr>
@@ -2444,7 +2645,7 @@
     </p:spTree>
     <p:extLst>
       <p:ext uri="{BB962C8B-B14F-4D97-AF65-F5344CB8AC3E}">
-        <p14:creationId xmlns:p14="http://schemas.microsoft.com/office/powerpoint/2010/main" val="72612694"/>
+        <p14:creationId xmlns:p14="http://schemas.microsoft.com/office/powerpoint/2010/main" val="989609315"/>
       </p:ext>
     </p:extLst>
   </p:cSld>
@@ -2475,7 +2676,7 @@
           <p:cNvPr id="1" name="">
             <a:extLst xmlns:a="http://schemas.openxmlformats.org/drawingml/2006/main">
               <a:ext uri="{FF2B5EF4-FFF2-40B4-BE49-F238E27FC236}">
-                <a16:creationId xmlns:a16="http://schemas.microsoft.com/office/drawing/2014/main" id="{D7D3DB81-3CCE-4C32-BC6B-E0F7C240A265}"/>
+                <a16:creationId xmlns:a16="http://schemas.microsoft.com/office/drawing/2014/main" id="{056E328E-8884-4F3D-94C1-6E89E0FC3767}"/>
               </a:ext>
             </a:extLst>
           </p:cNvPr>
@@ -2525,7 +2726,7 @@
           <p:cNvPr id="2" name="">
             <a:extLst xmlns:a="http://schemas.openxmlformats.org/drawingml/2006/main">
               <a:ext uri="{FF2B5EF4-FFF2-40B4-BE49-F238E27FC236}">
-                <a16:creationId xmlns:a16="http://schemas.microsoft.com/office/drawing/2014/main" id="{909FD28B-E84C-477B-9384-02A7C4C4F494}"/>
+                <a16:creationId xmlns:a16="http://schemas.microsoft.com/office/drawing/2014/main" id="{FA2818CE-0C32-4284-972D-70F92279BF1D}"/>
               </a:ext>
             </a:extLst>
           </p:cNvPr>
@@ -2575,7 +2776,7 @@
           <p:cNvPr id="3" name="">
             <a:extLst xmlns:a="http://schemas.openxmlformats.org/drawingml/2006/main">
               <a:ext uri="{FF2B5EF4-FFF2-40B4-BE49-F238E27FC236}">
-                <a16:creationId xmlns:a16="http://schemas.microsoft.com/office/drawing/2014/main" id="{AA38EA12-0465-44A6-B1D4-98B5A88FD190}"/>
+                <a16:creationId xmlns:a16="http://schemas.microsoft.com/office/drawing/2014/main" id="{BB124BFD-C015-4359-B9C8-B6E7E47396C1}"/>
               </a:ext>
             </a:extLst>
           </p:cNvPr>
@@ -2612,7 +2813,7 @@
           <p:nvPr/>
         </p:nvPicPr>
         <p:blipFill>
-          <a:blip xmlns:r="http://schemas.openxmlformats.org/officeDocument/2006/relationships" xmlns:a="http://schemas.openxmlformats.org/drawingml/2006/main" r:embed="R45491865c7d74dae"/>
+          <a:blip xmlns:r="http://schemas.openxmlformats.org/officeDocument/2006/relationships" xmlns:a="http://schemas.openxmlformats.org/drawingml/2006/main" r:embed="R77acd17572e241a6"/>
           <a:stretch xmlns:a="http://schemas.openxmlformats.org/drawingml/2006/main"/>
         </p:blipFill>
         <p:spPr>
@@ -2630,7 +2831,7 @@
           <p:cNvPr id="5" name="">
             <a:extLst xmlns:a="http://schemas.openxmlformats.org/drawingml/2006/main">
               <a:ext uri="{FF2B5EF4-FFF2-40B4-BE49-F238E27FC236}">
-                <a16:creationId xmlns:a16="http://schemas.microsoft.com/office/drawing/2014/main" id="{7CFDE43E-1D9E-4D93-83DB-68A9EE133765}"/>
+                <a16:creationId xmlns:a16="http://schemas.microsoft.com/office/drawing/2014/main" id="{10D15895-7BB2-4FC4-8380-F3DA5E7D7D81}"/>
               </a:ext>
             </a:extLst>
           </p:cNvPr>
@@ -2663,7 +2864,7 @@
           <p:cNvPr id="6" name="">
             <a:extLst xmlns:a="http://schemas.openxmlformats.org/drawingml/2006/main">
               <a:ext uri="{FF2B5EF4-FFF2-40B4-BE49-F238E27FC236}">
-                <a16:creationId xmlns:a16="http://schemas.microsoft.com/office/drawing/2014/main" id="{69B52AF1-02A1-4CAF-9EC9-FDD0D34A2D23}"/>
+                <a16:creationId xmlns:a16="http://schemas.microsoft.com/office/drawing/2014/main" id="{6D586B6D-24A2-4C02-B2AF-64A50A24D785}"/>
               </a:ext>
             </a:extLst>
           </p:cNvPr>
@@ -2713,7 +2914,7 @@
           <p:cNvPr id="7" name="">
             <a:extLst xmlns:a="http://schemas.openxmlformats.org/drawingml/2006/main">
               <a:ext uri="{FF2B5EF4-FFF2-40B4-BE49-F238E27FC236}">
-                <a16:creationId xmlns:a16="http://schemas.microsoft.com/office/drawing/2014/main" id="{9155DF38-5143-4B2E-BB67-DFEA1A045FB9}"/>
+                <a16:creationId xmlns:a16="http://schemas.microsoft.com/office/drawing/2014/main" id="{20958770-7467-4B3B-AC0A-5BD318790E79}"/>
               </a:ext>
             </a:extLst>
           </p:cNvPr>
@@ -2763,7 +2964,7 @@
           <p:cNvPr id="8" name="">
             <a:extLst xmlns:a="http://schemas.openxmlformats.org/drawingml/2006/main">
               <a:ext uri="{FF2B5EF4-FFF2-40B4-BE49-F238E27FC236}">
-                <a16:creationId xmlns:a16="http://schemas.microsoft.com/office/drawing/2014/main" id="{A52DE713-882B-4E4B-91E0-D60E6BED5811}"/>
+                <a16:creationId xmlns:a16="http://schemas.microsoft.com/office/drawing/2014/main" id="{70B41678-BD1A-4B71-B250-883F80F383BF}"/>
               </a:ext>
             </a:extLst>
           </p:cNvPr>
@@ -2811,7 +3012,7 @@
     </p:spTree>
     <p:extLst>
       <p:ext uri="{BB962C8B-B14F-4D97-AF65-F5344CB8AC3E}">
-        <p14:creationId xmlns:p14="http://schemas.microsoft.com/office/powerpoint/2010/main" val="1676005313"/>
+        <p14:creationId xmlns:p14="http://schemas.microsoft.com/office/powerpoint/2010/main" val="1966636422"/>
       </p:ext>
     </p:extLst>
   </p:cSld>
@@ -2842,7 +3043,7 @@
           <p:cNvPr id="1" name="">
             <a:extLst xmlns:a="http://schemas.openxmlformats.org/drawingml/2006/main">
               <a:ext uri="{FF2B5EF4-FFF2-40B4-BE49-F238E27FC236}">
-                <a16:creationId xmlns:a16="http://schemas.microsoft.com/office/drawing/2014/main" id="{5B68C056-1D0B-492A-825C-F526F357B09C}"/>
+                <a16:creationId xmlns:a16="http://schemas.microsoft.com/office/drawing/2014/main" id="{69AC9AFD-CE85-4367-BEF2-598CBA0110BA}"/>
               </a:ext>
             </a:extLst>
           </p:cNvPr>
@@ -2892,7 +3093,7 @@
           <p:cNvPr id="2" name="">
             <a:extLst xmlns:a="http://schemas.openxmlformats.org/drawingml/2006/main">
               <a:ext uri="{FF2B5EF4-FFF2-40B4-BE49-F238E27FC236}">
-                <a16:creationId xmlns:a16="http://schemas.microsoft.com/office/drawing/2014/main" id="{68C769EF-C02D-43EF-9302-7E4B387E91B6}"/>
+                <a16:creationId xmlns:a16="http://schemas.microsoft.com/office/drawing/2014/main" id="{13956F67-D7AC-498B-8017-480EA92C42F8}"/>
               </a:ext>
             </a:extLst>
           </p:cNvPr>
@@ -2942,7 +3143,7 @@
           <p:cNvPr id="3" name="">
             <a:extLst xmlns:a="http://schemas.openxmlformats.org/drawingml/2006/main">
               <a:ext uri="{FF2B5EF4-FFF2-40B4-BE49-F238E27FC236}">
-                <a16:creationId xmlns:a16="http://schemas.microsoft.com/office/drawing/2014/main" id="{44690A02-D738-44CD-BBFC-220926C20018}"/>
+                <a16:creationId xmlns:a16="http://schemas.microsoft.com/office/drawing/2014/main" id="{3F3C3172-D5FF-4904-9031-0B4609EF879B}"/>
               </a:ext>
             </a:extLst>
           </p:cNvPr>
@@ -2979,7 +3180,7 @@
           <p:nvPr/>
         </p:nvPicPr>
         <p:blipFill>
-          <a:blip xmlns:r="http://schemas.openxmlformats.org/officeDocument/2006/relationships" xmlns:a="http://schemas.openxmlformats.org/drawingml/2006/main" r:embed="R0e05d26e70cb4fa9"/>
+          <a:blip xmlns:r="http://schemas.openxmlformats.org/officeDocument/2006/relationships" xmlns:a="http://schemas.openxmlformats.org/drawingml/2006/main" r:embed="R4c04607c711c43ea"/>
           <a:stretch xmlns:a="http://schemas.openxmlformats.org/drawingml/2006/main"/>
         </p:blipFill>
         <p:spPr>
@@ -2997,7 +3198,7 @@
           <p:cNvPr id="5" name="">
             <a:extLst xmlns:a="http://schemas.openxmlformats.org/drawingml/2006/main">
               <a:ext uri="{FF2B5EF4-FFF2-40B4-BE49-F238E27FC236}">
-                <a16:creationId xmlns:a16="http://schemas.microsoft.com/office/drawing/2014/main" id="{D39B2A49-D311-46A4-B6EC-52F10C8E6FD7}"/>
+                <a16:creationId xmlns:a16="http://schemas.microsoft.com/office/drawing/2014/main" id="{1EC8A662-140A-4FDD-9E2C-0040ADEADE37}"/>
               </a:ext>
             </a:extLst>
           </p:cNvPr>
@@ -3030,7 +3231,7 @@
           <p:cNvPr id="6" name="">
             <a:extLst xmlns:a="http://schemas.openxmlformats.org/drawingml/2006/main">
               <a:ext uri="{FF2B5EF4-FFF2-40B4-BE49-F238E27FC236}">
-                <a16:creationId xmlns:a16="http://schemas.microsoft.com/office/drawing/2014/main" id="{05A812E3-7FAA-45EA-815C-1672293DC8D1}"/>
+                <a16:creationId xmlns:a16="http://schemas.microsoft.com/office/drawing/2014/main" id="{C4E0333F-E1B7-4E3D-A944-DF391448A61B}"/>
               </a:ext>
             </a:extLst>
           </p:cNvPr>
@@ -3080,7 +3281,7 @@
           <p:cNvPr id="7" name="">
             <a:extLst xmlns:a="http://schemas.openxmlformats.org/drawingml/2006/main">
               <a:ext uri="{FF2B5EF4-FFF2-40B4-BE49-F238E27FC236}">
-                <a16:creationId xmlns:a16="http://schemas.microsoft.com/office/drawing/2014/main" id="{C52BE384-2EA7-4C53-A5BC-39ED3834B9FC}"/>
+                <a16:creationId xmlns:a16="http://schemas.microsoft.com/office/drawing/2014/main" id="{270A3C1D-F41C-42C6-AACF-0F496A8C5B68}"/>
               </a:ext>
             </a:extLst>
           </p:cNvPr>
@@ -3113,7 +3314,7 @@
           <p:cNvPr id="8" name="">
             <a:extLst xmlns:a="http://schemas.openxmlformats.org/drawingml/2006/main">
               <a:ext uri="{FF2B5EF4-FFF2-40B4-BE49-F238E27FC236}">
-                <a16:creationId xmlns:a16="http://schemas.microsoft.com/office/drawing/2014/main" id="{0C2D0AA4-BF7C-49D1-9824-3242155FC8B4}"/>
+                <a16:creationId xmlns:a16="http://schemas.microsoft.com/office/drawing/2014/main" id="{594AD948-1BC9-43FE-94E1-2BBE287079A6}"/>
               </a:ext>
             </a:extLst>
           </p:cNvPr>
@@ -3163,7 +3364,7 @@
           <p:cNvPr id="9" name="">
             <a:extLst xmlns:a="http://schemas.openxmlformats.org/drawingml/2006/main">
               <a:ext uri="{FF2B5EF4-FFF2-40B4-BE49-F238E27FC236}">
-                <a16:creationId xmlns:a16="http://schemas.microsoft.com/office/drawing/2014/main" id="{CECA6E6C-03B9-4DF8-BC9A-13FB548727BB}"/>
+                <a16:creationId xmlns:a16="http://schemas.microsoft.com/office/drawing/2014/main" id="{44530694-45C0-45CB-B8CC-EA3D5938D86C}"/>
               </a:ext>
             </a:extLst>
           </p:cNvPr>
@@ -3196,7 +3397,7 @@
           <p:cNvPr id="10" name="">
             <a:extLst xmlns:a="http://schemas.openxmlformats.org/drawingml/2006/main">
               <a:ext uri="{FF2B5EF4-FFF2-40B4-BE49-F238E27FC236}">
-                <a16:creationId xmlns:a16="http://schemas.microsoft.com/office/drawing/2014/main" id="{5394EEFE-0ED1-439D-850E-C6DA00A982C9}"/>
+                <a16:creationId xmlns:a16="http://schemas.microsoft.com/office/drawing/2014/main" id="{8DA7A341-7218-45BB-8401-081AAD329D40}"/>
               </a:ext>
             </a:extLst>
           </p:cNvPr>
@@ -3246,7 +3447,7 @@
           <p:cNvPr id="11" name="">
             <a:extLst xmlns:a="http://schemas.openxmlformats.org/drawingml/2006/main">
               <a:ext uri="{FF2B5EF4-FFF2-40B4-BE49-F238E27FC236}">
-                <a16:creationId xmlns:a16="http://schemas.microsoft.com/office/drawing/2014/main" id="{EEE698A0-8786-4AE9-B067-D5CD3A34A679}"/>
+                <a16:creationId xmlns:a16="http://schemas.microsoft.com/office/drawing/2014/main" id="{972E89A0-629D-4C92-AD3F-3F895E7CF7E9}"/>
               </a:ext>
             </a:extLst>
           </p:cNvPr>
@@ -3279,7 +3480,7 @@
           <p:cNvPr id="12" name="">
             <a:extLst xmlns:a="http://schemas.openxmlformats.org/drawingml/2006/main">
               <a:ext uri="{FF2B5EF4-FFF2-40B4-BE49-F238E27FC236}">
-                <a16:creationId xmlns:a16="http://schemas.microsoft.com/office/drawing/2014/main" id="{92F892EC-58AB-46F5-B05D-DCDD1696A8D3}"/>
+                <a16:creationId xmlns:a16="http://schemas.microsoft.com/office/drawing/2014/main" id="{6215A24C-DE98-4539-965E-49E2A7CD272B}"/>
               </a:ext>
             </a:extLst>
           </p:cNvPr>
@@ -3329,7 +3530,7 @@
           <p:cNvPr id="13" name="">
             <a:extLst xmlns:a="http://schemas.openxmlformats.org/drawingml/2006/main">
               <a:ext uri="{FF2B5EF4-FFF2-40B4-BE49-F238E27FC236}">
-                <a16:creationId xmlns:a16="http://schemas.microsoft.com/office/drawing/2014/main" id="{55077AAB-06DD-4DE4-A339-3B5438BDA8D6}"/>
+                <a16:creationId xmlns:a16="http://schemas.microsoft.com/office/drawing/2014/main" id="{7F590E31-541B-463D-93E8-8DD894D8D546}"/>
               </a:ext>
             </a:extLst>
           </p:cNvPr>
@@ -3377,7 +3578,7 @@
     </p:spTree>
     <p:extLst>
       <p:ext uri="{BB962C8B-B14F-4D97-AF65-F5344CB8AC3E}">
-        <p14:creationId xmlns:p14="http://schemas.microsoft.com/office/powerpoint/2010/main" val="1315981939"/>
+        <p14:creationId xmlns:p14="http://schemas.microsoft.com/office/powerpoint/2010/main" val="2061091237"/>
       </p:ext>
     </p:extLst>
   </p:cSld>
@@ -3408,7 +3609,7 @@
           <p:cNvPr id="1" name="">
             <a:extLst xmlns:a="http://schemas.openxmlformats.org/drawingml/2006/main">
               <a:ext uri="{FF2B5EF4-FFF2-40B4-BE49-F238E27FC236}">
-                <a16:creationId xmlns:a16="http://schemas.microsoft.com/office/drawing/2014/main" id="{D8565518-5C75-4B63-B7F3-89DC3DA80CB3}"/>
+                <a16:creationId xmlns:a16="http://schemas.microsoft.com/office/drawing/2014/main" id="{0BA2A30D-6F67-4A00-961F-C2C4D32ED890}"/>
               </a:ext>
             </a:extLst>
           </p:cNvPr>
@@ -3458,7 +3659,7 @@
           <p:cNvPr id="2" name="">
             <a:extLst xmlns:a="http://schemas.openxmlformats.org/drawingml/2006/main">
               <a:ext uri="{FF2B5EF4-FFF2-40B4-BE49-F238E27FC236}">
-                <a16:creationId xmlns:a16="http://schemas.microsoft.com/office/drawing/2014/main" id="{4C72CB12-8ABC-4C36-933A-407BC54D4BF3}"/>
+                <a16:creationId xmlns:a16="http://schemas.microsoft.com/office/drawing/2014/main" id="{A96A0EE3-8A40-4F5C-B4F2-B9A4BBA1080C}"/>
               </a:ext>
             </a:extLst>
           </p:cNvPr>
@@ -3508,7 +3709,7 @@
           <p:cNvPr id="3" name="">
             <a:extLst xmlns:a="http://schemas.openxmlformats.org/drawingml/2006/main">
               <a:ext uri="{FF2B5EF4-FFF2-40B4-BE49-F238E27FC236}">
-                <a16:creationId xmlns:a16="http://schemas.microsoft.com/office/drawing/2014/main" id="{B41EDC4E-848E-485E-9087-BD0CF5E161DD}"/>
+                <a16:creationId xmlns:a16="http://schemas.microsoft.com/office/drawing/2014/main" id="{61E27BD0-18D6-4D39-882E-0F0E026EF04B}"/>
               </a:ext>
             </a:extLst>
           </p:cNvPr>
@@ -3541,7 +3742,7 @@
           <p:cNvPr id="4" name="">
             <a:extLst xmlns:a="http://schemas.openxmlformats.org/drawingml/2006/main">
               <a:ext uri="{FF2B5EF4-FFF2-40B4-BE49-F238E27FC236}">
-                <a16:creationId xmlns:a16="http://schemas.microsoft.com/office/drawing/2014/main" id="{47D16929-0636-4198-B332-265F45E139E0}"/>
+                <a16:creationId xmlns:a16="http://schemas.microsoft.com/office/drawing/2014/main" id="{FBFE2859-8E26-4E1B-AF70-72B914EBFFC8}"/>
               </a:ext>
             </a:extLst>
           </p:cNvPr>
@@ -3574,7 +3775,7 @@
           <p:cNvPr id="5" name="">
             <a:extLst xmlns:a="http://schemas.openxmlformats.org/drawingml/2006/main">
               <a:ext uri="{FF2B5EF4-FFF2-40B4-BE49-F238E27FC236}">
-                <a16:creationId xmlns:a16="http://schemas.microsoft.com/office/drawing/2014/main" id="{195DABB3-A0F0-4C35-9E97-03682CAC7C4D}"/>
+                <a16:creationId xmlns:a16="http://schemas.microsoft.com/office/drawing/2014/main" id="{4DB49341-D462-4025-BD2C-00663AA2BBEF}"/>
               </a:ext>
             </a:extLst>
           </p:cNvPr>
@@ -3607,7 +3808,7 @@
           <p:cNvPr id="6" name="">
             <a:extLst xmlns:a="http://schemas.openxmlformats.org/drawingml/2006/main">
               <a:ext uri="{FF2B5EF4-FFF2-40B4-BE49-F238E27FC236}">
-                <a16:creationId xmlns:a16="http://schemas.microsoft.com/office/drawing/2014/main" id="{0D4CFFB9-2B14-43FA-8C5C-F1EE2FA02982}"/>
+                <a16:creationId xmlns:a16="http://schemas.microsoft.com/office/drawing/2014/main" id="{EB2F3E6F-5831-44DF-ACD9-7058A77EA84B}"/>
               </a:ext>
             </a:extLst>
           </p:cNvPr>
@@ -3657,7 +3858,7 @@
           <p:cNvPr id="7" name="">
             <a:extLst xmlns:a="http://schemas.openxmlformats.org/drawingml/2006/main">
               <a:ext uri="{FF2B5EF4-FFF2-40B4-BE49-F238E27FC236}">
-                <a16:creationId xmlns:a16="http://schemas.microsoft.com/office/drawing/2014/main" id="{7632D407-8A34-4795-9D1A-3CDFEC117800}"/>
+                <a16:creationId xmlns:a16="http://schemas.microsoft.com/office/drawing/2014/main" id="{49501804-E532-48BD-BBC6-0B3AC577A1D1}"/>
               </a:ext>
             </a:extLst>
           </p:cNvPr>
@@ -3690,7 +3891,7 @@
           <p:cNvPr id="8" name="">
             <a:extLst xmlns:a="http://schemas.openxmlformats.org/drawingml/2006/main">
               <a:ext uri="{FF2B5EF4-FFF2-40B4-BE49-F238E27FC236}">
-                <a16:creationId xmlns:a16="http://schemas.microsoft.com/office/drawing/2014/main" id="{E5513D1F-1577-4F0E-BDEB-E42388C82F87}"/>
+                <a16:creationId xmlns:a16="http://schemas.microsoft.com/office/drawing/2014/main" id="{83A5E021-A4A0-40DF-8BE0-B570EE9C5915}"/>
               </a:ext>
             </a:extLst>
           </p:cNvPr>
@@ -3740,7 +3941,7 @@
           <p:cNvPr id="9" name="">
             <a:extLst xmlns:a="http://schemas.openxmlformats.org/drawingml/2006/main">
               <a:ext uri="{FF2B5EF4-FFF2-40B4-BE49-F238E27FC236}">
-                <a16:creationId xmlns:a16="http://schemas.microsoft.com/office/drawing/2014/main" id="{BF7148A6-F95F-4BB2-8F02-855C98CF26D8}"/>
+                <a16:creationId xmlns:a16="http://schemas.microsoft.com/office/drawing/2014/main" id="{838DBD67-4611-4F7F-8687-6C424686EA43}"/>
               </a:ext>
             </a:extLst>
           </p:cNvPr>
@@ -3773,7 +3974,7 @@
           <p:cNvPr id="10" name="">
             <a:extLst xmlns:a="http://schemas.openxmlformats.org/drawingml/2006/main">
               <a:ext uri="{FF2B5EF4-FFF2-40B4-BE49-F238E27FC236}">
-                <a16:creationId xmlns:a16="http://schemas.microsoft.com/office/drawing/2014/main" id="{EE34E1D7-2A83-4650-912A-ECC280984179}"/>
+                <a16:creationId xmlns:a16="http://schemas.microsoft.com/office/drawing/2014/main" id="{ABAA65D9-4C43-4C5F-B3DC-BECEB53280E2}"/>
               </a:ext>
             </a:extLst>
           </p:cNvPr>
@@ -3823,7 +4024,7 @@
           <p:cNvPr id="11" name="">
             <a:extLst xmlns:a="http://schemas.openxmlformats.org/drawingml/2006/main">
               <a:ext uri="{FF2B5EF4-FFF2-40B4-BE49-F238E27FC236}">
-                <a16:creationId xmlns:a16="http://schemas.microsoft.com/office/drawing/2014/main" id="{1D69CB7B-2C4E-4CC0-A252-37FF467AB2BE}"/>
+                <a16:creationId xmlns:a16="http://schemas.microsoft.com/office/drawing/2014/main" id="{0823894B-F502-41E1-879F-D9D01BA72C00}"/>
               </a:ext>
             </a:extLst>
           </p:cNvPr>
@@ -3856,7 +4057,7 @@
           <p:cNvPr id="12" name="">
             <a:extLst xmlns:a="http://schemas.openxmlformats.org/drawingml/2006/main">
               <a:ext uri="{FF2B5EF4-FFF2-40B4-BE49-F238E27FC236}">
-                <a16:creationId xmlns:a16="http://schemas.microsoft.com/office/drawing/2014/main" id="{D5299CD2-8001-408B-9501-A17BCEC770F2}"/>
+                <a16:creationId xmlns:a16="http://schemas.microsoft.com/office/drawing/2014/main" id="{7E3BBB49-565D-4F8C-AE35-C3424A20F443}"/>
               </a:ext>
             </a:extLst>
           </p:cNvPr>
@@ -3906,7 +4107,7 @@
           <p:cNvPr id="13" name="">
             <a:extLst xmlns:a="http://schemas.openxmlformats.org/drawingml/2006/main">
               <a:ext uri="{FF2B5EF4-FFF2-40B4-BE49-F238E27FC236}">
-                <a16:creationId xmlns:a16="http://schemas.microsoft.com/office/drawing/2014/main" id="{6447F585-DD4B-4636-A965-9C7DC841AFF8}"/>
+                <a16:creationId xmlns:a16="http://schemas.microsoft.com/office/drawing/2014/main" id="{1861CE03-30AC-47D9-BF2A-0431DA70FCAE}"/>
               </a:ext>
             </a:extLst>
           </p:cNvPr>
@@ -3939,7 +4140,7 @@
           <p:cNvPr id="14" name="">
             <a:extLst xmlns:a="http://schemas.openxmlformats.org/drawingml/2006/main">
               <a:ext uri="{FF2B5EF4-FFF2-40B4-BE49-F238E27FC236}">
-                <a16:creationId xmlns:a16="http://schemas.microsoft.com/office/drawing/2014/main" id="{5523250E-0F6D-4BCF-A1ED-6EA7E6EE2636}"/>
+                <a16:creationId xmlns:a16="http://schemas.microsoft.com/office/drawing/2014/main" id="{49014633-A937-42B5-85B8-805ED5F37A33}"/>
               </a:ext>
             </a:extLst>
           </p:cNvPr>
@@ -3989,7 +4190,7 @@
           <p:cNvPr id="15" name="">
             <a:extLst xmlns:a="http://schemas.openxmlformats.org/drawingml/2006/main">
               <a:ext uri="{FF2B5EF4-FFF2-40B4-BE49-F238E27FC236}">
-                <a16:creationId xmlns:a16="http://schemas.microsoft.com/office/drawing/2014/main" id="{FF054089-BEBE-4735-A582-EC4625B61CEA}"/>
+                <a16:creationId xmlns:a16="http://schemas.microsoft.com/office/drawing/2014/main" id="{50CCBAD4-4419-42B6-9BC5-EEBBFE2F5933}"/>
               </a:ext>
             </a:extLst>
           </p:cNvPr>
@@ -4039,7 +4240,7 @@
           <p:cNvPr id="16" name="">
             <a:extLst xmlns:a="http://schemas.openxmlformats.org/drawingml/2006/main">
               <a:ext uri="{FF2B5EF4-FFF2-40B4-BE49-F238E27FC236}">
-                <a16:creationId xmlns:a16="http://schemas.microsoft.com/office/drawing/2014/main" id="{1AA01C27-CC1B-4195-B350-6BEEF9B0BB17}"/>
+                <a16:creationId xmlns:a16="http://schemas.microsoft.com/office/drawing/2014/main" id="{D440F507-6AEE-40F7-8E31-AF58F8F64D76}"/>
               </a:ext>
             </a:extLst>
           </p:cNvPr>
@@ -4072,7 +4273,7 @@
           <p:cNvPr id="17" name="">
             <a:extLst xmlns:a="http://schemas.openxmlformats.org/drawingml/2006/main">
               <a:ext uri="{FF2B5EF4-FFF2-40B4-BE49-F238E27FC236}">
-                <a16:creationId xmlns:a16="http://schemas.microsoft.com/office/drawing/2014/main" id="{34975130-C04B-4D8C-B122-11D99EA44BE7}"/>
+                <a16:creationId xmlns:a16="http://schemas.microsoft.com/office/drawing/2014/main" id="{FA780D12-5449-4763-9EE5-84186D93FA3B}"/>
               </a:ext>
             </a:extLst>
           </p:cNvPr>
@@ -4122,7 +4323,7 @@
           <p:cNvPr id="18" name="">
             <a:extLst xmlns:a="http://schemas.openxmlformats.org/drawingml/2006/main">
               <a:ext uri="{FF2B5EF4-FFF2-40B4-BE49-F238E27FC236}">
-                <a16:creationId xmlns:a16="http://schemas.microsoft.com/office/drawing/2014/main" id="{18736134-3B07-418F-84AF-528740DB204A}"/>
+                <a16:creationId xmlns:a16="http://schemas.microsoft.com/office/drawing/2014/main" id="{DFCB7F31-9F89-4536-A597-B14D504EA81D}"/>
               </a:ext>
             </a:extLst>
           </p:cNvPr>
@@ -4155,7 +4356,7 @@
           <p:cNvPr id="19" name="">
             <a:extLst xmlns:a="http://schemas.openxmlformats.org/drawingml/2006/main">
               <a:ext uri="{FF2B5EF4-FFF2-40B4-BE49-F238E27FC236}">
-                <a16:creationId xmlns:a16="http://schemas.microsoft.com/office/drawing/2014/main" id="{1EBE9628-620F-4944-901C-421AF9CE11DA}"/>
+                <a16:creationId xmlns:a16="http://schemas.microsoft.com/office/drawing/2014/main" id="{EF7DD331-5756-4DD1-8874-3FA9EF7EB356}"/>
               </a:ext>
             </a:extLst>
           </p:cNvPr>
@@ -4205,7 +4406,7 @@
           <p:cNvPr id="20" name="">
             <a:extLst xmlns:a="http://schemas.openxmlformats.org/drawingml/2006/main">
               <a:ext uri="{FF2B5EF4-FFF2-40B4-BE49-F238E27FC236}">
-                <a16:creationId xmlns:a16="http://schemas.microsoft.com/office/drawing/2014/main" id="{8149E41A-E192-4AC0-B633-779DFB10C686}"/>
+                <a16:creationId xmlns:a16="http://schemas.microsoft.com/office/drawing/2014/main" id="{EC8DE9FE-EEA7-45DA-B3E7-BBD37CD14CF8}"/>
               </a:ext>
             </a:extLst>
           </p:cNvPr>
@@ -4238,7 +4439,7 @@
           <p:cNvPr id="21" name="">
             <a:extLst xmlns:a="http://schemas.openxmlformats.org/drawingml/2006/main">
               <a:ext uri="{FF2B5EF4-FFF2-40B4-BE49-F238E27FC236}">
-                <a16:creationId xmlns:a16="http://schemas.microsoft.com/office/drawing/2014/main" id="{299A6EEA-5B80-4BC8-9332-FBEBDE51A8B1}"/>
+                <a16:creationId xmlns:a16="http://schemas.microsoft.com/office/drawing/2014/main" id="{0B13202D-053B-4134-BD77-322D10A16747}"/>
               </a:ext>
             </a:extLst>
           </p:cNvPr>
@@ -4288,7 +4489,7 @@
           <p:cNvPr id="22" name="">
             <a:extLst xmlns:a="http://schemas.openxmlformats.org/drawingml/2006/main">
               <a:ext uri="{FF2B5EF4-FFF2-40B4-BE49-F238E27FC236}">
-                <a16:creationId xmlns:a16="http://schemas.microsoft.com/office/drawing/2014/main" id="{EEF84DBE-5DCA-44B3-A45F-DCADDCE488AA}"/>
+                <a16:creationId xmlns:a16="http://schemas.microsoft.com/office/drawing/2014/main" id="{380B098C-6886-47FB-BB87-C6BBCA7EB57D}"/>
               </a:ext>
             </a:extLst>
           </p:cNvPr>
@@ -4321,7 +4522,7 @@
           <p:cNvPr id="23" name="">
             <a:extLst xmlns:a="http://schemas.openxmlformats.org/drawingml/2006/main">
               <a:ext uri="{FF2B5EF4-FFF2-40B4-BE49-F238E27FC236}">
-                <a16:creationId xmlns:a16="http://schemas.microsoft.com/office/drawing/2014/main" id="{EB9EE5D9-4895-4A83-BE18-A921C2F276A2}"/>
+                <a16:creationId xmlns:a16="http://schemas.microsoft.com/office/drawing/2014/main" id="{24CAE943-7665-46E5-8ABA-9D704330C13A}"/>
               </a:ext>
             </a:extLst>
           </p:cNvPr>
@@ -4371,7 +4572,7 @@
           <p:cNvPr id="24" name="">
             <a:extLst xmlns:a="http://schemas.openxmlformats.org/drawingml/2006/main">
               <a:ext uri="{FF2B5EF4-FFF2-40B4-BE49-F238E27FC236}">
-                <a16:creationId xmlns:a16="http://schemas.microsoft.com/office/drawing/2014/main" id="{4943A2AD-C043-482C-B8DF-E0E70897CA64}"/>
+                <a16:creationId xmlns:a16="http://schemas.microsoft.com/office/drawing/2014/main" id="{276B8721-CE1E-4198-811B-7F693322B5DC}"/>
               </a:ext>
             </a:extLst>
           </p:cNvPr>
@@ -4421,7 +4622,7 @@
           <p:cNvPr id="25" name="">
             <a:extLst xmlns:a="http://schemas.openxmlformats.org/drawingml/2006/main">
               <a:ext uri="{FF2B5EF4-FFF2-40B4-BE49-F238E27FC236}">
-                <a16:creationId xmlns:a16="http://schemas.microsoft.com/office/drawing/2014/main" id="{D46A643E-005F-4243-901B-E3BA00ECAB24}"/>
+                <a16:creationId xmlns:a16="http://schemas.microsoft.com/office/drawing/2014/main" id="{3FDD5811-8D45-4E7E-83D9-DE4489652C99}"/>
               </a:ext>
             </a:extLst>
           </p:cNvPr>
@@ -4469,7 +4670,7 @@
     </p:spTree>
     <p:extLst>
       <p:ext uri="{BB962C8B-B14F-4D97-AF65-F5344CB8AC3E}">
-        <p14:creationId xmlns:p14="http://schemas.microsoft.com/office/powerpoint/2010/main" val="109791574"/>
+        <p14:creationId xmlns:p14="http://schemas.microsoft.com/office/powerpoint/2010/main" val="1768194252"/>
       </p:ext>
     </p:extLst>
   </p:cSld>
@@ -4500,7 +4701,7 @@
           <p:cNvPr id="1" name="">
             <a:extLst xmlns:a="http://schemas.openxmlformats.org/drawingml/2006/main">
               <a:ext uri="{FF2B5EF4-FFF2-40B4-BE49-F238E27FC236}">
-                <a16:creationId xmlns:a16="http://schemas.microsoft.com/office/drawing/2014/main" id="{1CC6A94F-31C5-44F3-BE9D-DFEA3CD26A7C}"/>
+                <a16:creationId xmlns:a16="http://schemas.microsoft.com/office/drawing/2014/main" id="{534AD96A-13F3-4DAD-ABA4-81CD109F1A55}"/>
               </a:ext>
             </a:extLst>
           </p:cNvPr>
@@ -4550,7 +4751,7 @@
           <p:cNvPr id="2" name="">
             <a:extLst xmlns:a="http://schemas.openxmlformats.org/drawingml/2006/main">
               <a:ext uri="{FF2B5EF4-FFF2-40B4-BE49-F238E27FC236}">
-                <a16:creationId xmlns:a16="http://schemas.microsoft.com/office/drawing/2014/main" id="{190BA639-B96E-4B1A-B96D-9DB440A72392}"/>
+                <a16:creationId xmlns:a16="http://schemas.microsoft.com/office/drawing/2014/main" id="{D866B608-A903-4590-93A2-64E62F157972}"/>
               </a:ext>
             </a:extLst>
           </p:cNvPr>
@@ -4600,7 +4801,7 @@
           <p:cNvPr id="3" name="">
             <a:extLst xmlns:a="http://schemas.openxmlformats.org/drawingml/2006/main">
               <a:ext uri="{FF2B5EF4-FFF2-40B4-BE49-F238E27FC236}">
-                <a16:creationId xmlns:a16="http://schemas.microsoft.com/office/drawing/2014/main" id="{E6E47B67-AF29-4576-8AC0-75CDAEB8F6D6}"/>
+                <a16:creationId xmlns:a16="http://schemas.microsoft.com/office/drawing/2014/main" id="{0743FE09-8BDB-4A38-B509-89123D47FC1D}"/>
               </a:ext>
             </a:extLst>
           </p:cNvPr>
@@ -4633,7 +4834,7 @@
           <p:cNvPr id="4" name="">
             <a:extLst xmlns:a="http://schemas.openxmlformats.org/drawingml/2006/main">
               <a:ext uri="{FF2B5EF4-FFF2-40B4-BE49-F238E27FC236}">
-                <a16:creationId xmlns:a16="http://schemas.microsoft.com/office/drawing/2014/main" id="{E4532C3B-D878-4F3F-AADE-D8518CDB0030}"/>
+                <a16:creationId xmlns:a16="http://schemas.microsoft.com/office/drawing/2014/main" id="{66DC250C-252A-456E-8545-94FD301D4953}"/>
               </a:ext>
             </a:extLst>
           </p:cNvPr>
@@ -4666,7 +4867,7 @@
           <p:cNvPr id="5" name="">
             <a:extLst xmlns:a="http://schemas.openxmlformats.org/drawingml/2006/main">
               <a:ext uri="{FF2B5EF4-FFF2-40B4-BE49-F238E27FC236}">
-                <a16:creationId xmlns:a16="http://schemas.microsoft.com/office/drawing/2014/main" id="{8BD31815-7082-49EE-B29C-A9AF3C515548}"/>
+                <a16:creationId xmlns:a16="http://schemas.microsoft.com/office/drawing/2014/main" id="{CF037942-5C29-4480-8879-881A46C6E514}"/>
               </a:ext>
             </a:extLst>
           </p:cNvPr>
@@ -4716,7 +4917,7 @@
           <p:cNvPr id="6" name="">
             <a:extLst xmlns:a="http://schemas.openxmlformats.org/drawingml/2006/main">
               <a:ext uri="{FF2B5EF4-FFF2-40B4-BE49-F238E27FC236}">
-                <a16:creationId xmlns:a16="http://schemas.microsoft.com/office/drawing/2014/main" id="{AD481D2E-620C-4AD4-81FA-B9F4637022A2}"/>
+                <a16:creationId xmlns:a16="http://schemas.microsoft.com/office/drawing/2014/main" id="{6499443F-069A-41DB-8291-E38E11658934}"/>
               </a:ext>
             </a:extLst>
           </p:cNvPr>
@@ -4766,7 +4967,7 @@
           <p:cNvPr id="7" name="">
             <a:extLst xmlns:a="http://schemas.openxmlformats.org/drawingml/2006/main">
               <a:ext uri="{FF2B5EF4-FFF2-40B4-BE49-F238E27FC236}">
-                <a16:creationId xmlns:a16="http://schemas.microsoft.com/office/drawing/2014/main" id="{F4FCA19F-2F25-43F3-AAA1-6C6E77BA1C58}"/>
+                <a16:creationId xmlns:a16="http://schemas.microsoft.com/office/drawing/2014/main" id="{68761CE2-25F3-43DE-9C4D-D6B7334256C6}"/>
               </a:ext>
             </a:extLst>
           </p:cNvPr>
@@ -4816,7 +5017,7 @@
           <p:cNvPr id="8" name="">
             <a:extLst xmlns:a="http://schemas.openxmlformats.org/drawingml/2006/main">
               <a:ext uri="{FF2B5EF4-FFF2-40B4-BE49-F238E27FC236}">
-                <a16:creationId xmlns:a16="http://schemas.microsoft.com/office/drawing/2014/main" id="{18B59DCE-7D93-4077-9E1A-549E0B8BE9C7}"/>
+                <a16:creationId xmlns:a16="http://schemas.microsoft.com/office/drawing/2014/main" id="{A5E6AF1F-9BF6-44B4-BC37-754740841DAC}"/>
               </a:ext>
             </a:extLst>
           </p:cNvPr>
@@ -4849,7 +5050,7 @@
           <p:cNvPr id="9" name="">
             <a:extLst xmlns:a="http://schemas.openxmlformats.org/drawingml/2006/main">
               <a:ext uri="{FF2B5EF4-FFF2-40B4-BE49-F238E27FC236}">
-                <a16:creationId xmlns:a16="http://schemas.microsoft.com/office/drawing/2014/main" id="{49AD7065-04C7-4B86-8F15-A05A09D91671}"/>
+                <a16:creationId xmlns:a16="http://schemas.microsoft.com/office/drawing/2014/main" id="{B1D120D7-E32B-47DD-8CF1-5A600411D9B8}"/>
               </a:ext>
             </a:extLst>
           </p:cNvPr>
@@ -4899,7 +5100,7 @@
           <p:cNvPr id="10" name="">
             <a:extLst xmlns:a="http://schemas.openxmlformats.org/drawingml/2006/main">
               <a:ext uri="{FF2B5EF4-FFF2-40B4-BE49-F238E27FC236}">
-                <a16:creationId xmlns:a16="http://schemas.microsoft.com/office/drawing/2014/main" id="{67F06C08-580F-4381-A25E-137D003D28CF}"/>
+                <a16:creationId xmlns:a16="http://schemas.microsoft.com/office/drawing/2014/main" id="{16732206-B419-4B08-BBE6-744B3C0A689A}"/>
               </a:ext>
             </a:extLst>
           </p:cNvPr>
@@ -4949,7 +5150,7 @@
           <p:cNvPr id="11" name="">
             <a:extLst xmlns:a="http://schemas.openxmlformats.org/drawingml/2006/main">
               <a:ext uri="{FF2B5EF4-FFF2-40B4-BE49-F238E27FC236}">
-                <a16:creationId xmlns:a16="http://schemas.microsoft.com/office/drawing/2014/main" id="{31A73D57-1B98-4E1E-9AAD-B92500B87BE5}"/>
+                <a16:creationId xmlns:a16="http://schemas.microsoft.com/office/drawing/2014/main" id="{76288996-E9F6-4576-A3CF-C5620A08EA5C}"/>
               </a:ext>
             </a:extLst>
           </p:cNvPr>
@@ -4999,7 +5200,7 @@
           <p:cNvPr id="12" name="">
             <a:extLst xmlns:a="http://schemas.openxmlformats.org/drawingml/2006/main">
               <a:ext uri="{FF2B5EF4-FFF2-40B4-BE49-F238E27FC236}">
-                <a16:creationId xmlns:a16="http://schemas.microsoft.com/office/drawing/2014/main" id="{5F1C5822-6FCB-4395-AD4E-A5447DBA1244}"/>
+                <a16:creationId xmlns:a16="http://schemas.microsoft.com/office/drawing/2014/main" id="{39556D25-397C-4FF7-B7F6-67BD2A27C2C0}"/>
               </a:ext>
             </a:extLst>
           </p:cNvPr>
@@ -5032,7 +5233,7 @@
           <p:cNvPr id="13" name="">
             <a:extLst xmlns:a="http://schemas.openxmlformats.org/drawingml/2006/main">
               <a:ext uri="{FF2B5EF4-FFF2-40B4-BE49-F238E27FC236}">
-                <a16:creationId xmlns:a16="http://schemas.microsoft.com/office/drawing/2014/main" id="{81DBF7BB-A9A0-4EE3-93A8-69292F29A5CF}"/>
+                <a16:creationId xmlns:a16="http://schemas.microsoft.com/office/drawing/2014/main" id="{D1F79DE4-FD3C-4219-9CC7-88463E13A5DF}"/>
               </a:ext>
             </a:extLst>
           </p:cNvPr>
@@ -5082,7 +5283,7 @@
           <p:cNvPr id="14" name="">
             <a:extLst xmlns:a="http://schemas.openxmlformats.org/drawingml/2006/main">
               <a:ext uri="{FF2B5EF4-FFF2-40B4-BE49-F238E27FC236}">
-                <a16:creationId xmlns:a16="http://schemas.microsoft.com/office/drawing/2014/main" id="{CF2FFD9D-8D6E-4525-8DDB-59DB85C08C53}"/>
+                <a16:creationId xmlns:a16="http://schemas.microsoft.com/office/drawing/2014/main" id="{6226DE10-688C-43B5-941C-DBB10C2810AF}"/>
               </a:ext>
             </a:extLst>
           </p:cNvPr>
@@ -5132,7 +5333,7 @@
           <p:cNvPr id="15" name="">
             <a:extLst xmlns:a="http://schemas.openxmlformats.org/drawingml/2006/main">
               <a:ext uri="{FF2B5EF4-FFF2-40B4-BE49-F238E27FC236}">
-                <a16:creationId xmlns:a16="http://schemas.microsoft.com/office/drawing/2014/main" id="{CA1BAA20-603D-45C4-A92B-80A1D8C65FFA}"/>
+                <a16:creationId xmlns:a16="http://schemas.microsoft.com/office/drawing/2014/main" id="{5656899E-69B4-4ED0-83C6-C2B94A875068}"/>
               </a:ext>
             </a:extLst>
           </p:cNvPr>
@@ -5182,7 +5383,7 @@
           <p:cNvPr id="16" name="">
             <a:extLst xmlns:a="http://schemas.openxmlformats.org/drawingml/2006/main">
               <a:ext uri="{FF2B5EF4-FFF2-40B4-BE49-F238E27FC236}">
-                <a16:creationId xmlns:a16="http://schemas.microsoft.com/office/drawing/2014/main" id="{0EA4AA0D-A4A7-48DC-BA7E-EEE6EB09CF7D}"/>
+                <a16:creationId xmlns:a16="http://schemas.microsoft.com/office/drawing/2014/main" id="{8E89F8D4-B729-4144-8DD4-AB462498AC3F}"/>
               </a:ext>
             </a:extLst>
           </p:cNvPr>
@@ -5232,7 +5433,7 @@
           <p:cNvPr id="17" name="">
             <a:extLst xmlns:a="http://schemas.openxmlformats.org/drawingml/2006/main">
               <a:ext uri="{FF2B5EF4-FFF2-40B4-BE49-F238E27FC236}">
-                <a16:creationId xmlns:a16="http://schemas.microsoft.com/office/drawing/2014/main" id="{D2F03BBD-1D5B-434F-B67D-3741ABC2B5CC}"/>
+                <a16:creationId xmlns:a16="http://schemas.microsoft.com/office/drawing/2014/main" id="{DCA922D8-C32B-4586-9793-051440FD185F}"/>
               </a:ext>
             </a:extLst>
           </p:cNvPr>
@@ -5280,7 +5481,4218 @@
     </p:spTree>
     <p:extLst>
       <p:ext uri="{BB962C8B-B14F-4D97-AF65-F5344CB8AC3E}">
-        <p14:creationId xmlns:p14="http://schemas.microsoft.com/office/powerpoint/2010/main" val="960238051"/>
+        <p14:creationId xmlns:p14="http://schemas.microsoft.com/office/powerpoint/2010/main" val="857486144"/>
+      </p:ext>
+    </p:extLst>
+  </p:cSld>
+</p:sld>
+</file>
+
+<file path=ppt/slides/slide14.xml><?xml version="1.0" encoding="utf-8"?>
+<p:sld xmlns:p="http://schemas.openxmlformats.org/presentationml/2006/main">
+  <p:cSld>
+    <p:bg>
+      <p:bgPr>
+        <a:solidFill xmlns:a="http://schemas.openxmlformats.org/drawingml/2006/main">
+          <a:srgbClr val="FFFFFF"/>
+        </a:solidFill>
+      </p:bgPr>
+    </p:bg>
+    <p:spTree>
+      <p:nvGrpSpPr>
+        <p:cNvPr id="1" name=""/>
+        <p:cNvGrpSpPr/>
+        <p:nvPr/>
+      </p:nvGrpSpPr>
+      <p:grpSpPr>
+        <a:xfrm xmlns:a="http://schemas.openxmlformats.org/drawingml/2006/main"/>
+      </p:grpSpPr>
+      <p:sp>
+        <p:nvSpPr>
+          <p:cNvPr id="1" name="">
+            <a:extLst xmlns:a="http://schemas.openxmlformats.org/drawingml/2006/main">
+              <a:ext uri="{FF2B5EF4-FFF2-40B4-BE49-F238E27FC236}">
+                <a16:creationId xmlns:a16="http://schemas.microsoft.com/office/drawing/2014/main" id="{2BDD1A44-9AD1-4345-A6D7-DA610D35D1CA}"/>
+              </a:ext>
+            </a:extLst>
+          </p:cNvPr>
+          <p:cNvSpPr>
+            <a:spLocks xmlns:a="http://schemas.openxmlformats.org/drawingml/2006/main" noGrp="1"/>
+          </p:cNvSpPr>
+          <p:nvPr/>
+        </p:nvSpPr>
+        <p:spPr>
+          <a:xfrm xmlns:a="http://schemas.openxmlformats.org/drawingml/2006/main">
+            <a:off x="514350" y="266700"/>
+            <a:ext cx="5905500" cy="228600"/>
+          </a:xfrm>
+          <a:prstGeom xmlns:a="http://schemas.openxmlformats.org/drawingml/2006/main" prst="rect">
+            <a:avLst/>
+          </a:prstGeom>
+          <a:noFill xmlns:a="http://schemas.openxmlformats.org/drawingml/2006/main"/>
+          <a:ln xmlns:a="http://schemas.openxmlformats.org/drawingml/2006/main" w="0">
+            <a:noFill/>
+            <a:prstDash val="solid"/>
+          </a:ln>
+        </p:spPr>
+        <p:txBody>
+          <a:bodyPr xmlns:a="http://schemas.openxmlformats.org/drawingml/2006/main"/>
+          <a:lstStyle xmlns:a="http://schemas.openxmlformats.org/drawingml/2006/main"/>
+          <a:p xmlns:a="http://schemas.openxmlformats.org/drawingml/2006/main">
+            <a:pPr>
+              <a:defRPr sz="1050" b="1">
+                <a:solidFill>
+                  <a:srgbClr val="555555"/>
+                </a:solidFill>
+              </a:defRPr>
+            </a:pPr>
+            <a:r>
+              <a:rPr sz="1050" b="1">
+                <a:solidFill>
+                  <a:srgbClr val="555555"/>
+                </a:solidFill>
+              </a:rPr>
+              <a:t>GEN5.3 MOMENTUM CONTEXT-SIZE SCREEN</a:t>
+            </a:r>
+          </a:p>
+        </p:txBody>
+      </p:sp>
+      <p:sp>
+        <p:nvSpPr>
+          <p:cNvPr id="2" name="">
+            <a:extLst xmlns:a="http://schemas.openxmlformats.org/drawingml/2006/main">
+              <a:ext uri="{FF2B5EF4-FFF2-40B4-BE49-F238E27FC236}">
+                <a16:creationId xmlns:a16="http://schemas.microsoft.com/office/drawing/2014/main" id="{105A8AEA-360C-4B4F-83A8-E3EB4D78BD37}"/>
+              </a:ext>
+            </a:extLst>
+          </p:cNvPr>
+          <p:cNvSpPr>
+            <a:spLocks xmlns:a="http://schemas.openxmlformats.org/drawingml/2006/main" noGrp="1"/>
+          </p:cNvSpPr>
+          <p:nvPr/>
+        </p:nvSpPr>
+        <p:spPr>
+          <a:xfrm xmlns:a="http://schemas.openxmlformats.org/drawingml/2006/main">
+            <a:off x="514350" y="628650"/>
+            <a:ext cx="10287000" cy="990600"/>
+          </a:xfrm>
+          <a:prstGeom xmlns:a="http://schemas.openxmlformats.org/drawingml/2006/main" prst="rect">
+            <a:avLst/>
+          </a:prstGeom>
+          <a:noFill xmlns:a="http://schemas.openxmlformats.org/drawingml/2006/main"/>
+          <a:ln xmlns:a="http://schemas.openxmlformats.org/drawingml/2006/main" w="0">
+            <a:noFill/>
+            <a:prstDash val="solid"/>
+          </a:ln>
+        </p:spPr>
+        <p:txBody>
+          <a:bodyPr xmlns:a="http://schemas.openxmlformats.org/drawingml/2006/main"/>
+          <a:lstStyle xmlns:a="http://schemas.openxmlformats.org/drawingml/2006/main"/>
+          <a:p xmlns:a="http://schemas.openxmlformats.org/drawingml/2006/main">
+            <a:pPr>
+              <a:defRPr sz="2850" b="1">
+                <a:solidFill>
+                  <a:srgbClr val="000000"/>
+                </a:solidFill>
+              </a:defRPr>
+            </a:pPr>
+            <a:r>
+              <a:rPr sz="2850" b="1">
+                <a:solidFill>
+                  <a:srgbClr val="000000"/>
+                </a:solidFill>
+              </a:rPr>
+              <a:t>A targeted EMA feature diagnostic improved returns, but did not clear the benchmark</a:t>
+            </a:r>
+          </a:p>
+        </p:txBody>
+      </p:sp>
+      <p:sp>
+        <p:nvSpPr>
+          <p:cNvPr id="3" name="">
+            <a:extLst xmlns:a="http://schemas.openxmlformats.org/drawingml/2006/main">
+              <a:ext uri="{FF2B5EF4-FFF2-40B4-BE49-F238E27FC236}">
+                <a16:creationId xmlns:a16="http://schemas.microsoft.com/office/drawing/2014/main" id="{04301B60-0831-46FE-AB92-902EE4F569CD}"/>
+              </a:ext>
+            </a:extLst>
+          </p:cNvPr>
+          <p:cNvSpPr>
+            <a:spLocks xmlns:a="http://schemas.openxmlformats.org/drawingml/2006/main" noGrp="1"/>
+          </p:cNvSpPr>
+          <p:nvPr/>
+        </p:nvSpPr>
+        <p:spPr>
+          <a:xfrm xmlns:a="http://schemas.openxmlformats.org/drawingml/2006/main">
+            <a:off x="514350" y="1619250"/>
+            <a:ext cx="11163300" cy="9525"/>
+          </a:xfrm>
+          <a:prstGeom xmlns:a="http://schemas.openxmlformats.org/drawingml/2006/main" prst="rect">
+            <a:avLst/>
+          </a:prstGeom>
+          <a:solidFill xmlns:a="http://schemas.openxmlformats.org/drawingml/2006/main">
+            <a:srgbClr val="B8BCC4"/>
+          </a:solidFill>
+          <a:ln xmlns:a="http://schemas.openxmlformats.org/drawingml/2006/main" w="9525">
+            <a:solidFill>
+              <a:srgbClr val="B8BCC4"/>
+            </a:solidFill>
+            <a:prstDash val="solid"/>
+          </a:ln>
+        </p:spPr>
+      </p:sp>
+      <p:sp>
+        <p:nvSpPr>
+          <p:cNvPr id="4" name="">
+            <a:extLst xmlns:a="http://schemas.openxmlformats.org/drawingml/2006/main">
+              <a:ext uri="{FF2B5EF4-FFF2-40B4-BE49-F238E27FC236}">
+                <a16:creationId xmlns:a16="http://schemas.microsoft.com/office/drawing/2014/main" id="{2C75C804-9212-4BEB-8BDC-ABF4181A73F0}"/>
+              </a:ext>
+            </a:extLst>
+          </p:cNvPr>
+          <p:cNvSpPr>
+            <a:spLocks xmlns:a="http://schemas.openxmlformats.org/drawingml/2006/main" noGrp="1"/>
+          </p:cNvSpPr>
+          <p:nvPr/>
+        </p:nvSpPr>
+        <p:spPr>
+          <a:xfrm xmlns:a="http://schemas.openxmlformats.org/drawingml/2006/main">
+            <a:off x="742950" y="1943100"/>
+            <a:ext cx="9906000" cy="552450"/>
+          </a:xfrm>
+          <a:prstGeom xmlns:a="http://schemas.openxmlformats.org/drawingml/2006/main" prst="rect">
+            <a:avLst/>
+          </a:prstGeom>
+          <a:noFill xmlns:a="http://schemas.openxmlformats.org/drawingml/2006/main"/>
+          <a:ln xmlns:a="http://schemas.openxmlformats.org/drawingml/2006/main" w="0">
+            <a:noFill/>
+            <a:prstDash val="solid"/>
+          </a:ln>
+        </p:spPr>
+        <p:txBody>
+          <a:bodyPr xmlns:a="http://schemas.openxmlformats.org/drawingml/2006/main"/>
+          <a:lstStyle xmlns:a="http://schemas.openxmlformats.org/drawingml/2006/main"/>
+          <a:p xmlns:a="http://schemas.openxmlformats.org/drawingml/2006/main">
+            <a:pPr>
+              <a:defRPr sz="1575" b="0">
+                <a:solidFill>
+                  <a:srgbClr val="000000"/>
+                </a:solidFill>
+              </a:defRPr>
+            </a:pPr>
+            <a:r>
+              <a:rPr sz="1575" b="0">
+                <a:solidFill>
+                  <a:srgbClr val="000000"/>
+                </a:solidFill>
+              </a:rPr>
+              <a:t>After the annual continuity control lane was identified, the next quick test held the high-beta risk-aware context, EMA-only pool, and continuation replay fixed while comparing three PCA feature surfaces.</a:t>
+            </a:r>
+          </a:p>
+        </p:txBody>
+      </p:sp>
+      <p:sp>
+        <p:nvSpPr>
+          <p:cNvPr id="5" name="">
+            <a:extLst xmlns:a="http://schemas.openxmlformats.org/drawingml/2006/main">
+              <a:ext uri="{FF2B5EF4-FFF2-40B4-BE49-F238E27FC236}">
+                <a16:creationId xmlns:a16="http://schemas.microsoft.com/office/drawing/2014/main" id="{5BBD36DE-97FA-4C91-806C-23A7936C4C2A}"/>
+              </a:ext>
+            </a:extLst>
+          </p:cNvPr>
+          <p:cNvSpPr>
+            <a:spLocks xmlns:a="http://schemas.openxmlformats.org/drawingml/2006/main" noGrp="1"/>
+          </p:cNvSpPr>
+          <p:nvPr/>
+        </p:nvSpPr>
+        <p:spPr>
+          <a:xfrm xmlns:a="http://schemas.openxmlformats.org/drawingml/2006/main">
+            <a:off x="742950" y="2381250"/>
+            <a:ext cx="2190750" cy="342900"/>
+          </a:xfrm>
+          <a:prstGeom xmlns:a="http://schemas.openxmlformats.org/drawingml/2006/main" prst="rect">
+            <a:avLst/>
+          </a:prstGeom>
+          <a:solidFill xmlns:a="http://schemas.openxmlformats.org/drawingml/2006/main">
+            <a:srgbClr val="EDEDED"/>
+          </a:solidFill>
+          <a:ln xmlns:a="http://schemas.openxmlformats.org/drawingml/2006/main" w="9525">
+            <a:solidFill>
+              <a:srgbClr val="B8BCC4"/>
+            </a:solidFill>
+            <a:prstDash val="solid"/>
+          </a:ln>
+        </p:spPr>
+      </p:sp>
+      <p:sp>
+        <p:nvSpPr>
+          <p:cNvPr id="6" name="">
+            <a:extLst xmlns:a="http://schemas.openxmlformats.org/drawingml/2006/main">
+              <a:ext uri="{FF2B5EF4-FFF2-40B4-BE49-F238E27FC236}">
+                <a16:creationId xmlns:a16="http://schemas.microsoft.com/office/drawing/2014/main" id="{6FBE455C-7BBB-4F39-8F63-987333F24FDA}"/>
+              </a:ext>
+            </a:extLst>
+          </p:cNvPr>
+          <p:cNvSpPr>
+            <a:spLocks xmlns:a="http://schemas.openxmlformats.org/drawingml/2006/main" noGrp="1"/>
+          </p:cNvSpPr>
+          <p:nvPr/>
+        </p:nvSpPr>
+        <p:spPr>
+          <a:xfrm xmlns:a="http://schemas.openxmlformats.org/drawingml/2006/main">
+            <a:off x="819150" y="2457450"/>
+            <a:ext cx="2038350" cy="209550"/>
+          </a:xfrm>
+          <a:prstGeom xmlns:a="http://schemas.openxmlformats.org/drawingml/2006/main" prst="rect">
+            <a:avLst/>
+          </a:prstGeom>
+          <a:noFill xmlns:a="http://schemas.openxmlformats.org/drawingml/2006/main"/>
+          <a:ln xmlns:a="http://schemas.openxmlformats.org/drawingml/2006/main" w="0">
+            <a:noFill/>
+            <a:prstDash val="solid"/>
+          </a:ln>
+        </p:spPr>
+        <p:txBody>
+          <a:bodyPr xmlns:a="http://schemas.openxmlformats.org/drawingml/2006/main"/>
+          <a:lstStyle xmlns:a="http://schemas.openxmlformats.org/drawingml/2006/main"/>
+          <a:p xmlns:a="http://schemas.openxmlformats.org/drawingml/2006/main">
+            <a:pPr>
+              <a:defRPr sz="1050" b="1">
+                <a:solidFill>
+                  <a:srgbClr val="000000"/>
+                </a:solidFill>
+              </a:defRPr>
+            </a:pPr>
+            <a:r>
+              <a:rPr sz="1050" b="1">
+                <a:solidFill>
+                  <a:srgbClr val="000000"/>
+                </a:solidFill>
+              </a:rPr>
+              <a:t>Context</a:t>
+            </a:r>
+          </a:p>
+        </p:txBody>
+      </p:sp>
+      <p:sp>
+        <p:nvSpPr>
+          <p:cNvPr id="7" name="">
+            <a:extLst xmlns:a="http://schemas.openxmlformats.org/drawingml/2006/main">
+              <a:ext uri="{FF2B5EF4-FFF2-40B4-BE49-F238E27FC236}">
+                <a16:creationId xmlns:a16="http://schemas.microsoft.com/office/drawing/2014/main" id="{A1BA666E-78B7-452D-BE58-6170AAA39491}"/>
+              </a:ext>
+            </a:extLst>
+          </p:cNvPr>
+          <p:cNvSpPr>
+            <a:spLocks xmlns:a="http://schemas.openxmlformats.org/drawingml/2006/main" noGrp="1"/>
+          </p:cNvSpPr>
+          <p:nvPr/>
+        </p:nvSpPr>
+        <p:spPr>
+          <a:xfrm xmlns:a="http://schemas.openxmlformats.org/drawingml/2006/main">
+            <a:off x="2933700" y="2381250"/>
+            <a:ext cx="2190750" cy="342900"/>
+          </a:xfrm>
+          <a:prstGeom xmlns:a="http://schemas.openxmlformats.org/drawingml/2006/main" prst="rect">
+            <a:avLst/>
+          </a:prstGeom>
+          <a:solidFill xmlns:a="http://schemas.openxmlformats.org/drawingml/2006/main">
+            <a:srgbClr val="EDEDED"/>
+          </a:solidFill>
+          <a:ln xmlns:a="http://schemas.openxmlformats.org/drawingml/2006/main" w="9525">
+            <a:solidFill>
+              <a:srgbClr val="B8BCC4"/>
+            </a:solidFill>
+            <a:prstDash val="solid"/>
+          </a:ln>
+        </p:spPr>
+      </p:sp>
+      <p:sp>
+        <p:nvSpPr>
+          <p:cNvPr id="8" name="">
+            <a:extLst xmlns:a="http://schemas.openxmlformats.org/drawingml/2006/main">
+              <a:ext uri="{FF2B5EF4-FFF2-40B4-BE49-F238E27FC236}">
+                <a16:creationId xmlns:a16="http://schemas.microsoft.com/office/drawing/2014/main" id="{84D2724F-1DC2-4031-81E0-50E6E1E62D62}"/>
+              </a:ext>
+            </a:extLst>
+          </p:cNvPr>
+          <p:cNvSpPr>
+            <a:spLocks xmlns:a="http://schemas.openxmlformats.org/drawingml/2006/main" noGrp="1"/>
+          </p:cNvSpPr>
+          <p:nvPr/>
+        </p:nvSpPr>
+        <p:spPr>
+          <a:xfrm xmlns:a="http://schemas.openxmlformats.org/drawingml/2006/main">
+            <a:off x="3009900" y="2457450"/>
+            <a:ext cx="2038350" cy="209550"/>
+          </a:xfrm>
+          <a:prstGeom xmlns:a="http://schemas.openxmlformats.org/drawingml/2006/main" prst="rect">
+            <a:avLst/>
+          </a:prstGeom>
+          <a:noFill xmlns:a="http://schemas.openxmlformats.org/drawingml/2006/main"/>
+          <a:ln xmlns:a="http://schemas.openxmlformats.org/drawingml/2006/main" w="0">
+            <a:noFill/>
+            <a:prstDash val="solid"/>
+          </a:ln>
+        </p:spPr>
+        <p:txBody>
+          <a:bodyPr xmlns:a="http://schemas.openxmlformats.org/drawingml/2006/main"/>
+          <a:lstStyle xmlns:a="http://schemas.openxmlformats.org/drawingml/2006/main"/>
+          <a:p xmlns:a="http://schemas.openxmlformats.org/drawingml/2006/main">
+            <a:pPr>
+              <a:defRPr sz="1050" b="1">
+                <a:solidFill>
+                  <a:srgbClr val="000000"/>
+                </a:solidFill>
+              </a:defRPr>
+            </a:pPr>
+            <a:r>
+              <a:rPr sz="1050" b="1">
+                <a:solidFill>
+                  <a:srgbClr val="000000"/>
+                </a:solidFill>
+              </a:rPr>
+              <a:t>Feature</a:t>
+            </a:r>
+          </a:p>
+        </p:txBody>
+      </p:sp>
+      <p:sp>
+        <p:nvSpPr>
+          <p:cNvPr id="9" name="">
+            <a:extLst xmlns:a="http://schemas.openxmlformats.org/drawingml/2006/main">
+              <a:ext uri="{FF2B5EF4-FFF2-40B4-BE49-F238E27FC236}">
+                <a16:creationId xmlns:a16="http://schemas.microsoft.com/office/drawing/2014/main" id="{2A51FA6A-906B-43D2-A66F-3D3EABB56541}"/>
+              </a:ext>
+            </a:extLst>
+          </p:cNvPr>
+          <p:cNvSpPr>
+            <a:spLocks xmlns:a="http://schemas.openxmlformats.org/drawingml/2006/main" noGrp="1"/>
+          </p:cNvSpPr>
+          <p:nvPr/>
+        </p:nvSpPr>
+        <p:spPr>
+          <a:xfrm xmlns:a="http://schemas.openxmlformats.org/drawingml/2006/main">
+            <a:off x="5124450" y="2381250"/>
+            <a:ext cx="1162050" cy="342900"/>
+          </a:xfrm>
+          <a:prstGeom xmlns:a="http://schemas.openxmlformats.org/drawingml/2006/main" prst="rect">
+            <a:avLst/>
+          </a:prstGeom>
+          <a:solidFill xmlns:a="http://schemas.openxmlformats.org/drawingml/2006/main">
+            <a:srgbClr val="EDEDED"/>
+          </a:solidFill>
+          <a:ln xmlns:a="http://schemas.openxmlformats.org/drawingml/2006/main" w="9525">
+            <a:solidFill>
+              <a:srgbClr val="B8BCC4"/>
+            </a:solidFill>
+            <a:prstDash val="solid"/>
+          </a:ln>
+        </p:spPr>
+      </p:sp>
+      <p:sp>
+        <p:nvSpPr>
+          <p:cNvPr id="10" name="">
+            <a:extLst xmlns:a="http://schemas.openxmlformats.org/drawingml/2006/main">
+              <a:ext uri="{FF2B5EF4-FFF2-40B4-BE49-F238E27FC236}">
+                <a16:creationId xmlns:a16="http://schemas.microsoft.com/office/drawing/2014/main" id="{9F41ECED-22C4-4026-8332-E3255E9861BE}"/>
+              </a:ext>
+            </a:extLst>
+          </p:cNvPr>
+          <p:cNvSpPr>
+            <a:spLocks xmlns:a="http://schemas.openxmlformats.org/drawingml/2006/main" noGrp="1"/>
+          </p:cNvSpPr>
+          <p:nvPr/>
+        </p:nvSpPr>
+        <p:spPr>
+          <a:xfrm xmlns:a="http://schemas.openxmlformats.org/drawingml/2006/main">
+            <a:off x="5200650" y="2457450"/>
+            <a:ext cx="1009650" cy="209550"/>
+          </a:xfrm>
+          <a:prstGeom xmlns:a="http://schemas.openxmlformats.org/drawingml/2006/main" prst="rect">
+            <a:avLst/>
+          </a:prstGeom>
+          <a:noFill xmlns:a="http://schemas.openxmlformats.org/drawingml/2006/main"/>
+          <a:ln xmlns:a="http://schemas.openxmlformats.org/drawingml/2006/main" w="0">
+            <a:noFill/>
+            <a:prstDash val="solid"/>
+          </a:ln>
+        </p:spPr>
+        <p:txBody>
+          <a:bodyPr xmlns:a="http://schemas.openxmlformats.org/drawingml/2006/main"/>
+          <a:lstStyle xmlns:a="http://schemas.openxmlformats.org/drawingml/2006/main"/>
+          <a:p xmlns:a="http://schemas.openxmlformats.org/drawingml/2006/main">
+            <a:pPr>
+              <a:defRPr sz="1050" b="1">
+                <a:solidFill>
+                  <a:srgbClr val="000000"/>
+                </a:solidFill>
+              </a:defRPr>
+            </a:pPr>
+            <a:r>
+              <a:rPr sz="1050" b="1">
+                <a:solidFill>
+                  <a:srgbClr val="000000"/>
+                </a:solidFill>
+              </a:rPr>
+              <a:t>Replay</a:t>
+            </a:r>
+          </a:p>
+        </p:txBody>
+      </p:sp>
+      <p:sp>
+        <p:nvSpPr>
+          <p:cNvPr id="11" name="">
+            <a:extLst xmlns:a="http://schemas.openxmlformats.org/drawingml/2006/main">
+              <a:ext uri="{FF2B5EF4-FFF2-40B4-BE49-F238E27FC236}">
+                <a16:creationId xmlns:a16="http://schemas.microsoft.com/office/drawing/2014/main" id="{8CF0BA8F-BB60-4007-8306-A975F8E690C3}"/>
+              </a:ext>
+            </a:extLst>
+          </p:cNvPr>
+          <p:cNvSpPr>
+            <a:spLocks xmlns:a="http://schemas.openxmlformats.org/drawingml/2006/main" noGrp="1"/>
+          </p:cNvSpPr>
+          <p:nvPr/>
+        </p:nvSpPr>
+        <p:spPr>
+          <a:xfrm xmlns:a="http://schemas.openxmlformats.org/drawingml/2006/main">
+            <a:off x="6286500" y="2381250"/>
+            <a:ext cx="1123950" cy="342900"/>
+          </a:xfrm>
+          <a:prstGeom xmlns:a="http://schemas.openxmlformats.org/drawingml/2006/main" prst="rect">
+            <a:avLst/>
+          </a:prstGeom>
+          <a:solidFill xmlns:a="http://schemas.openxmlformats.org/drawingml/2006/main">
+            <a:srgbClr val="EDEDED"/>
+          </a:solidFill>
+          <a:ln xmlns:a="http://schemas.openxmlformats.org/drawingml/2006/main" w="9525">
+            <a:solidFill>
+              <a:srgbClr val="B8BCC4"/>
+            </a:solidFill>
+            <a:prstDash val="solid"/>
+          </a:ln>
+        </p:spPr>
+      </p:sp>
+      <p:sp>
+        <p:nvSpPr>
+          <p:cNvPr id="12" name="">
+            <a:extLst xmlns:a="http://schemas.openxmlformats.org/drawingml/2006/main">
+              <a:ext uri="{FF2B5EF4-FFF2-40B4-BE49-F238E27FC236}">
+                <a16:creationId xmlns:a16="http://schemas.microsoft.com/office/drawing/2014/main" id="{16D4A453-97B0-4994-BE3D-8A3DD4FB4B59}"/>
+              </a:ext>
+            </a:extLst>
+          </p:cNvPr>
+          <p:cNvSpPr>
+            <a:spLocks xmlns:a="http://schemas.openxmlformats.org/drawingml/2006/main" noGrp="1"/>
+          </p:cNvSpPr>
+          <p:nvPr/>
+        </p:nvSpPr>
+        <p:spPr>
+          <a:xfrm xmlns:a="http://schemas.openxmlformats.org/drawingml/2006/main">
+            <a:off x="6362700" y="2457450"/>
+            <a:ext cx="971550" cy="209550"/>
+          </a:xfrm>
+          <a:prstGeom xmlns:a="http://schemas.openxmlformats.org/drawingml/2006/main" prst="rect">
+            <a:avLst/>
+          </a:prstGeom>
+          <a:noFill xmlns:a="http://schemas.openxmlformats.org/drawingml/2006/main"/>
+          <a:ln xmlns:a="http://schemas.openxmlformats.org/drawingml/2006/main" w="0">
+            <a:noFill/>
+            <a:prstDash val="solid"/>
+          </a:ln>
+        </p:spPr>
+        <p:txBody>
+          <a:bodyPr xmlns:a="http://schemas.openxmlformats.org/drawingml/2006/main"/>
+          <a:lstStyle xmlns:a="http://schemas.openxmlformats.org/drawingml/2006/main"/>
+          <a:p xmlns:a="http://schemas.openxmlformats.org/drawingml/2006/main">
+            <a:pPr>
+              <a:defRPr sz="1050" b="1">
+                <a:solidFill>
+                  <a:srgbClr val="000000"/>
+                </a:solidFill>
+              </a:defRPr>
+            </a:pPr>
+            <a:r>
+              <a:rPr sz="1050" b="1">
+                <a:solidFill>
+                  <a:srgbClr val="000000"/>
+                </a:solidFill>
+              </a:rPr>
+              <a:t>Win years</a:t>
+            </a:r>
+          </a:p>
+        </p:txBody>
+      </p:sp>
+      <p:sp>
+        <p:nvSpPr>
+          <p:cNvPr id="13" name="">
+            <a:extLst xmlns:a="http://schemas.openxmlformats.org/drawingml/2006/main">
+              <a:ext uri="{FF2B5EF4-FFF2-40B4-BE49-F238E27FC236}">
+                <a16:creationId xmlns:a16="http://schemas.microsoft.com/office/drawing/2014/main" id="{5B70C66D-6BEC-4015-BA7F-08BCD86A8AE5}"/>
+              </a:ext>
+            </a:extLst>
+          </p:cNvPr>
+          <p:cNvSpPr>
+            <a:spLocks xmlns:a="http://schemas.openxmlformats.org/drawingml/2006/main" noGrp="1"/>
+          </p:cNvSpPr>
+          <p:nvPr/>
+        </p:nvSpPr>
+        <p:spPr>
+          <a:xfrm xmlns:a="http://schemas.openxmlformats.org/drawingml/2006/main">
+            <a:off x="7410450" y="2381250"/>
+            <a:ext cx="1123950" cy="342900"/>
+          </a:xfrm>
+          <a:prstGeom xmlns:a="http://schemas.openxmlformats.org/drawingml/2006/main" prst="rect">
+            <a:avLst/>
+          </a:prstGeom>
+          <a:solidFill xmlns:a="http://schemas.openxmlformats.org/drawingml/2006/main">
+            <a:srgbClr val="EDEDED"/>
+          </a:solidFill>
+          <a:ln xmlns:a="http://schemas.openxmlformats.org/drawingml/2006/main" w="9525">
+            <a:solidFill>
+              <a:srgbClr val="B8BCC4"/>
+            </a:solidFill>
+            <a:prstDash val="solid"/>
+          </a:ln>
+        </p:spPr>
+      </p:sp>
+      <p:sp>
+        <p:nvSpPr>
+          <p:cNvPr id="14" name="">
+            <a:extLst xmlns:a="http://schemas.openxmlformats.org/drawingml/2006/main">
+              <a:ext uri="{FF2B5EF4-FFF2-40B4-BE49-F238E27FC236}">
+                <a16:creationId xmlns:a16="http://schemas.microsoft.com/office/drawing/2014/main" id="{EA9D1A8C-C4D9-4F04-BB81-894DEC8D0B8D}"/>
+              </a:ext>
+            </a:extLst>
+          </p:cNvPr>
+          <p:cNvSpPr>
+            <a:spLocks xmlns:a="http://schemas.openxmlformats.org/drawingml/2006/main" noGrp="1"/>
+          </p:cNvSpPr>
+          <p:nvPr/>
+        </p:nvSpPr>
+        <p:spPr>
+          <a:xfrm xmlns:a="http://schemas.openxmlformats.org/drawingml/2006/main">
+            <a:off x="7486650" y="2457450"/>
+            <a:ext cx="971550" cy="209550"/>
+          </a:xfrm>
+          <a:prstGeom xmlns:a="http://schemas.openxmlformats.org/drawingml/2006/main" prst="rect">
+            <a:avLst/>
+          </a:prstGeom>
+          <a:noFill xmlns:a="http://schemas.openxmlformats.org/drawingml/2006/main"/>
+          <a:ln xmlns:a="http://schemas.openxmlformats.org/drawingml/2006/main" w="0">
+            <a:noFill/>
+            <a:prstDash val="solid"/>
+          </a:ln>
+        </p:spPr>
+        <p:txBody>
+          <a:bodyPr xmlns:a="http://schemas.openxmlformats.org/drawingml/2006/main"/>
+          <a:lstStyle xmlns:a="http://schemas.openxmlformats.org/drawingml/2006/main"/>
+          <a:p xmlns:a="http://schemas.openxmlformats.org/drawingml/2006/main">
+            <a:pPr>
+              <a:defRPr sz="1050" b="1">
+                <a:solidFill>
+                  <a:srgbClr val="000000"/>
+                </a:solidFill>
+              </a:defRPr>
+            </a:pPr>
+            <a:r>
+              <a:rPr sz="1050" b="1">
+                <a:solidFill>
+                  <a:srgbClr val="000000"/>
+                </a:solidFill>
+              </a:rPr>
+              <a:t>Mean ret.</a:t>
+            </a:r>
+          </a:p>
+        </p:txBody>
+      </p:sp>
+      <p:sp>
+        <p:nvSpPr>
+          <p:cNvPr id="15" name="">
+            <a:extLst xmlns:a="http://schemas.openxmlformats.org/drawingml/2006/main">
+              <a:ext uri="{FF2B5EF4-FFF2-40B4-BE49-F238E27FC236}">
+                <a16:creationId xmlns:a16="http://schemas.microsoft.com/office/drawing/2014/main" id="{2F2726F4-7548-4748-A1E9-CB2EBBED664D}"/>
+              </a:ext>
+            </a:extLst>
+          </p:cNvPr>
+          <p:cNvSpPr>
+            <a:spLocks xmlns:a="http://schemas.openxmlformats.org/drawingml/2006/main" noGrp="1"/>
+          </p:cNvSpPr>
+          <p:nvPr/>
+        </p:nvSpPr>
+        <p:spPr>
+          <a:xfrm xmlns:a="http://schemas.openxmlformats.org/drawingml/2006/main">
+            <a:off x="8534400" y="2381250"/>
+            <a:ext cx="1066800" cy="342900"/>
+          </a:xfrm>
+          <a:prstGeom xmlns:a="http://schemas.openxmlformats.org/drawingml/2006/main" prst="rect">
+            <a:avLst/>
+          </a:prstGeom>
+          <a:solidFill xmlns:a="http://schemas.openxmlformats.org/drawingml/2006/main">
+            <a:srgbClr val="EDEDED"/>
+          </a:solidFill>
+          <a:ln xmlns:a="http://schemas.openxmlformats.org/drawingml/2006/main" w="9525">
+            <a:solidFill>
+              <a:srgbClr val="B8BCC4"/>
+            </a:solidFill>
+            <a:prstDash val="solid"/>
+          </a:ln>
+        </p:spPr>
+      </p:sp>
+      <p:sp>
+        <p:nvSpPr>
+          <p:cNvPr id="16" name="">
+            <a:extLst xmlns:a="http://schemas.openxmlformats.org/drawingml/2006/main">
+              <a:ext uri="{FF2B5EF4-FFF2-40B4-BE49-F238E27FC236}">
+                <a16:creationId xmlns:a16="http://schemas.microsoft.com/office/drawing/2014/main" id="{0F5C1703-76B4-4659-94F7-97F4E9AF02D8}"/>
+              </a:ext>
+            </a:extLst>
+          </p:cNvPr>
+          <p:cNvSpPr>
+            <a:spLocks xmlns:a="http://schemas.openxmlformats.org/drawingml/2006/main" noGrp="1"/>
+          </p:cNvSpPr>
+          <p:nvPr/>
+        </p:nvSpPr>
+        <p:spPr>
+          <a:xfrm xmlns:a="http://schemas.openxmlformats.org/drawingml/2006/main">
+            <a:off x="8610600" y="2457450"/>
+            <a:ext cx="914400" cy="209550"/>
+          </a:xfrm>
+          <a:prstGeom xmlns:a="http://schemas.openxmlformats.org/drawingml/2006/main" prst="rect">
+            <a:avLst/>
+          </a:prstGeom>
+          <a:noFill xmlns:a="http://schemas.openxmlformats.org/drawingml/2006/main"/>
+          <a:ln xmlns:a="http://schemas.openxmlformats.org/drawingml/2006/main" w="0">
+            <a:noFill/>
+            <a:prstDash val="solid"/>
+          </a:ln>
+        </p:spPr>
+        <p:txBody>
+          <a:bodyPr xmlns:a="http://schemas.openxmlformats.org/drawingml/2006/main"/>
+          <a:lstStyle xmlns:a="http://schemas.openxmlformats.org/drawingml/2006/main"/>
+          <a:p xmlns:a="http://schemas.openxmlformats.org/drawingml/2006/main">
+            <a:pPr>
+              <a:defRPr sz="1050" b="1">
+                <a:solidFill>
+                  <a:srgbClr val="000000"/>
+                </a:solidFill>
+              </a:defRPr>
+            </a:pPr>
+            <a:r>
+              <a:rPr sz="1050" b="1">
+                <a:solidFill>
+                  <a:srgbClr val="000000"/>
+                </a:solidFill>
+              </a:rPr>
+              <a:t>Mean alpha</a:t>
+            </a:r>
+          </a:p>
+        </p:txBody>
+      </p:sp>
+      <p:sp>
+        <p:nvSpPr>
+          <p:cNvPr id="17" name="">
+            <a:extLst xmlns:a="http://schemas.openxmlformats.org/drawingml/2006/main">
+              <a:ext uri="{FF2B5EF4-FFF2-40B4-BE49-F238E27FC236}">
+                <a16:creationId xmlns:a16="http://schemas.microsoft.com/office/drawing/2014/main" id="{3E02A267-1791-4B02-AA1B-4D0A2AC7370D}"/>
+              </a:ext>
+            </a:extLst>
+          </p:cNvPr>
+          <p:cNvSpPr>
+            <a:spLocks xmlns:a="http://schemas.openxmlformats.org/drawingml/2006/main" noGrp="1"/>
+          </p:cNvSpPr>
+          <p:nvPr/>
+        </p:nvSpPr>
+        <p:spPr>
+          <a:xfrm xmlns:a="http://schemas.openxmlformats.org/drawingml/2006/main">
+            <a:off x="9601200" y="2381250"/>
+            <a:ext cx="1028700" cy="342900"/>
+          </a:xfrm>
+          <a:prstGeom xmlns:a="http://schemas.openxmlformats.org/drawingml/2006/main" prst="rect">
+            <a:avLst/>
+          </a:prstGeom>
+          <a:solidFill xmlns:a="http://schemas.openxmlformats.org/drawingml/2006/main">
+            <a:srgbClr val="EDEDED"/>
+          </a:solidFill>
+          <a:ln xmlns:a="http://schemas.openxmlformats.org/drawingml/2006/main" w="9525">
+            <a:solidFill>
+              <a:srgbClr val="B8BCC4"/>
+            </a:solidFill>
+            <a:prstDash val="solid"/>
+          </a:ln>
+        </p:spPr>
+      </p:sp>
+      <p:sp>
+        <p:nvSpPr>
+          <p:cNvPr id="18" name="">
+            <a:extLst xmlns:a="http://schemas.openxmlformats.org/drawingml/2006/main">
+              <a:ext uri="{FF2B5EF4-FFF2-40B4-BE49-F238E27FC236}">
+                <a16:creationId xmlns:a16="http://schemas.microsoft.com/office/drawing/2014/main" id="{C42B09E9-2EF6-47F9-B04E-34D4D98147B2}"/>
+              </a:ext>
+            </a:extLst>
+          </p:cNvPr>
+          <p:cNvSpPr>
+            <a:spLocks xmlns:a="http://schemas.openxmlformats.org/drawingml/2006/main" noGrp="1"/>
+          </p:cNvSpPr>
+          <p:nvPr/>
+        </p:nvSpPr>
+        <p:spPr>
+          <a:xfrm xmlns:a="http://schemas.openxmlformats.org/drawingml/2006/main">
+            <a:off x="9677400" y="2457450"/>
+            <a:ext cx="876300" cy="209550"/>
+          </a:xfrm>
+          <a:prstGeom xmlns:a="http://schemas.openxmlformats.org/drawingml/2006/main" prst="rect">
+            <a:avLst/>
+          </a:prstGeom>
+          <a:noFill xmlns:a="http://schemas.openxmlformats.org/drawingml/2006/main"/>
+          <a:ln xmlns:a="http://schemas.openxmlformats.org/drawingml/2006/main" w="0">
+            <a:noFill/>
+            <a:prstDash val="solid"/>
+          </a:ln>
+        </p:spPr>
+        <p:txBody>
+          <a:bodyPr xmlns:a="http://schemas.openxmlformats.org/drawingml/2006/main"/>
+          <a:lstStyle xmlns:a="http://schemas.openxmlformats.org/drawingml/2006/main"/>
+          <a:p xmlns:a="http://schemas.openxmlformats.org/drawingml/2006/main">
+            <a:pPr>
+              <a:defRPr sz="1050" b="1">
+                <a:solidFill>
+                  <a:srgbClr val="000000"/>
+                </a:solidFill>
+              </a:defRPr>
+            </a:pPr>
+            <a:r>
+              <a:rPr sz="1050" b="1">
+                <a:solidFill>
+                  <a:srgbClr val="000000"/>
+                </a:solidFill>
+              </a:rPr>
+              <a:t>Exposure</a:t>
+            </a:r>
+          </a:p>
+        </p:txBody>
+      </p:sp>
+      <p:sp>
+        <p:nvSpPr>
+          <p:cNvPr id="19" name="">
+            <a:extLst xmlns:a="http://schemas.openxmlformats.org/drawingml/2006/main">
+              <a:ext uri="{FF2B5EF4-FFF2-40B4-BE49-F238E27FC236}">
+                <a16:creationId xmlns:a16="http://schemas.microsoft.com/office/drawing/2014/main" id="{B751E10A-1151-4DDA-AFA4-4805BD6DF84A}"/>
+              </a:ext>
+            </a:extLst>
+          </p:cNvPr>
+          <p:cNvSpPr>
+            <a:spLocks xmlns:a="http://schemas.openxmlformats.org/drawingml/2006/main" noGrp="1"/>
+          </p:cNvSpPr>
+          <p:nvPr/>
+        </p:nvSpPr>
+        <p:spPr>
+          <a:xfrm xmlns:a="http://schemas.openxmlformats.org/drawingml/2006/main">
+            <a:off x="742950" y="2724150"/>
+            <a:ext cx="2190750" cy="514350"/>
+          </a:xfrm>
+          <a:prstGeom xmlns:a="http://schemas.openxmlformats.org/drawingml/2006/main" prst="rect">
+            <a:avLst/>
+          </a:prstGeom>
+          <a:solidFill xmlns:a="http://schemas.openxmlformats.org/drawingml/2006/main">
+            <a:srgbClr val="F7F7F7"/>
+          </a:solidFill>
+          <a:ln xmlns:a="http://schemas.openxmlformats.org/drawingml/2006/main" w="9525">
+            <a:solidFill>
+              <a:srgbClr val="B8BCC4"/>
+            </a:solidFill>
+            <a:prstDash val="solid"/>
+          </a:ln>
+        </p:spPr>
+      </p:sp>
+      <p:sp>
+        <p:nvSpPr>
+          <p:cNvPr id="20" name="">
+            <a:extLst xmlns:a="http://schemas.openxmlformats.org/drawingml/2006/main">
+              <a:ext uri="{FF2B5EF4-FFF2-40B4-BE49-F238E27FC236}">
+                <a16:creationId xmlns:a16="http://schemas.microsoft.com/office/drawing/2014/main" id="{52315CC6-91D6-4CE6-B60B-D7D1CA60BAC1}"/>
+              </a:ext>
+            </a:extLst>
+          </p:cNvPr>
+          <p:cNvSpPr>
+            <a:spLocks xmlns:a="http://schemas.openxmlformats.org/drawingml/2006/main" noGrp="1"/>
+          </p:cNvSpPr>
+          <p:nvPr/>
+        </p:nvSpPr>
+        <p:spPr>
+          <a:xfrm xmlns:a="http://schemas.openxmlformats.org/drawingml/2006/main">
+            <a:off x="819150" y="2847975"/>
+            <a:ext cx="2038350" cy="266700"/>
+          </a:xfrm>
+          <a:prstGeom xmlns:a="http://schemas.openxmlformats.org/drawingml/2006/main" prst="rect">
+            <a:avLst/>
+          </a:prstGeom>
+          <a:noFill xmlns:a="http://schemas.openxmlformats.org/drawingml/2006/main"/>
+          <a:ln xmlns:a="http://schemas.openxmlformats.org/drawingml/2006/main" w="0">
+            <a:noFill/>
+            <a:prstDash val="solid"/>
+          </a:ln>
+        </p:spPr>
+        <p:txBody>
+          <a:bodyPr xmlns:a="http://schemas.openxmlformats.org/drawingml/2006/main"/>
+          <a:lstStyle xmlns:a="http://schemas.openxmlformats.org/drawingml/2006/main"/>
+          <a:p xmlns:a="http://schemas.openxmlformats.org/drawingml/2006/main">
+            <a:pPr>
+              <a:defRPr sz="1125" b="0">
+                <a:solidFill>
+                  <a:srgbClr val="000000"/>
+                </a:solidFill>
+              </a:defRPr>
+            </a:pPr>
+            <a:r>
+              <a:rPr sz="1125" b="0">
+                <a:solidFill>
+                  <a:srgbClr val="000000"/>
+                </a:solidFill>
+              </a:rPr>
+              <a:t>Live + peers + risk anchors</a:t>
+            </a:r>
+          </a:p>
+        </p:txBody>
+      </p:sp>
+      <p:sp>
+        <p:nvSpPr>
+          <p:cNvPr id="21" name="">
+            <a:extLst xmlns:a="http://schemas.openxmlformats.org/drawingml/2006/main">
+              <a:ext uri="{FF2B5EF4-FFF2-40B4-BE49-F238E27FC236}">
+                <a16:creationId xmlns:a16="http://schemas.microsoft.com/office/drawing/2014/main" id="{C55353FD-68ED-4ED6-9DF1-54B493D0311B}"/>
+              </a:ext>
+            </a:extLst>
+          </p:cNvPr>
+          <p:cNvSpPr>
+            <a:spLocks xmlns:a="http://schemas.openxmlformats.org/drawingml/2006/main" noGrp="1"/>
+          </p:cNvSpPr>
+          <p:nvPr/>
+        </p:nvSpPr>
+        <p:spPr>
+          <a:xfrm xmlns:a="http://schemas.openxmlformats.org/drawingml/2006/main">
+            <a:off x="2933700" y="2724150"/>
+            <a:ext cx="2190750" cy="514350"/>
+          </a:xfrm>
+          <a:prstGeom xmlns:a="http://schemas.openxmlformats.org/drawingml/2006/main" prst="rect">
+            <a:avLst/>
+          </a:prstGeom>
+          <a:solidFill xmlns:a="http://schemas.openxmlformats.org/drawingml/2006/main">
+            <a:srgbClr val="F7F7F7"/>
+          </a:solidFill>
+          <a:ln xmlns:a="http://schemas.openxmlformats.org/drawingml/2006/main" w="9525">
+            <a:solidFill>
+              <a:srgbClr val="B8BCC4"/>
+            </a:solidFill>
+            <a:prstDash val="solid"/>
+          </a:ln>
+        </p:spPr>
+      </p:sp>
+      <p:sp>
+        <p:nvSpPr>
+          <p:cNvPr id="22" name="">
+            <a:extLst xmlns:a="http://schemas.openxmlformats.org/drawingml/2006/main">
+              <a:ext uri="{FF2B5EF4-FFF2-40B4-BE49-F238E27FC236}">
+                <a16:creationId xmlns:a16="http://schemas.microsoft.com/office/drawing/2014/main" id="{BFD605F0-AE62-4680-A775-44B4CAED49B9}"/>
+              </a:ext>
+            </a:extLst>
+          </p:cNvPr>
+          <p:cNvSpPr>
+            <a:spLocks xmlns:a="http://schemas.openxmlformats.org/drawingml/2006/main" noGrp="1"/>
+          </p:cNvSpPr>
+          <p:nvPr/>
+        </p:nvSpPr>
+        <p:spPr>
+          <a:xfrm xmlns:a="http://schemas.openxmlformats.org/drawingml/2006/main">
+            <a:off x="3009900" y="2847975"/>
+            <a:ext cx="2038350" cy="266700"/>
+          </a:xfrm>
+          <a:prstGeom xmlns:a="http://schemas.openxmlformats.org/drawingml/2006/main" prst="rect">
+            <a:avLst/>
+          </a:prstGeom>
+          <a:noFill xmlns:a="http://schemas.openxmlformats.org/drawingml/2006/main"/>
+          <a:ln xmlns:a="http://schemas.openxmlformats.org/drawingml/2006/main" w="0">
+            <a:noFill/>
+            <a:prstDash val="solid"/>
+          </a:ln>
+        </p:spPr>
+        <p:txBody>
+          <a:bodyPr xmlns:a="http://schemas.openxmlformats.org/drawingml/2006/main"/>
+          <a:lstStyle xmlns:a="http://schemas.openxmlformats.org/drawingml/2006/main"/>
+          <a:p xmlns:a="http://schemas.openxmlformats.org/drawingml/2006/main">
+            <a:pPr>
+              <a:defRPr sz="1125" b="0">
+                <a:solidFill>
+                  <a:srgbClr val="000000"/>
+                </a:solidFill>
+              </a:defRPr>
+            </a:pPr>
+            <a:r>
+              <a:rPr sz="1125" b="0">
+                <a:solidFill>
+                  <a:srgbClr val="000000"/>
+                </a:solidFill>
+              </a:rPr>
+              <a:t>Reversion-breakout context</a:t>
+            </a:r>
+          </a:p>
+        </p:txBody>
+      </p:sp>
+      <p:sp>
+        <p:nvSpPr>
+          <p:cNvPr id="23" name="">
+            <a:extLst xmlns:a="http://schemas.openxmlformats.org/drawingml/2006/main">
+              <a:ext uri="{FF2B5EF4-FFF2-40B4-BE49-F238E27FC236}">
+                <a16:creationId xmlns:a16="http://schemas.microsoft.com/office/drawing/2014/main" id="{87E061EC-9677-4682-80DD-591ECFDFB508}"/>
+              </a:ext>
+            </a:extLst>
+          </p:cNvPr>
+          <p:cNvSpPr>
+            <a:spLocks xmlns:a="http://schemas.openxmlformats.org/drawingml/2006/main" noGrp="1"/>
+          </p:cNvSpPr>
+          <p:nvPr/>
+        </p:nvSpPr>
+        <p:spPr>
+          <a:xfrm xmlns:a="http://schemas.openxmlformats.org/drawingml/2006/main">
+            <a:off x="5124450" y="2724150"/>
+            <a:ext cx="1162050" cy="514350"/>
+          </a:xfrm>
+          <a:prstGeom xmlns:a="http://schemas.openxmlformats.org/drawingml/2006/main" prst="rect">
+            <a:avLst/>
+          </a:prstGeom>
+          <a:solidFill xmlns:a="http://schemas.openxmlformats.org/drawingml/2006/main">
+            <a:srgbClr val="F7F7F7"/>
+          </a:solidFill>
+          <a:ln xmlns:a="http://schemas.openxmlformats.org/drawingml/2006/main" w="9525">
+            <a:solidFill>
+              <a:srgbClr val="B8BCC4"/>
+            </a:solidFill>
+            <a:prstDash val="solid"/>
+          </a:ln>
+        </p:spPr>
+      </p:sp>
+      <p:sp>
+        <p:nvSpPr>
+          <p:cNvPr id="24" name="">
+            <a:extLst xmlns:a="http://schemas.openxmlformats.org/drawingml/2006/main">
+              <a:ext uri="{FF2B5EF4-FFF2-40B4-BE49-F238E27FC236}">
+                <a16:creationId xmlns:a16="http://schemas.microsoft.com/office/drawing/2014/main" id="{1DC3EB60-A9B3-4415-86DE-D0509C17D321}"/>
+              </a:ext>
+            </a:extLst>
+          </p:cNvPr>
+          <p:cNvSpPr>
+            <a:spLocks xmlns:a="http://schemas.openxmlformats.org/drawingml/2006/main" noGrp="1"/>
+          </p:cNvSpPr>
+          <p:nvPr/>
+        </p:nvSpPr>
+        <p:spPr>
+          <a:xfrm xmlns:a="http://schemas.openxmlformats.org/drawingml/2006/main">
+            <a:off x="5200650" y="2847975"/>
+            <a:ext cx="1009650" cy="266700"/>
+          </a:xfrm>
+          <a:prstGeom xmlns:a="http://schemas.openxmlformats.org/drawingml/2006/main" prst="rect">
+            <a:avLst/>
+          </a:prstGeom>
+          <a:noFill xmlns:a="http://schemas.openxmlformats.org/drawingml/2006/main"/>
+          <a:ln xmlns:a="http://schemas.openxmlformats.org/drawingml/2006/main" w="0">
+            <a:noFill/>
+            <a:prstDash val="solid"/>
+          </a:ln>
+        </p:spPr>
+        <p:txBody>
+          <a:bodyPr xmlns:a="http://schemas.openxmlformats.org/drawingml/2006/main"/>
+          <a:lstStyle xmlns:a="http://schemas.openxmlformats.org/drawingml/2006/main"/>
+          <a:p xmlns:a="http://schemas.openxmlformats.org/drawingml/2006/main">
+            <a:pPr>
+              <a:defRPr sz="1125" b="0">
+                <a:solidFill>
+                  <a:srgbClr val="000000"/>
+                </a:solidFill>
+              </a:defRPr>
+            </a:pPr>
+            <a:r>
+              <a:rPr sz="1125" b="0">
+                <a:solidFill>
+                  <a:srgbClr val="000000"/>
+                </a:solidFill>
+              </a:rPr>
+              <a:t>continuation</a:t>
+            </a:r>
+          </a:p>
+        </p:txBody>
+      </p:sp>
+      <p:sp>
+        <p:nvSpPr>
+          <p:cNvPr id="25" name="">
+            <a:extLst xmlns:a="http://schemas.openxmlformats.org/drawingml/2006/main">
+              <a:ext uri="{FF2B5EF4-FFF2-40B4-BE49-F238E27FC236}">
+                <a16:creationId xmlns:a16="http://schemas.microsoft.com/office/drawing/2014/main" id="{D4519844-68B8-4F6B-A3E3-9E5CE2F912DF}"/>
+              </a:ext>
+            </a:extLst>
+          </p:cNvPr>
+          <p:cNvSpPr>
+            <a:spLocks xmlns:a="http://schemas.openxmlformats.org/drawingml/2006/main" noGrp="1"/>
+          </p:cNvSpPr>
+          <p:nvPr/>
+        </p:nvSpPr>
+        <p:spPr>
+          <a:xfrm xmlns:a="http://schemas.openxmlformats.org/drawingml/2006/main">
+            <a:off x="6286500" y="2724150"/>
+            <a:ext cx="1123950" cy="514350"/>
+          </a:xfrm>
+          <a:prstGeom xmlns:a="http://schemas.openxmlformats.org/drawingml/2006/main" prst="rect">
+            <a:avLst/>
+          </a:prstGeom>
+          <a:solidFill xmlns:a="http://schemas.openxmlformats.org/drawingml/2006/main">
+            <a:srgbClr val="F7F7F7"/>
+          </a:solidFill>
+          <a:ln xmlns:a="http://schemas.openxmlformats.org/drawingml/2006/main" w="9525">
+            <a:solidFill>
+              <a:srgbClr val="B8BCC4"/>
+            </a:solidFill>
+            <a:prstDash val="solid"/>
+          </a:ln>
+        </p:spPr>
+      </p:sp>
+      <p:sp>
+        <p:nvSpPr>
+          <p:cNvPr id="26" name="">
+            <a:extLst xmlns:a="http://schemas.openxmlformats.org/drawingml/2006/main">
+              <a:ext uri="{FF2B5EF4-FFF2-40B4-BE49-F238E27FC236}">
+                <a16:creationId xmlns:a16="http://schemas.microsoft.com/office/drawing/2014/main" id="{6CC1400D-ADB6-4B27-B153-CD636C2E9DC5}"/>
+              </a:ext>
+            </a:extLst>
+          </p:cNvPr>
+          <p:cNvSpPr>
+            <a:spLocks xmlns:a="http://schemas.openxmlformats.org/drawingml/2006/main" noGrp="1"/>
+          </p:cNvSpPr>
+          <p:nvPr/>
+        </p:nvSpPr>
+        <p:spPr>
+          <a:xfrm xmlns:a="http://schemas.openxmlformats.org/drawingml/2006/main">
+            <a:off x="6362700" y="2847975"/>
+            <a:ext cx="971550" cy="266700"/>
+          </a:xfrm>
+          <a:prstGeom xmlns:a="http://schemas.openxmlformats.org/drawingml/2006/main" prst="rect">
+            <a:avLst/>
+          </a:prstGeom>
+          <a:noFill xmlns:a="http://schemas.openxmlformats.org/drawingml/2006/main"/>
+          <a:ln xmlns:a="http://schemas.openxmlformats.org/drawingml/2006/main" w="0">
+            <a:noFill/>
+            <a:prstDash val="solid"/>
+          </a:ln>
+        </p:spPr>
+        <p:txBody>
+          <a:bodyPr xmlns:a="http://schemas.openxmlformats.org/drawingml/2006/main"/>
+          <a:lstStyle xmlns:a="http://schemas.openxmlformats.org/drawingml/2006/main"/>
+          <a:p xmlns:a="http://schemas.openxmlformats.org/drawingml/2006/main">
+            <a:pPr>
+              <a:defRPr sz="1125" b="0">
+                <a:solidFill>
+                  <a:srgbClr val="000000"/>
+                </a:solidFill>
+              </a:defRPr>
+            </a:pPr>
+            <a:r>
+              <a:rPr sz="1125" b="0">
+                <a:solidFill>
+                  <a:srgbClr val="000000"/>
+                </a:solidFill>
+              </a:rPr>
+              <a:t>1/4</a:t>
+            </a:r>
+          </a:p>
+        </p:txBody>
+      </p:sp>
+      <p:sp>
+        <p:nvSpPr>
+          <p:cNvPr id="27" name="">
+            <a:extLst xmlns:a="http://schemas.openxmlformats.org/drawingml/2006/main">
+              <a:ext uri="{FF2B5EF4-FFF2-40B4-BE49-F238E27FC236}">
+                <a16:creationId xmlns:a16="http://schemas.microsoft.com/office/drawing/2014/main" id="{4283DA86-CEE0-4101-B202-3C4B6ADFBD57}"/>
+              </a:ext>
+            </a:extLst>
+          </p:cNvPr>
+          <p:cNvSpPr>
+            <a:spLocks xmlns:a="http://schemas.openxmlformats.org/drawingml/2006/main" noGrp="1"/>
+          </p:cNvSpPr>
+          <p:nvPr/>
+        </p:nvSpPr>
+        <p:spPr>
+          <a:xfrm xmlns:a="http://schemas.openxmlformats.org/drawingml/2006/main">
+            <a:off x="7410450" y="2724150"/>
+            <a:ext cx="1123950" cy="514350"/>
+          </a:xfrm>
+          <a:prstGeom xmlns:a="http://schemas.openxmlformats.org/drawingml/2006/main" prst="rect">
+            <a:avLst/>
+          </a:prstGeom>
+          <a:solidFill xmlns:a="http://schemas.openxmlformats.org/drawingml/2006/main">
+            <a:srgbClr val="F7F7F7"/>
+          </a:solidFill>
+          <a:ln xmlns:a="http://schemas.openxmlformats.org/drawingml/2006/main" w="9525">
+            <a:solidFill>
+              <a:srgbClr val="B8BCC4"/>
+            </a:solidFill>
+            <a:prstDash val="solid"/>
+          </a:ln>
+        </p:spPr>
+      </p:sp>
+      <p:sp>
+        <p:nvSpPr>
+          <p:cNvPr id="28" name="">
+            <a:extLst xmlns:a="http://schemas.openxmlformats.org/drawingml/2006/main">
+              <a:ext uri="{FF2B5EF4-FFF2-40B4-BE49-F238E27FC236}">
+                <a16:creationId xmlns:a16="http://schemas.microsoft.com/office/drawing/2014/main" id="{B4F01792-62A5-4C45-827E-A730BC24724C}"/>
+              </a:ext>
+            </a:extLst>
+          </p:cNvPr>
+          <p:cNvSpPr>
+            <a:spLocks xmlns:a="http://schemas.openxmlformats.org/drawingml/2006/main" noGrp="1"/>
+          </p:cNvSpPr>
+          <p:nvPr/>
+        </p:nvSpPr>
+        <p:spPr>
+          <a:xfrm xmlns:a="http://schemas.openxmlformats.org/drawingml/2006/main">
+            <a:off x="7486650" y="2847975"/>
+            <a:ext cx="971550" cy="266700"/>
+          </a:xfrm>
+          <a:prstGeom xmlns:a="http://schemas.openxmlformats.org/drawingml/2006/main" prst="rect">
+            <a:avLst/>
+          </a:prstGeom>
+          <a:noFill xmlns:a="http://schemas.openxmlformats.org/drawingml/2006/main"/>
+          <a:ln xmlns:a="http://schemas.openxmlformats.org/drawingml/2006/main" w="0">
+            <a:noFill/>
+            <a:prstDash val="solid"/>
+          </a:ln>
+        </p:spPr>
+        <p:txBody>
+          <a:bodyPr xmlns:a="http://schemas.openxmlformats.org/drawingml/2006/main"/>
+          <a:lstStyle xmlns:a="http://schemas.openxmlformats.org/drawingml/2006/main"/>
+          <a:p xmlns:a="http://schemas.openxmlformats.org/drawingml/2006/main">
+            <a:pPr>
+              <a:defRPr sz="1125" b="0">
+                <a:solidFill>
+                  <a:srgbClr val="000000"/>
+                </a:solidFill>
+              </a:defRPr>
+            </a:pPr>
+            <a:r>
+              <a:rPr sz="1125" b="0">
+                <a:solidFill>
+                  <a:srgbClr val="000000"/>
+                </a:solidFill>
+              </a:rPr>
+              <a:t>68.1%</a:t>
+            </a:r>
+          </a:p>
+        </p:txBody>
+      </p:sp>
+      <p:sp>
+        <p:nvSpPr>
+          <p:cNvPr id="29" name="">
+            <a:extLst xmlns:a="http://schemas.openxmlformats.org/drawingml/2006/main">
+              <a:ext uri="{FF2B5EF4-FFF2-40B4-BE49-F238E27FC236}">
+                <a16:creationId xmlns:a16="http://schemas.microsoft.com/office/drawing/2014/main" id="{A22311C4-BFA2-4A12-8E69-99533B39DC1C}"/>
+              </a:ext>
+            </a:extLst>
+          </p:cNvPr>
+          <p:cNvSpPr>
+            <a:spLocks xmlns:a="http://schemas.openxmlformats.org/drawingml/2006/main" noGrp="1"/>
+          </p:cNvSpPr>
+          <p:nvPr/>
+        </p:nvSpPr>
+        <p:spPr>
+          <a:xfrm xmlns:a="http://schemas.openxmlformats.org/drawingml/2006/main">
+            <a:off x="8534400" y="2724150"/>
+            <a:ext cx="1066800" cy="514350"/>
+          </a:xfrm>
+          <a:prstGeom xmlns:a="http://schemas.openxmlformats.org/drawingml/2006/main" prst="rect">
+            <a:avLst/>
+          </a:prstGeom>
+          <a:solidFill xmlns:a="http://schemas.openxmlformats.org/drawingml/2006/main">
+            <a:srgbClr val="F7F7F7"/>
+          </a:solidFill>
+          <a:ln xmlns:a="http://schemas.openxmlformats.org/drawingml/2006/main" w="9525">
+            <a:solidFill>
+              <a:srgbClr val="B8BCC4"/>
+            </a:solidFill>
+            <a:prstDash val="solid"/>
+          </a:ln>
+        </p:spPr>
+      </p:sp>
+      <p:sp>
+        <p:nvSpPr>
+          <p:cNvPr id="30" name="">
+            <a:extLst xmlns:a="http://schemas.openxmlformats.org/drawingml/2006/main">
+              <a:ext uri="{FF2B5EF4-FFF2-40B4-BE49-F238E27FC236}">
+                <a16:creationId xmlns:a16="http://schemas.microsoft.com/office/drawing/2014/main" id="{FD4B1486-B919-4E89-A474-D26ECAF1E7B7}"/>
+              </a:ext>
+            </a:extLst>
+          </p:cNvPr>
+          <p:cNvSpPr>
+            <a:spLocks xmlns:a="http://schemas.openxmlformats.org/drawingml/2006/main" noGrp="1"/>
+          </p:cNvSpPr>
+          <p:nvPr/>
+        </p:nvSpPr>
+        <p:spPr>
+          <a:xfrm xmlns:a="http://schemas.openxmlformats.org/drawingml/2006/main">
+            <a:off x="8610600" y="2847975"/>
+            <a:ext cx="914400" cy="266700"/>
+          </a:xfrm>
+          <a:prstGeom xmlns:a="http://schemas.openxmlformats.org/drawingml/2006/main" prst="rect">
+            <a:avLst/>
+          </a:prstGeom>
+          <a:noFill xmlns:a="http://schemas.openxmlformats.org/drawingml/2006/main"/>
+          <a:ln xmlns:a="http://schemas.openxmlformats.org/drawingml/2006/main" w="0">
+            <a:noFill/>
+            <a:prstDash val="solid"/>
+          </a:ln>
+        </p:spPr>
+        <p:txBody>
+          <a:bodyPr xmlns:a="http://schemas.openxmlformats.org/drawingml/2006/main"/>
+          <a:lstStyle xmlns:a="http://schemas.openxmlformats.org/drawingml/2006/main"/>
+          <a:p xmlns:a="http://schemas.openxmlformats.org/drawingml/2006/main">
+            <a:pPr>
+              <a:defRPr sz="1125" b="0">
+                <a:solidFill>
+                  <a:srgbClr val="B42318"/>
+                </a:solidFill>
+              </a:defRPr>
+            </a:pPr>
+            <a:r>
+              <a:rPr sz="1125" b="0">
+                <a:solidFill>
+                  <a:srgbClr val="B42318"/>
+                </a:solidFill>
+              </a:rPr>
+              <a:t>-23.4 pp</a:t>
+            </a:r>
+          </a:p>
+        </p:txBody>
+      </p:sp>
+      <p:sp>
+        <p:nvSpPr>
+          <p:cNvPr id="31" name="">
+            <a:extLst xmlns:a="http://schemas.openxmlformats.org/drawingml/2006/main">
+              <a:ext uri="{FF2B5EF4-FFF2-40B4-BE49-F238E27FC236}">
+                <a16:creationId xmlns:a16="http://schemas.microsoft.com/office/drawing/2014/main" id="{F539A0C8-EE19-4830-BD8A-6B1FBA2895F7}"/>
+              </a:ext>
+            </a:extLst>
+          </p:cNvPr>
+          <p:cNvSpPr>
+            <a:spLocks xmlns:a="http://schemas.openxmlformats.org/drawingml/2006/main" noGrp="1"/>
+          </p:cNvSpPr>
+          <p:nvPr/>
+        </p:nvSpPr>
+        <p:spPr>
+          <a:xfrm xmlns:a="http://schemas.openxmlformats.org/drawingml/2006/main">
+            <a:off x="9601200" y="2724150"/>
+            <a:ext cx="1028700" cy="514350"/>
+          </a:xfrm>
+          <a:prstGeom xmlns:a="http://schemas.openxmlformats.org/drawingml/2006/main" prst="rect">
+            <a:avLst/>
+          </a:prstGeom>
+          <a:solidFill xmlns:a="http://schemas.openxmlformats.org/drawingml/2006/main">
+            <a:srgbClr val="F7F7F7"/>
+          </a:solidFill>
+          <a:ln xmlns:a="http://schemas.openxmlformats.org/drawingml/2006/main" w="9525">
+            <a:solidFill>
+              <a:srgbClr val="B8BCC4"/>
+            </a:solidFill>
+            <a:prstDash val="solid"/>
+          </a:ln>
+        </p:spPr>
+      </p:sp>
+      <p:sp>
+        <p:nvSpPr>
+          <p:cNvPr id="32" name="">
+            <a:extLst xmlns:a="http://schemas.openxmlformats.org/drawingml/2006/main">
+              <a:ext uri="{FF2B5EF4-FFF2-40B4-BE49-F238E27FC236}">
+                <a16:creationId xmlns:a16="http://schemas.microsoft.com/office/drawing/2014/main" id="{53232A9E-D197-4D4B-91A8-CFA43034C197}"/>
+              </a:ext>
+            </a:extLst>
+          </p:cNvPr>
+          <p:cNvSpPr>
+            <a:spLocks xmlns:a="http://schemas.openxmlformats.org/drawingml/2006/main" noGrp="1"/>
+          </p:cNvSpPr>
+          <p:nvPr/>
+        </p:nvSpPr>
+        <p:spPr>
+          <a:xfrm xmlns:a="http://schemas.openxmlformats.org/drawingml/2006/main">
+            <a:off x="9677400" y="2847975"/>
+            <a:ext cx="876300" cy="266700"/>
+          </a:xfrm>
+          <a:prstGeom xmlns:a="http://schemas.openxmlformats.org/drawingml/2006/main" prst="rect">
+            <a:avLst/>
+          </a:prstGeom>
+          <a:noFill xmlns:a="http://schemas.openxmlformats.org/drawingml/2006/main"/>
+          <a:ln xmlns:a="http://schemas.openxmlformats.org/drawingml/2006/main" w="0">
+            <a:noFill/>
+            <a:prstDash val="solid"/>
+          </a:ln>
+        </p:spPr>
+        <p:txBody>
+          <a:bodyPr xmlns:a="http://schemas.openxmlformats.org/drawingml/2006/main"/>
+          <a:lstStyle xmlns:a="http://schemas.openxmlformats.org/drawingml/2006/main"/>
+          <a:p xmlns:a="http://schemas.openxmlformats.org/drawingml/2006/main">
+            <a:pPr>
+              <a:defRPr sz="1125" b="0">
+                <a:solidFill>
+                  <a:srgbClr val="000000"/>
+                </a:solidFill>
+              </a:defRPr>
+            </a:pPr>
+            <a:r>
+              <a:rPr sz="1125" b="0">
+                <a:solidFill>
+                  <a:srgbClr val="000000"/>
+                </a:solidFill>
+              </a:rPr>
+              <a:t>48.0%</a:t>
+            </a:r>
+          </a:p>
+        </p:txBody>
+      </p:sp>
+      <p:sp>
+        <p:nvSpPr>
+          <p:cNvPr id="33" name="">
+            <a:extLst xmlns:a="http://schemas.openxmlformats.org/drawingml/2006/main">
+              <a:ext uri="{FF2B5EF4-FFF2-40B4-BE49-F238E27FC236}">
+                <a16:creationId xmlns:a16="http://schemas.microsoft.com/office/drawing/2014/main" id="{B5D9CB6D-7E91-4221-AED4-56F9A82F836A}"/>
+              </a:ext>
+            </a:extLst>
+          </p:cNvPr>
+          <p:cNvSpPr>
+            <a:spLocks xmlns:a="http://schemas.openxmlformats.org/drawingml/2006/main" noGrp="1"/>
+          </p:cNvSpPr>
+          <p:nvPr/>
+        </p:nvSpPr>
+        <p:spPr>
+          <a:xfrm xmlns:a="http://schemas.openxmlformats.org/drawingml/2006/main">
+            <a:off x="742950" y="3238500"/>
+            <a:ext cx="2190750" cy="514350"/>
+          </a:xfrm>
+          <a:prstGeom xmlns:a="http://schemas.openxmlformats.org/drawingml/2006/main" prst="rect">
+            <a:avLst/>
+          </a:prstGeom>
+          <a:solidFill xmlns:a="http://schemas.openxmlformats.org/drawingml/2006/main">
+            <a:srgbClr val="FFFFFF"/>
+          </a:solidFill>
+          <a:ln xmlns:a="http://schemas.openxmlformats.org/drawingml/2006/main" w="9525">
+            <a:solidFill>
+              <a:srgbClr val="B8BCC4"/>
+            </a:solidFill>
+            <a:prstDash val="solid"/>
+          </a:ln>
+        </p:spPr>
+      </p:sp>
+      <p:sp>
+        <p:nvSpPr>
+          <p:cNvPr id="34" name="">
+            <a:extLst xmlns:a="http://schemas.openxmlformats.org/drawingml/2006/main">
+              <a:ext uri="{FF2B5EF4-FFF2-40B4-BE49-F238E27FC236}">
+                <a16:creationId xmlns:a16="http://schemas.microsoft.com/office/drawing/2014/main" id="{E94B69DE-B2E8-41F0-9C4B-CE39EFD4EC36}"/>
+              </a:ext>
+            </a:extLst>
+          </p:cNvPr>
+          <p:cNvSpPr>
+            <a:spLocks xmlns:a="http://schemas.openxmlformats.org/drawingml/2006/main" noGrp="1"/>
+          </p:cNvSpPr>
+          <p:nvPr/>
+        </p:nvSpPr>
+        <p:spPr>
+          <a:xfrm xmlns:a="http://schemas.openxmlformats.org/drawingml/2006/main">
+            <a:off x="819150" y="3362325"/>
+            <a:ext cx="2038350" cy="266700"/>
+          </a:xfrm>
+          <a:prstGeom xmlns:a="http://schemas.openxmlformats.org/drawingml/2006/main" prst="rect">
+            <a:avLst/>
+          </a:prstGeom>
+          <a:noFill xmlns:a="http://schemas.openxmlformats.org/drawingml/2006/main"/>
+          <a:ln xmlns:a="http://schemas.openxmlformats.org/drawingml/2006/main" w="0">
+            <a:noFill/>
+            <a:prstDash val="solid"/>
+          </a:ln>
+        </p:spPr>
+        <p:txBody>
+          <a:bodyPr xmlns:a="http://schemas.openxmlformats.org/drawingml/2006/main"/>
+          <a:lstStyle xmlns:a="http://schemas.openxmlformats.org/drawingml/2006/main"/>
+          <a:p xmlns:a="http://schemas.openxmlformats.org/drawingml/2006/main">
+            <a:pPr>
+              <a:defRPr sz="1125" b="0">
+                <a:solidFill>
+                  <a:srgbClr val="000000"/>
+                </a:solidFill>
+              </a:defRPr>
+            </a:pPr>
+            <a:r>
+              <a:rPr sz="1125" b="0">
+                <a:solidFill>
+                  <a:srgbClr val="000000"/>
+                </a:solidFill>
+              </a:rPr>
+              <a:t>Live + peers + risk anchors</a:t>
+            </a:r>
+          </a:p>
+        </p:txBody>
+      </p:sp>
+      <p:sp>
+        <p:nvSpPr>
+          <p:cNvPr id="35" name="">
+            <a:extLst xmlns:a="http://schemas.openxmlformats.org/drawingml/2006/main">
+              <a:ext uri="{FF2B5EF4-FFF2-40B4-BE49-F238E27FC236}">
+                <a16:creationId xmlns:a16="http://schemas.microsoft.com/office/drawing/2014/main" id="{1D7BDC18-D5F9-4F4E-8B1B-81680C93ECEA}"/>
+              </a:ext>
+            </a:extLst>
+          </p:cNvPr>
+          <p:cNvSpPr>
+            <a:spLocks xmlns:a="http://schemas.openxmlformats.org/drawingml/2006/main" noGrp="1"/>
+          </p:cNvSpPr>
+          <p:nvPr/>
+        </p:nvSpPr>
+        <p:spPr>
+          <a:xfrm xmlns:a="http://schemas.openxmlformats.org/drawingml/2006/main">
+            <a:off x="2933700" y="3238500"/>
+            <a:ext cx="2190750" cy="514350"/>
+          </a:xfrm>
+          <a:prstGeom xmlns:a="http://schemas.openxmlformats.org/drawingml/2006/main" prst="rect">
+            <a:avLst/>
+          </a:prstGeom>
+          <a:solidFill xmlns:a="http://schemas.openxmlformats.org/drawingml/2006/main">
+            <a:srgbClr val="FFFFFF"/>
+          </a:solidFill>
+          <a:ln xmlns:a="http://schemas.openxmlformats.org/drawingml/2006/main" w="9525">
+            <a:solidFill>
+              <a:srgbClr val="B8BCC4"/>
+            </a:solidFill>
+            <a:prstDash val="solid"/>
+          </a:ln>
+        </p:spPr>
+      </p:sp>
+      <p:sp>
+        <p:nvSpPr>
+          <p:cNvPr id="36" name="">
+            <a:extLst xmlns:a="http://schemas.openxmlformats.org/drawingml/2006/main">
+              <a:ext uri="{FF2B5EF4-FFF2-40B4-BE49-F238E27FC236}">
+                <a16:creationId xmlns:a16="http://schemas.microsoft.com/office/drawing/2014/main" id="{5C18663F-269F-4248-88ED-2D55A46FC33E}"/>
+              </a:ext>
+            </a:extLst>
+          </p:cNvPr>
+          <p:cNvSpPr>
+            <a:spLocks xmlns:a="http://schemas.openxmlformats.org/drawingml/2006/main" noGrp="1"/>
+          </p:cNvSpPr>
+          <p:nvPr/>
+        </p:nvSpPr>
+        <p:spPr>
+          <a:xfrm xmlns:a="http://schemas.openxmlformats.org/drawingml/2006/main">
+            <a:off x="3009900" y="3362325"/>
+            <a:ext cx="2038350" cy="266700"/>
+          </a:xfrm>
+          <a:prstGeom xmlns:a="http://schemas.openxmlformats.org/drawingml/2006/main" prst="rect">
+            <a:avLst/>
+          </a:prstGeom>
+          <a:noFill xmlns:a="http://schemas.openxmlformats.org/drawingml/2006/main"/>
+          <a:ln xmlns:a="http://schemas.openxmlformats.org/drawingml/2006/main" w="0">
+            <a:noFill/>
+            <a:prstDash val="solid"/>
+          </a:ln>
+        </p:spPr>
+        <p:txBody>
+          <a:bodyPr xmlns:a="http://schemas.openxmlformats.org/drawingml/2006/main"/>
+          <a:lstStyle xmlns:a="http://schemas.openxmlformats.org/drawingml/2006/main"/>
+          <a:p xmlns:a="http://schemas.openxmlformats.org/drawingml/2006/main">
+            <a:pPr>
+              <a:defRPr sz="1125" b="0">
+                <a:solidFill>
+                  <a:srgbClr val="000000"/>
+                </a:solidFill>
+              </a:defRPr>
+            </a:pPr>
+            <a:r>
+              <a:rPr sz="1125" b="0">
+                <a:solidFill>
+                  <a:srgbClr val="000000"/>
+                </a:solidFill>
+              </a:rPr>
+              <a:t>Workhorse enriched</a:t>
+            </a:r>
+          </a:p>
+        </p:txBody>
+      </p:sp>
+      <p:sp>
+        <p:nvSpPr>
+          <p:cNvPr id="37" name="">
+            <a:extLst xmlns:a="http://schemas.openxmlformats.org/drawingml/2006/main">
+              <a:ext uri="{FF2B5EF4-FFF2-40B4-BE49-F238E27FC236}">
+                <a16:creationId xmlns:a16="http://schemas.microsoft.com/office/drawing/2014/main" id="{47CC841B-22D3-444D-A228-5C72C423D2C2}"/>
+              </a:ext>
+            </a:extLst>
+          </p:cNvPr>
+          <p:cNvSpPr>
+            <a:spLocks xmlns:a="http://schemas.openxmlformats.org/drawingml/2006/main" noGrp="1"/>
+          </p:cNvSpPr>
+          <p:nvPr/>
+        </p:nvSpPr>
+        <p:spPr>
+          <a:xfrm xmlns:a="http://schemas.openxmlformats.org/drawingml/2006/main">
+            <a:off x="5124450" y="3238500"/>
+            <a:ext cx="1162050" cy="514350"/>
+          </a:xfrm>
+          <a:prstGeom xmlns:a="http://schemas.openxmlformats.org/drawingml/2006/main" prst="rect">
+            <a:avLst/>
+          </a:prstGeom>
+          <a:solidFill xmlns:a="http://schemas.openxmlformats.org/drawingml/2006/main">
+            <a:srgbClr val="FFFFFF"/>
+          </a:solidFill>
+          <a:ln xmlns:a="http://schemas.openxmlformats.org/drawingml/2006/main" w="9525">
+            <a:solidFill>
+              <a:srgbClr val="B8BCC4"/>
+            </a:solidFill>
+            <a:prstDash val="solid"/>
+          </a:ln>
+        </p:spPr>
+      </p:sp>
+      <p:sp>
+        <p:nvSpPr>
+          <p:cNvPr id="38" name="">
+            <a:extLst xmlns:a="http://schemas.openxmlformats.org/drawingml/2006/main">
+              <a:ext uri="{FF2B5EF4-FFF2-40B4-BE49-F238E27FC236}">
+                <a16:creationId xmlns:a16="http://schemas.microsoft.com/office/drawing/2014/main" id="{21A6FA31-1EE7-402C-9D45-C8EB01B0B5EE}"/>
+              </a:ext>
+            </a:extLst>
+          </p:cNvPr>
+          <p:cNvSpPr>
+            <a:spLocks xmlns:a="http://schemas.openxmlformats.org/drawingml/2006/main" noGrp="1"/>
+          </p:cNvSpPr>
+          <p:nvPr/>
+        </p:nvSpPr>
+        <p:spPr>
+          <a:xfrm xmlns:a="http://schemas.openxmlformats.org/drawingml/2006/main">
+            <a:off x="5200650" y="3362325"/>
+            <a:ext cx="1009650" cy="266700"/>
+          </a:xfrm>
+          <a:prstGeom xmlns:a="http://schemas.openxmlformats.org/drawingml/2006/main" prst="rect">
+            <a:avLst/>
+          </a:prstGeom>
+          <a:noFill xmlns:a="http://schemas.openxmlformats.org/drawingml/2006/main"/>
+          <a:ln xmlns:a="http://schemas.openxmlformats.org/drawingml/2006/main" w="0">
+            <a:noFill/>
+            <a:prstDash val="solid"/>
+          </a:ln>
+        </p:spPr>
+        <p:txBody>
+          <a:bodyPr xmlns:a="http://schemas.openxmlformats.org/drawingml/2006/main"/>
+          <a:lstStyle xmlns:a="http://schemas.openxmlformats.org/drawingml/2006/main"/>
+          <a:p xmlns:a="http://schemas.openxmlformats.org/drawingml/2006/main">
+            <a:pPr>
+              <a:defRPr sz="1125" b="0">
+                <a:solidFill>
+                  <a:srgbClr val="000000"/>
+                </a:solidFill>
+              </a:defRPr>
+            </a:pPr>
+            <a:r>
+              <a:rPr sz="1125" b="0">
+                <a:solidFill>
+                  <a:srgbClr val="000000"/>
+                </a:solidFill>
+              </a:rPr>
+              <a:t>continuation</a:t>
+            </a:r>
+          </a:p>
+        </p:txBody>
+      </p:sp>
+      <p:sp>
+        <p:nvSpPr>
+          <p:cNvPr id="39" name="">
+            <a:extLst xmlns:a="http://schemas.openxmlformats.org/drawingml/2006/main">
+              <a:ext uri="{FF2B5EF4-FFF2-40B4-BE49-F238E27FC236}">
+                <a16:creationId xmlns:a16="http://schemas.microsoft.com/office/drawing/2014/main" id="{0B5F54A9-9D4A-4D03-860A-6A4B712AC61E}"/>
+              </a:ext>
+            </a:extLst>
+          </p:cNvPr>
+          <p:cNvSpPr>
+            <a:spLocks xmlns:a="http://schemas.openxmlformats.org/drawingml/2006/main" noGrp="1"/>
+          </p:cNvSpPr>
+          <p:nvPr/>
+        </p:nvSpPr>
+        <p:spPr>
+          <a:xfrm xmlns:a="http://schemas.openxmlformats.org/drawingml/2006/main">
+            <a:off x="6286500" y="3238500"/>
+            <a:ext cx="1123950" cy="514350"/>
+          </a:xfrm>
+          <a:prstGeom xmlns:a="http://schemas.openxmlformats.org/drawingml/2006/main" prst="rect">
+            <a:avLst/>
+          </a:prstGeom>
+          <a:solidFill xmlns:a="http://schemas.openxmlformats.org/drawingml/2006/main">
+            <a:srgbClr val="FFFFFF"/>
+          </a:solidFill>
+          <a:ln xmlns:a="http://schemas.openxmlformats.org/drawingml/2006/main" w="9525">
+            <a:solidFill>
+              <a:srgbClr val="B8BCC4"/>
+            </a:solidFill>
+            <a:prstDash val="solid"/>
+          </a:ln>
+        </p:spPr>
+      </p:sp>
+      <p:sp>
+        <p:nvSpPr>
+          <p:cNvPr id="40" name="">
+            <a:extLst xmlns:a="http://schemas.openxmlformats.org/drawingml/2006/main">
+              <a:ext uri="{FF2B5EF4-FFF2-40B4-BE49-F238E27FC236}">
+                <a16:creationId xmlns:a16="http://schemas.microsoft.com/office/drawing/2014/main" id="{C45D6F7F-756D-4B0B-ABFD-9AF67CFDB4B4}"/>
+              </a:ext>
+            </a:extLst>
+          </p:cNvPr>
+          <p:cNvSpPr>
+            <a:spLocks xmlns:a="http://schemas.openxmlformats.org/drawingml/2006/main" noGrp="1"/>
+          </p:cNvSpPr>
+          <p:nvPr/>
+        </p:nvSpPr>
+        <p:spPr>
+          <a:xfrm xmlns:a="http://schemas.openxmlformats.org/drawingml/2006/main">
+            <a:off x="6362700" y="3362325"/>
+            <a:ext cx="971550" cy="266700"/>
+          </a:xfrm>
+          <a:prstGeom xmlns:a="http://schemas.openxmlformats.org/drawingml/2006/main" prst="rect">
+            <a:avLst/>
+          </a:prstGeom>
+          <a:noFill xmlns:a="http://schemas.openxmlformats.org/drawingml/2006/main"/>
+          <a:ln xmlns:a="http://schemas.openxmlformats.org/drawingml/2006/main" w="0">
+            <a:noFill/>
+            <a:prstDash val="solid"/>
+          </a:ln>
+        </p:spPr>
+        <p:txBody>
+          <a:bodyPr xmlns:a="http://schemas.openxmlformats.org/drawingml/2006/main"/>
+          <a:lstStyle xmlns:a="http://schemas.openxmlformats.org/drawingml/2006/main"/>
+          <a:p xmlns:a="http://schemas.openxmlformats.org/drawingml/2006/main">
+            <a:pPr>
+              <a:defRPr sz="1125" b="0">
+                <a:solidFill>
+                  <a:srgbClr val="000000"/>
+                </a:solidFill>
+              </a:defRPr>
+            </a:pPr>
+            <a:r>
+              <a:rPr sz="1125" b="0">
+                <a:solidFill>
+                  <a:srgbClr val="000000"/>
+                </a:solidFill>
+              </a:rPr>
+              <a:t>2/4</a:t>
+            </a:r>
+          </a:p>
+        </p:txBody>
+      </p:sp>
+      <p:sp>
+        <p:nvSpPr>
+          <p:cNvPr id="41" name="">
+            <a:extLst xmlns:a="http://schemas.openxmlformats.org/drawingml/2006/main">
+              <a:ext uri="{FF2B5EF4-FFF2-40B4-BE49-F238E27FC236}">
+                <a16:creationId xmlns:a16="http://schemas.microsoft.com/office/drawing/2014/main" id="{2786057F-1F6D-484D-ABB6-00127F6BEEB6}"/>
+              </a:ext>
+            </a:extLst>
+          </p:cNvPr>
+          <p:cNvSpPr>
+            <a:spLocks xmlns:a="http://schemas.openxmlformats.org/drawingml/2006/main" noGrp="1"/>
+          </p:cNvSpPr>
+          <p:nvPr/>
+        </p:nvSpPr>
+        <p:spPr>
+          <a:xfrm xmlns:a="http://schemas.openxmlformats.org/drawingml/2006/main">
+            <a:off x="7410450" y="3238500"/>
+            <a:ext cx="1123950" cy="514350"/>
+          </a:xfrm>
+          <a:prstGeom xmlns:a="http://schemas.openxmlformats.org/drawingml/2006/main" prst="rect">
+            <a:avLst/>
+          </a:prstGeom>
+          <a:solidFill xmlns:a="http://schemas.openxmlformats.org/drawingml/2006/main">
+            <a:srgbClr val="FFFFFF"/>
+          </a:solidFill>
+          <a:ln xmlns:a="http://schemas.openxmlformats.org/drawingml/2006/main" w="9525">
+            <a:solidFill>
+              <a:srgbClr val="B8BCC4"/>
+            </a:solidFill>
+            <a:prstDash val="solid"/>
+          </a:ln>
+        </p:spPr>
+      </p:sp>
+      <p:sp>
+        <p:nvSpPr>
+          <p:cNvPr id="42" name="">
+            <a:extLst xmlns:a="http://schemas.openxmlformats.org/drawingml/2006/main">
+              <a:ext uri="{FF2B5EF4-FFF2-40B4-BE49-F238E27FC236}">
+                <a16:creationId xmlns:a16="http://schemas.microsoft.com/office/drawing/2014/main" id="{440361BC-164F-4681-BC18-CADF6AA47677}"/>
+              </a:ext>
+            </a:extLst>
+          </p:cNvPr>
+          <p:cNvSpPr>
+            <a:spLocks xmlns:a="http://schemas.openxmlformats.org/drawingml/2006/main" noGrp="1"/>
+          </p:cNvSpPr>
+          <p:nvPr/>
+        </p:nvSpPr>
+        <p:spPr>
+          <a:xfrm xmlns:a="http://schemas.openxmlformats.org/drawingml/2006/main">
+            <a:off x="7486650" y="3362325"/>
+            <a:ext cx="971550" cy="266700"/>
+          </a:xfrm>
+          <a:prstGeom xmlns:a="http://schemas.openxmlformats.org/drawingml/2006/main" prst="rect">
+            <a:avLst/>
+          </a:prstGeom>
+          <a:noFill xmlns:a="http://schemas.openxmlformats.org/drawingml/2006/main"/>
+          <a:ln xmlns:a="http://schemas.openxmlformats.org/drawingml/2006/main" w="0">
+            <a:noFill/>
+            <a:prstDash val="solid"/>
+          </a:ln>
+        </p:spPr>
+        <p:txBody>
+          <a:bodyPr xmlns:a="http://schemas.openxmlformats.org/drawingml/2006/main"/>
+          <a:lstStyle xmlns:a="http://schemas.openxmlformats.org/drawingml/2006/main"/>
+          <a:p xmlns:a="http://schemas.openxmlformats.org/drawingml/2006/main">
+            <a:pPr>
+              <a:defRPr sz="1125" b="0">
+                <a:solidFill>
+                  <a:srgbClr val="000000"/>
+                </a:solidFill>
+              </a:defRPr>
+            </a:pPr>
+            <a:r>
+              <a:rPr sz="1125" b="0">
+                <a:solidFill>
+                  <a:srgbClr val="000000"/>
+                </a:solidFill>
+              </a:rPr>
+              <a:t>55.9%</a:t>
+            </a:r>
+          </a:p>
+        </p:txBody>
+      </p:sp>
+      <p:sp>
+        <p:nvSpPr>
+          <p:cNvPr id="43" name="">
+            <a:extLst xmlns:a="http://schemas.openxmlformats.org/drawingml/2006/main">
+              <a:ext uri="{FF2B5EF4-FFF2-40B4-BE49-F238E27FC236}">
+                <a16:creationId xmlns:a16="http://schemas.microsoft.com/office/drawing/2014/main" id="{5188CCE1-B486-4BB4-8393-DA0BFBB2D137}"/>
+              </a:ext>
+            </a:extLst>
+          </p:cNvPr>
+          <p:cNvSpPr>
+            <a:spLocks xmlns:a="http://schemas.openxmlformats.org/drawingml/2006/main" noGrp="1"/>
+          </p:cNvSpPr>
+          <p:nvPr/>
+        </p:nvSpPr>
+        <p:spPr>
+          <a:xfrm xmlns:a="http://schemas.openxmlformats.org/drawingml/2006/main">
+            <a:off x="8534400" y="3238500"/>
+            <a:ext cx="1066800" cy="514350"/>
+          </a:xfrm>
+          <a:prstGeom xmlns:a="http://schemas.openxmlformats.org/drawingml/2006/main" prst="rect">
+            <a:avLst/>
+          </a:prstGeom>
+          <a:solidFill xmlns:a="http://schemas.openxmlformats.org/drawingml/2006/main">
+            <a:srgbClr val="FFFFFF"/>
+          </a:solidFill>
+          <a:ln xmlns:a="http://schemas.openxmlformats.org/drawingml/2006/main" w="9525">
+            <a:solidFill>
+              <a:srgbClr val="B8BCC4"/>
+            </a:solidFill>
+            <a:prstDash val="solid"/>
+          </a:ln>
+        </p:spPr>
+      </p:sp>
+      <p:sp>
+        <p:nvSpPr>
+          <p:cNvPr id="44" name="">
+            <a:extLst xmlns:a="http://schemas.openxmlformats.org/drawingml/2006/main">
+              <a:ext uri="{FF2B5EF4-FFF2-40B4-BE49-F238E27FC236}">
+                <a16:creationId xmlns:a16="http://schemas.microsoft.com/office/drawing/2014/main" id="{22B04813-E0B5-42A3-89B9-077C0E50A842}"/>
+              </a:ext>
+            </a:extLst>
+          </p:cNvPr>
+          <p:cNvSpPr>
+            <a:spLocks xmlns:a="http://schemas.openxmlformats.org/drawingml/2006/main" noGrp="1"/>
+          </p:cNvSpPr>
+          <p:nvPr/>
+        </p:nvSpPr>
+        <p:spPr>
+          <a:xfrm xmlns:a="http://schemas.openxmlformats.org/drawingml/2006/main">
+            <a:off x="8610600" y="3362325"/>
+            <a:ext cx="914400" cy="266700"/>
+          </a:xfrm>
+          <a:prstGeom xmlns:a="http://schemas.openxmlformats.org/drawingml/2006/main" prst="rect">
+            <a:avLst/>
+          </a:prstGeom>
+          <a:noFill xmlns:a="http://schemas.openxmlformats.org/drawingml/2006/main"/>
+          <a:ln xmlns:a="http://schemas.openxmlformats.org/drawingml/2006/main" w="0">
+            <a:noFill/>
+            <a:prstDash val="solid"/>
+          </a:ln>
+        </p:spPr>
+        <p:txBody>
+          <a:bodyPr xmlns:a="http://schemas.openxmlformats.org/drawingml/2006/main"/>
+          <a:lstStyle xmlns:a="http://schemas.openxmlformats.org/drawingml/2006/main"/>
+          <a:p xmlns:a="http://schemas.openxmlformats.org/drawingml/2006/main">
+            <a:pPr>
+              <a:defRPr sz="1125" b="0">
+                <a:solidFill>
+                  <a:srgbClr val="B42318"/>
+                </a:solidFill>
+              </a:defRPr>
+            </a:pPr>
+            <a:r>
+              <a:rPr sz="1125" b="0">
+                <a:solidFill>
+                  <a:srgbClr val="B42318"/>
+                </a:solidFill>
+              </a:rPr>
+              <a:t>-35.6 pp</a:t>
+            </a:r>
+          </a:p>
+        </p:txBody>
+      </p:sp>
+      <p:sp>
+        <p:nvSpPr>
+          <p:cNvPr id="45" name="">
+            <a:extLst xmlns:a="http://schemas.openxmlformats.org/drawingml/2006/main">
+              <a:ext uri="{FF2B5EF4-FFF2-40B4-BE49-F238E27FC236}">
+                <a16:creationId xmlns:a16="http://schemas.microsoft.com/office/drawing/2014/main" id="{BE1F69E8-3063-4A64-9C80-15F019379F02}"/>
+              </a:ext>
+            </a:extLst>
+          </p:cNvPr>
+          <p:cNvSpPr>
+            <a:spLocks xmlns:a="http://schemas.openxmlformats.org/drawingml/2006/main" noGrp="1"/>
+          </p:cNvSpPr>
+          <p:nvPr/>
+        </p:nvSpPr>
+        <p:spPr>
+          <a:xfrm xmlns:a="http://schemas.openxmlformats.org/drawingml/2006/main">
+            <a:off x="9601200" y="3238500"/>
+            <a:ext cx="1028700" cy="514350"/>
+          </a:xfrm>
+          <a:prstGeom xmlns:a="http://schemas.openxmlformats.org/drawingml/2006/main" prst="rect">
+            <a:avLst/>
+          </a:prstGeom>
+          <a:solidFill xmlns:a="http://schemas.openxmlformats.org/drawingml/2006/main">
+            <a:srgbClr val="FFFFFF"/>
+          </a:solidFill>
+          <a:ln xmlns:a="http://schemas.openxmlformats.org/drawingml/2006/main" w="9525">
+            <a:solidFill>
+              <a:srgbClr val="B8BCC4"/>
+            </a:solidFill>
+            <a:prstDash val="solid"/>
+          </a:ln>
+        </p:spPr>
+      </p:sp>
+      <p:sp>
+        <p:nvSpPr>
+          <p:cNvPr id="46" name="">
+            <a:extLst xmlns:a="http://schemas.openxmlformats.org/drawingml/2006/main">
+              <a:ext uri="{FF2B5EF4-FFF2-40B4-BE49-F238E27FC236}">
+                <a16:creationId xmlns:a16="http://schemas.microsoft.com/office/drawing/2014/main" id="{433A95A9-6847-4CE1-9F4E-F0AF86AC8858}"/>
+              </a:ext>
+            </a:extLst>
+          </p:cNvPr>
+          <p:cNvSpPr>
+            <a:spLocks xmlns:a="http://schemas.openxmlformats.org/drawingml/2006/main" noGrp="1"/>
+          </p:cNvSpPr>
+          <p:nvPr/>
+        </p:nvSpPr>
+        <p:spPr>
+          <a:xfrm xmlns:a="http://schemas.openxmlformats.org/drawingml/2006/main">
+            <a:off x="9677400" y="3362325"/>
+            <a:ext cx="876300" cy="266700"/>
+          </a:xfrm>
+          <a:prstGeom xmlns:a="http://schemas.openxmlformats.org/drawingml/2006/main" prst="rect">
+            <a:avLst/>
+          </a:prstGeom>
+          <a:noFill xmlns:a="http://schemas.openxmlformats.org/drawingml/2006/main"/>
+          <a:ln xmlns:a="http://schemas.openxmlformats.org/drawingml/2006/main" w="0">
+            <a:noFill/>
+            <a:prstDash val="solid"/>
+          </a:ln>
+        </p:spPr>
+        <p:txBody>
+          <a:bodyPr xmlns:a="http://schemas.openxmlformats.org/drawingml/2006/main"/>
+          <a:lstStyle xmlns:a="http://schemas.openxmlformats.org/drawingml/2006/main"/>
+          <a:p xmlns:a="http://schemas.openxmlformats.org/drawingml/2006/main">
+            <a:pPr>
+              <a:defRPr sz="1125" b="0">
+                <a:solidFill>
+                  <a:srgbClr val="000000"/>
+                </a:solidFill>
+              </a:defRPr>
+            </a:pPr>
+            <a:r>
+              <a:rPr sz="1125" b="0">
+                <a:solidFill>
+                  <a:srgbClr val="000000"/>
+                </a:solidFill>
+              </a:rPr>
+              <a:t>40.3%</a:t>
+            </a:r>
+          </a:p>
+        </p:txBody>
+      </p:sp>
+      <p:sp>
+        <p:nvSpPr>
+          <p:cNvPr id="47" name="">
+            <a:extLst xmlns:a="http://schemas.openxmlformats.org/drawingml/2006/main">
+              <a:ext uri="{FF2B5EF4-FFF2-40B4-BE49-F238E27FC236}">
+                <a16:creationId xmlns:a16="http://schemas.microsoft.com/office/drawing/2014/main" id="{C650489F-82BE-474B-BB37-FB7CC72EEFED}"/>
+              </a:ext>
+            </a:extLst>
+          </p:cNvPr>
+          <p:cNvSpPr>
+            <a:spLocks xmlns:a="http://schemas.openxmlformats.org/drawingml/2006/main" noGrp="1"/>
+          </p:cNvSpPr>
+          <p:nvPr/>
+        </p:nvSpPr>
+        <p:spPr>
+          <a:xfrm xmlns:a="http://schemas.openxmlformats.org/drawingml/2006/main">
+            <a:off x="742950" y="3752850"/>
+            <a:ext cx="2190750" cy="514350"/>
+          </a:xfrm>
+          <a:prstGeom xmlns:a="http://schemas.openxmlformats.org/drawingml/2006/main" prst="rect">
+            <a:avLst/>
+          </a:prstGeom>
+          <a:solidFill xmlns:a="http://schemas.openxmlformats.org/drawingml/2006/main">
+            <a:srgbClr val="F7F7F7"/>
+          </a:solidFill>
+          <a:ln xmlns:a="http://schemas.openxmlformats.org/drawingml/2006/main" w="9525">
+            <a:solidFill>
+              <a:srgbClr val="B8BCC4"/>
+            </a:solidFill>
+            <a:prstDash val="solid"/>
+          </a:ln>
+        </p:spPr>
+      </p:sp>
+      <p:sp>
+        <p:nvSpPr>
+          <p:cNvPr id="48" name="">
+            <a:extLst xmlns:a="http://schemas.openxmlformats.org/drawingml/2006/main">
+              <a:ext uri="{FF2B5EF4-FFF2-40B4-BE49-F238E27FC236}">
+                <a16:creationId xmlns:a16="http://schemas.microsoft.com/office/drawing/2014/main" id="{18483260-A784-4A33-8244-3FD0AD050350}"/>
+              </a:ext>
+            </a:extLst>
+          </p:cNvPr>
+          <p:cNvSpPr>
+            <a:spLocks xmlns:a="http://schemas.openxmlformats.org/drawingml/2006/main" noGrp="1"/>
+          </p:cNvSpPr>
+          <p:nvPr/>
+        </p:nvSpPr>
+        <p:spPr>
+          <a:xfrm xmlns:a="http://schemas.openxmlformats.org/drawingml/2006/main">
+            <a:off x="819150" y="3876675"/>
+            <a:ext cx="2038350" cy="266700"/>
+          </a:xfrm>
+          <a:prstGeom xmlns:a="http://schemas.openxmlformats.org/drawingml/2006/main" prst="rect">
+            <a:avLst/>
+          </a:prstGeom>
+          <a:noFill xmlns:a="http://schemas.openxmlformats.org/drawingml/2006/main"/>
+          <a:ln xmlns:a="http://schemas.openxmlformats.org/drawingml/2006/main" w="0">
+            <a:noFill/>
+            <a:prstDash val="solid"/>
+          </a:ln>
+        </p:spPr>
+        <p:txBody>
+          <a:bodyPr xmlns:a="http://schemas.openxmlformats.org/drawingml/2006/main"/>
+          <a:lstStyle xmlns:a="http://schemas.openxmlformats.org/drawingml/2006/main"/>
+          <a:p xmlns:a="http://schemas.openxmlformats.org/drawingml/2006/main">
+            <a:pPr>
+              <a:defRPr sz="1125" b="0">
+                <a:solidFill>
+                  <a:srgbClr val="000000"/>
+                </a:solidFill>
+              </a:defRPr>
+            </a:pPr>
+            <a:r>
+              <a:rPr sz="1125" b="0">
+                <a:solidFill>
+                  <a:srgbClr val="000000"/>
+                </a:solidFill>
+              </a:rPr>
+              <a:t>Live + peers + risk anchors</a:t>
+            </a:r>
+          </a:p>
+        </p:txBody>
+      </p:sp>
+      <p:sp>
+        <p:nvSpPr>
+          <p:cNvPr id="49" name="">
+            <a:extLst xmlns:a="http://schemas.openxmlformats.org/drawingml/2006/main">
+              <a:ext uri="{FF2B5EF4-FFF2-40B4-BE49-F238E27FC236}">
+                <a16:creationId xmlns:a16="http://schemas.microsoft.com/office/drawing/2014/main" id="{8BC01726-45FF-4468-9E21-BD20AD02B347}"/>
+              </a:ext>
+            </a:extLst>
+          </p:cNvPr>
+          <p:cNvSpPr>
+            <a:spLocks xmlns:a="http://schemas.openxmlformats.org/drawingml/2006/main" noGrp="1"/>
+          </p:cNvSpPr>
+          <p:nvPr/>
+        </p:nvSpPr>
+        <p:spPr>
+          <a:xfrm xmlns:a="http://schemas.openxmlformats.org/drawingml/2006/main">
+            <a:off x="2933700" y="3752850"/>
+            <a:ext cx="2190750" cy="514350"/>
+          </a:xfrm>
+          <a:prstGeom xmlns:a="http://schemas.openxmlformats.org/drawingml/2006/main" prst="rect">
+            <a:avLst/>
+          </a:prstGeom>
+          <a:solidFill xmlns:a="http://schemas.openxmlformats.org/drawingml/2006/main">
+            <a:srgbClr val="F7F7F7"/>
+          </a:solidFill>
+          <a:ln xmlns:a="http://schemas.openxmlformats.org/drawingml/2006/main" w="9525">
+            <a:solidFill>
+              <a:srgbClr val="B8BCC4"/>
+            </a:solidFill>
+            <a:prstDash val="solid"/>
+          </a:ln>
+        </p:spPr>
+      </p:sp>
+      <p:sp>
+        <p:nvSpPr>
+          <p:cNvPr id="50" name="">
+            <a:extLst xmlns:a="http://schemas.openxmlformats.org/drawingml/2006/main">
+              <a:ext uri="{FF2B5EF4-FFF2-40B4-BE49-F238E27FC236}">
+                <a16:creationId xmlns:a16="http://schemas.microsoft.com/office/drawing/2014/main" id="{EEB78883-74B0-4405-A799-49B0CD93BD3F}"/>
+              </a:ext>
+            </a:extLst>
+          </p:cNvPr>
+          <p:cNvSpPr>
+            <a:spLocks xmlns:a="http://schemas.openxmlformats.org/drawingml/2006/main" noGrp="1"/>
+          </p:cNvSpPr>
+          <p:nvPr/>
+        </p:nvSpPr>
+        <p:spPr>
+          <a:xfrm xmlns:a="http://schemas.openxmlformats.org/drawingml/2006/main">
+            <a:off x="3009900" y="3876675"/>
+            <a:ext cx="2038350" cy="266700"/>
+          </a:xfrm>
+          <a:prstGeom xmlns:a="http://schemas.openxmlformats.org/drawingml/2006/main" prst="rect">
+            <a:avLst/>
+          </a:prstGeom>
+          <a:noFill xmlns:a="http://schemas.openxmlformats.org/drawingml/2006/main"/>
+          <a:ln xmlns:a="http://schemas.openxmlformats.org/drawingml/2006/main" w="0">
+            <a:noFill/>
+            <a:prstDash val="solid"/>
+          </a:ln>
+        </p:spPr>
+        <p:txBody>
+          <a:bodyPr xmlns:a="http://schemas.openxmlformats.org/drawingml/2006/main"/>
+          <a:lstStyle xmlns:a="http://schemas.openxmlformats.org/drawingml/2006/main"/>
+          <a:p xmlns:a="http://schemas.openxmlformats.org/drawingml/2006/main">
+            <a:pPr>
+              <a:defRPr sz="1125" b="0">
+                <a:solidFill>
+                  <a:srgbClr val="000000"/>
+                </a:solidFill>
+              </a:defRPr>
+            </a:pPr>
+            <a:r>
+              <a:rPr sz="1125" b="0">
+                <a:solidFill>
+                  <a:srgbClr val="000000"/>
+                </a:solidFill>
+              </a:rPr>
+              <a:t>Momentum plus stress</a:t>
+            </a:r>
+          </a:p>
+        </p:txBody>
+      </p:sp>
+      <p:sp>
+        <p:nvSpPr>
+          <p:cNvPr id="51" name="">
+            <a:extLst xmlns:a="http://schemas.openxmlformats.org/drawingml/2006/main">
+              <a:ext uri="{FF2B5EF4-FFF2-40B4-BE49-F238E27FC236}">
+                <a16:creationId xmlns:a16="http://schemas.microsoft.com/office/drawing/2014/main" id="{7B2178B9-B395-42EB-9B8F-A7AD5C2E9971}"/>
+              </a:ext>
+            </a:extLst>
+          </p:cNvPr>
+          <p:cNvSpPr>
+            <a:spLocks xmlns:a="http://schemas.openxmlformats.org/drawingml/2006/main" noGrp="1"/>
+          </p:cNvSpPr>
+          <p:nvPr/>
+        </p:nvSpPr>
+        <p:spPr>
+          <a:xfrm xmlns:a="http://schemas.openxmlformats.org/drawingml/2006/main">
+            <a:off x="5124450" y="3752850"/>
+            <a:ext cx="1162050" cy="514350"/>
+          </a:xfrm>
+          <a:prstGeom xmlns:a="http://schemas.openxmlformats.org/drawingml/2006/main" prst="rect">
+            <a:avLst/>
+          </a:prstGeom>
+          <a:solidFill xmlns:a="http://schemas.openxmlformats.org/drawingml/2006/main">
+            <a:srgbClr val="F7F7F7"/>
+          </a:solidFill>
+          <a:ln xmlns:a="http://schemas.openxmlformats.org/drawingml/2006/main" w="9525">
+            <a:solidFill>
+              <a:srgbClr val="B8BCC4"/>
+            </a:solidFill>
+            <a:prstDash val="solid"/>
+          </a:ln>
+        </p:spPr>
+      </p:sp>
+      <p:sp>
+        <p:nvSpPr>
+          <p:cNvPr id="52" name="">
+            <a:extLst xmlns:a="http://schemas.openxmlformats.org/drawingml/2006/main">
+              <a:ext uri="{FF2B5EF4-FFF2-40B4-BE49-F238E27FC236}">
+                <a16:creationId xmlns:a16="http://schemas.microsoft.com/office/drawing/2014/main" id="{DB1AB89D-77EA-46C5-A882-88AF5D33CFF4}"/>
+              </a:ext>
+            </a:extLst>
+          </p:cNvPr>
+          <p:cNvSpPr>
+            <a:spLocks xmlns:a="http://schemas.openxmlformats.org/drawingml/2006/main" noGrp="1"/>
+          </p:cNvSpPr>
+          <p:nvPr/>
+        </p:nvSpPr>
+        <p:spPr>
+          <a:xfrm xmlns:a="http://schemas.openxmlformats.org/drawingml/2006/main">
+            <a:off x="5200650" y="3876675"/>
+            <a:ext cx="1009650" cy="266700"/>
+          </a:xfrm>
+          <a:prstGeom xmlns:a="http://schemas.openxmlformats.org/drawingml/2006/main" prst="rect">
+            <a:avLst/>
+          </a:prstGeom>
+          <a:noFill xmlns:a="http://schemas.openxmlformats.org/drawingml/2006/main"/>
+          <a:ln xmlns:a="http://schemas.openxmlformats.org/drawingml/2006/main" w="0">
+            <a:noFill/>
+            <a:prstDash val="solid"/>
+          </a:ln>
+        </p:spPr>
+        <p:txBody>
+          <a:bodyPr xmlns:a="http://schemas.openxmlformats.org/drawingml/2006/main"/>
+          <a:lstStyle xmlns:a="http://schemas.openxmlformats.org/drawingml/2006/main"/>
+          <a:p xmlns:a="http://schemas.openxmlformats.org/drawingml/2006/main">
+            <a:pPr>
+              <a:defRPr sz="1125" b="0">
+                <a:solidFill>
+                  <a:srgbClr val="000000"/>
+                </a:solidFill>
+              </a:defRPr>
+            </a:pPr>
+            <a:r>
+              <a:rPr sz="1125" b="0">
+                <a:solidFill>
+                  <a:srgbClr val="000000"/>
+                </a:solidFill>
+              </a:rPr>
+              <a:t>continuation</a:t>
+            </a:r>
+          </a:p>
+        </p:txBody>
+      </p:sp>
+      <p:sp>
+        <p:nvSpPr>
+          <p:cNvPr id="53" name="">
+            <a:extLst xmlns:a="http://schemas.openxmlformats.org/drawingml/2006/main">
+              <a:ext uri="{FF2B5EF4-FFF2-40B4-BE49-F238E27FC236}">
+                <a16:creationId xmlns:a16="http://schemas.microsoft.com/office/drawing/2014/main" id="{B7337E45-1FDD-40BE-89E9-0CBCFF025685}"/>
+              </a:ext>
+            </a:extLst>
+          </p:cNvPr>
+          <p:cNvSpPr>
+            <a:spLocks xmlns:a="http://schemas.openxmlformats.org/drawingml/2006/main" noGrp="1"/>
+          </p:cNvSpPr>
+          <p:nvPr/>
+        </p:nvSpPr>
+        <p:spPr>
+          <a:xfrm xmlns:a="http://schemas.openxmlformats.org/drawingml/2006/main">
+            <a:off x="6286500" y="3752850"/>
+            <a:ext cx="1123950" cy="514350"/>
+          </a:xfrm>
+          <a:prstGeom xmlns:a="http://schemas.openxmlformats.org/drawingml/2006/main" prst="rect">
+            <a:avLst/>
+          </a:prstGeom>
+          <a:solidFill xmlns:a="http://schemas.openxmlformats.org/drawingml/2006/main">
+            <a:srgbClr val="F7F7F7"/>
+          </a:solidFill>
+          <a:ln xmlns:a="http://schemas.openxmlformats.org/drawingml/2006/main" w="9525">
+            <a:solidFill>
+              <a:srgbClr val="B8BCC4"/>
+            </a:solidFill>
+            <a:prstDash val="solid"/>
+          </a:ln>
+        </p:spPr>
+      </p:sp>
+      <p:sp>
+        <p:nvSpPr>
+          <p:cNvPr id="54" name="">
+            <a:extLst xmlns:a="http://schemas.openxmlformats.org/drawingml/2006/main">
+              <a:ext uri="{FF2B5EF4-FFF2-40B4-BE49-F238E27FC236}">
+                <a16:creationId xmlns:a16="http://schemas.microsoft.com/office/drawing/2014/main" id="{EBDC42CB-2705-4E04-9FC9-D6A703CFFF07}"/>
+              </a:ext>
+            </a:extLst>
+          </p:cNvPr>
+          <p:cNvSpPr>
+            <a:spLocks xmlns:a="http://schemas.openxmlformats.org/drawingml/2006/main" noGrp="1"/>
+          </p:cNvSpPr>
+          <p:nvPr/>
+        </p:nvSpPr>
+        <p:spPr>
+          <a:xfrm xmlns:a="http://schemas.openxmlformats.org/drawingml/2006/main">
+            <a:off x="6362700" y="3876675"/>
+            <a:ext cx="971550" cy="266700"/>
+          </a:xfrm>
+          <a:prstGeom xmlns:a="http://schemas.openxmlformats.org/drawingml/2006/main" prst="rect">
+            <a:avLst/>
+          </a:prstGeom>
+          <a:noFill xmlns:a="http://schemas.openxmlformats.org/drawingml/2006/main"/>
+          <a:ln xmlns:a="http://schemas.openxmlformats.org/drawingml/2006/main" w="0">
+            <a:noFill/>
+            <a:prstDash val="solid"/>
+          </a:ln>
+        </p:spPr>
+        <p:txBody>
+          <a:bodyPr xmlns:a="http://schemas.openxmlformats.org/drawingml/2006/main"/>
+          <a:lstStyle xmlns:a="http://schemas.openxmlformats.org/drawingml/2006/main"/>
+          <a:p xmlns:a="http://schemas.openxmlformats.org/drawingml/2006/main">
+            <a:pPr>
+              <a:defRPr sz="1125" b="0">
+                <a:solidFill>
+                  <a:srgbClr val="000000"/>
+                </a:solidFill>
+              </a:defRPr>
+            </a:pPr>
+            <a:r>
+              <a:rPr sz="1125" b="0">
+                <a:solidFill>
+                  <a:srgbClr val="000000"/>
+                </a:solidFill>
+              </a:rPr>
+              <a:t>1/4</a:t>
+            </a:r>
+          </a:p>
+        </p:txBody>
+      </p:sp>
+      <p:sp>
+        <p:nvSpPr>
+          <p:cNvPr id="55" name="">
+            <a:extLst xmlns:a="http://schemas.openxmlformats.org/drawingml/2006/main">
+              <a:ext uri="{FF2B5EF4-FFF2-40B4-BE49-F238E27FC236}">
+                <a16:creationId xmlns:a16="http://schemas.microsoft.com/office/drawing/2014/main" id="{FAFD434B-7215-4D34-89F5-12AF00491577}"/>
+              </a:ext>
+            </a:extLst>
+          </p:cNvPr>
+          <p:cNvSpPr>
+            <a:spLocks xmlns:a="http://schemas.openxmlformats.org/drawingml/2006/main" noGrp="1"/>
+          </p:cNvSpPr>
+          <p:nvPr/>
+        </p:nvSpPr>
+        <p:spPr>
+          <a:xfrm xmlns:a="http://schemas.openxmlformats.org/drawingml/2006/main">
+            <a:off x="7410450" y="3752850"/>
+            <a:ext cx="1123950" cy="514350"/>
+          </a:xfrm>
+          <a:prstGeom xmlns:a="http://schemas.openxmlformats.org/drawingml/2006/main" prst="rect">
+            <a:avLst/>
+          </a:prstGeom>
+          <a:solidFill xmlns:a="http://schemas.openxmlformats.org/drawingml/2006/main">
+            <a:srgbClr val="F7F7F7"/>
+          </a:solidFill>
+          <a:ln xmlns:a="http://schemas.openxmlformats.org/drawingml/2006/main" w="9525">
+            <a:solidFill>
+              <a:srgbClr val="B8BCC4"/>
+            </a:solidFill>
+            <a:prstDash val="solid"/>
+          </a:ln>
+        </p:spPr>
+      </p:sp>
+      <p:sp>
+        <p:nvSpPr>
+          <p:cNvPr id="56" name="">
+            <a:extLst xmlns:a="http://schemas.openxmlformats.org/drawingml/2006/main">
+              <a:ext uri="{FF2B5EF4-FFF2-40B4-BE49-F238E27FC236}">
+                <a16:creationId xmlns:a16="http://schemas.microsoft.com/office/drawing/2014/main" id="{5C04B862-17E9-400A-A5B2-95227BDD3DA3}"/>
+              </a:ext>
+            </a:extLst>
+          </p:cNvPr>
+          <p:cNvSpPr>
+            <a:spLocks xmlns:a="http://schemas.openxmlformats.org/drawingml/2006/main" noGrp="1"/>
+          </p:cNvSpPr>
+          <p:nvPr/>
+        </p:nvSpPr>
+        <p:spPr>
+          <a:xfrm xmlns:a="http://schemas.openxmlformats.org/drawingml/2006/main">
+            <a:off x="7486650" y="3876675"/>
+            <a:ext cx="971550" cy="266700"/>
+          </a:xfrm>
+          <a:prstGeom xmlns:a="http://schemas.openxmlformats.org/drawingml/2006/main" prst="rect">
+            <a:avLst/>
+          </a:prstGeom>
+          <a:noFill xmlns:a="http://schemas.openxmlformats.org/drawingml/2006/main"/>
+          <a:ln xmlns:a="http://schemas.openxmlformats.org/drawingml/2006/main" w="0">
+            <a:noFill/>
+            <a:prstDash val="solid"/>
+          </a:ln>
+        </p:spPr>
+        <p:txBody>
+          <a:bodyPr xmlns:a="http://schemas.openxmlformats.org/drawingml/2006/main"/>
+          <a:lstStyle xmlns:a="http://schemas.openxmlformats.org/drawingml/2006/main"/>
+          <a:p xmlns:a="http://schemas.openxmlformats.org/drawingml/2006/main">
+            <a:pPr>
+              <a:defRPr sz="1125" b="0">
+                <a:solidFill>
+                  <a:srgbClr val="000000"/>
+                </a:solidFill>
+              </a:defRPr>
+            </a:pPr>
+            <a:r>
+              <a:rPr sz="1125" b="0">
+                <a:solidFill>
+                  <a:srgbClr val="000000"/>
+                </a:solidFill>
+              </a:rPr>
+              <a:t>33.1%</a:t>
+            </a:r>
+          </a:p>
+        </p:txBody>
+      </p:sp>
+      <p:sp>
+        <p:nvSpPr>
+          <p:cNvPr id="57" name="">
+            <a:extLst xmlns:a="http://schemas.openxmlformats.org/drawingml/2006/main">
+              <a:ext uri="{FF2B5EF4-FFF2-40B4-BE49-F238E27FC236}">
+                <a16:creationId xmlns:a16="http://schemas.microsoft.com/office/drawing/2014/main" id="{5F30D8EF-1EE2-4C64-B86F-CFD5E5FC3946}"/>
+              </a:ext>
+            </a:extLst>
+          </p:cNvPr>
+          <p:cNvSpPr>
+            <a:spLocks xmlns:a="http://schemas.openxmlformats.org/drawingml/2006/main" noGrp="1"/>
+          </p:cNvSpPr>
+          <p:nvPr/>
+        </p:nvSpPr>
+        <p:spPr>
+          <a:xfrm xmlns:a="http://schemas.openxmlformats.org/drawingml/2006/main">
+            <a:off x="8534400" y="3752850"/>
+            <a:ext cx="1066800" cy="514350"/>
+          </a:xfrm>
+          <a:prstGeom xmlns:a="http://schemas.openxmlformats.org/drawingml/2006/main" prst="rect">
+            <a:avLst/>
+          </a:prstGeom>
+          <a:solidFill xmlns:a="http://schemas.openxmlformats.org/drawingml/2006/main">
+            <a:srgbClr val="F7F7F7"/>
+          </a:solidFill>
+          <a:ln xmlns:a="http://schemas.openxmlformats.org/drawingml/2006/main" w="9525">
+            <a:solidFill>
+              <a:srgbClr val="B8BCC4"/>
+            </a:solidFill>
+            <a:prstDash val="solid"/>
+          </a:ln>
+        </p:spPr>
+      </p:sp>
+      <p:sp>
+        <p:nvSpPr>
+          <p:cNvPr id="58" name="">
+            <a:extLst xmlns:a="http://schemas.openxmlformats.org/drawingml/2006/main">
+              <a:ext uri="{FF2B5EF4-FFF2-40B4-BE49-F238E27FC236}">
+                <a16:creationId xmlns:a16="http://schemas.microsoft.com/office/drawing/2014/main" id="{60D3CE5B-AA3B-4751-8872-D6A9B59C7704}"/>
+              </a:ext>
+            </a:extLst>
+          </p:cNvPr>
+          <p:cNvSpPr>
+            <a:spLocks xmlns:a="http://schemas.openxmlformats.org/drawingml/2006/main" noGrp="1"/>
+          </p:cNvSpPr>
+          <p:nvPr/>
+        </p:nvSpPr>
+        <p:spPr>
+          <a:xfrm xmlns:a="http://schemas.openxmlformats.org/drawingml/2006/main">
+            <a:off x="8610600" y="3876675"/>
+            <a:ext cx="914400" cy="266700"/>
+          </a:xfrm>
+          <a:prstGeom xmlns:a="http://schemas.openxmlformats.org/drawingml/2006/main" prst="rect">
+            <a:avLst/>
+          </a:prstGeom>
+          <a:noFill xmlns:a="http://schemas.openxmlformats.org/drawingml/2006/main"/>
+          <a:ln xmlns:a="http://schemas.openxmlformats.org/drawingml/2006/main" w="0">
+            <a:noFill/>
+            <a:prstDash val="solid"/>
+          </a:ln>
+        </p:spPr>
+        <p:txBody>
+          <a:bodyPr xmlns:a="http://schemas.openxmlformats.org/drawingml/2006/main"/>
+          <a:lstStyle xmlns:a="http://schemas.openxmlformats.org/drawingml/2006/main"/>
+          <a:p xmlns:a="http://schemas.openxmlformats.org/drawingml/2006/main">
+            <a:pPr>
+              <a:defRPr sz="1125" b="0">
+                <a:solidFill>
+                  <a:srgbClr val="B42318"/>
+                </a:solidFill>
+              </a:defRPr>
+            </a:pPr>
+            <a:r>
+              <a:rPr sz="1125" b="0">
+                <a:solidFill>
+                  <a:srgbClr val="B42318"/>
+                </a:solidFill>
+              </a:rPr>
+              <a:t>-58.5 pp</a:t>
+            </a:r>
+          </a:p>
+        </p:txBody>
+      </p:sp>
+      <p:sp>
+        <p:nvSpPr>
+          <p:cNvPr id="59" name="">
+            <a:extLst xmlns:a="http://schemas.openxmlformats.org/drawingml/2006/main">
+              <a:ext uri="{FF2B5EF4-FFF2-40B4-BE49-F238E27FC236}">
+                <a16:creationId xmlns:a16="http://schemas.microsoft.com/office/drawing/2014/main" id="{1443C39E-1156-40BF-9998-DCF183A85D44}"/>
+              </a:ext>
+            </a:extLst>
+          </p:cNvPr>
+          <p:cNvSpPr>
+            <a:spLocks xmlns:a="http://schemas.openxmlformats.org/drawingml/2006/main" noGrp="1"/>
+          </p:cNvSpPr>
+          <p:nvPr/>
+        </p:nvSpPr>
+        <p:spPr>
+          <a:xfrm xmlns:a="http://schemas.openxmlformats.org/drawingml/2006/main">
+            <a:off x="9601200" y="3752850"/>
+            <a:ext cx="1028700" cy="514350"/>
+          </a:xfrm>
+          <a:prstGeom xmlns:a="http://schemas.openxmlformats.org/drawingml/2006/main" prst="rect">
+            <a:avLst/>
+          </a:prstGeom>
+          <a:solidFill xmlns:a="http://schemas.openxmlformats.org/drawingml/2006/main">
+            <a:srgbClr val="F7F7F7"/>
+          </a:solidFill>
+          <a:ln xmlns:a="http://schemas.openxmlformats.org/drawingml/2006/main" w="9525">
+            <a:solidFill>
+              <a:srgbClr val="B8BCC4"/>
+            </a:solidFill>
+            <a:prstDash val="solid"/>
+          </a:ln>
+        </p:spPr>
+      </p:sp>
+      <p:sp>
+        <p:nvSpPr>
+          <p:cNvPr id="60" name="">
+            <a:extLst xmlns:a="http://schemas.openxmlformats.org/drawingml/2006/main">
+              <a:ext uri="{FF2B5EF4-FFF2-40B4-BE49-F238E27FC236}">
+                <a16:creationId xmlns:a16="http://schemas.microsoft.com/office/drawing/2014/main" id="{B1146691-56A1-4DB7-86C6-4D867B1FF61F}"/>
+              </a:ext>
+            </a:extLst>
+          </p:cNvPr>
+          <p:cNvSpPr>
+            <a:spLocks xmlns:a="http://schemas.openxmlformats.org/drawingml/2006/main" noGrp="1"/>
+          </p:cNvSpPr>
+          <p:nvPr/>
+        </p:nvSpPr>
+        <p:spPr>
+          <a:xfrm xmlns:a="http://schemas.openxmlformats.org/drawingml/2006/main">
+            <a:off x="9677400" y="3876675"/>
+            <a:ext cx="876300" cy="266700"/>
+          </a:xfrm>
+          <a:prstGeom xmlns:a="http://schemas.openxmlformats.org/drawingml/2006/main" prst="rect">
+            <a:avLst/>
+          </a:prstGeom>
+          <a:noFill xmlns:a="http://schemas.openxmlformats.org/drawingml/2006/main"/>
+          <a:ln xmlns:a="http://schemas.openxmlformats.org/drawingml/2006/main" w="0">
+            <a:noFill/>
+            <a:prstDash val="solid"/>
+          </a:ln>
+        </p:spPr>
+        <p:txBody>
+          <a:bodyPr xmlns:a="http://schemas.openxmlformats.org/drawingml/2006/main"/>
+          <a:lstStyle xmlns:a="http://schemas.openxmlformats.org/drawingml/2006/main"/>
+          <a:p xmlns:a="http://schemas.openxmlformats.org/drawingml/2006/main">
+            <a:pPr>
+              <a:defRPr sz="1125" b="0">
+                <a:solidFill>
+                  <a:srgbClr val="000000"/>
+                </a:solidFill>
+              </a:defRPr>
+            </a:pPr>
+            <a:r>
+              <a:rPr sz="1125" b="0">
+                <a:solidFill>
+                  <a:srgbClr val="000000"/>
+                </a:solidFill>
+              </a:rPr>
+              <a:t>35.0%</a:t>
+            </a:r>
+          </a:p>
+        </p:txBody>
+      </p:sp>
+      <p:sp>
+        <p:nvSpPr>
+          <p:cNvPr id="61" name="">
+            <a:extLst xmlns:a="http://schemas.openxmlformats.org/drawingml/2006/main">
+              <a:ext uri="{FF2B5EF4-FFF2-40B4-BE49-F238E27FC236}">
+                <a16:creationId xmlns:a16="http://schemas.microsoft.com/office/drawing/2014/main" id="{3ED7E310-D3B5-41BA-A29B-44DC784908B0}"/>
+              </a:ext>
+            </a:extLst>
+          </p:cNvPr>
+          <p:cNvSpPr>
+            <a:spLocks xmlns:a="http://schemas.openxmlformats.org/drawingml/2006/main" noGrp="1"/>
+          </p:cNvSpPr>
+          <p:nvPr/>
+        </p:nvSpPr>
+        <p:spPr>
+          <a:xfrm xmlns:a="http://schemas.openxmlformats.org/drawingml/2006/main">
+            <a:off x="857250" y="5638800"/>
+            <a:ext cx="10096500" cy="457200"/>
+          </a:xfrm>
+          <a:prstGeom xmlns:a="http://schemas.openxmlformats.org/drawingml/2006/main" prst="rect">
+            <a:avLst/>
+          </a:prstGeom>
+          <a:noFill xmlns:a="http://schemas.openxmlformats.org/drawingml/2006/main"/>
+          <a:ln xmlns:a="http://schemas.openxmlformats.org/drawingml/2006/main" w="0">
+            <a:noFill/>
+            <a:prstDash val="solid"/>
+          </a:ln>
+        </p:spPr>
+        <p:txBody>
+          <a:bodyPr xmlns:a="http://schemas.openxmlformats.org/drawingml/2006/main"/>
+          <a:lstStyle xmlns:a="http://schemas.openxmlformats.org/drawingml/2006/main"/>
+          <a:p xmlns:a="http://schemas.openxmlformats.org/drawingml/2006/main">
+            <a:pPr algn="ctr">
+              <a:defRPr sz="1575" b="1">
+                <a:solidFill>
+                  <a:srgbClr val="000000"/>
+                </a:solidFill>
+              </a:defRPr>
+            </a:pPr>
+            <a:r>
+              <a:rPr sz="1575" b="1">
+                <a:solidFill>
+                  <a:srgbClr val="000000"/>
+                </a:solidFill>
+              </a:rPr>
+              <a:t>Best diagnostic feature set: Reversion-breakout context. It averaged 68.1% return, -23.4 pp alpha versus basket hold, 48.0% exposure, and beat the basket in 1/4 annual windows.</a:t>
+            </a:r>
+          </a:p>
+        </p:txBody>
+      </p:sp>
+      <p:sp>
+        <p:nvSpPr>
+          <p:cNvPr id="62" name="">
+            <a:extLst xmlns:a="http://schemas.openxmlformats.org/drawingml/2006/main">
+              <a:ext uri="{FF2B5EF4-FFF2-40B4-BE49-F238E27FC236}">
+                <a16:creationId xmlns:a16="http://schemas.microsoft.com/office/drawing/2014/main" id="{E65AD94D-B939-432D-9271-7A3920BC3B17}"/>
+              </a:ext>
+            </a:extLst>
+          </p:cNvPr>
+          <p:cNvSpPr>
+            <a:spLocks xmlns:a="http://schemas.openxmlformats.org/drawingml/2006/main" noGrp="1"/>
+          </p:cNvSpPr>
+          <p:nvPr/>
+        </p:nvSpPr>
+        <p:spPr>
+          <a:xfrm xmlns:a="http://schemas.openxmlformats.org/drawingml/2006/main">
+            <a:off x="514350" y="6477000"/>
+            <a:ext cx="11163300" cy="209550"/>
+          </a:xfrm>
+          <a:prstGeom xmlns:a="http://schemas.openxmlformats.org/drawingml/2006/main" prst="rect">
+            <a:avLst/>
+          </a:prstGeom>
+          <a:noFill xmlns:a="http://schemas.openxmlformats.org/drawingml/2006/main"/>
+          <a:ln xmlns:a="http://schemas.openxmlformats.org/drawingml/2006/main" w="0">
+            <a:noFill/>
+            <a:prstDash val="solid"/>
+          </a:ln>
+        </p:spPr>
+        <p:txBody>
+          <a:bodyPr xmlns:a="http://schemas.openxmlformats.org/drawingml/2006/main"/>
+          <a:lstStyle xmlns:a="http://schemas.openxmlformats.org/drawingml/2006/main"/>
+          <a:p xmlns:a="http://schemas.openxmlformats.org/drawingml/2006/main">
+            <a:pPr>
+              <a:defRPr sz="900" b="0">
+                <a:solidFill>
+                  <a:srgbClr val="555555"/>
+                </a:solidFill>
+              </a:defRPr>
+            </a:pPr>
+            <a:r>
+              <a:rPr sz="900" b="0">
+                <a:solidFill>
+                  <a:srgbClr val="555555"/>
+                </a:solidFill>
+              </a:rPr>
+              <a:t>Research/inspection only. Not allocation evidence or live-advice behavior.</a:t>
+            </a:r>
+          </a:p>
+        </p:txBody>
+      </p:sp>
+    </p:spTree>
+    <p:extLst>
+      <p:ext uri="{BB962C8B-B14F-4D97-AF65-F5344CB8AC3E}">
+        <p14:creationId xmlns:p14="http://schemas.microsoft.com/office/powerpoint/2010/main" val="1583085319"/>
+      </p:ext>
+    </p:extLst>
+  </p:cSld>
+</p:sld>
+</file>
+
+<file path=ppt/slides/slide15.xml><?xml version="1.0" encoding="utf-8"?>
+<p:sld xmlns:p="http://schemas.openxmlformats.org/presentationml/2006/main">
+  <p:cSld>
+    <p:bg>
+      <p:bgPr>
+        <a:solidFill xmlns:a="http://schemas.openxmlformats.org/drawingml/2006/main">
+          <a:srgbClr val="FFFFFF"/>
+        </a:solidFill>
+      </p:bgPr>
+    </p:bg>
+    <p:spTree>
+      <p:nvGrpSpPr>
+        <p:cNvPr id="1" name=""/>
+        <p:cNvGrpSpPr/>
+        <p:nvPr/>
+      </p:nvGrpSpPr>
+      <p:grpSpPr>
+        <a:xfrm xmlns:a="http://schemas.openxmlformats.org/drawingml/2006/main"/>
+      </p:grpSpPr>
+      <p:sp>
+        <p:nvSpPr>
+          <p:cNvPr id="1" name="">
+            <a:extLst xmlns:a="http://schemas.openxmlformats.org/drawingml/2006/main">
+              <a:ext uri="{FF2B5EF4-FFF2-40B4-BE49-F238E27FC236}">
+                <a16:creationId xmlns:a16="http://schemas.microsoft.com/office/drawing/2014/main" id="{A160CFB1-F11D-42D6-A3F9-55CA2B64DD13}"/>
+              </a:ext>
+            </a:extLst>
+          </p:cNvPr>
+          <p:cNvSpPr>
+            <a:spLocks xmlns:a="http://schemas.openxmlformats.org/drawingml/2006/main" noGrp="1"/>
+          </p:cNvSpPr>
+          <p:nvPr/>
+        </p:nvSpPr>
+        <p:spPr>
+          <a:xfrm xmlns:a="http://schemas.openxmlformats.org/drawingml/2006/main">
+            <a:off x="514350" y="266700"/>
+            <a:ext cx="5905500" cy="228600"/>
+          </a:xfrm>
+          <a:prstGeom xmlns:a="http://schemas.openxmlformats.org/drawingml/2006/main" prst="rect">
+            <a:avLst/>
+          </a:prstGeom>
+          <a:noFill xmlns:a="http://schemas.openxmlformats.org/drawingml/2006/main"/>
+          <a:ln xmlns:a="http://schemas.openxmlformats.org/drawingml/2006/main" w="0">
+            <a:noFill/>
+            <a:prstDash val="solid"/>
+          </a:ln>
+        </p:spPr>
+        <p:txBody>
+          <a:bodyPr xmlns:a="http://schemas.openxmlformats.org/drawingml/2006/main"/>
+          <a:lstStyle xmlns:a="http://schemas.openxmlformats.org/drawingml/2006/main"/>
+          <a:p xmlns:a="http://schemas.openxmlformats.org/drawingml/2006/main">
+            <a:pPr>
+              <a:defRPr sz="1050" b="1">
+                <a:solidFill>
+                  <a:srgbClr val="555555"/>
+                </a:solidFill>
+              </a:defRPr>
+            </a:pPr>
+            <a:r>
+              <a:rPr sz="1050" b="1">
+                <a:solidFill>
+                  <a:srgbClr val="555555"/>
+                </a:solidFill>
+              </a:rPr>
+              <a:t>GEN5.3 MOMENTUM CONTEXT-SIZE SCREEN</a:t>
+            </a:r>
+          </a:p>
+        </p:txBody>
+      </p:sp>
+      <p:sp>
+        <p:nvSpPr>
+          <p:cNvPr id="2" name="">
+            <a:extLst xmlns:a="http://schemas.openxmlformats.org/drawingml/2006/main">
+              <a:ext uri="{FF2B5EF4-FFF2-40B4-BE49-F238E27FC236}">
+                <a16:creationId xmlns:a16="http://schemas.microsoft.com/office/drawing/2014/main" id="{D7578722-361E-4FAD-8DD9-361EE24B5F84}"/>
+              </a:ext>
+            </a:extLst>
+          </p:cNvPr>
+          <p:cNvSpPr>
+            <a:spLocks xmlns:a="http://schemas.openxmlformats.org/drawingml/2006/main" noGrp="1"/>
+          </p:cNvSpPr>
+          <p:nvPr/>
+        </p:nvSpPr>
+        <p:spPr>
+          <a:xfrm xmlns:a="http://schemas.openxmlformats.org/drawingml/2006/main">
+            <a:off x="514350" y="628650"/>
+            <a:ext cx="10287000" cy="990600"/>
+          </a:xfrm>
+          <a:prstGeom xmlns:a="http://schemas.openxmlformats.org/drawingml/2006/main" prst="rect">
+            <a:avLst/>
+          </a:prstGeom>
+          <a:noFill xmlns:a="http://schemas.openxmlformats.org/drawingml/2006/main"/>
+          <a:ln xmlns:a="http://schemas.openxmlformats.org/drawingml/2006/main" w="0">
+            <a:noFill/>
+            <a:prstDash val="solid"/>
+          </a:ln>
+        </p:spPr>
+        <p:txBody>
+          <a:bodyPr xmlns:a="http://schemas.openxmlformats.org/drawingml/2006/main"/>
+          <a:lstStyle xmlns:a="http://schemas.openxmlformats.org/drawingml/2006/main"/>
+          <a:p xmlns:a="http://schemas.openxmlformats.org/drawingml/2006/main">
+            <a:pPr>
+              <a:defRPr sz="2850" b="1">
+                <a:solidFill>
+                  <a:srgbClr val="000000"/>
+                </a:solidFill>
+              </a:defRPr>
+            </a:pPr>
+            <a:r>
+              <a:rPr sz="2850" b="1">
+                <a:solidFill>
+                  <a:srgbClr val="000000"/>
+                </a:solidFill>
+              </a:rPr>
+              <a:t>The reversion-breakout feature set raised participation without solving upside capture</a:t>
+            </a:r>
+          </a:p>
+        </p:txBody>
+      </p:sp>
+      <p:sp>
+        <p:nvSpPr>
+          <p:cNvPr id="3" name="">
+            <a:extLst xmlns:a="http://schemas.openxmlformats.org/drawingml/2006/main">
+              <a:ext uri="{FF2B5EF4-FFF2-40B4-BE49-F238E27FC236}">
+                <a16:creationId xmlns:a16="http://schemas.microsoft.com/office/drawing/2014/main" id="{C219C1E8-10DF-451E-9485-4BC637887724}"/>
+              </a:ext>
+            </a:extLst>
+          </p:cNvPr>
+          <p:cNvSpPr>
+            <a:spLocks xmlns:a="http://schemas.openxmlformats.org/drawingml/2006/main" noGrp="1"/>
+          </p:cNvSpPr>
+          <p:nvPr/>
+        </p:nvSpPr>
+        <p:spPr>
+          <a:xfrm xmlns:a="http://schemas.openxmlformats.org/drawingml/2006/main">
+            <a:off x="514350" y="1619250"/>
+            <a:ext cx="11163300" cy="9525"/>
+          </a:xfrm>
+          <a:prstGeom xmlns:a="http://schemas.openxmlformats.org/drawingml/2006/main" prst="rect">
+            <a:avLst/>
+          </a:prstGeom>
+          <a:solidFill xmlns:a="http://schemas.openxmlformats.org/drawingml/2006/main">
+            <a:srgbClr val="B8BCC4"/>
+          </a:solidFill>
+          <a:ln xmlns:a="http://schemas.openxmlformats.org/drawingml/2006/main" w="9525">
+            <a:solidFill>
+              <a:srgbClr val="B8BCC4"/>
+            </a:solidFill>
+            <a:prstDash val="solid"/>
+          </a:ln>
+        </p:spPr>
+      </p:sp>
+      <p:pic>
+        <p:nvPicPr>
+          <p:cNvPr id="17" name=""/>
+          <p:cNvPicPr>
+            <a:picLocks xmlns:a="http://schemas.openxmlformats.org/drawingml/2006/main" noChangeAspect="1"/>
+          </p:cNvPicPr>
+          <p:nvPr/>
+        </p:nvPicPr>
+        <p:blipFill>
+          <a:blip xmlns:r="http://schemas.openxmlformats.org/officeDocument/2006/relationships" xmlns:a="http://schemas.openxmlformats.org/drawingml/2006/main" r:embed="Rb0b38bb20dd444b7"/>
+          <a:stretch xmlns:a="http://schemas.openxmlformats.org/drawingml/2006/main"/>
+        </p:blipFill>
+        <p:spPr>
+          <a:xfrm xmlns:a="http://schemas.openxmlformats.org/drawingml/2006/main">
+            <a:off x="1211507" y="1695450"/>
+            <a:ext cx="5120787" cy="4591050"/>
+          </a:xfrm>
+          <a:prstGeom xmlns:a="http://schemas.openxmlformats.org/drawingml/2006/main" prst="rect">
+            <a:avLst/>
+          </a:prstGeom>
+        </p:spPr>
+      </p:pic>
+      <p:sp>
+        <p:nvSpPr>
+          <p:cNvPr id="5" name="">
+            <a:extLst xmlns:a="http://schemas.openxmlformats.org/drawingml/2006/main">
+              <a:ext uri="{FF2B5EF4-FFF2-40B4-BE49-F238E27FC236}">
+                <a16:creationId xmlns:a16="http://schemas.microsoft.com/office/drawing/2014/main" id="{367395B2-52DF-4C5B-812A-5DDCE50D6D52}"/>
+              </a:ext>
+            </a:extLst>
+          </p:cNvPr>
+          <p:cNvSpPr>
+            <a:spLocks xmlns:a="http://schemas.openxmlformats.org/drawingml/2006/main" noGrp="1"/>
+          </p:cNvSpPr>
+          <p:nvPr/>
+        </p:nvSpPr>
+        <p:spPr>
+          <a:xfrm xmlns:a="http://schemas.openxmlformats.org/drawingml/2006/main">
+            <a:off x="7639050" y="2076450"/>
+            <a:ext cx="3238500" cy="2781300"/>
+          </a:xfrm>
+          <a:prstGeom xmlns:a="http://schemas.openxmlformats.org/drawingml/2006/main" prst="rect">
+            <a:avLst/>
+          </a:prstGeom>
+          <a:solidFill xmlns:a="http://schemas.openxmlformats.org/drawingml/2006/main">
+            <a:srgbClr val="EDEDED"/>
+          </a:solidFill>
+          <a:ln xmlns:a="http://schemas.openxmlformats.org/drawingml/2006/main" w="9525">
+            <a:solidFill>
+              <a:srgbClr val="B8BCC4"/>
+            </a:solidFill>
+            <a:prstDash val="solid"/>
+          </a:ln>
+        </p:spPr>
+      </p:sp>
+      <p:sp>
+        <p:nvSpPr>
+          <p:cNvPr id="6" name="">
+            <a:extLst xmlns:a="http://schemas.openxmlformats.org/drawingml/2006/main">
+              <a:ext uri="{FF2B5EF4-FFF2-40B4-BE49-F238E27FC236}">
+                <a16:creationId xmlns:a16="http://schemas.microsoft.com/office/drawing/2014/main" id="{A70BD014-5F10-4A40-B33A-3E5FFE04557A}"/>
+              </a:ext>
+            </a:extLst>
+          </p:cNvPr>
+          <p:cNvSpPr>
+            <a:spLocks xmlns:a="http://schemas.openxmlformats.org/drawingml/2006/main" noGrp="1"/>
+          </p:cNvSpPr>
+          <p:nvPr/>
+        </p:nvSpPr>
+        <p:spPr>
+          <a:xfrm xmlns:a="http://schemas.openxmlformats.org/drawingml/2006/main">
+            <a:off x="7924800" y="2362200"/>
+            <a:ext cx="2343150" cy="304800"/>
+          </a:xfrm>
+          <a:prstGeom xmlns:a="http://schemas.openxmlformats.org/drawingml/2006/main" prst="rect">
+            <a:avLst/>
+          </a:prstGeom>
+          <a:noFill xmlns:a="http://schemas.openxmlformats.org/drawingml/2006/main"/>
+          <a:ln xmlns:a="http://schemas.openxmlformats.org/drawingml/2006/main" w="0">
+            <a:noFill/>
+            <a:prstDash val="solid"/>
+          </a:ln>
+        </p:spPr>
+        <p:txBody>
+          <a:bodyPr xmlns:a="http://schemas.openxmlformats.org/drawingml/2006/main"/>
+          <a:lstStyle xmlns:a="http://schemas.openxmlformats.org/drawingml/2006/main"/>
+          <a:p xmlns:a="http://schemas.openxmlformats.org/drawingml/2006/main">
+            <a:pPr>
+              <a:defRPr sz="1950" b="1">
+                <a:solidFill>
+                  <a:srgbClr val="000000"/>
+                </a:solidFill>
+              </a:defRPr>
+            </a:pPr>
+            <a:r>
+              <a:rPr sz="1950" b="1">
+                <a:solidFill>
+                  <a:srgbClr val="000000"/>
+                </a:solidFill>
+              </a:rPr>
+              <a:t>Interpretation</a:t>
+            </a:r>
+          </a:p>
+        </p:txBody>
+      </p:sp>
+      <p:sp>
+        <p:nvSpPr>
+          <p:cNvPr id="7" name="">
+            <a:extLst xmlns:a="http://schemas.openxmlformats.org/drawingml/2006/main">
+              <a:ext uri="{FF2B5EF4-FFF2-40B4-BE49-F238E27FC236}">
+                <a16:creationId xmlns:a16="http://schemas.microsoft.com/office/drawing/2014/main" id="{36247295-8B41-4BB4-864C-D84BB91D23B5}"/>
+              </a:ext>
+            </a:extLst>
+          </p:cNvPr>
+          <p:cNvSpPr>
+            <a:spLocks xmlns:a="http://schemas.openxmlformats.org/drawingml/2006/main" noGrp="1"/>
+          </p:cNvSpPr>
+          <p:nvPr/>
+        </p:nvSpPr>
+        <p:spPr>
+          <a:xfrm xmlns:a="http://schemas.openxmlformats.org/drawingml/2006/main">
+            <a:off x="7943850" y="3048000"/>
+            <a:ext cx="76200" cy="76200"/>
+          </a:xfrm>
+          <a:prstGeom xmlns:a="http://schemas.openxmlformats.org/drawingml/2006/main" prst="rect">
+            <a:avLst/>
+          </a:prstGeom>
+          <a:solidFill xmlns:a="http://schemas.openxmlformats.org/drawingml/2006/main">
+            <a:srgbClr val="FF6B35"/>
+          </a:solidFill>
+          <a:ln xmlns:a="http://schemas.openxmlformats.org/drawingml/2006/main" w="9525">
+            <a:solidFill>
+              <a:srgbClr val="FF6B35"/>
+            </a:solidFill>
+            <a:prstDash val="solid"/>
+          </a:ln>
+        </p:spPr>
+      </p:sp>
+      <p:sp>
+        <p:nvSpPr>
+          <p:cNvPr id="8" name="">
+            <a:extLst xmlns:a="http://schemas.openxmlformats.org/drawingml/2006/main">
+              <a:ext uri="{FF2B5EF4-FFF2-40B4-BE49-F238E27FC236}">
+                <a16:creationId xmlns:a16="http://schemas.microsoft.com/office/drawing/2014/main" id="{D9CE3B88-F3D5-4284-ADC5-4C8A29F2F26C}"/>
+              </a:ext>
+            </a:extLst>
+          </p:cNvPr>
+          <p:cNvSpPr>
+            <a:spLocks xmlns:a="http://schemas.openxmlformats.org/drawingml/2006/main" noGrp="1"/>
+          </p:cNvSpPr>
+          <p:nvPr/>
+        </p:nvSpPr>
+        <p:spPr>
+          <a:xfrm xmlns:a="http://schemas.openxmlformats.org/drawingml/2006/main">
+            <a:off x="8153400" y="2952750"/>
+            <a:ext cx="2133600" cy="552450"/>
+          </a:xfrm>
+          <a:prstGeom xmlns:a="http://schemas.openxmlformats.org/drawingml/2006/main" prst="rect">
+            <a:avLst/>
+          </a:prstGeom>
+          <a:noFill xmlns:a="http://schemas.openxmlformats.org/drawingml/2006/main"/>
+          <a:ln xmlns:a="http://schemas.openxmlformats.org/drawingml/2006/main" w="0">
+            <a:noFill/>
+            <a:prstDash val="solid"/>
+          </a:ln>
+        </p:spPr>
+        <p:txBody>
+          <a:bodyPr xmlns:a="http://schemas.openxmlformats.org/drawingml/2006/main"/>
+          <a:lstStyle xmlns:a="http://schemas.openxmlformats.org/drawingml/2006/main"/>
+          <a:p xmlns:a="http://schemas.openxmlformats.org/drawingml/2006/main">
+            <a:pPr>
+              <a:defRPr sz="1200" b="0">
+                <a:solidFill>
+                  <a:srgbClr val="000000"/>
+                </a:solidFill>
+              </a:defRPr>
+            </a:pPr>
+            <a:r>
+              <a:rPr sz="1200" b="0">
+                <a:solidFill>
+                  <a:srgbClr val="000000"/>
+                </a:solidFill>
+              </a:rPr>
+              <a:t>Reversion-breakout context lifted mean return versus the workhorse control.</a:t>
+            </a:r>
+          </a:p>
+        </p:txBody>
+      </p:sp>
+      <p:sp>
+        <p:nvSpPr>
+          <p:cNvPr id="9" name="">
+            <a:extLst xmlns:a="http://schemas.openxmlformats.org/drawingml/2006/main">
+              <a:ext uri="{FF2B5EF4-FFF2-40B4-BE49-F238E27FC236}">
+                <a16:creationId xmlns:a16="http://schemas.microsoft.com/office/drawing/2014/main" id="{CEA00A64-19AD-4C57-8569-221C7AB18829}"/>
+              </a:ext>
+            </a:extLst>
+          </p:cNvPr>
+          <p:cNvSpPr>
+            <a:spLocks xmlns:a="http://schemas.openxmlformats.org/drawingml/2006/main" noGrp="1"/>
+          </p:cNvSpPr>
+          <p:nvPr/>
+        </p:nvSpPr>
+        <p:spPr>
+          <a:xfrm xmlns:a="http://schemas.openxmlformats.org/drawingml/2006/main">
+            <a:off x="7943850" y="3543300"/>
+            <a:ext cx="76200" cy="76200"/>
+          </a:xfrm>
+          <a:prstGeom xmlns:a="http://schemas.openxmlformats.org/drawingml/2006/main" prst="rect">
+            <a:avLst/>
+          </a:prstGeom>
+          <a:solidFill xmlns:a="http://schemas.openxmlformats.org/drawingml/2006/main">
+            <a:srgbClr val="FF6B35"/>
+          </a:solidFill>
+          <a:ln xmlns:a="http://schemas.openxmlformats.org/drawingml/2006/main" w="9525">
+            <a:solidFill>
+              <a:srgbClr val="FF6B35"/>
+            </a:solidFill>
+            <a:prstDash val="solid"/>
+          </a:ln>
+        </p:spPr>
+      </p:sp>
+      <p:sp>
+        <p:nvSpPr>
+          <p:cNvPr id="10" name="">
+            <a:extLst xmlns:a="http://schemas.openxmlformats.org/drawingml/2006/main">
+              <a:ext uri="{FF2B5EF4-FFF2-40B4-BE49-F238E27FC236}">
+                <a16:creationId xmlns:a16="http://schemas.microsoft.com/office/drawing/2014/main" id="{284232C8-1697-4F61-82E1-6FFC186EBF9D}"/>
+              </a:ext>
+            </a:extLst>
+          </p:cNvPr>
+          <p:cNvSpPr>
+            <a:spLocks xmlns:a="http://schemas.openxmlformats.org/drawingml/2006/main" noGrp="1"/>
+          </p:cNvSpPr>
+          <p:nvPr/>
+        </p:nvSpPr>
+        <p:spPr>
+          <a:xfrm xmlns:a="http://schemas.openxmlformats.org/drawingml/2006/main">
+            <a:off x="8153400" y="3448050"/>
+            <a:ext cx="2133600" cy="552450"/>
+          </a:xfrm>
+          <a:prstGeom xmlns:a="http://schemas.openxmlformats.org/drawingml/2006/main" prst="rect">
+            <a:avLst/>
+          </a:prstGeom>
+          <a:noFill xmlns:a="http://schemas.openxmlformats.org/drawingml/2006/main"/>
+          <a:ln xmlns:a="http://schemas.openxmlformats.org/drawingml/2006/main" w="0">
+            <a:noFill/>
+            <a:prstDash val="solid"/>
+          </a:ln>
+        </p:spPr>
+        <p:txBody>
+          <a:bodyPr xmlns:a="http://schemas.openxmlformats.org/drawingml/2006/main"/>
+          <a:lstStyle xmlns:a="http://schemas.openxmlformats.org/drawingml/2006/main"/>
+          <a:p xmlns:a="http://schemas.openxmlformats.org/drawingml/2006/main">
+            <a:pPr>
+              <a:defRPr sz="1200" b="0">
+                <a:solidFill>
+                  <a:srgbClr val="000000"/>
+                </a:solidFill>
+              </a:defRPr>
+            </a:pPr>
+            <a:r>
+              <a:rPr sz="1200" b="0">
+                <a:solidFill>
+                  <a:srgbClr val="000000"/>
+                </a:solidFill>
+              </a:rPr>
+              <a:t>It came close in 2024 and improved 2019/2020 participation, but still lagged the basket in 3 of 4 years.</a:t>
+            </a:r>
+          </a:p>
+        </p:txBody>
+      </p:sp>
+      <p:sp>
+        <p:nvSpPr>
+          <p:cNvPr id="11" name="">
+            <a:extLst xmlns:a="http://schemas.openxmlformats.org/drawingml/2006/main">
+              <a:ext uri="{FF2B5EF4-FFF2-40B4-BE49-F238E27FC236}">
+                <a16:creationId xmlns:a16="http://schemas.microsoft.com/office/drawing/2014/main" id="{E8A1C798-AB47-45B4-BA93-539BBC7A0E9E}"/>
+              </a:ext>
+            </a:extLst>
+          </p:cNvPr>
+          <p:cNvSpPr>
+            <a:spLocks xmlns:a="http://schemas.openxmlformats.org/drawingml/2006/main" noGrp="1"/>
+          </p:cNvSpPr>
+          <p:nvPr/>
+        </p:nvSpPr>
+        <p:spPr>
+          <a:xfrm xmlns:a="http://schemas.openxmlformats.org/drawingml/2006/main">
+            <a:off x="7943850" y="4038600"/>
+            <a:ext cx="76200" cy="76200"/>
+          </a:xfrm>
+          <a:prstGeom xmlns:a="http://schemas.openxmlformats.org/drawingml/2006/main" prst="rect">
+            <a:avLst/>
+          </a:prstGeom>
+          <a:solidFill xmlns:a="http://schemas.openxmlformats.org/drawingml/2006/main">
+            <a:srgbClr val="FF6B35"/>
+          </a:solidFill>
+          <a:ln xmlns:a="http://schemas.openxmlformats.org/drawingml/2006/main" w="9525">
+            <a:solidFill>
+              <a:srgbClr val="FF6B35"/>
+            </a:solidFill>
+            <a:prstDash val="solid"/>
+          </a:ln>
+        </p:spPr>
+      </p:sp>
+      <p:sp>
+        <p:nvSpPr>
+          <p:cNvPr id="12" name="">
+            <a:extLst xmlns:a="http://schemas.openxmlformats.org/drawingml/2006/main">
+              <a:ext uri="{FF2B5EF4-FFF2-40B4-BE49-F238E27FC236}">
+                <a16:creationId xmlns:a16="http://schemas.microsoft.com/office/drawing/2014/main" id="{950B1680-0AAB-4423-A185-3179E06CBBB6}"/>
+              </a:ext>
+            </a:extLst>
+          </p:cNvPr>
+          <p:cNvSpPr>
+            <a:spLocks xmlns:a="http://schemas.openxmlformats.org/drawingml/2006/main" noGrp="1"/>
+          </p:cNvSpPr>
+          <p:nvPr/>
+        </p:nvSpPr>
+        <p:spPr>
+          <a:xfrm xmlns:a="http://schemas.openxmlformats.org/drawingml/2006/main">
+            <a:off x="8153400" y="3943350"/>
+            <a:ext cx="2133600" cy="552450"/>
+          </a:xfrm>
+          <a:prstGeom xmlns:a="http://schemas.openxmlformats.org/drawingml/2006/main" prst="rect">
+            <a:avLst/>
+          </a:prstGeom>
+          <a:noFill xmlns:a="http://schemas.openxmlformats.org/drawingml/2006/main"/>
+          <a:ln xmlns:a="http://schemas.openxmlformats.org/drawingml/2006/main" w="0">
+            <a:noFill/>
+            <a:prstDash val="solid"/>
+          </a:ln>
+        </p:spPr>
+        <p:txBody>
+          <a:bodyPr xmlns:a="http://schemas.openxmlformats.org/drawingml/2006/main"/>
+          <a:lstStyle xmlns:a="http://schemas.openxmlformats.org/drawingml/2006/main"/>
+          <a:p xmlns:a="http://schemas.openxmlformats.org/drawingml/2006/main">
+            <a:pPr>
+              <a:defRPr sz="1200" b="0">
+                <a:solidFill>
+                  <a:srgbClr val="000000"/>
+                </a:solidFill>
+              </a:defRPr>
+            </a:pPr>
+            <a:r>
+              <a:rPr sz="1200" b="0">
+                <a:solidFill>
+                  <a:srgbClr val="000000"/>
+                </a:solidFill>
+              </a:rPr>
+              <a:t>This argues for better state timing, not a feature-set promotion yet.</a:t>
+            </a:r>
+          </a:p>
+        </p:txBody>
+      </p:sp>
+      <p:sp>
+        <p:nvSpPr>
+          <p:cNvPr id="13" name="">
+            <a:extLst xmlns:a="http://schemas.openxmlformats.org/drawingml/2006/main">
+              <a:ext uri="{FF2B5EF4-FFF2-40B4-BE49-F238E27FC236}">
+                <a16:creationId xmlns:a16="http://schemas.microsoft.com/office/drawing/2014/main" id="{6B2CC0C4-DF87-468E-923D-9F9ABC24BB03}"/>
+              </a:ext>
+            </a:extLst>
+          </p:cNvPr>
+          <p:cNvSpPr>
+            <a:spLocks xmlns:a="http://schemas.openxmlformats.org/drawingml/2006/main" noGrp="1"/>
+          </p:cNvSpPr>
+          <p:nvPr/>
+        </p:nvSpPr>
+        <p:spPr>
+          <a:xfrm xmlns:a="http://schemas.openxmlformats.org/drawingml/2006/main">
+            <a:off x="514350" y="6477000"/>
+            <a:ext cx="11163300" cy="209550"/>
+          </a:xfrm>
+          <a:prstGeom xmlns:a="http://schemas.openxmlformats.org/drawingml/2006/main" prst="rect">
+            <a:avLst/>
+          </a:prstGeom>
+          <a:noFill xmlns:a="http://schemas.openxmlformats.org/drawingml/2006/main"/>
+          <a:ln xmlns:a="http://schemas.openxmlformats.org/drawingml/2006/main" w="0">
+            <a:noFill/>
+            <a:prstDash val="solid"/>
+          </a:ln>
+        </p:spPr>
+        <p:txBody>
+          <a:bodyPr xmlns:a="http://schemas.openxmlformats.org/drawingml/2006/main"/>
+          <a:lstStyle xmlns:a="http://schemas.openxmlformats.org/drawingml/2006/main"/>
+          <a:p xmlns:a="http://schemas.openxmlformats.org/drawingml/2006/main">
+            <a:pPr>
+              <a:defRPr sz="900" b="0">
+                <a:solidFill>
+                  <a:srgbClr val="555555"/>
+                </a:solidFill>
+              </a:defRPr>
+            </a:pPr>
+            <a:r>
+              <a:rPr sz="900" b="0">
+                <a:solidFill>
+                  <a:srgbClr val="555555"/>
+                </a:solidFill>
+              </a:rPr>
+              <a:t>Research/inspection only. Not allocation evidence or live-advice behavior.</a:t>
+            </a:r>
+          </a:p>
+        </p:txBody>
+      </p:sp>
+    </p:spTree>
+    <p:extLst>
+      <p:ext uri="{BB962C8B-B14F-4D97-AF65-F5344CB8AC3E}">
+        <p14:creationId xmlns:p14="http://schemas.microsoft.com/office/powerpoint/2010/main" val="1668505883"/>
+      </p:ext>
+    </p:extLst>
+  </p:cSld>
+</p:sld>
+</file>
+
+<file path=ppt/slides/slide16.xml><?xml version="1.0" encoding="utf-8"?>
+<p:sld xmlns:p="http://schemas.openxmlformats.org/presentationml/2006/main">
+  <p:cSld>
+    <p:bg>
+      <p:bgPr>
+        <a:solidFill xmlns:a="http://schemas.openxmlformats.org/drawingml/2006/main">
+          <a:srgbClr val="FFFFFF"/>
+        </a:solidFill>
+      </p:bgPr>
+    </p:bg>
+    <p:spTree>
+      <p:nvGrpSpPr>
+        <p:cNvPr id="1" name=""/>
+        <p:cNvGrpSpPr/>
+        <p:nvPr/>
+      </p:nvGrpSpPr>
+      <p:grpSpPr>
+        <a:xfrm xmlns:a="http://schemas.openxmlformats.org/drawingml/2006/main"/>
+      </p:grpSpPr>
+      <p:sp>
+        <p:nvSpPr>
+          <p:cNvPr id="1" name="">
+            <a:extLst xmlns:a="http://schemas.openxmlformats.org/drawingml/2006/main">
+              <a:ext uri="{FF2B5EF4-FFF2-40B4-BE49-F238E27FC236}">
+                <a16:creationId xmlns:a16="http://schemas.microsoft.com/office/drawing/2014/main" id="{D8547941-FBAA-4C3F-8B2E-2164CC263E7A}"/>
+              </a:ext>
+            </a:extLst>
+          </p:cNvPr>
+          <p:cNvSpPr>
+            <a:spLocks xmlns:a="http://schemas.openxmlformats.org/drawingml/2006/main" noGrp="1"/>
+          </p:cNvSpPr>
+          <p:nvPr/>
+        </p:nvSpPr>
+        <p:spPr>
+          <a:xfrm xmlns:a="http://schemas.openxmlformats.org/drawingml/2006/main">
+            <a:off x="514350" y="266700"/>
+            <a:ext cx="5905500" cy="228600"/>
+          </a:xfrm>
+          <a:prstGeom xmlns:a="http://schemas.openxmlformats.org/drawingml/2006/main" prst="rect">
+            <a:avLst/>
+          </a:prstGeom>
+          <a:noFill xmlns:a="http://schemas.openxmlformats.org/drawingml/2006/main"/>
+          <a:ln xmlns:a="http://schemas.openxmlformats.org/drawingml/2006/main" w="0">
+            <a:noFill/>
+            <a:prstDash val="solid"/>
+          </a:ln>
+        </p:spPr>
+        <p:txBody>
+          <a:bodyPr xmlns:a="http://schemas.openxmlformats.org/drawingml/2006/main"/>
+          <a:lstStyle xmlns:a="http://schemas.openxmlformats.org/drawingml/2006/main"/>
+          <a:p xmlns:a="http://schemas.openxmlformats.org/drawingml/2006/main">
+            <a:pPr>
+              <a:defRPr sz="1050" b="1">
+                <a:solidFill>
+                  <a:srgbClr val="555555"/>
+                </a:solidFill>
+              </a:defRPr>
+            </a:pPr>
+            <a:r>
+              <a:rPr sz="1050" b="1">
+                <a:solidFill>
+                  <a:srgbClr val="555555"/>
+                </a:solidFill>
+              </a:rPr>
+              <a:t>GEN5.3 MOMENTUM CONTEXT-SIZE SCREEN</a:t>
+            </a:r>
+          </a:p>
+        </p:txBody>
+      </p:sp>
+      <p:sp>
+        <p:nvSpPr>
+          <p:cNvPr id="2" name="">
+            <a:extLst xmlns:a="http://schemas.openxmlformats.org/drawingml/2006/main">
+              <a:ext uri="{FF2B5EF4-FFF2-40B4-BE49-F238E27FC236}">
+                <a16:creationId xmlns:a16="http://schemas.microsoft.com/office/drawing/2014/main" id="{C412F4C6-7800-4A12-B6DC-6DAF724E7CBE}"/>
+              </a:ext>
+            </a:extLst>
+          </p:cNvPr>
+          <p:cNvSpPr>
+            <a:spLocks xmlns:a="http://schemas.openxmlformats.org/drawingml/2006/main" noGrp="1"/>
+          </p:cNvSpPr>
+          <p:nvPr/>
+        </p:nvSpPr>
+        <p:spPr>
+          <a:xfrm xmlns:a="http://schemas.openxmlformats.org/drawingml/2006/main">
+            <a:off x="514350" y="628650"/>
+            <a:ext cx="10287000" cy="990600"/>
+          </a:xfrm>
+          <a:prstGeom xmlns:a="http://schemas.openxmlformats.org/drawingml/2006/main" prst="rect">
+            <a:avLst/>
+          </a:prstGeom>
+          <a:noFill xmlns:a="http://schemas.openxmlformats.org/drawingml/2006/main"/>
+          <a:ln xmlns:a="http://schemas.openxmlformats.org/drawingml/2006/main" w="0">
+            <a:noFill/>
+            <a:prstDash val="solid"/>
+          </a:ln>
+        </p:spPr>
+        <p:txBody>
+          <a:bodyPr xmlns:a="http://schemas.openxmlformats.org/drawingml/2006/main"/>
+          <a:lstStyle xmlns:a="http://schemas.openxmlformats.org/drawingml/2006/main"/>
+          <a:p xmlns:a="http://schemas.openxmlformats.org/drawingml/2006/main">
+            <a:pPr>
+              <a:defRPr sz="2850" b="1">
+                <a:solidFill>
+                  <a:srgbClr val="000000"/>
+                </a:solidFill>
+              </a:defRPr>
+            </a:pPr>
+            <a:r>
+              <a:rPr sz="2850" b="1">
+                <a:solidFill>
+                  <a:srgbClr val="000000"/>
+                </a:solidFill>
+              </a:rPr>
+              <a:t>Broad strategy-pool reopening is now a deliberate compute run</a:t>
+            </a:r>
+          </a:p>
+        </p:txBody>
+      </p:sp>
+      <p:sp>
+        <p:nvSpPr>
+          <p:cNvPr id="3" name="">
+            <a:extLst xmlns:a="http://schemas.openxmlformats.org/drawingml/2006/main">
+              <a:ext uri="{FF2B5EF4-FFF2-40B4-BE49-F238E27FC236}">
+                <a16:creationId xmlns:a16="http://schemas.microsoft.com/office/drawing/2014/main" id="{AC1ECFF2-CDDA-452D-8683-AE7B19735FD1}"/>
+              </a:ext>
+            </a:extLst>
+          </p:cNvPr>
+          <p:cNvSpPr>
+            <a:spLocks xmlns:a="http://schemas.openxmlformats.org/drawingml/2006/main" noGrp="1"/>
+          </p:cNvSpPr>
+          <p:nvPr/>
+        </p:nvSpPr>
+        <p:spPr>
+          <a:xfrm xmlns:a="http://schemas.openxmlformats.org/drawingml/2006/main">
+            <a:off x="514350" y="1619250"/>
+            <a:ext cx="11163300" cy="9525"/>
+          </a:xfrm>
+          <a:prstGeom xmlns:a="http://schemas.openxmlformats.org/drawingml/2006/main" prst="rect">
+            <a:avLst/>
+          </a:prstGeom>
+          <a:solidFill xmlns:a="http://schemas.openxmlformats.org/drawingml/2006/main">
+            <a:srgbClr val="B8BCC4"/>
+          </a:solidFill>
+          <a:ln xmlns:a="http://schemas.openxmlformats.org/drawingml/2006/main" w="9525">
+            <a:solidFill>
+              <a:srgbClr val="B8BCC4"/>
+            </a:solidFill>
+            <a:prstDash val="solid"/>
+          </a:ln>
+        </p:spPr>
+      </p:sp>
+      <p:sp>
+        <p:nvSpPr>
+          <p:cNvPr id="4" name="">
+            <a:extLst xmlns:a="http://schemas.openxmlformats.org/drawingml/2006/main">
+              <a:ext uri="{FF2B5EF4-FFF2-40B4-BE49-F238E27FC236}">
+                <a16:creationId xmlns:a16="http://schemas.microsoft.com/office/drawing/2014/main" id="{8D2A8DC5-FBF4-4DC9-BAAE-AB2500BB096C}"/>
+              </a:ext>
+            </a:extLst>
+          </p:cNvPr>
+          <p:cNvSpPr>
+            <a:spLocks xmlns:a="http://schemas.openxmlformats.org/drawingml/2006/main" noGrp="1"/>
+          </p:cNvSpPr>
+          <p:nvPr/>
+        </p:nvSpPr>
+        <p:spPr>
+          <a:xfrm xmlns:a="http://schemas.openxmlformats.org/drawingml/2006/main">
+            <a:off x="819150" y="2076450"/>
+            <a:ext cx="4438650" cy="2476500"/>
+          </a:xfrm>
+          <a:prstGeom xmlns:a="http://schemas.openxmlformats.org/drawingml/2006/main" prst="rect">
+            <a:avLst/>
+          </a:prstGeom>
+          <a:solidFill xmlns:a="http://schemas.openxmlformats.org/drawingml/2006/main">
+            <a:srgbClr val="EDEDED"/>
+          </a:solidFill>
+          <a:ln xmlns:a="http://schemas.openxmlformats.org/drawingml/2006/main" w="9525">
+            <a:solidFill>
+              <a:srgbClr val="B8BCC4"/>
+            </a:solidFill>
+            <a:prstDash val="solid"/>
+          </a:ln>
+        </p:spPr>
+      </p:sp>
+      <p:sp>
+        <p:nvSpPr>
+          <p:cNvPr id="5" name="">
+            <a:extLst xmlns:a="http://schemas.openxmlformats.org/drawingml/2006/main">
+              <a:ext uri="{FF2B5EF4-FFF2-40B4-BE49-F238E27FC236}">
+                <a16:creationId xmlns:a16="http://schemas.microsoft.com/office/drawing/2014/main" id="{B249CE4E-F19D-4D1E-BBFC-33F81184AEE9}"/>
+              </a:ext>
+            </a:extLst>
+          </p:cNvPr>
+          <p:cNvSpPr>
+            <a:spLocks xmlns:a="http://schemas.openxmlformats.org/drawingml/2006/main" noGrp="1"/>
+          </p:cNvSpPr>
+          <p:nvPr/>
+        </p:nvSpPr>
+        <p:spPr>
+          <a:xfrm xmlns:a="http://schemas.openxmlformats.org/drawingml/2006/main">
+            <a:off x="6477000" y="2076450"/>
+            <a:ext cx="4438650" cy="2476500"/>
+          </a:xfrm>
+          <a:prstGeom xmlns:a="http://schemas.openxmlformats.org/drawingml/2006/main" prst="rect">
+            <a:avLst/>
+          </a:prstGeom>
+          <a:solidFill xmlns:a="http://schemas.openxmlformats.org/drawingml/2006/main">
+            <a:srgbClr val="EDEDED"/>
+          </a:solidFill>
+          <a:ln xmlns:a="http://schemas.openxmlformats.org/drawingml/2006/main" w="9525">
+            <a:solidFill>
+              <a:srgbClr val="B8BCC4"/>
+            </a:solidFill>
+            <a:prstDash val="solid"/>
+          </a:ln>
+        </p:spPr>
+      </p:sp>
+      <p:sp>
+        <p:nvSpPr>
+          <p:cNvPr id="6" name="">
+            <a:extLst xmlns:a="http://schemas.openxmlformats.org/drawingml/2006/main">
+              <a:ext uri="{FF2B5EF4-FFF2-40B4-BE49-F238E27FC236}">
+                <a16:creationId xmlns:a16="http://schemas.microsoft.com/office/drawing/2014/main" id="{5C05C659-ADE7-4EAD-87DD-AEF27A7A1CE4}"/>
+              </a:ext>
+            </a:extLst>
+          </p:cNvPr>
+          <p:cNvSpPr>
+            <a:spLocks xmlns:a="http://schemas.openxmlformats.org/drawingml/2006/main" noGrp="1"/>
+          </p:cNvSpPr>
+          <p:nvPr/>
+        </p:nvSpPr>
+        <p:spPr>
+          <a:xfrm xmlns:a="http://schemas.openxmlformats.org/drawingml/2006/main">
+            <a:off x="1143000" y="2400300"/>
+            <a:ext cx="3048000" cy="323850"/>
+          </a:xfrm>
+          <a:prstGeom xmlns:a="http://schemas.openxmlformats.org/drawingml/2006/main" prst="rect">
+            <a:avLst/>
+          </a:prstGeom>
+          <a:noFill xmlns:a="http://schemas.openxmlformats.org/drawingml/2006/main"/>
+          <a:ln xmlns:a="http://schemas.openxmlformats.org/drawingml/2006/main" w="0">
+            <a:noFill/>
+            <a:prstDash val="solid"/>
+          </a:ln>
+        </p:spPr>
+        <p:txBody>
+          <a:bodyPr xmlns:a="http://schemas.openxmlformats.org/drawingml/2006/main"/>
+          <a:lstStyle xmlns:a="http://schemas.openxmlformats.org/drawingml/2006/main"/>
+          <a:p xmlns:a="http://schemas.openxmlformats.org/drawingml/2006/main">
+            <a:pPr>
+              <a:defRPr sz="2100" b="1">
+                <a:solidFill>
+                  <a:srgbClr val="FF6B35"/>
+                </a:solidFill>
+              </a:defRPr>
+            </a:pPr>
+            <a:r>
+              <a:rPr sz="2100" b="1">
+                <a:solidFill>
+                  <a:srgbClr val="FF6B35"/>
+                </a:solidFill>
+              </a:rPr>
+              <a:t>What we learned</a:t>
+            </a:r>
+          </a:p>
+        </p:txBody>
+      </p:sp>
+      <p:sp>
+        <p:nvSpPr>
+          <p:cNvPr id="7" name="">
+            <a:extLst xmlns:a="http://schemas.openxmlformats.org/drawingml/2006/main">
+              <a:ext uri="{FF2B5EF4-FFF2-40B4-BE49-F238E27FC236}">
+                <a16:creationId xmlns:a16="http://schemas.microsoft.com/office/drawing/2014/main" id="{CBACE349-6232-48B7-B3D9-E6C9A8D961AB}"/>
+              </a:ext>
+            </a:extLst>
+          </p:cNvPr>
+          <p:cNvSpPr>
+            <a:spLocks xmlns:a="http://schemas.openxmlformats.org/drawingml/2006/main" noGrp="1"/>
+          </p:cNvSpPr>
+          <p:nvPr/>
+        </p:nvSpPr>
+        <p:spPr>
+          <a:xfrm xmlns:a="http://schemas.openxmlformats.org/drawingml/2006/main">
+            <a:off x="1162050" y="3086100"/>
+            <a:ext cx="76200" cy="76200"/>
+          </a:xfrm>
+          <a:prstGeom xmlns:a="http://schemas.openxmlformats.org/drawingml/2006/main" prst="rect">
+            <a:avLst/>
+          </a:prstGeom>
+          <a:solidFill xmlns:a="http://schemas.openxmlformats.org/drawingml/2006/main">
+            <a:srgbClr val="FF6B35"/>
+          </a:solidFill>
+          <a:ln xmlns:a="http://schemas.openxmlformats.org/drawingml/2006/main" w="9525">
+            <a:solidFill>
+              <a:srgbClr val="FF6B35"/>
+            </a:solidFill>
+            <a:prstDash val="solid"/>
+          </a:ln>
+        </p:spPr>
+      </p:sp>
+      <p:sp>
+        <p:nvSpPr>
+          <p:cNvPr id="8" name="">
+            <a:extLst xmlns:a="http://schemas.openxmlformats.org/drawingml/2006/main">
+              <a:ext uri="{FF2B5EF4-FFF2-40B4-BE49-F238E27FC236}">
+                <a16:creationId xmlns:a16="http://schemas.microsoft.com/office/drawing/2014/main" id="{910CFCBC-06FC-48BD-81EB-E20FDDD436D1}"/>
+              </a:ext>
+            </a:extLst>
+          </p:cNvPr>
+          <p:cNvSpPr>
+            <a:spLocks xmlns:a="http://schemas.openxmlformats.org/drawingml/2006/main" noGrp="1"/>
+          </p:cNvSpPr>
+          <p:nvPr/>
+        </p:nvSpPr>
+        <p:spPr>
+          <a:xfrm xmlns:a="http://schemas.openxmlformats.org/drawingml/2006/main">
+            <a:off x="1371600" y="2990850"/>
+            <a:ext cx="3124200" cy="495300"/>
+          </a:xfrm>
+          <a:prstGeom xmlns:a="http://schemas.openxmlformats.org/drawingml/2006/main" prst="rect">
+            <a:avLst/>
+          </a:prstGeom>
+          <a:noFill xmlns:a="http://schemas.openxmlformats.org/drawingml/2006/main"/>
+          <a:ln xmlns:a="http://schemas.openxmlformats.org/drawingml/2006/main" w="0">
+            <a:noFill/>
+            <a:prstDash val="solid"/>
+          </a:ln>
+        </p:spPr>
+        <p:txBody>
+          <a:bodyPr xmlns:a="http://schemas.openxmlformats.org/drawingml/2006/main"/>
+          <a:lstStyle xmlns:a="http://schemas.openxmlformats.org/drawingml/2006/main"/>
+          <a:p xmlns:a="http://schemas.openxmlformats.org/drawingml/2006/main">
+            <a:pPr>
+              <a:defRPr sz="1275" b="0">
+                <a:solidFill>
+                  <a:srgbClr val="000000"/>
+                </a:solidFill>
+              </a:defRPr>
+            </a:pPr>
+            <a:r>
+              <a:rPr sz="1275" b="0">
+                <a:solidFill>
+                  <a:srgbClr val="000000"/>
+                </a:solidFill>
+              </a:rPr>
+              <a:t>EMA-only feature diagnostics are cheap enough for interactive iteration.</a:t>
+            </a:r>
+          </a:p>
+        </p:txBody>
+      </p:sp>
+      <p:sp>
+        <p:nvSpPr>
+          <p:cNvPr id="9" name="">
+            <a:extLst xmlns:a="http://schemas.openxmlformats.org/drawingml/2006/main">
+              <a:ext uri="{FF2B5EF4-FFF2-40B4-BE49-F238E27FC236}">
+                <a16:creationId xmlns:a16="http://schemas.microsoft.com/office/drawing/2014/main" id="{B3C50FD6-C7D5-40D2-AACD-709D3F5E87DC}"/>
+              </a:ext>
+            </a:extLst>
+          </p:cNvPr>
+          <p:cNvSpPr>
+            <a:spLocks xmlns:a="http://schemas.openxmlformats.org/drawingml/2006/main" noGrp="1"/>
+          </p:cNvSpPr>
+          <p:nvPr/>
+        </p:nvSpPr>
+        <p:spPr>
+          <a:xfrm xmlns:a="http://schemas.openxmlformats.org/drawingml/2006/main">
+            <a:off x="1162050" y="3524250"/>
+            <a:ext cx="76200" cy="76200"/>
+          </a:xfrm>
+          <a:prstGeom xmlns:a="http://schemas.openxmlformats.org/drawingml/2006/main" prst="rect">
+            <a:avLst/>
+          </a:prstGeom>
+          <a:solidFill xmlns:a="http://schemas.openxmlformats.org/drawingml/2006/main">
+            <a:srgbClr val="FF6B35"/>
+          </a:solidFill>
+          <a:ln xmlns:a="http://schemas.openxmlformats.org/drawingml/2006/main" w="9525">
+            <a:solidFill>
+              <a:srgbClr val="FF6B35"/>
+            </a:solidFill>
+            <a:prstDash val="solid"/>
+          </a:ln>
+        </p:spPr>
+      </p:sp>
+      <p:sp>
+        <p:nvSpPr>
+          <p:cNvPr id="10" name="">
+            <a:extLst xmlns:a="http://schemas.openxmlformats.org/drawingml/2006/main">
+              <a:ext uri="{FF2B5EF4-FFF2-40B4-BE49-F238E27FC236}">
+                <a16:creationId xmlns:a16="http://schemas.microsoft.com/office/drawing/2014/main" id="{E7E4A6E5-6E04-43B0-8148-7D89E94840E6}"/>
+              </a:ext>
+            </a:extLst>
+          </p:cNvPr>
+          <p:cNvSpPr>
+            <a:spLocks xmlns:a="http://schemas.openxmlformats.org/drawingml/2006/main" noGrp="1"/>
+          </p:cNvSpPr>
+          <p:nvPr/>
+        </p:nvSpPr>
+        <p:spPr>
+          <a:xfrm xmlns:a="http://schemas.openxmlformats.org/drawingml/2006/main">
+            <a:off x="1371600" y="3429000"/>
+            <a:ext cx="3124200" cy="495300"/>
+          </a:xfrm>
+          <a:prstGeom xmlns:a="http://schemas.openxmlformats.org/drawingml/2006/main" prst="rect">
+            <a:avLst/>
+          </a:prstGeom>
+          <a:noFill xmlns:a="http://schemas.openxmlformats.org/drawingml/2006/main"/>
+          <a:ln xmlns:a="http://schemas.openxmlformats.org/drawingml/2006/main" w="0">
+            <a:noFill/>
+            <a:prstDash val="solid"/>
+          </a:ln>
+        </p:spPr>
+        <p:txBody>
+          <a:bodyPr xmlns:a="http://schemas.openxmlformats.org/drawingml/2006/main"/>
+          <a:lstStyle xmlns:a="http://schemas.openxmlformats.org/drawingml/2006/main"/>
+          <a:p xmlns:a="http://schemas.openxmlformats.org/drawingml/2006/main">
+            <a:pPr>
+              <a:defRPr sz="1275" b="0">
+                <a:solidFill>
+                  <a:srgbClr val="000000"/>
+                </a:solidFill>
+              </a:defRPr>
+            </a:pPr>
+            <a:r>
+              <a:rPr sz="1275" b="0">
+                <a:solidFill>
+                  <a:srgbClr val="000000"/>
+                </a:solidFill>
+              </a:rPr>
+              <a:t>Trend/breakout authority fitting was much slower: roughly twenty minutes for one quarter across five symbols.</a:t>
+            </a:r>
+          </a:p>
+        </p:txBody>
+      </p:sp>
+      <p:sp>
+        <p:nvSpPr>
+          <p:cNvPr id="11" name="">
+            <a:extLst xmlns:a="http://schemas.openxmlformats.org/drawingml/2006/main">
+              <a:ext uri="{FF2B5EF4-FFF2-40B4-BE49-F238E27FC236}">
+                <a16:creationId xmlns:a16="http://schemas.microsoft.com/office/drawing/2014/main" id="{56B1C070-106F-44DA-BBC2-2887B68A594F}"/>
+              </a:ext>
+            </a:extLst>
+          </p:cNvPr>
+          <p:cNvSpPr>
+            <a:spLocks xmlns:a="http://schemas.openxmlformats.org/drawingml/2006/main" noGrp="1"/>
+          </p:cNvSpPr>
+          <p:nvPr/>
+        </p:nvSpPr>
+        <p:spPr>
+          <a:xfrm xmlns:a="http://schemas.openxmlformats.org/drawingml/2006/main">
+            <a:off x="1162050" y="3962400"/>
+            <a:ext cx="76200" cy="76200"/>
+          </a:xfrm>
+          <a:prstGeom xmlns:a="http://schemas.openxmlformats.org/drawingml/2006/main" prst="rect">
+            <a:avLst/>
+          </a:prstGeom>
+          <a:solidFill xmlns:a="http://schemas.openxmlformats.org/drawingml/2006/main">
+            <a:srgbClr val="FF6B35"/>
+          </a:solidFill>
+          <a:ln xmlns:a="http://schemas.openxmlformats.org/drawingml/2006/main" w="9525">
+            <a:solidFill>
+              <a:srgbClr val="FF6B35"/>
+            </a:solidFill>
+            <a:prstDash val="solid"/>
+          </a:ln>
+        </p:spPr>
+      </p:sp>
+      <p:sp>
+        <p:nvSpPr>
+          <p:cNvPr id="12" name="">
+            <a:extLst xmlns:a="http://schemas.openxmlformats.org/drawingml/2006/main">
+              <a:ext uri="{FF2B5EF4-FFF2-40B4-BE49-F238E27FC236}">
+                <a16:creationId xmlns:a16="http://schemas.microsoft.com/office/drawing/2014/main" id="{34484023-BB6A-4BB2-8074-F70BF4C3FF58}"/>
+              </a:ext>
+            </a:extLst>
+          </p:cNvPr>
+          <p:cNvSpPr>
+            <a:spLocks xmlns:a="http://schemas.openxmlformats.org/drawingml/2006/main" noGrp="1"/>
+          </p:cNvSpPr>
+          <p:nvPr/>
+        </p:nvSpPr>
+        <p:spPr>
+          <a:xfrm xmlns:a="http://schemas.openxmlformats.org/drawingml/2006/main">
+            <a:off x="1371600" y="3867150"/>
+            <a:ext cx="3124200" cy="495300"/>
+          </a:xfrm>
+          <a:prstGeom xmlns:a="http://schemas.openxmlformats.org/drawingml/2006/main" prst="rect">
+            <a:avLst/>
+          </a:prstGeom>
+          <a:noFill xmlns:a="http://schemas.openxmlformats.org/drawingml/2006/main"/>
+          <a:ln xmlns:a="http://schemas.openxmlformats.org/drawingml/2006/main" w="0">
+            <a:noFill/>
+            <a:prstDash val="solid"/>
+          </a:ln>
+        </p:spPr>
+        <p:txBody>
+          <a:bodyPr xmlns:a="http://schemas.openxmlformats.org/drawingml/2006/main"/>
+          <a:lstStyle xmlns:a="http://schemas.openxmlformats.org/drawingml/2006/main"/>
+          <a:p xmlns:a="http://schemas.openxmlformats.org/drawingml/2006/main">
+            <a:pPr>
+              <a:defRPr sz="1275" b="0">
+                <a:solidFill>
+                  <a:srgbClr val="000000"/>
+                </a:solidFill>
+              </a:defRPr>
+            </a:pPr>
+            <a:r>
+              <a:rPr sz="1275" b="0">
+                <a:solidFill>
+                  <a:srgbClr val="000000"/>
+                </a:solidFill>
+              </a:rPr>
+              <a:t>A full four-window reopened-pool sweep would be a dedicated compute job.</a:t>
+            </a:r>
+          </a:p>
+        </p:txBody>
+      </p:sp>
+      <p:sp>
+        <p:nvSpPr>
+          <p:cNvPr id="13" name="">
+            <a:extLst xmlns:a="http://schemas.openxmlformats.org/drawingml/2006/main">
+              <a:ext uri="{FF2B5EF4-FFF2-40B4-BE49-F238E27FC236}">
+                <a16:creationId xmlns:a16="http://schemas.microsoft.com/office/drawing/2014/main" id="{7249CD6A-1379-4077-8562-BD60DF50F692}"/>
+              </a:ext>
+            </a:extLst>
+          </p:cNvPr>
+          <p:cNvSpPr>
+            <a:spLocks xmlns:a="http://schemas.openxmlformats.org/drawingml/2006/main" noGrp="1"/>
+          </p:cNvSpPr>
+          <p:nvPr/>
+        </p:nvSpPr>
+        <p:spPr>
+          <a:xfrm xmlns:a="http://schemas.openxmlformats.org/drawingml/2006/main">
+            <a:off x="6800850" y="2400300"/>
+            <a:ext cx="3429000" cy="323850"/>
+          </a:xfrm>
+          <a:prstGeom xmlns:a="http://schemas.openxmlformats.org/drawingml/2006/main" prst="rect">
+            <a:avLst/>
+          </a:prstGeom>
+          <a:noFill xmlns:a="http://schemas.openxmlformats.org/drawingml/2006/main"/>
+          <a:ln xmlns:a="http://schemas.openxmlformats.org/drawingml/2006/main" w="0">
+            <a:noFill/>
+            <a:prstDash val="solid"/>
+          </a:ln>
+        </p:spPr>
+        <p:txBody>
+          <a:bodyPr xmlns:a="http://schemas.openxmlformats.org/drawingml/2006/main"/>
+          <a:lstStyle xmlns:a="http://schemas.openxmlformats.org/drawingml/2006/main"/>
+          <a:p xmlns:a="http://schemas.openxmlformats.org/drawingml/2006/main">
+            <a:pPr>
+              <a:defRPr sz="1950" b="1">
+                <a:solidFill>
+                  <a:srgbClr val="067647"/>
+                </a:solidFill>
+              </a:defRPr>
+            </a:pPr>
+            <a:r>
+              <a:rPr sz="1950" b="1">
+                <a:solidFill>
+                  <a:srgbClr val="067647"/>
+                </a:solidFill>
+              </a:rPr>
+              <a:t>Recommended next compute slice</a:t>
+            </a:r>
+          </a:p>
+        </p:txBody>
+      </p:sp>
+      <p:sp>
+        <p:nvSpPr>
+          <p:cNvPr id="14" name="">
+            <a:extLst xmlns:a="http://schemas.openxmlformats.org/drawingml/2006/main">
+              <a:ext uri="{FF2B5EF4-FFF2-40B4-BE49-F238E27FC236}">
+                <a16:creationId xmlns:a16="http://schemas.microsoft.com/office/drawing/2014/main" id="{FA4E5DB5-3BDD-4151-B2CD-B4B284EA5A7E}"/>
+              </a:ext>
+            </a:extLst>
+          </p:cNvPr>
+          <p:cNvSpPr>
+            <a:spLocks xmlns:a="http://schemas.openxmlformats.org/drawingml/2006/main" noGrp="1"/>
+          </p:cNvSpPr>
+          <p:nvPr/>
+        </p:nvSpPr>
+        <p:spPr>
+          <a:xfrm xmlns:a="http://schemas.openxmlformats.org/drawingml/2006/main">
+            <a:off x="6819900" y="3086100"/>
+            <a:ext cx="76200" cy="76200"/>
+          </a:xfrm>
+          <a:prstGeom xmlns:a="http://schemas.openxmlformats.org/drawingml/2006/main" prst="rect">
+            <a:avLst/>
+          </a:prstGeom>
+          <a:solidFill xmlns:a="http://schemas.openxmlformats.org/drawingml/2006/main">
+            <a:srgbClr val="067647"/>
+          </a:solidFill>
+          <a:ln xmlns:a="http://schemas.openxmlformats.org/drawingml/2006/main" w="9525">
+            <a:solidFill>
+              <a:srgbClr val="067647"/>
+            </a:solidFill>
+            <a:prstDash val="solid"/>
+          </a:ln>
+        </p:spPr>
+      </p:sp>
+      <p:sp>
+        <p:nvSpPr>
+          <p:cNvPr id="15" name="">
+            <a:extLst xmlns:a="http://schemas.openxmlformats.org/drawingml/2006/main">
+              <a:ext uri="{FF2B5EF4-FFF2-40B4-BE49-F238E27FC236}">
+                <a16:creationId xmlns:a16="http://schemas.microsoft.com/office/drawing/2014/main" id="{990D5DC9-BD62-40C1-9BA1-85F0BFCC0B37}"/>
+              </a:ext>
+            </a:extLst>
+          </p:cNvPr>
+          <p:cNvSpPr>
+            <a:spLocks xmlns:a="http://schemas.openxmlformats.org/drawingml/2006/main" noGrp="1"/>
+          </p:cNvSpPr>
+          <p:nvPr/>
+        </p:nvSpPr>
+        <p:spPr>
+          <a:xfrm xmlns:a="http://schemas.openxmlformats.org/drawingml/2006/main">
+            <a:off x="7029450" y="2990850"/>
+            <a:ext cx="3124200" cy="438150"/>
+          </a:xfrm>
+          <a:prstGeom xmlns:a="http://schemas.openxmlformats.org/drawingml/2006/main" prst="rect">
+            <a:avLst/>
+          </a:prstGeom>
+          <a:noFill xmlns:a="http://schemas.openxmlformats.org/drawingml/2006/main"/>
+          <a:ln xmlns:a="http://schemas.openxmlformats.org/drawingml/2006/main" w="0">
+            <a:noFill/>
+            <a:prstDash val="solid"/>
+          </a:ln>
+        </p:spPr>
+        <p:txBody>
+          <a:bodyPr xmlns:a="http://schemas.openxmlformats.org/drawingml/2006/main"/>
+          <a:lstStyle xmlns:a="http://schemas.openxmlformats.org/drawingml/2006/main"/>
+          <a:p xmlns:a="http://schemas.openxmlformats.org/drawingml/2006/main">
+            <a:pPr>
+              <a:defRPr sz="1275" b="0">
+                <a:solidFill>
+                  <a:srgbClr val="000000"/>
+                </a:solidFill>
+              </a:defRPr>
+            </a:pPr>
+            <a:r>
+              <a:rPr sz="1275" b="0">
+                <a:solidFill>
+                  <a:srgbClr val="000000"/>
+                </a:solidFill>
+              </a:rPr>
+              <a:t>Keep the control lane fixed.</a:t>
+            </a:r>
+          </a:p>
+        </p:txBody>
+      </p:sp>
+      <p:sp>
+        <p:nvSpPr>
+          <p:cNvPr id="16" name="">
+            <a:extLst xmlns:a="http://schemas.openxmlformats.org/drawingml/2006/main">
+              <a:ext uri="{FF2B5EF4-FFF2-40B4-BE49-F238E27FC236}">
+                <a16:creationId xmlns:a16="http://schemas.microsoft.com/office/drawing/2014/main" id="{6DC3CF53-0939-4950-A00E-2C21EB0381B2}"/>
+              </a:ext>
+            </a:extLst>
+          </p:cNvPr>
+          <p:cNvSpPr>
+            <a:spLocks xmlns:a="http://schemas.openxmlformats.org/drawingml/2006/main" noGrp="1"/>
+          </p:cNvSpPr>
+          <p:nvPr/>
+        </p:nvSpPr>
+        <p:spPr>
+          <a:xfrm xmlns:a="http://schemas.openxmlformats.org/drawingml/2006/main">
+            <a:off x="6819900" y="3467100"/>
+            <a:ext cx="76200" cy="76200"/>
+          </a:xfrm>
+          <a:prstGeom xmlns:a="http://schemas.openxmlformats.org/drawingml/2006/main" prst="rect">
+            <a:avLst/>
+          </a:prstGeom>
+          <a:solidFill xmlns:a="http://schemas.openxmlformats.org/drawingml/2006/main">
+            <a:srgbClr val="067647"/>
+          </a:solidFill>
+          <a:ln xmlns:a="http://schemas.openxmlformats.org/drawingml/2006/main" w="9525">
+            <a:solidFill>
+              <a:srgbClr val="067647"/>
+            </a:solidFill>
+            <a:prstDash val="solid"/>
+          </a:ln>
+        </p:spPr>
+      </p:sp>
+      <p:sp>
+        <p:nvSpPr>
+          <p:cNvPr id="17" name="">
+            <a:extLst xmlns:a="http://schemas.openxmlformats.org/drawingml/2006/main">
+              <a:ext uri="{FF2B5EF4-FFF2-40B4-BE49-F238E27FC236}">
+                <a16:creationId xmlns:a16="http://schemas.microsoft.com/office/drawing/2014/main" id="{75D1D134-5807-4987-8F0F-B708720E91E0}"/>
+              </a:ext>
+            </a:extLst>
+          </p:cNvPr>
+          <p:cNvSpPr>
+            <a:spLocks xmlns:a="http://schemas.openxmlformats.org/drawingml/2006/main" noGrp="1"/>
+          </p:cNvSpPr>
+          <p:nvPr/>
+        </p:nvSpPr>
+        <p:spPr>
+          <a:xfrm xmlns:a="http://schemas.openxmlformats.org/drawingml/2006/main">
+            <a:off x="7029450" y="3371850"/>
+            <a:ext cx="3124200" cy="438150"/>
+          </a:xfrm>
+          <a:prstGeom xmlns:a="http://schemas.openxmlformats.org/drawingml/2006/main" prst="rect">
+            <a:avLst/>
+          </a:prstGeom>
+          <a:noFill xmlns:a="http://schemas.openxmlformats.org/drawingml/2006/main"/>
+          <a:ln xmlns:a="http://schemas.openxmlformats.org/drawingml/2006/main" w="0">
+            <a:noFill/>
+            <a:prstDash val="solid"/>
+          </a:ln>
+        </p:spPr>
+        <p:txBody>
+          <a:bodyPr xmlns:a="http://schemas.openxmlformats.org/drawingml/2006/main"/>
+          <a:lstStyle xmlns:a="http://schemas.openxmlformats.org/drawingml/2006/main"/>
+          <a:p xmlns:a="http://schemas.openxmlformats.org/drawingml/2006/main">
+            <a:pPr>
+              <a:defRPr sz="1275" b="0">
+                <a:solidFill>
+                  <a:srgbClr val="000000"/>
+                </a:solidFill>
+              </a:defRPr>
+            </a:pPr>
+            <a:r>
+              <a:rPr sz="1275" b="0">
+                <a:solidFill>
+                  <a:srgbClr val="000000"/>
+                </a:solidFill>
+              </a:rPr>
+              <a:t>Run one reopened pool at a time.</a:t>
+            </a:r>
+          </a:p>
+        </p:txBody>
+      </p:sp>
+      <p:sp>
+        <p:nvSpPr>
+          <p:cNvPr id="18" name="">
+            <a:extLst xmlns:a="http://schemas.openxmlformats.org/drawingml/2006/main">
+              <a:ext uri="{FF2B5EF4-FFF2-40B4-BE49-F238E27FC236}">
+                <a16:creationId xmlns:a16="http://schemas.microsoft.com/office/drawing/2014/main" id="{8885FE15-E3F1-42B9-945D-7A5211211758}"/>
+              </a:ext>
+            </a:extLst>
+          </p:cNvPr>
+          <p:cNvSpPr>
+            <a:spLocks xmlns:a="http://schemas.openxmlformats.org/drawingml/2006/main" noGrp="1"/>
+          </p:cNvSpPr>
+          <p:nvPr/>
+        </p:nvSpPr>
+        <p:spPr>
+          <a:xfrm xmlns:a="http://schemas.openxmlformats.org/drawingml/2006/main">
+            <a:off x="6819900" y="3848100"/>
+            <a:ext cx="76200" cy="76200"/>
+          </a:xfrm>
+          <a:prstGeom xmlns:a="http://schemas.openxmlformats.org/drawingml/2006/main" prst="rect">
+            <a:avLst/>
+          </a:prstGeom>
+          <a:solidFill xmlns:a="http://schemas.openxmlformats.org/drawingml/2006/main">
+            <a:srgbClr val="067647"/>
+          </a:solidFill>
+          <a:ln xmlns:a="http://schemas.openxmlformats.org/drawingml/2006/main" w="9525">
+            <a:solidFill>
+              <a:srgbClr val="067647"/>
+            </a:solidFill>
+            <a:prstDash val="solid"/>
+          </a:ln>
+        </p:spPr>
+      </p:sp>
+      <p:sp>
+        <p:nvSpPr>
+          <p:cNvPr id="19" name="">
+            <a:extLst xmlns:a="http://schemas.openxmlformats.org/drawingml/2006/main">
+              <a:ext uri="{FF2B5EF4-FFF2-40B4-BE49-F238E27FC236}">
+                <a16:creationId xmlns:a16="http://schemas.microsoft.com/office/drawing/2014/main" id="{97C26625-B45C-4CF1-8ED9-88B900685F36}"/>
+              </a:ext>
+            </a:extLst>
+          </p:cNvPr>
+          <p:cNvSpPr>
+            <a:spLocks xmlns:a="http://schemas.openxmlformats.org/drawingml/2006/main" noGrp="1"/>
+          </p:cNvSpPr>
+          <p:nvPr/>
+        </p:nvSpPr>
+        <p:spPr>
+          <a:xfrm xmlns:a="http://schemas.openxmlformats.org/drawingml/2006/main">
+            <a:off x="7029450" y="3752850"/>
+            <a:ext cx="3124200" cy="438150"/>
+          </a:xfrm>
+          <a:prstGeom xmlns:a="http://schemas.openxmlformats.org/drawingml/2006/main" prst="rect">
+            <a:avLst/>
+          </a:prstGeom>
+          <a:noFill xmlns:a="http://schemas.openxmlformats.org/drawingml/2006/main"/>
+          <a:ln xmlns:a="http://schemas.openxmlformats.org/drawingml/2006/main" w="0">
+            <a:noFill/>
+            <a:prstDash val="solid"/>
+          </a:ln>
+        </p:spPr>
+        <p:txBody>
+          <a:bodyPr xmlns:a="http://schemas.openxmlformats.org/drawingml/2006/main"/>
+          <a:lstStyle xmlns:a="http://schemas.openxmlformats.org/drawingml/2006/main"/>
+          <a:p xmlns:a="http://schemas.openxmlformats.org/drawingml/2006/main">
+            <a:pPr>
+              <a:defRPr sz="1275" b="0">
+                <a:solidFill>
+                  <a:srgbClr val="000000"/>
+                </a:solidFill>
+              </a:defRPr>
+            </a:pPr>
+            <a:r>
+              <a:rPr sz="1275" b="0">
+                <a:solidFill>
+                  <a:srgbClr val="000000"/>
+                </a:solidFill>
+              </a:rPr>
+              <a:t>Start with trend/breakout on two annual windows before running classical full.</a:t>
+            </a:r>
+          </a:p>
+        </p:txBody>
+      </p:sp>
+      <p:sp>
+        <p:nvSpPr>
+          <p:cNvPr id="20" name="">
+            <a:extLst xmlns:a="http://schemas.openxmlformats.org/drawingml/2006/main">
+              <a:ext uri="{FF2B5EF4-FFF2-40B4-BE49-F238E27FC236}">
+                <a16:creationId xmlns:a16="http://schemas.microsoft.com/office/drawing/2014/main" id="{51C95224-9C24-4B7A-A038-AC2E6DEB5B01}"/>
+              </a:ext>
+            </a:extLst>
+          </p:cNvPr>
+          <p:cNvSpPr>
+            <a:spLocks xmlns:a="http://schemas.openxmlformats.org/drawingml/2006/main" noGrp="1"/>
+          </p:cNvSpPr>
+          <p:nvPr/>
+        </p:nvSpPr>
+        <p:spPr>
+          <a:xfrm xmlns:a="http://schemas.openxmlformats.org/drawingml/2006/main">
+            <a:off x="6819900" y="4229100"/>
+            <a:ext cx="76200" cy="76200"/>
+          </a:xfrm>
+          <a:prstGeom xmlns:a="http://schemas.openxmlformats.org/drawingml/2006/main" prst="rect">
+            <a:avLst/>
+          </a:prstGeom>
+          <a:solidFill xmlns:a="http://schemas.openxmlformats.org/drawingml/2006/main">
+            <a:srgbClr val="067647"/>
+          </a:solidFill>
+          <a:ln xmlns:a="http://schemas.openxmlformats.org/drawingml/2006/main" w="9525">
+            <a:solidFill>
+              <a:srgbClr val="067647"/>
+            </a:solidFill>
+            <a:prstDash val="solid"/>
+          </a:ln>
+        </p:spPr>
+      </p:sp>
+      <p:sp>
+        <p:nvSpPr>
+          <p:cNvPr id="21" name="">
+            <a:extLst xmlns:a="http://schemas.openxmlformats.org/drawingml/2006/main">
+              <a:ext uri="{FF2B5EF4-FFF2-40B4-BE49-F238E27FC236}">
+                <a16:creationId xmlns:a16="http://schemas.microsoft.com/office/drawing/2014/main" id="{CC5CB29C-A8E7-48A8-95E9-86AFBC15F4C8}"/>
+              </a:ext>
+            </a:extLst>
+          </p:cNvPr>
+          <p:cNvSpPr>
+            <a:spLocks xmlns:a="http://schemas.openxmlformats.org/drawingml/2006/main" noGrp="1"/>
+          </p:cNvSpPr>
+          <p:nvPr/>
+        </p:nvSpPr>
+        <p:spPr>
+          <a:xfrm xmlns:a="http://schemas.openxmlformats.org/drawingml/2006/main">
+            <a:off x="7029450" y="4133850"/>
+            <a:ext cx="3124200" cy="438150"/>
+          </a:xfrm>
+          <a:prstGeom xmlns:a="http://schemas.openxmlformats.org/drawingml/2006/main" prst="rect">
+            <a:avLst/>
+          </a:prstGeom>
+          <a:noFill xmlns:a="http://schemas.openxmlformats.org/drawingml/2006/main"/>
+          <a:ln xmlns:a="http://schemas.openxmlformats.org/drawingml/2006/main" w="0">
+            <a:noFill/>
+            <a:prstDash val="solid"/>
+          </a:ln>
+        </p:spPr>
+        <p:txBody>
+          <a:bodyPr xmlns:a="http://schemas.openxmlformats.org/drawingml/2006/main"/>
+          <a:lstStyle xmlns:a="http://schemas.openxmlformats.org/drawingml/2006/main"/>
+          <a:p xmlns:a="http://schemas.openxmlformats.org/drawingml/2006/main">
+            <a:pPr>
+              <a:defRPr sz="1275" b="0">
+                <a:solidFill>
+                  <a:srgbClr val="000000"/>
+                </a:solidFill>
+              </a:defRPr>
+            </a:pPr>
+            <a:r>
+              <a:rPr sz="1275" b="0">
+                <a:solidFill>
+                  <a:srgbClr val="000000"/>
+                </a:solidFill>
+              </a:rPr>
+              <a:t>Treat partial packets as timing evidence only, not performance evidence.</a:t>
+            </a:r>
+          </a:p>
+        </p:txBody>
+      </p:sp>
+      <p:sp>
+        <p:nvSpPr>
+          <p:cNvPr id="22" name="">
+            <a:extLst xmlns:a="http://schemas.openxmlformats.org/drawingml/2006/main">
+              <a:ext uri="{FF2B5EF4-FFF2-40B4-BE49-F238E27FC236}">
+                <a16:creationId xmlns:a16="http://schemas.microsoft.com/office/drawing/2014/main" id="{0520E26D-2487-4975-A9A3-D146736017B5}"/>
+              </a:ext>
+            </a:extLst>
+          </p:cNvPr>
+          <p:cNvSpPr>
+            <a:spLocks xmlns:a="http://schemas.openxmlformats.org/drawingml/2006/main" noGrp="1"/>
+          </p:cNvSpPr>
+          <p:nvPr/>
+        </p:nvSpPr>
+        <p:spPr>
+          <a:xfrm xmlns:a="http://schemas.openxmlformats.org/drawingml/2006/main">
+            <a:off x="1066800" y="5562600"/>
+            <a:ext cx="9753600" cy="514350"/>
+          </a:xfrm>
+          <a:prstGeom xmlns:a="http://schemas.openxmlformats.org/drawingml/2006/main" prst="rect">
+            <a:avLst/>
+          </a:prstGeom>
+          <a:noFill xmlns:a="http://schemas.openxmlformats.org/drawingml/2006/main"/>
+          <a:ln xmlns:a="http://schemas.openxmlformats.org/drawingml/2006/main" w="0">
+            <a:noFill/>
+            <a:prstDash val="solid"/>
+          </a:ln>
+        </p:spPr>
+        <p:txBody>
+          <a:bodyPr xmlns:a="http://schemas.openxmlformats.org/drawingml/2006/main"/>
+          <a:lstStyle xmlns:a="http://schemas.openxmlformats.org/drawingml/2006/main"/>
+          <a:p xmlns:a="http://schemas.openxmlformats.org/drawingml/2006/main">
+            <a:pPr algn="ctr">
+              <a:defRPr sz="1725" b="1">
+                <a:solidFill>
+                  <a:srgbClr val="000000"/>
+                </a:solidFill>
+              </a:defRPr>
+            </a:pPr>
+            <a:r>
+              <a:rPr sz="1725" b="1">
+                <a:solidFill>
+                  <a:srgbClr val="000000"/>
+                </a:solidFill>
+              </a:rPr>
+              <a:t>This is a useful engineering result: the next question is still valid, but it should be scheduled rather than hidden inside a chat turn.</a:t>
+            </a:r>
+          </a:p>
+        </p:txBody>
+      </p:sp>
+      <p:sp>
+        <p:nvSpPr>
+          <p:cNvPr id="23" name="">
+            <a:extLst xmlns:a="http://schemas.openxmlformats.org/drawingml/2006/main">
+              <a:ext uri="{FF2B5EF4-FFF2-40B4-BE49-F238E27FC236}">
+                <a16:creationId xmlns:a16="http://schemas.microsoft.com/office/drawing/2014/main" id="{0D482FEE-DA2C-4A46-BEBA-F6F694AF38DD}"/>
+              </a:ext>
+            </a:extLst>
+          </p:cNvPr>
+          <p:cNvSpPr>
+            <a:spLocks xmlns:a="http://schemas.openxmlformats.org/drawingml/2006/main" noGrp="1"/>
+          </p:cNvSpPr>
+          <p:nvPr/>
+        </p:nvSpPr>
+        <p:spPr>
+          <a:xfrm xmlns:a="http://schemas.openxmlformats.org/drawingml/2006/main">
+            <a:off x="514350" y="6477000"/>
+            <a:ext cx="11163300" cy="209550"/>
+          </a:xfrm>
+          <a:prstGeom xmlns:a="http://schemas.openxmlformats.org/drawingml/2006/main" prst="rect">
+            <a:avLst/>
+          </a:prstGeom>
+          <a:noFill xmlns:a="http://schemas.openxmlformats.org/drawingml/2006/main"/>
+          <a:ln xmlns:a="http://schemas.openxmlformats.org/drawingml/2006/main" w="0">
+            <a:noFill/>
+            <a:prstDash val="solid"/>
+          </a:ln>
+        </p:spPr>
+        <p:txBody>
+          <a:bodyPr xmlns:a="http://schemas.openxmlformats.org/drawingml/2006/main"/>
+          <a:lstStyle xmlns:a="http://schemas.openxmlformats.org/drawingml/2006/main"/>
+          <a:p xmlns:a="http://schemas.openxmlformats.org/drawingml/2006/main">
+            <a:pPr>
+              <a:defRPr sz="900" b="0">
+                <a:solidFill>
+                  <a:srgbClr val="555555"/>
+                </a:solidFill>
+              </a:defRPr>
+            </a:pPr>
+            <a:r>
+              <a:rPr sz="900" b="0">
+                <a:solidFill>
+                  <a:srgbClr val="555555"/>
+                </a:solidFill>
+              </a:rPr>
+              <a:t>Research/inspection only. Not allocation evidence or live-advice behavior.</a:t>
+            </a:r>
+          </a:p>
+        </p:txBody>
+      </p:sp>
+    </p:spTree>
+    <p:extLst>
+      <p:ext uri="{BB962C8B-B14F-4D97-AF65-F5344CB8AC3E}">
+        <p14:creationId xmlns:p14="http://schemas.microsoft.com/office/powerpoint/2010/main" val="1194418267"/>
       </p:ext>
     </p:extLst>
   </p:cSld>
@@ -5311,7 +9723,7 @@
           <p:cNvPr id="1" name="">
             <a:extLst xmlns:a="http://schemas.openxmlformats.org/drawingml/2006/main">
               <a:ext uri="{FF2B5EF4-FFF2-40B4-BE49-F238E27FC236}">
-                <a16:creationId xmlns:a16="http://schemas.microsoft.com/office/drawing/2014/main" id="{C1C59D45-82FD-44D0-9142-512574ECA6CB}"/>
+                <a16:creationId xmlns:a16="http://schemas.microsoft.com/office/drawing/2014/main" id="{BEF6FBFC-724A-44CA-B2A5-07AF87DC080E}"/>
               </a:ext>
             </a:extLst>
           </p:cNvPr>
@@ -5361,7 +9773,7 @@
           <p:cNvPr id="2" name="">
             <a:extLst xmlns:a="http://schemas.openxmlformats.org/drawingml/2006/main">
               <a:ext uri="{FF2B5EF4-FFF2-40B4-BE49-F238E27FC236}">
-                <a16:creationId xmlns:a16="http://schemas.microsoft.com/office/drawing/2014/main" id="{ECC8B7D8-6B45-4AA8-B543-A2016C0ECFB8}"/>
+                <a16:creationId xmlns:a16="http://schemas.microsoft.com/office/drawing/2014/main" id="{D7A0D535-3727-4B28-B2B2-1DB3DD9F3DD6}"/>
               </a:ext>
             </a:extLst>
           </p:cNvPr>
@@ -5411,7 +9823,7 @@
           <p:cNvPr id="3" name="">
             <a:extLst xmlns:a="http://schemas.openxmlformats.org/drawingml/2006/main">
               <a:ext uri="{FF2B5EF4-FFF2-40B4-BE49-F238E27FC236}">
-                <a16:creationId xmlns:a16="http://schemas.microsoft.com/office/drawing/2014/main" id="{F64A1D94-BEBC-4789-BFB8-7E9AFBD46527}"/>
+                <a16:creationId xmlns:a16="http://schemas.microsoft.com/office/drawing/2014/main" id="{80F34C45-E1D1-4E2F-BBA8-CC2BF161D980}"/>
               </a:ext>
             </a:extLst>
           </p:cNvPr>
@@ -5444,7 +9856,7 @@
           <p:cNvPr id="4" name="">
             <a:extLst xmlns:a="http://schemas.openxmlformats.org/drawingml/2006/main">
               <a:ext uri="{FF2B5EF4-FFF2-40B4-BE49-F238E27FC236}">
-                <a16:creationId xmlns:a16="http://schemas.microsoft.com/office/drawing/2014/main" id="{00C96D9C-BC95-40DA-95B1-FF7D92CEFD78}"/>
+                <a16:creationId xmlns:a16="http://schemas.microsoft.com/office/drawing/2014/main" id="{B321697A-D266-4410-939C-FFA04BF7E0A8}"/>
               </a:ext>
             </a:extLst>
           </p:cNvPr>
@@ -5494,7 +9906,7 @@
           <p:cNvPr id="5" name="">
             <a:extLst xmlns:a="http://schemas.openxmlformats.org/drawingml/2006/main">
               <a:ext uri="{FF2B5EF4-FFF2-40B4-BE49-F238E27FC236}">
-                <a16:creationId xmlns:a16="http://schemas.microsoft.com/office/drawing/2014/main" id="{F3F0BA2D-0727-45EA-92F6-EB49082BBB45}"/>
+                <a16:creationId xmlns:a16="http://schemas.microsoft.com/office/drawing/2014/main" id="{7EE7196B-8699-4E33-803C-006215E4D791}"/>
               </a:ext>
             </a:extLst>
           </p:cNvPr>
@@ -5527,7 +9939,7 @@
           <p:cNvPr id="6" name="">
             <a:extLst xmlns:a="http://schemas.openxmlformats.org/drawingml/2006/main">
               <a:ext uri="{FF2B5EF4-FFF2-40B4-BE49-F238E27FC236}">
-                <a16:creationId xmlns:a16="http://schemas.microsoft.com/office/drawing/2014/main" id="{36851A81-B8DD-4AF0-8F3E-93F18E319518}"/>
+                <a16:creationId xmlns:a16="http://schemas.microsoft.com/office/drawing/2014/main" id="{28FCB269-6615-4DF1-A8D0-5521EF786F74}"/>
               </a:ext>
             </a:extLst>
           </p:cNvPr>
@@ -5560,7 +9972,7 @@
           <p:cNvPr id="7" name="">
             <a:extLst xmlns:a="http://schemas.openxmlformats.org/drawingml/2006/main">
               <a:ext uri="{FF2B5EF4-FFF2-40B4-BE49-F238E27FC236}">
-                <a16:creationId xmlns:a16="http://schemas.microsoft.com/office/drawing/2014/main" id="{419AB7A9-437E-4B77-83BC-F44BF673483E}"/>
+                <a16:creationId xmlns:a16="http://schemas.microsoft.com/office/drawing/2014/main" id="{8EE947EE-8AA0-40E6-89A2-61CA3D4FF949}"/>
               </a:ext>
             </a:extLst>
           </p:cNvPr>
@@ -5610,7 +10022,7 @@
           <p:cNvPr id="8" name="">
             <a:extLst xmlns:a="http://schemas.openxmlformats.org/drawingml/2006/main">
               <a:ext uri="{FF2B5EF4-FFF2-40B4-BE49-F238E27FC236}">
-                <a16:creationId xmlns:a16="http://schemas.microsoft.com/office/drawing/2014/main" id="{4BD3CE15-03D3-474B-837A-D230B4C0CBB3}"/>
+                <a16:creationId xmlns:a16="http://schemas.microsoft.com/office/drawing/2014/main" id="{7D273F47-AA0D-402A-9409-90E828FB7FEB}"/>
               </a:ext>
             </a:extLst>
           </p:cNvPr>
@@ -5660,7 +10072,7 @@
           <p:cNvPr id="9" name="">
             <a:extLst xmlns:a="http://schemas.openxmlformats.org/drawingml/2006/main">
               <a:ext uri="{FF2B5EF4-FFF2-40B4-BE49-F238E27FC236}">
-                <a16:creationId xmlns:a16="http://schemas.microsoft.com/office/drawing/2014/main" id="{AEF8BFED-C696-4B80-ADE2-9006F17612AE}"/>
+                <a16:creationId xmlns:a16="http://schemas.microsoft.com/office/drawing/2014/main" id="{C1838F0A-1807-4CD2-8C4A-E688B34F9789}"/>
               </a:ext>
             </a:extLst>
           </p:cNvPr>
@@ -5710,7 +10122,7 @@
           <p:cNvPr id="10" name="">
             <a:extLst xmlns:a="http://schemas.openxmlformats.org/drawingml/2006/main">
               <a:ext uri="{FF2B5EF4-FFF2-40B4-BE49-F238E27FC236}">
-                <a16:creationId xmlns:a16="http://schemas.microsoft.com/office/drawing/2014/main" id="{5B3AC8CE-041E-4D43-A770-5B1BBF89266A}"/>
+                <a16:creationId xmlns:a16="http://schemas.microsoft.com/office/drawing/2014/main" id="{4106C338-56DB-4158-8AA2-9156A7BBEE46}"/>
               </a:ext>
             </a:extLst>
           </p:cNvPr>
@@ -5760,7 +10172,7 @@
           <p:cNvPr id="11" name="">
             <a:extLst xmlns:a="http://schemas.openxmlformats.org/drawingml/2006/main">
               <a:ext uri="{FF2B5EF4-FFF2-40B4-BE49-F238E27FC236}">
-                <a16:creationId xmlns:a16="http://schemas.microsoft.com/office/drawing/2014/main" id="{29F6FCC2-E83A-4C06-A0D6-7023F6BFDB46}"/>
+                <a16:creationId xmlns:a16="http://schemas.microsoft.com/office/drawing/2014/main" id="{99FB873D-1298-4786-959A-9C20C49A5905}"/>
               </a:ext>
             </a:extLst>
           </p:cNvPr>
@@ -5810,7 +10222,7 @@
           <p:cNvPr id="12" name="">
             <a:extLst xmlns:a="http://schemas.openxmlformats.org/drawingml/2006/main">
               <a:ext uri="{FF2B5EF4-FFF2-40B4-BE49-F238E27FC236}">
-                <a16:creationId xmlns:a16="http://schemas.microsoft.com/office/drawing/2014/main" id="{83D301FD-31BF-46C2-B8A9-1FC2836F0262}"/>
+                <a16:creationId xmlns:a16="http://schemas.microsoft.com/office/drawing/2014/main" id="{0335C4D3-44E6-48FD-9790-2707C52852DE}"/>
               </a:ext>
             </a:extLst>
           </p:cNvPr>
@@ -5858,7 +10270,7 @@
     </p:spTree>
     <p:extLst>
       <p:ext uri="{BB962C8B-B14F-4D97-AF65-F5344CB8AC3E}">
-        <p14:creationId xmlns:p14="http://schemas.microsoft.com/office/powerpoint/2010/main" val="1555691869"/>
+        <p14:creationId xmlns:p14="http://schemas.microsoft.com/office/powerpoint/2010/main" val="88591422"/>
       </p:ext>
     </p:extLst>
   </p:cSld>
@@ -5889,7 +10301,7 @@
           <p:cNvPr id="1" name="">
             <a:extLst xmlns:a="http://schemas.openxmlformats.org/drawingml/2006/main">
               <a:ext uri="{FF2B5EF4-FFF2-40B4-BE49-F238E27FC236}">
-                <a16:creationId xmlns:a16="http://schemas.microsoft.com/office/drawing/2014/main" id="{52D19D86-1D6F-438F-B302-DC611311E255}"/>
+                <a16:creationId xmlns:a16="http://schemas.microsoft.com/office/drawing/2014/main" id="{B913F234-BCBD-4DF2-8A73-9C24EB0587CD}"/>
               </a:ext>
             </a:extLst>
           </p:cNvPr>
@@ -5939,7 +10351,7 @@
           <p:cNvPr id="2" name="">
             <a:extLst xmlns:a="http://schemas.openxmlformats.org/drawingml/2006/main">
               <a:ext uri="{FF2B5EF4-FFF2-40B4-BE49-F238E27FC236}">
-                <a16:creationId xmlns:a16="http://schemas.microsoft.com/office/drawing/2014/main" id="{528AA793-7D43-411D-8FBC-2A8E48F295CB}"/>
+                <a16:creationId xmlns:a16="http://schemas.microsoft.com/office/drawing/2014/main" id="{954DFFF3-62F1-4E29-A92C-98335AF08F82}"/>
               </a:ext>
             </a:extLst>
           </p:cNvPr>
@@ -5989,7 +10401,7 @@
           <p:cNvPr id="3" name="">
             <a:extLst xmlns:a="http://schemas.openxmlformats.org/drawingml/2006/main">
               <a:ext uri="{FF2B5EF4-FFF2-40B4-BE49-F238E27FC236}">
-                <a16:creationId xmlns:a16="http://schemas.microsoft.com/office/drawing/2014/main" id="{B192E757-0E4B-48BA-BB68-732725B8D1E2}"/>
+                <a16:creationId xmlns:a16="http://schemas.microsoft.com/office/drawing/2014/main" id="{DBA3A2C6-006A-4BF1-A18C-FD70F0A39E52}"/>
               </a:ext>
             </a:extLst>
           </p:cNvPr>
@@ -6022,7 +10434,7 @@
           <p:cNvPr id="4" name="">
             <a:extLst xmlns:a="http://schemas.openxmlformats.org/drawingml/2006/main">
               <a:ext uri="{FF2B5EF4-FFF2-40B4-BE49-F238E27FC236}">
-                <a16:creationId xmlns:a16="http://schemas.microsoft.com/office/drawing/2014/main" id="{556D12D5-4DDB-4208-8EE0-5443C9294E93}"/>
+                <a16:creationId xmlns:a16="http://schemas.microsoft.com/office/drawing/2014/main" id="{DBBF7306-3814-4449-B2EE-1B5990C917CD}"/>
               </a:ext>
             </a:extLst>
           </p:cNvPr>
@@ -6055,7 +10467,7 @@
           <p:cNvPr id="5" name="">
             <a:extLst xmlns:a="http://schemas.openxmlformats.org/drawingml/2006/main">
               <a:ext uri="{FF2B5EF4-FFF2-40B4-BE49-F238E27FC236}">
-                <a16:creationId xmlns:a16="http://schemas.microsoft.com/office/drawing/2014/main" id="{AE42E73D-8E07-43A4-933E-43E1F1F04533}"/>
+                <a16:creationId xmlns:a16="http://schemas.microsoft.com/office/drawing/2014/main" id="{A98B4DCB-2289-407A-9EDB-A5577014BB0D}"/>
               </a:ext>
             </a:extLst>
           </p:cNvPr>
@@ -6105,7 +10517,7 @@
           <p:cNvPr id="6" name="">
             <a:extLst xmlns:a="http://schemas.openxmlformats.org/drawingml/2006/main">
               <a:ext uri="{FF2B5EF4-FFF2-40B4-BE49-F238E27FC236}">
-                <a16:creationId xmlns:a16="http://schemas.microsoft.com/office/drawing/2014/main" id="{BD967D36-4619-47F1-87C0-D1D342B4352D}"/>
+                <a16:creationId xmlns:a16="http://schemas.microsoft.com/office/drawing/2014/main" id="{80FD1CCC-657E-4F59-96A5-A1726C603079}"/>
               </a:ext>
             </a:extLst>
           </p:cNvPr>
@@ -6155,7 +10567,7 @@
           <p:cNvPr id="7" name="">
             <a:extLst xmlns:a="http://schemas.openxmlformats.org/drawingml/2006/main">
               <a:ext uri="{FF2B5EF4-FFF2-40B4-BE49-F238E27FC236}">
-                <a16:creationId xmlns:a16="http://schemas.microsoft.com/office/drawing/2014/main" id="{AE192B3C-6BE0-4693-AD27-E2B959BF6654}"/>
+                <a16:creationId xmlns:a16="http://schemas.microsoft.com/office/drawing/2014/main" id="{4C1A8A58-763C-42FA-B23C-82E97BAAA8B2}"/>
               </a:ext>
             </a:extLst>
           </p:cNvPr>
@@ -6188,7 +10600,7 @@
           <p:cNvPr id="8" name="">
             <a:extLst xmlns:a="http://schemas.openxmlformats.org/drawingml/2006/main">
               <a:ext uri="{FF2B5EF4-FFF2-40B4-BE49-F238E27FC236}">
-                <a16:creationId xmlns:a16="http://schemas.microsoft.com/office/drawing/2014/main" id="{AE2D0C5A-E41A-4014-8B6A-A677665E8104}"/>
+                <a16:creationId xmlns:a16="http://schemas.microsoft.com/office/drawing/2014/main" id="{843964D4-FE2C-441D-A940-233DBD070E6F}"/>
               </a:ext>
             </a:extLst>
           </p:cNvPr>
@@ -6238,7 +10650,7 @@
           <p:cNvPr id="9" name="">
             <a:extLst xmlns:a="http://schemas.openxmlformats.org/drawingml/2006/main">
               <a:ext uri="{FF2B5EF4-FFF2-40B4-BE49-F238E27FC236}">
-                <a16:creationId xmlns:a16="http://schemas.microsoft.com/office/drawing/2014/main" id="{1E36B600-EDE1-4D35-8E3D-A0B6DEFA03EB}"/>
+                <a16:creationId xmlns:a16="http://schemas.microsoft.com/office/drawing/2014/main" id="{81E92179-6029-4BA1-9228-FC5903B13F39}"/>
               </a:ext>
             </a:extLst>
           </p:cNvPr>
@@ -6288,7 +10700,7 @@
           <p:cNvPr id="10" name="">
             <a:extLst xmlns:a="http://schemas.openxmlformats.org/drawingml/2006/main">
               <a:ext uri="{FF2B5EF4-FFF2-40B4-BE49-F238E27FC236}">
-                <a16:creationId xmlns:a16="http://schemas.microsoft.com/office/drawing/2014/main" id="{D04C022F-CEB2-447B-82B0-CBC59CA87048}"/>
+                <a16:creationId xmlns:a16="http://schemas.microsoft.com/office/drawing/2014/main" id="{9092CBDF-44E4-4C20-8D68-085DA853DE60}"/>
               </a:ext>
             </a:extLst>
           </p:cNvPr>
@@ -6321,7 +10733,7 @@
           <p:cNvPr id="11" name="">
             <a:extLst xmlns:a="http://schemas.openxmlformats.org/drawingml/2006/main">
               <a:ext uri="{FF2B5EF4-FFF2-40B4-BE49-F238E27FC236}">
-                <a16:creationId xmlns:a16="http://schemas.microsoft.com/office/drawing/2014/main" id="{3A26C2B4-B57B-4B7F-A367-E175B2291EAC}"/>
+                <a16:creationId xmlns:a16="http://schemas.microsoft.com/office/drawing/2014/main" id="{EC5CD6C9-18E2-4C4A-BACA-99AC9BF4F013}"/>
               </a:ext>
             </a:extLst>
           </p:cNvPr>
@@ -6371,7 +10783,7 @@
           <p:cNvPr id="12" name="">
             <a:extLst xmlns:a="http://schemas.openxmlformats.org/drawingml/2006/main">
               <a:ext uri="{FF2B5EF4-FFF2-40B4-BE49-F238E27FC236}">
-                <a16:creationId xmlns:a16="http://schemas.microsoft.com/office/drawing/2014/main" id="{EBD01C38-DDFB-454D-938E-0767A5BF633F}"/>
+                <a16:creationId xmlns:a16="http://schemas.microsoft.com/office/drawing/2014/main" id="{82E72249-763B-4167-836D-ED32E43A69CF}"/>
               </a:ext>
             </a:extLst>
           </p:cNvPr>
@@ -6421,7 +10833,7 @@
           <p:cNvPr id="13" name="">
             <a:extLst xmlns:a="http://schemas.openxmlformats.org/drawingml/2006/main">
               <a:ext uri="{FF2B5EF4-FFF2-40B4-BE49-F238E27FC236}">
-                <a16:creationId xmlns:a16="http://schemas.microsoft.com/office/drawing/2014/main" id="{B39DF746-37D5-49F5-80FA-DBFE51C9C13D}"/>
+                <a16:creationId xmlns:a16="http://schemas.microsoft.com/office/drawing/2014/main" id="{BB9014F9-FB9A-4A14-A06B-1DE78D27FD55}"/>
               </a:ext>
             </a:extLst>
           </p:cNvPr>
@@ -6454,7 +10866,7 @@
           <p:cNvPr id="14" name="">
             <a:extLst xmlns:a="http://schemas.openxmlformats.org/drawingml/2006/main">
               <a:ext uri="{FF2B5EF4-FFF2-40B4-BE49-F238E27FC236}">
-                <a16:creationId xmlns:a16="http://schemas.microsoft.com/office/drawing/2014/main" id="{10902006-2088-46FB-BABC-3C4A28A9C6B4}"/>
+                <a16:creationId xmlns:a16="http://schemas.microsoft.com/office/drawing/2014/main" id="{0D0F8550-43BA-4ACC-978E-AE5B3A87ACFA}"/>
               </a:ext>
             </a:extLst>
           </p:cNvPr>
@@ -6504,7 +10916,7 @@
           <p:cNvPr id="15" name="">
             <a:extLst xmlns:a="http://schemas.openxmlformats.org/drawingml/2006/main">
               <a:ext uri="{FF2B5EF4-FFF2-40B4-BE49-F238E27FC236}">
-                <a16:creationId xmlns:a16="http://schemas.microsoft.com/office/drawing/2014/main" id="{8E51B26F-61FE-4E4E-A214-E8725664778C}"/>
+                <a16:creationId xmlns:a16="http://schemas.microsoft.com/office/drawing/2014/main" id="{DCD08A7D-4716-46DA-A464-233BCE73F1C0}"/>
               </a:ext>
             </a:extLst>
           </p:cNvPr>
@@ -6554,7 +10966,7 @@
           <p:cNvPr id="16" name="">
             <a:extLst xmlns:a="http://schemas.openxmlformats.org/drawingml/2006/main">
               <a:ext uri="{FF2B5EF4-FFF2-40B4-BE49-F238E27FC236}">
-                <a16:creationId xmlns:a16="http://schemas.microsoft.com/office/drawing/2014/main" id="{57D22C5E-2987-44C0-AB09-EAF185BBC4BD}"/>
+                <a16:creationId xmlns:a16="http://schemas.microsoft.com/office/drawing/2014/main" id="{A2DC09BA-CFAA-47C6-B4B7-B266104B1C43}"/>
               </a:ext>
             </a:extLst>
           </p:cNvPr>
@@ -6604,7 +11016,7 @@
           <p:cNvPr id="17" name="">
             <a:extLst xmlns:a="http://schemas.openxmlformats.org/drawingml/2006/main">
               <a:ext uri="{FF2B5EF4-FFF2-40B4-BE49-F238E27FC236}">
-                <a16:creationId xmlns:a16="http://schemas.microsoft.com/office/drawing/2014/main" id="{BB35D5EE-A863-443B-A79D-958672B0C05F}"/>
+                <a16:creationId xmlns:a16="http://schemas.microsoft.com/office/drawing/2014/main" id="{FFBF4D15-45F6-4F54-9CE7-03541714BC94}"/>
               </a:ext>
             </a:extLst>
           </p:cNvPr>
@@ -6652,7 +11064,7 @@
     </p:spTree>
     <p:extLst>
       <p:ext uri="{BB962C8B-B14F-4D97-AF65-F5344CB8AC3E}">
-        <p14:creationId xmlns:p14="http://schemas.microsoft.com/office/powerpoint/2010/main" val="106985917"/>
+        <p14:creationId xmlns:p14="http://schemas.microsoft.com/office/powerpoint/2010/main" val="359672917"/>
       </p:ext>
     </p:extLst>
   </p:cSld>
@@ -6683,7 +11095,7 @@
           <p:cNvPr id="1" name="">
             <a:extLst xmlns:a="http://schemas.openxmlformats.org/drawingml/2006/main">
               <a:ext uri="{FF2B5EF4-FFF2-40B4-BE49-F238E27FC236}">
-                <a16:creationId xmlns:a16="http://schemas.microsoft.com/office/drawing/2014/main" id="{6B8F85C5-9D09-4D39-8392-7150B08F09D5}"/>
+                <a16:creationId xmlns:a16="http://schemas.microsoft.com/office/drawing/2014/main" id="{D1C7B700-39F6-49E2-9A5C-91ABF12130B9}"/>
               </a:ext>
             </a:extLst>
           </p:cNvPr>
@@ -6733,7 +11145,7 @@
           <p:cNvPr id="2" name="">
             <a:extLst xmlns:a="http://schemas.openxmlformats.org/drawingml/2006/main">
               <a:ext uri="{FF2B5EF4-FFF2-40B4-BE49-F238E27FC236}">
-                <a16:creationId xmlns:a16="http://schemas.microsoft.com/office/drawing/2014/main" id="{6C93A69E-6379-438A-9B02-8BAC66182188}"/>
+                <a16:creationId xmlns:a16="http://schemas.microsoft.com/office/drawing/2014/main" id="{DC1D0D72-ABB4-4B93-99B9-B380EEF00FC9}"/>
               </a:ext>
             </a:extLst>
           </p:cNvPr>
@@ -6783,7 +11195,7 @@
           <p:cNvPr id="3" name="">
             <a:extLst xmlns:a="http://schemas.openxmlformats.org/drawingml/2006/main">
               <a:ext uri="{FF2B5EF4-FFF2-40B4-BE49-F238E27FC236}">
-                <a16:creationId xmlns:a16="http://schemas.microsoft.com/office/drawing/2014/main" id="{136ACA8E-35CC-446F-864E-1FD669E3DE36}"/>
+                <a16:creationId xmlns:a16="http://schemas.microsoft.com/office/drawing/2014/main" id="{A15FCD41-3788-42F2-A1C1-3CE20A34E2D5}"/>
               </a:ext>
             </a:extLst>
           </p:cNvPr>
@@ -6816,7 +11228,7 @@
           <p:cNvPr id="4" name="">
             <a:extLst xmlns:a="http://schemas.openxmlformats.org/drawingml/2006/main">
               <a:ext uri="{FF2B5EF4-FFF2-40B4-BE49-F238E27FC236}">
-                <a16:creationId xmlns:a16="http://schemas.microsoft.com/office/drawing/2014/main" id="{684B19C6-526B-4987-A378-45B0E3A9A2F3}"/>
+                <a16:creationId xmlns:a16="http://schemas.microsoft.com/office/drawing/2014/main" id="{48AA9FDD-3841-42D4-986B-D514CDB9E985}"/>
               </a:ext>
             </a:extLst>
           </p:cNvPr>
@@ -6849,7 +11261,7 @@
           <p:cNvPr id="5" name="">
             <a:extLst xmlns:a="http://schemas.openxmlformats.org/drawingml/2006/main">
               <a:ext uri="{FF2B5EF4-FFF2-40B4-BE49-F238E27FC236}">
-                <a16:creationId xmlns:a16="http://schemas.microsoft.com/office/drawing/2014/main" id="{4B2950D6-F4F4-4156-8F34-D529AF5FA28E}"/>
+                <a16:creationId xmlns:a16="http://schemas.microsoft.com/office/drawing/2014/main" id="{054CCBA3-0202-4DC0-8544-6C82313E0834}"/>
               </a:ext>
             </a:extLst>
           </p:cNvPr>
@@ -6899,7 +11311,7 @@
           <p:cNvPr id="6" name="">
             <a:extLst xmlns:a="http://schemas.openxmlformats.org/drawingml/2006/main">
               <a:ext uri="{FF2B5EF4-FFF2-40B4-BE49-F238E27FC236}">
-                <a16:creationId xmlns:a16="http://schemas.microsoft.com/office/drawing/2014/main" id="{EB850792-14BB-4AEF-9160-726685D3193B}"/>
+                <a16:creationId xmlns:a16="http://schemas.microsoft.com/office/drawing/2014/main" id="{CFDB2811-FC1E-4817-AE75-E11DDD0693FB}"/>
               </a:ext>
             </a:extLst>
           </p:cNvPr>
@@ -6932,7 +11344,7 @@
           <p:cNvPr id="7" name="">
             <a:extLst xmlns:a="http://schemas.openxmlformats.org/drawingml/2006/main">
               <a:ext uri="{FF2B5EF4-FFF2-40B4-BE49-F238E27FC236}">
-                <a16:creationId xmlns:a16="http://schemas.microsoft.com/office/drawing/2014/main" id="{D61D05A2-FCD8-43D6-A803-7095564D984F}"/>
+                <a16:creationId xmlns:a16="http://schemas.microsoft.com/office/drawing/2014/main" id="{1773FECD-D0CD-44BA-B22B-DDBB4D882AAA}"/>
               </a:ext>
             </a:extLst>
           </p:cNvPr>
@@ -6982,7 +11394,7 @@
           <p:cNvPr id="8" name="">
             <a:extLst xmlns:a="http://schemas.openxmlformats.org/drawingml/2006/main">
               <a:ext uri="{FF2B5EF4-FFF2-40B4-BE49-F238E27FC236}">
-                <a16:creationId xmlns:a16="http://schemas.microsoft.com/office/drawing/2014/main" id="{D3395D69-3A0B-4088-B7CD-987228B13846}"/>
+                <a16:creationId xmlns:a16="http://schemas.microsoft.com/office/drawing/2014/main" id="{35A89CD7-71F2-40FF-98D9-BA4BAABE0DF9}"/>
               </a:ext>
             </a:extLst>
           </p:cNvPr>
@@ -7015,7 +11427,7 @@
           <p:cNvPr id="9" name="">
             <a:extLst xmlns:a="http://schemas.openxmlformats.org/drawingml/2006/main">
               <a:ext uri="{FF2B5EF4-FFF2-40B4-BE49-F238E27FC236}">
-                <a16:creationId xmlns:a16="http://schemas.microsoft.com/office/drawing/2014/main" id="{5013A2CE-0C9B-475E-8498-20BDD3BABF79}"/>
+                <a16:creationId xmlns:a16="http://schemas.microsoft.com/office/drawing/2014/main" id="{0E4BB696-19FA-48F9-98E5-333F1DD24E99}"/>
               </a:ext>
             </a:extLst>
           </p:cNvPr>
@@ -7065,7 +11477,7 @@
           <p:cNvPr id="10" name="">
             <a:extLst xmlns:a="http://schemas.openxmlformats.org/drawingml/2006/main">
               <a:ext uri="{FF2B5EF4-FFF2-40B4-BE49-F238E27FC236}">
-                <a16:creationId xmlns:a16="http://schemas.microsoft.com/office/drawing/2014/main" id="{9AD85E15-718B-4A7E-BB34-B4EB6B312638}"/>
+                <a16:creationId xmlns:a16="http://schemas.microsoft.com/office/drawing/2014/main" id="{CA041DF6-D774-4399-91F6-D9EBCEFB9446}"/>
               </a:ext>
             </a:extLst>
           </p:cNvPr>
@@ -7098,7 +11510,7 @@
           <p:cNvPr id="11" name="">
             <a:extLst xmlns:a="http://schemas.openxmlformats.org/drawingml/2006/main">
               <a:ext uri="{FF2B5EF4-FFF2-40B4-BE49-F238E27FC236}">
-                <a16:creationId xmlns:a16="http://schemas.microsoft.com/office/drawing/2014/main" id="{143C48CF-FE2B-4EE0-AE62-3DD80864DACF}"/>
+                <a16:creationId xmlns:a16="http://schemas.microsoft.com/office/drawing/2014/main" id="{9EEB4643-9DA3-4579-B03D-CBC708455D35}"/>
               </a:ext>
             </a:extLst>
           </p:cNvPr>
@@ -7148,7 +11560,7 @@
           <p:cNvPr id="12" name="">
             <a:extLst xmlns:a="http://schemas.openxmlformats.org/drawingml/2006/main">
               <a:ext uri="{FF2B5EF4-FFF2-40B4-BE49-F238E27FC236}">
-                <a16:creationId xmlns:a16="http://schemas.microsoft.com/office/drawing/2014/main" id="{A9B70A9A-45F7-41F5-B9D6-DBF8F24FA75F}"/>
+                <a16:creationId xmlns:a16="http://schemas.microsoft.com/office/drawing/2014/main" id="{56199364-066D-41F7-AF99-7E82B225276E}"/>
               </a:ext>
             </a:extLst>
           </p:cNvPr>
@@ -7181,7 +11593,7 @@
           <p:cNvPr id="13" name="">
             <a:extLst xmlns:a="http://schemas.openxmlformats.org/drawingml/2006/main">
               <a:ext uri="{FF2B5EF4-FFF2-40B4-BE49-F238E27FC236}">
-                <a16:creationId xmlns:a16="http://schemas.microsoft.com/office/drawing/2014/main" id="{47E4851C-09C3-448C-A8EE-20C0C2866076}"/>
+                <a16:creationId xmlns:a16="http://schemas.microsoft.com/office/drawing/2014/main" id="{2B18B04E-839D-4050-BC29-47BE2B0B5000}"/>
               </a:ext>
             </a:extLst>
           </p:cNvPr>
@@ -7231,7 +11643,7 @@
           <p:cNvPr id="14" name="">
             <a:extLst xmlns:a="http://schemas.openxmlformats.org/drawingml/2006/main">
               <a:ext uri="{FF2B5EF4-FFF2-40B4-BE49-F238E27FC236}">
-                <a16:creationId xmlns:a16="http://schemas.microsoft.com/office/drawing/2014/main" id="{29783D2E-B25E-40B7-A7A1-A100B4068CB7}"/>
+                <a16:creationId xmlns:a16="http://schemas.microsoft.com/office/drawing/2014/main" id="{81A68011-CC6E-4EB0-9186-AD83AB6BEEA7}"/>
               </a:ext>
             </a:extLst>
           </p:cNvPr>
@@ -7264,7 +11676,7 @@
           <p:cNvPr id="15" name="">
             <a:extLst xmlns:a="http://schemas.openxmlformats.org/drawingml/2006/main">
               <a:ext uri="{FF2B5EF4-FFF2-40B4-BE49-F238E27FC236}">
-                <a16:creationId xmlns:a16="http://schemas.microsoft.com/office/drawing/2014/main" id="{EC74134B-263A-4109-9AF5-034B391635FD}"/>
+                <a16:creationId xmlns:a16="http://schemas.microsoft.com/office/drawing/2014/main" id="{2F0B9527-010D-455D-BFCF-150950249474}"/>
               </a:ext>
             </a:extLst>
           </p:cNvPr>
@@ -7314,7 +11726,7 @@
           <p:cNvPr id="16" name="">
             <a:extLst xmlns:a="http://schemas.openxmlformats.org/drawingml/2006/main">
               <a:ext uri="{FF2B5EF4-FFF2-40B4-BE49-F238E27FC236}">
-                <a16:creationId xmlns:a16="http://schemas.microsoft.com/office/drawing/2014/main" id="{0F15E294-9D39-4DB5-8551-BA98E3F62FA7}"/>
+                <a16:creationId xmlns:a16="http://schemas.microsoft.com/office/drawing/2014/main" id="{466BB23E-9F25-4849-9653-E10A87412375}"/>
               </a:ext>
             </a:extLst>
           </p:cNvPr>
@@ -7347,7 +11759,7 @@
           <p:cNvPr id="17" name="">
             <a:extLst xmlns:a="http://schemas.openxmlformats.org/drawingml/2006/main">
               <a:ext uri="{FF2B5EF4-FFF2-40B4-BE49-F238E27FC236}">
-                <a16:creationId xmlns:a16="http://schemas.microsoft.com/office/drawing/2014/main" id="{FD4D1F35-87B7-47A9-8703-48D37CCECBBA}"/>
+                <a16:creationId xmlns:a16="http://schemas.microsoft.com/office/drawing/2014/main" id="{B97FB68E-2EF2-4FC6-8402-C93A8E8A8CFF}"/>
               </a:ext>
             </a:extLst>
           </p:cNvPr>
@@ -7397,7 +11809,7 @@
           <p:cNvPr id="18" name="">
             <a:extLst xmlns:a="http://schemas.openxmlformats.org/drawingml/2006/main">
               <a:ext uri="{FF2B5EF4-FFF2-40B4-BE49-F238E27FC236}">
-                <a16:creationId xmlns:a16="http://schemas.microsoft.com/office/drawing/2014/main" id="{C386923A-52B9-42FA-B8B2-0ED1431DCA77}"/>
+                <a16:creationId xmlns:a16="http://schemas.microsoft.com/office/drawing/2014/main" id="{7FD10CD0-8C9F-4906-89FB-88CA8143B96E}"/>
               </a:ext>
             </a:extLst>
           </p:cNvPr>
@@ -7430,7 +11842,7 @@
           <p:cNvPr id="19" name="">
             <a:extLst xmlns:a="http://schemas.openxmlformats.org/drawingml/2006/main">
               <a:ext uri="{FF2B5EF4-FFF2-40B4-BE49-F238E27FC236}">
-                <a16:creationId xmlns:a16="http://schemas.microsoft.com/office/drawing/2014/main" id="{F4E5A860-BD5A-426B-8535-126239D0D923}"/>
+                <a16:creationId xmlns:a16="http://schemas.microsoft.com/office/drawing/2014/main" id="{1ACB9B9A-4F0C-4B81-B636-233767B239AC}"/>
               </a:ext>
             </a:extLst>
           </p:cNvPr>
@@ -7480,7 +11892,7 @@
           <p:cNvPr id="20" name="">
             <a:extLst xmlns:a="http://schemas.openxmlformats.org/drawingml/2006/main">
               <a:ext uri="{FF2B5EF4-FFF2-40B4-BE49-F238E27FC236}">
-                <a16:creationId xmlns:a16="http://schemas.microsoft.com/office/drawing/2014/main" id="{6616498E-73A3-4EDB-B9ED-1B3779DA5C81}"/>
+                <a16:creationId xmlns:a16="http://schemas.microsoft.com/office/drawing/2014/main" id="{5C40A595-3C3E-415F-A081-DE8F949B12A7}"/>
               </a:ext>
             </a:extLst>
           </p:cNvPr>
@@ -7513,7 +11925,7 @@
           <p:cNvPr id="21" name="">
             <a:extLst xmlns:a="http://schemas.openxmlformats.org/drawingml/2006/main">
               <a:ext uri="{FF2B5EF4-FFF2-40B4-BE49-F238E27FC236}">
-                <a16:creationId xmlns:a16="http://schemas.microsoft.com/office/drawing/2014/main" id="{F08A2618-8DBE-4698-9219-955D185ED005}"/>
+                <a16:creationId xmlns:a16="http://schemas.microsoft.com/office/drawing/2014/main" id="{0CC1E4FE-8833-46C4-B502-D4172E066403}"/>
               </a:ext>
             </a:extLst>
           </p:cNvPr>
@@ -7563,7 +11975,7 @@
           <p:cNvPr id="22" name="">
             <a:extLst xmlns:a="http://schemas.openxmlformats.org/drawingml/2006/main">
               <a:ext uri="{FF2B5EF4-FFF2-40B4-BE49-F238E27FC236}">
-                <a16:creationId xmlns:a16="http://schemas.microsoft.com/office/drawing/2014/main" id="{9B36FA75-C0CD-4173-B656-C7C7B620D77F}"/>
+                <a16:creationId xmlns:a16="http://schemas.microsoft.com/office/drawing/2014/main" id="{E47F2832-0D0D-4614-9F41-9755F42ED41A}"/>
               </a:ext>
             </a:extLst>
           </p:cNvPr>
@@ -7596,7 +12008,7 @@
           <p:cNvPr id="23" name="">
             <a:extLst xmlns:a="http://schemas.openxmlformats.org/drawingml/2006/main">
               <a:ext uri="{FF2B5EF4-FFF2-40B4-BE49-F238E27FC236}">
-                <a16:creationId xmlns:a16="http://schemas.microsoft.com/office/drawing/2014/main" id="{1EF76113-35E0-42BC-BEE7-408999BF6327}"/>
+                <a16:creationId xmlns:a16="http://schemas.microsoft.com/office/drawing/2014/main" id="{F11CD757-F499-4794-AF62-E5F86C0AAB94}"/>
               </a:ext>
             </a:extLst>
           </p:cNvPr>
@@ -7646,7 +12058,7 @@
           <p:cNvPr id="24" name="">
             <a:extLst xmlns:a="http://schemas.openxmlformats.org/drawingml/2006/main">
               <a:ext uri="{FF2B5EF4-FFF2-40B4-BE49-F238E27FC236}">
-                <a16:creationId xmlns:a16="http://schemas.microsoft.com/office/drawing/2014/main" id="{1A9EE314-E813-4BBA-8063-C277B534C8A6}"/>
+                <a16:creationId xmlns:a16="http://schemas.microsoft.com/office/drawing/2014/main" id="{1C74A5BF-28C2-4F9C-AA52-21ECAB6740BF}"/>
               </a:ext>
             </a:extLst>
           </p:cNvPr>
@@ -7679,7 +12091,7 @@
           <p:cNvPr id="25" name="">
             <a:extLst xmlns:a="http://schemas.openxmlformats.org/drawingml/2006/main">
               <a:ext uri="{FF2B5EF4-FFF2-40B4-BE49-F238E27FC236}">
-                <a16:creationId xmlns:a16="http://schemas.microsoft.com/office/drawing/2014/main" id="{817FAAE0-25E9-4BDE-A68B-0BAD9D550C93}"/>
+                <a16:creationId xmlns:a16="http://schemas.microsoft.com/office/drawing/2014/main" id="{27C61396-3210-43F7-8162-26B1BFE4D190}"/>
               </a:ext>
             </a:extLst>
           </p:cNvPr>
@@ -7729,7 +12141,7 @@
           <p:cNvPr id="26" name="">
             <a:extLst xmlns:a="http://schemas.openxmlformats.org/drawingml/2006/main">
               <a:ext uri="{FF2B5EF4-FFF2-40B4-BE49-F238E27FC236}">
-                <a16:creationId xmlns:a16="http://schemas.microsoft.com/office/drawing/2014/main" id="{7B18EAC4-AAE4-409D-951F-99BD8EA166DE}"/>
+                <a16:creationId xmlns:a16="http://schemas.microsoft.com/office/drawing/2014/main" id="{14BED880-28A1-4E0B-9B08-D4F26B2FFFB5}"/>
               </a:ext>
             </a:extLst>
           </p:cNvPr>
@@ -7762,7 +12174,7 @@
           <p:cNvPr id="27" name="">
             <a:extLst xmlns:a="http://schemas.openxmlformats.org/drawingml/2006/main">
               <a:ext uri="{FF2B5EF4-FFF2-40B4-BE49-F238E27FC236}">
-                <a16:creationId xmlns:a16="http://schemas.microsoft.com/office/drawing/2014/main" id="{90B812D2-4030-43CF-9844-C003986CFFB9}"/>
+                <a16:creationId xmlns:a16="http://schemas.microsoft.com/office/drawing/2014/main" id="{94B5206B-EBF6-4E9B-A90E-2C888DB7A0BF}"/>
               </a:ext>
             </a:extLst>
           </p:cNvPr>
@@ -7812,7 +12224,7 @@
           <p:cNvPr id="28" name="">
             <a:extLst xmlns:a="http://schemas.openxmlformats.org/drawingml/2006/main">
               <a:ext uri="{FF2B5EF4-FFF2-40B4-BE49-F238E27FC236}">
-                <a16:creationId xmlns:a16="http://schemas.microsoft.com/office/drawing/2014/main" id="{A4614C68-97C7-4048-958B-E9CAB8193511}"/>
+                <a16:creationId xmlns:a16="http://schemas.microsoft.com/office/drawing/2014/main" id="{F4AEAE4F-BB47-42F0-BC32-BA2F80591DCA}"/>
               </a:ext>
             </a:extLst>
           </p:cNvPr>
@@ -7845,7 +12257,7 @@
           <p:cNvPr id="29" name="">
             <a:extLst xmlns:a="http://schemas.openxmlformats.org/drawingml/2006/main">
               <a:ext uri="{FF2B5EF4-FFF2-40B4-BE49-F238E27FC236}">
-                <a16:creationId xmlns:a16="http://schemas.microsoft.com/office/drawing/2014/main" id="{723FB996-3122-46DF-A14B-C52C5E217823}"/>
+                <a16:creationId xmlns:a16="http://schemas.microsoft.com/office/drawing/2014/main" id="{5F5375C0-1438-4B75-929C-B690BA194C39}"/>
               </a:ext>
             </a:extLst>
           </p:cNvPr>
@@ -7895,7 +12307,7 @@
           <p:cNvPr id="30" name="">
             <a:extLst xmlns:a="http://schemas.openxmlformats.org/drawingml/2006/main">
               <a:ext uri="{FF2B5EF4-FFF2-40B4-BE49-F238E27FC236}">
-                <a16:creationId xmlns:a16="http://schemas.microsoft.com/office/drawing/2014/main" id="{E98CBC80-5F6C-40CF-B19A-661347E104DE}"/>
+                <a16:creationId xmlns:a16="http://schemas.microsoft.com/office/drawing/2014/main" id="{C5ABCD3F-9A3B-4E00-9878-909D4FA018D5}"/>
               </a:ext>
             </a:extLst>
           </p:cNvPr>
@@ -7928,7 +12340,7 @@
           <p:cNvPr id="31" name="">
             <a:extLst xmlns:a="http://schemas.openxmlformats.org/drawingml/2006/main">
               <a:ext uri="{FF2B5EF4-FFF2-40B4-BE49-F238E27FC236}">
-                <a16:creationId xmlns:a16="http://schemas.microsoft.com/office/drawing/2014/main" id="{66402564-5620-4E81-987C-87F6E6569650}"/>
+                <a16:creationId xmlns:a16="http://schemas.microsoft.com/office/drawing/2014/main" id="{9DBDD263-2F15-40A3-92CE-EBC4B03F37B1}"/>
               </a:ext>
             </a:extLst>
           </p:cNvPr>
@@ -7978,7 +12390,7 @@
           <p:cNvPr id="32" name="">
             <a:extLst xmlns:a="http://schemas.openxmlformats.org/drawingml/2006/main">
               <a:ext uri="{FF2B5EF4-FFF2-40B4-BE49-F238E27FC236}">
-                <a16:creationId xmlns:a16="http://schemas.microsoft.com/office/drawing/2014/main" id="{C0DCBCAB-02C6-4F17-A9C9-B1559BC00D09}"/>
+                <a16:creationId xmlns:a16="http://schemas.microsoft.com/office/drawing/2014/main" id="{C50ED5D0-6112-4CFD-A684-BB5C5FC1161E}"/>
               </a:ext>
             </a:extLst>
           </p:cNvPr>
@@ -8011,7 +12423,7 @@
           <p:cNvPr id="33" name="">
             <a:extLst xmlns:a="http://schemas.openxmlformats.org/drawingml/2006/main">
               <a:ext uri="{FF2B5EF4-FFF2-40B4-BE49-F238E27FC236}">
-                <a16:creationId xmlns:a16="http://schemas.microsoft.com/office/drawing/2014/main" id="{7BB1DA72-B7A2-445B-B642-46067B997972}"/>
+                <a16:creationId xmlns:a16="http://schemas.microsoft.com/office/drawing/2014/main" id="{669A5E6C-D904-4DFB-803F-2C59352D81F5}"/>
               </a:ext>
             </a:extLst>
           </p:cNvPr>
@@ -8061,7 +12473,7 @@
           <p:cNvPr id="34" name="">
             <a:extLst xmlns:a="http://schemas.openxmlformats.org/drawingml/2006/main">
               <a:ext uri="{FF2B5EF4-FFF2-40B4-BE49-F238E27FC236}">
-                <a16:creationId xmlns:a16="http://schemas.microsoft.com/office/drawing/2014/main" id="{9096392D-3711-4EF8-93D1-7AC97BFE3446}"/>
+                <a16:creationId xmlns:a16="http://schemas.microsoft.com/office/drawing/2014/main" id="{FF0E03C2-E21C-47CF-90E5-2E7D01621410}"/>
               </a:ext>
             </a:extLst>
           </p:cNvPr>
@@ -8094,7 +12506,7 @@
           <p:cNvPr id="35" name="">
             <a:extLst xmlns:a="http://schemas.openxmlformats.org/drawingml/2006/main">
               <a:ext uri="{FF2B5EF4-FFF2-40B4-BE49-F238E27FC236}">
-                <a16:creationId xmlns:a16="http://schemas.microsoft.com/office/drawing/2014/main" id="{02096796-87DD-42FF-B539-AA607BA0C976}"/>
+                <a16:creationId xmlns:a16="http://schemas.microsoft.com/office/drawing/2014/main" id="{2E2E9CDB-9C95-4CC7-811E-BD9B6A566974}"/>
               </a:ext>
             </a:extLst>
           </p:cNvPr>
@@ -8144,7 +12556,7 @@
           <p:cNvPr id="36" name="">
             <a:extLst xmlns:a="http://schemas.openxmlformats.org/drawingml/2006/main">
               <a:ext uri="{FF2B5EF4-FFF2-40B4-BE49-F238E27FC236}">
-                <a16:creationId xmlns:a16="http://schemas.microsoft.com/office/drawing/2014/main" id="{8DCD422D-55E2-4C39-A3AA-425AE6D11B32}"/>
+                <a16:creationId xmlns:a16="http://schemas.microsoft.com/office/drawing/2014/main" id="{46750E44-9BE4-4715-970D-CB7F0357FD21}"/>
               </a:ext>
             </a:extLst>
           </p:cNvPr>
@@ -8177,7 +12589,7 @@
           <p:cNvPr id="37" name="">
             <a:extLst xmlns:a="http://schemas.openxmlformats.org/drawingml/2006/main">
               <a:ext uri="{FF2B5EF4-FFF2-40B4-BE49-F238E27FC236}">
-                <a16:creationId xmlns:a16="http://schemas.microsoft.com/office/drawing/2014/main" id="{7866ED3F-42D3-41E1-AC9E-83C5B281BD25}"/>
+                <a16:creationId xmlns:a16="http://schemas.microsoft.com/office/drawing/2014/main" id="{01B7D97C-0420-4F82-90D3-147DF3350924}"/>
               </a:ext>
             </a:extLst>
           </p:cNvPr>
@@ -8227,7 +12639,7 @@
           <p:cNvPr id="38" name="">
             <a:extLst xmlns:a="http://schemas.openxmlformats.org/drawingml/2006/main">
               <a:ext uri="{FF2B5EF4-FFF2-40B4-BE49-F238E27FC236}">
-                <a16:creationId xmlns:a16="http://schemas.microsoft.com/office/drawing/2014/main" id="{C33D09F1-1112-4D31-AAE1-20AF44B41FE3}"/>
+                <a16:creationId xmlns:a16="http://schemas.microsoft.com/office/drawing/2014/main" id="{CBE9191E-8BC4-4BDB-A3EC-104C21769B63}"/>
               </a:ext>
             </a:extLst>
           </p:cNvPr>
@@ -8260,7 +12672,7 @@
           <p:cNvPr id="39" name="">
             <a:extLst xmlns:a="http://schemas.openxmlformats.org/drawingml/2006/main">
               <a:ext uri="{FF2B5EF4-FFF2-40B4-BE49-F238E27FC236}">
-                <a16:creationId xmlns:a16="http://schemas.microsoft.com/office/drawing/2014/main" id="{D40D3463-3882-40CB-823C-FCE2FF3DBD5B}"/>
+                <a16:creationId xmlns:a16="http://schemas.microsoft.com/office/drawing/2014/main" id="{EE1663F7-676B-434B-965B-1B24DBEA8869}"/>
               </a:ext>
             </a:extLst>
           </p:cNvPr>
@@ -8310,7 +12722,7 @@
           <p:cNvPr id="40" name="">
             <a:extLst xmlns:a="http://schemas.openxmlformats.org/drawingml/2006/main">
               <a:ext uri="{FF2B5EF4-FFF2-40B4-BE49-F238E27FC236}">
-                <a16:creationId xmlns:a16="http://schemas.microsoft.com/office/drawing/2014/main" id="{CEBAB944-B9D9-4E63-804E-96A826D8492B}"/>
+                <a16:creationId xmlns:a16="http://schemas.microsoft.com/office/drawing/2014/main" id="{32621536-07B2-4EE1-AD1B-E9DFC7B9CA85}"/>
               </a:ext>
             </a:extLst>
           </p:cNvPr>
@@ -8343,7 +12755,7 @@
           <p:cNvPr id="41" name="">
             <a:extLst xmlns:a="http://schemas.openxmlformats.org/drawingml/2006/main">
               <a:ext uri="{FF2B5EF4-FFF2-40B4-BE49-F238E27FC236}">
-                <a16:creationId xmlns:a16="http://schemas.microsoft.com/office/drawing/2014/main" id="{E5E0A8DC-8C4B-43F0-8CF1-9BFD2BE57933}"/>
+                <a16:creationId xmlns:a16="http://schemas.microsoft.com/office/drawing/2014/main" id="{24D83F15-DD6C-43E0-A5F4-29B66C644DFE}"/>
               </a:ext>
             </a:extLst>
           </p:cNvPr>
@@ -8393,7 +12805,7 @@
           <p:cNvPr id="42" name="">
             <a:extLst xmlns:a="http://schemas.openxmlformats.org/drawingml/2006/main">
               <a:ext uri="{FF2B5EF4-FFF2-40B4-BE49-F238E27FC236}">
-                <a16:creationId xmlns:a16="http://schemas.microsoft.com/office/drawing/2014/main" id="{0E08EF5B-AA3B-4C2E-A08A-FF9921A89B79}"/>
+                <a16:creationId xmlns:a16="http://schemas.microsoft.com/office/drawing/2014/main" id="{C705F8EA-95AE-4D79-AE73-8521321782F0}"/>
               </a:ext>
             </a:extLst>
           </p:cNvPr>
@@ -8426,7 +12838,7 @@
           <p:cNvPr id="43" name="">
             <a:extLst xmlns:a="http://schemas.openxmlformats.org/drawingml/2006/main">
               <a:ext uri="{FF2B5EF4-FFF2-40B4-BE49-F238E27FC236}">
-                <a16:creationId xmlns:a16="http://schemas.microsoft.com/office/drawing/2014/main" id="{C570F2D8-79F3-4879-BA3C-59FF56691590}"/>
+                <a16:creationId xmlns:a16="http://schemas.microsoft.com/office/drawing/2014/main" id="{2B771DD9-3973-47F9-97FA-86708F16F1A9}"/>
               </a:ext>
             </a:extLst>
           </p:cNvPr>
@@ -8476,7 +12888,7 @@
           <p:cNvPr id="44" name="">
             <a:extLst xmlns:a="http://schemas.openxmlformats.org/drawingml/2006/main">
               <a:ext uri="{FF2B5EF4-FFF2-40B4-BE49-F238E27FC236}">
-                <a16:creationId xmlns:a16="http://schemas.microsoft.com/office/drawing/2014/main" id="{7737B45B-9E10-4F06-B2FA-2989D96CA150}"/>
+                <a16:creationId xmlns:a16="http://schemas.microsoft.com/office/drawing/2014/main" id="{3A522697-B465-4774-986E-767626E88E22}"/>
               </a:ext>
             </a:extLst>
           </p:cNvPr>
@@ -8509,7 +12921,7 @@
           <p:cNvPr id="45" name="">
             <a:extLst xmlns:a="http://schemas.openxmlformats.org/drawingml/2006/main">
               <a:ext uri="{FF2B5EF4-FFF2-40B4-BE49-F238E27FC236}">
-                <a16:creationId xmlns:a16="http://schemas.microsoft.com/office/drawing/2014/main" id="{68F9BF02-818F-4384-B792-EF1BA0EF5787}"/>
+                <a16:creationId xmlns:a16="http://schemas.microsoft.com/office/drawing/2014/main" id="{20A023DE-B10A-4E20-A970-D5FB42F286DB}"/>
               </a:ext>
             </a:extLst>
           </p:cNvPr>
@@ -8559,7 +12971,7 @@
           <p:cNvPr id="46" name="">
             <a:extLst xmlns:a="http://schemas.openxmlformats.org/drawingml/2006/main">
               <a:ext uri="{FF2B5EF4-FFF2-40B4-BE49-F238E27FC236}">
-                <a16:creationId xmlns:a16="http://schemas.microsoft.com/office/drawing/2014/main" id="{3A3AF95E-D2A0-4153-AF15-D1BEF1912DBE}"/>
+                <a16:creationId xmlns:a16="http://schemas.microsoft.com/office/drawing/2014/main" id="{7F9E7A4C-A5D4-4E24-AD1F-A83A93243F03}"/>
               </a:ext>
             </a:extLst>
           </p:cNvPr>
@@ -8592,7 +13004,7 @@
           <p:cNvPr id="47" name="">
             <a:extLst xmlns:a="http://schemas.openxmlformats.org/drawingml/2006/main">
               <a:ext uri="{FF2B5EF4-FFF2-40B4-BE49-F238E27FC236}">
-                <a16:creationId xmlns:a16="http://schemas.microsoft.com/office/drawing/2014/main" id="{7DDEC44B-87E4-4E4A-A697-56463A2E5264}"/>
+                <a16:creationId xmlns:a16="http://schemas.microsoft.com/office/drawing/2014/main" id="{AFD1A7F4-1B68-4F76-9F5F-B78C153AAC78}"/>
               </a:ext>
             </a:extLst>
           </p:cNvPr>
@@ -8642,7 +13054,7 @@
           <p:cNvPr id="48" name="">
             <a:extLst xmlns:a="http://schemas.openxmlformats.org/drawingml/2006/main">
               <a:ext uri="{FF2B5EF4-FFF2-40B4-BE49-F238E27FC236}">
-                <a16:creationId xmlns:a16="http://schemas.microsoft.com/office/drawing/2014/main" id="{FDA633F0-753B-4F15-860A-350A13FE4700}"/>
+                <a16:creationId xmlns:a16="http://schemas.microsoft.com/office/drawing/2014/main" id="{66B9C996-C93F-4A9D-AD80-7ACF1510E3F6}"/>
               </a:ext>
             </a:extLst>
           </p:cNvPr>
@@ -8675,7 +13087,7 @@
           <p:cNvPr id="49" name="">
             <a:extLst xmlns:a="http://schemas.openxmlformats.org/drawingml/2006/main">
               <a:ext uri="{FF2B5EF4-FFF2-40B4-BE49-F238E27FC236}">
-                <a16:creationId xmlns:a16="http://schemas.microsoft.com/office/drawing/2014/main" id="{C1655425-664F-4475-9F8C-F8E97934B4D9}"/>
+                <a16:creationId xmlns:a16="http://schemas.microsoft.com/office/drawing/2014/main" id="{0C7B881A-B2D2-4536-8538-5E1A4B84F978}"/>
               </a:ext>
             </a:extLst>
           </p:cNvPr>
@@ -8725,7 +13137,7 @@
           <p:cNvPr id="50" name="">
             <a:extLst xmlns:a="http://schemas.openxmlformats.org/drawingml/2006/main">
               <a:ext uri="{FF2B5EF4-FFF2-40B4-BE49-F238E27FC236}">
-                <a16:creationId xmlns:a16="http://schemas.microsoft.com/office/drawing/2014/main" id="{0007713E-2A37-42AA-88D9-3D6A98BD43AA}"/>
+                <a16:creationId xmlns:a16="http://schemas.microsoft.com/office/drawing/2014/main" id="{423E427A-D30A-494F-8ECE-BF4F997D870D}"/>
               </a:ext>
             </a:extLst>
           </p:cNvPr>
@@ -8758,7 +13170,7 @@
           <p:cNvPr id="51" name="">
             <a:extLst xmlns:a="http://schemas.openxmlformats.org/drawingml/2006/main">
               <a:ext uri="{FF2B5EF4-FFF2-40B4-BE49-F238E27FC236}">
-                <a16:creationId xmlns:a16="http://schemas.microsoft.com/office/drawing/2014/main" id="{1F599373-36A1-4872-8588-A6C602BFA13B}"/>
+                <a16:creationId xmlns:a16="http://schemas.microsoft.com/office/drawing/2014/main" id="{BE1C0747-481C-4CA6-A73A-EBA1D104C5E1}"/>
               </a:ext>
             </a:extLst>
           </p:cNvPr>
@@ -8808,7 +13220,7 @@
           <p:cNvPr id="52" name="">
             <a:extLst xmlns:a="http://schemas.openxmlformats.org/drawingml/2006/main">
               <a:ext uri="{FF2B5EF4-FFF2-40B4-BE49-F238E27FC236}">
-                <a16:creationId xmlns:a16="http://schemas.microsoft.com/office/drawing/2014/main" id="{D3807127-625B-44EE-ABED-7C8E4E23ABC1}"/>
+                <a16:creationId xmlns:a16="http://schemas.microsoft.com/office/drawing/2014/main" id="{984D2008-888C-4AE2-A0FE-8B8E2BCE3BD0}"/>
               </a:ext>
             </a:extLst>
           </p:cNvPr>
@@ -8841,7 +13253,7 @@
           <p:cNvPr id="53" name="">
             <a:extLst xmlns:a="http://schemas.openxmlformats.org/drawingml/2006/main">
               <a:ext uri="{FF2B5EF4-FFF2-40B4-BE49-F238E27FC236}">
-                <a16:creationId xmlns:a16="http://schemas.microsoft.com/office/drawing/2014/main" id="{2DCA4250-00EF-404C-A0CE-E03E25D2CC70}"/>
+                <a16:creationId xmlns:a16="http://schemas.microsoft.com/office/drawing/2014/main" id="{15F48D15-2F9B-495E-AC3B-DC900115F7F8}"/>
               </a:ext>
             </a:extLst>
           </p:cNvPr>
@@ -8891,7 +13303,7 @@
           <p:cNvPr id="54" name="">
             <a:extLst xmlns:a="http://schemas.openxmlformats.org/drawingml/2006/main">
               <a:ext uri="{FF2B5EF4-FFF2-40B4-BE49-F238E27FC236}">
-                <a16:creationId xmlns:a16="http://schemas.microsoft.com/office/drawing/2014/main" id="{FE710EB5-11E3-419E-A435-16F7F266C8D3}"/>
+                <a16:creationId xmlns:a16="http://schemas.microsoft.com/office/drawing/2014/main" id="{6FEAB33A-F4D9-4A87-8765-928280D9F4FF}"/>
               </a:ext>
             </a:extLst>
           </p:cNvPr>
@@ -8924,7 +13336,7 @@
           <p:cNvPr id="55" name="">
             <a:extLst xmlns:a="http://schemas.openxmlformats.org/drawingml/2006/main">
               <a:ext uri="{FF2B5EF4-FFF2-40B4-BE49-F238E27FC236}">
-                <a16:creationId xmlns:a16="http://schemas.microsoft.com/office/drawing/2014/main" id="{6FFB7DCC-39A5-4823-A78B-2E44FCE1AFCB}"/>
+                <a16:creationId xmlns:a16="http://schemas.microsoft.com/office/drawing/2014/main" id="{9094C0C4-0864-4EF5-B987-99C164C00647}"/>
               </a:ext>
             </a:extLst>
           </p:cNvPr>
@@ -8974,7 +13386,7 @@
           <p:cNvPr id="56" name="">
             <a:extLst xmlns:a="http://schemas.openxmlformats.org/drawingml/2006/main">
               <a:ext uri="{FF2B5EF4-FFF2-40B4-BE49-F238E27FC236}">
-                <a16:creationId xmlns:a16="http://schemas.microsoft.com/office/drawing/2014/main" id="{A8B45FE4-3194-455C-8D11-C1C88750A4DA}"/>
+                <a16:creationId xmlns:a16="http://schemas.microsoft.com/office/drawing/2014/main" id="{601983F5-7730-4C5C-B5E7-B822F0726B41}"/>
               </a:ext>
             </a:extLst>
           </p:cNvPr>
@@ -9007,7 +13419,7 @@
           <p:cNvPr id="57" name="">
             <a:extLst xmlns:a="http://schemas.openxmlformats.org/drawingml/2006/main">
               <a:ext uri="{FF2B5EF4-FFF2-40B4-BE49-F238E27FC236}">
-                <a16:creationId xmlns:a16="http://schemas.microsoft.com/office/drawing/2014/main" id="{AB84C99C-438F-4650-964E-CC8EE47E4A8F}"/>
+                <a16:creationId xmlns:a16="http://schemas.microsoft.com/office/drawing/2014/main" id="{C4D4F18B-F1DC-4078-BE1A-67193E7845E5}"/>
               </a:ext>
             </a:extLst>
           </p:cNvPr>
@@ -9057,7 +13469,7 @@
           <p:cNvPr id="58" name="">
             <a:extLst xmlns:a="http://schemas.openxmlformats.org/drawingml/2006/main">
               <a:ext uri="{FF2B5EF4-FFF2-40B4-BE49-F238E27FC236}">
-                <a16:creationId xmlns:a16="http://schemas.microsoft.com/office/drawing/2014/main" id="{6C306BA1-1D9C-4A09-AFFA-2A488010A5DF}"/>
+                <a16:creationId xmlns:a16="http://schemas.microsoft.com/office/drawing/2014/main" id="{E022FD70-4DB1-4BFD-A09E-4FFE542B87E9}"/>
               </a:ext>
             </a:extLst>
           </p:cNvPr>
@@ -9090,7 +13502,7 @@
           <p:cNvPr id="59" name="">
             <a:extLst xmlns:a="http://schemas.openxmlformats.org/drawingml/2006/main">
               <a:ext uri="{FF2B5EF4-FFF2-40B4-BE49-F238E27FC236}">
-                <a16:creationId xmlns:a16="http://schemas.microsoft.com/office/drawing/2014/main" id="{B509C660-2DFE-47E5-8A53-878CA2AF5E61}"/>
+                <a16:creationId xmlns:a16="http://schemas.microsoft.com/office/drawing/2014/main" id="{AFB46794-6128-41CE-B836-C75A872BC91F}"/>
               </a:ext>
             </a:extLst>
           </p:cNvPr>
@@ -9140,7 +13552,7 @@
           <p:cNvPr id="60" name="">
             <a:extLst xmlns:a="http://schemas.openxmlformats.org/drawingml/2006/main">
               <a:ext uri="{FF2B5EF4-FFF2-40B4-BE49-F238E27FC236}">
-                <a16:creationId xmlns:a16="http://schemas.microsoft.com/office/drawing/2014/main" id="{7797FC3D-2F62-4BA6-8DB0-8F91193326B6}"/>
+                <a16:creationId xmlns:a16="http://schemas.microsoft.com/office/drawing/2014/main" id="{30D0EC6F-EB24-43D5-82B0-E5D179A1BF51}"/>
               </a:ext>
             </a:extLst>
           </p:cNvPr>
@@ -9173,7 +13585,7 @@
           <p:cNvPr id="61" name="">
             <a:extLst xmlns:a="http://schemas.openxmlformats.org/drawingml/2006/main">
               <a:ext uri="{FF2B5EF4-FFF2-40B4-BE49-F238E27FC236}">
-                <a16:creationId xmlns:a16="http://schemas.microsoft.com/office/drawing/2014/main" id="{E97146DC-BBD9-4D41-949B-87E50D675F31}"/>
+                <a16:creationId xmlns:a16="http://schemas.microsoft.com/office/drawing/2014/main" id="{AAB5B752-2C47-4FE6-A63E-13B62467B73B}"/>
               </a:ext>
             </a:extLst>
           </p:cNvPr>
@@ -9223,7 +13635,7 @@
           <p:cNvPr id="62" name="">
             <a:extLst xmlns:a="http://schemas.openxmlformats.org/drawingml/2006/main">
               <a:ext uri="{FF2B5EF4-FFF2-40B4-BE49-F238E27FC236}">
-                <a16:creationId xmlns:a16="http://schemas.microsoft.com/office/drawing/2014/main" id="{358C7435-ACBA-4348-B1A2-7471D0E66404}"/>
+                <a16:creationId xmlns:a16="http://schemas.microsoft.com/office/drawing/2014/main" id="{517EC71D-D9E0-4C5E-8A47-5ABFBD147BAC}"/>
               </a:ext>
             </a:extLst>
           </p:cNvPr>
@@ -9256,7 +13668,7 @@
           <p:cNvPr id="63" name="">
             <a:extLst xmlns:a="http://schemas.openxmlformats.org/drawingml/2006/main">
               <a:ext uri="{FF2B5EF4-FFF2-40B4-BE49-F238E27FC236}">
-                <a16:creationId xmlns:a16="http://schemas.microsoft.com/office/drawing/2014/main" id="{FA4301B9-F0D9-409D-BBCC-D8D0C34D615A}"/>
+                <a16:creationId xmlns:a16="http://schemas.microsoft.com/office/drawing/2014/main" id="{E3CA97E9-9E15-4E6C-8AE2-A053DF9DDF06}"/>
               </a:ext>
             </a:extLst>
           </p:cNvPr>
@@ -9306,7 +13718,7 @@
           <p:cNvPr id="64" name="">
             <a:extLst xmlns:a="http://schemas.openxmlformats.org/drawingml/2006/main">
               <a:ext uri="{FF2B5EF4-FFF2-40B4-BE49-F238E27FC236}">
-                <a16:creationId xmlns:a16="http://schemas.microsoft.com/office/drawing/2014/main" id="{C8C5AF10-C0B5-4571-8CB0-00A66C343D88}"/>
+                <a16:creationId xmlns:a16="http://schemas.microsoft.com/office/drawing/2014/main" id="{66E84DBD-1420-4EB0-A601-F13647245F89}"/>
               </a:ext>
             </a:extLst>
           </p:cNvPr>
@@ -9339,7 +13751,7 @@
           <p:cNvPr id="65" name="">
             <a:extLst xmlns:a="http://schemas.openxmlformats.org/drawingml/2006/main">
               <a:ext uri="{FF2B5EF4-FFF2-40B4-BE49-F238E27FC236}">
-                <a16:creationId xmlns:a16="http://schemas.microsoft.com/office/drawing/2014/main" id="{BE03BFD7-CA2D-46E7-B9A7-F0808D3CF79B}"/>
+                <a16:creationId xmlns:a16="http://schemas.microsoft.com/office/drawing/2014/main" id="{A4C26141-BCA5-4406-A9B2-F76D957B69F1}"/>
               </a:ext>
             </a:extLst>
           </p:cNvPr>
@@ -9389,7 +13801,7 @@
           <p:cNvPr id="66" name="">
             <a:extLst xmlns:a="http://schemas.openxmlformats.org/drawingml/2006/main">
               <a:ext uri="{FF2B5EF4-FFF2-40B4-BE49-F238E27FC236}">
-                <a16:creationId xmlns:a16="http://schemas.microsoft.com/office/drawing/2014/main" id="{F3D88FAC-B710-4214-ABC1-6F2B5BD8C9E4}"/>
+                <a16:creationId xmlns:a16="http://schemas.microsoft.com/office/drawing/2014/main" id="{6EEC1AB5-F0E6-4EBD-9AAD-257A84982FEF}"/>
               </a:ext>
             </a:extLst>
           </p:cNvPr>
@@ -9422,7 +13834,7 @@
           <p:cNvPr id="67" name="">
             <a:extLst xmlns:a="http://schemas.openxmlformats.org/drawingml/2006/main">
               <a:ext uri="{FF2B5EF4-FFF2-40B4-BE49-F238E27FC236}">
-                <a16:creationId xmlns:a16="http://schemas.microsoft.com/office/drawing/2014/main" id="{553FCD06-B490-480E-B8CC-D89F69437553}"/>
+                <a16:creationId xmlns:a16="http://schemas.microsoft.com/office/drawing/2014/main" id="{0902244A-5020-4021-9337-A636BC91C298}"/>
               </a:ext>
             </a:extLst>
           </p:cNvPr>
@@ -9472,7 +13884,7 @@
           <p:cNvPr id="68" name="">
             <a:extLst xmlns:a="http://schemas.openxmlformats.org/drawingml/2006/main">
               <a:ext uri="{FF2B5EF4-FFF2-40B4-BE49-F238E27FC236}">
-                <a16:creationId xmlns:a16="http://schemas.microsoft.com/office/drawing/2014/main" id="{F56E5861-4948-480E-8F07-A62C94747EC9}"/>
+                <a16:creationId xmlns:a16="http://schemas.microsoft.com/office/drawing/2014/main" id="{AC17D3BF-BF30-40A7-B1AC-D00A1950B255}"/>
               </a:ext>
             </a:extLst>
           </p:cNvPr>
@@ -9505,7 +13917,7 @@
           <p:cNvPr id="69" name="">
             <a:extLst xmlns:a="http://schemas.openxmlformats.org/drawingml/2006/main">
               <a:ext uri="{FF2B5EF4-FFF2-40B4-BE49-F238E27FC236}">
-                <a16:creationId xmlns:a16="http://schemas.microsoft.com/office/drawing/2014/main" id="{433F8892-A149-4F46-BC38-46691BD9E041}"/>
+                <a16:creationId xmlns:a16="http://schemas.microsoft.com/office/drawing/2014/main" id="{BF5F2F52-37BA-4C3A-BE76-DA8B9821C202}"/>
               </a:ext>
             </a:extLst>
           </p:cNvPr>
@@ -9555,7 +13967,7 @@
           <p:cNvPr id="70" name="">
             <a:extLst xmlns:a="http://schemas.openxmlformats.org/drawingml/2006/main">
               <a:ext uri="{FF2B5EF4-FFF2-40B4-BE49-F238E27FC236}">
-                <a16:creationId xmlns:a16="http://schemas.microsoft.com/office/drawing/2014/main" id="{3B68B7E5-4440-4F77-9583-812785910FE1}"/>
+                <a16:creationId xmlns:a16="http://schemas.microsoft.com/office/drawing/2014/main" id="{A3BE14F2-0E72-4DBF-87EF-A2C13AB4C366}"/>
               </a:ext>
             </a:extLst>
           </p:cNvPr>
@@ -9588,7 +14000,7 @@
           <p:cNvPr id="71" name="">
             <a:extLst xmlns:a="http://schemas.openxmlformats.org/drawingml/2006/main">
               <a:ext uri="{FF2B5EF4-FFF2-40B4-BE49-F238E27FC236}">
-                <a16:creationId xmlns:a16="http://schemas.microsoft.com/office/drawing/2014/main" id="{40167947-70A2-4A80-BEB8-C20AAB49FA52}"/>
+                <a16:creationId xmlns:a16="http://schemas.microsoft.com/office/drawing/2014/main" id="{A06C8DA3-4955-41C6-B620-393F9D53FC9B}"/>
               </a:ext>
             </a:extLst>
           </p:cNvPr>
@@ -9638,7 +14050,7 @@
           <p:cNvPr id="72" name="">
             <a:extLst xmlns:a="http://schemas.openxmlformats.org/drawingml/2006/main">
               <a:ext uri="{FF2B5EF4-FFF2-40B4-BE49-F238E27FC236}">
-                <a16:creationId xmlns:a16="http://schemas.microsoft.com/office/drawing/2014/main" id="{FE4C1AFB-3255-44FB-B741-B46CB581C2A6}"/>
+                <a16:creationId xmlns:a16="http://schemas.microsoft.com/office/drawing/2014/main" id="{4DA3C306-649C-4321-B822-C6C291E40D96}"/>
               </a:ext>
             </a:extLst>
           </p:cNvPr>
@@ -9671,7 +14083,7 @@
           <p:cNvPr id="73" name="">
             <a:extLst xmlns:a="http://schemas.openxmlformats.org/drawingml/2006/main">
               <a:ext uri="{FF2B5EF4-FFF2-40B4-BE49-F238E27FC236}">
-                <a16:creationId xmlns:a16="http://schemas.microsoft.com/office/drawing/2014/main" id="{528D522F-3959-41B1-A52E-8B4454DBD98A}"/>
+                <a16:creationId xmlns:a16="http://schemas.microsoft.com/office/drawing/2014/main" id="{A1696001-0F8B-473E-BBDD-BDDC56C04F57}"/>
               </a:ext>
             </a:extLst>
           </p:cNvPr>
@@ -9721,7 +14133,7 @@
           <p:cNvPr id="74" name="">
             <a:extLst xmlns:a="http://schemas.openxmlformats.org/drawingml/2006/main">
               <a:ext uri="{FF2B5EF4-FFF2-40B4-BE49-F238E27FC236}">
-                <a16:creationId xmlns:a16="http://schemas.microsoft.com/office/drawing/2014/main" id="{7ED474BF-AB2C-45BB-921C-B49AC1A3D8E4}"/>
+                <a16:creationId xmlns:a16="http://schemas.microsoft.com/office/drawing/2014/main" id="{9A65F632-C6BB-4145-B51C-EC6E07478F0C}"/>
               </a:ext>
             </a:extLst>
           </p:cNvPr>
@@ -9754,7 +14166,7 @@
           <p:cNvPr id="75" name="">
             <a:extLst xmlns:a="http://schemas.openxmlformats.org/drawingml/2006/main">
               <a:ext uri="{FF2B5EF4-FFF2-40B4-BE49-F238E27FC236}">
-                <a16:creationId xmlns:a16="http://schemas.microsoft.com/office/drawing/2014/main" id="{CCCED6FF-2BAE-49D8-AB09-6397B5917A90}"/>
+                <a16:creationId xmlns:a16="http://schemas.microsoft.com/office/drawing/2014/main" id="{2250CC0C-4311-4211-B617-040EA0EF32D2}"/>
               </a:ext>
             </a:extLst>
           </p:cNvPr>
@@ -9804,7 +14216,7 @@
           <p:cNvPr id="76" name="">
             <a:extLst xmlns:a="http://schemas.openxmlformats.org/drawingml/2006/main">
               <a:ext uri="{FF2B5EF4-FFF2-40B4-BE49-F238E27FC236}">
-                <a16:creationId xmlns:a16="http://schemas.microsoft.com/office/drawing/2014/main" id="{D16809E4-3152-4B67-A078-3624D05B2B7A}"/>
+                <a16:creationId xmlns:a16="http://schemas.microsoft.com/office/drawing/2014/main" id="{A91FCCEB-4422-4E99-A81D-776DCB8103AE}"/>
               </a:ext>
             </a:extLst>
           </p:cNvPr>
@@ -9837,7 +14249,7 @@
           <p:cNvPr id="77" name="">
             <a:extLst xmlns:a="http://schemas.openxmlformats.org/drawingml/2006/main">
               <a:ext uri="{FF2B5EF4-FFF2-40B4-BE49-F238E27FC236}">
-                <a16:creationId xmlns:a16="http://schemas.microsoft.com/office/drawing/2014/main" id="{11AE70D1-5862-4F0A-9E1E-7830F787DCDC}"/>
+                <a16:creationId xmlns:a16="http://schemas.microsoft.com/office/drawing/2014/main" id="{7FE2FD8F-C1CC-476B-95AF-A37ADABFEB15}"/>
               </a:ext>
             </a:extLst>
           </p:cNvPr>
@@ -9887,7 +14299,7 @@
           <p:cNvPr id="78" name="">
             <a:extLst xmlns:a="http://schemas.openxmlformats.org/drawingml/2006/main">
               <a:ext uri="{FF2B5EF4-FFF2-40B4-BE49-F238E27FC236}">
-                <a16:creationId xmlns:a16="http://schemas.microsoft.com/office/drawing/2014/main" id="{1CC93FB8-AC91-47A7-9E8E-C7BF7D3B5A2E}"/>
+                <a16:creationId xmlns:a16="http://schemas.microsoft.com/office/drawing/2014/main" id="{41A10E58-02BB-4485-B15A-F12BACAE2E3F}"/>
               </a:ext>
             </a:extLst>
           </p:cNvPr>
@@ -9920,7 +14332,7 @@
           <p:cNvPr id="79" name="">
             <a:extLst xmlns:a="http://schemas.openxmlformats.org/drawingml/2006/main">
               <a:ext uri="{FF2B5EF4-FFF2-40B4-BE49-F238E27FC236}">
-                <a16:creationId xmlns:a16="http://schemas.microsoft.com/office/drawing/2014/main" id="{6EE82E63-369F-4169-AC54-2BDCFB019A32}"/>
+                <a16:creationId xmlns:a16="http://schemas.microsoft.com/office/drawing/2014/main" id="{69762140-263C-429A-8B0F-7223AB2C0AA7}"/>
               </a:ext>
             </a:extLst>
           </p:cNvPr>
@@ -9970,7 +14382,7 @@
           <p:cNvPr id="80" name="">
             <a:extLst xmlns:a="http://schemas.openxmlformats.org/drawingml/2006/main">
               <a:ext uri="{FF2B5EF4-FFF2-40B4-BE49-F238E27FC236}">
-                <a16:creationId xmlns:a16="http://schemas.microsoft.com/office/drawing/2014/main" id="{45F91FDB-03B5-43F4-913D-3D4B156CD36A}"/>
+                <a16:creationId xmlns:a16="http://schemas.microsoft.com/office/drawing/2014/main" id="{5E844574-2781-45CA-B611-6FA4C52E4347}"/>
               </a:ext>
             </a:extLst>
           </p:cNvPr>
@@ -10003,7 +14415,7 @@
           <p:cNvPr id="81" name="">
             <a:extLst xmlns:a="http://schemas.openxmlformats.org/drawingml/2006/main">
               <a:ext uri="{FF2B5EF4-FFF2-40B4-BE49-F238E27FC236}">
-                <a16:creationId xmlns:a16="http://schemas.microsoft.com/office/drawing/2014/main" id="{581EBAD5-D970-45C2-9164-4EE92A61D5D1}"/>
+                <a16:creationId xmlns:a16="http://schemas.microsoft.com/office/drawing/2014/main" id="{485A1B49-513B-45B5-8742-9567D62FA2EE}"/>
               </a:ext>
             </a:extLst>
           </p:cNvPr>
@@ -10053,7 +14465,7 @@
           <p:cNvPr id="82" name="">
             <a:extLst xmlns:a="http://schemas.openxmlformats.org/drawingml/2006/main">
               <a:ext uri="{FF2B5EF4-FFF2-40B4-BE49-F238E27FC236}">
-                <a16:creationId xmlns:a16="http://schemas.microsoft.com/office/drawing/2014/main" id="{DB209CC0-D4CD-40B2-96C5-8F678A7B3EF4}"/>
+                <a16:creationId xmlns:a16="http://schemas.microsoft.com/office/drawing/2014/main" id="{A9A02031-EF00-4500-8E57-41583C4D9A23}"/>
               </a:ext>
             </a:extLst>
           </p:cNvPr>
@@ -10086,7 +14498,7 @@
           <p:cNvPr id="83" name="">
             <a:extLst xmlns:a="http://schemas.openxmlformats.org/drawingml/2006/main">
               <a:ext uri="{FF2B5EF4-FFF2-40B4-BE49-F238E27FC236}">
-                <a16:creationId xmlns:a16="http://schemas.microsoft.com/office/drawing/2014/main" id="{3B7F00D3-07B8-4ADB-AEB1-C94732D00731}"/>
+                <a16:creationId xmlns:a16="http://schemas.microsoft.com/office/drawing/2014/main" id="{617BE262-1B63-4210-AC7B-32255D033961}"/>
               </a:ext>
             </a:extLst>
           </p:cNvPr>
@@ -10136,7 +14548,7 @@
           <p:cNvPr id="84" name="">
             <a:extLst xmlns:a="http://schemas.openxmlformats.org/drawingml/2006/main">
               <a:ext uri="{FF2B5EF4-FFF2-40B4-BE49-F238E27FC236}">
-                <a16:creationId xmlns:a16="http://schemas.microsoft.com/office/drawing/2014/main" id="{2F1BD8F3-533E-44E8-91C4-42E21BA9CB50}"/>
+                <a16:creationId xmlns:a16="http://schemas.microsoft.com/office/drawing/2014/main" id="{684287B2-D2D1-41C2-AA88-3DB5999DBD66}"/>
               </a:ext>
             </a:extLst>
           </p:cNvPr>
@@ -10169,7 +14581,7 @@
           <p:cNvPr id="85" name="">
             <a:extLst xmlns:a="http://schemas.openxmlformats.org/drawingml/2006/main">
               <a:ext uri="{FF2B5EF4-FFF2-40B4-BE49-F238E27FC236}">
-                <a16:creationId xmlns:a16="http://schemas.microsoft.com/office/drawing/2014/main" id="{E9E8B8EE-F864-4B95-A020-665EE8541361}"/>
+                <a16:creationId xmlns:a16="http://schemas.microsoft.com/office/drawing/2014/main" id="{BA541A89-C67D-4891-9218-02E99FDB0706}"/>
               </a:ext>
             </a:extLst>
           </p:cNvPr>
@@ -10219,7 +14631,7 @@
           <p:cNvPr id="86" name="">
             <a:extLst xmlns:a="http://schemas.openxmlformats.org/drawingml/2006/main">
               <a:ext uri="{FF2B5EF4-FFF2-40B4-BE49-F238E27FC236}">
-                <a16:creationId xmlns:a16="http://schemas.microsoft.com/office/drawing/2014/main" id="{BF36E7FD-7E27-4EE4-A0C0-FBCAEEDA76B6}"/>
+                <a16:creationId xmlns:a16="http://schemas.microsoft.com/office/drawing/2014/main" id="{7879AEC6-C57C-4948-B244-B18CBD747333}"/>
               </a:ext>
             </a:extLst>
           </p:cNvPr>
@@ -10252,7 +14664,7 @@
           <p:cNvPr id="87" name="">
             <a:extLst xmlns:a="http://schemas.openxmlformats.org/drawingml/2006/main">
               <a:ext uri="{FF2B5EF4-FFF2-40B4-BE49-F238E27FC236}">
-                <a16:creationId xmlns:a16="http://schemas.microsoft.com/office/drawing/2014/main" id="{9C9AA3C8-9CAD-4B85-8312-2FC6DB1114E9}"/>
+                <a16:creationId xmlns:a16="http://schemas.microsoft.com/office/drawing/2014/main" id="{6F257AF0-4627-4F6D-B740-7B8D024483A3}"/>
               </a:ext>
             </a:extLst>
           </p:cNvPr>
@@ -10302,7 +14714,7 @@
           <p:cNvPr id="88" name="">
             <a:extLst xmlns:a="http://schemas.openxmlformats.org/drawingml/2006/main">
               <a:ext uri="{FF2B5EF4-FFF2-40B4-BE49-F238E27FC236}">
-                <a16:creationId xmlns:a16="http://schemas.microsoft.com/office/drawing/2014/main" id="{67BEFE44-884A-4F1B-9ED0-8389928D3D10}"/>
+                <a16:creationId xmlns:a16="http://schemas.microsoft.com/office/drawing/2014/main" id="{AFF33D8C-F04B-4B18-A065-4F717F8F4FAD}"/>
               </a:ext>
             </a:extLst>
           </p:cNvPr>
@@ -10335,7 +14747,7 @@
           <p:cNvPr id="89" name="">
             <a:extLst xmlns:a="http://schemas.openxmlformats.org/drawingml/2006/main">
               <a:ext uri="{FF2B5EF4-FFF2-40B4-BE49-F238E27FC236}">
-                <a16:creationId xmlns:a16="http://schemas.microsoft.com/office/drawing/2014/main" id="{4A6DD308-2C68-433C-8F3A-A3B3350ADB21}"/>
+                <a16:creationId xmlns:a16="http://schemas.microsoft.com/office/drawing/2014/main" id="{3F3A2C14-8A26-431E-825B-1E82FC7ED751}"/>
               </a:ext>
             </a:extLst>
           </p:cNvPr>
@@ -10385,7 +14797,7 @@
           <p:cNvPr id="90" name="">
             <a:extLst xmlns:a="http://schemas.openxmlformats.org/drawingml/2006/main">
               <a:ext uri="{FF2B5EF4-FFF2-40B4-BE49-F238E27FC236}">
-                <a16:creationId xmlns:a16="http://schemas.microsoft.com/office/drawing/2014/main" id="{39B4019A-2A8B-46A5-822F-1C321BE38D3D}"/>
+                <a16:creationId xmlns:a16="http://schemas.microsoft.com/office/drawing/2014/main" id="{A33CAE6B-273C-4CD4-B8E5-F20CE0BCBABA}"/>
               </a:ext>
             </a:extLst>
           </p:cNvPr>
@@ -10435,7 +14847,7 @@
           <p:cNvPr id="91" name="">
             <a:extLst xmlns:a="http://schemas.openxmlformats.org/drawingml/2006/main">
               <a:ext uri="{FF2B5EF4-FFF2-40B4-BE49-F238E27FC236}">
-                <a16:creationId xmlns:a16="http://schemas.microsoft.com/office/drawing/2014/main" id="{31B4B882-5DA1-43DE-82B4-314CBCAFB357}"/>
+                <a16:creationId xmlns:a16="http://schemas.microsoft.com/office/drawing/2014/main" id="{3073695E-DD6E-4A43-8537-927C91AF785E}"/>
               </a:ext>
             </a:extLst>
           </p:cNvPr>
@@ -10483,7 +14895,7 @@
     </p:spTree>
     <p:extLst>
       <p:ext uri="{BB962C8B-B14F-4D97-AF65-F5344CB8AC3E}">
-        <p14:creationId xmlns:p14="http://schemas.microsoft.com/office/powerpoint/2010/main" val="1864194922"/>
+        <p14:creationId xmlns:p14="http://schemas.microsoft.com/office/powerpoint/2010/main" val="524495134"/>
       </p:ext>
     </p:extLst>
   </p:cSld>
@@ -10514,7 +14926,7 @@
           <p:cNvPr id="1" name="">
             <a:extLst xmlns:a="http://schemas.openxmlformats.org/drawingml/2006/main">
               <a:ext uri="{FF2B5EF4-FFF2-40B4-BE49-F238E27FC236}">
-                <a16:creationId xmlns:a16="http://schemas.microsoft.com/office/drawing/2014/main" id="{A5356A93-56B2-44CB-95A7-4DF458ADF348}"/>
+                <a16:creationId xmlns:a16="http://schemas.microsoft.com/office/drawing/2014/main" id="{AAFB6FDA-5127-417C-B4E1-B00B6EF663F2}"/>
               </a:ext>
             </a:extLst>
           </p:cNvPr>
@@ -10564,7 +14976,7 @@
           <p:cNvPr id="2" name="">
             <a:extLst xmlns:a="http://schemas.openxmlformats.org/drawingml/2006/main">
               <a:ext uri="{FF2B5EF4-FFF2-40B4-BE49-F238E27FC236}">
-                <a16:creationId xmlns:a16="http://schemas.microsoft.com/office/drawing/2014/main" id="{58CAB48A-3999-45F6-BB91-6E98013FAF8F}"/>
+                <a16:creationId xmlns:a16="http://schemas.microsoft.com/office/drawing/2014/main" id="{ED766542-ACC4-405E-89BF-0CFCCA694484}"/>
               </a:ext>
             </a:extLst>
           </p:cNvPr>
@@ -10614,7 +15026,7 @@
           <p:cNvPr id="3" name="">
             <a:extLst xmlns:a="http://schemas.openxmlformats.org/drawingml/2006/main">
               <a:ext uri="{FF2B5EF4-FFF2-40B4-BE49-F238E27FC236}">
-                <a16:creationId xmlns:a16="http://schemas.microsoft.com/office/drawing/2014/main" id="{F2E0E6CB-AE91-4934-9784-89B3A6233EED}"/>
+                <a16:creationId xmlns:a16="http://schemas.microsoft.com/office/drawing/2014/main" id="{587C1636-D6A2-435C-A61A-B24D80A2EB46}"/>
               </a:ext>
             </a:extLst>
           </p:cNvPr>
@@ -10647,7 +15059,7 @@
           <p:cNvPr id="4" name="">
             <a:extLst xmlns:a="http://schemas.openxmlformats.org/drawingml/2006/main">
               <a:ext uri="{FF2B5EF4-FFF2-40B4-BE49-F238E27FC236}">
-                <a16:creationId xmlns:a16="http://schemas.microsoft.com/office/drawing/2014/main" id="{DACD0FE0-AAE7-43FD-8F83-83FC2FEC82D5}"/>
+                <a16:creationId xmlns:a16="http://schemas.microsoft.com/office/drawing/2014/main" id="{55B7A710-D1A0-4EAA-9D64-D47FF41010E0}"/>
               </a:ext>
             </a:extLst>
           </p:cNvPr>
@@ -10697,7 +15109,7 @@
           <p:cNvPr id="5" name="">
             <a:extLst xmlns:a="http://schemas.openxmlformats.org/drawingml/2006/main">
               <a:ext uri="{FF2B5EF4-FFF2-40B4-BE49-F238E27FC236}">
-                <a16:creationId xmlns:a16="http://schemas.microsoft.com/office/drawing/2014/main" id="{CF955838-C397-4473-A8A2-32058FA29D2D}"/>
+                <a16:creationId xmlns:a16="http://schemas.microsoft.com/office/drawing/2014/main" id="{1AB243E8-9BB2-4FCE-B5DA-201363E668A3}"/>
               </a:ext>
             </a:extLst>
           </p:cNvPr>
@@ -10730,7 +15142,7 @@
           <p:cNvPr id="6" name="">
             <a:extLst xmlns:a="http://schemas.openxmlformats.org/drawingml/2006/main">
               <a:ext uri="{FF2B5EF4-FFF2-40B4-BE49-F238E27FC236}">
-                <a16:creationId xmlns:a16="http://schemas.microsoft.com/office/drawing/2014/main" id="{C3AAAD3A-61DD-4A34-9D1C-61CDC6CAFDA2}"/>
+                <a16:creationId xmlns:a16="http://schemas.microsoft.com/office/drawing/2014/main" id="{976876EE-0499-486E-A80B-F5B8BA81B04C}"/>
               </a:ext>
             </a:extLst>
           </p:cNvPr>
@@ -10780,7 +15192,7 @@
           <p:cNvPr id="7" name="">
             <a:extLst xmlns:a="http://schemas.openxmlformats.org/drawingml/2006/main">
               <a:ext uri="{FF2B5EF4-FFF2-40B4-BE49-F238E27FC236}">
-                <a16:creationId xmlns:a16="http://schemas.microsoft.com/office/drawing/2014/main" id="{9E5A0CFA-4D90-41E1-AEA5-E6783EFB504D}"/>
+                <a16:creationId xmlns:a16="http://schemas.microsoft.com/office/drawing/2014/main" id="{67630F5C-64F9-40AC-BC31-C2DAA7C7B831}"/>
               </a:ext>
             </a:extLst>
           </p:cNvPr>
@@ -10830,7 +15242,7 @@
           <p:cNvPr id="8" name="">
             <a:extLst xmlns:a="http://schemas.openxmlformats.org/drawingml/2006/main">
               <a:ext uri="{FF2B5EF4-FFF2-40B4-BE49-F238E27FC236}">
-                <a16:creationId xmlns:a16="http://schemas.microsoft.com/office/drawing/2014/main" id="{EAC98E04-C015-4430-80F2-6287E8181527}"/>
+                <a16:creationId xmlns:a16="http://schemas.microsoft.com/office/drawing/2014/main" id="{823C0853-84C5-4C49-8947-91E41DED9182}"/>
               </a:ext>
             </a:extLst>
           </p:cNvPr>
@@ -10880,7 +15292,7 @@
           <p:cNvPr id="9" name="">
             <a:extLst xmlns:a="http://schemas.openxmlformats.org/drawingml/2006/main">
               <a:ext uri="{FF2B5EF4-FFF2-40B4-BE49-F238E27FC236}">
-                <a16:creationId xmlns:a16="http://schemas.microsoft.com/office/drawing/2014/main" id="{BD6DAACA-9F26-40EB-A8F9-268CD10D2239}"/>
+                <a16:creationId xmlns:a16="http://schemas.microsoft.com/office/drawing/2014/main" id="{C9911F00-154A-49BB-A971-53D6C1AA0267}"/>
               </a:ext>
             </a:extLst>
           </p:cNvPr>
@@ -10930,7 +15342,7 @@
           <p:cNvPr id="10" name="">
             <a:extLst xmlns:a="http://schemas.openxmlformats.org/drawingml/2006/main">
               <a:ext uri="{FF2B5EF4-FFF2-40B4-BE49-F238E27FC236}">
-                <a16:creationId xmlns:a16="http://schemas.microsoft.com/office/drawing/2014/main" id="{F2621716-5028-4494-BB5D-6AA3B233D33A}"/>
+                <a16:creationId xmlns:a16="http://schemas.microsoft.com/office/drawing/2014/main" id="{32E55758-DFB1-4BC7-A5BB-4D830E85F491}"/>
               </a:ext>
             </a:extLst>
           </p:cNvPr>
@@ -10963,7 +15375,7 @@
           <p:cNvPr id="11" name="">
             <a:extLst xmlns:a="http://schemas.openxmlformats.org/drawingml/2006/main">
               <a:ext uri="{FF2B5EF4-FFF2-40B4-BE49-F238E27FC236}">
-                <a16:creationId xmlns:a16="http://schemas.microsoft.com/office/drawing/2014/main" id="{002B8D39-C5A5-456C-8550-F276002DF410}"/>
+                <a16:creationId xmlns:a16="http://schemas.microsoft.com/office/drawing/2014/main" id="{2D1611F2-9424-42F7-A438-3A85321BC9AD}"/>
               </a:ext>
             </a:extLst>
           </p:cNvPr>
@@ -11013,7 +15425,7 @@
           <p:cNvPr id="12" name="">
             <a:extLst xmlns:a="http://schemas.openxmlformats.org/drawingml/2006/main">
               <a:ext uri="{FF2B5EF4-FFF2-40B4-BE49-F238E27FC236}">
-                <a16:creationId xmlns:a16="http://schemas.microsoft.com/office/drawing/2014/main" id="{9A160EDA-7075-49A2-8433-F8C79A7B00C2}"/>
+                <a16:creationId xmlns:a16="http://schemas.microsoft.com/office/drawing/2014/main" id="{FC56FF55-5469-4022-9AD5-D513D941B3F9}"/>
               </a:ext>
             </a:extLst>
           </p:cNvPr>
@@ -11063,7 +15475,7 @@
           <p:cNvPr id="13" name="">
             <a:extLst xmlns:a="http://schemas.openxmlformats.org/drawingml/2006/main">
               <a:ext uri="{FF2B5EF4-FFF2-40B4-BE49-F238E27FC236}">
-                <a16:creationId xmlns:a16="http://schemas.microsoft.com/office/drawing/2014/main" id="{75ED31A8-1F6A-4F82-A5BC-B810373AD23F}"/>
+                <a16:creationId xmlns:a16="http://schemas.microsoft.com/office/drawing/2014/main" id="{DFEB80DA-3C73-4C66-90B7-62765406494C}"/>
               </a:ext>
             </a:extLst>
           </p:cNvPr>
@@ -11113,7 +15525,7 @@
           <p:cNvPr id="14" name="">
             <a:extLst xmlns:a="http://schemas.openxmlformats.org/drawingml/2006/main">
               <a:ext uri="{FF2B5EF4-FFF2-40B4-BE49-F238E27FC236}">
-                <a16:creationId xmlns:a16="http://schemas.microsoft.com/office/drawing/2014/main" id="{CDD1D59B-72AD-4544-80F8-B3D809089F9D}"/>
+                <a16:creationId xmlns:a16="http://schemas.microsoft.com/office/drawing/2014/main" id="{E33F11E8-0A6B-403D-957C-2835F4AB9C98}"/>
               </a:ext>
             </a:extLst>
           </p:cNvPr>
@@ -11163,7 +15575,7 @@
           <p:cNvPr id="15" name="">
             <a:extLst xmlns:a="http://schemas.openxmlformats.org/drawingml/2006/main">
               <a:ext uri="{FF2B5EF4-FFF2-40B4-BE49-F238E27FC236}">
-                <a16:creationId xmlns:a16="http://schemas.microsoft.com/office/drawing/2014/main" id="{2CA2FF87-5602-46FB-ACCD-DA0F322FBB6F}"/>
+                <a16:creationId xmlns:a16="http://schemas.microsoft.com/office/drawing/2014/main" id="{B87E2CF2-97C9-4FCE-AC4F-F3CF487D4183}"/>
               </a:ext>
             </a:extLst>
           </p:cNvPr>
@@ -11196,7 +15608,7 @@
           <p:cNvPr id="16" name="">
             <a:extLst xmlns:a="http://schemas.openxmlformats.org/drawingml/2006/main">
               <a:ext uri="{FF2B5EF4-FFF2-40B4-BE49-F238E27FC236}">
-                <a16:creationId xmlns:a16="http://schemas.microsoft.com/office/drawing/2014/main" id="{149DAFAE-0EDC-4706-8566-B305C9C394A1}"/>
+                <a16:creationId xmlns:a16="http://schemas.microsoft.com/office/drawing/2014/main" id="{6DA6F603-F1E8-4FF2-BB2E-4B4676F39D57}"/>
               </a:ext>
             </a:extLst>
           </p:cNvPr>
@@ -11246,7 +15658,7 @@
           <p:cNvPr id="17" name="">
             <a:extLst xmlns:a="http://schemas.openxmlformats.org/drawingml/2006/main">
               <a:ext uri="{FF2B5EF4-FFF2-40B4-BE49-F238E27FC236}">
-                <a16:creationId xmlns:a16="http://schemas.microsoft.com/office/drawing/2014/main" id="{1BBB7CDE-9720-438B-9E84-865E852C911B}"/>
+                <a16:creationId xmlns:a16="http://schemas.microsoft.com/office/drawing/2014/main" id="{5B2B86FD-66BC-483A-AF8E-88F99A8162F8}"/>
               </a:ext>
             </a:extLst>
           </p:cNvPr>
@@ -11296,7 +15708,7 @@
           <p:cNvPr id="18" name="">
             <a:extLst xmlns:a="http://schemas.openxmlformats.org/drawingml/2006/main">
               <a:ext uri="{FF2B5EF4-FFF2-40B4-BE49-F238E27FC236}">
-                <a16:creationId xmlns:a16="http://schemas.microsoft.com/office/drawing/2014/main" id="{C72BD65B-006D-45F0-8453-C5E6D1447233}"/>
+                <a16:creationId xmlns:a16="http://schemas.microsoft.com/office/drawing/2014/main" id="{3F03560D-4374-4AE5-A1FC-41B2FBF0389B}"/>
               </a:ext>
             </a:extLst>
           </p:cNvPr>
@@ -11346,7 +15758,7 @@
           <p:cNvPr id="19" name="">
             <a:extLst xmlns:a="http://schemas.openxmlformats.org/drawingml/2006/main">
               <a:ext uri="{FF2B5EF4-FFF2-40B4-BE49-F238E27FC236}">
-                <a16:creationId xmlns:a16="http://schemas.microsoft.com/office/drawing/2014/main" id="{0209BCE6-6DDB-47B5-B970-D8608C59790E}"/>
+                <a16:creationId xmlns:a16="http://schemas.microsoft.com/office/drawing/2014/main" id="{58CD7D1F-AAA9-4310-967F-670234CB07A7}"/>
               </a:ext>
             </a:extLst>
           </p:cNvPr>
@@ -11396,7 +15808,7 @@
           <p:cNvPr id="20" name="">
             <a:extLst xmlns:a="http://schemas.openxmlformats.org/drawingml/2006/main">
               <a:ext uri="{FF2B5EF4-FFF2-40B4-BE49-F238E27FC236}">
-                <a16:creationId xmlns:a16="http://schemas.microsoft.com/office/drawing/2014/main" id="{B4501158-D579-47A0-B015-53086A8CCFA0}"/>
+                <a16:creationId xmlns:a16="http://schemas.microsoft.com/office/drawing/2014/main" id="{B90CB5BA-0A8B-44F1-9C30-0C1B143BEA4B}"/>
               </a:ext>
             </a:extLst>
           </p:cNvPr>
@@ -11429,7 +15841,7 @@
           <p:cNvPr id="21" name="">
             <a:extLst xmlns:a="http://schemas.openxmlformats.org/drawingml/2006/main">
               <a:ext uri="{FF2B5EF4-FFF2-40B4-BE49-F238E27FC236}">
-                <a16:creationId xmlns:a16="http://schemas.microsoft.com/office/drawing/2014/main" id="{22BA8A57-E475-4E5B-B5FE-2A3FA69F4FF3}"/>
+                <a16:creationId xmlns:a16="http://schemas.microsoft.com/office/drawing/2014/main" id="{EC918346-9F40-4DEB-8BAA-EC451DEAE3BF}"/>
               </a:ext>
             </a:extLst>
           </p:cNvPr>
@@ -11479,7 +15891,7 @@
           <p:cNvPr id="22" name="">
             <a:extLst xmlns:a="http://schemas.openxmlformats.org/drawingml/2006/main">
               <a:ext uri="{FF2B5EF4-FFF2-40B4-BE49-F238E27FC236}">
-                <a16:creationId xmlns:a16="http://schemas.microsoft.com/office/drawing/2014/main" id="{A0A9326B-CFA0-4D69-9A7B-A53D54E143D3}"/>
+                <a16:creationId xmlns:a16="http://schemas.microsoft.com/office/drawing/2014/main" id="{AE7AAFAA-199D-4297-8283-2ADA16D02628}"/>
               </a:ext>
             </a:extLst>
           </p:cNvPr>
@@ -11529,7 +15941,7 @@
           <p:cNvPr id="23" name="">
             <a:extLst xmlns:a="http://schemas.openxmlformats.org/drawingml/2006/main">
               <a:ext uri="{FF2B5EF4-FFF2-40B4-BE49-F238E27FC236}">
-                <a16:creationId xmlns:a16="http://schemas.microsoft.com/office/drawing/2014/main" id="{DEB7F145-8C14-4A39-A529-F5C44657890F}"/>
+                <a16:creationId xmlns:a16="http://schemas.microsoft.com/office/drawing/2014/main" id="{FD0ECD18-1FF1-43FA-9508-A0AA7D65E87F}"/>
               </a:ext>
             </a:extLst>
           </p:cNvPr>
@@ -11579,7 +15991,7 @@
           <p:cNvPr id="24" name="">
             <a:extLst xmlns:a="http://schemas.openxmlformats.org/drawingml/2006/main">
               <a:ext uri="{FF2B5EF4-FFF2-40B4-BE49-F238E27FC236}">
-                <a16:creationId xmlns:a16="http://schemas.microsoft.com/office/drawing/2014/main" id="{2098B29C-01A0-4C94-B344-AE41A469124F}"/>
+                <a16:creationId xmlns:a16="http://schemas.microsoft.com/office/drawing/2014/main" id="{B92CDC30-A2CB-4885-BBE1-4046323B3280}"/>
               </a:ext>
             </a:extLst>
           </p:cNvPr>
@@ -11629,7 +16041,7 @@
           <p:cNvPr id="25" name="">
             <a:extLst xmlns:a="http://schemas.openxmlformats.org/drawingml/2006/main">
               <a:ext uri="{FF2B5EF4-FFF2-40B4-BE49-F238E27FC236}">
-                <a16:creationId xmlns:a16="http://schemas.microsoft.com/office/drawing/2014/main" id="{EE5757E2-1939-4675-8362-D8B2AA33352C}"/>
+                <a16:creationId xmlns:a16="http://schemas.microsoft.com/office/drawing/2014/main" id="{A99EBCDC-4287-4216-B1E4-F257C5609821}"/>
               </a:ext>
             </a:extLst>
           </p:cNvPr>
@@ -11679,7 +16091,7 @@
           <p:cNvPr id="26" name="">
             <a:extLst xmlns:a="http://schemas.openxmlformats.org/drawingml/2006/main">
               <a:ext uri="{FF2B5EF4-FFF2-40B4-BE49-F238E27FC236}">
-                <a16:creationId xmlns:a16="http://schemas.microsoft.com/office/drawing/2014/main" id="{893F674D-DEAE-486A-AC78-9BBA3B8051A8}"/>
+                <a16:creationId xmlns:a16="http://schemas.microsoft.com/office/drawing/2014/main" id="{8978A520-3668-4CEC-BDD9-AF88D87E1EF7}"/>
               </a:ext>
             </a:extLst>
           </p:cNvPr>
@@ -11727,7 +16139,7 @@
     </p:spTree>
     <p:extLst>
       <p:ext uri="{BB962C8B-B14F-4D97-AF65-F5344CB8AC3E}">
-        <p14:creationId xmlns:p14="http://schemas.microsoft.com/office/powerpoint/2010/main" val="89678040"/>
+        <p14:creationId xmlns:p14="http://schemas.microsoft.com/office/powerpoint/2010/main" val="1260737409"/>
       </p:ext>
     </p:extLst>
   </p:cSld>
@@ -11758,7 +16170,7 @@
           <p:cNvPr id="1" name="">
             <a:extLst xmlns:a="http://schemas.openxmlformats.org/drawingml/2006/main">
               <a:ext uri="{FF2B5EF4-FFF2-40B4-BE49-F238E27FC236}">
-                <a16:creationId xmlns:a16="http://schemas.microsoft.com/office/drawing/2014/main" id="{77F2A3F0-A1AA-4151-B86E-9410C9BBF8F1}"/>
+                <a16:creationId xmlns:a16="http://schemas.microsoft.com/office/drawing/2014/main" id="{DB3DF3D0-D983-4929-9EC9-52CF72CD7588}"/>
               </a:ext>
             </a:extLst>
           </p:cNvPr>
@@ -11808,7 +16220,7 @@
           <p:cNvPr id="2" name="">
             <a:extLst xmlns:a="http://schemas.openxmlformats.org/drawingml/2006/main">
               <a:ext uri="{FF2B5EF4-FFF2-40B4-BE49-F238E27FC236}">
-                <a16:creationId xmlns:a16="http://schemas.microsoft.com/office/drawing/2014/main" id="{98497677-A27F-49DB-A119-1F67E05CE616}"/>
+                <a16:creationId xmlns:a16="http://schemas.microsoft.com/office/drawing/2014/main" id="{4C3D5E02-4AA2-4684-9402-214ABBA16E72}"/>
               </a:ext>
             </a:extLst>
           </p:cNvPr>
@@ -11858,7 +16270,7 @@
           <p:cNvPr id="3" name="">
             <a:extLst xmlns:a="http://schemas.openxmlformats.org/drawingml/2006/main">
               <a:ext uri="{FF2B5EF4-FFF2-40B4-BE49-F238E27FC236}">
-                <a16:creationId xmlns:a16="http://schemas.microsoft.com/office/drawing/2014/main" id="{A5B9DBB0-5206-48D6-B01E-1E5DCC6B8F33}"/>
+                <a16:creationId xmlns:a16="http://schemas.microsoft.com/office/drawing/2014/main" id="{317C6E8F-6D3A-43CA-94A4-87A7229D6686}"/>
               </a:ext>
             </a:extLst>
           </p:cNvPr>
@@ -11895,7 +16307,7 @@
           <p:nvPr/>
         </p:nvPicPr>
         <p:blipFill>
-          <a:blip xmlns:r="http://schemas.openxmlformats.org/officeDocument/2006/relationships" xmlns:a="http://schemas.openxmlformats.org/drawingml/2006/main" r:embed="Rdf11fe93aa9a4736"/>
+          <a:blip xmlns:r="http://schemas.openxmlformats.org/officeDocument/2006/relationships" xmlns:a="http://schemas.openxmlformats.org/drawingml/2006/main" r:embed="R28c0f13b6a214797"/>
           <a:stretch xmlns:a="http://schemas.openxmlformats.org/drawingml/2006/main"/>
         </p:blipFill>
         <p:spPr>
@@ -11913,7 +16325,7 @@
           <p:cNvPr id="5" name="">
             <a:extLst xmlns:a="http://schemas.openxmlformats.org/drawingml/2006/main">
               <a:ext uri="{FF2B5EF4-FFF2-40B4-BE49-F238E27FC236}">
-                <a16:creationId xmlns:a16="http://schemas.microsoft.com/office/drawing/2014/main" id="{DAEBDE69-05B1-4703-A71E-E832F3EA6382}"/>
+                <a16:creationId xmlns:a16="http://schemas.microsoft.com/office/drawing/2014/main" id="{AB44F05E-9E3C-4830-81A6-87772E53D4BB}"/>
               </a:ext>
             </a:extLst>
           </p:cNvPr>
@@ -11946,7 +16358,7 @@
           <p:cNvPr id="6" name="">
             <a:extLst xmlns:a="http://schemas.openxmlformats.org/drawingml/2006/main">
               <a:ext uri="{FF2B5EF4-FFF2-40B4-BE49-F238E27FC236}">
-                <a16:creationId xmlns:a16="http://schemas.microsoft.com/office/drawing/2014/main" id="{1CBA1087-AC0D-40C5-96C2-84A14DC522B8}"/>
+                <a16:creationId xmlns:a16="http://schemas.microsoft.com/office/drawing/2014/main" id="{CCD01588-74E4-4BDE-84E5-D87B2E653EA3}"/>
               </a:ext>
             </a:extLst>
           </p:cNvPr>
@@ -11996,7 +16408,7 @@
           <p:cNvPr id="7" name="">
             <a:extLst xmlns:a="http://schemas.openxmlformats.org/drawingml/2006/main">
               <a:ext uri="{FF2B5EF4-FFF2-40B4-BE49-F238E27FC236}">
-                <a16:creationId xmlns:a16="http://schemas.microsoft.com/office/drawing/2014/main" id="{BF600BCE-48AA-4807-A64A-CC5E18C3969D}"/>
+                <a16:creationId xmlns:a16="http://schemas.microsoft.com/office/drawing/2014/main" id="{BA7A5BCC-206F-4FF1-B99E-5C7EEF628C64}"/>
               </a:ext>
             </a:extLst>
           </p:cNvPr>
@@ -12029,7 +16441,7 @@
           <p:cNvPr id="8" name="">
             <a:extLst xmlns:a="http://schemas.openxmlformats.org/drawingml/2006/main">
               <a:ext uri="{FF2B5EF4-FFF2-40B4-BE49-F238E27FC236}">
-                <a16:creationId xmlns:a16="http://schemas.microsoft.com/office/drawing/2014/main" id="{E6A6B2F2-893C-41EB-8D92-6A827692B1CA}"/>
+                <a16:creationId xmlns:a16="http://schemas.microsoft.com/office/drawing/2014/main" id="{B9BB54D0-9AC1-4B31-872B-85D880FA99D8}"/>
               </a:ext>
             </a:extLst>
           </p:cNvPr>
@@ -12079,7 +16491,7 @@
           <p:cNvPr id="9" name="">
             <a:extLst xmlns:a="http://schemas.openxmlformats.org/drawingml/2006/main">
               <a:ext uri="{FF2B5EF4-FFF2-40B4-BE49-F238E27FC236}">
-                <a16:creationId xmlns:a16="http://schemas.microsoft.com/office/drawing/2014/main" id="{B72F9C5A-DBD0-4CBE-813E-E53416C4FFA9}"/>
+                <a16:creationId xmlns:a16="http://schemas.microsoft.com/office/drawing/2014/main" id="{FFA62F54-4FC9-4F3B-AF4E-7083D5DDB6AD}"/>
               </a:ext>
             </a:extLst>
           </p:cNvPr>
@@ -12112,7 +16524,7 @@
           <p:cNvPr id="10" name="">
             <a:extLst xmlns:a="http://schemas.openxmlformats.org/drawingml/2006/main">
               <a:ext uri="{FF2B5EF4-FFF2-40B4-BE49-F238E27FC236}">
-                <a16:creationId xmlns:a16="http://schemas.microsoft.com/office/drawing/2014/main" id="{E267FCD1-C28E-46E7-953B-D1F33ECA3FF8}"/>
+                <a16:creationId xmlns:a16="http://schemas.microsoft.com/office/drawing/2014/main" id="{F91F59C9-1D50-4F8F-88C4-9B344C91B11C}"/>
               </a:ext>
             </a:extLst>
           </p:cNvPr>
@@ -12162,7 +16574,7 @@
           <p:cNvPr id="11" name="">
             <a:extLst xmlns:a="http://schemas.openxmlformats.org/drawingml/2006/main">
               <a:ext uri="{FF2B5EF4-FFF2-40B4-BE49-F238E27FC236}">
-                <a16:creationId xmlns:a16="http://schemas.microsoft.com/office/drawing/2014/main" id="{8750E445-FF43-476B-B410-92F776B12AAD}"/>
+                <a16:creationId xmlns:a16="http://schemas.microsoft.com/office/drawing/2014/main" id="{2D1F072C-8C33-4106-B560-5B894462A1FF}"/>
               </a:ext>
             </a:extLst>
           </p:cNvPr>
@@ -12195,7 +16607,7 @@
           <p:cNvPr id="12" name="">
             <a:extLst xmlns:a="http://schemas.openxmlformats.org/drawingml/2006/main">
               <a:ext uri="{FF2B5EF4-FFF2-40B4-BE49-F238E27FC236}">
-                <a16:creationId xmlns:a16="http://schemas.microsoft.com/office/drawing/2014/main" id="{69514BF9-88E5-457B-B031-DAA903A0ACD0}"/>
+                <a16:creationId xmlns:a16="http://schemas.microsoft.com/office/drawing/2014/main" id="{4EFBC781-60DD-47C0-860F-769F71E1D340}"/>
               </a:ext>
             </a:extLst>
           </p:cNvPr>
@@ -12245,7 +16657,7 @@
           <p:cNvPr id="13" name="">
             <a:extLst xmlns:a="http://schemas.openxmlformats.org/drawingml/2006/main">
               <a:ext uri="{FF2B5EF4-FFF2-40B4-BE49-F238E27FC236}">
-                <a16:creationId xmlns:a16="http://schemas.microsoft.com/office/drawing/2014/main" id="{459DB658-1F41-412A-8B8F-6FF00E79C3AE}"/>
+                <a16:creationId xmlns:a16="http://schemas.microsoft.com/office/drawing/2014/main" id="{46F386D6-D242-4687-815F-8786A88ADF84}"/>
               </a:ext>
             </a:extLst>
           </p:cNvPr>
@@ -12278,7 +16690,7 @@
           <p:cNvPr id="14" name="">
             <a:extLst xmlns:a="http://schemas.openxmlformats.org/drawingml/2006/main">
               <a:ext uri="{FF2B5EF4-FFF2-40B4-BE49-F238E27FC236}">
-                <a16:creationId xmlns:a16="http://schemas.microsoft.com/office/drawing/2014/main" id="{29521193-B44A-4539-B997-C3F450381A60}"/>
+                <a16:creationId xmlns:a16="http://schemas.microsoft.com/office/drawing/2014/main" id="{92AAB98E-79C6-43D1-815D-9C8B70CA9B8D}"/>
               </a:ext>
             </a:extLst>
           </p:cNvPr>
@@ -12328,7 +16740,7 @@
           <p:cNvPr id="15" name="">
             <a:extLst xmlns:a="http://schemas.openxmlformats.org/drawingml/2006/main">
               <a:ext uri="{FF2B5EF4-FFF2-40B4-BE49-F238E27FC236}">
-                <a16:creationId xmlns:a16="http://schemas.microsoft.com/office/drawing/2014/main" id="{DD8975FE-03D2-4A13-A9B7-B6D9B942526E}"/>
+                <a16:creationId xmlns:a16="http://schemas.microsoft.com/office/drawing/2014/main" id="{B9AB36B7-474E-47A6-915E-AC550F9EE722}"/>
               </a:ext>
             </a:extLst>
           </p:cNvPr>
@@ -12376,7 +16788,7 @@
     </p:spTree>
     <p:extLst>
       <p:ext uri="{BB962C8B-B14F-4D97-AF65-F5344CB8AC3E}">
-        <p14:creationId xmlns:p14="http://schemas.microsoft.com/office/powerpoint/2010/main" val="184354497"/>
+        <p14:creationId xmlns:p14="http://schemas.microsoft.com/office/powerpoint/2010/main" val="1220355897"/>
       </p:ext>
     </p:extLst>
   </p:cSld>
@@ -12407,7 +16819,7 @@
           <p:cNvPr id="1" name="">
             <a:extLst xmlns:a="http://schemas.openxmlformats.org/drawingml/2006/main">
               <a:ext uri="{FF2B5EF4-FFF2-40B4-BE49-F238E27FC236}">
-                <a16:creationId xmlns:a16="http://schemas.microsoft.com/office/drawing/2014/main" id="{2E7B2F40-6D99-491A-814E-2D38CCCC87F4}"/>
+                <a16:creationId xmlns:a16="http://schemas.microsoft.com/office/drawing/2014/main" id="{A2731614-2319-41F8-83F5-194F0EABCC5F}"/>
               </a:ext>
             </a:extLst>
           </p:cNvPr>
@@ -12457,7 +16869,7 @@
           <p:cNvPr id="2" name="">
             <a:extLst xmlns:a="http://schemas.openxmlformats.org/drawingml/2006/main">
               <a:ext uri="{FF2B5EF4-FFF2-40B4-BE49-F238E27FC236}">
-                <a16:creationId xmlns:a16="http://schemas.microsoft.com/office/drawing/2014/main" id="{6607F67F-73BC-40D0-A23C-A0E8C829C87C}"/>
+                <a16:creationId xmlns:a16="http://schemas.microsoft.com/office/drawing/2014/main" id="{97206E11-7614-4E1D-9A9C-78AC5864DB06}"/>
               </a:ext>
             </a:extLst>
           </p:cNvPr>
@@ -12507,7 +16919,7 @@
           <p:cNvPr id="3" name="">
             <a:extLst xmlns:a="http://schemas.openxmlformats.org/drawingml/2006/main">
               <a:ext uri="{FF2B5EF4-FFF2-40B4-BE49-F238E27FC236}">
-                <a16:creationId xmlns:a16="http://schemas.microsoft.com/office/drawing/2014/main" id="{BBB6B3AF-09C5-434A-8C87-EBACB03FBD4C}"/>
+                <a16:creationId xmlns:a16="http://schemas.microsoft.com/office/drawing/2014/main" id="{40162B5E-EC39-4963-A5FE-F55A97F5875E}"/>
               </a:ext>
             </a:extLst>
           </p:cNvPr>
@@ -12540,7 +16952,7 @@
           <p:cNvPr id="4" name="">
             <a:extLst xmlns:a="http://schemas.openxmlformats.org/drawingml/2006/main">
               <a:ext uri="{FF2B5EF4-FFF2-40B4-BE49-F238E27FC236}">
-                <a16:creationId xmlns:a16="http://schemas.microsoft.com/office/drawing/2014/main" id="{B1DD14D2-0430-4589-AE7D-FCC626B9E956}"/>
+                <a16:creationId xmlns:a16="http://schemas.microsoft.com/office/drawing/2014/main" id="{98ACB84C-B2FA-4442-BF2A-3B6BAEA65510}"/>
               </a:ext>
             </a:extLst>
           </p:cNvPr>
@@ -12573,7 +16985,7 @@
           <p:cNvPr id="5" name="">
             <a:extLst xmlns:a="http://schemas.openxmlformats.org/drawingml/2006/main">
               <a:ext uri="{FF2B5EF4-FFF2-40B4-BE49-F238E27FC236}">
-                <a16:creationId xmlns:a16="http://schemas.microsoft.com/office/drawing/2014/main" id="{E79B1694-2AC7-4DB2-A232-85BEE6E2BB1B}"/>
+                <a16:creationId xmlns:a16="http://schemas.microsoft.com/office/drawing/2014/main" id="{7D841604-9218-4129-8E47-1A4177484A28}"/>
               </a:ext>
             </a:extLst>
           </p:cNvPr>
@@ -12623,7 +17035,7 @@
           <p:cNvPr id="6" name="">
             <a:extLst xmlns:a="http://schemas.openxmlformats.org/drawingml/2006/main">
               <a:ext uri="{FF2B5EF4-FFF2-40B4-BE49-F238E27FC236}">
-                <a16:creationId xmlns:a16="http://schemas.microsoft.com/office/drawing/2014/main" id="{2809BBCC-37F7-4AD7-9503-EBFDE4E94D5B}"/>
+                <a16:creationId xmlns:a16="http://schemas.microsoft.com/office/drawing/2014/main" id="{E78FC62F-A66A-49A4-A9F5-B0AA2067F2C0}"/>
               </a:ext>
             </a:extLst>
           </p:cNvPr>
@@ -12673,7 +17085,7 @@
           <p:cNvPr id="7" name="">
             <a:extLst xmlns:a="http://schemas.openxmlformats.org/drawingml/2006/main">
               <a:ext uri="{FF2B5EF4-FFF2-40B4-BE49-F238E27FC236}">
-                <a16:creationId xmlns:a16="http://schemas.microsoft.com/office/drawing/2014/main" id="{918D6998-2C87-42A7-B1D0-D8F0D27E540C}"/>
+                <a16:creationId xmlns:a16="http://schemas.microsoft.com/office/drawing/2014/main" id="{85D23DF1-188F-4868-836C-5EAC09DF65D6}"/>
               </a:ext>
             </a:extLst>
           </p:cNvPr>
@@ -12723,7 +17135,7 @@
           <p:cNvPr id="8" name="">
             <a:extLst xmlns:a="http://schemas.openxmlformats.org/drawingml/2006/main">
               <a:ext uri="{FF2B5EF4-FFF2-40B4-BE49-F238E27FC236}">
-                <a16:creationId xmlns:a16="http://schemas.microsoft.com/office/drawing/2014/main" id="{B1AD801A-7B5C-4492-8E5B-16355C4695EE}"/>
+                <a16:creationId xmlns:a16="http://schemas.microsoft.com/office/drawing/2014/main" id="{C4ACA74D-97D1-4F01-8AFF-352B83166DE9}"/>
               </a:ext>
             </a:extLst>
           </p:cNvPr>
@@ -12773,7 +17185,7 @@
           <p:cNvPr id="9" name="">
             <a:extLst xmlns:a="http://schemas.openxmlformats.org/drawingml/2006/main">
               <a:ext uri="{FF2B5EF4-FFF2-40B4-BE49-F238E27FC236}">
-                <a16:creationId xmlns:a16="http://schemas.microsoft.com/office/drawing/2014/main" id="{0A45AF08-67AB-4B1B-9C44-B7E983313E00}"/>
+                <a16:creationId xmlns:a16="http://schemas.microsoft.com/office/drawing/2014/main" id="{075DE79D-F052-4FA3-8188-B018A558F38C}"/>
               </a:ext>
             </a:extLst>
           </p:cNvPr>
@@ -12823,7 +17235,7 @@
           <p:cNvPr id="10" name="">
             <a:extLst xmlns:a="http://schemas.openxmlformats.org/drawingml/2006/main">
               <a:ext uri="{FF2B5EF4-FFF2-40B4-BE49-F238E27FC236}">
-                <a16:creationId xmlns:a16="http://schemas.microsoft.com/office/drawing/2014/main" id="{D3C77CA1-9F53-444E-9837-8D69EB5CCD1E}"/>
+                <a16:creationId xmlns:a16="http://schemas.microsoft.com/office/drawing/2014/main" id="{7AF9B7BE-ACB6-4ECC-A68D-322AB6EB55EA}"/>
               </a:ext>
             </a:extLst>
           </p:cNvPr>
@@ -12856,7 +17268,7 @@
           <p:cNvPr id="11" name="">
             <a:extLst xmlns:a="http://schemas.openxmlformats.org/drawingml/2006/main">
               <a:ext uri="{FF2B5EF4-FFF2-40B4-BE49-F238E27FC236}">
-                <a16:creationId xmlns:a16="http://schemas.microsoft.com/office/drawing/2014/main" id="{43AFDB2D-B5AE-46DC-9AEE-70516058EC70}"/>
+                <a16:creationId xmlns:a16="http://schemas.microsoft.com/office/drawing/2014/main" id="{05BA56A0-85C9-4EAF-82BD-C039974DAC6B}"/>
               </a:ext>
             </a:extLst>
           </p:cNvPr>
@@ -12906,7 +17318,7 @@
           <p:cNvPr id="12" name="">
             <a:extLst xmlns:a="http://schemas.openxmlformats.org/drawingml/2006/main">
               <a:ext uri="{FF2B5EF4-FFF2-40B4-BE49-F238E27FC236}">
-                <a16:creationId xmlns:a16="http://schemas.microsoft.com/office/drawing/2014/main" id="{44E6C7AD-D6F8-4788-936F-E8221FCE7651}"/>
+                <a16:creationId xmlns:a16="http://schemas.microsoft.com/office/drawing/2014/main" id="{18007CEC-A2CA-499D-B52B-5316E045FECB}"/>
               </a:ext>
             </a:extLst>
           </p:cNvPr>
@@ -12956,7 +17368,7 @@
           <p:cNvPr id="13" name="">
             <a:extLst xmlns:a="http://schemas.openxmlformats.org/drawingml/2006/main">
               <a:ext uri="{FF2B5EF4-FFF2-40B4-BE49-F238E27FC236}">
-                <a16:creationId xmlns:a16="http://schemas.microsoft.com/office/drawing/2014/main" id="{A5EFEB06-8402-4FD3-B0F2-7EC85168A95C}"/>
+                <a16:creationId xmlns:a16="http://schemas.microsoft.com/office/drawing/2014/main" id="{A8ED7C17-A2BC-4017-900B-601D06B9DD72}"/>
               </a:ext>
             </a:extLst>
           </p:cNvPr>
@@ -13006,7 +17418,7 @@
           <p:cNvPr id="14" name="">
             <a:extLst xmlns:a="http://schemas.openxmlformats.org/drawingml/2006/main">
               <a:ext uri="{FF2B5EF4-FFF2-40B4-BE49-F238E27FC236}">
-                <a16:creationId xmlns:a16="http://schemas.microsoft.com/office/drawing/2014/main" id="{AADDD5D6-D990-40AF-96A9-58A029E38C7D}"/>
+                <a16:creationId xmlns:a16="http://schemas.microsoft.com/office/drawing/2014/main" id="{A60A0A31-001E-4407-A263-3AAB8C3FD4E6}"/>
               </a:ext>
             </a:extLst>
           </p:cNvPr>
@@ -13056,7 +17468,7 @@
           <p:cNvPr id="15" name="">
             <a:extLst xmlns:a="http://schemas.openxmlformats.org/drawingml/2006/main">
               <a:ext uri="{FF2B5EF4-FFF2-40B4-BE49-F238E27FC236}">
-                <a16:creationId xmlns:a16="http://schemas.microsoft.com/office/drawing/2014/main" id="{7D3EC539-E5E4-4751-A330-C64EA4CB6771}"/>
+                <a16:creationId xmlns:a16="http://schemas.microsoft.com/office/drawing/2014/main" id="{CA739E46-F003-4D54-AF23-40FC3565904E}"/>
               </a:ext>
             </a:extLst>
           </p:cNvPr>
@@ -13106,7 +17518,7 @@
           <p:cNvPr id="16" name="">
             <a:extLst xmlns:a="http://schemas.openxmlformats.org/drawingml/2006/main">
               <a:ext uri="{FF2B5EF4-FFF2-40B4-BE49-F238E27FC236}">
-                <a16:creationId xmlns:a16="http://schemas.microsoft.com/office/drawing/2014/main" id="{3A51F2C1-454E-4AA8-A800-9B8D19105488}"/>
+                <a16:creationId xmlns:a16="http://schemas.microsoft.com/office/drawing/2014/main" id="{ED42EB78-C75C-415E-B317-DDDAA407E4EE}"/>
               </a:ext>
             </a:extLst>
           </p:cNvPr>
@@ -13139,7 +17551,7 @@
           <p:cNvPr id="17" name="">
             <a:extLst xmlns:a="http://schemas.openxmlformats.org/drawingml/2006/main">
               <a:ext uri="{FF2B5EF4-FFF2-40B4-BE49-F238E27FC236}">
-                <a16:creationId xmlns:a16="http://schemas.microsoft.com/office/drawing/2014/main" id="{3375A92A-0F94-46B7-B2F3-A25F8A57D265}"/>
+                <a16:creationId xmlns:a16="http://schemas.microsoft.com/office/drawing/2014/main" id="{08A4C320-7E3C-4535-B6A1-6E5E9E95AE3F}"/>
               </a:ext>
             </a:extLst>
           </p:cNvPr>
@@ -13189,7 +17601,7 @@
           <p:cNvPr id="18" name="">
             <a:extLst xmlns:a="http://schemas.openxmlformats.org/drawingml/2006/main">
               <a:ext uri="{FF2B5EF4-FFF2-40B4-BE49-F238E27FC236}">
-                <a16:creationId xmlns:a16="http://schemas.microsoft.com/office/drawing/2014/main" id="{35524D6F-D1E3-45A8-B7F4-5452F82E9E31}"/>
+                <a16:creationId xmlns:a16="http://schemas.microsoft.com/office/drawing/2014/main" id="{A7389138-D101-4DC3-866A-3220014AB5C3}"/>
               </a:ext>
             </a:extLst>
           </p:cNvPr>
@@ -13239,7 +17651,7 @@
           <p:cNvPr id="19" name="">
             <a:extLst xmlns:a="http://schemas.openxmlformats.org/drawingml/2006/main">
               <a:ext uri="{FF2B5EF4-FFF2-40B4-BE49-F238E27FC236}">
-                <a16:creationId xmlns:a16="http://schemas.microsoft.com/office/drawing/2014/main" id="{0FE57E83-2AC8-48A9-8741-9E41174DF581}"/>
+                <a16:creationId xmlns:a16="http://schemas.microsoft.com/office/drawing/2014/main" id="{33B4D79E-F87F-4012-8E06-56332CC7E847}"/>
               </a:ext>
             </a:extLst>
           </p:cNvPr>
@@ -13289,7 +17701,7 @@
           <p:cNvPr id="20" name="">
             <a:extLst xmlns:a="http://schemas.openxmlformats.org/drawingml/2006/main">
               <a:ext uri="{FF2B5EF4-FFF2-40B4-BE49-F238E27FC236}">
-                <a16:creationId xmlns:a16="http://schemas.microsoft.com/office/drawing/2014/main" id="{5CC2565F-2F8E-4E5F-A5D0-2221BF78CA07}"/>
+                <a16:creationId xmlns:a16="http://schemas.microsoft.com/office/drawing/2014/main" id="{4664226E-3F06-4471-B8D7-4CAAA2A638E7}"/>
               </a:ext>
             </a:extLst>
           </p:cNvPr>
@@ -13339,7 +17751,7 @@
           <p:cNvPr id="21" name="">
             <a:extLst xmlns:a="http://schemas.openxmlformats.org/drawingml/2006/main">
               <a:ext uri="{FF2B5EF4-FFF2-40B4-BE49-F238E27FC236}">
-                <a16:creationId xmlns:a16="http://schemas.microsoft.com/office/drawing/2014/main" id="{C3F21EDD-ACB0-4631-8FB5-0AB0B9708367}"/>
+                <a16:creationId xmlns:a16="http://schemas.microsoft.com/office/drawing/2014/main" id="{D6E9837F-5EC7-4FB0-9B18-BF3C6399A723}"/>
               </a:ext>
             </a:extLst>
           </p:cNvPr>
@@ -13389,7 +17801,7 @@
           <p:cNvPr id="22" name="">
             <a:extLst xmlns:a="http://schemas.openxmlformats.org/drawingml/2006/main">
               <a:ext uri="{FF2B5EF4-FFF2-40B4-BE49-F238E27FC236}">
-                <a16:creationId xmlns:a16="http://schemas.microsoft.com/office/drawing/2014/main" id="{FE6B2F00-593F-49A8-8726-9B9E5CB32647}"/>
+                <a16:creationId xmlns:a16="http://schemas.microsoft.com/office/drawing/2014/main" id="{C6C40650-44D8-47FD-8EFA-22BFE023F160}"/>
               </a:ext>
             </a:extLst>
           </p:cNvPr>
@@ -13422,7 +17834,7 @@
           <p:cNvPr id="23" name="">
             <a:extLst xmlns:a="http://schemas.openxmlformats.org/drawingml/2006/main">
               <a:ext uri="{FF2B5EF4-FFF2-40B4-BE49-F238E27FC236}">
-                <a16:creationId xmlns:a16="http://schemas.microsoft.com/office/drawing/2014/main" id="{88DB4A9B-809D-4F14-92EB-E6CE5060FBB7}"/>
+                <a16:creationId xmlns:a16="http://schemas.microsoft.com/office/drawing/2014/main" id="{E95EB25A-0089-460B-A097-585616BF7BB4}"/>
               </a:ext>
             </a:extLst>
           </p:cNvPr>
@@ -13472,7 +17884,7 @@
           <p:cNvPr id="24" name="">
             <a:extLst xmlns:a="http://schemas.openxmlformats.org/drawingml/2006/main">
               <a:ext uri="{FF2B5EF4-FFF2-40B4-BE49-F238E27FC236}">
-                <a16:creationId xmlns:a16="http://schemas.microsoft.com/office/drawing/2014/main" id="{BB460776-47C4-420F-A32F-A836C3FF2850}"/>
+                <a16:creationId xmlns:a16="http://schemas.microsoft.com/office/drawing/2014/main" id="{D4039C54-964E-4534-BD6A-A5F623316F5F}"/>
               </a:ext>
             </a:extLst>
           </p:cNvPr>
@@ -13522,7 +17934,7 @@
           <p:cNvPr id="25" name="">
             <a:extLst xmlns:a="http://schemas.openxmlformats.org/drawingml/2006/main">
               <a:ext uri="{FF2B5EF4-FFF2-40B4-BE49-F238E27FC236}">
-                <a16:creationId xmlns:a16="http://schemas.microsoft.com/office/drawing/2014/main" id="{F6F2C9DB-4A5D-4018-BA40-970E993212B2}"/>
+                <a16:creationId xmlns:a16="http://schemas.microsoft.com/office/drawing/2014/main" id="{C643A1D7-6EE9-42A1-85D7-B7F29F1139FB}"/>
               </a:ext>
             </a:extLst>
           </p:cNvPr>
@@ -13572,7 +17984,7 @@
           <p:cNvPr id="26" name="">
             <a:extLst xmlns:a="http://schemas.openxmlformats.org/drawingml/2006/main">
               <a:ext uri="{FF2B5EF4-FFF2-40B4-BE49-F238E27FC236}">
-                <a16:creationId xmlns:a16="http://schemas.microsoft.com/office/drawing/2014/main" id="{3FB9619D-64B9-417D-B850-1CEF79D4869C}"/>
+                <a16:creationId xmlns:a16="http://schemas.microsoft.com/office/drawing/2014/main" id="{2CA3EA26-3406-4BF7-80D2-1744EB2CA9EC}"/>
               </a:ext>
             </a:extLst>
           </p:cNvPr>
@@ -13622,7 +18034,7 @@
           <p:cNvPr id="27" name="">
             <a:extLst xmlns:a="http://schemas.openxmlformats.org/drawingml/2006/main">
               <a:ext uri="{FF2B5EF4-FFF2-40B4-BE49-F238E27FC236}">
-                <a16:creationId xmlns:a16="http://schemas.microsoft.com/office/drawing/2014/main" id="{803D6D28-29B8-4552-BCBC-0A03F233385D}"/>
+                <a16:creationId xmlns:a16="http://schemas.microsoft.com/office/drawing/2014/main" id="{F69BB2AC-03DD-482F-8C23-0F8F5B7A1C34}"/>
               </a:ext>
             </a:extLst>
           </p:cNvPr>
@@ -13672,7 +18084,7 @@
           <p:cNvPr id="28" name="">
             <a:extLst xmlns:a="http://schemas.openxmlformats.org/drawingml/2006/main">
               <a:ext uri="{FF2B5EF4-FFF2-40B4-BE49-F238E27FC236}">
-                <a16:creationId xmlns:a16="http://schemas.microsoft.com/office/drawing/2014/main" id="{5904C76F-415B-40B0-BD47-348C52B9B7CC}"/>
+                <a16:creationId xmlns:a16="http://schemas.microsoft.com/office/drawing/2014/main" id="{4B17AAB5-2719-4478-BAF1-934316E122CC}"/>
               </a:ext>
             </a:extLst>
           </p:cNvPr>
@@ -13722,7 +18134,7 @@
           <p:cNvPr id="29" name="">
             <a:extLst xmlns:a="http://schemas.openxmlformats.org/drawingml/2006/main">
               <a:ext uri="{FF2B5EF4-FFF2-40B4-BE49-F238E27FC236}">
-                <a16:creationId xmlns:a16="http://schemas.microsoft.com/office/drawing/2014/main" id="{05290D1F-573A-4461-8268-2278B1C744AE}"/>
+                <a16:creationId xmlns:a16="http://schemas.microsoft.com/office/drawing/2014/main" id="{BDC3F731-9CE8-45F0-A668-20580DF43D24}"/>
               </a:ext>
             </a:extLst>
           </p:cNvPr>
@@ -13770,7 +18182,7 @@
     </p:spTree>
     <p:extLst>
       <p:ext uri="{BB962C8B-B14F-4D97-AF65-F5344CB8AC3E}">
-        <p14:creationId xmlns:p14="http://schemas.microsoft.com/office/powerpoint/2010/main" val="1560219045"/>
+        <p14:creationId xmlns:p14="http://schemas.microsoft.com/office/powerpoint/2010/main" val="1526394034"/>
       </p:ext>
     </p:extLst>
   </p:cSld>
@@ -13801,7 +18213,7 @@
           <p:cNvPr id="1" name="">
             <a:extLst xmlns:a="http://schemas.openxmlformats.org/drawingml/2006/main">
               <a:ext uri="{FF2B5EF4-FFF2-40B4-BE49-F238E27FC236}">
-                <a16:creationId xmlns:a16="http://schemas.microsoft.com/office/drawing/2014/main" id="{E2056F30-BEF5-4161-9E57-A25178E6BC7D}"/>
+                <a16:creationId xmlns:a16="http://schemas.microsoft.com/office/drawing/2014/main" id="{93934143-B2C3-4C95-9728-BE21CBD98BB6}"/>
               </a:ext>
             </a:extLst>
           </p:cNvPr>
@@ -13851,7 +18263,7 @@
           <p:cNvPr id="2" name="">
             <a:extLst xmlns:a="http://schemas.openxmlformats.org/drawingml/2006/main">
               <a:ext uri="{FF2B5EF4-FFF2-40B4-BE49-F238E27FC236}">
-                <a16:creationId xmlns:a16="http://schemas.microsoft.com/office/drawing/2014/main" id="{588D604E-D1F6-4A89-90FD-23DBDCFD7DDB}"/>
+                <a16:creationId xmlns:a16="http://schemas.microsoft.com/office/drawing/2014/main" id="{5FF9BA4F-B444-40F3-A7D7-6595CE9FA692}"/>
               </a:ext>
             </a:extLst>
           </p:cNvPr>
@@ -13901,7 +18313,7 @@
           <p:cNvPr id="3" name="">
             <a:extLst xmlns:a="http://schemas.openxmlformats.org/drawingml/2006/main">
               <a:ext uri="{FF2B5EF4-FFF2-40B4-BE49-F238E27FC236}">
-                <a16:creationId xmlns:a16="http://schemas.microsoft.com/office/drawing/2014/main" id="{E4401012-A447-4798-B42F-33A2F58F697D}"/>
+                <a16:creationId xmlns:a16="http://schemas.microsoft.com/office/drawing/2014/main" id="{2889A7C5-70A3-44BA-8CA7-D6E283C4BCE0}"/>
               </a:ext>
             </a:extLst>
           </p:cNvPr>
@@ -13938,7 +18350,7 @@
           <p:nvPr/>
         </p:nvPicPr>
         <p:blipFill>
-          <a:blip xmlns:r="http://schemas.openxmlformats.org/officeDocument/2006/relationships" xmlns:a="http://schemas.openxmlformats.org/drawingml/2006/main" r:embed="Rb2f8a942c5494631"/>
+          <a:blip xmlns:r="http://schemas.openxmlformats.org/officeDocument/2006/relationships" xmlns:a="http://schemas.openxmlformats.org/drawingml/2006/main" r:embed="R2657708c2d5040dd"/>
           <a:stretch xmlns:a="http://schemas.openxmlformats.org/drawingml/2006/main"/>
         </p:blipFill>
         <p:spPr>
@@ -13956,7 +18368,7 @@
           <p:cNvPr id="5" name="">
             <a:extLst xmlns:a="http://schemas.openxmlformats.org/drawingml/2006/main">
               <a:ext uri="{FF2B5EF4-FFF2-40B4-BE49-F238E27FC236}">
-                <a16:creationId xmlns:a16="http://schemas.microsoft.com/office/drawing/2014/main" id="{E37892FC-64B9-4FCB-8A48-1AB456BA2479}"/>
+                <a16:creationId xmlns:a16="http://schemas.microsoft.com/office/drawing/2014/main" id="{C5A77E7D-C453-46BA-B4E9-20A60517BF8D}"/>
               </a:ext>
             </a:extLst>
           </p:cNvPr>
@@ -13989,7 +18401,7 @@
           <p:cNvPr id="6" name="">
             <a:extLst xmlns:a="http://schemas.openxmlformats.org/drawingml/2006/main">
               <a:ext uri="{FF2B5EF4-FFF2-40B4-BE49-F238E27FC236}">
-                <a16:creationId xmlns:a16="http://schemas.microsoft.com/office/drawing/2014/main" id="{0148C82E-58C7-4A12-A35C-85B4066B037A}"/>
+                <a16:creationId xmlns:a16="http://schemas.microsoft.com/office/drawing/2014/main" id="{60B8853D-772F-43C6-961B-DB270A032662}"/>
               </a:ext>
             </a:extLst>
           </p:cNvPr>
@@ -14039,7 +18451,7 @@
           <p:cNvPr id="7" name="">
             <a:extLst xmlns:a="http://schemas.openxmlformats.org/drawingml/2006/main">
               <a:ext uri="{FF2B5EF4-FFF2-40B4-BE49-F238E27FC236}">
-                <a16:creationId xmlns:a16="http://schemas.microsoft.com/office/drawing/2014/main" id="{C6447EF6-5254-4ADF-BBEE-72B413EEF201}"/>
+                <a16:creationId xmlns:a16="http://schemas.microsoft.com/office/drawing/2014/main" id="{111B91B3-B9C7-40FD-85F7-BDC7CC270112}"/>
               </a:ext>
             </a:extLst>
           </p:cNvPr>
@@ -14089,7 +18501,7 @@
           <p:cNvPr id="8" name="">
             <a:extLst xmlns:a="http://schemas.openxmlformats.org/drawingml/2006/main">
               <a:ext uri="{FF2B5EF4-FFF2-40B4-BE49-F238E27FC236}">
-                <a16:creationId xmlns:a16="http://schemas.microsoft.com/office/drawing/2014/main" id="{CC9B898D-5932-4148-8D9E-F8AC70E8F77A}"/>
+                <a16:creationId xmlns:a16="http://schemas.microsoft.com/office/drawing/2014/main" id="{696088B5-FC34-4EB3-BC0A-CE45DD056576}"/>
               </a:ext>
             </a:extLst>
           </p:cNvPr>
@@ -14137,7 +18549,7 @@
     </p:spTree>
     <p:extLst>
       <p:ext uri="{BB962C8B-B14F-4D97-AF65-F5344CB8AC3E}">
-        <p14:creationId xmlns:p14="http://schemas.microsoft.com/office/powerpoint/2010/main" val="378239360"/>
+        <p14:creationId xmlns:p14="http://schemas.microsoft.com/office/powerpoint/2010/main" val="1779875567"/>
       </p:ext>
     </p:extLst>
   </p:cSld>
@@ -14168,7 +18580,7 @@
           <p:cNvPr id="1" name="">
             <a:extLst xmlns:a="http://schemas.openxmlformats.org/drawingml/2006/main">
               <a:ext uri="{FF2B5EF4-FFF2-40B4-BE49-F238E27FC236}">
-                <a16:creationId xmlns:a16="http://schemas.microsoft.com/office/drawing/2014/main" id="{5CFD369B-1CCC-47A7-A8B4-1B1949F10682}"/>
+                <a16:creationId xmlns:a16="http://schemas.microsoft.com/office/drawing/2014/main" id="{797D2090-6840-43AA-BB54-A285567FD1FE}"/>
               </a:ext>
             </a:extLst>
           </p:cNvPr>
@@ -14218,7 +18630,7 @@
           <p:cNvPr id="2" name="">
             <a:extLst xmlns:a="http://schemas.openxmlformats.org/drawingml/2006/main">
               <a:ext uri="{FF2B5EF4-FFF2-40B4-BE49-F238E27FC236}">
-                <a16:creationId xmlns:a16="http://schemas.microsoft.com/office/drawing/2014/main" id="{826E2129-01D6-4311-A19E-218E5E050655}"/>
+                <a16:creationId xmlns:a16="http://schemas.microsoft.com/office/drawing/2014/main" id="{A74A1AFD-606B-470F-A8B0-3333143EC35E}"/>
               </a:ext>
             </a:extLst>
           </p:cNvPr>
@@ -14268,7 +18680,7 @@
           <p:cNvPr id="3" name="">
             <a:extLst xmlns:a="http://schemas.openxmlformats.org/drawingml/2006/main">
               <a:ext uri="{FF2B5EF4-FFF2-40B4-BE49-F238E27FC236}">
-                <a16:creationId xmlns:a16="http://schemas.microsoft.com/office/drawing/2014/main" id="{2843EE14-CBE2-4D6C-A9D2-F56206CC5E62}"/>
+                <a16:creationId xmlns:a16="http://schemas.microsoft.com/office/drawing/2014/main" id="{20736E71-E478-476B-9D41-037467863A32}"/>
               </a:ext>
             </a:extLst>
           </p:cNvPr>
@@ -14308,7 +18720,7 @@
         </p:xfrm>
         <a:graphic xmlns:a="http://schemas.openxmlformats.org/drawingml/2006/main">
           <a:graphicData uri="http://schemas.openxmlformats.org/drawingml/2006/chart">
-            <c:chart xmlns:r="http://schemas.openxmlformats.org/officeDocument/2006/relationships" xmlns:c="http://schemas.openxmlformats.org/drawingml/2006/chart" r:id="R8eded367f43d46c3"/>
+            <c:chart xmlns:r="http://schemas.openxmlformats.org/officeDocument/2006/relationships" xmlns:c="http://schemas.openxmlformats.org/drawingml/2006/chart" r:id="R2ed968e5a0614c02"/>
           </a:graphicData>
         </a:graphic>
       </p:graphicFrame>
@@ -14317,7 +18729,7 @@
           <p:cNvPr id="5" name="">
             <a:extLst xmlns:a="http://schemas.openxmlformats.org/drawingml/2006/main">
               <a:ext uri="{FF2B5EF4-FFF2-40B4-BE49-F238E27FC236}">
-                <a16:creationId xmlns:a16="http://schemas.microsoft.com/office/drawing/2014/main" id="{69A7093B-F540-4ACB-9F6B-182FAA10F220}"/>
+                <a16:creationId xmlns:a16="http://schemas.microsoft.com/office/drawing/2014/main" id="{33B46B5E-15E5-458C-9E40-9260E4F3C945}"/>
               </a:ext>
             </a:extLst>
           </p:cNvPr>
@@ -14350,7 +18762,7 @@
           <p:cNvPr id="6" name="">
             <a:extLst xmlns:a="http://schemas.openxmlformats.org/drawingml/2006/main">
               <a:ext uri="{FF2B5EF4-FFF2-40B4-BE49-F238E27FC236}">
-                <a16:creationId xmlns:a16="http://schemas.microsoft.com/office/drawing/2014/main" id="{54BBF068-65CB-434E-82A5-152DBEE0EACA}"/>
+                <a16:creationId xmlns:a16="http://schemas.microsoft.com/office/drawing/2014/main" id="{D3A03CA1-9B38-4BE7-B93E-B9D7C3420EFD}"/>
               </a:ext>
             </a:extLst>
           </p:cNvPr>
@@ -14400,7 +18812,7 @@
           <p:cNvPr id="7" name="">
             <a:extLst xmlns:a="http://schemas.openxmlformats.org/drawingml/2006/main">
               <a:ext uri="{FF2B5EF4-FFF2-40B4-BE49-F238E27FC236}">
-                <a16:creationId xmlns:a16="http://schemas.microsoft.com/office/drawing/2014/main" id="{8994F072-21C3-494E-B5FD-660C7C2C1028}"/>
+                <a16:creationId xmlns:a16="http://schemas.microsoft.com/office/drawing/2014/main" id="{9F43E504-B704-4C51-AE60-3C95115F1BFA}"/>
               </a:ext>
             </a:extLst>
           </p:cNvPr>
@@ -14433,7 +18845,7 @@
           <p:cNvPr id="8" name="">
             <a:extLst xmlns:a="http://schemas.openxmlformats.org/drawingml/2006/main">
               <a:ext uri="{FF2B5EF4-FFF2-40B4-BE49-F238E27FC236}">
-                <a16:creationId xmlns:a16="http://schemas.microsoft.com/office/drawing/2014/main" id="{02434202-47EA-4144-8D00-78C9F8412570}"/>
+                <a16:creationId xmlns:a16="http://schemas.microsoft.com/office/drawing/2014/main" id="{161E34AE-833D-4E70-8D7C-D03F8C4A5CCC}"/>
               </a:ext>
             </a:extLst>
           </p:cNvPr>
@@ -14483,7 +18895,7 @@
           <p:cNvPr id="9" name="">
             <a:extLst xmlns:a="http://schemas.openxmlformats.org/drawingml/2006/main">
               <a:ext uri="{FF2B5EF4-FFF2-40B4-BE49-F238E27FC236}">
-                <a16:creationId xmlns:a16="http://schemas.microsoft.com/office/drawing/2014/main" id="{CE9002FB-A87C-4233-9060-36F887C79CB1}"/>
+                <a16:creationId xmlns:a16="http://schemas.microsoft.com/office/drawing/2014/main" id="{C1A321D7-F983-4032-8404-935076D40318}"/>
               </a:ext>
             </a:extLst>
           </p:cNvPr>
@@ -14516,7 +18928,7 @@
           <p:cNvPr id="10" name="">
             <a:extLst xmlns:a="http://schemas.openxmlformats.org/drawingml/2006/main">
               <a:ext uri="{FF2B5EF4-FFF2-40B4-BE49-F238E27FC236}">
-                <a16:creationId xmlns:a16="http://schemas.microsoft.com/office/drawing/2014/main" id="{8EBBFD8D-5D24-4A2F-ADAC-ED5345CC6DC1}"/>
+                <a16:creationId xmlns:a16="http://schemas.microsoft.com/office/drawing/2014/main" id="{89853AC7-4065-4DA6-8631-1F903CA78771}"/>
               </a:ext>
             </a:extLst>
           </p:cNvPr>
@@ -14566,7 +18978,7 @@
           <p:cNvPr id="11" name="">
             <a:extLst xmlns:a="http://schemas.openxmlformats.org/drawingml/2006/main">
               <a:ext uri="{FF2B5EF4-FFF2-40B4-BE49-F238E27FC236}">
-                <a16:creationId xmlns:a16="http://schemas.microsoft.com/office/drawing/2014/main" id="{BE6ABE53-E6CF-442F-8415-181ED471832C}"/>
+                <a16:creationId xmlns:a16="http://schemas.microsoft.com/office/drawing/2014/main" id="{5F424ADF-0645-4F6B-A2B8-32B34E17B3E5}"/>
               </a:ext>
             </a:extLst>
           </p:cNvPr>
@@ -14599,7 +19011,7 @@
           <p:cNvPr id="12" name="">
             <a:extLst xmlns:a="http://schemas.openxmlformats.org/drawingml/2006/main">
               <a:ext uri="{FF2B5EF4-FFF2-40B4-BE49-F238E27FC236}">
-                <a16:creationId xmlns:a16="http://schemas.microsoft.com/office/drawing/2014/main" id="{63B6F0C3-DDC3-4B8B-9164-3AA5D6399D99}"/>
+                <a16:creationId xmlns:a16="http://schemas.microsoft.com/office/drawing/2014/main" id="{0B94670B-88ED-4D06-9D6C-71A57100B2EF}"/>
               </a:ext>
             </a:extLst>
           </p:cNvPr>
@@ -14649,7 +19061,7 @@
           <p:cNvPr id="13" name="">
             <a:extLst xmlns:a="http://schemas.openxmlformats.org/drawingml/2006/main">
               <a:ext uri="{FF2B5EF4-FFF2-40B4-BE49-F238E27FC236}">
-                <a16:creationId xmlns:a16="http://schemas.microsoft.com/office/drawing/2014/main" id="{22FE5118-5687-4501-B3B6-5BCEDFDA081D}"/>
+                <a16:creationId xmlns:a16="http://schemas.microsoft.com/office/drawing/2014/main" id="{25D7401F-491C-4667-8048-D94EE185EC81}"/>
               </a:ext>
             </a:extLst>
           </p:cNvPr>
@@ -14697,7 +19109,7 @@
     </p:spTree>
     <p:extLst>
       <p:ext uri="{BB962C8B-B14F-4D97-AF65-F5344CB8AC3E}">
-        <p14:creationId xmlns:p14="http://schemas.microsoft.com/office/powerpoint/2010/main" val="340282812"/>
+        <p14:creationId xmlns:p14="http://schemas.microsoft.com/office/powerpoint/2010/main" val="1552520152"/>
       </p:ext>
     </p:extLst>
   </p:cSld>

--- a/presentations/gen5_3_momentum_context_size_screen.pptx
+++ b/presentations/gen5_3_momentum_context_size_screen.pptx
@@ -2,28 +2,29 @@
 <file path=ppt/presentation.xml><?xml version="1.0" encoding="utf-8"?>
 <p:presentation xmlns:p="http://schemas.openxmlformats.org/presentationml/2006/main">
   <p:sldMasterIdLst>
-    <p:sldMasterId xmlns:r="http://schemas.openxmlformats.org/officeDocument/2006/relationships" id="2147483648" r:id="Re1567775fd484e45"/>
+    <p:sldMasterId xmlns:r="http://schemas.openxmlformats.org/officeDocument/2006/relationships" id="2147483648" r:id="R486a72ed5afc466d"/>
   </p:sldMasterIdLst>
   <p:notesMasterIdLst>
-    <p:notesMasterId xmlns:r="http://schemas.openxmlformats.org/officeDocument/2006/relationships" r:id="R2e9bbcecb6664dfd"/>
+    <p:notesMasterId xmlns:r="http://schemas.openxmlformats.org/officeDocument/2006/relationships" r:id="Rfe1e93b13b224ffd"/>
   </p:notesMasterIdLst>
   <p:sldIdLst>
-    <p:sldId xmlns:r="http://schemas.openxmlformats.org/officeDocument/2006/relationships" id="256" r:id="Re4eab6e9026c457d"/>
-    <p:sldId xmlns:r="http://schemas.openxmlformats.org/officeDocument/2006/relationships" id="257" r:id="Rf9e91935d25c4c05"/>
-    <p:sldId xmlns:r="http://schemas.openxmlformats.org/officeDocument/2006/relationships" id="258" r:id="R4dd7eec44539465d"/>
-    <p:sldId xmlns:r="http://schemas.openxmlformats.org/officeDocument/2006/relationships" id="259" r:id="R8313c91c95a64b0d"/>
-    <p:sldId xmlns:r="http://schemas.openxmlformats.org/officeDocument/2006/relationships" id="260" r:id="R1f059701aef44d36"/>
-    <p:sldId xmlns:r="http://schemas.openxmlformats.org/officeDocument/2006/relationships" id="261" r:id="R4d236f9f57b540dc"/>
-    <p:sldId xmlns:r="http://schemas.openxmlformats.org/officeDocument/2006/relationships" id="262" r:id="R3ba3421b67d1494c"/>
-    <p:sldId xmlns:r="http://schemas.openxmlformats.org/officeDocument/2006/relationships" id="263" r:id="R633e6510fa7047ef"/>
-    <p:sldId xmlns:r="http://schemas.openxmlformats.org/officeDocument/2006/relationships" id="264" r:id="R4993a15088d44a7b"/>
-    <p:sldId xmlns:r="http://schemas.openxmlformats.org/officeDocument/2006/relationships" id="265" r:id="R1c2d1f35c5df4961"/>
-    <p:sldId xmlns:r="http://schemas.openxmlformats.org/officeDocument/2006/relationships" id="266" r:id="R7fce26ad23d2477b"/>
-    <p:sldId xmlns:r="http://schemas.openxmlformats.org/officeDocument/2006/relationships" id="267" r:id="R09830085a1684328"/>
-    <p:sldId xmlns:r="http://schemas.openxmlformats.org/officeDocument/2006/relationships" id="268" r:id="R14e7bb8e026d4df4"/>
-    <p:sldId xmlns:r="http://schemas.openxmlformats.org/officeDocument/2006/relationships" id="269" r:id="Re719ff7647f54cf6"/>
-    <p:sldId xmlns:r="http://schemas.openxmlformats.org/officeDocument/2006/relationships" id="270" r:id="R262641f1ebb944d7"/>
-    <p:sldId xmlns:r="http://schemas.openxmlformats.org/officeDocument/2006/relationships" id="271" r:id="R905bc4e26fc44d35"/>
+    <p:sldId xmlns:r="http://schemas.openxmlformats.org/officeDocument/2006/relationships" id="256" r:id="R7a27974dc02341c1"/>
+    <p:sldId xmlns:r="http://schemas.openxmlformats.org/officeDocument/2006/relationships" id="257" r:id="R7845f4e43432461d"/>
+    <p:sldId xmlns:r="http://schemas.openxmlformats.org/officeDocument/2006/relationships" id="258" r:id="Rab8e7b9cd3af4281"/>
+    <p:sldId xmlns:r="http://schemas.openxmlformats.org/officeDocument/2006/relationships" id="259" r:id="Rffcfbf1fa70f405a"/>
+    <p:sldId xmlns:r="http://schemas.openxmlformats.org/officeDocument/2006/relationships" id="260" r:id="R2a238072d3c242d0"/>
+    <p:sldId xmlns:r="http://schemas.openxmlformats.org/officeDocument/2006/relationships" id="261" r:id="R147a4e89511d4c16"/>
+    <p:sldId xmlns:r="http://schemas.openxmlformats.org/officeDocument/2006/relationships" id="262" r:id="Re6b55dad719b46ca"/>
+    <p:sldId xmlns:r="http://schemas.openxmlformats.org/officeDocument/2006/relationships" id="263" r:id="Ra6ba0dcfda5f4f39"/>
+    <p:sldId xmlns:r="http://schemas.openxmlformats.org/officeDocument/2006/relationships" id="264" r:id="Rd3b18f852f4e4f81"/>
+    <p:sldId xmlns:r="http://schemas.openxmlformats.org/officeDocument/2006/relationships" id="265" r:id="R998a3fea02c246e2"/>
+    <p:sldId xmlns:r="http://schemas.openxmlformats.org/officeDocument/2006/relationships" id="266" r:id="Radfd5912f3c843a2"/>
+    <p:sldId xmlns:r="http://schemas.openxmlformats.org/officeDocument/2006/relationships" id="267" r:id="Re233fcad24394677"/>
+    <p:sldId xmlns:r="http://schemas.openxmlformats.org/officeDocument/2006/relationships" id="268" r:id="R4f9a9631d95b4399"/>
+    <p:sldId xmlns:r="http://schemas.openxmlformats.org/officeDocument/2006/relationships" id="269" r:id="R986c0fc4f31e4f0f"/>
+    <p:sldId xmlns:r="http://schemas.openxmlformats.org/officeDocument/2006/relationships" id="270" r:id="R7250bd5e5da342a3"/>
+    <p:sldId xmlns:r="http://schemas.openxmlformats.org/officeDocument/2006/relationships" id="271" r:id="R9aa3ac4ebd9c4eb0"/>
+    <p:sldId xmlns:r="http://schemas.openxmlformats.org/officeDocument/2006/relationships" id="272" r:id="Rbcd45905ada945b1"/>
   </p:sldIdLst>
   <p:sldSz cx="12192000" cy="6858000"/>
   <p:notesSz cx="6858000" cy="9144000"/>
@@ -1040,6 +1041,72 @@
 </p:notes>
 </file>
 
+<file path=ppt/notesSlides/notesSlide17.xml><?xml version="1.0" encoding="utf-8"?>
+<p:notes xmlns:p="http://schemas.openxmlformats.org/presentationml/2006/main">
+  <p:cSld>
+    <p:spTree>
+      <p:nvGrpSpPr>
+        <p:cNvPr id="1" name=""/>
+        <p:cNvGrpSpPr/>
+        <p:nvPr/>
+      </p:nvGrpSpPr>
+      <p:grpSpPr>
+        <a:xfrm xmlns:a="http://schemas.openxmlformats.org/drawingml/2006/main"/>
+      </p:grpSpPr>
+      <p:sp>
+        <p:nvSpPr>
+          <p:cNvPr id="2" name="Slide Image Placeholder 1"/>
+          <p:cNvSpPr>
+            <a:spLocks xmlns:a="http://schemas.openxmlformats.org/drawingml/2006/main" noGrp="1"/>
+          </p:cNvSpPr>
+          <p:nvPr>
+            <p:ph type="sldImg" idx="0"/>
+          </p:nvPr>
+        </p:nvSpPr>
+        <p:spPr/>
+      </p:sp>
+      <p:sp>
+        <p:nvSpPr>
+          <p:cNvPr id="3" name="Notes Placeholder 2"/>
+          <p:cNvSpPr>
+            <a:spLocks xmlns:a="http://schemas.openxmlformats.org/drawingml/2006/main" noGrp="1"/>
+          </p:cNvSpPr>
+          <p:nvPr>
+            <p:ph type="body" idx="1"/>
+          </p:nvPr>
+        </p:nvSpPr>
+        <p:spPr/>
+        <p:txBody>
+          <a:bodyPr xmlns:a="http://schemas.openxmlformats.org/drawingml/2006/main"/>
+          <a:lstStyle xmlns:a="http://schemas.openxmlformats.org/drawingml/2006/main"/>
+          <a:p xmlns:a="http://schemas.openxmlformats.org/drawingml/2006/main"/>
+        </p:txBody>
+      </p:sp>
+      <p:sp>
+        <p:nvSpPr>
+          <p:cNvPr id="4" name="Slide Number Placeholder 3"/>
+          <p:cNvSpPr>
+            <a:spLocks xmlns:a="http://schemas.openxmlformats.org/drawingml/2006/main" noGrp="1"/>
+          </p:cNvSpPr>
+          <p:nvPr>
+            <p:ph type="sldNum" idx="5"/>
+          </p:nvPr>
+        </p:nvSpPr>
+        <p:spPr/>
+        <p:txBody>
+          <a:bodyPr xmlns:a="http://schemas.openxmlformats.org/drawingml/2006/main"/>
+          <a:lstStyle xmlns:a="http://schemas.openxmlformats.org/drawingml/2006/main"/>
+          <a:p xmlns:a="http://schemas.openxmlformats.org/drawingml/2006/main"/>
+        </p:txBody>
+      </p:sp>
+    </p:spTree>
+  </p:cSld>
+  <p:clrMapOvr>
+    <a:masterClrMapping xmlns:a="http://schemas.openxmlformats.org/drawingml/2006/main"/>
+  </p:clrMapOvr>
+</p:notes>
+</file>
+
 <file path=ppt/notesSlides/notesSlide2.xml><?xml version="1.0" encoding="utf-8"?>
 <p:notes xmlns:p="http://schemas.openxmlformats.org/presentationml/2006/main">
   <p:cSld>
@@ -1606,7 +1673,7 @@
   </p:cSld>
   <p:clrMap bg1="lt1" tx1="dk1" bg2="lt2" tx2="dk2" accent1="accent1" accent2="accent2" accent3="accent3" accent4="accent4" accent5="accent5" accent6="accent6" hlink="hlink" folHlink="folHlink"/>
   <p:sldLayoutIdLst>
-    <p:sldLayoutId xmlns:r="http://schemas.openxmlformats.org/officeDocument/2006/relationships" id="2147483649" r:id="R8928f2350802420d"/>
+    <p:sldLayoutId xmlns:r="http://schemas.openxmlformats.org/officeDocument/2006/relationships" id="2147483649" r:id="R95bf8d53bcd34e92"/>
   </p:sldLayoutIdLst>
   <p:txStyles>
     <p:titleStyle>
@@ -2364,7 +2431,7 @@
           <p:cNvPr id="1" name="">
             <a:extLst xmlns:a="http://schemas.openxmlformats.org/drawingml/2006/main">
               <a:ext uri="{FF2B5EF4-FFF2-40B4-BE49-F238E27FC236}">
-                <a16:creationId xmlns:a16="http://schemas.microsoft.com/office/drawing/2014/main" id="{22D69BE1-E624-4616-80CF-7B6ACA54DA48}"/>
+                <a16:creationId xmlns:a16="http://schemas.microsoft.com/office/drawing/2014/main" id="{7B537F7F-98B8-4947-9075-0E8EB1209C36}"/>
               </a:ext>
             </a:extLst>
           </p:cNvPr>
@@ -2414,7 +2481,7 @@
           <p:cNvPr id="2" name="">
             <a:extLst xmlns:a="http://schemas.openxmlformats.org/drawingml/2006/main">
               <a:ext uri="{FF2B5EF4-FFF2-40B4-BE49-F238E27FC236}">
-                <a16:creationId xmlns:a16="http://schemas.microsoft.com/office/drawing/2014/main" id="{224852A1-7751-449C-98F5-D0E6201F701C}"/>
+                <a16:creationId xmlns:a16="http://schemas.microsoft.com/office/drawing/2014/main" id="{342B5D59-0220-4285-A510-CF154686D530}"/>
               </a:ext>
             </a:extLst>
           </p:cNvPr>
@@ -2464,7 +2531,7 @@
           <p:cNvPr id="3" name="">
             <a:extLst xmlns:a="http://schemas.openxmlformats.org/drawingml/2006/main">
               <a:ext uri="{FF2B5EF4-FFF2-40B4-BE49-F238E27FC236}">
-                <a16:creationId xmlns:a16="http://schemas.microsoft.com/office/drawing/2014/main" id="{F4BBACA5-AF3E-43D1-AF65-9167987AEF15}"/>
+                <a16:creationId xmlns:a16="http://schemas.microsoft.com/office/drawing/2014/main" id="{03205CB1-AD2C-425A-A40D-65D101A49E74}"/>
               </a:ext>
             </a:extLst>
           </p:cNvPr>
@@ -2514,7 +2581,7 @@
           <p:cNvPr id="4" name="">
             <a:extLst xmlns:a="http://schemas.openxmlformats.org/drawingml/2006/main">
               <a:ext uri="{FF2B5EF4-FFF2-40B4-BE49-F238E27FC236}">
-                <a16:creationId xmlns:a16="http://schemas.microsoft.com/office/drawing/2014/main" id="{BEFC5E41-DA5C-43AF-8084-DE2E7A114C1B}"/>
+                <a16:creationId xmlns:a16="http://schemas.microsoft.com/office/drawing/2014/main" id="{6673A5AA-8ACE-4B6F-BC21-F4CF98E2F707}"/>
               </a:ext>
             </a:extLst>
           </p:cNvPr>
@@ -2547,7 +2614,7 @@
           <p:cNvPr id="5" name="">
             <a:extLst xmlns:a="http://schemas.openxmlformats.org/drawingml/2006/main">
               <a:ext uri="{FF2B5EF4-FFF2-40B4-BE49-F238E27FC236}">
-                <a16:creationId xmlns:a16="http://schemas.microsoft.com/office/drawing/2014/main" id="{96772012-220B-4428-9FA4-8FBE6D8112AA}"/>
+                <a16:creationId xmlns:a16="http://schemas.microsoft.com/office/drawing/2014/main" id="{FC540987-B6D1-4D88-81AF-34454F073394}"/>
               </a:ext>
             </a:extLst>
           </p:cNvPr>
@@ -2597,7 +2664,7 @@
           <p:cNvPr id="6" name="">
             <a:extLst xmlns:a="http://schemas.openxmlformats.org/drawingml/2006/main">
               <a:ext uri="{FF2B5EF4-FFF2-40B4-BE49-F238E27FC236}">
-                <a16:creationId xmlns:a16="http://schemas.microsoft.com/office/drawing/2014/main" id="{7F1529E8-84E3-4C00-938F-A2D99F640EB3}"/>
+                <a16:creationId xmlns:a16="http://schemas.microsoft.com/office/drawing/2014/main" id="{F3AFB728-595A-4E53-9773-6369FC510463}"/>
               </a:ext>
             </a:extLst>
           </p:cNvPr>
@@ -2645,7 +2712,7 @@
     </p:spTree>
     <p:extLst>
       <p:ext uri="{BB962C8B-B14F-4D97-AF65-F5344CB8AC3E}">
-        <p14:creationId xmlns:p14="http://schemas.microsoft.com/office/powerpoint/2010/main" val="989609315"/>
+        <p14:creationId xmlns:p14="http://schemas.microsoft.com/office/powerpoint/2010/main" val="1309269461"/>
       </p:ext>
     </p:extLst>
   </p:cSld>
@@ -2676,7 +2743,7 @@
           <p:cNvPr id="1" name="">
             <a:extLst xmlns:a="http://schemas.openxmlformats.org/drawingml/2006/main">
               <a:ext uri="{FF2B5EF4-FFF2-40B4-BE49-F238E27FC236}">
-                <a16:creationId xmlns:a16="http://schemas.microsoft.com/office/drawing/2014/main" id="{056E328E-8884-4F3D-94C1-6E89E0FC3767}"/>
+                <a16:creationId xmlns:a16="http://schemas.microsoft.com/office/drawing/2014/main" id="{83CFDB12-3BB2-4D73-94A0-F8B044F779C8}"/>
               </a:ext>
             </a:extLst>
           </p:cNvPr>
@@ -2726,7 +2793,7 @@
           <p:cNvPr id="2" name="">
             <a:extLst xmlns:a="http://schemas.openxmlformats.org/drawingml/2006/main">
               <a:ext uri="{FF2B5EF4-FFF2-40B4-BE49-F238E27FC236}">
-                <a16:creationId xmlns:a16="http://schemas.microsoft.com/office/drawing/2014/main" id="{FA2818CE-0C32-4284-972D-70F92279BF1D}"/>
+                <a16:creationId xmlns:a16="http://schemas.microsoft.com/office/drawing/2014/main" id="{E947AE5B-DCDB-4C8F-B953-729F4E06B110}"/>
               </a:ext>
             </a:extLst>
           </p:cNvPr>
@@ -2776,7 +2843,7 @@
           <p:cNvPr id="3" name="">
             <a:extLst xmlns:a="http://schemas.openxmlformats.org/drawingml/2006/main">
               <a:ext uri="{FF2B5EF4-FFF2-40B4-BE49-F238E27FC236}">
-                <a16:creationId xmlns:a16="http://schemas.microsoft.com/office/drawing/2014/main" id="{BB124BFD-C015-4359-B9C8-B6E7E47396C1}"/>
+                <a16:creationId xmlns:a16="http://schemas.microsoft.com/office/drawing/2014/main" id="{5EF768E9-7B3A-4472-B563-9AE3A62585D4}"/>
               </a:ext>
             </a:extLst>
           </p:cNvPr>
@@ -2813,7 +2880,7 @@
           <p:nvPr/>
         </p:nvPicPr>
         <p:blipFill>
-          <a:blip xmlns:r="http://schemas.openxmlformats.org/officeDocument/2006/relationships" xmlns:a="http://schemas.openxmlformats.org/drawingml/2006/main" r:embed="R77acd17572e241a6"/>
+          <a:blip xmlns:r="http://schemas.openxmlformats.org/officeDocument/2006/relationships" xmlns:a="http://schemas.openxmlformats.org/drawingml/2006/main" r:embed="R95888b7b1db64d09"/>
           <a:stretch xmlns:a="http://schemas.openxmlformats.org/drawingml/2006/main"/>
         </p:blipFill>
         <p:spPr>
@@ -2831,7 +2898,7 @@
           <p:cNvPr id="5" name="">
             <a:extLst xmlns:a="http://schemas.openxmlformats.org/drawingml/2006/main">
               <a:ext uri="{FF2B5EF4-FFF2-40B4-BE49-F238E27FC236}">
-                <a16:creationId xmlns:a16="http://schemas.microsoft.com/office/drawing/2014/main" id="{10D15895-7BB2-4FC4-8380-F3DA5E7D7D81}"/>
+                <a16:creationId xmlns:a16="http://schemas.microsoft.com/office/drawing/2014/main" id="{CDE5BCFE-2D14-4C13-A680-582C8827970F}"/>
               </a:ext>
             </a:extLst>
           </p:cNvPr>
@@ -2864,7 +2931,7 @@
           <p:cNvPr id="6" name="">
             <a:extLst xmlns:a="http://schemas.openxmlformats.org/drawingml/2006/main">
               <a:ext uri="{FF2B5EF4-FFF2-40B4-BE49-F238E27FC236}">
-                <a16:creationId xmlns:a16="http://schemas.microsoft.com/office/drawing/2014/main" id="{6D586B6D-24A2-4C02-B2AF-64A50A24D785}"/>
+                <a16:creationId xmlns:a16="http://schemas.microsoft.com/office/drawing/2014/main" id="{55580949-F926-40DF-BA39-5D592A481B17}"/>
               </a:ext>
             </a:extLst>
           </p:cNvPr>
@@ -2914,7 +2981,7 @@
           <p:cNvPr id="7" name="">
             <a:extLst xmlns:a="http://schemas.openxmlformats.org/drawingml/2006/main">
               <a:ext uri="{FF2B5EF4-FFF2-40B4-BE49-F238E27FC236}">
-                <a16:creationId xmlns:a16="http://schemas.microsoft.com/office/drawing/2014/main" id="{20958770-7467-4B3B-AC0A-5BD318790E79}"/>
+                <a16:creationId xmlns:a16="http://schemas.microsoft.com/office/drawing/2014/main" id="{5DCD5033-20F2-4751-B9E8-B00E146B0870}"/>
               </a:ext>
             </a:extLst>
           </p:cNvPr>
@@ -2964,7 +3031,7 @@
           <p:cNvPr id="8" name="">
             <a:extLst xmlns:a="http://schemas.openxmlformats.org/drawingml/2006/main">
               <a:ext uri="{FF2B5EF4-FFF2-40B4-BE49-F238E27FC236}">
-                <a16:creationId xmlns:a16="http://schemas.microsoft.com/office/drawing/2014/main" id="{70B41678-BD1A-4B71-B250-883F80F383BF}"/>
+                <a16:creationId xmlns:a16="http://schemas.microsoft.com/office/drawing/2014/main" id="{796A573E-1793-4332-91EA-A763FF1DA900}"/>
               </a:ext>
             </a:extLst>
           </p:cNvPr>
@@ -3012,7 +3079,7 @@
     </p:spTree>
     <p:extLst>
       <p:ext uri="{BB962C8B-B14F-4D97-AF65-F5344CB8AC3E}">
-        <p14:creationId xmlns:p14="http://schemas.microsoft.com/office/powerpoint/2010/main" val="1966636422"/>
+        <p14:creationId xmlns:p14="http://schemas.microsoft.com/office/powerpoint/2010/main" val="1779271620"/>
       </p:ext>
     </p:extLst>
   </p:cSld>
@@ -3043,7 +3110,7 @@
           <p:cNvPr id="1" name="">
             <a:extLst xmlns:a="http://schemas.openxmlformats.org/drawingml/2006/main">
               <a:ext uri="{FF2B5EF4-FFF2-40B4-BE49-F238E27FC236}">
-                <a16:creationId xmlns:a16="http://schemas.microsoft.com/office/drawing/2014/main" id="{69AC9AFD-CE85-4367-BEF2-598CBA0110BA}"/>
+                <a16:creationId xmlns:a16="http://schemas.microsoft.com/office/drawing/2014/main" id="{11183633-0605-4A53-BF70-9289941E6207}"/>
               </a:ext>
             </a:extLst>
           </p:cNvPr>
@@ -3093,7 +3160,7 @@
           <p:cNvPr id="2" name="">
             <a:extLst xmlns:a="http://schemas.openxmlformats.org/drawingml/2006/main">
               <a:ext uri="{FF2B5EF4-FFF2-40B4-BE49-F238E27FC236}">
-                <a16:creationId xmlns:a16="http://schemas.microsoft.com/office/drawing/2014/main" id="{13956F67-D7AC-498B-8017-480EA92C42F8}"/>
+                <a16:creationId xmlns:a16="http://schemas.microsoft.com/office/drawing/2014/main" id="{F8412CAA-B28F-40DF-BBC1-1EAB7139F3D4}"/>
               </a:ext>
             </a:extLst>
           </p:cNvPr>
@@ -3143,7 +3210,7 @@
           <p:cNvPr id="3" name="">
             <a:extLst xmlns:a="http://schemas.openxmlformats.org/drawingml/2006/main">
               <a:ext uri="{FF2B5EF4-FFF2-40B4-BE49-F238E27FC236}">
-                <a16:creationId xmlns:a16="http://schemas.microsoft.com/office/drawing/2014/main" id="{3F3C3172-D5FF-4904-9031-0B4609EF879B}"/>
+                <a16:creationId xmlns:a16="http://schemas.microsoft.com/office/drawing/2014/main" id="{AE7D2DAD-B4B0-40AE-AA3C-6B3CEBFF4C38}"/>
               </a:ext>
             </a:extLst>
           </p:cNvPr>
@@ -3180,7 +3247,7 @@
           <p:nvPr/>
         </p:nvPicPr>
         <p:blipFill>
-          <a:blip xmlns:r="http://schemas.openxmlformats.org/officeDocument/2006/relationships" xmlns:a="http://schemas.openxmlformats.org/drawingml/2006/main" r:embed="R4c04607c711c43ea"/>
+          <a:blip xmlns:r="http://schemas.openxmlformats.org/officeDocument/2006/relationships" xmlns:a="http://schemas.openxmlformats.org/drawingml/2006/main" r:embed="R5bb077d58de34c28"/>
           <a:stretch xmlns:a="http://schemas.openxmlformats.org/drawingml/2006/main"/>
         </p:blipFill>
         <p:spPr>
@@ -3198,7 +3265,7 @@
           <p:cNvPr id="5" name="">
             <a:extLst xmlns:a="http://schemas.openxmlformats.org/drawingml/2006/main">
               <a:ext uri="{FF2B5EF4-FFF2-40B4-BE49-F238E27FC236}">
-                <a16:creationId xmlns:a16="http://schemas.microsoft.com/office/drawing/2014/main" id="{1EC8A662-140A-4FDD-9E2C-0040ADEADE37}"/>
+                <a16:creationId xmlns:a16="http://schemas.microsoft.com/office/drawing/2014/main" id="{56A5B1C6-390A-4475-92F1-D5B072DEC290}"/>
               </a:ext>
             </a:extLst>
           </p:cNvPr>
@@ -3231,7 +3298,7 @@
           <p:cNvPr id="6" name="">
             <a:extLst xmlns:a="http://schemas.openxmlformats.org/drawingml/2006/main">
               <a:ext uri="{FF2B5EF4-FFF2-40B4-BE49-F238E27FC236}">
-                <a16:creationId xmlns:a16="http://schemas.microsoft.com/office/drawing/2014/main" id="{C4E0333F-E1B7-4E3D-A944-DF391448A61B}"/>
+                <a16:creationId xmlns:a16="http://schemas.microsoft.com/office/drawing/2014/main" id="{2629EB82-6AD0-4EC3-82BE-F252E62095A7}"/>
               </a:ext>
             </a:extLst>
           </p:cNvPr>
@@ -3281,7 +3348,7 @@
           <p:cNvPr id="7" name="">
             <a:extLst xmlns:a="http://schemas.openxmlformats.org/drawingml/2006/main">
               <a:ext uri="{FF2B5EF4-FFF2-40B4-BE49-F238E27FC236}">
-                <a16:creationId xmlns:a16="http://schemas.microsoft.com/office/drawing/2014/main" id="{270A3C1D-F41C-42C6-AACF-0F496A8C5B68}"/>
+                <a16:creationId xmlns:a16="http://schemas.microsoft.com/office/drawing/2014/main" id="{334C4D22-2E59-44F7-8206-B8F4B9C44F28}"/>
               </a:ext>
             </a:extLst>
           </p:cNvPr>
@@ -3314,7 +3381,7 @@
           <p:cNvPr id="8" name="">
             <a:extLst xmlns:a="http://schemas.openxmlformats.org/drawingml/2006/main">
               <a:ext uri="{FF2B5EF4-FFF2-40B4-BE49-F238E27FC236}">
-                <a16:creationId xmlns:a16="http://schemas.microsoft.com/office/drawing/2014/main" id="{594AD948-1BC9-43FE-94E1-2BBE287079A6}"/>
+                <a16:creationId xmlns:a16="http://schemas.microsoft.com/office/drawing/2014/main" id="{B1F64F5C-A6CB-4A6A-A1E3-8E9E297C489D}"/>
               </a:ext>
             </a:extLst>
           </p:cNvPr>
@@ -3364,7 +3431,7 @@
           <p:cNvPr id="9" name="">
             <a:extLst xmlns:a="http://schemas.openxmlformats.org/drawingml/2006/main">
               <a:ext uri="{FF2B5EF4-FFF2-40B4-BE49-F238E27FC236}">
-                <a16:creationId xmlns:a16="http://schemas.microsoft.com/office/drawing/2014/main" id="{44530694-45C0-45CB-B8CC-EA3D5938D86C}"/>
+                <a16:creationId xmlns:a16="http://schemas.microsoft.com/office/drawing/2014/main" id="{F2E0081C-63FC-45A1-9821-94FE51F312DC}"/>
               </a:ext>
             </a:extLst>
           </p:cNvPr>
@@ -3397,7 +3464,7 @@
           <p:cNvPr id="10" name="">
             <a:extLst xmlns:a="http://schemas.openxmlformats.org/drawingml/2006/main">
               <a:ext uri="{FF2B5EF4-FFF2-40B4-BE49-F238E27FC236}">
-                <a16:creationId xmlns:a16="http://schemas.microsoft.com/office/drawing/2014/main" id="{8DA7A341-7218-45BB-8401-081AAD329D40}"/>
+                <a16:creationId xmlns:a16="http://schemas.microsoft.com/office/drawing/2014/main" id="{CBAB375A-D3BB-48E2-AE11-DFCA33E5025F}"/>
               </a:ext>
             </a:extLst>
           </p:cNvPr>
@@ -3447,7 +3514,7 @@
           <p:cNvPr id="11" name="">
             <a:extLst xmlns:a="http://schemas.openxmlformats.org/drawingml/2006/main">
               <a:ext uri="{FF2B5EF4-FFF2-40B4-BE49-F238E27FC236}">
-                <a16:creationId xmlns:a16="http://schemas.microsoft.com/office/drawing/2014/main" id="{972E89A0-629D-4C92-AD3F-3F895E7CF7E9}"/>
+                <a16:creationId xmlns:a16="http://schemas.microsoft.com/office/drawing/2014/main" id="{50CF7EF4-6F98-4119-BD3F-7F56E6F9EF9F}"/>
               </a:ext>
             </a:extLst>
           </p:cNvPr>
@@ -3480,7 +3547,7 @@
           <p:cNvPr id="12" name="">
             <a:extLst xmlns:a="http://schemas.openxmlformats.org/drawingml/2006/main">
               <a:ext uri="{FF2B5EF4-FFF2-40B4-BE49-F238E27FC236}">
-                <a16:creationId xmlns:a16="http://schemas.microsoft.com/office/drawing/2014/main" id="{6215A24C-DE98-4539-965E-49E2A7CD272B}"/>
+                <a16:creationId xmlns:a16="http://schemas.microsoft.com/office/drawing/2014/main" id="{0892B34B-A08C-4124-8B5B-CB5261020BD5}"/>
               </a:ext>
             </a:extLst>
           </p:cNvPr>
@@ -3530,7 +3597,7 @@
           <p:cNvPr id="13" name="">
             <a:extLst xmlns:a="http://schemas.openxmlformats.org/drawingml/2006/main">
               <a:ext uri="{FF2B5EF4-FFF2-40B4-BE49-F238E27FC236}">
-                <a16:creationId xmlns:a16="http://schemas.microsoft.com/office/drawing/2014/main" id="{7F590E31-541B-463D-93E8-8DD894D8D546}"/>
+                <a16:creationId xmlns:a16="http://schemas.microsoft.com/office/drawing/2014/main" id="{B7A800A7-70E1-4E74-B808-C6F6B491FE44}"/>
               </a:ext>
             </a:extLst>
           </p:cNvPr>
@@ -3578,7 +3645,7 @@
     </p:spTree>
     <p:extLst>
       <p:ext uri="{BB962C8B-B14F-4D97-AF65-F5344CB8AC3E}">
-        <p14:creationId xmlns:p14="http://schemas.microsoft.com/office/powerpoint/2010/main" val="2061091237"/>
+        <p14:creationId xmlns:p14="http://schemas.microsoft.com/office/powerpoint/2010/main" val="1101160008"/>
       </p:ext>
     </p:extLst>
   </p:cSld>
@@ -3609,7 +3676,7 @@
           <p:cNvPr id="1" name="">
             <a:extLst xmlns:a="http://schemas.openxmlformats.org/drawingml/2006/main">
               <a:ext uri="{FF2B5EF4-FFF2-40B4-BE49-F238E27FC236}">
-                <a16:creationId xmlns:a16="http://schemas.microsoft.com/office/drawing/2014/main" id="{0BA2A30D-6F67-4A00-961F-C2C4D32ED890}"/>
+                <a16:creationId xmlns:a16="http://schemas.microsoft.com/office/drawing/2014/main" id="{38C8B257-2FC4-4C0F-AFB7-5B4DC8FDFD0E}"/>
               </a:ext>
             </a:extLst>
           </p:cNvPr>
@@ -3659,7 +3726,7 @@
           <p:cNvPr id="2" name="">
             <a:extLst xmlns:a="http://schemas.openxmlformats.org/drawingml/2006/main">
               <a:ext uri="{FF2B5EF4-FFF2-40B4-BE49-F238E27FC236}">
-                <a16:creationId xmlns:a16="http://schemas.microsoft.com/office/drawing/2014/main" id="{A96A0EE3-8A40-4F5C-B4F2-B9A4BBA1080C}"/>
+                <a16:creationId xmlns:a16="http://schemas.microsoft.com/office/drawing/2014/main" id="{EA247149-EC1A-460F-A680-8FEB9A23B78E}"/>
               </a:ext>
             </a:extLst>
           </p:cNvPr>
@@ -3709,7 +3776,7 @@
           <p:cNvPr id="3" name="">
             <a:extLst xmlns:a="http://schemas.openxmlformats.org/drawingml/2006/main">
               <a:ext uri="{FF2B5EF4-FFF2-40B4-BE49-F238E27FC236}">
-                <a16:creationId xmlns:a16="http://schemas.microsoft.com/office/drawing/2014/main" id="{61E27BD0-18D6-4D39-882E-0F0E026EF04B}"/>
+                <a16:creationId xmlns:a16="http://schemas.microsoft.com/office/drawing/2014/main" id="{36228FF5-3A79-489C-8722-58126356969F}"/>
               </a:ext>
             </a:extLst>
           </p:cNvPr>
@@ -3742,7 +3809,7 @@
           <p:cNvPr id="4" name="">
             <a:extLst xmlns:a="http://schemas.openxmlformats.org/drawingml/2006/main">
               <a:ext uri="{FF2B5EF4-FFF2-40B4-BE49-F238E27FC236}">
-                <a16:creationId xmlns:a16="http://schemas.microsoft.com/office/drawing/2014/main" id="{FBFE2859-8E26-4E1B-AF70-72B914EBFFC8}"/>
+                <a16:creationId xmlns:a16="http://schemas.microsoft.com/office/drawing/2014/main" id="{66962C03-FB12-4816-BA8D-55070F54BDC5}"/>
               </a:ext>
             </a:extLst>
           </p:cNvPr>
@@ -3775,7 +3842,7 @@
           <p:cNvPr id="5" name="">
             <a:extLst xmlns:a="http://schemas.openxmlformats.org/drawingml/2006/main">
               <a:ext uri="{FF2B5EF4-FFF2-40B4-BE49-F238E27FC236}">
-                <a16:creationId xmlns:a16="http://schemas.microsoft.com/office/drawing/2014/main" id="{4DB49341-D462-4025-BD2C-00663AA2BBEF}"/>
+                <a16:creationId xmlns:a16="http://schemas.microsoft.com/office/drawing/2014/main" id="{CB0727EE-63D6-472A-8C12-04CC3B64E721}"/>
               </a:ext>
             </a:extLst>
           </p:cNvPr>
@@ -3808,7 +3875,7 @@
           <p:cNvPr id="6" name="">
             <a:extLst xmlns:a="http://schemas.openxmlformats.org/drawingml/2006/main">
               <a:ext uri="{FF2B5EF4-FFF2-40B4-BE49-F238E27FC236}">
-                <a16:creationId xmlns:a16="http://schemas.microsoft.com/office/drawing/2014/main" id="{EB2F3E6F-5831-44DF-ACD9-7058A77EA84B}"/>
+                <a16:creationId xmlns:a16="http://schemas.microsoft.com/office/drawing/2014/main" id="{96DB5A9A-5001-4A91-8352-1302E0CF1EEF}"/>
               </a:ext>
             </a:extLst>
           </p:cNvPr>
@@ -3858,7 +3925,7 @@
           <p:cNvPr id="7" name="">
             <a:extLst xmlns:a="http://schemas.openxmlformats.org/drawingml/2006/main">
               <a:ext uri="{FF2B5EF4-FFF2-40B4-BE49-F238E27FC236}">
-                <a16:creationId xmlns:a16="http://schemas.microsoft.com/office/drawing/2014/main" id="{49501804-E532-48BD-BBC6-0B3AC577A1D1}"/>
+                <a16:creationId xmlns:a16="http://schemas.microsoft.com/office/drawing/2014/main" id="{491345FF-08AA-493D-B5B3-C9949F8BBA17}"/>
               </a:ext>
             </a:extLst>
           </p:cNvPr>
@@ -3891,7 +3958,7 @@
           <p:cNvPr id="8" name="">
             <a:extLst xmlns:a="http://schemas.openxmlformats.org/drawingml/2006/main">
               <a:ext uri="{FF2B5EF4-FFF2-40B4-BE49-F238E27FC236}">
-                <a16:creationId xmlns:a16="http://schemas.microsoft.com/office/drawing/2014/main" id="{83A5E021-A4A0-40DF-8BE0-B570EE9C5915}"/>
+                <a16:creationId xmlns:a16="http://schemas.microsoft.com/office/drawing/2014/main" id="{C0EC2CA5-1F0B-4823-8371-405DF3C464CD}"/>
               </a:ext>
             </a:extLst>
           </p:cNvPr>
@@ -3941,7 +4008,7 @@
           <p:cNvPr id="9" name="">
             <a:extLst xmlns:a="http://schemas.openxmlformats.org/drawingml/2006/main">
               <a:ext uri="{FF2B5EF4-FFF2-40B4-BE49-F238E27FC236}">
-                <a16:creationId xmlns:a16="http://schemas.microsoft.com/office/drawing/2014/main" id="{838DBD67-4611-4F7F-8687-6C424686EA43}"/>
+                <a16:creationId xmlns:a16="http://schemas.microsoft.com/office/drawing/2014/main" id="{B01FF9DA-5064-4718-B56B-595E85C1C02B}"/>
               </a:ext>
             </a:extLst>
           </p:cNvPr>
@@ -3974,7 +4041,7 @@
           <p:cNvPr id="10" name="">
             <a:extLst xmlns:a="http://schemas.openxmlformats.org/drawingml/2006/main">
               <a:ext uri="{FF2B5EF4-FFF2-40B4-BE49-F238E27FC236}">
-                <a16:creationId xmlns:a16="http://schemas.microsoft.com/office/drawing/2014/main" id="{ABAA65D9-4C43-4C5F-B3DC-BECEB53280E2}"/>
+                <a16:creationId xmlns:a16="http://schemas.microsoft.com/office/drawing/2014/main" id="{7C0BBE3C-18A2-46EC-8561-37083D8EDC5A}"/>
               </a:ext>
             </a:extLst>
           </p:cNvPr>
@@ -4024,7 +4091,7 @@
           <p:cNvPr id="11" name="">
             <a:extLst xmlns:a="http://schemas.openxmlformats.org/drawingml/2006/main">
               <a:ext uri="{FF2B5EF4-FFF2-40B4-BE49-F238E27FC236}">
-                <a16:creationId xmlns:a16="http://schemas.microsoft.com/office/drawing/2014/main" id="{0823894B-F502-41E1-879F-D9D01BA72C00}"/>
+                <a16:creationId xmlns:a16="http://schemas.microsoft.com/office/drawing/2014/main" id="{4C9DD365-D0BF-4FEC-9F0D-AAACB0BD2D79}"/>
               </a:ext>
             </a:extLst>
           </p:cNvPr>
@@ -4057,7 +4124,7 @@
           <p:cNvPr id="12" name="">
             <a:extLst xmlns:a="http://schemas.openxmlformats.org/drawingml/2006/main">
               <a:ext uri="{FF2B5EF4-FFF2-40B4-BE49-F238E27FC236}">
-                <a16:creationId xmlns:a16="http://schemas.microsoft.com/office/drawing/2014/main" id="{7E3BBB49-565D-4F8C-AE35-C3424A20F443}"/>
+                <a16:creationId xmlns:a16="http://schemas.microsoft.com/office/drawing/2014/main" id="{8A76FE01-69CC-402D-9EAD-11CD84643CD3}"/>
               </a:ext>
             </a:extLst>
           </p:cNvPr>
@@ -4107,7 +4174,7 @@
           <p:cNvPr id="13" name="">
             <a:extLst xmlns:a="http://schemas.openxmlformats.org/drawingml/2006/main">
               <a:ext uri="{FF2B5EF4-FFF2-40B4-BE49-F238E27FC236}">
-                <a16:creationId xmlns:a16="http://schemas.microsoft.com/office/drawing/2014/main" id="{1861CE03-30AC-47D9-BF2A-0431DA70FCAE}"/>
+                <a16:creationId xmlns:a16="http://schemas.microsoft.com/office/drawing/2014/main" id="{DD6B2DAE-8E2A-4057-B4F5-63DCDE32E059}"/>
               </a:ext>
             </a:extLst>
           </p:cNvPr>
@@ -4140,7 +4207,7 @@
           <p:cNvPr id="14" name="">
             <a:extLst xmlns:a="http://schemas.openxmlformats.org/drawingml/2006/main">
               <a:ext uri="{FF2B5EF4-FFF2-40B4-BE49-F238E27FC236}">
-                <a16:creationId xmlns:a16="http://schemas.microsoft.com/office/drawing/2014/main" id="{49014633-A937-42B5-85B8-805ED5F37A33}"/>
+                <a16:creationId xmlns:a16="http://schemas.microsoft.com/office/drawing/2014/main" id="{EADD849C-C7D9-432A-B668-2DEBCA896806}"/>
               </a:ext>
             </a:extLst>
           </p:cNvPr>
@@ -4190,7 +4257,7 @@
           <p:cNvPr id="15" name="">
             <a:extLst xmlns:a="http://schemas.openxmlformats.org/drawingml/2006/main">
               <a:ext uri="{FF2B5EF4-FFF2-40B4-BE49-F238E27FC236}">
-                <a16:creationId xmlns:a16="http://schemas.microsoft.com/office/drawing/2014/main" id="{50CCBAD4-4419-42B6-9BC5-EEBBFE2F5933}"/>
+                <a16:creationId xmlns:a16="http://schemas.microsoft.com/office/drawing/2014/main" id="{E013212B-C4D6-4DA9-A81A-6AEFBCBD6685}"/>
               </a:ext>
             </a:extLst>
           </p:cNvPr>
@@ -4240,7 +4307,7 @@
           <p:cNvPr id="16" name="">
             <a:extLst xmlns:a="http://schemas.openxmlformats.org/drawingml/2006/main">
               <a:ext uri="{FF2B5EF4-FFF2-40B4-BE49-F238E27FC236}">
-                <a16:creationId xmlns:a16="http://schemas.microsoft.com/office/drawing/2014/main" id="{D440F507-6AEE-40F7-8E31-AF58F8F64D76}"/>
+                <a16:creationId xmlns:a16="http://schemas.microsoft.com/office/drawing/2014/main" id="{FB7F3FA9-A509-4FB3-95D7-48B82AAFD206}"/>
               </a:ext>
             </a:extLst>
           </p:cNvPr>
@@ -4273,7 +4340,7 @@
           <p:cNvPr id="17" name="">
             <a:extLst xmlns:a="http://schemas.openxmlformats.org/drawingml/2006/main">
               <a:ext uri="{FF2B5EF4-FFF2-40B4-BE49-F238E27FC236}">
-                <a16:creationId xmlns:a16="http://schemas.microsoft.com/office/drawing/2014/main" id="{FA780D12-5449-4763-9EE5-84186D93FA3B}"/>
+                <a16:creationId xmlns:a16="http://schemas.microsoft.com/office/drawing/2014/main" id="{F124D99D-78F6-49E9-8600-E745E713CC47}"/>
               </a:ext>
             </a:extLst>
           </p:cNvPr>
@@ -4323,7 +4390,7 @@
           <p:cNvPr id="18" name="">
             <a:extLst xmlns:a="http://schemas.openxmlformats.org/drawingml/2006/main">
               <a:ext uri="{FF2B5EF4-FFF2-40B4-BE49-F238E27FC236}">
-                <a16:creationId xmlns:a16="http://schemas.microsoft.com/office/drawing/2014/main" id="{DFCB7F31-9F89-4536-A597-B14D504EA81D}"/>
+                <a16:creationId xmlns:a16="http://schemas.microsoft.com/office/drawing/2014/main" id="{384F3F8F-CD53-4B11-9C38-DF4EE83542A5}"/>
               </a:ext>
             </a:extLst>
           </p:cNvPr>
@@ -4356,7 +4423,7 @@
           <p:cNvPr id="19" name="">
             <a:extLst xmlns:a="http://schemas.openxmlformats.org/drawingml/2006/main">
               <a:ext uri="{FF2B5EF4-FFF2-40B4-BE49-F238E27FC236}">
-                <a16:creationId xmlns:a16="http://schemas.microsoft.com/office/drawing/2014/main" id="{EF7DD331-5756-4DD1-8874-3FA9EF7EB356}"/>
+                <a16:creationId xmlns:a16="http://schemas.microsoft.com/office/drawing/2014/main" id="{501EE73D-B992-4D63-A13B-92692D19F233}"/>
               </a:ext>
             </a:extLst>
           </p:cNvPr>
@@ -4406,7 +4473,7 @@
           <p:cNvPr id="20" name="">
             <a:extLst xmlns:a="http://schemas.openxmlformats.org/drawingml/2006/main">
               <a:ext uri="{FF2B5EF4-FFF2-40B4-BE49-F238E27FC236}">
-                <a16:creationId xmlns:a16="http://schemas.microsoft.com/office/drawing/2014/main" id="{EC8DE9FE-EEA7-45DA-B3E7-BBD37CD14CF8}"/>
+                <a16:creationId xmlns:a16="http://schemas.microsoft.com/office/drawing/2014/main" id="{3399D366-7124-4D60-9B66-4AEB65B9A172}"/>
               </a:ext>
             </a:extLst>
           </p:cNvPr>
@@ -4439,7 +4506,7 @@
           <p:cNvPr id="21" name="">
             <a:extLst xmlns:a="http://schemas.openxmlformats.org/drawingml/2006/main">
               <a:ext uri="{FF2B5EF4-FFF2-40B4-BE49-F238E27FC236}">
-                <a16:creationId xmlns:a16="http://schemas.microsoft.com/office/drawing/2014/main" id="{0B13202D-053B-4134-BD77-322D10A16747}"/>
+                <a16:creationId xmlns:a16="http://schemas.microsoft.com/office/drawing/2014/main" id="{A2A9F99D-EE98-4BEC-BC44-110BA3686B0B}"/>
               </a:ext>
             </a:extLst>
           </p:cNvPr>
@@ -4489,7 +4556,7 @@
           <p:cNvPr id="22" name="">
             <a:extLst xmlns:a="http://schemas.openxmlformats.org/drawingml/2006/main">
               <a:ext uri="{FF2B5EF4-FFF2-40B4-BE49-F238E27FC236}">
-                <a16:creationId xmlns:a16="http://schemas.microsoft.com/office/drawing/2014/main" id="{380B098C-6886-47FB-BB87-C6BBCA7EB57D}"/>
+                <a16:creationId xmlns:a16="http://schemas.microsoft.com/office/drawing/2014/main" id="{DE7BFC67-DFB0-4783-822E-372395430878}"/>
               </a:ext>
             </a:extLst>
           </p:cNvPr>
@@ -4522,7 +4589,7 @@
           <p:cNvPr id="23" name="">
             <a:extLst xmlns:a="http://schemas.openxmlformats.org/drawingml/2006/main">
               <a:ext uri="{FF2B5EF4-FFF2-40B4-BE49-F238E27FC236}">
-                <a16:creationId xmlns:a16="http://schemas.microsoft.com/office/drawing/2014/main" id="{24CAE943-7665-46E5-8ABA-9D704330C13A}"/>
+                <a16:creationId xmlns:a16="http://schemas.microsoft.com/office/drawing/2014/main" id="{832A11AF-D6CE-45F1-A5F7-524487F5B6CB}"/>
               </a:ext>
             </a:extLst>
           </p:cNvPr>
@@ -4572,7 +4639,7 @@
           <p:cNvPr id="24" name="">
             <a:extLst xmlns:a="http://schemas.openxmlformats.org/drawingml/2006/main">
               <a:ext uri="{FF2B5EF4-FFF2-40B4-BE49-F238E27FC236}">
-                <a16:creationId xmlns:a16="http://schemas.microsoft.com/office/drawing/2014/main" id="{276B8721-CE1E-4198-811B-7F693322B5DC}"/>
+                <a16:creationId xmlns:a16="http://schemas.microsoft.com/office/drawing/2014/main" id="{4E63D3B7-85A1-457F-B1A1-7907D6DFB8AE}"/>
               </a:ext>
             </a:extLst>
           </p:cNvPr>
@@ -4622,7 +4689,7 @@
           <p:cNvPr id="25" name="">
             <a:extLst xmlns:a="http://schemas.openxmlformats.org/drawingml/2006/main">
               <a:ext uri="{FF2B5EF4-FFF2-40B4-BE49-F238E27FC236}">
-                <a16:creationId xmlns:a16="http://schemas.microsoft.com/office/drawing/2014/main" id="{3FDD5811-8D45-4E7E-83D9-DE4489652C99}"/>
+                <a16:creationId xmlns:a16="http://schemas.microsoft.com/office/drawing/2014/main" id="{5134920D-21C2-459D-806B-DCDB245DB5FB}"/>
               </a:ext>
             </a:extLst>
           </p:cNvPr>
@@ -4670,7 +4737,7 @@
     </p:spTree>
     <p:extLst>
       <p:ext uri="{BB962C8B-B14F-4D97-AF65-F5344CB8AC3E}">
-        <p14:creationId xmlns:p14="http://schemas.microsoft.com/office/powerpoint/2010/main" val="1768194252"/>
+        <p14:creationId xmlns:p14="http://schemas.microsoft.com/office/powerpoint/2010/main" val="381094010"/>
       </p:ext>
     </p:extLst>
   </p:cSld>
@@ -4701,7 +4768,7 @@
           <p:cNvPr id="1" name="">
             <a:extLst xmlns:a="http://schemas.openxmlformats.org/drawingml/2006/main">
               <a:ext uri="{FF2B5EF4-FFF2-40B4-BE49-F238E27FC236}">
-                <a16:creationId xmlns:a16="http://schemas.microsoft.com/office/drawing/2014/main" id="{534AD96A-13F3-4DAD-ABA4-81CD109F1A55}"/>
+                <a16:creationId xmlns:a16="http://schemas.microsoft.com/office/drawing/2014/main" id="{016B1878-DB1E-43B5-84D9-62A6B97F2852}"/>
               </a:ext>
             </a:extLst>
           </p:cNvPr>
@@ -4751,7 +4818,7 @@
           <p:cNvPr id="2" name="">
             <a:extLst xmlns:a="http://schemas.openxmlformats.org/drawingml/2006/main">
               <a:ext uri="{FF2B5EF4-FFF2-40B4-BE49-F238E27FC236}">
-                <a16:creationId xmlns:a16="http://schemas.microsoft.com/office/drawing/2014/main" id="{D866B608-A903-4590-93A2-64E62F157972}"/>
+                <a16:creationId xmlns:a16="http://schemas.microsoft.com/office/drawing/2014/main" id="{AD642B94-1B08-4C34-9F2F-8DD2DCCCFB8A}"/>
               </a:ext>
             </a:extLst>
           </p:cNvPr>
@@ -4801,7 +4868,7 @@
           <p:cNvPr id="3" name="">
             <a:extLst xmlns:a="http://schemas.openxmlformats.org/drawingml/2006/main">
               <a:ext uri="{FF2B5EF4-FFF2-40B4-BE49-F238E27FC236}">
-                <a16:creationId xmlns:a16="http://schemas.microsoft.com/office/drawing/2014/main" id="{0743FE09-8BDB-4A38-B509-89123D47FC1D}"/>
+                <a16:creationId xmlns:a16="http://schemas.microsoft.com/office/drawing/2014/main" id="{BF3B6DD9-CBBC-4233-AB4D-8DB71409C102}"/>
               </a:ext>
             </a:extLst>
           </p:cNvPr>
@@ -4834,7 +4901,7 @@
           <p:cNvPr id="4" name="">
             <a:extLst xmlns:a="http://schemas.openxmlformats.org/drawingml/2006/main">
               <a:ext uri="{FF2B5EF4-FFF2-40B4-BE49-F238E27FC236}">
-                <a16:creationId xmlns:a16="http://schemas.microsoft.com/office/drawing/2014/main" id="{66DC250C-252A-456E-8545-94FD301D4953}"/>
+                <a16:creationId xmlns:a16="http://schemas.microsoft.com/office/drawing/2014/main" id="{D67F47E1-A583-4A90-93C2-9CE2F22F239D}"/>
               </a:ext>
             </a:extLst>
           </p:cNvPr>
@@ -4867,7 +4934,7 @@
           <p:cNvPr id="5" name="">
             <a:extLst xmlns:a="http://schemas.openxmlformats.org/drawingml/2006/main">
               <a:ext uri="{FF2B5EF4-FFF2-40B4-BE49-F238E27FC236}">
-                <a16:creationId xmlns:a16="http://schemas.microsoft.com/office/drawing/2014/main" id="{CF037942-5C29-4480-8879-881A46C6E514}"/>
+                <a16:creationId xmlns:a16="http://schemas.microsoft.com/office/drawing/2014/main" id="{6A700E65-FB50-43FA-A7F2-DBD958317E44}"/>
               </a:ext>
             </a:extLst>
           </p:cNvPr>
@@ -4917,7 +4984,7 @@
           <p:cNvPr id="6" name="">
             <a:extLst xmlns:a="http://schemas.openxmlformats.org/drawingml/2006/main">
               <a:ext uri="{FF2B5EF4-FFF2-40B4-BE49-F238E27FC236}">
-                <a16:creationId xmlns:a16="http://schemas.microsoft.com/office/drawing/2014/main" id="{6499443F-069A-41DB-8291-E38E11658934}"/>
+                <a16:creationId xmlns:a16="http://schemas.microsoft.com/office/drawing/2014/main" id="{C8BF450E-2105-41CB-8A88-157198D97767}"/>
               </a:ext>
             </a:extLst>
           </p:cNvPr>
@@ -4967,7 +5034,7 @@
           <p:cNvPr id="7" name="">
             <a:extLst xmlns:a="http://schemas.openxmlformats.org/drawingml/2006/main">
               <a:ext uri="{FF2B5EF4-FFF2-40B4-BE49-F238E27FC236}">
-                <a16:creationId xmlns:a16="http://schemas.microsoft.com/office/drawing/2014/main" id="{68761CE2-25F3-43DE-9C4D-D6B7334256C6}"/>
+                <a16:creationId xmlns:a16="http://schemas.microsoft.com/office/drawing/2014/main" id="{EE8260C3-C812-4245-AF5F-E75333F2C1FC}"/>
               </a:ext>
             </a:extLst>
           </p:cNvPr>
@@ -5017,7 +5084,7 @@
           <p:cNvPr id="8" name="">
             <a:extLst xmlns:a="http://schemas.openxmlformats.org/drawingml/2006/main">
               <a:ext uri="{FF2B5EF4-FFF2-40B4-BE49-F238E27FC236}">
-                <a16:creationId xmlns:a16="http://schemas.microsoft.com/office/drawing/2014/main" id="{A5E6AF1F-9BF6-44B4-BC37-754740841DAC}"/>
+                <a16:creationId xmlns:a16="http://schemas.microsoft.com/office/drawing/2014/main" id="{B0920C47-A691-41CB-B43D-0DEDE7639245}"/>
               </a:ext>
             </a:extLst>
           </p:cNvPr>
@@ -5050,7 +5117,7 @@
           <p:cNvPr id="9" name="">
             <a:extLst xmlns:a="http://schemas.openxmlformats.org/drawingml/2006/main">
               <a:ext uri="{FF2B5EF4-FFF2-40B4-BE49-F238E27FC236}">
-                <a16:creationId xmlns:a16="http://schemas.microsoft.com/office/drawing/2014/main" id="{B1D120D7-E32B-47DD-8CF1-5A600411D9B8}"/>
+                <a16:creationId xmlns:a16="http://schemas.microsoft.com/office/drawing/2014/main" id="{80650AB5-CFEF-4B11-B4AE-5EC4A314348A}"/>
               </a:ext>
             </a:extLst>
           </p:cNvPr>
@@ -5100,7 +5167,7 @@
           <p:cNvPr id="10" name="">
             <a:extLst xmlns:a="http://schemas.openxmlformats.org/drawingml/2006/main">
               <a:ext uri="{FF2B5EF4-FFF2-40B4-BE49-F238E27FC236}">
-                <a16:creationId xmlns:a16="http://schemas.microsoft.com/office/drawing/2014/main" id="{16732206-B419-4B08-BBE6-744B3C0A689A}"/>
+                <a16:creationId xmlns:a16="http://schemas.microsoft.com/office/drawing/2014/main" id="{30021AE0-9831-4037-8A38-DC67DF38102E}"/>
               </a:ext>
             </a:extLst>
           </p:cNvPr>
@@ -5150,7 +5217,7 @@
           <p:cNvPr id="11" name="">
             <a:extLst xmlns:a="http://schemas.openxmlformats.org/drawingml/2006/main">
               <a:ext uri="{FF2B5EF4-FFF2-40B4-BE49-F238E27FC236}">
-                <a16:creationId xmlns:a16="http://schemas.microsoft.com/office/drawing/2014/main" id="{76288996-E9F6-4576-A3CF-C5620A08EA5C}"/>
+                <a16:creationId xmlns:a16="http://schemas.microsoft.com/office/drawing/2014/main" id="{31EC26D0-9B0A-45E4-8369-E753578242AE}"/>
               </a:ext>
             </a:extLst>
           </p:cNvPr>
@@ -5200,7 +5267,7 @@
           <p:cNvPr id="12" name="">
             <a:extLst xmlns:a="http://schemas.openxmlformats.org/drawingml/2006/main">
               <a:ext uri="{FF2B5EF4-FFF2-40B4-BE49-F238E27FC236}">
-                <a16:creationId xmlns:a16="http://schemas.microsoft.com/office/drawing/2014/main" id="{39556D25-397C-4FF7-B7F6-67BD2A27C2C0}"/>
+                <a16:creationId xmlns:a16="http://schemas.microsoft.com/office/drawing/2014/main" id="{45FD60E1-E136-49A7-A16B-AC6316A9E059}"/>
               </a:ext>
             </a:extLst>
           </p:cNvPr>
@@ -5233,7 +5300,7 @@
           <p:cNvPr id="13" name="">
             <a:extLst xmlns:a="http://schemas.openxmlformats.org/drawingml/2006/main">
               <a:ext uri="{FF2B5EF4-FFF2-40B4-BE49-F238E27FC236}">
-                <a16:creationId xmlns:a16="http://schemas.microsoft.com/office/drawing/2014/main" id="{D1F79DE4-FD3C-4219-9CC7-88463E13A5DF}"/>
+                <a16:creationId xmlns:a16="http://schemas.microsoft.com/office/drawing/2014/main" id="{EA470086-2B35-43AB-A658-3B7969A74BDE}"/>
               </a:ext>
             </a:extLst>
           </p:cNvPr>
@@ -5283,7 +5350,7 @@
           <p:cNvPr id="14" name="">
             <a:extLst xmlns:a="http://schemas.openxmlformats.org/drawingml/2006/main">
               <a:ext uri="{FF2B5EF4-FFF2-40B4-BE49-F238E27FC236}">
-                <a16:creationId xmlns:a16="http://schemas.microsoft.com/office/drawing/2014/main" id="{6226DE10-688C-43B5-941C-DBB10C2810AF}"/>
+                <a16:creationId xmlns:a16="http://schemas.microsoft.com/office/drawing/2014/main" id="{2C6CC893-41B5-4C68-B05F-58DF2A605D19}"/>
               </a:ext>
             </a:extLst>
           </p:cNvPr>
@@ -5333,7 +5400,7 @@
           <p:cNvPr id="15" name="">
             <a:extLst xmlns:a="http://schemas.openxmlformats.org/drawingml/2006/main">
               <a:ext uri="{FF2B5EF4-FFF2-40B4-BE49-F238E27FC236}">
-                <a16:creationId xmlns:a16="http://schemas.microsoft.com/office/drawing/2014/main" id="{5656899E-69B4-4ED0-83C6-C2B94A875068}"/>
+                <a16:creationId xmlns:a16="http://schemas.microsoft.com/office/drawing/2014/main" id="{AB2E1DE5-B550-419E-955A-D81E51B6E7B3}"/>
               </a:ext>
             </a:extLst>
           </p:cNvPr>
@@ -5383,7 +5450,7 @@
           <p:cNvPr id="16" name="">
             <a:extLst xmlns:a="http://schemas.openxmlformats.org/drawingml/2006/main">
               <a:ext uri="{FF2B5EF4-FFF2-40B4-BE49-F238E27FC236}">
-                <a16:creationId xmlns:a16="http://schemas.microsoft.com/office/drawing/2014/main" id="{8E89F8D4-B729-4144-8DD4-AB462498AC3F}"/>
+                <a16:creationId xmlns:a16="http://schemas.microsoft.com/office/drawing/2014/main" id="{4AE21FFF-0A8C-4D36-AFBF-8E201E353B67}"/>
               </a:ext>
             </a:extLst>
           </p:cNvPr>
@@ -5433,7 +5500,7 @@
           <p:cNvPr id="17" name="">
             <a:extLst xmlns:a="http://schemas.openxmlformats.org/drawingml/2006/main">
               <a:ext uri="{FF2B5EF4-FFF2-40B4-BE49-F238E27FC236}">
-                <a16:creationId xmlns:a16="http://schemas.microsoft.com/office/drawing/2014/main" id="{DCA922D8-C32B-4586-9793-051440FD185F}"/>
+                <a16:creationId xmlns:a16="http://schemas.microsoft.com/office/drawing/2014/main" id="{83E9295A-D8AF-44FA-84AA-543FBD917966}"/>
               </a:ext>
             </a:extLst>
           </p:cNvPr>
@@ -5481,7 +5548,7 @@
     </p:spTree>
     <p:extLst>
       <p:ext uri="{BB962C8B-B14F-4D97-AF65-F5344CB8AC3E}">
-        <p14:creationId xmlns:p14="http://schemas.microsoft.com/office/powerpoint/2010/main" val="857486144"/>
+        <p14:creationId xmlns:p14="http://schemas.microsoft.com/office/powerpoint/2010/main" val="2072410712"/>
       </p:ext>
     </p:extLst>
   </p:cSld>
@@ -5512,7 +5579,7 @@
           <p:cNvPr id="1" name="">
             <a:extLst xmlns:a="http://schemas.openxmlformats.org/drawingml/2006/main">
               <a:ext uri="{FF2B5EF4-FFF2-40B4-BE49-F238E27FC236}">
-                <a16:creationId xmlns:a16="http://schemas.microsoft.com/office/drawing/2014/main" id="{2BDD1A44-9AD1-4345-A6D7-DA610D35D1CA}"/>
+                <a16:creationId xmlns:a16="http://schemas.microsoft.com/office/drawing/2014/main" id="{900FA088-3710-417D-BABE-A5B884B0BA0D}"/>
               </a:ext>
             </a:extLst>
           </p:cNvPr>
@@ -5562,7 +5629,7 @@
           <p:cNvPr id="2" name="">
             <a:extLst xmlns:a="http://schemas.openxmlformats.org/drawingml/2006/main">
               <a:ext uri="{FF2B5EF4-FFF2-40B4-BE49-F238E27FC236}">
-                <a16:creationId xmlns:a16="http://schemas.microsoft.com/office/drawing/2014/main" id="{105A8AEA-360C-4B4F-83A8-E3EB4D78BD37}"/>
+                <a16:creationId xmlns:a16="http://schemas.microsoft.com/office/drawing/2014/main" id="{8F41DB43-BFB2-4DCC-A6EE-67D8581B2750}"/>
               </a:ext>
             </a:extLst>
           </p:cNvPr>
@@ -5612,7 +5679,7 @@
           <p:cNvPr id="3" name="">
             <a:extLst xmlns:a="http://schemas.openxmlformats.org/drawingml/2006/main">
               <a:ext uri="{FF2B5EF4-FFF2-40B4-BE49-F238E27FC236}">
-                <a16:creationId xmlns:a16="http://schemas.microsoft.com/office/drawing/2014/main" id="{04301B60-0831-46FE-AB92-902EE4F569CD}"/>
+                <a16:creationId xmlns:a16="http://schemas.microsoft.com/office/drawing/2014/main" id="{1C9ECEBC-BCC8-4F5E-8082-82983B242A44}"/>
               </a:ext>
             </a:extLst>
           </p:cNvPr>
@@ -5645,7 +5712,7 @@
           <p:cNvPr id="4" name="">
             <a:extLst xmlns:a="http://schemas.openxmlformats.org/drawingml/2006/main">
               <a:ext uri="{FF2B5EF4-FFF2-40B4-BE49-F238E27FC236}">
-                <a16:creationId xmlns:a16="http://schemas.microsoft.com/office/drawing/2014/main" id="{2C75C804-9212-4BEB-8BDC-ABF4181A73F0}"/>
+                <a16:creationId xmlns:a16="http://schemas.microsoft.com/office/drawing/2014/main" id="{7E853331-40F7-46B2-8822-5CE3E2EC021A}"/>
               </a:ext>
             </a:extLst>
           </p:cNvPr>
@@ -5695,7 +5762,7 @@
           <p:cNvPr id="5" name="">
             <a:extLst xmlns:a="http://schemas.openxmlformats.org/drawingml/2006/main">
               <a:ext uri="{FF2B5EF4-FFF2-40B4-BE49-F238E27FC236}">
-                <a16:creationId xmlns:a16="http://schemas.microsoft.com/office/drawing/2014/main" id="{5BBD36DE-97FA-4C91-806C-23A7936C4C2A}"/>
+                <a16:creationId xmlns:a16="http://schemas.microsoft.com/office/drawing/2014/main" id="{1372038B-F503-4A12-B3AA-71080F3D6361}"/>
               </a:ext>
             </a:extLst>
           </p:cNvPr>
@@ -5728,7 +5795,7 @@
           <p:cNvPr id="6" name="">
             <a:extLst xmlns:a="http://schemas.openxmlformats.org/drawingml/2006/main">
               <a:ext uri="{FF2B5EF4-FFF2-40B4-BE49-F238E27FC236}">
-                <a16:creationId xmlns:a16="http://schemas.microsoft.com/office/drawing/2014/main" id="{6FBE455C-7BBB-4F39-8F63-987333F24FDA}"/>
+                <a16:creationId xmlns:a16="http://schemas.microsoft.com/office/drawing/2014/main" id="{60762AF5-DC59-423A-A417-E2FA62C3DF5E}"/>
               </a:ext>
             </a:extLst>
           </p:cNvPr>
@@ -5778,7 +5845,7 @@
           <p:cNvPr id="7" name="">
             <a:extLst xmlns:a="http://schemas.openxmlformats.org/drawingml/2006/main">
               <a:ext uri="{FF2B5EF4-FFF2-40B4-BE49-F238E27FC236}">
-                <a16:creationId xmlns:a16="http://schemas.microsoft.com/office/drawing/2014/main" id="{A1BA666E-78B7-452D-BE58-6170AAA39491}"/>
+                <a16:creationId xmlns:a16="http://schemas.microsoft.com/office/drawing/2014/main" id="{5FC48612-421D-4519-A8D2-1C9E6C17E421}"/>
               </a:ext>
             </a:extLst>
           </p:cNvPr>
@@ -5811,7 +5878,7 @@
           <p:cNvPr id="8" name="">
             <a:extLst xmlns:a="http://schemas.openxmlformats.org/drawingml/2006/main">
               <a:ext uri="{FF2B5EF4-FFF2-40B4-BE49-F238E27FC236}">
-                <a16:creationId xmlns:a16="http://schemas.microsoft.com/office/drawing/2014/main" id="{84D2724F-1DC2-4031-81E0-50E6E1E62D62}"/>
+                <a16:creationId xmlns:a16="http://schemas.microsoft.com/office/drawing/2014/main" id="{EE677DB5-D5B6-4915-A3F4-4B2F44692002}"/>
               </a:ext>
             </a:extLst>
           </p:cNvPr>
@@ -5861,7 +5928,7 @@
           <p:cNvPr id="9" name="">
             <a:extLst xmlns:a="http://schemas.openxmlformats.org/drawingml/2006/main">
               <a:ext uri="{FF2B5EF4-FFF2-40B4-BE49-F238E27FC236}">
-                <a16:creationId xmlns:a16="http://schemas.microsoft.com/office/drawing/2014/main" id="{2A51FA6A-906B-43D2-A66F-3D3EABB56541}"/>
+                <a16:creationId xmlns:a16="http://schemas.microsoft.com/office/drawing/2014/main" id="{E37886DF-BB6B-416E-ACDC-8FFEA775732E}"/>
               </a:ext>
             </a:extLst>
           </p:cNvPr>
@@ -5894,7 +5961,7 @@
           <p:cNvPr id="10" name="">
             <a:extLst xmlns:a="http://schemas.openxmlformats.org/drawingml/2006/main">
               <a:ext uri="{FF2B5EF4-FFF2-40B4-BE49-F238E27FC236}">
-                <a16:creationId xmlns:a16="http://schemas.microsoft.com/office/drawing/2014/main" id="{9F41ECED-22C4-4026-8332-E3255E9861BE}"/>
+                <a16:creationId xmlns:a16="http://schemas.microsoft.com/office/drawing/2014/main" id="{333D33AF-4095-44AA-8529-301075E6DB9A}"/>
               </a:ext>
             </a:extLst>
           </p:cNvPr>
@@ -5944,7 +6011,7 @@
           <p:cNvPr id="11" name="">
             <a:extLst xmlns:a="http://schemas.openxmlformats.org/drawingml/2006/main">
               <a:ext uri="{FF2B5EF4-FFF2-40B4-BE49-F238E27FC236}">
-                <a16:creationId xmlns:a16="http://schemas.microsoft.com/office/drawing/2014/main" id="{8CF0BA8F-BB60-4007-8306-A975F8E690C3}"/>
+                <a16:creationId xmlns:a16="http://schemas.microsoft.com/office/drawing/2014/main" id="{4EB62933-4976-4EAA-8C32-68C8D60DAB2C}"/>
               </a:ext>
             </a:extLst>
           </p:cNvPr>
@@ -5977,7 +6044,7 @@
           <p:cNvPr id="12" name="">
             <a:extLst xmlns:a="http://schemas.openxmlformats.org/drawingml/2006/main">
               <a:ext uri="{FF2B5EF4-FFF2-40B4-BE49-F238E27FC236}">
-                <a16:creationId xmlns:a16="http://schemas.microsoft.com/office/drawing/2014/main" id="{16D4A453-97B0-4994-BE3D-8A3DD4FB4B59}"/>
+                <a16:creationId xmlns:a16="http://schemas.microsoft.com/office/drawing/2014/main" id="{3639B5D1-CD04-46B9-ADA2-7D1CD57205C9}"/>
               </a:ext>
             </a:extLst>
           </p:cNvPr>
@@ -6027,7 +6094,7 @@
           <p:cNvPr id="13" name="">
             <a:extLst xmlns:a="http://schemas.openxmlformats.org/drawingml/2006/main">
               <a:ext uri="{FF2B5EF4-FFF2-40B4-BE49-F238E27FC236}">
-                <a16:creationId xmlns:a16="http://schemas.microsoft.com/office/drawing/2014/main" id="{5B70C66D-6BEC-4015-BA7F-08BCD86A8AE5}"/>
+                <a16:creationId xmlns:a16="http://schemas.microsoft.com/office/drawing/2014/main" id="{EFDDA912-55DA-4BC1-BEA1-251FD11F9BC6}"/>
               </a:ext>
             </a:extLst>
           </p:cNvPr>
@@ -6060,7 +6127,7 @@
           <p:cNvPr id="14" name="">
             <a:extLst xmlns:a="http://schemas.openxmlformats.org/drawingml/2006/main">
               <a:ext uri="{FF2B5EF4-FFF2-40B4-BE49-F238E27FC236}">
-                <a16:creationId xmlns:a16="http://schemas.microsoft.com/office/drawing/2014/main" id="{EA9D1A8C-C4D9-4F04-BB81-894DEC8D0B8D}"/>
+                <a16:creationId xmlns:a16="http://schemas.microsoft.com/office/drawing/2014/main" id="{BBC82932-70C3-41ED-A1C3-EEAA48FF96B0}"/>
               </a:ext>
             </a:extLst>
           </p:cNvPr>
@@ -6110,7 +6177,7 @@
           <p:cNvPr id="15" name="">
             <a:extLst xmlns:a="http://schemas.openxmlformats.org/drawingml/2006/main">
               <a:ext uri="{FF2B5EF4-FFF2-40B4-BE49-F238E27FC236}">
-                <a16:creationId xmlns:a16="http://schemas.microsoft.com/office/drawing/2014/main" id="{2F2726F4-7548-4748-A1E9-CB2EBBED664D}"/>
+                <a16:creationId xmlns:a16="http://schemas.microsoft.com/office/drawing/2014/main" id="{8F8F3BBB-6965-4677-A1E4-6083A998D18C}"/>
               </a:ext>
             </a:extLst>
           </p:cNvPr>
@@ -6143,7 +6210,7 @@
           <p:cNvPr id="16" name="">
             <a:extLst xmlns:a="http://schemas.openxmlformats.org/drawingml/2006/main">
               <a:ext uri="{FF2B5EF4-FFF2-40B4-BE49-F238E27FC236}">
-                <a16:creationId xmlns:a16="http://schemas.microsoft.com/office/drawing/2014/main" id="{0F5C1703-76B4-4659-94F7-97F4E9AF02D8}"/>
+                <a16:creationId xmlns:a16="http://schemas.microsoft.com/office/drawing/2014/main" id="{680662A8-6E18-4A44-8187-664084714579}"/>
               </a:ext>
             </a:extLst>
           </p:cNvPr>
@@ -6193,7 +6260,7 @@
           <p:cNvPr id="17" name="">
             <a:extLst xmlns:a="http://schemas.openxmlformats.org/drawingml/2006/main">
               <a:ext uri="{FF2B5EF4-FFF2-40B4-BE49-F238E27FC236}">
-                <a16:creationId xmlns:a16="http://schemas.microsoft.com/office/drawing/2014/main" id="{3E02A267-1791-4B02-AA1B-4D0A2AC7370D}"/>
+                <a16:creationId xmlns:a16="http://schemas.microsoft.com/office/drawing/2014/main" id="{F7E7A979-6138-4B91-97AD-1B52E7845E8D}"/>
               </a:ext>
             </a:extLst>
           </p:cNvPr>
@@ -6226,7 +6293,7 @@
           <p:cNvPr id="18" name="">
             <a:extLst xmlns:a="http://schemas.openxmlformats.org/drawingml/2006/main">
               <a:ext uri="{FF2B5EF4-FFF2-40B4-BE49-F238E27FC236}">
-                <a16:creationId xmlns:a16="http://schemas.microsoft.com/office/drawing/2014/main" id="{C42B09E9-2EF6-47F9-B04E-34D4D98147B2}"/>
+                <a16:creationId xmlns:a16="http://schemas.microsoft.com/office/drawing/2014/main" id="{F11C15ED-BC5B-4B10-91D9-620917ABC048}"/>
               </a:ext>
             </a:extLst>
           </p:cNvPr>
@@ -6276,7 +6343,7 @@
           <p:cNvPr id="19" name="">
             <a:extLst xmlns:a="http://schemas.openxmlformats.org/drawingml/2006/main">
               <a:ext uri="{FF2B5EF4-FFF2-40B4-BE49-F238E27FC236}">
-                <a16:creationId xmlns:a16="http://schemas.microsoft.com/office/drawing/2014/main" id="{B751E10A-1151-4DDA-AFA4-4805BD6DF84A}"/>
+                <a16:creationId xmlns:a16="http://schemas.microsoft.com/office/drawing/2014/main" id="{DC13C226-5A51-480E-88C4-AE3F0F60B33C}"/>
               </a:ext>
             </a:extLst>
           </p:cNvPr>
@@ -6309,7 +6376,7 @@
           <p:cNvPr id="20" name="">
             <a:extLst xmlns:a="http://schemas.openxmlformats.org/drawingml/2006/main">
               <a:ext uri="{FF2B5EF4-FFF2-40B4-BE49-F238E27FC236}">
-                <a16:creationId xmlns:a16="http://schemas.microsoft.com/office/drawing/2014/main" id="{52315CC6-91D6-4CE6-B60B-D7D1CA60BAC1}"/>
+                <a16:creationId xmlns:a16="http://schemas.microsoft.com/office/drawing/2014/main" id="{88399CBD-FB68-4B3B-B7C4-8EC5845BAB36}"/>
               </a:ext>
             </a:extLst>
           </p:cNvPr>
@@ -6359,7 +6426,7 @@
           <p:cNvPr id="21" name="">
             <a:extLst xmlns:a="http://schemas.openxmlformats.org/drawingml/2006/main">
               <a:ext uri="{FF2B5EF4-FFF2-40B4-BE49-F238E27FC236}">
-                <a16:creationId xmlns:a16="http://schemas.microsoft.com/office/drawing/2014/main" id="{C55353FD-68ED-4ED6-9DF1-54B493D0311B}"/>
+                <a16:creationId xmlns:a16="http://schemas.microsoft.com/office/drawing/2014/main" id="{FCDEC743-83CA-4BAC-ABFF-B98E7F414160}"/>
               </a:ext>
             </a:extLst>
           </p:cNvPr>
@@ -6392,7 +6459,7 @@
           <p:cNvPr id="22" name="">
             <a:extLst xmlns:a="http://schemas.openxmlformats.org/drawingml/2006/main">
               <a:ext uri="{FF2B5EF4-FFF2-40B4-BE49-F238E27FC236}">
-                <a16:creationId xmlns:a16="http://schemas.microsoft.com/office/drawing/2014/main" id="{BFD605F0-AE62-4680-A775-44B4CAED49B9}"/>
+                <a16:creationId xmlns:a16="http://schemas.microsoft.com/office/drawing/2014/main" id="{1FF00390-5E64-42FC-91D4-CF0BC745B226}"/>
               </a:ext>
             </a:extLst>
           </p:cNvPr>
@@ -6442,7 +6509,7 @@
           <p:cNvPr id="23" name="">
             <a:extLst xmlns:a="http://schemas.openxmlformats.org/drawingml/2006/main">
               <a:ext uri="{FF2B5EF4-FFF2-40B4-BE49-F238E27FC236}">
-                <a16:creationId xmlns:a16="http://schemas.microsoft.com/office/drawing/2014/main" id="{87E061EC-9677-4682-80DD-591ECFDFB508}"/>
+                <a16:creationId xmlns:a16="http://schemas.microsoft.com/office/drawing/2014/main" id="{8239F344-9309-453F-B7D0-1FFD0B7FF08F}"/>
               </a:ext>
             </a:extLst>
           </p:cNvPr>
@@ -6475,7 +6542,7 @@
           <p:cNvPr id="24" name="">
             <a:extLst xmlns:a="http://schemas.openxmlformats.org/drawingml/2006/main">
               <a:ext uri="{FF2B5EF4-FFF2-40B4-BE49-F238E27FC236}">
-                <a16:creationId xmlns:a16="http://schemas.microsoft.com/office/drawing/2014/main" id="{1DC3EB60-A9B3-4415-86DE-D0509C17D321}"/>
+                <a16:creationId xmlns:a16="http://schemas.microsoft.com/office/drawing/2014/main" id="{45F83538-3353-4A60-9A3C-0E697AFEFD22}"/>
               </a:ext>
             </a:extLst>
           </p:cNvPr>
@@ -6525,7 +6592,7 @@
           <p:cNvPr id="25" name="">
             <a:extLst xmlns:a="http://schemas.openxmlformats.org/drawingml/2006/main">
               <a:ext uri="{FF2B5EF4-FFF2-40B4-BE49-F238E27FC236}">
-                <a16:creationId xmlns:a16="http://schemas.microsoft.com/office/drawing/2014/main" id="{D4519844-68B8-4F6B-A3E3-9E5CE2F912DF}"/>
+                <a16:creationId xmlns:a16="http://schemas.microsoft.com/office/drawing/2014/main" id="{055EA486-80F6-4146-9C37-1F84CE0A7F88}"/>
               </a:ext>
             </a:extLst>
           </p:cNvPr>
@@ -6558,7 +6625,7 @@
           <p:cNvPr id="26" name="">
             <a:extLst xmlns:a="http://schemas.openxmlformats.org/drawingml/2006/main">
               <a:ext uri="{FF2B5EF4-FFF2-40B4-BE49-F238E27FC236}">
-                <a16:creationId xmlns:a16="http://schemas.microsoft.com/office/drawing/2014/main" id="{6CC1400D-ADB6-4B27-B153-CD636C2E9DC5}"/>
+                <a16:creationId xmlns:a16="http://schemas.microsoft.com/office/drawing/2014/main" id="{83612A51-7B1D-43F7-BC5F-9DD2179A89A6}"/>
               </a:ext>
             </a:extLst>
           </p:cNvPr>
@@ -6608,7 +6675,7 @@
           <p:cNvPr id="27" name="">
             <a:extLst xmlns:a="http://schemas.openxmlformats.org/drawingml/2006/main">
               <a:ext uri="{FF2B5EF4-FFF2-40B4-BE49-F238E27FC236}">
-                <a16:creationId xmlns:a16="http://schemas.microsoft.com/office/drawing/2014/main" id="{4283DA86-CEE0-4101-B202-3C4B6ADFBD57}"/>
+                <a16:creationId xmlns:a16="http://schemas.microsoft.com/office/drawing/2014/main" id="{38A2FA94-DEC6-48C6-B225-59E84D653A1D}"/>
               </a:ext>
             </a:extLst>
           </p:cNvPr>
@@ -6641,7 +6708,7 @@
           <p:cNvPr id="28" name="">
             <a:extLst xmlns:a="http://schemas.openxmlformats.org/drawingml/2006/main">
               <a:ext uri="{FF2B5EF4-FFF2-40B4-BE49-F238E27FC236}">
-                <a16:creationId xmlns:a16="http://schemas.microsoft.com/office/drawing/2014/main" id="{B4F01792-62A5-4C45-827E-A730BC24724C}"/>
+                <a16:creationId xmlns:a16="http://schemas.microsoft.com/office/drawing/2014/main" id="{87A4C113-38DD-4E71-AB4F-73F18DCC3A8E}"/>
               </a:ext>
             </a:extLst>
           </p:cNvPr>
@@ -6691,7 +6758,7 @@
           <p:cNvPr id="29" name="">
             <a:extLst xmlns:a="http://schemas.openxmlformats.org/drawingml/2006/main">
               <a:ext uri="{FF2B5EF4-FFF2-40B4-BE49-F238E27FC236}">
-                <a16:creationId xmlns:a16="http://schemas.microsoft.com/office/drawing/2014/main" id="{A22311C4-BFA2-4A12-8E69-99533B39DC1C}"/>
+                <a16:creationId xmlns:a16="http://schemas.microsoft.com/office/drawing/2014/main" id="{0F231889-B7E2-4058-8DE7-95A0A67C389D}"/>
               </a:ext>
             </a:extLst>
           </p:cNvPr>
@@ -6724,7 +6791,7 @@
           <p:cNvPr id="30" name="">
             <a:extLst xmlns:a="http://schemas.openxmlformats.org/drawingml/2006/main">
               <a:ext uri="{FF2B5EF4-FFF2-40B4-BE49-F238E27FC236}">
-                <a16:creationId xmlns:a16="http://schemas.microsoft.com/office/drawing/2014/main" id="{FD4B1486-B919-4E89-A474-D26ECAF1E7B7}"/>
+                <a16:creationId xmlns:a16="http://schemas.microsoft.com/office/drawing/2014/main" id="{70DC1E30-8B68-4799-B86E-81FE5BAD9BCB}"/>
               </a:ext>
             </a:extLst>
           </p:cNvPr>
@@ -6774,7 +6841,7 @@
           <p:cNvPr id="31" name="">
             <a:extLst xmlns:a="http://schemas.openxmlformats.org/drawingml/2006/main">
               <a:ext uri="{FF2B5EF4-FFF2-40B4-BE49-F238E27FC236}">
-                <a16:creationId xmlns:a16="http://schemas.microsoft.com/office/drawing/2014/main" id="{F539A0C8-EE19-4830-BD8A-6B1FBA2895F7}"/>
+                <a16:creationId xmlns:a16="http://schemas.microsoft.com/office/drawing/2014/main" id="{EFA8088B-51EE-47A2-AF09-01E3798899D9}"/>
               </a:ext>
             </a:extLst>
           </p:cNvPr>
@@ -6807,7 +6874,7 @@
           <p:cNvPr id="32" name="">
             <a:extLst xmlns:a="http://schemas.openxmlformats.org/drawingml/2006/main">
               <a:ext uri="{FF2B5EF4-FFF2-40B4-BE49-F238E27FC236}">
-                <a16:creationId xmlns:a16="http://schemas.microsoft.com/office/drawing/2014/main" id="{53232A9E-D197-4D4B-91A8-CFA43034C197}"/>
+                <a16:creationId xmlns:a16="http://schemas.microsoft.com/office/drawing/2014/main" id="{43BEE100-AE80-4658-AD6B-3C69B8FAA118}"/>
               </a:ext>
             </a:extLst>
           </p:cNvPr>
@@ -6857,7 +6924,7 @@
           <p:cNvPr id="33" name="">
             <a:extLst xmlns:a="http://schemas.openxmlformats.org/drawingml/2006/main">
               <a:ext uri="{FF2B5EF4-FFF2-40B4-BE49-F238E27FC236}">
-                <a16:creationId xmlns:a16="http://schemas.microsoft.com/office/drawing/2014/main" id="{B5D9CB6D-7E91-4221-AED4-56F9A82F836A}"/>
+                <a16:creationId xmlns:a16="http://schemas.microsoft.com/office/drawing/2014/main" id="{73F13B76-F1E0-4BDA-9EAE-2202AD1702AD}"/>
               </a:ext>
             </a:extLst>
           </p:cNvPr>
@@ -6890,7 +6957,7 @@
           <p:cNvPr id="34" name="">
             <a:extLst xmlns:a="http://schemas.openxmlformats.org/drawingml/2006/main">
               <a:ext uri="{FF2B5EF4-FFF2-40B4-BE49-F238E27FC236}">
-                <a16:creationId xmlns:a16="http://schemas.microsoft.com/office/drawing/2014/main" id="{E94B69DE-B2E8-41F0-9C4B-CE39EFD4EC36}"/>
+                <a16:creationId xmlns:a16="http://schemas.microsoft.com/office/drawing/2014/main" id="{36FAF8EF-C519-445B-B91D-FC83C163635E}"/>
               </a:ext>
             </a:extLst>
           </p:cNvPr>
@@ -6940,7 +7007,7 @@
           <p:cNvPr id="35" name="">
             <a:extLst xmlns:a="http://schemas.openxmlformats.org/drawingml/2006/main">
               <a:ext uri="{FF2B5EF4-FFF2-40B4-BE49-F238E27FC236}">
-                <a16:creationId xmlns:a16="http://schemas.microsoft.com/office/drawing/2014/main" id="{1D7BDC18-D5F9-4F4E-8B1B-81680C93ECEA}"/>
+                <a16:creationId xmlns:a16="http://schemas.microsoft.com/office/drawing/2014/main" id="{D27BA85C-4733-4B6C-9D5F-A8EB2068FEBF}"/>
               </a:ext>
             </a:extLst>
           </p:cNvPr>
@@ -6973,7 +7040,7 @@
           <p:cNvPr id="36" name="">
             <a:extLst xmlns:a="http://schemas.openxmlformats.org/drawingml/2006/main">
               <a:ext uri="{FF2B5EF4-FFF2-40B4-BE49-F238E27FC236}">
-                <a16:creationId xmlns:a16="http://schemas.microsoft.com/office/drawing/2014/main" id="{5C18663F-269F-4248-88ED-2D55A46FC33E}"/>
+                <a16:creationId xmlns:a16="http://schemas.microsoft.com/office/drawing/2014/main" id="{452B822B-1B3B-45D3-90F8-F0F25DD21B71}"/>
               </a:ext>
             </a:extLst>
           </p:cNvPr>
@@ -7023,7 +7090,7 @@
           <p:cNvPr id="37" name="">
             <a:extLst xmlns:a="http://schemas.openxmlformats.org/drawingml/2006/main">
               <a:ext uri="{FF2B5EF4-FFF2-40B4-BE49-F238E27FC236}">
-                <a16:creationId xmlns:a16="http://schemas.microsoft.com/office/drawing/2014/main" id="{47CC841B-22D3-444D-A228-5C72C423D2C2}"/>
+                <a16:creationId xmlns:a16="http://schemas.microsoft.com/office/drawing/2014/main" id="{E77BCC36-F58F-44C8-9211-2780C035AB0A}"/>
               </a:ext>
             </a:extLst>
           </p:cNvPr>
@@ -7056,7 +7123,7 @@
           <p:cNvPr id="38" name="">
             <a:extLst xmlns:a="http://schemas.openxmlformats.org/drawingml/2006/main">
               <a:ext uri="{FF2B5EF4-FFF2-40B4-BE49-F238E27FC236}">
-                <a16:creationId xmlns:a16="http://schemas.microsoft.com/office/drawing/2014/main" id="{21A6FA31-1EE7-402C-9D45-C8EB01B0B5EE}"/>
+                <a16:creationId xmlns:a16="http://schemas.microsoft.com/office/drawing/2014/main" id="{E187BFA8-AA18-4F20-AC31-16E046B9AA99}"/>
               </a:ext>
             </a:extLst>
           </p:cNvPr>
@@ -7106,7 +7173,7 @@
           <p:cNvPr id="39" name="">
             <a:extLst xmlns:a="http://schemas.openxmlformats.org/drawingml/2006/main">
               <a:ext uri="{FF2B5EF4-FFF2-40B4-BE49-F238E27FC236}">
-                <a16:creationId xmlns:a16="http://schemas.microsoft.com/office/drawing/2014/main" id="{0B5F54A9-9D4A-4D03-860A-6A4B712AC61E}"/>
+                <a16:creationId xmlns:a16="http://schemas.microsoft.com/office/drawing/2014/main" id="{C2D2E097-905B-4030-85E3-A4DB44C884A5}"/>
               </a:ext>
             </a:extLst>
           </p:cNvPr>
@@ -7139,7 +7206,7 @@
           <p:cNvPr id="40" name="">
             <a:extLst xmlns:a="http://schemas.openxmlformats.org/drawingml/2006/main">
               <a:ext uri="{FF2B5EF4-FFF2-40B4-BE49-F238E27FC236}">
-                <a16:creationId xmlns:a16="http://schemas.microsoft.com/office/drawing/2014/main" id="{C45D6F7F-756D-4B0B-ABFD-9AF67CFDB4B4}"/>
+                <a16:creationId xmlns:a16="http://schemas.microsoft.com/office/drawing/2014/main" id="{D849AA47-4957-4570-8A64-A495A18AAD20}"/>
               </a:ext>
             </a:extLst>
           </p:cNvPr>
@@ -7189,7 +7256,7 @@
           <p:cNvPr id="41" name="">
             <a:extLst xmlns:a="http://schemas.openxmlformats.org/drawingml/2006/main">
               <a:ext uri="{FF2B5EF4-FFF2-40B4-BE49-F238E27FC236}">
-                <a16:creationId xmlns:a16="http://schemas.microsoft.com/office/drawing/2014/main" id="{2786057F-1F6D-484D-ABB6-00127F6BEEB6}"/>
+                <a16:creationId xmlns:a16="http://schemas.microsoft.com/office/drawing/2014/main" id="{5077E04F-6F5A-4A02-BF33-3A0A9386F4CA}"/>
               </a:ext>
             </a:extLst>
           </p:cNvPr>
@@ -7222,7 +7289,7 @@
           <p:cNvPr id="42" name="">
             <a:extLst xmlns:a="http://schemas.openxmlformats.org/drawingml/2006/main">
               <a:ext uri="{FF2B5EF4-FFF2-40B4-BE49-F238E27FC236}">
-                <a16:creationId xmlns:a16="http://schemas.microsoft.com/office/drawing/2014/main" id="{440361BC-164F-4681-BC18-CADF6AA47677}"/>
+                <a16:creationId xmlns:a16="http://schemas.microsoft.com/office/drawing/2014/main" id="{1B745314-8505-410E-89A0-7F15D69646EE}"/>
               </a:ext>
             </a:extLst>
           </p:cNvPr>
@@ -7272,7 +7339,7 @@
           <p:cNvPr id="43" name="">
             <a:extLst xmlns:a="http://schemas.openxmlformats.org/drawingml/2006/main">
               <a:ext uri="{FF2B5EF4-FFF2-40B4-BE49-F238E27FC236}">
-                <a16:creationId xmlns:a16="http://schemas.microsoft.com/office/drawing/2014/main" id="{5188CCE1-B486-4BB4-8393-DA0BFBB2D137}"/>
+                <a16:creationId xmlns:a16="http://schemas.microsoft.com/office/drawing/2014/main" id="{6B0B1E67-2C05-40AA-8CB9-938307F1AFDF}"/>
               </a:ext>
             </a:extLst>
           </p:cNvPr>
@@ -7305,7 +7372,7 @@
           <p:cNvPr id="44" name="">
             <a:extLst xmlns:a="http://schemas.openxmlformats.org/drawingml/2006/main">
               <a:ext uri="{FF2B5EF4-FFF2-40B4-BE49-F238E27FC236}">
-                <a16:creationId xmlns:a16="http://schemas.microsoft.com/office/drawing/2014/main" id="{22B04813-E0B5-42A3-89B9-077C0E50A842}"/>
+                <a16:creationId xmlns:a16="http://schemas.microsoft.com/office/drawing/2014/main" id="{A7A81933-2067-48BF-AC27-E636666AFA65}"/>
               </a:ext>
             </a:extLst>
           </p:cNvPr>
@@ -7355,7 +7422,7 @@
           <p:cNvPr id="45" name="">
             <a:extLst xmlns:a="http://schemas.openxmlformats.org/drawingml/2006/main">
               <a:ext uri="{FF2B5EF4-FFF2-40B4-BE49-F238E27FC236}">
-                <a16:creationId xmlns:a16="http://schemas.microsoft.com/office/drawing/2014/main" id="{BE1F69E8-3063-4A64-9C80-15F019379F02}"/>
+                <a16:creationId xmlns:a16="http://schemas.microsoft.com/office/drawing/2014/main" id="{FEF02516-F400-4D4C-B5B5-A3D3ABA349D2}"/>
               </a:ext>
             </a:extLst>
           </p:cNvPr>
@@ -7388,7 +7455,7 @@
           <p:cNvPr id="46" name="">
             <a:extLst xmlns:a="http://schemas.openxmlformats.org/drawingml/2006/main">
               <a:ext uri="{FF2B5EF4-FFF2-40B4-BE49-F238E27FC236}">
-                <a16:creationId xmlns:a16="http://schemas.microsoft.com/office/drawing/2014/main" id="{433A95A9-6847-4CE1-9F4E-F0AF86AC8858}"/>
+                <a16:creationId xmlns:a16="http://schemas.microsoft.com/office/drawing/2014/main" id="{38AA48D2-DB83-416E-AB88-4C2009E451CB}"/>
               </a:ext>
             </a:extLst>
           </p:cNvPr>
@@ -7438,7 +7505,7 @@
           <p:cNvPr id="47" name="">
             <a:extLst xmlns:a="http://schemas.openxmlformats.org/drawingml/2006/main">
               <a:ext uri="{FF2B5EF4-FFF2-40B4-BE49-F238E27FC236}">
-                <a16:creationId xmlns:a16="http://schemas.microsoft.com/office/drawing/2014/main" id="{C650489F-82BE-474B-BB37-FB7CC72EEFED}"/>
+                <a16:creationId xmlns:a16="http://schemas.microsoft.com/office/drawing/2014/main" id="{CE0CA93E-48D2-4AB6-89FE-96DDC6623C2D}"/>
               </a:ext>
             </a:extLst>
           </p:cNvPr>
@@ -7471,7 +7538,7 @@
           <p:cNvPr id="48" name="">
             <a:extLst xmlns:a="http://schemas.openxmlformats.org/drawingml/2006/main">
               <a:ext uri="{FF2B5EF4-FFF2-40B4-BE49-F238E27FC236}">
-                <a16:creationId xmlns:a16="http://schemas.microsoft.com/office/drawing/2014/main" id="{18483260-A784-4A33-8244-3FD0AD050350}"/>
+                <a16:creationId xmlns:a16="http://schemas.microsoft.com/office/drawing/2014/main" id="{C4AD8A15-8E85-4A0B-903D-4AA2F74FD4A4}"/>
               </a:ext>
             </a:extLst>
           </p:cNvPr>
@@ -7521,7 +7588,7 @@
           <p:cNvPr id="49" name="">
             <a:extLst xmlns:a="http://schemas.openxmlformats.org/drawingml/2006/main">
               <a:ext uri="{FF2B5EF4-FFF2-40B4-BE49-F238E27FC236}">
-                <a16:creationId xmlns:a16="http://schemas.microsoft.com/office/drawing/2014/main" id="{8BC01726-45FF-4468-9E21-BD20AD02B347}"/>
+                <a16:creationId xmlns:a16="http://schemas.microsoft.com/office/drawing/2014/main" id="{25E05742-1287-4E06-BEA7-D1986706B7F0}"/>
               </a:ext>
             </a:extLst>
           </p:cNvPr>
@@ -7554,7 +7621,7 @@
           <p:cNvPr id="50" name="">
             <a:extLst xmlns:a="http://schemas.openxmlformats.org/drawingml/2006/main">
               <a:ext uri="{FF2B5EF4-FFF2-40B4-BE49-F238E27FC236}">
-                <a16:creationId xmlns:a16="http://schemas.microsoft.com/office/drawing/2014/main" id="{EEB78883-74B0-4405-A799-49B0CD93BD3F}"/>
+                <a16:creationId xmlns:a16="http://schemas.microsoft.com/office/drawing/2014/main" id="{0B534415-24F7-4517-939B-C256E8D9CB26}"/>
               </a:ext>
             </a:extLst>
           </p:cNvPr>
@@ -7604,7 +7671,7 @@
           <p:cNvPr id="51" name="">
             <a:extLst xmlns:a="http://schemas.openxmlformats.org/drawingml/2006/main">
               <a:ext uri="{FF2B5EF4-FFF2-40B4-BE49-F238E27FC236}">
-                <a16:creationId xmlns:a16="http://schemas.microsoft.com/office/drawing/2014/main" id="{7B2178B9-B395-42EB-9B8F-A7AD5C2E9971}"/>
+                <a16:creationId xmlns:a16="http://schemas.microsoft.com/office/drawing/2014/main" id="{67B137C9-FB9C-44E6-9C3A-01C7813B80A2}"/>
               </a:ext>
             </a:extLst>
           </p:cNvPr>
@@ -7637,7 +7704,7 @@
           <p:cNvPr id="52" name="">
             <a:extLst xmlns:a="http://schemas.openxmlformats.org/drawingml/2006/main">
               <a:ext uri="{FF2B5EF4-FFF2-40B4-BE49-F238E27FC236}">
-                <a16:creationId xmlns:a16="http://schemas.microsoft.com/office/drawing/2014/main" id="{DB1AB89D-77EA-46C5-A882-88AF5D33CFF4}"/>
+                <a16:creationId xmlns:a16="http://schemas.microsoft.com/office/drawing/2014/main" id="{21061939-CF11-449E-BFA5-750502C9776C}"/>
               </a:ext>
             </a:extLst>
           </p:cNvPr>
@@ -7687,7 +7754,7 @@
           <p:cNvPr id="53" name="">
             <a:extLst xmlns:a="http://schemas.openxmlformats.org/drawingml/2006/main">
               <a:ext uri="{FF2B5EF4-FFF2-40B4-BE49-F238E27FC236}">
-                <a16:creationId xmlns:a16="http://schemas.microsoft.com/office/drawing/2014/main" id="{B7337E45-1FDD-40BE-89E9-0CBCFF025685}"/>
+                <a16:creationId xmlns:a16="http://schemas.microsoft.com/office/drawing/2014/main" id="{B640A070-3B98-42FE-B686-A501F5BB15E4}"/>
               </a:ext>
             </a:extLst>
           </p:cNvPr>
@@ -7720,7 +7787,7 @@
           <p:cNvPr id="54" name="">
             <a:extLst xmlns:a="http://schemas.openxmlformats.org/drawingml/2006/main">
               <a:ext uri="{FF2B5EF4-FFF2-40B4-BE49-F238E27FC236}">
-                <a16:creationId xmlns:a16="http://schemas.microsoft.com/office/drawing/2014/main" id="{EBDC42CB-2705-4E04-9FC9-D6A703CFFF07}"/>
+                <a16:creationId xmlns:a16="http://schemas.microsoft.com/office/drawing/2014/main" id="{F9BA33F4-8624-4F91-9DD4-2FC848100A4B}"/>
               </a:ext>
             </a:extLst>
           </p:cNvPr>
@@ -7770,7 +7837,7 @@
           <p:cNvPr id="55" name="">
             <a:extLst xmlns:a="http://schemas.openxmlformats.org/drawingml/2006/main">
               <a:ext uri="{FF2B5EF4-FFF2-40B4-BE49-F238E27FC236}">
-                <a16:creationId xmlns:a16="http://schemas.microsoft.com/office/drawing/2014/main" id="{FAFD434B-7215-4D34-89F5-12AF00491577}"/>
+                <a16:creationId xmlns:a16="http://schemas.microsoft.com/office/drawing/2014/main" id="{682993AB-FCD4-4734-928D-9E573E0F995F}"/>
               </a:ext>
             </a:extLst>
           </p:cNvPr>
@@ -7803,7 +7870,7 @@
           <p:cNvPr id="56" name="">
             <a:extLst xmlns:a="http://schemas.openxmlformats.org/drawingml/2006/main">
               <a:ext uri="{FF2B5EF4-FFF2-40B4-BE49-F238E27FC236}">
-                <a16:creationId xmlns:a16="http://schemas.microsoft.com/office/drawing/2014/main" id="{5C04B862-17E9-400A-A5B2-95227BDD3DA3}"/>
+                <a16:creationId xmlns:a16="http://schemas.microsoft.com/office/drawing/2014/main" id="{FD5354B0-ECBD-4846-9FB2-DA30A9EE1506}"/>
               </a:ext>
             </a:extLst>
           </p:cNvPr>
@@ -7853,7 +7920,7 @@
           <p:cNvPr id="57" name="">
             <a:extLst xmlns:a="http://schemas.openxmlformats.org/drawingml/2006/main">
               <a:ext uri="{FF2B5EF4-FFF2-40B4-BE49-F238E27FC236}">
-                <a16:creationId xmlns:a16="http://schemas.microsoft.com/office/drawing/2014/main" id="{5F30D8EF-1EE2-4C64-B86F-CFD5E5FC3946}"/>
+                <a16:creationId xmlns:a16="http://schemas.microsoft.com/office/drawing/2014/main" id="{DFE1CF58-1B14-4D5A-957D-0E232CB2D0B4}"/>
               </a:ext>
             </a:extLst>
           </p:cNvPr>
@@ -7886,7 +7953,7 @@
           <p:cNvPr id="58" name="">
             <a:extLst xmlns:a="http://schemas.openxmlformats.org/drawingml/2006/main">
               <a:ext uri="{FF2B5EF4-FFF2-40B4-BE49-F238E27FC236}">
-                <a16:creationId xmlns:a16="http://schemas.microsoft.com/office/drawing/2014/main" id="{60D3CE5B-AA3B-4751-8872-D6A9B59C7704}"/>
+                <a16:creationId xmlns:a16="http://schemas.microsoft.com/office/drawing/2014/main" id="{72245CAC-C8F3-46B2-B947-30E48E2FF001}"/>
               </a:ext>
             </a:extLst>
           </p:cNvPr>
@@ -7936,7 +8003,7 @@
           <p:cNvPr id="59" name="">
             <a:extLst xmlns:a="http://schemas.openxmlformats.org/drawingml/2006/main">
               <a:ext uri="{FF2B5EF4-FFF2-40B4-BE49-F238E27FC236}">
-                <a16:creationId xmlns:a16="http://schemas.microsoft.com/office/drawing/2014/main" id="{1443C39E-1156-40BF-9998-DCF183A85D44}"/>
+                <a16:creationId xmlns:a16="http://schemas.microsoft.com/office/drawing/2014/main" id="{80E32950-BB51-44FD-853A-37F402B32283}"/>
               </a:ext>
             </a:extLst>
           </p:cNvPr>
@@ -7969,7 +8036,7 @@
           <p:cNvPr id="60" name="">
             <a:extLst xmlns:a="http://schemas.openxmlformats.org/drawingml/2006/main">
               <a:ext uri="{FF2B5EF4-FFF2-40B4-BE49-F238E27FC236}">
-                <a16:creationId xmlns:a16="http://schemas.microsoft.com/office/drawing/2014/main" id="{B1146691-56A1-4DB7-86C6-4D867B1FF61F}"/>
+                <a16:creationId xmlns:a16="http://schemas.microsoft.com/office/drawing/2014/main" id="{03C4B54A-D941-4EAF-AB24-7EB49B68CB6B}"/>
               </a:ext>
             </a:extLst>
           </p:cNvPr>
@@ -8019,7 +8086,7 @@
           <p:cNvPr id="61" name="">
             <a:extLst xmlns:a="http://schemas.openxmlformats.org/drawingml/2006/main">
               <a:ext uri="{FF2B5EF4-FFF2-40B4-BE49-F238E27FC236}">
-                <a16:creationId xmlns:a16="http://schemas.microsoft.com/office/drawing/2014/main" id="{3ED7E310-D3B5-41BA-A29B-44DC784908B0}"/>
+                <a16:creationId xmlns:a16="http://schemas.microsoft.com/office/drawing/2014/main" id="{C4E3EB77-BF4D-47BC-8DE7-8C176C7DE206}"/>
               </a:ext>
             </a:extLst>
           </p:cNvPr>
@@ -8069,7 +8136,7 @@
           <p:cNvPr id="62" name="">
             <a:extLst xmlns:a="http://schemas.openxmlformats.org/drawingml/2006/main">
               <a:ext uri="{FF2B5EF4-FFF2-40B4-BE49-F238E27FC236}">
-                <a16:creationId xmlns:a16="http://schemas.microsoft.com/office/drawing/2014/main" id="{E65AD94D-B939-432D-9271-7A3920BC3B17}"/>
+                <a16:creationId xmlns:a16="http://schemas.microsoft.com/office/drawing/2014/main" id="{9AF0B30F-60E4-4ACA-AB74-71477A69D629}"/>
               </a:ext>
             </a:extLst>
           </p:cNvPr>
@@ -8117,7 +8184,7 @@
     </p:spTree>
     <p:extLst>
       <p:ext uri="{BB962C8B-B14F-4D97-AF65-F5344CB8AC3E}">
-        <p14:creationId xmlns:p14="http://schemas.microsoft.com/office/powerpoint/2010/main" val="1583085319"/>
+        <p14:creationId xmlns:p14="http://schemas.microsoft.com/office/powerpoint/2010/main" val="1526423918"/>
       </p:ext>
     </p:extLst>
   </p:cSld>
@@ -8148,7 +8215,7 @@
           <p:cNvPr id="1" name="">
             <a:extLst xmlns:a="http://schemas.openxmlformats.org/drawingml/2006/main">
               <a:ext uri="{FF2B5EF4-FFF2-40B4-BE49-F238E27FC236}">
-                <a16:creationId xmlns:a16="http://schemas.microsoft.com/office/drawing/2014/main" id="{A160CFB1-F11D-42D6-A3F9-55CA2B64DD13}"/>
+                <a16:creationId xmlns:a16="http://schemas.microsoft.com/office/drawing/2014/main" id="{A317CE85-EF67-485B-A25B-507CD6175C51}"/>
               </a:ext>
             </a:extLst>
           </p:cNvPr>
@@ -8198,7 +8265,7 @@
           <p:cNvPr id="2" name="">
             <a:extLst xmlns:a="http://schemas.openxmlformats.org/drawingml/2006/main">
               <a:ext uri="{FF2B5EF4-FFF2-40B4-BE49-F238E27FC236}">
-                <a16:creationId xmlns:a16="http://schemas.microsoft.com/office/drawing/2014/main" id="{D7578722-361E-4FAD-8DD9-361EE24B5F84}"/>
+                <a16:creationId xmlns:a16="http://schemas.microsoft.com/office/drawing/2014/main" id="{2D6B6BAB-2B4C-469D-A5CC-D636EC5F32AD}"/>
               </a:ext>
             </a:extLst>
           </p:cNvPr>
@@ -8248,7 +8315,7 @@
           <p:cNvPr id="3" name="">
             <a:extLst xmlns:a="http://schemas.openxmlformats.org/drawingml/2006/main">
               <a:ext uri="{FF2B5EF4-FFF2-40B4-BE49-F238E27FC236}">
-                <a16:creationId xmlns:a16="http://schemas.microsoft.com/office/drawing/2014/main" id="{C219C1E8-10DF-451E-9485-4BC637887724}"/>
+                <a16:creationId xmlns:a16="http://schemas.microsoft.com/office/drawing/2014/main" id="{78AC20F4-282E-4E35-BBCE-66DB80A2EDF1}"/>
               </a:ext>
             </a:extLst>
           </p:cNvPr>
@@ -8285,7 +8352,7 @@
           <p:nvPr/>
         </p:nvPicPr>
         <p:blipFill>
-          <a:blip xmlns:r="http://schemas.openxmlformats.org/officeDocument/2006/relationships" xmlns:a="http://schemas.openxmlformats.org/drawingml/2006/main" r:embed="Rb0b38bb20dd444b7"/>
+          <a:blip xmlns:r="http://schemas.openxmlformats.org/officeDocument/2006/relationships" xmlns:a="http://schemas.openxmlformats.org/drawingml/2006/main" r:embed="R107094f3b789441d"/>
           <a:stretch xmlns:a="http://schemas.openxmlformats.org/drawingml/2006/main"/>
         </p:blipFill>
         <p:spPr>
@@ -8303,7 +8370,7 @@
           <p:cNvPr id="5" name="">
             <a:extLst xmlns:a="http://schemas.openxmlformats.org/drawingml/2006/main">
               <a:ext uri="{FF2B5EF4-FFF2-40B4-BE49-F238E27FC236}">
-                <a16:creationId xmlns:a16="http://schemas.microsoft.com/office/drawing/2014/main" id="{367395B2-52DF-4C5B-812A-5DDCE50D6D52}"/>
+                <a16:creationId xmlns:a16="http://schemas.microsoft.com/office/drawing/2014/main" id="{1C2B6F37-1F64-4330-A15F-7F79251FB7BA}"/>
               </a:ext>
             </a:extLst>
           </p:cNvPr>
@@ -8336,7 +8403,7 @@
           <p:cNvPr id="6" name="">
             <a:extLst xmlns:a="http://schemas.openxmlformats.org/drawingml/2006/main">
               <a:ext uri="{FF2B5EF4-FFF2-40B4-BE49-F238E27FC236}">
-                <a16:creationId xmlns:a16="http://schemas.microsoft.com/office/drawing/2014/main" id="{A70BD014-5F10-4A40-B33A-3E5FFE04557A}"/>
+                <a16:creationId xmlns:a16="http://schemas.microsoft.com/office/drawing/2014/main" id="{8400E7B0-15D1-4F9A-99DD-7BFB9E45FC0F}"/>
               </a:ext>
             </a:extLst>
           </p:cNvPr>
@@ -8386,7 +8453,7 @@
           <p:cNvPr id="7" name="">
             <a:extLst xmlns:a="http://schemas.openxmlformats.org/drawingml/2006/main">
               <a:ext uri="{FF2B5EF4-FFF2-40B4-BE49-F238E27FC236}">
-                <a16:creationId xmlns:a16="http://schemas.microsoft.com/office/drawing/2014/main" id="{36247295-8B41-4BB4-864C-D84BB91D23B5}"/>
+                <a16:creationId xmlns:a16="http://schemas.microsoft.com/office/drawing/2014/main" id="{8DF35011-6436-40C5-AD21-74544FF5A962}"/>
               </a:ext>
             </a:extLst>
           </p:cNvPr>
@@ -8419,7 +8486,7 @@
           <p:cNvPr id="8" name="">
             <a:extLst xmlns:a="http://schemas.openxmlformats.org/drawingml/2006/main">
               <a:ext uri="{FF2B5EF4-FFF2-40B4-BE49-F238E27FC236}">
-                <a16:creationId xmlns:a16="http://schemas.microsoft.com/office/drawing/2014/main" id="{D9CE3B88-F3D5-4284-ADC5-4C8A29F2F26C}"/>
+                <a16:creationId xmlns:a16="http://schemas.microsoft.com/office/drawing/2014/main" id="{6A3946F2-4F59-4A00-984F-329A2B4508B8}"/>
               </a:ext>
             </a:extLst>
           </p:cNvPr>
@@ -8469,7 +8536,7 @@
           <p:cNvPr id="9" name="">
             <a:extLst xmlns:a="http://schemas.openxmlformats.org/drawingml/2006/main">
               <a:ext uri="{FF2B5EF4-FFF2-40B4-BE49-F238E27FC236}">
-                <a16:creationId xmlns:a16="http://schemas.microsoft.com/office/drawing/2014/main" id="{CEA00A64-19AD-4C57-8569-221C7AB18829}"/>
+                <a16:creationId xmlns:a16="http://schemas.microsoft.com/office/drawing/2014/main" id="{6014FBAD-7C71-4B93-878D-6FD5446E84DF}"/>
               </a:ext>
             </a:extLst>
           </p:cNvPr>
@@ -8502,7 +8569,7 @@
           <p:cNvPr id="10" name="">
             <a:extLst xmlns:a="http://schemas.openxmlformats.org/drawingml/2006/main">
               <a:ext uri="{FF2B5EF4-FFF2-40B4-BE49-F238E27FC236}">
-                <a16:creationId xmlns:a16="http://schemas.microsoft.com/office/drawing/2014/main" id="{284232C8-1697-4F61-82E1-6FFC186EBF9D}"/>
+                <a16:creationId xmlns:a16="http://schemas.microsoft.com/office/drawing/2014/main" id="{5161AAE7-84A9-4EDB-8A76-DA72663FEA86}"/>
               </a:ext>
             </a:extLst>
           </p:cNvPr>
@@ -8552,7 +8619,7 @@
           <p:cNvPr id="11" name="">
             <a:extLst xmlns:a="http://schemas.openxmlformats.org/drawingml/2006/main">
               <a:ext uri="{FF2B5EF4-FFF2-40B4-BE49-F238E27FC236}">
-                <a16:creationId xmlns:a16="http://schemas.microsoft.com/office/drawing/2014/main" id="{E8A1C798-AB47-45B4-BA93-539BBC7A0E9E}"/>
+                <a16:creationId xmlns:a16="http://schemas.microsoft.com/office/drawing/2014/main" id="{B6180B0E-9E46-4A03-891A-A7DC4D447719}"/>
               </a:ext>
             </a:extLst>
           </p:cNvPr>
@@ -8585,7 +8652,7 @@
           <p:cNvPr id="12" name="">
             <a:extLst xmlns:a="http://schemas.openxmlformats.org/drawingml/2006/main">
               <a:ext uri="{FF2B5EF4-FFF2-40B4-BE49-F238E27FC236}">
-                <a16:creationId xmlns:a16="http://schemas.microsoft.com/office/drawing/2014/main" id="{950B1680-0AAB-4423-A185-3179E06CBBB6}"/>
+                <a16:creationId xmlns:a16="http://schemas.microsoft.com/office/drawing/2014/main" id="{D89A8541-1BDA-4543-A47B-411214826DF2}"/>
               </a:ext>
             </a:extLst>
           </p:cNvPr>
@@ -8635,7 +8702,7 @@
           <p:cNvPr id="13" name="">
             <a:extLst xmlns:a="http://schemas.openxmlformats.org/drawingml/2006/main">
               <a:ext uri="{FF2B5EF4-FFF2-40B4-BE49-F238E27FC236}">
-                <a16:creationId xmlns:a16="http://schemas.microsoft.com/office/drawing/2014/main" id="{6B2CC0C4-DF87-468E-923D-9F9ABC24BB03}"/>
+                <a16:creationId xmlns:a16="http://schemas.microsoft.com/office/drawing/2014/main" id="{FE647BFA-0813-4A3B-93D9-C128D17DA7C4}"/>
               </a:ext>
             </a:extLst>
           </p:cNvPr>
@@ -8683,7 +8750,7 @@
     </p:spTree>
     <p:extLst>
       <p:ext uri="{BB962C8B-B14F-4D97-AF65-F5344CB8AC3E}">
-        <p14:creationId xmlns:p14="http://schemas.microsoft.com/office/powerpoint/2010/main" val="1668505883"/>
+        <p14:creationId xmlns:p14="http://schemas.microsoft.com/office/powerpoint/2010/main" val="1041080894"/>
       </p:ext>
     </p:extLst>
   </p:cSld>
@@ -8714,7 +8781,7 @@
           <p:cNvPr id="1" name="">
             <a:extLst xmlns:a="http://schemas.openxmlformats.org/drawingml/2006/main">
               <a:ext uri="{FF2B5EF4-FFF2-40B4-BE49-F238E27FC236}">
-                <a16:creationId xmlns:a16="http://schemas.microsoft.com/office/drawing/2014/main" id="{D8547941-FBAA-4C3F-8B2E-2164CC263E7A}"/>
+                <a16:creationId xmlns:a16="http://schemas.microsoft.com/office/drawing/2014/main" id="{BB5ED1F7-DAAD-496E-BD29-153A5FC12FD8}"/>
               </a:ext>
             </a:extLst>
           </p:cNvPr>
@@ -8764,7 +8831,7 @@
           <p:cNvPr id="2" name="">
             <a:extLst xmlns:a="http://schemas.openxmlformats.org/drawingml/2006/main">
               <a:ext uri="{FF2B5EF4-FFF2-40B4-BE49-F238E27FC236}">
-                <a16:creationId xmlns:a16="http://schemas.microsoft.com/office/drawing/2014/main" id="{C412F4C6-7800-4A12-B6DC-6DAF724E7CBE}"/>
+                <a16:creationId xmlns:a16="http://schemas.microsoft.com/office/drawing/2014/main" id="{3E166D49-41DC-4143-84FA-53B156ED2A00}"/>
               </a:ext>
             </a:extLst>
           </p:cNvPr>
@@ -8804,7 +8871,7 @@
                   <a:srgbClr val="000000"/>
                 </a:solidFill>
               </a:rPr>
-              <a:t>Broad strategy-pool reopening is now a deliberate compute run</a:t>
+              <a:t>Trend and breakout families made the lane more defensive, not more participatory</a:t>
             </a:r>
           </a:p>
         </p:txBody>
@@ -8814,7 +8881,7 @@
           <p:cNvPr id="3" name="">
             <a:extLst xmlns:a="http://schemas.openxmlformats.org/drawingml/2006/main">
               <a:ext uri="{FF2B5EF4-FFF2-40B4-BE49-F238E27FC236}">
-                <a16:creationId xmlns:a16="http://schemas.microsoft.com/office/drawing/2014/main" id="{AC1ECFF2-CDDA-452D-8683-AE7B19735FD1}"/>
+                <a16:creationId xmlns:a16="http://schemas.microsoft.com/office/drawing/2014/main" id="{666D7BF5-246C-4419-995E-4EB9CABB6B0F}"/>
               </a:ext>
             </a:extLst>
           </p:cNvPr>
@@ -8847,19 +8914,19 @@
           <p:cNvPr id="4" name="">
             <a:extLst xmlns:a="http://schemas.openxmlformats.org/drawingml/2006/main">
               <a:ext uri="{FF2B5EF4-FFF2-40B4-BE49-F238E27FC236}">
-                <a16:creationId xmlns:a16="http://schemas.microsoft.com/office/drawing/2014/main" id="{8D2A8DC5-FBF4-4DC9-BAAE-AB2500BB096C}"/>
-              </a:ext>
-            </a:extLst>
-          </p:cNvPr>
-          <p:cNvSpPr>
-            <a:spLocks xmlns:a="http://schemas.openxmlformats.org/drawingml/2006/main" noGrp="1"/>
-          </p:cNvSpPr>
-          <p:nvPr/>
-        </p:nvSpPr>
-        <p:spPr>
-          <a:xfrm xmlns:a="http://schemas.openxmlformats.org/drawingml/2006/main">
-            <a:off x="819150" y="2076450"/>
-            <a:ext cx="4438650" cy="2476500"/>
+                <a16:creationId xmlns:a16="http://schemas.microsoft.com/office/drawing/2014/main" id="{2350271E-96EE-4D54-A8DA-B3879E3E047D}"/>
+              </a:ext>
+            </a:extLst>
+          </p:cNvPr>
+          <p:cNvSpPr>
+            <a:spLocks xmlns:a="http://schemas.openxmlformats.org/drawingml/2006/main" noGrp="1"/>
+          </p:cNvSpPr>
+          <p:nvPr/>
+        </p:nvSpPr>
+        <p:spPr>
+          <a:xfrm xmlns:a="http://schemas.openxmlformats.org/drawingml/2006/main">
+            <a:off x="838200" y="2038350"/>
+            <a:ext cx="838200" cy="361950"/>
           </a:xfrm>
           <a:prstGeom xmlns:a="http://schemas.openxmlformats.org/drawingml/2006/main" prst="rect">
             <a:avLst/>
@@ -8880,19 +8947,69 @@
           <p:cNvPr id="5" name="">
             <a:extLst xmlns:a="http://schemas.openxmlformats.org/drawingml/2006/main">
               <a:ext uri="{FF2B5EF4-FFF2-40B4-BE49-F238E27FC236}">
-                <a16:creationId xmlns:a16="http://schemas.microsoft.com/office/drawing/2014/main" id="{B249CE4E-F19D-4D1E-BBFC-33F81184AEE9}"/>
-              </a:ext>
-            </a:extLst>
-          </p:cNvPr>
-          <p:cNvSpPr>
-            <a:spLocks xmlns:a="http://schemas.openxmlformats.org/drawingml/2006/main" noGrp="1"/>
-          </p:cNvSpPr>
-          <p:nvPr/>
-        </p:nvSpPr>
-        <p:spPr>
-          <a:xfrm xmlns:a="http://schemas.openxmlformats.org/drawingml/2006/main">
-            <a:off x="6477000" y="2076450"/>
-            <a:ext cx="4438650" cy="2476500"/>
+                <a16:creationId xmlns:a16="http://schemas.microsoft.com/office/drawing/2014/main" id="{2F2A485C-40AF-4F5E-8FD9-9C007F6F19DB}"/>
+              </a:ext>
+            </a:extLst>
+          </p:cNvPr>
+          <p:cNvSpPr>
+            <a:spLocks xmlns:a="http://schemas.openxmlformats.org/drawingml/2006/main" noGrp="1"/>
+          </p:cNvSpPr>
+          <p:nvPr/>
+        </p:nvSpPr>
+        <p:spPr>
+          <a:xfrm xmlns:a="http://schemas.openxmlformats.org/drawingml/2006/main">
+            <a:off x="914400" y="2124075"/>
+            <a:ext cx="685800" cy="209550"/>
+          </a:xfrm>
+          <a:prstGeom xmlns:a="http://schemas.openxmlformats.org/drawingml/2006/main" prst="rect">
+            <a:avLst/>
+          </a:prstGeom>
+          <a:noFill xmlns:a="http://schemas.openxmlformats.org/drawingml/2006/main"/>
+          <a:ln xmlns:a="http://schemas.openxmlformats.org/drawingml/2006/main" w="0">
+            <a:noFill/>
+            <a:prstDash val="solid"/>
+          </a:ln>
+        </p:spPr>
+        <p:txBody>
+          <a:bodyPr xmlns:a="http://schemas.openxmlformats.org/drawingml/2006/main"/>
+          <a:lstStyle xmlns:a="http://schemas.openxmlformats.org/drawingml/2006/main"/>
+          <a:p xmlns:a="http://schemas.openxmlformats.org/drawingml/2006/main">
+            <a:pPr>
+              <a:defRPr sz="1125" b="1">
+                <a:solidFill>
+                  <a:srgbClr val="000000"/>
+                </a:solidFill>
+              </a:defRPr>
+            </a:pPr>
+            <a:r>
+              <a:rPr sz="1125" b="1">
+                <a:solidFill>
+                  <a:srgbClr val="000000"/>
+                </a:solidFill>
+              </a:rPr>
+              <a:t>Year</a:t>
+            </a:r>
+          </a:p>
+        </p:txBody>
+      </p:sp>
+      <p:sp>
+        <p:nvSpPr>
+          <p:cNvPr id="6" name="">
+            <a:extLst xmlns:a="http://schemas.openxmlformats.org/drawingml/2006/main">
+              <a:ext uri="{FF2B5EF4-FFF2-40B4-BE49-F238E27FC236}">
+                <a16:creationId xmlns:a16="http://schemas.microsoft.com/office/drawing/2014/main" id="{0A16C350-33AB-4A75-B5BC-7C789579DFCF}"/>
+              </a:ext>
+            </a:extLst>
+          </p:cNvPr>
+          <p:cNvSpPr>
+            <a:spLocks xmlns:a="http://schemas.openxmlformats.org/drawingml/2006/main" noGrp="1"/>
+          </p:cNvSpPr>
+          <p:nvPr/>
+        </p:nvSpPr>
+        <p:spPr>
+          <a:xfrm xmlns:a="http://schemas.openxmlformats.org/drawingml/2006/main">
+            <a:off x="1676400" y="2038350"/>
+            <a:ext cx="1809750" cy="361950"/>
           </a:xfrm>
           <a:prstGeom xmlns:a="http://schemas.openxmlformats.org/drawingml/2006/main" prst="rect">
             <a:avLst/>
@@ -8910,50 +9027,3156 @@
       </p:sp>
       <p:sp>
         <p:nvSpPr>
+          <p:cNvPr id="7" name="">
+            <a:extLst xmlns:a="http://schemas.openxmlformats.org/drawingml/2006/main">
+              <a:ext uri="{FF2B5EF4-FFF2-40B4-BE49-F238E27FC236}">
+                <a16:creationId xmlns:a16="http://schemas.microsoft.com/office/drawing/2014/main" id="{8A091499-4B89-4660-87EB-029CE98EA93C}"/>
+              </a:ext>
+            </a:extLst>
+          </p:cNvPr>
+          <p:cNvSpPr>
+            <a:spLocks xmlns:a="http://schemas.openxmlformats.org/drawingml/2006/main" noGrp="1"/>
+          </p:cNvSpPr>
+          <p:nvPr/>
+        </p:nvSpPr>
+        <p:spPr>
+          <a:xfrm xmlns:a="http://schemas.openxmlformats.org/drawingml/2006/main">
+            <a:off x="1752600" y="2124075"/>
+            <a:ext cx="1657350" cy="209550"/>
+          </a:xfrm>
+          <a:prstGeom xmlns:a="http://schemas.openxmlformats.org/drawingml/2006/main" prst="rect">
+            <a:avLst/>
+          </a:prstGeom>
+          <a:noFill xmlns:a="http://schemas.openxmlformats.org/drawingml/2006/main"/>
+          <a:ln xmlns:a="http://schemas.openxmlformats.org/drawingml/2006/main" w="0">
+            <a:noFill/>
+            <a:prstDash val="solid"/>
+          </a:ln>
+        </p:spPr>
+        <p:txBody>
+          <a:bodyPr xmlns:a="http://schemas.openxmlformats.org/drawingml/2006/main"/>
+          <a:lstStyle xmlns:a="http://schemas.openxmlformats.org/drawingml/2006/main"/>
+          <a:p xmlns:a="http://schemas.openxmlformats.org/drawingml/2006/main">
+            <a:pPr>
+              <a:defRPr sz="1125" b="1">
+                <a:solidFill>
+                  <a:srgbClr val="000000"/>
+                </a:solidFill>
+              </a:defRPr>
+            </a:pPr>
+            <a:r>
+              <a:rPr sz="1125" b="1">
+                <a:solidFill>
+                  <a:srgbClr val="000000"/>
+                </a:solidFill>
+              </a:rPr>
+              <a:t>Pool</a:t>
+            </a:r>
+          </a:p>
+        </p:txBody>
+      </p:sp>
+      <p:sp>
+        <p:nvSpPr>
+          <p:cNvPr id="8" name="">
+            <a:extLst xmlns:a="http://schemas.openxmlformats.org/drawingml/2006/main">
+              <a:ext uri="{FF2B5EF4-FFF2-40B4-BE49-F238E27FC236}">
+                <a16:creationId xmlns:a16="http://schemas.microsoft.com/office/drawing/2014/main" id="{E146EEDE-20D9-46EA-8043-64E70E17F03B}"/>
+              </a:ext>
+            </a:extLst>
+          </p:cNvPr>
+          <p:cNvSpPr>
+            <a:spLocks xmlns:a="http://schemas.openxmlformats.org/drawingml/2006/main" noGrp="1"/>
+          </p:cNvSpPr>
+          <p:nvPr/>
+        </p:nvSpPr>
+        <p:spPr>
+          <a:xfrm xmlns:a="http://schemas.openxmlformats.org/drawingml/2006/main">
+            <a:off x="3486150" y="2038350"/>
+            <a:ext cx="1276350" cy="361950"/>
+          </a:xfrm>
+          <a:prstGeom xmlns:a="http://schemas.openxmlformats.org/drawingml/2006/main" prst="rect">
+            <a:avLst/>
+          </a:prstGeom>
+          <a:solidFill xmlns:a="http://schemas.openxmlformats.org/drawingml/2006/main">
+            <a:srgbClr val="EDEDED"/>
+          </a:solidFill>
+          <a:ln xmlns:a="http://schemas.openxmlformats.org/drawingml/2006/main" w="9525">
+            <a:solidFill>
+              <a:srgbClr val="B8BCC4"/>
+            </a:solidFill>
+            <a:prstDash val="solid"/>
+          </a:ln>
+        </p:spPr>
+      </p:sp>
+      <p:sp>
+        <p:nvSpPr>
+          <p:cNvPr id="9" name="">
+            <a:extLst xmlns:a="http://schemas.openxmlformats.org/drawingml/2006/main">
+              <a:ext uri="{FF2B5EF4-FFF2-40B4-BE49-F238E27FC236}">
+                <a16:creationId xmlns:a16="http://schemas.microsoft.com/office/drawing/2014/main" id="{D081EDDA-36DD-49F1-B161-062E1ED391D3}"/>
+              </a:ext>
+            </a:extLst>
+          </p:cNvPr>
+          <p:cNvSpPr>
+            <a:spLocks xmlns:a="http://schemas.openxmlformats.org/drawingml/2006/main" noGrp="1"/>
+          </p:cNvSpPr>
+          <p:nvPr/>
+        </p:nvSpPr>
+        <p:spPr>
+          <a:xfrm xmlns:a="http://schemas.openxmlformats.org/drawingml/2006/main">
+            <a:off x="3562350" y="2124075"/>
+            <a:ext cx="1123950" cy="209550"/>
+          </a:xfrm>
+          <a:prstGeom xmlns:a="http://schemas.openxmlformats.org/drawingml/2006/main" prst="rect">
+            <a:avLst/>
+          </a:prstGeom>
+          <a:noFill xmlns:a="http://schemas.openxmlformats.org/drawingml/2006/main"/>
+          <a:ln xmlns:a="http://schemas.openxmlformats.org/drawingml/2006/main" w="0">
+            <a:noFill/>
+            <a:prstDash val="solid"/>
+          </a:ln>
+        </p:spPr>
+        <p:txBody>
+          <a:bodyPr xmlns:a="http://schemas.openxmlformats.org/drawingml/2006/main"/>
+          <a:lstStyle xmlns:a="http://schemas.openxmlformats.org/drawingml/2006/main"/>
+          <a:p xmlns:a="http://schemas.openxmlformats.org/drawingml/2006/main">
+            <a:pPr>
+              <a:defRPr sz="1125" b="1">
+                <a:solidFill>
+                  <a:srgbClr val="000000"/>
+                </a:solidFill>
+              </a:defRPr>
+            </a:pPr>
+            <a:r>
+              <a:rPr sz="1125" b="1">
+                <a:solidFill>
+                  <a:srgbClr val="000000"/>
+                </a:solidFill>
+              </a:rPr>
+              <a:t>Return</a:t>
+            </a:r>
+          </a:p>
+        </p:txBody>
+      </p:sp>
+      <p:sp>
+        <p:nvSpPr>
+          <p:cNvPr id="10" name="">
+            <a:extLst xmlns:a="http://schemas.openxmlformats.org/drawingml/2006/main">
+              <a:ext uri="{FF2B5EF4-FFF2-40B4-BE49-F238E27FC236}">
+                <a16:creationId xmlns:a16="http://schemas.microsoft.com/office/drawing/2014/main" id="{88459CF7-2193-4A5F-A3DA-28A8A62FBF91}"/>
+              </a:ext>
+            </a:extLst>
+          </p:cNvPr>
+          <p:cNvSpPr>
+            <a:spLocks xmlns:a="http://schemas.openxmlformats.org/drawingml/2006/main" noGrp="1"/>
+          </p:cNvSpPr>
+          <p:nvPr/>
+        </p:nvSpPr>
+        <p:spPr>
+          <a:xfrm xmlns:a="http://schemas.openxmlformats.org/drawingml/2006/main">
+            <a:off x="4762500" y="2038350"/>
+            <a:ext cx="1219200" cy="361950"/>
+          </a:xfrm>
+          <a:prstGeom xmlns:a="http://schemas.openxmlformats.org/drawingml/2006/main" prst="rect">
+            <a:avLst/>
+          </a:prstGeom>
+          <a:solidFill xmlns:a="http://schemas.openxmlformats.org/drawingml/2006/main">
+            <a:srgbClr val="EDEDED"/>
+          </a:solidFill>
+          <a:ln xmlns:a="http://schemas.openxmlformats.org/drawingml/2006/main" w="9525">
+            <a:solidFill>
+              <a:srgbClr val="B8BCC4"/>
+            </a:solidFill>
+            <a:prstDash val="solid"/>
+          </a:ln>
+        </p:spPr>
+      </p:sp>
+      <p:sp>
+        <p:nvSpPr>
+          <p:cNvPr id="11" name="">
+            <a:extLst xmlns:a="http://schemas.openxmlformats.org/drawingml/2006/main">
+              <a:ext uri="{FF2B5EF4-FFF2-40B4-BE49-F238E27FC236}">
+                <a16:creationId xmlns:a16="http://schemas.microsoft.com/office/drawing/2014/main" id="{F0FF926C-1BA3-4662-B485-A46979E41BCF}"/>
+              </a:ext>
+            </a:extLst>
+          </p:cNvPr>
+          <p:cNvSpPr>
+            <a:spLocks xmlns:a="http://schemas.openxmlformats.org/drawingml/2006/main" noGrp="1"/>
+          </p:cNvSpPr>
+          <p:nvPr/>
+        </p:nvSpPr>
+        <p:spPr>
+          <a:xfrm xmlns:a="http://schemas.openxmlformats.org/drawingml/2006/main">
+            <a:off x="4838700" y="2124075"/>
+            <a:ext cx="1066800" cy="209550"/>
+          </a:xfrm>
+          <a:prstGeom xmlns:a="http://schemas.openxmlformats.org/drawingml/2006/main" prst="rect">
+            <a:avLst/>
+          </a:prstGeom>
+          <a:noFill xmlns:a="http://schemas.openxmlformats.org/drawingml/2006/main"/>
+          <a:ln xmlns:a="http://schemas.openxmlformats.org/drawingml/2006/main" w="0">
+            <a:noFill/>
+            <a:prstDash val="solid"/>
+          </a:ln>
+        </p:spPr>
+        <p:txBody>
+          <a:bodyPr xmlns:a="http://schemas.openxmlformats.org/drawingml/2006/main"/>
+          <a:lstStyle xmlns:a="http://schemas.openxmlformats.org/drawingml/2006/main"/>
+          <a:p xmlns:a="http://schemas.openxmlformats.org/drawingml/2006/main">
+            <a:pPr>
+              <a:defRPr sz="1125" b="1">
+                <a:solidFill>
+                  <a:srgbClr val="000000"/>
+                </a:solidFill>
+              </a:defRPr>
+            </a:pPr>
+            <a:r>
+              <a:rPr sz="1125" b="1">
+                <a:solidFill>
+                  <a:srgbClr val="000000"/>
+                </a:solidFill>
+              </a:rPr>
+              <a:t>Alpha</a:t>
+            </a:r>
+          </a:p>
+        </p:txBody>
+      </p:sp>
+      <p:sp>
+        <p:nvSpPr>
+          <p:cNvPr id="12" name="">
+            <a:extLst xmlns:a="http://schemas.openxmlformats.org/drawingml/2006/main">
+              <a:ext uri="{FF2B5EF4-FFF2-40B4-BE49-F238E27FC236}">
+                <a16:creationId xmlns:a16="http://schemas.microsoft.com/office/drawing/2014/main" id="{804FCD10-6B7A-4D80-8E7A-588CD99415F1}"/>
+              </a:ext>
+            </a:extLst>
+          </p:cNvPr>
+          <p:cNvSpPr>
+            <a:spLocks xmlns:a="http://schemas.openxmlformats.org/drawingml/2006/main" noGrp="1"/>
+          </p:cNvSpPr>
+          <p:nvPr/>
+        </p:nvSpPr>
+        <p:spPr>
+          <a:xfrm xmlns:a="http://schemas.openxmlformats.org/drawingml/2006/main">
+            <a:off x="5981700" y="2038350"/>
+            <a:ext cx="1219200" cy="361950"/>
+          </a:xfrm>
+          <a:prstGeom xmlns:a="http://schemas.openxmlformats.org/drawingml/2006/main" prst="rect">
+            <a:avLst/>
+          </a:prstGeom>
+          <a:solidFill xmlns:a="http://schemas.openxmlformats.org/drawingml/2006/main">
+            <a:srgbClr val="EDEDED"/>
+          </a:solidFill>
+          <a:ln xmlns:a="http://schemas.openxmlformats.org/drawingml/2006/main" w="9525">
+            <a:solidFill>
+              <a:srgbClr val="B8BCC4"/>
+            </a:solidFill>
+            <a:prstDash val="solid"/>
+          </a:ln>
+        </p:spPr>
+      </p:sp>
+      <p:sp>
+        <p:nvSpPr>
+          <p:cNvPr id="13" name="">
+            <a:extLst xmlns:a="http://schemas.openxmlformats.org/drawingml/2006/main">
+              <a:ext uri="{FF2B5EF4-FFF2-40B4-BE49-F238E27FC236}">
+                <a16:creationId xmlns:a16="http://schemas.microsoft.com/office/drawing/2014/main" id="{9F32D84C-4A7B-44EC-BBA1-E43AFFCBE8AA}"/>
+              </a:ext>
+            </a:extLst>
+          </p:cNvPr>
+          <p:cNvSpPr>
+            <a:spLocks xmlns:a="http://schemas.openxmlformats.org/drawingml/2006/main" noGrp="1"/>
+          </p:cNvSpPr>
+          <p:nvPr/>
+        </p:nvSpPr>
+        <p:spPr>
+          <a:xfrm xmlns:a="http://schemas.openxmlformats.org/drawingml/2006/main">
+            <a:off x="6057900" y="2124075"/>
+            <a:ext cx="1066800" cy="209550"/>
+          </a:xfrm>
+          <a:prstGeom xmlns:a="http://schemas.openxmlformats.org/drawingml/2006/main" prst="rect">
+            <a:avLst/>
+          </a:prstGeom>
+          <a:noFill xmlns:a="http://schemas.openxmlformats.org/drawingml/2006/main"/>
+          <a:ln xmlns:a="http://schemas.openxmlformats.org/drawingml/2006/main" w="0">
+            <a:noFill/>
+            <a:prstDash val="solid"/>
+          </a:ln>
+        </p:spPr>
+        <p:txBody>
+          <a:bodyPr xmlns:a="http://schemas.openxmlformats.org/drawingml/2006/main"/>
+          <a:lstStyle xmlns:a="http://schemas.openxmlformats.org/drawingml/2006/main"/>
+          <a:p xmlns:a="http://schemas.openxmlformats.org/drawingml/2006/main">
+            <a:pPr>
+              <a:defRPr sz="1125" b="1">
+                <a:solidFill>
+                  <a:srgbClr val="000000"/>
+                </a:solidFill>
+              </a:defRPr>
+            </a:pPr>
+            <a:r>
+              <a:rPr sz="1125" b="1">
+                <a:solidFill>
+                  <a:srgbClr val="000000"/>
+                </a:solidFill>
+              </a:rPr>
+              <a:t>Exposure</a:t>
+            </a:r>
+          </a:p>
+        </p:txBody>
+      </p:sp>
+      <p:sp>
+        <p:nvSpPr>
+          <p:cNvPr id="14" name="">
+            <a:extLst xmlns:a="http://schemas.openxmlformats.org/drawingml/2006/main">
+              <a:ext uri="{FF2B5EF4-FFF2-40B4-BE49-F238E27FC236}">
+                <a16:creationId xmlns:a16="http://schemas.microsoft.com/office/drawing/2014/main" id="{DFD944F9-5799-442A-A2F4-989EF9613B08}"/>
+              </a:ext>
+            </a:extLst>
+          </p:cNvPr>
+          <p:cNvSpPr>
+            <a:spLocks xmlns:a="http://schemas.openxmlformats.org/drawingml/2006/main" noGrp="1"/>
+          </p:cNvSpPr>
+          <p:nvPr/>
+        </p:nvSpPr>
+        <p:spPr>
+          <a:xfrm xmlns:a="http://schemas.openxmlformats.org/drawingml/2006/main">
+            <a:off x="7200900" y="2038350"/>
+            <a:ext cx="1219200" cy="361950"/>
+          </a:xfrm>
+          <a:prstGeom xmlns:a="http://schemas.openxmlformats.org/drawingml/2006/main" prst="rect">
+            <a:avLst/>
+          </a:prstGeom>
+          <a:solidFill xmlns:a="http://schemas.openxmlformats.org/drawingml/2006/main">
+            <a:srgbClr val="EDEDED"/>
+          </a:solidFill>
+          <a:ln xmlns:a="http://schemas.openxmlformats.org/drawingml/2006/main" w="9525">
+            <a:solidFill>
+              <a:srgbClr val="B8BCC4"/>
+            </a:solidFill>
+            <a:prstDash val="solid"/>
+          </a:ln>
+        </p:spPr>
+      </p:sp>
+      <p:sp>
+        <p:nvSpPr>
+          <p:cNvPr id="15" name="">
+            <a:extLst xmlns:a="http://schemas.openxmlformats.org/drawingml/2006/main">
+              <a:ext uri="{FF2B5EF4-FFF2-40B4-BE49-F238E27FC236}">
+                <a16:creationId xmlns:a16="http://schemas.microsoft.com/office/drawing/2014/main" id="{262E8992-A138-4356-9E09-12AFA2D6D443}"/>
+              </a:ext>
+            </a:extLst>
+          </p:cNvPr>
+          <p:cNvSpPr>
+            <a:spLocks xmlns:a="http://schemas.openxmlformats.org/drawingml/2006/main" noGrp="1"/>
+          </p:cNvSpPr>
+          <p:nvPr/>
+        </p:nvSpPr>
+        <p:spPr>
+          <a:xfrm xmlns:a="http://schemas.openxmlformats.org/drawingml/2006/main">
+            <a:off x="7277100" y="2124075"/>
+            <a:ext cx="1066800" cy="209550"/>
+          </a:xfrm>
+          <a:prstGeom xmlns:a="http://schemas.openxmlformats.org/drawingml/2006/main" prst="rect">
+            <a:avLst/>
+          </a:prstGeom>
+          <a:noFill xmlns:a="http://schemas.openxmlformats.org/drawingml/2006/main"/>
+          <a:ln xmlns:a="http://schemas.openxmlformats.org/drawingml/2006/main" w="0">
+            <a:noFill/>
+            <a:prstDash val="solid"/>
+          </a:ln>
+        </p:spPr>
+        <p:txBody>
+          <a:bodyPr xmlns:a="http://schemas.openxmlformats.org/drawingml/2006/main"/>
+          <a:lstStyle xmlns:a="http://schemas.openxmlformats.org/drawingml/2006/main"/>
+          <a:p xmlns:a="http://schemas.openxmlformats.org/drawingml/2006/main">
+            <a:pPr>
+              <a:defRPr sz="1125" b="1">
+                <a:solidFill>
+                  <a:srgbClr val="000000"/>
+                </a:solidFill>
+              </a:defRPr>
+            </a:pPr>
+            <a:r>
+              <a:rPr sz="1125" b="1">
+                <a:solidFill>
+                  <a:srgbClr val="000000"/>
+                </a:solidFill>
+              </a:rPr>
+              <a:t>Drawdown</a:t>
+            </a:r>
+          </a:p>
+        </p:txBody>
+      </p:sp>
+      <p:sp>
+        <p:nvSpPr>
+          <p:cNvPr id="16" name="">
+            <a:extLst xmlns:a="http://schemas.openxmlformats.org/drawingml/2006/main">
+              <a:ext uri="{FF2B5EF4-FFF2-40B4-BE49-F238E27FC236}">
+                <a16:creationId xmlns:a16="http://schemas.microsoft.com/office/drawing/2014/main" id="{8E2CDBFC-1D90-4D32-8680-A1736DA65126}"/>
+              </a:ext>
+            </a:extLst>
+          </p:cNvPr>
+          <p:cNvSpPr>
+            <a:spLocks xmlns:a="http://schemas.openxmlformats.org/drawingml/2006/main" noGrp="1"/>
+          </p:cNvSpPr>
+          <p:nvPr/>
+        </p:nvSpPr>
+        <p:spPr>
+          <a:xfrm xmlns:a="http://schemas.openxmlformats.org/drawingml/2006/main">
+            <a:off x="8420100" y="2038350"/>
+            <a:ext cx="1047750" cy="361950"/>
+          </a:xfrm>
+          <a:prstGeom xmlns:a="http://schemas.openxmlformats.org/drawingml/2006/main" prst="rect">
+            <a:avLst/>
+          </a:prstGeom>
+          <a:solidFill xmlns:a="http://schemas.openxmlformats.org/drawingml/2006/main">
+            <a:srgbClr val="EDEDED"/>
+          </a:solidFill>
+          <a:ln xmlns:a="http://schemas.openxmlformats.org/drawingml/2006/main" w="9525">
+            <a:solidFill>
+              <a:srgbClr val="B8BCC4"/>
+            </a:solidFill>
+            <a:prstDash val="solid"/>
+          </a:ln>
+        </p:spPr>
+      </p:sp>
+      <p:sp>
+        <p:nvSpPr>
+          <p:cNvPr id="17" name="">
+            <a:extLst xmlns:a="http://schemas.openxmlformats.org/drawingml/2006/main">
+              <a:ext uri="{FF2B5EF4-FFF2-40B4-BE49-F238E27FC236}">
+                <a16:creationId xmlns:a16="http://schemas.microsoft.com/office/drawing/2014/main" id="{1A18F889-C836-41D6-BA67-3F3E678C1DE3}"/>
+              </a:ext>
+            </a:extLst>
+          </p:cNvPr>
+          <p:cNvSpPr>
+            <a:spLocks xmlns:a="http://schemas.openxmlformats.org/drawingml/2006/main" noGrp="1"/>
+          </p:cNvSpPr>
+          <p:nvPr/>
+        </p:nvSpPr>
+        <p:spPr>
+          <a:xfrm xmlns:a="http://schemas.openxmlformats.org/drawingml/2006/main">
+            <a:off x="8496300" y="2124075"/>
+            <a:ext cx="895350" cy="209550"/>
+          </a:xfrm>
+          <a:prstGeom xmlns:a="http://schemas.openxmlformats.org/drawingml/2006/main" prst="rect">
+            <a:avLst/>
+          </a:prstGeom>
+          <a:noFill xmlns:a="http://schemas.openxmlformats.org/drawingml/2006/main"/>
+          <a:ln xmlns:a="http://schemas.openxmlformats.org/drawingml/2006/main" w="0">
+            <a:noFill/>
+            <a:prstDash val="solid"/>
+          </a:ln>
+        </p:spPr>
+        <p:txBody>
+          <a:bodyPr xmlns:a="http://schemas.openxmlformats.org/drawingml/2006/main"/>
+          <a:lstStyle xmlns:a="http://schemas.openxmlformats.org/drawingml/2006/main"/>
+          <a:p xmlns:a="http://schemas.openxmlformats.org/drawingml/2006/main">
+            <a:pPr>
+              <a:defRPr sz="1125" b="1">
+                <a:solidFill>
+                  <a:srgbClr val="000000"/>
+                </a:solidFill>
+              </a:defRPr>
+            </a:pPr>
+            <a:r>
+              <a:rPr sz="1125" b="1">
+                <a:solidFill>
+                  <a:srgbClr val="000000"/>
+                </a:solidFill>
+              </a:rPr>
+              <a:t>Entries</a:t>
+            </a:r>
+          </a:p>
+        </p:txBody>
+      </p:sp>
+      <p:sp>
+        <p:nvSpPr>
+          <p:cNvPr id="18" name="">
+            <a:extLst xmlns:a="http://schemas.openxmlformats.org/drawingml/2006/main">
+              <a:ext uri="{FF2B5EF4-FFF2-40B4-BE49-F238E27FC236}">
+                <a16:creationId xmlns:a16="http://schemas.microsoft.com/office/drawing/2014/main" id="{53623A85-7426-4E1E-B513-D160A560DD31}"/>
+              </a:ext>
+            </a:extLst>
+          </p:cNvPr>
+          <p:cNvSpPr>
+            <a:spLocks xmlns:a="http://schemas.openxmlformats.org/drawingml/2006/main" noGrp="1"/>
+          </p:cNvSpPr>
+          <p:nvPr/>
+        </p:nvSpPr>
+        <p:spPr>
+          <a:xfrm xmlns:a="http://schemas.openxmlformats.org/drawingml/2006/main">
+            <a:off x="838200" y="2400300"/>
+            <a:ext cx="838200" cy="590550"/>
+          </a:xfrm>
+          <a:prstGeom xmlns:a="http://schemas.openxmlformats.org/drawingml/2006/main" prst="rect">
+            <a:avLst/>
+          </a:prstGeom>
+          <a:solidFill xmlns:a="http://schemas.openxmlformats.org/drawingml/2006/main">
+            <a:srgbClr val="F7F7F7"/>
+          </a:solidFill>
+          <a:ln xmlns:a="http://schemas.openxmlformats.org/drawingml/2006/main" w="9525">
+            <a:solidFill>
+              <a:srgbClr val="B8BCC4"/>
+            </a:solidFill>
+            <a:prstDash val="solid"/>
+          </a:ln>
+        </p:spPr>
+      </p:sp>
+      <p:sp>
+        <p:nvSpPr>
+          <p:cNvPr id="19" name="">
+            <a:extLst xmlns:a="http://schemas.openxmlformats.org/drawingml/2006/main">
+              <a:ext uri="{FF2B5EF4-FFF2-40B4-BE49-F238E27FC236}">
+                <a16:creationId xmlns:a16="http://schemas.microsoft.com/office/drawing/2014/main" id="{AFF9D969-9A0F-48CB-A829-BF238D114AE2}"/>
+              </a:ext>
+            </a:extLst>
+          </p:cNvPr>
+          <p:cNvSpPr>
+            <a:spLocks xmlns:a="http://schemas.openxmlformats.org/drawingml/2006/main" noGrp="1"/>
+          </p:cNvSpPr>
+          <p:nvPr/>
+        </p:nvSpPr>
+        <p:spPr>
+          <a:xfrm xmlns:a="http://schemas.openxmlformats.org/drawingml/2006/main">
+            <a:off x="914400" y="2571750"/>
+            <a:ext cx="685800" cy="247650"/>
+          </a:xfrm>
+          <a:prstGeom xmlns:a="http://schemas.openxmlformats.org/drawingml/2006/main" prst="rect">
+            <a:avLst/>
+          </a:prstGeom>
+          <a:noFill xmlns:a="http://schemas.openxmlformats.org/drawingml/2006/main"/>
+          <a:ln xmlns:a="http://schemas.openxmlformats.org/drawingml/2006/main" w="0">
+            <a:noFill/>
+            <a:prstDash val="solid"/>
+          </a:ln>
+        </p:spPr>
+        <p:txBody>
+          <a:bodyPr xmlns:a="http://schemas.openxmlformats.org/drawingml/2006/main"/>
+          <a:lstStyle xmlns:a="http://schemas.openxmlformats.org/drawingml/2006/main"/>
+          <a:p xmlns:a="http://schemas.openxmlformats.org/drawingml/2006/main">
+            <a:pPr>
+              <a:defRPr sz="1200" b="0">
+                <a:solidFill>
+                  <a:srgbClr val="000000"/>
+                </a:solidFill>
+              </a:defRPr>
+            </a:pPr>
+            <a:r>
+              <a:rPr sz="1200" b="0">
+                <a:solidFill>
+                  <a:srgbClr val="000000"/>
+                </a:solidFill>
+              </a:rPr>
+              <a:t>2020</a:t>
+            </a:r>
+          </a:p>
+        </p:txBody>
+      </p:sp>
+      <p:sp>
+        <p:nvSpPr>
+          <p:cNvPr id="20" name="">
+            <a:extLst xmlns:a="http://schemas.openxmlformats.org/drawingml/2006/main">
+              <a:ext uri="{FF2B5EF4-FFF2-40B4-BE49-F238E27FC236}">
+                <a16:creationId xmlns:a16="http://schemas.microsoft.com/office/drawing/2014/main" id="{22C83342-04F3-4FFA-88C4-1B5374075763}"/>
+              </a:ext>
+            </a:extLst>
+          </p:cNvPr>
+          <p:cNvSpPr>
+            <a:spLocks xmlns:a="http://schemas.openxmlformats.org/drawingml/2006/main" noGrp="1"/>
+          </p:cNvSpPr>
+          <p:nvPr/>
+        </p:nvSpPr>
+        <p:spPr>
+          <a:xfrm xmlns:a="http://schemas.openxmlformats.org/drawingml/2006/main">
+            <a:off x="1676400" y="2400300"/>
+            <a:ext cx="1809750" cy="590550"/>
+          </a:xfrm>
+          <a:prstGeom xmlns:a="http://schemas.openxmlformats.org/drawingml/2006/main" prst="rect">
+            <a:avLst/>
+          </a:prstGeom>
+          <a:solidFill xmlns:a="http://schemas.openxmlformats.org/drawingml/2006/main">
+            <a:srgbClr val="F7F7F7"/>
+          </a:solidFill>
+          <a:ln xmlns:a="http://schemas.openxmlformats.org/drawingml/2006/main" w="9525">
+            <a:solidFill>
+              <a:srgbClr val="B8BCC4"/>
+            </a:solidFill>
+            <a:prstDash val="solid"/>
+          </a:ln>
+        </p:spPr>
+      </p:sp>
+      <p:sp>
+        <p:nvSpPr>
+          <p:cNvPr id="21" name="">
+            <a:extLst xmlns:a="http://schemas.openxmlformats.org/drawingml/2006/main">
+              <a:ext uri="{FF2B5EF4-FFF2-40B4-BE49-F238E27FC236}">
+                <a16:creationId xmlns:a16="http://schemas.microsoft.com/office/drawing/2014/main" id="{FE85A83E-5A0B-4467-A260-18ADBB49648C}"/>
+              </a:ext>
+            </a:extLst>
+          </p:cNvPr>
+          <p:cNvSpPr>
+            <a:spLocks xmlns:a="http://schemas.openxmlformats.org/drawingml/2006/main" noGrp="1"/>
+          </p:cNvSpPr>
+          <p:nvPr/>
+        </p:nvSpPr>
+        <p:spPr>
+          <a:xfrm xmlns:a="http://schemas.openxmlformats.org/drawingml/2006/main">
+            <a:off x="1752600" y="2571750"/>
+            <a:ext cx="1657350" cy="247650"/>
+          </a:xfrm>
+          <a:prstGeom xmlns:a="http://schemas.openxmlformats.org/drawingml/2006/main" prst="rect">
+            <a:avLst/>
+          </a:prstGeom>
+          <a:noFill xmlns:a="http://schemas.openxmlformats.org/drawingml/2006/main"/>
+          <a:ln xmlns:a="http://schemas.openxmlformats.org/drawingml/2006/main" w="0">
+            <a:noFill/>
+            <a:prstDash val="solid"/>
+          </a:ln>
+        </p:spPr>
+        <p:txBody>
+          <a:bodyPr xmlns:a="http://schemas.openxmlformats.org/drawingml/2006/main"/>
+          <a:lstStyle xmlns:a="http://schemas.openxmlformats.org/drawingml/2006/main"/>
+          <a:p xmlns:a="http://schemas.openxmlformats.org/drawingml/2006/main">
+            <a:pPr>
+              <a:defRPr sz="1200" b="1">
+                <a:solidFill>
+                  <a:srgbClr val="000000"/>
+                </a:solidFill>
+              </a:defRPr>
+            </a:pPr>
+            <a:r>
+              <a:rPr sz="1200" b="1">
+                <a:solidFill>
+                  <a:srgbClr val="000000"/>
+                </a:solidFill>
+              </a:rPr>
+              <a:t>EMA-only</a:t>
+            </a:r>
+          </a:p>
+        </p:txBody>
+      </p:sp>
+      <p:sp>
+        <p:nvSpPr>
+          <p:cNvPr id="22" name="">
+            <a:extLst xmlns:a="http://schemas.openxmlformats.org/drawingml/2006/main">
+              <a:ext uri="{FF2B5EF4-FFF2-40B4-BE49-F238E27FC236}">
+                <a16:creationId xmlns:a16="http://schemas.microsoft.com/office/drawing/2014/main" id="{D7F71575-A584-4296-BC3C-0F804624B710}"/>
+              </a:ext>
+            </a:extLst>
+          </p:cNvPr>
+          <p:cNvSpPr>
+            <a:spLocks xmlns:a="http://schemas.openxmlformats.org/drawingml/2006/main" noGrp="1"/>
+          </p:cNvSpPr>
+          <p:nvPr/>
+        </p:nvSpPr>
+        <p:spPr>
+          <a:xfrm xmlns:a="http://schemas.openxmlformats.org/drawingml/2006/main">
+            <a:off x="3486150" y="2400300"/>
+            <a:ext cx="1276350" cy="590550"/>
+          </a:xfrm>
+          <a:prstGeom xmlns:a="http://schemas.openxmlformats.org/drawingml/2006/main" prst="rect">
+            <a:avLst/>
+          </a:prstGeom>
+          <a:solidFill xmlns:a="http://schemas.openxmlformats.org/drawingml/2006/main">
+            <a:srgbClr val="F7F7F7"/>
+          </a:solidFill>
+          <a:ln xmlns:a="http://schemas.openxmlformats.org/drawingml/2006/main" w="9525">
+            <a:solidFill>
+              <a:srgbClr val="B8BCC4"/>
+            </a:solidFill>
+            <a:prstDash val="solid"/>
+          </a:ln>
+        </p:spPr>
+      </p:sp>
+      <p:sp>
+        <p:nvSpPr>
+          <p:cNvPr id="23" name="">
+            <a:extLst xmlns:a="http://schemas.openxmlformats.org/drawingml/2006/main">
+              <a:ext uri="{FF2B5EF4-FFF2-40B4-BE49-F238E27FC236}">
+                <a16:creationId xmlns:a16="http://schemas.microsoft.com/office/drawing/2014/main" id="{58094F57-127E-4D89-831F-D8543352C339}"/>
+              </a:ext>
+            </a:extLst>
+          </p:cNvPr>
+          <p:cNvSpPr>
+            <a:spLocks xmlns:a="http://schemas.openxmlformats.org/drawingml/2006/main" noGrp="1"/>
+          </p:cNvSpPr>
+          <p:nvPr/>
+        </p:nvSpPr>
+        <p:spPr>
+          <a:xfrm xmlns:a="http://schemas.openxmlformats.org/drawingml/2006/main">
+            <a:off x="3562350" y="2571750"/>
+            <a:ext cx="1123950" cy="247650"/>
+          </a:xfrm>
+          <a:prstGeom xmlns:a="http://schemas.openxmlformats.org/drawingml/2006/main" prst="rect">
+            <a:avLst/>
+          </a:prstGeom>
+          <a:noFill xmlns:a="http://schemas.openxmlformats.org/drawingml/2006/main"/>
+          <a:ln xmlns:a="http://schemas.openxmlformats.org/drawingml/2006/main" w="0">
+            <a:noFill/>
+            <a:prstDash val="solid"/>
+          </a:ln>
+        </p:spPr>
+        <p:txBody>
+          <a:bodyPr xmlns:a="http://schemas.openxmlformats.org/drawingml/2006/main"/>
+          <a:lstStyle xmlns:a="http://schemas.openxmlformats.org/drawingml/2006/main"/>
+          <a:p xmlns:a="http://schemas.openxmlformats.org/drawingml/2006/main">
+            <a:pPr>
+              <a:defRPr sz="1200" b="0">
+                <a:solidFill>
+                  <a:srgbClr val="000000"/>
+                </a:solidFill>
+              </a:defRPr>
+            </a:pPr>
+            <a:r>
+              <a:rPr sz="1200" b="0">
+                <a:solidFill>
+                  <a:srgbClr val="000000"/>
+                </a:solidFill>
+              </a:rPr>
+              <a:t>106.0%</a:t>
+            </a:r>
+          </a:p>
+        </p:txBody>
+      </p:sp>
+      <p:sp>
+        <p:nvSpPr>
+          <p:cNvPr id="24" name="">
+            <a:extLst xmlns:a="http://schemas.openxmlformats.org/drawingml/2006/main">
+              <a:ext uri="{FF2B5EF4-FFF2-40B4-BE49-F238E27FC236}">
+                <a16:creationId xmlns:a16="http://schemas.microsoft.com/office/drawing/2014/main" id="{45A2A9B1-F388-499F-8CA3-1217FE75F0E8}"/>
+              </a:ext>
+            </a:extLst>
+          </p:cNvPr>
+          <p:cNvSpPr>
+            <a:spLocks xmlns:a="http://schemas.openxmlformats.org/drawingml/2006/main" noGrp="1"/>
+          </p:cNvSpPr>
+          <p:nvPr/>
+        </p:nvSpPr>
+        <p:spPr>
+          <a:xfrm xmlns:a="http://schemas.openxmlformats.org/drawingml/2006/main">
+            <a:off x="4762500" y="2400300"/>
+            <a:ext cx="1219200" cy="590550"/>
+          </a:xfrm>
+          <a:prstGeom xmlns:a="http://schemas.openxmlformats.org/drawingml/2006/main" prst="rect">
+            <a:avLst/>
+          </a:prstGeom>
+          <a:solidFill xmlns:a="http://schemas.openxmlformats.org/drawingml/2006/main">
+            <a:srgbClr val="F7F7F7"/>
+          </a:solidFill>
+          <a:ln xmlns:a="http://schemas.openxmlformats.org/drawingml/2006/main" w="9525">
+            <a:solidFill>
+              <a:srgbClr val="B8BCC4"/>
+            </a:solidFill>
+            <a:prstDash val="solid"/>
+          </a:ln>
+        </p:spPr>
+      </p:sp>
+      <p:sp>
+        <p:nvSpPr>
+          <p:cNvPr id="25" name="">
+            <a:extLst xmlns:a="http://schemas.openxmlformats.org/drawingml/2006/main">
+              <a:ext uri="{FF2B5EF4-FFF2-40B4-BE49-F238E27FC236}">
+                <a16:creationId xmlns:a16="http://schemas.microsoft.com/office/drawing/2014/main" id="{3ABD1193-B71F-4EC4-B65F-9FF184BA2433}"/>
+              </a:ext>
+            </a:extLst>
+          </p:cNvPr>
+          <p:cNvSpPr>
+            <a:spLocks xmlns:a="http://schemas.openxmlformats.org/drawingml/2006/main" noGrp="1"/>
+          </p:cNvSpPr>
+          <p:nvPr/>
+        </p:nvSpPr>
+        <p:spPr>
+          <a:xfrm xmlns:a="http://schemas.openxmlformats.org/drawingml/2006/main">
+            <a:off x="4838700" y="2571750"/>
+            <a:ext cx="1066800" cy="247650"/>
+          </a:xfrm>
+          <a:prstGeom xmlns:a="http://schemas.openxmlformats.org/drawingml/2006/main" prst="rect">
+            <a:avLst/>
+          </a:prstGeom>
+          <a:noFill xmlns:a="http://schemas.openxmlformats.org/drawingml/2006/main"/>
+          <a:ln xmlns:a="http://schemas.openxmlformats.org/drawingml/2006/main" w="0">
+            <a:noFill/>
+            <a:prstDash val="solid"/>
+          </a:ln>
+        </p:spPr>
+        <p:txBody>
+          <a:bodyPr xmlns:a="http://schemas.openxmlformats.org/drawingml/2006/main"/>
+          <a:lstStyle xmlns:a="http://schemas.openxmlformats.org/drawingml/2006/main"/>
+          <a:p xmlns:a="http://schemas.openxmlformats.org/drawingml/2006/main">
+            <a:pPr>
+              <a:defRPr sz="1200" b="0">
+                <a:solidFill>
+                  <a:srgbClr val="B42318"/>
+                </a:solidFill>
+              </a:defRPr>
+            </a:pPr>
+            <a:r>
+              <a:rPr sz="1200" b="0">
+                <a:solidFill>
+                  <a:srgbClr val="B42318"/>
+                </a:solidFill>
+              </a:rPr>
+              <a:t>-121.3 pp</a:t>
+            </a:r>
+          </a:p>
+        </p:txBody>
+      </p:sp>
+      <p:sp>
+        <p:nvSpPr>
+          <p:cNvPr id="26" name="">
+            <a:extLst xmlns:a="http://schemas.openxmlformats.org/drawingml/2006/main">
+              <a:ext uri="{FF2B5EF4-FFF2-40B4-BE49-F238E27FC236}">
+                <a16:creationId xmlns:a16="http://schemas.microsoft.com/office/drawing/2014/main" id="{3F0BC112-9B4F-40DD-9670-9EF1663A2407}"/>
+              </a:ext>
+            </a:extLst>
+          </p:cNvPr>
+          <p:cNvSpPr>
+            <a:spLocks xmlns:a="http://schemas.openxmlformats.org/drawingml/2006/main" noGrp="1"/>
+          </p:cNvSpPr>
+          <p:nvPr/>
+        </p:nvSpPr>
+        <p:spPr>
+          <a:xfrm xmlns:a="http://schemas.openxmlformats.org/drawingml/2006/main">
+            <a:off x="5981700" y="2400300"/>
+            <a:ext cx="1219200" cy="590550"/>
+          </a:xfrm>
+          <a:prstGeom xmlns:a="http://schemas.openxmlformats.org/drawingml/2006/main" prst="rect">
+            <a:avLst/>
+          </a:prstGeom>
+          <a:solidFill xmlns:a="http://schemas.openxmlformats.org/drawingml/2006/main">
+            <a:srgbClr val="F7F7F7"/>
+          </a:solidFill>
+          <a:ln xmlns:a="http://schemas.openxmlformats.org/drawingml/2006/main" w="9525">
+            <a:solidFill>
+              <a:srgbClr val="B8BCC4"/>
+            </a:solidFill>
+            <a:prstDash val="solid"/>
+          </a:ln>
+        </p:spPr>
+      </p:sp>
+      <p:sp>
+        <p:nvSpPr>
+          <p:cNvPr id="27" name="">
+            <a:extLst xmlns:a="http://schemas.openxmlformats.org/drawingml/2006/main">
+              <a:ext uri="{FF2B5EF4-FFF2-40B4-BE49-F238E27FC236}">
+                <a16:creationId xmlns:a16="http://schemas.microsoft.com/office/drawing/2014/main" id="{82776F0B-1315-4F6C-8E08-314C842061EB}"/>
+              </a:ext>
+            </a:extLst>
+          </p:cNvPr>
+          <p:cNvSpPr>
+            <a:spLocks xmlns:a="http://schemas.openxmlformats.org/drawingml/2006/main" noGrp="1"/>
+          </p:cNvSpPr>
+          <p:nvPr/>
+        </p:nvSpPr>
+        <p:spPr>
+          <a:xfrm xmlns:a="http://schemas.openxmlformats.org/drawingml/2006/main">
+            <a:off x="6057900" y="2571750"/>
+            <a:ext cx="1066800" cy="247650"/>
+          </a:xfrm>
+          <a:prstGeom xmlns:a="http://schemas.openxmlformats.org/drawingml/2006/main" prst="rect">
+            <a:avLst/>
+          </a:prstGeom>
+          <a:noFill xmlns:a="http://schemas.openxmlformats.org/drawingml/2006/main"/>
+          <a:ln xmlns:a="http://schemas.openxmlformats.org/drawingml/2006/main" w="0">
+            <a:noFill/>
+            <a:prstDash val="solid"/>
+          </a:ln>
+        </p:spPr>
+        <p:txBody>
+          <a:bodyPr xmlns:a="http://schemas.openxmlformats.org/drawingml/2006/main"/>
+          <a:lstStyle xmlns:a="http://schemas.openxmlformats.org/drawingml/2006/main"/>
+          <a:p xmlns:a="http://schemas.openxmlformats.org/drawingml/2006/main">
+            <a:pPr>
+              <a:defRPr sz="1200" b="0">
+                <a:solidFill>
+                  <a:srgbClr val="000000"/>
+                </a:solidFill>
+              </a:defRPr>
+            </a:pPr>
+            <a:r>
+              <a:rPr sz="1200" b="0">
+                <a:solidFill>
+                  <a:srgbClr val="000000"/>
+                </a:solidFill>
+              </a:rPr>
+              <a:t>58.5%</a:t>
+            </a:r>
+          </a:p>
+        </p:txBody>
+      </p:sp>
+      <p:sp>
+        <p:nvSpPr>
+          <p:cNvPr id="28" name="">
+            <a:extLst xmlns:a="http://schemas.openxmlformats.org/drawingml/2006/main">
+              <a:ext uri="{FF2B5EF4-FFF2-40B4-BE49-F238E27FC236}">
+                <a16:creationId xmlns:a16="http://schemas.microsoft.com/office/drawing/2014/main" id="{98FE52DA-05D5-4885-9D62-A68A33A2D785}"/>
+              </a:ext>
+            </a:extLst>
+          </p:cNvPr>
+          <p:cNvSpPr>
+            <a:spLocks xmlns:a="http://schemas.openxmlformats.org/drawingml/2006/main" noGrp="1"/>
+          </p:cNvSpPr>
+          <p:nvPr/>
+        </p:nvSpPr>
+        <p:spPr>
+          <a:xfrm xmlns:a="http://schemas.openxmlformats.org/drawingml/2006/main">
+            <a:off x="7200900" y="2400300"/>
+            <a:ext cx="1219200" cy="590550"/>
+          </a:xfrm>
+          <a:prstGeom xmlns:a="http://schemas.openxmlformats.org/drawingml/2006/main" prst="rect">
+            <a:avLst/>
+          </a:prstGeom>
+          <a:solidFill xmlns:a="http://schemas.openxmlformats.org/drawingml/2006/main">
+            <a:srgbClr val="F7F7F7"/>
+          </a:solidFill>
+          <a:ln xmlns:a="http://schemas.openxmlformats.org/drawingml/2006/main" w="9525">
+            <a:solidFill>
+              <a:srgbClr val="B8BCC4"/>
+            </a:solidFill>
+            <a:prstDash val="solid"/>
+          </a:ln>
+        </p:spPr>
+      </p:sp>
+      <p:sp>
+        <p:nvSpPr>
+          <p:cNvPr id="29" name="">
+            <a:extLst xmlns:a="http://schemas.openxmlformats.org/drawingml/2006/main">
+              <a:ext uri="{FF2B5EF4-FFF2-40B4-BE49-F238E27FC236}">
+                <a16:creationId xmlns:a16="http://schemas.microsoft.com/office/drawing/2014/main" id="{B7BF58C9-E1BF-46FC-8DAA-B32761B9D857}"/>
+              </a:ext>
+            </a:extLst>
+          </p:cNvPr>
+          <p:cNvSpPr>
+            <a:spLocks xmlns:a="http://schemas.openxmlformats.org/drawingml/2006/main" noGrp="1"/>
+          </p:cNvSpPr>
+          <p:nvPr/>
+        </p:nvSpPr>
+        <p:spPr>
+          <a:xfrm xmlns:a="http://schemas.openxmlformats.org/drawingml/2006/main">
+            <a:off x="7277100" y="2571750"/>
+            <a:ext cx="1066800" cy="247650"/>
+          </a:xfrm>
+          <a:prstGeom xmlns:a="http://schemas.openxmlformats.org/drawingml/2006/main" prst="rect">
+            <a:avLst/>
+          </a:prstGeom>
+          <a:noFill xmlns:a="http://schemas.openxmlformats.org/drawingml/2006/main"/>
+          <a:ln xmlns:a="http://schemas.openxmlformats.org/drawingml/2006/main" w="0">
+            <a:noFill/>
+            <a:prstDash val="solid"/>
+          </a:ln>
+        </p:spPr>
+        <p:txBody>
+          <a:bodyPr xmlns:a="http://schemas.openxmlformats.org/drawingml/2006/main"/>
+          <a:lstStyle xmlns:a="http://schemas.openxmlformats.org/drawingml/2006/main"/>
+          <a:p xmlns:a="http://schemas.openxmlformats.org/drawingml/2006/main">
+            <a:pPr>
+              <a:defRPr sz="1200" b="0">
+                <a:solidFill>
+                  <a:srgbClr val="000000"/>
+                </a:solidFill>
+              </a:defRPr>
+            </a:pPr>
+            <a:r>
+              <a:rPr sz="1200" b="0">
+                <a:solidFill>
+                  <a:srgbClr val="000000"/>
+                </a:solidFill>
+              </a:rPr>
+              <a:t>-18.0%</a:t>
+            </a:r>
+          </a:p>
+        </p:txBody>
+      </p:sp>
+      <p:sp>
+        <p:nvSpPr>
+          <p:cNvPr id="30" name="">
+            <a:extLst xmlns:a="http://schemas.openxmlformats.org/drawingml/2006/main">
+              <a:ext uri="{FF2B5EF4-FFF2-40B4-BE49-F238E27FC236}">
+                <a16:creationId xmlns:a16="http://schemas.microsoft.com/office/drawing/2014/main" id="{EC1D0BC6-AF85-4313-A02C-B0EEF7A42269}"/>
+              </a:ext>
+            </a:extLst>
+          </p:cNvPr>
+          <p:cNvSpPr>
+            <a:spLocks xmlns:a="http://schemas.openxmlformats.org/drawingml/2006/main" noGrp="1"/>
+          </p:cNvSpPr>
+          <p:nvPr/>
+        </p:nvSpPr>
+        <p:spPr>
+          <a:xfrm xmlns:a="http://schemas.openxmlformats.org/drawingml/2006/main">
+            <a:off x="8420100" y="2400300"/>
+            <a:ext cx="1047750" cy="590550"/>
+          </a:xfrm>
+          <a:prstGeom xmlns:a="http://schemas.openxmlformats.org/drawingml/2006/main" prst="rect">
+            <a:avLst/>
+          </a:prstGeom>
+          <a:solidFill xmlns:a="http://schemas.openxmlformats.org/drawingml/2006/main">
+            <a:srgbClr val="F7F7F7"/>
+          </a:solidFill>
+          <a:ln xmlns:a="http://schemas.openxmlformats.org/drawingml/2006/main" w="9525">
+            <a:solidFill>
+              <a:srgbClr val="B8BCC4"/>
+            </a:solidFill>
+            <a:prstDash val="solid"/>
+          </a:ln>
+        </p:spPr>
+      </p:sp>
+      <p:sp>
+        <p:nvSpPr>
+          <p:cNvPr id="31" name="">
+            <a:extLst xmlns:a="http://schemas.openxmlformats.org/drawingml/2006/main">
+              <a:ext uri="{FF2B5EF4-FFF2-40B4-BE49-F238E27FC236}">
+                <a16:creationId xmlns:a16="http://schemas.microsoft.com/office/drawing/2014/main" id="{8A340C6F-50D8-4B6B-8559-24BD1B5368D3}"/>
+              </a:ext>
+            </a:extLst>
+          </p:cNvPr>
+          <p:cNvSpPr>
+            <a:spLocks xmlns:a="http://schemas.openxmlformats.org/drawingml/2006/main" noGrp="1"/>
+          </p:cNvSpPr>
+          <p:nvPr/>
+        </p:nvSpPr>
+        <p:spPr>
+          <a:xfrm xmlns:a="http://schemas.openxmlformats.org/drawingml/2006/main">
+            <a:off x="8496300" y="2571750"/>
+            <a:ext cx="895350" cy="247650"/>
+          </a:xfrm>
+          <a:prstGeom xmlns:a="http://schemas.openxmlformats.org/drawingml/2006/main" prst="rect">
+            <a:avLst/>
+          </a:prstGeom>
+          <a:noFill xmlns:a="http://schemas.openxmlformats.org/drawingml/2006/main"/>
+          <a:ln xmlns:a="http://schemas.openxmlformats.org/drawingml/2006/main" w="0">
+            <a:noFill/>
+            <a:prstDash val="solid"/>
+          </a:ln>
+        </p:spPr>
+        <p:txBody>
+          <a:bodyPr xmlns:a="http://schemas.openxmlformats.org/drawingml/2006/main"/>
+          <a:lstStyle xmlns:a="http://schemas.openxmlformats.org/drawingml/2006/main"/>
+          <a:p xmlns:a="http://schemas.openxmlformats.org/drawingml/2006/main">
+            <a:pPr>
+              <a:defRPr sz="1200" b="0">
+                <a:solidFill>
+                  <a:srgbClr val="000000"/>
+                </a:solidFill>
+              </a:defRPr>
+            </a:pPr>
+            <a:r>
+              <a:rPr sz="1200" b="0">
+                <a:solidFill>
+                  <a:srgbClr val="000000"/>
+                </a:solidFill>
+              </a:rPr>
+              <a:t>36</a:t>
+            </a:r>
+          </a:p>
+        </p:txBody>
+      </p:sp>
+      <p:sp>
+        <p:nvSpPr>
+          <p:cNvPr id="32" name="">
+            <a:extLst xmlns:a="http://schemas.openxmlformats.org/drawingml/2006/main">
+              <a:ext uri="{FF2B5EF4-FFF2-40B4-BE49-F238E27FC236}">
+                <a16:creationId xmlns:a16="http://schemas.microsoft.com/office/drawing/2014/main" id="{95C1B867-6AC9-421C-8FDF-895D1B208EA9}"/>
+              </a:ext>
+            </a:extLst>
+          </p:cNvPr>
+          <p:cNvSpPr>
+            <a:spLocks xmlns:a="http://schemas.openxmlformats.org/drawingml/2006/main" noGrp="1"/>
+          </p:cNvSpPr>
+          <p:nvPr/>
+        </p:nvSpPr>
+        <p:spPr>
+          <a:xfrm xmlns:a="http://schemas.openxmlformats.org/drawingml/2006/main">
+            <a:off x="838200" y="2990850"/>
+            <a:ext cx="838200" cy="590550"/>
+          </a:xfrm>
+          <a:prstGeom xmlns:a="http://schemas.openxmlformats.org/drawingml/2006/main" prst="rect">
+            <a:avLst/>
+          </a:prstGeom>
+          <a:solidFill xmlns:a="http://schemas.openxmlformats.org/drawingml/2006/main">
+            <a:srgbClr val="FFFFFF"/>
+          </a:solidFill>
+          <a:ln xmlns:a="http://schemas.openxmlformats.org/drawingml/2006/main" w="9525">
+            <a:solidFill>
+              <a:srgbClr val="B8BCC4"/>
+            </a:solidFill>
+            <a:prstDash val="solid"/>
+          </a:ln>
+        </p:spPr>
+      </p:sp>
+      <p:sp>
+        <p:nvSpPr>
+          <p:cNvPr id="33" name="">
+            <a:extLst xmlns:a="http://schemas.openxmlformats.org/drawingml/2006/main">
+              <a:ext uri="{FF2B5EF4-FFF2-40B4-BE49-F238E27FC236}">
+                <a16:creationId xmlns:a16="http://schemas.microsoft.com/office/drawing/2014/main" id="{21E026CB-312C-40B6-9B33-0F18F46D61E4}"/>
+              </a:ext>
+            </a:extLst>
+          </p:cNvPr>
+          <p:cNvSpPr>
+            <a:spLocks xmlns:a="http://schemas.openxmlformats.org/drawingml/2006/main" noGrp="1"/>
+          </p:cNvSpPr>
+          <p:nvPr/>
+        </p:nvSpPr>
+        <p:spPr>
+          <a:xfrm xmlns:a="http://schemas.openxmlformats.org/drawingml/2006/main">
+            <a:off x="914400" y="3162300"/>
+            <a:ext cx="685800" cy="247650"/>
+          </a:xfrm>
+          <a:prstGeom xmlns:a="http://schemas.openxmlformats.org/drawingml/2006/main" prst="rect">
+            <a:avLst/>
+          </a:prstGeom>
+          <a:noFill xmlns:a="http://schemas.openxmlformats.org/drawingml/2006/main"/>
+          <a:ln xmlns:a="http://schemas.openxmlformats.org/drawingml/2006/main" w="0">
+            <a:noFill/>
+            <a:prstDash val="solid"/>
+          </a:ln>
+        </p:spPr>
+        <p:txBody>
+          <a:bodyPr xmlns:a="http://schemas.openxmlformats.org/drawingml/2006/main"/>
+          <a:lstStyle xmlns:a="http://schemas.openxmlformats.org/drawingml/2006/main"/>
+          <a:p xmlns:a="http://schemas.openxmlformats.org/drawingml/2006/main">
+            <a:pPr>
+              <a:defRPr sz="1200" b="0">
+                <a:solidFill>
+                  <a:srgbClr val="000000"/>
+                </a:solidFill>
+              </a:defRPr>
+            </a:pPr>
+            <a:r>
+              <a:rPr sz="1200" b="0">
+                <a:solidFill>
+                  <a:srgbClr val="000000"/>
+                </a:solidFill>
+              </a:rPr>
+              <a:t>2020</a:t>
+            </a:r>
+          </a:p>
+        </p:txBody>
+      </p:sp>
+      <p:sp>
+        <p:nvSpPr>
+          <p:cNvPr id="34" name="">
+            <a:extLst xmlns:a="http://schemas.openxmlformats.org/drawingml/2006/main">
+              <a:ext uri="{FF2B5EF4-FFF2-40B4-BE49-F238E27FC236}">
+                <a16:creationId xmlns:a16="http://schemas.microsoft.com/office/drawing/2014/main" id="{57393017-AA61-4E48-BDBA-E5E97CBB3D6E}"/>
+              </a:ext>
+            </a:extLst>
+          </p:cNvPr>
+          <p:cNvSpPr>
+            <a:spLocks xmlns:a="http://schemas.openxmlformats.org/drawingml/2006/main" noGrp="1"/>
+          </p:cNvSpPr>
+          <p:nvPr/>
+        </p:nvSpPr>
+        <p:spPr>
+          <a:xfrm xmlns:a="http://schemas.openxmlformats.org/drawingml/2006/main">
+            <a:off x="1676400" y="2990850"/>
+            <a:ext cx="1809750" cy="590550"/>
+          </a:xfrm>
+          <a:prstGeom xmlns:a="http://schemas.openxmlformats.org/drawingml/2006/main" prst="rect">
+            <a:avLst/>
+          </a:prstGeom>
+          <a:solidFill xmlns:a="http://schemas.openxmlformats.org/drawingml/2006/main">
+            <a:srgbClr val="FFFFFF"/>
+          </a:solidFill>
+          <a:ln xmlns:a="http://schemas.openxmlformats.org/drawingml/2006/main" w="9525">
+            <a:solidFill>
+              <a:srgbClr val="B8BCC4"/>
+            </a:solidFill>
+            <a:prstDash val="solid"/>
+          </a:ln>
+        </p:spPr>
+      </p:sp>
+      <p:sp>
+        <p:nvSpPr>
+          <p:cNvPr id="35" name="">
+            <a:extLst xmlns:a="http://schemas.openxmlformats.org/drawingml/2006/main">
+              <a:ext uri="{FF2B5EF4-FFF2-40B4-BE49-F238E27FC236}">
+                <a16:creationId xmlns:a16="http://schemas.microsoft.com/office/drawing/2014/main" id="{E5204BD0-6172-4B09-AF2F-D0077D6C23BD}"/>
+              </a:ext>
+            </a:extLst>
+          </p:cNvPr>
+          <p:cNvSpPr>
+            <a:spLocks xmlns:a="http://schemas.openxmlformats.org/drawingml/2006/main" noGrp="1"/>
+          </p:cNvSpPr>
+          <p:nvPr/>
+        </p:nvSpPr>
+        <p:spPr>
+          <a:xfrm xmlns:a="http://schemas.openxmlformats.org/drawingml/2006/main">
+            <a:off x="1752600" y="3162300"/>
+            <a:ext cx="1657350" cy="247650"/>
+          </a:xfrm>
+          <a:prstGeom xmlns:a="http://schemas.openxmlformats.org/drawingml/2006/main" prst="rect">
+            <a:avLst/>
+          </a:prstGeom>
+          <a:noFill xmlns:a="http://schemas.openxmlformats.org/drawingml/2006/main"/>
+          <a:ln xmlns:a="http://schemas.openxmlformats.org/drawingml/2006/main" w="0">
+            <a:noFill/>
+            <a:prstDash val="solid"/>
+          </a:ln>
+        </p:spPr>
+        <p:txBody>
+          <a:bodyPr xmlns:a="http://schemas.openxmlformats.org/drawingml/2006/main"/>
+          <a:lstStyle xmlns:a="http://schemas.openxmlformats.org/drawingml/2006/main"/>
+          <a:p xmlns:a="http://schemas.openxmlformats.org/drawingml/2006/main">
+            <a:pPr>
+              <a:defRPr sz="1200" b="1">
+                <a:solidFill>
+                  <a:srgbClr val="000000"/>
+                </a:solidFill>
+              </a:defRPr>
+            </a:pPr>
+            <a:r>
+              <a:rPr sz="1200" b="1">
+                <a:solidFill>
+                  <a:srgbClr val="000000"/>
+                </a:solidFill>
+              </a:rPr>
+              <a:t>Trend/breakout</a:t>
+            </a:r>
+          </a:p>
+        </p:txBody>
+      </p:sp>
+      <p:sp>
+        <p:nvSpPr>
+          <p:cNvPr id="36" name="">
+            <a:extLst xmlns:a="http://schemas.openxmlformats.org/drawingml/2006/main">
+              <a:ext uri="{FF2B5EF4-FFF2-40B4-BE49-F238E27FC236}">
+                <a16:creationId xmlns:a16="http://schemas.microsoft.com/office/drawing/2014/main" id="{F65CE0BE-FD7C-471D-B521-C035657A8C79}"/>
+              </a:ext>
+            </a:extLst>
+          </p:cNvPr>
+          <p:cNvSpPr>
+            <a:spLocks xmlns:a="http://schemas.openxmlformats.org/drawingml/2006/main" noGrp="1"/>
+          </p:cNvSpPr>
+          <p:nvPr/>
+        </p:nvSpPr>
+        <p:spPr>
+          <a:xfrm xmlns:a="http://schemas.openxmlformats.org/drawingml/2006/main">
+            <a:off x="3486150" y="2990850"/>
+            <a:ext cx="1276350" cy="590550"/>
+          </a:xfrm>
+          <a:prstGeom xmlns:a="http://schemas.openxmlformats.org/drawingml/2006/main" prst="rect">
+            <a:avLst/>
+          </a:prstGeom>
+          <a:solidFill xmlns:a="http://schemas.openxmlformats.org/drawingml/2006/main">
+            <a:srgbClr val="FFFFFF"/>
+          </a:solidFill>
+          <a:ln xmlns:a="http://schemas.openxmlformats.org/drawingml/2006/main" w="9525">
+            <a:solidFill>
+              <a:srgbClr val="B8BCC4"/>
+            </a:solidFill>
+            <a:prstDash val="solid"/>
+          </a:ln>
+        </p:spPr>
+      </p:sp>
+      <p:sp>
+        <p:nvSpPr>
+          <p:cNvPr id="37" name="">
+            <a:extLst xmlns:a="http://schemas.openxmlformats.org/drawingml/2006/main">
+              <a:ext uri="{FF2B5EF4-FFF2-40B4-BE49-F238E27FC236}">
+                <a16:creationId xmlns:a16="http://schemas.microsoft.com/office/drawing/2014/main" id="{8F6A6C18-DBD4-4A52-9543-20DF5FC5B0C4}"/>
+              </a:ext>
+            </a:extLst>
+          </p:cNvPr>
+          <p:cNvSpPr>
+            <a:spLocks xmlns:a="http://schemas.openxmlformats.org/drawingml/2006/main" noGrp="1"/>
+          </p:cNvSpPr>
+          <p:nvPr/>
+        </p:nvSpPr>
+        <p:spPr>
+          <a:xfrm xmlns:a="http://schemas.openxmlformats.org/drawingml/2006/main">
+            <a:off x="3562350" y="3162300"/>
+            <a:ext cx="1123950" cy="247650"/>
+          </a:xfrm>
+          <a:prstGeom xmlns:a="http://schemas.openxmlformats.org/drawingml/2006/main" prst="rect">
+            <a:avLst/>
+          </a:prstGeom>
+          <a:noFill xmlns:a="http://schemas.openxmlformats.org/drawingml/2006/main"/>
+          <a:ln xmlns:a="http://schemas.openxmlformats.org/drawingml/2006/main" w="0">
+            <a:noFill/>
+            <a:prstDash val="solid"/>
+          </a:ln>
+        </p:spPr>
+        <p:txBody>
+          <a:bodyPr xmlns:a="http://schemas.openxmlformats.org/drawingml/2006/main"/>
+          <a:lstStyle xmlns:a="http://schemas.openxmlformats.org/drawingml/2006/main"/>
+          <a:p xmlns:a="http://schemas.openxmlformats.org/drawingml/2006/main">
+            <a:pPr>
+              <a:defRPr sz="1200" b="0">
+                <a:solidFill>
+                  <a:srgbClr val="000000"/>
+                </a:solidFill>
+              </a:defRPr>
+            </a:pPr>
+            <a:r>
+              <a:rPr sz="1200" b="0">
+                <a:solidFill>
+                  <a:srgbClr val="000000"/>
+                </a:solidFill>
+              </a:rPr>
+              <a:t>53.3%</a:t>
+            </a:r>
+          </a:p>
+        </p:txBody>
+      </p:sp>
+      <p:sp>
+        <p:nvSpPr>
+          <p:cNvPr id="38" name="">
+            <a:extLst xmlns:a="http://schemas.openxmlformats.org/drawingml/2006/main">
+              <a:ext uri="{FF2B5EF4-FFF2-40B4-BE49-F238E27FC236}">
+                <a16:creationId xmlns:a16="http://schemas.microsoft.com/office/drawing/2014/main" id="{046A94DE-B2E4-4153-88FB-909E6B33874F}"/>
+              </a:ext>
+            </a:extLst>
+          </p:cNvPr>
+          <p:cNvSpPr>
+            <a:spLocks xmlns:a="http://schemas.openxmlformats.org/drawingml/2006/main" noGrp="1"/>
+          </p:cNvSpPr>
+          <p:nvPr/>
+        </p:nvSpPr>
+        <p:spPr>
+          <a:xfrm xmlns:a="http://schemas.openxmlformats.org/drawingml/2006/main">
+            <a:off x="4762500" y="2990850"/>
+            <a:ext cx="1219200" cy="590550"/>
+          </a:xfrm>
+          <a:prstGeom xmlns:a="http://schemas.openxmlformats.org/drawingml/2006/main" prst="rect">
+            <a:avLst/>
+          </a:prstGeom>
+          <a:solidFill xmlns:a="http://schemas.openxmlformats.org/drawingml/2006/main">
+            <a:srgbClr val="FFFFFF"/>
+          </a:solidFill>
+          <a:ln xmlns:a="http://schemas.openxmlformats.org/drawingml/2006/main" w="9525">
+            <a:solidFill>
+              <a:srgbClr val="B8BCC4"/>
+            </a:solidFill>
+            <a:prstDash val="solid"/>
+          </a:ln>
+        </p:spPr>
+      </p:sp>
+      <p:sp>
+        <p:nvSpPr>
+          <p:cNvPr id="39" name="">
+            <a:extLst xmlns:a="http://schemas.openxmlformats.org/drawingml/2006/main">
+              <a:ext uri="{FF2B5EF4-FFF2-40B4-BE49-F238E27FC236}">
+                <a16:creationId xmlns:a16="http://schemas.microsoft.com/office/drawing/2014/main" id="{6E9EB8AA-B741-493C-B2A6-5B4AB84633BA}"/>
+              </a:ext>
+            </a:extLst>
+          </p:cNvPr>
+          <p:cNvSpPr>
+            <a:spLocks xmlns:a="http://schemas.openxmlformats.org/drawingml/2006/main" noGrp="1"/>
+          </p:cNvSpPr>
+          <p:nvPr/>
+        </p:nvSpPr>
+        <p:spPr>
+          <a:xfrm xmlns:a="http://schemas.openxmlformats.org/drawingml/2006/main">
+            <a:off x="4838700" y="3162300"/>
+            <a:ext cx="1066800" cy="247650"/>
+          </a:xfrm>
+          <a:prstGeom xmlns:a="http://schemas.openxmlformats.org/drawingml/2006/main" prst="rect">
+            <a:avLst/>
+          </a:prstGeom>
+          <a:noFill xmlns:a="http://schemas.openxmlformats.org/drawingml/2006/main"/>
+          <a:ln xmlns:a="http://schemas.openxmlformats.org/drawingml/2006/main" w="0">
+            <a:noFill/>
+            <a:prstDash val="solid"/>
+          </a:ln>
+        </p:spPr>
+        <p:txBody>
+          <a:bodyPr xmlns:a="http://schemas.openxmlformats.org/drawingml/2006/main"/>
+          <a:lstStyle xmlns:a="http://schemas.openxmlformats.org/drawingml/2006/main"/>
+          <a:p xmlns:a="http://schemas.openxmlformats.org/drawingml/2006/main">
+            <a:pPr>
+              <a:defRPr sz="1200" b="0">
+                <a:solidFill>
+                  <a:srgbClr val="B42318"/>
+                </a:solidFill>
+              </a:defRPr>
+            </a:pPr>
+            <a:r>
+              <a:rPr sz="1200" b="0">
+                <a:solidFill>
+                  <a:srgbClr val="B42318"/>
+                </a:solidFill>
+              </a:rPr>
+              <a:t>-173.9 pp</a:t>
+            </a:r>
+          </a:p>
+        </p:txBody>
+      </p:sp>
+      <p:sp>
+        <p:nvSpPr>
+          <p:cNvPr id="40" name="">
+            <a:extLst xmlns:a="http://schemas.openxmlformats.org/drawingml/2006/main">
+              <a:ext uri="{FF2B5EF4-FFF2-40B4-BE49-F238E27FC236}">
+                <a16:creationId xmlns:a16="http://schemas.microsoft.com/office/drawing/2014/main" id="{9F5FCC58-E1A1-4C05-8469-2A79E104530A}"/>
+              </a:ext>
+            </a:extLst>
+          </p:cNvPr>
+          <p:cNvSpPr>
+            <a:spLocks xmlns:a="http://schemas.openxmlformats.org/drawingml/2006/main" noGrp="1"/>
+          </p:cNvSpPr>
+          <p:nvPr/>
+        </p:nvSpPr>
+        <p:spPr>
+          <a:xfrm xmlns:a="http://schemas.openxmlformats.org/drawingml/2006/main">
+            <a:off x="5981700" y="2990850"/>
+            <a:ext cx="1219200" cy="590550"/>
+          </a:xfrm>
+          <a:prstGeom xmlns:a="http://schemas.openxmlformats.org/drawingml/2006/main" prst="rect">
+            <a:avLst/>
+          </a:prstGeom>
+          <a:solidFill xmlns:a="http://schemas.openxmlformats.org/drawingml/2006/main">
+            <a:srgbClr val="FFFFFF"/>
+          </a:solidFill>
+          <a:ln xmlns:a="http://schemas.openxmlformats.org/drawingml/2006/main" w="9525">
+            <a:solidFill>
+              <a:srgbClr val="B8BCC4"/>
+            </a:solidFill>
+            <a:prstDash val="solid"/>
+          </a:ln>
+        </p:spPr>
+      </p:sp>
+      <p:sp>
+        <p:nvSpPr>
+          <p:cNvPr id="41" name="">
+            <a:extLst xmlns:a="http://schemas.openxmlformats.org/drawingml/2006/main">
+              <a:ext uri="{FF2B5EF4-FFF2-40B4-BE49-F238E27FC236}">
+                <a16:creationId xmlns:a16="http://schemas.microsoft.com/office/drawing/2014/main" id="{C42FDE7C-C78B-407F-B81F-68678C97CA11}"/>
+              </a:ext>
+            </a:extLst>
+          </p:cNvPr>
+          <p:cNvSpPr>
+            <a:spLocks xmlns:a="http://schemas.openxmlformats.org/drawingml/2006/main" noGrp="1"/>
+          </p:cNvSpPr>
+          <p:nvPr/>
+        </p:nvSpPr>
+        <p:spPr>
+          <a:xfrm xmlns:a="http://schemas.openxmlformats.org/drawingml/2006/main">
+            <a:off x="6057900" y="3162300"/>
+            <a:ext cx="1066800" cy="247650"/>
+          </a:xfrm>
+          <a:prstGeom xmlns:a="http://schemas.openxmlformats.org/drawingml/2006/main" prst="rect">
+            <a:avLst/>
+          </a:prstGeom>
+          <a:noFill xmlns:a="http://schemas.openxmlformats.org/drawingml/2006/main"/>
+          <a:ln xmlns:a="http://schemas.openxmlformats.org/drawingml/2006/main" w="0">
+            <a:noFill/>
+            <a:prstDash val="solid"/>
+          </a:ln>
+        </p:spPr>
+        <p:txBody>
+          <a:bodyPr xmlns:a="http://schemas.openxmlformats.org/drawingml/2006/main"/>
+          <a:lstStyle xmlns:a="http://schemas.openxmlformats.org/drawingml/2006/main"/>
+          <a:p xmlns:a="http://schemas.openxmlformats.org/drawingml/2006/main">
+            <a:pPr>
+              <a:defRPr sz="1200" b="0">
+                <a:solidFill>
+                  <a:srgbClr val="000000"/>
+                </a:solidFill>
+              </a:defRPr>
+            </a:pPr>
+            <a:r>
+              <a:rPr sz="1200" b="0">
+                <a:solidFill>
+                  <a:srgbClr val="000000"/>
+                </a:solidFill>
+              </a:rPr>
+              <a:t>36.8%</a:t>
+            </a:r>
+          </a:p>
+        </p:txBody>
+      </p:sp>
+      <p:sp>
+        <p:nvSpPr>
+          <p:cNvPr id="42" name="">
+            <a:extLst xmlns:a="http://schemas.openxmlformats.org/drawingml/2006/main">
+              <a:ext uri="{FF2B5EF4-FFF2-40B4-BE49-F238E27FC236}">
+                <a16:creationId xmlns:a16="http://schemas.microsoft.com/office/drawing/2014/main" id="{2FB03A9D-07C5-4C7B-AE88-920810BCF468}"/>
+              </a:ext>
+            </a:extLst>
+          </p:cNvPr>
+          <p:cNvSpPr>
+            <a:spLocks xmlns:a="http://schemas.openxmlformats.org/drawingml/2006/main" noGrp="1"/>
+          </p:cNvSpPr>
+          <p:nvPr/>
+        </p:nvSpPr>
+        <p:spPr>
+          <a:xfrm xmlns:a="http://schemas.openxmlformats.org/drawingml/2006/main">
+            <a:off x="7200900" y="2990850"/>
+            <a:ext cx="1219200" cy="590550"/>
+          </a:xfrm>
+          <a:prstGeom xmlns:a="http://schemas.openxmlformats.org/drawingml/2006/main" prst="rect">
+            <a:avLst/>
+          </a:prstGeom>
+          <a:solidFill xmlns:a="http://schemas.openxmlformats.org/drawingml/2006/main">
+            <a:srgbClr val="FFFFFF"/>
+          </a:solidFill>
+          <a:ln xmlns:a="http://schemas.openxmlformats.org/drawingml/2006/main" w="9525">
+            <a:solidFill>
+              <a:srgbClr val="B8BCC4"/>
+            </a:solidFill>
+            <a:prstDash val="solid"/>
+          </a:ln>
+        </p:spPr>
+      </p:sp>
+      <p:sp>
+        <p:nvSpPr>
+          <p:cNvPr id="43" name="">
+            <a:extLst xmlns:a="http://schemas.openxmlformats.org/drawingml/2006/main">
+              <a:ext uri="{FF2B5EF4-FFF2-40B4-BE49-F238E27FC236}">
+                <a16:creationId xmlns:a16="http://schemas.microsoft.com/office/drawing/2014/main" id="{B60398B5-4963-47D0-B7FC-F41A70B2D8C6}"/>
+              </a:ext>
+            </a:extLst>
+          </p:cNvPr>
+          <p:cNvSpPr>
+            <a:spLocks xmlns:a="http://schemas.openxmlformats.org/drawingml/2006/main" noGrp="1"/>
+          </p:cNvSpPr>
+          <p:nvPr/>
+        </p:nvSpPr>
+        <p:spPr>
+          <a:xfrm xmlns:a="http://schemas.openxmlformats.org/drawingml/2006/main">
+            <a:off x="7277100" y="3162300"/>
+            <a:ext cx="1066800" cy="247650"/>
+          </a:xfrm>
+          <a:prstGeom xmlns:a="http://schemas.openxmlformats.org/drawingml/2006/main" prst="rect">
+            <a:avLst/>
+          </a:prstGeom>
+          <a:noFill xmlns:a="http://schemas.openxmlformats.org/drawingml/2006/main"/>
+          <a:ln xmlns:a="http://schemas.openxmlformats.org/drawingml/2006/main" w="0">
+            <a:noFill/>
+            <a:prstDash val="solid"/>
+          </a:ln>
+        </p:spPr>
+        <p:txBody>
+          <a:bodyPr xmlns:a="http://schemas.openxmlformats.org/drawingml/2006/main"/>
+          <a:lstStyle xmlns:a="http://schemas.openxmlformats.org/drawingml/2006/main"/>
+          <a:p xmlns:a="http://schemas.openxmlformats.org/drawingml/2006/main">
+            <a:pPr>
+              <a:defRPr sz="1200" b="0">
+                <a:solidFill>
+                  <a:srgbClr val="000000"/>
+                </a:solidFill>
+              </a:defRPr>
+            </a:pPr>
+            <a:r>
+              <a:rPr sz="1200" b="0">
+                <a:solidFill>
+                  <a:srgbClr val="000000"/>
+                </a:solidFill>
+              </a:rPr>
+              <a:t>-11.6%</a:t>
+            </a:r>
+          </a:p>
+        </p:txBody>
+      </p:sp>
+      <p:sp>
+        <p:nvSpPr>
+          <p:cNvPr id="44" name="">
+            <a:extLst xmlns:a="http://schemas.openxmlformats.org/drawingml/2006/main">
+              <a:ext uri="{FF2B5EF4-FFF2-40B4-BE49-F238E27FC236}">
+                <a16:creationId xmlns:a16="http://schemas.microsoft.com/office/drawing/2014/main" id="{0B974C63-D12A-4D55-8CB5-84A97C2F1187}"/>
+              </a:ext>
+            </a:extLst>
+          </p:cNvPr>
+          <p:cNvSpPr>
+            <a:spLocks xmlns:a="http://schemas.openxmlformats.org/drawingml/2006/main" noGrp="1"/>
+          </p:cNvSpPr>
+          <p:nvPr/>
+        </p:nvSpPr>
+        <p:spPr>
+          <a:xfrm xmlns:a="http://schemas.openxmlformats.org/drawingml/2006/main">
+            <a:off x="8420100" y="2990850"/>
+            <a:ext cx="1047750" cy="590550"/>
+          </a:xfrm>
+          <a:prstGeom xmlns:a="http://schemas.openxmlformats.org/drawingml/2006/main" prst="rect">
+            <a:avLst/>
+          </a:prstGeom>
+          <a:solidFill xmlns:a="http://schemas.openxmlformats.org/drawingml/2006/main">
+            <a:srgbClr val="FFFFFF"/>
+          </a:solidFill>
+          <a:ln xmlns:a="http://schemas.openxmlformats.org/drawingml/2006/main" w="9525">
+            <a:solidFill>
+              <a:srgbClr val="B8BCC4"/>
+            </a:solidFill>
+            <a:prstDash val="solid"/>
+          </a:ln>
+        </p:spPr>
+      </p:sp>
+      <p:sp>
+        <p:nvSpPr>
+          <p:cNvPr id="45" name="">
+            <a:extLst xmlns:a="http://schemas.openxmlformats.org/drawingml/2006/main">
+              <a:ext uri="{FF2B5EF4-FFF2-40B4-BE49-F238E27FC236}">
+                <a16:creationId xmlns:a16="http://schemas.microsoft.com/office/drawing/2014/main" id="{473CC6A9-3A8B-4480-BDA3-816A65F3544B}"/>
+              </a:ext>
+            </a:extLst>
+          </p:cNvPr>
+          <p:cNvSpPr>
+            <a:spLocks xmlns:a="http://schemas.openxmlformats.org/drawingml/2006/main" noGrp="1"/>
+          </p:cNvSpPr>
+          <p:nvPr/>
+        </p:nvSpPr>
+        <p:spPr>
+          <a:xfrm xmlns:a="http://schemas.openxmlformats.org/drawingml/2006/main">
+            <a:off x="8496300" y="3162300"/>
+            <a:ext cx="895350" cy="247650"/>
+          </a:xfrm>
+          <a:prstGeom xmlns:a="http://schemas.openxmlformats.org/drawingml/2006/main" prst="rect">
+            <a:avLst/>
+          </a:prstGeom>
+          <a:noFill xmlns:a="http://schemas.openxmlformats.org/drawingml/2006/main"/>
+          <a:ln xmlns:a="http://schemas.openxmlformats.org/drawingml/2006/main" w="0">
+            <a:noFill/>
+            <a:prstDash val="solid"/>
+          </a:ln>
+        </p:spPr>
+        <p:txBody>
+          <a:bodyPr xmlns:a="http://schemas.openxmlformats.org/drawingml/2006/main"/>
+          <a:lstStyle xmlns:a="http://schemas.openxmlformats.org/drawingml/2006/main"/>
+          <a:p xmlns:a="http://schemas.openxmlformats.org/drawingml/2006/main">
+            <a:pPr>
+              <a:defRPr sz="1200" b="0">
+                <a:solidFill>
+                  <a:srgbClr val="000000"/>
+                </a:solidFill>
+              </a:defRPr>
+            </a:pPr>
+            <a:r>
+              <a:rPr sz="1200" b="0">
+                <a:solidFill>
+                  <a:srgbClr val="000000"/>
+                </a:solidFill>
+              </a:rPr>
+              <a:t>47</a:t>
+            </a:r>
+          </a:p>
+        </p:txBody>
+      </p:sp>
+      <p:sp>
+        <p:nvSpPr>
+          <p:cNvPr id="46" name="">
+            <a:extLst xmlns:a="http://schemas.openxmlformats.org/drawingml/2006/main">
+              <a:ext uri="{FF2B5EF4-FFF2-40B4-BE49-F238E27FC236}">
+                <a16:creationId xmlns:a16="http://schemas.microsoft.com/office/drawing/2014/main" id="{EF2DE8AE-E232-4C85-A769-5E2998480990}"/>
+              </a:ext>
+            </a:extLst>
+          </p:cNvPr>
+          <p:cNvSpPr>
+            <a:spLocks xmlns:a="http://schemas.openxmlformats.org/drawingml/2006/main" noGrp="1"/>
+          </p:cNvSpPr>
+          <p:nvPr/>
+        </p:nvSpPr>
+        <p:spPr>
+          <a:xfrm xmlns:a="http://schemas.openxmlformats.org/drawingml/2006/main">
+            <a:off x="838200" y="3581400"/>
+            <a:ext cx="838200" cy="590550"/>
+          </a:xfrm>
+          <a:prstGeom xmlns:a="http://schemas.openxmlformats.org/drawingml/2006/main" prst="rect">
+            <a:avLst/>
+          </a:prstGeom>
+          <a:solidFill xmlns:a="http://schemas.openxmlformats.org/drawingml/2006/main">
+            <a:srgbClr val="F7F7F7"/>
+          </a:solidFill>
+          <a:ln xmlns:a="http://schemas.openxmlformats.org/drawingml/2006/main" w="9525">
+            <a:solidFill>
+              <a:srgbClr val="B8BCC4"/>
+            </a:solidFill>
+            <a:prstDash val="solid"/>
+          </a:ln>
+        </p:spPr>
+      </p:sp>
+      <p:sp>
+        <p:nvSpPr>
+          <p:cNvPr id="47" name="">
+            <a:extLst xmlns:a="http://schemas.openxmlformats.org/drawingml/2006/main">
+              <a:ext uri="{FF2B5EF4-FFF2-40B4-BE49-F238E27FC236}">
+                <a16:creationId xmlns:a16="http://schemas.microsoft.com/office/drawing/2014/main" id="{AAD2034A-E496-4194-BF21-C7101190B9D4}"/>
+              </a:ext>
+            </a:extLst>
+          </p:cNvPr>
+          <p:cNvSpPr>
+            <a:spLocks xmlns:a="http://schemas.openxmlformats.org/drawingml/2006/main" noGrp="1"/>
+          </p:cNvSpPr>
+          <p:nvPr/>
+        </p:nvSpPr>
+        <p:spPr>
+          <a:xfrm xmlns:a="http://schemas.openxmlformats.org/drawingml/2006/main">
+            <a:off x="914400" y="3752850"/>
+            <a:ext cx="685800" cy="247650"/>
+          </a:xfrm>
+          <a:prstGeom xmlns:a="http://schemas.openxmlformats.org/drawingml/2006/main" prst="rect">
+            <a:avLst/>
+          </a:prstGeom>
+          <a:noFill xmlns:a="http://schemas.openxmlformats.org/drawingml/2006/main"/>
+          <a:ln xmlns:a="http://schemas.openxmlformats.org/drawingml/2006/main" w="0">
+            <a:noFill/>
+            <a:prstDash val="solid"/>
+          </a:ln>
+        </p:spPr>
+        <p:txBody>
+          <a:bodyPr xmlns:a="http://schemas.openxmlformats.org/drawingml/2006/main"/>
+          <a:lstStyle xmlns:a="http://schemas.openxmlformats.org/drawingml/2006/main"/>
+          <a:p xmlns:a="http://schemas.openxmlformats.org/drawingml/2006/main">
+            <a:pPr>
+              <a:defRPr sz="1200" b="0">
+                <a:solidFill>
+                  <a:srgbClr val="000000"/>
+                </a:solidFill>
+              </a:defRPr>
+            </a:pPr>
+            <a:r>
+              <a:rPr sz="1200" b="0">
+                <a:solidFill>
+                  <a:srgbClr val="000000"/>
+                </a:solidFill>
+              </a:rPr>
+              <a:t>2022</a:t>
+            </a:r>
+          </a:p>
+        </p:txBody>
+      </p:sp>
+      <p:sp>
+        <p:nvSpPr>
+          <p:cNvPr id="48" name="">
+            <a:extLst xmlns:a="http://schemas.openxmlformats.org/drawingml/2006/main">
+              <a:ext uri="{FF2B5EF4-FFF2-40B4-BE49-F238E27FC236}">
+                <a16:creationId xmlns:a16="http://schemas.microsoft.com/office/drawing/2014/main" id="{30843DD9-D740-4C17-A0F0-B1B796F81740}"/>
+              </a:ext>
+            </a:extLst>
+          </p:cNvPr>
+          <p:cNvSpPr>
+            <a:spLocks xmlns:a="http://schemas.openxmlformats.org/drawingml/2006/main" noGrp="1"/>
+          </p:cNvSpPr>
+          <p:nvPr/>
+        </p:nvSpPr>
+        <p:spPr>
+          <a:xfrm xmlns:a="http://schemas.openxmlformats.org/drawingml/2006/main">
+            <a:off x="1676400" y="3581400"/>
+            <a:ext cx="1809750" cy="590550"/>
+          </a:xfrm>
+          <a:prstGeom xmlns:a="http://schemas.openxmlformats.org/drawingml/2006/main" prst="rect">
+            <a:avLst/>
+          </a:prstGeom>
+          <a:solidFill xmlns:a="http://schemas.openxmlformats.org/drawingml/2006/main">
+            <a:srgbClr val="F7F7F7"/>
+          </a:solidFill>
+          <a:ln xmlns:a="http://schemas.openxmlformats.org/drawingml/2006/main" w="9525">
+            <a:solidFill>
+              <a:srgbClr val="B8BCC4"/>
+            </a:solidFill>
+            <a:prstDash val="solid"/>
+          </a:ln>
+        </p:spPr>
+      </p:sp>
+      <p:sp>
+        <p:nvSpPr>
+          <p:cNvPr id="49" name="">
+            <a:extLst xmlns:a="http://schemas.openxmlformats.org/drawingml/2006/main">
+              <a:ext uri="{FF2B5EF4-FFF2-40B4-BE49-F238E27FC236}">
+                <a16:creationId xmlns:a16="http://schemas.microsoft.com/office/drawing/2014/main" id="{E8BA69BA-5937-410E-A0A3-5E79C73590DC}"/>
+              </a:ext>
+            </a:extLst>
+          </p:cNvPr>
+          <p:cNvSpPr>
+            <a:spLocks xmlns:a="http://schemas.openxmlformats.org/drawingml/2006/main" noGrp="1"/>
+          </p:cNvSpPr>
+          <p:nvPr/>
+        </p:nvSpPr>
+        <p:spPr>
+          <a:xfrm xmlns:a="http://schemas.openxmlformats.org/drawingml/2006/main">
+            <a:off x="1752600" y="3752850"/>
+            <a:ext cx="1657350" cy="247650"/>
+          </a:xfrm>
+          <a:prstGeom xmlns:a="http://schemas.openxmlformats.org/drawingml/2006/main" prst="rect">
+            <a:avLst/>
+          </a:prstGeom>
+          <a:noFill xmlns:a="http://schemas.openxmlformats.org/drawingml/2006/main"/>
+          <a:ln xmlns:a="http://schemas.openxmlformats.org/drawingml/2006/main" w="0">
+            <a:noFill/>
+            <a:prstDash val="solid"/>
+          </a:ln>
+        </p:spPr>
+        <p:txBody>
+          <a:bodyPr xmlns:a="http://schemas.openxmlformats.org/drawingml/2006/main"/>
+          <a:lstStyle xmlns:a="http://schemas.openxmlformats.org/drawingml/2006/main"/>
+          <a:p xmlns:a="http://schemas.openxmlformats.org/drawingml/2006/main">
+            <a:pPr>
+              <a:defRPr sz="1200" b="1">
+                <a:solidFill>
+                  <a:srgbClr val="000000"/>
+                </a:solidFill>
+              </a:defRPr>
+            </a:pPr>
+            <a:r>
+              <a:rPr sz="1200" b="1">
+                <a:solidFill>
+                  <a:srgbClr val="000000"/>
+                </a:solidFill>
+              </a:rPr>
+              <a:t>EMA-only</a:t>
+            </a:r>
+          </a:p>
+        </p:txBody>
+      </p:sp>
+      <p:sp>
+        <p:nvSpPr>
+          <p:cNvPr id="50" name="">
+            <a:extLst xmlns:a="http://schemas.openxmlformats.org/drawingml/2006/main">
+              <a:ext uri="{FF2B5EF4-FFF2-40B4-BE49-F238E27FC236}">
+                <a16:creationId xmlns:a16="http://schemas.microsoft.com/office/drawing/2014/main" id="{FC4ABDFC-6E63-493E-8EF7-48FAF05A11A1}"/>
+              </a:ext>
+            </a:extLst>
+          </p:cNvPr>
+          <p:cNvSpPr>
+            <a:spLocks xmlns:a="http://schemas.openxmlformats.org/drawingml/2006/main" noGrp="1"/>
+          </p:cNvSpPr>
+          <p:nvPr/>
+        </p:nvSpPr>
+        <p:spPr>
+          <a:xfrm xmlns:a="http://schemas.openxmlformats.org/drawingml/2006/main">
+            <a:off x="3486150" y="3581400"/>
+            <a:ext cx="1276350" cy="590550"/>
+          </a:xfrm>
+          <a:prstGeom xmlns:a="http://schemas.openxmlformats.org/drawingml/2006/main" prst="rect">
+            <a:avLst/>
+          </a:prstGeom>
+          <a:solidFill xmlns:a="http://schemas.openxmlformats.org/drawingml/2006/main">
+            <a:srgbClr val="F7F7F7"/>
+          </a:solidFill>
+          <a:ln xmlns:a="http://schemas.openxmlformats.org/drawingml/2006/main" w="9525">
+            <a:solidFill>
+              <a:srgbClr val="B8BCC4"/>
+            </a:solidFill>
+            <a:prstDash val="solid"/>
+          </a:ln>
+        </p:spPr>
+      </p:sp>
+      <p:sp>
+        <p:nvSpPr>
+          <p:cNvPr id="51" name="">
+            <a:extLst xmlns:a="http://schemas.openxmlformats.org/drawingml/2006/main">
+              <a:ext uri="{FF2B5EF4-FFF2-40B4-BE49-F238E27FC236}">
+                <a16:creationId xmlns:a16="http://schemas.microsoft.com/office/drawing/2014/main" id="{C514B5AB-16D6-4D0C-B993-7779377F2951}"/>
+              </a:ext>
+            </a:extLst>
+          </p:cNvPr>
+          <p:cNvSpPr>
+            <a:spLocks xmlns:a="http://schemas.openxmlformats.org/drawingml/2006/main" noGrp="1"/>
+          </p:cNvSpPr>
+          <p:nvPr/>
+        </p:nvSpPr>
+        <p:spPr>
+          <a:xfrm xmlns:a="http://schemas.openxmlformats.org/drawingml/2006/main">
+            <a:off x="3562350" y="3752850"/>
+            <a:ext cx="1123950" cy="247650"/>
+          </a:xfrm>
+          <a:prstGeom xmlns:a="http://schemas.openxmlformats.org/drawingml/2006/main" prst="rect">
+            <a:avLst/>
+          </a:prstGeom>
+          <a:noFill xmlns:a="http://schemas.openxmlformats.org/drawingml/2006/main"/>
+          <a:ln xmlns:a="http://schemas.openxmlformats.org/drawingml/2006/main" w="0">
+            <a:noFill/>
+            <a:prstDash val="solid"/>
+          </a:ln>
+        </p:spPr>
+        <p:txBody>
+          <a:bodyPr xmlns:a="http://schemas.openxmlformats.org/drawingml/2006/main"/>
+          <a:lstStyle xmlns:a="http://schemas.openxmlformats.org/drawingml/2006/main"/>
+          <a:p xmlns:a="http://schemas.openxmlformats.org/drawingml/2006/main">
+            <a:pPr>
+              <a:defRPr sz="1200" b="0">
+                <a:solidFill>
+                  <a:srgbClr val="000000"/>
+                </a:solidFill>
+              </a:defRPr>
+            </a:pPr>
+            <a:r>
+              <a:rPr sz="1200" b="0">
+                <a:solidFill>
+                  <a:srgbClr val="000000"/>
+                </a:solidFill>
+              </a:rPr>
+              <a:t>-22.6%</a:t>
+            </a:r>
+          </a:p>
+        </p:txBody>
+      </p:sp>
+      <p:sp>
+        <p:nvSpPr>
+          <p:cNvPr id="52" name="">
+            <a:extLst xmlns:a="http://schemas.openxmlformats.org/drawingml/2006/main">
+              <a:ext uri="{FF2B5EF4-FFF2-40B4-BE49-F238E27FC236}">
+                <a16:creationId xmlns:a16="http://schemas.microsoft.com/office/drawing/2014/main" id="{106E0D97-A069-4F4F-B7C5-5F07990A2B51}"/>
+              </a:ext>
+            </a:extLst>
+          </p:cNvPr>
+          <p:cNvSpPr>
+            <a:spLocks xmlns:a="http://schemas.openxmlformats.org/drawingml/2006/main" noGrp="1"/>
+          </p:cNvSpPr>
+          <p:nvPr/>
+        </p:nvSpPr>
+        <p:spPr>
+          <a:xfrm xmlns:a="http://schemas.openxmlformats.org/drawingml/2006/main">
+            <a:off x="4762500" y="3581400"/>
+            <a:ext cx="1219200" cy="590550"/>
+          </a:xfrm>
+          <a:prstGeom xmlns:a="http://schemas.openxmlformats.org/drawingml/2006/main" prst="rect">
+            <a:avLst/>
+          </a:prstGeom>
+          <a:solidFill xmlns:a="http://schemas.openxmlformats.org/drawingml/2006/main">
+            <a:srgbClr val="F7F7F7"/>
+          </a:solidFill>
+          <a:ln xmlns:a="http://schemas.openxmlformats.org/drawingml/2006/main" w="9525">
+            <a:solidFill>
+              <a:srgbClr val="B8BCC4"/>
+            </a:solidFill>
+            <a:prstDash val="solid"/>
+          </a:ln>
+        </p:spPr>
+      </p:sp>
+      <p:sp>
+        <p:nvSpPr>
+          <p:cNvPr id="53" name="">
+            <a:extLst xmlns:a="http://schemas.openxmlformats.org/drawingml/2006/main">
+              <a:ext uri="{FF2B5EF4-FFF2-40B4-BE49-F238E27FC236}">
+                <a16:creationId xmlns:a16="http://schemas.microsoft.com/office/drawing/2014/main" id="{D6A3B81B-29B4-4728-A42A-299642DD7207}"/>
+              </a:ext>
+            </a:extLst>
+          </p:cNvPr>
+          <p:cNvSpPr>
+            <a:spLocks xmlns:a="http://schemas.openxmlformats.org/drawingml/2006/main" noGrp="1"/>
+          </p:cNvSpPr>
+          <p:nvPr/>
+        </p:nvSpPr>
+        <p:spPr>
+          <a:xfrm xmlns:a="http://schemas.openxmlformats.org/drawingml/2006/main">
+            <a:off x="4838700" y="3752850"/>
+            <a:ext cx="1066800" cy="247650"/>
+          </a:xfrm>
+          <a:prstGeom xmlns:a="http://schemas.openxmlformats.org/drawingml/2006/main" prst="rect">
+            <a:avLst/>
+          </a:prstGeom>
+          <a:noFill xmlns:a="http://schemas.openxmlformats.org/drawingml/2006/main"/>
+          <a:ln xmlns:a="http://schemas.openxmlformats.org/drawingml/2006/main" w="0">
+            <a:noFill/>
+            <a:prstDash val="solid"/>
+          </a:ln>
+        </p:spPr>
+        <p:txBody>
+          <a:bodyPr xmlns:a="http://schemas.openxmlformats.org/drawingml/2006/main"/>
+          <a:lstStyle xmlns:a="http://schemas.openxmlformats.org/drawingml/2006/main"/>
+          <a:p xmlns:a="http://schemas.openxmlformats.org/drawingml/2006/main">
+            <a:pPr>
+              <a:defRPr sz="1200" b="0">
+                <a:solidFill>
+                  <a:srgbClr val="067647"/>
+                </a:solidFill>
+              </a:defRPr>
+            </a:pPr>
+            <a:r>
+              <a:rPr sz="1200" b="0">
+                <a:solidFill>
+                  <a:srgbClr val="067647"/>
+                </a:solidFill>
+              </a:rPr>
+              <a:t>+30.4 pp</a:t>
+            </a:r>
+          </a:p>
+        </p:txBody>
+      </p:sp>
+      <p:sp>
+        <p:nvSpPr>
+          <p:cNvPr id="54" name="">
+            <a:extLst xmlns:a="http://schemas.openxmlformats.org/drawingml/2006/main">
+              <a:ext uri="{FF2B5EF4-FFF2-40B4-BE49-F238E27FC236}">
+                <a16:creationId xmlns:a16="http://schemas.microsoft.com/office/drawing/2014/main" id="{E38176FA-2533-4E93-8921-5F0794ED229D}"/>
+              </a:ext>
+            </a:extLst>
+          </p:cNvPr>
+          <p:cNvSpPr>
+            <a:spLocks xmlns:a="http://schemas.openxmlformats.org/drawingml/2006/main" noGrp="1"/>
+          </p:cNvSpPr>
+          <p:nvPr/>
+        </p:nvSpPr>
+        <p:spPr>
+          <a:xfrm xmlns:a="http://schemas.openxmlformats.org/drawingml/2006/main">
+            <a:off x="5981700" y="3581400"/>
+            <a:ext cx="1219200" cy="590550"/>
+          </a:xfrm>
+          <a:prstGeom xmlns:a="http://schemas.openxmlformats.org/drawingml/2006/main" prst="rect">
+            <a:avLst/>
+          </a:prstGeom>
+          <a:solidFill xmlns:a="http://schemas.openxmlformats.org/drawingml/2006/main">
+            <a:srgbClr val="F7F7F7"/>
+          </a:solidFill>
+          <a:ln xmlns:a="http://schemas.openxmlformats.org/drawingml/2006/main" w="9525">
+            <a:solidFill>
+              <a:srgbClr val="B8BCC4"/>
+            </a:solidFill>
+            <a:prstDash val="solid"/>
+          </a:ln>
+        </p:spPr>
+      </p:sp>
+      <p:sp>
+        <p:nvSpPr>
+          <p:cNvPr id="55" name="">
+            <a:extLst xmlns:a="http://schemas.openxmlformats.org/drawingml/2006/main">
+              <a:ext uri="{FF2B5EF4-FFF2-40B4-BE49-F238E27FC236}">
+                <a16:creationId xmlns:a16="http://schemas.microsoft.com/office/drawing/2014/main" id="{00B5D150-E55E-4D23-92C8-C6419AFDED80}"/>
+              </a:ext>
+            </a:extLst>
+          </p:cNvPr>
+          <p:cNvSpPr>
+            <a:spLocks xmlns:a="http://schemas.openxmlformats.org/drawingml/2006/main" noGrp="1"/>
+          </p:cNvSpPr>
+          <p:nvPr/>
+        </p:nvSpPr>
+        <p:spPr>
+          <a:xfrm xmlns:a="http://schemas.openxmlformats.org/drawingml/2006/main">
+            <a:off x="6057900" y="3752850"/>
+            <a:ext cx="1066800" cy="247650"/>
+          </a:xfrm>
+          <a:prstGeom xmlns:a="http://schemas.openxmlformats.org/drawingml/2006/main" prst="rect">
+            <a:avLst/>
+          </a:prstGeom>
+          <a:noFill xmlns:a="http://schemas.openxmlformats.org/drawingml/2006/main"/>
+          <a:ln xmlns:a="http://schemas.openxmlformats.org/drawingml/2006/main" w="0">
+            <a:noFill/>
+            <a:prstDash val="solid"/>
+          </a:ln>
+        </p:spPr>
+        <p:txBody>
+          <a:bodyPr xmlns:a="http://schemas.openxmlformats.org/drawingml/2006/main"/>
+          <a:lstStyle xmlns:a="http://schemas.openxmlformats.org/drawingml/2006/main"/>
+          <a:p xmlns:a="http://schemas.openxmlformats.org/drawingml/2006/main">
+            <a:pPr>
+              <a:defRPr sz="1200" b="0">
+                <a:solidFill>
+                  <a:srgbClr val="000000"/>
+                </a:solidFill>
+              </a:defRPr>
+            </a:pPr>
+            <a:r>
+              <a:rPr sz="1200" b="0">
+                <a:solidFill>
+                  <a:srgbClr val="000000"/>
+                </a:solidFill>
+              </a:rPr>
+              <a:t>16.8%</a:t>
+            </a:r>
+          </a:p>
+        </p:txBody>
+      </p:sp>
+      <p:sp>
+        <p:nvSpPr>
+          <p:cNvPr id="56" name="">
+            <a:extLst xmlns:a="http://schemas.openxmlformats.org/drawingml/2006/main">
+              <a:ext uri="{FF2B5EF4-FFF2-40B4-BE49-F238E27FC236}">
+                <a16:creationId xmlns:a16="http://schemas.microsoft.com/office/drawing/2014/main" id="{62CE3AFC-E21C-48AB-B5FA-7922CD215667}"/>
+              </a:ext>
+            </a:extLst>
+          </p:cNvPr>
+          <p:cNvSpPr>
+            <a:spLocks xmlns:a="http://schemas.openxmlformats.org/drawingml/2006/main" noGrp="1"/>
+          </p:cNvSpPr>
+          <p:nvPr/>
+        </p:nvSpPr>
+        <p:spPr>
+          <a:xfrm xmlns:a="http://schemas.openxmlformats.org/drawingml/2006/main">
+            <a:off x="7200900" y="3581400"/>
+            <a:ext cx="1219200" cy="590550"/>
+          </a:xfrm>
+          <a:prstGeom xmlns:a="http://schemas.openxmlformats.org/drawingml/2006/main" prst="rect">
+            <a:avLst/>
+          </a:prstGeom>
+          <a:solidFill xmlns:a="http://schemas.openxmlformats.org/drawingml/2006/main">
+            <a:srgbClr val="F7F7F7"/>
+          </a:solidFill>
+          <a:ln xmlns:a="http://schemas.openxmlformats.org/drawingml/2006/main" w="9525">
+            <a:solidFill>
+              <a:srgbClr val="B8BCC4"/>
+            </a:solidFill>
+            <a:prstDash val="solid"/>
+          </a:ln>
+        </p:spPr>
+      </p:sp>
+      <p:sp>
+        <p:nvSpPr>
+          <p:cNvPr id="57" name="">
+            <a:extLst xmlns:a="http://schemas.openxmlformats.org/drawingml/2006/main">
+              <a:ext uri="{FF2B5EF4-FFF2-40B4-BE49-F238E27FC236}">
+                <a16:creationId xmlns:a16="http://schemas.microsoft.com/office/drawing/2014/main" id="{E19825C2-8B47-4CB1-8874-2CBF16881E70}"/>
+              </a:ext>
+            </a:extLst>
+          </p:cNvPr>
+          <p:cNvSpPr>
+            <a:spLocks xmlns:a="http://schemas.openxmlformats.org/drawingml/2006/main" noGrp="1"/>
+          </p:cNvSpPr>
+          <p:nvPr/>
+        </p:nvSpPr>
+        <p:spPr>
+          <a:xfrm xmlns:a="http://schemas.openxmlformats.org/drawingml/2006/main">
+            <a:off x="7277100" y="3752850"/>
+            <a:ext cx="1066800" cy="247650"/>
+          </a:xfrm>
+          <a:prstGeom xmlns:a="http://schemas.openxmlformats.org/drawingml/2006/main" prst="rect">
+            <a:avLst/>
+          </a:prstGeom>
+          <a:noFill xmlns:a="http://schemas.openxmlformats.org/drawingml/2006/main"/>
+          <a:ln xmlns:a="http://schemas.openxmlformats.org/drawingml/2006/main" w="0">
+            <a:noFill/>
+            <a:prstDash val="solid"/>
+          </a:ln>
+        </p:spPr>
+        <p:txBody>
+          <a:bodyPr xmlns:a="http://schemas.openxmlformats.org/drawingml/2006/main"/>
+          <a:lstStyle xmlns:a="http://schemas.openxmlformats.org/drawingml/2006/main"/>
+          <a:p xmlns:a="http://schemas.openxmlformats.org/drawingml/2006/main">
+            <a:pPr>
+              <a:defRPr sz="1200" b="0">
+                <a:solidFill>
+                  <a:srgbClr val="000000"/>
+                </a:solidFill>
+              </a:defRPr>
+            </a:pPr>
+            <a:r>
+              <a:rPr sz="1200" b="0">
+                <a:solidFill>
+                  <a:srgbClr val="000000"/>
+                </a:solidFill>
+              </a:rPr>
+              <a:t>-25.0%</a:t>
+            </a:r>
+          </a:p>
+        </p:txBody>
+      </p:sp>
+      <p:sp>
+        <p:nvSpPr>
+          <p:cNvPr id="58" name="">
+            <a:extLst xmlns:a="http://schemas.openxmlformats.org/drawingml/2006/main">
+              <a:ext uri="{FF2B5EF4-FFF2-40B4-BE49-F238E27FC236}">
+                <a16:creationId xmlns:a16="http://schemas.microsoft.com/office/drawing/2014/main" id="{630135E1-DAF9-4E28-96E9-182782021EB8}"/>
+              </a:ext>
+            </a:extLst>
+          </p:cNvPr>
+          <p:cNvSpPr>
+            <a:spLocks xmlns:a="http://schemas.openxmlformats.org/drawingml/2006/main" noGrp="1"/>
+          </p:cNvSpPr>
+          <p:nvPr/>
+        </p:nvSpPr>
+        <p:spPr>
+          <a:xfrm xmlns:a="http://schemas.openxmlformats.org/drawingml/2006/main">
+            <a:off x="8420100" y="3581400"/>
+            <a:ext cx="1047750" cy="590550"/>
+          </a:xfrm>
+          <a:prstGeom xmlns:a="http://schemas.openxmlformats.org/drawingml/2006/main" prst="rect">
+            <a:avLst/>
+          </a:prstGeom>
+          <a:solidFill xmlns:a="http://schemas.openxmlformats.org/drawingml/2006/main">
+            <a:srgbClr val="F7F7F7"/>
+          </a:solidFill>
+          <a:ln xmlns:a="http://schemas.openxmlformats.org/drawingml/2006/main" w="9525">
+            <a:solidFill>
+              <a:srgbClr val="B8BCC4"/>
+            </a:solidFill>
+            <a:prstDash val="solid"/>
+          </a:ln>
+        </p:spPr>
+      </p:sp>
+      <p:sp>
+        <p:nvSpPr>
+          <p:cNvPr id="59" name="">
+            <a:extLst xmlns:a="http://schemas.openxmlformats.org/drawingml/2006/main">
+              <a:ext uri="{FF2B5EF4-FFF2-40B4-BE49-F238E27FC236}">
+                <a16:creationId xmlns:a16="http://schemas.microsoft.com/office/drawing/2014/main" id="{6D360FF4-248C-40C7-992C-D314766AD9C5}"/>
+              </a:ext>
+            </a:extLst>
+          </p:cNvPr>
+          <p:cNvSpPr>
+            <a:spLocks xmlns:a="http://schemas.openxmlformats.org/drawingml/2006/main" noGrp="1"/>
+          </p:cNvSpPr>
+          <p:nvPr/>
+        </p:nvSpPr>
+        <p:spPr>
+          <a:xfrm xmlns:a="http://schemas.openxmlformats.org/drawingml/2006/main">
+            <a:off x="8496300" y="3752850"/>
+            <a:ext cx="895350" cy="247650"/>
+          </a:xfrm>
+          <a:prstGeom xmlns:a="http://schemas.openxmlformats.org/drawingml/2006/main" prst="rect">
+            <a:avLst/>
+          </a:prstGeom>
+          <a:noFill xmlns:a="http://schemas.openxmlformats.org/drawingml/2006/main"/>
+          <a:ln xmlns:a="http://schemas.openxmlformats.org/drawingml/2006/main" w="0">
+            <a:noFill/>
+            <a:prstDash val="solid"/>
+          </a:ln>
+        </p:spPr>
+        <p:txBody>
+          <a:bodyPr xmlns:a="http://schemas.openxmlformats.org/drawingml/2006/main"/>
+          <a:lstStyle xmlns:a="http://schemas.openxmlformats.org/drawingml/2006/main"/>
+          <a:p xmlns:a="http://schemas.openxmlformats.org/drawingml/2006/main">
+            <a:pPr>
+              <a:defRPr sz="1200" b="0">
+                <a:solidFill>
+                  <a:srgbClr val="000000"/>
+                </a:solidFill>
+              </a:defRPr>
+            </a:pPr>
+            <a:r>
+              <a:rPr sz="1200" b="0">
+                <a:solidFill>
+                  <a:srgbClr val="000000"/>
+                </a:solidFill>
+              </a:rPr>
+              <a:t>42</a:t>
+            </a:r>
+          </a:p>
+        </p:txBody>
+      </p:sp>
+      <p:sp>
+        <p:nvSpPr>
+          <p:cNvPr id="60" name="">
+            <a:extLst xmlns:a="http://schemas.openxmlformats.org/drawingml/2006/main">
+              <a:ext uri="{FF2B5EF4-FFF2-40B4-BE49-F238E27FC236}">
+                <a16:creationId xmlns:a16="http://schemas.microsoft.com/office/drawing/2014/main" id="{CD4FC99C-1453-4A33-9A08-C3BCCDE3DA0B}"/>
+              </a:ext>
+            </a:extLst>
+          </p:cNvPr>
+          <p:cNvSpPr>
+            <a:spLocks xmlns:a="http://schemas.openxmlformats.org/drawingml/2006/main" noGrp="1"/>
+          </p:cNvSpPr>
+          <p:nvPr/>
+        </p:nvSpPr>
+        <p:spPr>
+          <a:xfrm xmlns:a="http://schemas.openxmlformats.org/drawingml/2006/main">
+            <a:off x="838200" y="4171950"/>
+            <a:ext cx="838200" cy="590550"/>
+          </a:xfrm>
+          <a:prstGeom xmlns:a="http://schemas.openxmlformats.org/drawingml/2006/main" prst="rect">
+            <a:avLst/>
+          </a:prstGeom>
+          <a:solidFill xmlns:a="http://schemas.openxmlformats.org/drawingml/2006/main">
+            <a:srgbClr val="FFFFFF"/>
+          </a:solidFill>
+          <a:ln xmlns:a="http://schemas.openxmlformats.org/drawingml/2006/main" w="9525">
+            <a:solidFill>
+              <a:srgbClr val="B8BCC4"/>
+            </a:solidFill>
+            <a:prstDash val="solid"/>
+          </a:ln>
+        </p:spPr>
+      </p:sp>
+      <p:sp>
+        <p:nvSpPr>
+          <p:cNvPr id="61" name="">
+            <a:extLst xmlns:a="http://schemas.openxmlformats.org/drawingml/2006/main">
+              <a:ext uri="{FF2B5EF4-FFF2-40B4-BE49-F238E27FC236}">
+                <a16:creationId xmlns:a16="http://schemas.microsoft.com/office/drawing/2014/main" id="{16C56B7E-3904-4DBA-BCFF-DD87D85D8099}"/>
+              </a:ext>
+            </a:extLst>
+          </p:cNvPr>
+          <p:cNvSpPr>
+            <a:spLocks xmlns:a="http://schemas.openxmlformats.org/drawingml/2006/main" noGrp="1"/>
+          </p:cNvSpPr>
+          <p:nvPr/>
+        </p:nvSpPr>
+        <p:spPr>
+          <a:xfrm xmlns:a="http://schemas.openxmlformats.org/drawingml/2006/main">
+            <a:off x="914400" y="4343400"/>
+            <a:ext cx="685800" cy="247650"/>
+          </a:xfrm>
+          <a:prstGeom xmlns:a="http://schemas.openxmlformats.org/drawingml/2006/main" prst="rect">
+            <a:avLst/>
+          </a:prstGeom>
+          <a:noFill xmlns:a="http://schemas.openxmlformats.org/drawingml/2006/main"/>
+          <a:ln xmlns:a="http://schemas.openxmlformats.org/drawingml/2006/main" w="0">
+            <a:noFill/>
+            <a:prstDash val="solid"/>
+          </a:ln>
+        </p:spPr>
+        <p:txBody>
+          <a:bodyPr xmlns:a="http://schemas.openxmlformats.org/drawingml/2006/main"/>
+          <a:lstStyle xmlns:a="http://schemas.openxmlformats.org/drawingml/2006/main"/>
+          <a:p xmlns:a="http://schemas.openxmlformats.org/drawingml/2006/main">
+            <a:pPr>
+              <a:defRPr sz="1200" b="0">
+                <a:solidFill>
+                  <a:srgbClr val="000000"/>
+                </a:solidFill>
+              </a:defRPr>
+            </a:pPr>
+            <a:r>
+              <a:rPr sz="1200" b="0">
+                <a:solidFill>
+                  <a:srgbClr val="000000"/>
+                </a:solidFill>
+              </a:rPr>
+              <a:t>2022</a:t>
+            </a:r>
+          </a:p>
+        </p:txBody>
+      </p:sp>
+      <p:sp>
+        <p:nvSpPr>
+          <p:cNvPr id="62" name="">
+            <a:extLst xmlns:a="http://schemas.openxmlformats.org/drawingml/2006/main">
+              <a:ext uri="{FF2B5EF4-FFF2-40B4-BE49-F238E27FC236}">
+                <a16:creationId xmlns:a16="http://schemas.microsoft.com/office/drawing/2014/main" id="{A8D0CD3F-EE96-4A55-85BF-EE29A13AE151}"/>
+              </a:ext>
+            </a:extLst>
+          </p:cNvPr>
+          <p:cNvSpPr>
+            <a:spLocks xmlns:a="http://schemas.openxmlformats.org/drawingml/2006/main" noGrp="1"/>
+          </p:cNvSpPr>
+          <p:nvPr/>
+        </p:nvSpPr>
+        <p:spPr>
+          <a:xfrm xmlns:a="http://schemas.openxmlformats.org/drawingml/2006/main">
+            <a:off x="1676400" y="4171950"/>
+            <a:ext cx="1809750" cy="590550"/>
+          </a:xfrm>
+          <a:prstGeom xmlns:a="http://schemas.openxmlformats.org/drawingml/2006/main" prst="rect">
+            <a:avLst/>
+          </a:prstGeom>
+          <a:solidFill xmlns:a="http://schemas.openxmlformats.org/drawingml/2006/main">
+            <a:srgbClr val="FFFFFF"/>
+          </a:solidFill>
+          <a:ln xmlns:a="http://schemas.openxmlformats.org/drawingml/2006/main" w="9525">
+            <a:solidFill>
+              <a:srgbClr val="B8BCC4"/>
+            </a:solidFill>
+            <a:prstDash val="solid"/>
+          </a:ln>
+        </p:spPr>
+      </p:sp>
+      <p:sp>
+        <p:nvSpPr>
+          <p:cNvPr id="63" name="">
+            <a:extLst xmlns:a="http://schemas.openxmlformats.org/drawingml/2006/main">
+              <a:ext uri="{FF2B5EF4-FFF2-40B4-BE49-F238E27FC236}">
+                <a16:creationId xmlns:a16="http://schemas.microsoft.com/office/drawing/2014/main" id="{8AEC4AE5-CA98-4F6C-A749-BDD24B262F12}"/>
+              </a:ext>
+            </a:extLst>
+          </p:cNvPr>
+          <p:cNvSpPr>
+            <a:spLocks xmlns:a="http://schemas.openxmlformats.org/drawingml/2006/main" noGrp="1"/>
+          </p:cNvSpPr>
+          <p:nvPr/>
+        </p:nvSpPr>
+        <p:spPr>
+          <a:xfrm xmlns:a="http://schemas.openxmlformats.org/drawingml/2006/main">
+            <a:off x="1752600" y="4343400"/>
+            <a:ext cx="1657350" cy="247650"/>
+          </a:xfrm>
+          <a:prstGeom xmlns:a="http://schemas.openxmlformats.org/drawingml/2006/main" prst="rect">
+            <a:avLst/>
+          </a:prstGeom>
+          <a:noFill xmlns:a="http://schemas.openxmlformats.org/drawingml/2006/main"/>
+          <a:ln xmlns:a="http://schemas.openxmlformats.org/drawingml/2006/main" w="0">
+            <a:noFill/>
+            <a:prstDash val="solid"/>
+          </a:ln>
+        </p:spPr>
+        <p:txBody>
+          <a:bodyPr xmlns:a="http://schemas.openxmlformats.org/drawingml/2006/main"/>
+          <a:lstStyle xmlns:a="http://schemas.openxmlformats.org/drawingml/2006/main"/>
+          <a:p xmlns:a="http://schemas.openxmlformats.org/drawingml/2006/main">
+            <a:pPr>
+              <a:defRPr sz="1200" b="1">
+                <a:solidFill>
+                  <a:srgbClr val="000000"/>
+                </a:solidFill>
+              </a:defRPr>
+            </a:pPr>
+            <a:r>
+              <a:rPr sz="1200" b="1">
+                <a:solidFill>
+                  <a:srgbClr val="000000"/>
+                </a:solidFill>
+              </a:rPr>
+              <a:t>Trend/breakout</a:t>
+            </a:r>
+          </a:p>
+        </p:txBody>
+      </p:sp>
+      <p:sp>
+        <p:nvSpPr>
+          <p:cNvPr id="64" name="">
+            <a:extLst xmlns:a="http://schemas.openxmlformats.org/drawingml/2006/main">
+              <a:ext uri="{FF2B5EF4-FFF2-40B4-BE49-F238E27FC236}">
+                <a16:creationId xmlns:a16="http://schemas.microsoft.com/office/drawing/2014/main" id="{D8272D09-9E98-472E-86A9-D5A2AB14BAEA}"/>
+              </a:ext>
+            </a:extLst>
+          </p:cNvPr>
+          <p:cNvSpPr>
+            <a:spLocks xmlns:a="http://schemas.openxmlformats.org/drawingml/2006/main" noGrp="1"/>
+          </p:cNvSpPr>
+          <p:nvPr/>
+        </p:nvSpPr>
+        <p:spPr>
+          <a:xfrm xmlns:a="http://schemas.openxmlformats.org/drawingml/2006/main">
+            <a:off x="3486150" y="4171950"/>
+            <a:ext cx="1276350" cy="590550"/>
+          </a:xfrm>
+          <a:prstGeom xmlns:a="http://schemas.openxmlformats.org/drawingml/2006/main" prst="rect">
+            <a:avLst/>
+          </a:prstGeom>
+          <a:solidFill xmlns:a="http://schemas.openxmlformats.org/drawingml/2006/main">
+            <a:srgbClr val="FFFFFF"/>
+          </a:solidFill>
+          <a:ln xmlns:a="http://schemas.openxmlformats.org/drawingml/2006/main" w="9525">
+            <a:solidFill>
+              <a:srgbClr val="B8BCC4"/>
+            </a:solidFill>
+            <a:prstDash val="solid"/>
+          </a:ln>
+        </p:spPr>
+      </p:sp>
+      <p:sp>
+        <p:nvSpPr>
+          <p:cNvPr id="65" name="">
+            <a:extLst xmlns:a="http://schemas.openxmlformats.org/drawingml/2006/main">
+              <a:ext uri="{FF2B5EF4-FFF2-40B4-BE49-F238E27FC236}">
+                <a16:creationId xmlns:a16="http://schemas.microsoft.com/office/drawing/2014/main" id="{B9655FF5-4CE2-4B0B-A47F-E4CF015F6EC2}"/>
+              </a:ext>
+            </a:extLst>
+          </p:cNvPr>
+          <p:cNvSpPr>
+            <a:spLocks xmlns:a="http://schemas.openxmlformats.org/drawingml/2006/main" noGrp="1"/>
+          </p:cNvSpPr>
+          <p:nvPr/>
+        </p:nvSpPr>
+        <p:spPr>
+          <a:xfrm xmlns:a="http://schemas.openxmlformats.org/drawingml/2006/main">
+            <a:off x="3562350" y="4343400"/>
+            <a:ext cx="1123950" cy="247650"/>
+          </a:xfrm>
+          <a:prstGeom xmlns:a="http://schemas.openxmlformats.org/drawingml/2006/main" prst="rect">
+            <a:avLst/>
+          </a:prstGeom>
+          <a:noFill xmlns:a="http://schemas.openxmlformats.org/drawingml/2006/main"/>
+          <a:ln xmlns:a="http://schemas.openxmlformats.org/drawingml/2006/main" w="0">
+            <a:noFill/>
+            <a:prstDash val="solid"/>
+          </a:ln>
+        </p:spPr>
+        <p:txBody>
+          <a:bodyPr xmlns:a="http://schemas.openxmlformats.org/drawingml/2006/main"/>
+          <a:lstStyle xmlns:a="http://schemas.openxmlformats.org/drawingml/2006/main"/>
+          <a:p xmlns:a="http://schemas.openxmlformats.org/drawingml/2006/main">
+            <a:pPr>
+              <a:defRPr sz="1200" b="0">
+                <a:solidFill>
+                  <a:srgbClr val="000000"/>
+                </a:solidFill>
+              </a:defRPr>
+            </a:pPr>
+            <a:r>
+              <a:rPr sz="1200" b="0">
+                <a:solidFill>
+                  <a:srgbClr val="000000"/>
+                </a:solidFill>
+              </a:rPr>
+              <a:t>-10.8%</a:t>
+            </a:r>
+          </a:p>
+        </p:txBody>
+      </p:sp>
+      <p:sp>
+        <p:nvSpPr>
+          <p:cNvPr id="66" name="">
+            <a:extLst xmlns:a="http://schemas.openxmlformats.org/drawingml/2006/main">
+              <a:ext uri="{FF2B5EF4-FFF2-40B4-BE49-F238E27FC236}">
+                <a16:creationId xmlns:a16="http://schemas.microsoft.com/office/drawing/2014/main" id="{F297FCCC-E192-4FCD-9047-AC3B2A4D9FCD}"/>
+              </a:ext>
+            </a:extLst>
+          </p:cNvPr>
+          <p:cNvSpPr>
+            <a:spLocks xmlns:a="http://schemas.openxmlformats.org/drawingml/2006/main" noGrp="1"/>
+          </p:cNvSpPr>
+          <p:nvPr/>
+        </p:nvSpPr>
+        <p:spPr>
+          <a:xfrm xmlns:a="http://schemas.openxmlformats.org/drawingml/2006/main">
+            <a:off x="4762500" y="4171950"/>
+            <a:ext cx="1219200" cy="590550"/>
+          </a:xfrm>
+          <a:prstGeom xmlns:a="http://schemas.openxmlformats.org/drawingml/2006/main" prst="rect">
+            <a:avLst/>
+          </a:prstGeom>
+          <a:solidFill xmlns:a="http://schemas.openxmlformats.org/drawingml/2006/main">
+            <a:srgbClr val="FFFFFF"/>
+          </a:solidFill>
+          <a:ln xmlns:a="http://schemas.openxmlformats.org/drawingml/2006/main" w="9525">
+            <a:solidFill>
+              <a:srgbClr val="B8BCC4"/>
+            </a:solidFill>
+            <a:prstDash val="solid"/>
+          </a:ln>
+        </p:spPr>
+      </p:sp>
+      <p:sp>
+        <p:nvSpPr>
+          <p:cNvPr id="67" name="">
+            <a:extLst xmlns:a="http://schemas.openxmlformats.org/drawingml/2006/main">
+              <a:ext uri="{FF2B5EF4-FFF2-40B4-BE49-F238E27FC236}">
+                <a16:creationId xmlns:a16="http://schemas.microsoft.com/office/drawing/2014/main" id="{587C8CF5-6D38-45D1-99F4-04530BF5BE6F}"/>
+              </a:ext>
+            </a:extLst>
+          </p:cNvPr>
+          <p:cNvSpPr>
+            <a:spLocks xmlns:a="http://schemas.openxmlformats.org/drawingml/2006/main" noGrp="1"/>
+          </p:cNvSpPr>
+          <p:nvPr/>
+        </p:nvSpPr>
+        <p:spPr>
+          <a:xfrm xmlns:a="http://schemas.openxmlformats.org/drawingml/2006/main">
+            <a:off x="4838700" y="4343400"/>
+            <a:ext cx="1066800" cy="247650"/>
+          </a:xfrm>
+          <a:prstGeom xmlns:a="http://schemas.openxmlformats.org/drawingml/2006/main" prst="rect">
+            <a:avLst/>
+          </a:prstGeom>
+          <a:noFill xmlns:a="http://schemas.openxmlformats.org/drawingml/2006/main"/>
+          <a:ln xmlns:a="http://schemas.openxmlformats.org/drawingml/2006/main" w="0">
+            <a:noFill/>
+            <a:prstDash val="solid"/>
+          </a:ln>
+        </p:spPr>
+        <p:txBody>
+          <a:bodyPr xmlns:a="http://schemas.openxmlformats.org/drawingml/2006/main"/>
+          <a:lstStyle xmlns:a="http://schemas.openxmlformats.org/drawingml/2006/main"/>
+          <a:p xmlns:a="http://schemas.openxmlformats.org/drawingml/2006/main">
+            <a:pPr>
+              <a:defRPr sz="1200" b="0">
+                <a:solidFill>
+                  <a:srgbClr val="067647"/>
+                </a:solidFill>
+              </a:defRPr>
+            </a:pPr>
+            <a:r>
+              <a:rPr sz="1200" b="0">
+                <a:solidFill>
+                  <a:srgbClr val="067647"/>
+                </a:solidFill>
+              </a:rPr>
+              <a:t>+42.2 pp</a:t>
+            </a:r>
+          </a:p>
+        </p:txBody>
+      </p:sp>
+      <p:sp>
+        <p:nvSpPr>
+          <p:cNvPr id="68" name="">
+            <a:extLst xmlns:a="http://schemas.openxmlformats.org/drawingml/2006/main">
+              <a:ext uri="{FF2B5EF4-FFF2-40B4-BE49-F238E27FC236}">
+                <a16:creationId xmlns:a16="http://schemas.microsoft.com/office/drawing/2014/main" id="{E1DC3243-FFF6-4966-AE84-848FEDDB72A0}"/>
+              </a:ext>
+            </a:extLst>
+          </p:cNvPr>
+          <p:cNvSpPr>
+            <a:spLocks xmlns:a="http://schemas.openxmlformats.org/drawingml/2006/main" noGrp="1"/>
+          </p:cNvSpPr>
+          <p:nvPr/>
+        </p:nvSpPr>
+        <p:spPr>
+          <a:xfrm xmlns:a="http://schemas.openxmlformats.org/drawingml/2006/main">
+            <a:off x="5981700" y="4171950"/>
+            <a:ext cx="1219200" cy="590550"/>
+          </a:xfrm>
+          <a:prstGeom xmlns:a="http://schemas.openxmlformats.org/drawingml/2006/main" prst="rect">
+            <a:avLst/>
+          </a:prstGeom>
+          <a:solidFill xmlns:a="http://schemas.openxmlformats.org/drawingml/2006/main">
+            <a:srgbClr val="FFFFFF"/>
+          </a:solidFill>
+          <a:ln xmlns:a="http://schemas.openxmlformats.org/drawingml/2006/main" w="9525">
+            <a:solidFill>
+              <a:srgbClr val="B8BCC4"/>
+            </a:solidFill>
+            <a:prstDash val="solid"/>
+          </a:ln>
+        </p:spPr>
+      </p:sp>
+      <p:sp>
+        <p:nvSpPr>
+          <p:cNvPr id="69" name="">
+            <a:extLst xmlns:a="http://schemas.openxmlformats.org/drawingml/2006/main">
+              <a:ext uri="{FF2B5EF4-FFF2-40B4-BE49-F238E27FC236}">
+                <a16:creationId xmlns:a16="http://schemas.microsoft.com/office/drawing/2014/main" id="{457D9E9F-B6B7-4AE5-9B7E-5B1A39429A35}"/>
+              </a:ext>
+            </a:extLst>
+          </p:cNvPr>
+          <p:cNvSpPr>
+            <a:spLocks xmlns:a="http://schemas.openxmlformats.org/drawingml/2006/main" noGrp="1"/>
+          </p:cNvSpPr>
+          <p:nvPr/>
+        </p:nvSpPr>
+        <p:spPr>
+          <a:xfrm xmlns:a="http://schemas.openxmlformats.org/drawingml/2006/main">
+            <a:off x="6057900" y="4343400"/>
+            <a:ext cx="1066800" cy="247650"/>
+          </a:xfrm>
+          <a:prstGeom xmlns:a="http://schemas.openxmlformats.org/drawingml/2006/main" prst="rect">
+            <a:avLst/>
+          </a:prstGeom>
+          <a:noFill xmlns:a="http://schemas.openxmlformats.org/drawingml/2006/main"/>
+          <a:ln xmlns:a="http://schemas.openxmlformats.org/drawingml/2006/main" w="0">
+            <a:noFill/>
+            <a:prstDash val="solid"/>
+          </a:ln>
+        </p:spPr>
+        <p:txBody>
+          <a:bodyPr xmlns:a="http://schemas.openxmlformats.org/drawingml/2006/main"/>
+          <a:lstStyle xmlns:a="http://schemas.openxmlformats.org/drawingml/2006/main"/>
+          <a:p xmlns:a="http://schemas.openxmlformats.org/drawingml/2006/main">
+            <a:pPr>
+              <a:defRPr sz="1200" b="0">
+                <a:solidFill>
+                  <a:srgbClr val="000000"/>
+                </a:solidFill>
+              </a:defRPr>
+            </a:pPr>
+            <a:r>
+              <a:rPr sz="1200" b="0">
+                <a:solidFill>
+                  <a:srgbClr val="000000"/>
+                </a:solidFill>
+              </a:rPr>
+              <a:t>19.3%</a:t>
+            </a:r>
+          </a:p>
+        </p:txBody>
+      </p:sp>
+      <p:sp>
+        <p:nvSpPr>
+          <p:cNvPr id="70" name="">
+            <a:extLst xmlns:a="http://schemas.openxmlformats.org/drawingml/2006/main">
+              <a:ext uri="{FF2B5EF4-FFF2-40B4-BE49-F238E27FC236}">
+                <a16:creationId xmlns:a16="http://schemas.microsoft.com/office/drawing/2014/main" id="{5539FCF2-8005-41E6-BF21-BFB4766C9FF2}"/>
+              </a:ext>
+            </a:extLst>
+          </p:cNvPr>
+          <p:cNvSpPr>
+            <a:spLocks xmlns:a="http://schemas.openxmlformats.org/drawingml/2006/main" noGrp="1"/>
+          </p:cNvSpPr>
+          <p:nvPr/>
+        </p:nvSpPr>
+        <p:spPr>
+          <a:xfrm xmlns:a="http://schemas.openxmlformats.org/drawingml/2006/main">
+            <a:off x="7200900" y="4171950"/>
+            <a:ext cx="1219200" cy="590550"/>
+          </a:xfrm>
+          <a:prstGeom xmlns:a="http://schemas.openxmlformats.org/drawingml/2006/main" prst="rect">
+            <a:avLst/>
+          </a:prstGeom>
+          <a:solidFill xmlns:a="http://schemas.openxmlformats.org/drawingml/2006/main">
+            <a:srgbClr val="FFFFFF"/>
+          </a:solidFill>
+          <a:ln xmlns:a="http://schemas.openxmlformats.org/drawingml/2006/main" w="9525">
+            <a:solidFill>
+              <a:srgbClr val="B8BCC4"/>
+            </a:solidFill>
+            <a:prstDash val="solid"/>
+          </a:ln>
+        </p:spPr>
+      </p:sp>
+      <p:sp>
+        <p:nvSpPr>
+          <p:cNvPr id="71" name="">
+            <a:extLst xmlns:a="http://schemas.openxmlformats.org/drawingml/2006/main">
+              <a:ext uri="{FF2B5EF4-FFF2-40B4-BE49-F238E27FC236}">
+                <a16:creationId xmlns:a16="http://schemas.microsoft.com/office/drawing/2014/main" id="{6278E7AE-F323-4F1F-8F30-7696A197E4A6}"/>
+              </a:ext>
+            </a:extLst>
+          </p:cNvPr>
+          <p:cNvSpPr>
+            <a:spLocks xmlns:a="http://schemas.openxmlformats.org/drawingml/2006/main" noGrp="1"/>
+          </p:cNvSpPr>
+          <p:nvPr/>
+        </p:nvSpPr>
+        <p:spPr>
+          <a:xfrm xmlns:a="http://schemas.openxmlformats.org/drawingml/2006/main">
+            <a:off x="7277100" y="4343400"/>
+            <a:ext cx="1066800" cy="247650"/>
+          </a:xfrm>
+          <a:prstGeom xmlns:a="http://schemas.openxmlformats.org/drawingml/2006/main" prst="rect">
+            <a:avLst/>
+          </a:prstGeom>
+          <a:noFill xmlns:a="http://schemas.openxmlformats.org/drawingml/2006/main"/>
+          <a:ln xmlns:a="http://schemas.openxmlformats.org/drawingml/2006/main" w="0">
+            <a:noFill/>
+            <a:prstDash val="solid"/>
+          </a:ln>
+        </p:spPr>
+        <p:txBody>
+          <a:bodyPr xmlns:a="http://schemas.openxmlformats.org/drawingml/2006/main"/>
+          <a:lstStyle xmlns:a="http://schemas.openxmlformats.org/drawingml/2006/main"/>
+          <a:p xmlns:a="http://schemas.openxmlformats.org/drawingml/2006/main">
+            <a:pPr>
+              <a:defRPr sz="1200" b="0">
+                <a:solidFill>
+                  <a:srgbClr val="000000"/>
+                </a:solidFill>
+              </a:defRPr>
+            </a:pPr>
+            <a:r>
+              <a:rPr sz="1200" b="0">
+                <a:solidFill>
+                  <a:srgbClr val="000000"/>
+                </a:solidFill>
+              </a:rPr>
+              <a:t>-12.8%</a:t>
+            </a:r>
+          </a:p>
+        </p:txBody>
+      </p:sp>
+      <p:sp>
+        <p:nvSpPr>
+          <p:cNvPr id="72" name="">
+            <a:extLst xmlns:a="http://schemas.openxmlformats.org/drawingml/2006/main">
+              <a:ext uri="{FF2B5EF4-FFF2-40B4-BE49-F238E27FC236}">
+                <a16:creationId xmlns:a16="http://schemas.microsoft.com/office/drawing/2014/main" id="{28822748-1C65-4A21-B7A1-C7285390A08D}"/>
+              </a:ext>
+            </a:extLst>
+          </p:cNvPr>
+          <p:cNvSpPr>
+            <a:spLocks xmlns:a="http://schemas.openxmlformats.org/drawingml/2006/main" noGrp="1"/>
+          </p:cNvSpPr>
+          <p:nvPr/>
+        </p:nvSpPr>
+        <p:spPr>
+          <a:xfrm xmlns:a="http://schemas.openxmlformats.org/drawingml/2006/main">
+            <a:off x="8420100" y="4171950"/>
+            <a:ext cx="1047750" cy="590550"/>
+          </a:xfrm>
+          <a:prstGeom xmlns:a="http://schemas.openxmlformats.org/drawingml/2006/main" prst="rect">
+            <a:avLst/>
+          </a:prstGeom>
+          <a:solidFill xmlns:a="http://schemas.openxmlformats.org/drawingml/2006/main">
+            <a:srgbClr val="FFFFFF"/>
+          </a:solidFill>
+          <a:ln xmlns:a="http://schemas.openxmlformats.org/drawingml/2006/main" w="9525">
+            <a:solidFill>
+              <a:srgbClr val="B8BCC4"/>
+            </a:solidFill>
+            <a:prstDash val="solid"/>
+          </a:ln>
+        </p:spPr>
+      </p:sp>
+      <p:sp>
+        <p:nvSpPr>
+          <p:cNvPr id="73" name="">
+            <a:extLst xmlns:a="http://schemas.openxmlformats.org/drawingml/2006/main">
+              <a:ext uri="{FF2B5EF4-FFF2-40B4-BE49-F238E27FC236}">
+                <a16:creationId xmlns:a16="http://schemas.microsoft.com/office/drawing/2014/main" id="{D4F50586-20BF-4513-ADB9-E23230E78C6A}"/>
+              </a:ext>
+            </a:extLst>
+          </p:cNvPr>
+          <p:cNvSpPr>
+            <a:spLocks xmlns:a="http://schemas.openxmlformats.org/drawingml/2006/main" noGrp="1"/>
+          </p:cNvSpPr>
+          <p:nvPr/>
+        </p:nvSpPr>
+        <p:spPr>
+          <a:xfrm xmlns:a="http://schemas.openxmlformats.org/drawingml/2006/main">
+            <a:off x="8496300" y="4343400"/>
+            <a:ext cx="895350" cy="247650"/>
+          </a:xfrm>
+          <a:prstGeom xmlns:a="http://schemas.openxmlformats.org/drawingml/2006/main" prst="rect">
+            <a:avLst/>
+          </a:prstGeom>
+          <a:noFill xmlns:a="http://schemas.openxmlformats.org/drawingml/2006/main"/>
+          <a:ln xmlns:a="http://schemas.openxmlformats.org/drawingml/2006/main" w="0">
+            <a:noFill/>
+            <a:prstDash val="solid"/>
+          </a:ln>
+        </p:spPr>
+        <p:txBody>
+          <a:bodyPr xmlns:a="http://schemas.openxmlformats.org/drawingml/2006/main"/>
+          <a:lstStyle xmlns:a="http://schemas.openxmlformats.org/drawingml/2006/main"/>
+          <a:p xmlns:a="http://schemas.openxmlformats.org/drawingml/2006/main">
+            <a:pPr>
+              <a:defRPr sz="1200" b="0">
+                <a:solidFill>
+                  <a:srgbClr val="000000"/>
+                </a:solidFill>
+              </a:defRPr>
+            </a:pPr>
+            <a:r>
+              <a:rPr sz="1200" b="0">
+                <a:solidFill>
+                  <a:srgbClr val="000000"/>
+                </a:solidFill>
+              </a:rPr>
+              <a:t>19</a:t>
+            </a:r>
+          </a:p>
+        </p:txBody>
+      </p:sp>
+      <p:sp>
+        <p:nvSpPr>
+          <p:cNvPr id="74" name="">
+            <a:extLst xmlns:a="http://schemas.openxmlformats.org/drawingml/2006/main">
+              <a:ext uri="{FF2B5EF4-FFF2-40B4-BE49-F238E27FC236}">
+                <a16:creationId xmlns:a16="http://schemas.microsoft.com/office/drawing/2014/main" id="{BB3C8B4F-01CD-4A87-A309-03CD9F7AAA52}"/>
+              </a:ext>
+            </a:extLst>
+          </p:cNvPr>
+          <p:cNvSpPr>
+            <a:spLocks xmlns:a="http://schemas.openxmlformats.org/drawingml/2006/main" noGrp="1"/>
+          </p:cNvSpPr>
+          <p:nvPr/>
+        </p:nvSpPr>
+        <p:spPr>
+          <a:xfrm xmlns:a="http://schemas.openxmlformats.org/drawingml/2006/main">
+            <a:off x="1066800" y="5391150"/>
+            <a:ext cx="9753600" cy="590550"/>
+          </a:xfrm>
+          <a:prstGeom xmlns:a="http://schemas.openxmlformats.org/drawingml/2006/main" prst="rect">
+            <a:avLst/>
+          </a:prstGeom>
+          <a:noFill xmlns:a="http://schemas.openxmlformats.org/drawingml/2006/main"/>
+          <a:ln xmlns:a="http://schemas.openxmlformats.org/drawingml/2006/main" w="0">
+            <a:noFill/>
+            <a:prstDash val="solid"/>
+          </a:ln>
+        </p:spPr>
+        <p:txBody>
+          <a:bodyPr xmlns:a="http://schemas.openxmlformats.org/drawingml/2006/main"/>
+          <a:lstStyle xmlns:a="http://schemas.openxmlformats.org/drawingml/2006/main"/>
+          <a:p xmlns:a="http://schemas.openxmlformats.org/drawingml/2006/main">
+            <a:pPr algn="ctr">
+              <a:defRPr sz="1725" b="1">
+                <a:solidFill>
+                  <a:srgbClr val="000000"/>
+                </a:solidFill>
+              </a:defRPr>
+            </a:pPr>
+            <a:r>
+              <a:rPr sz="1725" b="1">
+                <a:solidFill>
+                  <a:srgbClr val="000000"/>
+                </a:solidFill>
+              </a:rPr>
+              <a:t>The reopened pool improved 2022 defense, but it cut 2020 exposure and return sharply. That is useful selectivity evidence, not a solution to the high-beta upside capture problem.</a:t>
+            </a:r>
+          </a:p>
+        </p:txBody>
+      </p:sp>
+      <p:sp>
+        <p:nvSpPr>
+          <p:cNvPr id="75" name="">
+            <a:extLst xmlns:a="http://schemas.openxmlformats.org/drawingml/2006/main">
+              <a:ext uri="{FF2B5EF4-FFF2-40B4-BE49-F238E27FC236}">
+                <a16:creationId xmlns:a16="http://schemas.microsoft.com/office/drawing/2014/main" id="{D3ACE3C3-9D17-4233-A1ED-5AF31954541B}"/>
+              </a:ext>
+            </a:extLst>
+          </p:cNvPr>
+          <p:cNvSpPr>
+            <a:spLocks xmlns:a="http://schemas.openxmlformats.org/drawingml/2006/main" noGrp="1"/>
+          </p:cNvSpPr>
+          <p:nvPr/>
+        </p:nvSpPr>
+        <p:spPr>
+          <a:xfrm xmlns:a="http://schemas.openxmlformats.org/drawingml/2006/main">
+            <a:off x="514350" y="6477000"/>
+            <a:ext cx="11163300" cy="209550"/>
+          </a:xfrm>
+          <a:prstGeom xmlns:a="http://schemas.openxmlformats.org/drawingml/2006/main" prst="rect">
+            <a:avLst/>
+          </a:prstGeom>
+          <a:noFill xmlns:a="http://schemas.openxmlformats.org/drawingml/2006/main"/>
+          <a:ln xmlns:a="http://schemas.openxmlformats.org/drawingml/2006/main" w="0">
+            <a:noFill/>
+            <a:prstDash val="solid"/>
+          </a:ln>
+        </p:spPr>
+        <p:txBody>
+          <a:bodyPr xmlns:a="http://schemas.openxmlformats.org/drawingml/2006/main"/>
+          <a:lstStyle xmlns:a="http://schemas.openxmlformats.org/drawingml/2006/main"/>
+          <a:p xmlns:a="http://schemas.openxmlformats.org/drawingml/2006/main">
+            <a:pPr>
+              <a:defRPr sz="900" b="0">
+                <a:solidFill>
+                  <a:srgbClr val="555555"/>
+                </a:solidFill>
+              </a:defRPr>
+            </a:pPr>
+            <a:r>
+              <a:rPr sz="900" b="0">
+                <a:solidFill>
+                  <a:srgbClr val="555555"/>
+                </a:solidFill>
+              </a:rPr>
+              <a:t>Research/inspection only. Not allocation evidence or live-advice behavior.</a:t>
+            </a:r>
+          </a:p>
+        </p:txBody>
+      </p:sp>
+    </p:spTree>
+    <p:extLst>
+      <p:ext uri="{BB962C8B-B14F-4D97-AF65-F5344CB8AC3E}">
+        <p14:creationId xmlns:p14="http://schemas.microsoft.com/office/powerpoint/2010/main" val="104660955"/>
+      </p:ext>
+    </p:extLst>
+  </p:cSld>
+</p:sld>
+</file>
+
+<file path=ppt/slides/slide17.xml><?xml version="1.0" encoding="utf-8"?>
+<p:sld xmlns:p="http://schemas.openxmlformats.org/presentationml/2006/main">
+  <p:cSld>
+    <p:bg>
+      <p:bgPr>
+        <a:solidFill xmlns:a="http://schemas.openxmlformats.org/drawingml/2006/main">
+          <a:srgbClr val="FFFFFF"/>
+        </a:solidFill>
+      </p:bgPr>
+    </p:bg>
+    <p:spTree>
+      <p:nvGrpSpPr>
+        <p:cNvPr id="1" name=""/>
+        <p:cNvGrpSpPr/>
+        <p:nvPr/>
+      </p:nvGrpSpPr>
+      <p:grpSpPr>
+        <a:xfrm xmlns:a="http://schemas.openxmlformats.org/drawingml/2006/main"/>
+      </p:grpSpPr>
+      <p:sp>
+        <p:nvSpPr>
+          <p:cNvPr id="1" name="">
+            <a:extLst xmlns:a="http://schemas.openxmlformats.org/drawingml/2006/main">
+              <a:ext uri="{FF2B5EF4-FFF2-40B4-BE49-F238E27FC236}">
+                <a16:creationId xmlns:a16="http://schemas.microsoft.com/office/drawing/2014/main" id="{B33F7137-2BC7-48D5-8B5C-3AB81FDBC4DB}"/>
+              </a:ext>
+            </a:extLst>
+          </p:cNvPr>
+          <p:cNvSpPr>
+            <a:spLocks xmlns:a="http://schemas.openxmlformats.org/drawingml/2006/main" noGrp="1"/>
+          </p:cNvSpPr>
+          <p:nvPr/>
+        </p:nvSpPr>
+        <p:spPr>
+          <a:xfrm xmlns:a="http://schemas.openxmlformats.org/drawingml/2006/main">
+            <a:off x="514350" y="266700"/>
+            <a:ext cx="5905500" cy="228600"/>
+          </a:xfrm>
+          <a:prstGeom xmlns:a="http://schemas.openxmlformats.org/drawingml/2006/main" prst="rect">
+            <a:avLst/>
+          </a:prstGeom>
+          <a:noFill xmlns:a="http://schemas.openxmlformats.org/drawingml/2006/main"/>
+          <a:ln xmlns:a="http://schemas.openxmlformats.org/drawingml/2006/main" w="0">
+            <a:noFill/>
+            <a:prstDash val="solid"/>
+          </a:ln>
+        </p:spPr>
+        <p:txBody>
+          <a:bodyPr xmlns:a="http://schemas.openxmlformats.org/drawingml/2006/main"/>
+          <a:lstStyle xmlns:a="http://schemas.openxmlformats.org/drawingml/2006/main"/>
+          <a:p xmlns:a="http://schemas.openxmlformats.org/drawingml/2006/main">
+            <a:pPr>
+              <a:defRPr sz="1050" b="1">
+                <a:solidFill>
+                  <a:srgbClr val="555555"/>
+                </a:solidFill>
+              </a:defRPr>
+            </a:pPr>
+            <a:r>
+              <a:rPr sz="1050" b="1">
+                <a:solidFill>
+                  <a:srgbClr val="555555"/>
+                </a:solidFill>
+              </a:rPr>
+              <a:t>GEN5.3 MOMENTUM CONTEXT-SIZE SCREEN</a:t>
+            </a:r>
+          </a:p>
+        </p:txBody>
+      </p:sp>
+      <p:sp>
+        <p:nvSpPr>
+          <p:cNvPr id="2" name="">
+            <a:extLst xmlns:a="http://schemas.openxmlformats.org/drawingml/2006/main">
+              <a:ext uri="{FF2B5EF4-FFF2-40B4-BE49-F238E27FC236}">
+                <a16:creationId xmlns:a16="http://schemas.microsoft.com/office/drawing/2014/main" id="{D66E7909-ED18-456E-B89C-60F0E7F1EE34}"/>
+              </a:ext>
+            </a:extLst>
+          </p:cNvPr>
+          <p:cNvSpPr>
+            <a:spLocks xmlns:a="http://schemas.openxmlformats.org/drawingml/2006/main" noGrp="1"/>
+          </p:cNvSpPr>
+          <p:nvPr/>
+        </p:nvSpPr>
+        <p:spPr>
+          <a:xfrm xmlns:a="http://schemas.openxmlformats.org/drawingml/2006/main">
+            <a:off x="514350" y="628650"/>
+            <a:ext cx="10287000" cy="990600"/>
+          </a:xfrm>
+          <a:prstGeom xmlns:a="http://schemas.openxmlformats.org/drawingml/2006/main" prst="rect">
+            <a:avLst/>
+          </a:prstGeom>
+          <a:noFill xmlns:a="http://schemas.openxmlformats.org/drawingml/2006/main"/>
+          <a:ln xmlns:a="http://schemas.openxmlformats.org/drawingml/2006/main" w="0">
+            <a:noFill/>
+            <a:prstDash val="solid"/>
+          </a:ln>
+        </p:spPr>
+        <p:txBody>
+          <a:bodyPr xmlns:a="http://schemas.openxmlformats.org/drawingml/2006/main"/>
+          <a:lstStyle xmlns:a="http://schemas.openxmlformats.org/drawingml/2006/main"/>
+          <a:p xmlns:a="http://schemas.openxmlformats.org/drawingml/2006/main">
+            <a:pPr>
+              <a:defRPr sz="2850" b="1">
+                <a:solidFill>
+                  <a:srgbClr val="000000"/>
+                </a:solidFill>
+              </a:defRPr>
+            </a:pPr>
+            <a:r>
+              <a:rPr sz="2850" b="1">
+                <a:solidFill>
+                  <a:srgbClr val="000000"/>
+                </a:solidFill>
+              </a:rPr>
+              <a:t>The strategy map explains the defensive readout</a:t>
+            </a:r>
+          </a:p>
+        </p:txBody>
+      </p:sp>
+      <p:sp>
+        <p:nvSpPr>
+          <p:cNvPr id="3" name="">
+            <a:extLst xmlns:a="http://schemas.openxmlformats.org/drawingml/2006/main">
+              <a:ext uri="{FF2B5EF4-FFF2-40B4-BE49-F238E27FC236}">
+                <a16:creationId xmlns:a16="http://schemas.microsoft.com/office/drawing/2014/main" id="{BD4A86E7-5997-449F-9828-1314BBDE61C1}"/>
+              </a:ext>
+            </a:extLst>
+          </p:cNvPr>
+          <p:cNvSpPr>
+            <a:spLocks xmlns:a="http://schemas.openxmlformats.org/drawingml/2006/main" noGrp="1"/>
+          </p:cNvSpPr>
+          <p:nvPr/>
+        </p:nvSpPr>
+        <p:spPr>
+          <a:xfrm xmlns:a="http://schemas.openxmlformats.org/drawingml/2006/main">
+            <a:off x="514350" y="1619250"/>
+            <a:ext cx="11163300" cy="9525"/>
+          </a:xfrm>
+          <a:prstGeom xmlns:a="http://schemas.openxmlformats.org/drawingml/2006/main" prst="rect">
+            <a:avLst/>
+          </a:prstGeom>
+          <a:solidFill xmlns:a="http://schemas.openxmlformats.org/drawingml/2006/main">
+            <a:srgbClr val="B8BCC4"/>
+          </a:solidFill>
+          <a:ln xmlns:a="http://schemas.openxmlformats.org/drawingml/2006/main" w="9525">
+            <a:solidFill>
+              <a:srgbClr val="B8BCC4"/>
+            </a:solidFill>
+            <a:prstDash val="solid"/>
+          </a:ln>
+        </p:spPr>
+      </p:sp>
+      <p:pic>
+        <p:nvPicPr>
+          <p:cNvPr id="18" name=""/>
+          <p:cNvPicPr>
+            <a:picLocks xmlns:a="http://schemas.openxmlformats.org/drawingml/2006/main" noChangeAspect="1"/>
+          </p:cNvPicPr>
+          <p:nvPr/>
+        </p:nvPicPr>
+        <p:blipFill>
+          <a:blip xmlns:r="http://schemas.openxmlformats.org/officeDocument/2006/relationships" xmlns:a="http://schemas.openxmlformats.org/drawingml/2006/main" r:embed="R0c1bec96a69743c6"/>
+          <a:stretch xmlns:a="http://schemas.openxmlformats.org/drawingml/2006/main"/>
+        </p:blipFill>
+        <p:spPr>
+          <a:xfrm xmlns:a="http://schemas.openxmlformats.org/drawingml/2006/main">
+            <a:off x="571500" y="1744540"/>
+            <a:ext cx="6667500" cy="4359519"/>
+          </a:xfrm>
+          <a:prstGeom xmlns:a="http://schemas.openxmlformats.org/drawingml/2006/main" prst="rect">
+            <a:avLst/>
+          </a:prstGeom>
+        </p:spPr>
+      </p:pic>
+      <p:sp>
+        <p:nvSpPr>
+          <p:cNvPr id="5" name="">
+            <a:extLst xmlns:a="http://schemas.openxmlformats.org/drawingml/2006/main">
+              <a:ext uri="{FF2B5EF4-FFF2-40B4-BE49-F238E27FC236}">
+                <a16:creationId xmlns:a16="http://schemas.microsoft.com/office/drawing/2014/main" id="{D575E13C-97C8-4F82-8E91-BA643A026DA7}"/>
+              </a:ext>
+            </a:extLst>
+          </p:cNvPr>
+          <p:cNvSpPr>
+            <a:spLocks xmlns:a="http://schemas.openxmlformats.org/drawingml/2006/main" noGrp="1"/>
+          </p:cNvSpPr>
+          <p:nvPr/>
+        </p:nvSpPr>
+        <p:spPr>
+          <a:xfrm xmlns:a="http://schemas.openxmlformats.org/drawingml/2006/main">
+            <a:off x="7810500" y="2171700"/>
+            <a:ext cx="3181350" cy="2667000"/>
+          </a:xfrm>
+          <a:prstGeom xmlns:a="http://schemas.openxmlformats.org/drawingml/2006/main" prst="rect">
+            <a:avLst/>
+          </a:prstGeom>
+          <a:solidFill xmlns:a="http://schemas.openxmlformats.org/drawingml/2006/main">
+            <a:srgbClr val="EDEDED"/>
+          </a:solidFill>
+          <a:ln xmlns:a="http://schemas.openxmlformats.org/drawingml/2006/main" w="9525">
+            <a:solidFill>
+              <a:srgbClr val="B8BCC4"/>
+            </a:solidFill>
+            <a:prstDash val="solid"/>
+          </a:ln>
+        </p:spPr>
+      </p:sp>
+      <p:sp>
+        <p:nvSpPr>
           <p:cNvPr id="6" name="">
             <a:extLst xmlns:a="http://schemas.openxmlformats.org/drawingml/2006/main">
               <a:ext uri="{FF2B5EF4-FFF2-40B4-BE49-F238E27FC236}">
-                <a16:creationId xmlns:a16="http://schemas.microsoft.com/office/drawing/2014/main" id="{5C05C659-ADE7-4EAD-87DD-AEF27A7A1CE4}"/>
-              </a:ext>
-            </a:extLst>
-          </p:cNvPr>
-          <p:cNvSpPr>
-            <a:spLocks xmlns:a="http://schemas.openxmlformats.org/drawingml/2006/main" noGrp="1"/>
-          </p:cNvSpPr>
-          <p:nvPr/>
-        </p:nvSpPr>
-        <p:spPr>
-          <a:xfrm xmlns:a="http://schemas.openxmlformats.org/drawingml/2006/main">
-            <a:off x="1143000" y="2400300"/>
-            <a:ext cx="3048000" cy="323850"/>
-          </a:xfrm>
-          <a:prstGeom xmlns:a="http://schemas.openxmlformats.org/drawingml/2006/main" prst="rect">
-            <a:avLst/>
-          </a:prstGeom>
-          <a:noFill xmlns:a="http://schemas.openxmlformats.org/drawingml/2006/main"/>
-          <a:ln xmlns:a="http://schemas.openxmlformats.org/drawingml/2006/main" w="0">
-            <a:noFill/>
-            <a:prstDash val="solid"/>
-          </a:ln>
-        </p:spPr>
-        <p:txBody>
-          <a:bodyPr xmlns:a="http://schemas.openxmlformats.org/drawingml/2006/main"/>
-          <a:lstStyle xmlns:a="http://schemas.openxmlformats.org/drawingml/2006/main"/>
-          <a:p xmlns:a="http://schemas.openxmlformats.org/drawingml/2006/main">
-            <a:pPr>
-              <a:defRPr sz="2100" b="1">
-                <a:solidFill>
-                  <a:srgbClr val="FF6B35"/>
-                </a:solidFill>
-              </a:defRPr>
-            </a:pPr>
-            <a:r>
-              <a:rPr sz="2100" b="1">
-                <a:solidFill>
-                  <a:srgbClr val="FF6B35"/>
-                </a:solidFill>
-              </a:rPr>
-              <a:t>What we learned</a:t>
+                <a16:creationId xmlns:a16="http://schemas.microsoft.com/office/drawing/2014/main" id="{1FA85324-F310-4463-B659-4D69BD7A4850}"/>
+              </a:ext>
+            </a:extLst>
+          </p:cNvPr>
+          <p:cNvSpPr>
+            <a:spLocks xmlns:a="http://schemas.openxmlformats.org/drawingml/2006/main" noGrp="1"/>
+          </p:cNvSpPr>
+          <p:nvPr/>
+        </p:nvSpPr>
+        <p:spPr>
+          <a:xfrm xmlns:a="http://schemas.openxmlformats.org/drawingml/2006/main">
+            <a:off x="8115300" y="2457450"/>
+            <a:ext cx="2286000" cy="304800"/>
+          </a:xfrm>
+          <a:prstGeom xmlns:a="http://schemas.openxmlformats.org/drawingml/2006/main" prst="rect">
+            <a:avLst/>
+          </a:prstGeom>
+          <a:noFill xmlns:a="http://schemas.openxmlformats.org/drawingml/2006/main"/>
+          <a:ln xmlns:a="http://schemas.openxmlformats.org/drawingml/2006/main" w="0">
+            <a:noFill/>
+            <a:prstDash val="solid"/>
+          </a:ln>
+        </p:spPr>
+        <p:txBody>
+          <a:bodyPr xmlns:a="http://schemas.openxmlformats.org/drawingml/2006/main"/>
+          <a:lstStyle xmlns:a="http://schemas.openxmlformats.org/drawingml/2006/main"/>
+          <a:p xmlns:a="http://schemas.openxmlformats.org/drawingml/2006/main">
+            <a:pPr>
+              <a:defRPr sz="1950" b="1">
+                <a:solidFill>
+                  <a:srgbClr val="000000"/>
+                </a:solidFill>
+              </a:defRPr>
+            </a:pPr>
+            <a:r>
+              <a:rPr sz="1950" b="1">
+                <a:solidFill>
+                  <a:srgbClr val="000000"/>
+                </a:solidFill>
+              </a:rPr>
+              <a:t>Visual read</a:t>
             </a:r>
           </a:p>
         </p:txBody>
@@ -8963,18 +12186,18 @@
           <p:cNvPr id="7" name="">
             <a:extLst xmlns:a="http://schemas.openxmlformats.org/drawingml/2006/main">
               <a:ext uri="{FF2B5EF4-FFF2-40B4-BE49-F238E27FC236}">
-                <a16:creationId xmlns:a16="http://schemas.microsoft.com/office/drawing/2014/main" id="{CBACE349-6232-48B7-B3D9-E6C9A8D961AB}"/>
-              </a:ext>
-            </a:extLst>
-          </p:cNvPr>
-          <p:cNvSpPr>
-            <a:spLocks xmlns:a="http://schemas.openxmlformats.org/drawingml/2006/main" noGrp="1"/>
-          </p:cNvSpPr>
-          <p:nvPr/>
-        </p:nvSpPr>
-        <p:spPr>
-          <a:xfrm xmlns:a="http://schemas.openxmlformats.org/drawingml/2006/main">
-            <a:off x="1162050" y="3086100"/>
+                <a16:creationId xmlns:a16="http://schemas.microsoft.com/office/drawing/2014/main" id="{11B3F744-8855-419E-9366-703943E30D3E}"/>
+              </a:ext>
+            </a:extLst>
+          </p:cNvPr>
+          <p:cNvSpPr>
+            <a:spLocks xmlns:a="http://schemas.openxmlformats.org/drawingml/2006/main" noGrp="1"/>
+          </p:cNvSpPr>
+          <p:nvPr/>
+        </p:nvSpPr>
+        <p:spPr>
+          <a:xfrm xmlns:a="http://schemas.openxmlformats.org/drawingml/2006/main">
+            <a:off x="8134350" y="3143250"/>
             <a:ext cx="76200" cy="76200"/>
           </a:xfrm>
           <a:prstGeom xmlns:a="http://schemas.openxmlformats.org/drawingml/2006/main" prst="rect">
@@ -8996,19 +12219,19 @@
           <p:cNvPr id="8" name="">
             <a:extLst xmlns:a="http://schemas.openxmlformats.org/drawingml/2006/main">
               <a:ext uri="{FF2B5EF4-FFF2-40B4-BE49-F238E27FC236}">
-                <a16:creationId xmlns:a16="http://schemas.microsoft.com/office/drawing/2014/main" id="{910CFCBC-06FC-48BD-81EB-E20FDDD436D1}"/>
-              </a:ext>
-            </a:extLst>
-          </p:cNvPr>
-          <p:cNvSpPr>
-            <a:spLocks xmlns:a="http://schemas.openxmlformats.org/drawingml/2006/main" noGrp="1"/>
-          </p:cNvSpPr>
-          <p:nvPr/>
-        </p:nvSpPr>
-        <p:spPr>
-          <a:xfrm xmlns:a="http://schemas.openxmlformats.org/drawingml/2006/main">
-            <a:off x="1371600" y="2990850"/>
-            <a:ext cx="3124200" cy="495300"/>
+                <a16:creationId xmlns:a16="http://schemas.microsoft.com/office/drawing/2014/main" id="{AFEF0CA4-5F5B-43B2-AAA0-2504F1C6693E}"/>
+              </a:ext>
+            </a:extLst>
+          </p:cNvPr>
+          <p:cNvSpPr>
+            <a:spLocks xmlns:a="http://schemas.openxmlformats.org/drawingml/2006/main" noGrp="1"/>
+          </p:cNvSpPr>
+          <p:nvPr/>
+        </p:nvSpPr>
+        <p:spPr>
+          <a:xfrm xmlns:a="http://schemas.openxmlformats.org/drawingml/2006/main">
+            <a:off x="8343900" y="3048000"/>
+            <a:ext cx="2133600" cy="533400"/>
           </a:xfrm>
           <a:prstGeom xmlns:a="http://schemas.openxmlformats.org/drawingml/2006/main" prst="rect">
             <a:avLst/>
@@ -9036,7 +12259,7 @@
                   <a:srgbClr val="000000"/>
                 </a:solidFill>
               </a:rPr>
-              <a:t>EMA-only feature diagnostics are cheap enough for interactive iteration.</a:t>
+              <a:t>Most asset-state cells still select cash.</a:t>
             </a:r>
           </a:p>
         </p:txBody>
@@ -9046,18 +12269,18 @@
           <p:cNvPr id="9" name="">
             <a:extLst xmlns:a="http://schemas.openxmlformats.org/drawingml/2006/main">
               <a:ext uri="{FF2B5EF4-FFF2-40B4-BE49-F238E27FC236}">
-                <a16:creationId xmlns:a16="http://schemas.microsoft.com/office/drawing/2014/main" id="{B3C50FD6-C7D5-40D2-AACD-709D3F5E87DC}"/>
-              </a:ext>
-            </a:extLst>
-          </p:cNvPr>
-          <p:cNvSpPr>
-            <a:spLocks xmlns:a="http://schemas.openxmlformats.org/drawingml/2006/main" noGrp="1"/>
-          </p:cNvSpPr>
-          <p:nvPr/>
-        </p:nvSpPr>
-        <p:spPr>
-          <a:xfrm xmlns:a="http://schemas.openxmlformats.org/drawingml/2006/main">
-            <a:off x="1162050" y="3524250"/>
+                <a16:creationId xmlns:a16="http://schemas.microsoft.com/office/drawing/2014/main" id="{97F1CA95-0C49-46B6-8962-B83025F95DBC}"/>
+              </a:ext>
+            </a:extLst>
+          </p:cNvPr>
+          <p:cNvSpPr>
+            <a:spLocks xmlns:a="http://schemas.openxmlformats.org/drawingml/2006/main" noGrp="1"/>
+          </p:cNvSpPr>
+          <p:nvPr/>
+        </p:nvSpPr>
+        <p:spPr>
+          <a:xfrm xmlns:a="http://schemas.openxmlformats.org/drawingml/2006/main">
+            <a:off x="8134350" y="3619500"/>
             <a:ext cx="76200" cy="76200"/>
           </a:xfrm>
           <a:prstGeom xmlns:a="http://schemas.openxmlformats.org/drawingml/2006/main" prst="rect">
@@ -9079,19 +12302,19 @@
           <p:cNvPr id="10" name="">
             <a:extLst xmlns:a="http://schemas.openxmlformats.org/drawingml/2006/main">
               <a:ext uri="{FF2B5EF4-FFF2-40B4-BE49-F238E27FC236}">
-                <a16:creationId xmlns:a16="http://schemas.microsoft.com/office/drawing/2014/main" id="{E7E4A6E5-6E04-43B0-8148-7D89E94840E6}"/>
-              </a:ext>
-            </a:extLst>
-          </p:cNvPr>
-          <p:cNvSpPr>
-            <a:spLocks xmlns:a="http://schemas.openxmlformats.org/drawingml/2006/main" noGrp="1"/>
-          </p:cNvSpPr>
-          <p:nvPr/>
-        </p:nvSpPr>
-        <p:spPr>
-          <a:xfrm xmlns:a="http://schemas.openxmlformats.org/drawingml/2006/main">
-            <a:off x="1371600" y="3429000"/>
-            <a:ext cx="3124200" cy="495300"/>
+                <a16:creationId xmlns:a16="http://schemas.microsoft.com/office/drawing/2014/main" id="{B2DA70D5-3858-4C8F-8810-C517368A820A}"/>
+              </a:ext>
+            </a:extLst>
+          </p:cNvPr>
+          <p:cNvSpPr>
+            <a:spLocks xmlns:a="http://schemas.openxmlformats.org/drawingml/2006/main" noGrp="1"/>
+          </p:cNvSpPr>
+          <p:nvPr/>
+        </p:nvSpPr>
+        <p:spPr>
+          <a:xfrm xmlns:a="http://schemas.openxmlformats.org/drawingml/2006/main">
+            <a:off x="8343900" y="3524250"/>
+            <a:ext cx="2133600" cy="533400"/>
           </a:xfrm>
           <a:prstGeom xmlns:a="http://schemas.openxmlformats.org/drawingml/2006/main" prst="rect">
             <a:avLst/>
@@ -9119,7 +12342,7 @@
                   <a:srgbClr val="000000"/>
                 </a:solidFill>
               </a:rPr>
-              <a:t>Trend/breakout authority fitting was much slower: roughly twenty minutes for one quarter across five symbols.</a:t>
+              <a:t>Breakout additions appear only in narrow pockets.</a:t>
             </a:r>
           </a:p>
         </p:txBody>
@@ -9129,18 +12352,18 @@
           <p:cNvPr id="11" name="">
             <a:extLst xmlns:a="http://schemas.openxmlformats.org/drawingml/2006/main">
               <a:ext uri="{FF2B5EF4-FFF2-40B4-BE49-F238E27FC236}">
-                <a16:creationId xmlns:a16="http://schemas.microsoft.com/office/drawing/2014/main" id="{56B1C070-106F-44DA-BBC2-2887B68A594F}"/>
-              </a:ext>
-            </a:extLst>
-          </p:cNvPr>
-          <p:cNvSpPr>
-            <a:spLocks xmlns:a="http://schemas.openxmlformats.org/drawingml/2006/main" noGrp="1"/>
-          </p:cNvSpPr>
-          <p:nvPr/>
-        </p:nvSpPr>
-        <p:spPr>
-          <a:xfrm xmlns:a="http://schemas.openxmlformats.org/drawingml/2006/main">
-            <a:off x="1162050" y="3962400"/>
+                <a16:creationId xmlns:a16="http://schemas.microsoft.com/office/drawing/2014/main" id="{60730A53-9EFD-4733-B9AC-C87C2D197EA9}"/>
+              </a:ext>
+            </a:extLst>
+          </p:cNvPr>
+          <p:cNvSpPr>
+            <a:spLocks xmlns:a="http://schemas.openxmlformats.org/drawingml/2006/main" noGrp="1"/>
+          </p:cNvSpPr>
+          <p:nvPr/>
+        </p:nvSpPr>
+        <p:spPr>
+          <a:xfrm xmlns:a="http://schemas.openxmlformats.org/drawingml/2006/main">
+            <a:off x="8134350" y="4095750"/>
             <a:ext cx="76200" cy="76200"/>
           </a:xfrm>
           <a:prstGeom xmlns:a="http://schemas.openxmlformats.org/drawingml/2006/main" prst="rect">
@@ -9162,19 +12385,19 @@
           <p:cNvPr id="12" name="">
             <a:extLst xmlns:a="http://schemas.openxmlformats.org/drawingml/2006/main">
               <a:ext uri="{FF2B5EF4-FFF2-40B4-BE49-F238E27FC236}">
-                <a16:creationId xmlns:a16="http://schemas.microsoft.com/office/drawing/2014/main" id="{34484023-BB6A-4BB2-8074-F70BF4C3FF58}"/>
-              </a:ext>
-            </a:extLst>
-          </p:cNvPr>
-          <p:cNvSpPr>
-            <a:spLocks xmlns:a="http://schemas.openxmlformats.org/drawingml/2006/main" noGrp="1"/>
-          </p:cNvSpPr>
-          <p:nvPr/>
-        </p:nvSpPr>
-        <p:spPr>
-          <a:xfrm xmlns:a="http://schemas.openxmlformats.org/drawingml/2006/main">
-            <a:off x="1371600" y="3867150"/>
-            <a:ext cx="3124200" cy="495300"/>
+                <a16:creationId xmlns:a16="http://schemas.microsoft.com/office/drawing/2014/main" id="{4E96E7D1-5955-4CD5-998D-6AA1A09FA85C}"/>
+              </a:ext>
+            </a:extLst>
+          </p:cNvPr>
+          <p:cNvSpPr>
+            <a:spLocks xmlns:a="http://schemas.openxmlformats.org/drawingml/2006/main" noGrp="1"/>
+          </p:cNvSpPr>
+          <p:nvPr/>
+        </p:nvSpPr>
+        <p:spPr>
+          <a:xfrm xmlns:a="http://schemas.openxmlformats.org/drawingml/2006/main">
+            <a:off x="8343900" y="4000500"/>
+            <a:ext cx="2133600" cy="533400"/>
           </a:xfrm>
           <a:prstGeom xmlns:a="http://schemas.openxmlformats.org/drawingml/2006/main" prst="rect">
             <a:avLst/>
@@ -9202,7 +12425,7 @@
                   <a:srgbClr val="000000"/>
                 </a:solidFill>
               </a:rPr>
-              <a:t>A full four-window reopened-pool sweep would be a dedicated compute job.</a:t>
+              <a:t>The pool reduced drawdown but did not keep the system long enough in 2020.</a:t>
             </a:r>
           </a:p>
         </p:txBody>
@@ -9212,47 +12435,47 @@
           <p:cNvPr id="13" name="">
             <a:extLst xmlns:a="http://schemas.openxmlformats.org/drawingml/2006/main">
               <a:ext uri="{FF2B5EF4-FFF2-40B4-BE49-F238E27FC236}">
-                <a16:creationId xmlns:a16="http://schemas.microsoft.com/office/drawing/2014/main" id="{7249CD6A-1379-4077-8562-BD60DF50F692}"/>
-              </a:ext>
-            </a:extLst>
-          </p:cNvPr>
-          <p:cNvSpPr>
-            <a:spLocks xmlns:a="http://schemas.openxmlformats.org/drawingml/2006/main" noGrp="1"/>
-          </p:cNvSpPr>
-          <p:nvPr/>
-        </p:nvSpPr>
-        <p:spPr>
-          <a:xfrm xmlns:a="http://schemas.openxmlformats.org/drawingml/2006/main">
-            <a:off x="6800850" y="2400300"/>
-            <a:ext cx="3429000" cy="323850"/>
-          </a:xfrm>
-          <a:prstGeom xmlns:a="http://schemas.openxmlformats.org/drawingml/2006/main" prst="rect">
-            <a:avLst/>
-          </a:prstGeom>
-          <a:noFill xmlns:a="http://schemas.openxmlformats.org/drawingml/2006/main"/>
-          <a:ln xmlns:a="http://schemas.openxmlformats.org/drawingml/2006/main" w="0">
-            <a:noFill/>
-            <a:prstDash val="solid"/>
-          </a:ln>
-        </p:spPr>
-        <p:txBody>
-          <a:bodyPr xmlns:a="http://schemas.openxmlformats.org/drawingml/2006/main"/>
-          <a:lstStyle xmlns:a="http://schemas.openxmlformats.org/drawingml/2006/main"/>
-          <a:p xmlns:a="http://schemas.openxmlformats.org/drawingml/2006/main">
-            <a:pPr>
-              <a:defRPr sz="1950" b="1">
-                <a:solidFill>
-                  <a:srgbClr val="067647"/>
-                </a:solidFill>
-              </a:defRPr>
-            </a:pPr>
-            <a:r>
-              <a:rPr sz="1950" b="1">
-                <a:solidFill>
-                  <a:srgbClr val="067647"/>
-                </a:solidFill>
-              </a:rPr>
-              <a:t>Recommended next compute slice</a:t>
+                <a16:creationId xmlns:a16="http://schemas.microsoft.com/office/drawing/2014/main" id="{BCD3DC73-A490-4BCA-A4B8-28B4473D4194}"/>
+              </a:ext>
+            </a:extLst>
+          </p:cNvPr>
+          <p:cNvSpPr>
+            <a:spLocks xmlns:a="http://schemas.openxmlformats.org/drawingml/2006/main" noGrp="1"/>
+          </p:cNvSpPr>
+          <p:nvPr/>
+        </p:nvSpPr>
+        <p:spPr>
+          <a:xfrm xmlns:a="http://schemas.openxmlformats.org/drawingml/2006/main">
+            <a:off x="1047750" y="5619750"/>
+            <a:ext cx="9810750" cy="400050"/>
+          </a:xfrm>
+          <a:prstGeom xmlns:a="http://schemas.openxmlformats.org/drawingml/2006/main" prst="rect">
+            <a:avLst/>
+          </a:prstGeom>
+          <a:noFill xmlns:a="http://schemas.openxmlformats.org/drawingml/2006/main"/>
+          <a:ln xmlns:a="http://schemas.openxmlformats.org/drawingml/2006/main" w="0">
+            <a:noFill/>
+            <a:prstDash val="solid"/>
+          </a:ln>
+        </p:spPr>
+        <p:txBody>
+          <a:bodyPr xmlns:a="http://schemas.openxmlformats.org/drawingml/2006/main"/>
+          <a:lstStyle xmlns:a="http://schemas.openxmlformats.org/drawingml/2006/main"/>
+          <a:p xmlns:a="http://schemas.openxmlformats.org/drawingml/2006/main">
+            <a:pPr algn="ctr">
+              <a:defRPr sz="1650" b="1">
+                <a:solidFill>
+                  <a:srgbClr val="000000"/>
+                </a:solidFill>
+              </a:defRPr>
+            </a:pPr>
+            <a:r>
+              <a:rPr sz="1650" b="1">
+                <a:solidFill>
+                  <a:srgbClr val="000000"/>
+                </a:solidFill>
+              </a:rPr>
+              <a:t>Next question: improve state timing and hold participation directly, instead of assuming a broader family list will create upside capture.</a:t>
             </a:r>
           </a:p>
         </p:txBody>
@@ -9262,389 +12485,7 @@
           <p:cNvPr id="14" name="">
             <a:extLst xmlns:a="http://schemas.openxmlformats.org/drawingml/2006/main">
               <a:ext uri="{FF2B5EF4-FFF2-40B4-BE49-F238E27FC236}">
-                <a16:creationId xmlns:a16="http://schemas.microsoft.com/office/drawing/2014/main" id="{FA4E5DB5-3BDD-4151-B2CD-B4B284EA5A7E}"/>
-              </a:ext>
-            </a:extLst>
-          </p:cNvPr>
-          <p:cNvSpPr>
-            <a:spLocks xmlns:a="http://schemas.openxmlformats.org/drawingml/2006/main" noGrp="1"/>
-          </p:cNvSpPr>
-          <p:nvPr/>
-        </p:nvSpPr>
-        <p:spPr>
-          <a:xfrm xmlns:a="http://schemas.openxmlformats.org/drawingml/2006/main">
-            <a:off x="6819900" y="3086100"/>
-            <a:ext cx="76200" cy="76200"/>
-          </a:xfrm>
-          <a:prstGeom xmlns:a="http://schemas.openxmlformats.org/drawingml/2006/main" prst="rect">
-            <a:avLst/>
-          </a:prstGeom>
-          <a:solidFill xmlns:a="http://schemas.openxmlformats.org/drawingml/2006/main">
-            <a:srgbClr val="067647"/>
-          </a:solidFill>
-          <a:ln xmlns:a="http://schemas.openxmlformats.org/drawingml/2006/main" w="9525">
-            <a:solidFill>
-              <a:srgbClr val="067647"/>
-            </a:solidFill>
-            <a:prstDash val="solid"/>
-          </a:ln>
-        </p:spPr>
-      </p:sp>
-      <p:sp>
-        <p:nvSpPr>
-          <p:cNvPr id="15" name="">
-            <a:extLst xmlns:a="http://schemas.openxmlformats.org/drawingml/2006/main">
-              <a:ext uri="{FF2B5EF4-FFF2-40B4-BE49-F238E27FC236}">
-                <a16:creationId xmlns:a16="http://schemas.microsoft.com/office/drawing/2014/main" id="{990D5DC9-BD62-40C1-9BA1-85F0BFCC0B37}"/>
-              </a:ext>
-            </a:extLst>
-          </p:cNvPr>
-          <p:cNvSpPr>
-            <a:spLocks xmlns:a="http://schemas.openxmlformats.org/drawingml/2006/main" noGrp="1"/>
-          </p:cNvSpPr>
-          <p:nvPr/>
-        </p:nvSpPr>
-        <p:spPr>
-          <a:xfrm xmlns:a="http://schemas.openxmlformats.org/drawingml/2006/main">
-            <a:off x="7029450" y="2990850"/>
-            <a:ext cx="3124200" cy="438150"/>
-          </a:xfrm>
-          <a:prstGeom xmlns:a="http://schemas.openxmlformats.org/drawingml/2006/main" prst="rect">
-            <a:avLst/>
-          </a:prstGeom>
-          <a:noFill xmlns:a="http://schemas.openxmlformats.org/drawingml/2006/main"/>
-          <a:ln xmlns:a="http://schemas.openxmlformats.org/drawingml/2006/main" w="0">
-            <a:noFill/>
-            <a:prstDash val="solid"/>
-          </a:ln>
-        </p:spPr>
-        <p:txBody>
-          <a:bodyPr xmlns:a="http://schemas.openxmlformats.org/drawingml/2006/main"/>
-          <a:lstStyle xmlns:a="http://schemas.openxmlformats.org/drawingml/2006/main"/>
-          <a:p xmlns:a="http://schemas.openxmlformats.org/drawingml/2006/main">
-            <a:pPr>
-              <a:defRPr sz="1275" b="0">
-                <a:solidFill>
-                  <a:srgbClr val="000000"/>
-                </a:solidFill>
-              </a:defRPr>
-            </a:pPr>
-            <a:r>
-              <a:rPr sz="1275" b="0">
-                <a:solidFill>
-                  <a:srgbClr val="000000"/>
-                </a:solidFill>
-              </a:rPr>
-              <a:t>Keep the control lane fixed.</a:t>
-            </a:r>
-          </a:p>
-        </p:txBody>
-      </p:sp>
-      <p:sp>
-        <p:nvSpPr>
-          <p:cNvPr id="16" name="">
-            <a:extLst xmlns:a="http://schemas.openxmlformats.org/drawingml/2006/main">
-              <a:ext uri="{FF2B5EF4-FFF2-40B4-BE49-F238E27FC236}">
-                <a16:creationId xmlns:a16="http://schemas.microsoft.com/office/drawing/2014/main" id="{6DC3CF53-0939-4950-A00E-2C21EB0381B2}"/>
-              </a:ext>
-            </a:extLst>
-          </p:cNvPr>
-          <p:cNvSpPr>
-            <a:spLocks xmlns:a="http://schemas.openxmlformats.org/drawingml/2006/main" noGrp="1"/>
-          </p:cNvSpPr>
-          <p:nvPr/>
-        </p:nvSpPr>
-        <p:spPr>
-          <a:xfrm xmlns:a="http://schemas.openxmlformats.org/drawingml/2006/main">
-            <a:off x="6819900" y="3467100"/>
-            <a:ext cx="76200" cy="76200"/>
-          </a:xfrm>
-          <a:prstGeom xmlns:a="http://schemas.openxmlformats.org/drawingml/2006/main" prst="rect">
-            <a:avLst/>
-          </a:prstGeom>
-          <a:solidFill xmlns:a="http://schemas.openxmlformats.org/drawingml/2006/main">
-            <a:srgbClr val="067647"/>
-          </a:solidFill>
-          <a:ln xmlns:a="http://schemas.openxmlformats.org/drawingml/2006/main" w="9525">
-            <a:solidFill>
-              <a:srgbClr val="067647"/>
-            </a:solidFill>
-            <a:prstDash val="solid"/>
-          </a:ln>
-        </p:spPr>
-      </p:sp>
-      <p:sp>
-        <p:nvSpPr>
-          <p:cNvPr id="17" name="">
-            <a:extLst xmlns:a="http://schemas.openxmlformats.org/drawingml/2006/main">
-              <a:ext uri="{FF2B5EF4-FFF2-40B4-BE49-F238E27FC236}">
-                <a16:creationId xmlns:a16="http://schemas.microsoft.com/office/drawing/2014/main" id="{75D1D134-5807-4987-8F0F-B708720E91E0}"/>
-              </a:ext>
-            </a:extLst>
-          </p:cNvPr>
-          <p:cNvSpPr>
-            <a:spLocks xmlns:a="http://schemas.openxmlformats.org/drawingml/2006/main" noGrp="1"/>
-          </p:cNvSpPr>
-          <p:nvPr/>
-        </p:nvSpPr>
-        <p:spPr>
-          <a:xfrm xmlns:a="http://schemas.openxmlformats.org/drawingml/2006/main">
-            <a:off x="7029450" y="3371850"/>
-            <a:ext cx="3124200" cy="438150"/>
-          </a:xfrm>
-          <a:prstGeom xmlns:a="http://schemas.openxmlformats.org/drawingml/2006/main" prst="rect">
-            <a:avLst/>
-          </a:prstGeom>
-          <a:noFill xmlns:a="http://schemas.openxmlformats.org/drawingml/2006/main"/>
-          <a:ln xmlns:a="http://schemas.openxmlformats.org/drawingml/2006/main" w="0">
-            <a:noFill/>
-            <a:prstDash val="solid"/>
-          </a:ln>
-        </p:spPr>
-        <p:txBody>
-          <a:bodyPr xmlns:a="http://schemas.openxmlformats.org/drawingml/2006/main"/>
-          <a:lstStyle xmlns:a="http://schemas.openxmlformats.org/drawingml/2006/main"/>
-          <a:p xmlns:a="http://schemas.openxmlformats.org/drawingml/2006/main">
-            <a:pPr>
-              <a:defRPr sz="1275" b="0">
-                <a:solidFill>
-                  <a:srgbClr val="000000"/>
-                </a:solidFill>
-              </a:defRPr>
-            </a:pPr>
-            <a:r>
-              <a:rPr sz="1275" b="0">
-                <a:solidFill>
-                  <a:srgbClr val="000000"/>
-                </a:solidFill>
-              </a:rPr>
-              <a:t>Run one reopened pool at a time.</a:t>
-            </a:r>
-          </a:p>
-        </p:txBody>
-      </p:sp>
-      <p:sp>
-        <p:nvSpPr>
-          <p:cNvPr id="18" name="">
-            <a:extLst xmlns:a="http://schemas.openxmlformats.org/drawingml/2006/main">
-              <a:ext uri="{FF2B5EF4-FFF2-40B4-BE49-F238E27FC236}">
-                <a16:creationId xmlns:a16="http://schemas.microsoft.com/office/drawing/2014/main" id="{8885FE15-E3F1-42B9-945D-7A5211211758}"/>
-              </a:ext>
-            </a:extLst>
-          </p:cNvPr>
-          <p:cNvSpPr>
-            <a:spLocks xmlns:a="http://schemas.openxmlformats.org/drawingml/2006/main" noGrp="1"/>
-          </p:cNvSpPr>
-          <p:nvPr/>
-        </p:nvSpPr>
-        <p:spPr>
-          <a:xfrm xmlns:a="http://schemas.openxmlformats.org/drawingml/2006/main">
-            <a:off x="6819900" y="3848100"/>
-            <a:ext cx="76200" cy="76200"/>
-          </a:xfrm>
-          <a:prstGeom xmlns:a="http://schemas.openxmlformats.org/drawingml/2006/main" prst="rect">
-            <a:avLst/>
-          </a:prstGeom>
-          <a:solidFill xmlns:a="http://schemas.openxmlformats.org/drawingml/2006/main">
-            <a:srgbClr val="067647"/>
-          </a:solidFill>
-          <a:ln xmlns:a="http://schemas.openxmlformats.org/drawingml/2006/main" w="9525">
-            <a:solidFill>
-              <a:srgbClr val="067647"/>
-            </a:solidFill>
-            <a:prstDash val="solid"/>
-          </a:ln>
-        </p:spPr>
-      </p:sp>
-      <p:sp>
-        <p:nvSpPr>
-          <p:cNvPr id="19" name="">
-            <a:extLst xmlns:a="http://schemas.openxmlformats.org/drawingml/2006/main">
-              <a:ext uri="{FF2B5EF4-FFF2-40B4-BE49-F238E27FC236}">
-                <a16:creationId xmlns:a16="http://schemas.microsoft.com/office/drawing/2014/main" id="{97C26625-B45C-4CF1-8ED9-88B900685F36}"/>
-              </a:ext>
-            </a:extLst>
-          </p:cNvPr>
-          <p:cNvSpPr>
-            <a:spLocks xmlns:a="http://schemas.openxmlformats.org/drawingml/2006/main" noGrp="1"/>
-          </p:cNvSpPr>
-          <p:nvPr/>
-        </p:nvSpPr>
-        <p:spPr>
-          <a:xfrm xmlns:a="http://schemas.openxmlformats.org/drawingml/2006/main">
-            <a:off x="7029450" y="3752850"/>
-            <a:ext cx="3124200" cy="438150"/>
-          </a:xfrm>
-          <a:prstGeom xmlns:a="http://schemas.openxmlformats.org/drawingml/2006/main" prst="rect">
-            <a:avLst/>
-          </a:prstGeom>
-          <a:noFill xmlns:a="http://schemas.openxmlformats.org/drawingml/2006/main"/>
-          <a:ln xmlns:a="http://schemas.openxmlformats.org/drawingml/2006/main" w="0">
-            <a:noFill/>
-            <a:prstDash val="solid"/>
-          </a:ln>
-        </p:spPr>
-        <p:txBody>
-          <a:bodyPr xmlns:a="http://schemas.openxmlformats.org/drawingml/2006/main"/>
-          <a:lstStyle xmlns:a="http://schemas.openxmlformats.org/drawingml/2006/main"/>
-          <a:p xmlns:a="http://schemas.openxmlformats.org/drawingml/2006/main">
-            <a:pPr>
-              <a:defRPr sz="1275" b="0">
-                <a:solidFill>
-                  <a:srgbClr val="000000"/>
-                </a:solidFill>
-              </a:defRPr>
-            </a:pPr>
-            <a:r>
-              <a:rPr sz="1275" b="0">
-                <a:solidFill>
-                  <a:srgbClr val="000000"/>
-                </a:solidFill>
-              </a:rPr>
-              <a:t>Start with trend/breakout on two annual windows before running classical full.</a:t>
-            </a:r>
-          </a:p>
-        </p:txBody>
-      </p:sp>
-      <p:sp>
-        <p:nvSpPr>
-          <p:cNvPr id="20" name="">
-            <a:extLst xmlns:a="http://schemas.openxmlformats.org/drawingml/2006/main">
-              <a:ext uri="{FF2B5EF4-FFF2-40B4-BE49-F238E27FC236}">
-                <a16:creationId xmlns:a16="http://schemas.microsoft.com/office/drawing/2014/main" id="{51C95224-9C24-4B7A-A038-AC2E6DEB5B01}"/>
-              </a:ext>
-            </a:extLst>
-          </p:cNvPr>
-          <p:cNvSpPr>
-            <a:spLocks xmlns:a="http://schemas.openxmlformats.org/drawingml/2006/main" noGrp="1"/>
-          </p:cNvSpPr>
-          <p:nvPr/>
-        </p:nvSpPr>
-        <p:spPr>
-          <a:xfrm xmlns:a="http://schemas.openxmlformats.org/drawingml/2006/main">
-            <a:off x="6819900" y="4229100"/>
-            <a:ext cx="76200" cy="76200"/>
-          </a:xfrm>
-          <a:prstGeom xmlns:a="http://schemas.openxmlformats.org/drawingml/2006/main" prst="rect">
-            <a:avLst/>
-          </a:prstGeom>
-          <a:solidFill xmlns:a="http://schemas.openxmlformats.org/drawingml/2006/main">
-            <a:srgbClr val="067647"/>
-          </a:solidFill>
-          <a:ln xmlns:a="http://schemas.openxmlformats.org/drawingml/2006/main" w="9525">
-            <a:solidFill>
-              <a:srgbClr val="067647"/>
-            </a:solidFill>
-            <a:prstDash val="solid"/>
-          </a:ln>
-        </p:spPr>
-      </p:sp>
-      <p:sp>
-        <p:nvSpPr>
-          <p:cNvPr id="21" name="">
-            <a:extLst xmlns:a="http://schemas.openxmlformats.org/drawingml/2006/main">
-              <a:ext uri="{FF2B5EF4-FFF2-40B4-BE49-F238E27FC236}">
-                <a16:creationId xmlns:a16="http://schemas.microsoft.com/office/drawing/2014/main" id="{CC5CB29C-A8E7-48A8-95E9-86AFBC15F4C8}"/>
-              </a:ext>
-            </a:extLst>
-          </p:cNvPr>
-          <p:cNvSpPr>
-            <a:spLocks xmlns:a="http://schemas.openxmlformats.org/drawingml/2006/main" noGrp="1"/>
-          </p:cNvSpPr>
-          <p:nvPr/>
-        </p:nvSpPr>
-        <p:spPr>
-          <a:xfrm xmlns:a="http://schemas.openxmlformats.org/drawingml/2006/main">
-            <a:off x="7029450" y="4133850"/>
-            <a:ext cx="3124200" cy="438150"/>
-          </a:xfrm>
-          <a:prstGeom xmlns:a="http://schemas.openxmlformats.org/drawingml/2006/main" prst="rect">
-            <a:avLst/>
-          </a:prstGeom>
-          <a:noFill xmlns:a="http://schemas.openxmlformats.org/drawingml/2006/main"/>
-          <a:ln xmlns:a="http://schemas.openxmlformats.org/drawingml/2006/main" w="0">
-            <a:noFill/>
-            <a:prstDash val="solid"/>
-          </a:ln>
-        </p:spPr>
-        <p:txBody>
-          <a:bodyPr xmlns:a="http://schemas.openxmlformats.org/drawingml/2006/main"/>
-          <a:lstStyle xmlns:a="http://schemas.openxmlformats.org/drawingml/2006/main"/>
-          <a:p xmlns:a="http://schemas.openxmlformats.org/drawingml/2006/main">
-            <a:pPr>
-              <a:defRPr sz="1275" b="0">
-                <a:solidFill>
-                  <a:srgbClr val="000000"/>
-                </a:solidFill>
-              </a:defRPr>
-            </a:pPr>
-            <a:r>
-              <a:rPr sz="1275" b="0">
-                <a:solidFill>
-                  <a:srgbClr val="000000"/>
-                </a:solidFill>
-              </a:rPr>
-              <a:t>Treat partial packets as timing evidence only, not performance evidence.</a:t>
-            </a:r>
-          </a:p>
-        </p:txBody>
-      </p:sp>
-      <p:sp>
-        <p:nvSpPr>
-          <p:cNvPr id="22" name="">
-            <a:extLst xmlns:a="http://schemas.openxmlformats.org/drawingml/2006/main">
-              <a:ext uri="{FF2B5EF4-FFF2-40B4-BE49-F238E27FC236}">
-                <a16:creationId xmlns:a16="http://schemas.microsoft.com/office/drawing/2014/main" id="{0520E26D-2487-4975-A9A3-D146736017B5}"/>
-              </a:ext>
-            </a:extLst>
-          </p:cNvPr>
-          <p:cNvSpPr>
-            <a:spLocks xmlns:a="http://schemas.openxmlformats.org/drawingml/2006/main" noGrp="1"/>
-          </p:cNvSpPr>
-          <p:nvPr/>
-        </p:nvSpPr>
-        <p:spPr>
-          <a:xfrm xmlns:a="http://schemas.openxmlformats.org/drawingml/2006/main">
-            <a:off x="1066800" y="5562600"/>
-            <a:ext cx="9753600" cy="514350"/>
-          </a:xfrm>
-          <a:prstGeom xmlns:a="http://schemas.openxmlformats.org/drawingml/2006/main" prst="rect">
-            <a:avLst/>
-          </a:prstGeom>
-          <a:noFill xmlns:a="http://schemas.openxmlformats.org/drawingml/2006/main"/>
-          <a:ln xmlns:a="http://schemas.openxmlformats.org/drawingml/2006/main" w="0">
-            <a:noFill/>
-            <a:prstDash val="solid"/>
-          </a:ln>
-        </p:spPr>
-        <p:txBody>
-          <a:bodyPr xmlns:a="http://schemas.openxmlformats.org/drawingml/2006/main"/>
-          <a:lstStyle xmlns:a="http://schemas.openxmlformats.org/drawingml/2006/main"/>
-          <a:p xmlns:a="http://schemas.openxmlformats.org/drawingml/2006/main">
-            <a:pPr algn="ctr">
-              <a:defRPr sz="1725" b="1">
-                <a:solidFill>
-                  <a:srgbClr val="000000"/>
-                </a:solidFill>
-              </a:defRPr>
-            </a:pPr>
-            <a:r>
-              <a:rPr sz="1725" b="1">
-                <a:solidFill>
-                  <a:srgbClr val="000000"/>
-                </a:solidFill>
-              </a:rPr>
-              <a:t>This is a useful engineering result: the next question is still valid, but it should be scheduled rather than hidden inside a chat turn.</a:t>
-            </a:r>
-          </a:p>
-        </p:txBody>
-      </p:sp>
-      <p:sp>
-        <p:nvSpPr>
-          <p:cNvPr id="23" name="">
-            <a:extLst xmlns:a="http://schemas.openxmlformats.org/drawingml/2006/main">
-              <a:ext uri="{FF2B5EF4-FFF2-40B4-BE49-F238E27FC236}">
-                <a16:creationId xmlns:a16="http://schemas.microsoft.com/office/drawing/2014/main" id="{0D482FEE-DA2C-4A46-BEBA-F6F694AF38DD}"/>
+                <a16:creationId xmlns:a16="http://schemas.microsoft.com/office/drawing/2014/main" id="{5D3A9EA7-1DAF-4C61-9CBC-789A7AE2E208}"/>
               </a:ext>
             </a:extLst>
           </p:cNvPr>
@@ -9692,7 +12533,7 @@
     </p:spTree>
     <p:extLst>
       <p:ext uri="{BB962C8B-B14F-4D97-AF65-F5344CB8AC3E}">
-        <p14:creationId xmlns:p14="http://schemas.microsoft.com/office/powerpoint/2010/main" val="1194418267"/>
+        <p14:creationId xmlns:p14="http://schemas.microsoft.com/office/powerpoint/2010/main" val="1380585201"/>
       </p:ext>
     </p:extLst>
   </p:cSld>
@@ -9723,7 +12564,7 @@
           <p:cNvPr id="1" name="">
             <a:extLst xmlns:a="http://schemas.openxmlformats.org/drawingml/2006/main">
               <a:ext uri="{FF2B5EF4-FFF2-40B4-BE49-F238E27FC236}">
-                <a16:creationId xmlns:a16="http://schemas.microsoft.com/office/drawing/2014/main" id="{BEF6FBFC-724A-44CA-B2A5-07AF87DC080E}"/>
+                <a16:creationId xmlns:a16="http://schemas.microsoft.com/office/drawing/2014/main" id="{649718DA-D3C7-463A-B2E5-A9D2CB2AE012}"/>
               </a:ext>
             </a:extLst>
           </p:cNvPr>
@@ -9773,7 +12614,7 @@
           <p:cNvPr id="2" name="">
             <a:extLst xmlns:a="http://schemas.openxmlformats.org/drawingml/2006/main">
               <a:ext uri="{FF2B5EF4-FFF2-40B4-BE49-F238E27FC236}">
-                <a16:creationId xmlns:a16="http://schemas.microsoft.com/office/drawing/2014/main" id="{D7A0D535-3727-4B28-B2B2-1DB3DD9F3DD6}"/>
+                <a16:creationId xmlns:a16="http://schemas.microsoft.com/office/drawing/2014/main" id="{E824582A-977A-45C8-964C-611016416312}"/>
               </a:ext>
             </a:extLst>
           </p:cNvPr>
@@ -9823,7 +12664,7 @@
           <p:cNvPr id="3" name="">
             <a:extLst xmlns:a="http://schemas.openxmlformats.org/drawingml/2006/main">
               <a:ext uri="{FF2B5EF4-FFF2-40B4-BE49-F238E27FC236}">
-                <a16:creationId xmlns:a16="http://schemas.microsoft.com/office/drawing/2014/main" id="{80F34C45-E1D1-4E2F-BBA8-CC2BF161D980}"/>
+                <a16:creationId xmlns:a16="http://schemas.microsoft.com/office/drawing/2014/main" id="{90E9A176-2E20-443C-9D85-3CAE626E2DFB}"/>
               </a:ext>
             </a:extLst>
           </p:cNvPr>
@@ -9856,7 +12697,7 @@
           <p:cNvPr id="4" name="">
             <a:extLst xmlns:a="http://schemas.openxmlformats.org/drawingml/2006/main">
               <a:ext uri="{FF2B5EF4-FFF2-40B4-BE49-F238E27FC236}">
-                <a16:creationId xmlns:a16="http://schemas.microsoft.com/office/drawing/2014/main" id="{B321697A-D266-4410-939C-FFA04BF7E0A8}"/>
+                <a16:creationId xmlns:a16="http://schemas.microsoft.com/office/drawing/2014/main" id="{B38B4B9B-8DD0-4ADA-A6F3-A110568D87F6}"/>
               </a:ext>
             </a:extLst>
           </p:cNvPr>
@@ -9906,7 +12747,7 @@
           <p:cNvPr id="5" name="">
             <a:extLst xmlns:a="http://schemas.openxmlformats.org/drawingml/2006/main">
               <a:ext uri="{FF2B5EF4-FFF2-40B4-BE49-F238E27FC236}">
-                <a16:creationId xmlns:a16="http://schemas.microsoft.com/office/drawing/2014/main" id="{7EE7196B-8699-4E33-803C-006215E4D791}"/>
+                <a16:creationId xmlns:a16="http://schemas.microsoft.com/office/drawing/2014/main" id="{7F44FC28-C8BE-4D20-99CF-4B90049E9EAB}"/>
               </a:ext>
             </a:extLst>
           </p:cNvPr>
@@ -9939,7 +12780,7 @@
           <p:cNvPr id="6" name="">
             <a:extLst xmlns:a="http://schemas.openxmlformats.org/drawingml/2006/main">
               <a:ext uri="{FF2B5EF4-FFF2-40B4-BE49-F238E27FC236}">
-                <a16:creationId xmlns:a16="http://schemas.microsoft.com/office/drawing/2014/main" id="{28FCB269-6615-4DF1-A8D0-5521EF786F74}"/>
+                <a16:creationId xmlns:a16="http://schemas.microsoft.com/office/drawing/2014/main" id="{58ACA5F2-11BA-4E93-866E-18D05E440F3D}"/>
               </a:ext>
             </a:extLst>
           </p:cNvPr>
@@ -9972,7 +12813,7 @@
           <p:cNvPr id="7" name="">
             <a:extLst xmlns:a="http://schemas.openxmlformats.org/drawingml/2006/main">
               <a:ext uri="{FF2B5EF4-FFF2-40B4-BE49-F238E27FC236}">
-                <a16:creationId xmlns:a16="http://schemas.microsoft.com/office/drawing/2014/main" id="{8EE947EE-8AA0-40E6-89A2-61CA3D4FF949}"/>
+                <a16:creationId xmlns:a16="http://schemas.microsoft.com/office/drawing/2014/main" id="{33940397-8C31-4D7D-89CB-49A9071E77C5}"/>
               </a:ext>
             </a:extLst>
           </p:cNvPr>
@@ -10022,7 +12863,7 @@
           <p:cNvPr id="8" name="">
             <a:extLst xmlns:a="http://schemas.openxmlformats.org/drawingml/2006/main">
               <a:ext uri="{FF2B5EF4-FFF2-40B4-BE49-F238E27FC236}">
-                <a16:creationId xmlns:a16="http://schemas.microsoft.com/office/drawing/2014/main" id="{7D273F47-AA0D-402A-9409-90E828FB7FEB}"/>
+                <a16:creationId xmlns:a16="http://schemas.microsoft.com/office/drawing/2014/main" id="{5272D7DA-A243-4786-B19C-3A9AA6BBCB6A}"/>
               </a:ext>
             </a:extLst>
           </p:cNvPr>
@@ -10072,7 +12913,7 @@
           <p:cNvPr id="9" name="">
             <a:extLst xmlns:a="http://schemas.openxmlformats.org/drawingml/2006/main">
               <a:ext uri="{FF2B5EF4-FFF2-40B4-BE49-F238E27FC236}">
-                <a16:creationId xmlns:a16="http://schemas.microsoft.com/office/drawing/2014/main" id="{C1838F0A-1807-4CD2-8C4A-E688B34F9789}"/>
+                <a16:creationId xmlns:a16="http://schemas.microsoft.com/office/drawing/2014/main" id="{39621012-053B-4921-84B8-CD7B46D5CFB5}"/>
               </a:ext>
             </a:extLst>
           </p:cNvPr>
@@ -10122,7 +12963,7 @@
           <p:cNvPr id="10" name="">
             <a:extLst xmlns:a="http://schemas.openxmlformats.org/drawingml/2006/main">
               <a:ext uri="{FF2B5EF4-FFF2-40B4-BE49-F238E27FC236}">
-                <a16:creationId xmlns:a16="http://schemas.microsoft.com/office/drawing/2014/main" id="{4106C338-56DB-4158-8AA2-9156A7BBEE46}"/>
+                <a16:creationId xmlns:a16="http://schemas.microsoft.com/office/drawing/2014/main" id="{35235F44-128A-44DF-86B5-30019C079807}"/>
               </a:ext>
             </a:extLst>
           </p:cNvPr>
@@ -10172,7 +13013,7 @@
           <p:cNvPr id="11" name="">
             <a:extLst xmlns:a="http://schemas.openxmlformats.org/drawingml/2006/main">
               <a:ext uri="{FF2B5EF4-FFF2-40B4-BE49-F238E27FC236}">
-                <a16:creationId xmlns:a16="http://schemas.microsoft.com/office/drawing/2014/main" id="{99FB873D-1298-4786-959A-9C20C49A5905}"/>
+                <a16:creationId xmlns:a16="http://schemas.microsoft.com/office/drawing/2014/main" id="{F43C8FD3-A9EA-4009-B1EF-3089B4AF1DA0}"/>
               </a:ext>
             </a:extLst>
           </p:cNvPr>
@@ -10222,7 +13063,7 @@
           <p:cNvPr id="12" name="">
             <a:extLst xmlns:a="http://schemas.openxmlformats.org/drawingml/2006/main">
               <a:ext uri="{FF2B5EF4-FFF2-40B4-BE49-F238E27FC236}">
-                <a16:creationId xmlns:a16="http://schemas.microsoft.com/office/drawing/2014/main" id="{0335C4D3-44E6-48FD-9790-2707C52852DE}"/>
+                <a16:creationId xmlns:a16="http://schemas.microsoft.com/office/drawing/2014/main" id="{AF5D37DE-7ECD-42E4-8C36-12E6340A87C3}"/>
               </a:ext>
             </a:extLst>
           </p:cNvPr>
@@ -10270,7 +13111,7 @@
     </p:spTree>
     <p:extLst>
       <p:ext uri="{BB962C8B-B14F-4D97-AF65-F5344CB8AC3E}">
-        <p14:creationId xmlns:p14="http://schemas.microsoft.com/office/powerpoint/2010/main" val="88591422"/>
+        <p14:creationId xmlns:p14="http://schemas.microsoft.com/office/powerpoint/2010/main" val="552873817"/>
       </p:ext>
     </p:extLst>
   </p:cSld>
@@ -10301,7 +13142,7 @@
           <p:cNvPr id="1" name="">
             <a:extLst xmlns:a="http://schemas.openxmlformats.org/drawingml/2006/main">
               <a:ext uri="{FF2B5EF4-FFF2-40B4-BE49-F238E27FC236}">
-                <a16:creationId xmlns:a16="http://schemas.microsoft.com/office/drawing/2014/main" id="{B913F234-BCBD-4DF2-8A73-9C24EB0587CD}"/>
+                <a16:creationId xmlns:a16="http://schemas.microsoft.com/office/drawing/2014/main" id="{A6B62335-07D3-41BF-BCAA-D5799FAD9EA3}"/>
               </a:ext>
             </a:extLst>
           </p:cNvPr>
@@ -10351,7 +13192,7 @@
           <p:cNvPr id="2" name="">
             <a:extLst xmlns:a="http://schemas.openxmlformats.org/drawingml/2006/main">
               <a:ext uri="{FF2B5EF4-FFF2-40B4-BE49-F238E27FC236}">
-                <a16:creationId xmlns:a16="http://schemas.microsoft.com/office/drawing/2014/main" id="{954DFFF3-62F1-4E29-A92C-98335AF08F82}"/>
+                <a16:creationId xmlns:a16="http://schemas.microsoft.com/office/drawing/2014/main" id="{4E820520-0FBE-47EC-8896-2E7729C34081}"/>
               </a:ext>
             </a:extLst>
           </p:cNvPr>
@@ -10401,7 +13242,7 @@
           <p:cNvPr id="3" name="">
             <a:extLst xmlns:a="http://schemas.openxmlformats.org/drawingml/2006/main">
               <a:ext uri="{FF2B5EF4-FFF2-40B4-BE49-F238E27FC236}">
-                <a16:creationId xmlns:a16="http://schemas.microsoft.com/office/drawing/2014/main" id="{DBA3A2C6-006A-4BF1-A18C-FD70F0A39E52}"/>
+                <a16:creationId xmlns:a16="http://schemas.microsoft.com/office/drawing/2014/main" id="{EFDEFB04-594F-4785-B367-28C106CF6A76}"/>
               </a:ext>
             </a:extLst>
           </p:cNvPr>
@@ -10434,7 +13275,7 @@
           <p:cNvPr id="4" name="">
             <a:extLst xmlns:a="http://schemas.openxmlformats.org/drawingml/2006/main">
               <a:ext uri="{FF2B5EF4-FFF2-40B4-BE49-F238E27FC236}">
-                <a16:creationId xmlns:a16="http://schemas.microsoft.com/office/drawing/2014/main" id="{DBBF7306-3814-4449-B2EE-1B5990C917CD}"/>
+                <a16:creationId xmlns:a16="http://schemas.microsoft.com/office/drawing/2014/main" id="{A80E8165-3676-4B92-91AE-9EA78BAEC232}"/>
               </a:ext>
             </a:extLst>
           </p:cNvPr>
@@ -10467,7 +13308,7 @@
           <p:cNvPr id="5" name="">
             <a:extLst xmlns:a="http://schemas.openxmlformats.org/drawingml/2006/main">
               <a:ext uri="{FF2B5EF4-FFF2-40B4-BE49-F238E27FC236}">
-                <a16:creationId xmlns:a16="http://schemas.microsoft.com/office/drawing/2014/main" id="{A98B4DCB-2289-407A-9EDB-A5577014BB0D}"/>
+                <a16:creationId xmlns:a16="http://schemas.microsoft.com/office/drawing/2014/main" id="{4D21DB6F-E1DE-4975-A3BB-D4AAAE00B858}"/>
               </a:ext>
             </a:extLst>
           </p:cNvPr>
@@ -10517,7 +13358,7 @@
           <p:cNvPr id="6" name="">
             <a:extLst xmlns:a="http://schemas.openxmlformats.org/drawingml/2006/main">
               <a:ext uri="{FF2B5EF4-FFF2-40B4-BE49-F238E27FC236}">
-                <a16:creationId xmlns:a16="http://schemas.microsoft.com/office/drawing/2014/main" id="{80FD1CCC-657E-4F59-96A5-A1726C603079}"/>
+                <a16:creationId xmlns:a16="http://schemas.microsoft.com/office/drawing/2014/main" id="{5682EF54-5959-466B-BA89-D7C97370EC44}"/>
               </a:ext>
             </a:extLst>
           </p:cNvPr>
@@ -10567,7 +13408,7 @@
           <p:cNvPr id="7" name="">
             <a:extLst xmlns:a="http://schemas.openxmlformats.org/drawingml/2006/main">
               <a:ext uri="{FF2B5EF4-FFF2-40B4-BE49-F238E27FC236}">
-                <a16:creationId xmlns:a16="http://schemas.microsoft.com/office/drawing/2014/main" id="{4C1A8A58-763C-42FA-B23C-82E97BAAA8B2}"/>
+                <a16:creationId xmlns:a16="http://schemas.microsoft.com/office/drawing/2014/main" id="{C7B42FA7-324B-4A6A-A57E-A796FDC550A1}"/>
               </a:ext>
             </a:extLst>
           </p:cNvPr>
@@ -10600,7 +13441,7 @@
           <p:cNvPr id="8" name="">
             <a:extLst xmlns:a="http://schemas.openxmlformats.org/drawingml/2006/main">
               <a:ext uri="{FF2B5EF4-FFF2-40B4-BE49-F238E27FC236}">
-                <a16:creationId xmlns:a16="http://schemas.microsoft.com/office/drawing/2014/main" id="{843964D4-FE2C-441D-A940-233DBD070E6F}"/>
+                <a16:creationId xmlns:a16="http://schemas.microsoft.com/office/drawing/2014/main" id="{A8054DA0-1CEB-45B3-A540-9EB563C5B480}"/>
               </a:ext>
             </a:extLst>
           </p:cNvPr>
@@ -10650,7 +13491,7 @@
           <p:cNvPr id="9" name="">
             <a:extLst xmlns:a="http://schemas.openxmlformats.org/drawingml/2006/main">
               <a:ext uri="{FF2B5EF4-FFF2-40B4-BE49-F238E27FC236}">
-                <a16:creationId xmlns:a16="http://schemas.microsoft.com/office/drawing/2014/main" id="{81E92179-6029-4BA1-9228-FC5903B13F39}"/>
+                <a16:creationId xmlns:a16="http://schemas.microsoft.com/office/drawing/2014/main" id="{291A77BF-1451-4ABA-B598-1ACA3350DB5D}"/>
               </a:ext>
             </a:extLst>
           </p:cNvPr>
@@ -10700,7 +13541,7 @@
           <p:cNvPr id="10" name="">
             <a:extLst xmlns:a="http://schemas.openxmlformats.org/drawingml/2006/main">
               <a:ext uri="{FF2B5EF4-FFF2-40B4-BE49-F238E27FC236}">
-                <a16:creationId xmlns:a16="http://schemas.microsoft.com/office/drawing/2014/main" id="{9092CBDF-44E4-4C20-8D68-085DA853DE60}"/>
+                <a16:creationId xmlns:a16="http://schemas.microsoft.com/office/drawing/2014/main" id="{A65E1A4B-DC56-4065-9882-94DE4136BF22}"/>
               </a:ext>
             </a:extLst>
           </p:cNvPr>
@@ -10733,7 +13574,7 @@
           <p:cNvPr id="11" name="">
             <a:extLst xmlns:a="http://schemas.openxmlformats.org/drawingml/2006/main">
               <a:ext uri="{FF2B5EF4-FFF2-40B4-BE49-F238E27FC236}">
-                <a16:creationId xmlns:a16="http://schemas.microsoft.com/office/drawing/2014/main" id="{EC5CD6C9-18E2-4C4A-BACA-99AC9BF4F013}"/>
+                <a16:creationId xmlns:a16="http://schemas.microsoft.com/office/drawing/2014/main" id="{AD92EF56-52D4-468F-9579-0950E3C295B3}"/>
               </a:ext>
             </a:extLst>
           </p:cNvPr>
@@ -10783,7 +13624,7 @@
           <p:cNvPr id="12" name="">
             <a:extLst xmlns:a="http://schemas.openxmlformats.org/drawingml/2006/main">
               <a:ext uri="{FF2B5EF4-FFF2-40B4-BE49-F238E27FC236}">
-                <a16:creationId xmlns:a16="http://schemas.microsoft.com/office/drawing/2014/main" id="{82E72249-763B-4167-836D-ED32E43A69CF}"/>
+                <a16:creationId xmlns:a16="http://schemas.microsoft.com/office/drawing/2014/main" id="{9159FEFE-9F96-4175-A6AB-C54D999EED26}"/>
               </a:ext>
             </a:extLst>
           </p:cNvPr>
@@ -10833,7 +13674,7 @@
           <p:cNvPr id="13" name="">
             <a:extLst xmlns:a="http://schemas.openxmlformats.org/drawingml/2006/main">
               <a:ext uri="{FF2B5EF4-FFF2-40B4-BE49-F238E27FC236}">
-                <a16:creationId xmlns:a16="http://schemas.microsoft.com/office/drawing/2014/main" id="{BB9014F9-FB9A-4A14-A06B-1DE78D27FD55}"/>
+                <a16:creationId xmlns:a16="http://schemas.microsoft.com/office/drawing/2014/main" id="{B2BEC1A9-D665-4284-B15A-149ABC46B6F8}"/>
               </a:ext>
             </a:extLst>
           </p:cNvPr>
@@ -10866,7 +13707,7 @@
           <p:cNvPr id="14" name="">
             <a:extLst xmlns:a="http://schemas.openxmlformats.org/drawingml/2006/main">
               <a:ext uri="{FF2B5EF4-FFF2-40B4-BE49-F238E27FC236}">
-                <a16:creationId xmlns:a16="http://schemas.microsoft.com/office/drawing/2014/main" id="{0D0F8550-43BA-4ACC-978E-AE5B3A87ACFA}"/>
+                <a16:creationId xmlns:a16="http://schemas.microsoft.com/office/drawing/2014/main" id="{FA2EAC67-6565-42FE-9093-85381A0DA54C}"/>
               </a:ext>
             </a:extLst>
           </p:cNvPr>
@@ -10916,7 +13757,7 @@
           <p:cNvPr id="15" name="">
             <a:extLst xmlns:a="http://schemas.openxmlformats.org/drawingml/2006/main">
               <a:ext uri="{FF2B5EF4-FFF2-40B4-BE49-F238E27FC236}">
-                <a16:creationId xmlns:a16="http://schemas.microsoft.com/office/drawing/2014/main" id="{DCD08A7D-4716-46DA-A464-233BCE73F1C0}"/>
+                <a16:creationId xmlns:a16="http://schemas.microsoft.com/office/drawing/2014/main" id="{317B9104-299B-4F60-BEE9-04759C536B34}"/>
               </a:ext>
             </a:extLst>
           </p:cNvPr>
@@ -10966,7 +13807,7 @@
           <p:cNvPr id="16" name="">
             <a:extLst xmlns:a="http://schemas.openxmlformats.org/drawingml/2006/main">
               <a:ext uri="{FF2B5EF4-FFF2-40B4-BE49-F238E27FC236}">
-                <a16:creationId xmlns:a16="http://schemas.microsoft.com/office/drawing/2014/main" id="{A2DC09BA-CFAA-47C6-B4B7-B266104B1C43}"/>
+                <a16:creationId xmlns:a16="http://schemas.microsoft.com/office/drawing/2014/main" id="{A0C4D01F-5DDF-4B95-A802-1BB533D5A0E0}"/>
               </a:ext>
             </a:extLst>
           </p:cNvPr>
@@ -11016,7 +13857,7 @@
           <p:cNvPr id="17" name="">
             <a:extLst xmlns:a="http://schemas.openxmlformats.org/drawingml/2006/main">
               <a:ext uri="{FF2B5EF4-FFF2-40B4-BE49-F238E27FC236}">
-                <a16:creationId xmlns:a16="http://schemas.microsoft.com/office/drawing/2014/main" id="{FFBF4D15-45F6-4F54-9CE7-03541714BC94}"/>
+                <a16:creationId xmlns:a16="http://schemas.microsoft.com/office/drawing/2014/main" id="{BC108CF8-5CAB-44DC-BAAC-DB7A81AFB925}"/>
               </a:ext>
             </a:extLst>
           </p:cNvPr>
@@ -11064,7 +13905,7 @@
     </p:spTree>
     <p:extLst>
       <p:ext uri="{BB962C8B-B14F-4D97-AF65-F5344CB8AC3E}">
-        <p14:creationId xmlns:p14="http://schemas.microsoft.com/office/powerpoint/2010/main" val="359672917"/>
+        <p14:creationId xmlns:p14="http://schemas.microsoft.com/office/powerpoint/2010/main" val="1759063051"/>
       </p:ext>
     </p:extLst>
   </p:cSld>
@@ -11095,7 +13936,7 @@
           <p:cNvPr id="1" name="">
             <a:extLst xmlns:a="http://schemas.openxmlformats.org/drawingml/2006/main">
               <a:ext uri="{FF2B5EF4-FFF2-40B4-BE49-F238E27FC236}">
-                <a16:creationId xmlns:a16="http://schemas.microsoft.com/office/drawing/2014/main" id="{D1C7B700-39F6-49E2-9A5C-91ABF12130B9}"/>
+                <a16:creationId xmlns:a16="http://schemas.microsoft.com/office/drawing/2014/main" id="{476B2049-F3D0-469F-BF8D-3E4D114BD344}"/>
               </a:ext>
             </a:extLst>
           </p:cNvPr>
@@ -11145,7 +13986,7 @@
           <p:cNvPr id="2" name="">
             <a:extLst xmlns:a="http://schemas.openxmlformats.org/drawingml/2006/main">
               <a:ext uri="{FF2B5EF4-FFF2-40B4-BE49-F238E27FC236}">
-                <a16:creationId xmlns:a16="http://schemas.microsoft.com/office/drawing/2014/main" id="{DC1D0D72-ABB4-4B93-99B9-B380EEF00FC9}"/>
+                <a16:creationId xmlns:a16="http://schemas.microsoft.com/office/drawing/2014/main" id="{9E68FB2A-63D6-435E-8E66-E271A3C8ECCD}"/>
               </a:ext>
             </a:extLst>
           </p:cNvPr>
@@ -11195,7 +14036,7 @@
           <p:cNvPr id="3" name="">
             <a:extLst xmlns:a="http://schemas.openxmlformats.org/drawingml/2006/main">
               <a:ext uri="{FF2B5EF4-FFF2-40B4-BE49-F238E27FC236}">
-                <a16:creationId xmlns:a16="http://schemas.microsoft.com/office/drawing/2014/main" id="{A15FCD41-3788-42F2-A1C1-3CE20A34E2D5}"/>
+                <a16:creationId xmlns:a16="http://schemas.microsoft.com/office/drawing/2014/main" id="{F2F214D0-39F0-43BF-A998-71750AAE1723}"/>
               </a:ext>
             </a:extLst>
           </p:cNvPr>
@@ -11228,7 +14069,7 @@
           <p:cNvPr id="4" name="">
             <a:extLst xmlns:a="http://schemas.openxmlformats.org/drawingml/2006/main">
               <a:ext uri="{FF2B5EF4-FFF2-40B4-BE49-F238E27FC236}">
-                <a16:creationId xmlns:a16="http://schemas.microsoft.com/office/drawing/2014/main" id="{48AA9FDD-3841-42D4-986B-D514CDB9E985}"/>
+                <a16:creationId xmlns:a16="http://schemas.microsoft.com/office/drawing/2014/main" id="{DCBE6C19-5BF9-4273-9FAF-B537D2B448E0}"/>
               </a:ext>
             </a:extLst>
           </p:cNvPr>
@@ -11261,7 +14102,7 @@
           <p:cNvPr id="5" name="">
             <a:extLst xmlns:a="http://schemas.openxmlformats.org/drawingml/2006/main">
               <a:ext uri="{FF2B5EF4-FFF2-40B4-BE49-F238E27FC236}">
-                <a16:creationId xmlns:a16="http://schemas.microsoft.com/office/drawing/2014/main" id="{054CCBA3-0202-4DC0-8544-6C82313E0834}"/>
+                <a16:creationId xmlns:a16="http://schemas.microsoft.com/office/drawing/2014/main" id="{1B4B2DF2-297A-4C73-AE85-38CCB79AF950}"/>
               </a:ext>
             </a:extLst>
           </p:cNvPr>
@@ -11311,7 +14152,7 @@
           <p:cNvPr id="6" name="">
             <a:extLst xmlns:a="http://schemas.openxmlformats.org/drawingml/2006/main">
               <a:ext uri="{FF2B5EF4-FFF2-40B4-BE49-F238E27FC236}">
-                <a16:creationId xmlns:a16="http://schemas.microsoft.com/office/drawing/2014/main" id="{CFDB2811-FC1E-4817-AE75-E11DDD0693FB}"/>
+                <a16:creationId xmlns:a16="http://schemas.microsoft.com/office/drawing/2014/main" id="{1A885B1E-00E9-4647-B438-83B5B48CD28D}"/>
               </a:ext>
             </a:extLst>
           </p:cNvPr>
@@ -11344,7 +14185,7 @@
           <p:cNvPr id="7" name="">
             <a:extLst xmlns:a="http://schemas.openxmlformats.org/drawingml/2006/main">
               <a:ext uri="{FF2B5EF4-FFF2-40B4-BE49-F238E27FC236}">
-                <a16:creationId xmlns:a16="http://schemas.microsoft.com/office/drawing/2014/main" id="{1773FECD-D0CD-44BA-B22B-DDBB4D882AAA}"/>
+                <a16:creationId xmlns:a16="http://schemas.microsoft.com/office/drawing/2014/main" id="{D512E351-3B6B-44D4-8D82-9BF6C7F29D20}"/>
               </a:ext>
             </a:extLst>
           </p:cNvPr>
@@ -11394,7 +14235,7 @@
           <p:cNvPr id="8" name="">
             <a:extLst xmlns:a="http://schemas.openxmlformats.org/drawingml/2006/main">
               <a:ext uri="{FF2B5EF4-FFF2-40B4-BE49-F238E27FC236}">
-                <a16:creationId xmlns:a16="http://schemas.microsoft.com/office/drawing/2014/main" id="{35A89CD7-71F2-40FF-98D9-BA4BAABE0DF9}"/>
+                <a16:creationId xmlns:a16="http://schemas.microsoft.com/office/drawing/2014/main" id="{657F9C2A-6896-4AD1-A5D6-2BC792D0145C}"/>
               </a:ext>
             </a:extLst>
           </p:cNvPr>
@@ -11427,7 +14268,7 @@
           <p:cNvPr id="9" name="">
             <a:extLst xmlns:a="http://schemas.openxmlformats.org/drawingml/2006/main">
               <a:ext uri="{FF2B5EF4-FFF2-40B4-BE49-F238E27FC236}">
-                <a16:creationId xmlns:a16="http://schemas.microsoft.com/office/drawing/2014/main" id="{0E4BB696-19FA-48F9-98E5-333F1DD24E99}"/>
+                <a16:creationId xmlns:a16="http://schemas.microsoft.com/office/drawing/2014/main" id="{12463A05-698F-4DE9-AD1D-F11877E75FEE}"/>
               </a:ext>
             </a:extLst>
           </p:cNvPr>
@@ -11477,7 +14318,7 @@
           <p:cNvPr id="10" name="">
             <a:extLst xmlns:a="http://schemas.openxmlformats.org/drawingml/2006/main">
               <a:ext uri="{FF2B5EF4-FFF2-40B4-BE49-F238E27FC236}">
-                <a16:creationId xmlns:a16="http://schemas.microsoft.com/office/drawing/2014/main" id="{CA041DF6-D774-4399-91F6-D9EBCEFB9446}"/>
+                <a16:creationId xmlns:a16="http://schemas.microsoft.com/office/drawing/2014/main" id="{E7B4D693-7F70-41C5-9E37-D07A60B282C1}"/>
               </a:ext>
             </a:extLst>
           </p:cNvPr>
@@ -11510,7 +14351,7 @@
           <p:cNvPr id="11" name="">
             <a:extLst xmlns:a="http://schemas.openxmlformats.org/drawingml/2006/main">
               <a:ext uri="{FF2B5EF4-FFF2-40B4-BE49-F238E27FC236}">
-                <a16:creationId xmlns:a16="http://schemas.microsoft.com/office/drawing/2014/main" id="{9EEB4643-9DA3-4579-B03D-CBC708455D35}"/>
+                <a16:creationId xmlns:a16="http://schemas.microsoft.com/office/drawing/2014/main" id="{5E2C263C-3E49-44EC-9220-76F6D0EB2531}"/>
               </a:ext>
             </a:extLst>
           </p:cNvPr>
@@ -11560,7 +14401,7 @@
           <p:cNvPr id="12" name="">
             <a:extLst xmlns:a="http://schemas.openxmlformats.org/drawingml/2006/main">
               <a:ext uri="{FF2B5EF4-FFF2-40B4-BE49-F238E27FC236}">
-                <a16:creationId xmlns:a16="http://schemas.microsoft.com/office/drawing/2014/main" id="{56199364-066D-41F7-AF99-7E82B225276E}"/>
+                <a16:creationId xmlns:a16="http://schemas.microsoft.com/office/drawing/2014/main" id="{1AF95263-2444-44D5-9681-60AED586747A}"/>
               </a:ext>
             </a:extLst>
           </p:cNvPr>
@@ -11593,7 +14434,7 @@
           <p:cNvPr id="13" name="">
             <a:extLst xmlns:a="http://schemas.openxmlformats.org/drawingml/2006/main">
               <a:ext uri="{FF2B5EF4-FFF2-40B4-BE49-F238E27FC236}">
-                <a16:creationId xmlns:a16="http://schemas.microsoft.com/office/drawing/2014/main" id="{2B18B04E-839D-4050-BC29-47BE2B0B5000}"/>
+                <a16:creationId xmlns:a16="http://schemas.microsoft.com/office/drawing/2014/main" id="{3F717E8B-23E5-4913-BE41-94153A5D12BE}"/>
               </a:ext>
             </a:extLst>
           </p:cNvPr>
@@ -11643,7 +14484,7 @@
           <p:cNvPr id="14" name="">
             <a:extLst xmlns:a="http://schemas.openxmlformats.org/drawingml/2006/main">
               <a:ext uri="{FF2B5EF4-FFF2-40B4-BE49-F238E27FC236}">
-                <a16:creationId xmlns:a16="http://schemas.microsoft.com/office/drawing/2014/main" id="{81A68011-CC6E-4EB0-9186-AD83AB6BEEA7}"/>
+                <a16:creationId xmlns:a16="http://schemas.microsoft.com/office/drawing/2014/main" id="{3AD07A00-4A92-48C3-BD19-90FF561483BB}"/>
               </a:ext>
             </a:extLst>
           </p:cNvPr>
@@ -11676,7 +14517,7 @@
           <p:cNvPr id="15" name="">
             <a:extLst xmlns:a="http://schemas.openxmlformats.org/drawingml/2006/main">
               <a:ext uri="{FF2B5EF4-FFF2-40B4-BE49-F238E27FC236}">
-                <a16:creationId xmlns:a16="http://schemas.microsoft.com/office/drawing/2014/main" id="{2F0B9527-010D-455D-BFCF-150950249474}"/>
+                <a16:creationId xmlns:a16="http://schemas.microsoft.com/office/drawing/2014/main" id="{8595A631-F196-4F63-A108-759CCB675972}"/>
               </a:ext>
             </a:extLst>
           </p:cNvPr>
@@ -11726,7 +14567,7 @@
           <p:cNvPr id="16" name="">
             <a:extLst xmlns:a="http://schemas.openxmlformats.org/drawingml/2006/main">
               <a:ext uri="{FF2B5EF4-FFF2-40B4-BE49-F238E27FC236}">
-                <a16:creationId xmlns:a16="http://schemas.microsoft.com/office/drawing/2014/main" id="{466BB23E-9F25-4849-9653-E10A87412375}"/>
+                <a16:creationId xmlns:a16="http://schemas.microsoft.com/office/drawing/2014/main" id="{AE0DBC61-9653-4AC9-B8B0-1484104D2B94}"/>
               </a:ext>
             </a:extLst>
           </p:cNvPr>
@@ -11759,7 +14600,7 @@
           <p:cNvPr id="17" name="">
             <a:extLst xmlns:a="http://schemas.openxmlformats.org/drawingml/2006/main">
               <a:ext uri="{FF2B5EF4-FFF2-40B4-BE49-F238E27FC236}">
-                <a16:creationId xmlns:a16="http://schemas.microsoft.com/office/drawing/2014/main" id="{B97FB68E-2EF2-4FC6-8402-C93A8E8A8CFF}"/>
+                <a16:creationId xmlns:a16="http://schemas.microsoft.com/office/drawing/2014/main" id="{3B9AF510-370F-47C8-89AA-BE284FD73C00}"/>
               </a:ext>
             </a:extLst>
           </p:cNvPr>
@@ -11809,7 +14650,7 @@
           <p:cNvPr id="18" name="">
             <a:extLst xmlns:a="http://schemas.openxmlformats.org/drawingml/2006/main">
               <a:ext uri="{FF2B5EF4-FFF2-40B4-BE49-F238E27FC236}">
-                <a16:creationId xmlns:a16="http://schemas.microsoft.com/office/drawing/2014/main" id="{7FD10CD0-8C9F-4906-89FB-88CA8143B96E}"/>
+                <a16:creationId xmlns:a16="http://schemas.microsoft.com/office/drawing/2014/main" id="{F31D4C30-A270-47BF-899C-363D0E242632}"/>
               </a:ext>
             </a:extLst>
           </p:cNvPr>
@@ -11842,7 +14683,7 @@
           <p:cNvPr id="19" name="">
             <a:extLst xmlns:a="http://schemas.openxmlformats.org/drawingml/2006/main">
               <a:ext uri="{FF2B5EF4-FFF2-40B4-BE49-F238E27FC236}">
-                <a16:creationId xmlns:a16="http://schemas.microsoft.com/office/drawing/2014/main" id="{1ACB9B9A-4F0C-4B81-B636-233767B239AC}"/>
+                <a16:creationId xmlns:a16="http://schemas.microsoft.com/office/drawing/2014/main" id="{EE399D91-CF20-4472-A588-D8363C5A5B08}"/>
               </a:ext>
             </a:extLst>
           </p:cNvPr>
@@ -11892,7 +14733,7 @@
           <p:cNvPr id="20" name="">
             <a:extLst xmlns:a="http://schemas.openxmlformats.org/drawingml/2006/main">
               <a:ext uri="{FF2B5EF4-FFF2-40B4-BE49-F238E27FC236}">
-                <a16:creationId xmlns:a16="http://schemas.microsoft.com/office/drawing/2014/main" id="{5C40A595-3C3E-415F-A081-DE8F949B12A7}"/>
+                <a16:creationId xmlns:a16="http://schemas.microsoft.com/office/drawing/2014/main" id="{4E15B74F-39C3-4C33-B717-9974731B7FE9}"/>
               </a:ext>
             </a:extLst>
           </p:cNvPr>
@@ -11925,7 +14766,7 @@
           <p:cNvPr id="21" name="">
             <a:extLst xmlns:a="http://schemas.openxmlformats.org/drawingml/2006/main">
               <a:ext uri="{FF2B5EF4-FFF2-40B4-BE49-F238E27FC236}">
-                <a16:creationId xmlns:a16="http://schemas.microsoft.com/office/drawing/2014/main" id="{0CC1E4FE-8833-46C4-B502-D4172E066403}"/>
+                <a16:creationId xmlns:a16="http://schemas.microsoft.com/office/drawing/2014/main" id="{B4A4E25A-96CE-461E-9705-A0B962834D34}"/>
               </a:ext>
             </a:extLst>
           </p:cNvPr>
@@ -11975,7 +14816,7 @@
           <p:cNvPr id="22" name="">
             <a:extLst xmlns:a="http://schemas.openxmlformats.org/drawingml/2006/main">
               <a:ext uri="{FF2B5EF4-FFF2-40B4-BE49-F238E27FC236}">
-                <a16:creationId xmlns:a16="http://schemas.microsoft.com/office/drawing/2014/main" id="{E47F2832-0D0D-4614-9F41-9755F42ED41A}"/>
+                <a16:creationId xmlns:a16="http://schemas.microsoft.com/office/drawing/2014/main" id="{670182B3-AE2D-4A66-A9B5-971920D895DF}"/>
               </a:ext>
             </a:extLst>
           </p:cNvPr>
@@ -12008,7 +14849,7 @@
           <p:cNvPr id="23" name="">
             <a:extLst xmlns:a="http://schemas.openxmlformats.org/drawingml/2006/main">
               <a:ext uri="{FF2B5EF4-FFF2-40B4-BE49-F238E27FC236}">
-                <a16:creationId xmlns:a16="http://schemas.microsoft.com/office/drawing/2014/main" id="{F11CD757-F499-4794-AF62-E5F86C0AAB94}"/>
+                <a16:creationId xmlns:a16="http://schemas.microsoft.com/office/drawing/2014/main" id="{3554E54F-2610-4BCE-BCC9-9B4E7E06B824}"/>
               </a:ext>
             </a:extLst>
           </p:cNvPr>
@@ -12058,7 +14899,7 @@
           <p:cNvPr id="24" name="">
             <a:extLst xmlns:a="http://schemas.openxmlformats.org/drawingml/2006/main">
               <a:ext uri="{FF2B5EF4-FFF2-40B4-BE49-F238E27FC236}">
-                <a16:creationId xmlns:a16="http://schemas.microsoft.com/office/drawing/2014/main" id="{1C74A5BF-28C2-4F9C-AA52-21ECAB6740BF}"/>
+                <a16:creationId xmlns:a16="http://schemas.microsoft.com/office/drawing/2014/main" id="{76B91022-DF04-4AF6-B625-D60E391DCBB2}"/>
               </a:ext>
             </a:extLst>
           </p:cNvPr>
@@ -12091,7 +14932,7 @@
           <p:cNvPr id="25" name="">
             <a:extLst xmlns:a="http://schemas.openxmlformats.org/drawingml/2006/main">
               <a:ext uri="{FF2B5EF4-FFF2-40B4-BE49-F238E27FC236}">
-                <a16:creationId xmlns:a16="http://schemas.microsoft.com/office/drawing/2014/main" id="{27C61396-3210-43F7-8162-26B1BFE4D190}"/>
+                <a16:creationId xmlns:a16="http://schemas.microsoft.com/office/drawing/2014/main" id="{E728B5BD-B8D6-40C2-B6DD-95D9C381C5EC}"/>
               </a:ext>
             </a:extLst>
           </p:cNvPr>
@@ -12141,7 +14982,7 @@
           <p:cNvPr id="26" name="">
             <a:extLst xmlns:a="http://schemas.openxmlformats.org/drawingml/2006/main">
               <a:ext uri="{FF2B5EF4-FFF2-40B4-BE49-F238E27FC236}">
-                <a16:creationId xmlns:a16="http://schemas.microsoft.com/office/drawing/2014/main" id="{14BED880-28A1-4E0B-9B08-D4F26B2FFFB5}"/>
+                <a16:creationId xmlns:a16="http://schemas.microsoft.com/office/drawing/2014/main" id="{1A597EA9-3268-42AE-8F17-296E0D22D215}"/>
               </a:ext>
             </a:extLst>
           </p:cNvPr>
@@ -12174,7 +15015,7 @@
           <p:cNvPr id="27" name="">
             <a:extLst xmlns:a="http://schemas.openxmlformats.org/drawingml/2006/main">
               <a:ext uri="{FF2B5EF4-FFF2-40B4-BE49-F238E27FC236}">
-                <a16:creationId xmlns:a16="http://schemas.microsoft.com/office/drawing/2014/main" id="{94B5206B-EBF6-4E9B-A90E-2C888DB7A0BF}"/>
+                <a16:creationId xmlns:a16="http://schemas.microsoft.com/office/drawing/2014/main" id="{7B76EC5E-297D-41C3-9D15-7E3D945B3EA3}"/>
               </a:ext>
             </a:extLst>
           </p:cNvPr>
@@ -12224,7 +15065,7 @@
           <p:cNvPr id="28" name="">
             <a:extLst xmlns:a="http://schemas.openxmlformats.org/drawingml/2006/main">
               <a:ext uri="{FF2B5EF4-FFF2-40B4-BE49-F238E27FC236}">
-                <a16:creationId xmlns:a16="http://schemas.microsoft.com/office/drawing/2014/main" id="{F4AEAE4F-BB47-42F0-BC32-BA2F80591DCA}"/>
+                <a16:creationId xmlns:a16="http://schemas.microsoft.com/office/drawing/2014/main" id="{F75DB463-BA44-4DAA-B858-3282C2838AEF}"/>
               </a:ext>
             </a:extLst>
           </p:cNvPr>
@@ -12257,7 +15098,7 @@
           <p:cNvPr id="29" name="">
             <a:extLst xmlns:a="http://schemas.openxmlformats.org/drawingml/2006/main">
               <a:ext uri="{FF2B5EF4-FFF2-40B4-BE49-F238E27FC236}">
-                <a16:creationId xmlns:a16="http://schemas.microsoft.com/office/drawing/2014/main" id="{5F5375C0-1438-4B75-929C-B690BA194C39}"/>
+                <a16:creationId xmlns:a16="http://schemas.microsoft.com/office/drawing/2014/main" id="{843D8CD5-C212-4E3B-A97A-8EF8F7A25CD0}"/>
               </a:ext>
             </a:extLst>
           </p:cNvPr>
@@ -12307,7 +15148,7 @@
           <p:cNvPr id="30" name="">
             <a:extLst xmlns:a="http://schemas.openxmlformats.org/drawingml/2006/main">
               <a:ext uri="{FF2B5EF4-FFF2-40B4-BE49-F238E27FC236}">
-                <a16:creationId xmlns:a16="http://schemas.microsoft.com/office/drawing/2014/main" id="{C5ABCD3F-9A3B-4E00-9878-909D4FA018D5}"/>
+                <a16:creationId xmlns:a16="http://schemas.microsoft.com/office/drawing/2014/main" id="{7D99AD39-5BAC-437B-93BB-F2192CE43F31}"/>
               </a:ext>
             </a:extLst>
           </p:cNvPr>
@@ -12340,7 +15181,7 @@
           <p:cNvPr id="31" name="">
             <a:extLst xmlns:a="http://schemas.openxmlformats.org/drawingml/2006/main">
               <a:ext uri="{FF2B5EF4-FFF2-40B4-BE49-F238E27FC236}">
-                <a16:creationId xmlns:a16="http://schemas.microsoft.com/office/drawing/2014/main" id="{9DBDD263-2F15-40A3-92CE-EBC4B03F37B1}"/>
+                <a16:creationId xmlns:a16="http://schemas.microsoft.com/office/drawing/2014/main" id="{73A4550F-D340-4CE3-AACF-3D018C3EBBD7}"/>
               </a:ext>
             </a:extLst>
           </p:cNvPr>
@@ -12390,7 +15231,7 @@
           <p:cNvPr id="32" name="">
             <a:extLst xmlns:a="http://schemas.openxmlformats.org/drawingml/2006/main">
               <a:ext uri="{FF2B5EF4-FFF2-40B4-BE49-F238E27FC236}">
-                <a16:creationId xmlns:a16="http://schemas.microsoft.com/office/drawing/2014/main" id="{C50ED5D0-6112-4CFD-A684-BB5C5FC1161E}"/>
+                <a16:creationId xmlns:a16="http://schemas.microsoft.com/office/drawing/2014/main" id="{A6811CDE-FFBC-4ECB-863C-3C49CE94CA50}"/>
               </a:ext>
             </a:extLst>
           </p:cNvPr>
@@ -12423,7 +15264,7 @@
           <p:cNvPr id="33" name="">
             <a:extLst xmlns:a="http://schemas.openxmlformats.org/drawingml/2006/main">
               <a:ext uri="{FF2B5EF4-FFF2-40B4-BE49-F238E27FC236}">
-                <a16:creationId xmlns:a16="http://schemas.microsoft.com/office/drawing/2014/main" id="{669A5E6C-D904-4DFB-803F-2C59352D81F5}"/>
+                <a16:creationId xmlns:a16="http://schemas.microsoft.com/office/drawing/2014/main" id="{2A43D0AB-B9D1-42F1-B595-A0AEF7848EB3}"/>
               </a:ext>
             </a:extLst>
           </p:cNvPr>
@@ -12473,7 +15314,7 @@
           <p:cNvPr id="34" name="">
             <a:extLst xmlns:a="http://schemas.openxmlformats.org/drawingml/2006/main">
               <a:ext uri="{FF2B5EF4-FFF2-40B4-BE49-F238E27FC236}">
-                <a16:creationId xmlns:a16="http://schemas.microsoft.com/office/drawing/2014/main" id="{FF0E03C2-E21C-47CF-90E5-2E7D01621410}"/>
+                <a16:creationId xmlns:a16="http://schemas.microsoft.com/office/drawing/2014/main" id="{B2909BB7-4410-45AC-B704-2C656D4DD9CB}"/>
               </a:ext>
             </a:extLst>
           </p:cNvPr>
@@ -12506,7 +15347,7 @@
           <p:cNvPr id="35" name="">
             <a:extLst xmlns:a="http://schemas.openxmlformats.org/drawingml/2006/main">
               <a:ext uri="{FF2B5EF4-FFF2-40B4-BE49-F238E27FC236}">
-                <a16:creationId xmlns:a16="http://schemas.microsoft.com/office/drawing/2014/main" id="{2E2E9CDB-9C95-4CC7-811E-BD9B6A566974}"/>
+                <a16:creationId xmlns:a16="http://schemas.microsoft.com/office/drawing/2014/main" id="{2C523BFD-FBB0-4BD6-A7E5-5FDB0C21DE5F}"/>
               </a:ext>
             </a:extLst>
           </p:cNvPr>
@@ -12556,7 +15397,7 @@
           <p:cNvPr id="36" name="">
             <a:extLst xmlns:a="http://schemas.openxmlformats.org/drawingml/2006/main">
               <a:ext uri="{FF2B5EF4-FFF2-40B4-BE49-F238E27FC236}">
-                <a16:creationId xmlns:a16="http://schemas.microsoft.com/office/drawing/2014/main" id="{46750E44-9BE4-4715-970D-CB7F0357FD21}"/>
+                <a16:creationId xmlns:a16="http://schemas.microsoft.com/office/drawing/2014/main" id="{C4D03376-0DE5-474B-BC51-3019C7057A12}"/>
               </a:ext>
             </a:extLst>
           </p:cNvPr>
@@ -12589,7 +15430,7 @@
           <p:cNvPr id="37" name="">
             <a:extLst xmlns:a="http://schemas.openxmlformats.org/drawingml/2006/main">
               <a:ext uri="{FF2B5EF4-FFF2-40B4-BE49-F238E27FC236}">
-                <a16:creationId xmlns:a16="http://schemas.microsoft.com/office/drawing/2014/main" id="{01B7D97C-0420-4F82-90D3-147DF3350924}"/>
+                <a16:creationId xmlns:a16="http://schemas.microsoft.com/office/drawing/2014/main" id="{D62338C5-2FB1-4DB4-B7F0-CC27B51318CF}"/>
               </a:ext>
             </a:extLst>
           </p:cNvPr>
@@ -12639,7 +15480,7 @@
           <p:cNvPr id="38" name="">
             <a:extLst xmlns:a="http://schemas.openxmlformats.org/drawingml/2006/main">
               <a:ext uri="{FF2B5EF4-FFF2-40B4-BE49-F238E27FC236}">
-                <a16:creationId xmlns:a16="http://schemas.microsoft.com/office/drawing/2014/main" id="{CBE9191E-8BC4-4BDB-A3EC-104C21769B63}"/>
+                <a16:creationId xmlns:a16="http://schemas.microsoft.com/office/drawing/2014/main" id="{F9449DB7-B73B-4CCB-BC19-4774C13E207D}"/>
               </a:ext>
             </a:extLst>
           </p:cNvPr>
@@ -12672,7 +15513,7 @@
           <p:cNvPr id="39" name="">
             <a:extLst xmlns:a="http://schemas.openxmlformats.org/drawingml/2006/main">
               <a:ext uri="{FF2B5EF4-FFF2-40B4-BE49-F238E27FC236}">
-                <a16:creationId xmlns:a16="http://schemas.microsoft.com/office/drawing/2014/main" id="{EE1663F7-676B-434B-965B-1B24DBEA8869}"/>
+                <a16:creationId xmlns:a16="http://schemas.microsoft.com/office/drawing/2014/main" id="{3A915683-47BF-4B11-B38F-FF2F2DF4CD8D}"/>
               </a:ext>
             </a:extLst>
           </p:cNvPr>
@@ -12722,7 +15563,7 @@
           <p:cNvPr id="40" name="">
             <a:extLst xmlns:a="http://schemas.openxmlformats.org/drawingml/2006/main">
               <a:ext uri="{FF2B5EF4-FFF2-40B4-BE49-F238E27FC236}">
-                <a16:creationId xmlns:a16="http://schemas.microsoft.com/office/drawing/2014/main" id="{32621536-07B2-4EE1-AD1B-E9DFC7B9CA85}"/>
+                <a16:creationId xmlns:a16="http://schemas.microsoft.com/office/drawing/2014/main" id="{1EC9C39F-1878-473F-8A29-74DC712E6DC2}"/>
               </a:ext>
             </a:extLst>
           </p:cNvPr>
@@ -12755,7 +15596,7 @@
           <p:cNvPr id="41" name="">
             <a:extLst xmlns:a="http://schemas.openxmlformats.org/drawingml/2006/main">
               <a:ext uri="{FF2B5EF4-FFF2-40B4-BE49-F238E27FC236}">
-                <a16:creationId xmlns:a16="http://schemas.microsoft.com/office/drawing/2014/main" id="{24D83F15-DD6C-43E0-A5F4-29B66C644DFE}"/>
+                <a16:creationId xmlns:a16="http://schemas.microsoft.com/office/drawing/2014/main" id="{41D5550B-4F9F-49C5-9F94-33A2AC548719}"/>
               </a:ext>
             </a:extLst>
           </p:cNvPr>
@@ -12805,7 +15646,7 @@
           <p:cNvPr id="42" name="">
             <a:extLst xmlns:a="http://schemas.openxmlformats.org/drawingml/2006/main">
               <a:ext uri="{FF2B5EF4-FFF2-40B4-BE49-F238E27FC236}">
-                <a16:creationId xmlns:a16="http://schemas.microsoft.com/office/drawing/2014/main" id="{C705F8EA-95AE-4D79-AE73-8521321782F0}"/>
+                <a16:creationId xmlns:a16="http://schemas.microsoft.com/office/drawing/2014/main" id="{42E60012-4BDD-4EE5-8E87-0F9427724503}"/>
               </a:ext>
             </a:extLst>
           </p:cNvPr>
@@ -12838,7 +15679,7 @@
           <p:cNvPr id="43" name="">
             <a:extLst xmlns:a="http://schemas.openxmlformats.org/drawingml/2006/main">
               <a:ext uri="{FF2B5EF4-FFF2-40B4-BE49-F238E27FC236}">
-                <a16:creationId xmlns:a16="http://schemas.microsoft.com/office/drawing/2014/main" id="{2B771DD9-3973-47F9-97FA-86708F16F1A9}"/>
+                <a16:creationId xmlns:a16="http://schemas.microsoft.com/office/drawing/2014/main" id="{3DE62AB6-DB72-447F-BB6E-366DD901EA36}"/>
               </a:ext>
             </a:extLst>
           </p:cNvPr>
@@ -12888,7 +15729,7 @@
           <p:cNvPr id="44" name="">
             <a:extLst xmlns:a="http://schemas.openxmlformats.org/drawingml/2006/main">
               <a:ext uri="{FF2B5EF4-FFF2-40B4-BE49-F238E27FC236}">
-                <a16:creationId xmlns:a16="http://schemas.microsoft.com/office/drawing/2014/main" id="{3A522697-B465-4774-986E-767626E88E22}"/>
+                <a16:creationId xmlns:a16="http://schemas.microsoft.com/office/drawing/2014/main" id="{6FE72D27-DF97-4184-889E-3FAA6BB19B42}"/>
               </a:ext>
             </a:extLst>
           </p:cNvPr>
@@ -12921,7 +15762,7 @@
           <p:cNvPr id="45" name="">
             <a:extLst xmlns:a="http://schemas.openxmlformats.org/drawingml/2006/main">
               <a:ext uri="{FF2B5EF4-FFF2-40B4-BE49-F238E27FC236}">
-                <a16:creationId xmlns:a16="http://schemas.microsoft.com/office/drawing/2014/main" id="{20A023DE-B10A-4E20-A970-D5FB42F286DB}"/>
+                <a16:creationId xmlns:a16="http://schemas.microsoft.com/office/drawing/2014/main" id="{D071E366-65B9-489B-86CD-F80B9EF9AA83}"/>
               </a:ext>
             </a:extLst>
           </p:cNvPr>
@@ -12971,7 +15812,7 @@
           <p:cNvPr id="46" name="">
             <a:extLst xmlns:a="http://schemas.openxmlformats.org/drawingml/2006/main">
               <a:ext uri="{FF2B5EF4-FFF2-40B4-BE49-F238E27FC236}">
-                <a16:creationId xmlns:a16="http://schemas.microsoft.com/office/drawing/2014/main" id="{7F9E7A4C-A5D4-4E24-AD1F-A83A93243F03}"/>
+                <a16:creationId xmlns:a16="http://schemas.microsoft.com/office/drawing/2014/main" id="{68DC42C2-CFE8-46B9-8298-C7AEDBD11FBA}"/>
               </a:ext>
             </a:extLst>
           </p:cNvPr>
@@ -13004,7 +15845,7 @@
           <p:cNvPr id="47" name="">
             <a:extLst xmlns:a="http://schemas.openxmlformats.org/drawingml/2006/main">
               <a:ext uri="{FF2B5EF4-FFF2-40B4-BE49-F238E27FC236}">
-                <a16:creationId xmlns:a16="http://schemas.microsoft.com/office/drawing/2014/main" id="{AFD1A7F4-1B68-4F76-9F5F-B78C153AAC78}"/>
+                <a16:creationId xmlns:a16="http://schemas.microsoft.com/office/drawing/2014/main" id="{39FCBA01-3638-44EF-9660-413387197800}"/>
               </a:ext>
             </a:extLst>
           </p:cNvPr>
@@ -13054,7 +15895,7 @@
           <p:cNvPr id="48" name="">
             <a:extLst xmlns:a="http://schemas.openxmlformats.org/drawingml/2006/main">
               <a:ext uri="{FF2B5EF4-FFF2-40B4-BE49-F238E27FC236}">
-                <a16:creationId xmlns:a16="http://schemas.microsoft.com/office/drawing/2014/main" id="{66B9C996-C93F-4A9D-AD80-7ACF1510E3F6}"/>
+                <a16:creationId xmlns:a16="http://schemas.microsoft.com/office/drawing/2014/main" id="{A9E33F16-B9AD-4D69-BEDB-9A1352CA905D}"/>
               </a:ext>
             </a:extLst>
           </p:cNvPr>
@@ -13087,7 +15928,7 @@
           <p:cNvPr id="49" name="">
             <a:extLst xmlns:a="http://schemas.openxmlformats.org/drawingml/2006/main">
               <a:ext uri="{FF2B5EF4-FFF2-40B4-BE49-F238E27FC236}">
-                <a16:creationId xmlns:a16="http://schemas.microsoft.com/office/drawing/2014/main" id="{0C7B881A-B2D2-4536-8538-5E1A4B84F978}"/>
+                <a16:creationId xmlns:a16="http://schemas.microsoft.com/office/drawing/2014/main" id="{EC356CD8-21E8-43B8-9C4E-C7A61054464A}"/>
               </a:ext>
             </a:extLst>
           </p:cNvPr>
@@ -13137,7 +15978,7 @@
           <p:cNvPr id="50" name="">
             <a:extLst xmlns:a="http://schemas.openxmlformats.org/drawingml/2006/main">
               <a:ext uri="{FF2B5EF4-FFF2-40B4-BE49-F238E27FC236}">
-                <a16:creationId xmlns:a16="http://schemas.microsoft.com/office/drawing/2014/main" id="{423E427A-D30A-494F-8ECE-BF4F997D870D}"/>
+                <a16:creationId xmlns:a16="http://schemas.microsoft.com/office/drawing/2014/main" id="{7F33CD1F-D7C3-4DA7-AA3A-ECF22D49FE59}"/>
               </a:ext>
             </a:extLst>
           </p:cNvPr>
@@ -13170,7 +16011,7 @@
           <p:cNvPr id="51" name="">
             <a:extLst xmlns:a="http://schemas.openxmlformats.org/drawingml/2006/main">
               <a:ext uri="{FF2B5EF4-FFF2-40B4-BE49-F238E27FC236}">
-                <a16:creationId xmlns:a16="http://schemas.microsoft.com/office/drawing/2014/main" id="{BE1C0747-481C-4CA6-A73A-EBA1D104C5E1}"/>
+                <a16:creationId xmlns:a16="http://schemas.microsoft.com/office/drawing/2014/main" id="{8E2CDDFC-9A3F-413A-9554-35D130B16360}"/>
               </a:ext>
             </a:extLst>
           </p:cNvPr>
@@ -13220,7 +16061,7 @@
           <p:cNvPr id="52" name="">
             <a:extLst xmlns:a="http://schemas.openxmlformats.org/drawingml/2006/main">
               <a:ext uri="{FF2B5EF4-FFF2-40B4-BE49-F238E27FC236}">
-                <a16:creationId xmlns:a16="http://schemas.microsoft.com/office/drawing/2014/main" id="{984D2008-888C-4AE2-A0FE-8B8E2BCE3BD0}"/>
+                <a16:creationId xmlns:a16="http://schemas.microsoft.com/office/drawing/2014/main" id="{20AD8F10-C978-4452-A0E4-5D7BA77AF127}"/>
               </a:ext>
             </a:extLst>
           </p:cNvPr>
@@ -13253,7 +16094,7 @@
           <p:cNvPr id="53" name="">
             <a:extLst xmlns:a="http://schemas.openxmlformats.org/drawingml/2006/main">
               <a:ext uri="{FF2B5EF4-FFF2-40B4-BE49-F238E27FC236}">
-                <a16:creationId xmlns:a16="http://schemas.microsoft.com/office/drawing/2014/main" id="{15F48D15-2F9B-495E-AC3B-DC900115F7F8}"/>
+                <a16:creationId xmlns:a16="http://schemas.microsoft.com/office/drawing/2014/main" id="{6B853C00-6BE6-49EF-B77E-219AD4FB3E6A}"/>
               </a:ext>
             </a:extLst>
           </p:cNvPr>
@@ -13303,7 +16144,7 @@
           <p:cNvPr id="54" name="">
             <a:extLst xmlns:a="http://schemas.openxmlformats.org/drawingml/2006/main">
               <a:ext uri="{FF2B5EF4-FFF2-40B4-BE49-F238E27FC236}">
-                <a16:creationId xmlns:a16="http://schemas.microsoft.com/office/drawing/2014/main" id="{6FEAB33A-F4D9-4A87-8765-928280D9F4FF}"/>
+                <a16:creationId xmlns:a16="http://schemas.microsoft.com/office/drawing/2014/main" id="{C069235A-1872-4F50-8CC2-CB41ECDBA5B3}"/>
               </a:ext>
             </a:extLst>
           </p:cNvPr>
@@ -13336,7 +16177,7 @@
           <p:cNvPr id="55" name="">
             <a:extLst xmlns:a="http://schemas.openxmlformats.org/drawingml/2006/main">
               <a:ext uri="{FF2B5EF4-FFF2-40B4-BE49-F238E27FC236}">
-                <a16:creationId xmlns:a16="http://schemas.microsoft.com/office/drawing/2014/main" id="{9094C0C4-0864-4EF5-B987-99C164C00647}"/>
+                <a16:creationId xmlns:a16="http://schemas.microsoft.com/office/drawing/2014/main" id="{0E4B4756-D3CD-483F-B45E-85306A115283}"/>
               </a:ext>
             </a:extLst>
           </p:cNvPr>
@@ -13386,7 +16227,7 @@
           <p:cNvPr id="56" name="">
             <a:extLst xmlns:a="http://schemas.openxmlformats.org/drawingml/2006/main">
               <a:ext uri="{FF2B5EF4-FFF2-40B4-BE49-F238E27FC236}">
-                <a16:creationId xmlns:a16="http://schemas.microsoft.com/office/drawing/2014/main" id="{601983F5-7730-4C5C-B5E7-B822F0726B41}"/>
+                <a16:creationId xmlns:a16="http://schemas.microsoft.com/office/drawing/2014/main" id="{40DC9B50-91A6-44FE-BA4D-04E94743174B}"/>
               </a:ext>
             </a:extLst>
           </p:cNvPr>
@@ -13419,7 +16260,7 @@
           <p:cNvPr id="57" name="">
             <a:extLst xmlns:a="http://schemas.openxmlformats.org/drawingml/2006/main">
               <a:ext uri="{FF2B5EF4-FFF2-40B4-BE49-F238E27FC236}">
-                <a16:creationId xmlns:a16="http://schemas.microsoft.com/office/drawing/2014/main" id="{C4D4F18B-F1DC-4078-BE1A-67193E7845E5}"/>
+                <a16:creationId xmlns:a16="http://schemas.microsoft.com/office/drawing/2014/main" id="{921B0A11-8ED0-416E-95C6-480743A24BE7}"/>
               </a:ext>
             </a:extLst>
           </p:cNvPr>
@@ -13469,7 +16310,7 @@
           <p:cNvPr id="58" name="">
             <a:extLst xmlns:a="http://schemas.openxmlformats.org/drawingml/2006/main">
               <a:ext uri="{FF2B5EF4-FFF2-40B4-BE49-F238E27FC236}">
-                <a16:creationId xmlns:a16="http://schemas.microsoft.com/office/drawing/2014/main" id="{E022FD70-4DB1-4BFD-A09E-4FFE542B87E9}"/>
+                <a16:creationId xmlns:a16="http://schemas.microsoft.com/office/drawing/2014/main" id="{63CAE622-A9A7-467A-B5C3-7CC280A3E87D}"/>
               </a:ext>
             </a:extLst>
           </p:cNvPr>
@@ -13502,7 +16343,7 @@
           <p:cNvPr id="59" name="">
             <a:extLst xmlns:a="http://schemas.openxmlformats.org/drawingml/2006/main">
               <a:ext uri="{FF2B5EF4-FFF2-40B4-BE49-F238E27FC236}">
-                <a16:creationId xmlns:a16="http://schemas.microsoft.com/office/drawing/2014/main" id="{AFB46794-6128-41CE-B836-C75A872BC91F}"/>
+                <a16:creationId xmlns:a16="http://schemas.microsoft.com/office/drawing/2014/main" id="{605DB361-8792-40ED-B4DF-055D63C9BEA4}"/>
               </a:ext>
             </a:extLst>
           </p:cNvPr>
@@ -13552,7 +16393,7 @@
           <p:cNvPr id="60" name="">
             <a:extLst xmlns:a="http://schemas.openxmlformats.org/drawingml/2006/main">
               <a:ext uri="{FF2B5EF4-FFF2-40B4-BE49-F238E27FC236}">
-                <a16:creationId xmlns:a16="http://schemas.microsoft.com/office/drawing/2014/main" id="{30D0EC6F-EB24-43D5-82B0-E5D179A1BF51}"/>
+                <a16:creationId xmlns:a16="http://schemas.microsoft.com/office/drawing/2014/main" id="{62E30466-9E11-4DF4-9FD6-50E1C9EB3A1D}"/>
               </a:ext>
             </a:extLst>
           </p:cNvPr>
@@ -13585,7 +16426,7 @@
           <p:cNvPr id="61" name="">
             <a:extLst xmlns:a="http://schemas.openxmlformats.org/drawingml/2006/main">
               <a:ext uri="{FF2B5EF4-FFF2-40B4-BE49-F238E27FC236}">
-                <a16:creationId xmlns:a16="http://schemas.microsoft.com/office/drawing/2014/main" id="{AAB5B752-2C47-4FE6-A63E-13B62467B73B}"/>
+                <a16:creationId xmlns:a16="http://schemas.microsoft.com/office/drawing/2014/main" id="{ADB22EBA-4BF7-4025-9280-9A5AADB5BED5}"/>
               </a:ext>
             </a:extLst>
           </p:cNvPr>
@@ -13635,7 +16476,7 @@
           <p:cNvPr id="62" name="">
             <a:extLst xmlns:a="http://schemas.openxmlformats.org/drawingml/2006/main">
               <a:ext uri="{FF2B5EF4-FFF2-40B4-BE49-F238E27FC236}">
-                <a16:creationId xmlns:a16="http://schemas.microsoft.com/office/drawing/2014/main" id="{517EC71D-D9E0-4C5E-8A47-5ABFBD147BAC}"/>
+                <a16:creationId xmlns:a16="http://schemas.microsoft.com/office/drawing/2014/main" id="{D0C866AC-CB80-4144-A6F1-739F7261C756}"/>
               </a:ext>
             </a:extLst>
           </p:cNvPr>
@@ -13668,7 +16509,7 @@
           <p:cNvPr id="63" name="">
             <a:extLst xmlns:a="http://schemas.openxmlformats.org/drawingml/2006/main">
               <a:ext uri="{FF2B5EF4-FFF2-40B4-BE49-F238E27FC236}">
-                <a16:creationId xmlns:a16="http://schemas.microsoft.com/office/drawing/2014/main" id="{E3CA97E9-9E15-4E6C-8AE2-A053DF9DDF06}"/>
+                <a16:creationId xmlns:a16="http://schemas.microsoft.com/office/drawing/2014/main" id="{1F8598C7-F0C2-41A7-AAD0-1D34E8EDA4D3}"/>
               </a:ext>
             </a:extLst>
           </p:cNvPr>
@@ -13718,7 +16559,7 @@
           <p:cNvPr id="64" name="">
             <a:extLst xmlns:a="http://schemas.openxmlformats.org/drawingml/2006/main">
               <a:ext uri="{FF2B5EF4-FFF2-40B4-BE49-F238E27FC236}">
-                <a16:creationId xmlns:a16="http://schemas.microsoft.com/office/drawing/2014/main" id="{66E84DBD-1420-4EB0-A601-F13647245F89}"/>
+                <a16:creationId xmlns:a16="http://schemas.microsoft.com/office/drawing/2014/main" id="{653C57DF-C247-48A6-81D7-9F3AB762EE5F}"/>
               </a:ext>
             </a:extLst>
           </p:cNvPr>
@@ -13751,7 +16592,7 @@
           <p:cNvPr id="65" name="">
             <a:extLst xmlns:a="http://schemas.openxmlformats.org/drawingml/2006/main">
               <a:ext uri="{FF2B5EF4-FFF2-40B4-BE49-F238E27FC236}">
-                <a16:creationId xmlns:a16="http://schemas.microsoft.com/office/drawing/2014/main" id="{A4C26141-BCA5-4406-A9B2-F76D957B69F1}"/>
+                <a16:creationId xmlns:a16="http://schemas.microsoft.com/office/drawing/2014/main" id="{755ED6A3-0FE1-4C38-971A-A89B68AB4741}"/>
               </a:ext>
             </a:extLst>
           </p:cNvPr>
@@ -13801,7 +16642,7 @@
           <p:cNvPr id="66" name="">
             <a:extLst xmlns:a="http://schemas.openxmlformats.org/drawingml/2006/main">
               <a:ext uri="{FF2B5EF4-FFF2-40B4-BE49-F238E27FC236}">
-                <a16:creationId xmlns:a16="http://schemas.microsoft.com/office/drawing/2014/main" id="{6EEC1AB5-F0E6-4EBD-9AAD-257A84982FEF}"/>
+                <a16:creationId xmlns:a16="http://schemas.microsoft.com/office/drawing/2014/main" id="{1A872389-E4CB-4271-88BC-47577B6B8956}"/>
               </a:ext>
             </a:extLst>
           </p:cNvPr>
@@ -13834,7 +16675,7 @@
           <p:cNvPr id="67" name="">
             <a:extLst xmlns:a="http://schemas.openxmlformats.org/drawingml/2006/main">
               <a:ext uri="{FF2B5EF4-FFF2-40B4-BE49-F238E27FC236}">
-                <a16:creationId xmlns:a16="http://schemas.microsoft.com/office/drawing/2014/main" id="{0902244A-5020-4021-9337-A636BC91C298}"/>
+                <a16:creationId xmlns:a16="http://schemas.microsoft.com/office/drawing/2014/main" id="{F93FF0DA-0379-4C6A-8E79-348951FF009C}"/>
               </a:ext>
             </a:extLst>
           </p:cNvPr>
@@ -13884,7 +16725,7 @@
           <p:cNvPr id="68" name="">
             <a:extLst xmlns:a="http://schemas.openxmlformats.org/drawingml/2006/main">
               <a:ext uri="{FF2B5EF4-FFF2-40B4-BE49-F238E27FC236}">
-                <a16:creationId xmlns:a16="http://schemas.microsoft.com/office/drawing/2014/main" id="{AC17D3BF-BF30-40A7-B1AC-D00A1950B255}"/>
+                <a16:creationId xmlns:a16="http://schemas.microsoft.com/office/drawing/2014/main" id="{48BE83BB-D576-4821-AC95-75F41229186F}"/>
               </a:ext>
             </a:extLst>
           </p:cNvPr>
@@ -13917,7 +16758,7 @@
           <p:cNvPr id="69" name="">
             <a:extLst xmlns:a="http://schemas.openxmlformats.org/drawingml/2006/main">
               <a:ext uri="{FF2B5EF4-FFF2-40B4-BE49-F238E27FC236}">
-                <a16:creationId xmlns:a16="http://schemas.microsoft.com/office/drawing/2014/main" id="{BF5F2F52-37BA-4C3A-BE76-DA8B9821C202}"/>
+                <a16:creationId xmlns:a16="http://schemas.microsoft.com/office/drawing/2014/main" id="{9327113D-0942-4BC1-935E-D785106CDEBF}"/>
               </a:ext>
             </a:extLst>
           </p:cNvPr>
@@ -13967,7 +16808,7 @@
           <p:cNvPr id="70" name="">
             <a:extLst xmlns:a="http://schemas.openxmlformats.org/drawingml/2006/main">
               <a:ext uri="{FF2B5EF4-FFF2-40B4-BE49-F238E27FC236}">
-                <a16:creationId xmlns:a16="http://schemas.microsoft.com/office/drawing/2014/main" id="{A3BE14F2-0E72-4DBF-87EF-A2C13AB4C366}"/>
+                <a16:creationId xmlns:a16="http://schemas.microsoft.com/office/drawing/2014/main" id="{F4418FB3-AD9F-4B69-BE0A-38A358E474DA}"/>
               </a:ext>
             </a:extLst>
           </p:cNvPr>
@@ -14000,7 +16841,7 @@
           <p:cNvPr id="71" name="">
             <a:extLst xmlns:a="http://schemas.openxmlformats.org/drawingml/2006/main">
               <a:ext uri="{FF2B5EF4-FFF2-40B4-BE49-F238E27FC236}">
-                <a16:creationId xmlns:a16="http://schemas.microsoft.com/office/drawing/2014/main" id="{A06C8DA3-4955-41C6-B620-393F9D53FC9B}"/>
+                <a16:creationId xmlns:a16="http://schemas.microsoft.com/office/drawing/2014/main" id="{3F296C89-ED78-4E80-8E14-9DDE0DCD92C4}"/>
               </a:ext>
             </a:extLst>
           </p:cNvPr>
@@ -14050,7 +16891,7 @@
           <p:cNvPr id="72" name="">
             <a:extLst xmlns:a="http://schemas.openxmlformats.org/drawingml/2006/main">
               <a:ext uri="{FF2B5EF4-FFF2-40B4-BE49-F238E27FC236}">
-                <a16:creationId xmlns:a16="http://schemas.microsoft.com/office/drawing/2014/main" id="{4DA3C306-649C-4321-B822-C6C291E40D96}"/>
+                <a16:creationId xmlns:a16="http://schemas.microsoft.com/office/drawing/2014/main" id="{05430AB0-D9AA-4A62-B154-B1CC803128B8}"/>
               </a:ext>
             </a:extLst>
           </p:cNvPr>
@@ -14083,7 +16924,7 @@
           <p:cNvPr id="73" name="">
             <a:extLst xmlns:a="http://schemas.openxmlformats.org/drawingml/2006/main">
               <a:ext uri="{FF2B5EF4-FFF2-40B4-BE49-F238E27FC236}">
-                <a16:creationId xmlns:a16="http://schemas.microsoft.com/office/drawing/2014/main" id="{A1696001-0F8B-473E-BBDD-BDDC56C04F57}"/>
+                <a16:creationId xmlns:a16="http://schemas.microsoft.com/office/drawing/2014/main" id="{8A97E30D-CBFB-48C3-87D4-F69413E2DBD5}"/>
               </a:ext>
             </a:extLst>
           </p:cNvPr>
@@ -14133,7 +16974,7 @@
           <p:cNvPr id="74" name="">
             <a:extLst xmlns:a="http://schemas.openxmlformats.org/drawingml/2006/main">
               <a:ext uri="{FF2B5EF4-FFF2-40B4-BE49-F238E27FC236}">
-                <a16:creationId xmlns:a16="http://schemas.microsoft.com/office/drawing/2014/main" id="{9A65F632-C6BB-4145-B51C-EC6E07478F0C}"/>
+                <a16:creationId xmlns:a16="http://schemas.microsoft.com/office/drawing/2014/main" id="{2553FE0F-004A-49D7-B021-228B7A9E8ACD}"/>
               </a:ext>
             </a:extLst>
           </p:cNvPr>
@@ -14166,7 +17007,7 @@
           <p:cNvPr id="75" name="">
             <a:extLst xmlns:a="http://schemas.openxmlformats.org/drawingml/2006/main">
               <a:ext uri="{FF2B5EF4-FFF2-40B4-BE49-F238E27FC236}">
-                <a16:creationId xmlns:a16="http://schemas.microsoft.com/office/drawing/2014/main" id="{2250CC0C-4311-4211-B617-040EA0EF32D2}"/>
+                <a16:creationId xmlns:a16="http://schemas.microsoft.com/office/drawing/2014/main" id="{E253E7D4-7AC3-4897-98DA-C726062872E0}"/>
               </a:ext>
             </a:extLst>
           </p:cNvPr>
@@ -14216,7 +17057,7 @@
           <p:cNvPr id="76" name="">
             <a:extLst xmlns:a="http://schemas.openxmlformats.org/drawingml/2006/main">
               <a:ext uri="{FF2B5EF4-FFF2-40B4-BE49-F238E27FC236}">
-                <a16:creationId xmlns:a16="http://schemas.microsoft.com/office/drawing/2014/main" id="{A91FCCEB-4422-4E99-A81D-776DCB8103AE}"/>
+                <a16:creationId xmlns:a16="http://schemas.microsoft.com/office/drawing/2014/main" id="{E382B430-F94B-4E0A-A8EF-F0307C6ED02D}"/>
               </a:ext>
             </a:extLst>
           </p:cNvPr>
@@ -14249,7 +17090,7 @@
           <p:cNvPr id="77" name="">
             <a:extLst xmlns:a="http://schemas.openxmlformats.org/drawingml/2006/main">
               <a:ext uri="{FF2B5EF4-FFF2-40B4-BE49-F238E27FC236}">
-                <a16:creationId xmlns:a16="http://schemas.microsoft.com/office/drawing/2014/main" id="{7FE2FD8F-C1CC-476B-95AF-A37ADABFEB15}"/>
+                <a16:creationId xmlns:a16="http://schemas.microsoft.com/office/drawing/2014/main" id="{E1D0FB18-951E-4681-ABEE-46EDF0D24AAC}"/>
               </a:ext>
             </a:extLst>
           </p:cNvPr>
@@ -14299,7 +17140,7 @@
           <p:cNvPr id="78" name="">
             <a:extLst xmlns:a="http://schemas.openxmlformats.org/drawingml/2006/main">
               <a:ext uri="{FF2B5EF4-FFF2-40B4-BE49-F238E27FC236}">
-                <a16:creationId xmlns:a16="http://schemas.microsoft.com/office/drawing/2014/main" id="{41A10E58-02BB-4485-B15A-F12BACAE2E3F}"/>
+                <a16:creationId xmlns:a16="http://schemas.microsoft.com/office/drawing/2014/main" id="{0A619B87-9A78-4882-88EF-B321D8857E25}"/>
               </a:ext>
             </a:extLst>
           </p:cNvPr>
@@ -14332,7 +17173,7 @@
           <p:cNvPr id="79" name="">
             <a:extLst xmlns:a="http://schemas.openxmlformats.org/drawingml/2006/main">
               <a:ext uri="{FF2B5EF4-FFF2-40B4-BE49-F238E27FC236}">
-                <a16:creationId xmlns:a16="http://schemas.microsoft.com/office/drawing/2014/main" id="{69762140-263C-429A-8B0F-7223AB2C0AA7}"/>
+                <a16:creationId xmlns:a16="http://schemas.microsoft.com/office/drawing/2014/main" id="{9CC1FA2D-C1E6-43B4-9615-366A4E679207}"/>
               </a:ext>
             </a:extLst>
           </p:cNvPr>
@@ -14382,7 +17223,7 @@
           <p:cNvPr id="80" name="">
             <a:extLst xmlns:a="http://schemas.openxmlformats.org/drawingml/2006/main">
               <a:ext uri="{FF2B5EF4-FFF2-40B4-BE49-F238E27FC236}">
-                <a16:creationId xmlns:a16="http://schemas.microsoft.com/office/drawing/2014/main" id="{5E844574-2781-45CA-B611-6FA4C52E4347}"/>
+                <a16:creationId xmlns:a16="http://schemas.microsoft.com/office/drawing/2014/main" id="{6121D637-4D79-48FC-9709-E811FDFAE8F4}"/>
               </a:ext>
             </a:extLst>
           </p:cNvPr>
@@ -14415,7 +17256,7 @@
           <p:cNvPr id="81" name="">
             <a:extLst xmlns:a="http://schemas.openxmlformats.org/drawingml/2006/main">
               <a:ext uri="{FF2B5EF4-FFF2-40B4-BE49-F238E27FC236}">
-                <a16:creationId xmlns:a16="http://schemas.microsoft.com/office/drawing/2014/main" id="{485A1B49-513B-45B5-8742-9567D62FA2EE}"/>
+                <a16:creationId xmlns:a16="http://schemas.microsoft.com/office/drawing/2014/main" id="{951595E8-F1C4-43A2-A49C-1833E2143236}"/>
               </a:ext>
             </a:extLst>
           </p:cNvPr>
@@ -14465,7 +17306,7 @@
           <p:cNvPr id="82" name="">
             <a:extLst xmlns:a="http://schemas.openxmlformats.org/drawingml/2006/main">
               <a:ext uri="{FF2B5EF4-FFF2-40B4-BE49-F238E27FC236}">
-                <a16:creationId xmlns:a16="http://schemas.microsoft.com/office/drawing/2014/main" id="{A9A02031-EF00-4500-8E57-41583C4D9A23}"/>
+                <a16:creationId xmlns:a16="http://schemas.microsoft.com/office/drawing/2014/main" id="{34D983EA-2338-4D9C-939A-E9A4053D2AAF}"/>
               </a:ext>
             </a:extLst>
           </p:cNvPr>
@@ -14498,7 +17339,7 @@
           <p:cNvPr id="83" name="">
             <a:extLst xmlns:a="http://schemas.openxmlformats.org/drawingml/2006/main">
               <a:ext uri="{FF2B5EF4-FFF2-40B4-BE49-F238E27FC236}">
-                <a16:creationId xmlns:a16="http://schemas.microsoft.com/office/drawing/2014/main" id="{617BE262-1B63-4210-AC7B-32255D033961}"/>
+                <a16:creationId xmlns:a16="http://schemas.microsoft.com/office/drawing/2014/main" id="{36602370-CCD9-4888-84C1-022DEAD37671}"/>
               </a:ext>
             </a:extLst>
           </p:cNvPr>
@@ -14548,7 +17389,7 @@
           <p:cNvPr id="84" name="">
             <a:extLst xmlns:a="http://schemas.openxmlformats.org/drawingml/2006/main">
               <a:ext uri="{FF2B5EF4-FFF2-40B4-BE49-F238E27FC236}">
-                <a16:creationId xmlns:a16="http://schemas.microsoft.com/office/drawing/2014/main" id="{684287B2-D2D1-41C2-AA88-3DB5999DBD66}"/>
+                <a16:creationId xmlns:a16="http://schemas.microsoft.com/office/drawing/2014/main" id="{6DCA1B80-226E-416C-BD9C-99E624E755A0}"/>
               </a:ext>
             </a:extLst>
           </p:cNvPr>
@@ -14581,7 +17422,7 @@
           <p:cNvPr id="85" name="">
             <a:extLst xmlns:a="http://schemas.openxmlformats.org/drawingml/2006/main">
               <a:ext uri="{FF2B5EF4-FFF2-40B4-BE49-F238E27FC236}">
-                <a16:creationId xmlns:a16="http://schemas.microsoft.com/office/drawing/2014/main" id="{BA541A89-C67D-4891-9218-02E99FDB0706}"/>
+                <a16:creationId xmlns:a16="http://schemas.microsoft.com/office/drawing/2014/main" id="{A601A09A-73A7-4B11-9D46-7253E802C35A}"/>
               </a:ext>
             </a:extLst>
           </p:cNvPr>
@@ -14631,7 +17472,7 @@
           <p:cNvPr id="86" name="">
             <a:extLst xmlns:a="http://schemas.openxmlformats.org/drawingml/2006/main">
               <a:ext uri="{FF2B5EF4-FFF2-40B4-BE49-F238E27FC236}">
-                <a16:creationId xmlns:a16="http://schemas.microsoft.com/office/drawing/2014/main" id="{7879AEC6-C57C-4948-B244-B18CBD747333}"/>
+                <a16:creationId xmlns:a16="http://schemas.microsoft.com/office/drawing/2014/main" id="{5DC7CC1E-8BC3-4F46-B20B-1413313BFE36}"/>
               </a:ext>
             </a:extLst>
           </p:cNvPr>
@@ -14664,7 +17505,7 @@
           <p:cNvPr id="87" name="">
             <a:extLst xmlns:a="http://schemas.openxmlformats.org/drawingml/2006/main">
               <a:ext uri="{FF2B5EF4-FFF2-40B4-BE49-F238E27FC236}">
-                <a16:creationId xmlns:a16="http://schemas.microsoft.com/office/drawing/2014/main" id="{6F257AF0-4627-4F6D-B740-7B8D024483A3}"/>
+                <a16:creationId xmlns:a16="http://schemas.microsoft.com/office/drawing/2014/main" id="{404C1B30-1F84-4C79-9BB4-31B3E957D943}"/>
               </a:ext>
             </a:extLst>
           </p:cNvPr>
@@ -14714,7 +17555,7 @@
           <p:cNvPr id="88" name="">
             <a:extLst xmlns:a="http://schemas.openxmlformats.org/drawingml/2006/main">
               <a:ext uri="{FF2B5EF4-FFF2-40B4-BE49-F238E27FC236}">
-                <a16:creationId xmlns:a16="http://schemas.microsoft.com/office/drawing/2014/main" id="{AFF33D8C-F04B-4B18-A065-4F717F8F4FAD}"/>
+                <a16:creationId xmlns:a16="http://schemas.microsoft.com/office/drawing/2014/main" id="{932AB428-C936-4E66-8A2D-07F033A25949}"/>
               </a:ext>
             </a:extLst>
           </p:cNvPr>
@@ -14747,7 +17588,7 @@
           <p:cNvPr id="89" name="">
             <a:extLst xmlns:a="http://schemas.openxmlformats.org/drawingml/2006/main">
               <a:ext uri="{FF2B5EF4-FFF2-40B4-BE49-F238E27FC236}">
-                <a16:creationId xmlns:a16="http://schemas.microsoft.com/office/drawing/2014/main" id="{3F3A2C14-8A26-431E-825B-1E82FC7ED751}"/>
+                <a16:creationId xmlns:a16="http://schemas.microsoft.com/office/drawing/2014/main" id="{1ACEFA03-4EFA-40AC-882E-D0C67FD78300}"/>
               </a:ext>
             </a:extLst>
           </p:cNvPr>
@@ -14797,7 +17638,7 @@
           <p:cNvPr id="90" name="">
             <a:extLst xmlns:a="http://schemas.openxmlformats.org/drawingml/2006/main">
               <a:ext uri="{FF2B5EF4-FFF2-40B4-BE49-F238E27FC236}">
-                <a16:creationId xmlns:a16="http://schemas.microsoft.com/office/drawing/2014/main" id="{A33CAE6B-273C-4CD4-B8E5-F20CE0BCBABA}"/>
+                <a16:creationId xmlns:a16="http://schemas.microsoft.com/office/drawing/2014/main" id="{90257847-4D95-43CD-96A5-290755D8460A}"/>
               </a:ext>
             </a:extLst>
           </p:cNvPr>
@@ -14847,7 +17688,7 @@
           <p:cNvPr id="91" name="">
             <a:extLst xmlns:a="http://schemas.openxmlformats.org/drawingml/2006/main">
               <a:ext uri="{FF2B5EF4-FFF2-40B4-BE49-F238E27FC236}">
-                <a16:creationId xmlns:a16="http://schemas.microsoft.com/office/drawing/2014/main" id="{3073695E-DD6E-4A43-8537-927C91AF785E}"/>
+                <a16:creationId xmlns:a16="http://schemas.microsoft.com/office/drawing/2014/main" id="{5EC092CF-55B9-451F-87B2-02711A96B38E}"/>
               </a:ext>
             </a:extLst>
           </p:cNvPr>
@@ -14895,7 +17736,7 @@
     </p:spTree>
     <p:extLst>
       <p:ext uri="{BB962C8B-B14F-4D97-AF65-F5344CB8AC3E}">
-        <p14:creationId xmlns:p14="http://schemas.microsoft.com/office/powerpoint/2010/main" val="524495134"/>
+        <p14:creationId xmlns:p14="http://schemas.microsoft.com/office/powerpoint/2010/main" val="2140673134"/>
       </p:ext>
     </p:extLst>
   </p:cSld>
@@ -14926,7 +17767,7 @@
           <p:cNvPr id="1" name="">
             <a:extLst xmlns:a="http://schemas.openxmlformats.org/drawingml/2006/main">
               <a:ext uri="{FF2B5EF4-FFF2-40B4-BE49-F238E27FC236}">
-                <a16:creationId xmlns:a16="http://schemas.microsoft.com/office/drawing/2014/main" id="{AAFB6FDA-5127-417C-B4E1-B00B6EF663F2}"/>
+                <a16:creationId xmlns:a16="http://schemas.microsoft.com/office/drawing/2014/main" id="{1DCF1D53-D8EE-4A64-95DB-F15A7AC36DF8}"/>
               </a:ext>
             </a:extLst>
           </p:cNvPr>
@@ -14976,7 +17817,7 @@
           <p:cNvPr id="2" name="">
             <a:extLst xmlns:a="http://schemas.openxmlformats.org/drawingml/2006/main">
               <a:ext uri="{FF2B5EF4-FFF2-40B4-BE49-F238E27FC236}">
-                <a16:creationId xmlns:a16="http://schemas.microsoft.com/office/drawing/2014/main" id="{ED766542-ACC4-405E-89BF-0CFCCA694484}"/>
+                <a16:creationId xmlns:a16="http://schemas.microsoft.com/office/drawing/2014/main" id="{DF929C5B-5173-4FDE-997A-FB7AC1368646}"/>
               </a:ext>
             </a:extLst>
           </p:cNvPr>
@@ -15026,7 +17867,7 @@
           <p:cNvPr id="3" name="">
             <a:extLst xmlns:a="http://schemas.openxmlformats.org/drawingml/2006/main">
               <a:ext uri="{FF2B5EF4-FFF2-40B4-BE49-F238E27FC236}">
-                <a16:creationId xmlns:a16="http://schemas.microsoft.com/office/drawing/2014/main" id="{587C1636-D6A2-435C-A61A-B24D80A2EB46}"/>
+                <a16:creationId xmlns:a16="http://schemas.microsoft.com/office/drawing/2014/main" id="{8E1E82DD-4375-458E-8D98-DE6FEAFDC822}"/>
               </a:ext>
             </a:extLst>
           </p:cNvPr>
@@ -15059,7 +17900,7 @@
           <p:cNvPr id="4" name="">
             <a:extLst xmlns:a="http://schemas.openxmlformats.org/drawingml/2006/main">
               <a:ext uri="{FF2B5EF4-FFF2-40B4-BE49-F238E27FC236}">
-                <a16:creationId xmlns:a16="http://schemas.microsoft.com/office/drawing/2014/main" id="{55B7A710-D1A0-4EAA-9D64-D47FF41010E0}"/>
+                <a16:creationId xmlns:a16="http://schemas.microsoft.com/office/drawing/2014/main" id="{D5E1C3D9-5B8A-44D4-8552-2D5793840A7A}"/>
               </a:ext>
             </a:extLst>
           </p:cNvPr>
@@ -15109,7 +17950,7 @@
           <p:cNvPr id="5" name="">
             <a:extLst xmlns:a="http://schemas.openxmlformats.org/drawingml/2006/main">
               <a:ext uri="{FF2B5EF4-FFF2-40B4-BE49-F238E27FC236}">
-                <a16:creationId xmlns:a16="http://schemas.microsoft.com/office/drawing/2014/main" id="{1AB243E8-9BB2-4FCE-B5DA-201363E668A3}"/>
+                <a16:creationId xmlns:a16="http://schemas.microsoft.com/office/drawing/2014/main" id="{2408C045-6F55-4D28-B4C7-5B0D4C49708C}"/>
               </a:ext>
             </a:extLst>
           </p:cNvPr>
@@ -15142,7 +17983,7 @@
           <p:cNvPr id="6" name="">
             <a:extLst xmlns:a="http://schemas.openxmlformats.org/drawingml/2006/main">
               <a:ext uri="{FF2B5EF4-FFF2-40B4-BE49-F238E27FC236}">
-                <a16:creationId xmlns:a16="http://schemas.microsoft.com/office/drawing/2014/main" id="{976876EE-0499-486E-A80B-F5B8BA81B04C}"/>
+                <a16:creationId xmlns:a16="http://schemas.microsoft.com/office/drawing/2014/main" id="{0BE2331D-9039-420F-87F9-C4312FA69124}"/>
               </a:ext>
             </a:extLst>
           </p:cNvPr>
@@ -15192,7 +18033,7 @@
           <p:cNvPr id="7" name="">
             <a:extLst xmlns:a="http://schemas.openxmlformats.org/drawingml/2006/main">
               <a:ext uri="{FF2B5EF4-FFF2-40B4-BE49-F238E27FC236}">
-                <a16:creationId xmlns:a16="http://schemas.microsoft.com/office/drawing/2014/main" id="{67630F5C-64F9-40AC-BC31-C2DAA7C7B831}"/>
+                <a16:creationId xmlns:a16="http://schemas.microsoft.com/office/drawing/2014/main" id="{4C00D29D-2822-4A72-B310-486EED42D867}"/>
               </a:ext>
             </a:extLst>
           </p:cNvPr>
@@ -15242,7 +18083,7 @@
           <p:cNvPr id="8" name="">
             <a:extLst xmlns:a="http://schemas.openxmlformats.org/drawingml/2006/main">
               <a:ext uri="{FF2B5EF4-FFF2-40B4-BE49-F238E27FC236}">
-                <a16:creationId xmlns:a16="http://schemas.microsoft.com/office/drawing/2014/main" id="{823C0853-84C5-4C49-8947-91E41DED9182}"/>
+                <a16:creationId xmlns:a16="http://schemas.microsoft.com/office/drawing/2014/main" id="{78744B83-FA72-4F9D-874C-281E37FBD7CE}"/>
               </a:ext>
             </a:extLst>
           </p:cNvPr>
@@ -15292,7 +18133,7 @@
           <p:cNvPr id="9" name="">
             <a:extLst xmlns:a="http://schemas.openxmlformats.org/drawingml/2006/main">
               <a:ext uri="{FF2B5EF4-FFF2-40B4-BE49-F238E27FC236}">
-                <a16:creationId xmlns:a16="http://schemas.microsoft.com/office/drawing/2014/main" id="{C9911F00-154A-49BB-A971-53D6C1AA0267}"/>
+                <a16:creationId xmlns:a16="http://schemas.microsoft.com/office/drawing/2014/main" id="{7CDB3DE8-68A1-428D-B56F-FA2212101A3C}"/>
               </a:ext>
             </a:extLst>
           </p:cNvPr>
@@ -15342,7 +18183,7 @@
           <p:cNvPr id="10" name="">
             <a:extLst xmlns:a="http://schemas.openxmlformats.org/drawingml/2006/main">
               <a:ext uri="{FF2B5EF4-FFF2-40B4-BE49-F238E27FC236}">
-                <a16:creationId xmlns:a16="http://schemas.microsoft.com/office/drawing/2014/main" id="{32E55758-DFB1-4BC7-A5BB-4D830E85F491}"/>
+                <a16:creationId xmlns:a16="http://schemas.microsoft.com/office/drawing/2014/main" id="{59047D0A-D7E5-409A-9126-4DAF27DA43F9}"/>
               </a:ext>
             </a:extLst>
           </p:cNvPr>
@@ -15375,7 +18216,7 @@
           <p:cNvPr id="11" name="">
             <a:extLst xmlns:a="http://schemas.openxmlformats.org/drawingml/2006/main">
               <a:ext uri="{FF2B5EF4-FFF2-40B4-BE49-F238E27FC236}">
-                <a16:creationId xmlns:a16="http://schemas.microsoft.com/office/drawing/2014/main" id="{2D1611F2-9424-42F7-A438-3A85321BC9AD}"/>
+                <a16:creationId xmlns:a16="http://schemas.microsoft.com/office/drawing/2014/main" id="{9DD26DDF-C656-4A9D-B153-52E71C4E27AA}"/>
               </a:ext>
             </a:extLst>
           </p:cNvPr>
@@ -15425,7 +18266,7 @@
           <p:cNvPr id="12" name="">
             <a:extLst xmlns:a="http://schemas.openxmlformats.org/drawingml/2006/main">
               <a:ext uri="{FF2B5EF4-FFF2-40B4-BE49-F238E27FC236}">
-                <a16:creationId xmlns:a16="http://schemas.microsoft.com/office/drawing/2014/main" id="{FC56FF55-5469-4022-9AD5-D513D941B3F9}"/>
+                <a16:creationId xmlns:a16="http://schemas.microsoft.com/office/drawing/2014/main" id="{709A702D-DBCC-4CBF-8169-E4B71B31888B}"/>
               </a:ext>
             </a:extLst>
           </p:cNvPr>
@@ -15475,7 +18316,7 @@
           <p:cNvPr id="13" name="">
             <a:extLst xmlns:a="http://schemas.openxmlformats.org/drawingml/2006/main">
               <a:ext uri="{FF2B5EF4-FFF2-40B4-BE49-F238E27FC236}">
-                <a16:creationId xmlns:a16="http://schemas.microsoft.com/office/drawing/2014/main" id="{DFEB80DA-3C73-4C66-90B7-62765406494C}"/>
+                <a16:creationId xmlns:a16="http://schemas.microsoft.com/office/drawing/2014/main" id="{F5F7CC58-C376-4749-AFDC-A70268AF2C45}"/>
               </a:ext>
             </a:extLst>
           </p:cNvPr>
@@ -15525,7 +18366,7 @@
           <p:cNvPr id="14" name="">
             <a:extLst xmlns:a="http://schemas.openxmlformats.org/drawingml/2006/main">
               <a:ext uri="{FF2B5EF4-FFF2-40B4-BE49-F238E27FC236}">
-                <a16:creationId xmlns:a16="http://schemas.microsoft.com/office/drawing/2014/main" id="{E33F11E8-0A6B-403D-957C-2835F4AB9C98}"/>
+                <a16:creationId xmlns:a16="http://schemas.microsoft.com/office/drawing/2014/main" id="{C30A9DA2-491C-484D-A31E-3B5EE3228769}"/>
               </a:ext>
             </a:extLst>
           </p:cNvPr>
@@ -15575,7 +18416,7 @@
           <p:cNvPr id="15" name="">
             <a:extLst xmlns:a="http://schemas.openxmlformats.org/drawingml/2006/main">
               <a:ext uri="{FF2B5EF4-FFF2-40B4-BE49-F238E27FC236}">
-                <a16:creationId xmlns:a16="http://schemas.microsoft.com/office/drawing/2014/main" id="{B87E2CF2-97C9-4FCE-AC4F-F3CF487D4183}"/>
+                <a16:creationId xmlns:a16="http://schemas.microsoft.com/office/drawing/2014/main" id="{52FDBBF6-3F2A-43AF-BD16-D6B6A8951292}"/>
               </a:ext>
             </a:extLst>
           </p:cNvPr>
@@ -15608,7 +18449,7 @@
           <p:cNvPr id="16" name="">
             <a:extLst xmlns:a="http://schemas.openxmlformats.org/drawingml/2006/main">
               <a:ext uri="{FF2B5EF4-FFF2-40B4-BE49-F238E27FC236}">
-                <a16:creationId xmlns:a16="http://schemas.microsoft.com/office/drawing/2014/main" id="{6DA6F603-F1E8-4FF2-BB2E-4B4676F39D57}"/>
+                <a16:creationId xmlns:a16="http://schemas.microsoft.com/office/drawing/2014/main" id="{6EED78BC-5058-4FC9-B8F5-40C7A3937CEB}"/>
               </a:ext>
             </a:extLst>
           </p:cNvPr>
@@ -15658,7 +18499,7 @@
           <p:cNvPr id="17" name="">
             <a:extLst xmlns:a="http://schemas.openxmlformats.org/drawingml/2006/main">
               <a:ext uri="{FF2B5EF4-FFF2-40B4-BE49-F238E27FC236}">
-                <a16:creationId xmlns:a16="http://schemas.microsoft.com/office/drawing/2014/main" id="{5B2B86FD-66BC-483A-AF8E-88F99A8162F8}"/>
+                <a16:creationId xmlns:a16="http://schemas.microsoft.com/office/drawing/2014/main" id="{7E7DF176-2022-424F-A93F-A04774B51C12}"/>
               </a:ext>
             </a:extLst>
           </p:cNvPr>
@@ -15708,7 +18549,7 @@
           <p:cNvPr id="18" name="">
             <a:extLst xmlns:a="http://schemas.openxmlformats.org/drawingml/2006/main">
               <a:ext uri="{FF2B5EF4-FFF2-40B4-BE49-F238E27FC236}">
-                <a16:creationId xmlns:a16="http://schemas.microsoft.com/office/drawing/2014/main" id="{3F03560D-4374-4AE5-A1FC-41B2FBF0389B}"/>
+                <a16:creationId xmlns:a16="http://schemas.microsoft.com/office/drawing/2014/main" id="{1918A154-7B04-4247-89E6-2D643E7F85C2}"/>
               </a:ext>
             </a:extLst>
           </p:cNvPr>
@@ -15758,7 +18599,7 @@
           <p:cNvPr id="19" name="">
             <a:extLst xmlns:a="http://schemas.openxmlformats.org/drawingml/2006/main">
               <a:ext uri="{FF2B5EF4-FFF2-40B4-BE49-F238E27FC236}">
-                <a16:creationId xmlns:a16="http://schemas.microsoft.com/office/drawing/2014/main" id="{58CD7D1F-AAA9-4310-967F-670234CB07A7}"/>
+                <a16:creationId xmlns:a16="http://schemas.microsoft.com/office/drawing/2014/main" id="{3E9C9BC5-B051-499F-B274-DF0C799D38B4}"/>
               </a:ext>
             </a:extLst>
           </p:cNvPr>
@@ -15808,7 +18649,7 @@
           <p:cNvPr id="20" name="">
             <a:extLst xmlns:a="http://schemas.openxmlformats.org/drawingml/2006/main">
               <a:ext uri="{FF2B5EF4-FFF2-40B4-BE49-F238E27FC236}">
-                <a16:creationId xmlns:a16="http://schemas.microsoft.com/office/drawing/2014/main" id="{B90CB5BA-0A8B-44F1-9C30-0C1B143BEA4B}"/>
+                <a16:creationId xmlns:a16="http://schemas.microsoft.com/office/drawing/2014/main" id="{F2E30835-25F5-416D-BB86-9543AD21FF90}"/>
               </a:ext>
             </a:extLst>
           </p:cNvPr>
@@ -15841,7 +18682,7 @@
           <p:cNvPr id="21" name="">
             <a:extLst xmlns:a="http://schemas.openxmlformats.org/drawingml/2006/main">
               <a:ext uri="{FF2B5EF4-FFF2-40B4-BE49-F238E27FC236}">
-                <a16:creationId xmlns:a16="http://schemas.microsoft.com/office/drawing/2014/main" id="{EC918346-9F40-4DEB-8BAA-EC451DEAE3BF}"/>
+                <a16:creationId xmlns:a16="http://schemas.microsoft.com/office/drawing/2014/main" id="{BCFFDC2A-DA9C-448D-9BA9-9B48EE8B0B59}"/>
               </a:ext>
             </a:extLst>
           </p:cNvPr>
@@ -15891,7 +18732,7 @@
           <p:cNvPr id="22" name="">
             <a:extLst xmlns:a="http://schemas.openxmlformats.org/drawingml/2006/main">
               <a:ext uri="{FF2B5EF4-FFF2-40B4-BE49-F238E27FC236}">
-                <a16:creationId xmlns:a16="http://schemas.microsoft.com/office/drawing/2014/main" id="{AE7AAFAA-199D-4297-8283-2ADA16D02628}"/>
+                <a16:creationId xmlns:a16="http://schemas.microsoft.com/office/drawing/2014/main" id="{709B4F69-6120-4D99-99AB-6BA42748179A}"/>
               </a:ext>
             </a:extLst>
           </p:cNvPr>
@@ -15941,7 +18782,7 @@
           <p:cNvPr id="23" name="">
             <a:extLst xmlns:a="http://schemas.openxmlformats.org/drawingml/2006/main">
               <a:ext uri="{FF2B5EF4-FFF2-40B4-BE49-F238E27FC236}">
-                <a16:creationId xmlns:a16="http://schemas.microsoft.com/office/drawing/2014/main" id="{FD0ECD18-1FF1-43FA-9508-A0AA7D65E87F}"/>
+                <a16:creationId xmlns:a16="http://schemas.microsoft.com/office/drawing/2014/main" id="{78EAB48E-2C7B-4E08-8EA0-E2CB4756FE7F}"/>
               </a:ext>
             </a:extLst>
           </p:cNvPr>
@@ -15991,7 +18832,7 @@
           <p:cNvPr id="24" name="">
             <a:extLst xmlns:a="http://schemas.openxmlformats.org/drawingml/2006/main">
               <a:ext uri="{FF2B5EF4-FFF2-40B4-BE49-F238E27FC236}">
-                <a16:creationId xmlns:a16="http://schemas.microsoft.com/office/drawing/2014/main" id="{B92CDC30-A2CB-4885-BBE1-4046323B3280}"/>
+                <a16:creationId xmlns:a16="http://schemas.microsoft.com/office/drawing/2014/main" id="{4B5941BA-D672-4208-AB21-7165C61F1DB3}"/>
               </a:ext>
             </a:extLst>
           </p:cNvPr>
@@ -16041,7 +18882,7 @@
           <p:cNvPr id="25" name="">
             <a:extLst xmlns:a="http://schemas.openxmlformats.org/drawingml/2006/main">
               <a:ext uri="{FF2B5EF4-FFF2-40B4-BE49-F238E27FC236}">
-                <a16:creationId xmlns:a16="http://schemas.microsoft.com/office/drawing/2014/main" id="{A99EBCDC-4287-4216-B1E4-F257C5609821}"/>
+                <a16:creationId xmlns:a16="http://schemas.microsoft.com/office/drawing/2014/main" id="{0B5EFE2B-99C2-4859-9EB1-ECE9A5F4E586}"/>
               </a:ext>
             </a:extLst>
           </p:cNvPr>
@@ -16091,7 +18932,7 @@
           <p:cNvPr id="26" name="">
             <a:extLst xmlns:a="http://schemas.openxmlformats.org/drawingml/2006/main">
               <a:ext uri="{FF2B5EF4-FFF2-40B4-BE49-F238E27FC236}">
-                <a16:creationId xmlns:a16="http://schemas.microsoft.com/office/drawing/2014/main" id="{8978A520-3668-4CEC-BDD9-AF88D87E1EF7}"/>
+                <a16:creationId xmlns:a16="http://schemas.microsoft.com/office/drawing/2014/main" id="{12CE2296-BDF7-4157-BCDA-1BBB30C4DEB2}"/>
               </a:ext>
             </a:extLst>
           </p:cNvPr>
@@ -16139,7 +18980,7 @@
     </p:spTree>
     <p:extLst>
       <p:ext uri="{BB962C8B-B14F-4D97-AF65-F5344CB8AC3E}">
-        <p14:creationId xmlns:p14="http://schemas.microsoft.com/office/powerpoint/2010/main" val="1260737409"/>
+        <p14:creationId xmlns:p14="http://schemas.microsoft.com/office/powerpoint/2010/main" val="1414503557"/>
       </p:ext>
     </p:extLst>
   </p:cSld>
@@ -16170,7 +19011,7 @@
           <p:cNvPr id="1" name="">
             <a:extLst xmlns:a="http://schemas.openxmlformats.org/drawingml/2006/main">
               <a:ext uri="{FF2B5EF4-FFF2-40B4-BE49-F238E27FC236}">
-                <a16:creationId xmlns:a16="http://schemas.microsoft.com/office/drawing/2014/main" id="{DB3DF3D0-D983-4929-9EC9-52CF72CD7588}"/>
+                <a16:creationId xmlns:a16="http://schemas.microsoft.com/office/drawing/2014/main" id="{FB0A8261-ECC4-464D-AE07-BE2AF593F8A9}"/>
               </a:ext>
             </a:extLst>
           </p:cNvPr>
@@ -16220,7 +19061,7 @@
           <p:cNvPr id="2" name="">
             <a:extLst xmlns:a="http://schemas.openxmlformats.org/drawingml/2006/main">
               <a:ext uri="{FF2B5EF4-FFF2-40B4-BE49-F238E27FC236}">
-                <a16:creationId xmlns:a16="http://schemas.microsoft.com/office/drawing/2014/main" id="{4C3D5E02-4AA2-4684-9402-214ABBA16E72}"/>
+                <a16:creationId xmlns:a16="http://schemas.microsoft.com/office/drawing/2014/main" id="{860A2293-EE99-4228-8BB6-9964406F8C5D}"/>
               </a:ext>
             </a:extLst>
           </p:cNvPr>
@@ -16270,7 +19111,7 @@
           <p:cNvPr id="3" name="">
             <a:extLst xmlns:a="http://schemas.openxmlformats.org/drawingml/2006/main">
               <a:ext uri="{FF2B5EF4-FFF2-40B4-BE49-F238E27FC236}">
-                <a16:creationId xmlns:a16="http://schemas.microsoft.com/office/drawing/2014/main" id="{317C6E8F-6D3A-43CA-94A4-87A7229D6686}"/>
+                <a16:creationId xmlns:a16="http://schemas.microsoft.com/office/drawing/2014/main" id="{D27765F7-388D-4822-A43A-46D2640CAFF9}"/>
               </a:ext>
             </a:extLst>
           </p:cNvPr>
@@ -16307,7 +19148,7 @@
           <p:nvPr/>
         </p:nvPicPr>
         <p:blipFill>
-          <a:blip xmlns:r="http://schemas.openxmlformats.org/officeDocument/2006/relationships" xmlns:a="http://schemas.openxmlformats.org/drawingml/2006/main" r:embed="R28c0f13b6a214797"/>
+          <a:blip xmlns:r="http://schemas.openxmlformats.org/officeDocument/2006/relationships" xmlns:a="http://schemas.openxmlformats.org/drawingml/2006/main" r:embed="R4404628e44524cb7"/>
           <a:stretch xmlns:a="http://schemas.openxmlformats.org/drawingml/2006/main"/>
         </p:blipFill>
         <p:spPr>
@@ -16325,7 +19166,7 @@
           <p:cNvPr id="5" name="">
             <a:extLst xmlns:a="http://schemas.openxmlformats.org/drawingml/2006/main">
               <a:ext uri="{FF2B5EF4-FFF2-40B4-BE49-F238E27FC236}">
-                <a16:creationId xmlns:a16="http://schemas.microsoft.com/office/drawing/2014/main" id="{AB44F05E-9E3C-4830-81A6-87772E53D4BB}"/>
+                <a16:creationId xmlns:a16="http://schemas.microsoft.com/office/drawing/2014/main" id="{D043528D-B4D6-4093-A81F-B29A7B3DFAB9}"/>
               </a:ext>
             </a:extLst>
           </p:cNvPr>
@@ -16358,7 +19199,7 @@
           <p:cNvPr id="6" name="">
             <a:extLst xmlns:a="http://schemas.openxmlformats.org/drawingml/2006/main">
               <a:ext uri="{FF2B5EF4-FFF2-40B4-BE49-F238E27FC236}">
-                <a16:creationId xmlns:a16="http://schemas.microsoft.com/office/drawing/2014/main" id="{CCD01588-74E4-4BDE-84E5-D87B2E653EA3}"/>
+                <a16:creationId xmlns:a16="http://schemas.microsoft.com/office/drawing/2014/main" id="{6121A4B1-9FB8-4C56-B4B5-D1786199AB49}"/>
               </a:ext>
             </a:extLst>
           </p:cNvPr>
@@ -16408,7 +19249,7 @@
           <p:cNvPr id="7" name="">
             <a:extLst xmlns:a="http://schemas.openxmlformats.org/drawingml/2006/main">
               <a:ext uri="{FF2B5EF4-FFF2-40B4-BE49-F238E27FC236}">
-                <a16:creationId xmlns:a16="http://schemas.microsoft.com/office/drawing/2014/main" id="{BA7A5BCC-206F-4FF1-B99E-5C7EEF628C64}"/>
+                <a16:creationId xmlns:a16="http://schemas.microsoft.com/office/drawing/2014/main" id="{49F5B14B-1223-4DAB-91B1-34B0254026C3}"/>
               </a:ext>
             </a:extLst>
           </p:cNvPr>
@@ -16441,7 +19282,7 @@
           <p:cNvPr id="8" name="">
             <a:extLst xmlns:a="http://schemas.openxmlformats.org/drawingml/2006/main">
               <a:ext uri="{FF2B5EF4-FFF2-40B4-BE49-F238E27FC236}">
-                <a16:creationId xmlns:a16="http://schemas.microsoft.com/office/drawing/2014/main" id="{B9BB54D0-9AC1-4B31-872B-85D880FA99D8}"/>
+                <a16:creationId xmlns:a16="http://schemas.microsoft.com/office/drawing/2014/main" id="{34976E29-4984-459D-A437-F61024A7F924}"/>
               </a:ext>
             </a:extLst>
           </p:cNvPr>
@@ -16491,7 +19332,7 @@
           <p:cNvPr id="9" name="">
             <a:extLst xmlns:a="http://schemas.openxmlformats.org/drawingml/2006/main">
               <a:ext uri="{FF2B5EF4-FFF2-40B4-BE49-F238E27FC236}">
-                <a16:creationId xmlns:a16="http://schemas.microsoft.com/office/drawing/2014/main" id="{FFA62F54-4FC9-4F3B-AF4E-7083D5DDB6AD}"/>
+                <a16:creationId xmlns:a16="http://schemas.microsoft.com/office/drawing/2014/main" id="{B1D314BD-CA28-4F75-9083-89BBA3366F34}"/>
               </a:ext>
             </a:extLst>
           </p:cNvPr>
@@ -16524,7 +19365,7 @@
           <p:cNvPr id="10" name="">
             <a:extLst xmlns:a="http://schemas.openxmlformats.org/drawingml/2006/main">
               <a:ext uri="{FF2B5EF4-FFF2-40B4-BE49-F238E27FC236}">
-                <a16:creationId xmlns:a16="http://schemas.microsoft.com/office/drawing/2014/main" id="{F91F59C9-1D50-4F8F-88C4-9B344C91B11C}"/>
+                <a16:creationId xmlns:a16="http://schemas.microsoft.com/office/drawing/2014/main" id="{2652735A-9A82-46EC-916D-B8CC28D797F2}"/>
               </a:ext>
             </a:extLst>
           </p:cNvPr>
@@ -16574,7 +19415,7 @@
           <p:cNvPr id="11" name="">
             <a:extLst xmlns:a="http://schemas.openxmlformats.org/drawingml/2006/main">
               <a:ext uri="{FF2B5EF4-FFF2-40B4-BE49-F238E27FC236}">
-                <a16:creationId xmlns:a16="http://schemas.microsoft.com/office/drawing/2014/main" id="{2D1F072C-8C33-4106-B560-5B894462A1FF}"/>
+                <a16:creationId xmlns:a16="http://schemas.microsoft.com/office/drawing/2014/main" id="{172E1CF4-8139-40FD-BD9E-FE3A99570623}"/>
               </a:ext>
             </a:extLst>
           </p:cNvPr>
@@ -16607,7 +19448,7 @@
           <p:cNvPr id="12" name="">
             <a:extLst xmlns:a="http://schemas.openxmlformats.org/drawingml/2006/main">
               <a:ext uri="{FF2B5EF4-FFF2-40B4-BE49-F238E27FC236}">
-                <a16:creationId xmlns:a16="http://schemas.microsoft.com/office/drawing/2014/main" id="{4EFBC781-60DD-47C0-860F-769F71E1D340}"/>
+                <a16:creationId xmlns:a16="http://schemas.microsoft.com/office/drawing/2014/main" id="{7E09CD90-6256-4F9A-B809-226F0A49D3AB}"/>
               </a:ext>
             </a:extLst>
           </p:cNvPr>
@@ -16657,7 +19498,7 @@
           <p:cNvPr id="13" name="">
             <a:extLst xmlns:a="http://schemas.openxmlformats.org/drawingml/2006/main">
               <a:ext uri="{FF2B5EF4-FFF2-40B4-BE49-F238E27FC236}">
-                <a16:creationId xmlns:a16="http://schemas.microsoft.com/office/drawing/2014/main" id="{46F386D6-D242-4687-815F-8786A88ADF84}"/>
+                <a16:creationId xmlns:a16="http://schemas.microsoft.com/office/drawing/2014/main" id="{FCF67DB7-CB9C-41C0-9F9D-C0847D675EE9}"/>
               </a:ext>
             </a:extLst>
           </p:cNvPr>
@@ -16690,7 +19531,7 @@
           <p:cNvPr id="14" name="">
             <a:extLst xmlns:a="http://schemas.openxmlformats.org/drawingml/2006/main">
               <a:ext uri="{FF2B5EF4-FFF2-40B4-BE49-F238E27FC236}">
-                <a16:creationId xmlns:a16="http://schemas.microsoft.com/office/drawing/2014/main" id="{92AAB98E-79C6-43D1-815D-9C8B70CA9B8D}"/>
+                <a16:creationId xmlns:a16="http://schemas.microsoft.com/office/drawing/2014/main" id="{08967B0B-A535-4F69-9AAA-8829ADC43F87}"/>
               </a:ext>
             </a:extLst>
           </p:cNvPr>
@@ -16740,7 +19581,7 @@
           <p:cNvPr id="15" name="">
             <a:extLst xmlns:a="http://schemas.openxmlformats.org/drawingml/2006/main">
               <a:ext uri="{FF2B5EF4-FFF2-40B4-BE49-F238E27FC236}">
-                <a16:creationId xmlns:a16="http://schemas.microsoft.com/office/drawing/2014/main" id="{B9AB36B7-474E-47A6-915E-AC550F9EE722}"/>
+                <a16:creationId xmlns:a16="http://schemas.microsoft.com/office/drawing/2014/main" id="{68DCD478-96C2-4D2A-AD6C-8BCDCF8D9DA2}"/>
               </a:ext>
             </a:extLst>
           </p:cNvPr>
@@ -16788,7 +19629,7 @@
     </p:spTree>
     <p:extLst>
       <p:ext uri="{BB962C8B-B14F-4D97-AF65-F5344CB8AC3E}">
-        <p14:creationId xmlns:p14="http://schemas.microsoft.com/office/powerpoint/2010/main" val="1220355897"/>
+        <p14:creationId xmlns:p14="http://schemas.microsoft.com/office/powerpoint/2010/main" val="725137153"/>
       </p:ext>
     </p:extLst>
   </p:cSld>
@@ -16819,7 +19660,7 @@
           <p:cNvPr id="1" name="">
             <a:extLst xmlns:a="http://schemas.openxmlformats.org/drawingml/2006/main">
               <a:ext uri="{FF2B5EF4-FFF2-40B4-BE49-F238E27FC236}">
-                <a16:creationId xmlns:a16="http://schemas.microsoft.com/office/drawing/2014/main" id="{A2731614-2319-41F8-83F5-194F0EABCC5F}"/>
+                <a16:creationId xmlns:a16="http://schemas.microsoft.com/office/drawing/2014/main" id="{E7C3FB24-741F-47AD-AEFC-19C09F3AD69B}"/>
               </a:ext>
             </a:extLst>
           </p:cNvPr>
@@ -16869,7 +19710,7 @@
           <p:cNvPr id="2" name="">
             <a:extLst xmlns:a="http://schemas.openxmlformats.org/drawingml/2006/main">
               <a:ext uri="{FF2B5EF4-FFF2-40B4-BE49-F238E27FC236}">
-                <a16:creationId xmlns:a16="http://schemas.microsoft.com/office/drawing/2014/main" id="{97206E11-7614-4E1D-9A9C-78AC5864DB06}"/>
+                <a16:creationId xmlns:a16="http://schemas.microsoft.com/office/drawing/2014/main" id="{A39E5EBB-DA9B-42AB-91D1-8C491377C1D4}"/>
               </a:ext>
             </a:extLst>
           </p:cNvPr>
@@ -16919,7 +19760,7 @@
           <p:cNvPr id="3" name="">
             <a:extLst xmlns:a="http://schemas.openxmlformats.org/drawingml/2006/main">
               <a:ext uri="{FF2B5EF4-FFF2-40B4-BE49-F238E27FC236}">
-                <a16:creationId xmlns:a16="http://schemas.microsoft.com/office/drawing/2014/main" id="{40162B5E-EC39-4963-A5FE-F55A97F5875E}"/>
+                <a16:creationId xmlns:a16="http://schemas.microsoft.com/office/drawing/2014/main" id="{9100A5E2-5565-4C37-A06D-B87F88640A23}"/>
               </a:ext>
             </a:extLst>
           </p:cNvPr>
@@ -16952,7 +19793,7 @@
           <p:cNvPr id="4" name="">
             <a:extLst xmlns:a="http://schemas.openxmlformats.org/drawingml/2006/main">
               <a:ext uri="{FF2B5EF4-FFF2-40B4-BE49-F238E27FC236}">
-                <a16:creationId xmlns:a16="http://schemas.microsoft.com/office/drawing/2014/main" id="{98ACB84C-B2FA-4442-BF2A-3B6BAEA65510}"/>
+                <a16:creationId xmlns:a16="http://schemas.microsoft.com/office/drawing/2014/main" id="{340D8CC2-B119-43F2-BD30-3619302DF1A2}"/>
               </a:ext>
             </a:extLst>
           </p:cNvPr>
@@ -16985,7 +19826,7 @@
           <p:cNvPr id="5" name="">
             <a:extLst xmlns:a="http://schemas.openxmlformats.org/drawingml/2006/main">
               <a:ext uri="{FF2B5EF4-FFF2-40B4-BE49-F238E27FC236}">
-                <a16:creationId xmlns:a16="http://schemas.microsoft.com/office/drawing/2014/main" id="{7D841604-9218-4129-8E47-1A4177484A28}"/>
+                <a16:creationId xmlns:a16="http://schemas.microsoft.com/office/drawing/2014/main" id="{BC736706-A03E-4CC7-A3FC-5E0F06FC1CAE}"/>
               </a:ext>
             </a:extLst>
           </p:cNvPr>
@@ -17035,7 +19876,7 @@
           <p:cNvPr id="6" name="">
             <a:extLst xmlns:a="http://schemas.openxmlformats.org/drawingml/2006/main">
               <a:ext uri="{FF2B5EF4-FFF2-40B4-BE49-F238E27FC236}">
-                <a16:creationId xmlns:a16="http://schemas.microsoft.com/office/drawing/2014/main" id="{E78FC62F-A66A-49A4-A9F5-B0AA2067F2C0}"/>
+                <a16:creationId xmlns:a16="http://schemas.microsoft.com/office/drawing/2014/main" id="{4EC425AB-09E8-4AAC-ACEA-D57BE18EE833}"/>
               </a:ext>
             </a:extLst>
           </p:cNvPr>
@@ -17085,7 +19926,7 @@
           <p:cNvPr id="7" name="">
             <a:extLst xmlns:a="http://schemas.openxmlformats.org/drawingml/2006/main">
               <a:ext uri="{FF2B5EF4-FFF2-40B4-BE49-F238E27FC236}">
-                <a16:creationId xmlns:a16="http://schemas.microsoft.com/office/drawing/2014/main" id="{85D23DF1-188F-4868-836C-5EAC09DF65D6}"/>
+                <a16:creationId xmlns:a16="http://schemas.microsoft.com/office/drawing/2014/main" id="{9EF761BD-4C8D-422B-9D70-E06A8797F4D3}"/>
               </a:ext>
             </a:extLst>
           </p:cNvPr>
@@ -17135,7 +19976,7 @@
           <p:cNvPr id="8" name="">
             <a:extLst xmlns:a="http://schemas.openxmlformats.org/drawingml/2006/main">
               <a:ext uri="{FF2B5EF4-FFF2-40B4-BE49-F238E27FC236}">
-                <a16:creationId xmlns:a16="http://schemas.microsoft.com/office/drawing/2014/main" id="{C4ACA74D-97D1-4F01-8AFF-352B83166DE9}"/>
+                <a16:creationId xmlns:a16="http://schemas.microsoft.com/office/drawing/2014/main" id="{F702D4ED-1EBC-461F-8731-E099F52C7598}"/>
               </a:ext>
             </a:extLst>
           </p:cNvPr>
@@ -17185,7 +20026,7 @@
           <p:cNvPr id="9" name="">
             <a:extLst xmlns:a="http://schemas.openxmlformats.org/drawingml/2006/main">
               <a:ext uri="{FF2B5EF4-FFF2-40B4-BE49-F238E27FC236}">
-                <a16:creationId xmlns:a16="http://schemas.microsoft.com/office/drawing/2014/main" id="{075DE79D-F052-4FA3-8188-B018A558F38C}"/>
+                <a16:creationId xmlns:a16="http://schemas.microsoft.com/office/drawing/2014/main" id="{52EFF304-F0BB-41C7-9958-3DE28C274F46}"/>
               </a:ext>
             </a:extLst>
           </p:cNvPr>
@@ -17235,7 +20076,7 @@
           <p:cNvPr id="10" name="">
             <a:extLst xmlns:a="http://schemas.openxmlformats.org/drawingml/2006/main">
               <a:ext uri="{FF2B5EF4-FFF2-40B4-BE49-F238E27FC236}">
-                <a16:creationId xmlns:a16="http://schemas.microsoft.com/office/drawing/2014/main" id="{7AF9B7BE-ACB6-4ECC-A68D-322AB6EB55EA}"/>
+                <a16:creationId xmlns:a16="http://schemas.microsoft.com/office/drawing/2014/main" id="{FD7B2FDD-3858-4B25-AE34-0E94DD0E7E44}"/>
               </a:ext>
             </a:extLst>
           </p:cNvPr>
@@ -17268,7 +20109,7 @@
           <p:cNvPr id="11" name="">
             <a:extLst xmlns:a="http://schemas.openxmlformats.org/drawingml/2006/main">
               <a:ext uri="{FF2B5EF4-FFF2-40B4-BE49-F238E27FC236}">
-                <a16:creationId xmlns:a16="http://schemas.microsoft.com/office/drawing/2014/main" id="{05BA56A0-85C9-4EAF-82BD-C039974DAC6B}"/>
+                <a16:creationId xmlns:a16="http://schemas.microsoft.com/office/drawing/2014/main" id="{82F0F1D1-D8F4-4BA9-9DDA-04BC04B819CF}"/>
               </a:ext>
             </a:extLst>
           </p:cNvPr>
@@ -17318,7 +20159,7 @@
           <p:cNvPr id="12" name="">
             <a:extLst xmlns:a="http://schemas.openxmlformats.org/drawingml/2006/main">
               <a:ext uri="{FF2B5EF4-FFF2-40B4-BE49-F238E27FC236}">
-                <a16:creationId xmlns:a16="http://schemas.microsoft.com/office/drawing/2014/main" id="{18007CEC-A2CA-499D-B52B-5316E045FECB}"/>
+                <a16:creationId xmlns:a16="http://schemas.microsoft.com/office/drawing/2014/main" id="{5583C5E3-0A72-458F-870C-54A649873F5F}"/>
               </a:ext>
             </a:extLst>
           </p:cNvPr>
@@ -17368,7 +20209,7 @@
           <p:cNvPr id="13" name="">
             <a:extLst xmlns:a="http://schemas.openxmlformats.org/drawingml/2006/main">
               <a:ext uri="{FF2B5EF4-FFF2-40B4-BE49-F238E27FC236}">
-                <a16:creationId xmlns:a16="http://schemas.microsoft.com/office/drawing/2014/main" id="{A8ED7C17-A2BC-4017-900B-601D06B9DD72}"/>
+                <a16:creationId xmlns:a16="http://schemas.microsoft.com/office/drawing/2014/main" id="{ECBA6667-1B1D-419B-8188-71387DC0117D}"/>
               </a:ext>
             </a:extLst>
           </p:cNvPr>
@@ -17418,7 +20259,7 @@
           <p:cNvPr id="14" name="">
             <a:extLst xmlns:a="http://schemas.openxmlformats.org/drawingml/2006/main">
               <a:ext uri="{FF2B5EF4-FFF2-40B4-BE49-F238E27FC236}">
-                <a16:creationId xmlns:a16="http://schemas.microsoft.com/office/drawing/2014/main" id="{A60A0A31-001E-4407-A263-3AAB8C3FD4E6}"/>
+                <a16:creationId xmlns:a16="http://schemas.microsoft.com/office/drawing/2014/main" id="{C5CA5840-E48E-40B5-A65E-377F15D4DCEF}"/>
               </a:ext>
             </a:extLst>
           </p:cNvPr>
@@ -17468,7 +20309,7 @@
           <p:cNvPr id="15" name="">
             <a:extLst xmlns:a="http://schemas.openxmlformats.org/drawingml/2006/main">
               <a:ext uri="{FF2B5EF4-FFF2-40B4-BE49-F238E27FC236}">
-                <a16:creationId xmlns:a16="http://schemas.microsoft.com/office/drawing/2014/main" id="{CA739E46-F003-4D54-AF23-40FC3565904E}"/>
+                <a16:creationId xmlns:a16="http://schemas.microsoft.com/office/drawing/2014/main" id="{31685404-534C-4AD1-8A40-D14F60623312}"/>
               </a:ext>
             </a:extLst>
           </p:cNvPr>
@@ -17518,7 +20359,7 @@
           <p:cNvPr id="16" name="">
             <a:extLst xmlns:a="http://schemas.openxmlformats.org/drawingml/2006/main">
               <a:ext uri="{FF2B5EF4-FFF2-40B4-BE49-F238E27FC236}">
-                <a16:creationId xmlns:a16="http://schemas.microsoft.com/office/drawing/2014/main" id="{ED42EB78-C75C-415E-B317-DDDAA407E4EE}"/>
+                <a16:creationId xmlns:a16="http://schemas.microsoft.com/office/drawing/2014/main" id="{D2328291-9BA0-4DAC-BDBD-E89DA042B4F0}"/>
               </a:ext>
             </a:extLst>
           </p:cNvPr>
@@ -17551,7 +20392,7 @@
           <p:cNvPr id="17" name="">
             <a:extLst xmlns:a="http://schemas.openxmlformats.org/drawingml/2006/main">
               <a:ext uri="{FF2B5EF4-FFF2-40B4-BE49-F238E27FC236}">
-                <a16:creationId xmlns:a16="http://schemas.microsoft.com/office/drawing/2014/main" id="{08A4C320-7E3C-4535-B6A1-6E5E9E95AE3F}"/>
+                <a16:creationId xmlns:a16="http://schemas.microsoft.com/office/drawing/2014/main" id="{D46CD971-76F4-4EEE-8E4B-5E1EA00DD2B4}"/>
               </a:ext>
             </a:extLst>
           </p:cNvPr>
@@ -17601,7 +20442,7 @@
           <p:cNvPr id="18" name="">
             <a:extLst xmlns:a="http://schemas.openxmlformats.org/drawingml/2006/main">
               <a:ext uri="{FF2B5EF4-FFF2-40B4-BE49-F238E27FC236}">
-                <a16:creationId xmlns:a16="http://schemas.microsoft.com/office/drawing/2014/main" id="{A7389138-D101-4DC3-866A-3220014AB5C3}"/>
+                <a16:creationId xmlns:a16="http://schemas.microsoft.com/office/drawing/2014/main" id="{E4552457-6AB8-426E-9699-7108C5D00EF7}"/>
               </a:ext>
             </a:extLst>
           </p:cNvPr>
@@ -17651,7 +20492,7 @@
           <p:cNvPr id="19" name="">
             <a:extLst xmlns:a="http://schemas.openxmlformats.org/drawingml/2006/main">
               <a:ext uri="{FF2B5EF4-FFF2-40B4-BE49-F238E27FC236}">
-                <a16:creationId xmlns:a16="http://schemas.microsoft.com/office/drawing/2014/main" id="{33B4D79E-F87F-4012-8E06-56332CC7E847}"/>
+                <a16:creationId xmlns:a16="http://schemas.microsoft.com/office/drawing/2014/main" id="{5D344C3F-AB7F-4A60-A56F-B7165C220B73}"/>
               </a:ext>
             </a:extLst>
           </p:cNvPr>
@@ -17701,7 +20542,7 @@
           <p:cNvPr id="20" name="">
             <a:extLst xmlns:a="http://schemas.openxmlformats.org/drawingml/2006/main">
               <a:ext uri="{FF2B5EF4-FFF2-40B4-BE49-F238E27FC236}">
-                <a16:creationId xmlns:a16="http://schemas.microsoft.com/office/drawing/2014/main" id="{4664226E-3F06-4471-B8D7-4CAAA2A638E7}"/>
+                <a16:creationId xmlns:a16="http://schemas.microsoft.com/office/drawing/2014/main" id="{AEE1A29B-2DF3-4623-A56F-A5BBD635CB94}"/>
               </a:ext>
             </a:extLst>
           </p:cNvPr>
@@ -17751,7 +20592,7 @@
           <p:cNvPr id="21" name="">
             <a:extLst xmlns:a="http://schemas.openxmlformats.org/drawingml/2006/main">
               <a:ext uri="{FF2B5EF4-FFF2-40B4-BE49-F238E27FC236}">
-                <a16:creationId xmlns:a16="http://schemas.microsoft.com/office/drawing/2014/main" id="{D6E9837F-5EC7-4FB0-9B18-BF3C6399A723}"/>
+                <a16:creationId xmlns:a16="http://schemas.microsoft.com/office/drawing/2014/main" id="{B282EE77-C43F-4A8E-9604-624098FFADFD}"/>
               </a:ext>
             </a:extLst>
           </p:cNvPr>
@@ -17801,7 +20642,7 @@
           <p:cNvPr id="22" name="">
             <a:extLst xmlns:a="http://schemas.openxmlformats.org/drawingml/2006/main">
               <a:ext uri="{FF2B5EF4-FFF2-40B4-BE49-F238E27FC236}">
-                <a16:creationId xmlns:a16="http://schemas.microsoft.com/office/drawing/2014/main" id="{C6C40650-44D8-47FD-8EFA-22BFE023F160}"/>
+                <a16:creationId xmlns:a16="http://schemas.microsoft.com/office/drawing/2014/main" id="{1BBAD9AA-B10E-40C0-8518-1588039B610F}"/>
               </a:ext>
             </a:extLst>
           </p:cNvPr>
@@ -17834,7 +20675,7 @@
           <p:cNvPr id="23" name="">
             <a:extLst xmlns:a="http://schemas.openxmlformats.org/drawingml/2006/main">
               <a:ext uri="{FF2B5EF4-FFF2-40B4-BE49-F238E27FC236}">
-                <a16:creationId xmlns:a16="http://schemas.microsoft.com/office/drawing/2014/main" id="{E95EB25A-0089-460B-A097-585616BF7BB4}"/>
+                <a16:creationId xmlns:a16="http://schemas.microsoft.com/office/drawing/2014/main" id="{0DEB322E-BCA1-49F3-B6C3-FA7B9B2C9DED}"/>
               </a:ext>
             </a:extLst>
           </p:cNvPr>
@@ -17884,7 +20725,7 @@
           <p:cNvPr id="24" name="">
             <a:extLst xmlns:a="http://schemas.openxmlformats.org/drawingml/2006/main">
               <a:ext uri="{FF2B5EF4-FFF2-40B4-BE49-F238E27FC236}">
-                <a16:creationId xmlns:a16="http://schemas.microsoft.com/office/drawing/2014/main" id="{D4039C54-964E-4534-BD6A-A5F623316F5F}"/>
+                <a16:creationId xmlns:a16="http://schemas.microsoft.com/office/drawing/2014/main" id="{50BB63A4-4E2B-4390-9DE0-BF50930A966F}"/>
               </a:ext>
             </a:extLst>
           </p:cNvPr>
@@ -17934,7 +20775,7 @@
           <p:cNvPr id="25" name="">
             <a:extLst xmlns:a="http://schemas.openxmlformats.org/drawingml/2006/main">
               <a:ext uri="{FF2B5EF4-FFF2-40B4-BE49-F238E27FC236}">
-                <a16:creationId xmlns:a16="http://schemas.microsoft.com/office/drawing/2014/main" id="{C643A1D7-6EE9-42A1-85D7-B7F29F1139FB}"/>
+                <a16:creationId xmlns:a16="http://schemas.microsoft.com/office/drawing/2014/main" id="{89010F40-C2AA-4259-86DA-38D4D22B63C4}"/>
               </a:ext>
             </a:extLst>
           </p:cNvPr>
@@ -17984,7 +20825,7 @@
           <p:cNvPr id="26" name="">
             <a:extLst xmlns:a="http://schemas.openxmlformats.org/drawingml/2006/main">
               <a:ext uri="{FF2B5EF4-FFF2-40B4-BE49-F238E27FC236}">
-                <a16:creationId xmlns:a16="http://schemas.microsoft.com/office/drawing/2014/main" id="{2CA3EA26-3406-4BF7-80D2-1744EB2CA9EC}"/>
+                <a16:creationId xmlns:a16="http://schemas.microsoft.com/office/drawing/2014/main" id="{4D37A120-2FA0-442D-827D-8B2C9CA53CF0}"/>
               </a:ext>
             </a:extLst>
           </p:cNvPr>
@@ -18034,7 +20875,7 @@
           <p:cNvPr id="27" name="">
             <a:extLst xmlns:a="http://schemas.openxmlformats.org/drawingml/2006/main">
               <a:ext uri="{FF2B5EF4-FFF2-40B4-BE49-F238E27FC236}">
-                <a16:creationId xmlns:a16="http://schemas.microsoft.com/office/drawing/2014/main" id="{F69BB2AC-03DD-482F-8C23-0F8F5B7A1C34}"/>
+                <a16:creationId xmlns:a16="http://schemas.microsoft.com/office/drawing/2014/main" id="{6FDF001E-02D2-4181-9E23-359DDF1DD788}"/>
               </a:ext>
             </a:extLst>
           </p:cNvPr>
@@ -18084,7 +20925,7 @@
           <p:cNvPr id="28" name="">
             <a:extLst xmlns:a="http://schemas.openxmlformats.org/drawingml/2006/main">
               <a:ext uri="{FF2B5EF4-FFF2-40B4-BE49-F238E27FC236}">
-                <a16:creationId xmlns:a16="http://schemas.microsoft.com/office/drawing/2014/main" id="{4B17AAB5-2719-4478-BAF1-934316E122CC}"/>
+                <a16:creationId xmlns:a16="http://schemas.microsoft.com/office/drawing/2014/main" id="{5E7AAC40-7B16-4E8D-8C90-C48EABF5569F}"/>
               </a:ext>
             </a:extLst>
           </p:cNvPr>
@@ -18134,7 +20975,7 @@
           <p:cNvPr id="29" name="">
             <a:extLst xmlns:a="http://schemas.openxmlformats.org/drawingml/2006/main">
               <a:ext uri="{FF2B5EF4-FFF2-40B4-BE49-F238E27FC236}">
-                <a16:creationId xmlns:a16="http://schemas.microsoft.com/office/drawing/2014/main" id="{BDC3F731-9CE8-45F0-A668-20580DF43D24}"/>
+                <a16:creationId xmlns:a16="http://schemas.microsoft.com/office/drawing/2014/main" id="{92889710-2341-4F74-B90F-30379C5C2A43}"/>
               </a:ext>
             </a:extLst>
           </p:cNvPr>
@@ -18182,7 +21023,7 @@
     </p:spTree>
     <p:extLst>
       <p:ext uri="{BB962C8B-B14F-4D97-AF65-F5344CB8AC3E}">
-        <p14:creationId xmlns:p14="http://schemas.microsoft.com/office/powerpoint/2010/main" val="1526394034"/>
+        <p14:creationId xmlns:p14="http://schemas.microsoft.com/office/powerpoint/2010/main" val="1658087994"/>
       </p:ext>
     </p:extLst>
   </p:cSld>
@@ -18213,7 +21054,7 @@
           <p:cNvPr id="1" name="">
             <a:extLst xmlns:a="http://schemas.openxmlformats.org/drawingml/2006/main">
               <a:ext uri="{FF2B5EF4-FFF2-40B4-BE49-F238E27FC236}">
-                <a16:creationId xmlns:a16="http://schemas.microsoft.com/office/drawing/2014/main" id="{93934143-B2C3-4C95-9728-BE21CBD98BB6}"/>
+                <a16:creationId xmlns:a16="http://schemas.microsoft.com/office/drawing/2014/main" id="{F5AB6ACA-8BEC-4D29-AD90-97D02397512F}"/>
               </a:ext>
             </a:extLst>
           </p:cNvPr>
@@ -18263,7 +21104,7 @@
           <p:cNvPr id="2" name="">
             <a:extLst xmlns:a="http://schemas.openxmlformats.org/drawingml/2006/main">
               <a:ext uri="{FF2B5EF4-FFF2-40B4-BE49-F238E27FC236}">
-                <a16:creationId xmlns:a16="http://schemas.microsoft.com/office/drawing/2014/main" id="{5FF9BA4F-B444-40F3-A7D7-6595CE9FA692}"/>
+                <a16:creationId xmlns:a16="http://schemas.microsoft.com/office/drawing/2014/main" id="{F8F2DE94-E69C-4296-A688-8D4C48EFF4F1}"/>
               </a:ext>
             </a:extLst>
           </p:cNvPr>
@@ -18313,7 +21154,7 @@
           <p:cNvPr id="3" name="">
             <a:extLst xmlns:a="http://schemas.openxmlformats.org/drawingml/2006/main">
               <a:ext uri="{FF2B5EF4-FFF2-40B4-BE49-F238E27FC236}">
-                <a16:creationId xmlns:a16="http://schemas.microsoft.com/office/drawing/2014/main" id="{2889A7C5-70A3-44BA-8CA7-D6E283C4BCE0}"/>
+                <a16:creationId xmlns:a16="http://schemas.microsoft.com/office/drawing/2014/main" id="{FEF6BD4F-9C00-401F-910F-DC7F045A6A56}"/>
               </a:ext>
             </a:extLst>
           </p:cNvPr>
@@ -18350,7 +21191,7 @@
           <p:nvPr/>
         </p:nvPicPr>
         <p:blipFill>
-          <a:blip xmlns:r="http://schemas.openxmlformats.org/officeDocument/2006/relationships" xmlns:a="http://schemas.openxmlformats.org/drawingml/2006/main" r:embed="R2657708c2d5040dd"/>
+          <a:blip xmlns:r="http://schemas.openxmlformats.org/officeDocument/2006/relationships" xmlns:a="http://schemas.openxmlformats.org/drawingml/2006/main" r:embed="R6b30e39bd4d343e6"/>
           <a:stretch xmlns:a="http://schemas.openxmlformats.org/drawingml/2006/main"/>
         </p:blipFill>
         <p:spPr>
@@ -18368,7 +21209,7 @@
           <p:cNvPr id="5" name="">
             <a:extLst xmlns:a="http://schemas.openxmlformats.org/drawingml/2006/main">
               <a:ext uri="{FF2B5EF4-FFF2-40B4-BE49-F238E27FC236}">
-                <a16:creationId xmlns:a16="http://schemas.microsoft.com/office/drawing/2014/main" id="{C5A77E7D-C453-46BA-B4E9-20A60517BF8D}"/>
+                <a16:creationId xmlns:a16="http://schemas.microsoft.com/office/drawing/2014/main" id="{85AA3E1A-1115-4435-9DC9-0BCC2A8E5B21}"/>
               </a:ext>
             </a:extLst>
           </p:cNvPr>
@@ -18401,7 +21242,7 @@
           <p:cNvPr id="6" name="">
             <a:extLst xmlns:a="http://schemas.openxmlformats.org/drawingml/2006/main">
               <a:ext uri="{FF2B5EF4-FFF2-40B4-BE49-F238E27FC236}">
-                <a16:creationId xmlns:a16="http://schemas.microsoft.com/office/drawing/2014/main" id="{60B8853D-772F-43C6-961B-DB270A032662}"/>
+                <a16:creationId xmlns:a16="http://schemas.microsoft.com/office/drawing/2014/main" id="{870523AB-D59C-4AF1-9009-966F84C15EF7}"/>
               </a:ext>
             </a:extLst>
           </p:cNvPr>
@@ -18451,7 +21292,7 @@
           <p:cNvPr id="7" name="">
             <a:extLst xmlns:a="http://schemas.openxmlformats.org/drawingml/2006/main">
               <a:ext uri="{FF2B5EF4-FFF2-40B4-BE49-F238E27FC236}">
-                <a16:creationId xmlns:a16="http://schemas.microsoft.com/office/drawing/2014/main" id="{111B91B3-B9C7-40FD-85F7-BDC7CC270112}"/>
+                <a16:creationId xmlns:a16="http://schemas.microsoft.com/office/drawing/2014/main" id="{C97966B1-7276-4F24-86FE-B06656700D0B}"/>
               </a:ext>
             </a:extLst>
           </p:cNvPr>
@@ -18501,7 +21342,7 @@
           <p:cNvPr id="8" name="">
             <a:extLst xmlns:a="http://schemas.openxmlformats.org/drawingml/2006/main">
               <a:ext uri="{FF2B5EF4-FFF2-40B4-BE49-F238E27FC236}">
-                <a16:creationId xmlns:a16="http://schemas.microsoft.com/office/drawing/2014/main" id="{696088B5-FC34-4EB3-BC0A-CE45DD056576}"/>
+                <a16:creationId xmlns:a16="http://schemas.microsoft.com/office/drawing/2014/main" id="{8F29266D-F30E-46C0-8BD3-3C2594E0A919}"/>
               </a:ext>
             </a:extLst>
           </p:cNvPr>
@@ -18549,7 +21390,7 @@
     </p:spTree>
     <p:extLst>
       <p:ext uri="{BB962C8B-B14F-4D97-AF65-F5344CB8AC3E}">
-        <p14:creationId xmlns:p14="http://schemas.microsoft.com/office/powerpoint/2010/main" val="1779875567"/>
+        <p14:creationId xmlns:p14="http://schemas.microsoft.com/office/powerpoint/2010/main" val="125949340"/>
       </p:ext>
     </p:extLst>
   </p:cSld>
@@ -18580,7 +21421,7 @@
           <p:cNvPr id="1" name="">
             <a:extLst xmlns:a="http://schemas.openxmlformats.org/drawingml/2006/main">
               <a:ext uri="{FF2B5EF4-FFF2-40B4-BE49-F238E27FC236}">
-                <a16:creationId xmlns:a16="http://schemas.microsoft.com/office/drawing/2014/main" id="{797D2090-6840-43AA-BB54-A285567FD1FE}"/>
+                <a16:creationId xmlns:a16="http://schemas.microsoft.com/office/drawing/2014/main" id="{DF3F8A95-3A3D-4A67-8FBD-A09BD814D091}"/>
               </a:ext>
             </a:extLst>
           </p:cNvPr>
@@ -18630,7 +21471,7 @@
           <p:cNvPr id="2" name="">
             <a:extLst xmlns:a="http://schemas.openxmlformats.org/drawingml/2006/main">
               <a:ext uri="{FF2B5EF4-FFF2-40B4-BE49-F238E27FC236}">
-                <a16:creationId xmlns:a16="http://schemas.microsoft.com/office/drawing/2014/main" id="{A74A1AFD-606B-470F-A8B0-3333143EC35E}"/>
+                <a16:creationId xmlns:a16="http://schemas.microsoft.com/office/drawing/2014/main" id="{1B94CA3F-5F32-4656-A5DF-53C848797388}"/>
               </a:ext>
             </a:extLst>
           </p:cNvPr>
@@ -18680,7 +21521,7 @@
           <p:cNvPr id="3" name="">
             <a:extLst xmlns:a="http://schemas.openxmlformats.org/drawingml/2006/main">
               <a:ext uri="{FF2B5EF4-FFF2-40B4-BE49-F238E27FC236}">
-                <a16:creationId xmlns:a16="http://schemas.microsoft.com/office/drawing/2014/main" id="{20736E71-E478-476B-9D41-037467863A32}"/>
+                <a16:creationId xmlns:a16="http://schemas.microsoft.com/office/drawing/2014/main" id="{385A482D-D599-4BCB-8488-C11B542577DC}"/>
               </a:ext>
             </a:extLst>
           </p:cNvPr>
@@ -18720,7 +21561,7 @@
         </p:xfrm>
         <a:graphic xmlns:a="http://schemas.openxmlformats.org/drawingml/2006/main">
           <a:graphicData uri="http://schemas.openxmlformats.org/drawingml/2006/chart">
-            <c:chart xmlns:r="http://schemas.openxmlformats.org/officeDocument/2006/relationships" xmlns:c="http://schemas.openxmlformats.org/drawingml/2006/chart" r:id="R2ed968e5a0614c02"/>
+            <c:chart xmlns:r="http://schemas.openxmlformats.org/officeDocument/2006/relationships" xmlns:c="http://schemas.openxmlformats.org/drawingml/2006/chart" r:id="R3b089e004fa04ff1"/>
           </a:graphicData>
         </a:graphic>
       </p:graphicFrame>
@@ -18729,7 +21570,7 @@
           <p:cNvPr id="5" name="">
             <a:extLst xmlns:a="http://schemas.openxmlformats.org/drawingml/2006/main">
               <a:ext uri="{FF2B5EF4-FFF2-40B4-BE49-F238E27FC236}">
-                <a16:creationId xmlns:a16="http://schemas.microsoft.com/office/drawing/2014/main" id="{33B46B5E-15E5-458C-9E40-9260E4F3C945}"/>
+                <a16:creationId xmlns:a16="http://schemas.microsoft.com/office/drawing/2014/main" id="{1C842D15-5AF7-4CC4-805B-5BB6D7DD1F22}"/>
               </a:ext>
             </a:extLst>
           </p:cNvPr>
@@ -18762,7 +21603,7 @@
           <p:cNvPr id="6" name="">
             <a:extLst xmlns:a="http://schemas.openxmlformats.org/drawingml/2006/main">
               <a:ext uri="{FF2B5EF4-FFF2-40B4-BE49-F238E27FC236}">
-                <a16:creationId xmlns:a16="http://schemas.microsoft.com/office/drawing/2014/main" id="{D3A03CA1-9B38-4BE7-B93E-B9D7C3420EFD}"/>
+                <a16:creationId xmlns:a16="http://schemas.microsoft.com/office/drawing/2014/main" id="{42CA1D50-1091-4CD5-A2CA-111B879B3D7E}"/>
               </a:ext>
             </a:extLst>
           </p:cNvPr>
@@ -18812,7 +21653,7 @@
           <p:cNvPr id="7" name="">
             <a:extLst xmlns:a="http://schemas.openxmlformats.org/drawingml/2006/main">
               <a:ext uri="{FF2B5EF4-FFF2-40B4-BE49-F238E27FC236}">
-                <a16:creationId xmlns:a16="http://schemas.microsoft.com/office/drawing/2014/main" id="{9F43E504-B704-4C51-AE60-3C95115F1BFA}"/>
+                <a16:creationId xmlns:a16="http://schemas.microsoft.com/office/drawing/2014/main" id="{FA5105C1-965F-47C5-8ED2-51192AA6CFCC}"/>
               </a:ext>
             </a:extLst>
           </p:cNvPr>
@@ -18845,7 +21686,7 @@
           <p:cNvPr id="8" name="">
             <a:extLst xmlns:a="http://schemas.openxmlformats.org/drawingml/2006/main">
               <a:ext uri="{FF2B5EF4-FFF2-40B4-BE49-F238E27FC236}">
-                <a16:creationId xmlns:a16="http://schemas.microsoft.com/office/drawing/2014/main" id="{161E34AE-833D-4E70-8D7C-D03F8C4A5CCC}"/>
+                <a16:creationId xmlns:a16="http://schemas.microsoft.com/office/drawing/2014/main" id="{56ADCFA2-1D77-4509-BECE-5F12FB98D550}"/>
               </a:ext>
             </a:extLst>
           </p:cNvPr>
@@ -18895,7 +21736,7 @@
           <p:cNvPr id="9" name="">
             <a:extLst xmlns:a="http://schemas.openxmlformats.org/drawingml/2006/main">
               <a:ext uri="{FF2B5EF4-FFF2-40B4-BE49-F238E27FC236}">
-                <a16:creationId xmlns:a16="http://schemas.microsoft.com/office/drawing/2014/main" id="{C1A321D7-F983-4032-8404-935076D40318}"/>
+                <a16:creationId xmlns:a16="http://schemas.microsoft.com/office/drawing/2014/main" id="{7B8DAD91-E6DA-420E-A9B3-A852F7F10412}"/>
               </a:ext>
             </a:extLst>
           </p:cNvPr>
@@ -18928,7 +21769,7 @@
           <p:cNvPr id="10" name="">
             <a:extLst xmlns:a="http://schemas.openxmlformats.org/drawingml/2006/main">
               <a:ext uri="{FF2B5EF4-FFF2-40B4-BE49-F238E27FC236}">
-                <a16:creationId xmlns:a16="http://schemas.microsoft.com/office/drawing/2014/main" id="{89853AC7-4065-4DA6-8631-1F903CA78771}"/>
+                <a16:creationId xmlns:a16="http://schemas.microsoft.com/office/drawing/2014/main" id="{69A23DB3-0332-4BE7-97C1-D1BB3097ACE5}"/>
               </a:ext>
             </a:extLst>
           </p:cNvPr>
@@ -18978,7 +21819,7 @@
           <p:cNvPr id="11" name="">
             <a:extLst xmlns:a="http://schemas.openxmlformats.org/drawingml/2006/main">
               <a:ext uri="{FF2B5EF4-FFF2-40B4-BE49-F238E27FC236}">
-                <a16:creationId xmlns:a16="http://schemas.microsoft.com/office/drawing/2014/main" id="{5F424ADF-0645-4F6B-A2B8-32B34E17B3E5}"/>
+                <a16:creationId xmlns:a16="http://schemas.microsoft.com/office/drawing/2014/main" id="{93AC7A92-BB7E-4E29-9C00-7A3E86CC6431}"/>
               </a:ext>
             </a:extLst>
           </p:cNvPr>
@@ -19011,7 +21852,7 @@
           <p:cNvPr id="12" name="">
             <a:extLst xmlns:a="http://schemas.openxmlformats.org/drawingml/2006/main">
               <a:ext uri="{FF2B5EF4-FFF2-40B4-BE49-F238E27FC236}">
-                <a16:creationId xmlns:a16="http://schemas.microsoft.com/office/drawing/2014/main" id="{0B94670B-88ED-4D06-9D6C-71A57100B2EF}"/>
+                <a16:creationId xmlns:a16="http://schemas.microsoft.com/office/drawing/2014/main" id="{2698AF49-BC8D-4FEE-8F1B-3370E2BB2F5E}"/>
               </a:ext>
             </a:extLst>
           </p:cNvPr>
@@ -19061,7 +21902,7 @@
           <p:cNvPr id="13" name="">
             <a:extLst xmlns:a="http://schemas.openxmlformats.org/drawingml/2006/main">
               <a:ext uri="{FF2B5EF4-FFF2-40B4-BE49-F238E27FC236}">
-                <a16:creationId xmlns:a16="http://schemas.microsoft.com/office/drawing/2014/main" id="{25D7401F-491C-4667-8048-D94EE185EC81}"/>
+                <a16:creationId xmlns:a16="http://schemas.microsoft.com/office/drawing/2014/main" id="{27F19255-0965-4DBE-9100-1C8B7A498E6B}"/>
               </a:ext>
             </a:extLst>
           </p:cNvPr>
@@ -19109,7 +21950,7 @@
     </p:spTree>
     <p:extLst>
       <p:ext uri="{BB962C8B-B14F-4D97-AF65-F5344CB8AC3E}">
-        <p14:creationId xmlns:p14="http://schemas.microsoft.com/office/powerpoint/2010/main" val="1552520152"/>
+        <p14:creationId xmlns:p14="http://schemas.microsoft.com/office/powerpoint/2010/main" val="254445268"/>
       </p:ext>
     </p:extLst>
   </p:cSld>

--- a/presentations/gen5_3_momentum_context_size_screen.pptx
+++ b/presentations/gen5_3_momentum_context_size_screen.pptx
@@ -2,29 +2,31 @@
 <file path=ppt/presentation.xml><?xml version="1.0" encoding="utf-8"?>
 <p:presentation xmlns:p="http://schemas.openxmlformats.org/presentationml/2006/main">
   <p:sldMasterIdLst>
-    <p:sldMasterId xmlns:r="http://schemas.openxmlformats.org/officeDocument/2006/relationships" id="2147483648" r:id="R486a72ed5afc466d"/>
+    <p:sldMasterId xmlns:r="http://schemas.openxmlformats.org/officeDocument/2006/relationships" id="2147483648" r:id="R06a1e88b1be34b9a"/>
   </p:sldMasterIdLst>
   <p:notesMasterIdLst>
-    <p:notesMasterId xmlns:r="http://schemas.openxmlformats.org/officeDocument/2006/relationships" r:id="Rfe1e93b13b224ffd"/>
+    <p:notesMasterId xmlns:r="http://schemas.openxmlformats.org/officeDocument/2006/relationships" r:id="R7060fdf3e5b34e5e"/>
   </p:notesMasterIdLst>
   <p:sldIdLst>
-    <p:sldId xmlns:r="http://schemas.openxmlformats.org/officeDocument/2006/relationships" id="256" r:id="R7a27974dc02341c1"/>
-    <p:sldId xmlns:r="http://schemas.openxmlformats.org/officeDocument/2006/relationships" id="257" r:id="R7845f4e43432461d"/>
-    <p:sldId xmlns:r="http://schemas.openxmlformats.org/officeDocument/2006/relationships" id="258" r:id="Rab8e7b9cd3af4281"/>
-    <p:sldId xmlns:r="http://schemas.openxmlformats.org/officeDocument/2006/relationships" id="259" r:id="Rffcfbf1fa70f405a"/>
-    <p:sldId xmlns:r="http://schemas.openxmlformats.org/officeDocument/2006/relationships" id="260" r:id="R2a238072d3c242d0"/>
-    <p:sldId xmlns:r="http://schemas.openxmlformats.org/officeDocument/2006/relationships" id="261" r:id="R147a4e89511d4c16"/>
-    <p:sldId xmlns:r="http://schemas.openxmlformats.org/officeDocument/2006/relationships" id="262" r:id="Re6b55dad719b46ca"/>
-    <p:sldId xmlns:r="http://schemas.openxmlformats.org/officeDocument/2006/relationships" id="263" r:id="Ra6ba0dcfda5f4f39"/>
-    <p:sldId xmlns:r="http://schemas.openxmlformats.org/officeDocument/2006/relationships" id="264" r:id="Rd3b18f852f4e4f81"/>
-    <p:sldId xmlns:r="http://schemas.openxmlformats.org/officeDocument/2006/relationships" id="265" r:id="R998a3fea02c246e2"/>
-    <p:sldId xmlns:r="http://schemas.openxmlformats.org/officeDocument/2006/relationships" id="266" r:id="Radfd5912f3c843a2"/>
-    <p:sldId xmlns:r="http://schemas.openxmlformats.org/officeDocument/2006/relationships" id="267" r:id="Re233fcad24394677"/>
-    <p:sldId xmlns:r="http://schemas.openxmlformats.org/officeDocument/2006/relationships" id="268" r:id="R4f9a9631d95b4399"/>
-    <p:sldId xmlns:r="http://schemas.openxmlformats.org/officeDocument/2006/relationships" id="269" r:id="R986c0fc4f31e4f0f"/>
-    <p:sldId xmlns:r="http://schemas.openxmlformats.org/officeDocument/2006/relationships" id="270" r:id="R7250bd5e5da342a3"/>
-    <p:sldId xmlns:r="http://schemas.openxmlformats.org/officeDocument/2006/relationships" id="271" r:id="R9aa3ac4ebd9c4eb0"/>
-    <p:sldId xmlns:r="http://schemas.openxmlformats.org/officeDocument/2006/relationships" id="272" r:id="Rbcd45905ada945b1"/>
+    <p:sldId xmlns:r="http://schemas.openxmlformats.org/officeDocument/2006/relationships" id="256" r:id="R366ef6022fc0419b"/>
+    <p:sldId xmlns:r="http://schemas.openxmlformats.org/officeDocument/2006/relationships" id="257" r:id="Re39d7ebd32cc4ae5"/>
+    <p:sldId xmlns:r="http://schemas.openxmlformats.org/officeDocument/2006/relationships" id="258" r:id="Raf440324eb0f4070"/>
+    <p:sldId xmlns:r="http://schemas.openxmlformats.org/officeDocument/2006/relationships" id="259" r:id="Rdb3c6042cdb34f36"/>
+    <p:sldId xmlns:r="http://schemas.openxmlformats.org/officeDocument/2006/relationships" id="260" r:id="R160e0061c0cf4dbd"/>
+    <p:sldId xmlns:r="http://schemas.openxmlformats.org/officeDocument/2006/relationships" id="261" r:id="R4c6bba99f70c40be"/>
+    <p:sldId xmlns:r="http://schemas.openxmlformats.org/officeDocument/2006/relationships" id="262" r:id="R4bc1845d74cb4b58"/>
+    <p:sldId xmlns:r="http://schemas.openxmlformats.org/officeDocument/2006/relationships" id="263" r:id="R61e832b5a2a2422d"/>
+    <p:sldId xmlns:r="http://schemas.openxmlformats.org/officeDocument/2006/relationships" id="264" r:id="R47d0d1c4483e4104"/>
+    <p:sldId xmlns:r="http://schemas.openxmlformats.org/officeDocument/2006/relationships" id="265" r:id="R370d7e724da9416a"/>
+    <p:sldId xmlns:r="http://schemas.openxmlformats.org/officeDocument/2006/relationships" id="266" r:id="Rb4b6471ec7a443af"/>
+    <p:sldId xmlns:r="http://schemas.openxmlformats.org/officeDocument/2006/relationships" id="267" r:id="Rfb0da01cea29402f"/>
+    <p:sldId xmlns:r="http://schemas.openxmlformats.org/officeDocument/2006/relationships" id="268" r:id="R7ba5761d2bfe404a"/>
+    <p:sldId xmlns:r="http://schemas.openxmlformats.org/officeDocument/2006/relationships" id="269" r:id="Rb7b643402df64e1c"/>
+    <p:sldId xmlns:r="http://schemas.openxmlformats.org/officeDocument/2006/relationships" id="270" r:id="Ra5e254293ca84144"/>
+    <p:sldId xmlns:r="http://schemas.openxmlformats.org/officeDocument/2006/relationships" id="271" r:id="R2824b61001cf45d7"/>
+    <p:sldId xmlns:r="http://schemas.openxmlformats.org/officeDocument/2006/relationships" id="272" r:id="Raa74517427074fc1"/>
+    <p:sldId xmlns:r="http://schemas.openxmlformats.org/officeDocument/2006/relationships" id="273" r:id="R9e8eef8c248841cd"/>
+    <p:sldId xmlns:r="http://schemas.openxmlformats.org/officeDocument/2006/relationships" id="274" r:id="R6877f1c8fecb47e3"/>
   </p:sldIdLst>
   <p:sldSz cx="12192000" cy="6858000"/>
   <p:notesSz cx="6858000" cy="9144000"/>
@@ -1107,6 +1109,138 @@
 </p:notes>
 </file>
 
+<file path=ppt/notesSlides/notesSlide18.xml><?xml version="1.0" encoding="utf-8"?>
+<p:notes xmlns:p="http://schemas.openxmlformats.org/presentationml/2006/main">
+  <p:cSld>
+    <p:spTree>
+      <p:nvGrpSpPr>
+        <p:cNvPr id="1" name=""/>
+        <p:cNvGrpSpPr/>
+        <p:nvPr/>
+      </p:nvGrpSpPr>
+      <p:grpSpPr>
+        <a:xfrm xmlns:a="http://schemas.openxmlformats.org/drawingml/2006/main"/>
+      </p:grpSpPr>
+      <p:sp>
+        <p:nvSpPr>
+          <p:cNvPr id="2" name="Slide Image Placeholder 1"/>
+          <p:cNvSpPr>
+            <a:spLocks xmlns:a="http://schemas.openxmlformats.org/drawingml/2006/main" noGrp="1"/>
+          </p:cNvSpPr>
+          <p:nvPr>
+            <p:ph type="sldImg" idx="0"/>
+          </p:nvPr>
+        </p:nvSpPr>
+        <p:spPr/>
+      </p:sp>
+      <p:sp>
+        <p:nvSpPr>
+          <p:cNvPr id="3" name="Notes Placeholder 2"/>
+          <p:cNvSpPr>
+            <a:spLocks xmlns:a="http://schemas.openxmlformats.org/drawingml/2006/main" noGrp="1"/>
+          </p:cNvSpPr>
+          <p:nvPr>
+            <p:ph type="body" idx="1"/>
+          </p:nvPr>
+        </p:nvSpPr>
+        <p:spPr/>
+        <p:txBody>
+          <a:bodyPr xmlns:a="http://schemas.openxmlformats.org/drawingml/2006/main"/>
+          <a:lstStyle xmlns:a="http://schemas.openxmlformats.org/drawingml/2006/main"/>
+          <a:p xmlns:a="http://schemas.openxmlformats.org/drawingml/2006/main"/>
+        </p:txBody>
+      </p:sp>
+      <p:sp>
+        <p:nvSpPr>
+          <p:cNvPr id="4" name="Slide Number Placeholder 3"/>
+          <p:cNvSpPr>
+            <a:spLocks xmlns:a="http://schemas.openxmlformats.org/drawingml/2006/main" noGrp="1"/>
+          </p:cNvSpPr>
+          <p:nvPr>
+            <p:ph type="sldNum" idx="5"/>
+          </p:nvPr>
+        </p:nvSpPr>
+        <p:spPr/>
+        <p:txBody>
+          <a:bodyPr xmlns:a="http://schemas.openxmlformats.org/drawingml/2006/main"/>
+          <a:lstStyle xmlns:a="http://schemas.openxmlformats.org/drawingml/2006/main"/>
+          <a:p xmlns:a="http://schemas.openxmlformats.org/drawingml/2006/main"/>
+        </p:txBody>
+      </p:sp>
+    </p:spTree>
+  </p:cSld>
+  <p:clrMapOvr>
+    <a:masterClrMapping xmlns:a="http://schemas.openxmlformats.org/drawingml/2006/main"/>
+  </p:clrMapOvr>
+</p:notes>
+</file>
+
+<file path=ppt/notesSlides/notesSlide19.xml><?xml version="1.0" encoding="utf-8"?>
+<p:notes xmlns:p="http://schemas.openxmlformats.org/presentationml/2006/main">
+  <p:cSld>
+    <p:spTree>
+      <p:nvGrpSpPr>
+        <p:cNvPr id="1" name=""/>
+        <p:cNvGrpSpPr/>
+        <p:nvPr/>
+      </p:nvGrpSpPr>
+      <p:grpSpPr>
+        <a:xfrm xmlns:a="http://schemas.openxmlformats.org/drawingml/2006/main"/>
+      </p:grpSpPr>
+      <p:sp>
+        <p:nvSpPr>
+          <p:cNvPr id="2" name="Slide Image Placeholder 1"/>
+          <p:cNvSpPr>
+            <a:spLocks xmlns:a="http://schemas.openxmlformats.org/drawingml/2006/main" noGrp="1"/>
+          </p:cNvSpPr>
+          <p:nvPr>
+            <p:ph type="sldImg" idx="0"/>
+          </p:nvPr>
+        </p:nvSpPr>
+        <p:spPr/>
+      </p:sp>
+      <p:sp>
+        <p:nvSpPr>
+          <p:cNvPr id="3" name="Notes Placeholder 2"/>
+          <p:cNvSpPr>
+            <a:spLocks xmlns:a="http://schemas.openxmlformats.org/drawingml/2006/main" noGrp="1"/>
+          </p:cNvSpPr>
+          <p:nvPr>
+            <p:ph type="body" idx="1"/>
+          </p:nvPr>
+        </p:nvSpPr>
+        <p:spPr/>
+        <p:txBody>
+          <a:bodyPr xmlns:a="http://schemas.openxmlformats.org/drawingml/2006/main"/>
+          <a:lstStyle xmlns:a="http://schemas.openxmlformats.org/drawingml/2006/main"/>
+          <a:p xmlns:a="http://schemas.openxmlformats.org/drawingml/2006/main"/>
+        </p:txBody>
+      </p:sp>
+      <p:sp>
+        <p:nvSpPr>
+          <p:cNvPr id="4" name="Slide Number Placeholder 3"/>
+          <p:cNvSpPr>
+            <a:spLocks xmlns:a="http://schemas.openxmlformats.org/drawingml/2006/main" noGrp="1"/>
+          </p:cNvSpPr>
+          <p:nvPr>
+            <p:ph type="sldNum" idx="5"/>
+          </p:nvPr>
+        </p:nvSpPr>
+        <p:spPr/>
+        <p:txBody>
+          <a:bodyPr xmlns:a="http://schemas.openxmlformats.org/drawingml/2006/main"/>
+          <a:lstStyle xmlns:a="http://schemas.openxmlformats.org/drawingml/2006/main"/>
+          <a:p xmlns:a="http://schemas.openxmlformats.org/drawingml/2006/main"/>
+        </p:txBody>
+      </p:sp>
+    </p:spTree>
+  </p:cSld>
+  <p:clrMapOvr>
+    <a:masterClrMapping xmlns:a="http://schemas.openxmlformats.org/drawingml/2006/main"/>
+  </p:clrMapOvr>
+</p:notes>
+</file>
+
 <file path=ppt/notesSlides/notesSlide2.xml><?xml version="1.0" encoding="utf-8"?>
 <p:notes xmlns:p="http://schemas.openxmlformats.org/presentationml/2006/main">
   <p:cSld>
@@ -1673,7 +1807,7 @@
   </p:cSld>
   <p:clrMap bg1="lt1" tx1="dk1" bg2="lt2" tx2="dk2" accent1="accent1" accent2="accent2" accent3="accent3" accent4="accent4" accent5="accent5" accent6="accent6" hlink="hlink" folHlink="folHlink"/>
   <p:sldLayoutIdLst>
-    <p:sldLayoutId xmlns:r="http://schemas.openxmlformats.org/officeDocument/2006/relationships" id="2147483649" r:id="R95bf8d53bcd34e92"/>
+    <p:sldLayoutId xmlns:r="http://schemas.openxmlformats.org/officeDocument/2006/relationships" id="2147483649" r:id="Rf8d212ae6d5a464b"/>
   </p:sldLayoutIdLst>
   <p:txStyles>
     <p:titleStyle>
@@ -2431,7 +2565,7 @@
           <p:cNvPr id="1" name="">
             <a:extLst xmlns:a="http://schemas.openxmlformats.org/drawingml/2006/main">
               <a:ext uri="{FF2B5EF4-FFF2-40B4-BE49-F238E27FC236}">
-                <a16:creationId xmlns:a16="http://schemas.microsoft.com/office/drawing/2014/main" id="{7B537F7F-98B8-4947-9075-0E8EB1209C36}"/>
+                <a16:creationId xmlns:a16="http://schemas.microsoft.com/office/drawing/2014/main" id="{1C19A5FD-5F61-46E9-8706-C11919F6184B}"/>
               </a:ext>
             </a:extLst>
           </p:cNvPr>
@@ -2481,7 +2615,7 @@
           <p:cNvPr id="2" name="">
             <a:extLst xmlns:a="http://schemas.openxmlformats.org/drawingml/2006/main">
               <a:ext uri="{FF2B5EF4-FFF2-40B4-BE49-F238E27FC236}">
-                <a16:creationId xmlns:a16="http://schemas.microsoft.com/office/drawing/2014/main" id="{342B5D59-0220-4285-A510-CF154686D530}"/>
+                <a16:creationId xmlns:a16="http://schemas.microsoft.com/office/drawing/2014/main" id="{FECB34EA-0F04-4950-8844-295FC930D8FB}"/>
               </a:ext>
             </a:extLst>
           </p:cNvPr>
@@ -2531,7 +2665,7 @@
           <p:cNvPr id="3" name="">
             <a:extLst xmlns:a="http://schemas.openxmlformats.org/drawingml/2006/main">
               <a:ext uri="{FF2B5EF4-FFF2-40B4-BE49-F238E27FC236}">
-                <a16:creationId xmlns:a16="http://schemas.microsoft.com/office/drawing/2014/main" id="{03205CB1-AD2C-425A-A40D-65D101A49E74}"/>
+                <a16:creationId xmlns:a16="http://schemas.microsoft.com/office/drawing/2014/main" id="{91DAF1C1-2184-4D50-A589-DBCD955ED8C0}"/>
               </a:ext>
             </a:extLst>
           </p:cNvPr>
@@ -2581,7 +2715,7 @@
           <p:cNvPr id="4" name="">
             <a:extLst xmlns:a="http://schemas.openxmlformats.org/drawingml/2006/main">
               <a:ext uri="{FF2B5EF4-FFF2-40B4-BE49-F238E27FC236}">
-                <a16:creationId xmlns:a16="http://schemas.microsoft.com/office/drawing/2014/main" id="{6673A5AA-8ACE-4B6F-BC21-F4CF98E2F707}"/>
+                <a16:creationId xmlns:a16="http://schemas.microsoft.com/office/drawing/2014/main" id="{CD1EC7AB-C76C-452A-898E-671AE3BD6764}"/>
               </a:ext>
             </a:extLst>
           </p:cNvPr>
@@ -2614,7 +2748,7 @@
           <p:cNvPr id="5" name="">
             <a:extLst xmlns:a="http://schemas.openxmlformats.org/drawingml/2006/main">
               <a:ext uri="{FF2B5EF4-FFF2-40B4-BE49-F238E27FC236}">
-                <a16:creationId xmlns:a16="http://schemas.microsoft.com/office/drawing/2014/main" id="{FC540987-B6D1-4D88-81AF-34454F073394}"/>
+                <a16:creationId xmlns:a16="http://schemas.microsoft.com/office/drawing/2014/main" id="{42D2E133-550A-4797-9937-9D31C4ECCDE8}"/>
               </a:ext>
             </a:extLst>
           </p:cNvPr>
@@ -2664,7 +2798,7 @@
           <p:cNvPr id="6" name="">
             <a:extLst xmlns:a="http://schemas.openxmlformats.org/drawingml/2006/main">
               <a:ext uri="{FF2B5EF4-FFF2-40B4-BE49-F238E27FC236}">
-                <a16:creationId xmlns:a16="http://schemas.microsoft.com/office/drawing/2014/main" id="{F3AFB728-595A-4E53-9773-6369FC510463}"/>
+                <a16:creationId xmlns:a16="http://schemas.microsoft.com/office/drawing/2014/main" id="{45A07BB3-CB8C-43A2-874C-F697C3088F0D}"/>
               </a:ext>
             </a:extLst>
           </p:cNvPr>
@@ -2712,7 +2846,7 @@
     </p:spTree>
     <p:extLst>
       <p:ext uri="{BB962C8B-B14F-4D97-AF65-F5344CB8AC3E}">
-        <p14:creationId xmlns:p14="http://schemas.microsoft.com/office/powerpoint/2010/main" val="1309269461"/>
+        <p14:creationId xmlns:p14="http://schemas.microsoft.com/office/powerpoint/2010/main" val="2034308081"/>
       </p:ext>
     </p:extLst>
   </p:cSld>
@@ -2743,7 +2877,7 @@
           <p:cNvPr id="1" name="">
             <a:extLst xmlns:a="http://schemas.openxmlformats.org/drawingml/2006/main">
               <a:ext uri="{FF2B5EF4-FFF2-40B4-BE49-F238E27FC236}">
-                <a16:creationId xmlns:a16="http://schemas.microsoft.com/office/drawing/2014/main" id="{83CFDB12-3BB2-4D73-94A0-F8B044F779C8}"/>
+                <a16:creationId xmlns:a16="http://schemas.microsoft.com/office/drawing/2014/main" id="{8FFB0307-EEF4-425C-95FD-34A52A65C814}"/>
               </a:ext>
             </a:extLst>
           </p:cNvPr>
@@ -2793,7 +2927,7 @@
           <p:cNvPr id="2" name="">
             <a:extLst xmlns:a="http://schemas.openxmlformats.org/drawingml/2006/main">
               <a:ext uri="{FF2B5EF4-FFF2-40B4-BE49-F238E27FC236}">
-                <a16:creationId xmlns:a16="http://schemas.microsoft.com/office/drawing/2014/main" id="{E947AE5B-DCDB-4C8F-B953-729F4E06B110}"/>
+                <a16:creationId xmlns:a16="http://schemas.microsoft.com/office/drawing/2014/main" id="{D33BD522-317D-4F6C-B8F1-050E65E6D584}"/>
               </a:ext>
             </a:extLst>
           </p:cNvPr>
@@ -2843,7 +2977,7 @@
           <p:cNvPr id="3" name="">
             <a:extLst xmlns:a="http://schemas.openxmlformats.org/drawingml/2006/main">
               <a:ext uri="{FF2B5EF4-FFF2-40B4-BE49-F238E27FC236}">
-                <a16:creationId xmlns:a16="http://schemas.microsoft.com/office/drawing/2014/main" id="{5EF768E9-7B3A-4472-B563-9AE3A62585D4}"/>
+                <a16:creationId xmlns:a16="http://schemas.microsoft.com/office/drawing/2014/main" id="{9FF395E1-A5A0-41BB-A859-A25022788416}"/>
               </a:ext>
             </a:extLst>
           </p:cNvPr>
@@ -2880,7 +3014,7 @@
           <p:nvPr/>
         </p:nvPicPr>
         <p:blipFill>
-          <a:blip xmlns:r="http://schemas.openxmlformats.org/officeDocument/2006/relationships" xmlns:a="http://schemas.openxmlformats.org/drawingml/2006/main" r:embed="R95888b7b1db64d09"/>
+          <a:blip xmlns:r="http://schemas.openxmlformats.org/officeDocument/2006/relationships" xmlns:a="http://schemas.openxmlformats.org/drawingml/2006/main" r:embed="R0732d99abe7842cc"/>
           <a:stretch xmlns:a="http://schemas.openxmlformats.org/drawingml/2006/main"/>
         </p:blipFill>
         <p:spPr>
@@ -2898,7 +3032,7 @@
           <p:cNvPr id="5" name="">
             <a:extLst xmlns:a="http://schemas.openxmlformats.org/drawingml/2006/main">
               <a:ext uri="{FF2B5EF4-FFF2-40B4-BE49-F238E27FC236}">
-                <a16:creationId xmlns:a16="http://schemas.microsoft.com/office/drawing/2014/main" id="{CDE5BCFE-2D14-4C13-A680-582C8827970F}"/>
+                <a16:creationId xmlns:a16="http://schemas.microsoft.com/office/drawing/2014/main" id="{FAABA588-1886-4DB9-A5BB-1175DDB6FFEE}"/>
               </a:ext>
             </a:extLst>
           </p:cNvPr>
@@ -2931,7 +3065,7 @@
           <p:cNvPr id="6" name="">
             <a:extLst xmlns:a="http://schemas.openxmlformats.org/drawingml/2006/main">
               <a:ext uri="{FF2B5EF4-FFF2-40B4-BE49-F238E27FC236}">
-                <a16:creationId xmlns:a16="http://schemas.microsoft.com/office/drawing/2014/main" id="{55580949-F926-40DF-BA39-5D592A481B17}"/>
+                <a16:creationId xmlns:a16="http://schemas.microsoft.com/office/drawing/2014/main" id="{D3B13233-C073-479A-8785-8E42ED4C235C}"/>
               </a:ext>
             </a:extLst>
           </p:cNvPr>
@@ -2981,7 +3115,7 @@
           <p:cNvPr id="7" name="">
             <a:extLst xmlns:a="http://schemas.openxmlformats.org/drawingml/2006/main">
               <a:ext uri="{FF2B5EF4-FFF2-40B4-BE49-F238E27FC236}">
-                <a16:creationId xmlns:a16="http://schemas.microsoft.com/office/drawing/2014/main" id="{5DCD5033-20F2-4751-B9E8-B00E146B0870}"/>
+                <a16:creationId xmlns:a16="http://schemas.microsoft.com/office/drawing/2014/main" id="{AD91B996-5AEE-4EEE-B91C-096BC9C66749}"/>
               </a:ext>
             </a:extLst>
           </p:cNvPr>
@@ -3031,7 +3165,7 @@
           <p:cNvPr id="8" name="">
             <a:extLst xmlns:a="http://schemas.openxmlformats.org/drawingml/2006/main">
               <a:ext uri="{FF2B5EF4-FFF2-40B4-BE49-F238E27FC236}">
-                <a16:creationId xmlns:a16="http://schemas.microsoft.com/office/drawing/2014/main" id="{796A573E-1793-4332-91EA-A763FF1DA900}"/>
+                <a16:creationId xmlns:a16="http://schemas.microsoft.com/office/drawing/2014/main" id="{6A0EB35C-DDB2-4BC0-9078-ECE58E84E10E}"/>
               </a:ext>
             </a:extLst>
           </p:cNvPr>
@@ -3079,7 +3213,7 @@
     </p:spTree>
     <p:extLst>
       <p:ext uri="{BB962C8B-B14F-4D97-AF65-F5344CB8AC3E}">
-        <p14:creationId xmlns:p14="http://schemas.microsoft.com/office/powerpoint/2010/main" val="1779271620"/>
+        <p14:creationId xmlns:p14="http://schemas.microsoft.com/office/powerpoint/2010/main" val="116375303"/>
       </p:ext>
     </p:extLst>
   </p:cSld>
@@ -3110,7 +3244,7 @@
           <p:cNvPr id="1" name="">
             <a:extLst xmlns:a="http://schemas.openxmlformats.org/drawingml/2006/main">
               <a:ext uri="{FF2B5EF4-FFF2-40B4-BE49-F238E27FC236}">
-                <a16:creationId xmlns:a16="http://schemas.microsoft.com/office/drawing/2014/main" id="{11183633-0605-4A53-BF70-9289941E6207}"/>
+                <a16:creationId xmlns:a16="http://schemas.microsoft.com/office/drawing/2014/main" id="{B48DC97B-CFCD-400C-9489-F9B30A32C5CD}"/>
               </a:ext>
             </a:extLst>
           </p:cNvPr>
@@ -3160,7 +3294,7 @@
           <p:cNvPr id="2" name="">
             <a:extLst xmlns:a="http://schemas.openxmlformats.org/drawingml/2006/main">
               <a:ext uri="{FF2B5EF4-FFF2-40B4-BE49-F238E27FC236}">
-                <a16:creationId xmlns:a16="http://schemas.microsoft.com/office/drawing/2014/main" id="{F8412CAA-B28F-40DF-BBC1-1EAB7139F3D4}"/>
+                <a16:creationId xmlns:a16="http://schemas.microsoft.com/office/drawing/2014/main" id="{D50BDB6E-7D09-4969-8D80-AD520B4DAE8B}"/>
               </a:ext>
             </a:extLst>
           </p:cNvPr>
@@ -3210,7 +3344,7 @@
           <p:cNvPr id="3" name="">
             <a:extLst xmlns:a="http://schemas.openxmlformats.org/drawingml/2006/main">
               <a:ext uri="{FF2B5EF4-FFF2-40B4-BE49-F238E27FC236}">
-                <a16:creationId xmlns:a16="http://schemas.microsoft.com/office/drawing/2014/main" id="{AE7D2DAD-B4B0-40AE-AA3C-6B3CEBFF4C38}"/>
+                <a16:creationId xmlns:a16="http://schemas.microsoft.com/office/drawing/2014/main" id="{4BB6B714-225B-4854-81DB-8C7710E2F8C4}"/>
               </a:ext>
             </a:extLst>
           </p:cNvPr>
@@ -3247,7 +3381,7 @@
           <p:nvPr/>
         </p:nvPicPr>
         <p:blipFill>
-          <a:blip xmlns:r="http://schemas.openxmlformats.org/officeDocument/2006/relationships" xmlns:a="http://schemas.openxmlformats.org/drawingml/2006/main" r:embed="R5bb077d58de34c28"/>
+          <a:blip xmlns:r="http://schemas.openxmlformats.org/officeDocument/2006/relationships" xmlns:a="http://schemas.openxmlformats.org/drawingml/2006/main" r:embed="R41d6fa84333142aa"/>
           <a:stretch xmlns:a="http://schemas.openxmlformats.org/drawingml/2006/main"/>
         </p:blipFill>
         <p:spPr>
@@ -3265,7 +3399,7 @@
           <p:cNvPr id="5" name="">
             <a:extLst xmlns:a="http://schemas.openxmlformats.org/drawingml/2006/main">
               <a:ext uri="{FF2B5EF4-FFF2-40B4-BE49-F238E27FC236}">
-                <a16:creationId xmlns:a16="http://schemas.microsoft.com/office/drawing/2014/main" id="{56A5B1C6-390A-4475-92F1-D5B072DEC290}"/>
+                <a16:creationId xmlns:a16="http://schemas.microsoft.com/office/drawing/2014/main" id="{E71CB98B-0094-4CC9-9C6C-B2DAED7A20CD}"/>
               </a:ext>
             </a:extLst>
           </p:cNvPr>
@@ -3298,7 +3432,7 @@
           <p:cNvPr id="6" name="">
             <a:extLst xmlns:a="http://schemas.openxmlformats.org/drawingml/2006/main">
               <a:ext uri="{FF2B5EF4-FFF2-40B4-BE49-F238E27FC236}">
-                <a16:creationId xmlns:a16="http://schemas.microsoft.com/office/drawing/2014/main" id="{2629EB82-6AD0-4EC3-82BE-F252E62095A7}"/>
+                <a16:creationId xmlns:a16="http://schemas.microsoft.com/office/drawing/2014/main" id="{AE607BE0-2093-4AA2-A910-DF7CD46F1890}"/>
               </a:ext>
             </a:extLst>
           </p:cNvPr>
@@ -3348,7 +3482,7 @@
           <p:cNvPr id="7" name="">
             <a:extLst xmlns:a="http://schemas.openxmlformats.org/drawingml/2006/main">
               <a:ext uri="{FF2B5EF4-FFF2-40B4-BE49-F238E27FC236}">
-                <a16:creationId xmlns:a16="http://schemas.microsoft.com/office/drawing/2014/main" id="{334C4D22-2E59-44F7-8206-B8F4B9C44F28}"/>
+                <a16:creationId xmlns:a16="http://schemas.microsoft.com/office/drawing/2014/main" id="{8B904336-5FCD-44A7-839C-346585A402A4}"/>
               </a:ext>
             </a:extLst>
           </p:cNvPr>
@@ -3381,7 +3515,7 @@
           <p:cNvPr id="8" name="">
             <a:extLst xmlns:a="http://schemas.openxmlformats.org/drawingml/2006/main">
               <a:ext uri="{FF2B5EF4-FFF2-40B4-BE49-F238E27FC236}">
-                <a16:creationId xmlns:a16="http://schemas.microsoft.com/office/drawing/2014/main" id="{B1F64F5C-A6CB-4A6A-A1E3-8E9E297C489D}"/>
+                <a16:creationId xmlns:a16="http://schemas.microsoft.com/office/drawing/2014/main" id="{48D87A66-E8EB-4F59-959B-EFF80A05CCD7}"/>
               </a:ext>
             </a:extLst>
           </p:cNvPr>
@@ -3431,7 +3565,7 @@
           <p:cNvPr id="9" name="">
             <a:extLst xmlns:a="http://schemas.openxmlformats.org/drawingml/2006/main">
               <a:ext uri="{FF2B5EF4-FFF2-40B4-BE49-F238E27FC236}">
-                <a16:creationId xmlns:a16="http://schemas.microsoft.com/office/drawing/2014/main" id="{F2E0081C-63FC-45A1-9821-94FE51F312DC}"/>
+                <a16:creationId xmlns:a16="http://schemas.microsoft.com/office/drawing/2014/main" id="{6BD8C676-6375-4B85-94BC-256CE61A5220}"/>
               </a:ext>
             </a:extLst>
           </p:cNvPr>
@@ -3464,7 +3598,7 @@
           <p:cNvPr id="10" name="">
             <a:extLst xmlns:a="http://schemas.openxmlformats.org/drawingml/2006/main">
               <a:ext uri="{FF2B5EF4-FFF2-40B4-BE49-F238E27FC236}">
-                <a16:creationId xmlns:a16="http://schemas.microsoft.com/office/drawing/2014/main" id="{CBAB375A-D3BB-48E2-AE11-DFCA33E5025F}"/>
+                <a16:creationId xmlns:a16="http://schemas.microsoft.com/office/drawing/2014/main" id="{A23B70E6-0FA4-440B-9A3D-DDDCD9C2482D}"/>
               </a:ext>
             </a:extLst>
           </p:cNvPr>
@@ -3514,7 +3648,7 @@
           <p:cNvPr id="11" name="">
             <a:extLst xmlns:a="http://schemas.openxmlformats.org/drawingml/2006/main">
               <a:ext uri="{FF2B5EF4-FFF2-40B4-BE49-F238E27FC236}">
-                <a16:creationId xmlns:a16="http://schemas.microsoft.com/office/drawing/2014/main" id="{50CF7EF4-6F98-4119-BD3F-7F56E6F9EF9F}"/>
+                <a16:creationId xmlns:a16="http://schemas.microsoft.com/office/drawing/2014/main" id="{A43BE068-E681-4832-9A55-A4D006E66215}"/>
               </a:ext>
             </a:extLst>
           </p:cNvPr>
@@ -3547,7 +3681,7 @@
           <p:cNvPr id="12" name="">
             <a:extLst xmlns:a="http://schemas.openxmlformats.org/drawingml/2006/main">
               <a:ext uri="{FF2B5EF4-FFF2-40B4-BE49-F238E27FC236}">
-                <a16:creationId xmlns:a16="http://schemas.microsoft.com/office/drawing/2014/main" id="{0892B34B-A08C-4124-8B5B-CB5261020BD5}"/>
+                <a16:creationId xmlns:a16="http://schemas.microsoft.com/office/drawing/2014/main" id="{10F87143-3EFF-457E-AEEB-E935D46A52AA}"/>
               </a:ext>
             </a:extLst>
           </p:cNvPr>
@@ -3597,7 +3731,7 @@
           <p:cNvPr id="13" name="">
             <a:extLst xmlns:a="http://schemas.openxmlformats.org/drawingml/2006/main">
               <a:ext uri="{FF2B5EF4-FFF2-40B4-BE49-F238E27FC236}">
-                <a16:creationId xmlns:a16="http://schemas.microsoft.com/office/drawing/2014/main" id="{B7A800A7-70E1-4E74-B808-C6F6B491FE44}"/>
+                <a16:creationId xmlns:a16="http://schemas.microsoft.com/office/drawing/2014/main" id="{3F7D08C6-A20A-4B99-A82F-FEF09A0694C4}"/>
               </a:ext>
             </a:extLst>
           </p:cNvPr>
@@ -3645,7 +3779,7 @@
     </p:spTree>
     <p:extLst>
       <p:ext uri="{BB962C8B-B14F-4D97-AF65-F5344CB8AC3E}">
-        <p14:creationId xmlns:p14="http://schemas.microsoft.com/office/powerpoint/2010/main" val="1101160008"/>
+        <p14:creationId xmlns:p14="http://schemas.microsoft.com/office/powerpoint/2010/main" val="1558117272"/>
       </p:ext>
     </p:extLst>
   </p:cSld>
@@ -3676,7 +3810,7 @@
           <p:cNvPr id="1" name="">
             <a:extLst xmlns:a="http://schemas.openxmlformats.org/drawingml/2006/main">
               <a:ext uri="{FF2B5EF4-FFF2-40B4-BE49-F238E27FC236}">
-                <a16:creationId xmlns:a16="http://schemas.microsoft.com/office/drawing/2014/main" id="{38C8B257-2FC4-4C0F-AFB7-5B4DC8FDFD0E}"/>
+                <a16:creationId xmlns:a16="http://schemas.microsoft.com/office/drawing/2014/main" id="{CE94F0C1-3E92-40A1-8FF4-CFB781BB5477}"/>
               </a:ext>
             </a:extLst>
           </p:cNvPr>
@@ -3726,7 +3860,7 @@
           <p:cNvPr id="2" name="">
             <a:extLst xmlns:a="http://schemas.openxmlformats.org/drawingml/2006/main">
               <a:ext uri="{FF2B5EF4-FFF2-40B4-BE49-F238E27FC236}">
-                <a16:creationId xmlns:a16="http://schemas.microsoft.com/office/drawing/2014/main" id="{EA247149-EC1A-460F-A680-8FEB9A23B78E}"/>
+                <a16:creationId xmlns:a16="http://schemas.microsoft.com/office/drawing/2014/main" id="{9F431B46-FCFA-414B-89DE-BAE78ADDAF6F}"/>
               </a:ext>
             </a:extLst>
           </p:cNvPr>
@@ -3776,7 +3910,7 @@
           <p:cNvPr id="3" name="">
             <a:extLst xmlns:a="http://schemas.openxmlformats.org/drawingml/2006/main">
               <a:ext uri="{FF2B5EF4-FFF2-40B4-BE49-F238E27FC236}">
-                <a16:creationId xmlns:a16="http://schemas.microsoft.com/office/drawing/2014/main" id="{36228FF5-3A79-489C-8722-58126356969F}"/>
+                <a16:creationId xmlns:a16="http://schemas.microsoft.com/office/drawing/2014/main" id="{9FC9F02E-E405-48A4-9822-1093716DBBA3}"/>
               </a:ext>
             </a:extLst>
           </p:cNvPr>
@@ -3809,7 +3943,7 @@
           <p:cNvPr id="4" name="">
             <a:extLst xmlns:a="http://schemas.openxmlformats.org/drawingml/2006/main">
               <a:ext uri="{FF2B5EF4-FFF2-40B4-BE49-F238E27FC236}">
-                <a16:creationId xmlns:a16="http://schemas.microsoft.com/office/drawing/2014/main" id="{66962C03-FB12-4816-BA8D-55070F54BDC5}"/>
+                <a16:creationId xmlns:a16="http://schemas.microsoft.com/office/drawing/2014/main" id="{4C4941CB-2C8D-4812-ACFA-9845FF868EEE}"/>
               </a:ext>
             </a:extLst>
           </p:cNvPr>
@@ -3842,7 +3976,7 @@
           <p:cNvPr id="5" name="">
             <a:extLst xmlns:a="http://schemas.openxmlformats.org/drawingml/2006/main">
               <a:ext uri="{FF2B5EF4-FFF2-40B4-BE49-F238E27FC236}">
-                <a16:creationId xmlns:a16="http://schemas.microsoft.com/office/drawing/2014/main" id="{CB0727EE-63D6-472A-8C12-04CC3B64E721}"/>
+                <a16:creationId xmlns:a16="http://schemas.microsoft.com/office/drawing/2014/main" id="{773B3102-B0E2-4CBD-A1FD-427774CC26FD}"/>
               </a:ext>
             </a:extLst>
           </p:cNvPr>
@@ -3875,7 +4009,7 @@
           <p:cNvPr id="6" name="">
             <a:extLst xmlns:a="http://schemas.openxmlformats.org/drawingml/2006/main">
               <a:ext uri="{FF2B5EF4-FFF2-40B4-BE49-F238E27FC236}">
-                <a16:creationId xmlns:a16="http://schemas.microsoft.com/office/drawing/2014/main" id="{96DB5A9A-5001-4A91-8352-1302E0CF1EEF}"/>
+                <a16:creationId xmlns:a16="http://schemas.microsoft.com/office/drawing/2014/main" id="{78B38462-AE3D-46D2-A932-74AB2FDD8C5E}"/>
               </a:ext>
             </a:extLst>
           </p:cNvPr>
@@ -3925,7 +4059,7 @@
           <p:cNvPr id="7" name="">
             <a:extLst xmlns:a="http://schemas.openxmlformats.org/drawingml/2006/main">
               <a:ext uri="{FF2B5EF4-FFF2-40B4-BE49-F238E27FC236}">
-                <a16:creationId xmlns:a16="http://schemas.microsoft.com/office/drawing/2014/main" id="{491345FF-08AA-493D-B5B3-C9949F8BBA17}"/>
+                <a16:creationId xmlns:a16="http://schemas.microsoft.com/office/drawing/2014/main" id="{BF194F99-8158-4238-B5D6-C7BA7630C6B6}"/>
               </a:ext>
             </a:extLst>
           </p:cNvPr>
@@ -3958,7 +4092,7 @@
           <p:cNvPr id="8" name="">
             <a:extLst xmlns:a="http://schemas.openxmlformats.org/drawingml/2006/main">
               <a:ext uri="{FF2B5EF4-FFF2-40B4-BE49-F238E27FC236}">
-                <a16:creationId xmlns:a16="http://schemas.microsoft.com/office/drawing/2014/main" id="{C0EC2CA5-1F0B-4823-8371-405DF3C464CD}"/>
+                <a16:creationId xmlns:a16="http://schemas.microsoft.com/office/drawing/2014/main" id="{D2DDB69C-43E7-4CD3-96E4-47ED47D680D1}"/>
               </a:ext>
             </a:extLst>
           </p:cNvPr>
@@ -4008,7 +4142,7 @@
           <p:cNvPr id="9" name="">
             <a:extLst xmlns:a="http://schemas.openxmlformats.org/drawingml/2006/main">
               <a:ext uri="{FF2B5EF4-FFF2-40B4-BE49-F238E27FC236}">
-                <a16:creationId xmlns:a16="http://schemas.microsoft.com/office/drawing/2014/main" id="{B01FF9DA-5064-4718-B56B-595E85C1C02B}"/>
+                <a16:creationId xmlns:a16="http://schemas.microsoft.com/office/drawing/2014/main" id="{E58C344A-47B4-4209-A27A-B4E8A205DB4D}"/>
               </a:ext>
             </a:extLst>
           </p:cNvPr>
@@ -4041,7 +4175,7 @@
           <p:cNvPr id="10" name="">
             <a:extLst xmlns:a="http://schemas.openxmlformats.org/drawingml/2006/main">
               <a:ext uri="{FF2B5EF4-FFF2-40B4-BE49-F238E27FC236}">
-                <a16:creationId xmlns:a16="http://schemas.microsoft.com/office/drawing/2014/main" id="{7C0BBE3C-18A2-46EC-8561-37083D8EDC5A}"/>
+                <a16:creationId xmlns:a16="http://schemas.microsoft.com/office/drawing/2014/main" id="{1DC4BA93-263A-4F19-BD22-490BC50265E4}"/>
               </a:ext>
             </a:extLst>
           </p:cNvPr>
@@ -4091,7 +4225,7 @@
           <p:cNvPr id="11" name="">
             <a:extLst xmlns:a="http://schemas.openxmlformats.org/drawingml/2006/main">
               <a:ext uri="{FF2B5EF4-FFF2-40B4-BE49-F238E27FC236}">
-                <a16:creationId xmlns:a16="http://schemas.microsoft.com/office/drawing/2014/main" id="{4C9DD365-D0BF-4FEC-9F0D-AAACB0BD2D79}"/>
+                <a16:creationId xmlns:a16="http://schemas.microsoft.com/office/drawing/2014/main" id="{FCFB4CE8-719A-44C3-915E-88AA368A0907}"/>
               </a:ext>
             </a:extLst>
           </p:cNvPr>
@@ -4124,7 +4258,7 @@
           <p:cNvPr id="12" name="">
             <a:extLst xmlns:a="http://schemas.openxmlformats.org/drawingml/2006/main">
               <a:ext uri="{FF2B5EF4-FFF2-40B4-BE49-F238E27FC236}">
-                <a16:creationId xmlns:a16="http://schemas.microsoft.com/office/drawing/2014/main" id="{8A76FE01-69CC-402D-9EAD-11CD84643CD3}"/>
+                <a16:creationId xmlns:a16="http://schemas.microsoft.com/office/drawing/2014/main" id="{BC84C8CE-45BC-4710-BFEA-3F8B52CFE7C4}"/>
               </a:ext>
             </a:extLst>
           </p:cNvPr>
@@ -4174,7 +4308,7 @@
           <p:cNvPr id="13" name="">
             <a:extLst xmlns:a="http://schemas.openxmlformats.org/drawingml/2006/main">
               <a:ext uri="{FF2B5EF4-FFF2-40B4-BE49-F238E27FC236}">
-                <a16:creationId xmlns:a16="http://schemas.microsoft.com/office/drawing/2014/main" id="{DD6B2DAE-8E2A-4057-B4F5-63DCDE32E059}"/>
+                <a16:creationId xmlns:a16="http://schemas.microsoft.com/office/drawing/2014/main" id="{A9953B34-85BA-4193-A672-2E7F3A7D4A36}"/>
               </a:ext>
             </a:extLst>
           </p:cNvPr>
@@ -4207,7 +4341,7 @@
           <p:cNvPr id="14" name="">
             <a:extLst xmlns:a="http://schemas.openxmlformats.org/drawingml/2006/main">
               <a:ext uri="{FF2B5EF4-FFF2-40B4-BE49-F238E27FC236}">
-                <a16:creationId xmlns:a16="http://schemas.microsoft.com/office/drawing/2014/main" id="{EADD849C-C7D9-432A-B668-2DEBCA896806}"/>
+                <a16:creationId xmlns:a16="http://schemas.microsoft.com/office/drawing/2014/main" id="{26630D9D-95AC-41A0-A6CC-78C3F31F3000}"/>
               </a:ext>
             </a:extLst>
           </p:cNvPr>
@@ -4257,7 +4391,7 @@
           <p:cNvPr id="15" name="">
             <a:extLst xmlns:a="http://schemas.openxmlformats.org/drawingml/2006/main">
               <a:ext uri="{FF2B5EF4-FFF2-40B4-BE49-F238E27FC236}">
-                <a16:creationId xmlns:a16="http://schemas.microsoft.com/office/drawing/2014/main" id="{E013212B-C4D6-4DA9-A81A-6AEFBCBD6685}"/>
+                <a16:creationId xmlns:a16="http://schemas.microsoft.com/office/drawing/2014/main" id="{E80C5083-0990-4A87-A800-98F3B977D0F1}"/>
               </a:ext>
             </a:extLst>
           </p:cNvPr>
@@ -4307,7 +4441,7 @@
           <p:cNvPr id="16" name="">
             <a:extLst xmlns:a="http://schemas.openxmlformats.org/drawingml/2006/main">
               <a:ext uri="{FF2B5EF4-FFF2-40B4-BE49-F238E27FC236}">
-                <a16:creationId xmlns:a16="http://schemas.microsoft.com/office/drawing/2014/main" id="{FB7F3FA9-A509-4FB3-95D7-48B82AAFD206}"/>
+                <a16:creationId xmlns:a16="http://schemas.microsoft.com/office/drawing/2014/main" id="{C4AF0FD7-B6E2-4EF7-BA8C-A51681AF11AC}"/>
               </a:ext>
             </a:extLst>
           </p:cNvPr>
@@ -4340,7 +4474,7 @@
           <p:cNvPr id="17" name="">
             <a:extLst xmlns:a="http://schemas.openxmlformats.org/drawingml/2006/main">
               <a:ext uri="{FF2B5EF4-FFF2-40B4-BE49-F238E27FC236}">
-                <a16:creationId xmlns:a16="http://schemas.microsoft.com/office/drawing/2014/main" id="{F124D99D-78F6-49E9-8600-E745E713CC47}"/>
+                <a16:creationId xmlns:a16="http://schemas.microsoft.com/office/drawing/2014/main" id="{E2FF2137-AFD5-4B54-A08B-422ABB9CB61D}"/>
               </a:ext>
             </a:extLst>
           </p:cNvPr>
@@ -4390,7 +4524,7 @@
           <p:cNvPr id="18" name="">
             <a:extLst xmlns:a="http://schemas.openxmlformats.org/drawingml/2006/main">
               <a:ext uri="{FF2B5EF4-FFF2-40B4-BE49-F238E27FC236}">
-                <a16:creationId xmlns:a16="http://schemas.microsoft.com/office/drawing/2014/main" id="{384F3F8F-CD53-4B11-9C38-DF4EE83542A5}"/>
+                <a16:creationId xmlns:a16="http://schemas.microsoft.com/office/drawing/2014/main" id="{1529C94D-9565-4685-B09B-83504B8AACCA}"/>
               </a:ext>
             </a:extLst>
           </p:cNvPr>
@@ -4423,7 +4557,7 @@
           <p:cNvPr id="19" name="">
             <a:extLst xmlns:a="http://schemas.openxmlformats.org/drawingml/2006/main">
               <a:ext uri="{FF2B5EF4-FFF2-40B4-BE49-F238E27FC236}">
-                <a16:creationId xmlns:a16="http://schemas.microsoft.com/office/drawing/2014/main" id="{501EE73D-B992-4D63-A13B-92692D19F233}"/>
+                <a16:creationId xmlns:a16="http://schemas.microsoft.com/office/drawing/2014/main" id="{6533B74C-316D-4053-8438-8B14FB9B2E75}"/>
               </a:ext>
             </a:extLst>
           </p:cNvPr>
@@ -4473,7 +4607,7 @@
           <p:cNvPr id="20" name="">
             <a:extLst xmlns:a="http://schemas.openxmlformats.org/drawingml/2006/main">
               <a:ext uri="{FF2B5EF4-FFF2-40B4-BE49-F238E27FC236}">
-                <a16:creationId xmlns:a16="http://schemas.microsoft.com/office/drawing/2014/main" id="{3399D366-7124-4D60-9B66-4AEB65B9A172}"/>
+                <a16:creationId xmlns:a16="http://schemas.microsoft.com/office/drawing/2014/main" id="{3B3208EC-7FC3-4D77-838D-E8446AB48968}"/>
               </a:ext>
             </a:extLst>
           </p:cNvPr>
@@ -4506,7 +4640,7 @@
           <p:cNvPr id="21" name="">
             <a:extLst xmlns:a="http://schemas.openxmlformats.org/drawingml/2006/main">
               <a:ext uri="{FF2B5EF4-FFF2-40B4-BE49-F238E27FC236}">
-                <a16:creationId xmlns:a16="http://schemas.microsoft.com/office/drawing/2014/main" id="{A2A9F99D-EE98-4BEC-BC44-110BA3686B0B}"/>
+                <a16:creationId xmlns:a16="http://schemas.microsoft.com/office/drawing/2014/main" id="{C2B9E09A-CD87-42BB-AD29-8640BB19EF5A}"/>
               </a:ext>
             </a:extLst>
           </p:cNvPr>
@@ -4556,7 +4690,7 @@
           <p:cNvPr id="22" name="">
             <a:extLst xmlns:a="http://schemas.openxmlformats.org/drawingml/2006/main">
               <a:ext uri="{FF2B5EF4-FFF2-40B4-BE49-F238E27FC236}">
-                <a16:creationId xmlns:a16="http://schemas.microsoft.com/office/drawing/2014/main" id="{DE7BFC67-DFB0-4783-822E-372395430878}"/>
+                <a16:creationId xmlns:a16="http://schemas.microsoft.com/office/drawing/2014/main" id="{579EA53D-2B3E-40E6-9CBA-89EBC3CBFEE2}"/>
               </a:ext>
             </a:extLst>
           </p:cNvPr>
@@ -4589,7 +4723,7 @@
           <p:cNvPr id="23" name="">
             <a:extLst xmlns:a="http://schemas.openxmlformats.org/drawingml/2006/main">
               <a:ext uri="{FF2B5EF4-FFF2-40B4-BE49-F238E27FC236}">
-                <a16:creationId xmlns:a16="http://schemas.microsoft.com/office/drawing/2014/main" id="{832A11AF-D6CE-45F1-A5F7-524487F5B6CB}"/>
+                <a16:creationId xmlns:a16="http://schemas.microsoft.com/office/drawing/2014/main" id="{40BBA9A1-E77C-494B-AFA8-07A6BD115731}"/>
               </a:ext>
             </a:extLst>
           </p:cNvPr>
@@ -4639,7 +4773,7 @@
           <p:cNvPr id="24" name="">
             <a:extLst xmlns:a="http://schemas.openxmlformats.org/drawingml/2006/main">
               <a:ext uri="{FF2B5EF4-FFF2-40B4-BE49-F238E27FC236}">
-                <a16:creationId xmlns:a16="http://schemas.microsoft.com/office/drawing/2014/main" id="{4E63D3B7-85A1-457F-B1A1-7907D6DFB8AE}"/>
+                <a16:creationId xmlns:a16="http://schemas.microsoft.com/office/drawing/2014/main" id="{B07204E0-E01B-4265-8F21-24099A2FE908}"/>
               </a:ext>
             </a:extLst>
           </p:cNvPr>
@@ -4689,7 +4823,7 @@
           <p:cNvPr id="25" name="">
             <a:extLst xmlns:a="http://schemas.openxmlformats.org/drawingml/2006/main">
               <a:ext uri="{FF2B5EF4-FFF2-40B4-BE49-F238E27FC236}">
-                <a16:creationId xmlns:a16="http://schemas.microsoft.com/office/drawing/2014/main" id="{5134920D-21C2-459D-806B-DCDB245DB5FB}"/>
+                <a16:creationId xmlns:a16="http://schemas.microsoft.com/office/drawing/2014/main" id="{35E9F2F8-A007-4A8D-B78E-D425E77068A4}"/>
               </a:ext>
             </a:extLst>
           </p:cNvPr>
@@ -4737,7 +4871,7 @@
     </p:spTree>
     <p:extLst>
       <p:ext uri="{BB962C8B-B14F-4D97-AF65-F5344CB8AC3E}">
-        <p14:creationId xmlns:p14="http://schemas.microsoft.com/office/powerpoint/2010/main" val="381094010"/>
+        <p14:creationId xmlns:p14="http://schemas.microsoft.com/office/powerpoint/2010/main" val="56402610"/>
       </p:ext>
     </p:extLst>
   </p:cSld>
@@ -4768,7 +4902,7 @@
           <p:cNvPr id="1" name="">
             <a:extLst xmlns:a="http://schemas.openxmlformats.org/drawingml/2006/main">
               <a:ext uri="{FF2B5EF4-FFF2-40B4-BE49-F238E27FC236}">
-                <a16:creationId xmlns:a16="http://schemas.microsoft.com/office/drawing/2014/main" id="{016B1878-DB1E-43B5-84D9-62A6B97F2852}"/>
+                <a16:creationId xmlns:a16="http://schemas.microsoft.com/office/drawing/2014/main" id="{D1DB6657-DF22-4898-A954-C07E38712050}"/>
               </a:ext>
             </a:extLst>
           </p:cNvPr>
@@ -4818,7 +4952,7 @@
           <p:cNvPr id="2" name="">
             <a:extLst xmlns:a="http://schemas.openxmlformats.org/drawingml/2006/main">
               <a:ext uri="{FF2B5EF4-FFF2-40B4-BE49-F238E27FC236}">
-                <a16:creationId xmlns:a16="http://schemas.microsoft.com/office/drawing/2014/main" id="{AD642B94-1B08-4C34-9F2F-8DD2DCCCFB8A}"/>
+                <a16:creationId xmlns:a16="http://schemas.microsoft.com/office/drawing/2014/main" id="{6E0ACCF1-E099-488D-8207-3B27BA9B317D}"/>
               </a:ext>
             </a:extLst>
           </p:cNvPr>
@@ -4868,7 +5002,7 @@
           <p:cNvPr id="3" name="">
             <a:extLst xmlns:a="http://schemas.openxmlformats.org/drawingml/2006/main">
               <a:ext uri="{FF2B5EF4-FFF2-40B4-BE49-F238E27FC236}">
-                <a16:creationId xmlns:a16="http://schemas.microsoft.com/office/drawing/2014/main" id="{BF3B6DD9-CBBC-4233-AB4D-8DB71409C102}"/>
+                <a16:creationId xmlns:a16="http://schemas.microsoft.com/office/drawing/2014/main" id="{C3B09605-C72F-419E-A6C9-633E3190B895}"/>
               </a:ext>
             </a:extLst>
           </p:cNvPr>
@@ -4901,7 +5035,7 @@
           <p:cNvPr id="4" name="">
             <a:extLst xmlns:a="http://schemas.openxmlformats.org/drawingml/2006/main">
               <a:ext uri="{FF2B5EF4-FFF2-40B4-BE49-F238E27FC236}">
-                <a16:creationId xmlns:a16="http://schemas.microsoft.com/office/drawing/2014/main" id="{D67F47E1-A583-4A90-93C2-9CE2F22F239D}"/>
+                <a16:creationId xmlns:a16="http://schemas.microsoft.com/office/drawing/2014/main" id="{2ABA3EFF-BB6F-4871-912A-54942332C172}"/>
               </a:ext>
             </a:extLst>
           </p:cNvPr>
@@ -4934,7 +5068,7 @@
           <p:cNvPr id="5" name="">
             <a:extLst xmlns:a="http://schemas.openxmlformats.org/drawingml/2006/main">
               <a:ext uri="{FF2B5EF4-FFF2-40B4-BE49-F238E27FC236}">
-                <a16:creationId xmlns:a16="http://schemas.microsoft.com/office/drawing/2014/main" id="{6A700E65-FB50-43FA-A7F2-DBD958317E44}"/>
+                <a16:creationId xmlns:a16="http://schemas.microsoft.com/office/drawing/2014/main" id="{C3880950-1E4F-415D-B5A8-8A2A8879E3B7}"/>
               </a:ext>
             </a:extLst>
           </p:cNvPr>
@@ -4984,7 +5118,7 @@
           <p:cNvPr id="6" name="">
             <a:extLst xmlns:a="http://schemas.openxmlformats.org/drawingml/2006/main">
               <a:ext uri="{FF2B5EF4-FFF2-40B4-BE49-F238E27FC236}">
-                <a16:creationId xmlns:a16="http://schemas.microsoft.com/office/drawing/2014/main" id="{C8BF450E-2105-41CB-8A88-157198D97767}"/>
+                <a16:creationId xmlns:a16="http://schemas.microsoft.com/office/drawing/2014/main" id="{C56D1E42-68F7-43B0-8072-CCACADEE4BE7}"/>
               </a:ext>
             </a:extLst>
           </p:cNvPr>
@@ -5034,7 +5168,7 @@
           <p:cNvPr id="7" name="">
             <a:extLst xmlns:a="http://schemas.openxmlformats.org/drawingml/2006/main">
               <a:ext uri="{FF2B5EF4-FFF2-40B4-BE49-F238E27FC236}">
-                <a16:creationId xmlns:a16="http://schemas.microsoft.com/office/drawing/2014/main" id="{EE8260C3-C812-4245-AF5F-E75333F2C1FC}"/>
+                <a16:creationId xmlns:a16="http://schemas.microsoft.com/office/drawing/2014/main" id="{FA14BC06-A3E7-4F55-924D-C8A2492CC552}"/>
               </a:ext>
             </a:extLst>
           </p:cNvPr>
@@ -5084,7 +5218,7 @@
           <p:cNvPr id="8" name="">
             <a:extLst xmlns:a="http://schemas.openxmlformats.org/drawingml/2006/main">
               <a:ext uri="{FF2B5EF4-FFF2-40B4-BE49-F238E27FC236}">
-                <a16:creationId xmlns:a16="http://schemas.microsoft.com/office/drawing/2014/main" id="{B0920C47-A691-41CB-B43D-0DEDE7639245}"/>
+                <a16:creationId xmlns:a16="http://schemas.microsoft.com/office/drawing/2014/main" id="{D2E5E0D3-7417-481B-920B-B01F3DC9BE88}"/>
               </a:ext>
             </a:extLst>
           </p:cNvPr>
@@ -5117,7 +5251,7 @@
           <p:cNvPr id="9" name="">
             <a:extLst xmlns:a="http://schemas.openxmlformats.org/drawingml/2006/main">
               <a:ext uri="{FF2B5EF4-FFF2-40B4-BE49-F238E27FC236}">
-                <a16:creationId xmlns:a16="http://schemas.microsoft.com/office/drawing/2014/main" id="{80650AB5-CFEF-4B11-B4AE-5EC4A314348A}"/>
+                <a16:creationId xmlns:a16="http://schemas.microsoft.com/office/drawing/2014/main" id="{CCD87DF5-0699-48C4-B302-B3311375D8CF}"/>
               </a:ext>
             </a:extLst>
           </p:cNvPr>
@@ -5167,7 +5301,7 @@
           <p:cNvPr id="10" name="">
             <a:extLst xmlns:a="http://schemas.openxmlformats.org/drawingml/2006/main">
               <a:ext uri="{FF2B5EF4-FFF2-40B4-BE49-F238E27FC236}">
-                <a16:creationId xmlns:a16="http://schemas.microsoft.com/office/drawing/2014/main" id="{30021AE0-9831-4037-8A38-DC67DF38102E}"/>
+                <a16:creationId xmlns:a16="http://schemas.microsoft.com/office/drawing/2014/main" id="{088B2900-8B6C-4AF3-8CA9-B38439A34DC3}"/>
               </a:ext>
             </a:extLst>
           </p:cNvPr>
@@ -5217,7 +5351,7 @@
           <p:cNvPr id="11" name="">
             <a:extLst xmlns:a="http://schemas.openxmlformats.org/drawingml/2006/main">
               <a:ext uri="{FF2B5EF4-FFF2-40B4-BE49-F238E27FC236}">
-                <a16:creationId xmlns:a16="http://schemas.microsoft.com/office/drawing/2014/main" id="{31EC26D0-9B0A-45E4-8369-E753578242AE}"/>
+                <a16:creationId xmlns:a16="http://schemas.microsoft.com/office/drawing/2014/main" id="{017685EB-B8B5-4237-A281-9B688DDCDB7F}"/>
               </a:ext>
             </a:extLst>
           </p:cNvPr>
@@ -5267,7 +5401,7 @@
           <p:cNvPr id="12" name="">
             <a:extLst xmlns:a="http://schemas.openxmlformats.org/drawingml/2006/main">
               <a:ext uri="{FF2B5EF4-FFF2-40B4-BE49-F238E27FC236}">
-                <a16:creationId xmlns:a16="http://schemas.microsoft.com/office/drawing/2014/main" id="{45FD60E1-E136-49A7-A16B-AC6316A9E059}"/>
+                <a16:creationId xmlns:a16="http://schemas.microsoft.com/office/drawing/2014/main" id="{D85F2CD1-BA56-468E-A2EA-1A6F7FE5743C}"/>
               </a:ext>
             </a:extLst>
           </p:cNvPr>
@@ -5300,7 +5434,7 @@
           <p:cNvPr id="13" name="">
             <a:extLst xmlns:a="http://schemas.openxmlformats.org/drawingml/2006/main">
               <a:ext uri="{FF2B5EF4-FFF2-40B4-BE49-F238E27FC236}">
-                <a16:creationId xmlns:a16="http://schemas.microsoft.com/office/drawing/2014/main" id="{EA470086-2B35-43AB-A658-3B7969A74BDE}"/>
+                <a16:creationId xmlns:a16="http://schemas.microsoft.com/office/drawing/2014/main" id="{BB5ED6D7-B80B-43FF-A6CF-1444DBDA7A19}"/>
               </a:ext>
             </a:extLst>
           </p:cNvPr>
@@ -5350,7 +5484,7 @@
           <p:cNvPr id="14" name="">
             <a:extLst xmlns:a="http://schemas.openxmlformats.org/drawingml/2006/main">
               <a:ext uri="{FF2B5EF4-FFF2-40B4-BE49-F238E27FC236}">
-                <a16:creationId xmlns:a16="http://schemas.microsoft.com/office/drawing/2014/main" id="{2C6CC893-41B5-4C68-B05F-58DF2A605D19}"/>
+                <a16:creationId xmlns:a16="http://schemas.microsoft.com/office/drawing/2014/main" id="{F0C65162-F32D-49C6-8149-E9CB7A9523D9}"/>
               </a:ext>
             </a:extLst>
           </p:cNvPr>
@@ -5400,7 +5534,7 @@
           <p:cNvPr id="15" name="">
             <a:extLst xmlns:a="http://schemas.openxmlformats.org/drawingml/2006/main">
               <a:ext uri="{FF2B5EF4-FFF2-40B4-BE49-F238E27FC236}">
-                <a16:creationId xmlns:a16="http://schemas.microsoft.com/office/drawing/2014/main" id="{AB2E1DE5-B550-419E-955A-D81E51B6E7B3}"/>
+                <a16:creationId xmlns:a16="http://schemas.microsoft.com/office/drawing/2014/main" id="{ADF17B01-C401-438A-ACD5-FCE21790EAF8}"/>
               </a:ext>
             </a:extLst>
           </p:cNvPr>
@@ -5450,7 +5584,7 @@
           <p:cNvPr id="16" name="">
             <a:extLst xmlns:a="http://schemas.openxmlformats.org/drawingml/2006/main">
               <a:ext uri="{FF2B5EF4-FFF2-40B4-BE49-F238E27FC236}">
-                <a16:creationId xmlns:a16="http://schemas.microsoft.com/office/drawing/2014/main" id="{4AE21FFF-0A8C-4D36-AFBF-8E201E353B67}"/>
+                <a16:creationId xmlns:a16="http://schemas.microsoft.com/office/drawing/2014/main" id="{CF400384-0CC6-49AB-93F6-7442B582D0E6}"/>
               </a:ext>
             </a:extLst>
           </p:cNvPr>
@@ -5500,7 +5634,7 @@
           <p:cNvPr id="17" name="">
             <a:extLst xmlns:a="http://schemas.openxmlformats.org/drawingml/2006/main">
               <a:ext uri="{FF2B5EF4-FFF2-40B4-BE49-F238E27FC236}">
-                <a16:creationId xmlns:a16="http://schemas.microsoft.com/office/drawing/2014/main" id="{83E9295A-D8AF-44FA-84AA-543FBD917966}"/>
+                <a16:creationId xmlns:a16="http://schemas.microsoft.com/office/drawing/2014/main" id="{6B08AE20-D006-4089-90B5-586223667C75}"/>
               </a:ext>
             </a:extLst>
           </p:cNvPr>
@@ -5548,7 +5682,7 @@
     </p:spTree>
     <p:extLst>
       <p:ext uri="{BB962C8B-B14F-4D97-AF65-F5344CB8AC3E}">
-        <p14:creationId xmlns:p14="http://schemas.microsoft.com/office/powerpoint/2010/main" val="2072410712"/>
+        <p14:creationId xmlns:p14="http://schemas.microsoft.com/office/powerpoint/2010/main" val="1240461868"/>
       </p:ext>
     </p:extLst>
   </p:cSld>
@@ -5579,7 +5713,7 @@
           <p:cNvPr id="1" name="">
             <a:extLst xmlns:a="http://schemas.openxmlformats.org/drawingml/2006/main">
               <a:ext uri="{FF2B5EF4-FFF2-40B4-BE49-F238E27FC236}">
-                <a16:creationId xmlns:a16="http://schemas.microsoft.com/office/drawing/2014/main" id="{900FA088-3710-417D-BABE-A5B884B0BA0D}"/>
+                <a16:creationId xmlns:a16="http://schemas.microsoft.com/office/drawing/2014/main" id="{729445B9-D256-41F3-86AA-668421F56507}"/>
               </a:ext>
             </a:extLst>
           </p:cNvPr>
@@ -5629,7 +5763,7 @@
           <p:cNvPr id="2" name="">
             <a:extLst xmlns:a="http://schemas.openxmlformats.org/drawingml/2006/main">
               <a:ext uri="{FF2B5EF4-FFF2-40B4-BE49-F238E27FC236}">
-                <a16:creationId xmlns:a16="http://schemas.microsoft.com/office/drawing/2014/main" id="{8F41DB43-BFB2-4DCC-A6EE-67D8581B2750}"/>
+                <a16:creationId xmlns:a16="http://schemas.microsoft.com/office/drawing/2014/main" id="{A7DA4CDD-A654-4611-9C53-10610B494EE8}"/>
               </a:ext>
             </a:extLst>
           </p:cNvPr>
@@ -5679,7 +5813,7 @@
           <p:cNvPr id="3" name="">
             <a:extLst xmlns:a="http://schemas.openxmlformats.org/drawingml/2006/main">
               <a:ext uri="{FF2B5EF4-FFF2-40B4-BE49-F238E27FC236}">
-                <a16:creationId xmlns:a16="http://schemas.microsoft.com/office/drawing/2014/main" id="{1C9ECEBC-BCC8-4F5E-8082-82983B242A44}"/>
+                <a16:creationId xmlns:a16="http://schemas.microsoft.com/office/drawing/2014/main" id="{6EE3BA3B-FC0C-4DA9-9F0C-574A39795E2A}"/>
               </a:ext>
             </a:extLst>
           </p:cNvPr>
@@ -5712,7 +5846,7 @@
           <p:cNvPr id="4" name="">
             <a:extLst xmlns:a="http://schemas.openxmlformats.org/drawingml/2006/main">
               <a:ext uri="{FF2B5EF4-FFF2-40B4-BE49-F238E27FC236}">
-                <a16:creationId xmlns:a16="http://schemas.microsoft.com/office/drawing/2014/main" id="{7E853331-40F7-46B2-8822-5CE3E2EC021A}"/>
+                <a16:creationId xmlns:a16="http://schemas.microsoft.com/office/drawing/2014/main" id="{999CF344-58DA-435B-9730-EAF4720F72D0}"/>
               </a:ext>
             </a:extLst>
           </p:cNvPr>
@@ -5762,7 +5896,7 @@
           <p:cNvPr id="5" name="">
             <a:extLst xmlns:a="http://schemas.openxmlformats.org/drawingml/2006/main">
               <a:ext uri="{FF2B5EF4-FFF2-40B4-BE49-F238E27FC236}">
-                <a16:creationId xmlns:a16="http://schemas.microsoft.com/office/drawing/2014/main" id="{1372038B-F503-4A12-B3AA-71080F3D6361}"/>
+                <a16:creationId xmlns:a16="http://schemas.microsoft.com/office/drawing/2014/main" id="{0420FA1E-5C47-4B1F-8E55-005F3BD74E66}"/>
               </a:ext>
             </a:extLst>
           </p:cNvPr>
@@ -5795,7 +5929,7 @@
           <p:cNvPr id="6" name="">
             <a:extLst xmlns:a="http://schemas.openxmlformats.org/drawingml/2006/main">
               <a:ext uri="{FF2B5EF4-FFF2-40B4-BE49-F238E27FC236}">
-                <a16:creationId xmlns:a16="http://schemas.microsoft.com/office/drawing/2014/main" id="{60762AF5-DC59-423A-A417-E2FA62C3DF5E}"/>
+                <a16:creationId xmlns:a16="http://schemas.microsoft.com/office/drawing/2014/main" id="{53CFC97F-ADDB-45AF-BA32-91D93333E667}"/>
               </a:ext>
             </a:extLst>
           </p:cNvPr>
@@ -5845,7 +5979,7 @@
           <p:cNvPr id="7" name="">
             <a:extLst xmlns:a="http://schemas.openxmlformats.org/drawingml/2006/main">
               <a:ext uri="{FF2B5EF4-FFF2-40B4-BE49-F238E27FC236}">
-                <a16:creationId xmlns:a16="http://schemas.microsoft.com/office/drawing/2014/main" id="{5FC48612-421D-4519-A8D2-1C9E6C17E421}"/>
+                <a16:creationId xmlns:a16="http://schemas.microsoft.com/office/drawing/2014/main" id="{FF39CB29-75C9-413C-BB50-AB5EAB69DD57}"/>
               </a:ext>
             </a:extLst>
           </p:cNvPr>
@@ -5878,7 +6012,7 @@
           <p:cNvPr id="8" name="">
             <a:extLst xmlns:a="http://schemas.openxmlformats.org/drawingml/2006/main">
               <a:ext uri="{FF2B5EF4-FFF2-40B4-BE49-F238E27FC236}">
-                <a16:creationId xmlns:a16="http://schemas.microsoft.com/office/drawing/2014/main" id="{EE677DB5-D5B6-4915-A3F4-4B2F44692002}"/>
+                <a16:creationId xmlns:a16="http://schemas.microsoft.com/office/drawing/2014/main" id="{282DED6E-D123-41AF-8F4F-05A30D1F0AD8}"/>
               </a:ext>
             </a:extLst>
           </p:cNvPr>
@@ -5928,7 +6062,7 @@
           <p:cNvPr id="9" name="">
             <a:extLst xmlns:a="http://schemas.openxmlformats.org/drawingml/2006/main">
               <a:ext uri="{FF2B5EF4-FFF2-40B4-BE49-F238E27FC236}">
-                <a16:creationId xmlns:a16="http://schemas.microsoft.com/office/drawing/2014/main" id="{E37886DF-BB6B-416E-ACDC-8FFEA775732E}"/>
+                <a16:creationId xmlns:a16="http://schemas.microsoft.com/office/drawing/2014/main" id="{90AA334E-B6F9-4A84-8FFB-DA178A992ADD}"/>
               </a:ext>
             </a:extLst>
           </p:cNvPr>
@@ -5961,7 +6095,7 @@
           <p:cNvPr id="10" name="">
             <a:extLst xmlns:a="http://schemas.openxmlformats.org/drawingml/2006/main">
               <a:ext uri="{FF2B5EF4-FFF2-40B4-BE49-F238E27FC236}">
-                <a16:creationId xmlns:a16="http://schemas.microsoft.com/office/drawing/2014/main" id="{333D33AF-4095-44AA-8529-301075E6DB9A}"/>
+                <a16:creationId xmlns:a16="http://schemas.microsoft.com/office/drawing/2014/main" id="{58A15D48-DC6D-44A5-A0D7-BBA2CD30EB1B}"/>
               </a:ext>
             </a:extLst>
           </p:cNvPr>
@@ -6011,7 +6145,7 @@
           <p:cNvPr id="11" name="">
             <a:extLst xmlns:a="http://schemas.openxmlformats.org/drawingml/2006/main">
               <a:ext uri="{FF2B5EF4-FFF2-40B4-BE49-F238E27FC236}">
-                <a16:creationId xmlns:a16="http://schemas.microsoft.com/office/drawing/2014/main" id="{4EB62933-4976-4EAA-8C32-68C8D60DAB2C}"/>
+                <a16:creationId xmlns:a16="http://schemas.microsoft.com/office/drawing/2014/main" id="{A6CE9154-5B0C-43D2-8CE8-2D759ABAE629}"/>
               </a:ext>
             </a:extLst>
           </p:cNvPr>
@@ -6044,7 +6178,7 @@
           <p:cNvPr id="12" name="">
             <a:extLst xmlns:a="http://schemas.openxmlformats.org/drawingml/2006/main">
               <a:ext uri="{FF2B5EF4-FFF2-40B4-BE49-F238E27FC236}">
-                <a16:creationId xmlns:a16="http://schemas.microsoft.com/office/drawing/2014/main" id="{3639B5D1-CD04-46B9-ADA2-7D1CD57205C9}"/>
+                <a16:creationId xmlns:a16="http://schemas.microsoft.com/office/drawing/2014/main" id="{80C352C0-69A7-4231-AF70-4822DFC8B578}"/>
               </a:ext>
             </a:extLst>
           </p:cNvPr>
@@ -6094,7 +6228,7 @@
           <p:cNvPr id="13" name="">
             <a:extLst xmlns:a="http://schemas.openxmlformats.org/drawingml/2006/main">
               <a:ext uri="{FF2B5EF4-FFF2-40B4-BE49-F238E27FC236}">
-                <a16:creationId xmlns:a16="http://schemas.microsoft.com/office/drawing/2014/main" id="{EFDDA912-55DA-4BC1-BEA1-251FD11F9BC6}"/>
+                <a16:creationId xmlns:a16="http://schemas.microsoft.com/office/drawing/2014/main" id="{BF31C4EA-A4DD-4589-AAA8-FDAB86C45484}"/>
               </a:ext>
             </a:extLst>
           </p:cNvPr>
@@ -6127,7 +6261,7 @@
           <p:cNvPr id="14" name="">
             <a:extLst xmlns:a="http://schemas.openxmlformats.org/drawingml/2006/main">
               <a:ext uri="{FF2B5EF4-FFF2-40B4-BE49-F238E27FC236}">
-                <a16:creationId xmlns:a16="http://schemas.microsoft.com/office/drawing/2014/main" id="{BBC82932-70C3-41ED-A1C3-EEAA48FF96B0}"/>
+                <a16:creationId xmlns:a16="http://schemas.microsoft.com/office/drawing/2014/main" id="{DBCBF1D8-C282-4EB2-BE59-69FD801CC3B1}"/>
               </a:ext>
             </a:extLst>
           </p:cNvPr>
@@ -6177,7 +6311,7 @@
           <p:cNvPr id="15" name="">
             <a:extLst xmlns:a="http://schemas.openxmlformats.org/drawingml/2006/main">
               <a:ext uri="{FF2B5EF4-FFF2-40B4-BE49-F238E27FC236}">
-                <a16:creationId xmlns:a16="http://schemas.microsoft.com/office/drawing/2014/main" id="{8F8F3BBB-6965-4677-A1E4-6083A998D18C}"/>
+                <a16:creationId xmlns:a16="http://schemas.microsoft.com/office/drawing/2014/main" id="{2725FCB8-79F3-46F2-8222-E1799529C493}"/>
               </a:ext>
             </a:extLst>
           </p:cNvPr>
@@ -6210,7 +6344,7 @@
           <p:cNvPr id="16" name="">
             <a:extLst xmlns:a="http://schemas.openxmlformats.org/drawingml/2006/main">
               <a:ext uri="{FF2B5EF4-FFF2-40B4-BE49-F238E27FC236}">
-                <a16:creationId xmlns:a16="http://schemas.microsoft.com/office/drawing/2014/main" id="{680662A8-6E18-4A44-8187-664084714579}"/>
+                <a16:creationId xmlns:a16="http://schemas.microsoft.com/office/drawing/2014/main" id="{461167CA-98E6-4E97-BC6F-006F17F38DF6}"/>
               </a:ext>
             </a:extLst>
           </p:cNvPr>
@@ -6260,7 +6394,7 @@
           <p:cNvPr id="17" name="">
             <a:extLst xmlns:a="http://schemas.openxmlformats.org/drawingml/2006/main">
               <a:ext uri="{FF2B5EF4-FFF2-40B4-BE49-F238E27FC236}">
-                <a16:creationId xmlns:a16="http://schemas.microsoft.com/office/drawing/2014/main" id="{F7E7A979-6138-4B91-97AD-1B52E7845E8D}"/>
+                <a16:creationId xmlns:a16="http://schemas.microsoft.com/office/drawing/2014/main" id="{C0695B9A-EAA3-48A3-A54A-BCBC2ECD9924}"/>
               </a:ext>
             </a:extLst>
           </p:cNvPr>
@@ -6293,7 +6427,7 @@
           <p:cNvPr id="18" name="">
             <a:extLst xmlns:a="http://schemas.openxmlformats.org/drawingml/2006/main">
               <a:ext uri="{FF2B5EF4-FFF2-40B4-BE49-F238E27FC236}">
-                <a16:creationId xmlns:a16="http://schemas.microsoft.com/office/drawing/2014/main" id="{F11C15ED-BC5B-4B10-91D9-620917ABC048}"/>
+                <a16:creationId xmlns:a16="http://schemas.microsoft.com/office/drawing/2014/main" id="{D83C3E07-3F8A-4419-B786-C0AECCCB7573}"/>
               </a:ext>
             </a:extLst>
           </p:cNvPr>
@@ -6343,7 +6477,7 @@
           <p:cNvPr id="19" name="">
             <a:extLst xmlns:a="http://schemas.openxmlformats.org/drawingml/2006/main">
               <a:ext uri="{FF2B5EF4-FFF2-40B4-BE49-F238E27FC236}">
-                <a16:creationId xmlns:a16="http://schemas.microsoft.com/office/drawing/2014/main" id="{DC13C226-5A51-480E-88C4-AE3F0F60B33C}"/>
+                <a16:creationId xmlns:a16="http://schemas.microsoft.com/office/drawing/2014/main" id="{3B02C732-4F38-4AE3-9D87-71B641810706}"/>
               </a:ext>
             </a:extLst>
           </p:cNvPr>
@@ -6376,7 +6510,7 @@
           <p:cNvPr id="20" name="">
             <a:extLst xmlns:a="http://schemas.openxmlformats.org/drawingml/2006/main">
               <a:ext uri="{FF2B5EF4-FFF2-40B4-BE49-F238E27FC236}">
-                <a16:creationId xmlns:a16="http://schemas.microsoft.com/office/drawing/2014/main" id="{88399CBD-FB68-4B3B-B7C4-8EC5845BAB36}"/>
+                <a16:creationId xmlns:a16="http://schemas.microsoft.com/office/drawing/2014/main" id="{96AF7B91-0BBD-4B1E-A8DA-F67002F19B44}"/>
               </a:ext>
             </a:extLst>
           </p:cNvPr>
@@ -6426,7 +6560,7 @@
           <p:cNvPr id="21" name="">
             <a:extLst xmlns:a="http://schemas.openxmlformats.org/drawingml/2006/main">
               <a:ext uri="{FF2B5EF4-FFF2-40B4-BE49-F238E27FC236}">
-                <a16:creationId xmlns:a16="http://schemas.microsoft.com/office/drawing/2014/main" id="{FCDEC743-83CA-4BAC-ABFF-B98E7F414160}"/>
+                <a16:creationId xmlns:a16="http://schemas.microsoft.com/office/drawing/2014/main" id="{0A4C9E1B-AD9B-45E5-8FBD-61CB8AE07A2E}"/>
               </a:ext>
             </a:extLst>
           </p:cNvPr>
@@ -6459,7 +6593,7 @@
           <p:cNvPr id="22" name="">
             <a:extLst xmlns:a="http://schemas.openxmlformats.org/drawingml/2006/main">
               <a:ext uri="{FF2B5EF4-FFF2-40B4-BE49-F238E27FC236}">
-                <a16:creationId xmlns:a16="http://schemas.microsoft.com/office/drawing/2014/main" id="{1FF00390-5E64-42FC-91D4-CF0BC745B226}"/>
+                <a16:creationId xmlns:a16="http://schemas.microsoft.com/office/drawing/2014/main" id="{FF547111-1C94-4BB5-938F-157836A28DE7}"/>
               </a:ext>
             </a:extLst>
           </p:cNvPr>
@@ -6509,7 +6643,7 @@
           <p:cNvPr id="23" name="">
             <a:extLst xmlns:a="http://schemas.openxmlformats.org/drawingml/2006/main">
               <a:ext uri="{FF2B5EF4-FFF2-40B4-BE49-F238E27FC236}">
-                <a16:creationId xmlns:a16="http://schemas.microsoft.com/office/drawing/2014/main" id="{8239F344-9309-453F-B7D0-1FFD0B7FF08F}"/>
+                <a16:creationId xmlns:a16="http://schemas.microsoft.com/office/drawing/2014/main" id="{E955A2C0-4F00-4974-A71A-91C2D60FEBD2}"/>
               </a:ext>
             </a:extLst>
           </p:cNvPr>
@@ -6542,7 +6676,7 @@
           <p:cNvPr id="24" name="">
             <a:extLst xmlns:a="http://schemas.openxmlformats.org/drawingml/2006/main">
               <a:ext uri="{FF2B5EF4-FFF2-40B4-BE49-F238E27FC236}">
-                <a16:creationId xmlns:a16="http://schemas.microsoft.com/office/drawing/2014/main" id="{45F83538-3353-4A60-9A3C-0E697AFEFD22}"/>
+                <a16:creationId xmlns:a16="http://schemas.microsoft.com/office/drawing/2014/main" id="{CC44E01C-B6B1-4555-88D6-869A26E695E3}"/>
               </a:ext>
             </a:extLst>
           </p:cNvPr>
@@ -6592,7 +6726,7 @@
           <p:cNvPr id="25" name="">
             <a:extLst xmlns:a="http://schemas.openxmlformats.org/drawingml/2006/main">
               <a:ext uri="{FF2B5EF4-FFF2-40B4-BE49-F238E27FC236}">
-                <a16:creationId xmlns:a16="http://schemas.microsoft.com/office/drawing/2014/main" id="{055EA486-80F6-4146-9C37-1F84CE0A7F88}"/>
+                <a16:creationId xmlns:a16="http://schemas.microsoft.com/office/drawing/2014/main" id="{CBC8A826-46CE-4CE4-AAD2-671B933F2C31}"/>
               </a:ext>
             </a:extLst>
           </p:cNvPr>
@@ -6625,7 +6759,7 @@
           <p:cNvPr id="26" name="">
             <a:extLst xmlns:a="http://schemas.openxmlformats.org/drawingml/2006/main">
               <a:ext uri="{FF2B5EF4-FFF2-40B4-BE49-F238E27FC236}">
-                <a16:creationId xmlns:a16="http://schemas.microsoft.com/office/drawing/2014/main" id="{83612A51-7B1D-43F7-BC5F-9DD2179A89A6}"/>
+                <a16:creationId xmlns:a16="http://schemas.microsoft.com/office/drawing/2014/main" id="{FBB40826-766D-438D-9DD5-2E33703AEF41}"/>
               </a:ext>
             </a:extLst>
           </p:cNvPr>
@@ -6675,7 +6809,7 @@
           <p:cNvPr id="27" name="">
             <a:extLst xmlns:a="http://schemas.openxmlformats.org/drawingml/2006/main">
               <a:ext uri="{FF2B5EF4-FFF2-40B4-BE49-F238E27FC236}">
-                <a16:creationId xmlns:a16="http://schemas.microsoft.com/office/drawing/2014/main" id="{38A2FA94-DEC6-48C6-B225-59E84D653A1D}"/>
+                <a16:creationId xmlns:a16="http://schemas.microsoft.com/office/drawing/2014/main" id="{2011B652-FD0D-4677-AECA-BA04122EC39D}"/>
               </a:ext>
             </a:extLst>
           </p:cNvPr>
@@ -6708,7 +6842,7 @@
           <p:cNvPr id="28" name="">
             <a:extLst xmlns:a="http://schemas.openxmlformats.org/drawingml/2006/main">
               <a:ext uri="{FF2B5EF4-FFF2-40B4-BE49-F238E27FC236}">
-                <a16:creationId xmlns:a16="http://schemas.microsoft.com/office/drawing/2014/main" id="{87A4C113-38DD-4E71-AB4F-73F18DCC3A8E}"/>
+                <a16:creationId xmlns:a16="http://schemas.microsoft.com/office/drawing/2014/main" id="{9C974E20-E1E2-46A9-9067-985435E64670}"/>
               </a:ext>
             </a:extLst>
           </p:cNvPr>
@@ -6758,7 +6892,7 @@
           <p:cNvPr id="29" name="">
             <a:extLst xmlns:a="http://schemas.openxmlformats.org/drawingml/2006/main">
               <a:ext uri="{FF2B5EF4-FFF2-40B4-BE49-F238E27FC236}">
-                <a16:creationId xmlns:a16="http://schemas.microsoft.com/office/drawing/2014/main" id="{0F231889-B7E2-4058-8DE7-95A0A67C389D}"/>
+                <a16:creationId xmlns:a16="http://schemas.microsoft.com/office/drawing/2014/main" id="{DEF526AE-D6ED-4769-BDD3-825BC6B1F92C}"/>
               </a:ext>
             </a:extLst>
           </p:cNvPr>
@@ -6791,7 +6925,7 @@
           <p:cNvPr id="30" name="">
             <a:extLst xmlns:a="http://schemas.openxmlformats.org/drawingml/2006/main">
               <a:ext uri="{FF2B5EF4-FFF2-40B4-BE49-F238E27FC236}">
-                <a16:creationId xmlns:a16="http://schemas.microsoft.com/office/drawing/2014/main" id="{70DC1E30-8B68-4799-B86E-81FE5BAD9BCB}"/>
+                <a16:creationId xmlns:a16="http://schemas.microsoft.com/office/drawing/2014/main" id="{20D482A9-5235-4F06-AB1D-50F9F913608F}"/>
               </a:ext>
             </a:extLst>
           </p:cNvPr>
@@ -6841,7 +6975,7 @@
           <p:cNvPr id="31" name="">
             <a:extLst xmlns:a="http://schemas.openxmlformats.org/drawingml/2006/main">
               <a:ext uri="{FF2B5EF4-FFF2-40B4-BE49-F238E27FC236}">
-                <a16:creationId xmlns:a16="http://schemas.microsoft.com/office/drawing/2014/main" id="{EFA8088B-51EE-47A2-AF09-01E3798899D9}"/>
+                <a16:creationId xmlns:a16="http://schemas.microsoft.com/office/drawing/2014/main" id="{0D6D4045-72EC-4A4B-A88E-B48BCD405A32}"/>
               </a:ext>
             </a:extLst>
           </p:cNvPr>
@@ -6874,7 +7008,7 @@
           <p:cNvPr id="32" name="">
             <a:extLst xmlns:a="http://schemas.openxmlformats.org/drawingml/2006/main">
               <a:ext uri="{FF2B5EF4-FFF2-40B4-BE49-F238E27FC236}">
-                <a16:creationId xmlns:a16="http://schemas.microsoft.com/office/drawing/2014/main" id="{43BEE100-AE80-4658-AD6B-3C69B8FAA118}"/>
+                <a16:creationId xmlns:a16="http://schemas.microsoft.com/office/drawing/2014/main" id="{CA68CE87-6A13-4568-88E9-065A2BDDAEA9}"/>
               </a:ext>
             </a:extLst>
           </p:cNvPr>
@@ -6924,7 +7058,7 @@
           <p:cNvPr id="33" name="">
             <a:extLst xmlns:a="http://schemas.openxmlformats.org/drawingml/2006/main">
               <a:ext uri="{FF2B5EF4-FFF2-40B4-BE49-F238E27FC236}">
-                <a16:creationId xmlns:a16="http://schemas.microsoft.com/office/drawing/2014/main" id="{73F13B76-F1E0-4BDA-9EAE-2202AD1702AD}"/>
+                <a16:creationId xmlns:a16="http://schemas.microsoft.com/office/drawing/2014/main" id="{F79B90B1-1FC9-4DC8-9016-C11EF9B99DAF}"/>
               </a:ext>
             </a:extLst>
           </p:cNvPr>
@@ -6957,7 +7091,7 @@
           <p:cNvPr id="34" name="">
             <a:extLst xmlns:a="http://schemas.openxmlformats.org/drawingml/2006/main">
               <a:ext uri="{FF2B5EF4-FFF2-40B4-BE49-F238E27FC236}">
-                <a16:creationId xmlns:a16="http://schemas.microsoft.com/office/drawing/2014/main" id="{36FAF8EF-C519-445B-B91D-FC83C163635E}"/>
+                <a16:creationId xmlns:a16="http://schemas.microsoft.com/office/drawing/2014/main" id="{3E014DA4-A1BB-487E-BCD2-BCDB7CA30F47}"/>
               </a:ext>
             </a:extLst>
           </p:cNvPr>
@@ -7007,7 +7141,7 @@
           <p:cNvPr id="35" name="">
             <a:extLst xmlns:a="http://schemas.openxmlformats.org/drawingml/2006/main">
               <a:ext uri="{FF2B5EF4-FFF2-40B4-BE49-F238E27FC236}">
-                <a16:creationId xmlns:a16="http://schemas.microsoft.com/office/drawing/2014/main" id="{D27BA85C-4733-4B6C-9D5F-A8EB2068FEBF}"/>
+                <a16:creationId xmlns:a16="http://schemas.microsoft.com/office/drawing/2014/main" id="{034667EE-C485-41A1-8DE4-B74FB25EB142}"/>
               </a:ext>
             </a:extLst>
           </p:cNvPr>
@@ -7040,7 +7174,7 @@
           <p:cNvPr id="36" name="">
             <a:extLst xmlns:a="http://schemas.openxmlformats.org/drawingml/2006/main">
               <a:ext uri="{FF2B5EF4-FFF2-40B4-BE49-F238E27FC236}">
-                <a16:creationId xmlns:a16="http://schemas.microsoft.com/office/drawing/2014/main" id="{452B822B-1B3B-45D3-90F8-F0F25DD21B71}"/>
+                <a16:creationId xmlns:a16="http://schemas.microsoft.com/office/drawing/2014/main" id="{31939F92-6B4B-49BE-8880-1A077A95AA98}"/>
               </a:ext>
             </a:extLst>
           </p:cNvPr>
@@ -7090,7 +7224,7 @@
           <p:cNvPr id="37" name="">
             <a:extLst xmlns:a="http://schemas.openxmlformats.org/drawingml/2006/main">
               <a:ext uri="{FF2B5EF4-FFF2-40B4-BE49-F238E27FC236}">
-                <a16:creationId xmlns:a16="http://schemas.microsoft.com/office/drawing/2014/main" id="{E77BCC36-F58F-44C8-9211-2780C035AB0A}"/>
+                <a16:creationId xmlns:a16="http://schemas.microsoft.com/office/drawing/2014/main" id="{0356F1E5-E8D1-40DB-9FB8-07AC53C01DA4}"/>
               </a:ext>
             </a:extLst>
           </p:cNvPr>
@@ -7123,7 +7257,7 @@
           <p:cNvPr id="38" name="">
             <a:extLst xmlns:a="http://schemas.openxmlformats.org/drawingml/2006/main">
               <a:ext uri="{FF2B5EF4-FFF2-40B4-BE49-F238E27FC236}">
-                <a16:creationId xmlns:a16="http://schemas.microsoft.com/office/drawing/2014/main" id="{E187BFA8-AA18-4F20-AC31-16E046B9AA99}"/>
+                <a16:creationId xmlns:a16="http://schemas.microsoft.com/office/drawing/2014/main" id="{45FC3344-7DD9-44C2-97C2-0EC16F4210A8}"/>
               </a:ext>
             </a:extLst>
           </p:cNvPr>
@@ -7173,7 +7307,7 @@
           <p:cNvPr id="39" name="">
             <a:extLst xmlns:a="http://schemas.openxmlformats.org/drawingml/2006/main">
               <a:ext uri="{FF2B5EF4-FFF2-40B4-BE49-F238E27FC236}">
-                <a16:creationId xmlns:a16="http://schemas.microsoft.com/office/drawing/2014/main" id="{C2D2E097-905B-4030-85E3-A4DB44C884A5}"/>
+                <a16:creationId xmlns:a16="http://schemas.microsoft.com/office/drawing/2014/main" id="{6268FF2C-B80B-4875-BC51-E7C077EC794D}"/>
               </a:ext>
             </a:extLst>
           </p:cNvPr>
@@ -7206,7 +7340,7 @@
           <p:cNvPr id="40" name="">
             <a:extLst xmlns:a="http://schemas.openxmlformats.org/drawingml/2006/main">
               <a:ext uri="{FF2B5EF4-FFF2-40B4-BE49-F238E27FC236}">
-                <a16:creationId xmlns:a16="http://schemas.microsoft.com/office/drawing/2014/main" id="{D849AA47-4957-4570-8A64-A495A18AAD20}"/>
+                <a16:creationId xmlns:a16="http://schemas.microsoft.com/office/drawing/2014/main" id="{CA211294-9F4C-4B26-82D4-2EA7B1E5FB8A}"/>
               </a:ext>
             </a:extLst>
           </p:cNvPr>
@@ -7256,7 +7390,7 @@
           <p:cNvPr id="41" name="">
             <a:extLst xmlns:a="http://schemas.openxmlformats.org/drawingml/2006/main">
               <a:ext uri="{FF2B5EF4-FFF2-40B4-BE49-F238E27FC236}">
-                <a16:creationId xmlns:a16="http://schemas.microsoft.com/office/drawing/2014/main" id="{5077E04F-6F5A-4A02-BF33-3A0A9386F4CA}"/>
+                <a16:creationId xmlns:a16="http://schemas.microsoft.com/office/drawing/2014/main" id="{A848DA54-A820-4640-BFF4-754C3F069835}"/>
               </a:ext>
             </a:extLst>
           </p:cNvPr>
@@ -7289,7 +7423,7 @@
           <p:cNvPr id="42" name="">
             <a:extLst xmlns:a="http://schemas.openxmlformats.org/drawingml/2006/main">
               <a:ext uri="{FF2B5EF4-FFF2-40B4-BE49-F238E27FC236}">
-                <a16:creationId xmlns:a16="http://schemas.microsoft.com/office/drawing/2014/main" id="{1B745314-8505-410E-89A0-7F15D69646EE}"/>
+                <a16:creationId xmlns:a16="http://schemas.microsoft.com/office/drawing/2014/main" id="{FFC4F83C-EF3B-4FDA-AE40-67E8BED1562F}"/>
               </a:ext>
             </a:extLst>
           </p:cNvPr>
@@ -7339,7 +7473,7 @@
           <p:cNvPr id="43" name="">
             <a:extLst xmlns:a="http://schemas.openxmlformats.org/drawingml/2006/main">
               <a:ext uri="{FF2B5EF4-FFF2-40B4-BE49-F238E27FC236}">
-                <a16:creationId xmlns:a16="http://schemas.microsoft.com/office/drawing/2014/main" id="{6B0B1E67-2C05-40AA-8CB9-938307F1AFDF}"/>
+                <a16:creationId xmlns:a16="http://schemas.microsoft.com/office/drawing/2014/main" id="{DBDFEBF2-D7BB-4953-8E4D-A147E3541223}"/>
               </a:ext>
             </a:extLst>
           </p:cNvPr>
@@ -7372,7 +7506,7 @@
           <p:cNvPr id="44" name="">
             <a:extLst xmlns:a="http://schemas.openxmlformats.org/drawingml/2006/main">
               <a:ext uri="{FF2B5EF4-FFF2-40B4-BE49-F238E27FC236}">
-                <a16:creationId xmlns:a16="http://schemas.microsoft.com/office/drawing/2014/main" id="{A7A81933-2067-48BF-AC27-E636666AFA65}"/>
+                <a16:creationId xmlns:a16="http://schemas.microsoft.com/office/drawing/2014/main" id="{CE7EE051-0A90-40B5-803B-CAE70E7D8530}"/>
               </a:ext>
             </a:extLst>
           </p:cNvPr>
@@ -7422,7 +7556,7 @@
           <p:cNvPr id="45" name="">
             <a:extLst xmlns:a="http://schemas.openxmlformats.org/drawingml/2006/main">
               <a:ext uri="{FF2B5EF4-FFF2-40B4-BE49-F238E27FC236}">
-                <a16:creationId xmlns:a16="http://schemas.microsoft.com/office/drawing/2014/main" id="{FEF02516-F400-4D4C-B5B5-A3D3ABA349D2}"/>
+                <a16:creationId xmlns:a16="http://schemas.microsoft.com/office/drawing/2014/main" id="{9463DF2F-8E3C-43DE-9FF2-10786FC52D76}"/>
               </a:ext>
             </a:extLst>
           </p:cNvPr>
@@ -7455,7 +7589,7 @@
           <p:cNvPr id="46" name="">
             <a:extLst xmlns:a="http://schemas.openxmlformats.org/drawingml/2006/main">
               <a:ext uri="{FF2B5EF4-FFF2-40B4-BE49-F238E27FC236}">
-                <a16:creationId xmlns:a16="http://schemas.microsoft.com/office/drawing/2014/main" id="{38AA48D2-DB83-416E-AB88-4C2009E451CB}"/>
+                <a16:creationId xmlns:a16="http://schemas.microsoft.com/office/drawing/2014/main" id="{B568C18C-8B2F-4C58-867D-C451F90A86BC}"/>
               </a:ext>
             </a:extLst>
           </p:cNvPr>
@@ -7505,7 +7639,7 @@
           <p:cNvPr id="47" name="">
             <a:extLst xmlns:a="http://schemas.openxmlformats.org/drawingml/2006/main">
               <a:ext uri="{FF2B5EF4-FFF2-40B4-BE49-F238E27FC236}">
-                <a16:creationId xmlns:a16="http://schemas.microsoft.com/office/drawing/2014/main" id="{CE0CA93E-48D2-4AB6-89FE-96DDC6623C2D}"/>
+                <a16:creationId xmlns:a16="http://schemas.microsoft.com/office/drawing/2014/main" id="{43C0837A-1086-427A-B4F4-AB5FE6215AA0}"/>
               </a:ext>
             </a:extLst>
           </p:cNvPr>
@@ -7538,7 +7672,7 @@
           <p:cNvPr id="48" name="">
             <a:extLst xmlns:a="http://schemas.openxmlformats.org/drawingml/2006/main">
               <a:ext uri="{FF2B5EF4-FFF2-40B4-BE49-F238E27FC236}">
-                <a16:creationId xmlns:a16="http://schemas.microsoft.com/office/drawing/2014/main" id="{C4AD8A15-8E85-4A0B-903D-4AA2F74FD4A4}"/>
+                <a16:creationId xmlns:a16="http://schemas.microsoft.com/office/drawing/2014/main" id="{DBA44481-1D7B-4AD1-9B96-160B3D1DF5BE}"/>
               </a:ext>
             </a:extLst>
           </p:cNvPr>
@@ -7588,7 +7722,7 @@
           <p:cNvPr id="49" name="">
             <a:extLst xmlns:a="http://schemas.openxmlformats.org/drawingml/2006/main">
               <a:ext uri="{FF2B5EF4-FFF2-40B4-BE49-F238E27FC236}">
-                <a16:creationId xmlns:a16="http://schemas.microsoft.com/office/drawing/2014/main" id="{25E05742-1287-4E06-BEA7-D1986706B7F0}"/>
+                <a16:creationId xmlns:a16="http://schemas.microsoft.com/office/drawing/2014/main" id="{5E8C1953-E962-45E4-B7E1-E213704C53EE}"/>
               </a:ext>
             </a:extLst>
           </p:cNvPr>
@@ -7621,7 +7755,7 @@
           <p:cNvPr id="50" name="">
             <a:extLst xmlns:a="http://schemas.openxmlformats.org/drawingml/2006/main">
               <a:ext uri="{FF2B5EF4-FFF2-40B4-BE49-F238E27FC236}">
-                <a16:creationId xmlns:a16="http://schemas.microsoft.com/office/drawing/2014/main" id="{0B534415-24F7-4517-939B-C256E8D9CB26}"/>
+                <a16:creationId xmlns:a16="http://schemas.microsoft.com/office/drawing/2014/main" id="{CF04A8D3-E8A8-4E0E-9622-A659D5170ED5}"/>
               </a:ext>
             </a:extLst>
           </p:cNvPr>
@@ -7671,7 +7805,7 @@
           <p:cNvPr id="51" name="">
             <a:extLst xmlns:a="http://schemas.openxmlformats.org/drawingml/2006/main">
               <a:ext uri="{FF2B5EF4-FFF2-40B4-BE49-F238E27FC236}">
-                <a16:creationId xmlns:a16="http://schemas.microsoft.com/office/drawing/2014/main" id="{67B137C9-FB9C-44E6-9C3A-01C7813B80A2}"/>
+                <a16:creationId xmlns:a16="http://schemas.microsoft.com/office/drawing/2014/main" id="{4C9E8AB8-61AD-4BC4-9232-24F205B78D73}"/>
               </a:ext>
             </a:extLst>
           </p:cNvPr>
@@ -7704,7 +7838,7 @@
           <p:cNvPr id="52" name="">
             <a:extLst xmlns:a="http://schemas.openxmlformats.org/drawingml/2006/main">
               <a:ext uri="{FF2B5EF4-FFF2-40B4-BE49-F238E27FC236}">
-                <a16:creationId xmlns:a16="http://schemas.microsoft.com/office/drawing/2014/main" id="{21061939-CF11-449E-BFA5-750502C9776C}"/>
+                <a16:creationId xmlns:a16="http://schemas.microsoft.com/office/drawing/2014/main" id="{FBA5952C-7A55-4A87-8247-74A19C9986D3}"/>
               </a:ext>
             </a:extLst>
           </p:cNvPr>
@@ -7754,7 +7888,7 @@
           <p:cNvPr id="53" name="">
             <a:extLst xmlns:a="http://schemas.openxmlformats.org/drawingml/2006/main">
               <a:ext uri="{FF2B5EF4-FFF2-40B4-BE49-F238E27FC236}">
-                <a16:creationId xmlns:a16="http://schemas.microsoft.com/office/drawing/2014/main" id="{B640A070-3B98-42FE-B686-A501F5BB15E4}"/>
+                <a16:creationId xmlns:a16="http://schemas.microsoft.com/office/drawing/2014/main" id="{0C3B026F-942B-4DD3-B0CE-787248FB119C}"/>
               </a:ext>
             </a:extLst>
           </p:cNvPr>
@@ -7787,7 +7921,7 @@
           <p:cNvPr id="54" name="">
             <a:extLst xmlns:a="http://schemas.openxmlformats.org/drawingml/2006/main">
               <a:ext uri="{FF2B5EF4-FFF2-40B4-BE49-F238E27FC236}">
-                <a16:creationId xmlns:a16="http://schemas.microsoft.com/office/drawing/2014/main" id="{F9BA33F4-8624-4F91-9DD4-2FC848100A4B}"/>
+                <a16:creationId xmlns:a16="http://schemas.microsoft.com/office/drawing/2014/main" id="{DAA035DC-2965-40F7-BE92-906C9C0C0175}"/>
               </a:ext>
             </a:extLst>
           </p:cNvPr>
@@ -7837,7 +7971,7 @@
           <p:cNvPr id="55" name="">
             <a:extLst xmlns:a="http://schemas.openxmlformats.org/drawingml/2006/main">
               <a:ext uri="{FF2B5EF4-FFF2-40B4-BE49-F238E27FC236}">
-                <a16:creationId xmlns:a16="http://schemas.microsoft.com/office/drawing/2014/main" id="{682993AB-FCD4-4734-928D-9E573E0F995F}"/>
+                <a16:creationId xmlns:a16="http://schemas.microsoft.com/office/drawing/2014/main" id="{DAD0173A-659D-4CB5-A27B-C9AB9EB0E4B3}"/>
               </a:ext>
             </a:extLst>
           </p:cNvPr>
@@ -7870,7 +8004,7 @@
           <p:cNvPr id="56" name="">
             <a:extLst xmlns:a="http://schemas.openxmlformats.org/drawingml/2006/main">
               <a:ext uri="{FF2B5EF4-FFF2-40B4-BE49-F238E27FC236}">
-                <a16:creationId xmlns:a16="http://schemas.microsoft.com/office/drawing/2014/main" id="{FD5354B0-ECBD-4846-9FB2-DA30A9EE1506}"/>
+                <a16:creationId xmlns:a16="http://schemas.microsoft.com/office/drawing/2014/main" id="{E1A9295A-AE30-4D7C-A7D6-8A6D3F0FCD66}"/>
               </a:ext>
             </a:extLst>
           </p:cNvPr>
@@ -7920,7 +8054,7 @@
           <p:cNvPr id="57" name="">
             <a:extLst xmlns:a="http://schemas.openxmlformats.org/drawingml/2006/main">
               <a:ext uri="{FF2B5EF4-FFF2-40B4-BE49-F238E27FC236}">
-                <a16:creationId xmlns:a16="http://schemas.microsoft.com/office/drawing/2014/main" id="{DFE1CF58-1B14-4D5A-957D-0E232CB2D0B4}"/>
+                <a16:creationId xmlns:a16="http://schemas.microsoft.com/office/drawing/2014/main" id="{73FA690A-AEC6-426D-B14F-95D4A435BE74}"/>
               </a:ext>
             </a:extLst>
           </p:cNvPr>
@@ -7953,7 +8087,7 @@
           <p:cNvPr id="58" name="">
             <a:extLst xmlns:a="http://schemas.openxmlformats.org/drawingml/2006/main">
               <a:ext uri="{FF2B5EF4-FFF2-40B4-BE49-F238E27FC236}">
-                <a16:creationId xmlns:a16="http://schemas.microsoft.com/office/drawing/2014/main" id="{72245CAC-C8F3-46B2-B947-30E48E2FF001}"/>
+                <a16:creationId xmlns:a16="http://schemas.microsoft.com/office/drawing/2014/main" id="{4163524D-F6A4-4C38-A999-3AC5F59EF609}"/>
               </a:ext>
             </a:extLst>
           </p:cNvPr>
@@ -8003,7 +8137,7 @@
           <p:cNvPr id="59" name="">
             <a:extLst xmlns:a="http://schemas.openxmlformats.org/drawingml/2006/main">
               <a:ext uri="{FF2B5EF4-FFF2-40B4-BE49-F238E27FC236}">
-                <a16:creationId xmlns:a16="http://schemas.microsoft.com/office/drawing/2014/main" id="{80E32950-BB51-44FD-853A-37F402B32283}"/>
+                <a16:creationId xmlns:a16="http://schemas.microsoft.com/office/drawing/2014/main" id="{801399DE-0B61-45A1-A8E7-EE7D2DC38490}"/>
               </a:ext>
             </a:extLst>
           </p:cNvPr>
@@ -8036,7 +8170,7 @@
           <p:cNvPr id="60" name="">
             <a:extLst xmlns:a="http://schemas.openxmlformats.org/drawingml/2006/main">
               <a:ext uri="{FF2B5EF4-FFF2-40B4-BE49-F238E27FC236}">
-                <a16:creationId xmlns:a16="http://schemas.microsoft.com/office/drawing/2014/main" id="{03C4B54A-D941-4EAF-AB24-7EB49B68CB6B}"/>
+                <a16:creationId xmlns:a16="http://schemas.microsoft.com/office/drawing/2014/main" id="{7A9FED12-585A-4985-91C8-3FEDF992706E}"/>
               </a:ext>
             </a:extLst>
           </p:cNvPr>
@@ -8086,7 +8220,7 @@
           <p:cNvPr id="61" name="">
             <a:extLst xmlns:a="http://schemas.openxmlformats.org/drawingml/2006/main">
               <a:ext uri="{FF2B5EF4-FFF2-40B4-BE49-F238E27FC236}">
-                <a16:creationId xmlns:a16="http://schemas.microsoft.com/office/drawing/2014/main" id="{C4E3EB77-BF4D-47BC-8DE7-8C176C7DE206}"/>
+                <a16:creationId xmlns:a16="http://schemas.microsoft.com/office/drawing/2014/main" id="{D03ECDCF-BDE4-4AAC-BCE4-214EADFF619C}"/>
               </a:ext>
             </a:extLst>
           </p:cNvPr>
@@ -8136,7 +8270,7 @@
           <p:cNvPr id="62" name="">
             <a:extLst xmlns:a="http://schemas.openxmlformats.org/drawingml/2006/main">
               <a:ext uri="{FF2B5EF4-FFF2-40B4-BE49-F238E27FC236}">
-                <a16:creationId xmlns:a16="http://schemas.microsoft.com/office/drawing/2014/main" id="{9AF0B30F-60E4-4ACA-AB74-71477A69D629}"/>
+                <a16:creationId xmlns:a16="http://schemas.microsoft.com/office/drawing/2014/main" id="{2CCF6494-D630-4D03-A769-E62DBDDBCF56}"/>
               </a:ext>
             </a:extLst>
           </p:cNvPr>
@@ -8184,7 +8318,7 @@
     </p:spTree>
     <p:extLst>
       <p:ext uri="{BB962C8B-B14F-4D97-AF65-F5344CB8AC3E}">
-        <p14:creationId xmlns:p14="http://schemas.microsoft.com/office/powerpoint/2010/main" val="1526423918"/>
+        <p14:creationId xmlns:p14="http://schemas.microsoft.com/office/powerpoint/2010/main" val="1212002564"/>
       </p:ext>
     </p:extLst>
   </p:cSld>
@@ -8215,7 +8349,7 @@
           <p:cNvPr id="1" name="">
             <a:extLst xmlns:a="http://schemas.openxmlformats.org/drawingml/2006/main">
               <a:ext uri="{FF2B5EF4-FFF2-40B4-BE49-F238E27FC236}">
-                <a16:creationId xmlns:a16="http://schemas.microsoft.com/office/drawing/2014/main" id="{A317CE85-EF67-485B-A25B-507CD6175C51}"/>
+                <a16:creationId xmlns:a16="http://schemas.microsoft.com/office/drawing/2014/main" id="{31C52800-0F24-4A75-B0F1-60796940C2C4}"/>
               </a:ext>
             </a:extLst>
           </p:cNvPr>
@@ -8265,7 +8399,7 @@
           <p:cNvPr id="2" name="">
             <a:extLst xmlns:a="http://schemas.openxmlformats.org/drawingml/2006/main">
               <a:ext uri="{FF2B5EF4-FFF2-40B4-BE49-F238E27FC236}">
-                <a16:creationId xmlns:a16="http://schemas.microsoft.com/office/drawing/2014/main" id="{2D6B6BAB-2B4C-469D-A5CC-D636EC5F32AD}"/>
+                <a16:creationId xmlns:a16="http://schemas.microsoft.com/office/drawing/2014/main" id="{080FF843-B1C6-4C40-AA17-F124472969C8}"/>
               </a:ext>
             </a:extLst>
           </p:cNvPr>
@@ -8315,7 +8449,7 @@
           <p:cNvPr id="3" name="">
             <a:extLst xmlns:a="http://schemas.openxmlformats.org/drawingml/2006/main">
               <a:ext uri="{FF2B5EF4-FFF2-40B4-BE49-F238E27FC236}">
-                <a16:creationId xmlns:a16="http://schemas.microsoft.com/office/drawing/2014/main" id="{78AC20F4-282E-4E35-BBCE-66DB80A2EDF1}"/>
+                <a16:creationId xmlns:a16="http://schemas.microsoft.com/office/drawing/2014/main" id="{8CBE4B78-B26D-4693-BA46-FCB999EAED55}"/>
               </a:ext>
             </a:extLst>
           </p:cNvPr>
@@ -8352,7 +8486,7 @@
           <p:nvPr/>
         </p:nvPicPr>
         <p:blipFill>
-          <a:blip xmlns:r="http://schemas.openxmlformats.org/officeDocument/2006/relationships" xmlns:a="http://schemas.openxmlformats.org/drawingml/2006/main" r:embed="R107094f3b789441d"/>
+          <a:blip xmlns:r="http://schemas.openxmlformats.org/officeDocument/2006/relationships" xmlns:a="http://schemas.openxmlformats.org/drawingml/2006/main" r:embed="R8e459f8843794221"/>
           <a:stretch xmlns:a="http://schemas.openxmlformats.org/drawingml/2006/main"/>
         </p:blipFill>
         <p:spPr>
@@ -8370,7 +8504,7 @@
           <p:cNvPr id="5" name="">
             <a:extLst xmlns:a="http://schemas.openxmlformats.org/drawingml/2006/main">
               <a:ext uri="{FF2B5EF4-FFF2-40B4-BE49-F238E27FC236}">
-                <a16:creationId xmlns:a16="http://schemas.microsoft.com/office/drawing/2014/main" id="{1C2B6F37-1F64-4330-A15F-7F79251FB7BA}"/>
+                <a16:creationId xmlns:a16="http://schemas.microsoft.com/office/drawing/2014/main" id="{4FC826A2-BBC4-4EF0-BD63-95A3CD9C2977}"/>
               </a:ext>
             </a:extLst>
           </p:cNvPr>
@@ -8403,7 +8537,7 @@
           <p:cNvPr id="6" name="">
             <a:extLst xmlns:a="http://schemas.openxmlformats.org/drawingml/2006/main">
               <a:ext uri="{FF2B5EF4-FFF2-40B4-BE49-F238E27FC236}">
-                <a16:creationId xmlns:a16="http://schemas.microsoft.com/office/drawing/2014/main" id="{8400E7B0-15D1-4F9A-99DD-7BFB9E45FC0F}"/>
+                <a16:creationId xmlns:a16="http://schemas.microsoft.com/office/drawing/2014/main" id="{2EE15E21-12BD-4DA8-90FC-C42820248FE0}"/>
               </a:ext>
             </a:extLst>
           </p:cNvPr>
@@ -8453,7 +8587,7 @@
           <p:cNvPr id="7" name="">
             <a:extLst xmlns:a="http://schemas.openxmlformats.org/drawingml/2006/main">
               <a:ext uri="{FF2B5EF4-FFF2-40B4-BE49-F238E27FC236}">
-                <a16:creationId xmlns:a16="http://schemas.microsoft.com/office/drawing/2014/main" id="{8DF35011-6436-40C5-AD21-74544FF5A962}"/>
+                <a16:creationId xmlns:a16="http://schemas.microsoft.com/office/drawing/2014/main" id="{E2B705C1-AEB8-438D-A1B1-37809B522E86}"/>
               </a:ext>
             </a:extLst>
           </p:cNvPr>
@@ -8486,7 +8620,7 @@
           <p:cNvPr id="8" name="">
             <a:extLst xmlns:a="http://schemas.openxmlformats.org/drawingml/2006/main">
               <a:ext uri="{FF2B5EF4-FFF2-40B4-BE49-F238E27FC236}">
-                <a16:creationId xmlns:a16="http://schemas.microsoft.com/office/drawing/2014/main" id="{6A3946F2-4F59-4A00-984F-329A2B4508B8}"/>
+                <a16:creationId xmlns:a16="http://schemas.microsoft.com/office/drawing/2014/main" id="{15120C0A-B132-4D2A-B325-213FA43C11C5}"/>
               </a:ext>
             </a:extLst>
           </p:cNvPr>
@@ -8536,7 +8670,7 @@
           <p:cNvPr id="9" name="">
             <a:extLst xmlns:a="http://schemas.openxmlformats.org/drawingml/2006/main">
               <a:ext uri="{FF2B5EF4-FFF2-40B4-BE49-F238E27FC236}">
-                <a16:creationId xmlns:a16="http://schemas.microsoft.com/office/drawing/2014/main" id="{6014FBAD-7C71-4B93-878D-6FD5446E84DF}"/>
+                <a16:creationId xmlns:a16="http://schemas.microsoft.com/office/drawing/2014/main" id="{9E0599A7-7B9C-4576-9799-2DA5D079EC7D}"/>
               </a:ext>
             </a:extLst>
           </p:cNvPr>
@@ -8569,7 +8703,7 @@
           <p:cNvPr id="10" name="">
             <a:extLst xmlns:a="http://schemas.openxmlformats.org/drawingml/2006/main">
               <a:ext uri="{FF2B5EF4-FFF2-40B4-BE49-F238E27FC236}">
-                <a16:creationId xmlns:a16="http://schemas.microsoft.com/office/drawing/2014/main" id="{5161AAE7-84A9-4EDB-8A76-DA72663FEA86}"/>
+                <a16:creationId xmlns:a16="http://schemas.microsoft.com/office/drawing/2014/main" id="{0CF4E1C3-3C83-4DC1-943C-83A2C64FC185}"/>
               </a:ext>
             </a:extLst>
           </p:cNvPr>
@@ -8619,7 +8753,7 @@
           <p:cNvPr id="11" name="">
             <a:extLst xmlns:a="http://schemas.openxmlformats.org/drawingml/2006/main">
               <a:ext uri="{FF2B5EF4-FFF2-40B4-BE49-F238E27FC236}">
-                <a16:creationId xmlns:a16="http://schemas.microsoft.com/office/drawing/2014/main" id="{B6180B0E-9E46-4A03-891A-A7DC4D447719}"/>
+                <a16:creationId xmlns:a16="http://schemas.microsoft.com/office/drawing/2014/main" id="{103EAD74-6111-43C9-AD57-F4E904B628DC}"/>
               </a:ext>
             </a:extLst>
           </p:cNvPr>
@@ -8652,7 +8786,7 @@
           <p:cNvPr id="12" name="">
             <a:extLst xmlns:a="http://schemas.openxmlformats.org/drawingml/2006/main">
               <a:ext uri="{FF2B5EF4-FFF2-40B4-BE49-F238E27FC236}">
-                <a16:creationId xmlns:a16="http://schemas.microsoft.com/office/drawing/2014/main" id="{D89A8541-1BDA-4543-A47B-411214826DF2}"/>
+                <a16:creationId xmlns:a16="http://schemas.microsoft.com/office/drawing/2014/main" id="{03A21D36-447B-4FD9-9CF9-8AEF0B3C058A}"/>
               </a:ext>
             </a:extLst>
           </p:cNvPr>
@@ -8702,7 +8836,7 @@
           <p:cNvPr id="13" name="">
             <a:extLst xmlns:a="http://schemas.openxmlformats.org/drawingml/2006/main">
               <a:ext uri="{FF2B5EF4-FFF2-40B4-BE49-F238E27FC236}">
-                <a16:creationId xmlns:a16="http://schemas.microsoft.com/office/drawing/2014/main" id="{FE647BFA-0813-4A3B-93D9-C128D17DA7C4}"/>
+                <a16:creationId xmlns:a16="http://schemas.microsoft.com/office/drawing/2014/main" id="{4EA729E7-F1C9-4F5F-AC22-3EEA31173AB2}"/>
               </a:ext>
             </a:extLst>
           </p:cNvPr>
@@ -8750,7 +8884,7 @@
     </p:spTree>
     <p:extLst>
       <p:ext uri="{BB962C8B-B14F-4D97-AF65-F5344CB8AC3E}">
-        <p14:creationId xmlns:p14="http://schemas.microsoft.com/office/powerpoint/2010/main" val="1041080894"/>
+        <p14:creationId xmlns:p14="http://schemas.microsoft.com/office/powerpoint/2010/main" val="773259615"/>
       </p:ext>
     </p:extLst>
   </p:cSld>
@@ -8781,7 +8915,7 @@
           <p:cNvPr id="1" name="">
             <a:extLst xmlns:a="http://schemas.openxmlformats.org/drawingml/2006/main">
               <a:ext uri="{FF2B5EF4-FFF2-40B4-BE49-F238E27FC236}">
-                <a16:creationId xmlns:a16="http://schemas.microsoft.com/office/drawing/2014/main" id="{BB5ED1F7-DAAD-496E-BD29-153A5FC12FD8}"/>
+                <a16:creationId xmlns:a16="http://schemas.microsoft.com/office/drawing/2014/main" id="{65991492-332C-49E1-813A-6CFFB656085A}"/>
               </a:ext>
             </a:extLst>
           </p:cNvPr>
@@ -8831,7 +8965,7 @@
           <p:cNvPr id="2" name="">
             <a:extLst xmlns:a="http://schemas.openxmlformats.org/drawingml/2006/main">
               <a:ext uri="{FF2B5EF4-FFF2-40B4-BE49-F238E27FC236}">
-                <a16:creationId xmlns:a16="http://schemas.microsoft.com/office/drawing/2014/main" id="{3E166D49-41DC-4143-84FA-53B156ED2A00}"/>
+                <a16:creationId xmlns:a16="http://schemas.microsoft.com/office/drawing/2014/main" id="{FCDAB555-74E6-42D4-A649-5EC8E19F9D08}"/>
               </a:ext>
             </a:extLst>
           </p:cNvPr>
@@ -8881,7 +9015,7 @@
           <p:cNvPr id="3" name="">
             <a:extLst xmlns:a="http://schemas.openxmlformats.org/drawingml/2006/main">
               <a:ext uri="{FF2B5EF4-FFF2-40B4-BE49-F238E27FC236}">
-                <a16:creationId xmlns:a16="http://schemas.microsoft.com/office/drawing/2014/main" id="{666D7BF5-246C-4419-995E-4EB9CABB6B0F}"/>
+                <a16:creationId xmlns:a16="http://schemas.microsoft.com/office/drawing/2014/main" id="{939C8D2B-6E73-4C51-99BC-387808B45F22}"/>
               </a:ext>
             </a:extLst>
           </p:cNvPr>
@@ -8914,7 +9048,7 @@
           <p:cNvPr id="4" name="">
             <a:extLst xmlns:a="http://schemas.openxmlformats.org/drawingml/2006/main">
               <a:ext uri="{FF2B5EF4-FFF2-40B4-BE49-F238E27FC236}">
-                <a16:creationId xmlns:a16="http://schemas.microsoft.com/office/drawing/2014/main" id="{2350271E-96EE-4D54-A8DA-B3879E3E047D}"/>
+                <a16:creationId xmlns:a16="http://schemas.microsoft.com/office/drawing/2014/main" id="{02F5DD23-0A61-4D8E-83DA-2F85CD592EA3}"/>
               </a:ext>
             </a:extLst>
           </p:cNvPr>
@@ -8947,7 +9081,7 @@
           <p:cNvPr id="5" name="">
             <a:extLst xmlns:a="http://schemas.openxmlformats.org/drawingml/2006/main">
               <a:ext uri="{FF2B5EF4-FFF2-40B4-BE49-F238E27FC236}">
-                <a16:creationId xmlns:a16="http://schemas.microsoft.com/office/drawing/2014/main" id="{2F2A485C-40AF-4F5E-8FD9-9C007F6F19DB}"/>
+                <a16:creationId xmlns:a16="http://schemas.microsoft.com/office/drawing/2014/main" id="{E36D9ECC-FEFC-4CA1-A3EA-876DD059E464}"/>
               </a:ext>
             </a:extLst>
           </p:cNvPr>
@@ -8997,7 +9131,7 @@
           <p:cNvPr id="6" name="">
             <a:extLst xmlns:a="http://schemas.openxmlformats.org/drawingml/2006/main">
               <a:ext uri="{FF2B5EF4-FFF2-40B4-BE49-F238E27FC236}">
-                <a16:creationId xmlns:a16="http://schemas.microsoft.com/office/drawing/2014/main" id="{0A16C350-33AB-4A75-B5BC-7C789579DFCF}"/>
+                <a16:creationId xmlns:a16="http://schemas.microsoft.com/office/drawing/2014/main" id="{E0F82FCD-BF98-4F9C-92F2-09B29B08CC81}"/>
               </a:ext>
             </a:extLst>
           </p:cNvPr>
@@ -9030,7 +9164,7 @@
           <p:cNvPr id="7" name="">
             <a:extLst xmlns:a="http://schemas.openxmlformats.org/drawingml/2006/main">
               <a:ext uri="{FF2B5EF4-FFF2-40B4-BE49-F238E27FC236}">
-                <a16:creationId xmlns:a16="http://schemas.microsoft.com/office/drawing/2014/main" id="{8A091499-4B89-4660-87EB-029CE98EA93C}"/>
+                <a16:creationId xmlns:a16="http://schemas.microsoft.com/office/drawing/2014/main" id="{BE2ACDAC-E3C3-4DCE-9B17-C216B4D3D8C7}"/>
               </a:ext>
             </a:extLst>
           </p:cNvPr>
@@ -9080,7 +9214,7 @@
           <p:cNvPr id="8" name="">
             <a:extLst xmlns:a="http://schemas.openxmlformats.org/drawingml/2006/main">
               <a:ext uri="{FF2B5EF4-FFF2-40B4-BE49-F238E27FC236}">
-                <a16:creationId xmlns:a16="http://schemas.microsoft.com/office/drawing/2014/main" id="{E146EEDE-20D9-46EA-8043-64E70E17F03B}"/>
+                <a16:creationId xmlns:a16="http://schemas.microsoft.com/office/drawing/2014/main" id="{3C2C6C68-3BD6-4A7A-B5F5-1955191A5F17}"/>
               </a:ext>
             </a:extLst>
           </p:cNvPr>
@@ -9113,7 +9247,7 @@
           <p:cNvPr id="9" name="">
             <a:extLst xmlns:a="http://schemas.openxmlformats.org/drawingml/2006/main">
               <a:ext uri="{FF2B5EF4-FFF2-40B4-BE49-F238E27FC236}">
-                <a16:creationId xmlns:a16="http://schemas.microsoft.com/office/drawing/2014/main" id="{D081EDDA-36DD-49F1-B161-062E1ED391D3}"/>
+                <a16:creationId xmlns:a16="http://schemas.microsoft.com/office/drawing/2014/main" id="{70977327-4F88-484B-9202-BB9B45B0BC3D}"/>
               </a:ext>
             </a:extLst>
           </p:cNvPr>
@@ -9163,7 +9297,7 @@
           <p:cNvPr id="10" name="">
             <a:extLst xmlns:a="http://schemas.openxmlformats.org/drawingml/2006/main">
               <a:ext uri="{FF2B5EF4-FFF2-40B4-BE49-F238E27FC236}">
-                <a16:creationId xmlns:a16="http://schemas.microsoft.com/office/drawing/2014/main" id="{88459CF7-2193-4A5F-A3DA-28A8A62FBF91}"/>
+                <a16:creationId xmlns:a16="http://schemas.microsoft.com/office/drawing/2014/main" id="{2D754333-794B-4192-A57C-6DC2E3777D9E}"/>
               </a:ext>
             </a:extLst>
           </p:cNvPr>
@@ -9196,7 +9330,7 @@
           <p:cNvPr id="11" name="">
             <a:extLst xmlns:a="http://schemas.openxmlformats.org/drawingml/2006/main">
               <a:ext uri="{FF2B5EF4-FFF2-40B4-BE49-F238E27FC236}">
-                <a16:creationId xmlns:a16="http://schemas.microsoft.com/office/drawing/2014/main" id="{F0FF926C-1BA3-4662-B485-A46979E41BCF}"/>
+                <a16:creationId xmlns:a16="http://schemas.microsoft.com/office/drawing/2014/main" id="{290E14F1-141F-4235-AC9C-67C249246C41}"/>
               </a:ext>
             </a:extLst>
           </p:cNvPr>
@@ -9246,7 +9380,7 @@
           <p:cNvPr id="12" name="">
             <a:extLst xmlns:a="http://schemas.openxmlformats.org/drawingml/2006/main">
               <a:ext uri="{FF2B5EF4-FFF2-40B4-BE49-F238E27FC236}">
-                <a16:creationId xmlns:a16="http://schemas.microsoft.com/office/drawing/2014/main" id="{804FCD10-6B7A-4D80-8E7A-588CD99415F1}"/>
+                <a16:creationId xmlns:a16="http://schemas.microsoft.com/office/drawing/2014/main" id="{563355EE-19F4-4B7C-8522-370042A34F2D}"/>
               </a:ext>
             </a:extLst>
           </p:cNvPr>
@@ -9279,7 +9413,7 @@
           <p:cNvPr id="13" name="">
             <a:extLst xmlns:a="http://schemas.openxmlformats.org/drawingml/2006/main">
               <a:ext uri="{FF2B5EF4-FFF2-40B4-BE49-F238E27FC236}">
-                <a16:creationId xmlns:a16="http://schemas.microsoft.com/office/drawing/2014/main" id="{9F32D84C-4A7B-44EC-BBA1-E43AFFCBE8AA}"/>
+                <a16:creationId xmlns:a16="http://schemas.microsoft.com/office/drawing/2014/main" id="{8BD5A4DD-D75D-4A35-83E8-2E4B8333DDD1}"/>
               </a:ext>
             </a:extLst>
           </p:cNvPr>
@@ -9329,7 +9463,7 @@
           <p:cNvPr id="14" name="">
             <a:extLst xmlns:a="http://schemas.openxmlformats.org/drawingml/2006/main">
               <a:ext uri="{FF2B5EF4-FFF2-40B4-BE49-F238E27FC236}">
-                <a16:creationId xmlns:a16="http://schemas.microsoft.com/office/drawing/2014/main" id="{DFD944F9-5799-442A-A2F4-989EF9613B08}"/>
+                <a16:creationId xmlns:a16="http://schemas.microsoft.com/office/drawing/2014/main" id="{5056F9F2-3739-4403-A584-23BE727B4C1C}"/>
               </a:ext>
             </a:extLst>
           </p:cNvPr>
@@ -9362,7 +9496,7 @@
           <p:cNvPr id="15" name="">
             <a:extLst xmlns:a="http://schemas.openxmlformats.org/drawingml/2006/main">
               <a:ext uri="{FF2B5EF4-FFF2-40B4-BE49-F238E27FC236}">
-                <a16:creationId xmlns:a16="http://schemas.microsoft.com/office/drawing/2014/main" id="{262E8992-A138-4356-9E09-12AFA2D6D443}"/>
+                <a16:creationId xmlns:a16="http://schemas.microsoft.com/office/drawing/2014/main" id="{F4B80CB1-E645-4339-A5FE-E0CFF28D0EF4}"/>
               </a:ext>
             </a:extLst>
           </p:cNvPr>
@@ -9412,7 +9546,7 @@
           <p:cNvPr id="16" name="">
             <a:extLst xmlns:a="http://schemas.openxmlformats.org/drawingml/2006/main">
               <a:ext uri="{FF2B5EF4-FFF2-40B4-BE49-F238E27FC236}">
-                <a16:creationId xmlns:a16="http://schemas.microsoft.com/office/drawing/2014/main" id="{8E2CDBFC-1D90-4D32-8680-A1736DA65126}"/>
+                <a16:creationId xmlns:a16="http://schemas.microsoft.com/office/drawing/2014/main" id="{B8CF097E-69F3-4F95-A58A-9E4DE16B1DB9}"/>
               </a:ext>
             </a:extLst>
           </p:cNvPr>
@@ -9445,7 +9579,7 @@
           <p:cNvPr id="17" name="">
             <a:extLst xmlns:a="http://schemas.openxmlformats.org/drawingml/2006/main">
               <a:ext uri="{FF2B5EF4-FFF2-40B4-BE49-F238E27FC236}">
-                <a16:creationId xmlns:a16="http://schemas.microsoft.com/office/drawing/2014/main" id="{1A18F889-C836-41D6-BA67-3F3E678C1DE3}"/>
+                <a16:creationId xmlns:a16="http://schemas.microsoft.com/office/drawing/2014/main" id="{C1C3A87E-181F-4500-BF2D-EB84A74969C0}"/>
               </a:ext>
             </a:extLst>
           </p:cNvPr>
@@ -9495,7 +9629,7 @@
           <p:cNvPr id="18" name="">
             <a:extLst xmlns:a="http://schemas.openxmlformats.org/drawingml/2006/main">
               <a:ext uri="{FF2B5EF4-FFF2-40B4-BE49-F238E27FC236}">
-                <a16:creationId xmlns:a16="http://schemas.microsoft.com/office/drawing/2014/main" id="{53623A85-7426-4E1E-B513-D160A560DD31}"/>
+                <a16:creationId xmlns:a16="http://schemas.microsoft.com/office/drawing/2014/main" id="{5D161ACF-542E-4621-9D40-54D38816F7D9}"/>
               </a:ext>
             </a:extLst>
           </p:cNvPr>
@@ -9528,7 +9662,7 @@
           <p:cNvPr id="19" name="">
             <a:extLst xmlns:a="http://schemas.openxmlformats.org/drawingml/2006/main">
               <a:ext uri="{FF2B5EF4-FFF2-40B4-BE49-F238E27FC236}">
-                <a16:creationId xmlns:a16="http://schemas.microsoft.com/office/drawing/2014/main" id="{AFF9D969-9A0F-48CB-A829-BF238D114AE2}"/>
+                <a16:creationId xmlns:a16="http://schemas.microsoft.com/office/drawing/2014/main" id="{20DA7B3C-EEDC-4D64-9178-53E9334E3BF9}"/>
               </a:ext>
             </a:extLst>
           </p:cNvPr>
@@ -9578,7 +9712,7 @@
           <p:cNvPr id="20" name="">
             <a:extLst xmlns:a="http://schemas.openxmlformats.org/drawingml/2006/main">
               <a:ext uri="{FF2B5EF4-FFF2-40B4-BE49-F238E27FC236}">
-                <a16:creationId xmlns:a16="http://schemas.microsoft.com/office/drawing/2014/main" id="{22C83342-04F3-4FFA-88C4-1B5374075763}"/>
+                <a16:creationId xmlns:a16="http://schemas.microsoft.com/office/drawing/2014/main" id="{D0E64C9C-9CAE-425C-A64A-EC04BC91965D}"/>
               </a:ext>
             </a:extLst>
           </p:cNvPr>
@@ -9611,7 +9745,7 @@
           <p:cNvPr id="21" name="">
             <a:extLst xmlns:a="http://schemas.openxmlformats.org/drawingml/2006/main">
               <a:ext uri="{FF2B5EF4-FFF2-40B4-BE49-F238E27FC236}">
-                <a16:creationId xmlns:a16="http://schemas.microsoft.com/office/drawing/2014/main" id="{FE85A83E-5A0B-4467-A260-18ADBB49648C}"/>
+                <a16:creationId xmlns:a16="http://schemas.microsoft.com/office/drawing/2014/main" id="{3DE91D2E-2EA3-42BA-981D-F0753762DADE}"/>
               </a:ext>
             </a:extLst>
           </p:cNvPr>
@@ -9661,7 +9795,7 @@
           <p:cNvPr id="22" name="">
             <a:extLst xmlns:a="http://schemas.openxmlformats.org/drawingml/2006/main">
               <a:ext uri="{FF2B5EF4-FFF2-40B4-BE49-F238E27FC236}">
-                <a16:creationId xmlns:a16="http://schemas.microsoft.com/office/drawing/2014/main" id="{D7F71575-A584-4296-BC3C-0F804624B710}"/>
+                <a16:creationId xmlns:a16="http://schemas.microsoft.com/office/drawing/2014/main" id="{15A82855-AFF2-48C8-8374-6DCFB8697A41}"/>
               </a:ext>
             </a:extLst>
           </p:cNvPr>
@@ -9694,7 +9828,7 @@
           <p:cNvPr id="23" name="">
             <a:extLst xmlns:a="http://schemas.openxmlformats.org/drawingml/2006/main">
               <a:ext uri="{FF2B5EF4-FFF2-40B4-BE49-F238E27FC236}">
-                <a16:creationId xmlns:a16="http://schemas.microsoft.com/office/drawing/2014/main" id="{58094F57-127E-4D89-831F-D8543352C339}"/>
+                <a16:creationId xmlns:a16="http://schemas.microsoft.com/office/drawing/2014/main" id="{C570096A-0187-4166-A307-CE3D52639B3A}"/>
               </a:ext>
             </a:extLst>
           </p:cNvPr>
@@ -9744,7 +9878,7 @@
           <p:cNvPr id="24" name="">
             <a:extLst xmlns:a="http://schemas.openxmlformats.org/drawingml/2006/main">
               <a:ext uri="{FF2B5EF4-FFF2-40B4-BE49-F238E27FC236}">
-                <a16:creationId xmlns:a16="http://schemas.microsoft.com/office/drawing/2014/main" id="{45A2A9B1-F388-499F-8CA3-1217FE75F0E8}"/>
+                <a16:creationId xmlns:a16="http://schemas.microsoft.com/office/drawing/2014/main" id="{135B2880-FD7E-422C-ADB0-E8094E5B9DE8}"/>
               </a:ext>
             </a:extLst>
           </p:cNvPr>
@@ -9777,7 +9911,7 @@
           <p:cNvPr id="25" name="">
             <a:extLst xmlns:a="http://schemas.openxmlformats.org/drawingml/2006/main">
               <a:ext uri="{FF2B5EF4-FFF2-40B4-BE49-F238E27FC236}">
-                <a16:creationId xmlns:a16="http://schemas.microsoft.com/office/drawing/2014/main" id="{3ABD1193-B71F-4EC4-B65F-9FF184BA2433}"/>
+                <a16:creationId xmlns:a16="http://schemas.microsoft.com/office/drawing/2014/main" id="{31DA6C7C-E37F-40B2-B855-A2926F7C8B1B}"/>
               </a:ext>
             </a:extLst>
           </p:cNvPr>
@@ -9827,7 +9961,7 @@
           <p:cNvPr id="26" name="">
             <a:extLst xmlns:a="http://schemas.openxmlformats.org/drawingml/2006/main">
               <a:ext uri="{FF2B5EF4-FFF2-40B4-BE49-F238E27FC236}">
-                <a16:creationId xmlns:a16="http://schemas.microsoft.com/office/drawing/2014/main" id="{3F0BC112-9B4F-40DD-9670-9EF1663A2407}"/>
+                <a16:creationId xmlns:a16="http://schemas.microsoft.com/office/drawing/2014/main" id="{9809CF56-B3D1-499C-801E-9FD5BC783CCD}"/>
               </a:ext>
             </a:extLst>
           </p:cNvPr>
@@ -9860,7 +9994,7 @@
           <p:cNvPr id="27" name="">
             <a:extLst xmlns:a="http://schemas.openxmlformats.org/drawingml/2006/main">
               <a:ext uri="{FF2B5EF4-FFF2-40B4-BE49-F238E27FC236}">
-                <a16:creationId xmlns:a16="http://schemas.microsoft.com/office/drawing/2014/main" id="{82776F0B-1315-4F6C-8E08-314C842061EB}"/>
+                <a16:creationId xmlns:a16="http://schemas.microsoft.com/office/drawing/2014/main" id="{B1232F03-34A9-4071-9906-8E6C2995C862}"/>
               </a:ext>
             </a:extLst>
           </p:cNvPr>
@@ -9910,7 +10044,7 @@
           <p:cNvPr id="28" name="">
             <a:extLst xmlns:a="http://schemas.openxmlformats.org/drawingml/2006/main">
               <a:ext uri="{FF2B5EF4-FFF2-40B4-BE49-F238E27FC236}">
-                <a16:creationId xmlns:a16="http://schemas.microsoft.com/office/drawing/2014/main" id="{98FE52DA-05D5-4885-9D62-A68A33A2D785}"/>
+                <a16:creationId xmlns:a16="http://schemas.microsoft.com/office/drawing/2014/main" id="{3FEF2F4F-84DD-4835-8687-E15064425250}"/>
               </a:ext>
             </a:extLst>
           </p:cNvPr>
@@ -9943,7 +10077,7 @@
           <p:cNvPr id="29" name="">
             <a:extLst xmlns:a="http://schemas.openxmlformats.org/drawingml/2006/main">
               <a:ext uri="{FF2B5EF4-FFF2-40B4-BE49-F238E27FC236}">
-                <a16:creationId xmlns:a16="http://schemas.microsoft.com/office/drawing/2014/main" id="{B7BF58C9-E1BF-46FC-8DAA-B32761B9D857}"/>
+                <a16:creationId xmlns:a16="http://schemas.microsoft.com/office/drawing/2014/main" id="{03AF39AB-C012-4B84-BCAE-2D4518976489}"/>
               </a:ext>
             </a:extLst>
           </p:cNvPr>
@@ -9993,7 +10127,7 @@
           <p:cNvPr id="30" name="">
             <a:extLst xmlns:a="http://schemas.openxmlformats.org/drawingml/2006/main">
               <a:ext uri="{FF2B5EF4-FFF2-40B4-BE49-F238E27FC236}">
-                <a16:creationId xmlns:a16="http://schemas.microsoft.com/office/drawing/2014/main" id="{EC1D0BC6-AF85-4313-A02C-B0EEF7A42269}"/>
+                <a16:creationId xmlns:a16="http://schemas.microsoft.com/office/drawing/2014/main" id="{F521989F-7571-4D98-B8FE-24E978914A31}"/>
               </a:ext>
             </a:extLst>
           </p:cNvPr>
@@ -10026,7 +10160,7 @@
           <p:cNvPr id="31" name="">
             <a:extLst xmlns:a="http://schemas.openxmlformats.org/drawingml/2006/main">
               <a:ext uri="{FF2B5EF4-FFF2-40B4-BE49-F238E27FC236}">
-                <a16:creationId xmlns:a16="http://schemas.microsoft.com/office/drawing/2014/main" id="{8A340C6F-50D8-4B6B-8559-24BD1B5368D3}"/>
+                <a16:creationId xmlns:a16="http://schemas.microsoft.com/office/drawing/2014/main" id="{8A563514-388F-4971-B903-FF6EAE75AD88}"/>
               </a:ext>
             </a:extLst>
           </p:cNvPr>
@@ -10076,7 +10210,7 @@
           <p:cNvPr id="32" name="">
             <a:extLst xmlns:a="http://schemas.openxmlformats.org/drawingml/2006/main">
               <a:ext uri="{FF2B5EF4-FFF2-40B4-BE49-F238E27FC236}">
-                <a16:creationId xmlns:a16="http://schemas.microsoft.com/office/drawing/2014/main" id="{95C1B867-6AC9-421C-8FDF-895D1B208EA9}"/>
+                <a16:creationId xmlns:a16="http://schemas.microsoft.com/office/drawing/2014/main" id="{593B8068-B0C6-44FF-AB82-89EEFA457C88}"/>
               </a:ext>
             </a:extLst>
           </p:cNvPr>
@@ -10109,7 +10243,7 @@
           <p:cNvPr id="33" name="">
             <a:extLst xmlns:a="http://schemas.openxmlformats.org/drawingml/2006/main">
               <a:ext uri="{FF2B5EF4-FFF2-40B4-BE49-F238E27FC236}">
-                <a16:creationId xmlns:a16="http://schemas.microsoft.com/office/drawing/2014/main" id="{21E026CB-312C-40B6-9B33-0F18F46D61E4}"/>
+                <a16:creationId xmlns:a16="http://schemas.microsoft.com/office/drawing/2014/main" id="{8FF22189-0ED8-49EA-8E60-DD48A3B34B83}"/>
               </a:ext>
             </a:extLst>
           </p:cNvPr>
@@ -10159,7 +10293,7 @@
           <p:cNvPr id="34" name="">
             <a:extLst xmlns:a="http://schemas.openxmlformats.org/drawingml/2006/main">
               <a:ext uri="{FF2B5EF4-FFF2-40B4-BE49-F238E27FC236}">
-                <a16:creationId xmlns:a16="http://schemas.microsoft.com/office/drawing/2014/main" id="{57393017-AA61-4E48-BDBA-E5E97CBB3D6E}"/>
+                <a16:creationId xmlns:a16="http://schemas.microsoft.com/office/drawing/2014/main" id="{8D154EF0-4856-4B1C-8BC3-4D98BB365F51}"/>
               </a:ext>
             </a:extLst>
           </p:cNvPr>
@@ -10192,7 +10326,7 @@
           <p:cNvPr id="35" name="">
             <a:extLst xmlns:a="http://schemas.openxmlformats.org/drawingml/2006/main">
               <a:ext uri="{FF2B5EF4-FFF2-40B4-BE49-F238E27FC236}">
-                <a16:creationId xmlns:a16="http://schemas.microsoft.com/office/drawing/2014/main" id="{E5204BD0-6172-4B09-AF2F-D0077D6C23BD}"/>
+                <a16:creationId xmlns:a16="http://schemas.microsoft.com/office/drawing/2014/main" id="{2CB60B5E-E377-4DA3-8814-BC64A3EE910A}"/>
               </a:ext>
             </a:extLst>
           </p:cNvPr>
@@ -10242,7 +10376,7 @@
           <p:cNvPr id="36" name="">
             <a:extLst xmlns:a="http://schemas.openxmlformats.org/drawingml/2006/main">
               <a:ext uri="{FF2B5EF4-FFF2-40B4-BE49-F238E27FC236}">
-                <a16:creationId xmlns:a16="http://schemas.microsoft.com/office/drawing/2014/main" id="{F65CE0BE-FD7C-471D-B521-C035657A8C79}"/>
+                <a16:creationId xmlns:a16="http://schemas.microsoft.com/office/drawing/2014/main" id="{6E8D1A6D-D33F-4571-87F0-92456432C2FA}"/>
               </a:ext>
             </a:extLst>
           </p:cNvPr>
@@ -10275,7 +10409,7 @@
           <p:cNvPr id="37" name="">
             <a:extLst xmlns:a="http://schemas.openxmlformats.org/drawingml/2006/main">
               <a:ext uri="{FF2B5EF4-FFF2-40B4-BE49-F238E27FC236}">
-                <a16:creationId xmlns:a16="http://schemas.microsoft.com/office/drawing/2014/main" id="{8F6A6C18-DBD4-4A52-9543-20DF5FC5B0C4}"/>
+                <a16:creationId xmlns:a16="http://schemas.microsoft.com/office/drawing/2014/main" id="{4390FEAE-80D1-46CF-AE52-B09C32E1DB30}"/>
               </a:ext>
             </a:extLst>
           </p:cNvPr>
@@ -10325,7 +10459,7 @@
           <p:cNvPr id="38" name="">
             <a:extLst xmlns:a="http://schemas.openxmlformats.org/drawingml/2006/main">
               <a:ext uri="{FF2B5EF4-FFF2-40B4-BE49-F238E27FC236}">
-                <a16:creationId xmlns:a16="http://schemas.microsoft.com/office/drawing/2014/main" id="{046A94DE-B2E4-4153-88FB-909E6B33874F}"/>
+                <a16:creationId xmlns:a16="http://schemas.microsoft.com/office/drawing/2014/main" id="{43C4A9BC-6A57-4C73-8AC2-A9DE08D07366}"/>
               </a:ext>
             </a:extLst>
           </p:cNvPr>
@@ -10358,7 +10492,7 @@
           <p:cNvPr id="39" name="">
             <a:extLst xmlns:a="http://schemas.openxmlformats.org/drawingml/2006/main">
               <a:ext uri="{FF2B5EF4-FFF2-40B4-BE49-F238E27FC236}">
-                <a16:creationId xmlns:a16="http://schemas.microsoft.com/office/drawing/2014/main" id="{6E9EB8AA-B741-493C-B2A6-5B4AB84633BA}"/>
+                <a16:creationId xmlns:a16="http://schemas.microsoft.com/office/drawing/2014/main" id="{225C7C34-DE16-4E44-98CF-8BBDEFF33401}"/>
               </a:ext>
             </a:extLst>
           </p:cNvPr>
@@ -10408,7 +10542,7 @@
           <p:cNvPr id="40" name="">
             <a:extLst xmlns:a="http://schemas.openxmlformats.org/drawingml/2006/main">
               <a:ext uri="{FF2B5EF4-FFF2-40B4-BE49-F238E27FC236}">
-                <a16:creationId xmlns:a16="http://schemas.microsoft.com/office/drawing/2014/main" id="{9F5FCC58-E1A1-4C05-8469-2A79E104530A}"/>
+                <a16:creationId xmlns:a16="http://schemas.microsoft.com/office/drawing/2014/main" id="{64F49D8E-7D67-4268-8058-2259CFF270CB}"/>
               </a:ext>
             </a:extLst>
           </p:cNvPr>
@@ -10441,7 +10575,7 @@
           <p:cNvPr id="41" name="">
             <a:extLst xmlns:a="http://schemas.openxmlformats.org/drawingml/2006/main">
               <a:ext uri="{FF2B5EF4-FFF2-40B4-BE49-F238E27FC236}">
-                <a16:creationId xmlns:a16="http://schemas.microsoft.com/office/drawing/2014/main" id="{C42FDE7C-C78B-407F-B81F-68678C97CA11}"/>
+                <a16:creationId xmlns:a16="http://schemas.microsoft.com/office/drawing/2014/main" id="{35EFD354-CBB1-4470-91DB-FB58E46FBA76}"/>
               </a:ext>
             </a:extLst>
           </p:cNvPr>
@@ -10491,7 +10625,7 @@
           <p:cNvPr id="42" name="">
             <a:extLst xmlns:a="http://schemas.openxmlformats.org/drawingml/2006/main">
               <a:ext uri="{FF2B5EF4-FFF2-40B4-BE49-F238E27FC236}">
-                <a16:creationId xmlns:a16="http://schemas.microsoft.com/office/drawing/2014/main" id="{2FB03A9D-07C5-4C7B-AE88-920810BCF468}"/>
+                <a16:creationId xmlns:a16="http://schemas.microsoft.com/office/drawing/2014/main" id="{E87227BA-D8B7-435B-83AB-E427370D4192}"/>
               </a:ext>
             </a:extLst>
           </p:cNvPr>
@@ -10524,7 +10658,7 @@
           <p:cNvPr id="43" name="">
             <a:extLst xmlns:a="http://schemas.openxmlformats.org/drawingml/2006/main">
               <a:ext uri="{FF2B5EF4-FFF2-40B4-BE49-F238E27FC236}">
-                <a16:creationId xmlns:a16="http://schemas.microsoft.com/office/drawing/2014/main" id="{B60398B5-4963-47D0-B7FC-F41A70B2D8C6}"/>
+                <a16:creationId xmlns:a16="http://schemas.microsoft.com/office/drawing/2014/main" id="{A930FEF3-FC30-4247-9E40-7142ED379FCD}"/>
               </a:ext>
             </a:extLst>
           </p:cNvPr>
@@ -10574,7 +10708,7 @@
           <p:cNvPr id="44" name="">
             <a:extLst xmlns:a="http://schemas.openxmlformats.org/drawingml/2006/main">
               <a:ext uri="{FF2B5EF4-FFF2-40B4-BE49-F238E27FC236}">
-                <a16:creationId xmlns:a16="http://schemas.microsoft.com/office/drawing/2014/main" id="{0B974C63-D12A-4D55-8CB5-84A97C2F1187}"/>
+                <a16:creationId xmlns:a16="http://schemas.microsoft.com/office/drawing/2014/main" id="{57C41BD2-27FB-4A3B-AB94-9F053631024F}"/>
               </a:ext>
             </a:extLst>
           </p:cNvPr>
@@ -10607,7 +10741,7 @@
           <p:cNvPr id="45" name="">
             <a:extLst xmlns:a="http://schemas.openxmlformats.org/drawingml/2006/main">
               <a:ext uri="{FF2B5EF4-FFF2-40B4-BE49-F238E27FC236}">
-                <a16:creationId xmlns:a16="http://schemas.microsoft.com/office/drawing/2014/main" id="{473CC6A9-3A8B-4480-BDA3-816A65F3544B}"/>
+                <a16:creationId xmlns:a16="http://schemas.microsoft.com/office/drawing/2014/main" id="{1CB0CD2E-D0E7-41D6-9B08-62D4F5C1F2C4}"/>
               </a:ext>
             </a:extLst>
           </p:cNvPr>
@@ -10657,7 +10791,7 @@
           <p:cNvPr id="46" name="">
             <a:extLst xmlns:a="http://schemas.openxmlformats.org/drawingml/2006/main">
               <a:ext uri="{FF2B5EF4-FFF2-40B4-BE49-F238E27FC236}">
-                <a16:creationId xmlns:a16="http://schemas.microsoft.com/office/drawing/2014/main" id="{EF2DE8AE-E232-4C85-A769-5E2998480990}"/>
+                <a16:creationId xmlns:a16="http://schemas.microsoft.com/office/drawing/2014/main" id="{15FCF375-416F-4244-A451-522232EA1763}"/>
               </a:ext>
             </a:extLst>
           </p:cNvPr>
@@ -10690,7 +10824,7 @@
           <p:cNvPr id="47" name="">
             <a:extLst xmlns:a="http://schemas.openxmlformats.org/drawingml/2006/main">
               <a:ext uri="{FF2B5EF4-FFF2-40B4-BE49-F238E27FC236}">
-                <a16:creationId xmlns:a16="http://schemas.microsoft.com/office/drawing/2014/main" id="{AAD2034A-E496-4194-BF21-C7101190B9D4}"/>
+                <a16:creationId xmlns:a16="http://schemas.microsoft.com/office/drawing/2014/main" id="{47BBAE20-6557-494D-9872-10C4BD47FB52}"/>
               </a:ext>
             </a:extLst>
           </p:cNvPr>
@@ -10740,7 +10874,7 @@
           <p:cNvPr id="48" name="">
             <a:extLst xmlns:a="http://schemas.openxmlformats.org/drawingml/2006/main">
               <a:ext uri="{FF2B5EF4-FFF2-40B4-BE49-F238E27FC236}">
-                <a16:creationId xmlns:a16="http://schemas.microsoft.com/office/drawing/2014/main" id="{30843DD9-D740-4C17-A0F0-B1B796F81740}"/>
+                <a16:creationId xmlns:a16="http://schemas.microsoft.com/office/drawing/2014/main" id="{E6437DCB-F92F-4382-B5BF-E4F622F5596B}"/>
               </a:ext>
             </a:extLst>
           </p:cNvPr>
@@ -10773,7 +10907,7 @@
           <p:cNvPr id="49" name="">
             <a:extLst xmlns:a="http://schemas.openxmlformats.org/drawingml/2006/main">
               <a:ext uri="{FF2B5EF4-FFF2-40B4-BE49-F238E27FC236}">
-                <a16:creationId xmlns:a16="http://schemas.microsoft.com/office/drawing/2014/main" id="{E8BA69BA-5937-410E-A0A3-5E79C73590DC}"/>
+                <a16:creationId xmlns:a16="http://schemas.microsoft.com/office/drawing/2014/main" id="{A308B2AF-3AE9-4829-A6A0-25AB1F07C3D1}"/>
               </a:ext>
             </a:extLst>
           </p:cNvPr>
@@ -10823,7 +10957,7 @@
           <p:cNvPr id="50" name="">
             <a:extLst xmlns:a="http://schemas.openxmlformats.org/drawingml/2006/main">
               <a:ext uri="{FF2B5EF4-FFF2-40B4-BE49-F238E27FC236}">
-                <a16:creationId xmlns:a16="http://schemas.microsoft.com/office/drawing/2014/main" id="{FC4ABDFC-6E63-493E-8EF7-48FAF05A11A1}"/>
+                <a16:creationId xmlns:a16="http://schemas.microsoft.com/office/drawing/2014/main" id="{86B0ECFB-336E-4145-9681-810766A4624B}"/>
               </a:ext>
             </a:extLst>
           </p:cNvPr>
@@ -10856,7 +10990,7 @@
           <p:cNvPr id="51" name="">
             <a:extLst xmlns:a="http://schemas.openxmlformats.org/drawingml/2006/main">
               <a:ext uri="{FF2B5EF4-FFF2-40B4-BE49-F238E27FC236}">
-                <a16:creationId xmlns:a16="http://schemas.microsoft.com/office/drawing/2014/main" id="{C514B5AB-16D6-4D0C-B993-7779377F2951}"/>
+                <a16:creationId xmlns:a16="http://schemas.microsoft.com/office/drawing/2014/main" id="{D7A72468-4502-4A72-BCFE-16722A61CB51}"/>
               </a:ext>
             </a:extLst>
           </p:cNvPr>
@@ -10906,7 +11040,7 @@
           <p:cNvPr id="52" name="">
             <a:extLst xmlns:a="http://schemas.openxmlformats.org/drawingml/2006/main">
               <a:ext uri="{FF2B5EF4-FFF2-40B4-BE49-F238E27FC236}">
-                <a16:creationId xmlns:a16="http://schemas.microsoft.com/office/drawing/2014/main" id="{106E0D97-A069-4F4F-B7C5-5F07990A2B51}"/>
+                <a16:creationId xmlns:a16="http://schemas.microsoft.com/office/drawing/2014/main" id="{EA61A83A-4944-4BF6-95FF-5077F5B3934C}"/>
               </a:ext>
             </a:extLst>
           </p:cNvPr>
@@ -10939,7 +11073,7 @@
           <p:cNvPr id="53" name="">
             <a:extLst xmlns:a="http://schemas.openxmlformats.org/drawingml/2006/main">
               <a:ext uri="{FF2B5EF4-FFF2-40B4-BE49-F238E27FC236}">
-                <a16:creationId xmlns:a16="http://schemas.microsoft.com/office/drawing/2014/main" id="{D6A3B81B-29B4-4728-A42A-299642DD7207}"/>
+                <a16:creationId xmlns:a16="http://schemas.microsoft.com/office/drawing/2014/main" id="{28CFEA22-156A-4462-84F8-07CBE2D43CEE}"/>
               </a:ext>
             </a:extLst>
           </p:cNvPr>
@@ -10989,7 +11123,7 @@
           <p:cNvPr id="54" name="">
             <a:extLst xmlns:a="http://schemas.openxmlformats.org/drawingml/2006/main">
               <a:ext uri="{FF2B5EF4-FFF2-40B4-BE49-F238E27FC236}">
-                <a16:creationId xmlns:a16="http://schemas.microsoft.com/office/drawing/2014/main" id="{E38176FA-2533-4E93-8921-5F0794ED229D}"/>
+                <a16:creationId xmlns:a16="http://schemas.microsoft.com/office/drawing/2014/main" id="{350B6B68-5644-4BFE-839E-9C681AE15B48}"/>
               </a:ext>
             </a:extLst>
           </p:cNvPr>
@@ -11022,7 +11156,7 @@
           <p:cNvPr id="55" name="">
             <a:extLst xmlns:a="http://schemas.openxmlformats.org/drawingml/2006/main">
               <a:ext uri="{FF2B5EF4-FFF2-40B4-BE49-F238E27FC236}">
-                <a16:creationId xmlns:a16="http://schemas.microsoft.com/office/drawing/2014/main" id="{00B5D150-E55E-4D23-92C8-C6419AFDED80}"/>
+                <a16:creationId xmlns:a16="http://schemas.microsoft.com/office/drawing/2014/main" id="{B17AF531-EE42-4746-93C0-4E2F5FD3E91F}"/>
               </a:ext>
             </a:extLst>
           </p:cNvPr>
@@ -11072,7 +11206,7 @@
           <p:cNvPr id="56" name="">
             <a:extLst xmlns:a="http://schemas.openxmlformats.org/drawingml/2006/main">
               <a:ext uri="{FF2B5EF4-FFF2-40B4-BE49-F238E27FC236}">
-                <a16:creationId xmlns:a16="http://schemas.microsoft.com/office/drawing/2014/main" id="{62CE3AFC-E21C-48AB-B5FA-7922CD215667}"/>
+                <a16:creationId xmlns:a16="http://schemas.microsoft.com/office/drawing/2014/main" id="{2441955B-F18F-401D-BF98-33349B6A2080}"/>
               </a:ext>
             </a:extLst>
           </p:cNvPr>
@@ -11105,7 +11239,7 @@
           <p:cNvPr id="57" name="">
             <a:extLst xmlns:a="http://schemas.openxmlformats.org/drawingml/2006/main">
               <a:ext uri="{FF2B5EF4-FFF2-40B4-BE49-F238E27FC236}">
-                <a16:creationId xmlns:a16="http://schemas.microsoft.com/office/drawing/2014/main" id="{E19825C2-8B47-4CB1-8874-2CBF16881E70}"/>
+                <a16:creationId xmlns:a16="http://schemas.microsoft.com/office/drawing/2014/main" id="{094CE6EB-86B1-4BFC-AE9E-5F29A1DF4222}"/>
               </a:ext>
             </a:extLst>
           </p:cNvPr>
@@ -11155,7 +11289,7 @@
           <p:cNvPr id="58" name="">
             <a:extLst xmlns:a="http://schemas.openxmlformats.org/drawingml/2006/main">
               <a:ext uri="{FF2B5EF4-FFF2-40B4-BE49-F238E27FC236}">
-                <a16:creationId xmlns:a16="http://schemas.microsoft.com/office/drawing/2014/main" id="{630135E1-DAF9-4E28-96E9-182782021EB8}"/>
+                <a16:creationId xmlns:a16="http://schemas.microsoft.com/office/drawing/2014/main" id="{0DFC46A1-14B4-42A0-9811-7568ECDE8024}"/>
               </a:ext>
             </a:extLst>
           </p:cNvPr>
@@ -11188,7 +11322,7 @@
           <p:cNvPr id="59" name="">
             <a:extLst xmlns:a="http://schemas.openxmlformats.org/drawingml/2006/main">
               <a:ext uri="{FF2B5EF4-FFF2-40B4-BE49-F238E27FC236}">
-                <a16:creationId xmlns:a16="http://schemas.microsoft.com/office/drawing/2014/main" id="{6D360FF4-248C-40C7-992C-D314766AD9C5}"/>
+                <a16:creationId xmlns:a16="http://schemas.microsoft.com/office/drawing/2014/main" id="{8C0F04A8-A620-435B-95DD-588C7A06C859}"/>
               </a:ext>
             </a:extLst>
           </p:cNvPr>
@@ -11238,7 +11372,7 @@
           <p:cNvPr id="60" name="">
             <a:extLst xmlns:a="http://schemas.openxmlformats.org/drawingml/2006/main">
               <a:ext uri="{FF2B5EF4-FFF2-40B4-BE49-F238E27FC236}">
-                <a16:creationId xmlns:a16="http://schemas.microsoft.com/office/drawing/2014/main" id="{CD4FC99C-1453-4A33-9A08-C3BCCDE3DA0B}"/>
+                <a16:creationId xmlns:a16="http://schemas.microsoft.com/office/drawing/2014/main" id="{0F4C344E-6E3B-481A-B1CB-70F1F8A96696}"/>
               </a:ext>
             </a:extLst>
           </p:cNvPr>
@@ -11271,7 +11405,7 @@
           <p:cNvPr id="61" name="">
             <a:extLst xmlns:a="http://schemas.openxmlformats.org/drawingml/2006/main">
               <a:ext uri="{FF2B5EF4-FFF2-40B4-BE49-F238E27FC236}">
-                <a16:creationId xmlns:a16="http://schemas.microsoft.com/office/drawing/2014/main" id="{16C56B7E-3904-4DBA-BCFF-DD87D85D8099}"/>
+                <a16:creationId xmlns:a16="http://schemas.microsoft.com/office/drawing/2014/main" id="{7C3F0CDA-DD19-4E6E-B455-53E421FA63D1}"/>
               </a:ext>
             </a:extLst>
           </p:cNvPr>
@@ -11321,7 +11455,7 @@
           <p:cNvPr id="62" name="">
             <a:extLst xmlns:a="http://schemas.openxmlformats.org/drawingml/2006/main">
               <a:ext uri="{FF2B5EF4-FFF2-40B4-BE49-F238E27FC236}">
-                <a16:creationId xmlns:a16="http://schemas.microsoft.com/office/drawing/2014/main" id="{A8D0CD3F-EE96-4A55-85BF-EE29A13AE151}"/>
+                <a16:creationId xmlns:a16="http://schemas.microsoft.com/office/drawing/2014/main" id="{7539EDC2-9252-4437-879A-BD498E08F764}"/>
               </a:ext>
             </a:extLst>
           </p:cNvPr>
@@ -11354,7 +11488,7 @@
           <p:cNvPr id="63" name="">
             <a:extLst xmlns:a="http://schemas.openxmlformats.org/drawingml/2006/main">
               <a:ext uri="{FF2B5EF4-FFF2-40B4-BE49-F238E27FC236}">
-                <a16:creationId xmlns:a16="http://schemas.microsoft.com/office/drawing/2014/main" id="{8AEC4AE5-CA98-4F6C-A749-BDD24B262F12}"/>
+                <a16:creationId xmlns:a16="http://schemas.microsoft.com/office/drawing/2014/main" id="{4A080DA3-6998-4312-A03A-BACCCC4A8C0F}"/>
               </a:ext>
             </a:extLst>
           </p:cNvPr>
@@ -11404,7 +11538,7 @@
           <p:cNvPr id="64" name="">
             <a:extLst xmlns:a="http://schemas.openxmlformats.org/drawingml/2006/main">
               <a:ext uri="{FF2B5EF4-FFF2-40B4-BE49-F238E27FC236}">
-                <a16:creationId xmlns:a16="http://schemas.microsoft.com/office/drawing/2014/main" id="{D8272D09-9E98-472E-86A9-D5A2AB14BAEA}"/>
+                <a16:creationId xmlns:a16="http://schemas.microsoft.com/office/drawing/2014/main" id="{3E889981-F210-4B6E-BB39-2409AA22D02E}"/>
               </a:ext>
             </a:extLst>
           </p:cNvPr>
@@ -11437,7 +11571,7 @@
           <p:cNvPr id="65" name="">
             <a:extLst xmlns:a="http://schemas.openxmlformats.org/drawingml/2006/main">
               <a:ext uri="{FF2B5EF4-FFF2-40B4-BE49-F238E27FC236}">
-                <a16:creationId xmlns:a16="http://schemas.microsoft.com/office/drawing/2014/main" id="{B9655FF5-4CE2-4B0B-A47F-E4CF015F6EC2}"/>
+                <a16:creationId xmlns:a16="http://schemas.microsoft.com/office/drawing/2014/main" id="{EC2648EF-AF0A-4DAE-8212-4BD9F4255480}"/>
               </a:ext>
             </a:extLst>
           </p:cNvPr>
@@ -11487,7 +11621,7 @@
           <p:cNvPr id="66" name="">
             <a:extLst xmlns:a="http://schemas.openxmlformats.org/drawingml/2006/main">
               <a:ext uri="{FF2B5EF4-FFF2-40B4-BE49-F238E27FC236}">
-                <a16:creationId xmlns:a16="http://schemas.microsoft.com/office/drawing/2014/main" id="{F297FCCC-E192-4FCD-9047-AC3B2A4D9FCD}"/>
+                <a16:creationId xmlns:a16="http://schemas.microsoft.com/office/drawing/2014/main" id="{6E12A08D-892A-4384-870E-A46D357B0AC4}"/>
               </a:ext>
             </a:extLst>
           </p:cNvPr>
@@ -11520,7 +11654,7 @@
           <p:cNvPr id="67" name="">
             <a:extLst xmlns:a="http://schemas.openxmlformats.org/drawingml/2006/main">
               <a:ext uri="{FF2B5EF4-FFF2-40B4-BE49-F238E27FC236}">
-                <a16:creationId xmlns:a16="http://schemas.microsoft.com/office/drawing/2014/main" id="{587C8CF5-6D38-45D1-99F4-04530BF5BE6F}"/>
+                <a16:creationId xmlns:a16="http://schemas.microsoft.com/office/drawing/2014/main" id="{ABF98CF0-5368-4E2C-93A3-B7096C623A8F}"/>
               </a:ext>
             </a:extLst>
           </p:cNvPr>
@@ -11570,7 +11704,7 @@
           <p:cNvPr id="68" name="">
             <a:extLst xmlns:a="http://schemas.openxmlformats.org/drawingml/2006/main">
               <a:ext uri="{FF2B5EF4-FFF2-40B4-BE49-F238E27FC236}">
-                <a16:creationId xmlns:a16="http://schemas.microsoft.com/office/drawing/2014/main" id="{E1DC3243-FFF6-4966-AE84-848FEDDB72A0}"/>
+                <a16:creationId xmlns:a16="http://schemas.microsoft.com/office/drawing/2014/main" id="{4F41CD3B-ADAD-4690-881D-531B122539A3}"/>
               </a:ext>
             </a:extLst>
           </p:cNvPr>
@@ -11603,7 +11737,7 @@
           <p:cNvPr id="69" name="">
             <a:extLst xmlns:a="http://schemas.openxmlformats.org/drawingml/2006/main">
               <a:ext uri="{FF2B5EF4-FFF2-40B4-BE49-F238E27FC236}">
-                <a16:creationId xmlns:a16="http://schemas.microsoft.com/office/drawing/2014/main" id="{457D9E9F-B6B7-4AE5-9B7E-5B1A39429A35}"/>
+                <a16:creationId xmlns:a16="http://schemas.microsoft.com/office/drawing/2014/main" id="{9D4C0E0D-9EA5-48E9-AABB-87951F14513A}"/>
               </a:ext>
             </a:extLst>
           </p:cNvPr>
@@ -11653,7 +11787,7 @@
           <p:cNvPr id="70" name="">
             <a:extLst xmlns:a="http://schemas.openxmlformats.org/drawingml/2006/main">
               <a:ext uri="{FF2B5EF4-FFF2-40B4-BE49-F238E27FC236}">
-                <a16:creationId xmlns:a16="http://schemas.microsoft.com/office/drawing/2014/main" id="{5539FCF2-8005-41E6-BF21-BFB4766C9FF2}"/>
+                <a16:creationId xmlns:a16="http://schemas.microsoft.com/office/drawing/2014/main" id="{92C6CDDB-BED0-49C0-B728-2A48F3C4DBBC}"/>
               </a:ext>
             </a:extLst>
           </p:cNvPr>
@@ -11686,7 +11820,7 @@
           <p:cNvPr id="71" name="">
             <a:extLst xmlns:a="http://schemas.openxmlformats.org/drawingml/2006/main">
               <a:ext uri="{FF2B5EF4-FFF2-40B4-BE49-F238E27FC236}">
-                <a16:creationId xmlns:a16="http://schemas.microsoft.com/office/drawing/2014/main" id="{6278E7AE-F323-4F1F-8F30-7696A197E4A6}"/>
+                <a16:creationId xmlns:a16="http://schemas.microsoft.com/office/drawing/2014/main" id="{6EFEFC24-A21C-4613-9405-1F7694BB1EA4}"/>
               </a:ext>
             </a:extLst>
           </p:cNvPr>
@@ -11736,7 +11870,7 @@
           <p:cNvPr id="72" name="">
             <a:extLst xmlns:a="http://schemas.openxmlformats.org/drawingml/2006/main">
               <a:ext uri="{FF2B5EF4-FFF2-40B4-BE49-F238E27FC236}">
-                <a16:creationId xmlns:a16="http://schemas.microsoft.com/office/drawing/2014/main" id="{28822748-1C65-4A21-B7A1-C7285390A08D}"/>
+                <a16:creationId xmlns:a16="http://schemas.microsoft.com/office/drawing/2014/main" id="{D00CC793-B61F-49B9-A03E-E6DF314E8A2E}"/>
               </a:ext>
             </a:extLst>
           </p:cNvPr>
@@ -11769,7 +11903,7 @@
           <p:cNvPr id="73" name="">
             <a:extLst xmlns:a="http://schemas.openxmlformats.org/drawingml/2006/main">
               <a:ext uri="{FF2B5EF4-FFF2-40B4-BE49-F238E27FC236}">
-                <a16:creationId xmlns:a16="http://schemas.microsoft.com/office/drawing/2014/main" id="{D4F50586-20BF-4513-ADB9-E23230E78C6A}"/>
+                <a16:creationId xmlns:a16="http://schemas.microsoft.com/office/drawing/2014/main" id="{DB6D4968-6134-4E2E-BB94-D77D14FFEC58}"/>
               </a:ext>
             </a:extLst>
           </p:cNvPr>
@@ -11819,7 +11953,7 @@
           <p:cNvPr id="74" name="">
             <a:extLst xmlns:a="http://schemas.openxmlformats.org/drawingml/2006/main">
               <a:ext uri="{FF2B5EF4-FFF2-40B4-BE49-F238E27FC236}">
-                <a16:creationId xmlns:a16="http://schemas.microsoft.com/office/drawing/2014/main" id="{BB3C8B4F-01CD-4A87-A309-03CD9F7AAA52}"/>
+                <a16:creationId xmlns:a16="http://schemas.microsoft.com/office/drawing/2014/main" id="{4AE6DF91-9D54-41FF-BDC8-235237DEF38B}"/>
               </a:ext>
             </a:extLst>
           </p:cNvPr>
@@ -11869,7 +12003,7 @@
           <p:cNvPr id="75" name="">
             <a:extLst xmlns:a="http://schemas.openxmlformats.org/drawingml/2006/main">
               <a:ext uri="{FF2B5EF4-FFF2-40B4-BE49-F238E27FC236}">
-                <a16:creationId xmlns:a16="http://schemas.microsoft.com/office/drawing/2014/main" id="{D3ACE3C3-9D17-4233-A1ED-5AF31954541B}"/>
+                <a16:creationId xmlns:a16="http://schemas.microsoft.com/office/drawing/2014/main" id="{D8CB16A1-4493-4F0B-A0DA-2D120223C20E}"/>
               </a:ext>
             </a:extLst>
           </p:cNvPr>
@@ -11917,7 +12051,7 @@
     </p:spTree>
     <p:extLst>
       <p:ext uri="{BB962C8B-B14F-4D97-AF65-F5344CB8AC3E}">
-        <p14:creationId xmlns:p14="http://schemas.microsoft.com/office/powerpoint/2010/main" val="104660955"/>
+        <p14:creationId xmlns:p14="http://schemas.microsoft.com/office/powerpoint/2010/main" val="1351969217"/>
       </p:ext>
     </p:extLst>
   </p:cSld>
@@ -11948,7 +12082,7 @@
           <p:cNvPr id="1" name="">
             <a:extLst xmlns:a="http://schemas.openxmlformats.org/drawingml/2006/main">
               <a:ext uri="{FF2B5EF4-FFF2-40B4-BE49-F238E27FC236}">
-                <a16:creationId xmlns:a16="http://schemas.microsoft.com/office/drawing/2014/main" id="{B33F7137-2BC7-48D5-8B5C-3AB81FDBC4DB}"/>
+                <a16:creationId xmlns:a16="http://schemas.microsoft.com/office/drawing/2014/main" id="{53EAA7CC-8CA0-469A-97F3-E45880AA9858}"/>
               </a:ext>
             </a:extLst>
           </p:cNvPr>
@@ -11998,7 +12132,7 @@
           <p:cNvPr id="2" name="">
             <a:extLst xmlns:a="http://schemas.openxmlformats.org/drawingml/2006/main">
               <a:ext uri="{FF2B5EF4-FFF2-40B4-BE49-F238E27FC236}">
-                <a16:creationId xmlns:a16="http://schemas.microsoft.com/office/drawing/2014/main" id="{D66E7909-ED18-456E-B89C-60F0E7F1EE34}"/>
+                <a16:creationId xmlns:a16="http://schemas.microsoft.com/office/drawing/2014/main" id="{482783CB-50AD-4643-96CA-1835F62EBF22}"/>
               </a:ext>
             </a:extLst>
           </p:cNvPr>
@@ -12048,7 +12182,7 @@
           <p:cNvPr id="3" name="">
             <a:extLst xmlns:a="http://schemas.openxmlformats.org/drawingml/2006/main">
               <a:ext uri="{FF2B5EF4-FFF2-40B4-BE49-F238E27FC236}">
-                <a16:creationId xmlns:a16="http://schemas.microsoft.com/office/drawing/2014/main" id="{BD4A86E7-5997-449F-9828-1314BBDE61C1}"/>
+                <a16:creationId xmlns:a16="http://schemas.microsoft.com/office/drawing/2014/main" id="{726A4ACA-A420-429B-8D56-8D4BA19E2695}"/>
               </a:ext>
             </a:extLst>
           </p:cNvPr>
@@ -12085,7 +12219,7 @@
           <p:nvPr/>
         </p:nvPicPr>
         <p:blipFill>
-          <a:blip xmlns:r="http://schemas.openxmlformats.org/officeDocument/2006/relationships" xmlns:a="http://schemas.openxmlformats.org/drawingml/2006/main" r:embed="R0c1bec96a69743c6"/>
+          <a:blip xmlns:r="http://schemas.openxmlformats.org/officeDocument/2006/relationships" xmlns:a="http://schemas.openxmlformats.org/drawingml/2006/main" r:embed="R883efb8db4284a99"/>
           <a:stretch xmlns:a="http://schemas.openxmlformats.org/drawingml/2006/main"/>
         </p:blipFill>
         <p:spPr>
@@ -12103,7 +12237,7 @@
           <p:cNvPr id="5" name="">
             <a:extLst xmlns:a="http://schemas.openxmlformats.org/drawingml/2006/main">
               <a:ext uri="{FF2B5EF4-FFF2-40B4-BE49-F238E27FC236}">
-                <a16:creationId xmlns:a16="http://schemas.microsoft.com/office/drawing/2014/main" id="{D575E13C-97C8-4F82-8E91-BA643A026DA7}"/>
+                <a16:creationId xmlns:a16="http://schemas.microsoft.com/office/drawing/2014/main" id="{C239D94D-1A8F-440E-B895-3F3BE3D0397E}"/>
               </a:ext>
             </a:extLst>
           </p:cNvPr>
@@ -12136,7 +12270,7 @@
           <p:cNvPr id="6" name="">
             <a:extLst xmlns:a="http://schemas.openxmlformats.org/drawingml/2006/main">
               <a:ext uri="{FF2B5EF4-FFF2-40B4-BE49-F238E27FC236}">
-                <a16:creationId xmlns:a16="http://schemas.microsoft.com/office/drawing/2014/main" id="{1FA85324-F310-4463-B659-4D69BD7A4850}"/>
+                <a16:creationId xmlns:a16="http://schemas.microsoft.com/office/drawing/2014/main" id="{0D281234-A165-446B-80B2-67F635A88B06}"/>
               </a:ext>
             </a:extLst>
           </p:cNvPr>
@@ -12186,7 +12320,7 @@
           <p:cNvPr id="7" name="">
             <a:extLst xmlns:a="http://schemas.openxmlformats.org/drawingml/2006/main">
               <a:ext uri="{FF2B5EF4-FFF2-40B4-BE49-F238E27FC236}">
-                <a16:creationId xmlns:a16="http://schemas.microsoft.com/office/drawing/2014/main" id="{11B3F744-8855-419E-9366-703943E30D3E}"/>
+                <a16:creationId xmlns:a16="http://schemas.microsoft.com/office/drawing/2014/main" id="{EFF91C34-601C-444A-92C1-2ED336B0F00D}"/>
               </a:ext>
             </a:extLst>
           </p:cNvPr>
@@ -12219,7 +12353,7 @@
           <p:cNvPr id="8" name="">
             <a:extLst xmlns:a="http://schemas.openxmlformats.org/drawingml/2006/main">
               <a:ext uri="{FF2B5EF4-FFF2-40B4-BE49-F238E27FC236}">
-                <a16:creationId xmlns:a16="http://schemas.microsoft.com/office/drawing/2014/main" id="{AFEF0CA4-5F5B-43B2-AAA0-2504F1C6693E}"/>
+                <a16:creationId xmlns:a16="http://schemas.microsoft.com/office/drawing/2014/main" id="{7760D450-5D56-43E7-9444-55EF7624E05C}"/>
               </a:ext>
             </a:extLst>
           </p:cNvPr>
@@ -12269,7 +12403,7 @@
           <p:cNvPr id="9" name="">
             <a:extLst xmlns:a="http://schemas.openxmlformats.org/drawingml/2006/main">
               <a:ext uri="{FF2B5EF4-FFF2-40B4-BE49-F238E27FC236}">
-                <a16:creationId xmlns:a16="http://schemas.microsoft.com/office/drawing/2014/main" id="{97F1CA95-0C49-46B6-8962-B83025F95DBC}"/>
+                <a16:creationId xmlns:a16="http://schemas.microsoft.com/office/drawing/2014/main" id="{E8C9EEF2-9585-42D1-B10A-1784887C5ABD}"/>
               </a:ext>
             </a:extLst>
           </p:cNvPr>
@@ -12302,7 +12436,7 @@
           <p:cNvPr id="10" name="">
             <a:extLst xmlns:a="http://schemas.openxmlformats.org/drawingml/2006/main">
               <a:ext uri="{FF2B5EF4-FFF2-40B4-BE49-F238E27FC236}">
-                <a16:creationId xmlns:a16="http://schemas.microsoft.com/office/drawing/2014/main" id="{B2DA70D5-3858-4C8F-8810-C517368A820A}"/>
+                <a16:creationId xmlns:a16="http://schemas.microsoft.com/office/drawing/2014/main" id="{32C8EF3A-8A97-498E-B425-4ED2BEF445FF}"/>
               </a:ext>
             </a:extLst>
           </p:cNvPr>
@@ -12352,7 +12486,7 @@
           <p:cNvPr id="11" name="">
             <a:extLst xmlns:a="http://schemas.openxmlformats.org/drawingml/2006/main">
               <a:ext uri="{FF2B5EF4-FFF2-40B4-BE49-F238E27FC236}">
-                <a16:creationId xmlns:a16="http://schemas.microsoft.com/office/drawing/2014/main" id="{60730A53-9EFD-4733-B9AC-C87C2D197EA9}"/>
+                <a16:creationId xmlns:a16="http://schemas.microsoft.com/office/drawing/2014/main" id="{E0D6B75D-735C-446E-ADBB-ACFF1209EC20}"/>
               </a:ext>
             </a:extLst>
           </p:cNvPr>
@@ -12385,7 +12519,7 @@
           <p:cNvPr id="12" name="">
             <a:extLst xmlns:a="http://schemas.openxmlformats.org/drawingml/2006/main">
               <a:ext uri="{FF2B5EF4-FFF2-40B4-BE49-F238E27FC236}">
-                <a16:creationId xmlns:a16="http://schemas.microsoft.com/office/drawing/2014/main" id="{4E96E7D1-5955-4CD5-998D-6AA1A09FA85C}"/>
+                <a16:creationId xmlns:a16="http://schemas.microsoft.com/office/drawing/2014/main" id="{0F50BA24-59E5-447E-B746-E486E84272E6}"/>
               </a:ext>
             </a:extLst>
           </p:cNvPr>
@@ -12435,7 +12569,7 @@
           <p:cNvPr id="13" name="">
             <a:extLst xmlns:a="http://schemas.openxmlformats.org/drawingml/2006/main">
               <a:ext uri="{FF2B5EF4-FFF2-40B4-BE49-F238E27FC236}">
-                <a16:creationId xmlns:a16="http://schemas.microsoft.com/office/drawing/2014/main" id="{BCD3DC73-A490-4BCA-A4B8-28B4473D4194}"/>
+                <a16:creationId xmlns:a16="http://schemas.microsoft.com/office/drawing/2014/main" id="{54206FA2-8C25-4A42-B2D8-F7551DA28E43}"/>
               </a:ext>
             </a:extLst>
           </p:cNvPr>
@@ -12485,7 +12619,7 @@
           <p:cNvPr id="14" name="">
             <a:extLst xmlns:a="http://schemas.openxmlformats.org/drawingml/2006/main">
               <a:ext uri="{FF2B5EF4-FFF2-40B4-BE49-F238E27FC236}">
-                <a16:creationId xmlns:a16="http://schemas.microsoft.com/office/drawing/2014/main" id="{5D3A9EA7-1DAF-4C61-9CBC-789A7AE2E208}"/>
+                <a16:creationId xmlns:a16="http://schemas.microsoft.com/office/drawing/2014/main" id="{44439EDA-305F-4CF5-A75E-F89288502226}"/>
               </a:ext>
             </a:extLst>
           </p:cNvPr>
@@ -12533,7 +12667,3873 @@
     </p:spTree>
     <p:extLst>
       <p:ext uri="{BB962C8B-B14F-4D97-AF65-F5344CB8AC3E}">
-        <p14:creationId xmlns:p14="http://schemas.microsoft.com/office/powerpoint/2010/main" val="1380585201"/>
+        <p14:creationId xmlns:p14="http://schemas.microsoft.com/office/powerpoint/2010/main" val="2059914808"/>
+      </p:ext>
+    </p:extLst>
+  </p:cSld>
+</p:sld>
+</file>
+
+<file path=ppt/slides/slide18.xml><?xml version="1.0" encoding="utf-8"?>
+<p:sld xmlns:p="http://schemas.openxmlformats.org/presentationml/2006/main">
+  <p:cSld>
+    <p:bg>
+      <p:bgPr>
+        <a:solidFill xmlns:a="http://schemas.openxmlformats.org/drawingml/2006/main">
+          <a:srgbClr val="FFFFFF"/>
+        </a:solidFill>
+      </p:bgPr>
+    </p:bg>
+    <p:spTree>
+      <p:nvGrpSpPr>
+        <p:cNvPr id="1" name=""/>
+        <p:cNvGrpSpPr/>
+        <p:nvPr/>
+      </p:nvGrpSpPr>
+      <p:grpSpPr>
+        <a:xfrm xmlns:a="http://schemas.openxmlformats.org/drawingml/2006/main"/>
+      </p:grpSpPr>
+      <p:sp>
+        <p:nvSpPr>
+          <p:cNvPr id="1" name="">
+            <a:extLst xmlns:a="http://schemas.openxmlformats.org/drawingml/2006/main">
+              <a:ext uri="{FF2B5EF4-FFF2-40B4-BE49-F238E27FC236}">
+                <a16:creationId xmlns:a16="http://schemas.microsoft.com/office/drawing/2014/main" id="{C5330A7E-F2A6-4679-B1FA-3CFAFB05DE81}"/>
+              </a:ext>
+            </a:extLst>
+          </p:cNvPr>
+          <p:cNvSpPr>
+            <a:spLocks xmlns:a="http://schemas.openxmlformats.org/drawingml/2006/main" noGrp="1"/>
+          </p:cNvSpPr>
+          <p:nvPr/>
+        </p:nvSpPr>
+        <p:spPr>
+          <a:xfrm xmlns:a="http://schemas.openxmlformats.org/drawingml/2006/main">
+            <a:off x="514350" y="266700"/>
+            <a:ext cx="5905500" cy="228600"/>
+          </a:xfrm>
+          <a:prstGeom xmlns:a="http://schemas.openxmlformats.org/drawingml/2006/main" prst="rect">
+            <a:avLst/>
+          </a:prstGeom>
+          <a:noFill xmlns:a="http://schemas.openxmlformats.org/drawingml/2006/main"/>
+          <a:ln xmlns:a="http://schemas.openxmlformats.org/drawingml/2006/main" w="0">
+            <a:noFill/>
+            <a:prstDash val="solid"/>
+          </a:ln>
+        </p:spPr>
+        <p:txBody>
+          <a:bodyPr xmlns:a="http://schemas.openxmlformats.org/drawingml/2006/main"/>
+          <a:lstStyle xmlns:a="http://schemas.openxmlformats.org/drawingml/2006/main"/>
+          <a:p xmlns:a="http://schemas.openxmlformats.org/drawingml/2006/main">
+            <a:pPr>
+              <a:defRPr sz="1050" b="1">
+                <a:solidFill>
+                  <a:srgbClr val="555555"/>
+                </a:solidFill>
+              </a:defRPr>
+            </a:pPr>
+            <a:r>
+              <a:rPr sz="1050" b="1">
+                <a:solidFill>
+                  <a:srgbClr val="555555"/>
+                </a:solidFill>
+              </a:rPr>
+              <a:t>GEN5.3 MOMENTUM CONTEXT-SIZE SCREEN</a:t>
+            </a:r>
+          </a:p>
+        </p:txBody>
+      </p:sp>
+      <p:sp>
+        <p:nvSpPr>
+          <p:cNvPr id="2" name="">
+            <a:extLst xmlns:a="http://schemas.openxmlformats.org/drawingml/2006/main">
+              <a:ext uri="{FF2B5EF4-FFF2-40B4-BE49-F238E27FC236}">
+                <a16:creationId xmlns:a16="http://schemas.microsoft.com/office/drawing/2014/main" id="{D3F56945-6806-43D9-B585-560E5FB790FF}"/>
+              </a:ext>
+            </a:extLst>
+          </p:cNvPr>
+          <p:cNvSpPr>
+            <a:spLocks xmlns:a="http://schemas.openxmlformats.org/drawingml/2006/main" noGrp="1"/>
+          </p:cNvSpPr>
+          <p:nvPr/>
+        </p:nvSpPr>
+        <p:spPr>
+          <a:xfrm xmlns:a="http://schemas.openxmlformats.org/drawingml/2006/main">
+            <a:off x="514350" y="628650"/>
+            <a:ext cx="10287000" cy="990600"/>
+          </a:xfrm>
+          <a:prstGeom xmlns:a="http://schemas.openxmlformats.org/drawingml/2006/main" prst="rect">
+            <a:avLst/>
+          </a:prstGeom>
+          <a:noFill xmlns:a="http://schemas.openxmlformats.org/drawingml/2006/main"/>
+          <a:ln xmlns:a="http://schemas.openxmlformats.org/drawingml/2006/main" w="0">
+            <a:noFill/>
+            <a:prstDash val="solid"/>
+          </a:ln>
+        </p:spPr>
+        <p:txBody>
+          <a:bodyPr xmlns:a="http://schemas.openxmlformats.org/drawingml/2006/main"/>
+          <a:lstStyle xmlns:a="http://schemas.openxmlformats.org/drawingml/2006/main"/>
+          <a:p xmlns:a="http://schemas.openxmlformats.org/drawingml/2006/main">
+            <a:pPr>
+              <a:defRPr sz="2850" b="1">
+                <a:solidFill>
+                  <a:srgbClr val="000000"/>
+                </a:solidFill>
+              </a:defRPr>
+            </a:pPr>
+            <a:r>
+              <a:rPr sz="2850" b="1">
+                <a:solidFill>
+                  <a:srgbClr val="000000"/>
+                </a:solidFill>
+              </a:rPr>
+              <a:t>Mean reversion did not solve the upside participation problem</a:t>
+            </a:r>
+          </a:p>
+        </p:txBody>
+      </p:sp>
+      <p:sp>
+        <p:nvSpPr>
+          <p:cNvPr id="3" name="">
+            <a:extLst xmlns:a="http://schemas.openxmlformats.org/drawingml/2006/main">
+              <a:ext uri="{FF2B5EF4-FFF2-40B4-BE49-F238E27FC236}">
+                <a16:creationId xmlns:a16="http://schemas.microsoft.com/office/drawing/2014/main" id="{A0AF7F4B-3F1F-44AA-9213-3DFBECA4E1FA}"/>
+              </a:ext>
+            </a:extLst>
+          </p:cNvPr>
+          <p:cNvSpPr>
+            <a:spLocks xmlns:a="http://schemas.openxmlformats.org/drawingml/2006/main" noGrp="1"/>
+          </p:cNvSpPr>
+          <p:nvPr/>
+        </p:nvSpPr>
+        <p:spPr>
+          <a:xfrm xmlns:a="http://schemas.openxmlformats.org/drawingml/2006/main">
+            <a:off x="514350" y="1619250"/>
+            <a:ext cx="11163300" cy="9525"/>
+          </a:xfrm>
+          <a:prstGeom xmlns:a="http://schemas.openxmlformats.org/drawingml/2006/main" prst="rect">
+            <a:avLst/>
+          </a:prstGeom>
+          <a:solidFill xmlns:a="http://schemas.openxmlformats.org/drawingml/2006/main">
+            <a:srgbClr val="B8BCC4"/>
+          </a:solidFill>
+          <a:ln xmlns:a="http://schemas.openxmlformats.org/drawingml/2006/main" w="9525">
+            <a:solidFill>
+              <a:srgbClr val="B8BCC4"/>
+            </a:solidFill>
+            <a:prstDash val="solid"/>
+          </a:ln>
+        </p:spPr>
+      </p:sp>
+      <p:sp>
+        <p:nvSpPr>
+          <p:cNvPr id="4" name="">
+            <a:extLst xmlns:a="http://schemas.openxmlformats.org/drawingml/2006/main">
+              <a:ext uri="{FF2B5EF4-FFF2-40B4-BE49-F238E27FC236}">
+                <a16:creationId xmlns:a16="http://schemas.microsoft.com/office/drawing/2014/main" id="{FF63BF3A-936D-4801-B09B-27D50183B64F}"/>
+              </a:ext>
+            </a:extLst>
+          </p:cNvPr>
+          <p:cNvSpPr>
+            <a:spLocks xmlns:a="http://schemas.openxmlformats.org/drawingml/2006/main" noGrp="1"/>
+          </p:cNvSpPr>
+          <p:nvPr/>
+        </p:nvSpPr>
+        <p:spPr>
+          <a:xfrm xmlns:a="http://schemas.openxmlformats.org/drawingml/2006/main">
+            <a:off x="819150" y="2038350"/>
+            <a:ext cx="838200" cy="361950"/>
+          </a:xfrm>
+          <a:prstGeom xmlns:a="http://schemas.openxmlformats.org/drawingml/2006/main" prst="rect">
+            <a:avLst/>
+          </a:prstGeom>
+          <a:solidFill xmlns:a="http://schemas.openxmlformats.org/drawingml/2006/main">
+            <a:srgbClr val="EDEDED"/>
+          </a:solidFill>
+          <a:ln xmlns:a="http://schemas.openxmlformats.org/drawingml/2006/main" w="9525">
+            <a:solidFill>
+              <a:srgbClr val="B8BCC4"/>
+            </a:solidFill>
+            <a:prstDash val="solid"/>
+          </a:ln>
+        </p:spPr>
+      </p:sp>
+      <p:sp>
+        <p:nvSpPr>
+          <p:cNvPr id="5" name="">
+            <a:extLst xmlns:a="http://schemas.openxmlformats.org/drawingml/2006/main">
+              <a:ext uri="{FF2B5EF4-FFF2-40B4-BE49-F238E27FC236}">
+                <a16:creationId xmlns:a16="http://schemas.microsoft.com/office/drawing/2014/main" id="{B21EF90A-532B-4112-88F2-CB73DB00D0EB}"/>
+              </a:ext>
+            </a:extLst>
+          </p:cNvPr>
+          <p:cNvSpPr>
+            <a:spLocks xmlns:a="http://schemas.openxmlformats.org/drawingml/2006/main" noGrp="1"/>
+          </p:cNvSpPr>
+          <p:nvPr/>
+        </p:nvSpPr>
+        <p:spPr>
+          <a:xfrm xmlns:a="http://schemas.openxmlformats.org/drawingml/2006/main">
+            <a:off x="895350" y="2124075"/>
+            <a:ext cx="685800" cy="209550"/>
+          </a:xfrm>
+          <a:prstGeom xmlns:a="http://schemas.openxmlformats.org/drawingml/2006/main" prst="rect">
+            <a:avLst/>
+          </a:prstGeom>
+          <a:noFill xmlns:a="http://schemas.openxmlformats.org/drawingml/2006/main"/>
+          <a:ln xmlns:a="http://schemas.openxmlformats.org/drawingml/2006/main" w="0">
+            <a:noFill/>
+            <a:prstDash val="solid"/>
+          </a:ln>
+        </p:spPr>
+        <p:txBody>
+          <a:bodyPr xmlns:a="http://schemas.openxmlformats.org/drawingml/2006/main"/>
+          <a:lstStyle xmlns:a="http://schemas.openxmlformats.org/drawingml/2006/main"/>
+          <a:p xmlns:a="http://schemas.openxmlformats.org/drawingml/2006/main">
+            <a:pPr>
+              <a:defRPr sz="1125" b="1">
+                <a:solidFill>
+                  <a:srgbClr val="000000"/>
+                </a:solidFill>
+              </a:defRPr>
+            </a:pPr>
+            <a:r>
+              <a:rPr sz="1125" b="1">
+                <a:solidFill>
+                  <a:srgbClr val="000000"/>
+                </a:solidFill>
+              </a:rPr>
+              <a:t>Year</a:t>
+            </a:r>
+          </a:p>
+        </p:txBody>
+      </p:sp>
+      <p:sp>
+        <p:nvSpPr>
+          <p:cNvPr id="6" name="">
+            <a:extLst xmlns:a="http://schemas.openxmlformats.org/drawingml/2006/main">
+              <a:ext uri="{FF2B5EF4-FFF2-40B4-BE49-F238E27FC236}">
+                <a16:creationId xmlns:a16="http://schemas.microsoft.com/office/drawing/2014/main" id="{C85B8C29-94A0-4ECE-99D4-4370CF9B1201}"/>
+              </a:ext>
+            </a:extLst>
+          </p:cNvPr>
+          <p:cNvSpPr>
+            <a:spLocks xmlns:a="http://schemas.openxmlformats.org/drawingml/2006/main" noGrp="1"/>
+          </p:cNvSpPr>
+          <p:nvPr/>
+        </p:nvSpPr>
+        <p:spPr>
+          <a:xfrm xmlns:a="http://schemas.openxmlformats.org/drawingml/2006/main">
+            <a:off x="1657350" y="2038350"/>
+            <a:ext cx="1962150" cy="361950"/>
+          </a:xfrm>
+          <a:prstGeom xmlns:a="http://schemas.openxmlformats.org/drawingml/2006/main" prst="rect">
+            <a:avLst/>
+          </a:prstGeom>
+          <a:solidFill xmlns:a="http://schemas.openxmlformats.org/drawingml/2006/main">
+            <a:srgbClr val="EDEDED"/>
+          </a:solidFill>
+          <a:ln xmlns:a="http://schemas.openxmlformats.org/drawingml/2006/main" w="9525">
+            <a:solidFill>
+              <a:srgbClr val="B8BCC4"/>
+            </a:solidFill>
+            <a:prstDash val="solid"/>
+          </a:ln>
+        </p:spPr>
+      </p:sp>
+      <p:sp>
+        <p:nvSpPr>
+          <p:cNvPr id="7" name="">
+            <a:extLst xmlns:a="http://schemas.openxmlformats.org/drawingml/2006/main">
+              <a:ext uri="{FF2B5EF4-FFF2-40B4-BE49-F238E27FC236}">
+                <a16:creationId xmlns:a16="http://schemas.microsoft.com/office/drawing/2014/main" id="{850A5D69-C92A-48D0-B586-974D91BC94B5}"/>
+              </a:ext>
+            </a:extLst>
+          </p:cNvPr>
+          <p:cNvSpPr>
+            <a:spLocks xmlns:a="http://schemas.openxmlformats.org/drawingml/2006/main" noGrp="1"/>
+          </p:cNvSpPr>
+          <p:nvPr/>
+        </p:nvSpPr>
+        <p:spPr>
+          <a:xfrm xmlns:a="http://schemas.openxmlformats.org/drawingml/2006/main">
+            <a:off x="1733550" y="2124075"/>
+            <a:ext cx="1809750" cy="209550"/>
+          </a:xfrm>
+          <a:prstGeom xmlns:a="http://schemas.openxmlformats.org/drawingml/2006/main" prst="rect">
+            <a:avLst/>
+          </a:prstGeom>
+          <a:noFill xmlns:a="http://schemas.openxmlformats.org/drawingml/2006/main"/>
+          <a:ln xmlns:a="http://schemas.openxmlformats.org/drawingml/2006/main" w="0">
+            <a:noFill/>
+            <a:prstDash val="solid"/>
+          </a:ln>
+        </p:spPr>
+        <p:txBody>
+          <a:bodyPr xmlns:a="http://schemas.openxmlformats.org/drawingml/2006/main"/>
+          <a:lstStyle xmlns:a="http://schemas.openxmlformats.org/drawingml/2006/main"/>
+          <a:p xmlns:a="http://schemas.openxmlformats.org/drawingml/2006/main">
+            <a:pPr>
+              <a:defRPr sz="1125" b="1">
+                <a:solidFill>
+                  <a:srgbClr val="000000"/>
+                </a:solidFill>
+              </a:defRPr>
+            </a:pPr>
+            <a:r>
+              <a:rPr sz="1125" b="1">
+                <a:solidFill>
+                  <a:srgbClr val="000000"/>
+                </a:solidFill>
+              </a:rPr>
+              <a:t>Feature</a:t>
+            </a:r>
+          </a:p>
+        </p:txBody>
+      </p:sp>
+      <p:sp>
+        <p:nvSpPr>
+          <p:cNvPr id="8" name="">
+            <a:extLst xmlns:a="http://schemas.openxmlformats.org/drawingml/2006/main">
+              <a:ext uri="{FF2B5EF4-FFF2-40B4-BE49-F238E27FC236}">
+                <a16:creationId xmlns:a16="http://schemas.microsoft.com/office/drawing/2014/main" id="{93EF0A6E-963B-4422-80F3-C54FAA05DB59}"/>
+              </a:ext>
+            </a:extLst>
+          </p:cNvPr>
+          <p:cNvSpPr>
+            <a:spLocks xmlns:a="http://schemas.openxmlformats.org/drawingml/2006/main" noGrp="1"/>
+          </p:cNvSpPr>
+          <p:nvPr/>
+        </p:nvSpPr>
+        <p:spPr>
+          <a:xfrm xmlns:a="http://schemas.openxmlformats.org/drawingml/2006/main">
+            <a:off x="3619500" y="2038350"/>
+            <a:ext cx="1238250" cy="361950"/>
+          </a:xfrm>
+          <a:prstGeom xmlns:a="http://schemas.openxmlformats.org/drawingml/2006/main" prst="rect">
+            <a:avLst/>
+          </a:prstGeom>
+          <a:solidFill xmlns:a="http://schemas.openxmlformats.org/drawingml/2006/main">
+            <a:srgbClr val="EDEDED"/>
+          </a:solidFill>
+          <a:ln xmlns:a="http://schemas.openxmlformats.org/drawingml/2006/main" w="9525">
+            <a:solidFill>
+              <a:srgbClr val="B8BCC4"/>
+            </a:solidFill>
+            <a:prstDash val="solid"/>
+          </a:ln>
+        </p:spPr>
+      </p:sp>
+      <p:sp>
+        <p:nvSpPr>
+          <p:cNvPr id="9" name="">
+            <a:extLst xmlns:a="http://schemas.openxmlformats.org/drawingml/2006/main">
+              <a:ext uri="{FF2B5EF4-FFF2-40B4-BE49-F238E27FC236}">
+                <a16:creationId xmlns:a16="http://schemas.microsoft.com/office/drawing/2014/main" id="{8AE87DA0-57BD-4965-ADED-4D46BBC2F9F9}"/>
+              </a:ext>
+            </a:extLst>
+          </p:cNvPr>
+          <p:cNvSpPr>
+            <a:spLocks xmlns:a="http://schemas.openxmlformats.org/drawingml/2006/main" noGrp="1"/>
+          </p:cNvSpPr>
+          <p:nvPr/>
+        </p:nvSpPr>
+        <p:spPr>
+          <a:xfrm xmlns:a="http://schemas.openxmlformats.org/drawingml/2006/main">
+            <a:off x="3695700" y="2124075"/>
+            <a:ext cx="1085850" cy="209550"/>
+          </a:xfrm>
+          <a:prstGeom xmlns:a="http://schemas.openxmlformats.org/drawingml/2006/main" prst="rect">
+            <a:avLst/>
+          </a:prstGeom>
+          <a:noFill xmlns:a="http://schemas.openxmlformats.org/drawingml/2006/main"/>
+          <a:ln xmlns:a="http://schemas.openxmlformats.org/drawingml/2006/main" w="0">
+            <a:noFill/>
+            <a:prstDash val="solid"/>
+          </a:ln>
+        </p:spPr>
+        <p:txBody>
+          <a:bodyPr xmlns:a="http://schemas.openxmlformats.org/drawingml/2006/main"/>
+          <a:lstStyle xmlns:a="http://schemas.openxmlformats.org/drawingml/2006/main"/>
+          <a:p xmlns:a="http://schemas.openxmlformats.org/drawingml/2006/main">
+            <a:pPr>
+              <a:defRPr sz="1125" b="1">
+                <a:solidFill>
+                  <a:srgbClr val="000000"/>
+                </a:solidFill>
+              </a:defRPr>
+            </a:pPr>
+            <a:r>
+              <a:rPr sz="1125" b="1">
+                <a:solidFill>
+                  <a:srgbClr val="000000"/>
+                </a:solidFill>
+              </a:rPr>
+              <a:t>Return</a:t>
+            </a:r>
+          </a:p>
+        </p:txBody>
+      </p:sp>
+      <p:sp>
+        <p:nvSpPr>
+          <p:cNvPr id="10" name="">
+            <a:extLst xmlns:a="http://schemas.openxmlformats.org/drawingml/2006/main">
+              <a:ext uri="{FF2B5EF4-FFF2-40B4-BE49-F238E27FC236}">
+                <a16:creationId xmlns:a16="http://schemas.microsoft.com/office/drawing/2014/main" id="{BC407902-94D8-417F-BDEE-26D0FAB87023}"/>
+              </a:ext>
+            </a:extLst>
+          </p:cNvPr>
+          <p:cNvSpPr>
+            <a:spLocks xmlns:a="http://schemas.openxmlformats.org/drawingml/2006/main" noGrp="1"/>
+          </p:cNvSpPr>
+          <p:nvPr/>
+        </p:nvSpPr>
+        <p:spPr>
+          <a:xfrm xmlns:a="http://schemas.openxmlformats.org/drawingml/2006/main">
+            <a:off x="4857750" y="2038350"/>
+            <a:ext cx="1219200" cy="361950"/>
+          </a:xfrm>
+          <a:prstGeom xmlns:a="http://schemas.openxmlformats.org/drawingml/2006/main" prst="rect">
+            <a:avLst/>
+          </a:prstGeom>
+          <a:solidFill xmlns:a="http://schemas.openxmlformats.org/drawingml/2006/main">
+            <a:srgbClr val="EDEDED"/>
+          </a:solidFill>
+          <a:ln xmlns:a="http://schemas.openxmlformats.org/drawingml/2006/main" w="9525">
+            <a:solidFill>
+              <a:srgbClr val="B8BCC4"/>
+            </a:solidFill>
+            <a:prstDash val="solid"/>
+          </a:ln>
+        </p:spPr>
+      </p:sp>
+      <p:sp>
+        <p:nvSpPr>
+          <p:cNvPr id="11" name="">
+            <a:extLst xmlns:a="http://schemas.openxmlformats.org/drawingml/2006/main">
+              <a:ext uri="{FF2B5EF4-FFF2-40B4-BE49-F238E27FC236}">
+                <a16:creationId xmlns:a16="http://schemas.microsoft.com/office/drawing/2014/main" id="{D562665E-52B2-44C4-AB09-27EEB08AB891}"/>
+              </a:ext>
+            </a:extLst>
+          </p:cNvPr>
+          <p:cNvSpPr>
+            <a:spLocks xmlns:a="http://schemas.openxmlformats.org/drawingml/2006/main" noGrp="1"/>
+          </p:cNvSpPr>
+          <p:nvPr/>
+        </p:nvSpPr>
+        <p:spPr>
+          <a:xfrm xmlns:a="http://schemas.openxmlformats.org/drawingml/2006/main">
+            <a:off x="4933950" y="2124075"/>
+            <a:ext cx="1066800" cy="209550"/>
+          </a:xfrm>
+          <a:prstGeom xmlns:a="http://schemas.openxmlformats.org/drawingml/2006/main" prst="rect">
+            <a:avLst/>
+          </a:prstGeom>
+          <a:noFill xmlns:a="http://schemas.openxmlformats.org/drawingml/2006/main"/>
+          <a:ln xmlns:a="http://schemas.openxmlformats.org/drawingml/2006/main" w="0">
+            <a:noFill/>
+            <a:prstDash val="solid"/>
+          </a:ln>
+        </p:spPr>
+        <p:txBody>
+          <a:bodyPr xmlns:a="http://schemas.openxmlformats.org/drawingml/2006/main"/>
+          <a:lstStyle xmlns:a="http://schemas.openxmlformats.org/drawingml/2006/main"/>
+          <a:p xmlns:a="http://schemas.openxmlformats.org/drawingml/2006/main">
+            <a:pPr>
+              <a:defRPr sz="1125" b="1">
+                <a:solidFill>
+                  <a:srgbClr val="000000"/>
+                </a:solidFill>
+              </a:defRPr>
+            </a:pPr>
+            <a:r>
+              <a:rPr sz="1125" b="1">
+                <a:solidFill>
+                  <a:srgbClr val="000000"/>
+                </a:solidFill>
+              </a:rPr>
+              <a:t>Alpha</a:t>
+            </a:r>
+          </a:p>
+        </p:txBody>
+      </p:sp>
+      <p:sp>
+        <p:nvSpPr>
+          <p:cNvPr id="12" name="">
+            <a:extLst xmlns:a="http://schemas.openxmlformats.org/drawingml/2006/main">
+              <a:ext uri="{FF2B5EF4-FFF2-40B4-BE49-F238E27FC236}">
+                <a16:creationId xmlns:a16="http://schemas.microsoft.com/office/drawing/2014/main" id="{6AC63F96-1DE9-41BF-96C1-79460951CE94}"/>
+              </a:ext>
+            </a:extLst>
+          </p:cNvPr>
+          <p:cNvSpPr>
+            <a:spLocks xmlns:a="http://schemas.openxmlformats.org/drawingml/2006/main" noGrp="1"/>
+          </p:cNvSpPr>
+          <p:nvPr/>
+        </p:nvSpPr>
+        <p:spPr>
+          <a:xfrm xmlns:a="http://schemas.openxmlformats.org/drawingml/2006/main">
+            <a:off x="6076950" y="2038350"/>
+            <a:ext cx="1219200" cy="361950"/>
+          </a:xfrm>
+          <a:prstGeom xmlns:a="http://schemas.openxmlformats.org/drawingml/2006/main" prst="rect">
+            <a:avLst/>
+          </a:prstGeom>
+          <a:solidFill xmlns:a="http://schemas.openxmlformats.org/drawingml/2006/main">
+            <a:srgbClr val="EDEDED"/>
+          </a:solidFill>
+          <a:ln xmlns:a="http://schemas.openxmlformats.org/drawingml/2006/main" w="9525">
+            <a:solidFill>
+              <a:srgbClr val="B8BCC4"/>
+            </a:solidFill>
+            <a:prstDash val="solid"/>
+          </a:ln>
+        </p:spPr>
+      </p:sp>
+      <p:sp>
+        <p:nvSpPr>
+          <p:cNvPr id="13" name="">
+            <a:extLst xmlns:a="http://schemas.openxmlformats.org/drawingml/2006/main">
+              <a:ext uri="{FF2B5EF4-FFF2-40B4-BE49-F238E27FC236}">
+                <a16:creationId xmlns:a16="http://schemas.microsoft.com/office/drawing/2014/main" id="{E3D69D69-C578-4CD7-BF60-DD443B136913}"/>
+              </a:ext>
+            </a:extLst>
+          </p:cNvPr>
+          <p:cNvSpPr>
+            <a:spLocks xmlns:a="http://schemas.openxmlformats.org/drawingml/2006/main" noGrp="1"/>
+          </p:cNvSpPr>
+          <p:nvPr/>
+        </p:nvSpPr>
+        <p:spPr>
+          <a:xfrm xmlns:a="http://schemas.openxmlformats.org/drawingml/2006/main">
+            <a:off x="6153150" y="2124075"/>
+            <a:ext cx="1066800" cy="209550"/>
+          </a:xfrm>
+          <a:prstGeom xmlns:a="http://schemas.openxmlformats.org/drawingml/2006/main" prst="rect">
+            <a:avLst/>
+          </a:prstGeom>
+          <a:noFill xmlns:a="http://schemas.openxmlformats.org/drawingml/2006/main"/>
+          <a:ln xmlns:a="http://schemas.openxmlformats.org/drawingml/2006/main" w="0">
+            <a:noFill/>
+            <a:prstDash val="solid"/>
+          </a:ln>
+        </p:spPr>
+        <p:txBody>
+          <a:bodyPr xmlns:a="http://schemas.openxmlformats.org/drawingml/2006/main"/>
+          <a:lstStyle xmlns:a="http://schemas.openxmlformats.org/drawingml/2006/main"/>
+          <a:p xmlns:a="http://schemas.openxmlformats.org/drawingml/2006/main">
+            <a:pPr>
+              <a:defRPr sz="1125" b="1">
+                <a:solidFill>
+                  <a:srgbClr val="000000"/>
+                </a:solidFill>
+              </a:defRPr>
+            </a:pPr>
+            <a:r>
+              <a:rPr sz="1125" b="1">
+                <a:solidFill>
+                  <a:srgbClr val="000000"/>
+                </a:solidFill>
+              </a:rPr>
+              <a:t>Exposure</a:t>
+            </a:r>
+          </a:p>
+        </p:txBody>
+      </p:sp>
+      <p:sp>
+        <p:nvSpPr>
+          <p:cNvPr id="14" name="">
+            <a:extLst xmlns:a="http://schemas.openxmlformats.org/drawingml/2006/main">
+              <a:ext uri="{FF2B5EF4-FFF2-40B4-BE49-F238E27FC236}">
+                <a16:creationId xmlns:a16="http://schemas.microsoft.com/office/drawing/2014/main" id="{E328B5EE-7C64-4503-BE7A-C0274D909589}"/>
+              </a:ext>
+            </a:extLst>
+          </p:cNvPr>
+          <p:cNvSpPr>
+            <a:spLocks xmlns:a="http://schemas.openxmlformats.org/drawingml/2006/main" noGrp="1"/>
+          </p:cNvSpPr>
+          <p:nvPr/>
+        </p:nvSpPr>
+        <p:spPr>
+          <a:xfrm xmlns:a="http://schemas.openxmlformats.org/drawingml/2006/main">
+            <a:off x="7296150" y="2038350"/>
+            <a:ext cx="1219200" cy="361950"/>
+          </a:xfrm>
+          <a:prstGeom xmlns:a="http://schemas.openxmlformats.org/drawingml/2006/main" prst="rect">
+            <a:avLst/>
+          </a:prstGeom>
+          <a:solidFill xmlns:a="http://schemas.openxmlformats.org/drawingml/2006/main">
+            <a:srgbClr val="EDEDED"/>
+          </a:solidFill>
+          <a:ln xmlns:a="http://schemas.openxmlformats.org/drawingml/2006/main" w="9525">
+            <a:solidFill>
+              <a:srgbClr val="B8BCC4"/>
+            </a:solidFill>
+            <a:prstDash val="solid"/>
+          </a:ln>
+        </p:spPr>
+      </p:sp>
+      <p:sp>
+        <p:nvSpPr>
+          <p:cNvPr id="15" name="">
+            <a:extLst xmlns:a="http://schemas.openxmlformats.org/drawingml/2006/main">
+              <a:ext uri="{FF2B5EF4-FFF2-40B4-BE49-F238E27FC236}">
+                <a16:creationId xmlns:a16="http://schemas.microsoft.com/office/drawing/2014/main" id="{BDE7F5A0-82E1-4C49-B476-2A7902FBBBDF}"/>
+              </a:ext>
+            </a:extLst>
+          </p:cNvPr>
+          <p:cNvSpPr>
+            <a:spLocks xmlns:a="http://schemas.openxmlformats.org/drawingml/2006/main" noGrp="1"/>
+          </p:cNvSpPr>
+          <p:nvPr/>
+        </p:nvSpPr>
+        <p:spPr>
+          <a:xfrm xmlns:a="http://schemas.openxmlformats.org/drawingml/2006/main">
+            <a:off x="7372350" y="2124075"/>
+            <a:ext cx="1066800" cy="209550"/>
+          </a:xfrm>
+          <a:prstGeom xmlns:a="http://schemas.openxmlformats.org/drawingml/2006/main" prst="rect">
+            <a:avLst/>
+          </a:prstGeom>
+          <a:noFill xmlns:a="http://schemas.openxmlformats.org/drawingml/2006/main"/>
+          <a:ln xmlns:a="http://schemas.openxmlformats.org/drawingml/2006/main" w="0">
+            <a:noFill/>
+            <a:prstDash val="solid"/>
+          </a:ln>
+        </p:spPr>
+        <p:txBody>
+          <a:bodyPr xmlns:a="http://schemas.openxmlformats.org/drawingml/2006/main"/>
+          <a:lstStyle xmlns:a="http://schemas.openxmlformats.org/drawingml/2006/main"/>
+          <a:p xmlns:a="http://schemas.openxmlformats.org/drawingml/2006/main">
+            <a:pPr>
+              <a:defRPr sz="1125" b="1">
+                <a:solidFill>
+                  <a:srgbClr val="000000"/>
+                </a:solidFill>
+              </a:defRPr>
+            </a:pPr>
+            <a:r>
+              <a:rPr sz="1125" b="1">
+                <a:solidFill>
+                  <a:srgbClr val="000000"/>
+                </a:solidFill>
+              </a:rPr>
+              <a:t>Drawdown</a:t>
+            </a:r>
+          </a:p>
+        </p:txBody>
+      </p:sp>
+      <p:sp>
+        <p:nvSpPr>
+          <p:cNvPr id="16" name="">
+            <a:extLst xmlns:a="http://schemas.openxmlformats.org/drawingml/2006/main">
+              <a:ext uri="{FF2B5EF4-FFF2-40B4-BE49-F238E27FC236}">
+                <a16:creationId xmlns:a16="http://schemas.microsoft.com/office/drawing/2014/main" id="{EB543646-714F-4F95-A84E-2A35A4032A60}"/>
+              </a:ext>
+            </a:extLst>
+          </p:cNvPr>
+          <p:cNvSpPr>
+            <a:spLocks xmlns:a="http://schemas.openxmlformats.org/drawingml/2006/main" noGrp="1"/>
+          </p:cNvSpPr>
+          <p:nvPr/>
+        </p:nvSpPr>
+        <p:spPr>
+          <a:xfrm xmlns:a="http://schemas.openxmlformats.org/drawingml/2006/main">
+            <a:off x="8515350" y="2038350"/>
+            <a:ext cx="1047750" cy="361950"/>
+          </a:xfrm>
+          <a:prstGeom xmlns:a="http://schemas.openxmlformats.org/drawingml/2006/main" prst="rect">
+            <a:avLst/>
+          </a:prstGeom>
+          <a:solidFill xmlns:a="http://schemas.openxmlformats.org/drawingml/2006/main">
+            <a:srgbClr val="EDEDED"/>
+          </a:solidFill>
+          <a:ln xmlns:a="http://schemas.openxmlformats.org/drawingml/2006/main" w="9525">
+            <a:solidFill>
+              <a:srgbClr val="B8BCC4"/>
+            </a:solidFill>
+            <a:prstDash val="solid"/>
+          </a:ln>
+        </p:spPr>
+      </p:sp>
+      <p:sp>
+        <p:nvSpPr>
+          <p:cNvPr id="17" name="">
+            <a:extLst xmlns:a="http://schemas.openxmlformats.org/drawingml/2006/main">
+              <a:ext uri="{FF2B5EF4-FFF2-40B4-BE49-F238E27FC236}">
+                <a16:creationId xmlns:a16="http://schemas.microsoft.com/office/drawing/2014/main" id="{A61495C8-E959-453B-886F-85CF82D3B4CC}"/>
+              </a:ext>
+            </a:extLst>
+          </p:cNvPr>
+          <p:cNvSpPr>
+            <a:spLocks xmlns:a="http://schemas.openxmlformats.org/drawingml/2006/main" noGrp="1"/>
+          </p:cNvSpPr>
+          <p:nvPr/>
+        </p:nvSpPr>
+        <p:spPr>
+          <a:xfrm xmlns:a="http://schemas.openxmlformats.org/drawingml/2006/main">
+            <a:off x="8591550" y="2124075"/>
+            <a:ext cx="895350" cy="209550"/>
+          </a:xfrm>
+          <a:prstGeom xmlns:a="http://schemas.openxmlformats.org/drawingml/2006/main" prst="rect">
+            <a:avLst/>
+          </a:prstGeom>
+          <a:noFill xmlns:a="http://schemas.openxmlformats.org/drawingml/2006/main"/>
+          <a:ln xmlns:a="http://schemas.openxmlformats.org/drawingml/2006/main" w="0">
+            <a:noFill/>
+            <a:prstDash val="solid"/>
+          </a:ln>
+        </p:spPr>
+        <p:txBody>
+          <a:bodyPr xmlns:a="http://schemas.openxmlformats.org/drawingml/2006/main"/>
+          <a:lstStyle xmlns:a="http://schemas.openxmlformats.org/drawingml/2006/main"/>
+          <a:p xmlns:a="http://schemas.openxmlformats.org/drawingml/2006/main">
+            <a:pPr>
+              <a:defRPr sz="1125" b="1">
+                <a:solidFill>
+                  <a:srgbClr val="000000"/>
+                </a:solidFill>
+              </a:defRPr>
+            </a:pPr>
+            <a:r>
+              <a:rPr sz="1125" b="1">
+                <a:solidFill>
+                  <a:srgbClr val="000000"/>
+                </a:solidFill>
+              </a:rPr>
+              <a:t>Entries</a:t>
+            </a:r>
+          </a:p>
+        </p:txBody>
+      </p:sp>
+      <p:sp>
+        <p:nvSpPr>
+          <p:cNvPr id="18" name="">
+            <a:extLst xmlns:a="http://schemas.openxmlformats.org/drawingml/2006/main">
+              <a:ext uri="{FF2B5EF4-FFF2-40B4-BE49-F238E27FC236}">
+                <a16:creationId xmlns:a16="http://schemas.microsoft.com/office/drawing/2014/main" id="{D83E75B7-2F20-4AD9-ACFA-961AE41A7018}"/>
+              </a:ext>
+            </a:extLst>
+          </p:cNvPr>
+          <p:cNvSpPr>
+            <a:spLocks xmlns:a="http://schemas.openxmlformats.org/drawingml/2006/main" noGrp="1"/>
+          </p:cNvSpPr>
+          <p:nvPr/>
+        </p:nvSpPr>
+        <p:spPr>
+          <a:xfrm xmlns:a="http://schemas.openxmlformats.org/drawingml/2006/main">
+            <a:off x="819150" y="2400300"/>
+            <a:ext cx="838200" cy="590550"/>
+          </a:xfrm>
+          <a:prstGeom xmlns:a="http://schemas.openxmlformats.org/drawingml/2006/main" prst="rect">
+            <a:avLst/>
+          </a:prstGeom>
+          <a:solidFill xmlns:a="http://schemas.openxmlformats.org/drawingml/2006/main">
+            <a:srgbClr val="F7F7F7"/>
+          </a:solidFill>
+          <a:ln xmlns:a="http://schemas.openxmlformats.org/drawingml/2006/main" w="9525">
+            <a:solidFill>
+              <a:srgbClr val="B8BCC4"/>
+            </a:solidFill>
+            <a:prstDash val="solid"/>
+          </a:ln>
+        </p:spPr>
+      </p:sp>
+      <p:sp>
+        <p:nvSpPr>
+          <p:cNvPr id="19" name="">
+            <a:extLst xmlns:a="http://schemas.openxmlformats.org/drawingml/2006/main">
+              <a:ext uri="{FF2B5EF4-FFF2-40B4-BE49-F238E27FC236}">
+                <a16:creationId xmlns:a16="http://schemas.microsoft.com/office/drawing/2014/main" id="{2F91F6DC-02B4-4620-B73D-39B9A959820D}"/>
+              </a:ext>
+            </a:extLst>
+          </p:cNvPr>
+          <p:cNvSpPr>
+            <a:spLocks xmlns:a="http://schemas.openxmlformats.org/drawingml/2006/main" noGrp="1"/>
+          </p:cNvSpPr>
+          <p:nvPr/>
+        </p:nvSpPr>
+        <p:spPr>
+          <a:xfrm xmlns:a="http://schemas.openxmlformats.org/drawingml/2006/main">
+            <a:off x="895350" y="2571750"/>
+            <a:ext cx="685800" cy="247650"/>
+          </a:xfrm>
+          <a:prstGeom xmlns:a="http://schemas.openxmlformats.org/drawingml/2006/main" prst="rect">
+            <a:avLst/>
+          </a:prstGeom>
+          <a:noFill xmlns:a="http://schemas.openxmlformats.org/drawingml/2006/main"/>
+          <a:ln xmlns:a="http://schemas.openxmlformats.org/drawingml/2006/main" w="0">
+            <a:noFill/>
+            <a:prstDash val="solid"/>
+          </a:ln>
+        </p:spPr>
+        <p:txBody>
+          <a:bodyPr xmlns:a="http://schemas.openxmlformats.org/drawingml/2006/main"/>
+          <a:lstStyle xmlns:a="http://schemas.openxmlformats.org/drawingml/2006/main"/>
+          <a:p xmlns:a="http://schemas.openxmlformats.org/drawingml/2006/main">
+            <a:pPr>
+              <a:defRPr sz="1200" b="0">
+                <a:solidFill>
+                  <a:srgbClr val="000000"/>
+                </a:solidFill>
+              </a:defRPr>
+            </a:pPr>
+            <a:r>
+              <a:rPr sz="1200" b="0">
+                <a:solidFill>
+                  <a:srgbClr val="000000"/>
+                </a:solidFill>
+              </a:rPr>
+              <a:t>2020</a:t>
+            </a:r>
+          </a:p>
+        </p:txBody>
+      </p:sp>
+      <p:sp>
+        <p:nvSpPr>
+          <p:cNvPr id="20" name="">
+            <a:extLst xmlns:a="http://schemas.openxmlformats.org/drawingml/2006/main">
+              <a:ext uri="{FF2B5EF4-FFF2-40B4-BE49-F238E27FC236}">
+                <a16:creationId xmlns:a16="http://schemas.microsoft.com/office/drawing/2014/main" id="{5F3C0C9C-8ADB-4256-8B21-E9A74122B9BC}"/>
+              </a:ext>
+            </a:extLst>
+          </p:cNvPr>
+          <p:cNvSpPr>
+            <a:spLocks xmlns:a="http://schemas.openxmlformats.org/drawingml/2006/main" noGrp="1"/>
+          </p:cNvSpPr>
+          <p:nvPr/>
+        </p:nvSpPr>
+        <p:spPr>
+          <a:xfrm xmlns:a="http://schemas.openxmlformats.org/drawingml/2006/main">
+            <a:off x="1657350" y="2400300"/>
+            <a:ext cx="1962150" cy="590550"/>
+          </a:xfrm>
+          <a:prstGeom xmlns:a="http://schemas.openxmlformats.org/drawingml/2006/main" prst="rect">
+            <a:avLst/>
+          </a:prstGeom>
+          <a:solidFill xmlns:a="http://schemas.openxmlformats.org/drawingml/2006/main">
+            <a:srgbClr val="F7F7F7"/>
+          </a:solidFill>
+          <a:ln xmlns:a="http://schemas.openxmlformats.org/drawingml/2006/main" w="9525">
+            <a:solidFill>
+              <a:srgbClr val="B8BCC4"/>
+            </a:solidFill>
+            <a:prstDash val="solid"/>
+          </a:ln>
+        </p:spPr>
+      </p:sp>
+      <p:sp>
+        <p:nvSpPr>
+          <p:cNvPr id="21" name="">
+            <a:extLst xmlns:a="http://schemas.openxmlformats.org/drawingml/2006/main">
+              <a:ext uri="{FF2B5EF4-FFF2-40B4-BE49-F238E27FC236}">
+                <a16:creationId xmlns:a16="http://schemas.microsoft.com/office/drawing/2014/main" id="{E88B2829-7B8D-4828-9499-CA8616F73C4B}"/>
+              </a:ext>
+            </a:extLst>
+          </p:cNvPr>
+          <p:cNvSpPr>
+            <a:spLocks xmlns:a="http://schemas.openxmlformats.org/drawingml/2006/main" noGrp="1"/>
+          </p:cNvSpPr>
+          <p:nvPr/>
+        </p:nvSpPr>
+        <p:spPr>
+          <a:xfrm xmlns:a="http://schemas.openxmlformats.org/drawingml/2006/main">
+            <a:off x="1733550" y="2571750"/>
+            <a:ext cx="1809750" cy="247650"/>
+          </a:xfrm>
+          <a:prstGeom xmlns:a="http://schemas.openxmlformats.org/drawingml/2006/main" prst="rect">
+            <a:avLst/>
+          </a:prstGeom>
+          <a:noFill xmlns:a="http://schemas.openxmlformats.org/drawingml/2006/main"/>
+          <a:ln xmlns:a="http://schemas.openxmlformats.org/drawingml/2006/main" w="0">
+            <a:noFill/>
+            <a:prstDash val="solid"/>
+          </a:ln>
+        </p:spPr>
+        <p:txBody>
+          <a:bodyPr xmlns:a="http://schemas.openxmlformats.org/drawingml/2006/main"/>
+          <a:lstStyle xmlns:a="http://schemas.openxmlformats.org/drawingml/2006/main"/>
+          <a:p xmlns:a="http://schemas.openxmlformats.org/drawingml/2006/main">
+            <a:pPr>
+              <a:defRPr sz="1200" b="1">
+                <a:solidFill>
+                  <a:srgbClr val="000000"/>
+                </a:solidFill>
+              </a:defRPr>
+            </a:pPr>
+            <a:r>
+              <a:rPr sz="1200" b="1">
+                <a:solidFill>
+                  <a:srgbClr val="000000"/>
+                </a:solidFill>
+              </a:rPr>
+              <a:t>Workhorse</a:t>
+            </a:r>
+          </a:p>
+        </p:txBody>
+      </p:sp>
+      <p:sp>
+        <p:nvSpPr>
+          <p:cNvPr id="22" name="">
+            <a:extLst xmlns:a="http://schemas.openxmlformats.org/drawingml/2006/main">
+              <a:ext uri="{FF2B5EF4-FFF2-40B4-BE49-F238E27FC236}">
+                <a16:creationId xmlns:a16="http://schemas.microsoft.com/office/drawing/2014/main" id="{58CBE873-E9D0-40BF-942C-E21CC2C9A62C}"/>
+              </a:ext>
+            </a:extLst>
+          </p:cNvPr>
+          <p:cNvSpPr>
+            <a:spLocks xmlns:a="http://schemas.openxmlformats.org/drawingml/2006/main" noGrp="1"/>
+          </p:cNvSpPr>
+          <p:nvPr/>
+        </p:nvSpPr>
+        <p:spPr>
+          <a:xfrm xmlns:a="http://schemas.openxmlformats.org/drawingml/2006/main">
+            <a:off x="3619500" y="2400300"/>
+            <a:ext cx="1238250" cy="590550"/>
+          </a:xfrm>
+          <a:prstGeom xmlns:a="http://schemas.openxmlformats.org/drawingml/2006/main" prst="rect">
+            <a:avLst/>
+          </a:prstGeom>
+          <a:solidFill xmlns:a="http://schemas.openxmlformats.org/drawingml/2006/main">
+            <a:srgbClr val="F7F7F7"/>
+          </a:solidFill>
+          <a:ln xmlns:a="http://schemas.openxmlformats.org/drawingml/2006/main" w="9525">
+            <a:solidFill>
+              <a:srgbClr val="B8BCC4"/>
+            </a:solidFill>
+            <a:prstDash val="solid"/>
+          </a:ln>
+        </p:spPr>
+      </p:sp>
+      <p:sp>
+        <p:nvSpPr>
+          <p:cNvPr id="23" name="">
+            <a:extLst xmlns:a="http://schemas.openxmlformats.org/drawingml/2006/main">
+              <a:ext uri="{FF2B5EF4-FFF2-40B4-BE49-F238E27FC236}">
+                <a16:creationId xmlns:a16="http://schemas.microsoft.com/office/drawing/2014/main" id="{4406A263-A25A-4815-9379-1866F8D36D4B}"/>
+              </a:ext>
+            </a:extLst>
+          </p:cNvPr>
+          <p:cNvSpPr>
+            <a:spLocks xmlns:a="http://schemas.openxmlformats.org/drawingml/2006/main" noGrp="1"/>
+          </p:cNvSpPr>
+          <p:nvPr/>
+        </p:nvSpPr>
+        <p:spPr>
+          <a:xfrm xmlns:a="http://schemas.openxmlformats.org/drawingml/2006/main">
+            <a:off x="3695700" y="2571750"/>
+            <a:ext cx="1085850" cy="247650"/>
+          </a:xfrm>
+          <a:prstGeom xmlns:a="http://schemas.openxmlformats.org/drawingml/2006/main" prst="rect">
+            <a:avLst/>
+          </a:prstGeom>
+          <a:noFill xmlns:a="http://schemas.openxmlformats.org/drawingml/2006/main"/>
+          <a:ln xmlns:a="http://schemas.openxmlformats.org/drawingml/2006/main" w="0">
+            <a:noFill/>
+            <a:prstDash val="solid"/>
+          </a:ln>
+        </p:spPr>
+        <p:txBody>
+          <a:bodyPr xmlns:a="http://schemas.openxmlformats.org/drawingml/2006/main"/>
+          <a:lstStyle xmlns:a="http://schemas.openxmlformats.org/drawingml/2006/main"/>
+          <a:p xmlns:a="http://schemas.openxmlformats.org/drawingml/2006/main">
+            <a:pPr>
+              <a:defRPr sz="1200" b="0">
+                <a:solidFill>
+                  <a:srgbClr val="000000"/>
+                </a:solidFill>
+              </a:defRPr>
+            </a:pPr>
+            <a:r>
+              <a:rPr sz="1200" b="0">
+                <a:solidFill>
+                  <a:srgbClr val="000000"/>
+                </a:solidFill>
+              </a:rPr>
+              <a:t>20.3%</a:t>
+            </a:r>
+          </a:p>
+        </p:txBody>
+      </p:sp>
+      <p:sp>
+        <p:nvSpPr>
+          <p:cNvPr id="24" name="">
+            <a:extLst xmlns:a="http://schemas.openxmlformats.org/drawingml/2006/main">
+              <a:ext uri="{FF2B5EF4-FFF2-40B4-BE49-F238E27FC236}">
+                <a16:creationId xmlns:a16="http://schemas.microsoft.com/office/drawing/2014/main" id="{96443E16-1906-4267-BC4A-2FC0BAEF61AA}"/>
+              </a:ext>
+            </a:extLst>
+          </p:cNvPr>
+          <p:cNvSpPr>
+            <a:spLocks xmlns:a="http://schemas.openxmlformats.org/drawingml/2006/main" noGrp="1"/>
+          </p:cNvSpPr>
+          <p:nvPr/>
+        </p:nvSpPr>
+        <p:spPr>
+          <a:xfrm xmlns:a="http://schemas.openxmlformats.org/drawingml/2006/main">
+            <a:off x="4857750" y="2400300"/>
+            <a:ext cx="1219200" cy="590550"/>
+          </a:xfrm>
+          <a:prstGeom xmlns:a="http://schemas.openxmlformats.org/drawingml/2006/main" prst="rect">
+            <a:avLst/>
+          </a:prstGeom>
+          <a:solidFill xmlns:a="http://schemas.openxmlformats.org/drawingml/2006/main">
+            <a:srgbClr val="F7F7F7"/>
+          </a:solidFill>
+          <a:ln xmlns:a="http://schemas.openxmlformats.org/drawingml/2006/main" w="9525">
+            <a:solidFill>
+              <a:srgbClr val="B8BCC4"/>
+            </a:solidFill>
+            <a:prstDash val="solid"/>
+          </a:ln>
+        </p:spPr>
+      </p:sp>
+      <p:sp>
+        <p:nvSpPr>
+          <p:cNvPr id="25" name="">
+            <a:extLst xmlns:a="http://schemas.openxmlformats.org/drawingml/2006/main">
+              <a:ext uri="{FF2B5EF4-FFF2-40B4-BE49-F238E27FC236}">
+                <a16:creationId xmlns:a16="http://schemas.microsoft.com/office/drawing/2014/main" id="{5E57A2CB-820C-4DD9-826B-F465B376DEA1}"/>
+              </a:ext>
+            </a:extLst>
+          </p:cNvPr>
+          <p:cNvSpPr>
+            <a:spLocks xmlns:a="http://schemas.openxmlformats.org/drawingml/2006/main" noGrp="1"/>
+          </p:cNvSpPr>
+          <p:nvPr/>
+        </p:nvSpPr>
+        <p:spPr>
+          <a:xfrm xmlns:a="http://schemas.openxmlformats.org/drawingml/2006/main">
+            <a:off x="4933950" y="2571750"/>
+            <a:ext cx="1066800" cy="247650"/>
+          </a:xfrm>
+          <a:prstGeom xmlns:a="http://schemas.openxmlformats.org/drawingml/2006/main" prst="rect">
+            <a:avLst/>
+          </a:prstGeom>
+          <a:noFill xmlns:a="http://schemas.openxmlformats.org/drawingml/2006/main"/>
+          <a:ln xmlns:a="http://schemas.openxmlformats.org/drawingml/2006/main" w="0">
+            <a:noFill/>
+            <a:prstDash val="solid"/>
+          </a:ln>
+        </p:spPr>
+        <p:txBody>
+          <a:bodyPr xmlns:a="http://schemas.openxmlformats.org/drawingml/2006/main"/>
+          <a:lstStyle xmlns:a="http://schemas.openxmlformats.org/drawingml/2006/main"/>
+          <a:p xmlns:a="http://schemas.openxmlformats.org/drawingml/2006/main">
+            <a:pPr>
+              <a:defRPr sz="1200" b="0">
+                <a:solidFill>
+                  <a:srgbClr val="B42318"/>
+                </a:solidFill>
+              </a:defRPr>
+            </a:pPr>
+            <a:r>
+              <a:rPr sz="1200" b="0">
+                <a:solidFill>
+                  <a:srgbClr val="B42318"/>
+                </a:solidFill>
+              </a:rPr>
+              <a:t>-207.0 pp</a:t>
+            </a:r>
+          </a:p>
+        </p:txBody>
+      </p:sp>
+      <p:sp>
+        <p:nvSpPr>
+          <p:cNvPr id="26" name="">
+            <a:extLst xmlns:a="http://schemas.openxmlformats.org/drawingml/2006/main">
+              <a:ext uri="{FF2B5EF4-FFF2-40B4-BE49-F238E27FC236}">
+                <a16:creationId xmlns:a16="http://schemas.microsoft.com/office/drawing/2014/main" id="{AF0AF1EA-3E1E-4C76-8B31-889EDD9DB5A6}"/>
+              </a:ext>
+            </a:extLst>
+          </p:cNvPr>
+          <p:cNvSpPr>
+            <a:spLocks xmlns:a="http://schemas.openxmlformats.org/drawingml/2006/main" noGrp="1"/>
+          </p:cNvSpPr>
+          <p:nvPr/>
+        </p:nvSpPr>
+        <p:spPr>
+          <a:xfrm xmlns:a="http://schemas.openxmlformats.org/drawingml/2006/main">
+            <a:off x="6076950" y="2400300"/>
+            <a:ext cx="1219200" cy="590550"/>
+          </a:xfrm>
+          <a:prstGeom xmlns:a="http://schemas.openxmlformats.org/drawingml/2006/main" prst="rect">
+            <a:avLst/>
+          </a:prstGeom>
+          <a:solidFill xmlns:a="http://schemas.openxmlformats.org/drawingml/2006/main">
+            <a:srgbClr val="F7F7F7"/>
+          </a:solidFill>
+          <a:ln xmlns:a="http://schemas.openxmlformats.org/drawingml/2006/main" w="9525">
+            <a:solidFill>
+              <a:srgbClr val="B8BCC4"/>
+            </a:solidFill>
+            <a:prstDash val="solid"/>
+          </a:ln>
+        </p:spPr>
+      </p:sp>
+      <p:sp>
+        <p:nvSpPr>
+          <p:cNvPr id="27" name="">
+            <a:extLst xmlns:a="http://schemas.openxmlformats.org/drawingml/2006/main">
+              <a:ext uri="{FF2B5EF4-FFF2-40B4-BE49-F238E27FC236}">
+                <a16:creationId xmlns:a16="http://schemas.microsoft.com/office/drawing/2014/main" id="{12A1ACEE-58B7-4CE9-8551-9E0836A3D3F8}"/>
+              </a:ext>
+            </a:extLst>
+          </p:cNvPr>
+          <p:cNvSpPr>
+            <a:spLocks xmlns:a="http://schemas.openxmlformats.org/drawingml/2006/main" noGrp="1"/>
+          </p:cNvSpPr>
+          <p:nvPr/>
+        </p:nvSpPr>
+        <p:spPr>
+          <a:xfrm xmlns:a="http://schemas.openxmlformats.org/drawingml/2006/main">
+            <a:off x="6153150" y="2571750"/>
+            <a:ext cx="1066800" cy="247650"/>
+          </a:xfrm>
+          <a:prstGeom xmlns:a="http://schemas.openxmlformats.org/drawingml/2006/main" prst="rect">
+            <a:avLst/>
+          </a:prstGeom>
+          <a:noFill xmlns:a="http://schemas.openxmlformats.org/drawingml/2006/main"/>
+          <a:ln xmlns:a="http://schemas.openxmlformats.org/drawingml/2006/main" w="0">
+            <a:noFill/>
+            <a:prstDash val="solid"/>
+          </a:ln>
+        </p:spPr>
+        <p:txBody>
+          <a:bodyPr xmlns:a="http://schemas.openxmlformats.org/drawingml/2006/main"/>
+          <a:lstStyle xmlns:a="http://schemas.openxmlformats.org/drawingml/2006/main"/>
+          <a:p xmlns:a="http://schemas.openxmlformats.org/drawingml/2006/main">
+            <a:pPr>
+              <a:defRPr sz="1200" b="0">
+                <a:solidFill>
+                  <a:srgbClr val="000000"/>
+                </a:solidFill>
+              </a:defRPr>
+            </a:pPr>
+            <a:r>
+              <a:rPr sz="1200" b="0">
+                <a:solidFill>
+                  <a:srgbClr val="000000"/>
+                </a:solidFill>
+              </a:rPr>
+              <a:t>21.3%</a:t>
+            </a:r>
+          </a:p>
+        </p:txBody>
+      </p:sp>
+      <p:sp>
+        <p:nvSpPr>
+          <p:cNvPr id="28" name="">
+            <a:extLst xmlns:a="http://schemas.openxmlformats.org/drawingml/2006/main">
+              <a:ext uri="{FF2B5EF4-FFF2-40B4-BE49-F238E27FC236}">
+                <a16:creationId xmlns:a16="http://schemas.microsoft.com/office/drawing/2014/main" id="{14DFB5C0-F9FA-4159-B20D-77F372ADED04}"/>
+              </a:ext>
+            </a:extLst>
+          </p:cNvPr>
+          <p:cNvSpPr>
+            <a:spLocks xmlns:a="http://schemas.openxmlformats.org/drawingml/2006/main" noGrp="1"/>
+          </p:cNvSpPr>
+          <p:nvPr/>
+        </p:nvSpPr>
+        <p:spPr>
+          <a:xfrm xmlns:a="http://schemas.openxmlformats.org/drawingml/2006/main">
+            <a:off x="7296150" y="2400300"/>
+            <a:ext cx="1219200" cy="590550"/>
+          </a:xfrm>
+          <a:prstGeom xmlns:a="http://schemas.openxmlformats.org/drawingml/2006/main" prst="rect">
+            <a:avLst/>
+          </a:prstGeom>
+          <a:solidFill xmlns:a="http://schemas.openxmlformats.org/drawingml/2006/main">
+            <a:srgbClr val="F7F7F7"/>
+          </a:solidFill>
+          <a:ln xmlns:a="http://schemas.openxmlformats.org/drawingml/2006/main" w="9525">
+            <a:solidFill>
+              <a:srgbClr val="B8BCC4"/>
+            </a:solidFill>
+            <a:prstDash val="solid"/>
+          </a:ln>
+        </p:spPr>
+      </p:sp>
+      <p:sp>
+        <p:nvSpPr>
+          <p:cNvPr id="29" name="">
+            <a:extLst xmlns:a="http://schemas.openxmlformats.org/drawingml/2006/main">
+              <a:ext uri="{FF2B5EF4-FFF2-40B4-BE49-F238E27FC236}">
+                <a16:creationId xmlns:a16="http://schemas.microsoft.com/office/drawing/2014/main" id="{BBF4D76D-0F5B-4C5F-AAE4-D5D2B577DABD}"/>
+              </a:ext>
+            </a:extLst>
+          </p:cNvPr>
+          <p:cNvSpPr>
+            <a:spLocks xmlns:a="http://schemas.openxmlformats.org/drawingml/2006/main" noGrp="1"/>
+          </p:cNvSpPr>
+          <p:nvPr/>
+        </p:nvSpPr>
+        <p:spPr>
+          <a:xfrm xmlns:a="http://schemas.openxmlformats.org/drawingml/2006/main">
+            <a:off x="7372350" y="2571750"/>
+            <a:ext cx="1066800" cy="247650"/>
+          </a:xfrm>
+          <a:prstGeom xmlns:a="http://schemas.openxmlformats.org/drawingml/2006/main" prst="rect">
+            <a:avLst/>
+          </a:prstGeom>
+          <a:noFill xmlns:a="http://schemas.openxmlformats.org/drawingml/2006/main"/>
+          <a:ln xmlns:a="http://schemas.openxmlformats.org/drawingml/2006/main" w="0">
+            <a:noFill/>
+            <a:prstDash val="solid"/>
+          </a:ln>
+        </p:spPr>
+        <p:txBody>
+          <a:bodyPr xmlns:a="http://schemas.openxmlformats.org/drawingml/2006/main"/>
+          <a:lstStyle xmlns:a="http://schemas.openxmlformats.org/drawingml/2006/main"/>
+          <a:p xmlns:a="http://schemas.openxmlformats.org/drawingml/2006/main">
+            <a:pPr>
+              <a:defRPr sz="1200" b="0">
+                <a:solidFill>
+                  <a:srgbClr val="000000"/>
+                </a:solidFill>
+              </a:defRPr>
+            </a:pPr>
+            <a:r>
+              <a:rPr sz="1200" b="0">
+                <a:solidFill>
+                  <a:srgbClr val="000000"/>
+                </a:solidFill>
+              </a:rPr>
+              <a:t>-34.9%</a:t>
+            </a:r>
+          </a:p>
+        </p:txBody>
+      </p:sp>
+      <p:sp>
+        <p:nvSpPr>
+          <p:cNvPr id="30" name="">
+            <a:extLst xmlns:a="http://schemas.openxmlformats.org/drawingml/2006/main">
+              <a:ext uri="{FF2B5EF4-FFF2-40B4-BE49-F238E27FC236}">
+                <a16:creationId xmlns:a16="http://schemas.microsoft.com/office/drawing/2014/main" id="{DEF604A5-92A7-49A7-8F15-19A232C71A9E}"/>
+              </a:ext>
+            </a:extLst>
+          </p:cNvPr>
+          <p:cNvSpPr>
+            <a:spLocks xmlns:a="http://schemas.openxmlformats.org/drawingml/2006/main" noGrp="1"/>
+          </p:cNvSpPr>
+          <p:nvPr/>
+        </p:nvSpPr>
+        <p:spPr>
+          <a:xfrm xmlns:a="http://schemas.openxmlformats.org/drawingml/2006/main">
+            <a:off x="8515350" y="2400300"/>
+            <a:ext cx="1047750" cy="590550"/>
+          </a:xfrm>
+          <a:prstGeom xmlns:a="http://schemas.openxmlformats.org/drawingml/2006/main" prst="rect">
+            <a:avLst/>
+          </a:prstGeom>
+          <a:solidFill xmlns:a="http://schemas.openxmlformats.org/drawingml/2006/main">
+            <a:srgbClr val="F7F7F7"/>
+          </a:solidFill>
+          <a:ln xmlns:a="http://schemas.openxmlformats.org/drawingml/2006/main" w="9525">
+            <a:solidFill>
+              <a:srgbClr val="B8BCC4"/>
+            </a:solidFill>
+            <a:prstDash val="solid"/>
+          </a:ln>
+        </p:spPr>
+      </p:sp>
+      <p:sp>
+        <p:nvSpPr>
+          <p:cNvPr id="31" name="">
+            <a:extLst xmlns:a="http://schemas.openxmlformats.org/drawingml/2006/main">
+              <a:ext uri="{FF2B5EF4-FFF2-40B4-BE49-F238E27FC236}">
+                <a16:creationId xmlns:a16="http://schemas.microsoft.com/office/drawing/2014/main" id="{3C23F0DC-E69B-4F44-BA3D-C5144FB05A92}"/>
+              </a:ext>
+            </a:extLst>
+          </p:cNvPr>
+          <p:cNvSpPr>
+            <a:spLocks xmlns:a="http://schemas.openxmlformats.org/drawingml/2006/main" noGrp="1"/>
+          </p:cNvSpPr>
+          <p:nvPr/>
+        </p:nvSpPr>
+        <p:spPr>
+          <a:xfrm xmlns:a="http://schemas.openxmlformats.org/drawingml/2006/main">
+            <a:off x="8591550" y="2571750"/>
+            <a:ext cx="895350" cy="247650"/>
+          </a:xfrm>
+          <a:prstGeom xmlns:a="http://schemas.openxmlformats.org/drawingml/2006/main" prst="rect">
+            <a:avLst/>
+          </a:prstGeom>
+          <a:noFill xmlns:a="http://schemas.openxmlformats.org/drawingml/2006/main"/>
+          <a:ln xmlns:a="http://schemas.openxmlformats.org/drawingml/2006/main" w="0">
+            <a:noFill/>
+            <a:prstDash val="solid"/>
+          </a:ln>
+        </p:spPr>
+        <p:txBody>
+          <a:bodyPr xmlns:a="http://schemas.openxmlformats.org/drawingml/2006/main"/>
+          <a:lstStyle xmlns:a="http://schemas.openxmlformats.org/drawingml/2006/main"/>
+          <a:p xmlns:a="http://schemas.openxmlformats.org/drawingml/2006/main">
+            <a:pPr>
+              <a:defRPr sz="1200" b="0">
+                <a:solidFill>
+                  <a:srgbClr val="000000"/>
+                </a:solidFill>
+              </a:defRPr>
+            </a:pPr>
+            <a:r>
+              <a:rPr sz="1200" b="0">
+                <a:solidFill>
+                  <a:srgbClr val="000000"/>
+                </a:solidFill>
+              </a:rPr>
+              <a:t>26</a:t>
+            </a:r>
+          </a:p>
+        </p:txBody>
+      </p:sp>
+      <p:sp>
+        <p:nvSpPr>
+          <p:cNvPr id="32" name="">
+            <a:extLst xmlns:a="http://schemas.openxmlformats.org/drawingml/2006/main">
+              <a:ext uri="{FF2B5EF4-FFF2-40B4-BE49-F238E27FC236}">
+                <a16:creationId xmlns:a16="http://schemas.microsoft.com/office/drawing/2014/main" id="{78545E9D-3E9E-4C6D-A2CD-89874F978F3F}"/>
+              </a:ext>
+            </a:extLst>
+          </p:cNvPr>
+          <p:cNvSpPr>
+            <a:spLocks xmlns:a="http://schemas.openxmlformats.org/drawingml/2006/main" noGrp="1"/>
+          </p:cNvSpPr>
+          <p:nvPr/>
+        </p:nvSpPr>
+        <p:spPr>
+          <a:xfrm xmlns:a="http://schemas.openxmlformats.org/drawingml/2006/main">
+            <a:off x="819150" y="2990850"/>
+            <a:ext cx="838200" cy="590550"/>
+          </a:xfrm>
+          <a:prstGeom xmlns:a="http://schemas.openxmlformats.org/drawingml/2006/main" prst="rect">
+            <a:avLst/>
+          </a:prstGeom>
+          <a:solidFill xmlns:a="http://schemas.openxmlformats.org/drawingml/2006/main">
+            <a:srgbClr val="FFFFFF"/>
+          </a:solidFill>
+          <a:ln xmlns:a="http://schemas.openxmlformats.org/drawingml/2006/main" w="9525">
+            <a:solidFill>
+              <a:srgbClr val="B8BCC4"/>
+            </a:solidFill>
+            <a:prstDash val="solid"/>
+          </a:ln>
+        </p:spPr>
+      </p:sp>
+      <p:sp>
+        <p:nvSpPr>
+          <p:cNvPr id="33" name="">
+            <a:extLst xmlns:a="http://schemas.openxmlformats.org/drawingml/2006/main">
+              <a:ext uri="{FF2B5EF4-FFF2-40B4-BE49-F238E27FC236}">
+                <a16:creationId xmlns:a16="http://schemas.microsoft.com/office/drawing/2014/main" id="{DC2E0845-E9BF-4644-883D-BBC034F961B2}"/>
+              </a:ext>
+            </a:extLst>
+          </p:cNvPr>
+          <p:cNvSpPr>
+            <a:spLocks xmlns:a="http://schemas.openxmlformats.org/drawingml/2006/main" noGrp="1"/>
+          </p:cNvSpPr>
+          <p:nvPr/>
+        </p:nvSpPr>
+        <p:spPr>
+          <a:xfrm xmlns:a="http://schemas.openxmlformats.org/drawingml/2006/main">
+            <a:off x="895350" y="3162300"/>
+            <a:ext cx="685800" cy="247650"/>
+          </a:xfrm>
+          <a:prstGeom xmlns:a="http://schemas.openxmlformats.org/drawingml/2006/main" prst="rect">
+            <a:avLst/>
+          </a:prstGeom>
+          <a:noFill xmlns:a="http://schemas.openxmlformats.org/drawingml/2006/main"/>
+          <a:ln xmlns:a="http://schemas.openxmlformats.org/drawingml/2006/main" w="0">
+            <a:noFill/>
+            <a:prstDash val="solid"/>
+          </a:ln>
+        </p:spPr>
+        <p:txBody>
+          <a:bodyPr xmlns:a="http://schemas.openxmlformats.org/drawingml/2006/main"/>
+          <a:lstStyle xmlns:a="http://schemas.openxmlformats.org/drawingml/2006/main"/>
+          <a:p xmlns:a="http://schemas.openxmlformats.org/drawingml/2006/main">
+            <a:pPr>
+              <a:defRPr sz="1200" b="0">
+                <a:solidFill>
+                  <a:srgbClr val="000000"/>
+                </a:solidFill>
+              </a:defRPr>
+            </a:pPr>
+            <a:r>
+              <a:rPr sz="1200" b="0">
+                <a:solidFill>
+                  <a:srgbClr val="000000"/>
+                </a:solidFill>
+              </a:rPr>
+              <a:t>2020</a:t>
+            </a:r>
+          </a:p>
+        </p:txBody>
+      </p:sp>
+      <p:sp>
+        <p:nvSpPr>
+          <p:cNvPr id="34" name="">
+            <a:extLst xmlns:a="http://schemas.openxmlformats.org/drawingml/2006/main">
+              <a:ext uri="{FF2B5EF4-FFF2-40B4-BE49-F238E27FC236}">
+                <a16:creationId xmlns:a16="http://schemas.microsoft.com/office/drawing/2014/main" id="{9E8085BE-BB4D-4730-BBE8-13787E2F0C94}"/>
+              </a:ext>
+            </a:extLst>
+          </p:cNvPr>
+          <p:cNvSpPr>
+            <a:spLocks xmlns:a="http://schemas.openxmlformats.org/drawingml/2006/main" noGrp="1"/>
+          </p:cNvSpPr>
+          <p:nvPr/>
+        </p:nvSpPr>
+        <p:spPr>
+          <a:xfrm xmlns:a="http://schemas.openxmlformats.org/drawingml/2006/main">
+            <a:off x="1657350" y="2990850"/>
+            <a:ext cx="1962150" cy="590550"/>
+          </a:xfrm>
+          <a:prstGeom xmlns:a="http://schemas.openxmlformats.org/drawingml/2006/main" prst="rect">
+            <a:avLst/>
+          </a:prstGeom>
+          <a:solidFill xmlns:a="http://schemas.openxmlformats.org/drawingml/2006/main">
+            <a:srgbClr val="FFFFFF"/>
+          </a:solidFill>
+          <a:ln xmlns:a="http://schemas.openxmlformats.org/drawingml/2006/main" w="9525">
+            <a:solidFill>
+              <a:srgbClr val="B8BCC4"/>
+            </a:solidFill>
+            <a:prstDash val="solid"/>
+          </a:ln>
+        </p:spPr>
+      </p:sp>
+      <p:sp>
+        <p:nvSpPr>
+          <p:cNvPr id="35" name="">
+            <a:extLst xmlns:a="http://schemas.openxmlformats.org/drawingml/2006/main">
+              <a:ext uri="{FF2B5EF4-FFF2-40B4-BE49-F238E27FC236}">
+                <a16:creationId xmlns:a16="http://schemas.microsoft.com/office/drawing/2014/main" id="{AC22A867-3AB4-4AF2-939F-5FF7F935FAFC}"/>
+              </a:ext>
+            </a:extLst>
+          </p:cNvPr>
+          <p:cNvSpPr>
+            <a:spLocks xmlns:a="http://schemas.openxmlformats.org/drawingml/2006/main" noGrp="1"/>
+          </p:cNvSpPr>
+          <p:nvPr/>
+        </p:nvSpPr>
+        <p:spPr>
+          <a:xfrm xmlns:a="http://schemas.openxmlformats.org/drawingml/2006/main">
+            <a:off x="1733550" y="3162300"/>
+            <a:ext cx="1809750" cy="247650"/>
+          </a:xfrm>
+          <a:prstGeom xmlns:a="http://schemas.openxmlformats.org/drawingml/2006/main" prst="rect">
+            <a:avLst/>
+          </a:prstGeom>
+          <a:noFill xmlns:a="http://schemas.openxmlformats.org/drawingml/2006/main"/>
+          <a:ln xmlns:a="http://schemas.openxmlformats.org/drawingml/2006/main" w="0">
+            <a:noFill/>
+            <a:prstDash val="solid"/>
+          </a:ln>
+        </p:spPr>
+        <p:txBody>
+          <a:bodyPr xmlns:a="http://schemas.openxmlformats.org/drawingml/2006/main"/>
+          <a:lstStyle xmlns:a="http://schemas.openxmlformats.org/drawingml/2006/main"/>
+          <a:p xmlns:a="http://schemas.openxmlformats.org/drawingml/2006/main">
+            <a:pPr>
+              <a:defRPr sz="1200" b="1">
+                <a:solidFill>
+                  <a:srgbClr val="000000"/>
+                </a:solidFill>
+              </a:defRPr>
+            </a:pPr>
+            <a:r>
+              <a:rPr sz="1200" b="1">
+                <a:solidFill>
+                  <a:srgbClr val="000000"/>
+                </a:solidFill>
+              </a:rPr>
+              <a:t>Reversion context</a:t>
+            </a:r>
+          </a:p>
+        </p:txBody>
+      </p:sp>
+      <p:sp>
+        <p:nvSpPr>
+          <p:cNvPr id="36" name="">
+            <a:extLst xmlns:a="http://schemas.openxmlformats.org/drawingml/2006/main">
+              <a:ext uri="{FF2B5EF4-FFF2-40B4-BE49-F238E27FC236}">
+                <a16:creationId xmlns:a16="http://schemas.microsoft.com/office/drawing/2014/main" id="{C7BAD20C-FADC-4198-BD9D-F223FF20A35A}"/>
+              </a:ext>
+            </a:extLst>
+          </p:cNvPr>
+          <p:cNvSpPr>
+            <a:spLocks xmlns:a="http://schemas.openxmlformats.org/drawingml/2006/main" noGrp="1"/>
+          </p:cNvSpPr>
+          <p:nvPr/>
+        </p:nvSpPr>
+        <p:spPr>
+          <a:xfrm xmlns:a="http://schemas.openxmlformats.org/drawingml/2006/main">
+            <a:off x="3619500" y="2990850"/>
+            <a:ext cx="1238250" cy="590550"/>
+          </a:xfrm>
+          <a:prstGeom xmlns:a="http://schemas.openxmlformats.org/drawingml/2006/main" prst="rect">
+            <a:avLst/>
+          </a:prstGeom>
+          <a:solidFill xmlns:a="http://schemas.openxmlformats.org/drawingml/2006/main">
+            <a:srgbClr val="FFFFFF"/>
+          </a:solidFill>
+          <a:ln xmlns:a="http://schemas.openxmlformats.org/drawingml/2006/main" w="9525">
+            <a:solidFill>
+              <a:srgbClr val="B8BCC4"/>
+            </a:solidFill>
+            <a:prstDash val="solid"/>
+          </a:ln>
+        </p:spPr>
+      </p:sp>
+      <p:sp>
+        <p:nvSpPr>
+          <p:cNvPr id="37" name="">
+            <a:extLst xmlns:a="http://schemas.openxmlformats.org/drawingml/2006/main">
+              <a:ext uri="{FF2B5EF4-FFF2-40B4-BE49-F238E27FC236}">
+                <a16:creationId xmlns:a16="http://schemas.microsoft.com/office/drawing/2014/main" id="{18EE5646-7770-4340-B5A9-7086DDE03E51}"/>
+              </a:ext>
+            </a:extLst>
+          </p:cNvPr>
+          <p:cNvSpPr>
+            <a:spLocks xmlns:a="http://schemas.openxmlformats.org/drawingml/2006/main" noGrp="1"/>
+          </p:cNvSpPr>
+          <p:nvPr/>
+        </p:nvSpPr>
+        <p:spPr>
+          <a:xfrm xmlns:a="http://schemas.openxmlformats.org/drawingml/2006/main">
+            <a:off x="3695700" y="3162300"/>
+            <a:ext cx="1085850" cy="247650"/>
+          </a:xfrm>
+          <a:prstGeom xmlns:a="http://schemas.openxmlformats.org/drawingml/2006/main" prst="rect">
+            <a:avLst/>
+          </a:prstGeom>
+          <a:noFill xmlns:a="http://schemas.openxmlformats.org/drawingml/2006/main"/>
+          <a:ln xmlns:a="http://schemas.openxmlformats.org/drawingml/2006/main" w="0">
+            <a:noFill/>
+            <a:prstDash val="solid"/>
+          </a:ln>
+        </p:spPr>
+        <p:txBody>
+          <a:bodyPr xmlns:a="http://schemas.openxmlformats.org/drawingml/2006/main"/>
+          <a:lstStyle xmlns:a="http://schemas.openxmlformats.org/drawingml/2006/main"/>
+          <a:p xmlns:a="http://schemas.openxmlformats.org/drawingml/2006/main">
+            <a:pPr>
+              <a:defRPr sz="1200" b="0">
+                <a:solidFill>
+                  <a:srgbClr val="000000"/>
+                </a:solidFill>
+              </a:defRPr>
+            </a:pPr>
+            <a:r>
+              <a:rPr sz="1200" b="0">
+                <a:solidFill>
+                  <a:srgbClr val="000000"/>
+                </a:solidFill>
+              </a:rPr>
+              <a:t>13.6%</a:t>
+            </a:r>
+          </a:p>
+        </p:txBody>
+      </p:sp>
+      <p:sp>
+        <p:nvSpPr>
+          <p:cNvPr id="38" name="">
+            <a:extLst xmlns:a="http://schemas.openxmlformats.org/drawingml/2006/main">
+              <a:ext uri="{FF2B5EF4-FFF2-40B4-BE49-F238E27FC236}">
+                <a16:creationId xmlns:a16="http://schemas.microsoft.com/office/drawing/2014/main" id="{C4B289B5-AA2C-4963-9650-D330C330C2B5}"/>
+              </a:ext>
+            </a:extLst>
+          </p:cNvPr>
+          <p:cNvSpPr>
+            <a:spLocks xmlns:a="http://schemas.openxmlformats.org/drawingml/2006/main" noGrp="1"/>
+          </p:cNvSpPr>
+          <p:nvPr/>
+        </p:nvSpPr>
+        <p:spPr>
+          <a:xfrm xmlns:a="http://schemas.openxmlformats.org/drawingml/2006/main">
+            <a:off x="4857750" y="2990850"/>
+            <a:ext cx="1219200" cy="590550"/>
+          </a:xfrm>
+          <a:prstGeom xmlns:a="http://schemas.openxmlformats.org/drawingml/2006/main" prst="rect">
+            <a:avLst/>
+          </a:prstGeom>
+          <a:solidFill xmlns:a="http://schemas.openxmlformats.org/drawingml/2006/main">
+            <a:srgbClr val="FFFFFF"/>
+          </a:solidFill>
+          <a:ln xmlns:a="http://schemas.openxmlformats.org/drawingml/2006/main" w="9525">
+            <a:solidFill>
+              <a:srgbClr val="B8BCC4"/>
+            </a:solidFill>
+            <a:prstDash val="solid"/>
+          </a:ln>
+        </p:spPr>
+      </p:sp>
+      <p:sp>
+        <p:nvSpPr>
+          <p:cNvPr id="39" name="">
+            <a:extLst xmlns:a="http://schemas.openxmlformats.org/drawingml/2006/main">
+              <a:ext uri="{FF2B5EF4-FFF2-40B4-BE49-F238E27FC236}">
+                <a16:creationId xmlns:a16="http://schemas.microsoft.com/office/drawing/2014/main" id="{D37AA0A8-D784-4DF0-A692-B3BC17F1FA4F}"/>
+              </a:ext>
+            </a:extLst>
+          </p:cNvPr>
+          <p:cNvSpPr>
+            <a:spLocks xmlns:a="http://schemas.openxmlformats.org/drawingml/2006/main" noGrp="1"/>
+          </p:cNvSpPr>
+          <p:nvPr/>
+        </p:nvSpPr>
+        <p:spPr>
+          <a:xfrm xmlns:a="http://schemas.openxmlformats.org/drawingml/2006/main">
+            <a:off x="4933950" y="3162300"/>
+            <a:ext cx="1066800" cy="247650"/>
+          </a:xfrm>
+          <a:prstGeom xmlns:a="http://schemas.openxmlformats.org/drawingml/2006/main" prst="rect">
+            <a:avLst/>
+          </a:prstGeom>
+          <a:noFill xmlns:a="http://schemas.openxmlformats.org/drawingml/2006/main"/>
+          <a:ln xmlns:a="http://schemas.openxmlformats.org/drawingml/2006/main" w="0">
+            <a:noFill/>
+            <a:prstDash val="solid"/>
+          </a:ln>
+        </p:spPr>
+        <p:txBody>
+          <a:bodyPr xmlns:a="http://schemas.openxmlformats.org/drawingml/2006/main"/>
+          <a:lstStyle xmlns:a="http://schemas.openxmlformats.org/drawingml/2006/main"/>
+          <a:p xmlns:a="http://schemas.openxmlformats.org/drawingml/2006/main">
+            <a:pPr>
+              <a:defRPr sz="1200" b="0">
+                <a:solidFill>
+                  <a:srgbClr val="B42318"/>
+                </a:solidFill>
+              </a:defRPr>
+            </a:pPr>
+            <a:r>
+              <a:rPr sz="1200" b="0">
+                <a:solidFill>
+                  <a:srgbClr val="B42318"/>
+                </a:solidFill>
+              </a:rPr>
+              <a:t>-213.7 pp</a:t>
+            </a:r>
+          </a:p>
+        </p:txBody>
+      </p:sp>
+      <p:sp>
+        <p:nvSpPr>
+          <p:cNvPr id="40" name="">
+            <a:extLst xmlns:a="http://schemas.openxmlformats.org/drawingml/2006/main">
+              <a:ext uri="{FF2B5EF4-FFF2-40B4-BE49-F238E27FC236}">
+                <a16:creationId xmlns:a16="http://schemas.microsoft.com/office/drawing/2014/main" id="{979EF6CE-9061-4FD7-B861-569B74A6B1FD}"/>
+              </a:ext>
+            </a:extLst>
+          </p:cNvPr>
+          <p:cNvSpPr>
+            <a:spLocks xmlns:a="http://schemas.openxmlformats.org/drawingml/2006/main" noGrp="1"/>
+          </p:cNvSpPr>
+          <p:nvPr/>
+        </p:nvSpPr>
+        <p:spPr>
+          <a:xfrm xmlns:a="http://schemas.openxmlformats.org/drawingml/2006/main">
+            <a:off x="6076950" y="2990850"/>
+            <a:ext cx="1219200" cy="590550"/>
+          </a:xfrm>
+          <a:prstGeom xmlns:a="http://schemas.openxmlformats.org/drawingml/2006/main" prst="rect">
+            <a:avLst/>
+          </a:prstGeom>
+          <a:solidFill xmlns:a="http://schemas.openxmlformats.org/drawingml/2006/main">
+            <a:srgbClr val="FFFFFF"/>
+          </a:solidFill>
+          <a:ln xmlns:a="http://schemas.openxmlformats.org/drawingml/2006/main" w="9525">
+            <a:solidFill>
+              <a:srgbClr val="B8BCC4"/>
+            </a:solidFill>
+            <a:prstDash val="solid"/>
+          </a:ln>
+        </p:spPr>
+      </p:sp>
+      <p:sp>
+        <p:nvSpPr>
+          <p:cNvPr id="41" name="">
+            <a:extLst xmlns:a="http://schemas.openxmlformats.org/drawingml/2006/main">
+              <a:ext uri="{FF2B5EF4-FFF2-40B4-BE49-F238E27FC236}">
+                <a16:creationId xmlns:a16="http://schemas.microsoft.com/office/drawing/2014/main" id="{E5DBEBE4-1BF1-4C93-B012-649CBF78CA0F}"/>
+              </a:ext>
+            </a:extLst>
+          </p:cNvPr>
+          <p:cNvSpPr>
+            <a:spLocks xmlns:a="http://schemas.openxmlformats.org/drawingml/2006/main" noGrp="1"/>
+          </p:cNvSpPr>
+          <p:nvPr/>
+        </p:nvSpPr>
+        <p:spPr>
+          <a:xfrm xmlns:a="http://schemas.openxmlformats.org/drawingml/2006/main">
+            <a:off x="6153150" y="3162300"/>
+            <a:ext cx="1066800" cy="247650"/>
+          </a:xfrm>
+          <a:prstGeom xmlns:a="http://schemas.openxmlformats.org/drawingml/2006/main" prst="rect">
+            <a:avLst/>
+          </a:prstGeom>
+          <a:noFill xmlns:a="http://schemas.openxmlformats.org/drawingml/2006/main"/>
+          <a:ln xmlns:a="http://schemas.openxmlformats.org/drawingml/2006/main" w="0">
+            <a:noFill/>
+            <a:prstDash val="solid"/>
+          </a:ln>
+        </p:spPr>
+        <p:txBody>
+          <a:bodyPr xmlns:a="http://schemas.openxmlformats.org/drawingml/2006/main"/>
+          <a:lstStyle xmlns:a="http://schemas.openxmlformats.org/drawingml/2006/main"/>
+          <a:p xmlns:a="http://schemas.openxmlformats.org/drawingml/2006/main">
+            <a:pPr>
+              <a:defRPr sz="1200" b="0">
+                <a:solidFill>
+                  <a:srgbClr val="000000"/>
+                </a:solidFill>
+              </a:defRPr>
+            </a:pPr>
+            <a:r>
+              <a:rPr sz="1200" b="0">
+                <a:solidFill>
+                  <a:srgbClr val="000000"/>
+                </a:solidFill>
+              </a:rPr>
+              <a:t>19.8%</a:t>
+            </a:r>
+          </a:p>
+        </p:txBody>
+      </p:sp>
+      <p:sp>
+        <p:nvSpPr>
+          <p:cNvPr id="42" name="">
+            <a:extLst xmlns:a="http://schemas.openxmlformats.org/drawingml/2006/main">
+              <a:ext uri="{FF2B5EF4-FFF2-40B4-BE49-F238E27FC236}">
+                <a16:creationId xmlns:a16="http://schemas.microsoft.com/office/drawing/2014/main" id="{8261AB1B-09EE-42B5-A2AC-5137E21548B6}"/>
+              </a:ext>
+            </a:extLst>
+          </p:cNvPr>
+          <p:cNvSpPr>
+            <a:spLocks xmlns:a="http://schemas.openxmlformats.org/drawingml/2006/main" noGrp="1"/>
+          </p:cNvSpPr>
+          <p:nvPr/>
+        </p:nvSpPr>
+        <p:spPr>
+          <a:xfrm xmlns:a="http://schemas.openxmlformats.org/drawingml/2006/main">
+            <a:off x="7296150" y="2990850"/>
+            <a:ext cx="1219200" cy="590550"/>
+          </a:xfrm>
+          <a:prstGeom xmlns:a="http://schemas.openxmlformats.org/drawingml/2006/main" prst="rect">
+            <a:avLst/>
+          </a:prstGeom>
+          <a:solidFill xmlns:a="http://schemas.openxmlformats.org/drawingml/2006/main">
+            <a:srgbClr val="FFFFFF"/>
+          </a:solidFill>
+          <a:ln xmlns:a="http://schemas.openxmlformats.org/drawingml/2006/main" w="9525">
+            <a:solidFill>
+              <a:srgbClr val="B8BCC4"/>
+            </a:solidFill>
+            <a:prstDash val="solid"/>
+          </a:ln>
+        </p:spPr>
+      </p:sp>
+      <p:sp>
+        <p:nvSpPr>
+          <p:cNvPr id="43" name="">
+            <a:extLst xmlns:a="http://schemas.openxmlformats.org/drawingml/2006/main">
+              <a:ext uri="{FF2B5EF4-FFF2-40B4-BE49-F238E27FC236}">
+                <a16:creationId xmlns:a16="http://schemas.microsoft.com/office/drawing/2014/main" id="{BE1F360D-BDEB-4F8B-864B-D32E7D653E60}"/>
+              </a:ext>
+            </a:extLst>
+          </p:cNvPr>
+          <p:cNvSpPr>
+            <a:spLocks xmlns:a="http://schemas.openxmlformats.org/drawingml/2006/main" noGrp="1"/>
+          </p:cNvSpPr>
+          <p:nvPr/>
+        </p:nvSpPr>
+        <p:spPr>
+          <a:xfrm xmlns:a="http://schemas.openxmlformats.org/drawingml/2006/main">
+            <a:off x="7372350" y="3162300"/>
+            <a:ext cx="1066800" cy="247650"/>
+          </a:xfrm>
+          <a:prstGeom xmlns:a="http://schemas.openxmlformats.org/drawingml/2006/main" prst="rect">
+            <a:avLst/>
+          </a:prstGeom>
+          <a:noFill xmlns:a="http://schemas.openxmlformats.org/drawingml/2006/main"/>
+          <a:ln xmlns:a="http://schemas.openxmlformats.org/drawingml/2006/main" w="0">
+            <a:noFill/>
+            <a:prstDash val="solid"/>
+          </a:ln>
+        </p:spPr>
+        <p:txBody>
+          <a:bodyPr xmlns:a="http://schemas.openxmlformats.org/drawingml/2006/main"/>
+          <a:lstStyle xmlns:a="http://schemas.openxmlformats.org/drawingml/2006/main"/>
+          <a:p xmlns:a="http://schemas.openxmlformats.org/drawingml/2006/main">
+            <a:pPr>
+              <a:defRPr sz="1200" b="0">
+                <a:solidFill>
+                  <a:srgbClr val="000000"/>
+                </a:solidFill>
+              </a:defRPr>
+            </a:pPr>
+            <a:r>
+              <a:rPr sz="1200" b="0">
+                <a:solidFill>
+                  <a:srgbClr val="000000"/>
+                </a:solidFill>
+              </a:rPr>
+              <a:t>-32.0%</a:t>
+            </a:r>
+          </a:p>
+        </p:txBody>
+      </p:sp>
+      <p:sp>
+        <p:nvSpPr>
+          <p:cNvPr id="44" name="">
+            <a:extLst xmlns:a="http://schemas.openxmlformats.org/drawingml/2006/main">
+              <a:ext uri="{FF2B5EF4-FFF2-40B4-BE49-F238E27FC236}">
+                <a16:creationId xmlns:a16="http://schemas.microsoft.com/office/drawing/2014/main" id="{119E4A43-58A8-438C-8F77-BE5CD9BAD5F8}"/>
+              </a:ext>
+            </a:extLst>
+          </p:cNvPr>
+          <p:cNvSpPr>
+            <a:spLocks xmlns:a="http://schemas.openxmlformats.org/drawingml/2006/main" noGrp="1"/>
+          </p:cNvSpPr>
+          <p:nvPr/>
+        </p:nvSpPr>
+        <p:spPr>
+          <a:xfrm xmlns:a="http://schemas.openxmlformats.org/drawingml/2006/main">
+            <a:off x="8515350" y="2990850"/>
+            <a:ext cx="1047750" cy="590550"/>
+          </a:xfrm>
+          <a:prstGeom xmlns:a="http://schemas.openxmlformats.org/drawingml/2006/main" prst="rect">
+            <a:avLst/>
+          </a:prstGeom>
+          <a:solidFill xmlns:a="http://schemas.openxmlformats.org/drawingml/2006/main">
+            <a:srgbClr val="FFFFFF"/>
+          </a:solidFill>
+          <a:ln xmlns:a="http://schemas.openxmlformats.org/drawingml/2006/main" w="9525">
+            <a:solidFill>
+              <a:srgbClr val="B8BCC4"/>
+            </a:solidFill>
+            <a:prstDash val="solid"/>
+          </a:ln>
+        </p:spPr>
+      </p:sp>
+      <p:sp>
+        <p:nvSpPr>
+          <p:cNvPr id="45" name="">
+            <a:extLst xmlns:a="http://schemas.openxmlformats.org/drawingml/2006/main">
+              <a:ext uri="{FF2B5EF4-FFF2-40B4-BE49-F238E27FC236}">
+                <a16:creationId xmlns:a16="http://schemas.microsoft.com/office/drawing/2014/main" id="{6C16D34B-9CEC-47F3-85AB-B66555D1FD87}"/>
+              </a:ext>
+            </a:extLst>
+          </p:cNvPr>
+          <p:cNvSpPr>
+            <a:spLocks xmlns:a="http://schemas.openxmlformats.org/drawingml/2006/main" noGrp="1"/>
+          </p:cNvSpPr>
+          <p:nvPr/>
+        </p:nvSpPr>
+        <p:spPr>
+          <a:xfrm xmlns:a="http://schemas.openxmlformats.org/drawingml/2006/main">
+            <a:off x="8591550" y="3162300"/>
+            <a:ext cx="895350" cy="247650"/>
+          </a:xfrm>
+          <a:prstGeom xmlns:a="http://schemas.openxmlformats.org/drawingml/2006/main" prst="rect">
+            <a:avLst/>
+          </a:prstGeom>
+          <a:noFill xmlns:a="http://schemas.openxmlformats.org/drawingml/2006/main"/>
+          <a:ln xmlns:a="http://schemas.openxmlformats.org/drawingml/2006/main" w="0">
+            <a:noFill/>
+            <a:prstDash val="solid"/>
+          </a:ln>
+        </p:spPr>
+        <p:txBody>
+          <a:bodyPr xmlns:a="http://schemas.openxmlformats.org/drawingml/2006/main"/>
+          <a:lstStyle xmlns:a="http://schemas.openxmlformats.org/drawingml/2006/main"/>
+          <a:p xmlns:a="http://schemas.openxmlformats.org/drawingml/2006/main">
+            <a:pPr>
+              <a:defRPr sz="1200" b="0">
+                <a:solidFill>
+                  <a:srgbClr val="000000"/>
+                </a:solidFill>
+              </a:defRPr>
+            </a:pPr>
+            <a:r>
+              <a:rPr sz="1200" b="0">
+                <a:solidFill>
+                  <a:srgbClr val="000000"/>
+                </a:solidFill>
+              </a:rPr>
+              <a:t>30</a:t>
+            </a:r>
+          </a:p>
+        </p:txBody>
+      </p:sp>
+      <p:sp>
+        <p:nvSpPr>
+          <p:cNvPr id="46" name="">
+            <a:extLst xmlns:a="http://schemas.openxmlformats.org/drawingml/2006/main">
+              <a:ext uri="{FF2B5EF4-FFF2-40B4-BE49-F238E27FC236}">
+                <a16:creationId xmlns:a16="http://schemas.microsoft.com/office/drawing/2014/main" id="{C1810D7E-6F21-4EEC-A611-4CF9E807E42E}"/>
+              </a:ext>
+            </a:extLst>
+          </p:cNvPr>
+          <p:cNvSpPr>
+            <a:spLocks xmlns:a="http://schemas.openxmlformats.org/drawingml/2006/main" noGrp="1"/>
+          </p:cNvSpPr>
+          <p:nvPr/>
+        </p:nvSpPr>
+        <p:spPr>
+          <a:xfrm xmlns:a="http://schemas.openxmlformats.org/drawingml/2006/main">
+            <a:off x="819150" y="3581400"/>
+            <a:ext cx="838200" cy="590550"/>
+          </a:xfrm>
+          <a:prstGeom xmlns:a="http://schemas.openxmlformats.org/drawingml/2006/main" prst="rect">
+            <a:avLst/>
+          </a:prstGeom>
+          <a:solidFill xmlns:a="http://schemas.openxmlformats.org/drawingml/2006/main">
+            <a:srgbClr val="F7F7F7"/>
+          </a:solidFill>
+          <a:ln xmlns:a="http://schemas.openxmlformats.org/drawingml/2006/main" w="9525">
+            <a:solidFill>
+              <a:srgbClr val="B8BCC4"/>
+            </a:solidFill>
+            <a:prstDash val="solid"/>
+          </a:ln>
+        </p:spPr>
+      </p:sp>
+      <p:sp>
+        <p:nvSpPr>
+          <p:cNvPr id="47" name="">
+            <a:extLst xmlns:a="http://schemas.openxmlformats.org/drawingml/2006/main">
+              <a:ext uri="{FF2B5EF4-FFF2-40B4-BE49-F238E27FC236}">
+                <a16:creationId xmlns:a16="http://schemas.microsoft.com/office/drawing/2014/main" id="{C6E55187-3251-4565-BD48-AFFBE58ABB22}"/>
+              </a:ext>
+            </a:extLst>
+          </p:cNvPr>
+          <p:cNvSpPr>
+            <a:spLocks xmlns:a="http://schemas.openxmlformats.org/drawingml/2006/main" noGrp="1"/>
+          </p:cNvSpPr>
+          <p:nvPr/>
+        </p:nvSpPr>
+        <p:spPr>
+          <a:xfrm xmlns:a="http://schemas.openxmlformats.org/drawingml/2006/main">
+            <a:off x="895350" y="3752850"/>
+            <a:ext cx="685800" cy="247650"/>
+          </a:xfrm>
+          <a:prstGeom xmlns:a="http://schemas.openxmlformats.org/drawingml/2006/main" prst="rect">
+            <a:avLst/>
+          </a:prstGeom>
+          <a:noFill xmlns:a="http://schemas.openxmlformats.org/drawingml/2006/main"/>
+          <a:ln xmlns:a="http://schemas.openxmlformats.org/drawingml/2006/main" w="0">
+            <a:noFill/>
+            <a:prstDash val="solid"/>
+          </a:ln>
+        </p:spPr>
+        <p:txBody>
+          <a:bodyPr xmlns:a="http://schemas.openxmlformats.org/drawingml/2006/main"/>
+          <a:lstStyle xmlns:a="http://schemas.openxmlformats.org/drawingml/2006/main"/>
+          <a:p xmlns:a="http://schemas.openxmlformats.org/drawingml/2006/main">
+            <a:pPr>
+              <a:defRPr sz="1200" b="0">
+                <a:solidFill>
+                  <a:srgbClr val="000000"/>
+                </a:solidFill>
+              </a:defRPr>
+            </a:pPr>
+            <a:r>
+              <a:rPr sz="1200" b="0">
+                <a:solidFill>
+                  <a:srgbClr val="000000"/>
+                </a:solidFill>
+              </a:rPr>
+              <a:t>2022</a:t>
+            </a:r>
+          </a:p>
+        </p:txBody>
+      </p:sp>
+      <p:sp>
+        <p:nvSpPr>
+          <p:cNvPr id="48" name="">
+            <a:extLst xmlns:a="http://schemas.openxmlformats.org/drawingml/2006/main">
+              <a:ext uri="{FF2B5EF4-FFF2-40B4-BE49-F238E27FC236}">
+                <a16:creationId xmlns:a16="http://schemas.microsoft.com/office/drawing/2014/main" id="{6B11C61B-EAE0-4E04-8783-D88B5D6057BA}"/>
+              </a:ext>
+            </a:extLst>
+          </p:cNvPr>
+          <p:cNvSpPr>
+            <a:spLocks xmlns:a="http://schemas.openxmlformats.org/drawingml/2006/main" noGrp="1"/>
+          </p:cNvSpPr>
+          <p:nvPr/>
+        </p:nvSpPr>
+        <p:spPr>
+          <a:xfrm xmlns:a="http://schemas.openxmlformats.org/drawingml/2006/main">
+            <a:off x="1657350" y="3581400"/>
+            <a:ext cx="1962150" cy="590550"/>
+          </a:xfrm>
+          <a:prstGeom xmlns:a="http://schemas.openxmlformats.org/drawingml/2006/main" prst="rect">
+            <a:avLst/>
+          </a:prstGeom>
+          <a:solidFill xmlns:a="http://schemas.openxmlformats.org/drawingml/2006/main">
+            <a:srgbClr val="F7F7F7"/>
+          </a:solidFill>
+          <a:ln xmlns:a="http://schemas.openxmlformats.org/drawingml/2006/main" w="9525">
+            <a:solidFill>
+              <a:srgbClr val="B8BCC4"/>
+            </a:solidFill>
+            <a:prstDash val="solid"/>
+          </a:ln>
+        </p:spPr>
+      </p:sp>
+      <p:sp>
+        <p:nvSpPr>
+          <p:cNvPr id="49" name="">
+            <a:extLst xmlns:a="http://schemas.openxmlformats.org/drawingml/2006/main">
+              <a:ext uri="{FF2B5EF4-FFF2-40B4-BE49-F238E27FC236}">
+                <a16:creationId xmlns:a16="http://schemas.microsoft.com/office/drawing/2014/main" id="{11BBE457-D1C8-4513-B28B-5E25FFA27A55}"/>
+              </a:ext>
+            </a:extLst>
+          </p:cNvPr>
+          <p:cNvSpPr>
+            <a:spLocks xmlns:a="http://schemas.openxmlformats.org/drawingml/2006/main" noGrp="1"/>
+          </p:cNvSpPr>
+          <p:nvPr/>
+        </p:nvSpPr>
+        <p:spPr>
+          <a:xfrm xmlns:a="http://schemas.openxmlformats.org/drawingml/2006/main">
+            <a:off x="1733550" y="3752850"/>
+            <a:ext cx="1809750" cy="247650"/>
+          </a:xfrm>
+          <a:prstGeom xmlns:a="http://schemas.openxmlformats.org/drawingml/2006/main" prst="rect">
+            <a:avLst/>
+          </a:prstGeom>
+          <a:noFill xmlns:a="http://schemas.openxmlformats.org/drawingml/2006/main"/>
+          <a:ln xmlns:a="http://schemas.openxmlformats.org/drawingml/2006/main" w="0">
+            <a:noFill/>
+            <a:prstDash val="solid"/>
+          </a:ln>
+        </p:spPr>
+        <p:txBody>
+          <a:bodyPr xmlns:a="http://schemas.openxmlformats.org/drawingml/2006/main"/>
+          <a:lstStyle xmlns:a="http://schemas.openxmlformats.org/drawingml/2006/main"/>
+          <a:p xmlns:a="http://schemas.openxmlformats.org/drawingml/2006/main">
+            <a:pPr>
+              <a:defRPr sz="1200" b="1">
+                <a:solidFill>
+                  <a:srgbClr val="000000"/>
+                </a:solidFill>
+              </a:defRPr>
+            </a:pPr>
+            <a:r>
+              <a:rPr sz="1200" b="1">
+                <a:solidFill>
+                  <a:srgbClr val="000000"/>
+                </a:solidFill>
+              </a:rPr>
+              <a:t>Workhorse</a:t>
+            </a:r>
+          </a:p>
+        </p:txBody>
+      </p:sp>
+      <p:sp>
+        <p:nvSpPr>
+          <p:cNvPr id="50" name="">
+            <a:extLst xmlns:a="http://schemas.openxmlformats.org/drawingml/2006/main">
+              <a:ext uri="{FF2B5EF4-FFF2-40B4-BE49-F238E27FC236}">
+                <a16:creationId xmlns:a16="http://schemas.microsoft.com/office/drawing/2014/main" id="{2930FAD1-E38C-4E99-B01F-505B63BB707F}"/>
+              </a:ext>
+            </a:extLst>
+          </p:cNvPr>
+          <p:cNvSpPr>
+            <a:spLocks xmlns:a="http://schemas.openxmlformats.org/drawingml/2006/main" noGrp="1"/>
+          </p:cNvSpPr>
+          <p:nvPr/>
+        </p:nvSpPr>
+        <p:spPr>
+          <a:xfrm xmlns:a="http://schemas.openxmlformats.org/drawingml/2006/main">
+            <a:off x="3619500" y="3581400"/>
+            <a:ext cx="1238250" cy="590550"/>
+          </a:xfrm>
+          <a:prstGeom xmlns:a="http://schemas.openxmlformats.org/drawingml/2006/main" prst="rect">
+            <a:avLst/>
+          </a:prstGeom>
+          <a:solidFill xmlns:a="http://schemas.openxmlformats.org/drawingml/2006/main">
+            <a:srgbClr val="F7F7F7"/>
+          </a:solidFill>
+          <a:ln xmlns:a="http://schemas.openxmlformats.org/drawingml/2006/main" w="9525">
+            <a:solidFill>
+              <a:srgbClr val="B8BCC4"/>
+            </a:solidFill>
+            <a:prstDash val="solid"/>
+          </a:ln>
+        </p:spPr>
+      </p:sp>
+      <p:sp>
+        <p:nvSpPr>
+          <p:cNvPr id="51" name="">
+            <a:extLst xmlns:a="http://schemas.openxmlformats.org/drawingml/2006/main">
+              <a:ext uri="{FF2B5EF4-FFF2-40B4-BE49-F238E27FC236}">
+                <a16:creationId xmlns:a16="http://schemas.microsoft.com/office/drawing/2014/main" id="{1B2D7D17-32F0-44C7-9588-A632DA1DBB11}"/>
+              </a:ext>
+            </a:extLst>
+          </p:cNvPr>
+          <p:cNvSpPr>
+            <a:spLocks xmlns:a="http://schemas.openxmlformats.org/drawingml/2006/main" noGrp="1"/>
+          </p:cNvSpPr>
+          <p:nvPr/>
+        </p:nvSpPr>
+        <p:spPr>
+          <a:xfrm xmlns:a="http://schemas.openxmlformats.org/drawingml/2006/main">
+            <a:off x="3695700" y="3752850"/>
+            <a:ext cx="1085850" cy="247650"/>
+          </a:xfrm>
+          <a:prstGeom xmlns:a="http://schemas.openxmlformats.org/drawingml/2006/main" prst="rect">
+            <a:avLst/>
+          </a:prstGeom>
+          <a:noFill xmlns:a="http://schemas.openxmlformats.org/drawingml/2006/main"/>
+          <a:ln xmlns:a="http://schemas.openxmlformats.org/drawingml/2006/main" w="0">
+            <a:noFill/>
+            <a:prstDash val="solid"/>
+          </a:ln>
+        </p:spPr>
+        <p:txBody>
+          <a:bodyPr xmlns:a="http://schemas.openxmlformats.org/drawingml/2006/main"/>
+          <a:lstStyle xmlns:a="http://schemas.openxmlformats.org/drawingml/2006/main"/>
+          <a:p xmlns:a="http://schemas.openxmlformats.org/drawingml/2006/main">
+            <a:pPr>
+              <a:defRPr sz="1200" b="0">
+                <a:solidFill>
+                  <a:srgbClr val="000000"/>
+                </a:solidFill>
+              </a:defRPr>
+            </a:pPr>
+            <a:r>
+              <a:rPr sz="1200" b="0">
+                <a:solidFill>
+                  <a:srgbClr val="000000"/>
+                </a:solidFill>
+              </a:rPr>
+              <a:t>-12.9%</a:t>
+            </a:r>
+          </a:p>
+        </p:txBody>
+      </p:sp>
+      <p:sp>
+        <p:nvSpPr>
+          <p:cNvPr id="52" name="">
+            <a:extLst xmlns:a="http://schemas.openxmlformats.org/drawingml/2006/main">
+              <a:ext uri="{FF2B5EF4-FFF2-40B4-BE49-F238E27FC236}">
+                <a16:creationId xmlns:a16="http://schemas.microsoft.com/office/drawing/2014/main" id="{0FDA12AD-C358-4D2C-812F-D3EF6FDF0C39}"/>
+              </a:ext>
+            </a:extLst>
+          </p:cNvPr>
+          <p:cNvSpPr>
+            <a:spLocks xmlns:a="http://schemas.openxmlformats.org/drawingml/2006/main" noGrp="1"/>
+          </p:cNvSpPr>
+          <p:nvPr/>
+        </p:nvSpPr>
+        <p:spPr>
+          <a:xfrm xmlns:a="http://schemas.openxmlformats.org/drawingml/2006/main">
+            <a:off x="4857750" y="3581400"/>
+            <a:ext cx="1219200" cy="590550"/>
+          </a:xfrm>
+          <a:prstGeom xmlns:a="http://schemas.openxmlformats.org/drawingml/2006/main" prst="rect">
+            <a:avLst/>
+          </a:prstGeom>
+          <a:solidFill xmlns:a="http://schemas.openxmlformats.org/drawingml/2006/main">
+            <a:srgbClr val="F7F7F7"/>
+          </a:solidFill>
+          <a:ln xmlns:a="http://schemas.openxmlformats.org/drawingml/2006/main" w="9525">
+            <a:solidFill>
+              <a:srgbClr val="B8BCC4"/>
+            </a:solidFill>
+            <a:prstDash val="solid"/>
+          </a:ln>
+        </p:spPr>
+      </p:sp>
+      <p:sp>
+        <p:nvSpPr>
+          <p:cNvPr id="53" name="">
+            <a:extLst xmlns:a="http://schemas.openxmlformats.org/drawingml/2006/main">
+              <a:ext uri="{FF2B5EF4-FFF2-40B4-BE49-F238E27FC236}">
+                <a16:creationId xmlns:a16="http://schemas.microsoft.com/office/drawing/2014/main" id="{32FE8F1B-2847-4817-8FE4-14A1D6916AA7}"/>
+              </a:ext>
+            </a:extLst>
+          </p:cNvPr>
+          <p:cNvSpPr>
+            <a:spLocks xmlns:a="http://schemas.openxmlformats.org/drawingml/2006/main" noGrp="1"/>
+          </p:cNvSpPr>
+          <p:nvPr/>
+        </p:nvSpPr>
+        <p:spPr>
+          <a:xfrm xmlns:a="http://schemas.openxmlformats.org/drawingml/2006/main">
+            <a:off x="4933950" y="3752850"/>
+            <a:ext cx="1066800" cy="247650"/>
+          </a:xfrm>
+          <a:prstGeom xmlns:a="http://schemas.openxmlformats.org/drawingml/2006/main" prst="rect">
+            <a:avLst/>
+          </a:prstGeom>
+          <a:noFill xmlns:a="http://schemas.openxmlformats.org/drawingml/2006/main"/>
+          <a:ln xmlns:a="http://schemas.openxmlformats.org/drawingml/2006/main" w="0">
+            <a:noFill/>
+            <a:prstDash val="solid"/>
+          </a:ln>
+        </p:spPr>
+        <p:txBody>
+          <a:bodyPr xmlns:a="http://schemas.openxmlformats.org/drawingml/2006/main"/>
+          <a:lstStyle xmlns:a="http://schemas.openxmlformats.org/drawingml/2006/main"/>
+          <a:p xmlns:a="http://schemas.openxmlformats.org/drawingml/2006/main">
+            <a:pPr>
+              <a:defRPr sz="1200" b="0">
+                <a:solidFill>
+                  <a:srgbClr val="067647"/>
+                </a:solidFill>
+              </a:defRPr>
+            </a:pPr>
+            <a:r>
+              <a:rPr sz="1200" b="0">
+                <a:solidFill>
+                  <a:srgbClr val="067647"/>
+                </a:solidFill>
+              </a:rPr>
+              <a:t>+40.1 pp</a:t>
+            </a:r>
+          </a:p>
+        </p:txBody>
+      </p:sp>
+      <p:sp>
+        <p:nvSpPr>
+          <p:cNvPr id="54" name="">
+            <a:extLst xmlns:a="http://schemas.openxmlformats.org/drawingml/2006/main">
+              <a:ext uri="{FF2B5EF4-FFF2-40B4-BE49-F238E27FC236}">
+                <a16:creationId xmlns:a16="http://schemas.microsoft.com/office/drawing/2014/main" id="{A98BD6EE-C0EF-4566-AEB4-5D84B277983E}"/>
+              </a:ext>
+            </a:extLst>
+          </p:cNvPr>
+          <p:cNvSpPr>
+            <a:spLocks xmlns:a="http://schemas.openxmlformats.org/drawingml/2006/main" noGrp="1"/>
+          </p:cNvSpPr>
+          <p:nvPr/>
+        </p:nvSpPr>
+        <p:spPr>
+          <a:xfrm xmlns:a="http://schemas.openxmlformats.org/drawingml/2006/main">
+            <a:off x="6076950" y="3581400"/>
+            <a:ext cx="1219200" cy="590550"/>
+          </a:xfrm>
+          <a:prstGeom xmlns:a="http://schemas.openxmlformats.org/drawingml/2006/main" prst="rect">
+            <a:avLst/>
+          </a:prstGeom>
+          <a:solidFill xmlns:a="http://schemas.openxmlformats.org/drawingml/2006/main">
+            <a:srgbClr val="F7F7F7"/>
+          </a:solidFill>
+          <a:ln xmlns:a="http://schemas.openxmlformats.org/drawingml/2006/main" w="9525">
+            <a:solidFill>
+              <a:srgbClr val="B8BCC4"/>
+            </a:solidFill>
+            <a:prstDash val="solid"/>
+          </a:ln>
+        </p:spPr>
+      </p:sp>
+      <p:sp>
+        <p:nvSpPr>
+          <p:cNvPr id="55" name="">
+            <a:extLst xmlns:a="http://schemas.openxmlformats.org/drawingml/2006/main">
+              <a:ext uri="{FF2B5EF4-FFF2-40B4-BE49-F238E27FC236}">
+                <a16:creationId xmlns:a16="http://schemas.microsoft.com/office/drawing/2014/main" id="{5EE4F482-3191-4BC2-A67B-2987FA3C93D4}"/>
+              </a:ext>
+            </a:extLst>
+          </p:cNvPr>
+          <p:cNvSpPr>
+            <a:spLocks xmlns:a="http://schemas.openxmlformats.org/drawingml/2006/main" noGrp="1"/>
+          </p:cNvSpPr>
+          <p:nvPr/>
+        </p:nvSpPr>
+        <p:spPr>
+          <a:xfrm xmlns:a="http://schemas.openxmlformats.org/drawingml/2006/main">
+            <a:off x="6153150" y="3752850"/>
+            <a:ext cx="1066800" cy="247650"/>
+          </a:xfrm>
+          <a:prstGeom xmlns:a="http://schemas.openxmlformats.org/drawingml/2006/main" prst="rect">
+            <a:avLst/>
+          </a:prstGeom>
+          <a:noFill xmlns:a="http://schemas.openxmlformats.org/drawingml/2006/main"/>
+          <a:ln xmlns:a="http://schemas.openxmlformats.org/drawingml/2006/main" w="0">
+            <a:noFill/>
+            <a:prstDash val="solid"/>
+          </a:ln>
+        </p:spPr>
+        <p:txBody>
+          <a:bodyPr xmlns:a="http://schemas.openxmlformats.org/drawingml/2006/main"/>
+          <a:lstStyle xmlns:a="http://schemas.openxmlformats.org/drawingml/2006/main"/>
+          <a:p xmlns:a="http://schemas.openxmlformats.org/drawingml/2006/main">
+            <a:pPr>
+              <a:defRPr sz="1200" b="0">
+                <a:solidFill>
+                  <a:srgbClr val="000000"/>
+                </a:solidFill>
+              </a:defRPr>
+            </a:pPr>
+            <a:r>
+              <a:rPr sz="1200" b="0">
+                <a:solidFill>
+                  <a:srgbClr val="000000"/>
+                </a:solidFill>
+              </a:rPr>
+              <a:t>25.9%</a:t>
+            </a:r>
+          </a:p>
+        </p:txBody>
+      </p:sp>
+      <p:sp>
+        <p:nvSpPr>
+          <p:cNvPr id="56" name="">
+            <a:extLst xmlns:a="http://schemas.openxmlformats.org/drawingml/2006/main">
+              <a:ext uri="{FF2B5EF4-FFF2-40B4-BE49-F238E27FC236}">
+                <a16:creationId xmlns:a16="http://schemas.microsoft.com/office/drawing/2014/main" id="{4CA6B6DE-965C-47E2-9ACF-202C027D3865}"/>
+              </a:ext>
+            </a:extLst>
+          </p:cNvPr>
+          <p:cNvSpPr>
+            <a:spLocks xmlns:a="http://schemas.openxmlformats.org/drawingml/2006/main" noGrp="1"/>
+          </p:cNvSpPr>
+          <p:nvPr/>
+        </p:nvSpPr>
+        <p:spPr>
+          <a:xfrm xmlns:a="http://schemas.openxmlformats.org/drawingml/2006/main">
+            <a:off x="7296150" y="3581400"/>
+            <a:ext cx="1219200" cy="590550"/>
+          </a:xfrm>
+          <a:prstGeom xmlns:a="http://schemas.openxmlformats.org/drawingml/2006/main" prst="rect">
+            <a:avLst/>
+          </a:prstGeom>
+          <a:solidFill xmlns:a="http://schemas.openxmlformats.org/drawingml/2006/main">
+            <a:srgbClr val="F7F7F7"/>
+          </a:solidFill>
+          <a:ln xmlns:a="http://schemas.openxmlformats.org/drawingml/2006/main" w="9525">
+            <a:solidFill>
+              <a:srgbClr val="B8BCC4"/>
+            </a:solidFill>
+            <a:prstDash val="solid"/>
+          </a:ln>
+        </p:spPr>
+      </p:sp>
+      <p:sp>
+        <p:nvSpPr>
+          <p:cNvPr id="57" name="">
+            <a:extLst xmlns:a="http://schemas.openxmlformats.org/drawingml/2006/main">
+              <a:ext uri="{FF2B5EF4-FFF2-40B4-BE49-F238E27FC236}">
+                <a16:creationId xmlns:a16="http://schemas.microsoft.com/office/drawing/2014/main" id="{B393798D-5A26-4212-8630-4694FECC44D7}"/>
+              </a:ext>
+            </a:extLst>
+          </p:cNvPr>
+          <p:cNvSpPr>
+            <a:spLocks xmlns:a="http://schemas.openxmlformats.org/drawingml/2006/main" noGrp="1"/>
+          </p:cNvSpPr>
+          <p:nvPr/>
+        </p:nvSpPr>
+        <p:spPr>
+          <a:xfrm xmlns:a="http://schemas.openxmlformats.org/drawingml/2006/main">
+            <a:off x="7372350" y="3752850"/>
+            <a:ext cx="1066800" cy="247650"/>
+          </a:xfrm>
+          <a:prstGeom xmlns:a="http://schemas.openxmlformats.org/drawingml/2006/main" prst="rect">
+            <a:avLst/>
+          </a:prstGeom>
+          <a:noFill xmlns:a="http://schemas.openxmlformats.org/drawingml/2006/main"/>
+          <a:ln xmlns:a="http://schemas.openxmlformats.org/drawingml/2006/main" w="0">
+            <a:noFill/>
+            <a:prstDash val="solid"/>
+          </a:ln>
+        </p:spPr>
+        <p:txBody>
+          <a:bodyPr xmlns:a="http://schemas.openxmlformats.org/drawingml/2006/main"/>
+          <a:lstStyle xmlns:a="http://schemas.openxmlformats.org/drawingml/2006/main"/>
+          <a:p xmlns:a="http://schemas.openxmlformats.org/drawingml/2006/main">
+            <a:pPr>
+              <a:defRPr sz="1200" b="0">
+                <a:solidFill>
+                  <a:srgbClr val="000000"/>
+                </a:solidFill>
+              </a:defRPr>
+            </a:pPr>
+            <a:r>
+              <a:rPr sz="1200" b="0">
+                <a:solidFill>
+                  <a:srgbClr val="000000"/>
+                </a:solidFill>
+              </a:rPr>
+              <a:t>-17.6%</a:t>
+            </a:r>
+          </a:p>
+        </p:txBody>
+      </p:sp>
+      <p:sp>
+        <p:nvSpPr>
+          <p:cNvPr id="58" name="">
+            <a:extLst xmlns:a="http://schemas.openxmlformats.org/drawingml/2006/main">
+              <a:ext uri="{FF2B5EF4-FFF2-40B4-BE49-F238E27FC236}">
+                <a16:creationId xmlns:a16="http://schemas.microsoft.com/office/drawing/2014/main" id="{D7744EC9-C1FF-4E3E-AA92-F41E4C29815D}"/>
+              </a:ext>
+            </a:extLst>
+          </p:cNvPr>
+          <p:cNvSpPr>
+            <a:spLocks xmlns:a="http://schemas.openxmlformats.org/drawingml/2006/main" noGrp="1"/>
+          </p:cNvSpPr>
+          <p:nvPr/>
+        </p:nvSpPr>
+        <p:spPr>
+          <a:xfrm xmlns:a="http://schemas.openxmlformats.org/drawingml/2006/main">
+            <a:off x="8515350" y="3581400"/>
+            <a:ext cx="1047750" cy="590550"/>
+          </a:xfrm>
+          <a:prstGeom xmlns:a="http://schemas.openxmlformats.org/drawingml/2006/main" prst="rect">
+            <a:avLst/>
+          </a:prstGeom>
+          <a:solidFill xmlns:a="http://schemas.openxmlformats.org/drawingml/2006/main">
+            <a:srgbClr val="F7F7F7"/>
+          </a:solidFill>
+          <a:ln xmlns:a="http://schemas.openxmlformats.org/drawingml/2006/main" w="9525">
+            <a:solidFill>
+              <a:srgbClr val="B8BCC4"/>
+            </a:solidFill>
+            <a:prstDash val="solid"/>
+          </a:ln>
+        </p:spPr>
+      </p:sp>
+      <p:sp>
+        <p:nvSpPr>
+          <p:cNvPr id="59" name="">
+            <a:extLst xmlns:a="http://schemas.openxmlformats.org/drawingml/2006/main">
+              <a:ext uri="{FF2B5EF4-FFF2-40B4-BE49-F238E27FC236}">
+                <a16:creationId xmlns:a16="http://schemas.microsoft.com/office/drawing/2014/main" id="{C0E43E43-EA5A-4955-BA8A-3E5676E52305}"/>
+              </a:ext>
+            </a:extLst>
+          </p:cNvPr>
+          <p:cNvSpPr>
+            <a:spLocks xmlns:a="http://schemas.openxmlformats.org/drawingml/2006/main" noGrp="1"/>
+          </p:cNvSpPr>
+          <p:nvPr/>
+        </p:nvSpPr>
+        <p:spPr>
+          <a:xfrm xmlns:a="http://schemas.openxmlformats.org/drawingml/2006/main">
+            <a:off x="8591550" y="3752850"/>
+            <a:ext cx="895350" cy="247650"/>
+          </a:xfrm>
+          <a:prstGeom xmlns:a="http://schemas.openxmlformats.org/drawingml/2006/main" prst="rect">
+            <a:avLst/>
+          </a:prstGeom>
+          <a:noFill xmlns:a="http://schemas.openxmlformats.org/drawingml/2006/main"/>
+          <a:ln xmlns:a="http://schemas.openxmlformats.org/drawingml/2006/main" w="0">
+            <a:noFill/>
+            <a:prstDash val="solid"/>
+          </a:ln>
+        </p:spPr>
+        <p:txBody>
+          <a:bodyPr xmlns:a="http://schemas.openxmlformats.org/drawingml/2006/main"/>
+          <a:lstStyle xmlns:a="http://schemas.openxmlformats.org/drawingml/2006/main"/>
+          <a:p xmlns:a="http://schemas.openxmlformats.org/drawingml/2006/main">
+            <a:pPr>
+              <a:defRPr sz="1200" b="0">
+                <a:solidFill>
+                  <a:srgbClr val="000000"/>
+                </a:solidFill>
+              </a:defRPr>
+            </a:pPr>
+            <a:r>
+              <a:rPr sz="1200" b="0">
+                <a:solidFill>
+                  <a:srgbClr val="000000"/>
+                </a:solidFill>
+              </a:rPr>
+              <a:t>41</a:t>
+            </a:r>
+          </a:p>
+        </p:txBody>
+      </p:sp>
+      <p:sp>
+        <p:nvSpPr>
+          <p:cNvPr id="60" name="">
+            <a:extLst xmlns:a="http://schemas.openxmlformats.org/drawingml/2006/main">
+              <a:ext uri="{FF2B5EF4-FFF2-40B4-BE49-F238E27FC236}">
+                <a16:creationId xmlns:a16="http://schemas.microsoft.com/office/drawing/2014/main" id="{898F5AC9-8531-4358-82E4-D3D93857400D}"/>
+              </a:ext>
+            </a:extLst>
+          </p:cNvPr>
+          <p:cNvSpPr>
+            <a:spLocks xmlns:a="http://schemas.openxmlformats.org/drawingml/2006/main" noGrp="1"/>
+          </p:cNvSpPr>
+          <p:nvPr/>
+        </p:nvSpPr>
+        <p:spPr>
+          <a:xfrm xmlns:a="http://schemas.openxmlformats.org/drawingml/2006/main">
+            <a:off x="819150" y="4171950"/>
+            <a:ext cx="838200" cy="590550"/>
+          </a:xfrm>
+          <a:prstGeom xmlns:a="http://schemas.openxmlformats.org/drawingml/2006/main" prst="rect">
+            <a:avLst/>
+          </a:prstGeom>
+          <a:solidFill xmlns:a="http://schemas.openxmlformats.org/drawingml/2006/main">
+            <a:srgbClr val="FFFFFF"/>
+          </a:solidFill>
+          <a:ln xmlns:a="http://schemas.openxmlformats.org/drawingml/2006/main" w="9525">
+            <a:solidFill>
+              <a:srgbClr val="B8BCC4"/>
+            </a:solidFill>
+            <a:prstDash val="solid"/>
+          </a:ln>
+        </p:spPr>
+      </p:sp>
+      <p:sp>
+        <p:nvSpPr>
+          <p:cNvPr id="61" name="">
+            <a:extLst xmlns:a="http://schemas.openxmlformats.org/drawingml/2006/main">
+              <a:ext uri="{FF2B5EF4-FFF2-40B4-BE49-F238E27FC236}">
+                <a16:creationId xmlns:a16="http://schemas.microsoft.com/office/drawing/2014/main" id="{08AB92CE-02C7-4F8B-87D1-CE3E27B19019}"/>
+              </a:ext>
+            </a:extLst>
+          </p:cNvPr>
+          <p:cNvSpPr>
+            <a:spLocks xmlns:a="http://schemas.openxmlformats.org/drawingml/2006/main" noGrp="1"/>
+          </p:cNvSpPr>
+          <p:nvPr/>
+        </p:nvSpPr>
+        <p:spPr>
+          <a:xfrm xmlns:a="http://schemas.openxmlformats.org/drawingml/2006/main">
+            <a:off x="895350" y="4343400"/>
+            <a:ext cx="685800" cy="247650"/>
+          </a:xfrm>
+          <a:prstGeom xmlns:a="http://schemas.openxmlformats.org/drawingml/2006/main" prst="rect">
+            <a:avLst/>
+          </a:prstGeom>
+          <a:noFill xmlns:a="http://schemas.openxmlformats.org/drawingml/2006/main"/>
+          <a:ln xmlns:a="http://schemas.openxmlformats.org/drawingml/2006/main" w="0">
+            <a:noFill/>
+            <a:prstDash val="solid"/>
+          </a:ln>
+        </p:spPr>
+        <p:txBody>
+          <a:bodyPr xmlns:a="http://schemas.openxmlformats.org/drawingml/2006/main"/>
+          <a:lstStyle xmlns:a="http://schemas.openxmlformats.org/drawingml/2006/main"/>
+          <a:p xmlns:a="http://schemas.openxmlformats.org/drawingml/2006/main">
+            <a:pPr>
+              <a:defRPr sz="1200" b="0">
+                <a:solidFill>
+                  <a:srgbClr val="000000"/>
+                </a:solidFill>
+              </a:defRPr>
+            </a:pPr>
+            <a:r>
+              <a:rPr sz="1200" b="0">
+                <a:solidFill>
+                  <a:srgbClr val="000000"/>
+                </a:solidFill>
+              </a:rPr>
+              <a:t>2022</a:t>
+            </a:r>
+          </a:p>
+        </p:txBody>
+      </p:sp>
+      <p:sp>
+        <p:nvSpPr>
+          <p:cNvPr id="62" name="">
+            <a:extLst xmlns:a="http://schemas.openxmlformats.org/drawingml/2006/main">
+              <a:ext uri="{FF2B5EF4-FFF2-40B4-BE49-F238E27FC236}">
+                <a16:creationId xmlns:a16="http://schemas.microsoft.com/office/drawing/2014/main" id="{A72C6403-459F-45D0-A413-D173B10B7DED}"/>
+              </a:ext>
+            </a:extLst>
+          </p:cNvPr>
+          <p:cNvSpPr>
+            <a:spLocks xmlns:a="http://schemas.openxmlformats.org/drawingml/2006/main" noGrp="1"/>
+          </p:cNvSpPr>
+          <p:nvPr/>
+        </p:nvSpPr>
+        <p:spPr>
+          <a:xfrm xmlns:a="http://schemas.openxmlformats.org/drawingml/2006/main">
+            <a:off x="1657350" y="4171950"/>
+            <a:ext cx="1962150" cy="590550"/>
+          </a:xfrm>
+          <a:prstGeom xmlns:a="http://schemas.openxmlformats.org/drawingml/2006/main" prst="rect">
+            <a:avLst/>
+          </a:prstGeom>
+          <a:solidFill xmlns:a="http://schemas.openxmlformats.org/drawingml/2006/main">
+            <a:srgbClr val="FFFFFF"/>
+          </a:solidFill>
+          <a:ln xmlns:a="http://schemas.openxmlformats.org/drawingml/2006/main" w="9525">
+            <a:solidFill>
+              <a:srgbClr val="B8BCC4"/>
+            </a:solidFill>
+            <a:prstDash val="solid"/>
+          </a:ln>
+        </p:spPr>
+      </p:sp>
+      <p:sp>
+        <p:nvSpPr>
+          <p:cNvPr id="63" name="">
+            <a:extLst xmlns:a="http://schemas.openxmlformats.org/drawingml/2006/main">
+              <a:ext uri="{FF2B5EF4-FFF2-40B4-BE49-F238E27FC236}">
+                <a16:creationId xmlns:a16="http://schemas.microsoft.com/office/drawing/2014/main" id="{A06B9D65-7BB5-4835-909F-1D037EE6E346}"/>
+              </a:ext>
+            </a:extLst>
+          </p:cNvPr>
+          <p:cNvSpPr>
+            <a:spLocks xmlns:a="http://schemas.openxmlformats.org/drawingml/2006/main" noGrp="1"/>
+          </p:cNvSpPr>
+          <p:nvPr/>
+        </p:nvSpPr>
+        <p:spPr>
+          <a:xfrm xmlns:a="http://schemas.openxmlformats.org/drawingml/2006/main">
+            <a:off x="1733550" y="4343400"/>
+            <a:ext cx="1809750" cy="247650"/>
+          </a:xfrm>
+          <a:prstGeom xmlns:a="http://schemas.openxmlformats.org/drawingml/2006/main" prst="rect">
+            <a:avLst/>
+          </a:prstGeom>
+          <a:noFill xmlns:a="http://schemas.openxmlformats.org/drawingml/2006/main"/>
+          <a:ln xmlns:a="http://schemas.openxmlformats.org/drawingml/2006/main" w="0">
+            <a:noFill/>
+            <a:prstDash val="solid"/>
+          </a:ln>
+        </p:spPr>
+        <p:txBody>
+          <a:bodyPr xmlns:a="http://schemas.openxmlformats.org/drawingml/2006/main"/>
+          <a:lstStyle xmlns:a="http://schemas.openxmlformats.org/drawingml/2006/main"/>
+          <a:p xmlns:a="http://schemas.openxmlformats.org/drawingml/2006/main">
+            <a:pPr>
+              <a:defRPr sz="1200" b="1">
+                <a:solidFill>
+                  <a:srgbClr val="000000"/>
+                </a:solidFill>
+              </a:defRPr>
+            </a:pPr>
+            <a:r>
+              <a:rPr sz="1200" b="1">
+                <a:solidFill>
+                  <a:srgbClr val="000000"/>
+                </a:solidFill>
+              </a:rPr>
+              <a:t>Reversion context</a:t>
+            </a:r>
+          </a:p>
+        </p:txBody>
+      </p:sp>
+      <p:sp>
+        <p:nvSpPr>
+          <p:cNvPr id="64" name="">
+            <a:extLst xmlns:a="http://schemas.openxmlformats.org/drawingml/2006/main">
+              <a:ext uri="{FF2B5EF4-FFF2-40B4-BE49-F238E27FC236}">
+                <a16:creationId xmlns:a16="http://schemas.microsoft.com/office/drawing/2014/main" id="{1C667D60-D914-4FF1-B63F-EAC1C6E8FCB9}"/>
+              </a:ext>
+            </a:extLst>
+          </p:cNvPr>
+          <p:cNvSpPr>
+            <a:spLocks xmlns:a="http://schemas.openxmlformats.org/drawingml/2006/main" noGrp="1"/>
+          </p:cNvSpPr>
+          <p:nvPr/>
+        </p:nvSpPr>
+        <p:spPr>
+          <a:xfrm xmlns:a="http://schemas.openxmlformats.org/drawingml/2006/main">
+            <a:off x="3619500" y="4171950"/>
+            <a:ext cx="1238250" cy="590550"/>
+          </a:xfrm>
+          <a:prstGeom xmlns:a="http://schemas.openxmlformats.org/drawingml/2006/main" prst="rect">
+            <a:avLst/>
+          </a:prstGeom>
+          <a:solidFill xmlns:a="http://schemas.openxmlformats.org/drawingml/2006/main">
+            <a:srgbClr val="FFFFFF"/>
+          </a:solidFill>
+          <a:ln xmlns:a="http://schemas.openxmlformats.org/drawingml/2006/main" w="9525">
+            <a:solidFill>
+              <a:srgbClr val="B8BCC4"/>
+            </a:solidFill>
+            <a:prstDash val="solid"/>
+          </a:ln>
+        </p:spPr>
+      </p:sp>
+      <p:sp>
+        <p:nvSpPr>
+          <p:cNvPr id="65" name="">
+            <a:extLst xmlns:a="http://schemas.openxmlformats.org/drawingml/2006/main">
+              <a:ext uri="{FF2B5EF4-FFF2-40B4-BE49-F238E27FC236}">
+                <a16:creationId xmlns:a16="http://schemas.microsoft.com/office/drawing/2014/main" id="{79C15977-C31D-44B2-8F72-D9D520B6F9A0}"/>
+              </a:ext>
+            </a:extLst>
+          </p:cNvPr>
+          <p:cNvSpPr>
+            <a:spLocks xmlns:a="http://schemas.openxmlformats.org/drawingml/2006/main" noGrp="1"/>
+          </p:cNvSpPr>
+          <p:nvPr/>
+        </p:nvSpPr>
+        <p:spPr>
+          <a:xfrm xmlns:a="http://schemas.openxmlformats.org/drawingml/2006/main">
+            <a:off x="3695700" y="4343400"/>
+            <a:ext cx="1085850" cy="247650"/>
+          </a:xfrm>
+          <a:prstGeom xmlns:a="http://schemas.openxmlformats.org/drawingml/2006/main" prst="rect">
+            <a:avLst/>
+          </a:prstGeom>
+          <a:noFill xmlns:a="http://schemas.openxmlformats.org/drawingml/2006/main"/>
+          <a:ln xmlns:a="http://schemas.openxmlformats.org/drawingml/2006/main" w="0">
+            <a:noFill/>
+            <a:prstDash val="solid"/>
+          </a:ln>
+        </p:spPr>
+        <p:txBody>
+          <a:bodyPr xmlns:a="http://schemas.openxmlformats.org/drawingml/2006/main"/>
+          <a:lstStyle xmlns:a="http://schemas.openxmlformats.org/drawingml/2006/main"/>
+          <a:p xmlns:a="http://schemas.openxmlformats.org/drawingml/2006/main">
+            <a:pPr>
+              <a:defRPr sz="1200" b="0">
+                <a:solidFill>
+                  <a:srgbClr val="000000"/>
+                </a:solidFill>
+              </a:defRPr>
+            </a:pPr>
+            <a:r>
+              <a:rPr sz="1200" b="0">
+                <a:solidFill>
+                  <a:srgbClr val="000000"/>
+                </a:solidFill>
+              </a:rPr>
+              <a:t>-17.6%</a:t>
+            </a:r>
+          </a:p>
+        </p:txBody>
+      </p:sp>
+      <p:sp>
+        <p:nvSpPr>
+          <p:cNvPr id="66" name="">
+            <a:extLst xmlns:a="http://schemas.openxmlformats.org/drawingml/2006/main">
+              <a:ext uri="{FF2B5EF4-FFF2-40B4-BE49-F238E27FC236}">
+                <a16:creationId xmlns:a16="http://schemas.microsoft.com/office/drawing/2014/main" id="{5FA73FAF-A501-4956-9364-1FA572FA1738}"/>
+              </a:ext>
+            </a:extLst>
+          </p:cNvPr>
+          <p:cNvSpPr>
+            <a:spLocks xmlns:a="http://schemas.openxmlformats.org/drawingml/2006/main" noGrp="1"/>
+          </p:cNvSpPr>
+          <p:nvPr/>
+        </p:nvSpPr>
+        <p:spPr>
+          <a:xfrm xmlns:a="http://schemas.openxmlformats.org/drawingml/2006/main">
+            <a:off x="4857750" y="4171950"/>
+            <a:ext cx="1219200" cy="590550"/>
+          </a:xfrm>
+          <a:prstGeom xmlns:a="http://schemas.openxmlformats.org/drawingml/2006/main" prst="rect">
+            <a:avLst/>
+          </a:prstGeom>
+          <a:solidFill xmlns:a="http://schemas.openxmlformats.org/drawingml/2006/main">
+            <a:srgbClr val="FFFFFF"/>
+          </a:solidFill>
+          <a:ln xmlns:a="http://schemas.openxmlformats.org/drawingml/2006/main" w="9525">
+            <a:solidFill>
+              <a:srgbClr val="B8BCC4"/>
+            </a:solidFill>
+            <a:prstDash val="solid"/>
+          </a:ln>
+        </p:spPr>
+      </p:sp>
+      <p:sp>
+        <p:nvSpPr>
+          <p:cNvPr id="67" name="">
+            <a:extLst xmlns:a="http://schemas.openxmlformats.org/drawingml/2006/main">
+              <a:ext uri="{FF2B5EF4-FFF2-40B4-BE49-F238E27FC236}">
+                <a16:creationId xmlns:a16="http://schemas.microsoft.com/office/drawing/2014/main" id="{F976B21B-971D-465D-B2B4-08A9D079CE35}"/>
+              </a:ext>
+            </a:extLst>
+          </p:cNvPr>
+          <p:cNvSpPr>
+            <a:spLocks xmlns:a="http://schemas.openxmlformats.org/drawingml/2006/main" noGrp="1"/>
+          </p:cNvSpPr>
+          <p:nvPr/>
+        </p:nvSpPr>
+        <p:spPr>
+          <a:xfrm xmlns:a="http://schemas.openxmlformats.org/drawingml/2006/main">
+            <a:off x="4933950" y="4343400"/>
+            <a:ext cx="1066800" cy="247650"/>
+          </a:xfrm>
+          <a:prstGeom xmlns:a="http://schemas.openxmlformats.org/drawingml/2006/main" prst="rect">
+            <a:avLst/>
+          </a:prstGeom>
+          <a:noFill xmlns:a="http://schemas.openxmlformats.org/drawingml/2006/main"/>
+          <a:ln xmlns:a="http://schemas.openxmlformats.org/drawingml/2006/main" w="0">
+            <a:noFill/>
+            <a:prstDash val="solid"/>
+          </a:ln>
+        </p:spPr>
+        <p:txBody>
+          <a:bodyPr xmlns:a="http://schemas.openxmlformats.org/drawingml/2006/main"/>
+          <a:lstStyle xmlns:a="http://schemas.openxmlformats.org/drawingml/2006/main"/>
+          <a:p xmlns:a="http://schemas.openxmlformats.org/drawingml/2006/main">
+            <a:pPr>
+              <a:defRPr sz="1200" b="0">
+                <a:solidFill>
+                  <a:srgbClr val="067647"/>
+                </a:solidFill>
+              </a:defRPr>
+            </a:pPr>
+            <a:r>
+              <a:rPr sz="1200" b="0">
+                <a:solidFill>
+                  <a:srgbClr val="067647"/>
+                </a:solidFill>
+              </a:rPr>
+              <a:t>+35.4 pp</a:t>
+            </a:r>
+          </a:p>
+        </p:txBody>
+      </p:sp>
+      <p:sp>
+        <p:nvSpPr>
+          <p:cNvPr id="68" name="">
+            <a:extLst xmlns:a="http://schemas.openxmlformats.org/drawingml/2006/main">
+              <a:ext uri="{FF2B5EF4-FFF2-40B4-BE49-F238E27FC236}">
+                <a16:creationId xmlns:a16="http://schemas.microsoft.com/office/drawing/2014/main" id="{150EB7ED-E7EC-4BD9-9496-7FE90D977CCF}"/>
+              </a:ext>
+            </a:extLst>
+          </p:cNvPr>
+          <p:cNvSpPr>
+            <a:spLocks xmlns:a="http://schemas.openxmlformats.org/drawingml/2006/main" noGrp="1"/>
+          </p:cNvSpPr>
+          <p:nvPr/>
+        </p:nvSpPr>
+        <p:spPr>
+          <a:xfrm xmlns:a="http://schemas.openxmlformats.org/drawingml/2006/main">
+            <a:off x="6076950" y="4171950"/>
+            <a:ext cx="1219200" cy="590550"/>
+          </a:xfrm>
+          <a:prstGeom xmlns:a="http://schemas.openxmlformats.org/drawingml/2006/main" prst="rect">
+            <a:avLst/>
+          </a:prstGeom>
+          <a:solidFill xmlns:a="http://schemas.openxmlformats.org/drawingml/2006/main">
+            <a:srgbClr val="FFFFFF"/>
+          </a:solidFill>
+          <a:ln xmlns:a="http://schemas.openxmlformats.org/drawingml/2006/main" w="9525">
+            <a:solidFill>
+              <a:srgbClr val="B8BCC4"/>
+            </a:solidFill>
+            <a:prstDash val="solid"/>
+          </a:ln>
+        </p:spPr>
+      </p:sp>
+      <p:sp>
+        <p:nvSpPr>
+          <p:cNvPr id="69" name="">
+            <a:extLst xmlns:a="http://schemas.openxmlformats.org/drawingml/2006/main">
+              <a:ext uri="{FF2B5EF4-FFF2-40B4-BE49-F238E27FC236}">
+                <a16:creationId xmlns:a16="http://schemas.microsoft.com/office/drawing/2014/main" id="{8346D55E-9B7E-4A91-A0CD-D2E8CC3AA9CD}"/>
+              </a:ext>
+            </a:extLst>
+          </p:cNvPr>
+          <p:cNvSpPr>
+            <a:spLocks xmlns:a="http://schemas.openxmlformats.org/drawingml/2006/main" noGrp="1"/>
+          </p:cNvSpPr>
+          <p:nvPr/>
+        </p:nvSpPr>
+        <p:spPr>
+          <a:xfrm xmlns:a="http://schemas.openxmlformats.org/drawingml/2006/main">
+            <a:off x="6153150" y="4343400"/>
+            <a:ext cx="1066800" cy="247650"/>
+          </a:xfrm>
+          <a:prstGeom xmlns:a="http://schemas.openxmlformats.org/drawingml/2006/main" prst="rect">
+            <a:avLst/>
+          </a:prstGeom>
+          <a:noFill xmlns:a="http://schemas.openxmlformats.org/drawingml/2006/main"/>
+          <a:ln xmlns:a="http://schemas.openxmlformats.org/drawingml/2006/main" w="0">
+            <a:noFill/>
+            <a:prstDash val="solid"/>
+          </a:ln>
+        </p:spPr>
+        <p:txBody>
+          <a:bodyPr xmlns:a="http://schemas.openxmlformats.org/drawingml/2006/main"/>
+          <a:lstStyle xmlns:a="http://schemas.openxmlformats.org/drawingml/2006/main"/>
+          <a:p xmlns:a="http://schemas.openxmlformats.org/drawingml/2006/main">
+            <a:pPr>
+              <a:defRPr sz="1200" b="0">
+                <a:solidFill>
+                  <a:srgbClr val="000000"/>
+                </a:solidFill>
+              </a:defRPr>
+            </a:pPr>
+            <a:r>
+              <a:rPr sz="1200" b="0">
+                <a:solidFill>
+                  <a:srgbClr val="000000"/>
+                </a:solidFill>
+              </a:rPr>
+              <a:t>27.3%</a:t>
+            </a:r>
+          </a:p>
+        </p:txBody>
+      </p:sp>
+      <p:sp>
+        <p:nvSpPr>
+          <p:cNvPr id="70" name="">
+            <a:extLst xmlns:a="http://schemas.openxmlformats.org/drawingml/2006/main">
+              <a:ext uri="{FF2B5EF4-FFF2-40B4-BE49-F238E27FC236}">
+                <a16:creationId xmlns:a16="http://schemas.microsoft.com/office/drawing/2014/main" id="{213C61B0-D949-4C9B-9C7A-E83675804BAE}"/>
+              </a:ext>
+            </a:extLst>
+          </p:cNvPr>
+          <p:cNvSpPr>
+            <a:spLocks xmlns:a="http://schemas.openxmlformats.org/drawingml/2006/main" noGrp="1"/>
+          </p:cNvSpPr>
+          <p:nvPr/>
+        </p:nvSpPr>
+        <p:spPr>
+          <a:xfrm xmlns:a="http://schemas.openxmlformats.org/drawingml/2006/main">
+            <a:off x="7296150" y="4171950"/>
+            <a:ext cx="1219200" cy="590550"/>
+          </a:xfrm>
+          <a:prstGeom xmlns:a="http://schemas.openxmlformats.org/drawingml/2006/main" prst="rect">
+            <a:avLst/>
+          </a:prstGeom>
+          <a:solidFill xmlns:a="http://schemas.openxmlformats.org/drawingml/2006/main">
+            <a:srgbClr val="FFFFFF"/>
+          </a:solidFill>
+          <a:ln xmlns:a="http://schemas.openxmlformats.org/drawingml/2006/main" w="9525">
+            <a:solidFill>
+              <a:srgbClr val="B8BCC4"/>
+            </a:solidFill>
+            <a:prstDash val="solid"/>
+          </a:ln>
+        </p:spPr>
+      </p:sp>
+      <p:sp>
+        <p:nvSpPr>
+          <p:cNvPr id="71" name="">
+            <a:extLst xmlns:a="http://schemas.openxmlformats.org/drawingml/2006/main">
+              <a:ext uri="{FF2B5EF4-FFF2-40B4-BE49-F238E27FC236}">
+                <a16:creationId xmlns:a16="http://schemas.microsoft.com/office/drawing/2014/main" id="{6947C217-035C-40FF-922A-9DAD49B7059D}"/>
+              </a:ext>
+            </a:extLst>
+          </p:cNvPr>
+          <p:cNvSpPr>
+            <a:spLocks xmlns:a="http://schemas.openxmlformats.org/drawingml/2006/main" noGrp="1"/>
+          </p:cNvSpPr>
+          <p:nvPr/>
+        </p:nvSpPr>
+        <p:spPr>
+          <a:xfrm xmlns:a="http://schemas.openxmlformats.org/drawingml/2006/main">
+            <a:off x="7372350" y="4343400"/>
+            <a:ext cx="1066800" cy="247650"/>
+          </a:xfrm>
+          <a:prstGeom xmlns:a="http://schemas.openxmlformats.org/drawingml/2006/main" prst="rect">
+            <a:avLst/>
+          </a:prstGeom>
+          <a:noFill xmlns:a="http://schemas.openxmlformats.org/drawingml/2006/main"/>
+          <a:ln xmlns:a="http://schemas.openxmlformats.org/drawingml/2006/main" w="0">
+            <a:noFill/>
+            <a:prstDash val="solid"/>
+          </a:ln>
+        </p:spPr>
+        <p:txBody>
+          <a:bodyPr xmlns:a="http://schemas.openxmlformats.org/drawingml/2006/main"/>
+          <a:lstStyle xmlns:a="http://schemas.openxmlformats.org/drawingml/2006/main"/>
+          <a:p xmlns:a="http://schemas.openxmlformats.org/drawingml/2006/main">
+            <a:pPr>
+              <a:defRPr sz="1200" b="0">
+                <a:solidFill>
+                  <a:srgbClr val="000000"/>
+                </a:solidFill>
+              </a:defRPr>
+            </a:pPr>
+            <a:r>
+              <a:rPr sz="1200" b="0">
+                <a:solidFill>
+                  <a:srgbClr val="000000"/>
+                </a:solidFill>
+              </a:rPr>
+              <a:t>-19.5%</a:t>
+            </a:r>
+          </a:p>
+        </p:txBody>
+      </p:sp>
+      <p:sp>
+        <p:nvSpPr>
+          <p:cNvPr id="72" name="">
+            <a:extLst xmlns:a="http://schemas.openxmlformats.org/drawingml/2006/main">
+              <a:ext uri="{FF2B5EF4-FFF2-40B4-BE49-F238E27FC236}">
+                <a16:creationId xmlns:a16="http://schemas.microsoft.com/office/drawing/2014/main" id="{CE8B4F45-93DA-49B6-94EF-8F0AF3852E8F}"/>
+              </a:ext>
+            </a:extLst>
+          </p:cNvPr>
+          <p:cNvSpPr>
+            <a:spLocks xmlns:a="http://schemas.openxmlformats.org/drawingml/2006/main" noGrp="1"/>
+          </p:cNvSpPr>
+          <p:nvPr/>
+        </p:nvSpPr>
+        <p:spPr>
+          <a:xfrm xmlns:a="http://schemas.openxmlformats.org/drawingml/2006/main">
+            <a:off x="8515350" y="4171950"/>
+            <a:ext cx="1047750" cy="590550"/>
+          </a:xfrm>
+          <a:prstGeom xmlns:a="http://schemas.openxmlformats.org/drawingml/2006/main" prst="rect">
+            <a:avLst/>
+          </a:prstGeom>
+          <a:solidFill xmlns:a="http://schemas.openxmlformats.org/drawingml/2006/main">
+            <a:srgbClr val="FFFFFF"/>
+          </a:solidFill>
+          <a:ln xmlns:a="http://schemas.openxmlformats.org/drawingml/2006/main" w="9525">
+            <a:solidFill>
+              <a:srgbClr val="B8BCC4"/>
+            </a:solidFill>
+            <a:prstDash val="solid"/>
+          </a:ln>
+        </p:spPr>
+      </p:sp>
+      <p:sp>
+        <p:nvSpPr>
+          <p:cNvPr id="73" name="">
+            <a:extLst xmlns:a="http://schemas.openxmlformats.org/drawingml/2006/main">
+              <a:ext uri="{FF2B5EF4-FFF2-40B4-BE49-F238E27FC236}">
+                <a16:creationId xmlns:a16="http://schemas.microsoft.com/office/drawing/2014/main" id="{5F635E65-4048-4871-BCAF-5544011A583E}"/>
+              </a:ext>
+            </a:extLst>
+          </p:cNvPr>
+          <p:cNvSpPr>
+            <a:spLocks xmlns:a="http://schemas.openxmlformats.org/drawingml/2006/main" noGrp="1"/>
+          </p:cNvSpPr>
+          <p:nvPr/>
+        </p:nvSpPr>
+        <p:spPr>
+          <a:xfrm xmlns:a="http://schemas.openxmlformats.org/drawingml/2006/main">
+            <a:off x="8591550" y="4343400"/>
+            <a:ext cx="895350" cy="247650"/>
+          </a:xfrm>
+          <a:prstGeom xmlns:a="http://schemas.openxmlformats.org/drawingml/2006/main" prst="rect">
+            <a:avLst/>
+          </a:prstGeom>
+          <a:noFill xmlns:a="http://schemas.openxmlformats.org/drawingml/2006/main"/>
+          <a:ln xmlns:a="http://schemas.openxmlformats.org/drawingml/2006/main" w="0">
+            <a:noFill/>
+            <a:prstDash val="solid"/>
+          </a:ln>
+        </p:spPr>
+        <p:txBody>
+          <a:bodyPr xmlns:a="http://schemas.openxmlformats.org/drawingml/2006/main"/>
+          <a:lstStyle xmlns:a="http://schemas.openxmlformats.org/drawingml/2006/main"/>
+          <a:p xmlns:a="http://schemas.openxmlformats.org/drawingml/2006/main">
+            <a:pPr>
+              <a:defRPr sz="1200" b="0">
+                <a:solidFill>
+                  <a:srgbClr val="000000"/>
+                </a:solidFill>
+              </a:defRPr>
+            </a:pPr>
+            <a:r>
+              <a:rPr sz="1200" b="0">
+                <a:solidFill>
+                  <a:srgbClr val="000000"/>
+                </a:solidFill>
+              </a:rPr>
+              <a:t>44</a:t>
+            </a:r>
+          </a:p>
+        </p:txBody>
+      </p:sp>
+      <p:sp>
+        <p:nvSpPr>
+          <p:cNvPr id="74" name="">
+            <a:extLst xmlns:a="http://schemas.openxmlformats.org/drawingml/2006/main">
+              <a:ext uri="{FF2B5EF4-FFF2-40B4-BE49-F238E27FC236}">
+                <a16:creationId xmlns:a16="http://schemas.microsoft.com/office/drawing/2014/main" id="{DA9B3F46-3E84-4EE9-95DE-262FA0BD2344}"/>
+              </a:ext>
+            </a:extLst>
+          </p:cNvPr>
+          <p:cNvSpPr>
+            <a:spLocks xmlns:a="http://schemas.openxmlformats.org/drawingml/2006/main" noGrp="1"/>
+          </p:cNvSpPr>
+          <p:nvPr/>
+        </p:nvSpPr>
+        <p:spPr>
+          <a:xfrm xmlns:a="http://schemas.openxmlformats.org/drawingml/2006/main">
+            <a:off x="1066800" y="5391150"/>
+            <a:ext cx="9753600" cy="590550"/>
+          </a:xfrm>
+          <a:prstGeom xmlns:a="http://schemas.openxmlformats.org/drawingml/2006/main" prst="rect">
+            <a:avLst/>
+          </a:prstGeom>
+          <a:noFill xmlns:a="http://schemas.openxmlformats.org/drawingml/2006/main"/>
+          <a:ln xmlns:a="http://schemas.openxmlformats.org/drawingml/2006/main" w="0">
+            <a:noFill/>
+            <a:prstDash val="solid"/>
+          </a:ln>
+        </p:spPr>
+        <p:txBody>
+          <a:bodyPr xmlns:a="http://schemas.openxmlformats.org/drawingml/2006/main"/>
+          <a:lstStyle xmlns:a="http://schemas.openxmlformats.org/drawingml/2006/main"/>
+          <a:p xmlns:a="http://schemas.openxmlformats.org/drawingml/2006/main">
+            <a:pPr algn="ctr">
+              <a:defRPr sz="1725" b="1">
+                <a:solidFill>
+                  <a:srgbClr val="000000"/>
+                </a:solidFill>
+              </a:defRPr>
+            </a:pPr>
+            <a:r>
+              <a:rPr sz="1725" b="1">
+                <a:solidFill>
+                  <a:srgbClr val="000000"/>
+                </a:solidFill>
+              </a:rPr>
+              <a:t>The diagnostic behaved like a defensive/range-trading probe: it reduced 2022 damage versus basket hold, but it badly lagged the 2020 rally and did not improve on the EMA control.</a:t>
+            </a:r>
+          </a:p>
+        </p:txBody>
+      </p:sp>
+      <p:sp>
+        <p:nvSpPr>
+          <p:cNvPr id="75" name="">
+            <a:extLst xmlns:a="http://schemas.openxmlformats.org/drawingml/2006/main">
+              <a:ext uri="{FF2B5EF4-FFF2-40B4-BE49-F238E27FC236}">
+                <a16:creationId xmlns:a16="http://schemas.microsoft.com/office/drawing/2014/main" id="{BA32C0E5-6E49-4B39-B2D4-0B2842EBCC1F}"/>
+              </a:ext>
+            </a:extLst>
+          </p:cNvPr>
+          <p:cNvSpPr>
+            <a:spLocks xmlns:a="http://schemas.openxmlformats.org/drawingml/2006/main" noGrp="1"/>
+          </p:cNvSpPr>
+          <p:nvPr/>
+        </p:nvSpPr>
+        <p:spPr>
+          <a:xfrm xmlns:a="http://schemas.openxmlformats.org/drawingml/2006/main">
+            <a:off x="514350" y="6477000"/>
+            <a:ext cx="11163300" cy="209550"/>
+          </a:xfrm>
+          <a:prstGeom xmlns:a="http://schemas.openxmlformats.org/drawingml/2006/main" prst="rect">
+            <a:avLst/>
+          </a:prstGeom>
+          <a:noFill xmlns:a="http://schemas.openxmlformats.org/drawingml/2006/main"/>
+          <a:ln xmlns:a="http://schemas.openxmlformats.org/drawingml/2006/main" w="0">
+            <a:noFill/>
+            <a:prstDash val="solid"/>
+          </a:ln>
+        </p:spPr>
+        <p:txBody>
+          <a:bodyPr xmlns:a="http://schemas.openxmlformats.org/drawingml/2006/main"/>
+          <a:lstStyle xmlns:a="http://schemas.openxmlformats.org/drawingml/2006/main"/>
+          <a:p xmlns:a="http://schemas.openxmlformats.org/drawingml/2006/main">
+            <a:pPr>
+              <a:defRPr sz="900" b="0">
+                <a:solidFill>
+                  <a:srgbClr val="555555"/>
+                </a:solidFill>
+              </a:defRPr>
+            </a:pPr>
+            <a:r>
+              <a:rPr sz="900" b="0">
+                <a:solidFill>
+                  <a:srgbClr val="555555"/>
+                </a:solidFill>
+              </a:rPr>
+              <a:t>Research/inspection only. Not allocation evidence or live-advice behavior.</a:t>
+            </a:r>
+          </a:p>
+        </p:txBody>
+      </p:sp>
+    </p:spTree>
+    <p:extLst>
+      <p:ext uri="{BB962C8B-B14F-4D97-AF65-F5344CB8AC3E}">
+        <p14:creationId xmlns:p14="http://schemas.microsoft.com/office/powerpoint/2010/main" val="1557966060"/>
+      </p:ext>
+    </p:extLst>
+  </p:cSld>
+</p:sld>
+</file>
+
+<file path=ppt/slides/slide19.xml><?xml version="1.0" encoding="utf-8"?>
+<p:sld xmlns:p="http://schemas.openxmlformats.org/presentationml/2006/main">
+  <p:cSld>
+    <p:bg>
+      <p:bgPr>
+        <a:solidFill xmlns:a="http://schemas.openxmlformats.org/drawingml/2006/main">
+          <a:srgbClr val="FFFFFF"/>
+        </a:solidFill>
+      </p:bgPr>
+    </p:bg>
+    <p:spTree>
+      <p:nvGrpSpPr>
+        <p:cNvPr id="1" name=""/>
+        <p:cNvGrpSpPr/>
+        <p:nvPr/>
+      </p:nvGrpSpPr>
+      <p:grpSpPr>
+        <a:xfrm xmlns:a="http://schemas.openxmlformats.org/drawingml/2006/main"/>
+      </p:grpSpPr>
+      <p:sp>
+        <p:nvSpPr>
+          <p:cNvPr id="1" name="">
+            <a:extLst xmlns:a="http://schemas.openxmlformats.org/drawingml/2006/main">
+              <a:ext uri="{FF2B5EF4-FFF2-40B4-BE49-F238E27FC236}">
+                <a16:creationId xmlns:a16="http://schemas.microsoft.com/office/drawing/2014/main" id="{D8F73B89-72E5-4BED-8479-18F5DD7D34C5}"/>
+              </a:ext>
+            </a:extLst>
+          </p:cNvPr>
+          <p:cNvSpPr>
+            <a:spLocks xmlns:a="http://schemas.openxmlformats.org/drawingml/2006/main" noGrp="1"/>
+          </p:cNvSpPr>
+          <p:nvPr/>
+        </p:nvSpPr>
+        <p:spPr>
+          <a:xfrm xmlns:a="http://schemas.openxmlformats.org/drawingml/2006/main">
+            <a:off x="514350" y="266700"/>
+            <a:ext cx="5905500" cy="228600"/>
+          </a:xfrm>
+          <a:prstGeom xmlns:a="http://schemas.openxmlformats.org/drawingml/2006/main" prst="rect">
+            <a:avLst/>
+          </a:prstGeom>
+          <a:noFill xmlns:a="http://schemas.openxmlformats.org/drawingml/2006/main"/>
+          <a:ln xmlns:a="http://schemas.openxmlformats.org/drawingml/2006/main" w="0">
+            <a:noFill/>
+            <a:prstDash val="solid"/>
+          </a:ln>
+        </p:spPr>
+        <p:txBody>
+          <a:bodyPr xmlns:a="http://schemas.openxmlformats.org/drawingml/2006/main"/>
+          <a:lstStyle xmlns:a="http://schemas.openxmlformats.org/drawingml/2006/main"/>
+          <a:p xmlns:a="http://schemas.openxmlformats.org/drawingml/2006/main">
+            <a:pPr>
+              <a:defRPr sz="1050" b="1">
+                <a:solidFill>
+                  <a:srgbClr val="555555"/>
+                </a:solidFill>
+              </a:defRPr>
+            </a:pPr>
+            <a:r>
+              <a:rPr sz="1050" b="1">
+                <a:solidFill>
+                  <a:srgbClr val="555555"/>
+                </a:solidFill>
+              </a:rPr>
+              <a:t>GEN5.3 MOMENTUM CONTEXT-SIZE SCREEN</a:t>
+            </a:r>
+          </a:p>
+        </p:txBody>
+      </p:sp>
+      <p:sp>
+        <p:nvSpPr>
+          <p:cNvPr id="2" name="">
+            <a:extLst xmlns:a="http://schemas.openxmlformats.org/drawingml/2006/main">
+              <a:ext uri="{FF2B5EF4-FFF2-40B4-BE49-F238E27FC236}">
+                <a16:creationId xmlns:a16="http://schemas.microsoft.com/office/drawing/2014/main" id="{AE4E80BF-38F1-4D1E-BE09-4F4B424EAA71}"/>
+              </a:ext>
+            </a:extLst>
+          </p:cNvPr>
+          <p:cNvSpPr>
+            <a:spLocks xmlns:a="http://schemas.openxmlformats.org/drawingml/2006/main" noGrp="1"/>
+          </p:cNvSpPr>
+          <p:nvPr/>
+        </p:nvSpPr>
+        <p:spPr>
+          <a:xfrm xmlns:a="http://schemas.openxmlformats.org/drawingml/2006/main">
+            <a:off x="514350" y="628650"/>
+            <a:ext cx="10287000" cy="990600"/>
+          </a:xfrm>
+          <a:prstGeom xmlns:a="http://schemas.openxmlformats.org/drawingml/2006/main" prst="rect">
+            <a:avLst/>
+          </a:prstGeom>
+          <a:noFill xmlns:a="http://schemas.openxmlformats.org/drawingml/2006/main"/>
+          <a:ln xmlns:a="http://schemas.openxmlformats.org/drawingml/2006/main" w="0">
+            <a:noFill/>
+            <a:prstDash val="solid"/>
+          </a:ln>
+        </p:spPr>
+        <p:txBody>
+          <a:bodyPr xmlns:a="http://schemas.openxmlformats.org/drawingml/2006/main"/>
+          <a:lstStyle xmlns:a="http://schemas.openxmlformats.org/drawingml/2006/main"/>
+          <a:p xmlns:a="http://schemas.openxmlformats.org/drawingml/2006/main">
+            <a:pPr>
+              <a:defRPr sz="2850" b="1">
+                <a:solidFill>
+                  <a:srgbClr val="000000"/>
+                </a:solidFill>
+              </a:defRPr>
+            </a:pPr>
+            <a:r>
+              <a:rPr sz="2850" b="1">
+                <a:solidFill>
+                  <a:srgbClr val="000000"/>
+                </a:solidFill>
+              </a:rPr>
+              <a:t>The mean-reversion map is mostly cash with narrow Bollinger pockets</a:t>
+            </a:r>
+          </a:p>
+        </p:txBody>
+      </p:sp>
+      <p:sp>
+        <p:nvSpPr>
+          <p:cNvPr id="3" name="">
+            <a:extLst xmlns:a="http://schemas.openxmlformats.org/drawingml/2006/main">
+              <a:ext uri="{FF2B5EF4-FFF2-40B4-BE49-F238E27FC236}">
+                <a16:creationId xmlns:a16="http://schemas.microsoft.com/office/drawing/2014/main" id="{229D09F0-B352-48C9-A9B8-451123591360}"/>
+              </a:ext>
+            </a:extLst>
+          </p:cNvPr>
+          <p:cNvSpPr>
+            <a:spLocks xmlns:a="http://schemas.openxmlformats.org/drawingml/2006/main" noGrp="1"/>
+          </p:cNvSpPr>
+          <p:nvPr/>
+        </p:nvSpPr>
+        <p:spPr>
+          <a:xfrm xmlns:a="http://schemas.openxmlformats.org/drawingml/2006/main">
+            <a:off x="514350" y="1619250"/>
+            <a:ext cx="11163300" cy="9525"/>
+          </a:xfrm>
+          <a:prstGeom xmlns:a="http://schemas.openxmlformats.org/drawingml/2006/main" prst="rect">
+            <a:avLst/>
+          </a:prstGeom>
+          <a:solidFill xmlns:a="http://schemas.openxmlformats.org/drawingml/2006/main">
+            <a:srgbClr val="B8BCC4"/>
+          </a:solidFill>
+          <a:ln xmlns:a="http://schemas.openxmlformats.org/drawingml/2006/main" w="9525">
+            <a:solidFill>
+              <a:srgbClr val="B8BCC4"/>
+            </a:solidFill>
+            <a:prstDash val="solid"/>
+          </a:ln>
+        </p:spPr>
+      </p:sp>
+      <p:pic>
+        <p:nvPicPr>
+          <p:cNvPr id="20" name=""/>
+          <p:cNvPicPr>
+            <a:picLocks xmlns:a="http://schemas.openxmlformats.org/drawingml/2006/main" noChangeAspect="1"/>
+          </p:cNvPicPr>
+          <p:nvPr/>
+        </p:nvPicPr>
+        <p:blipFill>
+          <a:blip xmlns:r="http://schemas.openxmlformats.org/officeDocument/2006/relationships" xmlns:a="http://schemas.openxmlformats.org/drawingml/2006/main" r:embed="Rd8bb16a8565f4e59"/>
+          <a:stretch xmlns:a="http://schemas.openxmlformats.org/drawingml/2006/main"/>
+        </p:blipFill>
+        <p:spPr>
+          <a:xfrm xmlns:a="http://schemas.openxmlformats.org/drawingml/2006/main">
+            <a:off x="552450" y="1716332"/>
+            <a:ext cx="6724650" cy="4396887"/>
+          </a:xfrm>
+          <a:prstGeom xmlns:a="http://schemas.openxmlformats.org/drawingml/2006/main" prst="rect">
+            <a:avLst/>
+          </a:prstGeom>
+        </p:spPr>
+      </p:pic>
+      <p:sp>
+        <p:nvSpPr>
+          <p:cNvPr id="5" name="">
+            <a:extLst xmlns:a="http://schemas.openxmlformats.org/drawingml/2006/main">
+              <a:ext uri="{FF2B5EF4-FFF2-40B4-BE49-F238E27FC236}">
+                <a16:creationId xmlns:a16="http://schemas.microsoft.com/office/drawing/2014/main" id="{A9A1674E-D8B6-46C8-89ED-F43D6BF9EFDD}"/>
+              </a:ext>
+            </a:extLst>
+          </p:cNvPr>
+          <p:cNvSpPr>
+            <a:spLocks xmlns:a="http://schemas.openxmlformats.org/drawingml/2006/main" noGrp="1"/>
+          </p:cNvSpPr>
+          <p:nvPr/>
+        </p:nvSpPr>
+        <p:spPr>
+          <a:xfrm xmlns:a="http://schemas.openxmlformats.org/drawingml/2006/main">
+            <a:off x="7810500" y="2152650"/>
+            <a:ext cx="3181350" cy="2781300"/>
+          </a:xfrm>
+          <a:prstGeom xmlns:a="http://schemas.openxmlformats.org/drawingml/2006/main" prst="rect">
+            <a:avLst/>
+          </a:prstGeom>
+          <a:solidFill xmlns:a="http://schemas.openxmlformats.org/drawingml/2006/main">
+            <a:srgbClr val="EDEDED"/>
+          </a:solidFill>
+          <a:ln xmlns:a="http://schemas.openxmlformats.org/drawingml/2006/main" w="9525">
+            <a:solidFill>
+              <a:srgbClr val="B8BCC4"/>
+            </a:solidFill>
+            <a:prstDash val="solid"/>
+          </a:ln>
+        </p:spPr>
+      </p:sp>
+      <p:sp>
+        <p:nvSpPr>
+          <p:cNvPr id="6" name="">
+            <a:extLst xmlns:a="http://schemas.openxmlformats.org/drawingml/2006/main">
+              <a:ext uri="{FF2B5EF4-FFF2-40B4-BE49-F238E27FC236}">
+                <a16:creationId xmlns:a16="http://schemas.microsoft.com/office/drawing/2014/main" id="{F8116AF5-F54F-4B06-93FF-A41EE3AA0A04}"/>
+              </a:ext>
+            </a:extLst>
+          </p:cNvPr>
+          <p:cNvSpPr>
+            <a:spLocks xmlns:a="http://schemas.openxmlformats.org/drawingml/2006/main" noGrp="1"/>
+          </p:cNvSpPr>
+          <p:nvPr/>
+        </p:nvSpPr>
+        <p:spPr>
+          <a:xfrm xmlns:a="http://schemas.openxmlformats.org/drawingml/2006/main">
+            <a:off x="8115300" y="2438400"/>
+            <a:ext cx="2286000" cy="304800"/>
+          </a:xfrm>
+          <a:prstGeom xmlns:a="http://schemas.openxmlformats.org/drawingml/2006/main" prst="rect">
+            <a:avLst/>
+          </a:prstGeom>
+          <a:noFill xmlns:a="http://schemas.openxmlformats.org/drawingml/2006/main"/>
+          <a:ln xmlns:a="http://schemas.openxmlformats.org/drawingml/2006/main" w="0">
+            <a:noFill/>
+            <a:prstDash val="solid"/>
+          </a:ln>
+        </p:spPr>
+        <p:txBody>
+          <a:bodyPr xmlns:a="http://schemas.openxmlformats.org/drawingml/2006/main"/>
+          <a:lstStyle xmlns:a="http://schemas.openxmlformats.org/drawingml/2006/main"/>
+          <a:p xmlns:a="http://schemas.openxmlformats.org/drawingml/2006/main">
+            <a:pPr>
+              <a:defRPr sz="1950" b="1">
+                <a:solidFill>
+                  <a:srgbClr val="000000"/>
+                </a:solidFill>
+              </a:defRPr>
+            </a:pPr>
+            <a:r>
+              <a:rPr sz="1950" b="1">
+                <a:solidFill>
+                  <a:srgbClr val="000000"/>
+                </a:solidFill>
+              </a:rPr>
+              <a:t>Visual read</a:t>
+            </a:r>
+          </a:p>
+        </p:txBody>
+      </p:sp>
+      <p:sp>
+        <p:nvSpPr>
+          <p:cNvPr id="7" name="">
+            <a:extLst xmlns:a="http://schemas.openxmlformats.org/drawingml/2006/main">
+              <a:ext uri="{FF2B5EF4-FFF2-40B4-BE49-F238E27FC236}">
+                <a16:creationId xmlns:a16="http://schemas.microsoft.com/office/drawing/2014/main" id="{BAD47873-B5D2-44AF-87B3-CEA60448BAEC}"/>
+              </a:ext>
+            </a:extLst>
+          </p:cNvPr>
+          <p:cNvSpPr>
+            <a:spLocks xmlns:a="http://schemas.openxmlformats.org/drawingml/2006/main" noGrp="1"/>
+          </p:cNvSpPr>
+          <p:nvPr/>
+        </p:nvSpPr>
+        <p:spPr>
+          <a:xfrm xmlns:a="http://schemas.openxmlformats.org/drawingml/2006/main">
+            <a:off x="8134350" y="3086100"/>
+            <a:ext cx="76200" cy="76200"/>
+          </a:xfrm>
+          <a:prstGeom xmlns:a="http://schemas.openxmlformats.org/drawingml/2006/main" prst="rect">
+            <a:avLst/>
+          </a:prstGeom>
+          <a:solidFill xmlns:a="http://schemas.openxmlformats.org/drawingml/2006/main">
+            <a:srgbClr val="FF6B35"/>
+          </a:solidFill>
+          <a:ln xmlns:a="http://schemas.openxmlformats.org/drawingml/2006/main" w="9525">
+            <a:solidFill>
+              <a:srgbClr val="FF6B35"/>
+            </a:solidFill>
+            <a:prstDash val="solid"/>
+          </a:ln>
+        </p:spPr>
+      </p:sp>
+      <p:sp>
+        <p:nvSpPr>
+          <p:cNvPr id="8" name="">
+            <a:extLst xmlns:a="http://schemas.openxmlformats.org/drawingml/2006/main">
+              <a:ext uri="{FF2B5EF4-FFF2-40B4-BE49-F238E27FC236}">
+                <a16:creationId xmlns:a16="http://schemas.microsoft.com/office/drawing/2014/main" id="{BA8B363D-61D8-4FC6-8A12-4B2C4D82B904}"/>
+              </a:ext>
+            </a:extLst>
+          </p:cNvPr>
+          <p:cNvSpPr>
+            <a:spLocks xmlns:a="http://schemas.openxmlformats.org/drawingml/2006/main" noGrp="1"/>
+          </p:cNvSpPr>
+          <p:nvPr/>
+        </p:nvSpPr>
+        <p:spPr>
+          <a:xfrm xmlns:a="http://schemas.openxmlformats.org/drawingml/2006/main">
+            <a:off x="8343900" y="2990850"/>
+            <a:ext cx="2133600" cy="466725"/>
+          </a:xfrm>
+          <a:prstGeom xmlns:a="http://schemas.openxmlformats.org/drawingml/2006/main" prst="rect">
+            <a:avLst/>
+          </a:prstGeom>
+          <a:noFill xmlns:a="http://schemas.openxmlformats.org/drawingml/2006/main"/>
+          <a:ln xmlns:a="http://schemas.openxmlformats.org/drawingml/2006/main" w="0">
+            <a:noFill/>
+            <a:prstDash val="solid"/>
+          </a:ln>
+        </p:spPr>
+        <p:txBody>
+          <a:bodyPr xmlns:a="http://schemas.openxmlformats.org/drawingml/2006/main"/>
+          <a:lstStyle xmlns:a="http://schemas.openxmlformats.org/drawingml/2006/main"/>
+          <a:p xmlns:a="http://schemas.openxmlformats.org/drawingml/2006/main">
+            <a:pPr>
+              <a:defRPr sz="1200" b="0">
+                <a:solidFill>
+                  <a:srgbClr val="000000"/>
+                </a:solidFill>
+              </a:defRPr>
+            </a:pPr>
+            <a:r>
+              <a:rPr sz="1200" b="0">
+                <a:solidFill>
+                  <a:srgbClr val="000000"/>
+                </a:solidFill>
+              </a:rPr>
+              <a:t>No-trade still dominates many asset-state cells.</a:t>
+            </a:r>
+          </a:p>
+        </p:txBody>
+      </p:sp>
+      <p:sp>
+        <p:nvSpPr>
+          <p:cNvPr id="9" name="">
+            <a:extLst xmlns:a="http://schemas.openxmlformats.org/drawingml/2006/main">
+              <a:ext uri="{FF2B5EF4-FFF2-40B4-BE49-F238E27FC236}">
+                <a16:creationId xmlns:a16="http://schemas.microsoft.com/office/drawing/2014/main" id="{0AD5987D-014C-40F0-9AC8-D534A6000DDE}"/>
+              </a:ext>
+            </a:extLst>
+          </p:cNvPr>
+          <p:cNvSpPr>
+            <a:spLocks xmlns:a="http://schemas.openxmlformats.org/drawingml/2006/main" noGrp="1"/>
+          </p:cNvSpPr>
+          <p:nvPr/>
+        </p:nvSpPr>
+        <p:spPr>
+          <a:xfrm xmlns:a="http://schemas.openxmlformats.org/drawingml/2006/main">
+            <a:off x="8134350" y="3495675"/>
+            <a:ext cx="76200" cy="76200"/>
+          </a:xfrm>
+          <a:prstGeom xmlns:a="http://schemas.openxmlformats.org/drawingml/2006/main" prst="rect">
+            <a:avLst/>
+          </a:prstGeom>
+          <a:solidFill xmlns:a="http://schemas.openxmlformats.org/drawingml/2006/main">
+            <a:srgbClr val="FF6B35"/>
+          </a:solidFill>
+          <a:ln xmlns:a="http://schemas.openxmlformats.org/drawingml/2006/main" w="9525">
+            <a:solidFill>
+              <a:srgbClr val="FF6B35"/>
+            </a:solidFill>
+            <a:prstDash val="solid"/>
+          </a:ln>
+        </p:spPr>
+      </p:sp>
+      <p:sp>
+        <p:nvSpPr>
+          <p:cNvPr id="10" name="">
+            <a:extLst xmlns:a="http://schemas.openxmlformats.org/drawingml/2006/main">
+              <a:ext uri="{FF2B5EF4-FFF2-40B4-BE49-F238E27FC236}">
+                <a16:creationId xmlns:a16="http://schemas.microsoft.com/office/drawing/2014/main" id="{E081142D-FE45-4DEE-B154-203265F7D182}"/>
+              </a:ext>
+            </a:extLst>
+          </p:cNvPr>
+          <p:cNvSpPr>
+            <a:spLocks xmlns:a="http://schemas.openxmlformats.org/drawingml/2006/main" noGrp="1"/>
+          </p:cNvSpPr>
+          <p:nvPr/>
+        </p:nvSpPr>
+        <p:spPr>
+          <a:xfrm xmlns:a="http://schemas.openxmlformats.org/drawingml/2006/main">
+            <a:off x="8343900" y="3400425"/>
+            <a:ext cx="2133600" cy="466725"/>
+          </a:xfrm>
+          <a:prstGeom xmlns:a="http://schemas.openxmlformats.org/drawingml/2006/main" prst="rect">
+            <a:avLst/>
+          </a:prstGeom>
+          <a:noFill xmlns:a="http://schemas.openxmlformats.org/drawingml/2006/main"/>
+          <a:ln xmlns:a="http://schemas.openxmlformats.org/drawingml/2006/main" w="0">
+            <a:noFill/>
+            <a:prstDash val="solid"/>
+          </a:ln>
+        </p:spPr>
+        <p:txBody>
+          <a:bodyPr xmlns:a="http://schemas.openxmlformats.org/drawingml/2006/main"/>
+          <a:lstStyle xmlns:a="http://schemas.openxmlformats.org/drawingml/2006/main"/>
+          <a:p xmlns:a="http://schemas.openxmlformats.org/drawingml/2006/main">
+            <a:pPr>
+              <a:defRPr sz="1200" b="0">
+                <a:solidFill>
+                  <a:srgbClr val="000000"/>
+                </a:solidFill>
+              </a:defRPr>
+            </a:pPr>
+            <a:r>
+              <a:rPr sz="1200" b="0">
+                <a:solidFill>
+                  <a:srgbClr val="000000"/>
+                </a:solidFill>
+              </a:rPr>
+              <a:t>Bollinger variants appear in selective pockets, especially AVGO.</a:t>
+            </a:r>
+          </a:p>
+        </p:txBody>
+      </p:sp>
+      <p:sp>
+        <p:nvSpPr>
+          <p:cNvPr id="11" name="">
+            <a:extLst xmlns:a="http://schemas.openxmlformats.org/drawingml/2006/main">
+              <a:ext uri="{FF2B5EF4-FFF2-40B4-BE49-F238E27FC236}">
+                <a16:creationId xmlns:a16="http://schemas.microsoft.com/office/drawing/2014/main" id="{0EC82760-B82B-46B2-8EEE-FFEE077A2443}"/>
+              </a:ext>
+            </a:extLst>
+          </p:cNvPr>
+          <p:cNvSpPr>
+            <a:spLocks xmlns:a="http://schemas.openxmlformats.org/drawingml/2006/main" noGrp="1"/>
+          </p:cNvSpPr>
+          <p:nvPr/>
+        </p:nvSpPr>
+        <p:spPr>
+          <a:xfrm xmlns:a="http://schemas.openxmlformats.org/drawingml/2006/main">
+            <a:off x="8134350" y="3905250"/>
+            <a:ext cx="76200" cy="76200"/>
+          </a:xfrm>
+          <a:prstGeom xmlns:a="http://schemas.openxmlformats.org/drawingml/2006/main" prst="rect">
+            <a:avLst/>
+          </a:prstGeom>
+          <a:solidFill xmlns:a="http://schemas.openxmlformats.org/drawingml/2006/main">
+            <a:srgbClr val="FF6B35"/>
+          </a:solidFill>
+          <a:ln xmlns:a="http://schemas.openxmlformats.org/drawingml/2006/main" w="9525">
+            <a:solidFill>
+              <a:srgbClr val="FF6B35"/>
+            </a:solidFill>
+            <a:prstDash val="solid"/>
+          </a:ln>
+        </p:spPr>
+      </p:sp>
+      <p:sp>
+        <p:nvSpPr>
+          <p:cNvPr id="12" name="">
+            <a:extLst xmlns:a="http://schemas.openxmlformats.org/drawingml/2006/main">
+              <a:ext uri="{FF2B5EF4-FFF2-40B4-BE49-F238E27FC236}">
+                <a16:creationId xmlns:a16="http://schemas.microsoft.com/office/drawing/2014/main" id="{8076ABDC-5287-4F20-AE54-9E709267EEAF}"/>
+              </a:ext>
+            </a:extLst>
+          </p:cNvPr>
+          <p:cNvSpPr>
+            <a:spLocks xmlns:a="http://schemas.openxmlformats.org/drawingml/2006/main" noGrp="1"/>
+          </p:cNvSpPr>
+          <p:nvPr/>
+        </p:nvSpPr>
+        <p:spPr>
+          <a:xfrm xmlns:a="http://schemas.openxmlformats.org/drawingml/2006/main">
+            <a:off x="8343900" y="3810000"/>
+            <a:ext cx="2133600" cy="466725"/>
+          </a:xfrm>
+          <a:prstGeom xmlns:a="http://schemas.openxmlformats.org/drawingml/2006/main" prst="rect">
+            <a:avLst/>
+          </a:prstGeom>
+          <a:noFill xmlns:a="http://schemas.openxmlformats.org/drawingml/2006/main"/>
+          <a:ln xmlns:a="http://schemas.openxmlformats.org/drawingml/2006/main" w="0">
+            <a:noFill/>
+            <a:prstDash val="solid"/>
+          </a:ln>
+        </p:spPr>
+        <p:txBody>
+          <a:bodyPr xmlns:a="http://schemas.openxmlformats.org/drawingml/2006/main"/>
+          <a:lstStyle xmlns:a="http://schemas.openxmlformats.org/drawingml/2006/main"/>
+          <a:p xmlns:a="http://schemas.openxmlformats.org/drawingml/2006/main">
+            <a:pPr>
+              <a:defRPr sz="1200" b="0">
+                <a:solidFill>
+                  <a:srgbClr val="000000"/>
+                </a:solidFill>
+              </a:defRPr>
+            </a:pPr>
+            <a:r>
+              <a:rPr sz="1200" b="0">
+                <a:solidFill>
+                  <a:srgbClr val="000000"/>
+                </a:solidFill>
+              </a:rPr>
+              <a:t>RSI and z-return did not become dominant state actions.</a:t>
+            </a:r>
+          </a:p>
+        </p:txBody>
+      </p:sp>
+      <p:sp>
+        <p:nvSpPr>
+          <p:cNvPr id="13" name="">
+            <a:extLst xmlns:a="http://schemas.openxmlformats.org/drawingml/2006/main">
+              <a:ext uri="{FF2B5EF4-FFF2-40B4-BE49-F238E27FC236}">
+                <a16:creationId xmlns:a16="http://schemas.microsoft.com/office/drawing/2014/main" id="{08048B2B-B721-40D7-B15A-9305F2A5428E}"/>
+              </a:ext>
+            </a:extLst>
+          </p:cNvPr>
+          <p:cNvSpPr>
+            <a:spLocks xmlns:a="http://schemas.openxmlformats.org/drawingml/2006/main" noGrp="1"/>
+          </p:cNvSpPr>
+          <p:nvPr/>
+        </p:nvSpPr>
+        <p:spPr>
+          <a:xfrm xmlns:a="http://schemas.openxmlformats.org/drawingml/2006/main">
+            <a:off x="8134350" y="4314825"/>
+            <a:ext cx="76200" cy="76200"/>
+          </a:xfrm>
+          <a:prstGeom xmlns:a="http://schemas.openxmlformats.org/drawingml/2006/main" prst="rect">
+            <a:avLst/>
+          </a:prstGeom>
+          <a:solidFill xmlns:a="http://schemas.openxmlformats.org/drawingml/2006/main">
+            <a:srgbClr val="FF6B35"/>
+          </a:solidFill>
+          <a:ln xmlns:a="http://schemas.openxmlformats.org/drawingml/2006/main" w="9525">
+            <a:solidFill>
+              <a:srgbClr val="FF6B35"/>
+            </a:solidFill>
+            <a:prstDash val="solid"/>
+          </a:ln>
+        </p:spPr>
+      </p:sp>
+      <p:sp>
+        <p:nvSpPr>
+          <p:cNvPr id="14" name="">
+            <a:extLst xmlns:a="http://schemas.openxmlformats.org/drawingml/2006/main">
+              <a:ext uri="{FF2B5EF4-FFF2-40B4-BE49-F238E27FC236}">
+                <a16:creationId xmlns:a16="http://schemas.microsoft.com/office/drawing/2014/main" id="{0BD075CF-A549-40A2-9D76-D351072A6DDB}"/>
+              </a:ext>
+            </a:extLst>
+          </p:cNvPr>
+          <p:cNvSpPr>
+            <a:spLocks xmlns:a="http://schemas.openxmlformats.org/drawingml/2006/main" noGrp="1"/>
+          </p:cNvSpPr>
+          <p:nvPr/>
+        </p:nvSpPr>
+        <p:spPr>
+          <a:xfrm xmlns:a="http://schemas.openxmlformats.org/drawingml/2006/main">
+            <a:off x="8343900" y="4219575"/>
+            <a:ext cx="2133600" cy="466725"/>
+          </a:xfrm>
+          <a:prstGeom xmlns:a="http://schemas.openxmlformats.org/drawingml/2006/main" prst="rect">
+            <a:avLst/>
+          </a:prstGeom>
+          <a:noFill xmlns:a="http://schemas.openxmlformats.org/drawingml/2006/main"/>
+          <a:ln xmlns:a="http://schemas.openxmlformats.org/drawingml/2006/main" w="0">
+            <a:noFill/>
+            <a:prstDash val="solid"/>
+          </a:ln>
+        </p:spPr>
+        <p:txBody>
+          <a:bodyPr xmlns:a="http://schemas.openxmlformats.org/drawingml/2006/main"/>
+          <a:lstStyle xmlns:a="http://schemas.openxmlformats.org/drawingml/2006/main"/>
+          <a:p xmlns:a="http://schemas.openxmlformats.org/drawingml/2006/main">
+            <a:pPr>
+              <a:defRPr sz="1200" b="0">
+                <a:solidFill>
+                  <a:srgbClr val="000000"/>
+                </a:solidFill>
+              </a:defRPr>
+            </a:pPr>
+            <a:r>
+              <a:rPr sz="1200" b="0">
+                <a:solidFill>
+                  <a:srgbClr val="000000"/>
+                </a:solidFill>
+              </a:rPr>
+              <a:t>This is not a high-beta upside engine in its current form.</a:t>
+            </a:r>
+          </a:p>
+        </p:txBody>
+      </p:sp>
+      <p:sp>
+        <p:nvSpPr>
+          <p:cNvPr id="15" name="">
+            <a:extLst xmlns:a="http://schemas.openxmlformats.org/drawingml/2006/main">
+              <a:ext uri="{FF2B5EF4-FFF2-40B4-BE49-F238E27FC236}">
+                <a16:creationId xmlns:a16="http://schemas.microsoft.com/office/drawing/2014/main" id="{99B55908-1EC2-401B-9D54-0F2986AFCD13}"/>
+              </a:ext>
+            </a:extLst>
+          </p:cNvPr>
+          <p:cNvSpPr>
+            <a:spLocks xmlns:a="http://schemas.openxmlformats.org/drawingml/2006/main" noGrp="1"/>
+          </p:cNvSpPr>
+          <p:nvPr/>
+        </p:nvSpPr>
+        <p:spPr>
+          <a:xfrm xmlns:a="http://schemas.openxmlformats.org/drawingml/2006/main">
+            <a:off x="971550" y="5619750"/>
+            <a:ext cx="9982200" cy="400050"/>
+          </a:xfrm>
+          <a:prstGeom xmlns:a="http://schemas.openxmlformats.org/drawingml/2006/main" prst="rect">
+            <a:avLst/>
+          </a:prstGeom>
+          <a:noFill xmlns:a="http://schemas.openxmlformats.org/drawingml/2006/main"/>
+          <a:ln xmlns:a="http://schemas.openxmlformats.org/drawingml/2006/main" w="0">
+            <a:noFill/>
+            <a:prstDash val="solid"/>
+          </a:ln>
+        </p:spPr>
+        <p:txBody>
+          <a:bodyPr xmlns:a="http://schemas.openxmlformats.org/drawingml/2006/main"/>
+          <a:lstStyle xmlns:a="http://schemas.openxmlformats.org/drawingml/2006/main"/>
+          <a:p xmlns:a="http://schemas.openxmlformats.org/drawingml/2006/main">
+            <a:pPr algn="ctr">
+              <a:defRPr sz="1650" b="1">
+                <a:solidFill>
+                  <a:srgbClr val="000000"/>
+                </a:solidFill>
+              </a:defRPr>
+            </a:pPr>
+            <a:r>
+              <a:rPr sz="1650" b="1">
+                <a:solidFill>
+                  <a:srgbClr val="000000"/>
+                </a:solidFill>
+              </a:rPr>
+              <a:t>The trade tapes reinforce the same story: countertrend chips and defensive abstention, not early sticky participation in a broad high-beta rally.</a:t>
+            </a:r>
+          </a:p>
+        </p:txBody>
+      </p:sp>
+      <p:sp>
+        <p:nvSpPr>
+          <p:cNvPr id="16" name="">
+            <a:extLst xmlns:a="http://schemas.openxmlformats.org/drawingml/2006/main">
+              <a:ext uri="{FF2B5EF4-FFF2-40B4-BE49-F238E27FC236}">
+                <a16:creationId xmlns:a16="http://schemas.microsoft.com/office/drawing/2014/main" id="{9EC5B6EA-4553-4ADD-8210-D6732163FF31}"/>
+              </a:ext>
+            </a:extLst>
+          </p:cNvPr>
+          <p:cNvSpPr>
+            <a:spLocks xmlns:a="http://schemas.openxmlformats.org/drawingml/2006/main" noGrp="1"/>
+          </p:cNvSpPr>
+          <p:nvPr/>
+        </p:nvSpPr>
+        <p:spPr>
+          <a:xfrm xmlns:a="http://schemas.openxmlformats.org/drawingml/2006/main">
+            <a:off x="514350" y="6477000"/>
+            <a:ext cx="11163300" cy="209550"/>
+          </a:xfrm>
+          <a:prstGeom xmlns:a="http://schemas.openxmlformats.org/drawingml/2006/main" prst="rect">
+            <a:avLst/>
+          </a:prstGeom>
+          <a:noFill xmlns:a="http://schemas.openxmlformats.org/drawingml/2006/main"/>
+          <a:ln xmlns:a="http://schemas.openxmlformats.org/drawingml/2006/main" w="0">
+            <a:noFill/>
+            <a:prstDash val="solid"/>
+          </a:ln>
+        </p:spPr>
+        <p:txBody>
+          <a:bodyPr xmlns:a="http://schemas.openxmlformats.org/drawingml/2006/main"/>
+          <a:lstStyle xmlns:a="http://schemas.openxmlformats.org/drawingml/2006/main"/>
+          <a:p xmlns:a="http://schemas.openxmlformats.org/drawingml/2006/main">
+            <a:pPr>
+              <a:defRPr sz="900" b="0">
+                <a:solidFill>
+                  <a:srgbClr val="555555"/>
+                </a:solidFill>
+              </a:defRPr>
+            </a:pPr>
+            <a:r>
+              <a:rPr sz="900" b="0">
+                <a:solidFill>
+                  <a:srgbClr val="555555"/>
+                </a:solidFill>
+              </a:rPr>
+              <a:t>Research/inspection only. Not allocation evidence or live-advice behavior.</a:t>
+            </a:r>
+          </a:p>
+        </p:txBody>
+      </p:sp>
+    </p:spTree>
+    <p:extLst>
+      <p:ext uri="{BB962C8B-B14F-4D97-AF65-F5344CB8AC3E}">
+        <p14:creationId xmlns:p14="http://schemas.microsoft.com/office/powerpoint/2010/main" val="1859712912"/>
       </p:ext>
     </p:extLst>
   </p:cSld>
@@ -12564,7 +16564,7 @@
           <p:cNvPr id="1" name="">
             <a:extLst xmlns:a="http://schemas.openxmlformats.org/drawingml/2006/main">
               <a:ext uri="{FF2B5EF4-FFF2-40B4-BE49-F238E27FC236}">
-                <a16:creationId xmlns:a16="http://schemas.microsoft.com/office/drawing/2014/main" id="{649718DA-D3C7-463A-B2E5-A9D2CB2AE012}"/>
+                <a16:creationId xmlns:a16="http://schemas.microsoft.com/office/drawing/2014/main" id="{E367B1FF-6889-48AB-8048-2BE4C7564F2D}"/>
               </a:ext>
             </a:extLst>
           </p:cNvPr>
@@ -12614,7 +16614,7 @@
           <p:cNvPr id="2" name="">
             <a:extLst xmlns:a="http://schemas.openxmlformats.org/drawingml/2006/main">
               <a:ext uri="{FF2B5EF4-FFF2-40B4-BE49-F238E27FC236}">
-                <a16:creationId xmlns:a16="http://schemas.microsoft.com/office/drawing/2014/main" id="{E824582A-977A-45C8-964C-611016416312}"/>
+                <a16:creationId xmlns:a16="http://schemas.microsoft.com/office/drawing/2014/main" id="{1DC56B6C-48F8-42D8-B9FB-E76F0CEDFCF5}"/>
               </a:ext>
             </a:extLst>
           </p:cNvPr>
@@ -12664,7 +16664,7 @@
           <p:cNvPr id="3" name="">
             <a:extLst xmlns:a="http://schemas.openxmlformats.org/drawingml/2006/main">
               <a:ext uri="{FF2B5EF4-FFF2-40B4-BE49-F238E27FC236}">
-                <a16:creationId xmlns:a16="http://schemas.microsoft.com/office/drawing/2014/main" id="{90E9A176-2E20-443C-9D85-3CAE626E2DFB}"/>
+                <a16:creationId xmlns:a16="http://schemas.microsoft.com/office/drawing/2014/main" id="{C80E97DE-9CA3-4F5D-914F-CA5D4018370B}"/>
               </a:ext>
             </a:extLst>
           </p:cNvPr>
@@ -12697,7 +16697,7 @@
           <p:cNvPr id="4" name="">
             <a:extLst xmlns:a="http://schemas.openxmlformats.org/drawingml/2006/main">
               <a:ext uri="{FF2B5EF4-FFF2-40B4-BE49-F238E27FC236}">
-                <a16:creationId xmlns:a16="http://schemas.microsoft.com/office/drawing/2014/main" id="{B38B4B9B-8DD0-4ADA-A6F3-A110568D87F6}"/>
+                <a16:creationId xmlns:a16="http://schemas.microsoft.com/office/drawing/2014/main" id="{2A60C965-6483-4101-B477-C621568A7D89}"/>
               </a:ext>
             </a:extLst>
           </p:cNvPr>
@@ -12747,7 +16747,7 @@
           <p:cNvPr id="5" name="">
             <a:extLst xmlns:a="http://schemas.openxmlformats.org/drawingml/2006/main">
               <a:ext uri="{FF2B5EF4-FFF2-40B4-BE49-F238E27FC236}">
-                <a16:creationId xmlns:a16="http://schemas.microsoft.com/office/drawing/2014/main" id="{7F44FC28-C8BE-4D20-99CF-4B90049E9EAB}"/>
+                <a16:creationId xmlns:a16="http://schemas.microsoft.com/office/drawing/2014/main" id="{16F737CA-9693-4D26-8B62-394CC0415429}"/>
               </a:ext>
             </a:extLst>
           </p:cNvPr>
@@ -12780,7 +16780,7 @@
           <p:cNvPr id="6" name="">
             <a:extLst xmlns:a="http://schemas.openxmlformats.org/drawingml/2006/main">
               <a:ext uri="{FF2B5EF4-FFF2-40B4-BE49-F238E27FC236}">
-                <a16:creationId xmlns:a16="http://schemas.microsoft.com/office/drawing/2014/main" id="{58ACA5F2-11BA-4E93-866E-18D05E440F3D}"/>
+                <a16:creationId xmlns:a16="http://schemas.microsoft.com/office/drawing/2014/main" id="{39976DD0-1D3D-4DCE-A748-685AD8C8E90E}"/>
               </a:ext>
             </a:extLst>
           </p:cNvPr>
@@ -12813,7 +16813,7 @@
           <p:cNvPr id="7" name="">
             <a:extLst xmlns:a="http://schemas.openxmlformats.org/drawingml/2006/main">
               <a:ext uri="{FF2B5EF4-FFF2-40B4-BE49-F238E27FC236}">
-                <a16:creationId xmlns:a16="http://schemas.microsoft.com/office/drawing/2014/main" id="{33940397-8C31-4D7D-89CB-49A9071E77C5}"/>
+                <a16:creationId xmlns:a16="http://schemas.microsoft.com/office/drawing/2014/main" id="{4A1DB6F9-C0C1-4169-A61F-67977BB22C9B}"/>
               </a:ext>
             </a:extLst>
           </p:cNvPr>
@@ -12863,7 +16863,7 @@
           <p:cNvPr id="8" name="">
             <a:extLst xmlns:a="http://schemas.openxmlformats.org/drawingml/2006/main">
               <a:ext uri="{FF2B5EF4-FFF2-40B4-BE49-F238E27FC236}">
-                <a16:creationId xmlns:a16="http://schemas.microsoft.com/office/drawing/2014/main" id="{5272D7DA-A243-4786-B19C-3A9AA6BBCB6A}"/>
+                <a16:creationId xmlns:a16="http://schemas.microsoft.com/office/drawing/2014/main" id="{F6D96B28-EF95-452D-83FF-804EEC1D1772}"/>
               </a:ext>
             </a:extLst>
           </p:cNvPr>
@@ -12913,7 +16913,7 @@
           <p:cNvPr id="9" name="">
             <a:extLst xmlns:a="http://schemas.openxmlformats.org/drawingml/2006/main">
               <a:ext uri="{FF2B5EF4-FFF2-40B4-BE49-F238E27FC236}">
-                <a16:creationId xmlns:a16="http://schemas.microsoft.com/office/drawing/2014/main" id="{39621012-053B-4921-84B8-CD7B46D5CFB5}"/>
+                <a16:creationId xmlns:a16="http://schemas.microsoft.com/office/drawing/2014/main" id="{38E1862A-F616-4459-BEAF-FA0DAE1B1D35}"/>
               </a:ext>
             </a:extLst>
           </p:cNvPr>
@@ -12963,7 +16963,7 @@
           <p:cNvPr id="10" name="">
             <a:extLst xmlns:a="http://schemas.openxmlformats.org/drawingml/2006/main">
               <a:ext uri="{FF2B5EF4-FFF2-40B4-BE49-F238E27FC236}">
-                <a16:creationId xmlns:a16="http://schemas.microsoft.com/office/drawing/2014/main" id="{35235F44-128A-44DF-86B5-30019C079807}"/>
+                <a16:creationId xmlns:a16="http://schemas.microsoft.com/office/drawing/2014/main" id="{0983303A-4E54-4286-891B-42EAE2A13FC0}"/>
               </a:ext>
             </a:extLst>
           </p:cNvPr>
@@ -13013,7 +17013,7 @@
           <p:cNvPr id="11" name="">
             <a:extLst xmlns:a="http://schemas.openxmlformats.org/drawingml/2006/main">
               <a:ext uri="{FF2B5EF4-FFF2-40B4-BE49-F238E27FC236}">
-                <a16:creationId xmlns:a16="http://schemas.microsoft.com/office/drawing/2014/main" id="{F43C8FD3-A9EA-4009-B1EF-3089B4AF1DA0}"/>
+                <a16:creationId xmlns:a16="http://schemas.microsoft.com/office/drawing/2014/main" id="{AD719218-7C34-4E9D-91C1-4C5569F53EA6}"/>
               </a:ext>
             </a:extLst>
           </p:cNvPr>
@@ -13063,7 +17063,7 @@
           <p:cNvPr id="12" name="">
             <a:extLst xmlns:a="http://schemas.openxmlformats.org/drawingml/2006/main">
               <a:ext uri="{FF2B5EF4-FFF2-40B4-BE49-F238E27FC236}">
-                <a16:creationId xmlns:a16="http://schemas.microsoft.com/office/drawing/2014/main" id="{AF5D37DE-7ECD-42E4-8C36-12E6340A87C3}"/>
+                <a16:creationId xmlns:a16="http://schemas.microsoft.com/office/drawing/2014/main" id="{60125296-92C9-4B05-86F3-2F91C625DB9E}"/>
               </a:ext>
             </a:extLst>
           </p:cNvPr>
@@ -13111,7 +17111,7 @@
     </p:spTree>
     <p:extLst>
       <p:ext uri="{BB962C8B-B14F-4D97-AF65-F5344CB8AC3E}">
-        <p14:creationId xmlns:p14="http://schemas.microsoft.com/office/powerpoint/2010/main" val="552873817"/>
+        <p14:creationId xmlns:p14="http://schemas.microsoft.com/office/powerpoint/2010/main" val="885522316"/>
       </p:ext>
     </p:extLst>
   </p:cSld>
@@ -13142,7 +17142,7 @@
           <p:cNvPr id="1" name="">
             <a:extLst xmlns:a="http://schemas.openxmlformats.org/drawingml/2006/main">
               <a:ext uri="{FF2B5EF4-FFF2-40B4-BE49-F238E27FC236}">
-                <a16:creationId xmlns:a16="http://schemas.microsoft.com/office/drawing/2014/main" id="{A6B62335-07D3-41BF-BCAA-D5799FAD9EA3}"/>
+                <a16:creationId xmlns:a16="http://schemas.microsoft.com/office/drawing/2014/main" id="{2F24831B-701F-4DC0-A58E-D66E4FD61EFE}"/>
               </a:ext>
             </a:extLst>
           </p:cNvPr>
@@ -13192,7 +17192,7 @@
           <p:cNvPr id="2" name="">
             <a:extLst xmlns:a="http://schemas.openxmlformats.org/drawingml/2006/main">
               <a:ext uri="{FF2B5EF4-FFF2-40B4-BE49-F238E27FC236}">
-                <a16:creationId xmlns:a16="http://schemas.microsoft.com/office/drawing/2014/main" id="{4E820520-0FBE-47EC-8896-2E7729C34081}"/>
+                <a16:creationId xmlns:a16="http://schemas.microsoft.com/office/drawing/2014/main" id="{33E67004-5522-483B-A6D1-31D5F48187CE}"/>
               </a:ext>
             </a:extLst>
           </p:cNvPr>
@@ -13242,7 +17242,7 @@
           <p:cNvPr id="3" name="">
             <a:extLst xmlns:a="http://schemas.openxmlformats.org/drawingml/2006/main">
               <a:ext uri="{FF2B5EF4-FFF2-40B4-BE49-F238E27FC236}">
-                <a16:creationId xmlns:a16="http://schemas.microsoft.com/office/drawing/2014/main" id="{EFDEFB04-594F-4785-B367-28C106CF6A76}"/>
+                <a16:creationId xmlns:a16="http://schemas.microsoft.com/office/drawing/2014/main" id="{78595A69-E1D9-43A6-AE90-088B5157804F}"/>
               </a:ext>
             </a:extLst>
           </p:cNvPr>
@@ -13275,7 +17275,7 @@
           <p:cNvPr id="4" name="">
             <a:extLst xmlns:a="http://schemas.openxmlformats.org/drawingml/2006/main">
               <a:ext uri="{FF2B5EF4-FFF2-40B4-BE49-F238E27FC236}">
-                <a16:creationId xmlns:a16="http://schemas.microsoft.com/office/drawing/2014/main" id="{A80E8165-3676-4B92-91AE-9EA78BAEC232}"/>
+                <a16:creationId xmlns:a16="http://schemas.microsoft.com/office/drawing/2014/main" id="{68720078-A30D-4B64-9CE9-9B25D8F598A7}"/>
               </a:ext>
             </a:extLst>
           </p:cNvPr>
@@ -13308,7 +17308,7 @@
           <p:cNvPr id="5" name="">
             <a:extLst xmlns:a="http://schemas.openxmlformats.org/drawingml/2006/main">
               <a:ext uri="{FF2B5EF4-FFF2-40B4-BE49-F238E27FC236}">
-                <a16:creationId xmlns:a16="http://schemas.microsoft.com/office/drawing/2014/main" id="{4D21DB6F-E1DE-4975-A3BB-D4AAAE00B858}"/>
+                <a16:creationId xmlns:a16="http://schemas.microsoft.com/office/drawing/2014/main" id="{5B775ED9-B8C1-473C-A763-C5330052495D}"/>
               </a:ext>
             </a:extLst>
           </p:cNvPr>
@@ -13358,7 +17358,7 @@
           <p:cNvPr id="6" name="">
             <a:extLst xmlns:a="http://schemas.openxmlformats.org/drawingml/2006/main">
               <a:ext uri="{FF2B5EF4-FFF2-40B4-BE49-F238E27FC236}">
-                <a16:creationId xmlns:a16="http://schemas.microsoft.com/office/drawing/2014/main" id="{5682EF54-5959-466B-BA89-D7C97370EC44}"/>
+                <a16:creationId xmlns:a16="http://schemas.microsoft.com/office/drawing/2014/main" id="{9E7A01E2-2FDA-48DE-84D2-46ABFCF4DA44}"/>
               </a:ext>
             </a:extLst>
           </p:cNvPr>
@@ -13408,7 +17408,7 @@
           <p:cNvPr id="7" name="">
             <a:extLst xmlns:a="http://schemas.openxmlformats.org/drawingml/2006/main">
               <a:ext uri="{FF2B5EF4-FFF2-40B4-BE49-F238E27FC236}">
-                <a16:creationId xmlns:a16="http://schemas.microsoft.com/office/drawing/2014/main" id="{C7B42FA7-324B-4A6A-A57E-A796FDC550A1}"/>
+                <a16:creationId xmlns:a16="http://schemas.microsoft.com/office/drawing/2014/main" id="{96A2EAA8-02A0-457E-863B-4CCF2D894E0C}"/>
               </a:ext>
             </a:extLst>
           </p:cNvPr>
@@ -13441,7 +17441,7 @@
           <p:cNvPr id="8" name="">
             <a:extLst xmlns:a="http://schemas.openxmlformats.org/drawingml/2006/main">
               <a:ext uri="{FF2B5EF4-FFF2-40B4-BE49-F238E27FC236}">
-                <a16:creationId xmlns:a16="http://schemas.microsoft.com/office/drawing/2014/main" id="{A8054DA0-1CEB-45B3-A540-9EB563C5B480}"/>
+                <a16:creationId xmlns:a16="http://schemas.microsoft.com/office/drawing/2014/main" id="{4A05AE3F-D6D4-4534-9212-8EEE5645A724}"/>
               </a:ext>
             </a:extLst>
           </p:cNvPr>
@@ -13491,7 +17491,7 @@
           <p:cNvPr id="9" name="">
             <a:extLst xmlns:a="http://schemas.openxmlformats.org/drawingml/2006/main">
               <a:ext uri="{FF2B5EF4-FFF2-40B4-BE49-F238E27FC236}">
-                <a16:creationId xmlns:a16="http://schemas.microsoft.com/office/drawing/2014/main" id="{291A77BF-1451-4ABA-B598-1ACA3350DB5D}"/>
+                <a16:creationId xmlns:a16="http://schemas.microsoft.com/office/drawing/2014/main" id="{A5A57485-DC48-47FD-A10D-6222CC21A76F}"/>
               </a:ext>
             </a:extLst>
           </p:cNvPr>
@@ -13541,7 +17541,7 @@
           <p:cNvPr id="10" name="">
             <a:extLst xmlns:a="http://schemas.openxmlformats.org/drawingml/2006/main">
               <a:ext uri="{FF2B5EF4-FFF2-40B4-BE49-F238E27FC236}">
-                <a16:creationId xmlns:a16="http://schemas.microsoft.com/office/drawing/2014/main" id="{A65E1A4B-DC56-4065-9882-94DE4136BF22}"/>
+                <a16:creationId xmlns:a16="http://schemas.microsoft.com/office/drawing/2014/main" id="{2C10F4F9-E60C-4514-94C9-BBD5D9A9F8A6}"/>
               </a:ext>
             </a:extLst>
           </p:cNvPr>
@@ -13574,7 +17574,7 @@
           <p:cNvPr id="11" name="">
             <a:extLst xmlns:a="http://schemas.openxmlformats.org/drawingml/2006/main">
               <a:ext uri="{FF2B5EF4-FFF2-40B4-BE49-F238E27FC236}">
-                <a16:creationId xmlns:a16="http://schemas.microsoft.com/office/drawing/2014/main" id="{AD92EF56-52D4-468F-9579-0950E3C295B3}"/>
+                <a16:creationId xmlns:a16="http://schemas.microsoft.com/office/drawing/2014/main" id="{1FF3558B-E01E-4174-9CDC-7E5B588533E4}"/>
               </a:ext>
             </a:extLst>
           </p:cNvPr>
@@ -13624,7 +17624,7 @@
           <p:cNvPr id="12" name="">
             <a:extLst xmlns:a="http://schemas.openxmlformats.org/drawingml/2006/main">
               <a:ext uri="{FF2B5EF4-FFF2-40B4-BE49-F238E27FC236}">
-                <a16:creationId xmlns:a16="http://schemas.microsoft.com/office/drawing/2014/main" id="{9159FEFE-9F96-4175-A6AB-C54D999EED26}"/>
+                <a16:creationId xmlns:a16="http://schemas.microsoft.com/office/drawing/2014/main" id="{95AAD6EF-74C1-4C21-89D7-1475E78100CA}"/>
               </a:ext>
             </a:extLst>
           </p:cNvPr>
@@ -13674,7 +17674,7 @@
           <p:cNvPr id="13" name="">
             <a:extLst xmlns:a="http://schemas.openxmlformats.org/drawingml/2006/main">
               <a:ext uri="{FF2B5EF4-FFF2-40B4-BE49-F238E27FC236}">
-                <a16:creationId xmlns:a16="http://schemas.microsoft.com/office/drawing/2014/main" id="{B2BEC1A9-D665-4284-B15A-149ABC46B6F8}"/>
+                <a16:creationId xmlns:a16="http://schemas.microsoft.com/office/drawing/2014/main" id="{50949A5E-F25D-4ACC-9E39-AD2E39B8E55B}"/>
               </a:ext>
             </a:extLst>
           </p:cNvPr>
@@ -13707,7 +17707,7 @@
           <p:cNvPr id="14" name="">
             <a:extLst xmlns:a="http://schemas.openxmlformats.org/drawingml/2006/main">
               <a:ext uri="{FF2B5EF4-FFF2-40B4-BE49-F238E27FC236}">
-                <a16:creationId xmlns:a16="http://schemas.microsoft.com/office/drawing/2014/main" id="{FA2EAC67-6565-42FE-9093-85381A0DA54C}"/>
+                <a16:creationId xmlns:a16="http://schemas.microsoft.com/office/drawing/2014/main" id="{38E657A5-2C84-4F16-AC7D-2C4B3577D2A5}"/>
               </a:ext>
             </a:extLst>
           </p:cNvPr>
@@ -13757,7 +17757,7 @@
           <p:cNvPr id="15" name="">
             <a:extLst xmlns:a="http://schemas.openxmlformats.org/drawingml/2006/main">
               <a:ext uri="{FF2B5EF4-FFF2-40B4-BE49-F238E27FC236}">
-                <a16:creationId xmlns:a16="http://schemas.microsoft.com/office/drawing/2014/main" id="{317B9104-299B-4F60-BEE9-04759C536B34}"/>
+                <a16:creationId xmlns:a16="http://schemas.microsoft.com/office/drawing/2014/main" id="{2F99F2AC-F459-4C4D-A4F2-DB8925A62285}"/>
               </a:ext>
             </a:extLst>
           </p:cNvPr>
@@ -13807,7 +17807,7 @@
           <p:cNvPr id="16" name="">
             <a:extLst xmlns:a="http://schemas.openxmlformats.org/drawingml/2006/main">
               <a:ext uri="{FF2B5EF4-FFF2-40B4-BE49-F238E27FC236}">
-                <a16:creationId xmlns:a16="http://schemas.microsoft.com/office/drawing/2014/main" id="{A0C4D01F-5DDF-4B95-A802-1BB533D5A0E0}"/>
+                <a16:creationId xmlns:a16="http://schemas.microsoft.com/office/drawing/2014/main" id="{0C351C07-65DC-4ED4-B6FD-9D1359A83A0B}"/>
               </a:ext>
             </a:extLst>
           </p:cNvPr>
@@ -13857,7 +17857,7 @@
           <p:cNvPr id="17" name="">
             <a:extLst xmlns:a="http://schemas.openxmlformats.org/drawingml/2006/main">
               <a:ext uri="{FF2B5EF4-FFF2-40B4-BE49-F238E27FC236}">
-                <a16:creationId xmlns:a16="http://schemas.microsoft.com/office/drawing/2014/main" id="{BC108CF8-5CAB-44DC-BAAC-DB7A81AFB925}"/>
+                <a16:creationId xmlns:a16="http://schemas.microsoft.com/office/drawing/2014/main" id="{2DC55FFD-7048-490D-8E43-C51900C4AC1F}"/>
               </a:ext>
             </a:extLst>
           </p:cNvPr>
@@ -13905,7 +17905,7 @@
     </p:spTree>
     <p:extLst>
       <p:ext uri="{BB962C8B-B14F-4D97-AF65-F5344CB8AC3E}">
-        <p14:creationId xmlns:p14="http://schemas.microsoft.com/office/powerpoint/2010/main" val="1759063051"/>
+        <p14:creationId xmlns:p14="http://schemas.microsoft.com/office/powerpoint/2010/main" val="1621502297"/>
       </p:ext>
     </p:extLst>
   </p:cSld>
@@ -13936,7 +17936,7 @@
           <p:cNvPr id="1" name="">
             <a:extLst xmlns:a="http://schemas.openxmlformats.org/drawingml/2006/main">
               <a:ext uri="{FF2B5EF4-FFF2-40B4-BE49-F238E27FC236}">
-                <a16:creationId xmlns:a16="http://schemas.microsoft.com/office/drawing/2014/main" id="{476B2049-F3D0-469F-BF8D-3E4D114BD344}"/>
+                <a16:creationId xmlns:a16="http://schemas.microsoft.com/office/drawing/2014/main" id="{220926F0-58DD-4AA0-9E7B-BB43BB8E08C7}"/>
               </a:ext>
             </a:extLst>
           </p:cNvPr>
@@ -13986,7 +17986,7 @@
           <p:cNvPr id="2" name="">
             <a:extLst xmlns:a="http://schemas.openxmlformats.org/drawingml/2006/main">
               <a:ext uri="{FF2B5EF4-FFF2-40B4-BE49-F238E27FC236}">
-                <a16:creationId xmlns:a16="http://schemas.microsoft.com/office/drawing/2014/main" id="{9E68FB2A-63D6-435E-8E66-E271A3C8ECCD}"/>
+                <a16:creationId xmlns:a16="http://schemas.microsoft.com/office/drawing/2014/main" id="{9C888017-3618-4B58-93D2-0D0E51ABFC3D}"/>
               </a:ext>
             </a:extLst>
           </p:cNvPr>
@@ -14036,7 +18036,7 @@
           <p:cNvPr id="3" name="">
             <a:extLst xmlns:a="http://schemas.openxmlformats.org/drawingml/2006/main">
               <a:ext uri="{FF2B5EF4-FFF2-40B4-BE49-F238E27FC236}">
-                <a16:creationId xmlns:a16="http://schemas.microsoft.com/office/drawing/2014/main" id="{F2F214D0-39F0-43BF-A998-71750AAE1723}"/>
+                <a16:creationId xmlns:a16="http://schemas.microsoft.com/office/drawing/2014/main" id="{AB58FF5F-E627-47A4-ACAE-BE2105261EC0}"/>
               </a:ext>
             </a:extLst>
           </p:cNvPr>
@@ -14069,7 +18069,7 @@
           <p:cNvPr id="4" name="">
             <a:extLst xmlns:a="http://schemas.openxmlformats.org/drawingml/2006/main">
               <a:ext uri="{FF2B5EF4-FFF2-40B4-BE49-F238E27FC236}">
-                <a16:creationId xmlns:a16="http://schemas.microsoft.com/office/drawing/2014/main" id="{DCBE6C19-5BF9-4273-9FAF-B537D2B448E0}"/>
+                <a16:creationId xmlns:a16="http://schemas.microsoft.com/office/drawing/2014/main" id="{3EC814C5-BA55-4D1F-9C09-108C1C453FFD}"/>
               </a:ext>
             </a:extLst>
           </p:cNvPr>
@@ -14102,7 +18102,7 @@
           <p:cNvPr id="5" name="">
             <a:extLst xmlns:a="http://schemas.openxmlformats.org/drawingml/2006/main">
               <a:ext uri="{FF2B5EF4-FFF2-40B4-BE49-F238E27FC236}">
-                <a16:creationId xmlns:a16="http://schemas.microsoft.com/office/drawing/2014/main" id="{1B4B2DF2-297A-4C73-AE85-38CCB79AF950}"/>
+                <a16:creationId xmlns:a16="http://schemas.microsoft.com/office/drawing/2014/main" id="{9CAC3660-6CE7-4CD7-BC2D-9C8A42A20422}"/>
               </a:ext>
             </a:extLst>
           </p:cNvPr>
@@ -14152,7 +18152,7 @@
           <p:cNvPr id="6" name="">
             <a:extLst xmlns:a="http://schemas.openxmlformats.org/drawingml/2006/main">
               <a:ext uri="{FF2B5EF4-FFF2-40B4-BE49-F238E27FC236}">
-                <a16:creationId xmlns:a16="http://schemas.microsoft.com/office/drawing/2014/main" id="{1A885B1E-00E9-4647-B438-83B5B48CD28D}"/>
+                <a16:creationId xmlns:a16="http://schemas.microsoft.com/office/drawing/2014/main" id="{CF1BB283-87BC-4708-BFAB-1C65CC020162}"/>
               </a:ext>
             </a:extLst>
           </p:cNvPr>
@@ -14185,7 +18185,7 @@
           <p:cNvPr id="7" name="">
             <a:extLst xmlns:a="http://schemas.openxmlformats.org/drawingml/2006/main">
               <a:ext uri="{FF2B5EF4-FFF2-40B4-BE49-F238E27FC236}">
-                <a16:creationId xmlns:a16="http://schemas.microsoft.com/office/drawing/2014/main" id="{D512E351-3B6B-44D4-8D82-9BF6C7F29D20}"/>
+                <a16:creationId xmlns:a16="http://schemas.microsoft.com/office/drawing/2014/main" id="{18CCD7A3-4393-440B-BCBE-9DECE2BF37CE}"/>
               </a:ext>
             </a:extLst>
           </p:cNvPr>
@@ -14235,7 +18235,7 @@
           <p:cNvPr id="8" name="">
             <a:extLst xmlns:a="http://schemas.openxmlformats.org/drawingml/2006/main">
               <a:ext uri="{FF2B5EF4-FFF2-40B4-BE49-F238E27FC236}">
-                <a16:creationId xmlns:a16="http://schemas.microsoft.com/office/drawing/2014/main" id="{657F9C2A-6896-4AD1-A5D6-2BC792D0145C}"/>
+                <a16:creationId xmlns:a16="http://schemas.microsoft.com/office/drawing/2014/main" id="{BA521040-DE55-453D-9589-D2D27C5F3068}"/>
               </a:ext>
             </a:extLst>
           </p:cNvPr>
@@ -14268,7 +18268,7 @@
           <p:cNvPr id="9" name="">
             <a:extLst xmlns:a="http://schemas.openxmlformats.org/drawingml/2006/main">
               <a:ext uri="{FF2B5EF4-FFF2-40B4-BE49-F238E27FC236}">
-                <a16:creationId xmlns:a16="http://schemas.microsoft.com/office/drawing/2014/main" id="{12463A05-698F-4DE9-AD1D-F11877E75FEE}"/>
+                <a16:creationId xmlns:a16="http://schemas.microsoft.com/office/drawing/2014/main" id="{D5D4A9A0-2FC3-48AD-87BE-F84C3704A577}"/>
               </a:ext>
             </a:extLst>
           </p:cNvPr>
@@ -14318,7 +18318,7 @@
           <p:cNvPr id="10" name="">
             <a:extLst xmlns:a="http://schemas.openxmlformats.org/drawingml/2006/main">
               <a:ext uri="{FF2B5EF4-FFF2-40B4-BE49-F238E27FC236}">
-                <a16:creationId xmlns:a16="http://schemas.microsoft.com/office/drawing/2014/main" id="{E7B4D693-7F70-41C5-9E37-D07A60B282C1}"/>
+                <a16:creationId xmlns:a16="http://schemas.microsoft.com/office/drawing/2014/main" id="{61C52205-7B9F-43C1-AFA9-C2B767DDF50C}"/>
               </a:ext>
             </a:extLst>
           </p:cNvPr>
@@ -14351,7 +18351,7 @@
           <p:cNvPr id="11" name="">
             <a:extLst xmlns:a="http://schemas.openxmlformats.org/drawingml/2006/main">
               <a:ext uri="{FF2B5EF4-FFF2-40B4-BE49-F238E27FC236}">
-                <a16:creationId xmlns:a16="http://schemas.microsoft.com/office/drawing/2014/main" id="{5E2C263C-3E49-44EC-9220-76F6D0EB2531}"/>
+                <a16:creationId xmlns:a16="http://schemas.microsoft.com/office/drawing/2014/main" id="{A29ECE49-B10E-4D93-B95C-D2864D4F6EA5}"/>
               </a:ext>
             </a:extLst>
           </p:cNvPr>
@@ -14401,7 +18401,7 @@
           <p:cNvPr id="12" name="">
             <a:extLst xmlns:a="http://schemas.openxmlformats.org/drawingml/2006/main">
               <a:ext uri="{FF2B5EF4-FFF2-40B4-BE49-F238E27FC236}">
-                <a16:creationId xmlns:a16="http://schemas.microsoft.com/office/drawing/2014/main" id="{1AF95263-2444-44D5-9681-60AED586747A}"/>
+                <a16:creationId xmlns:a16="http://schemas.microsoft.com/office/drawing/2014/main" id="{096B7817-09AF-40B7-99AD-2931B37B2D75}"/>
               </a:ext>
             </a:extLst>
           </p:cNvPr>
@@ -14434,7 +18434,7 @@
           <p:cNvPr id="13" name="">
             <a:extLst xmlns:a="http://schemas.openxmlformats.org/drawingml/2006/main">
               <a:ext uri="{FF2B5EF4-FFF2-40B4-BE49-F238E27FC236}">
-                <a16:creationId xmlns:a16="http://schemas.microsoft.com/office/drawing/2014/main" id="{3F717E8B-23E5-4913-BE41-94153A5D12BE}"/>
+                <a16:creationId xmlns:a16="http://schemas.microsoft.com/office/drawing/2014/main" id="{3F3AD642-044B-4BB6-A0E6-11883D8ADF9A}"/>
               </a:ext>
             </a:extLst>
           </p:cNvPr>
@@ -14484,7 +18484,7 @@
           <p:cNvPr id="14" name="">
             <a:extLst xmlns:a="http://schemas.openxmlformats.org/drawingml/2006/main">
               <a:ext uri="{FF2B5EF4-FFF2-40B4-BE49-F238E27FC236}">
-                <a16:creationId xmlns:a16="http://schemas.microsoft.com/office/drawing/2014/main" id="{3AD07A00-4A92-48C3-BD19-90FF561483BB}"/>
+                <a16:creationId xmlns:a16="http://schemas.microsoft.com/office/drawing/2014/main" id="{44B92219-51E3-42FF-9CB3-0099ECD38FCE}"/>
               </a:ext>
             </a:extLst>
           </p:cNvPr>
@@ -14517,7 +18517,7 @@
           <p:cNvPr id="15" name="">
             <a:extLst xmlns:a="http://schemas.openxmlformats.org/drawingml/2006/main">
               <a:ext uri="{FF2B5EF4-FFF2-40B4-BE49-F238E27FC236}">
-                <a16:creationId xmlns:a16="http://schemas.microsoft.com/office/drawing/2014/main" id="{8595A631-F196-4F63-A108-759CCB675972}"/>
+                <a16:creationId xmlns:a16="http://schemas.microsoft.com/office/drawing/2014/main" id="{13AAF47E-E865-450F-B187-19F176D80C5A}"/>
               </a:ext>
             </a:extLst>
           </p:cNvPr>
@@ -14567,7 +18567,7 @@
           <p:cNvPr id="16" name="">
             <a:extLst xmlns:a="http://schemas.openxmlformats.org/drawingml/2006/main">
               <a:ext uri="{FF2B5EF4-FFF2-40B4-BE49-F238E27FC236}">
-                <a16:creationId xmlns:a16="http://schemas.microsoft.com/office/drawing/2014/main" id="{AE0DBC61-9653-4AC9-B8B0-1484104D2B94}"/>
+                <a16:creationId xmlns:a16="http://schemas.microsoft.com/office/drawing/2014/main" id="{E72189CC-3633-47A7-9A1A-A83E873F9AAD}"/>
               </a:ext>
             </a:extLst>
           </p:cNvPr>
@@ -14600,7 +18600,7 @@
           <p:cNvPr id="17" name="">
             <a:extLst xmlns:a="http://schemas.openxmlformats.org/drawingml/2006/main">
               <a:ext uri="{FF2B5EF4-FFF2-40B4-BE49-F238E27FC236}">
-                <a16:creationId xmlns:a16="http://schemas.microsoft.com/office/drawing/2014/main" id="{3B9AF510-370F-47C8-89AA-BE284FD73C00}"/>
+                <a16:creationId xmlns:a16="http://schemas.microsoft.com/office/drawing/2014/main" id="{756CFC68-39C0-4EE6-8465-98CA2EFACF0C}"/>
               </a:ext>
             </a:extLst>
           </p:cNvPr>
@@ -14650,7 +18650,7 @@
           <p:cNvPr id="18" name="">
             <a:extLst xmlns:a="http://schemas.openxmlformats.org/drawingml/2006/main">
               <a:ext uri="{FF2B5EF4-FFF2-40B4-BE49-F238E27FC236}">
-                <a16:creationId xmlns:a16="http://schemas.microsoft.com/office/drawing/2014/main" id="{F31D4C30-A270-47BF-899C-363D0E242632}"/>
+                <a16:creationId xmlns:a16="http://schemas.microsoft.com/office/drawing/2014/main" id="{8399BF48-1FE3-440D-8199-215D80C5BB8A}"/>
               </a:ext>
             </a:extLst>
           </p:cNvPr>
@@ -14683,7 +18683,7 @@
           <p:cNvPr id="19" name="">
             <a:extLst xmlns:a="http://schemas.openxmlformats.org/drawingml/2006/main">
               <a:ext uri="{FF2B5EF4-FFF2-40B4-BE49-F238E27FC236}">
-                <a16:creationId xmlns:a16="http://schemas.microsoft.com/office/drawing/2014/main" id="{EE399D91-CF20-4472-A588-D8363C5A5B08}"/>
+                <a16:creationId xmlns:a16="http://schemas.microsoft.com/office/drawing/2014/main" id="{8728D9E9-B84F-4A4C-92ED-DA1EADDCEC7D}"/>
               </a:ext>
             </a:extLst>
           </p:cNvPr>
@@ -14733,7 +18733,7 @@
           <p:cNvPr id="20" name="">
             <a:extLst xmlns:a="http://schemas.openxmlformats.org/drawingml/2006/main">
               <a:ext uri="{FF2B5EF4-FFF2-40B4-BE49-F238E27FC236}">
-                <a16:creationId xmlns:a16="http://schemas.microsoft.com/office/drawing/2014/main" id="{4E15B74F-39C3-4C33-B717-9974731B7FE9}"/>
+                <a16:creationId xmlns:a16="http://schemas.microsoft.com/office/drawing/2014/main" id="{03052F4C-688C-4008-9081-BAA62F73C9A3}"/>
               </a:ext>
             </a:extLst>
           </p:cNvPr>
@@ -14766,7 +18766,7 @@
           <p:cNvPr id="21" name="">
             <a:extLst xmlns:a="http://schemas.openxmlformats.org/drawingml/2006/main">
               <a:ext uri="{FF2B5EF4-FFF2-40B4-BE49-F238E27FC236}">
-                <a16:creationId xmlns:a16="http://schemas.microsoft.com/office/drawing/2014/main" id="{B4A4E25A-96CE-461E-9705-A0B962834D34}"/>
+                <a16:creationId xmlns:a16="http://schemas.microsoft.com/office/drawing/2014/main" id="{C8FD3AF8-041F-4849-BA8C-53AA1AA4658F}"/>
               </a:ext>
             </a:extLst>
           </p:cNvPr>
@@ -14816,7 +18816,7 @@
           <p:cNvPr id="22" name="">
             <a:extLst xmlns:a="http://schemas.openxmlformats.org/drawingml/2006/main">
               <a:ext uri="{FF2B5EF4-FFF2-40B4-BE49-F238E27FC236}">
-                <a16:creationId xmlns:a16="http://schemas.microsoft.com/office/drawing/2014/main" id="{670182B3-AE2D-4A66-A9B5-971920D895DF}"/>
+                <a16:creationId xmlns:a16="http://schemas.microsoft.com/office/drawing/2014/main" id="{61828A5C-D68D-49CD-8B82-3C2F697C1CE1}"/>
               </a:ext>
             </a:extLst>
           </p:cNvPr>
@@ -14849,7 +18849,7 @@
           <p:cNvPr id="23" name="">
             <a:extLst xmlns:a="http://schemas.openxmlformats.org/drawingml/2006/main">
               <a:ext uri="{FF2B5EF4-FFF2-40B4-BE49-F238E27FC236}">
-                <a16:creationId xmlns:a16="http://schemas.microsoft.com/office/drawing/2014/main" id="{3554E54F-2610-4BCE-BCC9-9B4E7E06B824}"/>
+                <a16:creationId xmlns:a16="http://schemas.microsoft.com/office/drawing/2014/main" id="{BBA9D75E-0A86-48D5-80D9-15DF4B627300}"/>
               </a:ext>
             </a:extLst>
           </p:cNvPr>
@@ -14899,7 +18899,7 @@
           <p:cNvPr id="24" name="">
             <a:extLst xmlns:a="http://schemas.openxmlformats.org/drawingml/2006/main">
               <a:ext uri="{FF2B5EF4-FFF2-40B4-BE49-F238E27FC236}">
-                <a16:creationId xmlns:a16="http://schemas.microsoft.com/office/drawing/2014/main" id="{76B91022-DF04-4AF6-B625-D60E391DCBB2}"/>
+                <a16:creationId xmlns:a16="http://schemas.microsoft.com/office/drawing/2014/main" id="{384AA855-5502-476C-9DBB-C5D74AC8DEDE}"/>
               </a:ext>
             </a:extLst>
           </p:cNvPr>
@@ -14932,7 +18932,7 @@
           <p:cNvPr id="25" name="">
             <a:extLst xmlns:a="http://schemas.openxmlformats.org/drawingml/2006/main">
               <a:ext uri="{FF2B5EF4-FFF2-40B4-BE49-F238E27FC236}">
-                <a16:creationId xmlns:a16="http://schemas.microsoft.com/office/drawing/2014/main" id="{E728B5BD-B8D6-40C2-B6DD-95D9C381C5EC}"/>
+                <a16:creationId xmlns:a16="http://schemas.microsoft.com/office/drawing/2014/main" id="{661C2417-23A8-4826-81CC-D55FA8D9992E}"/>
               </a:ext>
             </a:extLst>
           </p:cNvPr>
@@ -14982,7 +18982,7 @@
           <p:cNvPr id="26" name="">
             <a:extLst xmlns:a="http://schemas.openxmlformats.org/drawingml/2006/main">
               <a:ext uri="{FF2B5EF4-FFF2-40B4-BE49-F238E27FC236}">
-                <a16:creationId xmlns:a16="http://schemas.microsoft.com/office/drawing/2014/main" id="{1A597EA9-3268-42AE-8F17-296E0D22D215}"/>
+                <a16:creationId xmlns:a16="http://schemas.microsoft.com/office/drawing/2014/main" id="{19007B82-9DDF-4FDD-84B5-5A418D0B84B4}"/>
               </a:ext>
             </a:extLst>
           </p:cNvPr>
@@ -15015,7 +19015,7 @@
           <p:cNvPr id="27" name="">
             <a:extLst xmlns:a="http://schemas.openxmlformats.org/drawingml/2006/main">
               <a:ext uri="{FF2B5EF4-FFF2-40B4-BE49-F238E27FC236}">
-                <a16:creationId xmlns:a16="http://schemas.microsoft.com/office/drawing/2014/main" id="{7B76EC5E-297D-41C3-9D15-7E3D945B3EA3}"/>
+                <a16:creationId xmlns:a16="http://schemas.microsoft.com/office/drawing/2014/main" id="{7AE9C419-E0AE-47AA-A776-81880F38CF81}"/>
               </a:ext>
             </a:extLst>
           </p:cNvPr>
@@ -15065,7 +19065,7 @@
           <p:cNvPr id="28" name="">
             <a:extLst xmlns:a="http://schemas.openxmlformats.org/drawingml/2006/main">
               <a:ext uri="{FF2B5EF4-FFF2-40B4-BE49-F238E27FC236}">
-                <a16:creationId xmlns:a16="http://schemas.microsoft.com/office/drawing/2014/main" id="{F75DB463-BA44-4DAA-B858-3282C2838AEF}"/>
+                <a16:creationId xmlns:a16="http://schemas.microsoft.com/office/drawing/2014/main" id="{F176BDC7-24E4-44C0-861D-18D457555A68}"/>
               </a:ext>
             </a:extLst>
           </p:cNvPr>
@@ -15098,7 +19098,7 @@
           <p:cNvPr id="29" name="">
             <a:extLst xmlns:a="http://schemas.openxmlformats.org/drawingml/2006/main">
               <a:ext uri="{FF2B5EF4-FFF2-40B4-BE49-F238E27FC236}">
-                <a16:creationId xmlns:a16="http://schemas.microsoft.com/office/drawing/2014/main" id="{843D8CD5-C212-4E3B-A97A-8EF8F7A25CD0}"/>
+                <a16:creationId xmlns:a16="http://schemas.microsoft.com/office/drawing/2014/main" id="{5D641F38-031C-4EB9-9B6D-B4D41E7163E8}"/>
               </a:ext>
             </a:extLst>
           </p:cNvPr>
@@ -15148,7 +19148,7 @@
           <p:cNvPr id="30" name="">
             <a:extLst xmlns:a="http://schemas.openxmlformats.org/drawingml/2006/main">
               <a:ext uri="{FF2B5EF4-FFF2-40B4-BE49-F238E27FC236}">
-                <a16:creationId xmlns:a16="http://schemas.microsoft.com/office/drawing/2014/main" id="{7D99AD39-5BAC-437B-93BB-F2192CE43F31}"/>
+                <a16:creationId xmlns:a16="http://schemas.microsoft.com/office/drawing/2014/main" id="{80583371-201F-4686-B8C2-4439A78F8724}"/>
               </a:ext>
             </a:extLst>
           </p:cNvPr>
@@ -15181,7 +19181,7 @@
           <p:cNvPr id="31" name="">
             <a:extLst xmlns:a="http://schemas.openxmlformats.org/drawingml/2006/main">
               <a:ext uri="{FF2B5EF4-FFF2-40B4-BE49-F238E27FC236}">
-                <a16:creationId xmlns:a16="http://schemas.microsoft.com/office/drawing/2014/main" id="{73A4550F-D340-4CE3-AACF-3D018C3EBBD7}"/>
+                <a16:creationId xmlns:a16="http://schemas.microsoft.com/office/drawing/2014/main" id="{1D6F4C06-8A02-4D2B-8585-8E7C2F1692A6}"/>
               </a:ext>
             </a:extLst>
           </p:cNvPr>
@@ -15231,7 +19231,7 @@
           <p:cNvPr id="32" name="">
             <a:extLst xmlns:a="http://schemas.openxmlformats.org/drawingml/2006/main">
               <a:ext uri="{FF2B5EF4-FFF2-40B4-BE49-F238E27FC236}">
-                <a16:creationId xmlns:a16="http://schemas.microsoft.com/office/drawing/2014/main" id="{A6811CDE-FFBC-4ECB-863C-3C49CE94CA50}"/>
+                <a16:creationId xmlns:a16="http://schemas.microsoft.com/office/drawing/2014/main" id="{3861083B-CCB4-4E9A-AD92-0BBEE5729522}"/>
               </a:ext>
             </a:extLst>
           </p:cNvPr>
@@ -15264,7 +19264,7 @@
           <p:cNvPr id="33" name="">
             <a:extLst xmlns:a="http://schemas.openxmlformats.org/drawingml/2006/main">
               <a:ext uri="{FF2B5EF4-FFF2-40B4-BE49-F238E27FC236}">
-                <a16:creationId xmlns:a16="http://schemas.microsoft.com/office/drawing/2014/main" id="{2A43D0AB-B9D1-42F1-B595-A0AEF7848EB3}"/>
+                <a16:creationId xmlns:a16="http://schemas.microsoft.com/office/drawing/2014/main" id="{A489885E-6F8E-40C7-BC2C-ABA6AA4BED2B}"/>
               </a:ext>
             </a:extLst>
           </p:cNvPr>
@@ -15314,7 +19314,7 @@
           <p:cNvPr id="34" name="">
             <a:extLst xmlns:a="http://schemas.openxmlformats.org/drawingml/2006/main">
               <a:ext uri="{FF2B5EF4-FFF2-40B4-BE49-F238E27FC236}">
-                <a16:creationId xmlns:a16="http://schemas.microsoft.com/office/drawing/2014/main" id="{B2909BB7-4410-45AC-B704-2C656D4DD9CB}"/>
+                <a16:creationId xmlns:a16="http://schemas.microsoft.com/office/drawing/2014/main" id="{06211C1F-9EAE-4D15-8A43-1DCE310B1AE9}"/>
               </a:ext>
             </a:extLst>
           </p:cNvPr>
@@ -15347,7 +19347,7 @@
           <p:cNvPr id="35" name="">
             <a:extLst xmlns:a="http://schemas.openxmlformats.org/drawingml/2006/main">
               <a:ext uri="{FF2B5EF4-FFF2-40B4-BE49-F238E27FC236}">
-                <a16:creationId xmlns:a16="http://schemas.microsoft.com/office/drawing/2014/main" id="{2C523BFD-FBB0-4BD6-A7E5-5FDB0C21DE5F}"/>
+                <a16:creationId xmlns:a16="http://schemas.microsoft.com/office/drawing/2014/main" id="{D5588C7F-6C19-468E-9DC6-5A37B5EC85C3}"/>
               </a:ext>
             </a:extLst>
           </p:cNvPr>
@@ -15397,7 +19397,7 @@
           <p:cNvPr id="36" name="">
             <a:extLst xmlns:a="http://schemas.openxmlformats.org/drawingml/2006/main">
               <a:ext uri="{FF2B5EF4-FFF2-40B4-BE49-F238E27FC236}">
-                <a16:creationId xmlns:a16="http://schemas.microsoft.com/office/drawing/2014/main" id="{C4D03376-0DE5-474B-BC51-3019C7057A12}"/>
+                <a16:creationId xmlns:a16="http://schemas.microsoft.com/office/drawing/2014/main" id="{EB5608C9-2044-4F1C-BB87-7B3D1E3DCB03}"/>
               </a:ext>
             </a:extLst>
           </p:cNvPr>
@@ -15430,7 +19430,7 @@
           <p:cNvPr id="37" name="">
             <a:extLst xmlns:a="http://schemas.openxmlformats.org/drawingml/2006/main">
               <a:ext uri="{FF2B5EF4-FFF2-40B4-BE49-F238E27FC236}">
-                <a16:creationId xmlns:a16="http://schemas.microsoft.com/office/drawing/2014/main" id="{D62338C5-2FB1-4DB4-B7F0-CC27B51318CF}"/>
+                <a16:creationId xmlns:a16="http://schemas.microsoft.com/office/drawing/2014/main" id="{E703ED68-D4E8-4453-99BC-82DF67AE9B69}"/>
               </a:ext>
             </a:extLst>
           </p:cNvPr>
@@ -15480,7 +19480,7 @@
           <p:cNvPr id="38" name="">
             <a:extLst xmlns:a="http://schemas.openxmlformats.org/drawingml/2006/main">
               <a:ext uri="{FF2B5EF4-FFF2-40B4-BE49-F238E27FC236}">
-                <a16:creationId xmlns:a16="http://schemas.microsoft.com/office/drawing/2014/main" id="{F9449DB7-B73B-4CCB-BC19-4774C13E207D}"/>
+                <a16:creationId xmlns:a16="http://schemas.microsoft.com/office/drawing/2014/main" id="{43D19E61-531F-4C18-9265-47955EF110E9}"/>
               </a:ext>
             </a:extLst>
           </p:cNvPr>
@@ -15513,7 +19513,7 @@
           <p:cNvPr id="39" name="">
             <a:extLst xmlns:a="http://schemas.openxmlformats.org/drawingml/2006/main">
               <a:ext uri="{FF2B5EF4-FFF2-40B4-BE49-F238E27FC236}">
-                <a16:creationId xmlns:a16="http://schemas.microsoft.com/office/drawing/2014/main" id="{3A915683-47BF-4B11-B38F-FF2F2DF4CD8D}"/>
+                <a16:creationId xmlns:a16="http://schemas.microsoft.com/office/drawing/2014/main" id="{4FF3A8B9-0268-4A20-84F7-45ADCBE955B7}"/>
               </a:ext>
             </a:extLst>
           </p:cNvPr>
@@ -15563,7 +19563,7 @@
           <p:cNvPr id="40" name="">
             <a:extLst xmlns:a="http://schemas.openxmlformats.org/drawingml/2006/main">
               <a:ext uri="{FF2B5EF4-FFF2-40B4-BE49-F238E27FC236}">
-                <a16:creationId xmlns:a16="http://schemas.microsoft.com/office/drawing/2014/main" id="{1EC9C39F-1878-473F-8A29-74DC712E6DC2}"/>
+                <a16:creationId xmlns:a16="http://schemas.microsoft.com/office/drawing/2014/main" id="{BEDCACC9-646E-4C01-B7E7-8CF025A6E440}"/>
               </a:ext>
             </a:extLst>
           </p:cNvPr>
@@ -15596,7 +19596,7 @@
           <p:cNvPr id="41" name="">
             <a:extLst xmlns:a="http://schemas.openxmlformats.org/drawingml/2006/main">
               <a:ext uri="{FF2B5EF4-FFF2-40B4-BE49-F238E27FC236}">
-                <a16:creationId xmlns:a16="http://schemas.microsoft.com/office/drawing/2014/main" id="{41D5550B-4F9F-49C5-9F94-33A2AC548719}"/>
+                <a16:creationId xmlns:a16="http://schemas.microsoft.com/office/drawing/2014/main" id="{6A0C4A83-162E-4D11-B2A5-F471102D3512}"/>
               </a:ext>
             </a:extLst>
           </p:cNvPr>
@@ -15646,7 +19646,7 @@
           <p:cNvPr id="42" name="">
             <a:extLst xmlns:a="http://schemas.openxmlformats.org/drawingml/2006/main">
               <a:ext uri="{FF2B5EF4-FFF2-40B4-BE49-F238E27FC236}">
-                <a16:creationId xmlns:a16="http://schemas.microsoft.com/office/drawing/2014/main" id="{42E60012-4BDD-4EE5-8E87-0F9427724503}"/>
+                <a16:creationId xmlns:a16="http://schemas.microsoft.com/office/drawing/2014/main" id="{3D624BC1-DE71-4490-984B-F33FA9D0CEAE}"/>
               </a:ext>
             </a:extLst>
           </p:cNvPr>
@@ -15679,7 +19679,7 @@
           <p:cNvPr id="43" name="">
             <a:extLst xmlns:a="http://schemas.openxmlformats.org/drawingml/2006/main">
               <a:ext uri="{FF2B5EF4-FFF2-40B4-BE49-F238E27FC236}">
-                <a16:creationId xmlns:a16="http://schemas.microsoft.com/office/drawing/2014/main" id="{3DE62AB6-DB72-447F-BB6E-366DD901EA36}"/>
+                <a16:creationId xmlns:a16="http://schemas.microsoft.com/office/drawing/2014/main" id="{D6A1D4AC-9525-453E-9739-37C97ED19F3C}"/>
               </a:ext>
             </a:extLst>
           </p:cNvPr>
@@ -15729,7 +19729,7 @@
           <p:cNvPr id="44" name="">
             <a:extLst xmlns:a="http://schemas.openxmlformats.org/drawingml/2006/main">
               <a:ext uri="{FF2B5EF4-FFF2-40B4-BE49-F238E27FC236}">
-                <a16:creationId xmlns:a16="http://schemas.microsoft.com/office/drawing/2014/main" id="{6FE72D27-DF97-4184-889E-3FAA6BB19B42}"/>
+                <a16:creationId xmlns:a16="http://schemas.microsoft.com/office/drawing/2014/main" id="{7B76C1B8-9C03-4715-B530-AF198926A3B5}"/>
               </a:ext>
             </a:extLst>
           </p:cNvPr>
@@ -15762,7 +19762,7 @@
           <p:cNvPr id="45" name="">
             <a:extLst xmlns:a="http://schemas.openxmlformats.org/drawingml/2006/main">
               <a:ext uri="{FF2B5EF4-FFF2-40B4-BE49-F238E27FC236}">
-                <a16:creationId xmlns:a16="http://schemas.microsoft.com/office/drawing/2014/main" id="{D071E366-65B9-489B-86CD-F80B9EF9AA83}"/>
+                <a16:creationId xmlns:a16="http://schemas.microsoft.com/office/drawing/2014/main" id="{271EA518-FAF1-42FB-A392-7F698C8AE2C7}"/>
               </a:ext>
             </a:extLst>
           </p:cNvPr>
@@ -15812,7 +19812,7 @@
           <p:cNvPr id="46" name="">
             <a:extLst xmlns:a="http://schemas.openxmlformats.org/drawingml/2006/main">
               <a:ext uri="{FF2B5EF4-FFF2-40B4-BE49-F238E27FC236}">
-                <a16:creationId xmlns:a16="http://schemas.microsoft.com/office/drawing/2014/main" id="{68DC42C2-CFE8-46B9-8298-C7AEDBD11FBA}"/>
+                <a16:creationId xmlns:a16="http://schemas.microsoft.com/office/drawing/2014/main" id="{A2BBEBC0-E91F-4A79-A173-047072D1220D}"/>
               </a:ext>
             </a:extLst>
           </p:cNvPr>
@@ -15845,7 +19845,7 @@
           <p:cNvPr id="47" name="">
             <a:extLst xmlns:a="http://schemas.openxmlformats.org/drawingml/2006/main">
               <a:ext uri="{FF2B5EF4-FFF2-40B4-BE49-F238E27FC236}">
-                <a16:creationId xmlns:a16="http://schemas.microsoft.com/office/drawing/2014/main" id="{39FCBA01-3638-44EF-9660-413387197800}"/>
+                <a16:creationId xmlns:a16="http://schemas.microsoft.com/office/drawing/2014/main" id="{19989F1F-8818-42A5-944A-BE84AC44AEE7}"/>
               </a:ext>
             </a:extLst>
           </p:cNvPr>
@@ -15895,7 +19895,7 @@
           <p:cNvPr id="48" name="">
             <a:extLst xmlns:a="http://schemas.openxmlformats.org/drawingml/2006/main">
               <a:ext uri="{FF2B5EF4-FFF2-40B4-BE49-F238E27FC236}">
-                <a16:creationId xmlns:a16="http://schemas.microsoft.com/office/drawing/2014/main" id="{A9E33F16-B9AD-4D69-BEDB-9A1352CA905D}"/>
+                <a16:creationId xmlns:a16="http://schemas.microsoft.com/office/drawing/2014/main" id="{C55A6625-B36C-4943-8E47-A25B9D4FECFE}"/>
               </a:ext>
             </a:extLst>
           </p:cNvPr>
@@ -15928,7 +19928,7 @@
           <p:cNvPr id="49" name="">
             <a:extLst xmlns:a="http://schemas.openxmlformats.org/drawingml/2006/main">
               <a:ext uri="{FF2B5EF4-FFF2-40B4-BE49-F238E27FC236}">
-                <a16:creationId xmlns:a16="http://schemas.microsoft.com/office/drawing/2014/main" id="{EC356CD8-21E8-43B8-9C4E-C7A61054464A}"/>
+                <a16:creationId xmlns:a16="http://schemas.microsoft.com/office/drawing/2014/main" id="{984A1505-375B-40AA-9858-B434747B4D81}"/>
               </a:ext>
             </a:extLst>
           </p:cNvPr>
@@ -15978,7 +19978,7 @@
           <p:cNvPr id="50" name="">
             <a:extLst xmlns:a="http://schemas.openxmlformats.org/drawingml/2006/main">
               <a:ext uri="{FF2B5EF4-FFF2-40B4-BE49-F238E27FC236}">
-                <a16:creationId xmlns:a16="http://schemas.microsoft.com/office/drawing/2014/main" id="{7F33CD1F-D7C3-4DA7-AA3A-ECF22D49FE59}"/>
+                <a16:creationId xmlns:a16="http://schemas.microsoft.com/office/drawing/2014/main" id="{8D5049E3-1E04-48F0-93B8-6D1E3769D7C5}"/>
               </a:ext>
             </a:extLst>
           </p:cNvPr>
@@ -16011,7 +20011,7 @@
           <p:cNvPr id="51" name="">
             <a:extLst xmlns:a="http://schemas.openxmlformats.org/drawingml/2006/main">
               <a:ext uri="{FF2B5EF4-FFF2-40B4-BE49-F238E27FC236}">
-                <a16:creationId xmlns:a16="http://schemas.microsoft.com/office/drawing/2014/main" id="{8E2CDDFC-9A3F-413A-9554-35D130B16360}"/>
+                <a16:creationId xmlns:a16="http://schemas.microsoft.com/office/drawing/2014/main" id="{BFA27FE3-B6EF-4EA5-AC34-90233A00BDEC}"/>
               </a:ext>
             </a:extLst>
           </p:cNvPr>
@@ -16061,7 +20061,7 @@
           <p:cNvPr id="52" name="">
             <a:extLst xmlns:a="http://schemas.openxmlformats.org/drawingml/2006/main">
               <a:ext uri="{FF2B5EF4-FFF2-40B4-BE49-F238E27FC236}">
-                <a16:creationId xmlns:a16="http://schemas.microsoft.com/office/drawing/2014/main" id="{20AD8F10-C978-4452-A0E4-5D7BA77AF127}"/>
+                <a16:creationId xmlns:a16="http://schemas.microsoft.com/office/drawing/2014/main" id="{816491B4-0FB6-4A6C-84EE-730E6A7D9F7B}"/>
               </a:ext>
             </a:extLst>
           </p:cNvPr>
@@ -16094,7 +20094,7 @@
           <p:cNvPr id="53" name="">
             <a:extLst xmlns:a="http://schemas.openxmlformats.org/drawingml/2006/main">
               <a:ext uri="{FF2B5EF4-FFF2-40B4-BE49-F238E27FC236}">
-                <a16:creationId xmlns:a16="http://schemas.microsoft.com/office/drawing/2014/main" id="{6B853C00-6BE6-49EF-B77E-219AD4FB3E6A}"/>
+                <a16:creationId xmlns:a16="http://schemas.microsoft.com/office/drawing/2014/main" id="{6560AA53-111B-4404-8947-E5833464E6FC}"/>
               </a:ext>
             </a:extLst>
           </p:cNvPr>
@@ -16144,7 +20144,7 @@
           <p:cNvPr id="54" name="">
             <a:extLst xmlns:a="http://schemas.openxmlformats.org/drawingml/2006/main">
               <a:ext uri="{FF2B5EF4-FFF2-40B4-BE49-F238E27FC236}">
-                <a16:creationId xmlns:a16="http://schemas.microsoft.com/office/drawing/2014/main" id="{C069235A-1872-4F50-8CC2-CB41ECDBA5B3}"/>
+                <a16:creationId xmlns:a16="http://schemas.microsoft.com/office/drawing/2014/main" id="{4C8AEA0A-644C-4D3F-9F2F-908025B240FC}"/>
               </a:ext>
             </a:extLst>
           </p:cNvPr>
@@ -16177,7 +20177,7 @@
           <p:cNvPr id="55" name="">
             <a:extLst xmlns:a="http://schemas.openxmlformats.org/drawingml/2006/main">
               <a:ext uri="{FF2B5EF4-FFF2-40B4-BE49-F238E27FC236}">
-                <a16:creationId xmlns:a16="http://schemas.microsoft.com/office/drawing/2014/main" id="{0E4B4756-D3CD-483F-B45E-85306A115283}"/>
+                <a16:creationId xmlns:a16="http://schemas.microsoft.com/office/drawing/2014/main" id="{0A0B8F36-8F8A-4DFB-96EB-34D3420C5BFA}"/>
               </a:ext>
             </a:extLst>
           </p:cNvPr>
@@ -16227,7 +20227,7 @@
           <p:cNvPr id="56" name="">
             <a:extLst xmlns:a="http://schemas.openxmlformats.org/drawingml/2006/main">
               <a:ext uri="{FF2B5EF4-FFF2-40B4-BE49-F238E27FC236}">
-                <a16:creationId xmlns:a16="http://schemas.microsoft.com/office/drawing/2014/main" id="{40DC9B50-91A6-44FE-BA4D-04E94743174B}"/>
+                <a16:creationId xmlns:a16="http://schemas.microsoft.com/office/drawing/2014/main" id="{8B51785D-6E8C-4965-81CE-62903C957BEB}"/>
               </a:ext>
             </a:extLst>
           </p:cNvPr>
@@ -16260,7 +20260,7 @@
           <p:cNvPr id="57" name="">
             <a:extLst xmlns:a="http://schemas.openxmlformats.org/drawingml/2006/main">
               <a:ext uri="{FF2B5EF4-FFF2-40B4-BE49-F238E27FC236}">
-                <a16:creationId xmlns:a16="http://schemas.microsoft.com/office/drawing/2014/main" id="{921B0A11-8ED0-416E-95C6-480743A24BE7}"/>
+                <a16:creationId xmlns:a16="http://schemas.microsoft.com/office/drawing/2014/main" id="{30EE7ECE-14E1-4DA4-9DF6-54D149B1B96B}"/>
               </a:ext>
             </a:extLst>
           </p:cNvPr>
@@ -16310,7 +20310,7 @@
           <p:cNvPr id="58" name="">
             <a:extLst xmlns:a="http://schemas.openxmlformats.org/drawingml/2006/main">
               <a:ext uri="{FF2B5EF4-FFF2-40B4-BE49-F238E27FC236}">
-                <a16:creationId xmlns:a16="http://schemas.microsoft.com/office/drawing/2014/main" id="{63CAE622-A9A7-467A-B5C3-7CC280A3E87D}"/>
+                <a16:creationId xmlns:a16="http://schemas.microsoft.com/office/drawing/2014/main" id="{49C953CC-5E45-4C5C-9A4D-9997A2D1307C}"/>
               </a:ext>
             </a:extLst>
           </p:cNvPr>
@@ -16343,7 +20343,7 @@
           <p:cNvPr id="59" name="">
             <a:extLst xmlns:a="http://schemas.openxmlformats.org/drawingml/2006/main">
               <a:ext uri="{FF2B5EF4-FFF2-40B4-BE49-F238E27FC236}">
-                <a16:creationId xmlns:a16="http://schemas.microsoft.com/office/drawing/2014/main" id="{605DB361-8792-40ED-B4DF-055D63C9BEA4}"/>
+                <a16:creationId xmlns:a16="http://schemas.microsoft.com/office/drawing/2014/main" id="{EEE78DCD-0C0A-4172-9950-5DDE1DAFAEB7}"/>
               </a:ext>
             </a:extLst>
           </p:cNvPr>
@@ -16393,7 +20393,7 @@
           <p:cNvPr id="60" name="">
             <a:extLst xmlns:a="http://schemas.openxmlformats.org/drawingml/2006/main">
               <a:ext uri="{FF2B5EF4-FFF2-40B4-BE49-F238E27FC236}">
-                <a16:creationId xmlns:a16="http://schemas.microsoft.com/office/drawing/2014/main" id="{62E30466-9E11-4DF4-9FD6-50E1C9EB3A1D}"/>
+                <a16:creationId xmlns:a16="http://schemas.microsoft.com/office/drawing/2014/main" id="{A6B5BBDC-E08D-4D93-93E1-267DE80777FB}"/>
               </a:ext>
             </a:extLst>
           </p:cNvPr>
@@ -16426,7 +20426,7 @@
           <p:cNvPr id="61" name="">
             <a:extLst xmlns:a="http://schemas.openxmlformats.org/drawingml/2006/main">
               <a:ext uri="{FF2B5EF4-FFF2-40B4-BE49-F238E27FC236}">
-                <a16:creationId xmlns:a16="http://schemas.microsoft.com/office/drawing/2014/main" id="{ADB22EBA-4BF7-4025-9280-9A5AADB5BED5}"/>
+                <a16:creationId xmlns:a16="http://schemas.microsoft.com/office/drawing/2014/main" id="{910C2D43-B05C-49F0-B7D6-F99702357954}"/>
               </a:ext>
             </a:extLst>
           </p:cNvPr>
@@ -16476,7 +20476,7 @@
           <p:cNvPr id="62" name="">
             <a:extLst xmlns:a="http://schemas.openxmlformats.org/drawingml/2006/main">
               <a:ext uri="{FF2B5EF4-FFF2-40B4-BE49-F238E27FC236}">
-                <a16:creationId xmlns:a16="http://schemas.microsoft.com/office/drawing/2014/main" id="{D0C866AC-CB80-4144-A6F1-739F7261C756}"/>
+                <a16:creationId xmlns:a16="http://schemas.microsoft.com/office/drawing/2014/main" id="{E5A5D565-AF22-48D3-BB97-7AEB206CCF0C}"/>
               </a:ext>
             </a:extLst>
           </p:cNvPr>
@@ -16509,7 +20509,7 @@
           <p:cNvPr id="63" name="">
             <a:extLst xmlns:a="http://schemas.openxmlformats.org/drawingml/2006/main">
               <a:ext uri="{FF2B5EF4-FFF2-40B4-BE49-F238E27FC236}">
-                <a16:creationId xmlns:a16="http://schemas.microsoft.com/office/drawing/2014/main" id="{1F8598C7-F0C2-41A7-AAD0-1D34E8EDA4D3}"/>
+                <a16:creationId xmlns:a16="http://schemas.microsoft.com/office/drawing/2014/main" id="{9F8F1A01-1F80-4A63-B232-1A30284D40A8}"/>
               </a:ext>
             </a:extLst>
           </p:cNvPr>
@@ -16559,7 +20559,7 @@
           <p:cNvPr id="64" name="">
             <a:extLst xmlns:a="http://schemas.openxmlformats.org/drawingml/2006/main">
               <a:ext uri="{FF2B5EF4-FFF2-40B4-BE49-F238E27FC236}">
-                <a16:creationId xmlns:a16="http://schemas.microsoft.com/office/drawing/2014/main" id="{653C57DF-C247-48A6-81D7-9F3AB762EE5F}"/>
+                <a16:creationId xmlns:a16="http://schemas.microsoft.com/office/drawing/2014/main" id="{1F7582D7-9BEC-46F2-A67E-5DBBF3FEE7F5}"/>
               </a:ext>
             </a:extLst>
           </p:cNvPr>
@@ -16592,7 +20592,7 @@
           <p:cNvPr id="65" name="">
             <a:extLst xmlns:a="http://schemas.openxmlformats.org/drawingml/2006/main">
               <a:ext uri="{FF2B5EF4-FFF2-40B4-BE49-F238E27FC236}">
-                <a16:creationId xmlns:a16="http://schemas.microsoft.com/office/drawing/2014/main" id="{755ED6A3-0FE1-4C38-971A-A89B68AB4741}"/>
+                <a16:creationId xmlns:a16="http://schemas.microsoft.com/office/drawing/2014/main" id="{696F476C-EA90-4366-9C03-B9B7B58CC08A}"/>
               </a:ext>
             </a:extLst>
           </p:cNvPr>
@@ -16642,7 +20642,7 @@
           <p:cNvPr id="66" name="">
             <a:extLst xmlns:a="http://schemas.openxmlformats.org/drawingml/2006/main">
               <a:ext uri="{FF2B5EF4-FFF2-40B4-BE49-F238E27FC236}">
-                <a16:creationId xmlns:a16="http://schemas.microsoft.com/office/drawing/2014/main" id="{1A872389-E4CB-4271-88BC-47577B6B8956}"/>
+                <a16:creationId xmlns:a16="http://schemas.microsoft.com/office/drawing/2014/main" id="{BE7EC0DC-695B-4E0F-A3AF-E133260ED6A2}"/>
               </a:ext>
             </a:extLst>
           </p:cNvPr>
@@ -16675,7 +20675,7 @@
           <p:cNvPr id="67" name="">
             <a:extLst xmlns:a="http://schemas.openxmlformats.org/drawingml/2006/main">
               <a:ext uri="{FF2B5EF4-FFF2-40B4-BE49-F238E27FC236}">
-                <a16:creationId xmlns:a16="http://schemas.microsoft.com/office/drawing/2014/main" id="{F93FF0DA-0379-4C6A-8E79-348951FF009C}"/>
+                <a16:creationId xmlns:a16="http://schemas.microsoft.com/office/drawing/2014/main" id="{DF9741A5-B36B-42B9-AE3B-74754F0FFB8B}"/>
               </a:ext>
             </a:extLst>
           </p:cNvPr>
@@ -16725,7 +20725,7 @@
           <p:cNvPr id="68" name="">
             <a:extLst xmlns:a="http://schemas.openxmlformats.org/drawingml/2006/main">
               <a:ext uri="{FF2B5EF4-FFF2-40B4-BE49-F238E27FC236}">
-                <a16:creationId xmlns:a16="http://schemas.microsoft.com/office/drawing/2014/main" id="{48BE83BB-D576-4821-AC95-75F41229186F}"/>
+                <a16:creationId xmlns:a16="http://schemas.microsoft.com/office/drawing/2014/main" id="{91F059B2-F1D1-465D-91B0-5F61C46331D1}"/>
               </a:ext>
             </a:extLst>
           </p:cNvPr>
@@ -16758,7 +20758,7 @@
           <p:cNvPr id="69" name="">
             <a:extLst xmlns:a="http://schemas.openxmlformats.org/drawingml/2006/main">
               <a:ext uri="{FF2B5EF4-FFF2-40B4-BE49-F238E27FC236}">
-                <a16:creationId xmlns:a16="http://schemas.microsoft.com/office/drawing/2014/main" id="{9327113D-0942-4BC1-935E-D785106CDEBF}"/>
+                <a16:creationId xmlns:a16="http://schemas.microsoft.com/office/drawing/2014/main" id="{31FF35D8-1DC1-43CF-A268-8D95E196E359}"/>
               </a:ext>
             </a:extLst>
           </p:cNvPr>
@@ -16808,7 +20808,7 @@
           <p:cNvPr id="70" name="">
             <a:extLst xmlns:a="http://schemas.openxmlformats.org/drawingml/2006/main">
               <a:ext uri="{FF2B5EF4-FFF2-40B4-BE49-F238E27FC236}">
-                <a16:creationId xmlns:a16="http://schemas.microsoft.com/office/drawing/2014/main" id="{F4418FB3-AD9F-4B69-BE0A-38A358E474DA}"/>
+                <a16:creationId xmlns:a16="http://schemas.microsoft.com/office/drawing/2014/main" id="{C02E8C12-336F-4AE7-9F37-585F5D5D0946}"/>
               </a:ext>
             </a:extLst>
           </p:cNvPr>
@@ -16841,7 +20841,7 @@
           <p:cNvPr id="71" name="">
             <a:extLst xmlns:a="http://schemas.openxmlformats.org/drawingml/2006/main">
               <a:ext uri="{FF2B5EF4-FFF2-40B4-BE49-F238E27FC236}">
-                <a16:creationId xmlns:a16="http://schemas.microsoft.com/office/drawing/2014/main" id="{3F296C89-ED78-4E80-8E14-9DDE0DCD92C4}"/>
+                <a16:creationId xmlns:a16="http://schemas.microsoft.com/office/drawing/2014/main" id="{A6D7BA3A-1BBF-4187-9CA2-0B402CDE51B4}"/>
               </a:ext>
             </a:extLst>
           </p:cNvPr>
@@ -16891,7 +20891,7 @@
           <p:cNvPr id="72" name="">
             <a:extLst xmlns:a="http://schemas.openxmlformats.org/drawingml/2006/main">
               <a:ext uri="{FF2B5EF4-FFF2-40B4-BE49-F238E27FC236}">
-                <a16:creationId xmlns:a16="http://schemas.microsoft.com/office/drawing/2014/main" id="{05430AB0-D9AA-4A62-B154-B1CC803128B8}"/>
+                <a16:creationId xmlns:a16="http://schemas.microsoft.com/office/drawing/2014/main" id="{EB104CBA-3F47-40E8-8AFB-F0148A92E58C}"/>
               </a:ext>
             </a:extLst>
           </p:cNvPr>
@@ -16924,7 +20924,7 @@
           <p:cNvPr id="73" name="">
             <a:extLst xmlns:a="http://schemas.openxmlformats.org/drawingml/2006/main">
               <a:ext uri="{FF2B5EF4-FFF2-40B4-BE49-F238E27FC236}">
-                <a16:creationId xmlns:a16="http://schemas.microsoft.com/office/drawing/2014/main" id="{8A97E30D-CBFB-48C3-87D4-F69413E2DBD5}"/>
+                <a16:creationId xmlns:a16="http://schemas.microsoft.com/office/drawing/2014/main" id="{006F798D-5A9A-4550-8932-07FD87F5D1A0}"/>
               </a:ext>
             </a:extLst>
           </p:cNvPr>
@@ -16974,7 +20974,7 @@
           <p:cNvPr id="74" name="">
             <a:extLst xmlns:a="http://schemas.openxmlformats.org/drawingml/2006/main">
               <a:ext uri="{FF2B5EF4-FFF2-40B4-BE49-F238E27FC236}">
-                <a16:creationId xmlns:a16="http://schemas.microsoft.com/office/drawing/2014/main" id="{2553FE0F-004A-49D7-B021-228B7A9E8ACD}"/>
+                <a16:creationId xmlns:a16="http://schemas.microsoft.com/office/drawing/2014/main" id="{D668EF2C-5100-44E9-938D-3A668D637308}"/>
               </a:ext>
             </a:extLst>
           </p:cNvPr>
@@ -17007,7 +21007,7 @@
           <p:cNvPr id="75" name="">
             <a:extLst xmlns:a="http://schemas.openxmlformats.org/drawingml/2006/main">
               <a:ext uri="{FF2B5EF4-FFF2-40B4-BE49-F238E27FC236}">
-                <a16:creationId xmlns:a16="http://schemas.microsoft.com/office/drawing/2014/main" id="{E253E7D4-7AC3-4897-98DA-C726062872E0}"/>
+                <a16:creationId xmlns:a16="http://schemas.microsoft.com/office/drawing/2014/main" id="{24C82A82-8EBC-4987-971E-DABEA6E0913C}"/>
               </a:ext>
             </a:extLst>
           </p:cNvPr>
@@ -17057,7 +21057,7 @@
           <p:cNvPr id="76" name="">
             <a:extLst xmlns:a="http://schemas.openxmlformats.org/drawingml/2006/main">
               <a:ext uri="{FF2B5EF4-FFF2-40B4-BE49-F238E27FC236}">
-                <a16:creationId xmlns:a16="http://schemas.microsoft.com/office/drawing/2014/main" id="{E382B430-F94B-4E0A-A8EF-F0307C6ED02D}"/>
+                <a16:creationId xmlns:a16="http://schemas.microsoft.com/office/drawing/2014/main" id="{108EC5B7-F56E-4C43-B928-EF9D893C830D}"/>
               </a:ext>
             </a:extLst>
           </p:cNvPr>
@@ -17090,7 +21090,7 @@
           <p:cNvPr id="77" name="">
             <a:extLst xmlns:a="http://schemas.openxmlformats.org/drawingml/2006/main">
               <a:ext uri="{FF2B5EF4-FFF2-40B4-BE49-F238E27FC236}">
-                <a16:creationId xmlns:a16="http://schemas.microsoft.com/office/drawing/2014/main" id="{E1D0FB18-951E-4681-ABEE-46EDF0D24AAC}"/>
+                <a16:creationId xmlns:a16="http://schemas.microsoft.com/office/drawing/2014/main" id="{2454F033-27D1-4F16-9CD4-05320FA71D53}"/>
               </a:ext>
             </a:extLst>
           </p:cNvPr>
@@ -17140,7 +21140,7 @@
           <p:cNvPr id="78" name="">
             <a:extLst xmlns:a="http://schemas.openxmlformats.org/drawingml/2006/main">
               <a:ext uri="{FF2B5EF4-FFF2-40B4-BE49-F238E27FC236}">
-                <a16:creationId xmlns:a16="http://schemas.microsoft.com/office/drawing/2014/main" id="{0A619B87-9A78-4882-88EF-B321D8857E25}"/>
+                <a16:creationId xmlns:a16="http://schemas.microsoft.com/office/drawing/2014/main" id="{4CC99030-BF28-430F-B5BC-E773A0021139}"/>
               </a:ext>
             </a:extLst>
           </p:cNvPr>
@@ -17173,7 +21173,7 @@
           <p:cNvPr id="79" name="">
             <a:extLst xmlns:a="http://schemas.openxmlformats.org/drawingml/2006/main">
               <a:ext uri="{FF2B5EF4-FFF2-40B4-BE49-F238E27FC236}">
-                <a16:creationId xmlns:a16="http://schemas.microsoft.com/office/drawing/2014/main" id="{9CC1FA2D-C1E6-43B4-9615-366A4E679207}"/>
+                <a16:creationId xmlns:a16="http://schemas.microsoft.com/office/drawing/2014/main" id="{57E9C319-FC53-4195-B35E-3E589FDD422A}"/>
               </a:ext>
             </a:extLst>
           </p:cNvPr>
@@ -17223,7 +21223,7 @@
           <p:cNvPr id="80" name="">
             <a:extLst xmlns:a="http://schemas.openxmlformats.org/drawingml/2006/main">
               <a:ext uri="{FF2B5EF4-FFF2-40B4-BE49-F238E27FC236}">
-                <a16:creationId xmlns:a16="http://schemas.microsoft.com/office/drawing/2014/main" id="{6121D637-4D79-48FC-9709-E811FDFAE8F4}"/>
+                <a16:creationId xmlns:a16="http://schemas.microsoft.com/office/drawing/2014/main" id="{A2F4C17D-D17E-4CAD-BC45-0EDF73684AFE}"/>
               </a:ext>
             </a:extLst>
           </p:cNvPr>
@@ -17256,7 +21256,7 @@
           <p:cNvPr id="81" name="">
             <a:extLst xmlns:a="http://schemas.openxmlformats.org/drawingml/2006/main">
               <a:ext uri="{FF2B5EF4-FFF2-40B4-BE49-F238E27FC236}">
-                <a16:creationId xmlns:a16="http://schemas.microsoft.com/office/drawing/2014/main" id="{951595E8-F1C4-43A2-A49C-1833E2143236}"/>
+                <a16:creationId xmlns:a16="http://schemas.microsoft.com/office/drawing/2014/main" id="{E23529B0-E6B5-4ACC-AB13-823D48371F80}"/>
               </a:ext>
             </a:extLst>
           </p:cNvPr>
@@ -17306,7 +21306,7 @@
           <p:cNvPr id="82" name="">
             <a:extLst xmlns:a="http://schemas.openxmlformats.org/drawingml/2006/main">
               <a:ext uri="{FF2B5EF4-FFF2-40B4-BE49-F238E27FC236}">
-                <a16:creationId xmlns:a16="http://schemas.microsoft.com/office/drawing/2014/main" id="{34D983EA-2338-4D9C-939A-E9A4053D2AAF}"/>
+                <a16:creationId xmlns:a16="http://schemas.microsoft.com/office/drawing/2014/main" id="{E34BB937-0B51-4F1C-BB4E-B0FADF7E3D30}"/>
               </a:ext>
             </a:extLst>
           </p:cNvPr>
@@ -17339,7 +21339,7 @@
           <p:cNvPr id="83" name="">
             <a:extLst xmlns:a="http://schemas.openxmlformats.org/drawingml/2006/main">
               <a:ext uri="{FF2B5EF4-FFF2-40B4-BE49-F238E27FC236}">
-                <a16:creationId xmlns:a16="http://schemas.microsoft.com/office/drawing/2014/main" id="{36602370-CCD9-4888-84C1-022DEAD37671}"/>
+                <a16:creationId xmlns:a16="http://schemas.microsoft.com/office/drawing/2014/main" id="{E2D34522-D7B1-4701-B90E-E723D935DBAD}"/>
               </a:ext>
             </a:extLst>
           </p:cNvPr>
@@ -17389,7 +21389,7 @@
           <p:cNvPr id="84" name="">
             <a:extLst xmlns:a="http://schemas.openxmlformats.org/drawingml/2006/main">
               <a:ext uri="{FF2B5EF4-FFF2-40B4-BE49-F238E27FC236}">
-                <a16:creationId xmlns:a16="http://schemas.microsoft.com/office/drawing/2014/main" id="{6DCA1B80-226E-416C-BD9C-99E624E755A0}"/>
+                <a16:creationId xmlns:a16="http://schemas.microsoft.com/office/drawing/2014/main" id="{92FA27DF-CE1A-4E37-8B9E-06759D91B7B6}"/>
               </a:ext>
             </a:extLst>
           </p:cNvPr>
@@ -17422,7 +21422,7 @@
           <p:cNvPr id="85" name="">
             <a:extLst xmlns:a="http://schemas.openxmlformats.org/drawingml/2006/main">
               <a:ext uri="{FF2B5EF4-FFF2-40B4-BE49-F238E27FC236}">
-                <a16:creationId xmlns:a16="http://schemas.microsoft.com/office/drawing/2014/main" id="{A601A09A-73A7-4B11-9D46-7253E802C35A}"/>
+                <a16:creationId xmlns:a16="http://schemas.microsoft.com/office/drawing/2014/main" id="{E053C110-BAAA-4D0C-8170-957D8894223D}"/>
               </a:ext>
             </a:extLst>
           </p:cNvPr>
@@ -17472,7 +21472,7 @@
           <p:cNvPr id="86" name="">
             <a:extLst xmlns:a="http://schemas.openxmlformats.org/drawingml/2006/main">
               <a:ext uri="{FF2B5EF4-FFF2-40B4-BE49-F238E27FC236}">
-                <a16:creationId xmlns:a16="http://schemas.microsoft.com/office/drawing/2014/main" id="{5DC7CC1E-8BC3-4F46-B20B-1413313BFE36}"/>
+                <a16:creationId xmlns:a16="http://schemas.microsoft.com/office/drawing/2014/main" id="{B5E8A543-510A-4620-BB93-84EC2B3005CA}"/>
               </a:ext>
             </a:extLst>
           </p:cNvPr>
@@ -17505,7 +21505,7 @@
           <p:cNvPr id="87" name="">
             <a:extLst xmlns:a="http://schemas.openxmlformats.org/drawingml/2006/main">
               <a:ext uri="{FF2B5EF4-FFF2-40B4-BE49-F238E27FC236}">
-                <a16:creationId xmlns:a16="http://schemas.microsoft.com/office/drawing/2014/main" id="{404C1B30-1F84-4C79-9BB4-31B3E957D943}"/>
+                <a16:creationId xmlns:a16="http://schemas.microsoft.com/office/drawing/2014/main" id="{107A9B9A-7912-4324-A88C-EEEF92ED004D}"/>
               </a:ext>
             </a:extLst>
           </p:cNvPr>
@@ -17555,7 +21555,7 @@
           <p:cNvPr id="88" name="">
             <a:extLst xmlns:a="http://schemas.openxmlformats.org/drawingml/2006/main">
               <a:ext uri="{FF2B5EF4-FFF2-40B4-BE49-F238E27FC236}">
-                <a16:creationId xmlns:a16="http://schemas.microsoft.com/office/drawing/2014/main" id="{932AB428-C936-4E66-8A2D-07F033A25949}"/>
+                <a16:creationId xmlns:a16="http://schemas.microsoft.com/office/drawing/2014/main" id="{6B5343CD-A746-4D71-A9B9-158CE4C2FDFF}"/>
               </a:ext>
             </a:extLst>
           </p:cNvPr>
@@ -17588,7 +21588,7 @@
           <p:cNvPr id="89" name="">
             <a:extLst xmlns:a="http://schemas.openxmlformats.org/drawingml/2006/main">
               <a:ext uri="{FF2B5EF4-FFF2-40B4-BE49-F238E27FC236}">
-                <a16:creationId xmlns:a16="http://schemas.microsoft.com/office/drawing/2014/main" id="{1ACEFA03-4EFA-40AC-882E-D0C67FD78300}"/>
+                <a16:creationId xmlns:a16="http://schemas.microsoft.com/office/drawing/2014/main" id="{1025C186-7FE9-40D8-A96B-A7FA71FE0F68}"/>
               </a:ext>
             </a:extLst>
           </p:cNvPr>
@@ -17638,7 +21638,7 @@
           <p:cNvPr id="90" name="">
             <a:extLst xmlns:a="http://schemas.openxmlformats.org/drawingml/2006/main">
               <a:ext uri="{FF2B5EF4-FFF2-40B4-BE49-F238E27FC236}">
-                <a16:creationId xmlns:a16="http://schemas.microsoft.com/office/drawing/2014/main" id="{90257847-4D95-43CD-96A5-290755D8460A}"/>
+                <a16:creationId xmlns:a16="http://schemas.microsoft.com/office/drawing/2014/main" id="{B57849D5-5228-4CE5-8EC1-921514B38B53}"/>
               </a:ext>
             </a:extLst>
           </p:cNvPr>
@@ -17688,7 +21688,7 @@
           <p:cNvPr id="91" name="">
             <a:extLst xmlns:a="http://schemas.openxmlformats.org/drawingml/2006/main">
               <a:ext uri="{FF2B5EF4-FFF2-40B4-BE49-F238E27FC236}">
-                <a16:creationId xmlns:a16="http://schemas.microsoft.com/office/drawing/2014/main" id="{5EC092CF-55B9-451F-87B2-02711A96B38E}"/>
+                <a16:creationId xmlns:a16="http://schemas.microsoft.com/office/drawing/2014/main" id="{D4EDDC40-A68D-4889-9ACD-1B4E2C73BAB1}"/>
               </a:ext>
             </a:extLst>
           </p:cNvPr>
@@ -17736,7 +21736,7 @@
     </p:spTree>
     <p:extLst>
       <p:ext uri="{BB962C8B-B14F-4D97-AF65-F5344CB8AC3E}">
-        <p14:creationId xmlns:p14="http://schemas.microsoft.com/office/powerpoint/2010/main" val="2140673134"/>
+        <p14:creationId xmlns:p14="http://schemas.microsoft.com/office/powerpoint/2010/main" val="1815042159"/>
       </p:ext>
     </p:extLst>
   </p:cSld>
@@ -17767,7 +21767,7 @@
           <p:cNvPr id="1" name="">
             <a:extLst xmlns:a="http://schemas.openxmlformats.org/drawingml/2006/main">
               <a:ext uri="{FF2B5EF4-FFF2-40B4-BE49-F238E27FC236}">
-                <a16:creationId xmlns:a16="http://schemas.microsoft.com/office/drawing/2014/main" id="{1DCF1D53-D8EE-4A64-95DB-F15A7AC36DF8}"/>
+                <a16:creationId xmlns:a16="http://schemas.microsoft.com/office/drawing/2014/main" id="{9A98A403-B074-4DAF-9629-E963178B0136}"/>
               </a:ext>
             </a:extLst>
           </p:cNvPr>
@@ -17817,7 +21817,7 @@
           <p:cNvPr id="2" name="">
             <a:extLst xmlns:a="http://schemas.openxmlformats.org/drawingml/2006/main">
               <a:ext uri="{FF2B5EF4-FFF2-40B4-BE49-F238E27FC236}">
-                <a16:creationId xmlns:a16="http://schemas.microsoft.com/office/drawing/2014/main" id="{DF929C5B-5173-4FDE-997A-FB7AC1368646}"/>
+                <a16:creationId xmlns:a16="http://schemas.microsoft.com/office/drawing/2014/main" id="{9AB19F6E-0115-4CCD-A6E3-EF1926D29244}"/>
               </a:ext>
             </a:extLst>
           </p:cNvPr>
@@ -17867,7 +21867,7 @@
           <p:cNvPr id="3" name="">
             <a:extLst xmlns:a="http://schemas.openxmlformats.org/drawingml/2006/main">
               <a:ext uri="{FF2B5EF4-FFF2-40B4-BE49-F238E27FC236}">
-                <a16:creationId xmlns:a16="http://schemas.microsoft.com/office/drawing/2014/main" id="{8E1E82DD-4375-458E-8D98-DE6FEAFDC822}"/>
+                <a16:creationId xmlns:a16="http://schemas.microsoft.com/office/drawing/2014/main" id="{D1C72324-EB2E-42D8-8BDE-D5FF81FB26B9}"/>
               </a:ext>
             </a:extLst>
           </p:cNvPr>
@@ -17900,7 +21900,7 @@
           <p:cNvPr id="4" name="">
             <a:extLst xmlns:a="http://schemas.openxmlformats.org/drawingml/2006/main">
               <a:ext uri="{FF2B5EF4-FFF2-40B4-BE49-F238E27FC236}">
-                <a16:creationId xmlns:a16="http://schemas.microsoft.com/office/drawing/2014/main" id="{D5E1C3D9-5B8A-44D4-8552-2D5793840A7A}"/>
+                <a16:creationId xmlns:a16="http://schemas.microsoft.com/office/drawing/2014/main" id="{1DD6AA46-93F8-4986-B732-7C0F90D3844E}"/>
               </a:ext>
             </a:extLst>
           </p:cNvPr>
@@ -17950,7 +21950,7 @@
           <p:cNvPr id="5" name="">
             <a:extLst xmlns:a="http://schemas.openxmlformats.org/drawingml/2006/main">
               <a:ext uri="{FF2B5EF4-FFF2-40B4-BE49-F238E27FC236}">
-                <a16:creationId xmlns:a16="http://schemas.microsoft.com/office/drawing/2014/main" id="{2408C045-6F55-4D28-B4C7-5B0D4C49708C}"/>
+                <a16:creationId xmlns:a16="http://schemas.microsoft.com/office/drawing/2014/main" id="{D6C3F676-1DF4-46C6-BC4B-E4E5BCEB570C}"/>
               </a:ext>
             </a:extLst>
           </p:cNvPr>
@@ -17983,7 +21983,7 @@
           <p:cNvPr id="6" name="">
             <a:extLst xmlns:a="http://schemas.openxmlformats.org/drawingml/2006/main">
               <a:ext uri="{FF2B5EF4-FFF2-40B4-BE49-F238E27FC236}">
-                <a16:creationId xmlns:a16="http://schemas.microsoft.com/office/drawing/2014/main" id="{0BE2331D-9039-420F-87F9-C4312FA69124}"/>
+                <a16:creationId xmlns:a16="http://schemas.microsoft.com/office/drawing/2014/main" id="{32100CCF-F5F4-4985-AB00-CE3819E29CE4}"/>
               </a:ext>
             </a:extLst>
           </p:cNvPr>
@@ -18033,7 +22033,7 @@
           <p:cNvPr id="7" name="">
             <a:extLst xmlns:a="http://schemas.openxmlformats.org/drawingml/2006/main">
               <a:ext uri="{FF2B5EF4-FFF2-40B4-BE49-F238E27FC236}">
-                <a16:creationId xmlns:a16="http://schemas.microsoft.com/office/drawing/2014/main" id="{4C00D29D-2822-4A72-B310-486EED42D867}"/>
+                <a16:creationId xmlns:a16="http://schemas.microsoft.com/office/drawing/2014/main" id="{686C63A3-C250-4E2A-95BB-0BF65D352C78}"/>
               </a:ext>
             </a:extLst>
           </p:cNvPr>
@@ -18083,7 +22083,7 @@
           <p:cNvPr id="8" name="">
             <a:extLst xmlns:a="http://schemas.openxmlformats.org/drawingml/2006/main">
               <a:ext uri="{FF2B5EF4-FFF2-40B4-BE49-F238E27FC236}">
-                <a16:creationId xmlns:a16="http://schemas.microsoft.com/office/drawing/2014/main" id="{78744B83-FA72-4F9D-874C-281E37FBD7CE}"/>
+                <a16:creationId xmlns:a16="http://schemas.microsoft.com/office/drawing/2014/main" id="{4F4BE122-8AD8-4138-8C9F-F9274186FF03}"/>
               </a:ext>
             </a:extLst>
           </p:cNvPr>
@@ -18133,7 +22133,7 @@
           <p:cNvPr id="9" name="">
             <a:extLst xmlns:a="http://schemas.openxmlformats.org/drawingml/2006/main">
               <a:ext uri="{FF2B5EF4-FFF2-40B4-BE49-F238E27FC236}">
-                <a16:creationId xmlns:a16="http://schemas.microsoft.com/office/drawing/2014/main" id="{7CDB3DE8-68A1-428D-B56F-FA2212101A3C}"/>
+                <a16:creationId xmlns:a16="http://schemas.microsoft.com/office/drawing/2014/main" id="{ECEF15A7-68E9-4281-999B-991B1F478385}"/>
               </a:ext>
             </a:extLst>
           </p:cNvPr>
@@ -18183,7 +22183,7 @@
           <p:cNvPr id="10" name="">
             <a:extLst xmlns:a="http://schemas.openxmlformats.org/drawingml/2006/main">
               <a:ext uri="{FF2B5EF4-FFF2-40B4-BE49-F238E27FC236}">
-                <a16:creationId xmlns:a16="http://schemas.microsoft.com/office/drawing/2014/main" id="{59047D0A-D7E5-409A-9126-4DAF27DA43F9}"/>
+                <a16:creationId xmlns:a16="http://schemas.microsoft.com/office/drawing/2014/main" id="{E2ACFE68-1CE0-4DD9-A482-86A4C56A4994}"/>
               </a:ext>
             </a:extLst>
           </p:cNvPr>
@@ -18216,7 +22216,7 @@
           <p:cNvPr id="11" name="">
             <a:extLst xmlns:a="http://schemas.openxmlformats.org/drawingml/2006/main">
               <a:ext uri="{FF2B5EF4-FFF2-40B4-BE49-F238E27FC236}">
-                <a16:creationId xmlns:a16="http://schemas.microsoft.com/office/drawing/2014/main" id="{9DD26DDF-C656-4A9D-B153-52E71C4E27AA}"/>
+                <a16:creationId xmlns:a16="http://schemas.microsoft.com/office/drawing/2014/main" id="{13B22F4E-E111-4E92-9806-99ED8169E0C1}"/>
               </a:ext>
             </a:extLst>
           </p:cNvPr>
@@ -18266,7 +22266,7 @@
           <p:cNvPr id="12" name="">
             <a:extLst xmlns:a="http://schemas.openxmlformats.org/drawingml/2006/main">
               <a:ext uri="{FF2B5EF4-FFF2-40B4-BE49-F238E27FC236}">
-                <a16:creationId xmlns:a16="http://schemas.microsoft.com/office/drawing/2014/main" id="{709A702D-DBCC-4CBF-8169-E4B71B31888B}"/>
+                <a16:creationId xmlns:a16="http://schemas.microsoft.com/office/drawing/2014/main" id="{8C90F994-1241-4483-AD14-808CA0405661}"/>
               </a:ext>
             </a:extLst>
           </p:cNvPr>
@@ -18316,7 +22316,7 @@
           <p:cNvPr id="13" name="">
             <a:extLst xmlns:a="http://schemas.openxmlformats.org/drawingml/2006/main">
               <a:ext uri="{FF2B5EF4-FFF2-40B4-BE49-F238E27FC236}">
-                <a16:creationId xmlns:a16="http://schemas.microsoft.com/office/drawing/2014/main" id="{F5F7CC58-C376-4749-AFDC-A70268AF2C45}"/>
+                <a16:creationId xmlns:a16="http://schemas.microsoft.com/office/drawing/2014/main" id="{63F8D658-8842-4DF0-A510-08263604F310}"/>
               </a:ext>
             </a:extLst>
           </p:cNvPr>
@@ -18366,7 +22366,7 @@
           <p:cNvPr id="14" name="">
             <a:extLst xmlns:a="http://schemas.openxmlformats.org/drawingml/2006/main">
               <a:ext uri="{FF2B5EF4-FFF2-40B4-BE49-F238E27FC236}">
-                <a16:creationId xmlns:a16="http://schemas.microsoft.com/office/drawing/2014/main" id="{C30A9DA2-491C-484D-A31E-3B5EE3228769}"/>
+                <a16:creationId xmlns:a16="http://schemas.microsoft.com/office/drawing/2014/main" id="{17E0297E-D8D4-45C9-B344-65F2811FC01B}"/>
               </a:ext>
             </a:extLst>
           </p:cNvPr>
@@ -18416,7 +22416,7 @@
           <p:cNvPr id="15" name="">
             <a:extLst xmlns:a="http://schemas.openxmlformats.org/drawingml/2006/main">
               <a:ext uri="{FF2B5EF4-FFF2-40B4-BE49-F238E27FC236}">
-                <a16:creationId xmlns:a16="http://schemas.microsoft.com/office/drawing/2014/main" id="{52FDBBF6-3F2A-43AF-BD16-D6B6A8951292}"/>
+                <a16:creationId xmlns:a16="http://schemas.microsoft.com/office/drawing/2014/main" id="{08C1E8DB-A732-4FA3-BE47-8D41A68E547E}"/>
               </a:ext>
             </a:extLst>
           </p:cNvPr>
@@ -18449,7 +22449,7 @@
           <p:cNvPr id="16" name="">
             <a:extLst xmlns:a="http://schemas.openxmlformats.org/drawingml/2006/main">
               <a:ext uri="{FF2B5EF4-FFF2-40B4-BE49-F238E27FC236}">
-                <a16:creationId xmlns:a16="http://schemas.microsoft.com/office/drawing/2014/main" id="{6EED78BC-5058-4FC9-B8F5-40C7A3937CEB}"/>
+                <a16:creationId xmlns:a16="http://schemas.microsoft.com/office/drawing/2014/main" id="{ADFC1E0D-4D09-497B-828C-AEA0E5BEA673}"/>
               </a:ext>
             </a:extLst>
           </p:cNvPr>
@@ -18499,7 +22499,7 @@
           <p:cNvPr id="17" name="">
             <a:extLst xmlns:a="http://schemas.openxmlformats.org/drawingml/2006/main">
               <a:ext uri="{FF2B5EF4-FFF2-40B4-BE49-F238E27FC236}">
-                <a16:creationId xmlns:a16="http://schemas.microsoft.com/office/drawing/2014/main" id="{7E7DF176-2022-424F-A93F-A04774B51C12}"/>
+                <a16:creationId xmlns:a16="http://schemas.microsoft.com/office/drawing/2014/main" id="{CB261E74-1749-4CC4-ADBF-8AC19538599B}"/>
               </a:ext>
             </a:extLst>
           </p:cNvPr>
@@ -18549,7 +22549,7 @@
           <p:cNvPr id="18" name="">
             <a:extLst xmlns:a="http://schemas.openxmlformats.org/drawingml/2006/main">
               <a:ext uri="{FF2B5EF4-FFF2-40B4-BE49-F238E27FC236}">
-                <a16:creationId xmlns:a16="http://schemas.microsoft.com/office/drawing/2014/main" id="{1918A154-7B04-4247-89E6-2D643E7F85C2}"/>
+                <a16:creationId xmlns:a16="http://schemas.microsoft.com/office/drawing/2014/main" id="{7A9ED956-A761-4C9A-B7A2-13E498773D09}"/>
               </a:ext>
             </a:extLst>
           </p:cNvPr>
@@ -18599,7 +22599,7 @@
           <p:cNvPr id="19" name="">
             <a:extLst xmlns:a="http://schemas.openxmlformats.org/drawingml/2006/main">
               <a:ext uri="{FF2B5EF4-FFF2-40B4-BE49-F238E27FC236}">
-                <a16:creationId xmlns:a16="http://schemas.microsoft.com/office/drawing/2014/main" id="{3E9C9BC5-B051-499F-B274-DF0C799D38B4}"/>
+                <a16:creationId xmlns:a16="http://schemas.microsoft.com/office/drawing/2014/main" id="{6C1546B2-8E1D-43F7-86CA-BCB97CF57B94}"/>
               </a:ext>
             </a:extLst>
           </p:cNvPr>
@@ -18649,7 +22649,7 @@
           <p:cNvPr id="20" name="">
             <a:extLst xmlns:a="http://schemas.openxmlformats.org/drawingml/2006/main">
               <a:ext uri="{FF2B5EF4-FFF2-40B4-BE49-F238E27FC236}">
-                <a16:creationId xmlns:a16="http://schemas.microsoft.com/office/drawing/2014/main" id="{F2E30835-25F5-416D-BB86-9543AD21FF90}"/>
+                <a16:creationId xmlns:a16="http://schemas.microsoft.com/office/drawing/2014/main" id="{F15CA286-BEB9-4EF8-BBBF-0B48C9615D5A}"/>
               </a:ext>
             </a:extLst>
           </p:cNvPr>
@@ -18682,7 +22682,7 @@
           <p:cNvPr id="21" name="">
             <a:extLst xmlns:a="http://schemas.openxmlformats.org/drawingml/2006/main">
               <a:ext uri="{FF2B5EF4-FFF2-40B4-BE49-F238E27FC236}">
-                <a16:creationId xmlns:a16="http://schemas.microsoft.com/office/drawing/2014/main" id="{BCFFDC2A-DA9C-448D-9BA9-9B48EE8B0B59}"/>
+                <a16:creationId xmlns:a16="http://schemas.microsoft.com/office/drawing/2014/main" id="{CC792152-C33C-4798-BA72-6B740FA2C661}"/>
               </a:ext>
             </a:extLst>
           </p:cNvPr>
@@ -18732,7 +22732,7 @@
           <p:cNvPr id="22" name="">
             <a:extLst xmlns:a="http://schemas.openxmlformats.org/drawingml/2006/main">
               <a:ext uri="{FF2B5EF4-FFF2-40B4-BE49-F238E27FC236}">
-                <a16:creationId xmlns:a16="http://schemas.microsoft.com/office/drawing/2014/main" id="{709B4F69-6120-4D99-99AB-6BA42748179A}"/>
+                <a16:creationId xmlns:a16="http://schemas.microsoft.com/office/drawing/2014/main" id="{527E91A0-FC4B-46B4-8F12-57534A4B2E9A}"/>
               </a:ext>
             </a:extLst>
           </p:cNvPr>
@@ -18782,7 +22782,7 @@
           <p:cNvPr id="23" name="">
             <a:extLst xmlns:a="http://schemas.openxmlformats.org/drawingml/2006/main">
               <a:ext uri="{FF2B5EF4-FFF2-40B4-BE49-F238E27FC236}">
-                <a16:creationId xmlns:a16="http://schemas.microsoft.com/office/drawing/2014/main" id="{78EAB48E-2C7B-4E08-8EA0-E2CB4756FE7F}"/>
+                <a16:creationId xmlns:a16="http://schemas.microsoft.com/office/drawing/2014/main" id="{86355873-F7A7-4E03-A45F-13F74042BA92}"/>
               </a:ext>
             </a:extLst>
           </p:cNvPr>
@@ -18832,7 +22832,7 @@
           <p:cNvPr id="24" name="">
             <a:extLst xmlns:a="http://schemas.openxmlformats.org/drawingml/2006/main">
               <a:ext uri="{FF2B5EF4-FFF2-40B4-BE49-F238E27FC236}">
-                <a16:creationId xmlns:a16="http://schemas.microsoft.com/office/drawing/2014/main" id="{4B5941BA-D672-4208-AB21-7165C61F1DB3}"/>
+                <a16:creationId xmlns:a16="http://schemas.microsoft.com/office/drawing/2014/main" id="{EDAF47C9-CD1A-4C7D-A51E-D28B5609F720}"/>
               </a:ext>
             </a:extLst>
           </p:cNvPr>
@@ -18882,7 +22882,7 @@
           <p:cNvPr id="25" name="">
             <a:extLst xmlns:a="http://schemas.openxmlformats.org/drawingml/2006/main">
               <a:ext uri="{FF2B5EF4-FFF2-40B4-BE49-F238E27FC236}">
-                <a16:creationId xmlns:a16="http://schemas.microsoft.com/office/drawing/2014/main" id="{0B5EFE2B-99C2-4859-9EB1-ECE9A5F4E586}"/>
+                <a16:creationId xmlns:a16="http://schemas.microsoft.com/office/drawing/2014/main" id="{D695D1F9-D316-43E2-A60B-A3C2854EFCE9}"/>
               </a:ext>
             </a:extLst>
           </p:cNvPr>
@@ -18932,7 +22932,7 @@
           <p:cNvPr id="26" name="">
             <a:extLst xmlns:a="http://schemas.openxmlformats.org/drawingml/2006/main">
               <a:ext uri="{FF2B5EF4-FFF2-40B4-BE49-F238E27FC236}">
-                <a16:creationId xmlns:a16="http://schemas.microsoft.com/office/drawing/2014/main" id="{12CE2296-BDF7-4157-BCDA-1BBB30C4DEB2}"/>
+                <a16:creationId xmlns:a16="http://schemas.microsoft.com/office/drawing/2014/main" id="{25EB4219-63F3-452C-AD04-320A6CD2B3CC}"/>
               </a:ext>
             </a:extLst>
           </p:cNvPr>
@@ -18980,7 +22980,7 @@
     </p:spTree>
     <p:extLst>
       <p:ext uri="{BB962C8B-B14F-4D97-AF65-F5344CB8AC3E}">
-        <p14:creationId xmlns:p14="http://schemas.microsoft.com/office/powerpoint/2010/main" val="1414503557"/>
+        <p14:creationId xmlns:p14="http://schemas.microsoft.com/office/powerpoint/2010/main" val="781272643"/>
       </p:ext>
     </p:extLst>
   </p:cSld>
@@ -19011,7 +23011,7 @@
           <p:cNvPr id="1" name="">
             <a:extLst xmlns:a="http://schemas.openxmlformats.org/drawingml/2006/main">
               <a:ext uri="{FF2B5EF4-FFF2-40B4-BE49-F238E27FC236}">
-                <a16:creationId xmlns:a16="http://schemas.microsoft.com/office/drawing/2014/main" id="{FB0A8261-ECC4-464D-AE07-BE2AF593F8A9}"/>
+                <a16:creationId xmlns:a16="http://schemas.microsoft.com/office/drawing/2014/main" id="{E6C6ADD2-A381-49AA-B843-4D10633C12E2}"/>
               </a:ext>
             </a:extLst>
           </p:cNvPr>
@@ -19061,7 +23061,7 @@
           <p:cNvPr id="2" name="">
             <a:extLst xmlns:a="http://schemas.openxmlformats.org/drawingml/2006/main">
               <a:ext uri="{FF2B5EF4-FFF2-40B4-BE49-F238E27FC236}">
-                <a16:creationId xmlns:a16="http://schemas.microsoft.com/office/drawing/2014/main" id="{860A2293-EE99-4228-8BB6-9964406F8C5D}"/>
+                <a16:creationId xmlns:a16="http://schemas.microsoft.com/office/drawing/2014/main" id="{C994FDEB-8348-45F1-9DAD-BD1E49934BD3}"/>
               </a:ext>
             </a:extLst>
           </p:cNvPr>
@@ -19111,7 +23111,7 @@
           <p:cNvPr id="3" name="">
             <a:extLst xmlns:a="http://schemas.openxmlformats.org/drawingml/2006/main">
               <a:ext uri="{FF2B5EF4-FFF2-40B4-BE49-F238E27FC236}">
-                <a16:creationId xmlns:a16="http://schemas.microsoft.com/office/drawing/2014/main" id="{D27765F7-388D-4822-A43A-46D2640CAFF9}"/>
+                <a16:creationId xmlns:a16="http://schemas.microsoft.com/office/drawing/2014/main" id="{0384FA3A-AF99-44D2-BF70-84CE584D74DF}"/>
               </a:ext>
             </a:extLst>
           </p:cNvPr>
@@ -19148,7 +23148,7 @@
           <p:nvPr/>
         </p:nvPicPr>
         <p:blipFill>
-          <a:blip xmlns:r="http://schemas.openxmlformats.org/officeDocument/2006/relationships" xmlns:a="http://schemas.openxmlformats.org/drawingml/2006/main" r:embed="R4404628e44524cb7"/>
+          <a:blip xmlns:r="http://schemas.openxmlformats.org/officeDocument/2006/relationships" xmlns:a="http://schemas.openxmlformats.org/drawingml/2006/main" r:embed="R059a4526f97a4449"/>
           <a:stretch xmlns:a="http://schemas.openxmlformats.org/drawingml/2006/main"/>
         </p:blipFill>
         <p:spPr>
@@ -19166,7 +23166,7 @@
           <p:cNvPr id="5" name="">
             <a:extLst xmlns:a="http://schemas.openxmlformats.org/drawingml/2006/main">
               <a:ext uri="{FF2B5EF4-FFF2-40B4-BE49-F238E27FC236}">
-                <a16:creationId xmlns:a16="http://schemas.microsoft.com/office/drawing/2014/main" id="{D043528D-B4D6-4093-A81F-B29A7B3DFAB9}"/>
+                <a16:creationId xmlns:a16="http://schemas.microsoft.com/office/drawing/2014/main" id="{3B87A2B9-A57C-46E3-BA8F-4C1AF39B096F}"/>
               </a:ext>
             </a:extLst>
           </p:cNvPr>
@@ -19199,7 +23199,7 @@
           <p:cNvPr id="6" name="">
             <a:extLst xmlns:a="http://schemas.openxmlformats.org/drawingml/2006/main">
               <a:ext uri="{FF2B5EF4-FFF2-40B4-BE49-F238E27FC236}">
-                <a16:creationId xmlns:a16="http://schemas.microsoft.com/office/drawing/2014/main" id="{6121A4B1-9FB8-4C56-B4B5-D1786199AB49}"/>
+                <a16:creationId xmlns:a16="http://schemas.microsoft.com/office/drawing/2014/main" id="{ED71A9C8-1F67-4B8D-B577-2E2F56868CA2}"/>
               </a:ext>
             </a:extLst>
           </p:cNvPr>
@@ -19249,7 +23249,7 @@
           <p:cNvPr id="7" name="">
             <a:extLst xmlns:a="http://schemas.openxmlformats.org/drawingml/2006/main">
               <a:ext uri="{FF2B5EF4-FFF2-40B4-BE49-F238E27FC236}">
-                <a16:creationId xmlns:a16="http://schemas.microsoft.com/office/drawing/2014/main" id="{49F5B14B-1223-4DAB-91B1-34B0254026C3}"/>
+                <a16:creationId xmlns:a16="http://schemas.microsoft.com/office/drawing/2014/main" id="{E2765853-059D-46D6-B875-CE25632393A0}"/>
               </a:ext>
             </a:extLst>
           </p:cNvPr>
@@ -19282,7 +23282,7 @@
           <p:cNvPr id="8" name="">
             <a:extLst xmlns:a="http://schemas.openxmlformats.org/drawingml/2006/main">
               <a:ext uri="{FF2B5EF4-FFF2-40B4-BE49-F238E27FC236}">
-                <a16:creationId xmlns:a16="http://schemas.microsoft.com/office/drawing/2014/main" id="{34976E29-4984-459D-A437-F61024A7F924}"/>
+                <a16:creationId xmlns:a16="http://schemas.microsoft.com/office/drawing/2014/main" id="{E6FFBA1F-8E4F-4D2A-B54C-13B3A4972DB4}"/>
               </a:ext>
             </a:extLst>
           </p:cNvPr>
@@ -19332,7 +23332,7 @@
           <p:cNvPr id="9" name="">
             <a:extLst xmlns:a="http://schemas.openxmlformats.org/drawingml/2006/main">
               <a:ext uri="{FF2B5EF4-FFF2-40B4-BE49-F238E27FC236}">
-                <a16:creationId xmlns:a16="http://schemas.microsoft.com/office/drawing/2014/main" id="{B1D314BD-CA28-4F75-9083-89BBA3366F34}"/>
+                <a16:creationId xmlns:a16="http://schemas.microsoft.com/office/drawing/2014/main" id="{2F6E038A-525C-48D2-BABF-68587D5241AC}"/>
               </a:ext>
             </a:extLst>
           </p:cNvPr>
@@ -19365,7 +23365,7 @@
           <p:cNvPr id="10" name="">
             <a:extLst xmlns:a="http://schemas.openxmlformats.org/drawingml/2006/main">
               <a:ext uri="{FF2B5EF4-FFF2-40B4-BE49-F238E27FC236}">
-                <a16:creationId xmlns:a16="http://schemas.microsoft.com/office/drawing/2014/main" id="{2652735A-9A82-46EC-916D-B8CC28D797F2}"/>
+                <a16:creationId xmlns:a16="http://schemas.microsoft.com/office/drawing/2014/main" id="{FA0A30EA-19F2-4AF7-AC3E-D8F4E03029E4}"/>
               </a:ext>
             </a:extLst>
           </p:cNvPr>
@@ -19415,7 +23415,7 @@
           <p:cNvPr id="11" name="">
             <a:extLst xmlns:a="http://schemas.openxmlformats.org/drawingml/2006/main">
               <a:ext uri="{FF2B5EF4-FFF2-40B4-BE49-F238E27FC236}">
-                <a16:creationId xmlns:a16="http://schemas.microsoft.com/office/drawing/2014/main" id="{172E1CF4-8139-40FD-BD9E-FE3A99570623}"/>
+                <a16:creationId xmlns:a16="http://schemas.microsoft.com/office/drawing/2014/main" id="{763062D9-09BD-402E-9138-E928DEFCFCEE}"/>
               </a:ext>
             </a:extLst>
           </p:cNvPr>
@@ -19448,7 +23448,7 @@
           <p:cNvPr id="12" name="">
             <a:extLst xmlns:a="http://schemas.openxmlformats.org/drawingml/2006/main">
               <a:ext uri="{FF2B5EF4-FFF2-40B4-BE49-F238E27FC236}">
-                <a16:creationId xmlns:a16="http://schemas.microsoft.com/office/drawing/2014/main" id="{7E09CD90-6256-4F9A-B809-226F0A49D3AB}"/>
+                <a16:creationId xmlns:a16="http://schemas.microsoft.com/office/drawing/2014/main" id="{43274EC1-586F-4CFE-BE1E-93D4A4022D31}"/>
               </a:ext>
             </a:extLst>
           </p:cNvPr>
@@ -19498,7 +23498,7 @@
           <p:cNvPr id="13" name="">
             <a:extLst xmlns:a="http://schemas.openxmlformats.org/drawingml/2006/main">
               <a:ext uri="{FF2B5EF4-FFF2-40B4-BE49-F238E27FC236}">
-                <a16:creationId xmlns:a16="http://schemas.microsoft.com/office/drawing/2014/main" id="{FCF67DB7-CB9C-41C0-9F9D-C0847D675EE9}"/>
+                <a16:creationId xmlns:a16="http://schemas.microsoft.com/office/drawing/2014/main" id="{372A4B98-0C95-46E1-87B3-3565C109E797}"/>
               </a:ext>
             </a:extLst>
           </p:cNvPr>
@@ -19531,7 +23531,7 @@
           <p:cNvPr id="14" name="">
             <a:extLst xmlns:a="http://schemas.openxmlformats.org/drawingml/2006/main">
               <a:ext uri="{FF2B5EF4-FFF2-40B4-BE49-F238E27FC236}">
-                <a16:creationId xmlns:a16="http://schemas.microsoft.com/office/drawing/2014/main" id="{08967B0B-A535-4F69-9AAA-8829ADC43F87}"/>
+                <a16:creationId xmlns:a16="http://schemas.microsoft.com/office/drawing/2014/main" id="{56C6896D-1104-4565-A1C6-8DFA57D90C6F}"/>
               </a:ext>
             </a:extLst>
           </p:cNvPr>
@@ -19581,7 +23581,7 @@
           <p:cNvPr id="15" name="">
             <a:extLst xmlns:a="http://schemas.openxmlformats.org/drawingml/2006/main">
               <a:ext uri="{FF2B5EF4-FFF2-40B4-BE49-F238E27FC236}">
-                <a16:creationId xmlns:a16="http://schemas.microsoft.com/office/drawing/2014/main" id="{68DCD478-96C2-4D2A-AD6C-8BCDCF8D9DA2}"/>
+                <a16:creationId xmlns:a16="http://schemas.microsoft.com/office/drawing/2014/main" id="{E7AFBE99-01B3-4F78-BBC3-A83758BA54EC}"/>
               </a:ext>
             </a:extLst>
           </p:cNvPr>
@@ -19629,7 +23629,7 @@
     </p:spTree>
     <p:extLst>
       <p:ext uri="{BB962C8B-B14F-4D97-AF65-F5344CB8AC3E}">
-        <p14:creationId xmlns:p14="http://schemas.microsoft.com/office/powerpoint/2010/main" val="725137153"/>
+        <p14:creationId xmlns:p14="http://schemas.microsoft.com/office/powerpoint/2010/main" val="1260157458"/>
       </p:ext>
     </p:extLst>
   </p:cSld>
@@ -19660,7 +23660,7 @@
           <p:cNvPr id="1" name="">
             <a:extLst xmlns:a="http://schemas.openxmlformats.org/drawingml/2006/main">
               <a:ext uri="{FF2B5EF4-FFF2-40B4-BE49-F238E27FC236}">
-                <a16:creationId xmlns:a16="http://schemas.microsoft.com/office/drawing/2014/main" id="{E7C3FB24-741F-47AD-AEFC-19C09F3AD69B}"/>
+                <a16:creationId xmlns:a16="http://schemas.microsoft.com/office/drawing/2014/main" id="{3FE04A61-7A6B-4059-BEAA-5A46A665FADB}"/>
               </a:ext>
             </a:extLst>
           </p:cNvPr>
@@ -19710,7 +23710,7 @@
           <p:cNvPr id="2" name="">
             <a:extLst xmlns:a="http://schemas.openxmlformats.org/drawingml/2006/main">
               <a:ext uri="{FF2B5EF4-FFF2-40B4-BE49-F238E27FC236}">
-                <a16:creationId xmlns:a16="http://schemas.microsoft.com/office/drawing/2014/main" id="{A39E5EBB-DA9B-42AB-91D1-8C491377C1D4}"/>
+                <a16:creationId xmlns:a16="http://schemas.microsoft.com/office/drawing/2014/main" id="{10F24876-61E6-468E-BABC-1FC4DD187B19}"/>
               </a:ext>
             </a:extLst>
           </p:cNvPr>
@@ -19760,7 +23760,7 @@
           <p:cNvPr id="3" name="">
             <a:extLst xmlns:a="http://schemas.openxmlformats.org/drawingml/2006/main">
               <a:ext uri="{FF2B5EF4-FFF2-40B4-BE49-F238E27FC236}">
-                <a16:creationId xmlns:a16="http://schemas.microsoft.com/office/drawing/2014/main" id="{9100A5E2-5565-4C37-A06D-B87F88640A23}"/>
+                <a16:creationId xmlns:a16="http://schemas.microsoft.com/office/drawing/2014/main" id="{F1C75968-8870-4550-86D6-600E62B09314}"/>
               </a:ext>
             </a:extLst>
           </p:cNvPr>
@@ -19793,7 +23793,7 @@
           <p:cNvPr id="4" name="">
             <a:extLst xmlns:a="http://schemas.openxmlformats.org/drawingml/2006/main">
               <a:ext uri="{FF2B5EF4-FFF2-40B4-BE49-F238E27FC236}">
-                <a16:creationId xmlns:a16="http://schemas.microsoft.com/office/drawing/2014/main" id="{340D8CC2-B119-43F2-BD30-3619302DF1A2}"/>
+                <a16:creationId xmlns:a16="http://schemas.microsoft.com/office/drawing/2014/main" id="{7D353A69-49FA-4983-93CA-DE3EF96458FC}"/>
               </a:ext>
             </a:extLst>
           </p:cNvPr>
@@ -19826,7 +23826,7 @@
           <p:cNvPr id="5" name="">
             <a:extLst xmlns:a="http://schemas.openxmlformats.org/drawingml/2006/main">
               <a:ext uri="{FF2B5EF4-FFF2-40B4-BE49-F238E27FC236}">
-                <a16:creationId xmlns:a16="http://schemas.microsoft.com/office/drawing/2014/main" id="{BC736706-A03E-4CC7-A3FC-5E0F06FC1CAE}"/>
+                <a16:creationId xmlns:a16="http://schemas.microsoft.com/office/drawing/2014/main" id="{E4DCD9B5-0F88-4169-9A3E-6BBD2668A64E}"/>
               </a:ext>
             </a:extLst>
           </p:cNvPr>
@@ -19876,7 +23876,7 @@
           <p:cNvPr id="6" name="">
             <a:extLst xmlns:a="http://schemas.openxmlformats.org/drawingml/2006/main">
               <a:ext uri="{FF2B5EF4-FFF2-40B4-BE49-F238E27FC236}">
-                <a16:creationId xmlns:a16="http://schemas.microsoft.com/office/drawing/2014/main" id="{4EC425AB-09E8-4AAC-ACEA-D57BE18EE833}"/>
+                <a16:creationId xmlns:a16="http://schemas.microsoft.com/office/drawing/2014/main" id="{E67DA06F-8F38-46FA-9722-9DE0129AFCBF}"/>
               </a:ext>
             </a:extLst>
           </p:cNvPr>
@@ -19926,7 +23926,7 @@
           <p:cNvPr id="7" name="">
             <a:extLst xmlns:a="http://schemas.openxmlformats.org/drawingml/2006/main">
               <a:ext uri="{FF2B5EF4-FFF2-40B4-BE49-F238E27FC236}">
-                <a16:creationId xmlns:a16="http://schemas.microsoft.com/office/drawing/2014/main" id="{9EF761BD-4C8D-422B-9D70-E06A8797F4D3}"/>
+                <a16:creationId xmlns:a16="http://schemas.microsoft.com/office/drawing/2014/main" id="{8239FABA-8A2D-48C1-87B7-B8025B9E1573}"/>
               </a:ext>
             </a:extLst>
           </p:cNvPr>
@@ -19976,7 +23976,7 @@
           <p:cNvPr id="8" name="">
             <a:extLst xmlns:a="http://schemas.openxmlformats.org/drawingml/2006/main">
               <a:ext uri="{FF2B5EF4-FFF2-40B4-BE49-F238E27FC236}">
-                <a16:creationId xmlns:a16="http://schemas.microsoft.com/office/drawing/2014/main" id="{F702D4ED-1EBC-461F-8731-E099F52C7598}"/>
+                <a16:creationId xmlns:a16="http://schemas.microsoft.com/office/drawing/2014/main" id="{50E43F8C-1993-4531-A71B-4A111CF76104}"/>
               </a:ext>
             </a:extLst>
           </p:cNvPr>
@@ -20026,7 +24026,7 @@
           <p:cNvPr id="9" name="">
             <a:extLst xmlns:a="http://schemas.openxmlformats.org/drawingml/2006/main">
               <a:ext uri="{FF2B5EF4-FFF2-40B4-BE49-F238E27FC236}">
-                <a16:creationId xmlns:a16="http://schemas.microsoft.com/office/drawing/2014/main" id="{52EFF304-F0BB-41C7-9958-3DE28C274F46}"/>
+                <a16:creationId xmlns:a16="http://schemas.microsoft.com/office/drawing/2014/main" id="{8789B5E1-33BD-400F-8C1E-A3757264FC48}"/>
               </a:ext>
             </a:extLst>
           </p:cNvPr>
@@ -20076,7 +24076,7 @@
           <p:cNvPr id="10" name="">
             <a:extLst xmlns:a="http://schemas.openxmlformats.org/drawingml/2006/main">
               <a:ext uri="{FF2B5EF4-FFF2-40B4-BE49-F238E27FC236}">
-                <a16:creationId xmlns:a16="http://schemas.microsoft.com/office/drawing/2014/main" id="{FD7B2FDD-3858-4B25-AE34-0E94DD0E7E44}"/>
+                <a16:creationId xmlns:a16="http://schemas.microsoft.com/office/drawing/2014/main" id="{7ACC094B-3C76-4198-B3B2-346750732B73}"/>
               </a:ext>
             </a:extLst>
           </p:cNvPr>
@@ -20109,7 +24109,7 @@
           <p:cNvPr id="11" name="">
             <a:extLst xmlns:a="http://schemas.openxmlformats.org/drawingml/2006/main">
               <a:ext uri="{FF2B5EF4-FFF2-40B4-BE49-F238E27FC236}">
-                <a16:creationId xmlns:a16="http://schemas.microsoft.com/office/drawing/2014/main" id="{82F0F1D1-D8F4-4BA9-9DDA-04BC04B819CF}"/>
+                <a16:creationId xmlns:a16="http://schemas.microsoft.com/office/drawing/2014/main" id="{9160A0E9-98C8-4922-8FA8-8ED20EF3D1AA}"/>
               </a:ext>
             </a:extLst>
           </p:cNvPr>
@@ -20159,7 +24159,7 @@
           <p:cNvPr id="12" name="">
             <a:extLst xmlns:a="http://schemas.openxmlformats.org/drawingml/2006/main">
               <a:ext uri="{FF2B5EF4-FFF2-40B4-BE49-F238E27FC236}">
-                <a16:creationId xmlns:a16="http://schemas.microsoft.com/office/drawing/2014/main" id="{5583C5E3-0A72-458F-870C-54A649873F5F}"/>
+                <a16:creationId xmlns:a16="http://schemas.microsoft.com/office/drawing/2014/main" id="{1F73C966-4B25-4E32-8803-65F8773C868B}"/>
               </a:ext>
             </a:extLst>
           </p:cNvPr>
@@ -20209,7 +24209,7 @@
           <p:cNvPr id="13" name="">
             <a:extLst xmlns:a="http://schemas.openxmlformats.org/drawingml/2006/main">
               <a:ext uri="{FF2B5EF4-FFF2-40B4-BE49-F238E27FC236}">
-                <a16:creationId xmlns:a16="http://schemas.microsoft.com/office/drawing/2014/main" id="{ECBA6667-1B1D-419B-8188-71387DC0117D}"/>
+                <a16:creationId xmlns:a16="http://schemas.microsoft.com/office/drawing/2014/main" id="{22185C39-87D8-4D3E-9238-32A5360B2865}"/>
               </a:ext>
             </a:extLst>
           </p:cNvPr>
@@ -20259,7 +24259,7 @@
           <p:cNvPr id="14" name="">
             <a:extLst xmlns:a="http://schemas.openxmlformats.org/drawingml/2006/main">
               <a:ext uri="{FF2B5EF4-FFF2-40B4-BE49-F238E27FC236}">
-                <a16:creationId xmlns:a16="http://schemas.microsoft.com/office/drawing/2014/main" id="{C5CA5840-E48E-40B5-A65E-377F15D4DCEF}"/>
+                <a16:creationId xmlns:a16="http://schemas.microsoft.com/office/drawing/2014/main" id="{E9D4D416-5348-4419-9340-0E6C157EA3F7}"/>
               </a:ext>
             </a:extLst>
           </p:cNvPr>
@@ -20309,7 +24309,7 @@
           <p:cNvPr id="15" name="">
             <a:extLst xmlns:a="http://schemas.openxmlformats.org/drawingml/2006/main">
               <a:ext uri="{FF2B5EF4-FFF2-40B4-BE49-F238E27FC236}">
-                <a16:creationId xmlns:a16="http://schemas.microsoft.com/office/drawing/2014/main" id="{31685404-534C-4AD1-8A40-D14F60623312}"/>
+                <a16:creationId xmlns:a16="http://schemas.microsoft.com/office/drawing/2014/main" id="{B830F88A-182A-4F36-B782-BE67FA8AC7A6}"/>
               </a:ext>
             </a:extLst>
           </p:cNvPr>
@@ -20359,7 +24359,7 @@
           <p:cNvPr id="16" name="">
             <a:extLst xmlns:a="http://schemas.openxmlformats.org/drawingml/2006/main">
               <a:ext uri="{FF2B5EF4-FFF2-40B4-BE49-F238E27FC236}">
-                <a16:creationId xmlns:a16="http://schemas.microsoft.com/office/drawing/2014/main" id="{D2328291-9BA0-4DAC-BDBD-E89DA042B4F0}"/>
+                <a16:creationId xmlns:a16="http://schemas.microsoft.com/office/drawing/2014/main" id="{3E0FC589-857D-4E59-993C-1A9B0A90DC02}"/>
               </a:ext>
             </a:extLst>
           </p:cNvPr>
@@ -20392,7 +24392,7 @@
           <p:cNvPr id="17" name="">
             <a:extLst xmlns:a="http://schemas.openxmlformats.org/drawingml/2006/main">
               <a:ext uri="{FF2B5EF4-FFF2-40B4-BE49-F238E27FC236}">
-                <a16:creationId xmlns:a16="http://schemas.microsoft.com/office/drawing/2014/main" id="{D46CD971-76F4-4EEE-8E4B-5E1EA00DD2B4}"/>
+                <a16:creationId xmlns:a16="http://schemas.microsoft.com/office/drawing/2014/main" id="{66333677-5B36-4C4A-9D8B-8FFDC4D01E7A}"/>
               </a:ext>
             </a:extLst>
           </p:cNvPr>
@@ -20442,7 +24442,7 @@
           <p:cNvPr id="18" name="">
             <a:extLst xmlns:a="http://schemas.openxmlformats.org/drawingml/2006/main">
               <a:ext uri="{FF2B5EF4-FFF2-40B4-BE49-F238E27FC236}">
-                <a16:creationId xmlns:a16="http://schemas.microsoft.com/office/drawing/2014/main" id="{E4552457-6AB8-426E-9699-7108C5D00EF7}"/>
+                <a16:creationId xmlns:a16="http://schemas.microsoft.com/office/drawing/2014/main" id="{CD88CB66-DC64-4355-A998-1C6CE65B86F3}"/>
               </a:ext>
             </a:extLst>
           </p:cNvPr>
@@ -20492,7 +24492,7 @@
           <p:cNvPr id="19" name="">
             <a:extLst xmlns:a="http://schemas.openxmlformats.org/drawingml/2006/main">
               <a:ext uri="{FF2B5EF4-FFF2-40B4-BE49-F238E27FC236}">
-                <a16:creationId xmlns:a16="http://schemas.microsoft.com/office/drawing/2014/main" id="{5D344C3F-AB7F-4A60-A56F-B7165C220B73}"/>
+                <a16:creationId xmlns:a16="http://schemas.microsoft.com/office/drawing/2014/main" id="{513ED797-AD5D-47F3-B3C3-279C8CD240A7}"/>
               </a:ext>
             </a:extLst>
           </p:cNvPr>
@@ -20542,7 +24542,7 @@
           <p:cNvPr id="20" name="">
             <a:extLst xmlns:a="http://schemas.openxmlformats.org/drawingml/2006/main">
               <a:ext uri="{FF2B5EF4-FFF2-40B4-BE49-F238E27FC236}">
-                <a16:creationId xmlns:a16="http://schemas.microsoft.com/office/drawing/2014/main" id="{AEE1A29B-2DF3-4623-A56F-A5BBD635CB94}"/>
+                <a16:creationId xmlns:a16="http://schemas.microsoft.com/office/drawing/2014/main" id="{F41EAD68-75A1-4E41-8F68-681551829ED5}"/>
               </a:ext>
             </a:extLst>
           </p:cNvPr>
@@ -20592,7 +24592,7 @@
           <p:cNvPr id="21" name="">
             <a:extLst xmlns:a="http://schemas.openxmlformats.org/drawingml/2006/main">
               <a:ext uri="{FF2B5EF4-FFF2-40B4-BE49-F238E27FC236}">
-                <a16:creationId xmlns:a16="http://schemas.microsoft.com/office/drawing/2014/main" id="{B282EE77-C43F-4A8E-9604-624098FFADFD}"/>
+                <a16:creationId xmlns:a16="http://schemas.microsoft.com/office/drawing/2014/main" id="{9910C0BC-B738-4165-AD65-F6441C480A70}"/>
               </a:ext>
             </a:extLst>
           </p:cNvPr>
@@ -20642,7 +24642,7 @@
           <p:cNvPr id="22" name="">
             <a:extLst xmlns:a="http://schemas.openxmlformats.org/drawingml/2006/main">
               <a:ext uri="{FF2B5EF4-FFF2-40B4-BE49-F238E27FC236}">
-                <a16:creationId xmlns:a16="http://schemas.microsoft.com/office/drawing/2014/main" id="{1BBAD9AA-B10E-40C0-8518-1588039B610F}"/>
+                <a16:creationId xmlns:a16="http://schemas.microsoft.com/office/drawing/2014/main" id="{47174438-026B-46CD-8DBD-197D7E96FAC9}"/>
               </a:ext>
             </a:extLst>
           </p:cNvPr>
@@ -20675,7 +24675,7 @@
           <p:cNvPr id="23" name="">
             <a:extLst xmlns:a="http://schemas.openxmlformats.org/drawingml/2006/main">
               <a:ext uri="{FF2B5EF4-FFF2-40B4-BE49-F238E27FC236}">
-                <a16:creationId xmlns:a16="http://schemas.microsoft.com/office/drawing/2014/main" id="{0DEB322E-BCA1-49F3-B6C3-FA7B9B2C9DED}"/>
+                <a16:creationId xmlns:a16="http://schemas.microsoft.com/office/drawing/2014/main" id="{5B2A4813-CA6F-4955-A590-A5A7D048DF00}"/>
               </a:ext>
             </a:extLst>
           </p:cNvPr>
@@ -20725,7 +24725,7 @@
           <p:cNvPr id="24" name="">
             <a:extLst xmlns:a="http://schemas.openxmlformats.org/drawingml/2006/main">
               <a:ext uri="{FF2B5EF4-FFF2-40B4-BE49-F238E27FC236}">
-                <a16:creationId xmlns:a16="http://schemas.microsoft.com/office/drawing/2014/main" id="{50BB63A4-4E2B-4390-9DE0-BF50930A966F}"/>
+                <a16:creationId xmlns:a16="http://schemas.microsoft.com/office/drawing/2014/main" id="{6105DCCF-FBE3-48E2-8507-A960212C0619}"/>
               </a:ext>
             </a:extLst>
           </p:cNvPr>
@@ -20775,7 +24775,7 @@
           <p:cNvPr id="25" name="">
             <a:extLst xmlns:a="http://schemas.openxmlformats.org/drawingml/2006/main">
               <a:ext uri="{FF2B5EF4-FFF2-40B4-BE49-F238E27FC236}">
-                <a16:creationId xmlns:a16="http://schemas.microsoft.com/office/drawing/2014/main" id="{89010F40-C2AA-4259-86DA-38D4D22B63C4}"/>
+                <a16:creationId xmlns:a16="http://schemas.microsoft.com/office/drawing/2014/main" id="{9D8CC04F-9066-484F-B4F6-794CFA2DB76D}"/>
               </a:ext>
             </a:extLst>
           </p:cNvPr>
@@ -20825,7 +24825,7 @@
           <p:cNvPr id="26" name="">
             <a:extLst xmlns:a="http://schemas.openxmlformats.org/drawingml/2006/main">
               <a:ext uri="{FF2B5EF4-FFF2-40B4-BE49-F238E27FC236}">
-                <a16:creationId xmlns:a16="http://schemas.microsoft.com/office/drawing/2014/main" id="{4D37A120-2FA0-442D-827D-8B2C9CA53CF0}"/>
+                <a16:creationId xmlns:a16="http://schemas.microsoft.com/office/drawing/2014/main" id="{ABD17FCB-B4C8-46DA-B085-B3C107C7B3B0}"/>
               </a:ext>
             </a:extLst>
           </p:cNvPr>
@@ -20875,7 +24875,7 @@
           <p:cNvPr id="27" name="">
             <a:extLst xmlns:a="http://schemas.openxmlformats.org/drawingml/2006/main">
               <a:ext uri="{FF2B5EF4-FFF2-40B4-BE49-F238E27FC236}">
-                <a16:creationId xmlns:a16="http://schemas.microsoft.com/office/drawing/2014/main" id="{6FDF001E-02D2-4181-9E23-359DDF1DD788}"/>
+                <a16:creationId xmlns:a16="http://schemas.microsoft.com/office/drawing/2014/main" id="{C58E00F2-72C4-480B-8301-3CB32578BDA1}"/>
               </a:ext>
             </a:extLst>
           </p:cNvPr>
@@ -20925,7 +24925,7 @@
           <p:cNvPr id="28" name="">
             <a:extLst xmlns:a="http://schemas.openxmlformats.org/drawingml/2006/main">
               <a:ext uri="{FF2B5EF4-FFF2-40B4-BE49-F238E27FC236}">
-                <a16:creationId xmlns:a16="http://schemas.microsoft.com/office/drawing/2014/main" id="{5E7AAC40-7B16-4E8D-8C90-C48EABF5569F}"/>
+                <a16:creationId xmlns:a16="http://schemas.microsoft.com/office/drawing/2014/main" id="{050C0349-4EE6-4CDB-AB44-0033836560F3}"/>
               </a:ext>
             </a:extLst>
           </p:cNvPr>
@@ -20975,7 +24975,7 @@
           <p:cNvPr id="29" name="">
             <a:extLst xmlns:a="http://schemas.openxmlformats.org/drawingml/2006/main">
               <a:ext uri="{FF2B5EF4-FFF2-40B4-BE49-F238E27FC236}">
-                <a16:creationId xmlns:a16="http://schemas.microsoft.com/office/drawing/2014/main" id="{92889710-2341-4F74-B90F-30379C5C2A43}"/>
+                <a16:creationId xmlns:a16="http://schemas.microsoft.com/office/drawing/2014/main" id="{B706279A-591D-4828-B988-5FB532E2E09E}"/>
               </a:ext>
             </a:extLst>
           </p:cNvPr>
@@ -21023,7 +25023,7 @@
     </p:spTree>
     <p:extLst>
       <p:ext uri="{BB962C8B-B14F-4D97-AF65-F5344CB8AC3E}">
-        <p14:creationId xmlns:p14="http://schemas.microsoft.com/office/powerpoint/2010/main" val="1658087994"/>
+        <p14:creationId xmlns:p14="http://schemas.microsoft.com/office/powerpoint/2010/main" val="1118999885"/>
       </p:ext>
     </p:extLst>
   </p:cSld>
@@ -21054,7 +25054,7 @@
           <p:cNvPr id="1" name="">
             <a:extLst xmlns:a="http://schemas.openxmlformats.org/drawingml/2006/main">
               <a:ext uri="{FF2B5EF4-FFF2-40B4-BE49-F238E27FC236}">
-                <a16:creationId xmlns:a16="http://schemas.microsoft.com/office/drawing/2014/main" id="{F5AB6ACA-8BEC-4D29-AD90-97D02397512F}"/>
+                <a16:creationId xmlns:a16="http://schemas.microsoft.com/office/drawing/2014/main" id="{478BEFCA-0E91-4F80-BC4E-07B07635747D}"/>
               </a:ext>
             </a:extLst>
           </p:cNvPr>
@@ -21104,7 +25104,7 @@
           <p:cNvPr id="2" name="">
             <a:extLst xmlns:a="http://schemas.openxmlformats.org/drawingml/2006/main">
               <a:ext uri="{FF2B5EF4-FFF2-40B4-BE49-F238E27FC236}">
-                <a16:creationId xmlns:a16="http://schemas.microsoft.com/office/drawing/2014/main" id="{F8F2DE94-E69C-4296-A688-8D4C48EFF4F1}"/>
+                <a16:creationId xmlns:a16="http://schemas.microsoft.com/office/drawing/2014/main" id="{597F7974-CED5-43EC-8D39-AE57169A9789}"/>
               </a:ext>
             </a:extLst>
           </p:cNvPr>
@@ -21154,7 +25154,7 @@
           <p:cNvPr id="3" name="">
             <a:extLst xmlns:a="http://schemas.openxmlformats.org/drawingml/2006/main">
               <a:ext uri="{FF2B5EF4-FFF2-40B4-BE49-F238E27FC236}">
-                <a16:creationId xmlns:a16="http://schemas.microsoft.com/office/drawing/2014/main" id="{FEF6BD4F-9C00-401F-910F-DC7F045A6A56}"/>
+                <a16:creationId xmlns:a16="http://schemas.microsoft.com/office/drawing/2014/main" id="{537972A1-FF0D-41C5-831C-67AFA882670E}"/>
               </a:ext>
             </a:extLst>
           </p:cNvPr>
@@ -21191,7 +25191,7 @@
           <p:nvPr/>
         </p:nvPicPr>
         <p:blipFill>
-          <a:blip xmlns:r="http://schemas.openxmlformats.org/officeDocument/2006/relationships" xmlns:a="http://schemas.openxmlformats.org/drawingml/2006/main" r:embed="R6b30e39bd4d343e6"/>
+          <a:blip xmlns:r="http://schemas.openxmlformats.org/officeDocument/2006/relationships" xmlns:a="http://schemas.openxmlformats.org/drawingml/2006/main" r:embed="Rab78b39b7a574a65"/>
           <a:stretch xmlns:a="http://schemas.openxmlformats.org/drawingml/2006/main"/>
         </p:blipFill>
         <p:spPr>
@@ -21209,7 +25209,7 @@
           <p:cNvPr id="5" name="">
             <a:extLst xmlns:a="http://schemas.openxmlformats.org/drawingml/2006/main">
               <a:ext uri="{FF2B5EF4-FFF2-40B4-BE49-F238E27FC236}">
-                <a16:creationId xmlns:a16="http://schemas.microsoft.com/office/drawing/2014/main" id="{85AA3E1A-1115-4435-9DC9-0BCC2A8E5B21}"/>
+                <a16:creationId xmlns:a16="http://schemas.microsoft.com/office/drawing/2014/main" id="{36F978A5-699F-43D5-9876-FB744E1DB573}"/>
               </a:ext>
             </a:extLst>
           </p:cNvPr>
@@ -21242,7 +25242,7 @@
           <p:cNvPr id="6" name="">
             <a:extLst xmlns:a="http://schemas.openxmlformats.org/drawingml/2006/main">
               <a:ext uri="{FF2B5EF4-FFF2-40B4-BE49-F238E27FC236}">
-                <a16:creationId xmlns:a16="http://schemas.microsoft.com/office/drawing/2014/main" id="{870523AB-D59C-4AF1-9009-966F84C15EF7}"/>
+                <a16:creationId xmlns:a16="http://schemas.microsoft.com/office/drawing/2014/main" id="{60E7B0F4-303B-498D-A095-15C3A568FBDA}"/>
               </a:ext>
             </a:extLst>
           </p:cNvPr>
@@ -21292,7 +25292,7 @@
           <p:cNvPr id="7" name="">
             <a:extLst xmlns:a="http://schemas.openxmlformats.org/drawingml/2006/main">
               <a:ext uri="{FF2B5EF4-FFF2-40B4-BE49-F238E27FC236}">
-                <a16:creationId xmlns:a16="http://schemas.microsoft.com/office/drawing/2014/main" id="{C97966B1-7276-4F24-86FE-B06656700D0B}"/>
+                <a16:creationId xmlns:a16="http://schemas.microsoft.com/office/drawing/2014/main" id="{A7588AB4-4D9D-44E3-8F87-D846126493F8}"/>
               </a:ext>
             </a:extLst>
           </p:cNvPr>
@@ -21342,7 +25342,7 @@
           <p:cNvPr id="8" name="">
             <a:extLst xmlns:a="http://schemas.openxmlformats.org/drawingml/2006/main">
               <a:ext uri="{FF2B5EF4-FFF2-40B4-BE49-F238E27FC236}">
-                <a16:creationId xmlns:a16="http://schemas.microsoft.com/office/drawing/2014/main" id="{8F29266D-F30E-46C0-8BD3-3C2594E0A919}"/>
+                <a16:creationId xmlns:a16="http://schemas.microsoft.com/office/drawing/2014/main" id="{31613A94-3BD2-491C-8A67-2717B6C62CA0}"/>
               </a:ext>
             </a:extLst>
           </p:cNvPr>
@@ -21390,7 +25390,7 @@
     </p:spTree>
     <p:extLst>
       <p:ext uri="{BB962C8B-B14F-4D97-AF65-F5344CB8AC3E}">
-        <p14:creationId xmlns:p14="http://schemas.microsoft.com/office/powerpoint/2010/main" val="125949340"/>
+        <p14:creationId xmlns:p14="http://schemas.microsoft.com/office/powerpoint/2010/main" val="325984565"/>
       </p:ext>
     </p:extLst>
   </p:cSld>
@@ -21421,7 +25421,7 @@
           <p:cNvPr id="1" name="">
             <a:extLst xmlns:a="http://schemas.openxmlformats.org/drawingml/2006/main">
               <a:ext uri="{FF2B5EF4-FFF2-40B4-BE49-F238E27FC236}">
-                <a16:creationId xmlns:a16="http://schemas.microsoft.com/office/drawing/2014/main" id="{DF3F8A95-3A3D-4A67-8FBD-A09BD814D091}"/>
+                <a16:creationId xmlns:a16="http://schemas.microsoft.com/office/drawing/2014/main" id="{310736F5-06CE-4953-9C20-C62AF100CD91}"/>
               </a:ext>
             </a:extLst>
           </p:cNvPr>
@@ -21471,7 +25471,7 @@
           <p:cNvPr id="2" name="">
             <a:extLst xmlns:a="http://schemas.openxmlformats.org/drawingml/2006/main">
               <a:ext uri="{FF2B5EF4-FFF2-40B4-BE49-F238E27FC236}">
-                <a16:creationId xmlns:a16="http://schemas.microsoft.com/office/drawing/2014/main" id="{1B94CA3F-5F32-4656-A5DF-53C848797388}"/>
+                <a16:creationId xmlns:a16="http://schemas.microsoft.com/office/drawing/2014/main" id="{CBDC7B38-9711-4F4C-AE07-E8B35C791953}"/>
               </a:ext>
             </a:extLst>
           </p:cNvPr>
@@ -21521,7 +25521,7 @@
           <p:cNvPr id="3" name="">
             <a:extLst xmlns:a="http://schemas.openxmlformats.org/drawingml/2006/main">
               <a:ext uri="{FF2B5EF4-FFF2-40B4-BE49-F238E27FC236}">
-                <a16:creationId xmlns:a16="http://schemas.microsoft.com/office/drawing/2014/main" id="{385A482D-D599-4BCB-8488-C11B542577DC}"/>
+                <a16:creationId xmlns:a16="http://schemas.microsoft.com/office/drawing/2014/main" id="{E40CEA77-0EBD-495A-8A9A-0F2D32AAFA4F}"/>
               </a:ext>
             </a:extLst>
           </p:cNvPr>
@@ -21561,7 +25561,7 @@
         </p:xfrm>
         <a:graphic xmlns:a="http://schemas.openxmlformats.org/drawingml/2006/main">
           <a:graphicData uri="http://schemas.openxmlformats.org/drawingml/2006/chart">
-            <c:chart xmlns:r="http://schemas.openxmlformats.org/officeDocument/2006/relationships" xmlns:c="http://schemas.openxmlformats.org/drawingml/2006/chart" r:id="R3b089e004fa04ff1"/>
+            <c:chart xmlns:r="http://schemas.openxmlformats.org/officeDocument/2006/relationships" xmlns:c="http://schemas.openxmlformats.org/drawingml/2006/chart" r:id="R766d3c3847bc4bee"/>
           </a:graphicData>
         </a:graphic>
       </p:graphicFrame>
@@ -21570,7 +25570,7 @@
           <p:cNvPr id="5" name="">
             <a:extLst xmlns:a="http://schemas.openxmlformats.org/drawingml/2006/main">
               <a:ext uri="{FF2B5EF4-FFF2-40B4-BE49-F238E27FC236}">
-                <a16:creationId xmlns:a16="http://schemas.microsoft.com/office/drawing/2014/main" id="{1C842D15-5AF7-4CC4-805B-5BB6D7DD1F22}"/>
+                <a16:creationId xmlns:a16="http://schemas.microsoft.com/office/drawing/2014/main" id="{E6CF55D4-0815-4BBF-A286-4E9BA6A73F2E}"/>
               </a:ext>
             </a:extLst>
           </p:cNvPr>
@@ -21603,7 +25603,7 @@
           <p:cNvPr id="6" name="">
             <a:extLst xmlns:a="http://schemas.openxmlformats.org/drawingml/2006/main">
               <a:ext uri="{FF2B5EF4-FFF2-40B4-BE49-F238E27FC236}">
-                <a16:creationId xmlns:a16="http://schemas.microsoft.com/office/drawing/2014/main" id="{42CA1D50-1091-4CD5-A2CA-111B879B3D7E}"/>
+                <a16:creationId xmlns:a16="http://schemas.microsoft.com/office/drawing/2014/main" id="{1275CF5B-3434-4FAE-BC68-4538D124F90B}"/>
               </a:ext>
             </a:extLst>
           </p:cNvPr>
@@ -21653,7 +25653,7 @@
           <p:cNvPr id="7" name="">
             <a:extLst xmlns:a="http://schemas.openxmlformats.org/drawingml/2006/main">
               <a:ext uri="{FF2B5EF4-FFF2-40B4-BE49-F238E27FC236}">
-                <a16:creationId xmlns:a16="http://schemas.microsoft.com/office/drawing/2014/main" id="{FA5105C1-965F-47C5-8ED2-51192AA6CFCC}"/>
+                <a16:creationId xmlns:a16="http://schemas.microsoft.com/office/drawing/2014/main" id="{D8173A7C-83EC-4150-9FAD-6D55AD397FB4}"/>
               </a:ext>
             </a:extLst>
           </p:cNvPr>
@@ -21686,7 +25686,7 @@
           <p:cNvPr id="8" name="">
             <a:extLst xmlns:a="http://schemas.openxmlformats.org/drawingml/2006/main">
               <a:ext uri="{FF2B5EF4-FFF2-40B4-BE49-F238E27FC236}">
-                <a16:creationId xmlns:a16="http://schemas.microsoft.com/office/drawing/2014/main" id="{56ADCFA2-1D77-4509-BECE-5F12FB98D550}"/>
+                <a16:creationId xmlns:a16="http://schemas.microsoft.com/office/drawing/2014/main" id="{0BE9C949-4EC6-48F1-B4F4-D3E2D739FD01}"/>
               </a:ext>
             </a:extLst>
           </p:cNvPr>
@@ -21736,7 +25736,7 @@
           <p:cNvPr id="9" name="">
             <a:extLst xmlns:a="http://schemas.openxmlformats.org/drawingml/2006/main">
               <a:ext uri="{FF2B5EF4-FFF2-40B4-BE49-F238E27FC236}">
-                <a16:creationId xmlns:a16="http://schemas.microsoft.com/office/drawing/2014/main" id="{7B8DAD91-E6DA-420E-A9B3-A852F7F10412}"/>
+                <a16:creationId xmlns:a16="http://schemas.microsoft.com/office/drawing/2014/main" id="{7019490F-1231-43D0-9E82-B3E2A9D1A71D}"/>
               </a:ext>
             </a:extLst>
           </p:cNvPr>
@@ -21769,7 +25769,7 @@
           <p:cNvPr id="10" name="">
             <a:extLst xmlns:a="http://schemas.openxmlformats.org/drawingml/2006/main">
               <a:ext uri="{FF2B5EF4-FFF2-40B4-BE49-F238E27FC236}">
-                <a16:creationId xmlns:a16="http://schemas.microsoft.com/office/drawing/2014/main" id="{69A23DB3-0332-4BE7-97C1-D1BB3097ACE5}"/>
+                <a16:creationId xmlns:a16="http://schemas.microsoft.com/office/drawing/2014/main" id="{A2DC91BD-E069-4B29-AAF4-F2C7EBCA9861}"/>
               </a:ext>
             </a:extLst>
           </p:cNvPr>
@@ -21819,7 +25819,7 @@
           <p:cNvPr id="11" name="">
             <a:extLst xmlns:a="http://schemas.openxmlformats.org/drawingml/2006/main">
               <a:ext uri="{FF2B5EF4-FFF2-40B4-BE49-F238E27FC236}">
-                <a16:creationId xmlns:a16="http://schemas.microsoft.com/office/drawing/2014/main" id="{93AC7A92-BB7E-4E29-9C00-7A3E86CC6431}"/>
+                <a16:creationId xmlns:a16="http://schemas.microsoft.com/office/drawing/2014/main" id="{643ED8AF-C9EA-439F-B58F-32C9E829A098}"/>
               </a:ext>
             </a:extLst>
           </p:cNvPr>
@@ -21852,7 +25852,7 @@
           <p:cNvPr id="12" name="">
             <a:extLst xmlns:a="http://schemas.openxmlformats.org/drawingml/2006/main">
               <a:ext uri="{FF2B5EF4-FFF2-40B4-BE49-F238E27FC236}">
-                <a16:creationId xmlns:a16="http://schemas.microsoft.com/office/drawing/2014/main" id="{2698AF49-BC8D-4FEE-8F1B-3370E2BB2F5E}"/>
+                <a16:creationId xmlns:a16="http://schemas.microsoft.com/office/drawing/2014/main" id="{C39C5C54-8017-4110-8C2E-4D0A13C8E5B5}"/>
               </a:ext>
             </a:extLst>
           </p:cNvPr>
@@ -21902,7 +25902,7 @@
           <p:cNvPr id="13" name="">
             <a:extLst xmlns:a="http://schemas.openxmlformats.org/drawingml/2006/main">
               <a:ext uri="{FF2B5EF4-FFF2-40B4-BE49-F238E27FC236}">
-                <a16:creationId xmlns:a16="http://schemas.microsoft.com/office/drawing/2014/main" id="{27F19255-0965-4DBE-9100-1C8B7A498E6B}"/>
+                <a16:creationId xmlns:a16="http://schemas.microsoft.com/office/drawing/2014/main" id="{D85F7F7B-6CA6-4B15-ADBF-3D75425D44DF}"/>
               </a:ext>
             </a:extLst>
           </p:cNvPr>
@@ -21950,7 +25950,7 @@
     </p:spTree>
     <p:extLst>
       <p:ext uri="{BB962C8B-B14F-4D97-AF65-F5344CB8AC3E}">
-        <p14:creationId xmlns:p14="http://schemas.microsoft.com/office/powerpoint/2010/main" val="254445268"/>
+        <p14:creationId xmlns:p14="http://schemas.microsoft.com/office/powerpoint/2010/main" val="373886350"/>
       </p:ext>
     </p:extLst>
   </p:cSld>

--- a/presentations/gen5_3_momentum_context_size_screen.pptx
+++ b/presentations/gen5_3_momentum_context_size_screen.pptx
@@ -2,32 +2,35 @@
 <file path=ppt/presentation.xml><?xml version="1.0" encoding="utf-8"?>
 <p:presentation xmlns:p="http://schemas.openxmlformats.org/presentationml/2006/main">
   <p:sldMasterIdLst>
-    <p:sldMasterId xmlns:r="http://schemas.openxmlformats.org/officeDocument/2006/relationships" id="2147483648" r:id="R068aadb270da4564"/>
+    <p:sldMasterId xmlns:r="http://schemas.openxmlformats.org/officeDocument/2006/relationships" id="2147483648" r:id="R11e77e705aba46e7"/>
   </p:sldMasterIdLst>
   <p:notesMasterIdLst>
-    <p:notesMasterId xmlns:r="http://schemas.openxmlformats.org/officeDocument/2006/relationships" r:id="R08055b08452349c2"/>
+    <p:notesMasterId xmlns:r="http://schemas.openxmlformats.org/officeDocument/2006/relationships" r:id="R81c7118714de4830"/>
   </p:notesMasterIdLst>
   <p:sldIdLst>
-    <p:sldId xmlns:r="http://schemas.openxmlformats.org/officeDocument/2006/relationships" id="256" r:id="R3c382c85fa0f4831"/>
-    <p:sldId xmlns:r="http://schemas.openxmlformats.org/officeDocument/2006/relationships" id="257" r:id="R0e6e685302eb4ab3"/>
-    <p:sldId xmlns:r="http://schemas.openxmlformats.org/officeDocument/2006/relationships" id="258" r:id="Rce6568ef56e64f32"/>
-    <p:sldId xmlns:r="http://schemas.openxmlformats.org/officeDocument/2006/relationships" id="259" r:id="Rb6cfcbad15fa4e0c"/>
-    <p:sldId xmlns:r="http://schemas.openxmlformats.org/officeDocument/2006/relationships" id="260" r:id="Rff363b4062914b36"/>
-    <p:sldId xmlns:r="http://schemas.openxmlformats.org/officeDocument/2006/relationships" id="261" r:id="R698cb6183ad94e43"/>
-    <p:sldId xmlns:r="http://schemas.openxmlformats.org/officeDocument/2006/relationships" id="262" r:id="R4c0343f4740b4be8"/>
-    <p:sldId xmlns:r="http://schemas.openxmlformats.org/officeDocument/2006/relationships" id="263" r:id="R750d2eea64fb48dc"/>
-    <p:sldId xmlns:r="http://schemas.openxmlformats.org/officeDocument/2006/relationships" id="264" r:id="Rc0966e4a0e5348b2"/>
-    <p:sldId xmlns:r="http://schemas.openxmlformats.org/officeDocument/2006/relationships" id="265" r:id="R1136b960126542c0"/>
-    <p:sldId xmlns:r="http://schemas.openxmlformats.org/officeDocument/2006/relationships" id="266" r:id="R8b8a685211e940f0"/>
-    <p:sldId xmlns:r="http://schemas.openxmlformats.org/officeDocument/2006/relationships" id="267" r:id="R48e26a6f49f844cc"/>
-    <p:sldId xmlns:r="http://schemas.openxmlformats.org/officeDocument/2006/relationships" id="268" r:id="R69e7f7a0b4c94f67"/>
-    <p:sldId xmlns:r="http://schemas.openxmlformats.org/officeDocument/2006/relationships" id="269" r:id="R55da06b4022549aa"/>
-    <p:sldId xmlns:r="http://schemas.openxmlformats.org/officeDocument/2006/relationships" id="270" r:id="R7d036a7757fa4444"/>
-    <p:sldId xmlns:r="http://schemas.openxmlformats.org/officeDocument/2006/relationships" id="271" r:id="R566f4644b5fe4fdd"/>
-    <p:sldId xmlns:r="http://schemas.openxmlformats.org/officeDocument/2006/relationships" id="272" r:id="R10043d47d9e84281"/>
-    <p:sldId xmlns:r="http://schemas.openxmlformats.org/officeDocument/2006/relationships" id="273" r:id="R3c3e783652ec478a"/>
-    <p:sldId xmlns:r="http://schemas.openxmlformats.org/officeDocument/2006/relationships" id="274" r:id="Re9cb61c5ce7843b9"/>
-    <p:sldId xmlns:r="http://schemas.openxmlformats.org/officeDocument/2006/relationships" id="275" r:id="R6081ee74230e40f4"/>
+    <p:sldId xmlns:r="http://schemas.openxmlformats.org/officeDocument/2006/relationships" id="256" r:id="Rbfbc70a39bb54535"/>
+    <p:sldId xmlns:r="http://schemas.openxmlformats.org/officeDocument/2006/relationships" id="257" r:id="R5c1760f6f4874236"/>
+    <p:sldId xmlns:r="http://schemas.openxmlformats.org/officeDocument/2006/relationships" id="258" r:id="R626d44a2ebd04938"/>
+    <p:sldId xmlns:r="http://schemas.openxmlformats.org/officeDocument/2006/relationships" id="259" r:id="R6171334ebaf4478d"/>
+    <p:sldId xmlns:r="http://schemas.openxmlformats.org/officeDocument/2006/relationships" id="260" r:id="Rbb413dbf6cab49d0"/>
+    <p:sldId xmlns:r="http://schemas.openxmlformats.org/officeDocument/2006/relationships" id="261" r:id="Rffed8fa5c990400e"/>
+    <p:sldId xmlns:r="http://schemas.openxmlformats.org/officeDocument/2006/relationships" id="262" r:id="R7502c4eb518f4f8a"/>
+    <p:sldId xmlns:r="http://schemas.openxmlformats.org/officeDocument/2006/relationships" id="263" r:id="R69aae2de5d9f4246"/>
+    <p:sldId xmlns:r="http://schemas.openxmlformats.org/officeDocument/2006/relationships" id="264" r:id="Recd6c2e252134af5"/>
+    <p:sldId xmlns:r="http://schemas.openxmlformats.org/officeDocument/2006/relationships" id="265" r:id="Rf6e24173cb3c47d1"/>
+    <p:sldId xmlns:r="http://schemas.openxmlformats.org/officeDocument/2006/relationships" id="266" r:id="Re34bd2e828ba4115"/>
+    <p:sldId xmlns:r="http://schemas.openxmlformats.org/officeDocument/2006/relationships" id="267" r:id="R6f3754f1cdb5482b"/>
+    <p:sldId xmlns:r="http://schemas.openxmlformats.org/officeDocument/2006/relationships" id="268" r:id="R900420333ed04027"/>
+    <p:sldId xmlns:r="http://schemas.openxmlformats.org/officeDocument/2006/relationships" id="269" r:id="R05c1f046d6824e00"/>
+    <p:sldId xmlns:r="http://schemas.openxmlformats.org/officeDocument/2006/relationships" id="270" r:id="R4ce78c4cb6c14482"/>
+    <p:sldId xmlns:r="http://schemas.openxmlformats.org/officeDocument/2006/relationships" id="271" r:id="R550c6eef596d4e62"/>
+    <p:sldId xmlns:r="http://schemas.openxmlformats.org/officeDocument/2006/relationships" id="272" r:id="R222bb9fe8ef748cc"/>
+    <p:sldId xmlns:r="http://schemas.openxmlformats.org/officeDocument/2006/relationships" id="273" r:id="R929ce603653d4a79"/>
+    <p:sldId xmlns:r="http://schemas.openxmlformats.org/officeDocument/2006/relationships" id="274" r:id="Raa1f2042b8d54be0"/>
+    <p:sldId xmlns:r="http://schemas.openxmlformats.org/officeDocument/2006/relationships" id="275" r:id="R021b82227f424146"/>
+    <p:sldId xmlns:r="http://schemas.openxmlformats.org/officeDocument/2006/relationships" id="276" r:id="R7d7dfb7024c14a9a"/>
+    <p:sldId xmlns:r="http://schemas.openxmlformats.org/officeDocument/2006/relationships" id="277" r:id="R47e18b3e7ab944cb"/>
+    <p:sldId xmlns:r="http://schemas.openxmlformats.org/officeDocument/2006/relationships" id="278" r:id="R038cbfb99b064592"/>
   </p:sldIdLst>
   <p:sldSz cx="12192000" cy="6858000"/>
   <p:notesSz cx="6858000" cy="9144000"/>
@@ -1374,6 +1377,204 @@
 </p:notes>
 </file>
 
+<file path=ppt/notesSlides/notesSlide21.xml><?xml version="1.0" encoding="utf-8"?>
+<p:notes xmlns:p="http://schemas.openxmlformats.org/presentationml/2006/main">
+  <p:cSld>
+    <p:spTree>
+      <p:nvGrpSpPr>
+        <p:cNvPr id="1" name=""/>
+        <p:cNvGrpSpPr/>
+        <p:nvPr/>
+      </p:nvGrpSpPr>
+      <p:grpSpPr>
+        <a:xfrm xmlns:a="http://schemas.openxmlformats.org/drawingml/2006/main"/>
+      </p:grpSpPr>
+      <p:sp>
+        <p:nvSpPr>
+          <p:cNvPr id="2" name="Slide Image Placeholder 1"/>
+          <p:cNvSpPr>
+            <a:spLocks xmlns:a="http://schemas.openxmlformats.org/drawingml/2006/main" noGrp="1"/>
+          </p:cNvSpPr>
+          <p:nvPr>
+            <p:ph type="sldImg" idx="0"/>
+          </p:nvPr>
+        </p:nvSpPr>
+        <p:spPr/>
+      </p:sp>
+      <p:sp>
+        <p:nvSpPr>
+          <p:cNvPr id="3" name="Notes Placeholder 2"/>
+          <p:cNvSpPr>
+            <a:spLocks xmlns:a="http://schemas.openxmlformats.org/drawingml/2006/main" noGrp="1"/>
+          </p:cNvSpPr>
+          <p:nvPr>
+            <p:ph type="body" idx="1"/>
+          </p:nvPr>
+        </p:nvSpPr>
+        <p:spPr/>
+        <p:txBody>
+          <a:bodyPr xmlns:a="http://schemas.openxmlformats.org/drawingml/2006/main"/>
+          <a:lstStyle xmlns:a="http://schemas.openxmlformats.org/drawingml/2006/main"/>
+          <a:p xmlns:a="http://schemas.openxmlformats.org/drawingml/2006/main"/>
+        </p:txBody>
+      </p:sp>
+      <p:sp>
+        <p:nvSpPr>
+          <p:cNvPr id="4" name="Slide Number Placeholder 3"/>
+          <p:cNvSpPr>
+            <a:spLocks xmlns:a="http://schemas.openxmlformats.org/drawingml/2006/main" noGrp="1"/>
+          </p:cNvSpPr>
+          <p:nvPr>
+            <p:ph type="sldNum" idx="5"/>
+          </p:nvPr>
+        </p:nvSpPr>
+        <p:spPr/>
+        <p:txBody>
+          <a:bodyPr xmlns:a="http://schemas.openxmlformats.org/drawingml/2006/main"/>
+          <a:lstStyle xmlns:a="http://schemas.openxmlformats.org/drawingml/2006/main"/>
+          <a:p xmlns:a="http://schemas.openxmlformats.org/drawingml/2006/main"/>
+        </p:txBody>
+      </p:sp>
+    </p:spTree>
+  </p:cSld>
+  <p:clrMapOvr>
+    <a:masterClrMapping xmlns:a="http://schemas.openxmlformats.org/drawingml/2006/main"/>
+  </p:clrMapOvr>
+</p:notes>
+</file>
+
+<file path=ppt/notesSlides/notesSlide22.xml><?xml version="1.0" encoding="utf-8"?>
+<p:notes xmlns:p="http://schemas.openxmlformats.org/presentationml/2006/main">
+  <p:cSld>
+    <p:spTree>
+      <p:nvGrpSpPr>
+        <p:cNvPr id="1" name=""/>
+        <p:cNvGrpSpPr/>
+        <p:nvPr/>
+      </p:nvGrpSpPr>
+      <p:grpSpPr>
+        <a:xfrm xmlns:a="http://schemas.openxmlformats.org/drawingml/2006/main"/>
+      </p:grpSpPr>
+      <p:sp>
+        <p:nvSpPr>
+          <p:cNvPr id="2" name="Slide Image Placeholder 1"/>
+          <p:cNvSpPr>
+            <a:spLocks xmlns:a="http://schemas.openxmlformats.org/drawingml/2006/main" noGrp="1"/>
+          </p:cNvSpPr>
+          <p:nvPr>
+            <p:ph type="sldImg" idx="0"/>
+          </p:nvPr>
+        </p:nvSpPr>
+        <p:spPr/>
+      </p:sp>
+      <p:sp>
+        <p:nvSpPr>
+          <p:cNvPr id="3" name="Notes Placeholder 2"/>
+          <p:cNvSpPr>
+            <a:spLocks xmlns:a="http://schemas.openxmlformats.org/drawingml/2006/main" noGrp="1"/>
+          </p:cNvSpPr>
+          <p:nvPr>
+            <p:ph type="body" idx="1"/>
+          </p:nvPr>
+        </p:nvSpPr>
+        <p:spPr/>
+        <p:txBody>
+          <a:bodyPr xmlns:a="http://schemas.openxmlformats.org/drawingml/2006/main"/>
+          <a:lstStyle xmlns:a="http://schemas.openxmlformats.org/drawingml/2006/main"/>
+          <a:p xmlns:a="http://schemas.openxmlformats.org/drawingml/2006/main"/>
+        </p:txBody>
+      </p:sp>
+      <p:sp>
+        <p:nvSpPr>
+          <p:cNvPr id="4" name="Slide Number Placeholder 3"/>
+          <p:cNvSpPr>
+            <a:spLocks xmlns:a="http://schemas.openxmlformats.org/drawingml/2006/main" noGrp="1"/>
+          </p:cNvSpPr>
+          <p:nvPr>
+            <p:ph type="sldNum" idx="5"/>
+          </p:nvPr>
+        </p:nvSpPr>
+        <p:spPr/>
+        <p:txBody>
+          <a:bodyPr xmlns:a="http://schemas.openxmlformats.org/drawingml/2006/main"/>
+          <a:lstStyle xmlns:a="http://schemas.openxmlformats.org/drawingml/2006/main"/>
+          <a:p xmlns:a="http://schemas.openxmlformats.org/drawingml/2006/main"/>
+        </p:txBody>
+      </p:sp>
+    </p:spTree>
+  </p:cSld>
+  <p:clrMapOvr>
+    <a:masterClrMapping xmlns:a="http://schemas.openxmlformats.org/drawingml/2006/main"/>
+  </p:clrMapOvr>
+</p:notes>
+</file>
+
+<file path=ppt/notesSlides/notesSlide23.xml><?xml version="1.0" encoding="utf-8"?>
+<p:notes xmlns:p="http://schemas.openxmlformats.org/presentationml/2006/main">
+  <p:cSld>
+    <p:spTree>
+      <p:nvGrpSpPr>
+        <p:cNvPr id="1" name=""/>
+        <p:cNvGrpSpPr/>
+        <p:nvPr/>
+      </p:nvGrpSpPr>
+      <p:grpSpPr>
+        <a:xfrm xmlns:a="http://schemas.openxmlformats.org/drawingml/2006/main"/>
+      </p:grpSpPr>
+      <p:sp>
+        <p:nvSpPr>
+          <p:cNvPr id="2" name="Slide Image Placeholder 1"/>
+          <p:cNvSpPr>
+            <a:spLocks xmlns:a="http://schemas.openxmlformats.org/drawingml/2006/main" noGrp="1"/>
+          </p:cNvSpPr>
+          <p:nvPr>
+            <p:ph type="sldImg" idx="0"/>
+          </p:nvPr>
+        </p:nvSpPr>
+        <p:spPr/>
+      </p:sp>
+      <p:sp>
+        <p:nvSpPr>
+          <p:cNvPr id="3" name="Notes Placeholder 2"/>
+          <p:cNvSpPr>
+            <a:spLocks xmlns:a="http://schemas.openxmlformats.org/drawingml/2006/main" noGrp="1"/>
+          </p:cNvSpPr>
+          <p:nvPr>
+            <p:ph type="body" idx="1"/>
+          </p:nvPr>
+        </p:nvSpPr>
+        <p:spPr/>
+        <p:txBody>
+          <a:bodyPr xmlns:a="http://schemas.openxmlformats.org/drawingml/2006/main"/>
+          <a:lstStyle xmlns:a="http://schemas.openxmlformats.org/drawingml/2006/main"/>
+          <a:p xmlns:a="http://schemas.openxmlformats.org/drawingml/2006/main"/>
+        </p:txBody>
+      </p:sp>
+      <p:sp>
+        <p:nvSpPr>
+          <p:cNvPr id="4" name="Slide Number Placeholder 3"/>
+          <p:cNvSpPr>
+            <a:spLocks xmlns:a="http://schemas.openxmlformats.org/drawingml/2006/main" noGrp="1"/>
+          </p:cNvSpPr>
+          <p:nvPr>
+            <p:ph type="sldNum" idx="5"/>
+          </p:nvPr>
+        </p:nvSpPr>
+        <p:spPr/>
+        <p:txBody>
+          <a:bodyPr xmlns:a="http://schemas.openxmlformats.org/drawingml/2006/main"/>
+          <a:lstStyle xmlns:a="http://schemas.openxmlformats.org/drawingml/2006/main"/>
+          <a:p xmlns:a="http://schemas.openxmlformats.org/drawingml/2006/main"/>
+        </p:txBody>
+      </p:sp>
+    </p:spTree>
+  </p:cSld>
+  <p:clrMapOvr>
+    <a:masterClrMapping xmlns:a="http://schemas.openxmlformats.org/drawingml/2006/main"/>
+  </p:clrMapOvr>
+</p:notes>
+</file>
+
 <file path=ppt/notesSlides/notesSlide3.xml><?xml version="1.0" encoding="utf-8"?>
 <p:notes xmlns:p="http://schemas.openxmlformats.org/presentationml/2006/main">
   <p:cSld>
@@ -1874,7 +2075,7 @@
   </p:cSld>
   <p:clrMap bg1="lt1" tx1="dk1" bg2="lt2" tx2="dk2" accent1="accent1" accent2="accent2" accent3="accent3" accent4="accent4" accent5="accent5" accent6="accent6" hlink="hlink" folHlink="folHlink"/>
   <p:sldLayoutIdLst>
-    <p:sldLayoutId xmlns:r="http://schemas.openxmlformats.org/officeDocument/2006/relationships" id="2147483649" r:id="R808dc483939d47ee"/>
+    <p:sldLayoutId xmlns:r="http://schemas.openxmlformats.org/officeDocument/2006/relationships" id="2147483649" r:id="R28ac90b3edd844f0"/>
   </p:sldLayoutIdLst>
   <p:txStyles>
     <p:titleStyle>
@@ -2632,7 +2833,7 @@
           <p:cNvPr id="1" name="">
             <a:extLst xmlns:a="http://schemas.openxmlformats.org/drawingml/2006/main">
               <a:ext uri="{FF2B5EF4-FFF2-40B4-BE49-F238E27FC236}">
-                <a16:creationId xmlns:a16="http://schemas.microsoft.com/office/drawing/2014/main" id="{CA95AEA2-8A8B-4536-BB6C-62C8DC0C9475}"/>
+                <a16:creationId xmlns:a16="http://schemas.microsoft.com/office/drawing/2014/main" id="{D4C61443-AE02-4BA7-8A5D-4F9085495042}"/>
               </a:ext>
             </a:extLst>
           </p:cNvPr>
@@ -2682,7 +2883,7 @@
           <p:cNvPr id="2" name="">
             <a:extLst xmlns:a="http://schemas.openxmlformats.org/drawingml/2006/main">
               <a:ext uri="{FF2B5EF4-FFF2-40B4-BE49-F238E27FC236}">
-                <a16:creationId xmlns:a16="http://schemas.microsoft.com/office/drawing/2014/main" id="{C028F2D2-4CCA-4C9E-8318-7F73C874F8C9}"/>
+                <a16:creationId xmlns:a16="http://schemas.microsoft.com/office/drawing/2014/main" id="{50199652-6195-4522-8B9E-19A8550CF2B3}"/>
               </a:ext>
             </a:extLst>
           </p:cNvPr>
@@ -2732,7 +2933,7 @@
           <p:cNvPr id="3" name="">
             <a:extLst xmlns:a="http://schemas.openxmlformats.org/drawingml/2006/main">
               <a:ext uri="{FF2B5EF4-FFF2-40B4-BE49-F238E27FC236}">
-                <a16:creationId xmlns:a16="http://schemas.microsoft.com/office/drawing/2014/main" id="{A72D56B1-F3E4-4E2F-B410-E464C38EACCD}"/>
+                <a16:creationId xmlns:a16="http://schemas.microsoft.com/office/drawing/2014/main" id="{51F3FC37-1A1E-4534-8223-C33C2F02B752}"/>
               </a:ext>
             </a:extLst>
           </p:cNvPr>
@@ -2782,7 +2983,7 @@
           <p:cNvPr id="4" name="">
             <a:extLst xmlns:a="http://schemas.openxmlformats.org/drawingml/2006/main">
               <a:ext uri="{FF2B5EF4-FFF2-40B4-BE49-F238E27FC236}">
-                <a16:creationId xmlns:a16="http://schemas.microsoft.com/office/drawing/2014/main" id="{DF4BD806-30EA-4055-AC66-90454C31B57C}"/>
+                <a16:creationId xmlns:a16="http://schemas.microsoft.com/office/drawing/2014/main" id="{F595127B-D8A1-4C7E-A57E-6E4436C266BE}"/>
               </a:ext>
             </a:extLst>
           </p:cNvPr>
@@ -2815,7 +3016,7 @@
           <p:cNvPr id="5" name="">
             <a:extLst xmlns:a="http://schemas.openxmlformats.org/drawingml/2006/main">
               <a:ext uri="{FF2B5EF4-FFF2-40B4-BE49-F238E27FC236}">
-                <a16:creationId xmlns:a16="http://schemas.microsoft.com/office/drawing/2014/main" id="{D23A5655-0304-45E1-89B7-3C9315A48C32}"/>
+                <a16:creationId xmlns:a16="http://schemas.microsoft.com/office/drawing/2014/main" id="{BD3899C1-9985-46A7-9E2A-174A4482E05C}"/>
               </a:ext>
             </a:extLst>
           </p:cNvPr>
@@ -2865,7 +3066,7 @@
           <p:cNvPr id="6" name="">
             <a:extLst xmlns:a="http://schemas.openxmlformats.org/drawingml/2006/main">
               <a:ext uri="{FF2B5EF4-FFF2-40B4-BE49-F238E27FC236}">
-                <a16:creationId xmlns:a16="http://schemas.microsoft.com/office/drawing/2014/main" id="{54E01832-566A-4685-B3DB-D1A6A8A9ECD7}"/>
+                <a16:creationId xmlns:a16="http://schemas.microsoft.com/office/drawing/2014/main" id="{FB10FFF8-F8E8-4524-98F5-727E0B4A305F}"/>
               </a:ext>
             </a:extLst>
           </p:cNvPr>
@@ -2913,7 +3114,7 @@
     </p:spTree>
     <p:extLst>
       <p:ext uri="{BB962C8B-B14F-4D97-AF65-F5344CB8AC3E}">
-        <p14:creationId xmlns:p14="http://schemas.microsoft.com/office/powerpoint/2010/main" val="283690310"/>
+        <p14:creationId xmlns:p14="http://schemas.microsoft.com/office/powerpoint/2010/main" val="60585260"/>
       </p:ext>
     </p:extLst>
   </p:cSld>
@@ -2944,7 +3145,7 @@
           <p:cNvPr id="1" name="">
             <a:extLst xmlns:a="http://schemas.openxmlformats.org/drawingml/2006/main">
               <a:ext uri="{FF2B5EF4-FFF2-40B4-BE49-F238E27FC236}">
-                <a16:creationId xmlns:a16="http://schemas.microsoft.com/office/drawing/2014/main" id="{2F1A7131-3BB7-4190-A5AE-5E68EE831202}"/>
+                <a16:creationId xmlns:a16="http://schemas.microsoft.com/office/drawing/2014/main" id="{8430A29B-B070-42C5-ABAD-EE4ED30C9733}"/>
               </a:ext>
             </a:extLst>
           </p:cNvPr>
@@ -2994,7 +3195,7 @@
           <p:cNvPr id="2" name="">
             <a:extLst xmlns:a="http://schemas.openxmlformats.org/drawingml/2006/main">
               <a:ext uri="{FF2B5EF4-FFF2-40B4-BE49-F238E27FC236}">
-                <a16:creationId xmlns:a16="http://schemas.microsoft.com/office/drawing/2014/main" id="{A303775E-0B65-42CD-B594-814660F49CCF}"/>
+                <a16:creationId xmlns:a16="http://schemas.microsoft.com/office/drawing/2014/main" id="{B1D7E1C9-2620-4CCB-ADB6-3388200EC4DA}"/>
               </a:ext>
             </a:extLst>
           </p:cNvPr>
@@ -3044,7 +3245,7 @@
           <p:cNvPr id="3" name="">
             <a:extLst xmlns:a="http://schemas.openxmlformats.org/drawingml/2006/main">
               <a:ext uri="{FF2B5EF4-FFF2-40B4-BE49-F238E27FC236}">
-                <a16:creationId xmlns:a16="http://schemas.microsoft.com/office/drawing/2014/main" id="{8E066749-0DDC-49BA-A99F-482577FB2BAF}"/>
+                <a16:creationId xmlns:a16="http://schemas.microsoft.com/office/drawing/2014/main" id="{5C1C084F-CE07-47A6-83C8-311232AC93C3}"/>
               </a:ext>
             </a:extLst>
           </p:cNvPr>
@@ -3081,7 +3282,7 @@
           <p:nvPr/>
         </p:nvPicPr>
         <p:blipFill>
-          <a:blip xmlns:r="http://schemas.openxmlformats.org/officeDocument/2006/relationships" xmlns:a="http://schemas.openxmlformats.org/drawingml/2006/main" r:embed="Rdb60e2dae6ee4fd0"/>
+          <a:blip xmlns:r="http://schemas.openxmlformats.org/officeDocument/2006/relationships" xmlns:a="http://schemas.openxmlformats.org/drawingml/2006/main" r:embed="R54c47b7dbe9248f6"/>
           <a:stretch xmlns:a="http://schemas.openxmlformats.org/drawingml/2006/main"/>
         </p:blipFill>
         <p:spPr>
@@ -3099,7 +3300,7 @@
           <p:cNvPr id="5" name="">
             <a:extLst xmlns:a="http://schemas.openxmlformats.org/drawingml/2006/main">
               <a:ext uri="{FF2B5EF4-FFF2-40B4-BE49-F238E27FC236}">
-                <a16:creationId xmlns:a16="http://schemas.microsoft.com/office/drawing/2014/main" id="{6F4A871F-E066-4CED-BCB0-08C69CD9FEC7}"/>
+                <a16:creationId xmlns:a16="http://schemas.microsoft.com/office/drawing/2014/main" id="{CD245FA9-0A1B-44C4-9B1C-36C0139D219F}"/>
               </a:ext>
             </a:extLst>
           </p:cNvPr>
@@ -3132,7 +3333,7 @@
           <p:cNvPr id="6" name="">
             <a:extLst xmlns:a="http://schemas.openxmlformats.org/drawingml/2006/main">
               <a:ext uri="{FF2B5EF4-FFF2-40B4-BE49-F238E27FC236}">
-                <a16:creationId xmlns:a16="http://schemas.microsoft.com/office/drawing/2014/main" id="{F022CD78-A5DA-499D-B01C-A4C9B7546971}"/>
+                <a16:creationId xmlns:a16="http://schemas.microsoft.com/office/drawing/2014/main" id="{65CD40EB-FF72-43A1-BF79-6D01A6208006}"/>
               </a:ext>
             </a:extLst>
           </p:cNvPr>
@@ -3182,7 +3383,7 @@
           <p:cNvPr id="7" name="">
             <a:extLst xmlns:a="http://schemas.openxmlformats.org/drawingml/2006/main">
               <a:ext uri="{FF2B5EF4-FFF2-40B4-BE49-F238E27FC236}">
-                <a16:creationId xmlns:a16="http://schemas.microsoft.com/office/drawing/2014/main" id="{45255213-CFAC-4FD6-A9C0-D8182962A7C6}"/>
+                <a16:creationId xmlns:a16="http://schemas.microsoft.com/office/drawing/2014/main" id="{C281DDEE-828F-4815-B6C4-12458A779D8E}"/>
               </a:ext>
             </a:extLst>
           </p:cNvPr>
@@ -3232,7 +3433,7 @@
           <p:cNvPr id="8" name="">
             <a:extLst xmlns:a="http://schemas.openxmlformats.org/drawingml/2006/main">
               <a:ext uri="{FF2B5EF4-FFF2-40B4-BE49-F238E27FC236}">
-                <a16:creationId xmlns:a16="http://schemas.microsoft.com/office/drawing/2014/main" id="{72F9AB68-F1BD-418D-92E2-BF3789E9A0AE}"/>
+                <a16:creationId xmlns:a16="http://schemas.microsoft.com/office/drawing/2014/main" id="{21042F13-2327-41D3-B2C5-15136BAC3BF3}"/>
               </a:ext>
             </a:extLst>
           </p:cNvPr>
@@ -3280,7 +3481,7 @@
     </p:spTree>
     <p:extLst>
       <p:ext uri="{BB962C8B-B14F-4D97-AF65-F5344CB8AC3E}">
-        <p14:creationId xmlns:p14="http://schemas.microsoft.com/office/powerpoint/2010/main" val="1464972822"/>
+        <p14:creationId xmlns:p14="http://schemas.microsoft.com/office/powerpoint/2010/main" val="1217103861"/>
       </p:ext>
     </p:extLst>
   </p:cSld>
@@ -3311,7 +3512,7 @@
           <p:cNvPr id="1" name="">
             <a:extLst xmlns:a="http://schemas.openxmlformats.org/drawingml/2006/main">
               <a:ext uri="{FF2B5EF4-FFF2-40B4-BE49-F238E27FC236}">
-                <a16:creationId xmlns:a16="http://schemas.microsoft.com/office/drawing/2014/main" id="{40BFFDF1-5FF1-4222-995F-C59141FB44EA}"/>
+                <a16:creationId xmlns:a16="http://schemas.microsoft.com/office/drawing/2014/main" id="{91840C7B-93B0-46E0-8B0E-A5FDB65CCD21}"/>
               </a:ext>
             </a:extLst>
           </p:cNvPr>
@@ -3361,7 +3562,7 @@
           <p:cNvPr id="2" name="">
             <a:extLst xmlns:a="http://schemas.openxmlformats.org/drawingml/2006/main">
               <a:ext uri="{FF2B5EF4-FFF2-40B4-BE49-F238E27FC236}">
-                <a16:creationId xmlns:a16="http://schemas.microsoft.com/office/drawing/2014/main" id="{E6E226EF-9FC1-4B14-9C49-2163A7F3930A}"/>
+                <a16:creationId xmlns:a16="http://schemas.microsoft.com/office/drawing/2014/main" id="{FDBB623F-B96E-4149-80B9-C308BC65F466}"/>
               </a:ext>
             </a:extLst>
           </p:cNvPr>
@@ -3411,7 +3612,7 @@
           <p:cNvPr id="3" name="">
             <a:extLst xmlns:a="http://schemas.openxmlformats.org/drawingml/2006/main">
               <a:ext uri="{FF2B5EF4-FFF2-40B4-BE49-F238E27FC236}">
-                <a16:creationId xmlns:a16="http://schemas.microsoft.com/office/drawing/2014/main" id="{8EEA8D35-6873-489B-83C4-7B86EA3C330F}"/>
+                <a16:creationId xmlns:a16="http://schemas.microsoft.com/office/drawing/2014/main" id="{9B3E4D51-730B-4C26-8703-E945BDF8C7DC}"/>
               </a:ext>
             </a:extLst>
           </p:cNvPr>
@@ -3448,7 +3649,7 @@
           <p:nvPr/>
         </p:nvPicPr>
         <p:blipFill>
-          <a:blip xmlns:r="http://schemas.openxmlformats.org/officeDocument/2006/relationships" xmlns:a="http://schemas.openxmlformats.org/drawingml/2006/main" r:embed="R2da844c898bc47c4"/>
+          <a:blip xmlns:r="http://schemas.openxmlformats.org/officeDocument/2006/relationships" xmlns:a="http://schemas.openxmlformats.org/drawingml/2006/main" r:embed="R899787cdf8a74a25"/>
           <a:stretch xmlns:a="http://schemas.openxmlformats.org/drawingml/2006/main"/>
         </p:blipFill>
         <p:spPr>
@@ -3466,7 +3667,7 @@
           <p:cNvPr id="5" name="">
             <a:extLst xmlns:a="http://schemas.openxmlformats.org/drawingml/2006/main">
               <a:ext uri="{FF2B5EF4-FFF2-40B4-BE49-F238E27FC236}">
-                <a16:creationId xmlns:a16="http://schemas.microsoft.com/office/drawing/2014/main" id="{ACBD7D54-CEAA-46DF-A6D6-9286E4E71C89}"/>
+                <a16:creationId xmlns:a16="http://schemas.microsoft.com/office/drawing/2014/main" id="{61906CDF-0C45-4102-AE0F-213BF5A9163D}"/>
               </a:ext>
             </a:extLst>
           </p:cNvPr>
@@ -3499,7 +3700,7 @@
           <p:cNvPr id="6" name="">
             <a:extLst xmlns:a="http://schemas.openxmlformats.org/drawingml/2006/main">
               <a:ext uri="{FF2B5EF4-FFF2-40B4-BE49-F238E27FC236}">
-                <a16:creationId xmlns:a16="http://schemas.microsoft.com/office/drawing/2014/main" id="{B27C1594-5DDD-40AB-95C2-268D94E4F9D0}"/>
+                <a16:creationId xmlns:a16="http://schemas.microsoft.com/office/drawing/2014/main" id="{BA370501-1718-40CA-AC20-F5563E5350B9}"/>
               </a:ext>
             </a:extLst>
           </p:cNvPr>
@@ -3549,7 +3750,7 @@
           <p:cNvPr id="7" name="">
             <a:extLst xmlns:a="http://schemas.openxmlformats.org/drawingml/2006/main">
               <a:ext uri="{FF2B5EF4-FFF2-40B4-BE49-F238E27FC236}">
-                <a16:creationId xmlns:a16="http://schemas.microsoft.com/office/drawing/2014/main" id="{5F3F84B8-A967-440B-90FA-051F18386F2C}"/>
+                <a16:creationId xmlns:a16="http://schemas.microsoft.com/office/drawing/2014/main" id="{87516AAD-580E-42CD-B82C-F9DC0F050C3D}"/>
               </a:ext>
             </a:extLst>
           </p:cNvPr>
@@ -3582,7 +3783,7 @@
           <p:cNvPr id="8" name="">
             <a:extLst xmlns:a="http://schemas.openxmlformats.org/drawingml/2006/main">
               <a:ext uri="{FF2B5EF4-FFF2-40B4-BE49-F238E27FC236}">
-                <a16:creationId xmlns:a16="http://schemas.microsoft.com/office/drawing/2014/main" id="{2AF40AFA-BCB1-4340-B6BF-AEDBA14978D7}"/>
+                <a16:creationId xmlns:a16="http://schemas.microsoft.com/office/drawing/2014/main" id="{794799B8-A667-4D68-83D4-AE834461D0B5}"/>
               </a:ext>
             </a:extLst>
           </p:cNvPr>
@@ -3632,7 +3833,7 @@
           <p:cNvPr id="9" name="">
             <a:extLst xmlns:a="http://schemas.openxmlformats.org/drawingml/2006/main">
               <a:ext uri="{FF2B5EF4-FFF2-40B4-BE49-F238E27FC236}">
-                <a16:creationId xmlns:a16="http://schemas.microsoft.com/office/drawing/2014/main" id="{CA9584C4-ED8E-4B4B-BDBF-6DAB879AB070}"/>
+                <a16:creationId xmlns:a16="http://schemas.microsoft.com/office/drawing/2014/main" id="{7F468F1B-AE66-45CE-A0D2-80572C8820B4}"/>
               </a:ext>
             </a:extLst>
           </p:cNvPr>
@@ -3665,7 +3866,7 @@
           <p:cNvPr id="10" name="">
             <a:extLst xmlns:a="http://schemas.openxmlformats.org/drawingml/2006/main">
               <a:ext uri="{FF2B5EF4-FFF2-40B4-BE49-F238E27FC236}">
-                <a16:creationId xmlns:a16="http://schemas.microsoft.com/office/drawing/2014/main" id="{D8851259-4812-480A-AA74-F1C34D526CBC}"/>
+                <a16:creationId xmlns:a16="http://schemas.microsoft.com/office/drawing/2014/main" id="{4C6F80FB-41D1-4776-A731-544FDD166C82}"/>
               </a:ext>
             </a:extLst>
           </p:cNvPr>
@@ -3715,7 +3916,7 @@
           <p:cNvPr id="11" name="">
             <a:extLst xmlns:a="http://schemas.openxmlformats.org/drawingml/2006/main">
               <a:ext uri="{FF2B5EF4-FFF2-40B4-BE49-F238E27FC236}">
-                <a16:creationId xmlns:a16="http://schemas.microsoft.com/office/drawing/2014/main" id="{09447BA7-11B5-456C-B36E-B71CC3C1C093}"/>
+                <a16:creationId xmlns:a16="http://schemas.microsoft.com/office/drawing/2014/main" id="{533F945A-9470-465C-A157-1126CDF0D027}"/>
               </a:ext>
             </a:extLst>
           </p:cNvPr>
@@ -3748,7 +3949,7 @@
           <p:cNvPr id="12" name="">
             <a:extLst xmlns:a="http://schemas.openxmlformats.org/drawingml/2006/main">
               <a:ext uri="{FF2B5EF4-FFF2-40B4-BE49-F238E27FC236}">
-                <a16:creationId xmlns:a16="http://schemas.microsoft.com/office/drawing/2014/main" id="{2F202642-9D74-41EC-A7A0-10019C85F189}"/>
+                <a16:creationId xmlns:a16="http://schemas.microsoft.com/office/drawing/2014/main" id="{4F0C24D9-8BEA-4D0B-9B9B-2D2AE540A284}"/>
               </a:ext>
             </a:extLst>
           </p:cNvPr>
@@ -3798,7 +3999,7 @@
           <p:cNvPr id="13" name="">
             <a:extLst xmlns:a="http://schemas.openxmlformats.org/drawingml/2006/main">
               <a:ext uri="{FF2B5EF4-FFF2-40B4-BE49-F238E27FC236}">
-                <a16:creationId xmlns:a16="http://schemas.microsoft.com/office/drawing/2014/main" id="{4E2EA647-5652-4F6C-ABDF-1E905DF55EBD}"/>
+                <a16:creationId xmlns:a16="http://schemas.microsoft.com/office/drawing/2014/main" id="{BFADD6FC-0214-48E7-867C-CC4DA1B29BCF}"/>
               </a:ext>
             </a:extLst>
           </p:cNvPr>
@@ -3846,7 +4047,7 @@
     </p:spTree>
     <p:extLst>
       <p:ext uri="{BB962C8B-B14F-4D97-AF65-F5344CB8AC3E}">
-        <p14:creationId xmlns:p14="http://schemas.microsoft.com/office/powerpoint/2010/main" val="1955243378"/>
+        <p14:creationId xmlns:p14="http://schemas.microsoft.com/office/powerpoint/2010/main" val="1290909979"/>
       </p:ext>
     </p:extLst>
   </p:cSld>
@@ -3877,7 +4078,7 @@
           <p:cNvPr id="1" name="">
             <a:extLst xmlns:a="http://schemas.openxmlformats.org/drawingml/2006/main">
               <a:ext uri="{FF2B5EF4-FFF2-40B4-BE49-F238E27FC236}">
-                <a16:creationId xmlns:a16="http://schemas.microsoft.com/office/drawing/2014/main" id="{F8CAF542-3E19-48C8-8322-F1206C74A09E}"/>
+                <a16:creationId xmlns:a16="http://schemas.microsoft.com/office/drawing/2014/main" id="{94F32B35-0D3E-42E0-BE01-BB3AA0C9C8BB}"/>
               </a:ext>
             </a:extLst>
           </p:cNvPr>
@@ -3927,7 +4128,7 @@
           <p:cNvPr id="2" name="">
             <a:extLst xmlns:a="http://schemas.openxmlformats.org/drawingml/2006/main">
               <a:ext uri="{FF2B5EF4-FFF2-40B4-BE49-F238E27FC236}">
-                <a16:creationId xmlns:a16="http://schemas.microsoft.com/office/drawing/2014/main" id="{D1752ACB-ABEB-4C10-B52F-86F42C65C3C2}"/>
+                <a16:creationId xmlns:a16="http://schemas.microsoft.com/office/drawing/2014/main" id="{9D1D612C-9765-4916-AF1C-673FCDA63F54}"/>
               </a:ext>
             </a:extLst>
           </p:cNvPr>
@@ -3977,7 +4178,7 @@
           <p:cNvPr id="3" name="">
             <a:extLst xmlns:a="http://schemas.openxmlformats.org/drawingml/2006/main">
               <a:ext uri="{FF2B5EF4-FFF2-40B4-BE49-F238E27FC236}">
-                <a16:creationId xmlns:a16="http://schemas.microsoft.com/office/drawing/2014/main" id="{62A90D27-AB07-448A-9E4D-98F1462F294F}"/>
+                <a16:creationId xmlns:a16="http://schemas.microsoft.com/office/drawing/2014/main" id="{C56D85F4-9D72-4F2E-8427-47BE831F5A43}"/>
               </a:ext>
             </a:extLst>
           </p:cNvPr>
@@ -4014,7 +4215,7 @@
           <p:nvPr/>
         </p:nvPicPr>
         <p:blipFill>
-          <a:blip xmlns:r="http://schemas.openxmlformats.org/officeDocument/2006/relationships" xmlns:a="http://schemas.openxmlformats.org/drawingml/2006/main" r:embed="Rcdd001ca0e074661"/>
+          <a:blip xmlns:r="http://schemas.openxmlformats.org/officeDocument/2006/relationships" xmlns:a="http://schemas.openxmlformats.org/drawingml/2006/main" r:embed="Rcb4e92a619af423f"/>
           <a:stretch xmlns:a="http://schemas.openxmlformats.org/drawingml/2006/main"/>
         </p:blipFill>
         <p:spPr>
@@ -4032,7 +4233,7 @@
           <p:cNvPr id="5" name="">
             <a:extLst xmlns:a="http://schemas.openxmlformats.org/drawingml/2006/main">
               <a:ext uri="{FF2B5EF4-FFF2-40B4-BE49-F238E27FC236}">
-                <a16:creationId xmlns:a16="http://schemas.microsoft.com/office/drawing/2014/main" id="{A408EAFB-8E19-4DE4-82E4-D0EC90355B51}"/>
+                <a16:creationId xmlns:a16="http://schemas.microsoft.com/office/drawing/2014/main" id="{FEBEBA9E-06F4-41AF-92FA-BDFEACC2DFCA}"/>
               </a:ext>
             </a:extLst>
           </p:cNvPr>
@@ -4065,7 +4266,7 @@
           <p:cNvPr id="6" name="">
             <a:extLst xmlns:a="http://schemas.openxmlformats.org/drawingml/2006/main">
               <a:ext uri="{FF2B5EF4-FFF2-40B4-BE49-F238E27FC236}">
-                <a16:creationId xmlns:a16="http://schemas.microsoft.com/office/drawing/2014/main" id="{2E7DFCF7-DE37-40AD-AF97-DD17B8BAB298}"/>
+                <a16:creationId xmlns:a16="http://schemas.microsoft.com/office/drawing/2014/main" id="{7CFB0297-3552-4040-9E99-EAC485888F0D}"/>
               </a:ext>
             </a:extLst>
           </p:cNvPr>
@@ -4115,7 +4316,7 @@
           <p:cNvPr id="7" name="">
             <a:extLst xmlns:a="http://schemas.openxmlformats.org/drawingml/2006/main">
               <a:ext uri="{FF2B5EF4-FFF2-40B4-BE49-F238E27FC236}">
-                <a16:creationId xmlns:a16="http://schemas.microsoft.com/office/drawing/2014/main" id="{7B815E8F-95C9-462C-9D26-D656C1C26A98}"/>
+                <a16:creationId xmlns:a16="http://schemas.microsoft.com/office/drawing/2014/main" id="{7E5DB621-6E39-4D49-BCC2-1FD9C64FC08C}"/>
               </a:ext>
             </a:extLst>
           </p:cNvPr>
@@ -4148,7 +4349,7 @@
           <p:cNvPr id="8" name="">
             <a:extLst xmlns:a="http://schemas.openxmlformats.org/drawingml/2006/main">
               <a:ext uri="{FF2B5EF4-FFF2-40B4-BE49-F238E27FC236}">
-                <a16:creationId xmlns:a16="http://schemas.microsoft.com/office/drawing/2014/main" id="{58E5844E-A92D-42F4-923C-7AF602722116}"/>
+                <a16:creationId xmlns:a16="http://schemas.microsoft.com/office/drawing/2014/main" id="{E5605A7A-8F6C-45F9-B3F4-DCBC8B029B5D}"/>
               </a:ext>
             </a:extLst>
           </p:cNvPr>
@@ -4198,7 +4399,7 @@
           <p:cNvPr id="9" name="">
             <a:extLst xmlns:a="http://schemas.openxmlformats.org/drawingml/2006/main">
               <a:ext uri="{FF2B5EF4-FFF2-40B4-BE49-F238E27FC236}">
-                <a16:creationId xmlns:a16="http://schemas.microsoft.com/office/drawing/2014/main" id="{ADF00BA5-0899-47A8-8C7C-1ED525C370C5}"/>
+                <a16:creationId xmlns:a16="http://schemas.microsoft.com/office/drawing/2014/main" id="{70C4F628-F979-448B-9C87-ACAC76D8A0D3}"/>
               </a:ext>
             </a:extLst>
           </p:cNvPr>
@@ -4231,7 +4432,7 @@
           <p:cNvPr id="10" name="">
             <a:extLst xmlns:a="http://schemas.openxmlformats.org/drawingml/2006/main">
               <a:ext uri="{FF2B5EF4-FFF2-40B4-BE49-F238E27FC236}">
-                <a16:creationId xmlns:a16="http://schemas.microsoft.com/office/drawing/2014/main" id="{49502496-BE92-4998-AC39-F4A93E7E88EC}"/>
+                <a16:creationId xmlns:a16="http://schemas.microsoft.com/office/drawing/2014/main" id="{D6067DD2-8559-48A1-905A-0AF2C965496F}"/>
               </a:ext>
             </a:extLst>
           </p:cNvPr>
@@ -4281,7 +4482,7 @@
           <p:cNvPr id="11" name="">
             <a:extLst xmlns:a="http://schemas.openxmlformats.org/drawingml/2006/main">
               <a:ext uri="{FF2B5EF4-FFF2-40B4-BE49-F238E27FC236}">
-                <a16:creationId xmlns:a16="http://schemas.microsoft.com/office/drawing/2014/main" id="{3A001D10-04CF-429A-B250-92D59253B414}"/>
+                <a16:creationId xmlns:a16="http://schemas.microsoft.com/office/drawing/2014/main" id="{26FFB7EC-125C-46DF-BEBE-64D10C3C547E}"/>
               </a:ext>
             </a:extLst>
           </p:cNvPr>
@@ -4314,7 +4515,7 @@
           <p:cNvPr id="12" name="">
             <a:extLst xmlns:a="http://schemas.openxmlformats.org/drawingml/2006/main">
               <a:ext uri="{FF2B5EF4-FFF2-40B4-BE49-F238E27FC236}">
-                <a16:creationId xmlns:a16="http://schemas.microsoft.com/office/drawing/2014/main" id="{3C1D901C-0464-458F-8D6A-1A13601D8F96}"/>
+                <a16:creationId xmlns:a16="http://schemas.microsoft.com/office/drawing/2014/main" id="{D647F5DA-B3AE-400E-8745-F93F1A5C4946}"/>
               </a:ext>
             </a:extLst>
           </p:cNvPr>
@@ -4364,7 +4565,7 @@
           <p:cNvPr id="13" name="">
             <a:extLst xmlns:a="http://schemas.openxmlformats.org/drawingml/2006/main">
               <a:ext uri="{FF2B5EF4-FFF2-40B4-BE49-F238E27FC236}">
-                <a16:creationId xmlns:a16="http://schemas.microsoft.com/office/drawing/2014/main" id="{352E5211-A474-4464-ACEC-78CA9CBB11D0}"/>
+                <a16:creationId xmlns:a16="http://schemas.microsoft.com/office/drawing/2014/main" id="{6D715C98-9C28-4037-A4DE-78B62E1FA78A}"/>
               </a:ext>
             </a:extLst>
           </p:cNvPr>
@@ -4414,7 +4615,7 @@
           <p:cNvPr id="14" name="">
             <a:extLst xmlns:a="http://schemas.openxmlformats.org/drawingml/2006/main">
               <a:ext uri="{FF2B5EF4-FFF2-40B4-BE49-F238E27FC236}">
-                <a16:creationId xmlns:a16="http://schemas.microsoft.com/office/drawing/2014/main" id="{B6C740BF-E70A-4008-A5D4-B6977467815A}"/>
+                <a16:creationId xmlns:a16="http://schemas.microsoft.com/office/drawing/2014/main" id="{06231C23-031A-4BF5-9FEF-B3E2D0A24180}"/>
               </a:ext>
             </a:extLst>
           </p:cNvPr>
@@ -4462,7 +4663,7 @@
     </p:spTree>
     <p:extLst>
       <p:ext uri="{BB962C8B-B14F-4D97-AF65-F5344CB8AC3E}">
-        <p14:creationId xmlns:p14="http://schemas.microsoft.com/office/powerpoint/2010/main" val="668851975"/>
+        <p14:creationId xmlns:p14="http://schemas.microsoft.com/office/powerpoint/2010/main" val="1056429172"/>
       </p:ext>
     </p:extLst>
   </p:cSld>
@@ -4493,7 +4694,7 @@
           <p:cNvPr id="1" name="">
             <a:extLst xmlns:a="http://schemas.openxmlformats.org/drawingml/2006/main">
               <a:ext uri="{FF2B5EF4-FFF2-40B4-BE49-F238E27FC236}">
-                <a16:creationId xmlns:a16="http://schemas.microsoft.com/office/drawing/2014/main" id="{4057DC00-6714-4D6E-9050-DFC6B080F9DA}"/>
+                <a16:creationId xmlns:a16="http://schemas.microsoft.com/office/drawing/2014/main" id="{86D4CE58-2061-4383-8F09-16766D1AF6A8}"/>
               </a:ext>
             </a:extLst>
           </p:cNvPr>
@@ -4543,7 +4744,7 @@
           <p:cNvPr id="2" name="">
             <a:extLst xmlns:a="http://schemas.openxmlformats.org/drawingml/2006/main">
               <a:ext uri="{FF2B5EF4-FFF2-40B4-BE49-F238E27FC236}">
-                <a16:creationId xmlns:a16="http://schemas.microsoft.com/office/drawing/2014/main" id="{292C1BE9-5FA0-4B9D-87F8-67DDA924D073}"/>
+                <a16:creationId xmlns:a16="http://schemas.microsoft.com/office/drawing/2014/main" id="{6714F3AF-A0C9-4867-9FD4-6FDF12E4A8D3}"/>
               </a:ext>
             </a:extLst>
           </p:cNvPr>
@@ -4593,7 +4794,7 @@
           <p:cNvPr id="3" name="">
             <a:extLst xmlns:a="http://schemas.openxmlformats.org/drawingml/2006/main">
               <a:ext uri="{FF2B5EF4-FFF2-40B4-BE49-F238E27FC236}">
-                <a16:creationId xmlns:a16="http://schemas.microsoft.com/office/drawing/2014/main" id="{61392B22-0C7E-4291-965E-C53F2662A0AB}"/>
+                <a16:creationId xmlns:a16="http://schemas.microsoft.com/office/drawing/2014/main" id="{78CCEDD5-4E82-47CF-996A-CB0BDE4CC2CF}"/>
               </a:ext>
             </a:extLst>
           </p:cNvPr>
@@ -4626,7 +4827,7 @@
           <p:cNvPr id="4" name="">
             <a:extLst xmlns:a="http://schemas.openxmlformats.org/drawingml/2006/main">
               <a:ext uri="{FF2B5EF4-FFF2-40B4-BE49-F238E27FC236}">
-                <a16:creationId xmlns:a16="http://schemas.microsoft.com/office/drawing/2014/main" id="{31094B6E-2790-441E-B16F-A42605FBDCFA}"/>
+                <a16:creationId xmlns:a16="http://schemas.microsoft.com/office/drawing/2014/main" id="{829DBE52-A6DF-4930-97BA-60E04ED44A07}"/>
               </a:ext>
             </a:extLst>
           </p:cNvPr>
@@ -4659,7 +4860,7 @@
           <p:cNvPr id="5" name="">
             <a:extLst xmlns:a="http://schemas.openxmlformats.org/drawingml/2006/main">
               <a:ext uri="{FF2B5EF4-FFF2-40B4-BE49-F238E27FC236}">
-                <a16:creationId xmlns:a16="http://schemas.microsoft.com/office/drawing/2014/main" id="{0B826B12-18EA-4C6B-B362-62D96026CC24}"/>
+                <a16:creationId xmlns:a16="http://schemas.microsoft.com/office/drawing/2014/main" id="{85CFABA5-B41B-468F-B289-FF46A873AEAC}"/>
               </a:ext>
             </a:extLst>
           </p:cNvPr>
@@ -4692,7 +4893,7 @@
           <p:cNvPr id="6" name="">
             <a:extLst xmlns:a="http://schemas.openxmlformats.org/drawingml/2006/main">
               <a:ext uri="{FF2B5EF4-FFF2-40B4-BE49-F238E27FC236}">
-                <a16:creationId xmlns:a16="http://schemas.microsoft.com/office/drawing/2014/main" id="{D86C7515-645B-4234-BDF5-B1E54E305F27}"/>
+                <a16:creationId xmlns:a16="http://schemas.microsoft.com/office/drawing/2014/main" id="{FE2D83E8-4AB8-499E-BFB6-98AFF5C79712}"/>
               </a:ext>
             </a:extLst>
           </p:cNvPr>
@@ -4742,7 +4943,7 @@
           <p:cNvPr id="7" name="">
             <a:extLst xmlns:a="http://schemas.openxmlformats.org/drawingml/2006/main">
               <a:ext uri="{FF2B5EF4-FFF2-40B4-BE49-F238E27FC236}">
-                <a16:creationId xmlns:a16="http://schemas.microsoft.com/office/drawing/2014/main" id="{0B419B3C-91BB-404C-8ED9-B8F2B993D9C1}"/>
+                <a16:creationId xmlns:a16="http://schemas.microsoft.com/office/drawing/2014/main" id="{36D176D1-46BE-41F8-8ECE-C8260B5F9A04}"/>
               </a:ext>
             </a:extLst>
           </p:cNvPr>
@@ -4775,7 +4976,7 @@
           <p:cNvPr id="8" name="">
             <a:extLst xmlns:a="http://schemas.openxmlformats.org/drawingml/2006/main">
               <a:ext uri="{FF2B5EF4-FFF2-40B4-BE49-F238E27FC236}">
-                <a16:creationId xmlns:a16="http://schemas.microsoft.com/office/drawing/2014/main" id="{396D5591-4944-4B49-8FD8-2AF08EB183A1}"/>
+                <a16:creationId xmlns:a16="http://schemas.microsoft.com/office/drawing/2014/main" id="{F5BA6EE9-1B13-4F1D-853F-AD11652E8F9E}"/>
               </a:ext>
             </a:extLst>
           </p:cNvPr>
@@ -4825,7 +5026,7 @@
           <p:cNvPr id="9" name="">
             <a:extLst xmlns:a="http://schemas.openxmlformats.org/drawingml/2006/main">
               <a:ext uri="{FF2B5EF4-FFF2-40B4-BE49-F238E27FC236}">
-                <a16:creationId xmlns:a16="http://schemas.microsoft.com/office/drawing/2014/main" id="{50547FB0-3391-427A-BD40-B7CBC57A2C9D}"/>
+                <a16:creationId xmlns:a16="http://schemas.microsoft.com/office/drawing/2014/main" id="{841F72E2-4F95-4ED3-B4EB-9DF07D50F94A}"/>
               </a:ext>
             </a:extLst>
           </p:cNvPr>
@@ -4858,7 +5059,7 @@
           <p:cNvPr id="10" name="">
             <a:extLst xmlns:a="http://schemas.openxmlformats.org/drawingml/2006/main">
               <a:ext uri="{FF2B5EF4-FFF2-40B4-BE49-F238E27FC236}">
-                <a16:creationId xmlns:a16="http://schemas.microsoft.com/office/drawing/2014/main" id="{94ACE62E-3624-4941-B72C-35FC8C56CB25}"/>
+                <a16:creationId xmlns:a16="http://schemas.microsoft.com/office/drawing/2014/main" id="{54B4B8FD-151F-46B5-B6FB-4E0342BAF26F}"/>
               </a:ext>
             </a:extLst>
           </p:cNvPr>
@@ -4908,7 +5109,7 @@
           <p:cNvPr id="11" name="">
             <a:extLst xmlns:a="http://schemas.openxmlformats.org/drawingml/2006/main">
               <a:ext uri="{FF2B5EF4-FFF2-40B4-BE49-F238E27FC236}">
-                <a16:creationId xmlns:a16="http://schemas.microsoft.com/office/drawing/2014/main" id="{43C77E3E-0BE9-4B15-A555-3D4D853A972E}"/>
+                <a16:creationId xmlns:a16="http://schemas.microsoft.com/office/drawing/2014/main" id="{F4C59603-6386-41A3-A8B4-E1A7C57C85A4}"/>
               </a:ext>
             </a:extLst>
           </p:cNvPr>
@@ -4941,7 +5142,7 @@
           <p:cNvPr id="12" name="">
             <a:extLst xmlns:a="http://schemas.openxmlformats.org/drawingml/2006/main">
               <a:ext uri="{FF2B5EF4-FFF2-40B4-BE49-F238E27FC236}">
-                <a16:creationId xmlns:a16="http://schemas.microsoft.com/office/drawing/2014/main" id="{329700AD-3A43-42BC-B55F-9AA6CB32E829}"/>
+                <a16:creationId xmlns:a16="http://schemas.microsoft.com/office/drawing/2014/main" id="{B8E2C093-DCA9-4D86-A821-9BADC09614D5}"/>
               </a:ext>
             </a:extLst>
           </p:cNvPr>
@@ -4991,7 +5192,7 @@
           <p:cNvPr id="13" name="">
             <a:extLst xmlns:a="http://schemas.openxmlformats.org/drawingml/2006/main">
               <a:ext uri="{FF2B5EF4-FFF2-40B4-BE49-F238E27FC236}">
-                <a16:creationId xmlns:a16="http://schemas.microsoft.com/office/drawing/2014/main" id="{CD2A8089-8435-47FE-88E7-3E4F846986C5}"/>
+                <a16:creationId xmlns:a16="http://schemas.microsoft.com/office/drawing/2014/main" id="{707B01F8-01B3-4CEC-AECD-F203BD6F92CF}"/>
               </a:ext>
             </a:extLst>
           </p:cNvPr>
@@ -5024,7 +5225,7 @@
           <p:cNvPr id="14" name="">
             <a:extLst xmlns:a="http://schemas.openxmlformats.org/drawingml/2006/main">
               <a:ext uri="{FF2B5EF4-FFF2-40B4-BE49-F238E27FC236}">
-                <a16:creationId xmlns:a16="http://schemas.microsoft.com/office/drawing/2014/main" id="{7A2327AA-C708-472E-B22D-FA170816CC49}"/>
+                <a16:creationId xmlns:a16="http://schemas.microsoft.com/office/drawing/2014/main" id="{31BABE03-F688-49A8-8B39-03AEBEEB4451}"/>
               </a:ext>
             </a:extLst>
           </p:cNvPr>
@@ -5074,7 +5275,7 @@
           <p:cNvPr id="15" name="">
             <a:extLst xmlns:a="http://schemas.openxmlformats.org/drawingml/2006/main">
               <a:ext uri="{FF2B5EF4-FFF2-40B4-BE49-F238E27FC236}">
-                <a16:creationId xmlns:a16="http://schemas.microsoft.com/office/drawing/2014/main" id="{786B3063-C894-449A-89C0-8AEC1853AA6B}"/>
+                <a16:creationId xmlns:a16="http://schemas.microsoft.com/office/drawing/2014/main" id="{02B268BE-3701-4A97-9E81-24F6E2BA12F5}"/>
               </a:ext>
             </a:extLst>
           </p:cNvPr>
@@ -5124,7 +5325,7 @@
           <p:cNvPr id="16" name="">
             <a:extLst xmlns:a="http://schemas.openxmlformats.org/drawingml/2006/main">
               <a:ext uri="{FF2B5EF4-FFF2-40B4-BE49-F238E27FC236}">
-                <a16:creationId xmlns:a16="http://schemas.microsoft.com/office/drawing/2014/main" id="{265E159B-EAC8-4894-9049-C6F9C145B933}"/>
+                <a16:creationId xmlns:a16="http://schemas.microsoft.com/office/drawing/2014/main" id="{596E73E9-8A41-4A33-B4A7-93AC4FD44872}"/>
               </a:ext>
             </a:extLst>
           </p:cNvPr>
@@ -5157,7 +5358,7 @@
           <p:cNvPr id="17" name="">
             <a:extLst xmlns:a="http://schemas.openxmlformats.org/drawingml/2006/main">
               <a:ext uri="{FF2B5EF4-FFF2-40B4-BE49-F238E27FC236}">
-                <a16:creationId xmlns:a16="http://schemas.microsoft.com/office/drawing/2014/main" id="{583F9849-CF04-419C-A518-7987554305CE}"/>
+                <a16:creationId xmlns:a16="http://schemas.microsoft.com/office/drawing/2014/main" id="{C81C9EAB-EA56-4DFB-A963-7AD7592AC4F9}"/>
               </a:ext>
             </a:extLst>
           </p:cNvPr>
@@ -5207,7 +5408,7 @@
           <p:cNvPr id="18" name="">
             <a:extLst xmlns:a="http://schemas.openxmlformats.org/drawingml/2006/main">
               <a:ext uri="{FF2B5EF4-FFF2-40B4-BE49-F238E27FC236}">
-                <a16:creationId xmlns:a16="http://schemas.microsoft.com/office/drawing/2014/main" id="{F41DD9AC-0F15-43E9-8AE3-8EE442116293}"/>
+                <a16:creationId xmlns:a16="http://schemas.microsoft.com/office/drawing/2014/main" id="{984E0B23-A879-42FF-8A1F-AF346FB3CBD7}"/>
               </a:ext>
             </a:extLst>
           </p:cNvPr>
@@ -5240,7 +5441,7 @@
           <p:cNvPr id="19" name="">
             <a:extLst xmlns:a="http://schemas.openxmlformats.org/drawingml/2006/main">
               <a:ext uri="{FF2B5EF4-FFF2-40B4-BE49-F238E27FC236}">
-                <a16:creationId xmlns:a16="http://schemas.microsoft.com/office/drawing/2014/main" id="{83A521A1-C74D-4360-A92F-A9C609D44B3F}"/>
+                <a16:creationId xmlns:a16="http://schemas.microsoft.com/office/drawing/2014/main" id="{9E889C64-AC60-48FB-9065-14C3E88C52FE}"/>
               </a:ext>
             </a:extLst>
           </p:cNvPr>
@@ -5290,7 +5491,7 @@
           <p:cNvPr id="20" name="">
             <a:extLst xmlns:a="http://schemas.openxmlformats.org/drawingml/2006/main">
               <a:ext uri="{FF2B5EF4-FFF2-40B4-BE49-F238E27FC236}">
-                <a16:creationId xmlns:a16="http://schemas.microsoft.com/office/drawing/2014/main" id="{AD4AD529-149B-4E5F-BE68-EA5BE20DA7EC}"/>
+                <a16:creationId xmlns:a16="http://schemas.microsoft.com/office/drawing/2014/main" id="{7270F321-6FBA-44C0-A0F1-3A53C72A9E0E}"/>
               </a:ext>
             </a:extLst>
           </p:cNvPr>
@@ -5323,7 +5524,7 @@
           <p:cNvPr id="21" name="">
             <a:extLst xmlns:a="http://schemas.openxmlformats.org/drawingml/2006/main">
               <a:ext uri="{FF2B5EF4-FFF2-40B4-BE49-F238E27FC236}">
-                <a16:creationId xmlns:a16="http://schemas.microsoft.com/office/drawing/2014/main" id="{693D5142-B3CD-4AC6-AD19-FD1F7E8E6616}"/>
+                <a16:creationId xmlns:a16="http://schemas.microsoft.com/office/drawing/2014/main" id="{119A2848-CF13-480F-82AD-37D927AFA90D}"/>
               </a:ext>
             </a:extLst>
           </p:cNvPr>
@@ -5373,7 +5574,7 @@
           <p:cNvPr id="22" name="">
             <a:extLst xmlns:a="http://schemas.openxmlformats.org/drawingml/2006/main">
               <a:ext uri="{FF2B5EF4-FFF2-40B4-BE49-F238E27FC236}">
-                <a16:creationId xmlns:a16="http://schemas.microsoft.com/office/drawing/2014/main" id="{531C5F6F-B539-43DE-BA32-2819CA2F4BE8}"/>
+                <a16:creationId xmlns:a16="http://schemas.microsoft.com/office/drawing/2014/main" id="{102C6CB8-C224-4092-9255-E99A3D294556}"/>
               </a:ext>
             </a:extLst>
           </p:cNvPr>
@@ -5406,7 +5607,7 @@
           <p:cNvPr id="23" name="">
             <a:extLst xmlns:a="http://schemas.openxmlformats.org/drawingml/2006/main">
               <a:ext uri="{FF2B5EF4-FFF2-40B4-BE49-F238E27FC236}">
-                <a16:creationId xmlns:a16="http://schemas.microsoft.com/office/drawing/2014/main" id="{72918AA7-D348-40B0-A761-A6E5A113E8F5}"/>
+                <a16:creationId xmlns:a16="http://schemas.microsoft.com/office/drawing/2014/main" id="{ED59115C-9BA7-482B-86B6-B4750698D017}"/>
               </a:ext>
             </a:extLst>
           </p:cNvPr>
@@ -5456,7 +5657,7 @@
           <p:cNvPr id="24" name="">
             <a:extLst xmlns:a="http://schemas.openxmlformats.org/drawingml/2006/main">
               <a:ext uri="{FF2B5EF4-FFF2-40B4-BE49-F238E27FC236}">
-                <a16:creationId xmlns:a16="http://schemas.microsoft.com/office/drawing/2014/main" id="{FAF44CD3-2839-4F6F-96B3-31ED1BEB701F}"/>
+                <a16:creationId xmlns:a16="http://schemas.microsoft.com/office/drawing/2014/main" id="{55D43C90-E2BF-475C-97C1-5E72835BBFF6}"/>
               </a:ext>
             </a:extLst>
           </p:cNvPr>
@@ -5506,7 +5707,7 @@
           <p:cNvPr id="25" name="">
             <a:extLst xmlns:a="http://schemas.openxmlformats.org/drawingml/2006/main">
               <a:ext uri="{FF2B5EF4-FFF2-40B4-BE49-F238E27FC236}">
-                <a16:creationId xmlns:a16="http://schemas.microsoft.com/office/drawing/2014/main" id="{C8B886FB-A17B-4D0B-A0D5-5C713DC72B90}"/>
+                <a16:creationId xmlns:a16="http://schemas.microsoft.com/office/drawing/2014/main" id="{F331BFD4-A462-4464-B47F-DD8E98CCA2BB}"/>
               </a:ext>
             </a:extLst>
           </p:cNvPr>
@@ -5554,7 +5755,7 @@
     </p:spTree>
     <p:extLst>
       <p:ext uri="{BB962C8B-B14F-4D97-AF65-F5344CB8AC3E}">
-        <p14:creationId xmlns:p14="http://schemas.microsoft.com/office/powerpoint/2010/main" val="2014700373"/>
+        <p14:creationId xmlns:p14="http://schemas.microsoft.com/office/powerpoint/2010/main" val="2085542683"/>
       </p:ext>
     </p:extLst>
   </p:cSld>
@@ -5585,7 +5786,7 @@
           <p:cNvPr id="1" name="">
             <a:extLst xmlns:a="http://schemas.openxmlformats.org/drawingml/2006/main">
               <a:ext uri="{FF2B5EF4-FFF2-40B4-BE49-F238E27FC236}">
-                <a16:creationId xmlns:a16="http://schemas.microsoft.com/office/drawing/2014/main" id="{38E03B20-BA77-4DFA-A1BF-F690DE638A22}"/>
+                <a16:creationId xmlns:a16="http://schemas.microsoft.com/office/drawing/2014/main" id="{0C379BD3-22E5-4B0E-BD4B-BC4C3D0B64F7}"/>
               </a:ext>
             </a:extLst>
           </p:cNvPr>
@@ -5635,7 +5836,7 @@
           <p:cNvPr id="2" name="">
             <a:extLst xmlns:a="http://schemas.openxmlformats.org/drawingml/2006/main">
               <a:ext uri="{FF2B5EF4-FFF2-40B4-BE49-F238E27FC236}">
-                <a16:creationId xmlns:a16="http://schemas.microsoft.com/office/drawing/2014/main" id="{8239CE33-0CF8-4ADF-B495-D8BDC9F1C713}"/>
+                <a16:creationId xmlns:a16="http://schemas.microsoft.com/office/drawing/2014/main" id="{2F8FCCCA-44A0-4931-9ABE-53F9DAB5C8F3}"/>
               </a:ext>
             </a:extLst>
           </p:cNvPr>
@@ -5685,7 +5886,7 @@
           <p:cNvPr id="3" name="">
             <a:extLst xmlns:a="http://schemas.openxmlformats.org/drawingml/2006/main">
               <a:ext uri="{FF2B5EF4-FFF2-40B4-BE49-F238E27FC236}">
-                <a16:creationId xmlns:a16="http://schemas.microsoft.com/office/drawing/2014/main" id="{DEAC0C81-AE0D-4F41-B57A-4EE2171A4065}"/>
+                <a16:creationId xmlns:a16="http://schemas.microsoft.com/office/drawing/2014/main" id="{1057C4E2-F70E-45CB-8EBF-E05C481DD455}"/>
               </a:ext>
             </a:extLst>
           </p:cNvPr>
@@ -5718,7 +5919,7 @@
           <p:cNvPr id="4" name="">
             <a:extLst xmlns:a="http://schemas.openxmlformats.org/drawingml/2006/main">
               <a:ext uri="{FF2B5EF4-FFF2-40B4-BE49-F238E27FC236}">
-                <a16:creationId xmlns:a16="http://schemas.microsoft.com/office/drawing/2014/main" id="{81A556E0-66B4-44EB-955C-3C8DD2B2C0E5}"/>
+                <a16:creationId xmlns:a16="http://schemas.microsoft.com/office/drawing/2014/main" id="{1CAFCBA2-29EF-47BB-B7AC-2A96C545E031}"/>
               </a:ext>
             </a:extLst>
           </p:cNvPr>
@@ -5751,7 +5952,7 @@
           <p:cNvPr id="5" name="">
             <a:extLst xmlns:a="http://schemas.openxmlformats.org/drawingml/2006/main">
               <a:ext uri="{FF2B5EF4-FFF2-40B4-BE49-F238E27FC236}">
-                <a16:creationId xmlns:a16="http://schemas.microsoft.com/office/drawing/2014/main" id="{9A1AF9BE-5802-44DB-B259-D7F3C5C75E70}"/>
+                <a16:creationId xmlns:a16="http://schemas.microsoft.com/office/drawing/2014/main" id="{1C56DC5D-FDBC-44FF-AA8E-C751D43A3800}"/>
               </a:ext>
             </a:extLst>
           </p:cNvPr>
@@ -5801,7 +6002,7 @@
           <p:cNvPr id="6" name="">
             <a:extLst xmlns:a="http://schemas.openxmlformats.org/drawingml/2006/main">
               <a:ext uri="{FF2B5EF4-FFF2-40B4-BE49-F238E27FC236}">
-                <a16:creationId xmlns:a16="http://schemas.microsoft.com/office/drawing/2014/main" id="{926EEEAA-333A-4773-A47B-0A05AF3F1755}"/>
+                <a16:creationId xmlns:a16="http://schemas.microsoft.com/office/drawing/2014/main" id="{89DCF39E-2CD3-43C8-BB96-38BB36C6BD88}"/>
               </a:ext>
             </a:extLst>
           </p:cNvPr>
@@ -5851,7 +6052,7 @@
           <p:cNvPr id="7" name="">
             <a:extLst xmlns:a="http://schemas.openxmlformats.org/drawingml/2006/main">
               <a:ext uri="{FF2B5EF4-FFF2-40B4-BE49-F238E27FC236}">
-                <a16:creationId xmlns:a16="http://schemas.microsoft.com/office/drawing/2014/main" id="{89C23D3E-BC9D-4915-8350-BD5336B7842E}"/>
+                <a16:creationId xmlns:a16="http://schemas.microsoft.com/office/drawing/2014/main" id="{55142E11-418C-45A0-8D44-89702C4F86CC}"/>
               </a:ext>
             </a:extLst>
           </p:cNvPr>
@@ -5901,7 +6102,7 @@
           <p:cNvPr id="8" name="">
             <a:extLst xmlns:a="http://schemas.openxmlformats.org/drawingml/2006/main">
               <a:ext uri="{FF2B5EF4-FFF2-40B4-BE49-F238E27FC236}">
-                <a16:creationId xmlns:a16="http://schemas.microsoft.com/office/drawing/2014/main" id="{62C3A8AD-8CCC-4BC6-9A78-3298FAE0B6E4}"/>
+                <a16:creationId xmlns:a16="http://schemas.microsoft.com/office/drawing/2014/main" id="{1C0E1E8A-CF1B-4B70-979C-8ED0104B91FD}"/>
               </a:ext>
             </a:extLst>
           </p:cNvPr>
@@ -5934,7 +6135,7 @@
           <p:cNvPr id="9" name="">
             <a:extLst xmlns:a="http://schemas.openxmlformats.org/drawingml/2006/main">
               <a:ext uri="{FF2B5EF4-FFF2-40B4-BE49-F238E27FC236}">
-                <a16:creationId xmlns:a16="http://schemas.microsoft.com/office/drawing/2014/main" id="{33DE9E80-11EA-4797-8C2A-DDA567A037C5}"/>
+                <a16:creationId xmlns:a16="http://schemas.microsoft.com/office/drawing/2014/main" id="{94BC987A-D9C2-4FCD-8B27-141C6AE30920}"/>
               </a:ext>
             </a:extLst>
           </p:cNvPr>
@@ -5984,7 +6185,7 @@
           <p:cNvPr id="10" name="">
             <a:extLst xmlns:a="http://schemas.openxmlformats.org/drawingml/2006/main">
               <a:ext uri="{FF2B5EF4-FFF2-40B4-BE49-F238E27FC236}">
-                <a16:creationId xmlns:a16="http://schemas.microsoft.com/office/drawing/2014/main" id="{6EA1621E-36BA-4963-96E2-BC262A087E74}"/>
+                <a16:creationId xmlns:a16="http://schemas.microsoft.com/office/drawing/2014/main" id="{C70E3C13-77AD-465A-A166-FCCF779F222A}"/>
               </a:ext>
             </a:extLst>
           </p:cNvPr>
@@ -6034,7 +6235,7 @@
           <p:cNvPr id="11" name="">
             <a:extLst xmlns:a="http://schemas.openxmlformats.org/drawingml/2006/main">
               <a:ext uri="{FF2B5EF4-FFF2-40B4-BE49-F238E27FC236}">
-                <a16:creationId xmlns:a16="http://schemas.microsoft.com/office/drawing/2014/main" id="{CB1236CC-59F1-45B5-ABBC-FD4E728BB670}"/>
+                <a16:creationId xmlns:a16="http://schemas.microsoft.com/office/drawing/2014/main" id="{8152A2BA-1F57-4C29-B533-DBE7F3FE9004}"/>
               </a:ext>
             </a:extLst>
           </p:cNvPr>
@@ -6084,7 +6285,7 @@
           <p:cNvPr id="12" name="">
             <a:extLst xmlns:a="http://schemas.openxmlformats.org/drawingml/2006/main">
               <a:ext uri="{FF2B5EF4-FFF2-40B4-BE49-F238E27FC236}">
-                <a16:creationId xmlns:a16="http://schemas.microsoft.com/office/drawing/2014/main" id="{D4EDA81E-6295-477E-8C3F-166D095ADAEF}"/>
+                <a16:creationId xmlns:a16="http://schemas.microsoft.com/office/drawing/2014/main" id="{2BD0B467-3E92-44D1-A65A-891CF68B44E4}"/>
               </a:ext>
             </a:extLst>
           </p:cNvPr>
@@ -6117,7 +6318,7 @@
           <p:cNvPr id="13" name="">
             <a:extLst xmlns:a="http://schemas.openxmlformats.org/drawingml/2006/main">
               <a:ext uri="{FF2B5EF4-FFF2-40B4-BE49-F238E27FC236}">
-                <a16:creationId xmlns:a16="http://schemas.microsoft.com/office/drawing/2014/main" id="{7F063BCA-AF78-47FE-BEDF-3ABC618C3928}"/>
+                <a16:creationId xmlns:a16="http://schemas.microsoft.com/office/drawing/2014/main" id="{14962FFA-11F9-47FE-8280-834DA5503604}"/>
               </a:ext>
             </a:extLst>
           </p:cNvPr>
@@ -6167,7 +6368,7 @@
           <p:cNvPr id="14" name="">
             <a:extLst xmlns:a="http://schemas.openxmlformats.org/drawingml/2006/main">
               <a:ext uri="{FF2B5EF4-FFF2-40B4-BE49-F238E27FC236}">
-                <a16:creationId xmlns:a16="http://schemas.microsoft.com/office/drawing/2014/main" id="{B102BB79-80A3-49BD-B1ED-147302176419}"/>
+                <a16:creationId xmlns:a16="http://schemas.microsoft.com/office/drawing/2014/main" id="{98245F6B-819B-4777-AF3A-E48B3E327032}"/>
               </a:ext>
             </a:extLst>
           </p:cNvPr>
@@ -6217,7 +6418,7 @@
           <p:cNvPr id="15" name="">
             <a:extLst xmlns:a="http://schemas.openxmlformats.org/drawingml/2006/main">
               <a:ext uri="{FF2B5EF4-FFF2-40B4-BE49-F238E27FC236}">
-                <a16:creationId xmlns:a16="http://schemas.microsoft.com/office/drawing/2014/main" id="{1C8E1B61-FC24-4F87-8319-3D0609C4D811}"/>
+                <a16:creationId xmlns:a16="http://schemas.microsoft.com/office/drawing/2014/main" id="{BBDA5433-F9F4-4F69-BCB1-249D97423670}"/>
               </a:ext>
             </a:extLst>
           </p:cNvPr>
@@ -6267,7 +6468,7 @@
           <p:cNvPr id="16" name="">
             <a:extLst xmlns:a="http://schemas.openxmlformats.org/drawingml/2006/main">
               <a:ext uri="{FF2B5EF4-FFF2-40B4-BE49-F238E27FC236}">
-                <a16:creationId xmlns:a16="http://schemas.microsoft.com/office/drawing/2014/main" id="{E45DEEE2-7ACE-4D8A-9ACC-69247AC230A6}"/>
+                <a16:creationId xmlns:a16="http://schemas.microsoft.com/office/drawing/2014/main" id="{C1385646-0F44-47A5-811B-9CB083CDE9F4}"/>
               </a:ext>
             </a:extLst>
           </p:cNvPr>
@@ -6317,7 +6518,7 @@
           <p:cNvPr id="17" name="">
             <a:extLst xmlns:a="http://schemas.openxmlformats.org/drawingml/2006/main">
               <a:ext uri="{FF2B5EF4-FFF2-40B4-BE49-F238E27FC236}">
-                <a16:creationId xmlns:a16="http://schemas.microsoft.com/office/drawing/2014/main" id="{10078383-1D2C-467C-9DDC-D451F8547821}"/>
+                <a16:creationId xmlns:a16="http://schemas.microsoft.com/office/drawing/2014/main" id="{AC4AA988-AFC3-4450-B721-448C8D9B95CC}"/>
               </a:ext>
             </a:extLst>
           </p:cNvPr>
@@ -6365,7 +6566,7 @@
     </p:spTree>
     <p:extLst>
       <p:ext uri="{BB962C8B-B14F-4D97-AF65-F5344CB8AC3E}">
-        <p14:creationId xmlns:p14="http://schemas.microsoft.com/office/powerpoint/2010/main" val="563866620"/>
+        <p14:creationId xmlns:p14="http://schemas.microsoft.com/office/powerpoint/2010/main" val="1114642433"/>
       </p:ext>
     </p:extLst>
   </p:cSld>
@@ -6396,7 +6597,7 @@
           <p:cNvPr id="1" name="">
             <a:extLst xmlns:a="http://schemas.openxmlformats.org/drawingml/2006/main">
               <a:ext uri="{FF2B5EF4-FFF2-40B4-BE49-F238E27FC236}">
-                <a16:creationId xmlns:a16="http://schemas.microsoft.com/office/drawing/2014/main" id="{C03EAE01-7D40-477C-9624-120B0D1473B8}"/>
+                <a16:creationId xmlns:a16="http://schemas.microsoft.com/office/drawing/2014/main" id="{82135B6E-4691-41A3-9F93-5A4B9E020104}"/>
               </a:ext>
             </a:extLst>
           </p:cNvPr>
@@ -6446,7 +6647,7 @@
           <p:cNvPr id="2" name="">
             <a:extLst xmlns:a="http://schemas.openxmlformats.org/drawingml/2006/main">
               <a:ext uri="{FF2B5EF4-FFF2-40B4-BE49-F238E27FC236}">
-                <a16:creationId xmlns:a16="http://schemas.microsoft.com/office/drawing/2014/main" id="{6F0E0298-37AA-4388-B4ED-EF093DDBA492}"/>
+                <a16:creationId xmlns:a16="http://schemas.microsoft.com/office/drawing/2014/main" id="{5588B453-2BB7-4D4E-802D-3BD30EFBCE16}"/>
               </a:ext>
             </a:extLst>
           </p:cNvPr>
@@ -6496,7 +6697,7 @@
           <p:cNvPr id="3" name="">
             <a:extLst xmlns:a="http://schemas.openxmlformats.org/drawingml/2006/main">
               <a:ext uri="{FF2B5EF4-FFF2-40B4-BE49-F238E27FC236}">
-                <a16:creationId xmlns:a16="http://schemas.microsoft.com/office/drawing/2014/main" id="{E8DEFA3A-FB1A-42BB-8C47-C8E70A795059}"/>
+                <a16:creationId xmlns:a16="http://schemas.microsoft.com/office/drawing/2014/main" id="{5CF1293B-511B-4295-BFA3-781DF23CBC07}"/>
               </a:ext>
             </a:extLst>
           </p:cNvPr>
@@ -6529,7 +6730,7 @@
           <p:cNvPr id="4" name="">
             <a:extLst xmlns:a="http://schemas.openxmlformats.org/drawingml/2006/main">
               <a:ext uri="{FF2B5EF4-FFF2-40B4-BE49-F238E27FC236}">
-                <a16:creationId xmlns:a16="http://schemas.microsoft.com/office/drawing/2014/main" id="{1D19D6EC-15B8-4066-A5EB-D7A33A16D970}"/>
+                <a16:creationId xmlns:a16="http://schemas.microsoft.com/office/drawing/2014/main" id="{9C0A1B77-3329-4EBB-8FE4-577C8FB590DF}"/>
               </a:ext>
             </a:extLst>
           </p:cNvPr>
@@ -6579,7 +6780,7 @@
           <p:cNvPr id="5" name="">
             <a:extLst xmlns:a="http://schemas.openxmlformats.org/drawingml/2006/main">
               <a:ext uri="{FF2B5EF4-FFF2-40B4-BE49-F238E27FC236}">
-                <a16:creationId xmlns:a16="http://schemas.microsoft.com/office/drawing/2014/main" id="{E32CCFD8-CECB-4C43-BFBE-896FD02D16C8}"/>
+                <a16:creationId xmlns:a16="http://schemas.microsoft.com/office/drawing/2014/main" id="{600DC4F3-23F5-4C08-98E7-E8C14E758D1D}"/>
               </a:ext>
             </a:extLst>
           </p:cNvPr>
@@ -6612,7 +6813,7 @@
           <p:cNvPr id="6" name="">
             <a:extLst xmlns:a="http://schemas.openxmlformats.org/drawingml/2006/main">
               <a:ext uri="{FF2B5EF4-FFF2-40B4-BE49-F238E27FC236}">
-                <a16:creationId xmlns:a16="http://schemas.microsoft.com/office/drawing/2014/main" id="{1306D6D0-583D-4657-B8EC-78549C941ABD}"/>
+                <a16:creationId xmlns:a16="http://schemas.microsoft.com/office/drawing/2014/main" id="{3A5A93E9-0A9C-475E-9E21-FB43435CE220}"/>
               </a:ext>
             </a:extLst>
           </p:cNvPr>
@@ -6662,7 +6863,7 @@
           <p:cNvPr id="7" name="">
             <a:extLst xmlns:a="http://schemas.openxmlformats.org/drawingml/2006/main">
               <a:ext uri="{FF2B5EF4-FFF2-40B4-BE49-F238E27FC236}">
-                <a16:creationId xmlns:a16="http://schemas.microsoft.com/office/drawing/2014/main" id="{952F90ED-A61D-471F-A461-9AF192101794}"/>
+                <a16:creationId xmlns:a16="http://schemas.microsoft.com/office/drawing/2014/main" id="{A1E18255-AB59-42F1-A606-3BD4D98B7106}"/>
               </a:ext>
             </a:extLst>
           </p:cNvPr>
@@ -6695,7 +6896,7 @@
           <p:cNvPr id="8" name="">
             <a:extLst xmlns:a="http://schemas.openxmlformats.org/drawingml/2006/main">
               <a:ext uri="{FF2B5EF4-FFF2-40B4-BE49-F238E27FC236}">
-                <a16:creationId xmlns:a16="http://schemas.microsoft.com/office/drawing/2014/main" id="{5809BACB-C4AE-4C32-96C1-E49A4C5C3BB4}"/>
+                <a16:creationId xmlns:a16="http://schemas.microsoft.com/office/drawing/2014/main" id="{BC297AC8-171D-451F-8742-076308B4B783}"/>
               </a:ext>
             </a:extLst>
           </p:cNvPr>
@@ -6745,7 +6946,7 @@
           <p:cNvPr id="9" name="">
             <a:extLst xmlns:a="http://schemas.openxmlformats.org/drawingml/2006/main">
               <a:ext uri="{FF2B5EF4-FFF2-40B4-BE49-F238E27FC236}">
-                <a16:creationId xmlns:a16="http://schemas.microsoft.com/office/drawing/2014/main" id="{0EA1CCD9-EEA8-41E1-B972-F6BB8610466B}"/>
+                <a16:creationId xmlns:a16="http://schemas.microsoft.com/office/drawing/2014/main" id="{E6DF1A83-5F13-4B56-95BF-D3AE4CFB4AEE}"/>
               </a:ext>
             </a:extLst>
           </p:cNvPr>
@@ -6778,7 +6979,7 @@
           <p:cNvPr id="10" name="">
             <a:extLst xmlns:a="http://schemas.openxmlformats.org/drawingml/2006/main">
               <a:ext uri="{FF2B5EF4-FFF2-40B4-BE49-F238E27FC236}">
-                <a16:creationId xmlns:a16="http://schemas.microsoft.com/office/drawing/2014/main" id="{98BD3448-0115-42B3-B53A-5F76AAF52479}"/>
+                <a16:creationId xmlns:a16="http://schemas.microsoft.com/office/drawing/2014/main" id="{06293E24-7D73-440A-B95E-D15C332F4D7E}"/>
               </a:ext>
             </a:extLst>
           </p:cNvPr>
@@ -6828,7 +7029,7 @@
           <p:cNvPr id="11" name="">
             <a:extLst xmlns:a="http://schemas.openxmlformats.org/drawingml/2006/main">
               <a:ext uri="{FF2B5EF4-FFF2-40B4-BE49-F238E27FC236}">
-                <a16:creationId xmlns:a16="http://schemas.microsoft.com/office/drawing/2014/main" id="{5EBE489E-5220-462C-B3EC-9B99AA5E6011}"/>
+                <a16:creationId xmlns:a16="http://schemas.microsoft.com/office/drawing/2014/main" id="{81EB47EA-2774-4D62-AE45-53F8C8E2D5D1}"/>
               </a:ext>
             </a:extLst>
           </p:cNvPr>
@@ -6861,7 +7062,7 @@
           <p:cNvPr id="12" name="">
             <a:extLst xmlns:a="http://schemas.openxmlformats.org/drawingml/2006/main">
               <a:ext uri="{FF2B5EF4-FFF2-40B4-BE49-F238E27FC236}">
-                <a16:creationId xmlns:a16="http://schemas.microsoft.com/office/drawing/2014/main" id="{DF625B03-A81F-46CB-B1A1-09EEA36B97BE}"/>
+                <a16:creationId xmlns:a16="http://schemas.microsoft.com/office/drawing/2014/main" id="{AFF853D5-6D6B-48DA-A5E6-5F0D74383D44}"/>
               </a:ext>
             </a:extLst>
           </p:cNvPr>
@@ -6911,7 +7112,7 @@
           <p:cNvPr id="13" name="">
             <a:extLst xmlns:a="http://schemas.openxmlformats.org/drawingml/2006/main">
               <a:ext uri="{FF2B5EF4-FFF2-40B4-BE49-F238E27FC236}">
-                <a16:creationId xmlns:a16="http://schemas.microsoft.com/office/drawing/2014/main" id="{C8781EA7-F05A-4364-AAF4-66D1FD0D504E}"/>
+                <a16:creationId xmlns:a16="http://schemas.microsoft.com/office/drawing/2014/main" id="{B5B9E389-02C2-43A9-9E68-5ACF5D53A29D}"/>
               </a:ext>
             </a:extLst>
           </p:cNvPr>
@@ -6944,7 +7145,7 @@
           <p:cNvPr id="14" name="">
             <a:extLst xmlns:a="http://schemas.openxmlformats.org/drawingml/2006/main">
               <a:ext uri="{FF2B5EF4-FFF2-40B4-BE49-F238E27FC236}">
-                <a16:creationId xmlns:a16="http://schemas.microsoft.com/office/drawing/2014/main" id="{506EAAD7-EC29-4A5E-B01B-83363E97DFC7}"/>
+                <a16:creationId xmlns:a16="http://schemas.microsoft.com/office/drawing/2014/main" id="{70DFE290-57D1-4A57-BFFC-AC7803608595}"/>
               </a:ext>
             </a:extLst>
           </p:cNvPr>
@@ -6994,7 +7195,7 @@
           <p:cNvPr id="15" name="">
             <a:extLst xmlns:a="http://schemas.openxmlformats.org/drawingml/2006/main">
               <a:ext uri="{FF2B5EF4-FFF2-40B4-BE49-F238E27FC236}">
-                <a16:creationId xmlns:a16="http://schemas.microsoft.com/office/drawing/2014/main" id="{D4CB1AB9-0D8C-42B1-B25E-8ABE9195853E}"/>
+                <a16:creationId xmlns:a16="http://schemas.microsoft.com/office/drawing/2014/main" id="{26C8897A-9C1C-4A44-8E86-C3E9F353A3E1}"/>
               </a:ext>
             </a:extLst>
           </p:cNvPr>
@@ -7027,7 +7228,7 @@
           <p:cNvPr id="16" name="">
             <a:extLst xmlns:a="http://schemas.openxmlformats.org/drawingml/2006/main">
               <a:ext uri="{FF2B5EF4-FFF2-40B4-BE49-F238E27FC236}">
-                <a16:creationId xmlns:a16="http://schemas.microsoft.com/office/drawing/2014/main" id="{2BB21DA4-104C-467F-9301-9DB42089B57C}"/>
+                <a16:creationId xmlns:a16="http://schemas.microsoft.com/office/drawing/2014/main" id="{5DFC8257-5D88-4D74-AEA0-CF8BDAAF3D1E}"/>
               </a:ext>
             </a:extLst>
           </p:cNvPr>
@@ -7077,7 +7278,7 @@
           <p:cNvPr id="17" name="">
             <a:extLst xmlns:a="http://schemas.openxmlformats.org/drawingml/2006/main">
               <a:ext uri="{FF2B5EF4-FFF2-40B4-BE49-F238E27FC236}">
-                <a16:creationId xmlns:a16="http://schemas.microsoft.com/office/drawing/2014/main" id="{B5750EC7-060E-402F-9FC1-4960F13E7A1E}"/>
+                <a16:creationId xmlns:a16="http://schemas.microsoft.com/office/drawing/2014/main" id="{F0459B33-857B-4BC2-B638-845ABA9B4F96}"/>
               </a:ext>
             </a:extLst>
           </p:cNvPr>
@@ -7110,7 +7311,7 @@
           <p:cNvPr id="18" name="">
             <a:extLst xmlns:a="http://schemas.openxmlformats.org/drawingml/2006/main">
               <a:ext uri="{FF2B5EF4-FFF2-40B4-BE49-F238E27FC236}">
-                <a16:creationId xmlns:a16="http://schemas.microsoft.com/office/drawing/2014/main" id="{467F8E66-D93C-4671-9B54-9D0223908158}"/>
+                <a16:creationId xmlns:a16="http://schemas.microsoft.com/office/drawing/2014/main" id="{6FCB84F9-687E-488C-933C-47EB1B9A53B4}"/>
               </a:ext>
             </a:extLst>
           </p:cNvPr>
@@ -7160,7 +7361,7 @@
           <p:cNvPr id="19" name="">
             <a:extLst xmlns:a="http://schemas.openxmlformats.org/drawingml/2006/main">
               <a:ext uri="{FF2B5EF4-FFF2-40B4-BE49-F238E27FC236}">
-                <a16:creationId xmlns:a16="http://schemas.microsoft.com/office/drawing/2014/main" id="{484BDA03-ADB2-4F07-9DEE-27E5E9CF592D}"/>
+                <a16:creationId xmlns:a16="http://schemas.microsoft.com/office/drawing/2014/main" id="{114CA665-94A7-4448-BBC4-DB6C3D334994}"/>
               </a:ext>
             </a:extLst>
           </p:cNvPr>
@@ -7193,7 +7394,7 @@
           <p:cNvPr id="20" name="">
             <a:extLst xmlns:a="http://schemas.openxmlformats.org/drawingml/2006/main">
               <a:ext uri="{FF2B5EF4-FFF2-40B4-BE49-F238E27FC236}">
-                <a16:creationId xmlns:a16="http://schemas.microsoft.com/office/drawing/2014/main" id="{DFEBE594-EFC8-4511-BB46-298AD2992296}"/>
+                <a16:creationId xmlns:a16="http://schemas.microsoft.com/office/drawing/2014/main" id="{0D60E5B2-5168-47C5-85C3-8AB3C9293536}"/>
               </a:ext>
             </a:extLst>
           </p:cNvPr>
@@ -7243,7 +7444,7 @@
           <p:cNvPr id="21" name="">
             <a:extLst xmlns:a="http://schemas.openxmlformats.org/drawingml/2006/main">
               <a:ext uri="{FF2B5EF4-FFF2-40B4-BE49-F238E27FC236}">
-                <a16:creationId xmlns:a16="http://schemas.microsoft.com/office/drawing/2014/main" id="{59360A78-877D-4D65-9094-5A99D51616AC}"/>
+                <a16:creationId xmlns:a16="http://schemas.microsoft.com/office/drawing/2014/main" id="{081D0225-42D7-4778-9775-3866A32E8E6A}"/>
               </a:ext>
             </a:extLst>
           </p:cNvPr>
@@ -7276,7 +7477,7 @@
           <p:cNvPr id="22" name="">
             <a:extLst xmlns:a="http://schemas.openxmlformats.org/drawingml/2006/main">
               <a:ext uri="{FF2B5EF4-FFF2-40B4-BE49-F238E27FC236}">
-                <a16:creationId xmlns:a16="http://schemas.microsoft.com/office/drawing/2014/main" id="{80F93234-BB13-4340-B4E8-947A68A37BC1}"/>
+                <a16:creationId xmlns:a16="http://schemas.microsoft.com/office/drawing/2014/main" id="{B6F611B2-6436-4D92-ABB6-F5CEBB7C6A45}"/>
               </a:ext>
             </a:extLst>
           </p:cNvPr>
@@ -7326,7 +7527,7 @@
           <p:cNvPr id="23" name="">
             <a:extLst xmlns:a="http://schemas.openxmlformats.org/drawingml/2006/main">
               <a:ext uri="{FF2B5EF4-FFF2-40B4-BE49-F238E27FC236}">
-                <a16:creationId xmlns:a16="http://schemas.microsoft.com/office/drawing/2014/main" id="{F8D1409E-C00D-470B-ACEA-D91AC020CD6E}"/>
+                <a16:creationId xmlns:a16="http://schemas.microsoft.com/office/drawing/2014/main" id="{73D285BD-63E7-4096-8B0B-959E102A6460}"/>
               </a:ext>
             </a:extLst>
           </p:cNvPr>
@@ -7359,7 +7560,7 @@
           <p:cNvPr id="24" name="">
             <a:extLst xmlns:a="http://schemas.openxmlformats.org/drawingml/2006/main">
               <a:ext uri="{FF2B5EF4-FFF2-40B4-BE49-F238E27FC236}">
-                <a16:creationId xmlns:a16="http://schemas.microsoft.com/office/drawing/2014/main" id="{493CE19A-7031-49FF-9F7B-0443CB5A1E13}"/>
+                <a16:creationId xmlns:a16="http://schemas.microsoft.com/office/drawing/2014/main" id="{A8FFC72E-CD71-49A4-AC58-DFC2201F4906}"/>
               </a:ext>
             </a:extLst>
           </p:cNvPr>
@@ -7409,7 +7610,7 @@
           <p:cNvPr id="25" name="">
             <a:extLst xmlns:a="http://schemas.openxmlformats.org/drawingml/2006/main">
               <a:ext uri="{FF2B5EF4-FFF2-40B4-BE49-F238E27FC236}">
-                <a16:creationId xmlns:a16="http://schemas.microsoft.com/office/drawing/2014/main" id="{DD983D5D-361E-4EFE-A78E-F0EF4485D529}"/>
+                <a16:creationId xmlns:a16="http://schemas.microsoft.com/office/drawing/2014/main" id="{3D1CF10D-6A99-4A13-A79B-2C9320D2C752}"/>
               </a:ext>
             </a:extLst>
           </p:cNvPr>
@@ -7442,7 +7643,7 @@
           <p:cNvPr id="26" name="">
             <a:extLst xmlns:a="http://schemas.openxmlformats.org/drawingml/2006/main">
               <a:ext uri="{FF2B5EF4-FFF2-40B4-BE49-F238E27FC236}">
-                <a16:creationId xmlns:a16="http://schemas.microsoft.com/office/drawing/2014/main" id="{EF6AF930-FA46-4430-9CAA-E1018734F54E}"/>
+                <a16:creationId xmlns:a16="http://schemas.microsoft.com/office/drawing/2014/main" id="{FB2EC67A-365C-4102-BAE1-E29311350243}"/>
               </a:ext>
             </a:extLst>
           </p:cNvPr>
@@ -7492,7 +7693,7 @@
           <p:cNvPr id="27" name="">
             <a:extLst xmlns:a="http://schemas.openxmlformats.org/drawingml/2006/main">
               <a:ext uri="{FF2B5EF4-FFF2-40B4-BE49-F238E27FC236}">
-                <a16:creationId xmlns:a16="http://schemas.microsoft.com/office/drawing/2014/main" id="{29F18AA8-80E5-4915-B8AC-FC9F68C3F0F9}"/>
+                <a16:creationId xmlns:a16="http://schemas.microsoft.com/office/drawing/2014/main" id="{DADE7509-C745-48A6-BA15-B841AD8EA82E}"/>
               </a:ext>
             </a:extLst>
           </p:cNvPr>
@@ -7525,7 +7726,7 @@
           <p:cNvPr id="28" name="">
             <a:extLst xmlns:a="http://schemas.openxmlformats.org/drawingml/2006/main">
               <a:ext uri="{FF2B5EF4-FFF2-40B4-BE49-F238E27FC236}">
-                <a16:creationId xmlns:a16="http://schemas.microsoft.com/office/drawing/2014/main" id="{EBEFD19D-4C8A-4425-870E-142FAE662831}"/>
+                <a16:creationId xmlns:a16="http://schemas.microsoft.com/office/drawing/2014/main" id="{F7CFA003-3682-45E3-8323-03EDB5463AD1}"/>
               </a:ext>
             </a:extLst>
           </p:cNvPr>
@@ -7575,7 +7776,7 @@
           <p:cNvPr id="29" name="">
             <a:extLst xmlns:a="http://schemas.openxmlformats.org/drawingml/2006/main">
               <a:ext uri="{FF2B5EF4-FFF2-40B4-BE49-F238E27FC236}">
-                <a16:creationId xmlns:a16="http://schemas.microsoft.com/office/drawing/2014/main" id="{980268A9-D5DA-4B1A-81C3-8FA63B40D23F}"/>
+                <a16:creationId xmlns:a16="http://schemas.microsoft.com/office/drawing/2014/main" id="{736AD228-0147-403C-BF2D-C393AC367689}"/>
               </a:ext>
             </a:extLst>
           </p:cNvPr>
@@ -7608,7 +7809,7 @@
           <p:cNvPr id="30" name="">
             <a:extLst xmlns:a="http://schemas.openxmlformats.org/drawingml/2006/main">
               <a:ext uri="{FF2B5EF4-FFF2-40B4-BE49-F238E27FC236}">
-                <a16:creationId xmlns:a16="http://schemas.microsoft.com/office/drawing/2014/main" id="{DB6423E9-ACFE-4DEE-AEF7-D181AE18D22D}"/>
+                <a16:creationId xmlns:a16="http://schemas.microsoft.com/office/drawing/2014/main" id="{7B5CFEB3-C1E0-462E-90A3-9492EE479DAC}"/>
               </a:ext>
             </a:extLst>
           </p:cNvPr>
@@ -7658,7 +7859,7 @@
           <p:cNvPr id="31" name="">
             <a:extLst xmlns:a="http://schemas.openxmlformats.org/drawingml/2006/main">
               <a:ext uri="{FF2B5EF4-FFF2-40B4-BE49-F238E27FC236}">
-                <a16:creationId xmlns:a16="http://schemas.microsoft.com/office/drawing/2014/main" id="{D807F305-F5AE-41FB-8B5C-D79374A0BD83}"/>
+                <a16:creationId xmlns:a16="http://schemas.microsoft.com/office/drawing/2014/main" id="{B7EBFC46-2327-421A-9A8A-E4E055012EF7}"/>
               </a:ext>
             </a:extLst>
           </p:cNvPr>
@@ -7691,7 +7892,7 @@
           <p:cNvPr id="32" name="">
             <a:extLst xmlns:a="http://schemas.openxmlformats.org/drawingml/2006/main">
               <a:ext uri="{FF2B5EF4-FFF2-40B4-BE49-F238E27FC236}">
-                <a16:creationId xmlns:a16="http://schemas.microsoft.com/office/drawing/2014/main" id="{CC645BC3-91BE-4A1E-94AD-447EEF3739FC}"/>
+                <a16:creationId xmlns:a16="http://schemas.microsoft.com/office/drawing/2014/main" id="{E03015E7-0705-4201-A9D2-51782CA08518}"/>
               </a:ext>
             </a:extLst>
           </p:cNvPr>
@@ -7741,7 +7942,7 @@
           <p:cNvPr id="33" name="">
             <a:extLst xmlns:a="http://schemas.openxmlformats.org/drawingml/2006/main">
               <a:ext uri="{FF2B5EF4-FFF2-40B4-BE49-F238E27FC236}">
-                <a16:creationId xmlns:a16="http://schemas.microsoft.com/office/drawing/2014/main" id="{1B147225-11EB-460E-B6E5-75373C3175DA}"/>
+                <a16:creationId xmlns:a16="http://schemas.microsoft.com/office/drawing/2014/main" id="{9BD93893-D6A2-4CA8-9288-43C76BC3E739}"/>
               </a:ext>
             </a:extLst>
           </p:cNvPr>
@@ -7774,7 +7975,7 @@
           <p:cNvPr id="34" name="">
             <a:extLst xmlns:a="http://schemas.openxmlformats.org/drawingml/2006/main">
               <a:ext uri="{FF2B5EF4-FFF2-40B4-BE49-F238E27FC236}">
-                <a16:creationId xmlns:a16="http://schemas.microsoft.com/office/drawing/2014/main" id="{850B9069-295E-4534-ADE1-10947E1DCFC8}"/>
+                <a16:creationId xmlns:a16="http://schemas.microsoft.com/office/drawing/2014/main" id="{E9221408-26AF-4F70-931D-BAB1740053E6}"/>
               </a:ext>
             </a:extLst>
           </p:cNvPr>
@@ -7824,7 +8025,7 @@
           <p:cNvPr id="35" name="">
             <a:extLst xmlns:a="http://schemas.openxmlformats.org/drawingml/2006/main">
               <a:ext uri="{FF2B5EF4-FFF2-40B4-BE49-F238E27FC236}">
-                <a16:creationId xmlns:a16="http://schemas.microsoft.com/office/drawing/2014/main" id="{FA1CA870-703A-4B04-8B39-7D952C279633}"/>
+                <a16:creationId xmlns:a16="http://schemas.microsoft.com/office/drawing/2014/main" id="{DB295B51-57E3-48FC-A35E-771DBFAF6337}"/>
               </a:ext>
             </a:extLst>
           </p:cNvPr>
@@ -7857,7 +8058,7 @@
           <p:cNvPr id="36" name="">
             <a:extLst xmlns:a="http://schemas.openxmlformats.org/drawingml/2006/main">
               <a:ext uri="{FF2B5EF4-FFF2-40B4-BE49-F238E27FC236}">
-                <a16:creationId xmlns:a16="http://schemas.microsoft.com/office/drawing/2014/main" id="{2B5A4D43-F774-416B-A629-2C2A87D6DBC0}"/>
+                <a16:creationId xmlns:a16="http://schemas.microsoft.com/office/drawing/2014/main" id="{7E14B016-566D-4668-8431-9CD660A27C67}"/>
               </a:ext>
             </a:extLst>
           </p:cNvPr>
@@ -7907,7 +8108,7 @@
           <p:cNvPr id="37" name="">
             <a:extLst xmlns:a="http://schemas.openxmlformats.org/drawingml/2006/main">
               <a:ext uri="{FF2B5EF4-FFF2-40B4-BE49-F238E27FC236}">
-                <a16:creationId xmlns:a16="http://schemas.microsoft.com/office/drawing/2014/main" id="{EE244743-2EAD-43ED-A5DD-9B5CD60AD46E}"/>
+                <a16:creationId xmlns:a16="http://schemas.microsoft.com/office/drawing/2014/main" id="{3C65E4E5-37E2-45BD-951A-7382361B49A4}"/>
               </a:ext>
             </a:extLst>
           </p:cNvPr>
@@ -7940,7 +8141,7 @@
           <p:cNvPr id="38" name="">
             <a:extLst xmlns:a="http://schemas.openxmlformats.org/drawingml/2006/main">
               <a:ext uri="{FF2B5EF4-FFF2-40B4-BE49-F238E27FC236}">
-                <a16:creationId xmlns:a16="http://schemas.microsoft.com/office/drawing/2014/main" id="{B6CB99DF-4C18-45A9-AA9E-7688677C3AD9}"/>
+                <a16:creationId xmlns:a16="http://schemas.microsoft.com/office/drawing/2014/main" id="{F3A46D2C-36A9-4303-8449-DD8C140ED6A7}"/>
               </a:ext>
             </a:extLst>
           </p:cNvPr>
@@ -7990,7 +8191,7 @@
           <p:cNvPr id="39" name="">
             <a:extLst xmlns:a="http://schemas.openxmlformats.org/drawingml/2006/main">
               <a:ext uri="{FF2B5EF4-FFF2-40B4-BE49-F238E27FC236}">
-                <a16:creationId xmlns:a16="http://schemas.microsoft.com/office/drawing/2014/main" id="{F1A2BDDE-0A32-41B6-8E5C-7A58F9852015}"/>
+                <a16:creationId xmlns:a16="http://schemas.microsoft.com/office/drawing/2014/main" id="{01B026F9-460D-4372-99AD-CEE358BFF41B}"/>
               </a:ext>
             </a:extLst>
           </p:cNvPr>
@@ -8023,7 +8224,7 @@
           <p:cNvPr id="40" name="">
             <a:extLst xmlns:a="http://schemas.openxmlformats.org/drawingml/2006/main">
               <a:ext uri="{FF2B5EF4-FFF2-40B4-BE49-F238E27FC236}">
-                <a16:creationId xmlns:a16="http://schemas.microsoft.com/office/drawing/2014/main" id="{B81FD70A-ABBD-47D8-98B7-A2D8117DBBD0}"/>
+                <a16:creationId xmlns:a16="http://schemas.microsoft.com/office/drawing/2014/main" id="{CCA7CF91-34DE-4C7C-81A7-CD9A13F232E6}"/>
               </a:ext>
             </a:extLst>
           </p:cNvPr>
@@ -8073,7 +8274,7 @@
           <p:cNvPr id="41" name="">
             <a:extLst xmlns:a="http://schemas.openxmlformats.org/drawingml/2006/main">
               <a:ext uri="{FF2B5EF4-FFF2-40B4-BE49-F238E27FC236}">
-                <a16:creationId xmlns:a16="http://schemas.microsoft.com/office/drawing/2014/main" id="{D30F8E59-24B5-4AB0-B548-7B5B1412E562}"/>
+                <a16:creationId xmlns:a16="http://schemas.microsoft.com/office/drawing/2014/main" id="{29A2D3C9-87F1-445A-A0A6-DC545BF293A5}"/>
               </a:ext>
             </a:extLst>
           </p:cNvPr>
@@ -8106,7 +8307,7 @@
           <p:cNvPr id="42" name="">
             <a:extLst xmlns:a="http://schemas.openxmlformats.org/drawingml/2006/main">
               <a:ext uri="{FF2B5EF4-FFF2-40B4-BE49-F238E27FC236}">
-                <a16:creationId xmlns:a16="http://schemas.microsoft.com/office/drawing/2014/main" id="{B75171AC-0AEF-4F11-B8D1-FE26B38E0F81}"/>
+                <a16:creationId xmlns:a16="http://schemas.microsoft.com/office/drawing/2014/main" id="{B7F16B76-2935-433A-9930-9BE9D627E5E5}"/>
               </a:ext>
             </a:extLst>
           </p:cNvPr>
@@ -8156,7 +8357,7 @@
           <p:cNvPr id="43" name="">
             <a:extLst xmlns:a="http://schemas.openxmlformats.org/drawingml/2006/main">
               <a:ext uri="{FF2B5EF4-FFF2-40B4-BE49-F238E27FC236}">
-                <a16:creationId xmlns:a16="http://schemas.microsoft.com/office/drawing/2014/main" id="{FFDAC601-23AC-49AA-BDEF-695580C8AB16}"/>
+                <a16:creationId xmlns:a16="http://schemas.microsoft.com/office/drawing/2014/main" id="{0CDF87F3-BED5-41B6-AFE4-FC8E72A6985D}"/>
               </a:ext>
             </a:extLst>
           </p:cNvPr>
@@ -8189,7 +8390,7 @@
           <p:cNvPr id="44" name="">
             <a:extLst xmlns:a="http://schemas.openxmlformats.org/drawingml/2006/main">
               <a:ext uri="{FF2B5EF4-FFF2-40B4-BE49-F238E27FC236}">
-                <a16:creationId xmlns:a16="http://schemas.microsoft.com/office/drawing/2014/main" id="{071A2D8C-742F-4E1D-A77E-BFD2ECF92193}"/>
+                <a16:creationId xmlns:a16="http://schemas.microsoft.com/office/drawing/2014/main" id="{696078D3-1BC2-456A-86DA-D904B26F9E4C}"/>
               </a:ext>
             </a:extLst>
           </p:cNvPr>
@@ -8239,7 +8440,7 @@
           <p:cNvPr id="45" name="">
             <a:extLst xmlns:a="http://schemas.openxmlformats.org/drawingml/2006/main">
               <a:ext uri="{FF2B5EF4-FFF2-40B4-BE49-F238E27FC236}">
-                <a16:creationId xmlns:a16="http://schemas.microsoft.com/office/drawing/2014/main" id="{8F05AA6F-7A5D-46D1-BADF-8B07B5C749F6}"/>
+                <a16:creationId xmlns:a16="http://schemas.microsoft.com/office/drawing/2014/main" id="{12E45FBA-EADA-4C81-B243-77E30CF5A547}"/>
               </a:ext>
             </a:extLst>
           </p:cNvPr>
@@ -8272,7 +8473,7 @@
           <p:cNvPr id="46" name="">
             <a:extLst xmlns:a="http://schemas.openxmlformats.org/drawingml/2006/main">
               <a:ext uri="{FF2B5EF4-FFF2-40B4-BE49-F238E27FC236}">
-                <a16:creationId xmlns:a16="http://schemas.microsoft.com/office/drawing/2014/main" id="{9A3A010C-3177-4B44-94EE-834F3412D802}"/>
+                <a16:creationId xmlns:a16="http://schemas.microsoft.com/office/drawing/2014/main" id="{8AC874E0-204F-4D9E-966A-6D6FC1EA2631}"/>
               </a:ext>
             </a:extLst>
           </p:cNvPr>
@@ -8322,7 +8523,7 @@
           <p:cNvPr id="47" name="">
             <a:extLst xmlns:a="http://schemas.openxmlformats.org/drawingml/2006/main">
               <a:ext uri="{FF2B5EF4-FFF2-40B4-BE49-F238E27FC236}">
-                <a16:creationId xmlns:a16="http://schemas.microsoft.com/office/drawing/2014/main" id="{158A9442-75B3-44B8-B177-D29AA2D8870E}"/>
+                <a16:creationId xmlns:a16="http://schemas.microsoft.com/office/drawing/2014/main" id="{A7D13A00-93EB-4B2F-A734-33C3F90D0E7A}"/>
               </a:ext>
             </a:extLst>
           </p:cNvPr>
@@ -8355,7 +8556,7 @@
           <p:cNvPr id="48" name="">
             <a:extLst xmlns:a="http://schemas.openxmlformats.org/drawingml/2006/main">
               <a:ext uri="{FF2B5EF4-FFF2-40B4-BE49-F238E27FC236}">
-                <a16:creationId xmlns:a16="http://schemas.microsoft.com/office/drawing/2014/main" id="{E60E4100-2C55-41BE-B878-532A9C13EC16}"/>
+                <a16:creationId xmlns:a16="http://schemas.microsoft.com/office/drawing/2014/main" id="{19179F2B-0D9D-40AC-A712-F26DC596102F}"/>
               </a:ext>
             </a:extLst>
           </p:cNvPr>
@@ -8405,7 +8606,7 @@
           <p:cNvPr id="49" name="">
             <a:extLst xmlns:a="http://schemas.openxmlformats.org/drawingml/2006/main">
               <a:ext uri="{FF2B5EF4-FFF2-40B4-BE49-F238E27FC236}">
-                <a16:creationId xmlns:a16="http://schemas.microsoft.com/office/drawing/2014/main" id="{24AD98DE-DC93-4484-99F6-87828A953E88}"/>
+                <a16:creationId xmlns:a16="http://schemas.microsoft.com/office/drawing/2014/main" id="{25498B49-D7ED-4BB1-8A3A-3B819ED5FC68}"/>
               </a:ext>
             </a:extLst>
           </p:cNvPr>
@@ -8438,7 +8639,7 @@
           <p:cNvPr id="50" name="">
             <a:extLst xmlns:a="http://schemas.openxmlformats.org/drawingml/2006/main">
               <a:ext uri="{FF2B5EF4-FFF2-40B4-BE49-F238E27FC236}">
-                <a16:creationId xmlns:a16="http://schemas.microsoft.com/office/drawing/2014/main" id="{983B3524-CFEB-4BC5-99D0-DDAEA79E548A}"/>
+                <a16:creationId xmlns:a16="http://schemas.microsoft.com/office/drawing/2014/main" id="{C1B91F7C-39DF-4519-A267-23CD33C18CEB}"/>
               </a:ext>
             </a:extLst>
           </p:cNvPr>
@@ -8488,7 +8689,7 @@
           <p:cNvPr id="51" name="">
             <a:extLst xmlns:a="http://schemas.openxmlformats.org/drawingml/2006/main">
               <a:ext uri="{FF2B5EF4-FFF2-40B4-BE49-F238E27FC236}">
-                <a16:creationId xmlns:a16="http://schemas.microsoft.com/office/drawing/2014/main" id="{62B29E77-7F91-4819-8552-F9BFC15BD664}"/>
+                <a16:creationId xmlns:a16="http://schemas.microsoft.com/office/drawing/2014/main" id="{23AB1667-9AA1-4460-9812-E905140825B3}"/>
               </a:ext>
             </a:extLst>
           </p:cNvPr>
@@ -8521,7 +8722,7 @@
           <p:cNvPr id="52" name="">
             <a:extLst xmlns:a="http://schemas.openxmlformats.org/drawingml/2006/main">
               <a:ext uri="{FF2B5EF4-FFF2-40B4-BE49-F238E27FC236}">
-                <a16:creationId xmlns:a16="http://schemas.microsoft.com/office/drawing/2014/main" id="{2E994612-A936-4316-AA59-A25202DE8ABA}"/>
+                <a16:creationId xmlns:a16="http://schemas.microsoft.com/office/drawing/2014/main" id="{64B862B5-F5A4-4DC2-949C-05D5D9254A1B}"/>
               </a:ext>
             </a:extLst>
           </p:cNvPr>
@@ -8571,7 +8772,7 @@
           <p:cNvPr id="53" name="">
             <a:extLst xmlns:a="http://schemas.openxmlformats.org/drawingml/2006/main">
               <a:ext uri="{FF2B5EF4-FFF2-40B4-BE49-F238E27FC236}">
-                <a16:creationId xmlns:a16="http://schemas.microsoft.com/office/drawing/2014/main" id="{5F5E4FA3-838D-48AD-917A-F925876FFCB8}"/>
+                <a16:creationId xmlns:a16="http://schemas.microsoft.com/office/drawing/2014/main" id="{976BB332-1A25-416A-B348-BE00D560C9D8}"/>
               </a:ext>
             </a:extLst>
           </p:cNvPr>
@@ -8604,7 +8805,7 @@
           <p:cNvPr id="54" name="">
             <a:extLst xmlns:a="http://schemas.openxmlformats.org/drawingml/2006/main">
               <a:ext uri="{FF2B5EF4-FFF2-40B4-BE49-F238E27FC236}">
-                <a16:creationId xmlns:a16="http://schemas.microsoft.com/office/drawing/2014/main" id="{7220FFFC-35E2-4474-9091-94091C0CBC37}"/>
+                <a16:creationId xmlns:a16="http://schemas.microsoft.com/office/drawing/2014/main" id="{7BC839C1-2494-433D-99AC-51E16E121F7C}"/>
               </a:ext>
             </a:extLst>
           </p:cNvPr>
@@ -8654,7 +8855,7 @@
           <p:cNvPr id="55" name="">
             <a:extLst xmlns:a="http://schemas.openxmlformats.org/drawingml/2006/main">
               <a:ext uri="{FF2B5EF4-FFF2-40B4-BE49-F238E27FC236}">
-                <a16:creationId xmlns:a16="http://schemas.microsoft.com/office/drawing/2014/main" id="{C06DAC22-6C33-49FD-A5F7-EF236E09873B}"/>
+                <a16:creationId xmlns:a16="http://schemas.microsoft.com/office/drawing/2014/main" id="{9FE177AF-4A73-4049-BA5A-73089D8BED93}"/>
               </a:ext>
             </a:extLst>
           </p:cNvPr>
@@ -8687,7 +8888,7 @@
           <p:cNvPr id="56" name="">
             <a:extLst xmlns:a="http://schemas.openxmlformats.org/drawingml/2006/main">
               <a:ext uri="{FF2B5EF4-FFF2-40B4-BE49-F238E27FC236}">
-                <a16:creationId xmlns:a16="http://schemas.microsoft.com/office/drawing/2014/main" id="{DFA7CD9E-8EEF-4CDF-B109-521BA6018833}"/>
+                <a16:creationId xmlns:a16="http://schemas.microsoft.com/office/drawing/2014/main" id="{45880E0A-690C-41BA-9B41-61768BFA3027}"/>
               </a:ext>
             </a:extLst>
           </p:cNvPr>
@@ -8737,7 +8938,7 @@
           <p:cNvPr id="57" name="">
             <a:extLst xmlns:a="http://schemas.openxmlformats.org/drawingml/2006/main">
               <a:ext uri="{FF2B5EF4-FFF2-40B4-BE49-F238E27FC236}">
-                <a16:creationId xmlns:a16="http://schemas.microsoft.com/office/drawing/2014/main" id="{6D43EA3E-9604-4C07-84C0-87A54D037F06}"/>
+                <a16:creationId xmlns:a16="http://schemas.microsoft.com/office/drawing/2014/main" id="{8433A101-0372-4874-A0B3-7A80195B361F}"/>
               </a:ext>
             </a:extLst>
           </p:cNvPr>
@@ -8770,7 +8971,7 @@
           <p:cNvPr id="58" name="">
             <a:extLst xmlns:a="http://schemas.openxmlformats.org/drawingml/2006/main">
               <a:ext uri="{FF2B5EF4-FFF2-40B4-BE49-F238E27FC236}">
-                <a16:creationId xmlns:a16="http://schemas.microsoft.com/office/drawing/2014/main" id="{4E2EC930-6675-4861-B395-81AAB7300734}"/>
+                <a16:creationId xmlns:a16="http://schemas.microsoft.com/office/drawing/2014/main" id="{607B55DC-7646-4953-8967-513FF6E397E9}"/>
               </a:ext>
             </a:extLst>
           </p:cNvPr>
@@ -8820,7 +9021,7 @@
           <p:cNvPr id="59" name="">
             <a:extLst xmlns:a="http://schemas.openxmlformats.org/drawingml/2006/main">
               <a:ext uri="{FF2B5EF4-FFF2-40B4-BE49-F238E27FC236}">
-                <a16:creationId xmlns:a16="http://schemas.microsoft.com/office/drawing/2014/main" id="{15CFCA91-79DD-4ABB-B809-E4EE069B30CE}"/>
+                <a16:creationId xmlns:a16="http://schemas.microsoft.com/office/drawing/2014/main" id="{01891743-C015-4DB0-A07C-BD901D9BBB98}"/>
               </a:ext>
             </a:extLst>
           </p:cNvPr>
@@ -8853,7 +9054,7 @@
           <p:cNvPr id="60" name="">
             <a:extLst xmlns:a="http://schemas.openxmlformats.org/drawingml/2006/main">
               <a:ext uri="{FF2B5EF4-FFF2-40B4-BE49-F238E27FC236}">
-                <a16:creationId xmlns:a16="http://schemas.microsoft.com/office/drawing/2014/main" id="{32D1D3D2-7D0F-4F88-BF84-05E45269DD68}"/>
+                <a16:creationId xmlns:a16="http://schemas.microsoft.com/office/drawing/2014/main" id="{3BFB9993-37A2-4179-B17C-DF51402143DD}"/>
               </a:ext>
             </a:extLst>
           </p:cNvPr>
@@ -8903,7 +9104,7 @@
           <p:cNvPr id="61" name="">
             <a:extLst xmlns:a="http://schemas.openxmlformats.org/drawingml/2006/main">
               <a:ext uri="{FF2B5EF4-FFF2-40B4-BE49-F238E27FC236}">
-                <a16:creationId xmlns:a16="http://schemas.microsoft.com/office/drawing/2014/main" id="{85425047-7323-4E6B-B601-EF28FA3ACF8B}"/>
+                <a16:creationId xmlns:a16="http://schemas.microsoft.com/office/drawing/2014/main" id="{D30DC902-E365-4B4D-B6AE-EA9712EDD01D}"/>
               </a:ext>
             </a:extLst>
           </p:cNvPr>
@@ -8953,7 +9154,7 @@
           <p:cNvPr id="62" name="">
             <a:extLst xmlns:a="http://schemas.openxmlformats.org/drawingml/2006/main">
               <a:ext uri="{FF2B5EF4-FFF2-40B4-BE49-F238E27FC236}">
-                <a16:creationId xmlns:a16="http://schemas.microsoft.com/office/drawing/2014/main" id="{228EE0E5-A883-4B37-9AAE-E4250A406BC9}"/>
+                <a16:creationId xmlns:a16="http://schemas.microsoft.com/office/drawing/2014/main" id="{D338139E-5799-47E1-8BE8-508CDDA9E0CD}"/>
               </a:ext>
             </a:extLst>
           </p:cNvPr>
@@ -9001,7 +9202,7 @@
     </p:spTree>
     <p:extLst>
       <p:ext uri="{BB962C8B-B14F-4D97-AF65-F5344CB8AC3E}">
-        <p14:creationId xmlns:p14="http://schemas.microsoft.com/office/powerpoint/2010/main" val="367290520"/>
+        <p14:creationId xmlns:p14="http://schemas.microsoft.com/office/powerpoint/2010/main" val="1139606267"/>
       </p:ext>
     </p:extLst>
   </p:cSld>
@@ -9032,7 +9233,7 @@
           <p:cNvPr id="1" name="">
             <a:extLst xmlns:a="http://schemas.openxmlformats.org/drawingml/2006/main">
               <a:ext uri="{FF2B5EF4-FFF2-40B4-BE49-F238E27FC236}">
-                <a16:creationId xmlns:a16="http://schemas.microsoft.com/office/drawing/2014/main" id="{84CA2551-FBC8-4C56-851C-46266FD03F0A}"/>
+                <a16:creationId xmlns:a16="http://schemas.microsoft.com/office/drawing/2014/main" id="{86DC903D-AF55-426E-B4DB-07B0AB3DF571}"/>
               </a:ext>
             </a:extLst>
           </p:cNvPr>
@@ -9082,7 +9283,7 @@
           <p:cNvPr id="2" name="">
             <a:extLst xmlns:a="http://schemas.openxmlformats.org/drawingml/2006/main">
               <a:ext uri="{FF2B5EF4-FFF2-40B4-BE49-F238E27FC236}">
-                <a16:creationId xmlns:a16="http://schemas.microsoft.com/office/drawing/2014/main" id="{C20C7614-CDCA-4F92-AC14-FC0BE1D36F2D}"/>
+                <a16:creationId xmlns:a16="http://schemas.microsoft.com/office/drawing/2014/main" id="{9F442BDC-EBB8-4B14-90B8-510338C35412}"/>
               </a:ext>
             </a:extLst>
           </p:cNvPr>
@@ -9132,7 +9333,7 @@
           <p:cNvPr id="3" name="">
             <a:extLst xmlns:a="http://schemas.openxmlformats.org/drawingml/2006/main">
               <a:ext uri="{FF2B5EF4-FFF2-40B4-BE49-F238E27FC236}">
-                <a16:creationId xmlns:a16="http://schemas.microsoft.com/office/drawing/2014/main" id="{C4D00D92-0741-4983-9064-25457D01C284}"/>
+                <a16:creationId xmlns:a16="http://schemas.microsoft.com/office/drawing/2014/main" id="{0BD35D69-1694-4126-8C79-1A890C6C8ECB}"/>
               </a:ext>
             </a:extLst>
           </p:cNvPr>
@@ -9169,7 +9370,7 @@
           <p:nvPr/>
         </p:nvPicPr>
         <p:blipFill>
-          <a:blip xmlns:r="http://schemas.openxmlformats.org/officeDocument/2006/relationships" xmlns:a="http://schemas.openxmlformats.org/drawingml/2006/main" r:embed="Rc102204624534844"/>
+          <a:blip xmlns:r="http://schemas.openxmlformats.org/officeDocument/2006/relationships" xmlns:a="http://schemas.openxmlformats.org/drawingml/2006/main" r:embed="Rfde9b9bc7951430f"/>
           <a:stretch xmlns:a="http://schemas.openxmlformats.org/drawingml/2006/main"/>
         </p:blipFill>
         <p:spPr>
@@ -9187,7 +9388,7 @@
           <p:cNvPr id="5" name="">
             <a:extLst xmlns:a="http://schemas.openxmlformats.org/drawingml/2006/main">
               <a:ext uri="{FF2B5EF4-FFF2-40B4-BE49-F238E27FC236}">
-                <a16:creationId xmlns:a16="http://schemas.microsoft.com/office/drawing/2014/main" id="{A1634AE9-9812-4020-B805-615921B648BB}"/>
+                <a16:creationId xmlns:a16="http://schemas.microsoft.com/office/drawing/2014/main" id="{B9A92EFF-7A98-44CC-8BFF-54DB12BA1C43}"/>
               </a:ext>
             </a:extLst>
           </p:cNvPr>
@@ -9220,7 +9421,7 @@
           <p:cNvPr id="6" name="">
             <a:extLst xmlns:a="http://schemas.openxmlformats.org/drawingml/2006/main">
               <a:ext uri="{FF2B5EF4-FFF2-40B4-BE49-F238E27FC236}">
-                <a16:creationId xmlns:a16="http://schemas.microsoft.com/office/drawing/2014/main" id="{480E7905-EFFA-468D-A3C5-81A0C9974AC7}"/>
+                <a16:creationId xmlns:a16="http://schemas.microsoft.com/office/drawing/2014/main" id="{20DC7107-0075-4E35-9D45-A4FDB34268B9}"/>
               </a:ext>
             </a:extLst>
           </p:cNvPr>
@@ -9270,7 +9471,7 @@
           <p:cNvPr id="7" name="">
             <a:extLst xmlns:a="http://schemas.openxmlformats.org/drawingml/2006/main">
               <a:ext uri="{FF2B5EF4-FFF2-40B4-BE49-F238E27FC236}">
-                <a16:creationId xmlns:a16="http://schemas.microsoft.com/office/drawing/2014/main" id="{0F863E2A-E863-451F-A1EE-FB2410BE41BE}"/>
+                <a16:creationId xmlns:a16="http://schemas.microsoft.com/office/drawing/2014/main" id="{C71D158A-F03E-4E53-8EC4-4B273169138A}"/>
               </a:ext>
             </a:extLst>
           </p:cNvPr>
@@ -9303,7 +9504,7 @@
           <p:cNvPr id="8" name="">
             <a:extLst xmlns:a="http://schemas.openxmlformats.org/drawingml/2006/main">
               <a:ext uri="{FF2B5EF4-FFF2-40B4-BE49-F238E27FC236}">
-                <a16:creationId xmlns:a16="http://schemas.microsoft.com/office/drawing/2014/main" id="{6E5C0D2D-ADB2-4A14-B91F-F969672DF404}"/>
+                <a16:creationId xmlns:a16="http://schemas.microsoft.com/office/drawing/2014/main" id="{883C4702-2456-4C09-A14D-A28CC2C113C4}"/>
               </a:ext>
             </a:extLst>
           </p:cNvPr>
@@ -9353,7 +9554,7 @@
           <p:cNvPr id="9" name="">
             <a:extLst xmlns:a="http://schemas.openxmlformats.org/drawingml/2006/main">
               <a:ext uri="{FF2B5EF4-FFF2-40B4-BE49-F238E27FC236}">
-                <a16:creationId xmlns:a16="http://schemas.microsoft.com/office/drawing/2014/main" id="{98F1E9EB-A5D9-4AE5-B909-45AF3543B00A}"/>
+                <a16:creationId xmlns:a16="http://schemas.microsoft.com/office/drawing/2014/main" id="{8614FD8A-B830-4754-A25D-3BB66DD04ACC}"/>
               </a:ext>
             </a:extLst>
           </p:cNvPr>
@@ -9386,7 +9587,7 @@
           <p:cNvPr id="10" name="">
             <a:extLst xmlns:a="http://schemas.openxmlformats.org/drawingml/2006/main">
               <a:ext uri="{FF2B5EF4-FFF2-40B4-BE49-F238E27FC236}">
-                <a16:creationId xmlns:a16="http://schemas.microsoft.com/office/drawing/2014/main" id="{65BB4245-35BC-4794-9DBE-C0ACADCE22A8}"/>
+                <a16:creationId xmlns:a16="http://schemas.microsoft.com/office/drawing/2014/main" id="{A552B0D9-1BBE-4A2F-A9B5-082E80CC17B3}"/>
               </a:ext>
             </a:extLst>
           </p:cNvPr>
@@ -9436,7 +9637,7 @@
           <p:cNvPr id="11" name="">
             <a:extLst xmlns:a="http://schemas.openxmlformats.org/drawingml/2006/main">
               <a:ext uri="{FF2B5EF4-FFF2-40B4-BE49-F238E27FC236}">
-                <a16:creationId xmlns:a16="http://schemas.microsoft.com/office/drawing/2014/main" id="{24826357-1E4A-4AAB-9380-6AD5E27D0C17}"/>
+                <a16:creationId xmlns:a16="http://schemas.microsoft.com/office/drawing/2014/main" id="{D7574E06-1FC5-45D9-9D11-FA9A4D1CEE8F}"/>
               </a:ext>
             </a:extLst>
           </p:cNvPr>
@@ -9469,7 +9670,7 @@
           <p:cNvPr id="12" name="">
             <a:extLst xmlns:a="http://schemas.openxmlformats.org/drawingml/2006/main">
               <a:ext uri="{FF2B5EF4-FFF2-40B4-BE49-F238E27FC236}">
-                <a16:creationId xmlns:a16="http://schemas.microsoft.com/office/drawing/2014/main" id="{44354B33-63E0-486E-80DB-61D38D9947BB}"/>
+                <a16:creationId xmlns:a16="http://schemas.microsoft.com/office/drawing/2014/main" id="{FCE2ADBA-DC9B-4F40-9E29-E8715F1B098D}"/>
               </a:ext>
             </a:extLst>
           </p:cNvPr>
@@ -9519,7 +9720,7 @@
           <p:cNvPr id="13" name="">
             <a:extLst xmlns:a="http://schemas.openxmlformats.org/drawingml/2006/main">
               <a:ext uri="{FF2B5EF4-FFF2-40B4-BE49-F238E27FC236}">
-                <a16:creationId xmlns:a16="http://schemas.microsoft.com/office/drawing/2014/main" id="{0597E885-173B-4EA8-ADC5-B09C4FF8DB4B}"/>
+                <a16:creationId xmlns:a16="http://schemas.microsoft.com/office/drawing/2014/main" id="{79628A5A-845B-4517-B87E-5C5453FF5200}"/>
               </a:ext>
             </a:extLst>
           </p:cNvPr>
@@ -9567,7 +9768,7 @@
     </p:spTree>
     <p:extLst>
       <p:ext uri="{BB962C8B-B14F-4D97-AF65-F5344CB8AC3E}">
-        <p14:creationId xmlns:p14="http://schemas.microsoft.com/office/powerpoint/2010/main" val="1874721067"/>
+        <p14:creationId xmlns:p14="http://schemas.microsoft.com/office/powerpoint/2010/main" val="1295305307"/>
       </p:ext>
     </p:extLst>
   </p:cSld>
@@ -9598,7 +9799,7 @@
           <p:cNvPr id="1" name="">
             <a:extLst xmlns:a="http://schemas.openxmlformats.org/drawingml/2006/main">
               <a:ext uri="{FF2B5EF4-FFF2-40B4-BE49-F238E27FC236}">
-                <a16:creationId xmlns:a16="http://schemas.microsoft.com/office/drawing/2014/main" id="{ABA60D17-6452-4BD6-8919-872644CDAC00}"/>
+                <a16:creationId xmlns:a16="http://schemas.microsoft.com/office/drawing/2014/main" id="{0FDA0E35-114D-48BD-8C40-F8BC45793C91}"/>
               </a:ext>
             </a:extLst>
           </p:cNvPr>
@@ -9648,7 +9849,7 @@
           <p:cNvPr id="2" name="">
             <a:extLst xmlns:a="http://schemas.openxmlformats.org/drawingml/2006/main">
               <a:ext uri="{FF2B5EF4-FFF2-40B4-BE49-F238E27FC236}">
-                <a16:creationId xmlns:a16="http://schemas.microsoft.com/office/drawing/2014/main" id="{D377F11A-8BEB-4C02-B62B-B5958C422EED}"/>
+                <a16:creationId xmlns:a16="http://schemas.microsoft.com/office/drawing/2014/main" id="{C86FCC46-BBD1-46D5-83C0-371730506190}"/>
               </a:ext>
             </a:extLst>
           </p:cNvPr>
@@ -9698,7 +9899,7 @@
           <p:cNvPr id="3" name="">
             <a:extLst xmlns:a="http://schemas.openxmlformats.org/drawingml/2006/main">
               <a:ext uri="{FF2B5EF4-FFF2-40B4-BE49-F238E27FC236}">
-                <a16:creationId xmlns:a16="http://schemas.microsoft.com/office/drawing/2014/main" id="{3D6E40FA-A189-46FA-938D-E8714A118826}"/>
+                <a16:creationId xmlns:a16="http://schemas.microsoft.com/office/drawing/2014/main" id="{04A30F00-9659-4AC6-BB89-F9806C47EFFD}"/>
               </a:ext>
             </a:extLst>
           </p:cNvPr>
@@ -9731,7 +9932,7 @@
           <p:cNvPr id="4" name="">
             <a:extLst xmlns:a="http://schemas.openxmlformats.org/drawingml/2006/main">
               <a:ext uri="{FF2B5EF4-FFF2-40B4-BE49-F238E27FC236}">
-                <a16:creationId xmlns:a16="http://schemas.microsoft.com/office/drawing/2014/main" id="{332C9E28-8012-4175-9FAE-321B2649EA64}"/>
+                <a16:creationId xmlns:a16="http://schemas.microsoft.com/office/drawing/2014/main" id="{EDC2FCDE-76CB-4461-9D52-591874D1149B}"/>
               </a:ext>
             </a:extLst>
           </p:cNvPr>
@@ -9764,7 +9965,7 @@
           <p:cNvPr id="5" name="">
             <a:extLst xmlns:a="http://schemas.openxmlformats.org/drawingml/2006/main">
               <a:ext uri="{FF2B5EF4-FFF2-40B4-BE49-F238E27FC236}">
-                <a16:creationId xmlns:a16="http://schemas.microsoft.com/office/drawing/2014/main" id="{F7BBEF6F-9AE0-48FB-B557-971867A191C9}"/>
+                <a16:creationId xmlns:a16="http://schemas.microsoft.com/office/drawing/2014/main" id="{8BDEE33C-D1D8-43F5-8DA8-9764D5E2C611}"/>
               </a:ext>
             </a:extLst>
           </p:cNvPr>
@@ -9814,7 +10015,7 @@
           <p:cNvPr id="6" name="">
             <a:extLst xmlns:a="http://schemas.openxmlformats.org/drawingml/2006/main">
               <a:ext uri="{FF2B5EF4-FFF2-40B4-BE49-F238E27FC236}">
-                <a16:creationId xmlns:a16="http://schemas.microsoft.com/office/drawing/2014/main" id="{AAC0D79D-F499-4EE9-9B01-60A8F0D8DF39}"/>
+                <a16:creationId xmlns:a16="http://schemas.microsoft.com/office/drawing/2014/main" id="{F355E281-31EE-48D2-BD5B-A6CCD6F8F750}"/>
               </a:ext>
             </a:extLst>
           </p:cNvPr>
@@ -9847,7 +10048,7 @@
           <p:cNvPr id="7" name="">
             <a:extLst xmlns:a="http://schemas.openxmlformats.org/drawingml/2006/main">
               <a:ext uri="{FF2B5EF4-FFF2-40B4-BE49-F238E27FC236}">
-                <a16:creationId xmlns:a16="http://schemas.microsoft.com/office/drawing/2014/main" id="{E75CF07F-F2EF-4A48-A1E3-B8792AB961F8}"/>
+                <a16:creationId xmlns:a16="http://schemas.microsoft.com/office/drawing/2014/main" id="{85B0B37A-DDEA-4C82-A936-1D9846F6EC75}"/>
               </a:ext>
             </a:extLst>
           </p:cNvPr>
@@ -9897,7 +10098,7 @@
           <p:cNvPr id="8" name="">
             <a:extLst xmlns:a="http://schemas.openxmlformats.org/drawingml/2006/main">
               <a:ext uri="{FF2B5EF4-FFF2-40B4-BE49-F238E27FC236}">
-                <a16:creationId xmlns:a16="http://schemas.microsoft.com/office/drawing/2014/main" id="{45E4DCF5-1DC3-48A3-939D-FF01E314D7A2}"/>
+                <a16:creationId xmlns:a16="http://schemas.microsoft.com/office/drawing/2014/main" id="{CDA1563E-D6B7-4CBF-B5E6-AFE59A64485D}"/>
               </a:ext>
             </a:extLst>
           </p:cNvPr>
@@ -9930,7 +10131,7 @@
           <p:cNvPr id="9" name="">
             <a:extLst xmlns:a="http://schemas.openxmlformats.org/drawingml/2006/main">
               <a:ext uri="{FF2B5EF4-FFF2-40B4-BE49-F238E27FC236}">
-                <a16:creationId xmlns:a16="http://schemas.microsoft.com/office/drawing/2014/main" id="{01C4E108-5229-4255-8BF0-38E57057ABD5}"/>
+                <a16:creationId xmlns:a16="http://schemas.microsoft.com/office/drawing/2014/main" id="{018094B2-9EF4-4709-81D8-EDEFFEDF1DCD}"/>
               </a:ext>
             </a:extLst>
           </p:cNvPr>
@@ -9980,7 +10181,7 @@
           <p:cNvPr id="10" name="">
             <a:extLst xmlns:a="http://schemas.openxmlformats.org/drawingml/2006/main">
               <a:ext uri="{FF2B5EF4-FFF2-40B4-BE49-F238E27FC236}">
-                <a16:creationId xmlns:a16="http://schemas.microsoft.com/office/drawing/2014/main" id="{60EDDB75-D148-4876-B94B-886E2B3EC152}"/>
+                <a16:creationId xmlns:a16="http://schemas.microsoft.com/office/drawing/2014/main" id="{ACCB025A-83F7-4BBD-B85A-EB8E823C8A28}"/>
               </a:ext>
             </a:extLst>
           </p:cNvPr>
@@ -10013,7 +10214,7 @@
           <p:cNvPr id="11" name="">
             <a:extLst xmlns:a="http://schemas.openxmlformats.org/drawingml/2006/main">
               <a:ext uri="{FF2B5EF4-FFF2-40B4-BE49-F238E27FC236}">
-                <a16:creationId xmlns:a16="http://schemas.microsoft.com/office/drawing/2014/main" id="{85267815-3198-4CCE-8A31-CBDF862C7917}"/>
+                <a16:creationId xmlns:a16="http://schemas.microsoft.com/office/drawing/2014/main" id="{CD817A20-818F-4F32-9E18-81238BDF5853}"/>
               </a:ext>
             </a:extLst>
           </p:cNvPr>
@@ -10063,7 +10264,7 @@
           <p:cNvPr id="12" name="">
             <a:extLst xmlns:a="http://schemas.openxmlformats.org/drawingml/2006/main">
               <a:ext uri="{FF2B5EF4-FFF2-40B4-BE49-F238E27FC236}">
-                <a16:creationId xmlns:a16="http://schemas.microsoft.com/office/drawing/2014/main" id="{FAE4E7FB-B2A6-4C4E-89EE-31816723714C}"/>
+                <a16:creationId xmlns:a16="http://schemas.microsoft.com/office/drawing/2014/main" id="{F42BAAA8-9FDC-41F5-B683-1A0271CDFDB9}"/>
               </a:ext>
             </a:extLst>
           </p:cNvPr>
@@ -10096,7 +10297,7 @@
           <p:cNvPr id="13" name="">
             <a:extLst xmlns:a="http://schemas.openxmlformats.org/drawingml/2006/main">
               <a:ext uri="{FF2B5EF4-FFF2-40B4-BE49-F238E27FC236}">
-                <a16:creationId xmlns:a16="http://schemas.microsoft.com/office/drawing/2014/main" id="{3385464F-0187-471B-A154-0775F393C39A}"/>
+                <a16:creationId xmlns:a16="http://schemas.microsoft.com/office/drawing/2014/main" id="{95ED70FD-93BB-44B8-BB5D-65C8AAEE37B9}"/>
               </a:ext>
             </a:extLst>
           </p:cNvPr>
@@ -10146,7 +10347,7 @@
           <p:cNvPr id="14" name="">
             <a:extLst xmlns:a="http://schemas.openxmlformats.org/drawingml/2006/main">
               <a:ext uri="{FF2B5EF4-FFF2-40B4-BE49-F238E27FC236}">
-                <a16:creationId xmlns:a16="http://schemas.microsoft.com/office/drawing/2014/main" id="{D4EBBB92-FC9F-48FB-B4D4-34158A747DC2}"/>
+                <a16:creationId xmlns:a16="http://schemas.microsoft.com/office/drawing/2014/main" id="{E85A2282-405C-4956-8608-AA1552CB2724}"/>
               </a:ext>
             </a:extLst>
           </p:cNvPr>
@@ -10179,7 +10380,7 @@
           <p:cNvPr id="15" name="">
             <a:extLst xmlns:a="http://schemas.openxmlformats.org/drawingml/2006/main">
               <a:ext uri="{FF2B5EF4-FFF2-40B4-BE49-F238E27FC236}">
-                <a16:creationId xmlns:a16="http://schemas.microsoft.com/office/drawing/2014/main" id="{8D342E93-7075-4D89-99B1-C0D23FD1A20A}"/>
+                <a16:creationId xmlns:a16="http://schemas.microsoft.com/office/drawing/2014/main" id="{4B070661-6866-4A3C-8704-1055B36FC758}"/>
               </a:ext>
             </a:extLst>
           </p:cNvPr>
@@ -10229,7 +10430,7 @@
           <p:cNvPr id="16" name="">
             <a:extLst xmlns:a="http://schemas.openxmlformats.org/drawingml/2006/main">
               <a:ext uri="{FF2B5EF4-FFF2-40B4-BE49-F238E27FC236}">
-                <a16:creationId xmlns:a16="http://schemas.microsoft.com/office/drawing/2014/main" id="{F99DBE2B-E674-4D64-813F-D9235895B8AA}"/>
+                <a16:creationId xmlns:a16="http://schemas.microsoft.com/office/drawing/2014/main" id="{1511ED70-F431-4244-A095-1E0F0F307C86}"/>
               </a:ext>
             </a:extLst>
           </p:cNvPr>
@@ -10262,7 +10463,7 @@
           <p:cNvPr id="17" name="">
             <a:extLst xmlns:a="http://schemas.openxmlformats.org/drawingml/2006/main">
               <a:ext uri="{FF2B5EF4-FFF2-40B4-BE49-F238E27FC236}">
-                <a16:creationId xmlns:a16="http://schemas.microsoft.com/office/drawing/2014/main" id="{FC519090-CDAB-492E-8ADD-770496C12B90}"/>
+                <a16:creationId xmlns:a16="http://schemas.microsoft.com/office/drawing/2014/main" id="{BA405A94-7A3C-4ECB-B4BA-7F4BE328F0FB}"/>
               </a:ext>
             </a:extLst>
           </p:cNvPr>
@@ -10312,7 +10513,7 @@
           <p:cNvPr id="18" name="">
             <a:extLst xmlns:a="http://schemas.openxmlformats.org/drawingml/2006/main">
               <a:ext uri="{FF2B5EF4-FFF2-40B4-BE49-F238E27FC236}">
-                <a16:creationId xmlns:a16="http://schemas.microsoft.com/office/drawing/2014/main" id="{40293116-DDBA-4AD4-AC50-E9A3C381C043}"/>
+                <a16:creationId xmlns:a16="http://schemas.microsoft.com/office/drawing/2014/main" id="{FF1CA934-DF75-497D-BF3D-1B464CD1E814}"/>
               </a:ext>
             </a:extLst>
           </p:cNvPr>
@@ -10345,7 +10546,7 @@
           <p:cNvPr id="19" name="">
             <a:extLst xmlns:a="http://schemas.openxmlformats.org/drawingml/2006/main">
               <a:ext uri="{FF2B5EF4-FFF2-40B4-BE49-F238E27FC236}">
-                <a16:creationId xmlns:a16="http://schemas.microsoft.com/office/drawing/2014/main" id="{2D6BFF55-A12D-4D59-BFA1-205E1E23CB92}"/>
+                <a16:creationId xmlns:a16="http://schemas.microsoft.com/office/drawing/2014/main" id="{D2BC12A5-2E6E-474B-8F09-97FFB4361A01}"/>
               </a:ext>
             </a:extLst>
           </p:cNvPr>
@@ -10395,7 +10596,7 @@
           <p:cNvPr id="20" name="">
             <a:extLst xmlns:a="http://schemas.openxmlformats.org/drawingml/2006/main">
               <a:ext uri="{FF2B5EF4-FFF2-40B4-BE49-F238E27FC236}">
-                <a16:creationId xmlns:a16="http://schemas.microsoft.com/office/drawing/2014/main" id="{4947090C-B63F-47A4-98DF-B4986BA4D2B4}"/>
+                <a16:creationId xmlns:a16="http://schemas.microsoft.com/office/drawing/2014/main" id="{86C6A0BB-1D33-4C64-8453-EB321BA8458E}"/>
               </a:ext>
             </a:extLst>
           </p:cNvPr>
@@ -10428,7 +10629,7 @@
           <p:cNvPr id="21" name="">
             <a:extLst xmlns:a="http://schemas.openxmlformats.org/drawingml/2006/main">
               <a:ext uri="{FF2B5EF4-FFF2-40B4-BE49-F238E27FC236}">
-                <a16:creationId xmlns:a16="http://schemas.microsoft.com/office/drawing/2014/main" id="{C98DB6AF-6240-4F50-97E2-31B505C4D458}"/>
+                <a16:creationId xmlns:a16="http://schemas.microsoft.com/office/drawing/2014/main" id="{62CD55FA-A535-4DD4-A9DD-F090C2B571F6}"/>
               </a:ext>
             </a:extLst>
           </p:cNvPr>
@@ -10478,7 +10679,7 @@
           <p:cNvPr id="22" name="">
             <a:extLst xmlns:a="http://schemas.openxmlformats.org/drawingml/2006/main">
               <a:ext uri="{FF2B5EF4-FFF2-40B4-BE49-F238E27FC236}">
-                <a16:creationId xmlns:a16="http://schemas.microsoft.com/office/drawing/2014/main" id="{EDE8547B-9438-4659-BEEA-22A01939B56C}"/>
+                <a16:creationId xmlns:a16="http://schemas.microsoft.com/office/drawing/2014/main" id="{6F91055F-A62D-40E7-875E-5494B37F891D}"/>
               </a:ext>
             </a:extLst>
           </p:cNvPr>
@@ -10511,7 +10712,7 @@
           <p:cNvPr id="23" name="">
             <a:extLst xmlns:a="http://schemas.openxmlformats.org/drawingml/2006/main">
               <a:ext uri="{FF2B5EF4-FFF2-40B4-BE49-F238E27FC236}">
-                <a16:creationId xmlns:a16="http://schemas.microsoft.com/office/drawing/2014/main" id="{B708BA7F-CFE4-4FC9-9932-1429F80F52B5}"/>
+                <a16:creationId xmlns:a16="http://schemas.microsoft.com/office/drawing/2014/main" id="{37B93208-B56F-496D-8E2E-440D37C15E14}"/>
               </a:ext>
             </a:extLst>
           </p:cNvPr>
@@ -10561,7 +10762,7 @@
           <p:cNvPr id="24" name="">
             <a:extLst xmlns:a="http://schemas.openxmlformats.org/drawingml/2006/main">
               <a:ext uri="{FF2B5EF4-FFF2-40B4-BE49-F238E27FC236}">
-                <a16:creationId xmlns:a16="http://schemas.microsoft.com/office/drawing/2014/main" id="{32B0654B-F9DA-4145-BD0D-A6F21F92AEC2}"/>
+                <a16:creationId xmlns:a16="http://schemas.microsoft.com/office/drawing/2014/main" id="{0FFE4730-F724-4462-8323-39A32058518C}"/>
               </a:ext>
             </a:extLst>
           </p:cNvPr>
@@ -10594,7 +10795,7 @@
           <p:cNvPr id="25" name="">
             <a:extLst xmlns:a="http://schemas.openxmlformats.org/drawingml/2006/main">
               <a:ext uri="{FF2B5EF4-FFF2-40B4-BE49-F238E27FC236}">
-                <a16:creationId xmlns:a16="http://schemas.microsoft.com/office/drawing/2014/main" id="{718A490C-9F04-490D-AAB2-6AC9946A61D9}"/>
+                <a16:creationId xmlns:a16="http://schemas.microsoft.com/office/drawing/2014/main" id="{8CEF8F73-7FDD-465A-9106-12BFC6C0F7E8}"/>
               </a:ext>
             </a:extLst>
           </p:cNvPr>
@@ -10644,7 +10845,7 @@
           <p:cNvPr id="26" name="">
             <a:extLst xmlns:a="http://schemas.openxmlformats.org/drawingml/2006/main">
               <a:ext uri="{FF2B5EF4-FFF2-40B4-BE49-F238E27FC236}">
-                <a16:creationId xmlns:a16="http://schemas.microsoft.com/office/drawing/2014/main" id="{A56436C9-0D3A-4075-AB6D-73594A6159D7}"/>
+                <a16:creationId xmlns:a16="http://schemas.microsoft.com/office/drawing/2014/main" id="{7AD12632-D84D-4109-AACE-E4CADF68043F}"/>
               </a:ext>
             </a:extLst>
           </p:cNvPr>
@@ -10677,7 +10878,7 @@
           <p:cNvPr id="27" name="">
             <a:extLst xmlns:a="http://schemas.openxmlformats.org/drawingml/2006/main">
               <a:ext uri="{FF2B5EF4-FFF2-40B4-BE49-F238E27FC236}">
-                <a16:creationId xmlns:a16="http://schemas.microsoft.com/office/drawing/2014/main" id="{3DAE214C-413C-4FD0-AF36-9B1DD4D73DFA}"/>
+                <a16:creationId xmlns:a16="http://schemas.microsoft.com/office/drawing/2014/main" id="{6B612F8B-3458-403C-9657-A2DB25B95AC7}"/>
               </a:ext>
             </a:extLst>
           </p:cNvPr>
@@ -10727,7 +10928,7 @@
           <p:cNvPr id="28" name="">
             <a:extLst xmlns:a="http://schemas.openxmlformats.org/drawingml/2006/main">
               <a:ext uri="{FF2B5EF4-FFF2-40B4-BE49-F238E27FC236}">
-                <a16:creationId xmlns:a16="http://schemas.microsoft.com/office/drawing/2014/main" id="{9CD67739-391B-4F89-9D2E-3AD3E87F7672}"/>
+                <a16:creationId xmlns:a16="http://schemas.microsoft.com/office/drawing/2014/main" id="{DEA304E4-1027-4F30-942B-828693837D16}"/>
               </a:ext>
             </a:extLst>
           </p:cNvPr>
@@ -10760,7 +10961,7 @@
           <p:cNvPr id="29" name="">
             <a:extLst xmlns:a="http://schemas.openxmlformats.org/drawingml/2006/main">
               <a:ext uri="{FF2B5EF4-FFF2-40B4-BE49-F238E27FC236}">
-                <a16:creationId xmlns:a16="http://schemas.microsoft.com/office/drawing/2014/main" id="{1D426893-6626-4472-8E35-964687842C40}"/>
+                <a16:creationId xmlns:a16="http://schemas.microsoft.com/office/drawing/2014/main" id="{3006F186-16E1-4A30-9A3F-123A00E74CB1}"/>
               </a:ext>
             </a:extLst>
           </p:cNvPr>
@@ -10810,7 +11011,7 @@
           <p:cNvPr id="30" name="">
             <a:extLst xmlns:a="http://schemas.openxmlformats.org/drawingml/2006/main">
               <a:ext uri="{FF2B5EF4-FFF2-40B4-BE49-F238E27FC236}">
-                <a16:creationId xmlns:a16="http://schemas.microsoft.com/office/drawing/2014/main" id="{9B9B7CC2-0090-400D-9FAE-757ED6309939}"/>
+                <a16:creationId xmlns:a16="http://schemas.microsoft.com/office/drawing/2014/main" id="{0AB07803-A506-4386-AE22-DE728E9F6DB1}"/>
               </a:ext>
             </a:extLst>
           </p:cNvPr>
@@ -10843,7 +11044,7 @@
           <p:cNvPr id="31" name="">
             <a:extLst xmlns:a="http://schemas.openxmlformats.org/drawingml/2006/main">
               <a:ext uri="{FF2B5EF4-FFF2-40B4-BE49-F238E27FC236}">
-                <a16:creationId xmlns:a16="http://schemas.microsoft.com/office/drawing/2014/main" id="{81EAD454-C67E-4DB9-97FC-E3BA0E424D99}"/>
+                <a16:creationId xmlns:a16="http://schemas.microsoft.com/office/drawing/2014/main" id="{D81DDA19-7189-4608-90A9-4E2D0AFF4819}"/>
               </a:ext>
             </a:extLst>
           </p:cNvPr>
@@ -10893,7 +11094,7 @@
           <p:cNvPr id="32" name="">
             <a:extLst xmlns:a="http://schemas.openxmlformats.org/drawingml/2006/main">
               <a:ext uri="{FF2B5EF4-FFF2-40B4-BE49-F238E27FC236}">
-                <a16:creationId xmlns:a16="http://schemas.microsoft.com/office/drawing/2014/main" id="{0E4474A7-0B56-4DC0-AAD3-586D4095732E}"/>
+                <a16:creationId xmlns:a16="http://schemas.microsoft.com/office/drawing/2014/main" id="{BBFBA34A-6FC2-4DAA-B1A1-F9D70E11B14E}"/>
               </a:ext>
             </a:extLst>
           </p:cNvPr>
@@ -10926,7 +11127,7 @@
           <p:cNvPr id="33" name="">
             <a:extLst xmlns:a="http://schemas.openxmlformats.org/drawingml/2006/main">
               <a:ext uri="{FF2B5EF4-FFF2-40B4-BE49-F238E27FC236}">
-                <a16:creationId xmlns:a16="http://schemas.microsoft.com/office/drawing/2014/main" id="{3CC2E35B-2D11-447A-AE96-648CFF570463}"/>
+                <a16:creationId xmlns:a16="http://schemas.microsoft.com/office/drawing/2014/main" id="{C32A6978-BB52-4E69-8962-C5F28DC7E8C0}"/>
               </a:ext>
             </a:extLst>
           </p:cNvPr>
@@ -10976,7 +11177,7 @@
           <p:cNvPr id="34" name="">
             <a:extLst xmlns:a="http://schemas.openxmlformats.org/drawingml/2006/main">
               <a:ext uri="{FF2B5EF4-FFF2-40B4-BE49-F238E27FC236}">
-                <a16:creationId xmlns:a16="http://schemas.microsoft.com/office/drawing/2014/main" id="{0ABD751F-271D-405A-AF11-4ECDBD2ADEC7}"/>
+                <a16:creationId xmlns:a16="http://schemas.microsoft.com/office/drawing/2014/main" id="{0096EFD3-3469-48FB-B5A7-5D9F431D6269}"/>
               </a:ext>
             </a:extLst>
           </p:cNvPr>
@@ -11009,7 +11210,7 @@
           <p:cNvPr id="35" name="">
             <a:extLst xmlns:a="http://schemas.openxmlformats.org/drawingml/2006/main">
               <a:ext uri="{FF2B5EF4-FFF2-40B4-BE49-F238E27FC236}">
-                <a16:creationId xmlns:a16="http://schemas.microsoft.com/office/drawing/2014/main" id="{D4C94949-E361-4DEF-B310-73C61F0C60FF}"/>
+                <a16:creationId xmlns:a16="http://schemas.microsoft.com/office/drawing/2014/main" id="{A43B1EAB-8101-478C-8DB1-205B8FF1A431}"/>
               </a:ext>
             </a:extLst>
           </p:cNvPr>
@@ -11059,7 +11260,7 @@
           <p:cNvPr id="36" name="">
             <a:extLst xmlns:a="http://schemas.openxmlformats.org/drawingml/2006/main">
               <a:ext uri="{FF2B5EF4-FFF2-40B4-BE49-F238E27FC236}">
-                <a16:creationId xmlns:a16="http://schemas.microsoft.com/office/drawing/2014/main" id="{D01BBA3B-CF20-4B05-9678-F45DF22133EF}"/>
+                <a16:creationId xmlns:a16="http://schemas.microsoft.com/office/drawing/2014/main" id="{D841C9BE-A0C3-4851-876F-7AA83E4703B6}"/>
               </a:ext>
             </a:extLst>
           </p:cNvPr>
@@ -11092,7 +11293,7 @@
           <p:cNvPr id="37" name="">
             <a:extLst xmlns:a="http://schemas.openxmlformats.org/drawingml/2006/main">
               <a:ext uri="{FF2B5EF4-FFF2-40B4-BE49-F238E27FC236}">
-                <a16:creationId xmlns:a16="http://schemas.microsoft.com/office/drawing/2014/main" id="{5BB9FBF2-B77A-4856-8FE2-710674B07791}"/>
+                <a16:creationId xmlns:a16="http://schemas.microsoft.com/office/drawing/2014/main" id="{1BE318A5-B90E-49E9-85D7-CC5D9997F673}"/>
               </a:ext>
             </a:extLst>
           </p:cNvPr>
@@ -11142,7 +11343,7 @@
           <p:cNvPr id="38" name="">
             <a:extLst xmlns:a="http://schemas.openxmlformats.org/drawingml/2006/main">
               <a:ext uri="{FF2B5EF4-FFF2-40B4-BE49-F238E27FC236}">
-                <a16:creationId xmlns:a16="http://schemas.microsoft.com/office/drawing/2014/main" id="{5EBAA375-0B4B-4A15-B9F6-D0E19BAC34FE}"/>
+                <a16:creationId xmlns:a16="http://schemas.microsoft.com/office/drawing/2014/main" id="{CE7EE74C-936C-4E22-B849-0798C9840998}"/>
               </a:ext>
             </a:extLst>
           </p:cNvPr>
@@ -11175,7 +11376,7 @@
           <p:cNvPr id="39" name="">
             <a:extLst xmlns:a="http://schemas.openxmlformats.org/drawingml/2006/main">
               <a:ext uri="{FF2B5EF4-FFF2-40B4-BE49-F238E27FC236}">
-                <a16:creationId xmlns:a16="http://schemas.microsoft.com/office/drawing/2014/main" id="{BC94AC29-17C4-4BF1-9821-BCFA36F5F5F8}"/>
+                <a16:creationId xmlns:a16="http://schemas.microsoft.com/office/drawing/2014/main" id="{E0844F18-805B-4DA7-97DB-09601C089658}"/>
               </a:ext>
             </a:extLst>
           </p:cNvPr>
@@ -11225,7 +11426,7 @@
           <p:cNvPr id="40" name="">
             <a:extLst xmlns:a="http://schemas.openxmlformats.org/drawingml/2006/main">
               <a:ext uri="{FF2B5EF4-FFF2-40B4-BE49-F238E27FC236}">
-                <a16:creationId xmlns:a16="http://schemas.microsoft.com/office/drawing/2014/main" id="{30F35F9A-F06B-4ED8-8AF0-8E163AFC17C3}"/>
+                <a16:creationId xmlns:a16="http://schemas.microsoft.com/office/drawing/2014/main" id="{A92DED86-1494-441E-8038-91D9B15ACD8A}"/>
               </a:ext>
             </a:extLst>
           </p:cNvPr>
@@ -11258,7 +11459,7 @@
           <p:cNvPr id="41" name="">
             <a:extLst xmlns:a="http://schemas.openxmlformats.org/drawingml/2006/main">
               <a:ext uri="{FF2B5EF4-FFF2-40B4-BE49-F238E27FC236}">
-                <a16:creationId xmlns:a16="http://schemas.microsoft.com/office/drawing/2014/main" id="{27693034-21AC-45EC-A6F0-EA34BEE687F0}"/>
+                <a16:creationId xmlns:a16="http://schemas.microsoft.com/office/drawing/2014/main" id="{AEC92E1B-F4F3-4F12-B1EE-7DA292FBA940}"/>
               </a:ext>
             </a:extLst>
           </p:cNvPr>
@@ -11308,7 +11509,7 @@
           <p:cNvPr id="42" name="">
             <a:extLst xmlns:a="http://schemas.openxmlformats.org/drawingml/2006/main">
               <a:ext uri="{FF2B5EF4-FFF2-40B4-BE49-F238E27FC236}">
-                <a16:creationId xmlns:a16="http://schemas.microsoft.com/office/drawing/2014/main" id="{C93548B1-B907-4435-A7D2-B0321EC9944E}"/>
+                <a16:creationId xmlns:a16="http://schemas.microsoft.com/office/drawing/2014/main" id="{E0F9BE8B-CE1D-4F3B-834E-0E790AED494C}"/>
               </a:ext>
             </a:extLst>
           </p:cNvPr>
@@ -11341,7 +11542,7 @@
           <p:cNvPr id="43" name="">
             <a:extLst xmlns:a="http://schemas.openxmlformats.org/drawingml/2006/main">
               <a:ext uri="{FF2B5EF4-FFF2-40B4-BE49-F238E27FC236}">
-                <a16:creationId xmlns:a16="http://schemas.microsoft.com/office/drawing/2014/main" id="{D9FFDF85-AC0D-40D4-832D-9E13A55B284A}"/>
+                <a16:creationId xmlns:a16="http://schemas.microsoft.com/office/drawing/2014/main" id="{E6D116DC-A01C-4511-9F74-0C323BBF5AB3}"/>
               </a:ext>
             </a:extLst>
           </p:cNvPr>
@@ -11391,7 +11592,7 @@
           <p:cNvPr id="44" name="">
             <a:extLst xmlns:a="http://schemas.openxmlformats.org/drawingml/2006/main">
               <a:ext uri="{FF2B5EF4-FFF2-40B4-BE49-F238E27FC236}">
-                <a16:creationId xmlns:a16="http://schemas.microsoft.com/office/drawing/2014/main" id="{10770A4D-A9F8-41DF-877D-A6F31471E153}"/>
+                <a16:creationId xmlns:a16="http://schemas.microsoft.com/office/drawing/2014/main" id="{C4AA4E3E-DCEC-4AB2-AF49-B7657D03BC4E}"/>
               </a:ext>
             </a:extLst>
           </p:cNvPr>
@@ -11424,7 +11625,7 @@
           <p:cNvPr id="45" name="">
             <a:extLst xmlns:a="http://schemas.openxmlformats.org/drawingml/2006/main">
               <a:ext uri="{FF2B5EF4-FFF2-40B4-BE49-F238E27FC236}">
-                <a16:creationId xmlns:a16="http://schemas.microsoft.com/office/drawing/2014/main" id="{1907AF4F-E083-4A5A-89F1-B378D598F80D}"/>
+                <a16:creationId xmlns:a16="http://schemas.microsoft.com/office/drawing/2014/main" id="{713EFAF6-46DA-472B-9430-7728292CC8A1}"/>
               </a:ext>
             </a:extLst>
           </p:cNvPr>
@@ -11474,7 +11675,7 @@
           <p:cNvPr id="46" name="">
             <a:extLst xmlns:a="http://schemas.openxmlformats.org/drawingml/2006/main">
               <a:ext uri="{FF2B5EF4-FFF2-40B4-BE49-F238E27FC236}">
-                <a16:creationId xmlns:a16="http://schemas.microsoft.com/office/drawing/2014/main" id="{9A9DAE4F-F4B3-437E-9340-0F588A096C77}"/>
+                <a16:creationId xmlns:a16="http://schemas.microsoft.com/office/drawing/2014/main" id="{B9AA951B-93E1-4271-8DCC-D600D9F2842D}"/>
               </a:ext>
             </a:extLst>
           </p:cNvPr>
@@ -11507,7 +11708,7 @@
           <p:cNvPr id="47" name="">
             <a:extLst xmlns:a="http://schemas.openxmlformats.org/drawingml/2006/main">
               <a:ext uri="{FF2B5EF4-FFF2-40B4-BE49-F238E27FC236}">
-                <a16:creationId xmlns:a16="http://schemas.microsoft.com/office/drawing/2014/main" id="{F9D20B2A-ACB4-4500-BC9C-6DEB7753F0CE}"/>
+                <a16:creationId xmlns:a16="http://schemas.microsoft.com/office/drawing/2014/main" id="{BB809575-E7CC-43AD-A5D0-91B0AE39F360}"/>
               </a:ext>
             </a:extLst>
           </p:cNvPr>
@@ -11557,7 +11758,7 @@
           <p:cNvPr id="48" name="">
             <a:extLst xmlns:a="http://schemas.openxmlformats.org/drawingml/2006/main">
               <a:ext uri="{FF2B5EF4-FFF2-40B4-BE49-F238E27FC236}">
-                <a16:creationId xmlns:a16="http://schemas.microsoft.com/office/drawing/2014/main" id="{A169AE71-1BB0-4A99-8B90-D8009AA0C365}"/>
+                <a16:creationId xmlns:a16="http://schemas.microsoft.com/office/drawing/2014/main" id="{C422F70C-DF47-402D-A4F6-03B6275B085D}"/>
               </a:ext>
             </a:extLst>
           </p:cNvPr>
@@ -11590,7 +11791,7 @@
           <p:cNvPr id="49" name="">
             <a:extLst xmlns:a="http://schemas.openxmlformats.org/drawingml/2006/main">
               <a:ext uri="{FF2B5EF4-FFF2-40B4-BE49-F238E27FC236}">
-                <a16:creationId xmlns:a16="http://schemas.microsoft.com/office/drawing/2014/main" id="{724221D8-B40A-4BC1-8BFE-4701782C0E65}"/>
+                <a16:creationId xmlns:a16="http://schemas.microsoft.com/office/drawing/2014/main" id="{A9C424C0-72E9-4A01-AB0A-D206FB30F32E}"/>
               </a:ext>
             </a:extLst>
           </p:cNvPr>
@@ -11640,7 +11841,7 @@
           <p:cNvPr id="50" name="">
             <a:extLst xmlns:a="http://schemas.openxmlformats.org/drawingml/2006/main">
               <a:ext uri="{FF2B5EF4-FFF2-40B4-BE49-F238E27FC236}">
-                <a16:creationId xmlns:a16="http://schemas.microsoft.com/office/drawing/2014/main" id="{2B875FBC-7DA8-4FE3-9D70-1BEF58758736}"/>
+                <a16:creationId xmlns:a16="http://schemas.microsoft.com/office/drawing/2014/main" id="{70801AB5-FDF5-4A01-A2FB-4D4BB705860F}"/>
               </a:ext>
             </a:extLst>
           </p:cNvPr>
@@ -11673,7 +11874,7 @@
           <p:cNvPr id="51" name="">
             <a:extLst xmlns:a="http://schemas.openxmlformats.org/drawingml/2006/main">
               <a:ext uri="{FF2B5EF4-FFF2-40B4-BE49-F238E27FC236}">
-                <a16:creationId xmlns:a16="http://schemas.microsoft.com/office/drawing/2014/main" id="{C5CC5983-5F6A-462E-AE6D-50E0E5CE4BA3}"/>
+                <a16:creationId xmlns:a16="http://schemas.microsoft.com/office/drawing/2014/main" id="{4EAC99FC-85AA-4FF3-BA2E-E789DDC9FD3B}"/>
               </a:ext>
             </a:extLst>
           </p:cNvPr>
@@ -11723,7 +11924,7 @@
           <p:cNvPr id="52" name="">
             <a:extLst xmlns:a="http://schemas.openxmlformats.org/drawingml/2006/main">
               <a:ext uri="{FF2B5EF4-FFF2-40B4-BE49-F238E27FC236}">
-                <a16:creationId xmlns:a16="http://schemas.microsoft.com/office/drawing/2014/main" id="{B474D2C0-63CE-4ADE-8696-ACF873350DC5}"/>
+                <a16:creationId xmlns:a16="http://schemas.microsoft.com/office/drawing/2014/main" id="{B80C58E2-011B-4D84-A4AE-84197D9CF550}"/>
               </a:ext>
             </a:extLst>
           </p:cNvPr>
@@ -11756,7 +11957,7 @@
           <p:cNvPr id="53" name="">
             <a:extLst xmlns:a="http://schemas.openxmlformats.org/drawingml/2006/main">
               <a:ext uri="{FF2B5EF4-FFF2-40B4-BE49-F238E27FC236}">
-                <a16:creationId xmlns:a16="http://schemas.microsoft.com/office/drawing/2014/main" id="{16CF08E4-86C9-414F-A37C-2DA16E50D039}"/>
+                <a16:creationId xmlns:a16="http://schemas.microsoft.com/office/drawing/2014/main" id="{63960839-E2CA-4C67-AEE9-34DE4C836DBC}"/>
               </a:ext>
             </a:extLst>
           </p:cNvPr>
@@ -11806,7 +12007,7 @@
           <p:cNvPr id="54" name="">
             <a:extLst xmlns:a="http://schemas.openxmlformats.org/drawingml/2006/main">
               <a:ext uri="{FF2B5EF4-FFF2-40B4-BE49-F238E27FC236}">
-                <a16:creationId xmlns:a16="http://schemas.microsoft.com/office/drawing/2014/main" id="{F00E2F43-71FD-4670-B73C-B224F30A5094}"/>
+                <a16:creationId xmlns:a16="http://schemas.microsoft.com/office/drawing/2014/main" id="{DDB6AB5E-9D51-41E3-AF7A-B5F0FEBC7AAE}"/>
               </a:ext>
             </a:extLst>
           </p:cNvPr>
@@ -11839,7 +12040,7 @@
           <p:cNvPr id="55" name="">
             <a:extLst xmlns:a="http://schemas.openxmlformats.org/drawingml/2006/main">
               <a:ext uri="{FF2B5EF4-FFF2-40B4-BE49-F238E27FC236}">
-                <a16:creationId xmlns:a16="http://schemas.microsoft.com/office/drawing/2014/main" id="{6C75D1F0-EB9F-465A-B879-CC7FC0176BDD}"/>
+                <a16:creationId xmlns:a16="http://schemas.microsoft.com/office/drawing/2014/main" id="{77EBEB77-1EFB-409C-BCB1-84B5AE7487EB}"/>
               </a:ext>
             </a:extLst>
           </p:cNvPr>
@@ -11889,7 +12090,7 @@
           <p:cNvPr id="56" name="">
             <a:extLst xmlns:a="http://schemas.openxmlformats.org/drawingml/2006/main">
               <a:ext uri="{FF2B5EF4-FFF2-40B4-BE49-F238E27FC236}">
-                <a16:creationId xmlns:a16="http://schemas.microsoft.com/office/drawing/2014/main" id="{286FEBBA-6049-43BD-9877-450A19464248}"/>
+                <a16:creationId xmlns:a16="http://schemas.microsoft.com/office/drawing/2014/main" id="{01D7562C-36AC-4312-9CF1-EEB431E2F5E3}"/>
               </a:ext>
             </a:extLst>
           </p:cNvPr>
@@ -11922,7 +12123,7 @@
           <p:cNvPr id="57" name="">
             <a:extLst xmlns:a="http://schemas.openxmlformats.org/drawingml/2006/main">
               <a:ext uri="{FF2B5EF4-FFF2-40B4-BE49-F238E27FC236}">
-                <a16:creationId xmlns:a16="http://schemas.microsoft.com/office/drawing/2014/main" id="{3368C634-BAC2-42EC-B645-A317CC7526AD}"/>
+                <a16:creationId xmlns:a16="http://schemas.microsoft.com/office/drawing/2014/main" id="{FD14F29F-E786-402F-9CD7-D39BC6EFF75D}"/>
               </a:ext>
             </a:extLst>
           </p:cNvPr>
@@ -11972,7 +12173,7 @@
           <p:cNvPr id="58" name="">
             <a:extLst xmlns:a="http://schemas.openxmlformats.org/drawingml/2006/main">
               <a:ext uri="{FF2B5EF4-FFF2-40B4-BE49-F238E27FC236}">
-                <a16:creationId xmlns:a16="http://schemas.microsoft.com/office/drawing/2014/main" id="{9ECCA7D4-271E-418E-AAE8-12EB514EB33D}"/>
+                <a16:creationId xmlns:a16="http://schemas.microsoft.com/office/drawing/2014/main" id="{C515A1C7-531C-4120-AF0E-0BB252BCD200}"/>
               </a:ext>
             </a:extLst>
           </p:cNvPr>
@@ -12005,7 +12206,7 @@
           <p:cNvPr id="59" name="">
             <a:extLst xmlns:a="http://schemas.openxmlformats.org/drawingml/2006/main">
               <a:ext uri="{FF2B5EF4-FFF2-40B4-BE49-F238E27FC236}">
-                <a16:creationId xmlns:a16="http://schemas.microsoft.com/office/drawing/2014/main" id="{2E619B3A-6050-4D82-99E3-3867E92EDA5A}"/>
+                <a16:creationId xmlns:a16="http://schemas.microsoft.com/office/drawing/2014/main" id="{DA6EDAA9-6743-4BD3-9D31-0036424FC038}"/>
               </a:ext>
             </a:extLst>
           </p:cNvPr>
@@ -12055,7 +12256,7 @@
           <p:cNvPr id="60" name="">
             <a:extLst xmlns:a="http://schemas.openxmlformats.org/drawingml/2006/main">
               <a:ext uri="{FF2B5EF4-FFF2-40B4-BE49-F238E27FC236}">
-                <a16:creationId xmlns:a16="http://schemas.microsoft.com/office/drawing/2014/main" id="{1C6EA40E-3C13-4349-ACDB-50DE6352EB95}"/>
+                <a16:creationId xmlns:a16="http://schemas.microsoft.com/office/drawing/2014/main" id="{BD4CB75D-06F7-42F9-9B3B-6576645E4390}"/>
               </a:ext>
             </a:extLst>
           </p:cNvPr>
@@ -12088,7 +12289,7 @@
           <p:cNvPr id="61" name="">
             <a:extLst xmlns:a="http://schemas.openxmlformats.org/drawingml/2006/main">
               <a:ext uri="{FF2B5EF4-FFF2-40B4-BE49-F238E27FC236}">
-                <a16:creationId xmlns:a16="http://schemas.microsoft.com/office/drawing/2014/main" id="{E8CC6A14-94C5-433C-8882-9005393B7784}"/>
+                <a16:creationId xmlns:a16="http://schemas.microsoft.com/office/drawing/2014/main" id="{FF3C0F43-1A13-45FF-8A05-AEEFEDBB5F18}"/>
               </a:ext>
             </a:extLst>
           </p:cNvPr>
@@ -12138,7 +12339,7 @@
           <p:cNvPr id="62" name="">
             <a:extLst xmlns:a="http://schemas.openxmlformats.org/drawingml/2006/main">
               <a:ext uri="{FF2B5EF4-FFF2-40B4-BE49-F238E27FC236}">
-                <a16:creationId xmlns:a16="http://schemas.microsoft.com/office/drawing/2014/main" id="{ED270FBC-1AEF-4874-90A7-9C4F459BB768}"/>
+                <a16:creationId xmlns:a16="http://schemas.microsoft.com/office/drawing/2014/main" id="{9CC851AC-5F4C-4CF4-95B8-B4F0F9B69A37}"/>
               </a:ext>
             </a:extLst>
           </p:cNvPr>
@@ -12171,7 +12372,7 @@
           <p:cNvPr id="63" name="">
             <a:extLst xmlns:a="http://schemas.openxmlformats.org/drawingml/2006/main">
               <a:ext uri="{FF2B5EF4-FFF2-40B4-BE49-F238E27FC236}">
-                <a16:creationId xmlns:a16="http://schemas.microsoft.com/office/drawing/2014/main" id="{780948B0-E33D-4527-93AE-904968601D8C}"/>
+                <a16:creationId xmlns:a16="http://schemas.microsoft.com/office/drawing/2014/main" id="{86EA0F97-FACE-4E89-8C49-52BE973B5146}"/>
               </a:ext>
             </a:extLst>
           </p:cNvPr>
@@ -12221,7 +12422,7 @@
           <p:cNvPr id="64" name="">
             <a:extLst xmlns:a="http://schemas.openxmlformats.org/drawingml/2006/main">
               <a:ext uri="{FF2B5EF4-FFF2-40B4-BE49-F238E27FC236}">
-                <a16:creationId xmlns:a16="http://schemas.microsoft.com/office/drawing/2014/main" id="{4C4DF621-9100-429D-B286-407BE2D403FC}"/>
+                <a16:creationId xmlns:a16="http://schemas.microsoft.com/office/drawing/2014/main" id="{1D0B9442-BC72-4BF2-BD81-3D90B9151B91}"/>
               </a:ext>
             </a:extLst>
           </p:cNvPr>
@@ -12254,7 +12455,7 @@
           <p:cNvPr id="65" name="">
             <a:extLst xmlns:a="http://schemas.openxmlformats.org/drawingml/2006/main">
               <a:ext uri="{FF2B5EF4-FFF2-40B4-BE49-F238E27FC236}">
-                <a16:creationId xmlns:a16="http://schemas.microsoft.com/office/drawing/2014/main" id="{1A4CFB26-E3A5-483F-951C-6971F9E70498}"/>
+                <a16:creationId xmlns:a16="http://schemas.microsoft.com/office/drawing/2014/main" id="{10F89439-7703-46FC-98FD-077AFEF85F4C}"/>
               </a:ext>
             </a:extLst>
           </p:cNvPr>
@@ -12304,7 +12505,7 @@
           <p:cNvPr id="66" name="">
             <a:extLst xmlns:a="http://schemas.openxmlformats.org/drawingml/2006/main">
               <a:ext uri="{FF2B5EF4-FFF2-40B4-BE49-F238E27FC236}">
-                <a16:creationId xmlns:a16="http://schemas.microsoft.com/office/drawing/2014/main" id="{DBAB4634-7FB3-4A5F-8062-AC174AD33B92}"/>
+                <a16:creationId xmlns:a16="http://schemas.microsoft.com/office/drawing/2014/main" id="{714B27AD-5B31-47F1-8FCF-C24FBF39853A}"/>
               </a:ext>
             </a:extLst>
           </p:cNvPr>
@@ -12337,7 +12538,7 @@
           <p:cNvPr id="67" name="">
             <a:extLst xmlns:a="http://schemas.openxmlformats.org/drawingml/2006/main">
               <a:ext uri="{FF2B5EF4-FFF2-40B4-BE49-F238E27FC236}">
-                <a16:creationId xmlns:a16="http://schemas.microsoft.com/office/drawing/2014/main" id="{ECE0F344-B56A-41A1-8657-EF0D98E11B7C}"/>
+                <a16:creationId xmlns:a16="http://schemas.microsoft.com/office/drawing/2014/main" id="{2DF1EBEB-776D-4DCF-A676-1319E2FD3B5D}"/>
               </a:ext>
             </a:extLst>
           </p:cNvPr>
@@ -12387,7 +12588,7 @@
           <p:cNvPr id="68" name="">
             <a:extLst xmlns:a="http://schemas.openxmlformats.org/drawingml/2006/main">
               <a:ext uri="{FF2B5EF4-FFF2-40B4-BE49-F238E27FC236}">
-                <a16:creationId xmlns:a16="http://schemas.microsoft.com/office/drawing/2014/main" id="{C947FECD-2580-419A-B231-F74BF9C2A930}"/>
+                <a16:creationId xmlns:a16="http://schemas.microsoft.com/office/drawing/2014/main" id="{F9EC006F-F042-4380-A53D-374A35163DA0}"/>
               </a:ext>
             </a:extLst>
           </p:cNvPr>
@@ -12420,7 +12621,7 @@
           <p:cNvPr id="69" name="">
             <a:extLst xmlns:a="http://schemas.openxmlformats.org/drawingml/2006/main">
               <a:ext uri="{FF2B5EF4-FFF2-40B4-BE49-F238E27FC236}">
-                <a16:creationId xmlns:a16="http://schemas.microsoft.com/office/drawing/2014/main" id="{8D977B85-E734-4507-9810-EACCAA9DE843}"/>
+                <a16:creationId xmlns:a16="http://schemas.microsoft.com/office/drawing/2014/main" id="{F859938F-4E56-4238-B346-3EA963389275}"/>
               </a:ext>
             </a:extLst>
           </p:cNvPr>
@@ -12470,7 +12671,7 @@
           <p:cNvPr id="70" name="">
             <a:extLst xmlns:a="http://schemas.openxmlformats.org/drawingml/2006/main">
               <a:ext uri="{FF2B5EF4-FFF2-40B4-BE49-F238E27FC236}">
-                <a16:creationId xmlns:a16="http://schemas.microsoft.com/office/drawing/2014/main" id="{4BCF639A-9031-4B46-A463-D89B171DD813}"/>
+                <a16:creationId xmlns:a16="http://schemas.microsoft.com/office/drawing/2014/main" id="{B52772A9-EF34-4A46-AE39-2B8D0F599E63}"/>
               </a:ext>
             </a:extLst>
           </p:cNvPr>
@@ -12503,7 +12704,7 @@
           <p:cNvPr id="71" name="">
             <a:extLst xmlns:a="http://schemas.openxmlformats.org/drawingml/2006/main">
               <a:ext uri="{FF2B5EF4-FFF2-40B4-BE49-F238E27FC236}">
-                <a16:creationId xmlns:a16="http://schemas.microsoft.com/office/drawing/2014/main" id="{81E785A7-1C0F-426E-96EE-5ECD8508D331}"/>
+                <a16:creationId xmlns:a16="http://schemas.microsoft.com/office/drawing/2014/main" id="{0029D8EF-BD1C-426C-B697-3DFCB489158E}"/>
               </a:ext>
             </a:extLst>
           </p:cNvPr>
@@ -12553,7 +12754,7 @@
           <p:cNvPr id="72" name="">
             <a:extLst xmlns:a="http://schemas.openxmlformats.org/drawingml/2006/main">
               <a:ext uri="{FF2B5EF4-FFF2-40B4-BE49-F238E27FC236}">
-                <a16:creationId xmlns:a16="http://schemas.microsoft.com/office/drawing/2014/main" id="{D0071BA0-881C-40D6-A57C-E55AA3B3436A}"/>
+                <a16:creationId xmlns:a16="http://schemas.microsoft.com/office/drawing/2014/main" id="{B8ABF115-C2F8-4A04-B9AB-4CA5FA3F6214}"/>
               </a:ext>
             </a:extLst>
           </p:cNvPr>
@@ -12586,7 +12787,7 @@
           <p:cNvPr id="73" name="">
             <a:extLst xmlns:a="http://schemas.openxmlformats.org/drawingml/2006/main">
               <a:ext uri="{FF2B5EF4-FFF2-40B4-BE49-F238E27FC236}">
-                <a16:creationId xmlns:a16="http://schemas.microsoft.com/office/drawing/2014/main" id="{4E4E799E-450A-4359-A589-80A666A193B3}"/>
+                <a16:creationId xmlns:a16="http://schemas.microsoft.com/office/drawing/2014/main" id="{24549D6A-EEE1-4F21-AF80-C9D3896220E9}"/>
               </a:ext>
             </a:extLst>
           </p:cNvPr>
@@ -12636,7 +12837,7 @@
           <p:cNvPr id="74" name="">
             <a:extLst xmlns:a="http://schemas.openxmlformats.org/drawingml/2006/main">
               <a:ext uri="{FF2B5EF4-FFF2-40B4-BE49-F238E27FC236}">
-                <a16:creationId xmlns:a16="http://schemas.microsoft.com/office/drawing/2014/main" id="{B0D654F4-48B2-45DE-9634-D7891EA53AEF}"/>
+                <a16:creationId xmlns:a16="http://schemas.microsoft.com/office/drawing/2014/main" id="{46558537-6AB6-4CF1-B7C3-6F3BCEBD0399}"/>
               </a:ext>
             </a:extLst>
           </p:cNvPr>
@@ -12686,7 +12887,7 @@
           <p:cNvPr id="75" name="">
             <a:extLst xmlns:a="http://schemas.openxmlformats.org/drawingml/2006/main">
               <a:ext uri="{FF2B5EF4-FFF2-40B4-BE49-F238E27FC236}">
-                <a16:creationId xmlns:a16="http://schemas.microsoft.com/office/drawing/2014/main" id="{99420F5D-4DE0-4CE6-97F2-DD7A8E3453E3}"/>
+                <a16:creationId xmlns:a16="http://schemas.microsoft.com/office/drawing/2014/main" id="{B5C297AB-C929-41B0-881B-389B2B79518E}"/>
               </a:ext>
             </a:extLst>
           </p:cNvPr>
@@ -12734,7 +12935,7 @@
     </p:spTree>
     <p:extLst>
       <p:ext uri="{BB962C8B-B14F-4D97-AF65-F5344CB8AC3E}">
-        <p14:creationId xmlns:p14="http://schemas.microsoft.com/office/powerpoint/2010/main" val="2084170578"/>
+        <p14:creationId xmlns:p14="http://schemas.microsoft.com/office/powerpoint/2010/main" val="658774580"/>
       </p:ext>
     </p:extLst>
   </p:cSld>
@@ -12765,7 +12966,7 @@
           <p:cNvPr id="1" name="">
             <a:extLst xmlns:a="http://schemas.openxmlformats.org/drawingml/2006/main">
               <a:ext uri="{FF2B5EF4-FFF2-40B4-BE49-F238E27FC236}">
-                <a16:creationId xmlns:a16="http://schemas.microsoft.com/office/drawing/2014/main" id="{E62BC8AF-1C13-4748-9C14-96F6BD03EC46}"/>
+                <a16:creationId xmlns:a16="http://schemas.microsoft.com/office/drawing/2014/main" id="{91AC7AB4-7FD3-47A5-881F-84409E8FEF19}"/>
               </a:ext>
             </a:extLst>
           </p:cNvPr>
@@ -12815,7 +13016,7 @@
           <p:cNvPr id="2" name="">
             <a:extLst xmlns:a="http://schemas.openxmlformats.org/drawingml/2006/main">
               <a:ext uri="{FF2B5EF4-FFF2-40B4-BE49-F238E27FC236}">
-                <a16:creationId xmlns:a16="http://schemas.microsoft.com/office/drawing/2014/main" id="{1DF5853D-87B1-4393-A60C-0696797DD86E}"/>
+                <a16:creationId xmlns:a16="http://schemas.microsoft.com/office/drawing/2014/main" id="{5C992191-D587-42CE-ADD1-388D63E02C74}"/>
               </a:ext>
             </a:extLst>
           </p:cNvPr>
@@ -12865,7 +13066,7 @@
           <p:cNvPr id="3" name="">
             <a:extLst xmlns:a="http://schemas.openxmlformats.org/drawingml/2006/main">
               <a:ext uri="{FF2B5EF4-FFF2-40B4-BE49-F238E27FC236}">
-                <a16:creationId xmlns:a16="http://schemas.microsoft.com/office/drawing/2014/main" id="{3941DBB4-235F-4CB1-9453-4B9A86631F71}"/>
+                <a16:creationId xmlns:a16="http://schemas.microsoft.com/office/drawing/2014/main" id="{E3B5ABF7-C365-40DB-846D-A60168C0859A}"/>
               </a:ext>
             </a:extLst>
           </p:cNvPr>
@@ -12902,7 +13103,7 @@
           <p:nvPr/>
         </p:nvPicPr>
         <p:blipFill>
-          <a:blip xmlns:r="http://schemas.openxmlformats.org/officeDocument/2006/relationships" xmlns:a="http://schemas.openxmlformats.org/drawingml/2006/main" r:embed="R9ac9f6fdc3f2403a"/>
+          <a:blip xmlns:r="http://schemas.openxmlformats.org/officeDocument/2006/relationships" xmlns:a="http://schemas.openxmlformats.org/drawingml/2006/main" r:embed="Rdc38b0dbfa054cc3"/>
           <a:stretch xmlns:a="http://schemas.openxmlformats.org/drawingml/2006/main"/>
         </p:blipFill>
         <p:spPr>
@@ -12920,7 +13121,7 @@
           <p:cNvPr id="5" name="">
             <a:extLst xmlns:a="http://schemas.openxmlformats.org/drawingml/2006/main">
               <a:ext uri="{FF2B5EF4-FFF2-40B4-BE49-F238E27FC236}">
-                <a16:creationId xmlns:a16="http://schemas.microsoft.com/office/drawing/2014/main" id="{2627DF7F-D5CE-4A19-A37F-CE536D90A25E}"/>
+                <a16:creationId xmlns:a16="http://schemas.microsoft.com/office/drawing/2014/main" id="{646448D9-FA70-43E4-8E35-A761D54B3CA1}"/>
               </a:ext>
             </a:extLst>
           </p:cNvPr>
@@ -12953,7 +13154,7 @@
           <p:cNvPr id="6" name="">
             <a:extLst xmlns:a="http://schemas.openxmlformats.org/drawingml/2006/main">
               <a:ext uri="{FF2B5EF4-FFF2-40B4-BE49-F238E27FC236}">
-                <a16:creationId xmlns:a16="http://schemas.microsoft.com/office/drawing/2014/main" id="{1F622AD2-67D4-4B0A-8463-D46AFC89C45B}"/>
+                <a16:creationId xmlns:a16="http://schemas.microsoft.com/office/drawing/2014/main" id="{EEB1A96A-72C3-4F28-908D-6FA9A22B598B}"/>
               </a:ext>
             </a:extLst>
           </p:cNvPr>
@@ -13003,7 +13204,7 @@
           <p:cNvPr id="7" name="">
             <a:extLst xmlns:a="http://schemas.openxmlformats.org/drawingml/2006/main">
               <a:ext uri="{FF2B5EF4-FFF2-40B4-BE49-F238E27FC236}">
-                <a16:creationId xmlns:a16="http://schemas.microsoft.com/office/drawing/2014/main" id="{BA2C515D-88E5-462A-A078-D617219C14B6}"/>
+                <a16:creationId xmlns:a16="http://schemas.microsoft.com/office/drawing/2014/main" id="{ED209FAB-9C8C-40EF-B73C-B4AECDB6D38B}"/>
               </a:ext>
             </a:extLst>
           </p:cNvPr>
@@ -13036,7 +13237,7 @@
           <p:cNvPr id="8" name="">
             <a:extLst xmlns:a="http://schemas.openxmlformats.org/drawingml/2006/main">
               <a:ext uri="{FF2B5EF4-FFF2-40B4-BE49-F238E27FC236}">
-                <a16:creationId xmlns:a16="http://schemas.microsoft.com/office/drawing/2014/main" id="{764C4ECB-2954-4332-B249-81E99DFAD1B1}"/>
+                <a16:creationId xmlns:a16="http://schemas.microsoft.com/office/drawing/2014/main" id="{601CDD29-C894-4C59-82D1-7CBA4136CDCB}"/>
               </a:ext>
             </a:extLst>
           </p:cNvPr>
@@ -13086,7 +13287,7 @@
           <p:cNvPr id="9" name="">
             <a:extLst xmlns:a="http://schemas.openxmlformats.org/drawingml/2006/main">
               <a:ext uri="{FF2B5EF4-FFF2-40B4-BE49-F238E27FC236}">
-                <a16:creationId xmlns:a16="http://schemas.microsoft.com/office/drawing/2014/main" id="{A60368C8-E5A5-4F8C-A58C-367644C25C7B}"/>
+                <a16:creationId xmlns:a16="http://schemas.microsoft.com/office/drawing/2014/main" id="{045FE861-9979-4C46-9D12-A819D365D399}"/>
               </a:ext>
             </a:extLst>
           </p:cNvPr>
@@ -13119,7 +13320,7 @@
           <p:cNvPr id="10" name="">
             <a:extLst xmlns:a="http://schemas.openxmlformats.org/drawingml/2006/main">
               <a:ext uri="{FF2B5EF4-FFF2-40B4-BE49-F238E27FC236}">
-                <a16:creationId xmlns:a16="http://schemas.microsoft.com/office/drawing/2014/main" id="{D579553D-F948-4083-9926-123EECF91A0D}"/>
+                <a16:creationId xmlns:a16="http://schemas.microsoft.com/office/drawing/2014/main" id="{2D22F28B-49AA-45AE-88B4-B092038B6396}"/>
               </a:ext>
             </a:extLst>
           </p:cNvPr>
@@ -13169,7 +13370,7 @@
           <p:cNvPr id="11" name="">
             <a:extLst xmlns:a="http://schemas.openxmlformats.org/drawingml/2006/main">
               <a:ext uri="{FF2B5EF4-FFF2-40B4-BE49-F238E27FC236}">
-                <a16:creationId xmlns:a16="http://schemas.microsoft.com/office/drawing/2014/main" id="{66C5D8C4-7295-4F86-8755-747379A06726}"/>
+                <a16:creationId xmlns:a16="http://schemas.microsoft.com/office/drawing/2014/main" id="{A3829D99-537C-4829-BC18-7B39478871B7}"/>
               </a:ext>
             </a:extLst>
           </p:cNvPr>
@@ -13202,7 +13403,7 @@
           <p:cNvPr id="12" name="">
             <a:extLst xmlns:a="http://schemas.openxmlformats.org/drawingml/2006/main">
               <a:ext uri="{FF2B5EF4-FFF2-40B4-BE49-F238E27FC236}">
-                <a16:creationId xmlns:a16="http://schemas.microsoft.com/office/drawing/2014/main" id="{D83FE3FB-97D4-49C4-A54F-B072DCA1A0D1}"/>
+                <a16:creationId xmlns:a16="http://schemas.microsoft.com/office/drawing/2014/main" id="{5654E8BA-1485-482A-AA5B-72FC640B0058}"/>
               </a:ext>
             </a:extLst>
           </p:cNvPr>
@@ -13252,7 +13453,7 @@
           <p:cNvPr id="13" name="">
             <a:extLst xmlns:a="http://schemas.openxmlformats.org/drawingml/2006/main">
               <a:ext uri="{FF2B5EF4-FFF2-40B4-BE49-F238E27FC236}">
-                <a16:creationId xmlns:a16="http://schemas.microsoft.com/office/drawing/2014/main" id="{07BD4DA0-D55A-4BAC-9759-8291247B1288}"/>
+                <a16:creationId xmlns:a16="http://schemas.microsoft.com/office/drawing/2014/main" id="{839B6DC2-4033-475E-AFA3-209F7571B89E}"/>
               </a:ext>
             </a:extLst>
           </p:cNvPr>
@@ -13302,7 +13503,7 @@
           <p:cNvPr id="14" name="">
             <a:extLst xmlns:a="http://schemas.openxmlformats.org/drawingml/2006/main">
               <a:ext uri="{FF2B5EF4-FFF2-40B4-BE49-F238E27FC236}">
-                <a16:creationId xmlns:a16="http://schemas.microsoft.com/office/drawing/2014/main" id="{A32A8F0A-92EA-4CB8-BE50-9CD9821EC080}"/>
+                <a16:creationId xmlns:a16="http://schemas.microsoft.com/office/drawing/2014/main" id="{22BF684E-3A4C-41F3-AA15-E2DF0CE6F1CA}"/>
               </a:ext>
             </a:extLst>
           </p:cNvPr>
@@ -13350,7 +13551,7 @@
     </p:spTree>
     <p:extLst>
       <p:ext uri="{BB962C8B-B14F-4D97-AF65-F5344CB8AC3E}">
-        <p14:creationId xmlns:p14="http://schemas.microsoft.com/office/powerpoint/2010/main" val="165046836"/>
+        <p14:creationId xmlns:p14="http://schemas.microsoft.com/office/powerpoint/2010/main" val="1945157170"/>
       </p:ext>
     </p:extLst>
   </p:cSld>
@@ -13381,7 +13582,7 @@
           <p:cNvPr id="1" name="">
             <a:extLst xmlns:a="http://schemas.openxmlformats.org/drawingml/2006/main">
               <a:ext uri="{FF2B5EF4-FFF2-40B4-BE49-F238E27FC236}">
-                <a16:creationId xmlns:a16="http://schemas.microsoft.com/office/drawing/2014/main" id="{7A45432F-CD74-4F0C-9E51-34C9A89ABE63}"/>
+                <a16:creationId xmlns:a16="http://schemas.microsoft.com/office/drawing/2014/main" id="{BBEAF74B-49D2-4D2B-898A-86795391C9C7}"/>
               </a:ext>
             </a:extLst>
           </p:cNvPr>
@@ -13431,7 +13632,7 @@
           <p:cNvPr id="2" name="">
             <a:extLst xmlns:a="http://schemas.openxmlformats.org/drawingml/2006/main">
               <a:ext uri="{FF2B5EF4-FFF2-40B4-BE49-F238E27FC236}">
-                <a16:creationId xmlns:a16="http://schemas.microsoft.com/office/drawing/2014/main" id="{9F056671-08FB-49F7-BB6E-EF3A9ED672FF}"/>
+                <a16:creationId xmlns:a16="http://schemas.microsoft.com/office/drawing/2014/main" id="{A7520B15-F5DC-413D-8F16-5D2071A3A447}"/>
               </a:ext>
             </a:extLst>
           </p:cNvPr>
@@ -13481,7 +13682,7 @@
           <p:cNvPr id="3" name="">
             <a:extLst xmlns:a="http://schemas.openxmlformats.org/drawingml/2006/main">
               <a:ext uri="{FF2B5EF4-FFF2-40B4-BE49-F238E27FC236}">
-                <a16:creationId xmlns:a16="http://schemas.microsoft.com/office/drawing/2014/main" id="{4BFB7BB1-B43A-46FA-86F9-7871C5198A0C}"/>
+                <a16:creationId xmlns:a16="http://schemas.microsoft.com/office/drawing/2014/main" id="{1EC550AF-0637-4C97-9F15-2E1FBCF858C7}"/>
               </a:ext>
             </a:extLst>
           </p:cNvPr>
@@ -13514,7 +13715,7 @@
           <p:cNvPr id="4" name="">
             <a:extLst xmlns:a="http://schemas.openxmlformats.org/drawingml/2006/main">
               <a:ext uri="{FF2B5EF4-FFF2-40B4-BE49-F238E27FC236}">
-                <a16:creationId xmlns:a16="http://schemas.microsoft.com/office/drawing/2014/main" id="{C3573850-051B-493C-B650-9B24D4798523}"/>
+                <a16:creationId xmlns:a16="http://schemas.microsoft.com/office/drawing/2014/main" id="{327F4E2E-8AD2-4258-A589-749BE0EB005A}"/>
               </a:ext>
             </a:extLst>
           </p:cNvPr>
@@ -13547,7 +13748,7 @@
           <p:cNvPr id="5" name="">
             <a:extLst xmlns:a="http://schemas.openxmlformats.org/drawingml/2006/main">
               <a:ext uri="{FF2B5EF4-FFF2-40B4-BE49-F238E27FC236}">
-                <a16:creationId xmlns:a16="http://schemas.microsoft.com/office/drawing/2014/main" id="{96B79899-A77E-4BAA-B050-4D11F565377B}"/>
+                <a16:creationId xmlns:a16="http://schemas.microsoft.com/office/drawing/2014/main" id="{D00C6FF3-7DEA-4707-BF21-CB20B00336AA}"/>
               </a:ext>
             </a:extLst>
           </p:cNvPr>
@@ -13597,7 +13798,7 @@
           <p:cNvPr id="6" name="">
             <a:extLst xmlns:a="http://schemas.openxmlformats.org/drawingml/2006/main">
               <a:ext uri="{FF2B5EF4-FFF2-40B4-BE49-F238E27FC236}">
-                <a16:creationId xmlns:a16="http://schemas.microsoft.com/office/drawing/2014/main" id="{9C8C7985-1978-4B53-B6C8-C4F5E98BC943}"/>
+                <a16:creationId xmlns:a16="http://schemas.microsoft.com/office/drawing/2014/main" id="{3285E18B-8533-4DF5-8785-88F6AE159D65}"/>
               </a:ext>
             </a:extLst>
           </p:cNvPr>
@@ -13630,7 +13831,7 @@
           <p:cNvPr id="7" name="">
             <a:extLst xmlns:a="http://schemas.openxmlformats.org/drawingml/2006/main">
               <a:ext uri="{FF2B5EF4-FFF2-40B4-BE49-F238E27FC236}">
-                <a16:creationId xmlns:a16="http://schemas.microsoft.com/office/drawing/2014/main" id="{447CCC55-5976-4F50-8EDC-3C3DDFB666C0}"/>
+                <a16:creationId xmlns:a16="http://schemas.microsoft.com/office/drawing/2014/main" id="{7D429CA8-0DC2-4B48-BA5B-5BD8F72F181D}"/>
               </a:ext>
             </a:extLst>
           </p:cNvPr>
@@ -13680,7 +13881,7 @@
           <p:cNvPr id="8" name="">
             <a:extLst xmlns:a="http://schemas.openxmlformats.org/drawingml/2006/main">
               <a:ext uri="{FF2B5EF4-FFF2-40B4-BE49-F238E27FC236}">
-                <a16:creationId xmlns:a16="http://schemas.microsoft.com/office/drawing/2014/main" id="{C326361C-F48D-4C86-8C4D-18B3A8C1FB39}"/>
+                <a16:creationId xmlns:a16="http://schemas.microsoft.com/office/drawing/2014/main" id="{9B17875D-667B-4F15-9C97-FA03999141C4}"/>
               </a:ext>
             </a:extLst>
           </p:cNvPr>
@@ -13713,7 +13914,7 @@
           <p:cNvPr id="9" name="">
             <a:extLst xmlns:a="http://schemas.openxmlformats.org/drawingml/2006/main">
               <a:ext uri="{FF2B5EF4-FFF2-40B4-BE49-F238E27FC236}">
-                <a16:creationId xmlns:a16="http://schemas.microsoft.com/office/drawing/2014/main" id="{B09E92B2-B4AD-4E28-B9D9-E5C684A9F861}"/>
+                <a16:creationId xmlns:a16="http://schemas.microsoft.com/office/drawing/2014/main" id="{802DF205-CAA5-4C22-8126-4CA04BA8C101}"/>
               </a:ext>
             </a:extLst>
           </p:cNvPr>
@@ -13763,7 +13964,7 @@
           <p:cNvPr id="10" name="">
             <a:extLst xmlns:a="http://schemas.openxmlformats.org/drawingml/2006/main">
               <a:ext uri="{FF2B5EF4-FFF2-40B4-BE49-F238E27FC236}">
-                <a16:creationId xmlns:a16="http://schemas.microsoft.com/office/drawing/2014/main" id="{EC8F8EF4-E806-4BA6-9CA3-C3CC60CCC14D}"/>
+                <a16:creationId xmlns:a16="http://schemas.microsoft.com/office/drawing/2014/main" id="{973BBBC4-F816-42D8-828A-AF1EAE9FAF0E}"/>
               </a:ext>
             </a:extLst>
           </p:cNvPr>
@@ -13796,7 +13997,7 @@
           <p:cNvPr id="11" name="">
             <a:extLst xmlns:a="http://schemas.openxmlformats.org/drawingml/2006/main">
               <a:ext uri="{FF2B5EF4-FFF2-40B4-BE49-F238E27FC236}">
-                <a16:creationId xmlns:a16="http://schemas.microsoft.com/office/drawing/2014/main" id="{96125BFF-4268-483E-8CB5-A3CC302218CF}"/>
+                <a16:creationId xmlns:a16="http://schemas.microsoft.com/office/drawing/2014/main" id="{CC1799AE-3D30-4581-BC39-5D325045755D}"/>
               </a:ext>
             </a:extLst>
           </p:cNvPr>
@@ -13846,7 +14047,7 @@
           <p:cNvPr id="12" name="">
             <a:extLst xmlns:a="http://schemas.openxmlformats.org/drawingml/2006/main">
               <a:ext uri="{FF2B5EF4-FFF2-40B4-BE49-F238E27FC236}">
-                <a16:creationId xmlns:a16="http://schemas.microsoft.com/office/drawing/2014/main" id="{4241FBD8-C6E5-4158-B064-1561D1F39B3A}"/>
+                <a16:creationId xmlns:a16="http://schemas.microsoft.com/office/drawing/2014/main" id="{4BC8970D-3A99-49E7-880A-9982507A350C}"/>
               </a:ext>
             </a:extLst>
           </p:cNvPr>
@@ -13879,7 +14080,7 @@
           <p:cNvPr id="13" name="">
             <a:extLst xmlns:a="http://schemas.openxmlformats.org/drawingml/2006/main">
               <a:ext uri="{FF2B5EF4-FFF2-40B4-BE49-F238E27FC236}">
-                <a16:creationId xmlns:a16="http://schemas.microsoft.com/office/drawing/2014/main" id="{60D8FB15-A07B-48A4-926C-DF5B3B1E5A9F}"/>
+                <a16:creationId xmlns:a16="http://schemas.microsoft.com/office/drawing/2014/main" id="{53637C2D-7684-4CA5-952D-20C013A19CC6}"/>
               </a:ext>
             </a:extLst>
           </p:cNvPr>
@@ -13929,7 +14130,7 @@
           <p:cNvPr id="14" name="">
             <a:extLst xmlns:a="http://schemas.openxmlformats.org/drawingml/2006/main">
               <a:ext uri="{FF2B5EF4-FFF2-40B4-BE49-F238E27FC236}">
-                <a16:creationId xmlns:a16="http://schemas.microsoft.com/office/drawing/2014/main" id="{209CF651-B636-4306-8467-C728733588D5}"/>
+                <a16:creationId xmlns:a16="http://schemas.microsoft.com/office/drawing/2014/main" id="{4DE224B4-49E9-4361-9522-C58D574E4539}"/>
               </a:ext>
             </a:extLst>
           </p:cNvPr>
@@ -13962,7 +14163,7 @@
           <p:cNvPr id="15" name="">
             <a:extLst xmlns:a="http://schemas.openxmlformats.org/drawingml/2006/main">
               <a:ext uri="{FF2B5EF4-FFF2-40B4-BE49-F238E27FC236}">
-                <a16:creationId xmlns:a16="http://schemas.microsoft.com/office/drawing/2014/main" id="{159ACF5B-E5E8-40CE-9A51-F8A26B052CF0}"/>
+                <a16:creationId xmlns:a16="http://schemas.microsoft.com/office/drawing/2014/main" id="{FE362905-1DA6-4761-9A99-60BF11C70297}"/>
               </a:ext>
             </a:extLst>
           </p:cNvPr>
@@ -14012,7 +14213,7 @@
           <p:cNvPr id="16" name="">
             <a:extLst xmlns:a="http://schemas.openxmlformats.org/drawingml/2006/main">
               <a:ext uri="{FF2B5EF4-FFF2-40B4-BE49-F238E27FC236}">
-                <a16:creationId xmlns:a16="http://schemas.microsoft.com/office/drawing/2014/main" id="{0BA0E2C2-EBC5-47D7-991F-CE30F7FEC128}"/>
+                <a16:creationId xmlns:a16="http://schemas.microsoft.com/office/drawing/2014/main" id="{21367390-6E33-4BAA-9A07-D4CED57F4EB2}"/>
               </a:ext>
             </a:extLst>
           </p:cNvPr>
@@ -14045,7 +14246,7 @@
           <p:cNvPr id="17" name="">
             <a:extLst xmlns:a="http://schemas.openxmlformats.org/drawingml/2006/main">
               <a:ext uri="{FF2B5EF4-FFF2-40B4-BE49-F238E27FC236}">
-                <a16:creationId xmlns:a16="http://schemas.microsoft.com/office/drawing/2014/main" id="{BB150D72-7613-4AEE-B7D7-C390CEE68973}"/>
+                <a16:creationId xmlns:a16="http://schemas.microsoft.com/office/drawing/2014/main" id="{8773C59D-558F-49E9-84C0-4F7531540917}"/>
               </a:ext>
             </a:extLst>
           </p:cNvPr>
@@ -14095,7 +14296,7 @@
           <p:cNvPr id="18" name="">
             <a:extLst xmlns:a="http://schemas.openxmlformats.org/drawingml/2006/main">
               <a:ext uri="{FF2B5EF4-FFF2-40B4-BE49-F238E27FC236}">
-                <a16:creationId xmlns:a16="http://schemas.microsoft.com/office/drawing/2014/main" id="{F8CE45E0-CD53-43E7-A301-F991A1831CDB}"/>
+                <a16:creationId xmlns:a16="http://schemas.microsoft.com/office/drawing/2014/main" id="{84FDFBBC-38A6-4ABF-BA46-D9E92F56FF1A}"/>
               </a:ext>
             </a:extLst>
           </p:cNvPr>
@@ -14128,7 +14329,7 @@
           <p:cNvPr id="19" name="">
             <a:extLst xmlns:a="http://schemas.openxmlformats.org/drawingml/2006/main">
               <a:ext uri="{FF2B5EF4-FFF2-40B4-BE49-F238E27FC236}">
-                <a16:creationId xmlns:a16="http://schemas.microsoft.com/office/drawing/2014/main" id="{C29FC94F-F576-490E-BA10-3B8813E092AC}"/>
+                <a16:creationId xmlns:a16="http://schemas.microsoft.com/office/drawing/2014/main" id="{9734F64E-4A0B-4E64-8205-7526A4786058}"/>
               </a:ext>
             </a:extLst>
           </p:cNvPr>
@@ -14178,7 +14379,7 @@
           <p:cNvPr id="20" name="">
             <a:extLst xmlns:a="http://schemas.openxmlformats.org/drawingml/2006/main">
               <a:ext uri="{FF2B5EF4-FFF2-40B4-BE49-F238E27FC236}">
-                <a16:creationId xmlns:a16="http://schemas.microsoft.com/office/drawing/2014/main" id="{07E82D53-969D-449A-B267-AAEEB4C5E934}"/>
+                <a16:creationId xmlns:a16="http://schemas.microsoft.com/office/drawing/2014/main" id="{3DC98E75-E37D-4A1E-8733-C76639C40189}"/>
               </a:ext>
             </a:extLst>
           </p:cNvPr>
@@ -14211,7 +14412,7 @@
           <p:cNvPr id="21" name="">
             <a:extLst xmlns:a="http://schemas.openxmlformats.org/drawingml/2006/main">
               <a:ext uri="{FF2B5EF4-FFF2-40B4-BE49-F238E27FC236}">
-                <a16:creationId xmlns:a16="http://schemas.microsoft.com/office/drawing/2014/main" id="{94E42459-574F-4E88-B7C9-E432CDB3557C}"/>
+                <a16:creationId xmlns:a16="http://schemas.microsoft.com/office/drawing/2014/main" id="{C8EEC1A5-9588-4B9F-AAB9-1F9C5B3B84DA}"/>
               </a:ext>
             </a:extLst>
           </p:cNvPr>
@@ -14261,7 +14462,7 @@
           <p:cNvPr id="22" name="">
             <a:extLst xmlns:a="http://schemas.openxmlformats.org/drawingml/2006/main">
               <a:ext uri="{FF2B5EF4-FFF2-40B4-BE49-F238E27FC236}">
-                <a16:creationId xmlns:a16="http://schemas.microsoft.com/office/drawing/2014/main" id="{E786540E-A9E2-4597-90D1-EB796617049A}"/>
+                <a16:creationId xmlns:a16="http://schemas.microsoft.com/office/drawing/2014/main" id="{10F8BFF1-1060-4F23-A2CD-A67147C67A7F}"/>
               </a:ext>
             </a:extLst>
           </p:cNvPr>
@@ -14294,7 +14495,7 @@
           <p:cNvPr id="23" name="">
             <a:extLst xmlns:a="http://schemas.openxmlformats.org/drawingml/2006/main">
               <a:ext uri="{FF2B5EF4-FFF2-40B4-BE49-F238E27FC236}">
-                <a16:creationId xmlns:a16="http://schemas.microsoft.com/office/drawing/2014/main" id="{186AF182-2126-42FA-89B0-F3BD73B3F389}"/>
+                <a16:creationId xmlns:a16="http://schemas.microsoft.com/office/drawing/2014/main" id="{F371D70F-C427-4AF1-945D-C8DB03763CCE}"/>
               </a:ext>
             </a:extLst>
           </p:cNvPr>
@@ -14344,7 +14545,7 @@
           <p:cNvPr id="24" name="">
             <a:extLst xmlns:a="http://schemas.openxmlformats.org/drawingml/2006/main">
               <a:ext uri="{FF2B5EF4-FFF2-40B4-BE49-F238E27FC236}">
-                <a16:creationId xmlns:a16="http://schemas.microsoft.com/office/drawing/2014/main" id="{27F0614D-8F0A-4CCB-A4F7-E51C94AF51F2}"/>
+                <a16:creationId xmlns:a16="http://schemas.microsoft.com/office/drawing/2014/main" id="{2B467363-BE91-4620-A700-2E6BFC5E5F2F}"/>
               </a:ext>
             </a:extLst>
           </p:cNvPr>
@@ -14377,7 +14578,7 @@
           <p:cNvPr id="25" name="">
             <a:extLst xmlns:a="http://schemas.openxmlformats.org/drawingml/2006/main">
               <a:ext uri="{FF2B5EF4-FFF2-40B4-BE49-F238E27FC236}">
-                <a16:creationId xmlns:a16="http://schemas.microsoft.com/office/drawing/2014/main" id="{1BFA6649-CE02-4F45-AAC4-53C891B66BBA}"/>
+                <a16:creationId xmlns:a16="http://schemas.microsoft.com/office/drawing/2014/main" id="{8BA75355-3600-4C81-85B5-95E41FE0B866}"/>
               </a:ext>
             </a:extLst>
           </p:cNvPr>
@@ -14427,7 +14628,7 @@
           <p:cNvPr id="26" name="">
             <a:extLst xmlns:a="http://schemas.openxmlformats.org/drawingml/2006/main">
               <a:ext uri="{FF2B5EF4-FFF2-40B4-BE49-F238E27FC236}">
-                <a16:creationId xmlns:a16="http://schemas.microsoft.com/office/drawing/2014/main" id="{B2C1F386-F9F2-4798-8AE3-684542648EED}"/>
+                <a16:creationId xmlns:a16="http://schemas.microsoft.com/office/drawing/2014/main" id="{38BA79BB-46B7-492D-84B0-2E8B53B14DD5}"/>
               </a:ext>
             </a:extLst>
           </p:cNvPr>
@@ -14460,7 +14661,7 @@
           <p:cNvPr id="27" name="">
             <a:extLst xmlns:a="http://schemas.openxmlformats.org/drawingml/2006/main">
               <a:ext uri="{FF2B5EF4-FFF2-40B4-BE49-F238E27FC236}">
-                <a16:creationId xmlns:a16="http://schemas.microsoft.com/office/drawing/2014/main" id="{E5E830E7-38A7-4FA4-8344-BE7DA77BFF02}"/>
+                <a16:creationId xmlns:a16="http://schemas.microsoft.com/office/drawing/2014/main" id="{B285C46E-3D61-41EF-B500-4DA27809438A}"/>
               </a:ext>
             </a:extLst>
           </p:cNvPr>
@@ -14510,7 +14711,7 @@
           <p:cNvPr id="28" name="">
             <a:extLst xmlns:a="http://schemas.openxmlformats.org/drawingml/2006/main">
               <a:ext uri="{FF2B5EF4-FFF2-40B4-BE49-F238E27FC236}">
-                <a16:creationId xmlns:a16="http://schemas.microsoft.com/office/drawing/2014/main" id="{E67DF9D3-4F59-430E-87D2-7439BB6AE518}"/>
+                <a16:creationId xmlns:a16="http://schemas.microsoft.com/office/drawing/2014/main" id="{C15CD0A8-FAC3-4544-ADC4-B1B6766A5D81}"/>
               </a:ext>
             </a:extLst>
           </p:cNvPr>
@@ -14543,7 +14744,7 @@
           <p:cNvPr id="29" name="">
             <a:extLst xmlns:a="http://schemas.openxmlformats.org/drawingml/2006/main">
               <a:ext uri="{FF2B5EF4-FFF2-40B4-BE49-F238E27FC236}">
-                <a16:creationId xmlns:a16="http://schemas.microsoft.com/office/drawing/2014/main" id="{142D9F42-5167-4849-8AA8-1E617AA6A469}"/>
+                <a16:creationId xmlns:a16="http://schemas.microsoft.com/office/drawing/2014/main" id="{BD5A4FB7-7EF8-4368-9848-C78A8361CAD4}"/>
               </a:ext>
             </a:extLst>
           </p:cNvPr>
@@ -14593,7 +14794,7 @@
           <p:cNvPr id="30" name="">
             <a:extLst xmlns:a="http://schemas.openxmlformats.org/drawingml/2006/main">
               <a:ext uri="{FF2B5EF4-FFF2-40B4-BE49-F238E27FC236}">
-                <a16:creationId xmlns:a16="http://schemas.microsoft.com/office/drawing/2014/main" id="{25358EAC-3F9A-42DE-B980-ABD706502913}"/>
+                <a16:creationId xmlns:a16="http://schemas.microsoft.com/office/drawing/2014/main" id="{7D0E40B7-559F-4DE0-9C2C-32A3A99C69A5}"/>
               </a:ext>
             </a:extLst>
           </p:cNvPr>
@@ -14626,7 +14827,7 @@
           <p:cNvPr id="31" name="">
             <a:extLst xmlns:a="http://schemas.openxmlformats.org/drawingml/2006/main">
               <a:ext uri="{FF2B5EF4-FFF2-40B4-BE49-F238E27FC236}">
-                <a16:creationId xmlns:a16="http://schemas.microsoft.com/office/drawing/2014/main" id="{641879DB-A567-4093-912E-304D844D0329}"/>
+                <a16:creationId xmlns:a16="http://schemas.microsoft.com/office/drawing/2014/main" id="{40883483-BF5B-4A00-8B47-3EF5B06E7585}"/>
               </a:ext>
             </a:extLst>
           </p:cNvPr>
@@ -14676,7 +14877,7 @@
           <p:cNvPr id="32" name="">
             <a:extLst xmlns:a="http://schemas.openxmlformats.org/drawingml/2006/main">
               <a:ext uri="{FF2B5EF4-FFF2-40B4-BE49-F238E27FC236}">
-                <a16:creationId xmlns:a16="http://schemas.microsoft.com/office/drawing/2014/main" id="{0DF4BBA9-091C-40F0-9525-2960933B46C0}"/>
+                <a16:creationId xmlns:a16="http://schemas.microsoft.com/office/drawing/2014/main" id="{D35F98AA-651C-4616-829F-4F6D9FB61FE8}"/>
               </a:ext>
             </a:extLst>
           </p:cNvPr>
@@ -14709,7 +14910,7 @@
           <p:cNvPr id="33" name="">
             <a:extLst xmlns:a="http://schemas.openxmlformats.org/drawingml/2006/main">
               <a:ext uri="{FF2B5EF4-FFF2-40B4-BE49-F238E27FC236}">
-                <a16:creationId xmlns:a16="http://schemas.microsoft.com/office/drawing/2014/main" id="{B2B20AA2-79FE-429D-8037-320430332B40}"/>
+                <a16:creationId xmlns:a16="http://schemas.microsoft.com/office/drawing/2014/main" id="{53EA0C16-80E6-453B-9A38-AAA94B7EE6B1}"/>
               </a:ext>
             </a:extLst>
           </p:cNvPr>
@@ -14759,7 +14960,7 @@
           <p:cNvPr id="34" name="">
             <a:extLst xmlns:a="http://schemas.openxmlformats.org/drawingml/2006/main">
               <a:ext uri="{FF2B5EF4-FFF2-40B4-BE49-F238E27FC236}">
-                <a16:creationId xmlns:a16="http://schemas.microsoft.com/office/drawing/2014/main" id="{69F87317-4491-4925-99E0-BEE57B0DB122}"/>
+                <a16:creationId xmlns:a16="http://schemas.microsoft.com/office/drawing/2014/main" id="{BC76353F-52C7-4A3C-8D90-B3B4018740D2}"/>
               </a:ext>
             </a:extLst>
           </p:cNvPr>
@@ -14792,7 +14993,7 @@
           <p:cNvPr id="35" name="">
             <a:extLst xmlns:a="http://schemas.openxmlformats.org/drawingml/2006/main">
               <a:ext uri="{FF2B5EF4-FFF2-40B4-BE49-F238E27FC236}">
-                <a16:creationId xmlns:a16="http://schemas.microsoft.com/office/drawing/2014/main" id="{29D4192B-3BCE-4DE9-A7CA-9E48D02BCDD1}"/>
+                <a16:creationId xmlns:a16="http://schemas.microsoft.com/office/drawing/2014/main" id="{23B19618-CC83-4716-B7DE-76A22E912DD2}"/>
               </a:ext>
             </a:extLst>
           </p:cNvPr>
@@ -14842,7 +15043,7 @@
           <p:cNvPr id="36" name="">
             <a:extLst xmlns:a="http://schemas.openxmlformats.org/drawingml/2006/main">
               <a:ext uri="{FF2B5EF4-FFF2-40B4-BE49-F238E27FC236}">
-                <a16:creationId xmlns:a16="http://schemas.microsoft.com/office/drawing/2014/main" id="{96D35966-AD2C-409A-AF94-9CB2731DD260}"/>
+                <a16:creationId xmlns:a16="http://schemas.microsoft.com/office/drawing/2014/main" id="{75F1BADA-F84D-4EEF-A53F-2CE24357992D}"/>
               </a:ext>
             </a:extLst>
           </p:cNvPr>
@@ -14875,7 +15076,7 @@
           <p:cNvPr id="37" name="">
             <a:extLst xmlns:a="http://schemas.openxmlformats.org/drawingml/2006/main">
               <a:ext uri="{FF2B5EF4-FFF2-40B4-BE49-F238E27FC236}">
-                <a16:creationId xmlns:a16="http://schemas.microsoft.com/office/drawing/2014/main" id="{ABE4D3B6-13A4-4446-B501-A5268C8E84F6}"/>
+                <a16:creationId xmlns:a16="http://schemas.microsoft.com/office/drawing/2014/main" id="{26166F83-E699-4C1C-9FAC-84274683BD3F}"/>
               </a:ext>
             </a:extLst>
           </p:cNvPr>
@@ -14925,7 +15126,7 @@
           <p:cNvPr id="38" name="">
             <a:extLst xmlns:a="http://schemas.openxmlformats.org/drawingml/2006/main">
               <a:ext uri="{FF2B5EF4-FFF2-40B4-BE49-F238E27FC236}">
-                <a16:creationId xmlns:a16="http://schemas.microsoft.com/office/drawing/2014/main" id="{D174470E-52FF-465C-92F2-3F0950B93425}"/>
+                <a16:creationId xmlns:a16="http://schemas.microsoft.com/office/drawing/2014/main" id="{4C74A904-FA98-4699-980B-1924A681F279}"/>
               </a:ext>
             </a:extLst>
           </p:cNvPr>
@@ -14958,7 +15159,7 @@
           <p:cNvPr id="39" name="">
             <a:extLst xmlns:a="http://schemas.openxmlformats.org/drawingml/2006/main">
               <a:ext uri="{FF2B5EF4-FFF2-40B4-BE49-F238E27FC236}">
-                <a16:creationId xmlns:a16="http://schemas.microsoft.com/office/drawing/2014/main" id="{C91524BB-1E2D-468E-81F4-7CF2E77B063D}"/>
+                <a16:creationId xmlns:a16="http://schemas.microsoft.com/office/drawing/2014/main" id="{02A8FC39-BBE9-45B7-951E-5D68438DDDA1}"/>
               </a:ext>
             </a:extLst>
           </p:cNvPr>
@@ -15008,7 +15209,7 @@
           <p:cNvPr id="40" name="">
             <a:extLst xmlns:a="http://schemas.openxmlformats.org/drawingml/2006/main">
               <a:ext uri="{FF2B5EF4-FFF2-40B4-BE49-F238E27FC236}">
-                <a16:creationId xmlns:a16="http://schemas.microsoft.com/office/drawing/2014/main" id="{917BDF11-E1A5-4942-B950-44F73A27D220}"/>
+                <a16:creationId xmlns:a16="http://schemas.microsoft.com/office/drawing/2014/main" id="{F1ABDC55-1F9E-4AB3-B7C4-9B38DEC4FFD7}"/>
               </a:ext>
             </a:extLst>
           </p:cNvPr>
@@ -15041,7 +15242,7 @@
           <p:cNvPr id="41" name="">
             <a:extLst xmlns:a="http://schemas.openxmlformats.org/drawingml/2006/main">
               <a:ext uri="{FF2B5EF4-FFF2-40B4-BE49-F238E27FC236}">
-                <a16:creationId xmlns:a16="http://schemas.microsoft.com/office/drawing/2014/main" id="{00A51447-405D-4FAA-A2FE-D0883F6C5427}"/>
+                <a16:creationId xmlns:a16="http://schemas.microsoft.com/office/drawing/2014/main" id="{F8D3EEB3-1CF4-4473-84CD-C30DEA9F3C36}"/>
               </a:ext>
             </a:extLst>
           </p:cNvPr>
@@ -15091,7 +15292,7 @@
           <p:cNvPr id="42" name="">
             <a:extLst xmlns:a="http://schemas.openxmlformats.org/drawingml/2006/main">
               <a:ext uri="{FF2B5EF4-FFF2-40B4-BE49-F238E27FC236}">
-                <a16:creationId xmlns:a16="http://schemas.microsoft.com/office/drawing/2014/main" id="{39FF14C2-6633-4DDC-B9A6-EDE96F86635C}"/>
+                <a16:creationId xmlns:a16="http://schemas.microsoft.com/office/drawing/2014/main" id="{460674BE-DDDE-45CF-8FAB-C915984E01F5}"/>
               </a:ext>
             </a:extLst>
           </p:cNvPr>
@@ -15124,7 +15325,7 @@
           <p:cNvPr id="43" name="">
             <a:extLst xmlns:a="http://schemas.openxmlformats.org/drawingml/2006/main">
               <a:ext uri="{FF2B5EF4-FFF2-40B4-BE49-F238E27FC236}">
-                <a16:creationId xmlns:a16="http://schemas.microsoft.com/office/drawing/2014/main" id="{B83CC13C-07E3-4570-8C2C-C1A74C69B180}"/>
+                <a16:creationId xmlns:a16="http://schemas.microsoft.com/office/drawing/2014/main" id="{75E458C7-8EA9-4799-AB0A-56E64B8D2858}"/>
               </a:ext>
             </a:extLst>
           </p:cNvPr>
@@ -15174,7 +15375,7 @@
           <p:cNvPr id="44" name="">
             <a:extLst xmlns:a="http://schemas.openxmlformats.org/drawingml/2006/main">
               <a:ext uri="{FF2B5EF4-FFF2-40B4-BE49-F238E27FC236}">
-                <a16:creationId xmlns:a16="http://schemas.microsoft.com/office/drawing/2014/main" id="{0CBF2FFC-2E5F-4295-9799-250DE445D4A5}"/>
+                <a16:creationId xmlns:a16="http://schemas.microsoft.com/office/drawing/2014/main" id="{35765B80-1383-4B2D-97DE-67027D2E9F34}"/>
               </a:ext>
             </a:extLst>
           </p:cNvPr>
@@ -15207,7 +15408,7 @@
           <p:cNvPr id="45" name="">
             <a:extLst xmlns:a="http://schemas.openxmlformats.org/drawingml/2006/main">
               <a:ext uri="{FF2B5EF4-FFF2-40B4-BE49-F238E27FC236}">
-                <a16:creationId xmlns:a16="http://schemas.microsoft.com/office/drawing/2014/main" id="{A1C0806B-E128-4E07-9FA1-A37082CFF488}"/>
+                <a16:creationId xmlns:a16="http://schemas.microsoft.com/office/drawing/2014/main" id="{B7F5A68C-D15C-41A6-86D1-FF18E6B3394F}"/>
               </a:ext>
             </a:extLst>
           </p:cNvPr>
@@ -15257,7 +15458,7 @@
           <p:cNvPr id="46" name="">
             <a:extLst xmlns:a="http://schemas.openxmlformats.org/drawingml/2006/main">
               <a:ext uri="{FF2B5EF4-FFF2-40B4-BE49-F238E27FC236}">
-                <a16:creationId xmlns:a16="http://schemas.microsoft.com/office/drawing/2014/main" id="{20DC4224-6953-4422-B68B-7DF2FAC8B7B6}"/>
+                <a16:creationId xmlns:a16="http://schemas.microsoft.com/office/drawing/2014/main" id="{B7021CB3-792D-4232-937C-80BEF42308F3}"/>
               </a:ext>
             </a:extLst>
           </p:cNvPr>
@@ -15290,7 +15491,7 @@
           <p:cNvPr id="47" name="">
             <a:extLst xmlns:a="http://schemas.openxmlformats.org/drawingml/2006/main">
               <a:ext uri="{FF2B5EF4-FFF2-40B4-BE49-F238E27FC236}">
-                <a16:creationId xmlns:a16="http://schemas.microsoft.com/office/drawing/2014/main" id="{2331EFD3-7C2B-4130-9379-1F4D8F98153C}"/>
+                <a16:creationId xmlns:a16="http://schemas.microsoft.com/office/drawing/2014/main" id="{EB1B6A98-F396-409E-A84E-A80AE2AFDF50}"/>
               </a:ext>
             </a:extLst>
           </p:cNvPr>
@@ -15340,7 +15541,7 @@
           <p:cNvPr id="48" name="">
             <a:extLst xmlns:a="http://schemas.openxmlformats.org/drawingml/2006/main">
               <a:ext uri="{FF2B5EF4-FFF2-40B4-BE49-F238E27FC236}">
-                <a16:creationId xmlns:a16="http://schemas.microsoft.com/office/drawing/2014/main" id="{07E2E43F-7D34-4DB1-AB56-BF586CB4DB8F}"/>
+                <a16:creationId xmlns:a16="http://schemas.microsoft.com/office/drawing/2014/main" id="{B231CC53-F6C0-4925-8A8D-DA5D686DF3B5}"/>
               </a:ext>
             </a:extLst>
           </p:cNvPr>
@@ -15373,7 +15574,7 @@
           <p:cNvPr id="49" name="">
             <a:extLst xmlns:a="http://schemas.openxmlformats.org/drawingml/2006/main">
               <a:ext uri="{FF2B5EF4-FFF2-40B4-BE49-F238E27FC236}">
-                <a16:creationId xmlns:a16="http://schemas.microsoft.com/office/drawing/2014/main" id="{D132AB21-F93F-4AF8-AFD5-9A15AB7C36E8}"/>
+                <a16:creationId xmlns:a16="http://schemas.microsoft.com/office/drawing/2014/main" id="{03B4329A-0B84-49B3-98EC-D835998AC8C6}"/>
               </a:ext>
             </a:extLst>
           </p:cNvPr>
@@ -15423,7 +15624,7 @@
           <p:cNvPr id="50" name="">
             <a:extLst xmlns:a="http://schemas.openxmlformats.org/drawingml/2006/main">
               <a:ext uri="{FF2B5EF4-FFF2-40B4-BE49-F238E27FC236}">
-                <a16:creationId xmlns:a16="http://schemas.microsoft.com/office/drawing/2014/main" id="{479A2829-4091-495D-B193-B81CF9C01897}"/>
+                <a16:creationId xmlns:a16="http://schemas.microsoft.com/office/drawing/2014/main" id="{10ACE60F-130F-4EC0-93F7-1CF847BF2F66}"/>
               </a:ext>
             </a:extLst>
           </p:cNvPr>
@@ -15456,7 +15657,7 @@
           <p:cNvPr id="51" name="">
             <a:extLst xmlns:a="http://schemas.openxmlformats.org/drawingml/2006/main">
               <a:ext uri="{FF2B5EF4-FFF2-40B4-BE49-F238E27FC236}">
-                <a16:creationId xmlns:a16="http://schemas.microsoft.com/office/drawing/2014/main" id="{A199780D-1EC6-4C7C-B8CE-5D65B406C7AE}"/>
+                <a16:creationId xmlns:a16="http://schemas.microsoft.com/office/drawing/2014/main" id="{9D89F7DD-35CD-47C9-AA28-47B99BC80517}"/>
               </a:ext>
             </a:extLst>
           </p:cNvPr>
@@ -15506,7 +15707,7 @@
           <p:cNvPr id="52" name="">
             <a:extLst xmlns:a="http://schemas.openxmlformats.org/drawingml/2006/main">
               <a:ext uri="{FF2B5EF4-FFF2-40B4-BE49-F238E27FC236}">
-                <a16:creationId xmlns:a16="http://schemas.microsoft.com/office/drawing/2014/main" id="{6AA1F182-A18D-4486-8977-EA0813F1479F}"/>
+                <a16:creationId xmlns:a16="http://schemas.microsoft.com/office/drawing/2014/main" id="{926E7216-C49A-4D6D-8B1B-D6B405DD642C}"/>
               </a:ext>
             </a:extLst>
           </p:cNvPr>
@@ -15539,7 +15740,7 @@
           <p:cNvPr id="53" name="">
             <a:extLst xmlns:a="http://schemas.openxmlformats.org/drawingml/2006/main">
               <a:ext uri="{FF2B5EF4-FFF2-40B4-BE49-F238E27FC236}">
-                <a16:creationId xmlns:a16="http://schemas.microsoft.com/office/drawing/2014/main" id="{C746A77D-931D-4E6C-B3A5-8CCE6526C307}"/>
+                <a16:creationId xmlns:a16="http://schemas.microsoft.com/office/drawing/2014/main" id="{3AF9F3EA-6074-4B5F-BAA2-5FEDB5ED1D6B}"/>
               </a:ext>
             </a:extLst>
           </p:cNvPr>
@@ -15589,7 +15790,7 @@
           <p:cNvPr id="54" name="">
             <a:extLst xmlns:a="http://schemas.openxmlformats.org/drawingml/2006/main">
               <a:ext uri="{FF2B5EF4-FFF2-40B4-BE49-F238E27FC236}">
-                <a16:creationId xmlns:a16="http://schemas.microsoft.com/office/drawing/2014/main" id="{B31BAA4B-BFF0-47E1-B708-69DBD2F6166A}"/>
+                <a16:creationId xmlns:a16="http://schemas.microsoft.com/office/drawing/2014/main" id="{697EF355-BC99-43D0-836B-787AAAB16D9E}"/>
               </a:ext>
             </a:extLst>
           </p:cNvPr>
@@ -15622,7 +15823,7 @@
           <p:cNvPr id="55" name="">
             <a:extLst xmlns:a="http://schemas.openxmlformats.org/drawingml/2006/main">
               <a:ext uri="{FF2B5EF4-FFF2-40B4-BE49-F238E27FC236}">
-                <a16:creationId xmlns:a16="http://schemas.microsoft.com/office/drawing/2014/main" id="{35B829AF-188E-473B-9CC0-FE4E048C1C25}"/>
+                <a16:creationId xmlns:a16="http://schemas.microsoft.com/office/drawing/2014/main" id="{4DB68CC2-0E5C-48B9-BCF6-B10BB4D1A613}"/>
               </a:ext>
             </a:extLst>
           </p:cNvPr>
@@ -15672,7 +15873,7 @@
           <p:cNvPr id="56" name="">
             <a:extLst xmlns:a="http://schemas.openxmlformats.org/drawingml/2006/main">
               <a:ext uri="{FF2B5EF4-FFF2-40B4-BE49-F238E27FC236}">
-                <a16:creationId xmlns:a16="http://schemas.microsoft.com/office/drawing/2014/main" id="{D62B5D9B-A6AE-48B6-A58A-8D23B0174B17}"/>
+                <a16:creationId xmlns:a16="http://schemas.microsoft.com/office/drawing/2014/main" id="{4FCE68C0-0E77-4761-8BD6-FEF1510FCA93}"/>
               </a:ext>
             </a:extLst>
           </p:cNvPr>
@@ -15705,7 +15906,7 @@
           <p:cNvPr id="57" name="">
             <a:extLst xmlns:a="http://schemas.openxmlformats.org/drawingml/2006/main">
               <a:ext uri="{FF2B5EF4-FFF2-40B4-BE49-F238E27FC236}">
-                <a16:creationId xmlns:a16="http://schemas.microsoft.com/office/drawing/2014/main" id="{0B900F59-A381-4702-8D31-3B9D813DF179}"/>
+                <a16:creationId xmlns:a16="http://schemas.microsoft.com/office/drawing/2014/main" id="{28A1CC4A-9D88-4EC5-9163-878612E2D008}"/>
               </a:ext>
             </a:extLst>
           </p:cNvPr>
@@ -15755,7 +15956,7 @@
           <p:cNvPr id="58" name="">
             <a:extLst xmlns:a="http://schemas.openxmlformats.org/drawingml/2006/main">
               <a:ext uri="{FF2B5EF4-FFF2-40B4-BE49-F238E27FC236}">
-                <a16:creationId xmlns:a16="http://schemas.microsoft.com/office/drawing/2014/main" id="{B67D59F7-1B56-4220-A5F9-D69E958FF7E5}"/>
+                <a16:creationId xmlns:a16="http://schemas.microsoft.com/office/drawing/2014/main" id="{D72F5538-975D-456E-8543-4FB73316A1A1}"/>
               </a:ext>
             </a:extLst>
           </p:cNvPr>
@@ -15788,7 +15989,7 @@
           <p:cNvPr id="59" name="">
             <a:extLst xmlns:a="http://schemas.openxmlformats.org/drawingml/2006/main">
               <a:ext uri="{FF2B5EF4-FFF2-40B4-BE49-F238E27FC236}">
-                <a16:creationId xmlns:a16="http://schemas.microsoft.com/office/drawing/2014/main" id="{7FDCBCEB-BA25-479D-8D84-DE757F09FD3A}"/>
+                <a16:creationId xmlns:a16="http://schemas.microsoft.com/office/drawing/2014/main" id="{85CB665F-4976-453F-AE57-7BF483708847}"/>
               </a:ext>
             </a:extLst>
           </p:cNvPr>
@@ -15838,7 +16039,7 @@
           <p:cNvPr id="60" name="">
             <a:extLst xmlns:a="http://schemas.openxmlformats.org/drawingml/2006/main">
               <a:ext uri="{FF2B5EF4-FFF2-40B4-BE49-F238E27FC236}">
-                <a16:creationId xmlns:a16="http://schemas.microsoft.com/office/drawing/2014/main" id="{5BC98AF3-DB43-4DCB-ACB0-5C282C5434B3}"/>
+                <a16:creationId xmlns:a16="http://schemas.microsoft.com/office/drawing/2014/main" id="{654189F9-2DD3-4266-A007-3A5D90475ECF}"/>
               </a:ext>
             </a:extLst>
           </p:cNvPr>
@@ -15871,7 +16072,7 @@
           <p:cNvPr id="61" name="">
             <a:extLst xmlns:a="http://schemas.openxmlformats.org/drawingml/2006/main">
               <a:ext uri="{FF2B5EF4-FFF2-40B4-BE49-F238E27FC236}">
-                <a16:creationId xmlns:a16="http://schemas.microsoft.com/office/drawing/2014/main" id="{053FD7A2-2462-4952-8F65-73FDC9BF82F8}"/>
+                <a16:creationId xmlns:a16="http://schemas.microsoft.com/office/drawing/2014/main" id="{2C9E408E-7953-427D-8945-49F0FBFA0540}"/>
               </a:ext>
             </a:extLst>
           </p:cNvPr>
@@ -15921,7 +16122,7 @@
           <p:cNvPr id="62" name="">
             <a:extLst xmlns:a="http://schemas.openxmlformats.org/drawingml/2006/main">
               <a:ext uri="{FF2B5EF4-FFF2-40B4-BE49-F238E27FC236}">
-                <a16:creationId xmlns:a16="http://schemas.microsoft.com/office/drawing/2014/main" id="{15A4CCC7-FEF7-4B18-B676-1C28719C85AD}"/>
+                <a16:creationId xmlns:a16="http://schemas.microsoft.com/office/drawing/2014/main" id="{917715D9-FDB6-47F8-BD33-0DD434E2D558}"/>
               </a:ext>
             </a:extLst>
           </p:cNvPr>
@@ -15954,7 +16155,7 @@
           <p:cNvPr id="63" name="">
             <a:extLst xmlns:a="http://schemas.openxmlformats.org/drawingml/2006/main">
               <a:ext uri="{FF2B5EF4-FFF2-40B4-BE49-F238E27FC236}">
-                <a16:creationId xmlns:a16="http://schemas.microsoft.com/office/drawing/2014/main" id="{655ABE01-EF79-4BB9-AADF-AAFDA68A3BFE}"/>
+                <a16:creationId xmlns:a16="http://schemas.microsoft.com/office/drawing/2014/main" id="{1364AF4D-689C-4B3D-8801-B00C3D6B39BC}"/>
               </a:ext>
             </a:extLst>
           </p:cNvPr>
@@ -16004,7 +16205,7 @@
           <p:cNvPr id="64" name="">
             <a:extLst xmlns:a="http://schemas.openxmlformats.org/drawingml/2006/main">
               <a:ext uri="{FF2B5EF4-FFF2-40B4-BE49-F238E27FC236}">
-                <a16:creationId xmlns:a16="http://schemas.microsoft.com/office/drawing/2014/main" id="{A25AB6AA-BFF5-47F9-B75D-1BFA7D1B2DCC}"/>
+                <a16:creationId xmlns:a16="http://schemas.microsoft.com/office/drawing/2014/main" id="{B2A7F9E0-CD0C-47A5-ACE7-D1EE542C64C9}"/>
               </a:ext>
             </a:extLst>
           </p:cNvPr>
@@ -16037,7 +16238,7 @@
           <p:cNvPr id="65" name="">
             <a:extLst xmlns:a="http://schemas.openxmlformats.org/drawingml/2006/main">
               <a:ext uri="{FF2B5EF4-FFF2-40B4-BE49-F238E27FC236}">
-                <a16:creationId xmlns:a16="http://schemas.microsoft.com/office/drawing/2014/main" id="{BF37124E-269F-444D-8469-03D38676A406}"/>
+                <a16:creationId xmlns:a16="http://schemas.microsoft.com/office/drawing/2014/main" id="{2F55595D-16AE-422A-AB1D-83A7B771A01D}"/>
               </a:ext>
             </a:extLst>
           </p:cNvPr>
@@ -16087,7 +16288,7 @@
           <p:cNvPr id="66" name="">
             <a:extLst xmlns:a="http://schemas.openxmlformats.org/drawingml/2006/main">
               <a:ext uri="{FF2B5EF4-FFF2-40B4-BE49-F238E27FC236}">
-                <a16:creationId xmlns:a16="http://schemas.microsoft.com/office/drawing/2014/main" id="{7C5DE558-DDE8-4393-BC92-486C3F0D3757}"/>
+                <a16:creationId xmlns:a16="http://schemas.microsoft.com/office/drawing/2014/main" id="{4CEDE14B-7B2A-4796-9872-44CF38D3345B}"/>
               </a:ext>
             </a:extLst>
           </p:cNvPr>
@@ -16120,7 +16321,7 @@
           <p:cNvPr id="67" name="">
             <a:extLst xmlns:a="http://schemas.openxmlformats.org/drawingml/2006/main">
               <a:ext uri="{FF2B5EF4-FFF2-40B4-BE49-F238E27FC236}">
-                <a16:creationId xmlns:a16="http://schemas.microsoft.com/office/drawing/2014/main" id="{D5C5FE5A-D3CB-4C70-B2DB-4EB446DFE9DE}"/>
+                <a16:creationId xmlns:a16="http://schemas.microsoft.com/office/drawing/2014/main" id="{43B983B6-BBB2-4D27-B4C9-5E09C39DDCB6}"/>
               </a:ext>
             </a:extLst>
           </p:cNvPr>
@@ -16170,7 +16371,7 @@
           <p:cNvPr id="68" name="">
             <a:extLst xmlns:a="http://schemas.openxmlformats.org/drawingml/2006/main">
               <a:ext uri="{FF2B5EF4-FFF2-40B4-BE49-F238E27FC236}">
-                <a16:creationId xmlns:a16="http://schemas.microsoft.com/office/drawing/2014/main" id="{207EDB5F-BB98-4383-9C69-74E646F4C190}"/>
+                <a16:creationId xmlns:a16="http://schemas.microsoft.com/office/drawing/2014/main" id="{14060AC2-0463-4FFD-8097-078844A85C19}"/>
               </a:ext>
             </a:extLst>
           </p:cNvPr>
@@ -16203,7 +16404,7 @@
           <p:cNvPr id="69" name="">
             <a:extLst xmlns:a="http://schemas.openxmlformats.org/drawingml/2006/main">
               <a:ext uri="{FF2B5EF4-FFF2-40B4-BE49-F238E27FC236}">
-                <a16:creationId xmlns:a16="http://schemas.microsoft.com/office/drawing/2014/main" id="{EA5B909A-5D61-43AF-A41E-982266CDCDBE}"/>
+                <a16:creationId xmlns:a16="http://schemas.microsoft.com/office/drawing/2014/main" id="{29732097-5BD1-4146-8EED-F251F177882E}"/>
               </a:ext>
             </a:extLst>
           </p:cNvPr>
@@ -16253,7 +16454,7 @@
           <p:cNvPr id="70" name="">
             <a:extLst xmlns:a="http://schemas.openxmlformats.org/drawingml/2006/main">
               <a:ext uri="{FF2B5EF4-FFF2-40B4-BE49-F238E27FC236}">
-                <a16:creationId xmlns:a16="http://schemas.microsoft.com/office/drawing/2014/main" id="{94283BF9-11BF-40CA-93BD-45F9D60057CD}"/>
+                <a16:creationId xmlns:a16="http://schemas.microsoft.com/office/drawing/2014/main" id="{61F53094-349F-4D4E-9047-26E2C32EAF5C}"/>
               </a:ext>
             </a:extLst>
           </p:cNvPr>
@@ -16286,7 +16487,7 @@
           <p:cNvPr id="71" name="">
             <a:extLst xmlns:a="http://schemas.openxmlformats.org/drawingml/2006/main">
               <a:ext uri="{FF2B5EF4-FFF2-40B4-BE49-F238E27FC236}">
-                <a16:creationId xmlns:a16="http://schemas.microsoft.com/office/drawing/2014/main" id="{CDA5E48B-1757-4A00-87C6-0274C6065A70}"/>
+                <a16:creationId xmlns:a16="http://schemas.microsoft.com/office/drawing/2014/main" id="{E3CB4A75-051A-4224-91C3-397E451FEF6B}"/>
               </a:ext>
             </a:extLst>
           </p:cNvPr>
@@ -16336,7 +16537,7 @@
           <p:cNvPr id="72" name="">
             <a:extLst xmlns:a="http://schemas.openxmlformats.org/drawingml/2006/main">
               <a:ext uri="{FF2B5EF4-FFF2-40B4-BE49-F238E27FC236}">
-                <a16:creationId xmlns:a16="http://schemas.microsoft.com/office/drawing/2014/main" id="{B2449E89-99EF-416E-8079-F42CE64707CB}"/>
+                <a16:creationId xmlns:a16="http://schemas.microsoft.com/office/drawing/2014/main" id="{1023F059-0E1E-423C-B39F-DDE1B0F83B4A}"/>
               </a:ext>
             </a:extLst>
           </p:cNvPr>
@@ -16369,7 +16570,7 @@
           <p:cNvPr id="73" name="">
             <a:extLst xmlns:a="http://schemas.openxmlformats.org/drawingml/2006/main">
               <a:ext uri="{FF2B5EF4-FFF2-40B4-BE49-F238E27FC236}">
-                <a16:creationId xmlns:a16="http://schemas.microsoft.com/office/drawing/2014/main" id="{32896A24-5107-4B9D-BE88-36D3C05F9E35}"/>
+                <a16:creationId xmlns:a16="http://schemas.microsoft.com/office/drawing/2014/main" id="{6AB16F97-0D26-41B8-9574-8ED3CFBF6F23}"/>
               </a:ext>
             </a:extLst>
           </p:cNvPr>
@@ -16419,7 +16620,7 @@
           <p:cNvPr id="74" name="">
             <a:extLst xmlns:a="http://schemas.openxmlformats.org/drawingml/2006/main">
               <a:ext uri="{FF2B5EF4-FFF2-40B4-BE49-F238E27FC236}">
-                <a16:creationId xmlns:a16="http://schemas.microsoft.com/office/drawing/2014/main" id="{76EF4109-58DA-495A-A426-6C2E317AE8ED}"/>
+                <a16:creationId xmlns:a16="http://schemas.microsoft.com/office/drawing/2014/main" id="{A4150335-B6B8-4FC7-BDBD-79C0D3CF1EA8}"/>
               </a:ext>
             </a:extLst>
           </p:cNvPr>
@@ -16469,7 +16670,7 @@
           <p:cNvPr id="75" name="">
             <a:extLst xmlns:a="http://schemas.openxmlformats.org/drawingml/2006/main">
               <a:ext uri="{FF2B5EF4-FFF2-40B4-BE49-F238E27FC236}">
-                <a16:creationId xmlns:a16="http://schemas.microsoft.com/office/drawing/2014/main" id="{EC67FA08-D655-4E37-9C42-1AA73955FFD6}"/>
+                <a16:creationId xmlns:a16="http://schemas.microsoft.com/office/drawing/2014/main" id="{2C4C9CAA-8D42-4622-8F46-5F2DA9D5079B}"/>
               </a:ext>
             </a:extLst>
           </p:cNvPr>
@@ -16517,7 +16718,7 @@
     </p:spTree>
     <p:extLst>
       <p:ext uri="{BB962C8B-B14F-4D97-AF65-F5344CB8AC3E}">
-        <p14:creationId xmlns:p14="http://schemas.microsoft.com/office/powerpoint/2010/main" val="1651893038"/>
+        <p14:creationId xmlns:p14="http://schemas.microsoft.com/office/powerpoint/2010/main" val="2103574354"/>
       </p:ext>
     </p:extLst>
   </p:cSld>
@@ -16548,7 +16749,7 @@
           <p:cNvPr id="1" name="">
             <a:extLst xmlns:a="http://schemas.openxmlformats.org/drawingml/2006/main">
               <a:ext uri="{FF2B5EF4-FFF2-40B4-BE49-F238E27FC236}">
-                <a16:creationId xmlns:a16="http://schemas.microsoft.com/office/drawing/2014/main" id="{2AA8550A-59D2-4C8F-8E19-7B3052792020}"/>
+                <a16:creationId xmlns:a16="http://schemas.microsoft.com/office/drawing/2014/main" id="{E79EFEB7-3314-407B-831D-FFB8A9ED6AFD}"/>
               </a:ext>
             </a:extLst>
           </p:cNvPr>
@@ -16598,7 +16799,7 @@
           <p:cNvPr id="2" name="">
             <a:extLst xmlns:a="http://schemas.openxmlformats.org/drawingml/2006/main">
               <a:ext uri="{FF2B5EF4-FFF2-40B4-BE49-F238E27FC236}">
-                <a16:creationId xmlns:a16="http://schemas.microsoft.com/office/drawing/2014/main" id="{8E5D9C7A-B248-472D-81E9-2528FCAF7046}"/>
+                <a16:creationId xmlns:a16="http://schemas.microsoft.com/office/drawing/2014/main" id="{88818A01-8870-4138-9E6D-66ED3637F6AD}"/>
               </a:ext>
             </a:extLst>
           </p:cNvPr>
@@ -16648,7 +16849,7 @@
           <p:cNvPr id="3" name="">
             <a:extLst xmlns:a="http://schemas.openxmlformats.org/drawingml/2006/main">
               <a:ext uri="{FF2B5EF4-FFF2-40B4-BE49-F238E27FC236}">
-                <a16:creationId xmlns:a16="http://schemas.microsoft.com/office/drawing/2014/main" id="{1F95256A-A0E7-4C11-BDE4-ED5F2E3F45AD}"/>
+                <a16:creationId xmlns:a16="http://schemas.microsoft.com/office/drawing/2014/main" id="{DF09BC37-9025-4C4A-A4F0-874D29F7BC89}"/>
               </a:ext>
             </a:extLst>
           </p:cNvPr>
@@ -16681,7 +16882,7 @@
           <p:cNvPr id="4" name="">
             <a:extLst xmlns:a="http://schemas.openxmlformats.org/drawingml/2006/main">
               <a:ext uri="{FF2B5EF4-FFF2-40B4-BE49-F238E27FC236}">
-                <a16:creationId xmlns:a16="http://schemas.microsoft.com/office/drawing/2014/main" id="{28AD782F-618F-4A31-BD67-2853681C04C3}"/>
+                <a16:creationId xmlns:a16="http://schemas.microsoft.com/office/drawing/2014/main" id="{0E5C7FC6-5FF6-4B50-9BB9-4946871BF60A}"/>
               </a:ext>
             </a:extLst>
           </p:cNvPr>
@@ -16731,7 +16932,7 @@
           <p:cNvPr id="5" name="">
             <a:extLst xmlns:a="http://schemas.openxmlformats.org/drawingml/2006/main">
               <a:ext uri="{FF2B5EF4-FFF2-40B4-BE49-F238E27FC236}">
-                <a16:creationId xmlns:a16="http://schemas.microsoft.com/office/drawing/2014/main" id="{495F0DEA-8BEF-40CD-AE7B-09AF1D5C5C59}"/>
+                <a16:creationId xmlns:a16="http://schemas.microsoft.com/office/drawing/2014/main" id="{49F2FE05-2480-41CD-A3E7-0411147E5411}"/>
               </a:ext>
             </a:extLst>
           </p:cNvPr>
@@ -16764,7 +16965,7 @@
           <p:cNvPr id="6" name="">
             <a:extLst xmlns:a="http://schemas.openxmlformats.org/drawingml/2006/main">
               <a:ext uri="{FF2B5EF4-FFF2-40B4-BE49-F238E27FC236}">
-                <a16:creationId xmlns:a16="http://schemas.microsoft.com/office/drawing/2014/main" id="{438AF9BF-C691-48D8-BF51-02B4BEC179C3}"/>
+                <a16:creationId xmlns:a16="http://schemas.microsoft.com/office/drawing/2014/main" id="{C8C757E6-8100-431E-BF54-128EEF5A4300}"/>
               </a:ext>
             </a:extLst>
           </p:cNvPr>
@@ -16797,7 +16998,7 @@
           <p:cNvPr id="7" name="">
             <a:extLst xmlns:a="http://schemas.openxmlformats.org/drawingml/2006/main">
               <a:ext uri="{FF2B5EF4-FFF2-40B4-BE49-F238E27FC236}">
-                <a16:creationId xmlns:a16="http://schemas.microsoft.com/office/drawing/2014/main" id="{A469B857-E9C7-4D72-AB32-BB64175BA2BB}"/>
+                <a16:creationId xmlns:a16="http://schemas.microsoft.com/office/drawing/2014/main" id="{BC4A9E8D-D4A3-427D-8200-4C8E0C0E2630}"/>
               </a:ext>
             </a:extLst>
           </p:cNvPr>
@@ -16847,7 +17048,7 @@
           <p:cNvPr id="8" name="">
             <a:extLst xmlns:a="http://schemas.openxmlformats.org/drawingml/2006/main">
               <a:ext uri="{FF2B5EF4-FFF2-40B4-BE49-F238E27FC236}">
-                <a16:creationId xmlns:a16="http://schemas.microsoft.com/office/drawing/2014/main" id="{091B5CB0-AC9B-4CEA-97C5-9C9D364294CB}"/>
+                <a16:creationId xmlns:a16="http://schemas.microsoft.com/office/drawing/2014/main" id="{088695EB-007C-4155-944E-BFB695B521AE}"/>
               </a:ext>
             </a:extLst>
           </p:cNvPr>
@@ -16897,7 +17098,7 @@
           <p:cNvPr id="9" name="">
             <a:extLst xmlns:a="http://schemas.openxmlformats.org/drawingml/2006/main">
               <a:ext uri="{FF2B5EF4-FFF2-40B4-BE49-F238E27FC236}">
-                <a16:creationId xmlns:a16="http://schemas.microsoft.com/office/drawing/2014/main" id="{4D9E93A2-EA95-4278-B5C4-B7A6F1DB9DD2}"/>
+                <a16:creationId xmlns:a16="http://schemas.microsoft.com/office/drawing/2014/main" id="{48D2F02C-4C5C-4543-8DF6-32715DF367C5}"/>
               </a:ext>
             </a:extLst>
           </p:cNvPr>
@@ -16947,7 +17148,7 @@
           <p:cNvPr id="10" name="">
             <a:extLst xmlns:a="http://schemas.openxmlformats.org/drawingml/2006/main">
               <a:ext uri="{FF2B5EF4-FFF2-40B4-BE49-F238E27FC236}">
-                <a16:creationId xmlns:a16="http://schemas.microsoft.com/office/drawing/2014/main" id="{3DB803C9-C653-4D69-BE6B-59CA6A5DBBAF}"/>
+                <a16:creationId xmlns:a16="http://schemas.microsoft.com/office/drawing/2014/main" id="{97D3AA4C-888F-4920-A3BD-2B796E0A77C8}"/>
               </a:ext>
             </a:extLst>
           </p:cNvPr>
@@ -16997,7 +17198,7 @@
           <p:cNvPr id="11" name="">
             <a:extLst xmlns:a="http://schemas.openxmlformats.org/drawingml/2006/main">
               <a:ext uri="{FF2B5EF4-FFF2-40B4-BE49-F238E27FC236}">
-                <a16:creationId xmlns:a16="http://schemas.microsoft.com/office/drawing/2014/main" id="{0400477E-703B-446E-8209-1BC12269DCD5}"/>
+                <a16:creationId xmlns:a16="http://schemas.microsoft.com/office/drawing/2014/main" id="{39D37BE3-0395-4B77-905D-035B82D1C48C}"/>
               </a:ext>
             </a:extLst>
           </p:cNvPr>
@@ -17047,7 +17248,7 @@
           <p:cNvPr id="12" name="">
             <a:extLst xmlns:a="http://schemas.openxmlformats.org/drawingml/2006/main">
               <a:ext uri="{FF2B5EF4-FFF2-40B4-BE49-F238E27FC236}">
-                <a16:creationId xmlns:a16="http://schemas.microsoft.com/office/drawing/2014/main" id="{754B21F3-9CF3-43FC-9749-8DAFFA76C59E}"/>
+                <a16:creationId xmlns:a16="http://schemas.microsoft.com/office/drawing/2014/main" id="{1E79DF80-CCD9-4DE0-8AA0-FE4E215CDE74}"/>
               </a:ext>
             </a:extLst>
           </p:cNvPr>
@@ -17095,7 +17296,7 @@
     </p:spTree>
     <p:extLst>
       <p:ext uri="{BB962C8B-B14F-4D97-AF65-F5344CB8AC3E}">
-        <p14:creationId xmlns:p14="http://schemas.microsoft.com/office/powerpoint/2010/main" val="928944977"/>
+        <p14:creationId xmlns:p14="http://schemas.microsoft.com/office/powerpoint/2010/main" val="135227132"/>
       </p:ext>
     </p:extLst>
   </p:cSld>
@@ -17126,7 +17327,7 @@
           <p:cNvPr id="1" name="">
             <a:extLst xmlns:a="http://schemas.openxmlformats.org/drawingml/2006/main">
               <a:ext uri="{FF2B5EF4-FFF2-40B4-BE49-F238E27FC236}">
-                <a16:creationId xmlns:a16="http://schemas.microsoft.com/office/drawing/2014/main" id="{48C6E41F-C404-4FB9-BE1B-D174B11AE93D}"/>
+                <a16:creationId xmlns:a16="http://schemas.microsoft.com/office/drawing/2014/main" id="{85AC81BB-5A30-4388-9518-23F4B65181D4}"/>
               </a:ext>
             </a:extLst>
           </p:cNvPr>
@@ -17176,7 +17377,7 @@
           <p:cNvPr id="2" name="">
             <a:extLst xmlns:a="http://schemas.openxmlformats.org/drawingml/2006/main">
               <a:ext uri="{FF2B5EF4-FFF2-40B4-BE49-F238E27FC236}">
-                <a16:creationId xmlns:a16="http://schemas.microsoft.com/office/drawing/2014/main" id="{E73A3AF7-770D-4FFC-A35D-7EAFB2A65C31}"/>
+                <a16:creationId xmlns:a16="http://schemas.microsoft.com/office/drawing/2014/main" id="{8EF1FB5C-A767-43CF-B965-F36D5FB0900F}"/>
               </a:ext>
             </a:extLst>
           </p:cNvPr>
@@ -17226,7 +17427,7 @@
           <p:cNvPr id="3" name="">
             <a:extLst xmlns:a="http://schemas.openxmlformats.org/drawingml/2006/main">
               <a:ext uri="{FF2B5EF4-FFF2-40B4-BE49-F238E27FC236}">
-                <a16:creationId xmlns:a16="http://schemas.microsoft.com/office/drawing/2014/main" id="{6EC15118-CC4D-4EA0-9716-17E17221FBA5}"/>
+                <a16:creationId xmlns:a16="http://schemas.microsoft.com/office/drawing/2014/main" id="{AE6ED25F-4FC0-418C-B072-41C20B405DB0}"/>
               </a:ext>
             </a:extLst>
           </p:cNvPr>
@@ -17263,7 +17464,7 @@
           <p:nvPr/>
         </p:nvPicPr>
         <p:blipFill>
-          <a:blip xmlns:r="http://schemas.openxmlformats.org/officeDocument/2006/relationships" xmlns:a="http://schemas.openxmlformats.org/drawingml/2006/main" r:embed="R281602a4e7f641d7"/>
+          <a:blip xmlns:r="http://schemas.openxmlformats.org/officeDocument/2006/relationships" xmlns:a="http://schemas.openxmlformats.org/drawingml/2006/main" r:embed="Rb89d5f5972214f00"/>
           <a:stretch xmlns:a="http://schemas.openxmlformats.org/drawingml/2006/main"/>
         </p:blipFill>
         <p:spPr>
@@ -17281,7 +17482,7 @@
           <p:cNvPr id="5" name="">
             <a:extLst xmlns:a="http://schemas.openxmlformats.org/drawingml/2006/main">
               <a:ext uri="{FF2B5EF4-FFF2-40B4-BE49-F238E27FC236}">
-                <a16:creationId xmlns:a16="http://schemas.microsoft.com/office/drawing/2014/main" id="{8DE7CB70-C795-4967-B4AC-7AAB39036B81}"/>
+                <a16:creationId xmlns:a16="http://schemas.microsoft.com/office/drawing/2014/main" id="{DB9C0096-0081-4E9D-9492-3BBF463459C7}"/>
               </a:ext>
             </a:extLst>
           </p:cNvPr>
@@ -17314,7 +17515,7 @@
           <p:cNvPr id="6" name="">
             <a:extLst xmlns:a="http://schemas.openxmlformats.org/drawingml/2006/main">
               <a:ext uri="{FF2B5EF4-FFF2-40B4-BE49-F238E27FC236}">
-                <a16:creationId xmlns:a16="http://schemas.microsoft.com/office/drawing/2014/main" id="{7E04E161-51DC-4436-834E-89BA463EA9F2}"/>
+                <a16:creationId xmlns:a16="http://schemas.microsoft.com/office/drawing/2014/main" id="{D5B69035-B13B-45F4-B8B0-5944598D9185}"/>
               </a:ext>
             </a:extLst>
           </p:cNvPr>
@@ -17364,7 +17565,7 @@
           <p:cNvPr id="7" name="">
             <a:extLst xmlns:a="http://schemas.openxmlformats.org/drawingml/2006/main">
               <a:ext uri="{FF2B5EF4-FFF2-40B4-BE49-F238E27FC236}">
-                <a16:creationId xmlns:a16="http://schemas.microsoft.com/office/drawing/2014/main" id="{E23D6B31-4F25-4EEF-BDEF-9753B2BB1E76}"/>
+                <a16:creationId xmlns:a16="http://schemas.microsoft.com/office/drawing/2014/main" id="{A42C06BF-29C3-4D22-8F61-F0CEAFE5E43D}"/>
               </a:ext>
             </a:extLst>
           </p:cNvPr>
@@ -17397,7 +17598,7 @@
           <p:cNvPr id="8" name="">
             <a:extLst xmlns:a="http://schemas.openxmlformats.org/drawingml/2006/main">
               <a:ext uri="{FF2B5EF4-FFF2-40B4-BE49-F238E27FC236}">
-                <a16:creationId xmlns:a16="http://schemas.microsoft.com/office/drawing/2014/main" id="{D5F2810A-65A4-4DFE-8373-DC2B4F4321C5}"/>
+                <a16:creationId xmlns:a16="http://schemas.microsoft.com/office/drawing/2014/main" id="{B3F605EA-7591-4781-9C17-91C19992B598}"/>
               </a:ext>
             </a:extLst>
           </p:cNvPr>
@@ -17447,7 +17648,7 @@
           <p:cNvPr id="9" name="">
             <a:extLst xmlns:a="http://schemas.openxmlformats.org/drawingml/2006/main">
               <a:ext uri="{FF2B5EF4-FFF2-40B4-BE49-F238E27FC236}">
-                <a16:creationId xmlns:a16="http://schemas.microsoft.com/office/drawing/2014/main" id="{6C32E0C7-088C-46D9-BFA1-C35724F4FCB5}"/>
+                <a16:creationId xmlns:a16="http://schemas.microsoft.com/office/drawing/2014/main" id="{EE6A9795-5F17-4896-9D0C-FCCCDD6EA06C}"/>
               </a:ext>
             </a:extLst>
           </p:cNvPr>
@@ -17480,7 +17681,7 @@
           <p:cNvPr id="10" name="">
             <a:extLst xmlns:a="http://schemas.openxmlformats.org/drawingml/2006/main">
               <a:ext uri="{FF2B5EF4-FFF2-40B4-BE49-F238E27FC236}">
-                <a16:creationId xmlns:a16="http://schemas.microsoft.com/office/drawing/2014/main" id="{2D92957B-F5EC-4E91-9190-48C5817292C6}"/>
+                <a16:creationId xmlns:a16="http://schemas.microsoft.com/office/drawing/2014/main" id="{9B705561-CACF-4A51-B9C5-A974B42765F0}"/>
               </a:ext>
             </a:extLst>
           </p:cNvPr>
@@ -17530,7 +17731,7 @@
           <p:cNvPr id="11" name="">
             <a:extLst xmlns:a="http://schemas.openxmlformats.org/drawingml/2006/main">
               <a:ext uri="{FF2B5EF4-FFF2-40B4-BE49-F238E27FC236}">
-                <a16:creationId xmlns:a16="http://schemas.microsoft.com/office/drawing/2014/main" id="{D4E60E46-4BEE-4FF7-AFE2-60E9A6B44E46}"/>
+                <a16:creationId xmlns:a16="http://schemas.microsoft.com/office/drawing/2014/main" id="{A24D46AA-7AA5-462C-A6F9-7CD0F7623EBE}"/>
               </a:ext>
             </a:extLst>
           </p:cNvPr>
@@ -17563,7 +17764,7 @@
           <p:cNvPr id="12" name="">
             <a:extLst xmlns:a="http://schemas.openxmlformats.org/drawingml/2006/main">
               <a:ext uri="{FF2B5EF4-FFF2-40B4-BE49-F238E27FC236}">
-                <a16:creationId xmlns:a16="http://schemas.microsoft.com/office/drawing/2014/main" id="{9C3F5E15-389B-49C5-9A4B-7F2BAB49B134}"/>
+                <a16:creationId xmlns:a16="http://schemas.microsoft.com/office/drawing/2014/main" id="{669C93D0-9593-4007-98B8-A499BC2639CC}"/>
               </a:ext>
             </a:extLst>
           </p:cNvPr>
@@ -17613,7 +17814,7 @@
           <p:cNvPr id="13" name="">
             <a:extLst xmlns:a="http://schemas.openxmlformats.org/drawingml/2006/main">
               <a:ext uri="{FF2B5EF4-FFF2-40B4-BE49-F238E27FC236}">
-                <a16:creationId xmlns:a16="http://schemas.microsoft.com/office/drawing/2014/main" id="{95964C2F-A824-4BA9-95A3-6FE8047FE3AF}"/>
+                <a16:creationId xmlns:a16="http://schemas.microsoft.com/office/drawing/2014/main" id="{2CB04F71-BE9B-4A14-A183-2A06A12FF11C}"/>
               </a:ext>
             </a:extLst>
           </p:cNvPr>
@@ -17646,7 +17847,7 @@
           <p:cNvPr id="14" name="">
             <a:extLst xmlns:a="http://schemas.openxmlformats.org/drawingml/2006/main">
               <a:ext uri="{FF2B5EF4-FFF2-40B4-BE49-F238E27FC236}">
-                <a16:creationId xmlns:a16="http://schemas.microsoft.com/office/drawing/2014/main" id="{EA00A8A1-385C-443F-9E0E-C13E79131B4D}"/>
+                <a16:creationId xmlns:a16="http://schemas.microsoft.com/office/drawing/2014/main" id="{68CB3E30-DA05-4653-A46A-BA804BC62875}"/>
               </a:ext>
             </a:extLst>
           </p:cNvPr>
@@ -17696,7 +17897,7 @@
           <p:cNvPr id="15" name="">
             <a:extLst xmlns:a="http://schemas.openxmlformats.org/drawingml/2006/main">
               <a:ext uri="{FF2B5EF4-FFF2-40B4-BE49-F238E27FC236}">
-                <a16:creationId xmlns:a16="http://schemas.microsoft.com/office/drawing/2014/main" id="{4861CFEF-0491-43C9-84E1-C0AAFE2C23C4}"/>
+                <a16:creationId xmlns:a16="http://schemas.microsoft.com/office/drawing/2014/main" id="{CB6698CF-A5CF-4EF2-92B6-2C37D0B3D1C4}"/>
               </a:ext>
             </a:extLst>
           </p:cNvPr>
@@ -17746,7 +17947,7 @@
           <p:cNvPr id="16" name="">
             <a:extLst xmlns:a="http://schemas.openxmlformats.org/drawingml/2006/main">
               <a:ext uri="{FF2B5EF4-FFF2-40B4-BE49-F238E27FC236}">
-                <a16:creationId xmlns:a16="http://schemas.microsoft.com/office/drawing/2014/main" id="{420818AB-56E1-4362-9062-3DA616187D95}"/>
+                <a16:creationId xmlns:a16="http://schemas.microsoft.com/office/drawing/2014/main" id="{5024035B-D998-48F1-A8CB-B2EF3B5F0334}"/>
               </a:ext>
             </a:extLst>
           </p:cNvPr>
@@ -17794,7 +17995,1817 @@
     </p:spTree>
     <p:extLst>
       <p:ext uri="{BB962C8B-B14F-4D97-AF65-F5344CB8AC3E}">
-        <p14:creationId xmlns:p14="http://schemas.microsoft.com/office/powerpoint/2010/main" val="2140011815"/>
+        <p14:creationId xmlns:p14="http://schemas.microsoft.com/office/powerpoint/2010/main" val="900169334"/>
+      </p:ext>
+    </p:extLst>
+  </p:cSld>
+</p:sld>
+</file>
+
+<file path=ppt/slides/slide21.xml><?xml version="1.0" encoding="utf-8"?>
+<p:sld xmlns:p="http://schemas.openxmlformats.org/presentationml/2006/main">
+  <p:cSld>
+    <p:bg>
+      <p:bgPr>
+        <a:solidFill xmlns:a="http://schemas.openxmlformats.org/drawingml/2006/main">
+          <a:srgbClr val="FFFFFF"/>
+        </a:solidFill>
+      </p:bgPr>
+    </p:bg>
+    <p:spTree>
+      <p:nvGrpSpPr>
+        <p:cNvPr id="1" name=""/>
+        <p:cNvGrpSpPr/>
+        <p:nvPr/>
+      </p:nvGrpSpPr>
+      <p:grpSpPr>
+        <a:xfrm xmlns:a="http://schemas.openxmlformats.org/drawingml/2006/main"/>
+      </p:grpSpPr>
+      <p:sp>
+        <p:nvSpPr>
+          <p:cNvPr id="1" name="">
+            <a:extLst xmlns:a="http://schemas.openxmlformats.org/drawingml/2006/main">
+              <a:ext uri="{FF2B5EF4-FFF2-40B4-BE49-F238E27FC236}">
+                <a16:creationId xmlns:a16="http://schemas.microsoft.com/office/drawing/2014/main" id="{5A157B4B-3B97-45B4-9850-BED1FA3F733A}"/>
+              </a:ext>
+            </a:extLst>
+          </p:cNvPr>
+          <p:cNvSpPr>
+            <a:spLocks xmlns:a="http://schemas.openxmlformats.org/drawingml/2006/main" noGrp="1"/>
+          </p:cNvSpPr>
+          <p:nvPr/>
+        </p:nvSpPr>
+        <p:spPr>
+          <a:xfrm xmlns:a="http://schemas.openxmlformats.org/drawingml/2006/main">
+            <a:off x="514350" y="266700"/>
+            <a:ext cx="5905500" cy="228600"/>
+          </a:xfrm>
+          <a:prstGeom xmlns:a="http://schemas.openxmlformats.org/drawingml/2006/main" prst="rect">
+            <a:avLst/>
+          </a:prstGeom>
+          <a:noFill xmlns:a="http://schemas.openxmlformats.org/drawingml/2006/main"/>
+          <a:ln xmlns:a="http://schemas.openxmlformats.org/drawingml/2006/main" w="0">
+            <a:noFill/>
+            <a:prstDash val="solid"/>
+          </a:ln>
+        </p:spPr>
+        <p:txBody>
+          <a:bodyPr xmlns:a="http://schemas.openxmlformats.org/drawingml/2006/main"/>
+          <a:lstStyle xmlns:a="http://schemas.openxmlformats.org/drawingml/2006/main"/>
+          <a:p xmlns:a="http://schemas.openxmlformats.org/drawingml/2006/main">
+            <a:pPr>
+              <a:defRPr sz="1050" b="1">
+                <a:solidFill>
+                  <a:srgbClr val="555555"/>
+                </a:solidFill>
+              </a:defRPr>
+            </a:pPr>
+            <a:r>
+              <a:rPr sz="1050" b="1">
+                <a:solidFill>
+                  <a:srgbClr val="555555"/>
+                </a:solidFill>
+              </a:rPr>
+              <a:t>GEN5.3 MOMENTUM CONTEXT-SIZE SCREEN</a:t>
+            </a:r>
+          </a:p>
+        </p:txBody>
+      </p:sp>
+      <p:sp>
+        <p:nvSpPr>
+          <p:cNvPr id="2" name="">
+            <a:extLst xmlns:a="http://schemas.openxmlformats.org/drawingml/2006/main">
+              <a:ext uri="{FF2B5EF4-FFF2-40B4-BE49-F238E27FC236}">
+                <a16:creationId xmlns:a16="http://schemas.microsoft.com/office/drawing/2014/main" id="{6285835D-3486-42D1-AA89-D312A77107C9}"/>
+              </a:ext>
+            </a:extLst>
+          </p:cNvPr>
+          <p:cNvSpPr>
+            <a:spLocks xmlns:a="http://schemas.openxmlformats.org/drawingml/2006/main" noGrp="1"/>
+          </p:cNvSpPr>
+          <p:nvPr/>
+        </p:nvSpPr>
+        <p:spPr>
+          <a:xfrm xmlns:a="http://schemas.openxmlformats.org/drawingml/2006/main">
+            <a:off x="514350" y="628650"/>
+            <a:ext cx="10287000" cy="990600"/>
+          </a:xfrm>
+          <a:prstGeom xmlns:a="http://schemas.openxmlformats.org/drawingml/2006/main" prst="rect">
+            <a:avLst/>
+          </a:prstGeom>
+          <a:noFill xmlns:a="http://schemas.openxmlformats.org/drawingml/2006/main"/>
+          <a:ln xmlns:a="http://schemas.openxmlformats.org/drawingml/2006/main" w="0">
+            <a:noFill/>
+            <a:prstDash val="solid"/>
+          </a:ln>
+        </p:spPr>
+        <p:txBody>
+          <a:bodyPr xmlns:a="http://schemas.openxmlformats.org/drawingml/2006/main"/>
+          <a:lstStyle xmlns:a="http://schemas.openxmlformats.org/drawingml/2006/main"/>
+          <a:p xmlns:a="http://schemas.openxmlformats.org/drawingml/2006/main">
+            <a:pPr>
+              <a:defRPr sz="2850" b="1">
+                <a:solidFill>
+                  <a:srgbClr val="000000"/>
+                </a:solidFill>
+              </a:defRPr>
+            </a:pPr>
+            <a:r>
+              <a:rPr sz="2850" b="1">
+                <a:solidFill>
+                  <a:srgbClr val="000000"/>
+                </a:solidFill>
+              </a:rPr>
+              <a:t>Leveraged active trading needs a same-leverage passive benchmark</a:t>
+            </a:r>
+          </a:p>
+        </p:txBody>
+      </p:sp>
+      <p:sp>
+        <p:nvSpPr>
+          <p:cNvPr id="3" name="">
+            <a:extLst xmlns:a="http://schemas.openxmlformats.org/drawingml/2006/main">
+              <a:ext uri="{FF2B5EF4-FFF2-40B4-BE49-F238E27FC236}">
+                <a16:creationId xmlns:a16="http://schemas.microsoft.com/office/drawing/2014/main" id="{0E277DF3-7808-4D42-B7EC-31ED62987079}"/>
+              </a:ext>
+            </a:extLst>
+          </p:cNvPr>
+          <p:cNvSpPr>
+            <a:spLocks xmlns:a="http://schemas.openxmlformats.org/drawingml/2006/main" noGrp="1"/>
+          </p:cNvSpPr>
+          <p:nvPr/>
+        </p:nvSpPr>
+        <p:spPr>
+          <a:xfrm xmlns:a="http://schemas.openxmlformats.org/drawingml/2006/main">
+            <a:off x="514350" y="1619250"/>
+            <a:ext cx="11163300" cy="9525"/>
+          </a:xfrm>
+          <a:prstGeom xmlns:a="http://schemas.openxmlformats.org/drawingml/2006/main" prst="rect">
+            <a:avLst/>
+          </a:prstGeom>
+          <a:solidFill xmlns:a="http://schemas.openxmlformats.org/drawingml/2006/main">
+            <a:srgbClr val="B8BCC4"/>
+          </a:solidFill>
+          <a:ln xmlns:a="http://schemas.openxmlformats.org/drawingml/2006/main" w="9525">
+            <a:solidFill>
+              <a:srgbClr val="B8BCC4"/>
+            </a:solidFill>
+            <a:prstDash val="solid"/>
+          </a:ln>
+        </p:spPr>
+      </p:sp>
+      <p:sp>
+        <p:nvSpPr>
+          <p:cNvPr id="4" name="">
+            <a:extLst xmlns:a="http://schemas.openxmlformats.org/drawingml/2006/main">
+              <a:ext uri="{FF2B5EF4-FFF2-40B4-BE49-F238E27FC236}">
+                <a16:creationId xmlns:a16="http://schemas.microsoft.com/office/drawing/2014/main" id="{F494ACED-173C-4209-997D-69837A063C54}"/>
+              </a:ext>
+            </a:extLst>
+          </p:cNvPr>
+          <p:cNvSpPr>
+            <a:spLocks xmlns:a="http://schemas.openxmlformats.org/drawingml/2006/main" noGrp="1"/>
+          </p:cNvSpPr>
+          <p:nvPr/>
+        </p:nvSpPr>
+        <p:spPr>
+          <a:xfrm xmlns:a="http://schemas.openxmlformats.org/drawingml/2006/main">
+            <a:off x="800100" y="1885950"/>
+            <a:ext cx="9810750" cy="552450"/>
+          </a:xfrm>
+          <a:prstGeom xmlns:a="http://schemas.openxmlformats.org/drawingml/2006/main" prst="rect">
+            <a:avLst/>
+          </a:prstGeom>
+          <a:noFill xmlns:a="http://schemas.openxmlformats.org/drawingml/2006/main"/>
+          <a:ln xmlns:a="http://schemas.openxmlformats.org/drawingml/2006/main" w="0">
+            <a:noFill/>
+            <a:prstDash val="solid"/>
+          </a:ln>
+        </p:spPr>
+        <p:txBody>
+          <a:bodyPr xmlns:a="http://schemas.openxmlformats.org/drawingml/2006/main"/>
+          <a:lstStyle xmlns:a="http://schemas.openxmlformats.org/drawingml/2006/main"/>
+          <a:p xmlns:a="http://schemas.openxmlformats.org/drawingml/2006/main">
+            <a:pPr>
+              <a:defRPr sz="1650" b="0">
+                <a:solidFill>
+                  <a:srgbClr val="000000"/>
+                </a:solidFill>
+              </a:defRPr>
+            </a:pPr>
+            <a:r>
+              <a:rPr sz="1650" b="0">
+                <a:solidFill>
+                  <a:srgbClr val="000000"/>
+                </a:solidFill>
+              </a:rPr>
+              <a:t>The leverage slice keeps signals, states, entries, exits, and quarterly authority unchanged. Only the portfolio sizing layer changes from 1x to 1.8x.</a:t>
+            </a:r>
+          </a:p>
+        </p:txBody>
+      </p:sp>
+      <p:sp>
+        <p:nvSpPr>
+          <p:cNvPr id="5" name="">
+            <a:extLst xmlns:a="http://schemas.openxmlformats.org/drawingml/2006/main">
+              <a:ext uri="{FF2B5EF4-FFF2-40B4-BE49-F238E27FC236}">
+                <a16:creationId xmlns:a16="http://schemas.microsoft.com/office/drawing/2014/main" id="{3E3DA3EA-FDA0-4FE1-8FFE-F89741670C87}"/>
+              </a:ext>
+            </a:extLst>
+          </p:cNvPr>
+          <p:cNvSpPr>
+            <a:spLocks xmlns:a="http://schemas.openxmlformats.org/drawingml/2006/main" noGrp="1"/>
+          </p:cNvSpPr>
+          <p:nvPr/>
+        </p:nvSpPr>
+        <p:spPr>
+          <a:xfrm xmlns:a="http://schemas.openxmlformats.org/drawingml/2006/main">
+            <a:off x="876300" y="2876550"/>
+            <a:ext cx="4495800" cy="1524000"/>
+          </a:xfrm>
+          <a:prstGeom xmlns:a="http://schemas.openxmlformats.org/drawingml/2006/main" prst="rect">
+            <a:avLst/>
+          </a:prstGeom>
+          <a:solidFill xmlns:a="http://schemas.openxmlformats.org/drawingml/2006/main">
+            <a:srgbClr val="EDEDED"/>
+          </a:solidFill>
+          <a:ln xmlns:a="http://schemas.openxmlformats.org/drawingml/2006/main" w="9525">
+            <a:solidFill>
+              <a:srgbClr val="B8BCC4"/>
+            </a:solidFill>
+            <a:prstDash val="solid"/>
+          </a:ln>
+        </p:spPr>
+      </p:sp>
+      <p:sp>
+        <p:nvSpPr>
+          <p:cNvPr id="6" name="">
+            <a:extLst xmlns:a="http://schemas.openxmlformats.org/drawingml/2006/main">
+              <a:ext uri="{FF2B5EF4-FFF2-40B4-BE49-F238E27FC236}">
+                <a16:creationId xmlns:a16="http://schemas.microsoft.com/office/drawing/2014/main" id="{321823E5-C003-41E4-9288-50844F4C055F}"/>
+              </a:ext>
+            </a:extLst>
+          </p:cNvPr>
+          <p:cNvSpPr>
+            <a:spLocks xmlns:a="http://schemas.openxmlformats.org/drawingml/2006/main" noGrp="1"/>
+          </p:cNvSpPr>
+          <p:nvPr/>
+        </p:nvSpPr>
+        <p:spPr>
+          <a:xfrm xmlns:a="http://schemas.openxmlformats.org/drawingml/2006/main">
+            <a:off x="6362700" y="2876550"/>
+            <a:ext cx="4495800" cy="1524000"/>
+          </a:xfrm>
+          <a:prstGeom xmlns:a="http://schemas.openxmlformats.org/drawingml/2006/main" prst="rect">
+            <a:avLst/>
+          </a:prstGeom>
+          <a:solidFill xmlns:a="http://schemas.openxmlformats.org/drawingml/2006/main">
+            <a:srgbClr val="EDEDED"/>
+          </a:solidFill>
+          <a:ln xmlns:a="http://schemas.openxmlformats.org/drawingml/2006/main" w="9525">
+            <a:solidFill>
+              <a:srgbClr val="B8BCC4"/>
+            </a:solidFill>
+            <a:prstDash val="solid"/>
+          </a:ln>
+        </p:spPr>
+      </p:sp>
+      <p:sp>
+        <p:nvSpPr>
+          <p:cNvPr id="7" name="">
+            <a:extLst xmlns:a="http://schemas.openxmlformats.org/drawingml/2006/main">
+              <a:ext uri="{FF2B5EF4-FFF2-40B4-BE49-F238E27FC236}">
+                <a16:creationId xmlns:a16="http://schemas.microsoft.com/office/drawing/2014/main" id="{611D683A-1132-44E1-95E6-75E2BA612D83}"/>
+              </a:ext>
+            </a:extLst>
+          </p:cNvPr>
+          <p:cNvSpPr>
+            <a:spLocks xmlns:a="http://schemas.openxmlformats.org/drawingml/2006/main" noGrp="1"/>
+          </p:cNvSpPr>
+          <p:nvPr/>
+        </p:nvSpPr>
+        <p:spPr>
+          <a:xfrm xmlns:a="http://schemas.openxmlformats.org/drawingml/2006/main">
+            <a:off x="1181100" y="3143250"/>
+            <a:ext cx="2476500" cy="304800"/>
+          </a:xfrm>
+          <a:prstGeom xmlns:a="http://schemas.openxmlformats.org/drawingml/2006/main" prst="rect">
+            <a:avLst/>
+          </a:prstGeom>
+          <a:noFill xmlns:a="http://schemas.openxmlformats.org/drawingml/2006/main"/>
+          <a:ln xmlns:a="http://schemas.openxmlformats.org/drawingml/2006/main" w="0">
+            <a:noFill/>
+            <a:prstDash val="solid"/>
+          </a:ln>
+        </p:spPr>
+        <p:txBody>
+          <a:bodyPr xmlns:a="http://schemas.openxmlformats.org/drawingml/2006/main"/>
+          <a:lstStyle xmlns:a="http://schemas.openxmlformats.org/drawingml/2006/main"/>
+          <a:p xmlns:a="http://schemas.openxmlformats.org/drawingml/2006/main">
+            <a:pPr>
+              <a:defRPr sz="2025" b="1">
+                <a:solidFill>
+                  <a:srgbClr val="B42318"/>
+                </a:solidFill>
+              </a:defRPr>
+            </a:pPr>
+            <a:r>
+              <a:rPr sz="2025" b="1">
+                <a:solidFill>
+                  <a:srgbClr val="B42318"/>
+                </a:solidFill>
+              </a:rPr>
+              <a:t>Wrong read</a:t>
+            </a:r>
+          </a:p>
+        </p:txBody>
+      </p:sp>
+      <p:sp>
+        <p:nvSpPr>
+          <p:cNvPr id="8" name="">
+            <a:extLst xmlns:a="http://schemas.openxmlformats.org/drawingml/2006/main">
+              <a:ext uri="{FF2B5EF4-FFF2-40B4-BE49-F238E27FC236}">
+                <a16:creationId xmlns:a16="http://schemas.microsoft.com/office/drawing/2014/main" id="{231E19C4-E635-4507-9843-0F23A85A1CA1}"/>
+              </a:ext>
+            </a:extLst>
+          </p:cNvPr>
+          <p:cNvSpPr>
+            <a:spLocks xmlns:a="http://schemas.openxmlformats.org/drawingml/2006/main" noGrp="1"/>
+          </p:cNvSpPr>
+          <p:nvPr/>
+        </p:nvSpPr>
+        <p:spPr>
+          <a:xfrm xmlns:a="http://schemas.openxmlformats.org/drawingml/2006/main">
+            <a:off x="1181100" y="3638550"/>
+            <a:ext cx="3333750" cy="514350"/>
+          </a:xfrm>
+          <a:prstGeom xmlns:a="http://schemas.openxmlformats.org/drawingml/2006/main" prst="rect">
+            <a:avLst/>
+          </a:prstGeom>
+          <a:noFill xmlns:a="http://schemas.openxmlformats.org/drawingml/2006/main"/>
+          <a:ln xmlns:a="http://schemas.openxmlformats.org/drawingml/2006/main" w="0">
+            <a:noFill/>
+            <a:prstDash val="solid"/>
+          </a:ln>
+        </p:spPr>
+        <p:txBody>
+          <a:bodyPr xmlns:a="http://schemas.openxmlformats.org/drawingml/2006/main"/>
+          <a:lstStyle xmlns:a="http://schemas.openxmlformats.org/drawingml/2006/main"/>
+          <a:p xmlns:a="http://schemas.openxmlformats.org/drawingml/2006/main">
+            <a:pPr>
+              <a:defRPr sz="1500" b="0">
+                <a:solidFill>
+                  <a:srgbClr val="555555"/>
+                </a:solidFill>
+              </a:defRPr>
+            </a:pPr>
+            <a:r>
+              <a:rPr sz="1500" b="0">
+                <a:solidFill>
+                  <a:srgbClr val="555555"/>
+                </a:solidFill>
+              </a:rPr>
+              <a:t>Compare 1.8x active return to 1x basket hold, then call the extra return alpha.</a:t>
+            </a:r>
+          </a:p>
+        </p:txBody>
+      </p:sp>
+      <p:sp>
+        <p:nvSpPr>
+          <p:cNvPr id="9" name="">
+            <a:extLst xmlns:a="http://schemas.openxmlformats.org/drawingml/2006/main">
+              <a:ext uri="{FF2B5EF4-FFF2-40B4-BE49-F238E27FC236}">
+                <a16:creationId xmlns:a16="http://schemas.microsoft.com/office/drawing/2014/main" id="{56AE3297-8045-42DA-A9E1-F73465D65073}"/>
+              </a:ext>
+            </a:extLst>
+          </p:cNvPr>
+          <p:cNvSpPr>
+            <a:spLocks xmlns:a="http://schemas.openxmlformats.org/drawingml/2006/main" noGrp="1"/>
+          </p:cNvSpPr>
+          <p:nvPr/>
+        </p:nvSpPr>
+        <p:spPr>
+          <a:xfrm xmlns:a="http://schemas.openxmlformats.org/drawingml/2006/main">
+            <a:off x="6667500" y="3143250"/>
+            <a:ext cx="2476500" cy="304800"/>
+          </a:xfrm>
+          <a:prstGeom xmlns:a="http://schemas.openxmlformats.org/drawingml/2006/main" prst="rect">
+            <a:avLst/>
+          </a:prstGeom>
+          <a:noFill xmlns:a="http://schemas.openxmlformats.org/drawingml/2006/main"/>
+          <a:ln xmlns:a="http://schemas.openxmlformats.org/drawingml/2006/main" w="0">
+            <a:noFill/>
+            <a:prstDash val="solid"/>
+          </a:ln>
+        </p:spPr>
+        <p:txBody>
+          <a:bodyPr xmlns:a="http://schemas.openxmlformats.org/drawingml/2006/main"/>
+          <a:lstStyle xmlns:a="http://schemas.openxmlformats.org/drawingml/2006/main"/>
+          <a:p xmlns:a="http://schemas.openxmlformats.org/drawingml/2006/main">
+            <a:pPr>
+              <a:defRPr sz="2025" b="1">
+                <a:solidFill>
+                  <a:srgbClr val="067647"/>
+                </a:solidFill>
+              </a:defRPr>
+            </a:pPr>
+            <a:r>
+              <a:rPr sz="2025" b="1">
+                <a:solidFill>
+                  <a:srgbClr val="067647"/>
+                </a:solidFill>
+              </a:rPr>
+              <a:t>Fair read</a:t>
+            </a:r>
+          </a:p>
+        </p:txBody>
+      </p:sp>
+      <p:sp>
+        <p:nvSpPr>
+          <p:cNvPr id="10" name="">
+            <a:extLst xmlns:a="http://schemas.openxmlformats.org/drawingml/2006/main">
+              <a:ext uri="{FF2B5EF4-FFF2-40B4-BE49-F238E27FC236}">
+                <a16:creationId xmlns:a16="http://schemas.microsoft.com/office/drawing/2014/main" id="{371B0191-70F5-4A2B-8C5B-26096129BEA4}"/>
+              </a:ext>
+            </a:extLst>
+          </p:cNvPr>
+          <p:cNvSpPr>
+            <a:spLocks xmlns:a="http://schemas.openxmlformats.org/drawingml/2006/main" noGrp="1"/>
+          </p:cNvSpPr>
+          <p:nvPr/>
+        </p:nvSpPr>
+        <p:spPr>
+          <a:xfrm xmlns:a="http://schemas.openxmlformats.org/drawingml/2006/main">
+            <a:off x="6667500" y="3638550"/>
+            <a:ext cx="3333750" cy="514350"/>
+          </a:xfrm>
+          <a:prstGeom xmlns:a="http://schemas.openxmlformats.org/drawingml/2006/main" prst="rect">
+            <a:avLst/>
+          </a:prstGeom>
+          <a:noFill xmlns:a="http://schemas.openxmlformats.org/drawingml/2006/main"/>
+          <a:ln xmlns:a="http://schemas.openxmlformats.org/drawingml/2006/main" w="0">
+            <a:noFill/>
+            <a:prstDash val="solid"/>
+          </a:ln>
+        </p:spPr>
+        <p:txBody>
+          <a:bodyPr xmlns:a="http://schemas.openxmlformats.org/drawingml/2006/main"/>
+          <a:lstStyle xmlns:a="http://schemas.openxmlformats.org/drawingml/2006/main"/>
+          <a:p xmlns:a="http://schemas.openxmlformats.org/drawingml/2006/main">
+            <a:pPr>
+              <a:defRPr sz="1500" b="0">
+                <a:solidFill>
+                  <a:srgbClr val="555555"/>
+                </a:solidFill>
+              </a:defRPr>
+            </a:pPr>
+            <a:r>
+              <a:rPr sz="1500" b="0">
+                <a:solidFill>
+                  <a:srgbClr val="555555"/>
+                </a:solidFill>
+              </a:rPr>
+              <a:t>Compare 1.8x active return to 1.8x equal-weight basket hold over the same dates.</a:t>
+            </a:r>
+          </a:p>
+        </p:txBody>
+      </p:sp>
+      <p:sp>
+        <p:nvSpPr>
+          <p:cNvPr id="11" name="">
+            <a:extLst xmlns:a="http://schemas.openxmlformats.org/drawingml/2006/main">
+              <a:ext uri="{FF2B5EF4-FFF2-40B4-BE49-F238E27FC236}">
+                <a16:creationId xmlns:a16="http://schemas.microsoft.com/office/drawing/2014/main" id="{CE093F68-0E4F-42F1-8A30-5D6F6CDA3797}"/>
+              </a:ext>
+            </a:extLst>
+          </p:cNvPr>
+          <p:cNvSpPr>
+            <a:spLocks xmlns:a="http://schemas.openxmlformats.org/drawingml/2006/main" noGrp="1"/>
+          </p:cNvSpPr>
+          <p:nvPr/>
+        </p:nvSpPr>
+        <p:spPr>
+          <a:xfrm xmlns:a="http://schemas.openxmlformats.org/drawingml/2006/main">
+            <a:off x="1219200" y="5391150"/>
+            <a:ext cx="9525000" cy="514350"/>
+          </a:xfrm>
+          <a:prstGeom xmlns:a="http://schemas.openxmlformats.org/drawingml/2006/main" prst="rect">
+            <a:avLst/>
+          </a:prstGeom>
+          <a:noFill xmlns:a="http://schemas.openxmlformats.org/drawingml/2006/main"/>
+          <a:ln xmlns:a="http://schemas.openxmlformats.org/drawingml/2006/main" w="0">
+            <a:noFill/>
+            <a:prstDash val="solid"/>
+          </a:ln>
+        </p:spPr>
+        <p:txBody>
+          <a:bodyPr xmlns:a="http://schemas.openxmlformats.org/drawingml/2006/main"/>
+          <a:lstStyle xmlns:a="http://schemas.openxmlformats.org/drawingml/2006/main"/>
+          <a:p xmlns:a="http://schemas.openxmlformats.org/drawingml/2006/main">
+            <a:pPr algn="ctr">
+              <a:defRPr sz="1800" b="1">
+                <a:solidFill>
+                  <a:srgbClr val="000000"/>
+                </a:solidFill>
+              </a:defRPr>
+            </a:pPr>
+            <a:r>
+              <a:rPr sz="1800" b="1">
+                <a:solidFill>
+                  <a:srgbClr val="000000"/>
+                </a:solidFill>
+              </a:rPr>
+              <a:t>This keeps leverage as a risk overlay. It prevents sizing from masquerading as a better entry/exit engine.</a:t>
+            </a:r>
+          </a:p>
+        </p:txBody>
+      </p:sp>
+      <p:sp>
+        <p:nvSpPr>
+          <p:cNvPr id="12" name="">
+            <a:extLst xmlns:a="http://schemas.openxmlformats.org/drawingml/2006/main">
+              <a:ext uri="{FF2B5EF4-FFF2-40B4-BE49-F238E27FC236}">
+                <a16:creationId xmlns:a16="http://schemas.microsoft.com/office/drawing/2014/main" id="{C865A93C-388F-42F1-95CF-82A9F1717134}"/>
+              </a:ext>
+            </a:extLst>
+          </p:cNvPr>
+          <p:cNvSpPr>
+            <a:spLocks xmlns:a="http://schemas.openxmlformats.org/drawingml/2006/main" noGrp="1"/>
+          </p:cNvSpPr>
+          <p:nvPr/>
+        </p:nvSpPr>
+        <p:spPr>
+          <a:xfrm xmlns:a="http://schemas.openxmlformats.org/drawingml/2006/main">
+            <a:off x="514350" y="6477000"/>
+            <a:ext cx="11163300" cy="209550"/>
+          </a:xfrm>
+          <a:prstGeom xmlns:a="http://schemas.openxmlformats.org/drawingml/2006/main" prst="rect">
+            <a:avLst/>
+          </a:prstGeom>
+          <a:noFill xmlns:a="http://schemas.openxmlformats.org/drawingml/2006/main"/>
+          <a:ln xmlns:a="http://schemas.openxmlformats.org/drawingml/2006/main" w="0">
+            <a:noFill/>
+            <a:prstDash val="solid"/>
+          </a:ln>
+        </p:spPr>
+        <p:txBody>
+          <a:bodyPr xmlns:a="http://schemas.openxmlformats.org/drawingml/2006/main"/>
+          <a:lstStyle xmlns:a="http://schemas.openxmlformats.org/drawingml/2006/main"/>
+          <a:p xmlns:a="http://schemas.openxmlformats.org/drawingml/2006/main">
+            <a:pPr>
+              <a:defRPr sz="900" b="0">
+                <a:solidFill>
+                  <a:srgbClr val="555555"/>
+                </a:solidFill>
+              </a:defRPr>
+            </a:pPr>
+            <a:r>
+              <a:rPr sz="900" b="0">
+                <a:solidFill>
+                  <a:srgbClr val="555555"/>
+                </a:solidFill>
+              </a:rPr>
+              <a:t>Research/inspection only. Not allocation evidence or live-advice behavior.</a:t>
+            </a:r>
+          </a:p>
+        </p:txBody>
+      </p:sp>
+    </p:spTree>
+    <p:extLst>
+      <p:ext uri="{BB962C8B-B14F-4D97-AF65-F5344CB8AC3E}">
+        <p14:creationId xmlns:p14="http://schemas.microsoft.com/office/powerpoint/2010/main" val="1559826727"/>
+      </p:ext>
+    </p:extLst>
+  </p:cSld>
+</p:sld>
+</file>
+
+<file path=ppt/slides/slide22.xml><?xml version="1.0" encoding="utf-8"?>
+<p:sld xmlns:p="http://schemas.openxmlformats.org/presentationml/2006/main">
+  <p:cSld>
+    <p:bg>
+      <p:bgPr>
+        <a:solidFill xmlns:a="http://schemas.openxmlformats.org/drawingml/2006/main">
+          <a:srgbClr val="FFFFFF"/>
+        </a:solidFill>
+      </p:bgPr>
+    </p:bg>
+    <p:spTree>
+      <p:nvGrpSpPr>
+        <p:cNvPr id="1" name=""/>
+        <p:cNvGrpSpPr/>
+        <p:nvPr/>
+      </p:nvGrpSpPr>
+      <p:grpSpPr>
+        <a:xfrm xmlns:a="http://schemas.openxmlformats.org/drawingml/2006/main"/>
+      </p:grpSpPr>
+      <p:sp>
+        <p:nvSpPr>
+          <p:cNvPr id="1" name="">
+            <a:extLst xmlns:a="http://schemas.openxmlformats.org/drawingml/2006/main">
+              <a:ext uri="{FF2B5EF4-FFF2-40B4-BE49-F238E27FC236}">
+                <a16:creationId xmlns:a16="http://schemas.microsoft.com/office/drawing/2014/main" id="{61E79A88-F41D-4801-BBD9-237A45667F1E}"/>
+              </a:ext>
+            </a:extLst>
+          </p:cNvPr>
+          <p:cNvSpPr>
+            <a:spLocks xmlns:a="http://schemas.openxmlformats.org/drawingml/2006/main" noGrp="1"/>
+          </p:cNvSpPr>
+          <p:nvPr/>
+        </p:nvSpPr>
+        <p:spPr>
+          <a:xfrm xmlns:a="http://schemas.openxmlformats.org/drawingml/2006/main">
+            <a:off x="514350" y="266700"/>
+            <a:ext cx="5905500" cy="228600"/>
+          </a:xfrm>
+          <a:prstGeom xmlns:a="http://schemas.openxmlformats.org/drawingml/2006/main" prst="rect">
+            <a:avLst/>
+          </a:prstGeom>
+          <a:noFill xmlns:a="http://schemas.openxmlformats.org/drawingml/2006/main"/>
+          <a:ln xmlns:a="http://schemas.openxmlformats.org/drawingml/2006/main" w="0">
+            <a:noFill/>
+            <a:prstDash val="solid"/>
+          </a:ln>
+        </p:spPr>
+        <p:txBody>
+          <a:bodyPr xmlns:a="http://schemas.openxmlformats.org/drawingml/2006/main"/>
+          <a:lstStyle xmlns:a="http://schemas.openxmlformats.org/drawingml/2006/main"/>
+          <a:p xmlns:a="http://schemas.openxmlformats.org/drawingml/2006/main">
+            <a:pPr>
+              <a:defRPr sz="1050" b="1">
+                <a:solidFill>
+                  <a:srgbClr val="555555"/>
+                </a:solidFill>
+              </a:defRPr>
+            </a:pPr>
+            <a:r>
+              <a:rPr sz="1050" b="1">
+                <a:solidFill>
+                  <a:srgbClr val="555555"/>
+                </a:solidFill>
+              </a:rPr>
+              <a:t>GEN5.3 MOMENTUM CONTEXT-SIZE SCREEN</a:t>
+            </a:r>
+          </a:p>
+        </p:txBody>
+      </p:sp>
+      <p:sp>
+        <p:nvSpPr>
+          <p:cNvPr id="2" name="">
+            <a:extLst xmlns:a="http://schemas.openxmlformats.org/drawingml/2006/main">
+              <a:ext uri="{FF2B5EF4-FFF2-40B4-BE49-F238E27FC236}">
+                <a16:creationId xmlns:a16="http://schemas.microsoft.com/office/drawing/2014/main" id="{D42850DB-CECA-4479-B55D-2DBCAF36A014}"/>
+              </a:ext>
+            </a:extLst>
+          </p:cNvPr>
+          <p:cNvSpPr>
+            <a:spLocks xmlns:a="http://schemas.openxmlformats.org/drawingml/2006/main" noGrp="1"/>
+          </p:cNvSpPr>
+          <p:nvPr/>
+        </p:nvSpPr>
+        <p:spPr>
+          <a:xfrm xmlns:a="http://schemas.openxmlformats.org/drawingml/2006/main">
+            <a:off x="514350" y="628650"/>
+            <a:ext cx="10287000" cy="990600"/>
+          </a:xfrm>
+          <a:prstGeom xmlns:a="http://schemas.openxmlformats.org/drawingml/2006/main" prst="rect">
+            <a:avLst/>
+          </a:prstGeom>
+          <a:noFill xmlns:a="http://schemas.openxmlformats.org/drawingml/2006/main"/>
+          <a:ln xmlns:a="http://schemas.openxmlformats.org/drawingml/2006/main" w="0">
+            <a:noFill/>
+            <a:prstDash val="solid"/>
+          </a:ln>
+        </p:spPr>
+        <p:txBody>
+          <a:bodyPr xmlns:a="http://schemas.openxmlformats.org/drawingml/2006/main"/>
+          <a:lstStyle xmlns:a="http://schemas.openxmlformats.org/drawingml/2006/main"/>
+          <a:p xmlns:a="http://schemas.openxmlformats.org/drawingml/2006/main">
+            <a:pPr>
+              <a:defRPr sz="2850" b="1">
+                <a:solidFill>
+                  <a:srgbClr val="000000"/>
+                </a:solidFill>
+              </a:defRPr>
+            </a:pPr>
+            <a:r>
+              <a:rPr sz="2850" b="1">
+                <a:solidFill>
+                  <a:srgbClr val="000000"/>
+                </a:solidFill>
+              </a:rPr>
+              <a:t>Trend/breakout leverage made the defensive profile more obvious</a:t>
+            </a:r>
+          </a:p>
+        </p:txBody>
+      </p:sp>
+      <p:sp>
+        <p:nvSpPr>
+          <p:cNvPr id="3" name="">
+            <a:extLst xmlns:a="http://schemas.openxmlformats.org/drawingml/2006/main">
+              <a:ext uri="{FF2B5EF4-FFF2-40B4-BE49-F238E27FC236}">
+                <a16:creationId xmlns:a16="http://schemas.microsoft.com/office/drawing/2014/main" id="{5437F9C8-6CE9-4E30-AB9B-0B7C98846D4F}"/>
+              </a:ext>
+            </a:extLst>
+          </p:cNvPr>
+          <p:cNvSpPr>
+            <a:spLocks xmlns:a="http://schemas.openxmlformats.org/drawingml/2006/main" noGrp="1"/>
+          </p:cNvSpPr>
+          <p:nvPr/>
+        </p:nvSpPr>
+        <p:spPr>
+          <a:xfrm xmlns:a="http://schemas.openxmlformats.org/drawingml/2006/main">
+            <a:off x="514350" y="1619250"/>
+            <a:ext cx="11163300" cy="9525"/>
+          </a:xfrm>
+          <a:prstGeom xmlns:a="http://schemas.openxmlformats.org/drawingml/2006/main" prst="rect">
+            <a:avLst/>
+          </a:prstGeom>
+          <a:solidFill xmlns:a="http://schemas.openxmlformats.org/drawingml/2006/main">
+            <a:srgbClr val="B8BCC4"/>
+          </a:solidFill>
+          <a:ln xmlns:a="http://schemas.openxmlformats.org/drawingml/2006/main" w="9525">
+            <a:solidFill>
+              <a:srgbClr val="B8BCC4"/>
+            </a:solidFill>
+            <a:prstDash val="solid"/>
+          </a:ln>
+        </p:spPr>
+      </p:sp>
+      <p:pic>
+        <p:nvPicPr>
+          <p:cNvPr id="18" name=""/>
+          <p:cNvPicPr>
+            <a:picLocks xmlns:a="http://schemas.openxmlformats.org/drawingml/2006/main" noChangeAspect="1"/>
+          </p:cNvPicPr>
+          <p:nvPr/>
+        </p:nvPicPr>
+        <p:blipFill>
+          <a:blip xmlns:r="http://schemas.openxmlformats.org/officeDocument/2006/relationships" xmlns:a="http://schemas.openxmlformats.org/drawingml/2006/main" r:embed="R9790f149f3da4ac8"/>
+          <a:stretch xmlns:a="http://schemas.openxmlformats.org/drawingml/2006/main"/>
+        </p:blipFill>
+        <p:spPr>
+          <a:xfrm xmlns:a="http://schemas.openxmlformats.org/drawingml/2006/main">
+            <a:off x="1585913" y="1752600"/>
+            <a:ext cx="4143375" cy="3714750"/>
+          </a:xfrm>
+          <a:prstGeom xmlns:a="http://schemas.openxmlformats.org/drawingml/2006/main" prst="rect">
+            <a:avLst/>
+          </a:prstGeom>
+        </p:spPr>
+      </p:pic>
+      <p:sp>
+        <p:nvSpPr>
+          <p:cNvPr id="5" name="">
+            <a:extLst xmlns:a="http://schemas.openxmlformats.org/drawingml/2006/main">
+              <a:ext uri="{FF2B5EF4-FFF2-40B4-BE49-F238E27FC236}">
+                <a16:creationId xmlns:a16="http://schemas.microsoft.com/office/drawing/2014/main" id="{A2FA0679-AF6E-4505-869E-45813FDE936C}"/>
+              </a:ext>
+            </a:extLst>
+          </p:cNvPr>
+          <p:cNvSpPr>
+            <a:spLocks xmlns:a="http://schemas.openxmlformats.org/drawingml/2006/main" noGrp="1"/>
+          </p:cNvSpPr>
+          <p:nvPr/>
+        </p:nvSpPr>
+        <p:spPr>
+          <a:xfrm xmlns:a="http://schemas.openxmlformats.org/drawingml/2006/main">
+            <a:off x="7448550" y="2114550"/>
+            <a:ext cx="3467100" cy="2743200"/>
+          </a:xfrm>
+          <a:prstGeom xmlns:a="http://schemas.openxmlformats.org/drawingml/2006/main" prst="rect">
+            <a:avLst/>
+          </a:prstGeom>
+          <a:solidFill xmlns:a="http://schemas.openxmlformats.org/drawingml/2006/main">
+            <a:srgbClr val="EDEDED"/>
+          </a:solidFill>
+          <a:ln xmlns:a="http://schemas.openxmlformats.org/drawingml/2006/main" w="9525">
+            <a:solidFill>
+              <a:srgbClr val="B8BCC4"/>
+            </a:solidFill>
+            <a:prstDash val="solid"/>
+          </a:ln>
+        </p:spPr>
+      </p:sp>
+      <p:sp>
+        <p:nvSpPr>
+          <p:cNvPr id="6" name="">
+            <a:extLst xmlns:a="http://schemas.openxmlformats.org/drawingml/2006/main">
+              <a:ext uri="{FF2B5EF4-FFF2-40B4-BE49-F238E27FC236}">
+                <a16:creationId xmlns:a16="http://schemas.microsoft.com/office/drawing/2014/main" id="{A271E1C8-8557-4A0A-9C11-6E44A999437A}"/>
+              </a:ext>
+            </a:extLst>
+          </p:cNvPr>
+          <p:cNvSpPr>
+            <a:spLocks xmlns:a="http://schemas.openxmlformats.org/drawingml/2006/main" noGrp="1"/>
+          </p:cNvSpPr>
+          <p:nvPr/>
+        </p:nvSpPr>
+        <p:spPr>
+          <a:xfrm xmlns:a="http://schemas.openxmlformats.org/drawingml/2006/main">
+            <a:off x="7753350" y="2400300"/>
+            <a:ext cx="2571750" cy="304800"/>
+          </a:xfrm>
+          <a:prstGeom xmlns:a="http://schemas.openxmlformats.org/drawingml/2006/main" prst="rect">
+            <a:avLst/>
+          </a:prstGeom>
+          <a:noFill xmlns:a="http://schemas.openxmlformats.org/drawingml/2006/main"/>
+          <a:ln xmlns:a="http://schemas.openxmlformats.org/drawingml/2006/main" w="0">
+            <a:noFill/>
+            <a:prstDash val="solid"/>
+          </a:ln>
+        </p:spPr>
+        <p:txBody>
+          <a:bodyPr xmlns:a="http://schemas.openxmlformats.org/drawingml/2006/main"/>
+          <a:lstStyle xmlns:a="http://schemas.openxmlformats.org/drawingml/2006/main"/>
+          <a:p xmlns:a="http://schemas.openxmlformats.org/drawingml/2006/main">
+            <a:pPr>
+              <a:defRPr sz="1950" b="1">
+                <a:solidFill>
+                  <a:srgbClr val="000000"/>
+                </a:solidFill>
+              </a:defRPr>
+            </a:pPr>
+            <a:r>
+              <a:rPr sz="1950" b="1">
+                <a:solidFill>
+                  <a:srgbClr val="000000"/>
+                </a:solidFill>
+              </a:rPr>
+              <a:t>Same-leverage read</a:t>
+            </a:r>
+          </a:p>
+        </p:txBody>
+      </p:sp>
+      <p:sp>
+        <p:nvSpPr>
+          <p:cNvPr id="7" name="">
+            <a:extLst xmlns:a="http://schemas.openxmlformats.org/drawingml/2006/main">
+              <a:ext uri="{FF2B5EF4-FFF2-40B4-BE49-F238E27FC236}">
+                <a16:creationId xmlns:a16="http://schemas.microsoft.com/office/drawing/2014/main" id="{85FD6ED3-4F62-41BE-9648-7427A271FA8A}"/>
+              </a:ext>
+            </a:extLst>
+          </p:cNvPr>
+          <p:cNvSpPr>
+            <a:spLocks xmlns:a="http://schemas.openxmlformats.org/drawingml/2006/main" noGrp="1"/>
+          </p:cNvSpPr>
+          <p:nvPr/>
+        </p:nvSpPr>
+        <p:spPr>
+          <a:xfrm xmlns:a="http://schemas.openxmlformats.org/drawingml/2006/main">
+            <a:off x="7753350" y="3086100"/>
+            <a:ext cx="76200" cy="76200"/>
+          </a:xfrm>
+          <a:prstGeom xmlns:a="http://schemas.openxmlformats.org/drawingml/2006/main" prst="rect">
+            <a:avLst/>
+          </a:prstGeom>
+          <a:solidFill xmlns:a="http://schemas.openxmlformats.org/drawingml/2006/main">
+            <a:srgbClr val="FF6B35"/>
+          </a:solidFill>
+          <a:ln xmlns:a="http://schemas.openxmlformats.org/drawingml/2006/main" w="9525">
+            <a:solidFill>
+              <a:srgbClr val="FF6B35"/>
+            </a:solidFill>
+            <a:prstDash val="solid"/>
+          </a:ln>
+        </p:spPr>
+      </p:sp>
+      <p:sp>
+        <p:nvSpPr>
+          <p:cNvPr id="8" name="">
+            <a:extLst xmlns:a="http://schemas.openxmlformats.org/drawingml/2006/main">
+              <a:ext uri="{FF2B5EF4-FFF2-40B4-BE49-F238E27FC236}">
+                <a16:creationId xmlns:a16="http://schemas.microsoft.com/office/drawing/2014/main" id="{052B9A2D-5C51-428C-A91E-421B3D5BFE7C}"/>
+              </a:ext>
+            </a:extLst>
+          </p:cNvPr>
+          <p:cNvSpPr>
+            <a:spLocks xmlns:a="http://schemas.openxmlformats.org/drawingml/2006/main" noGrp="1"/>
+          </p:cNvSpPr>
+          <p:nvPr/>
+        </p:nvSpPr>
+        <p:spPr>
+          <a:xfrm xmlns:a="http://schemas.openxmlformats.org/drawingml/2006/main">
+            <a:off x="7962900" y="2990850"/>
+            <a:ext cx="2571750" cy="571500"/>
+          </a:xfrm>
+          <a:prstGeom xmlns:a="http://schemas.openxmlformats.org/drawingml/2006/main" prst="rect">
+            <a:avLst/>
+          </a:prstGeom>
+          <a:noFill xmlns:a="http://schemas.openxmlformats.org/drawingml/2006/main"/>
+          <a:ln xmlns:a="http://schemas.openxmlformats.org/drawingml/2006/main" w="0">
+            <a:noFill/>
+            <a:prstDash val="solid"/>
+          </a:ln>
+        </p:spPr>
+        <p:txBody>
+          <a:bodyPr xmlns:a="http://schemas.openxmlformats.org/drawingml/2006/main"/>
+          <a:lstStyle xmlns:a="http://schemas.openxmlformats.org/drawingml/2006/main"/>
+          <a:p xmlns:a="http://schemas.openxmlformats.org/drawingml/2006/main">
+            <a:pPr>
+              <a:defRPr sz="1200" b="0">
+                <a:solidFill>
+                  <a:srgbClr val="000000"/>
+                </a:solidFill>
+              </a:defRPr>
+            </a:pPr>
+            <a:r>
+              <a:rPr sz="1200" b="0">
+                <a:solidFill>
+                  <a:srgbClr val="000000"/>
+                </a:solidFill>
+              </a:rPr>
+              <a:t>2020: active 108.1%, but 1.8x basket 409.1%.</a:t>
+            </a:r>
+          </a:p>
+        </p:txBody>
+      </p:sp>
+      <p:sp>
+        <p:nvSpPr>
+          <p:cNvPr id="9" name="">
+            <a:extLst xmlns:a="http://schemas.openxmlformats.org/drawingml/2006/main">
+              <a:ext uri="{FF2B5EF4-FFF2-40B4-BE49-F238E27FC236}">
+                <a16:creationId xmlns:a16="http://schemas.microsoft.com/office/drawing/2014/main" id="{DDDB7DD4-DDA7-466F-B8E8-F1B4C6B13930}"/>
+              </a:ext>
+            </a:extLst>
+          </p:cNvPr>
+          <p:cNvSpPr>
+            <a:spLocks xmlns:a="http://schemas.openxmlformats.org/drawingml/2006/main" noGrp="1"/>
+          </p:cNvSpPr>
+          <p:nvPr/>
+        </p:nvSpPr>
+        <p:spPr>
+          <a:xfrm xmlns:a="http://schemas.openxmlformats.org/drawingml/2006/main">
+            <a:off x="7753350" y="3600450"/>
+            <a:ext cx="76200" cy="76200"/>
+          </a:xfrm>
+          <a:prstGeom xmlns:a="http://schemas.openxmlformats.org/drawingml/2006/main" prst="rect">
+            <a:avLst/>
+          </a:prstGeom>
+          <a:solidFill xmlns:a="http://schemas.openxmlformats.org/drawingml/2006/main">
+            <a:srgbClr val="FF6B35"/>
+          </a:solidFill>
+          <a:ln xmlns:a="http://schemas.openxmlformats.org/drawingml/2006/main" w="9525">
+            <a:solidFill>
+              <a:srgbClr val="FF6B35"/>
+            </a:solidFill>
+            <a:prstDash val="solid"/>
+          </a:ln>
+        </p:spPr>
+      </p:sp>
+      <p:sp>
+        <p:nvSpPr>
+          <p:cNvPr id="10" name="">
+            <a:extLst xmlns:a="http://schemas.openxmlformats.org/drawingml/2006/main">
+              <a:ext uri="{FF2B5EF4-FFF2-40B4-BE49-F238E27FC236}">
+                <a16:creationId xmlns:a16="http://schemas.microsoft.com/office/drawing/2014/main" id="{20921072-2875-4061-9670-1C208A8EE1AC}"/>
+              </a:ext>
+            </a:extLst>
+          </p:cNvPr>
+          <p:cNvSpPr>
+            <a:spLocks xmlns:a="http://schemas.openxmlformats.org/drawingml/2006/main" noGrp="1"/>
+          </p:cNvSpPr>
+          <p:nvPr/>
+        </p:nvSpPr>
+        <p:spPr>
+          <a:xfrm xmlns:a="http://schemas.openxmlformats.org/drawingml/2006/main">
+            <a:off x="7962900" y="3505200"/>
+            <a:ext cx="2571750" cy="571500"/>
+          </a:xfrm>
+          <a:prstGeom xmlns:a="http://schemas.openxmlformats.org/drawingml/2006/main" prst="rect">
+            <a:avLst/>
+          </a:prstGeom>
+          <a:noFill xmlns:a="http://schemas.openxmlformats.org/drawingml/2006/main"/>
+          <a:ln xmlns:a="http://schemas.openxmlformats.org/drawingml/2006/main" w="0">
+            <a:noFill/>
+            <a:prstDash val="solid"/>
+          </a:ln>
+        </p:spPr>
+        <p:txBody>
+          <a:bodyPr xmlns:a="http://schemas.openxmlformats.org/drawingml/2006/main"/>
+          <a:lstStyle xmlns:a="http://schemas.openxmlformats.org/drawingml/2006/main"/>
+          <a:p xmlns:a="http://schemas.openxmlformats.org/drawingml/2006/main">
+            <a:pPr>
+              <a:defRPr sz="1200" b="0">
+                <a:solidFill>
+                  <a:srgbClr val="000000"/>
+                </a:solidFill>
+              </a:defRPr>
+            </a:pPr>
+            <a:r>
+              <a:rPr sz="1200" b="0">
+                <a:solidFill>
+                  <a:srgbClr val="000000"/>
+                </a:solidFill>
+              </a:rPr>
+              <a:t>2022: +76.4 pp alpha because the levered basket drawdown was severe.</a:t>
+            </a:r>
+          </a:p>
+        </p:txBody>
+      </p:sp>
+      <p:sp>
+        <p:nvSpPr>
+          <p:cNvPr id="11" name="">
+            <a:extLst xmlns:a="http://schemas.openxmlformats.org/drawingml/2006/main">
+              <a:ext uri="{FF2B5EF4-FFF2-40B4-BE49-F238E27FC236}">
+                <a16:creationId xmlns:a16="http://schemas.microsoft.com/office/drawing/2014/main" id="{C55A54E3-CCF6-42FC-AAA9-FB48F639F3AA}"/>
+              </a:ext>
+            </a:extLst>
+          </p:cNvPr>
+          <p:cNvSpPr>
+            <a:spLocks xmlns:a="http://schemas.openxmlformats.org/drawingml/2006/main" noGrp="1"/>
+          </p:cNvSpPr>
+          <p:nvPr/>
+        </p:nvSpPr>
+        <p:spPr>
+          <a:xfrm xmlns:a="http://schemas.openxmlformats.org/drawingml/2006/main">
+            <a:off x="7753350" y="4114800"/>
+            <a:ext cx="76200" cy="76200"/>
+          </a:xfrm>
+          <a:prstGeom xmlns:a="http://schemas.openxmlformats.org/drawingml/2006/main" prst="rect">
+            <a:avLst/>
+          </a:prstGeom>
+          <a:solidFill xmlns:a="http://schemas.openxmlformats.org/drawingml/2006/main">
+            <a:srgbClr val="FF6B35"/>
+          </a:solidFill>
+          <a:ln xmlns:a="http://schemas.openxmlformats.org/drawingml/2006/main" w="9525">
+            <a:solidFill>
+              <a:srgbClr val="FF6B35"/>
+            </a:solidFill>
+            <a:prstDash val="solid"/>
+          </a:ln>
+        </p:spPr>
+      </p:sp>
+      <p:sp>
+        <p:nvSpPr>
+          <p:cNvPr id="12" name="">
+            <a:extLst xmlns:a="http://schemas.openxmlformats.org/drawingml/2006/main">
+              <a:ext uri="{FF2B5EF4-FFF2-40B4-BE49-F238E27FC236}">
+                <a16:creationId xmlns:a16="http://schemas.microsoft.com/office/drawing/2014/main" id="{3AA358BE-DFFD-42AB-822A-FFBE94ACA52B}"/>
+              </a:ext>
+            </a:extLst>
+          </p:cNvPr>
+          <p:cNvSpPr>
+            <a:spLocks xmlns:a="http://schemas.openxmlformats.org/drawingml/2006/main" noGrp="1"/>
+          </p:cNvSpPr>
+          <p:nvPr/>
+        </p:nvSpPr>
+        <p:spPr>
+          <a:xfrm xmlns:a="http://schemas.openxmlformats.org/drawingml/2006/main">
+            <a:off x="7962900" y="4019550"/>
+            <a:ext cx="2571750" cy="571500"/>
+          </a:xfrm>
+          <a:prstGeom xmlns:a="http://schemas.openxmlformats.org/drawingml/2006/main" prst="rect">
+            <a:avLst/>
+          </a:prstGeom>
+          <a:noFill xmlns:a="http://schemas.openxmlformats.org/drawingml/2006/main"/>
+          <a:ln xmlns:a="http://schemas.openxmlformats.org/drawingml/2006/main" w="0">
+            <a:noFill/>
+            <a:prstDash val="solid"/>
+          </a:ln>
+        </p:spPr>
+        <p:txBody>
+          <a:bodyPr xmlns:a="http://schemas.openxmlformats.org/drawingml/2006/main"/>
+          <a:lstStyle xmlns:a="http://schemas.openxmlformats.org/drawingml/2006/main"/>
+          <a:p xmlns:a="http://schemas.openxmlformats.org/drawingml/2006/main">
+            <a:pPr>
+              <a:defRPr sz="1200" b="0">
+                <a:solidFill>
+                  <a:srgbClr val="000000"/>
+                </a:solidFill>
+              </a:defRPr>
+            </a:pPr>
+            <a:r>
+              <a:rPr sz="1200" b="0">
+                <a:solidFill>
+                  <a:srgbClr val="000000"/>
+                </a:solidFill>
+              </a:rPr>
+              <a:t>This is defense, not solved upside participation.</a:t>
+            </a:r>
+          </a:p>
+        </p:txBody>
+      </p:sp>
+      <p:sp>
+        <p:nvSpPr>
+          <p:cNvPr id="13" name="">
+            <a:extLst xmlns:a="http://schemas.openxmlformats.org/drawingml/2006/main">
+              <a:ext uri="{FF2B5EF4-FFF2-40B4-BE49-F238E27FC236}">
+                <a16:creationId xmlns:a16="http://schemas.microsoft.com/office/drawing/2014/main" id="{90A88842-D297-406B-A2AD-F061AB7C372D}"/>
+              </a:ext>
+            </a:extLst>
+          </p:cNvPr>
+          <p:cNvSpPr>
+            <a:spLocks xmlns:a="http://schemas.openxmlformats.org/drawingml/2006/main" noGrp="1"/>
+          </p:cNvSpPr>
+          <p:nvPr/>
+        </p:nvSpPr>
+        <p:spPr>
+          <a:xfrm xmlns:a="http://schemas.openxmlformats.org/drawingml/2006/main">
+            <a:off x="1066800" y="5791200"/>
+            <a:ext cx="9753600" cy="323850"/>
+          </a:xfrm>
+          <a:prstGeom xmlns:a="http://schemas.openxmlformats.org/drawingml/2006/main" prst="rect">
+            <a:avLst/>
+          </a:prstGeom>
+          <a:noFill xmlns:a="http://schemas.openxmlformats.org/drawingml/2006/main"/>
+          <a:ln xmlns:a="http://schemas.openxmlformats.org/drawingml/2006/main" w="0">
+            <a:noFill/>
+            <a:prstDash val="solid"/>
+          </a:ln>
+        </p:spPr>
+        <p:txBody>
+          <a:bodyPr xmlns:a="http://schemas.openxmlformats.org/drawingml/2006/main"/>
+          <a:lstStyle xmlns:a="http://schemas.openxmlformats.org/drawingml/2006/main"/>
+          <a:p xmlns:a="http://schemas.openxmlformats.org/drawingml/2006/main">
+            <a:pPr algn="ctr">
+              <a:defRPr sz="1650" b="1">
+                <a:solidFill>
+                  <a:srgbClr val="000000"/>
+                </a:solidFill>
+              </a:defRPr>
+            </a:pPr>
+            <a:r>
+              <a:rPr sz="1650" b="1">
+                <a:solidFill>
+                  <a:srgbClr val="000000"/>
+                </a:solidFill>
+              </a:rPr>
+              <a:t>At 1.8x, the same lane produced -301.0 pp alpha in 2020 and +76.4 pp in 2022.</a:t>
+            </a:r>
+          </a:p>
+        </p:txBody>
+      </p:sp>
+      <p:sp>
+        <p:nvSpPr>
+          <p:cNvPr id="14" name="">
+            <a:extLst xmlns:a="http://schemas.openxmlformats.org/drawingml/2006/main">
+              <a:ext uri="{FF2B5EF4-FFF2-40B4-BE49-F238E27FC236}">
+                <a16:creationId xmlns:a16="http://schemas.microsoft.com/office/drawing/2014/main" id="{4D60C645-67E8-4998-B1F6-FED0D81A91DF}"/>
+              </a:ext>
+            </a:extLst>
+          </p:cNvPr>
+          <p:cNvSpPr>
+            <a:spLocks xmlns:a="http://schemas.openxmlformats.org/drawingml/2006/main" noGrp="1"/>
+          </p:cNvSpPr>
+          <p:nvPr/>
+        </p:nvSpPr>
+        <p:spPr>
+          <a:xfrm xmlns:a="http://schemas.openxmlformats.org/drawingml/2006/main">
+            <a:off x="514350" y="6477000"/>
+            <a:ext cx="11163300" cy="209550"/>
+          </a:xfrm>
+          <a:prstGeom xmlns:a="http://schemas.openxmlformats.org/drawingml/2006/main" prst="rect">
+            <a:avLst/>
+          </a:prstGeom>
+          <a:noFill xmlns:a="http://schemas.openxmlformats.org/drawingml/2006/main"/>
+          <a:ln xmlns:a="http://schemas.openxmlformats.org/drawingml/2006/main" w="0">
+            <a:noFill/>
+            <a:prstDash val="solid"/>
+          </a:ln>
+        </p:spPr>
+        <p:txBody>
+          <a:bodyPr xmlns:a="http://schemas.openxmlformats.org/drawingml/2006/main"/>
+          <a:lstStyle xmlns:a="http://schemas.openxmlformats.org/drawingml/2006/main"/>
+          <a:p xmlns:a="http://schemas.openxmlformats.org/drawingml/2006/main">
+            <a:pPr>
+              <a:defRPr sz="900" b="0">
+                <a:solidFill>
+                  <a:srgbClr val="555555"/>
+                </a:solidFill>
+              </a:defRPr>
+            </a:pPr>
+            <a:r>
+              <a:rPr sz="900" b="0">
+                <a:solidFill>
+                  <a:srgbClr val="555555"/>
+                </a:solidFill>
+              </a:rPr>
+              <a:t>Research/inspection only. Not allocation evidence or live-advice behavior.</a:t>
+            </a:r>
+          </a:p>
+        </p:txBody>
+      </p:sp>
+    </p:spTree>
+    <p:extLst>
+      <p:ext uri="{BB962C8B-B14F-4D97-AF65-F5344CB8AC3E}">
+        <p14:creationId xmlns:p14="http://schemas.microsoft.com/office/powerpoint/2010/main" val="1502866528"/>
+      </p:ext>
+    </p:extLst>
+  </p:cSld>
+</p:sld>
+</file>
+
+<file path=ppt/slides/slide23.xml><?xml version="1.0" encoding="utf-8"?>
+<p:sld xmlns:p="http://schemas.openxmlformats.org/presentationml/2006/main">
+  <p:cSld>
+    <p:bg>
+      <p:bgPr>
+        <a:solidFill xmlns:a="http://schemas.openxmlformats.org/drawingml/2006/main">
+          <a:srgbClr val="FFFFFF"/>
+        </a:solidFill>
+      </p:bgPr>
+    </p:bg>
+    <p:spTree>
+      <p:nvGrpSpPr>
+        <p:cNvPr id="1" name=""/>
+        <p:cNvGrpSpPr/>
+        <p:nvPr/>
+      </p:nvGrpSpPr>
+      <p:grpSpPr>
+        <a:xfrm xmlns:a="http://schemas.openxmlformats.org/drawingml/2006/main"/>
+      </p:grpSpPr>
+      <p:sp>
+        <p:nvSpPr>
+          <p:cNvPr id="1" name="">
+            <a:extLst xmlns:a="http://schemas.openxmlformats.org/drawingml/2006/main">
+              <a:ext uri="{FF2B5EF4-FFF2-40B4-BE49-F238E27FC236}">
+                <a16:creationId xmlns:a16="http://schemas.microsoft.com/office/drawing/2014/main" id="{D502DBC2-D42B-448A-9F46-3F75982064D8}"/>
+              </a:ext>
+            </a:extLst>
+          </p:cNvPr>
+          <p:cNvSpPr>
+            <a:spLocks xmlns:a="http://schemas.openxmlformats.org/drawingml/2006/main" noGrp="1"/>
+          </p:cNvSpPr>
+          <p:nvPr/>
+        </p:nvSpPr>
+        <p:spPr>
+          <a:xfrm xmlns:a="http://schemas.openxmlformats.org/drawingml/2006/main">
+            <a:off x="514350" y="266700"/>
+            <a:ext cx="5905500" cy="228600"/>
+          </a:xfrm>
+          <a:prstGeom xmlns:a="http://schemas.openxmlformats.org/drawingml/2006/main" prst="rect">
+            <a:avLst/>
+          </a:prstGeom>
+          <a:noFill xmlns:a="http://schemas.openxmlformats.org/drawingml/2006/main"/>
+          <a:ln xmlns:a="http://schemas.openxmlformats.org/drawingml/2006/main" w="0">
+            <a:noFill/>
+            <a:prstDash val="solid"/>
+          </a:ln>
+        </p:spPr>
+        <p:txBody>
+          <a:bodyPr xmlns:a="http://schemas.openxmlformats.org/drawingml/2006/main"/>
+          <a:lstStyle xmlns:a="http://schemas.openxmlformats.org/drawingml/2006/main"/>
+          <a:p xmlns:a="http://schemas.openxmlformats.org/drawingml/2006/main">
+            <a:pPr>
+              <a:defRPr sz="1050" b="1">
+                <a:solidFill>
+                  <a:srgbClr val="555555"/>
+                </a:solidFill>
+              </a:defRPr>
+            </a:pPr>
+            <a:r>
+              <a:rPr sz="1050" b="1">
+                <a:solidFill>
+                  <a:srgbClr val="555555"/>
+                </a:solidFill>
+              </a:rPr>
+              <a:t>GEN5.3 MOMENTUM CONTEXT-SIZE SCREEN</a:t>
+            </a:r>
+          </a:p>
+        </p:txBody>
+      </p:sp>
+      <p:sp>
+        <p:nvSpPr>
+          <p:cNvPr id="2" name="">
+            <a:extLst xmlns:a="http://schemas.openxmlformats.org/drawingml/2006/main">
+              <a:ext uri="{FF2B5EF4-FFF2-40B4-BE49-F238E27FC236}">
+                <a16:creationId xmlns:a16="http://schemas.microsoft.com/office/drawing/2014/main" id="{103F63AD-2F96-4393-8394-2ADB63117C4A}"/>
+              </a:ext>
+            </a:extLst>
+          </p:cNvPr>
+          <p:cNvSpPr>
+            <a:spLocks xmlns:a="http://schemas.openxmlformats.org/drawingml/2006/main" noGrp="1"/>
+          </p:cNvSpPr>
+          <p:nvPr/>
+        </p:nvSpPr>
+        <p:spPr>
+          <a:xfrm xmlns:a="http://schemas.openxmlformats.org/drawingml/2006/main">
+            <a:off x="514350" y="628650"/>
+            <a:ext cx="10287000" cy="990600"/>
+          </a:xfrm>
+          <a:prstGeom xmlns:a="http://schemas.openxmlformats.org/drawingml/2006/main" prst="rect">
+            <a:avLst/>
+          </a:prstGeom>
+          <a:noFill xmlns:a="http://schemas.openxmlformats.org/drawingml/2006/main"/>
+          <a:ln xmlns:a="http://schemas.openxmlformats.org/drawingml/2006/main" w="0">
+            <a:noFill/>
+            <a:prstDash val="solid"/>
+          </a:ln>
+        </p:spPr>
+        <p:txBody>
+          <a:bodyPr xmlns:a="http://schemas.openxmlformats.org/drawingml/2006/main"/>
+          <a:lstStyle xmlns:a="http://schemas.openxmlformats.org/drawingml/2006/main"/>
+          <a:p xmlns:a="http://schemas.openxmlformats.org/drawingml/2006/main">
+            <a:pPr>
+              <a:defRPr sz="2850" b="1">
+                <a:solidFill>
+                  <a:srgbClr val="000000"/>
+                </a:solidFill>
+              </a:defRPr>
+            </a:pPr>
+            <a:r>
+              <a:rPr sz="2850" b="1">
+                <a:solidFill>
+                  <a:srgbClr val="000000"/>
+                </a:solidFill>
+              </a:rPr>
+              <a:t>Mean reversion with leverage still looks like defense, not upside capture</a:t>
+            </a:r>
+          </a:p>
+        </p:txBody>
+      </p:sp>
+      <p:sp>
+        <p:nvSpPr>
+          <p:cNvPr id="3" name="">
+            <a:extLst xmlns:a="http://schemas.openxmlformats.org/drawingml/2006/main">
+              <a:ext uri="{FF2B5EF4-FFF2-40B4-BE49-F238E27FC236}">
+                <a16:creationId xmlns:a16="http://schemas.microsoft.com/office/drawing/2014/main" id="{E8C6C57B-1FCA-4646-A3A1-8F1781A917CC}"/>
+              </a:ext>
+            </a:extLst>
+          </p:cNvPr>
+          <p:cNvSpPr>
+            <a:spLocks xmlns:a="http://schemas.openxmlformats.org/drawingml/2006/main" noGrp="1"/>
+          </p:cNvSpPr>
+          <p:nvPr/>
+        </p:nvSpPr>
+        <p:spPr>
+          <a:xfrm xmlns:a="http://schemas.openxmlformats.org/drawingml/2006/main">
+            <a:off x="514350" y="1619250"/>
+            <a:ext cx="11163300" cy="9525"/>
+          </a:xfrm>
+          <a:prstGeom xmlns:a="http://schemas.openxmlformats.org/drawingml/2006/main" prst="rect">
+            <a:avLst/>
+          </a:prstGeom>
+          <a:solidFill xmlns:a="http://schemas.openxmlformats.org/drawingml/2006/main">
+            <a:srgbClr val="B8BCC4"/>
+          </a:solidFill>
+          <a:ln xmlns:a="http://schemas.openxmlformats.org/drawingml/2006/main" w="9525">
+            <a:solidFill>
+              <a:srgbClr val="B8BCC4"/>
+            </a:solidFill>
+            <a:prstDash val="solid"/>
+          </a:ln>
+        </p:spPr>
+      </p:sp>
+      <p:pic>
+        <p:nvPicPr>
+          <p:cNvPr id="18" name=""/>
+          <p:cNvPicPr>
+            <a:picLocks xmlns:a="http://schemas.openxmlformats.org/drawingml/2006/main" noChangeAspect="1"/>
+          </p:cNvPicPr>
+          <p:nvPr/>
+        </p:nvPicPr>
+        <p:blipFill>
+          <a:blip xmlns:r="http://schemas.openxmlformats.org/officeDocument/2006/relationships" xmlns:a="http://schemas.openxmlformats.org/drawingml/2006/main" r:embed="R685021adc2aa4820"/>
+          <a:stretch xmlns:a="http://schemas.openxmlformats.org/drawingml/2006/main"/>
+        </p:blipFill>
+        <p:spPr>
+          <a:xfrm xmlns:a="http://schemas.openxmlformats.org/drawingml/2006/main">
+            <a:off x="1585913" y="1752600"/>
+            <a:ext cx="4143375" cy="3714750"/>
+          </a:xfrm>
+          <a:prstGeom xmlns:a="http://schemas.openxmlformats.org/drawingml/2006/main" prst="rect">
+            <a:avLst/>
+          </a:prstGeom>
+        </p:spPr>
+      </p:pic>
+      <p:sp>
+        <p:nvSpPr>
+          <p:cNvPr id="5" name="">
+            <a:extLst xmlns:a="http://schemas.openxmlformats.org/drawingml/2006/main">
+              <a:ext uri="{FF2B5EF4-FFF2-40B4-BE49-F238E27FC236}">
+                <a16:creationId xmlns:a16="http://schemas.microsoft.com/office/drawing/2014/main" id="{58016C73-4835-4BE2-BDFF-5666264BF7D7}"/>
+              </a:ext>
+            </a:extLst>
+          </p:cNvPr>
+          <p:cNvSpPr>
+            <a:spLocks xmlns:a="http://schemas.openxmlformats.org/drawingml/2006/main" noGrp="1"/>
+          </p:cNvSpPr>
+          <p:nvPr/>
+        </p:nvSpPr>
+        <p:spPr>
+          <a:xfrm xmlns:a="http://schemas.openxmlformats.org/drawingml/2006/main">
+            <a:off x="7448550" y="2114550"/>
+            <a:ext cx="3467100" cy="2743200"/>
+          </a:xfrm>
+          <a:prstGeom xmlns:a="http://schemas.openxmlformats.org/drawingml/2006/main" prst="rect">
+            <a:avLst/>
+          </a:prstGeom>
+          <a:solidFill xmlns:a="http://schemas.openxmlformats.org/drawingml/2006/main">
+            <a:srgbClr val="EDEDED"/>
+          </a:solidFill>
+          <a:ln xmlns:a="http://schemas.openxmlformats.org/drawingml/2006/main" w="9525">
+            <a:solidFill>
+              <a:srgbClr val="B8BCC4"/>
+            </a:solidFill>
+            <a:prstDash val="solid"/>
+          </a:ln>
+        </p:spPr>
+      </p:sp>
+      <p:sp>
+        <p:nvSpPr>
+          <p:cNvPr id="6" name="">
+            <a:extLst xmlns:a="http://schemas.openxmlformats.org/drawingml/2006/main">
+              <a:ext uri="{FF2B5EF4-FFF2-40B4-BE49-F238E27FC236}">
+                <a16:creationId xmlns:a16="http://schemas.microsoft.com/office/drawing/2014/main" id="{EE89B5EE-EDAD-4D58-8AF7-0FB1B97DA231}"/>
+              </a:ext>
+            </a:extLst>
+          </p:cNvPr>
+          <p:cNvSpPr>
+            <a:spLocks xmlns:a="http://schemas.openxmlformats.org/drawingml/2006/main" noGrp="1"/>
+          </p:cNvSpPr>
+          <p:nvPr/>
+        </p:nvSpPr>
+        <p:spPr>
+          <a:xfrm xmlns:a="http://schemas.openxmlformats.org/drawingml/2006/main">
+            <a:off x="7753350" y="2400300"/>
+            <a:ext cx="2571750" cy="304800"/>
+          </a:xfrm>
+          <a:prstGeom xmlns:a="http://schemas.openxmlformats.org/drawingml/2006/main" prst="rect">
+            <a:avLst/>
+          </a:prstGeom>
+          <a:noFill xmlns:a="http://schemas.openxmlformats.org/drawingml/2006/main"/>
+          <a:ln xmlns:a="http://schemas.openxmlformats.org/drawingml/2006/main" w="0">
+            <a:noFill/>
+            <a:prstDash val="solid"/>
+          </a:ln>
+        </p:spPr>
+        <p:txBody>
+          <a:bodyPr xmlns:a="http://schemas.openxmlformats.org/drawingml/2006/main"/>
+          <a:lstStyle xmlns:a="http://schemas.openxmlformats.org/drawingml/2006/main"/>
+          <a:p xmlns:a="http://schemas.openxmlformats.org/drawingml/2006/main">
+            <a:pPr>
+              <a:defRPr sz="1950" b="1">
+                <a:solidFill>
+                  <a:srgbClr val="000000"/>
+                </a:solidFill>
+              </a:defRPr>
+            </a:pPr>
+            <a:r>
+              <a:rPr sz="1950" b="1">
+                <a:solidFill>
+                  <a:srgbClr val="000000"/>
+                </a:solidFill>
+              </a:rPr>
+              <a:t>Same-leverage read</a:t>
+            </a:r>
+          </a:p>
+        </p:txBody>
+      </p:sp>
+      <p:sp>
+        <p:nvSpPr>
+          <p:cNvPr id="7" name="">
+            <a:extLst xmlns:a="http://schemas.openxmlformats.org/drawingml/2006/main">
+              <a:ext uri="{FF2B5EF4-FFF2-40B4-BE49-F238E27FC236}">
+                <a16:creationId xmlns:a16="http://schemas.microsoft.com/office/drawing/2014/main" id="{EFD454D3-3C84-481A-AD58-1E27BACD9B98}"/>
+              </a:ext>
+            </a:extLst>
+          </p:cNvPr>
+          <p:cNvSpPr>
+            <a:spLocks xmlns:a="http://schemas.openxmlformats.org/drawingml/2006/main" noGrp="1"/>
+          </p:cNvSpPr>
+          <p:nvPr/>
+        </p:nvSpPr>
+        <p:spPr>
+          <a:xfrm xmlns:a="http://schemas.openxmlformats.org/drawingml/2006/main">
+            <a:off x="7753350" y="3086100"/>
+            <a:ext cx="76200" cy="76200"/>
+          </a:xfrm>
+          <a:prstGeom xmlns:a="http://schemas.openxmlformats.org/drawingml/2006/main" prst="rect">
+            <a:avLst/>
+          </a:prstGeom>
+          <a:solidFill xmlns:a="http://schemas.openxmlformats.org/drawingml/2006/main">
+            <a:srgbClr val="FF6B35"/>
+          </a:solidFill>
+          <a:ln xmlns:a="http://schemas.openxmlformats.org/drawingml/2006/main" w="9525">
+            <a:solidFill>
+              <a:srgbClr val="FF6B35"/>
+            </a:solidFill>
+            <a:prstDash val="solid"/>
+          </a:ln>
+        </p:spPr>
+      </p:sp>
+      <p:sp>
+        <p:nvSpPr>
+          <p:cNvPr id="8" name="">
+            <a:extLst xmlns:a="http://schemas.openxmlformats.org/drawingml/2006/main">
+              <a:ext uri="{FF2B5EF4-FFF2-40B4-BE49-F238E27FC236}">
+                <a16:creationId xmlns:a16="http://schemas.microsoft.com/office/drawing/2014/main" id="{F3EF757D-8BF7-44DA-9AC5-40B29114FE87}"/>
+              </a:ext>
+            </a:extLst>
+          </p:cNvPr>
+          <p:cNvSpPr>
+            <a:spLocks xmlns:a="http://schemas.openxmlformats.org/drawingml/2006/main" noGrp="1"/>
+          </p:cNvSpPr>
+          <p:nvPr/>
+        </p:nvSpPr>
+        <p:spPr>
+          <a:xfrm xmlns:a="http://schemas.openxmlformats.org/drawingml/2006/main">
+            <a:off x="7962900" y="2990850"/>
+            <a:ext cx="2571750" cy="571500"/>
+          </a:xfrm>
+          <a:prstGeom xmlns:a="http://schemas.openxmlformats.org/drawingml/2006/main" prst="rect">
+            <a:avLst/>
+          </a:prstGeom>
+          <a:noFill xmlns:a="http://schemas.openxmlformats.org/drawingml/2006/main"/>
+          <a:ln xmlns:a="http://schemas.openxmlformats.org/drawingml/2006/main" w="0">
+            <a:noFill/>
+            <a:prstDash val="solid"/>
+          </a:ln>
+        </p:spPr>
+        <p:txBody>
+          <a:bodyPr xmlns:a="http://schemas.openxmlformats.org/drawingml/2006/main"/>
+          <a:lstStyle xmlns:a="http://schemas.openxmlformats.org/drawingml/2006/main"/>
+          <a:p xmlns:a="http://schemas.openxmlformats.org/drawingml/2006/main">
+            <a:pPr>
+              <a:defRPr sz="1200" b="0">
+                <a:solidFill>
+                  <a:srgbClr val="000000"/>
+                </a:solidFill>
+              </a:defRPr>
+            </a:pPr>
+            <a:r>
+              <a:rPr sz="1200" b="0">
+                <a:solidFill>
+                  <a:srgbClr val="000000"/>
+                </a:solidFill>
+              </a:rPr>
+              <a:t>2020: active 37.3%, far below the 1.8x basket.</a:t>
+            </a:r>
+          </a:p>
+        </p:txBody>
+      </p:sp>
+      <p:sp>
+        <p:nvSpPr>
+          <p:cNvPr id="9" name="">
+            <a:extLst xmlns:a="http://schemas.openxmlformats.org/drawingml/2006/main">
+              <a:ext uri="{FF2B5EF4-FFF2-40B4-BE49-F238E27FC236}">
+                <a16:creationId xmlns:a16="http://schemas.microsoft.com/office/drawing/2014/main" id="{29151B76-572B-405C-8336-4227F3AD4052}"/>
+              </a:ext>
+            </a:extLst>
+          </p:cNvPr>
+          <p:cNvSpPr>
+            <a:spLocks xmlns:a="http://schemas.openxmlformats.org/drawingml/2006/main" noGrp="1"/>
+          </p:cNvSpPr>
+          <p:nvPr/>
+        </p:nvSpPr>
+        <p:spPr>
+          <a:xfrm xmlns:a="http://schemas.openxmlformats.org/drawingml/2006/main">
+            <a:off x="7753350" y="3600450"/>
+            <a:ext cx="76200" cy="76200"/>
+          </a:xfrm>
+          <a:prstGeom xmlns:a="http://schemas.openxmlformats.org/drawingml/2006/main" prst="rect">
+            <a:avLst/>
+          </a:prstGeom>
+          <a:solidFill xmlns:a="http://schemas.openxmlformats.org/drawingml/2006/main">
+            <a:srgbClr val="FF6B35"/>
+          </a:solidFill>
+          <a:ln xmlns:a="http://schemas.openxmlformats.org/drawingml/2006/main" w="9525">
+            <a:solidFill>
+              <a:srgbClr val="FF6B35"/>
+            </a:solidFill>
+            <a:prstDash val="solid"/>
+          </a:ln>
+        </p:spPr>
+      </p:sp>
+      <p:sp>
+        <p:nvSpPr>
+          <p:cNvPr id="10" name="">
+            <a:extLst xmlns:a="http://schemas.openxmlformats.org/drawingml/2006/main">
+              <a:ext uri="{FF2B5EF4-FFF2-40B4-BE49-F238E27FC236}">
+                <a16:creationId xmlns:a16="http://schemas.microsoft.com/office/drawing/2014/main" id="{EEC967A9-E71D-4278-8BF3-1BF24A43E659}"/>
+              </a:ext>
+            </a:extLst>
+          </p:cNvPr>
+          <p:cNvSpPr>
+            <a:spLocks xmlns:a="http://schemas.openxmlformats.org/drawingml/2006/main" noGrp="1"/>
+          </p:cNvSpPr>
+          <p:nvPr/>
+        </p:nvSpPr>
+        <p:spPr>
+          <a:xfrm xmlns:a="http://schemas.openxmlformats.org/drawingml/2006/main">
+            <a:off x="7962900" y="3505200"/>
+            <a:ext cx="2571750" cy="571500"/>
+          </a:xfrm>
+          <a:prstGeom xmlns:a="http://schemas.openxmlformats.org/drawingml/2006/main" prst="rect">
+            <a:avLst/>
+          </a:prstGeom>
+          <a:noFill xmlns:a="http://schemas.openxmlformats.org/drawingml/2006/main"/>
+          <a:ln xmlns:a="http://schemas.openxmlformats.org/drawingml/2006/main" w="0">
+            <a:noFill/>
+            <a:prstDash val="solid"/>
+          </a:ln>
+        </p:spPr>
+        <p:txBody>
+          <a:bodyPr xmlns:a="http://schemas.openxmlformats.org/drawingml/2006/main"/>
+          <a:lstStyle xmlns:a="http://schemas.openxmlformats.org/drawingml/2006/main"/>
+          <a:p xmlns:a="http://schemas.openxmlformats.org/drawingml/2006/main">
+            <a:pPr>
+              <a:defRPr sz="1200" b="0">
+                <a:solidFill>
+                  <a:srgbClr val="000000"/>
+                </a:solidFill>
+              </a:defRPr>
+            </a:pPr>
+            <a:r>
+              <a:rPr sz="1200" b="0">
+                <a:solidFill>
+                  <a:srgbClr val="000000"/>
+                </a:solidFill>
+              </a:rPr>
+              <a:t>2022: active beat the levered basket by +72.4 pp.</a:t>
+            </a:r>
+          </a:p>
+        </p:txBody>
+      </p:sp>
+      <p:sp>
+        <p:nvSpPr>
+          <p:cNvPr id="11" name="">
+            <a:extLst xmlns:a="http://schemas.openxmlformats.org/drawingml/2006/main">
+              <a:ext uri="{FF2B5EF4-FFF2-40B4-BE49-F238E27FC236}">
+                <a16:creationId xmlns:a16="http://schemas.microsoft.com/office/drawing/2014/main" id="{61A9B8BD-D8D5-4342-8EA8-FC0F5931BDE7}"/>
+              </a:ext>
+            </a:extLst>
+          </p:cNvPr>
+          <p:cNvSpPr>
+            <a:spLocks xmlns:a="http://schemas.openxmlformats.org/drawingml/2006/main" noGrp="1"/>
+          </p:cNvSpPr>
+          <p:nvPr/>
+        </p:nvSpPr>
+        <p:spPr>
+          <a:xfrm xmlns:a="http://schemas.openxmlformats.org/drawingml/2006/main">
+            <a:off x="7753350" y="4114800"/>
+            <a:ext cx="76200" cy="76200"/>
+          </a:xfrm>
+          <a:prstGeom xmlns:a="http://schemas.openxmlformats.org/drawingml/2006/main" prst="rect">
+            <a:avLst/>
+          </a:prstGeom>
+          <a:solidFill xmlns:a="http://schemas.openxmlformats.org/drawingml/2006/main">
+            <a:srgbClr val="FF6B35"/>
+          </a:solidFill>
+          <a:ln xmlns:a="http://schemas.openxmlformats.org/drawingml/2006/main" w="9525">
+            <a:solidFill>
+              <a:srgbClr val="FF6B35"/>
+            </a:solidFill>
+            <a:prstDash val="solid"/>
+          </a:ln>
+        </p:spPr>
+      </p:sp>
+      <p:sp>
+        <p:nvSpPr>
+          <p:cNvPr id="12" name="">
+            <a:extLst xmlns:a="http://schemas.openxmlformats.org/drawingml/2006/main">
+              <a:ext uri="{FF2B5EF4-FFF2-40B4-BE49-F238E27FC236}">
+                <a16:creationId xmlns:a16="http://schemas.microsoft.com/office/drawing/2014/main" id="{D7DF4395-A365-446F-994F-A40D280F3C31}"/>
+              </a:ext>
+            </a:extLst>
+          </p:cNvPr>
+          <p:cNvSpPr>
+            <a:spLocks xmlns:a="http://schemas.openxmlformats.org/drawingml/2006/main" noGrp="1"/>
+          </p:cNvSpPr>
+          <p:nvPr/>
+        </p:nvSpPr>
+        <p:spPr>
+          <a:xfrm xmlns:a="http://schemas.openxmlformats.org/drawingml/2006/main">
+            <a:off x="7962900" y="4019550"/>
+            <a:ext cx="2571750" cy="571500"/>
+          </a:xfrm>
+          <a:prstGeom xmlns:a="http://schemas.openxmlformats.org/drawingml/2006/main" prst="rect">
+            <a:avLst/>
+          </a:prstGeom>
+          <a:noFill xmlns:a="http://schemas.openxmlformats.org/drawingml/2006/main"/>
+          <a:ln xmlns:a="http://schemas.openxmlformats.org/drawingml/2006/main" w="0">
+            <a:noFill/>
+            <a:prstDash val="solid"/>
+          </a:ln>
+        </p:spPr>
+        <p:txBody>
+          <a:bodyPr xmlns:a="http://schemas.openxmlformats.org/drawingml/2006/main"/>
+          <a:lstStyle xmlns:a="http://schemas.openxmlformats.org/drawingml/2006/main"/>
+          <a:p xmlns:a="http://schemas.openxmlformats.org/drawingml/2006/main">
+            <a:pPr>
+              <a:defRPr sz="1200" b="0">
+                <a:solidFill>
+                  <a:srgbClr val="000000"/>
+                </a:solidFill>
+              </a:defRPr>
+            </a:pPr>
+            <a:r>
+              <a:rPr sz="1200" b="0">
+                <a:solidFill>
+                  <a:srgbClr val="000000"/>
+                </a:solidFill>
+              </a:rPr>
+              <a:t>Leverage amplified the defensive value and the rally underparticipation.</a:t>
+            </a:r>
+          </a:p>
+        </p:txBody>
+      </p:sp>
+      <p:sp>
+        <p:nvSpPr>
+          <p:cNvPr id="13" name="">
+            <a:extLst xmlns:a="http://schemas.openxmlformats.org/drawingml/2006/main">
+              <a:ext uri="{FF2B5EF4-FFF2-40B4-BE49-F238E27FC236}">
+                <a16:creationId xmlns:a16="http://schemas.microsoft.com/office/drawing/2014/main" id="{5FF9CAB1-1281-46F7-A54B-6732F0546782}"/>
+              </a:ext>
+            </a:extLst>
+          </p:cNvPr>
+          <p:cNvSpPr>
+            <a:spLocks xmlns:a="http://schemas.openxmlformats.org/drawingml/2006/main" noGrp="1"/>
+          </p:cNvSpPr>
+          <p:nvPr/>
+        </p:nvSpPr>
+        <p:spPr>
+          <a:xfrm xmlns:a="http://schemas.openxmlformats.org/drawingml/2006/main">
+            <a:off x="1066800" y="5791200"/>
+            <a:ext cx="9753600" cy="323850"/>
+          </a:xfrm>
+          <a:prstGeom xmlns:a="http://schemas.openxmlformats.org/drawingml/2006/main" prst="rect">
+            <a:avLst/>
+          </a:prstGeom>
+          <a:noFill xmlns:a="http://schemas.openxmlformats.org/drawingml/2006/main"/>
+          <a:ln xmlns:a="http://schemas.openxmlformats.org/drawingml/2006/main" w="0">
+            <a:noFill/>
+            <a:prstDash val="solid"/>
+          </a:ln>
+        </p:spPr>
+        <p:txBody>
+          <a:bodyPr xmlns:a="http://schemas.openxmlformats.org/drawingml/2006/main"/>
+          <a:lstStyle xmlns:a="http://schemas.openxmlformats.org/drawingml/2006/main"/>
+          <a:p xmlns:a="http://schemas.openxmlformats.org/drawingml/2006/main">
+            <a:pPr algn="ctr">
+              <a:defRPr sz="1650" b="1">
+                <a:solidFill>
+                  <a:srgbClr val="000000"/>
+                </a:solidFill>
+              </a:defRPr>
+            </a:pPr>
+            <a:r>
+              <a:rPr sz="1650" b="1">
+                <a:solidFill>
+                  <a:srgbClr val="000000"/>
+                </a:solidFill>
+              </a:rPr>
+              <a:t>At 1.8x, workhorse mean reversion produced -371.8 pp alpha in 2020 and +72.4 pp in 2022.</a:t>
+            </a:r>
+          </a:p>
+        </p:txBody>
+      </p:sp>
+      <p:sp>
+        <p:nvSpPr>
+          <p:cNvPr id="14" name="">
+            <a:extLst xmlns:a="http://schemas.openxmlformats.org/drawingml/2006/main">
+              <a:ext uri="{FF2B5EF4-FFF2-40B4-BE49-F238E27FC236}">
+                <a16:creationId xmlns:a16="http://schemas.microsoft.com/office/drawing/2014/main" id="{E2A9E04B-15D5-4BA2-B1B6-6C439D94FA19}"/>
+              </a:ext>
+            </a:extLst>
+          </p:cNvPr>
+          <p:cNvSpPr>
+            <a:spLocks xmlns:a="http://schemas.openxmlformats.org/drawingml/2006/main" noGrp="1"/>
+          </p:cNvSpPr>
+          <p:nvPr/>
+        </p:nvSpPr>
+        <p:spPr>
+          <a:xfrm xmlns:a="http://schemas.openxmlformats.org/drawingml/2006/main">
+            <a:off x="514350" y="6477000"/>
+            <a:ext cx="11163300" cy="209550"/>
+          </a:xfrm>
+          <a:prstGeom xmlns:a="http://schemas.openxmlformats.org/drawingml/2006/main" prst="rect">
+            <a:avLst/>
+          </a:prstGeom>
+          <a:noFill xmlns:a="http://schemas.openxmlformats.org/drawingml/2006/main"/>
+          <a:ln xmlns:a="http://schemas.openxmlformats.org/drawingml/2006/main" w="0">
+            <a:noFill/>
+            <a:prstDash val="solid"/>
+          </a:ln>
+        </p:spPr>
+        <p:txBody>
+          <a:bodyPr xmlns:a="http://schemas.openxmlformats.org/drawingml/2006/main"/>
+          <a:lstStyle xmlns:a="http://schemas.openxmlformats.org/drawingml/2006/main"/>
+          <a:p xmlns:a="http://schemas.openxmlformats.org/drawingml/2006/main">
+            <a:pPr>
+              <a:defRPr sz="900" b="0">
+                <a:solidFill>
+                  <a:srgbClr val="555555"/>
+                </a:solidFill>
+              </a:defRPr>
+            </a:pPr>
+            <a:r>
+              <a:rPr sz="900" b="0">
+                <a:solidFill>
+                  <a:srgbClr val="555555"/>
+                </a:solidFill>
+              </a:rPr>
+              <a:t>Research/inspection only. Not allocation evidence or live-advice behavior.</a:t>
+            </a:r>
+          </a:p>
+        </p:txBody>
+      </p:sp>
+    </p:spTree>
+    <p:extLst>
+      <p:ext uri="{BB962C8B-B14F-4D97-AF65-F5344CB8AC3E}">
+        <p14:creationId xmlns:p14="http://schemas.microsoft.com/office/powerpoint/2010/main" val="467753788"/>
       </p:ext>
     </p:extLst>
   </p:cSld>
@@ -17825,7 +19836,7 @@
           <p:cNvPr id="1" name="">
             <a:extLst xmlns:a="http://schemas.openxmlformats.org/drawingml/2006/main">
               <a:ext uri="{FF2B5EF4-FFF2-40B4-BE49-F238E27FC236}">
-                <a16:creationId xmlns:a16="http://schemas.microsoft.com/office/drawing/2014/main" id="{F667122B-C1EE-41A3-832E-43FC0BB9C1F9}"/>
+                <a16:creationId xmlns:a16="http://schemas.microsoft.com/office/drawing/2014/main" id="{4B6423A7-7B58-475A-9546-013FFE49298B}"/>
               </a:ext>
             </a:extLst>
           </p:cNvPr>
@@ -17875,7 +19886,7 @@
           <p:cNvPr id="2" name="">
             <a:extLst xmlns:a="http://schemas.openxmlformats.org/drawingml/2006/main">
               <a:ext uri="{FF2B5EF4-FFF2-40B4-BE49-F238E27FC236}">
-                <a16:creationId xmlns:a16="http://schemas.microsoft.com/office/drawing/2014/main" id="{5012A2B3-6101-48F0-89CD-79E2FE1AE3D5}"/>
+                <a16:creationId xmlns:a16="http://schemas.microsoft.com/office/drawing/2014/main" id="{391F8716-3F8E-4FAA-9546-1F3DFAEC93C5}"/>
               </a:ext>
             </a:extLst>
           </p:cNvPr>
@@ -17925,7 +19936,7 @@
           <p:cNvPr id="3" name="">
             <a:extLst xmlns:a="http://schemas.openxmlformats.org/drawingml/2006/main">
               <a:ext uri="{FF2B5EF4-FFF2-40B4-BE49-F238E27FC236}">
-                <a16:creationId xmlns:a16="http://schemas.microsoft.com/office/drawing/2014/main" id="{95DE9DBD-B300-4C81-A348-BD39385D3492}"/>
+                <a16:creationId xmlns:a16="http://schemas.microsoft.com/office/drawing/2014/main" id="{84F27FD1-0BC8-498B-A871-6F1A19C2A4F9}"/>
               </a:ext>
             </a:extLst>
           </p:cNvPr>
@@ -17958,7 +19969,7 @@
           <p:cNvPr id="4" name="">
             <a:extLst xmlns:a="http://schemas.openxmlformats.org/drawingml/2006/main">
               <a:ext uri="{FF2B5EF4-FFF2-40B4-BE49-F238E27FC236}">
-                <a16:creationId xmlns:a16="http://schemas.microsoft.com/office/drawing/2014/main" id="{91891108-AC33-41E3-8682-8A1F6BDE2AEE}"/>
+                <a16:creationId xmlns:a16="http://schemas.microsoft.com/office/drawing/2014/main" id="{BA6612DC-DE16-4967-A2C2-DF08E324972C}"/>
               </a:ext>
             </a:extLst>
           </p:cNvPr>
@@ -17991,7 +20002,7 @@
           <p:cNvPr id="5" name="">
             <a:extLst xmlns:a="http://schemas.openxmlformats.org/drawingml/2006/main">
               <a:ext uri="{FF2B5EF4-FFF2-40B4-BE49-F238E27FC236}">
-                <a16:creationId xmlns:a16="http://schemas.microsoft.com/office/drawing/2014/main" id="{81C909A7-162F-41B0-9136-CAE7BB4684E3}"/>
+                <a16:creationId xmlns:a16="http://schemas.microsoft.com/office/drawing/2014/main" id="{B46E3A92-B046-4635-82CC-E3477340D90A}"/>
               </a:ext>
             </a:extLst>
           </p:cNvPr>
@@ -18041,7 +20052,7 @@
           <p:cNvPr id="6" name="">
             <a:extLst xmlns:a="http://schemas.openxmlformats.org/drawingml/2006/main">
               <a:ext uri="{FF2B5EF4-FFF2-40B4-BE49-F238E27FC236}">
-                <a16:creationId xmlns:a16="http://schemas.microsoft.com/office/drawing/2014/main" id="{B9A8B77F-E17C-4710-9F44-ED17FBABC720}"/>
+                <a16:creationId xmlns:a16="http://schemas.microsoft.com/office/drawing/2014/main" id="{BDA222FE-A170-459E-83D2-B1EA14EF8389}"/>
               </a:ext>
             </a:extLst>
           </p:cNvPr>
@@ -18091,7 +20102,7 @@
           <p:cNvPr id="7" name="">
             <a:extLst xmlns:a="http://schemas.openxmlformats.org/drawingml/2006/main">
               <a:ext uri="{FF2B5EF4-FFF2-40B4-BE49-F238E27FC236}">
-                <a16:creationId xmlns:a16="http://schemas.microsoft.com/office/drawing/2014/main" id="{E227E116-21AF-4721-85B0-C6F5DBEC2046}"/>
+                <a16:creationId xmlns:a16="http://schemas.microsoft.com/office/drawing/2014/main" id="{A58B6F35-9DEB-40BE-BC26-A846D4FD4C5F}"/>
               </a:ext>
             </a:extLst>
           </p:cNvPr>
@@ -18124,7 +20135,7 @@
           <p:cNvPr id="8" name="">
             <a:extLst xmlns:a="http://schemas.openxmlformats.org/drawingml/2006/main">
               <a:ext uri="{FF2B5EF4-FFF2-40B4-BE49-F238E27FC236}">
-                <a16:creationId xmlns:a16="http://schemas.microsoft.com/office/drawing/2014/main" id="{C7783D6F-2F99-469D-9A06-C54D777F6EE6}"/>
+                <a16:creationId xmlns:a16="http://schemas.microsoft.com/office/drawing/2014/main" id="{68EB5979-8035-40FC-AC84-500C2A7AB581}"/>
               </a:ext>
             </a:extLst>
           </p:cNvPr>
@@ -18174,7 +20185,7 @@
           <p:cNvPr id="9" name="">
             <a:extLst xmlns:a="http://schemas.openxmlformats.org/drawingml/2006/main">
               <a:ext uri="{FF2B5EF4-FFF2-40B4-BE49-F238E27FC236}">
-                <a16:creationId xmlns:a16="http://schemas.microsoft.com/office/drawing/2014/main" id="{23EAD413-7D36-4F82-8CD5-3C9E04870E43}"/>
+                <a16:creationId xmlns:a16="http://schemas.microsoft.com/office/drawing/2014/main" id="{00140208-D438-451D-AF25-32C59675FBC7}"/>
               </a:ext>
             </a:extLst>
           </p:cNvPr>
@@ -18224,7 +20235,7 @@
           <p:cNvPr id="10" name="">
             <a:extLst xmlns:a="http://schemas.openxmlformats.org/drawingml/2006/main">
               <a:ext uri="{FF2B5EF4-FFF2-40B4-BE49-F238E27FC236}">
-                <a16:creationId xmlns:a16="http://schemas.microsoft.com/office/drawing/2014/main" id="{8DDA77A2-F658-4A14-889F-7178866ACEDF}"/>
+                <a16:creationId xmlns:a16="http://schemas.microsoft.com/office/drawing/2014/main" id="{EFF55369-E351-4FCE-9DDB-A45FEBDBD6E4}"/>
               </a:ext>
             </a:extLst>
           </p:cNvPr>
@@ -18257,7 +20268,7 @@
           <p:cNvPr id="11" name="">
             <a:extLst xmlns:a="http://schemas.openxmlformats.org/drawingml/2006/main">
               <a:ext uri="{FF2B5EF4-FFF2-40B4-BE49-F238E27FC236}">
-                <a16:creationId xmlns:a16="http://schemas.microsoft.com/office/drawing/2014/main" id="{72A48A70-4D20-489B-B98D-C40061BFB587}"/>
+                <a16:creationId xmlns:a16="http://schemas.microsoft.com/office/drawing/2014/main" id="{175EFC78-B782-4F97-9818-6F0C7E8098F1}"/>
               </a:ext>
             </a:extLst>
           </p:cNvPr>
@@ -18307,7 +20318,7 @@
           <p:cNvPr id="12" name="">
             <a:extLst xmlns:a="http://schemas.openxmlformats.org/drawingml/2006/main">
               <a:ext uri="{FF2B5EF4-FFF2-40B4-BE49-F238E27FC236}">
-                <a16:creationId xmlns:a16="http://schemas.microsoft.com/office/drawing/2014/main" id="{1B30FB25-2D57-4406-BFE0-13C81F4B2264}"/>
+                <a16:creationId xmlns:a16="http://schemas.microsoft.com/office/drawing/2014/main" id="{2C00CD74-081C-4D51-B24F-5028C4516CB5}"/>
               </a:ext>
             </a:extLst>
           </p:cNvPr>
@@ -18357,7 +20368,7 @@
           <p:cNvPr id="13" name="">
             <a:extLst xmlns:a="http://schemas.openxmlformats.org/drawingml/2006/main">
               <a:ext uri="{FF2B5EF4-FFF2-40B4-BE49-F238E27FC236}">
-                <a16:creationId xmlns:a16="http://schemas.microsoft.com/office/drawing/2014/main" id="{220C7F79-83E4-4839-8C2B-8DF906F6D977}"/>
+                <a16:creationId xmlns:a16="http://schemas.microsoft.com/office/drawing/2014/main" id="{4170F1CD-DA38-425B-8372-DE9CA119CD1D}"/>
               </a:ext>
             </a:extLst>
           </p:cNvPr>
@@ -18390,7 +20401,7 @@
           <p:cNvPr id="14" name="">
             <a:extLst xmlns:a="http://schemas.openxmlformats.org/drawingml/2006/main">
               <a:ext uri="{FF2B5EF4-FFF2-40B4-BE49-F238E27FC236}">
-                <a16:creationId xmlns:a16="http://schemas.microsoft.com/office/drawing/2014/main" id="{712DFAE0-6012-4BD0-B515-5325663F5FA9}"/>
+                <a16:creationId xmlns:a16="http://schemas.microsoft.com/office/drawing/2014/main" id="{746F40DF-8BAB-46C3-A470-581ED9AACCB1}"/>
               </a:ext>
             </a:extLst>
           </p:cNvPr>
@@ -18440,7 +20451,7 @@
           <p:cNvPr id="15" name="">
             <a:extLst xmlns:a="http://schemas.openxmlformats.org/drawingml/2006/main">
               <a:ext uri="{FF2B5EF4-FFF2-40B4-BE49-F238E27FC236}">
-                <a16:creationId xmlns:a16="http://schemas.microsoft.com/office/drawing/2014/main" id="{ABAD598B-345D-467E-90F7-850636949CB3}"/>
+                <a16:creationId xmlns:a16="http://schemas.microsoft.com/office/drawing/2014/main" id="{8499F6DB-9A14-46DF-8DC0-BCA9E089BD84}"/>
               </a:ext>
             </a:extLst>
           </p:cNvPr>
@@ -18490,7 +20501,7 @@
           <p:cNvPr id="16" name="">
             <a:extLst xmlns:a="http://schemas.openxmlformats.org/drawingml/2006/main">
               <a:ext uri="{FF2B5EF4-FFF2-40B4-BE49-F238E27FC236}">
-                <a16:creationId xmlns:a16="http://schemas.microsoft.com/office/drawing/2014/main" id="{6A34E4A2-A1F0-49E8-B2E2-D8EC4207E435}"/>
+                <a16:creationId xmlns:a16="http://schemas.microsoft.com/office/drawing/2014/main" id="{667B853B-E2B5-4E56-BA62-2D52FA7E013E}"/>
               </a:ext>
             </a:extLst>
           </p:cNvPr>
@@ -18540,7 +20551,7 @@
           <p:cNvPr id="17" name="">
             <a:extLst xmlns:a="http://schemas.openxmlformats.org/drawingml/2006/main">
               <a:ext uri="{FF2B5EF4-FFF2-40B4-BE49-F238E27FC236}">
-                <a16:creationId xmlns:a16="http://schemas.microsoft.com/office/drawing/2014/main" id="{C25ECA59-C66E-4078-B1AA-4B048E420AAA}"/>
+                <a16:creationId xmlns:a16="http://schemas.microsoft.com/office/drawing/2014/main" id="{04A696AB-42A6-4955-B52A-6AE50700E0AE}"/>
               </a:ext>
             </a:extLst>
           </p:cNvPr>
@@ -18588,7 +20599,7 @@
     </p:spTree>
     <p:extLst>
       <p:ext uri="{BB962C8B-B14F-4D97-AF65-F5344CB8AC3E}">
-        <p14:creationId xmlns:p14="http://schemas.microsoft.com/office/powerpoint/2010/main" val="1397163753"/>
+        <p14:creationId xmlns:p14="http://schemas.microsoft.com/office/powerpoint/2010/main" val="1997857528"/>
       </p:ext>
     </p:extLst>
   </p:cSld>
@@ -18619,7 +20630,7 @@
           <p:cNvPr id="1" name="">
             <a:extLst xmlns:a="http://schemas.openxmlformats.org/drawingml/2006/main">
               <a:ext uri="{FF2B5EF4-FFF2-40B4-BE49-F238E27FC236}">
-                <a16:creationId xmlns:a16="http://schemas.microsoft.com/office/drawing/2014/main" id="{BFFC6F0C-14B1-4287-ADA9-5503B1D5BD22}"/>
+                <a16:creationId xmlns:a16="http://schemas.microsoft.com/office/drawing/2014/main" id="{30F0B77D-9DD9-4959-95AD-26B2C8FC112C}"/>
               </a:ext>
             </a:extLst>
           </p:cNvPr>
@@ -18669,7 +20680,7 @@
           <p:cNvPr id="2" name="">
             <a:extLst xmlns:a="http://schemas.openxmlformats.org/drawingml/2006/main">
               <a:ext uri="{FF2B5EF4-FFF2-40B4-BE49-F238E27FC236}">
-                <a16:creationId xmlns:a16="http://schemas.microsoft.com/office/drawing/2014/main" id="{65B66DC0-EF00-46BE-9FB6-756995D04E97}"/>
+                <a16:creationId xmlns:a16="http://schemas.microsoft.com/office/drawing/2014/main" id="{3A51751C-B65E-4823-BCFF-99D9AB2846B5}"/>
               </a:ext>
             </a:extLst>
           </p:cNvPr>
@@ -18719,7 +20730,7 @@
           <p:cNvPr id="3" name="">
             <a:extLst xmlns:a="http://schemas.openxmlformats.org/drawingml/2006/main">
               <a:ext uri="{FF2B5EF4-FFF2-40B4-BE49-F238E27FC236}">
-                <a16:creationId xmlns:a16="http://schemas.microsoft.com/office/drawing/2014/main" id="{9E62E4FC-96D7-4812-877C-F129451F55B9}"/>
+                <a16:creationId xmlns:a16="http://schemas.microsoft.com/office/drawing/2014/main" id="{9FB66475-724B-4EE3-B212-C5FCC79A3469}"/>
               </a:ext>
             </a:extLst>
           </p:cNvPr>
@@ -18752,7 +20763,7 @@
           <p:cNvPr id="4" name="">
             <a:extLst xmlns:a="http://schemas.openxmlformats.org/drawingml/2006/main">
               <a:ext uri="{FF2B5EF4-FFF2-40B4-BE49-F238E27FC236}">
-                <a16:creationId xmlns:a16="http://schemas.microsoft.com/office/drawing/2014/main" id="{F628C082-2714-4946-BA96-B1869E307AC3}"/>
+                <a16:creationId xmlns:a16="http://schemas.microsoft.com/office/drawing/2014/main" id="{338BA925-2730-4B97-BC6B-3BD9E9EEB723}"/>
               </a:ext>
             </a:extLst>
           </p:cNvPr>
@@ -18785,7 +20796,7 @@
           <p:cNvPr id="5" name="">
             <a:extLst xmlns:a="http://schemas.openxmlformats.org/drawingml/2006/main">
               <a:ext uri="{FF2B5EF4-FFF2-40B4-BE49-F238E27FC236}">
-                <a16:creationId xmlns:a16="http://schemas.microsoft.com/office/drawing/2014/main" id="{D03026E8-2364-4D3E-8381-5A638A089441}"/>
+                <a16:creationId xmlns:a16="http://schemas.microsoft.com/office/drawing/2014/main" id="{4244626D-BEA0-4A3E-8D3F-D0A9AE500C2D}"/>
               </a:ext>
             </a:extLst>
           </p:cNvPr>
@@ -18835,7 +20846,7 @@
           <p:cNvPr id="6" name="">
             <a:extLst xmlns:a="http://schemas.openxmlformats.org/drawingml/2006/main">
               <a:ext uri="{FF2B5EF4-FFF2-40B4-BE49-F238E27FC236}">
-                <a16:creationId xmlns:a16="http://schemas.microsoft.com/office/drawing/2014/main" id="{7CC79A04-E2B1-4413-A7E7-3CC2BA6DFCA3}"/>
+                <a16:creationId xmlns:a16="http://schemas.microsoft.com/office/drawing/2014/main" id="{6C69830E-B618-4F18-9793-79FB5C279BDB}"/>
               </a:ext>
             </a:extLst>
           </p:cNvPr>
@@ -18868,7 +20879,7 @@
           <p:cNvPr id="7" name="">
             <a:extLst xmlns:a="http://schemas.openxmlformats.org/drawingml/2006/main">
               <a:ext uri="{FF2B5EF4-FFF2-40B4-BE49-F238E27FC236}">
-                <a16:creationId xmlns:a16="http://schemas.microsoft.com/office/drawing/2014/main" id="{6ED9EED1-47DA-40B4-AF99-44D8292DEABF}"/>
+                <a16:creationId xmlns:a16="http://schemas.microsoft.com/office/drawing/2014/main" id="{15F0FDD1-AB4E-4081-85C3-166E8CC89ADD}"/>
               </a:ext>
             </a:extLst>
           </p:cNvPr>
@@ -18918,7 +20929,7 @@
           <p:cNvPr id="8" name="">
             <a:extLst xmlns:a="http://schemas.openxmlformats.org/drawingml/2006/main">
               <a:ext uri="{FF2B5EF4-FFF2-40B4-BE49-F238E27FC236}">
-                <a16:creationId xmlns:a16="http://schemas.microsoft.com/office/drawing/2014/main" id="{49E3F212-EB94-48FB-83B7-39A4BE0AD831}"/>
+                <a16:creationId xmlns:a16="http://schemas.microsoft.com/office/drawing/2014/main" id="{125C85CE-11F7-4084-A344-8A6BFAA09043}"/>
               </a:ext>
             </a:extLst>
           </p:cNvPr>
@@ -18951,7 +20962,7 @@
           <p:cNvPr id="9" name="">
             <a:extLst xmlns:a="http://schemas.openxmlformats.org/drawingml/2006/main">
               <a:ext uri="{FF2B5EF4-FFF2-40B4-BE49-F238E27FC236}">
-                <a16:creationId xmlns:a16="http://schemas.microsoft.com/office/drawing/2014/main" id="{253E607C-67D1-492D-AB99-8EF5F160D22D}"/>
+                <a16:creationId xmlns:a16="http://schemas.microsoft.com/office/drawing/2014/main" id="{87ADAD67-8B49-461B-802F-3782BB3EAE7A}"/>
               </a:ext>
             </a:extLst>
           </p:cNvPr>
@@ -19001,7 +21012,7 @@
           <p:cNvPr id="10" name="">
             <a:extLst xmlns:a="http://schemas.openxmlformats.org/drawingml/2006/main">
               <a:ext uri="{FF2B5EF4-FFF2-40B4-BE49-F238E27FC236}">
-                <a16:creationId xmlns:a16="http://schemas.microsoft.com/office/drawing/2014/main" id="{723C36A4-57EB-404A-A0DB-4600E0E99F60}"/>
+                <a16:creationId xmlns:a16="http://schemas.microsoft.com/office/drawing/2014/main" id="{F2D0252A-A5C0-4411-960D-254F80A6EE0B}"/>
               </a:ext>
             </a:extLst>
           </p:cNvPr>
@@ -19034,7 +21045,7 @@
           <p:cNvPr id="11" name="">
             <a:extLst xmlns:a="http://schemas.openxmlformats.org/drawingml/2006/main">
               <a:ext uri="{FF2B5EF4-FFF2-40B4-BE49-F238E27FC236}">
-                <a16:creationId xmlns:a16="http://schemas.microsoft.com/office/drawing/2014/main" id="{AC8B07D2-BFBA-449C-8D3E-DE47E7A5B46F}"/>
+                <a16:creationId xmlns:a16="http://schemas.microsoft.com/office/drawing/2014/main" id="{4333E27D-1247-4AC6-9951-33CF9505AF49}"/>
               </a:ext>
             </a:extLst>
           </p:cNvPr>
@@ -19084,7 +21095,7 @@
           <p:cNvPr id="12" name="">
             <a:extLst xmlns:a="http://schemas.openxmlformats.org/drawingml/2006/main">
               <a:ext uri="{FF2B5EF4-FFF2-40B4-BE49-F238E27FC236}">
-                <a16:creationId xmlns:a16="http://schemas.microsoft.com/office/drawing/2014/main" id="{CFED6B04-4686-40D2-99F4-45C4C388FAB1}"/>
+                <a16:creationId xmlns:a16="http://schemas.microsoft.com/office/drawing/2014/main" id="{E2691199-FC2E-48DC-9DFB-4F9574E142CB}"/>
               </a:ext>
             </a:extLst>
           </p:cNvPr>
@@ -19117,7 +21128,7 @@
           <p:cNvPr id="13" name="">
             <a:extLst xmlns:a="http://schemas.openxmlformats.org/drawingml/2006/main">
               <a:ext uri="{FF2B5EF4-FFF2-40B4-BE49-F238E27FC236}">
-                <a16:creationId xmlns:a16="http://schemas.microsoft.com/office/drawing/2014/main" id="{135A5401-A3CE-4BBB-93EC-AEAC2198845A}"/>
+                <a16:creationId xmlns:a16="http://schemas.microsoft.com/office/drawing/2014/main" id="{88376D34-3B91-4ECA-84F2-1F56961F4FA9}"/>
               </a:ext>
             </a:extLst>
           </p:cNvPr>
@@ -19167,7 +21178,7 @@
           <p:cNvPr id="14" name="">
             <a:extLst xmlns:a="http://schemas.openxmlformats.org/drawingml/2006/main">
               <a:ext uri="{FF2B5EF4-FFF2-40B4-BE49-F238E27FC236}">
-                <a16:creationId xmlns:a16="http://schemas.microsoft.com/office/drawing/2014/main" id="{21A87CD0-9B0B-4144-A1A1-C1925FC631CA}"/>
+                <a16:creationId xmlns:a16="http://schemas.microsoft.com/office/drawing/2014/main" id="{16E405FB-5635-4218-B046-4739102BBE1B}"/>
               </a:ext>
             </a:extLst>
           </p:cNvPr>
@@ -19200,7 +21211,7 @@
           <p:cNvPr id="15" name="">
             <a:extLst xmlns:a="http://schemas.openxmlformats.org/drawingml/2006/main">
               <a:ext uri="{FF2B5EF4-FFF2-40B4-BE49-F238E27FC236}">
-                <a16:creationId xmlns:a16="http://schemas.microsoft.com/office/drawing/2014/main" id="{BEF56877-8A08-4350-B4CA-E8B6967A151B}"/>
+                <a16:creationId xmlns:a16="http://schemas.microsoft.com/office/drawing/2014/main" id="{B120928D-E914-45DD-89E6-C89FFF477FBD}"/>
               </a:ext>
             </a:extLst>
           </p:cNvPr>
@@ -19250,7 +21261,7 @@
           <p:cNvPr id="16" name="">
             <a:extLst xmlns:a="http://schemas.openxmlformats.org/drawingml/2006/main">
               <a:ext uri="{FF2B5EF4-FFF2-40B4-BE49-F238E27FC236}">
-                <a16:creationId xmlns:a16="http://schemas.microsoft.com/office/drawing/2014/main" id="{6E86EF76-68F2-4585-A630-718D137FF3D4}"/>
+                <a16:creationId xmlns:a16="http://schemas.microsoft.com/office/drawing/2014/main" id="{5CF3B904-5093-4673-903A-6E8F1A7C2035}"/>
               </a:ext>
             </a:extLst>
           </p:cNvPr>
@@ -19283,7 +21294,7 @@
           <p:cNvPr id="17" name="">
             <a:extLst xmlns:a="http://schemas.openxmlformats.org/drawingml/2006/main">
               <a:ext uri="{FF2B5EF4-FFF2-40B4-BE49-F238E27FC236}">
-                <a16:creationId xmlns:a16="http://schemas.microsoft.com/office/drawing/2014/main" id="{70201552-0168-40A5-A0C8-0EBF2FE768EE}"/>
+                <a16:creationId xmlns:a16="http://schemas.microsoft.com/office/drawing/2014/main" id="{CBE6839F-FE36-4100-8620-764F3355138B}"/>
               </a:ext>
             </a:extLst>
           </p:cNvPr>
@@ -19333,7 +21344,7 @@
           <p:cNvPr id="18" name="">
             <a:extLst xmlns:a="http://schemas.openxmlformats.org/drawingml/2006/main">
               <a:ext uri="{FF2B5EF4-FFF2-40B4-BE49-F238E27FC236}">
-                <a16:creationId xmlns:a16="http://schemas.microsoft.com/office/drawing/2014/main" id="{B1250C43-3392-4C5D-B8F4-6ECBF070AFD5}"/>
+                <a16:creationId xmlns:a16="http://schemas.microsoft.com/office/drawing/2014/main" id="{45B87430-A6A2-49A1-9509-41466EDC7408}"/>
               </a:ext>
             </a:extLst>
           </p:cNvPr>
@@ -19366,7 +21377,7 @@
           <p:cNvPr id="19" name="">
             <a:extLst xmlns:a="http://schemas.openxmlformats.org/drawingml/2006/main">
               <a:ext uri="{FF2B5EF4-FFF2-40B4-BE49-F238E27FC236}">
-                <a16:creationId xmlns:a16="http://schemas.microsoft.com/office/drawing/2014/main" id="{E05A1ED8-6434-43CB-BDCF-1C3A35AEDC94}"/>
+                <a16:creationId xmlns:a16="http://schemas.microsoft.com/office/drawing/2014/main" id="{0330CFE0-AF39-425C-8581-BFF116A22322}"/>
               </a:ext>
             </a:extLst>
           </p:cNvPr>
@@ -19416,7 +21427,7 @@
           <p:cNvPr id="20" name="">
             <a:extLst xmlns:a="http://schemas.openxmlformats.org/drawingml/2006/main">
               <a:ext uri="{FF2B5EF4-FFF2-40B4-BE49-F238E27FC236}">
-                <a16:creationId xmlns:a16="http://schemas.microsoft.com/office/drawing/2014/main" id="{EAC13838-54BB-4718-B8F7-0E37BAC79A1E}"/>
+                <a16:creationId xmlns:a16="http://schemas.microsoft.com/office/drawing/2014/main" id="{29A6F2D6-ADE6-4BD1-B03C-7CC4D892C841}"/>
               </a:ext>
             </a:extLst>
           </p:cNvPr>
@@ -19449,7 +21460,7 @@
           <p:cNvPr id="21" name="">
             <a:extLst xmlns:a="http://schemas.openxmlformats.org/drawingml/2006/main">
               <a:ext uri="{FF2B5EF4-FFF2-40B4-BE49-F238E27FC236}">
-                <a16:creationId xmlns:a16="http://schemas.microsoft.com/office/drawing/2014/main" id="{1A0B9602-43AF-410C-BC45-5146B81D0FA8}"/>
+                <a16:creationId xmlns:a16="http://schemas.microsoft.com/office/drawing/2014/main" id="{0EFB191E-1478-4433-BF1D-678BD504C43E}"/>
               </a:ext>
             </a:extLst>
           </p:cNvPr>
@@ -19499,7 +21510,7 @@
           <p:cNvPr id="22" name="">
             <a:extLst xmlns:a="http://schemas.openxmlformats.org/drawingml/2006/main">
               <a:ext uri="{FF2B5EF4-FFF2-40B4-BE49-F238E27FC236}">
-                <a16:creationId xmlns:a16="http://schemas.microsoft.com/office/drawing/2014/main" id="{3E55AF0D-6134-4BA6-A6EA-399FE401E73B}"/>
+                <a16:creationId xmlns:a16="http://schemas.microsoft.com/office/drawing/2014/main" id="{BEC98D05-3B6A-406F-BE33-758580B51750}"/>
               </a:ext>
             </a:extLst>
           </p:cNvPr>
@@ -19532,7 +21543,7 @@
           <p:cNvPr id="23" name="">
             <a:extLst xmlns:a="http://schemas.openxmlformats.org/drawingml/2006/main">
               <a:ext uri="{FF2B5EF4-FFF2-40B4-BE49-F238E27FC236}">
-                <a16:creationId xmlns:a16="http://schemas.microsoft.com/office/drawing/2014/main" id="{199872C1-BF9C-4956-8F15-7ADEE5E760D4}"/>
+                <a16:creationId xmlns:a16="http://schemas.microsoft.com/office/drawing/2014/main" id="{62F0AF00-78D6-4057-9E84-E01B77CD1AC8}"/>
               </a:ext>
             </a:extLst>
           </p:cNvPr>
@@ -19582,7 +21593,7 @@
           <p:cNvPr id="24" name="">
             <a:extLst xmlns:a="http://schemas.openxmlformats.org/drawingml/2006/main">
               <a:ext uri="{FF2B5EF4-FFF2-40B4-BE49-F238E27FC236}">
-                <a16:creationId xmlns:a16="http://schemas.microsoft.com/office/drawing/2014/main" id="{CCA3006C-4782-42C7-A40C-8B9A543206FF}"/>
+                <a16:creationId xmlns:a16="http://schemas.microsoft.com/office/drawing/2014/main" id="{BF7B56D6-8F66-479A-AF9D-3403FAA33515}"/>
               </a:ext>
             </a:extLst>
           </p:cNvPr>
@@ -19615,7 +21626,7 @@
           <p:cNvPr id="25" name="">
             <a:extLst xmlns:a="http://schemas.openxmlformats.org/drawingml/2006/main">
               <a:ext uri="{FF2B5EF4-FFF2-40B4-BE49-F238E27FC236}">
-                <a16:creationId xmlns:a16="http://schemas.microsoft.com/office/drawing/2014/main" id="{A4025228-42F0-4A18-87CA-6749F8DF384E}"/>
+                <a16:creationId xmlns:a16="http://schemas.microsoft.com/office/drawing/2014/main" id="{5F119364-32E9-4F89-8AF7-DFB45D8703C6}"/>
               </a:ext>
             </a:extLst>
           </p:cNvPr>
@@ -19665,7 +21676,7 @@
           <p:cNvPr id="26" name="">
             <a:extLst xmlns:a="http://schemas.openxmlformats.org/drawingml/2006/main">
               <a:ext uri="{FF2B5EF4-FFF2-40B4-BE49-F238E27FC236}">
-                <a16:creationId xmlns:a16="http://schemas.microsoft.com/office/drawing/2014/main" id="{545A8C72-7F0A-4C79-A634-26592F0F7F18}"/>
+                <a16:creationId xmlns:a16="http://schemas.microsoft.com/office/drawing/2014/main" id="{D80D7C58-457D-4A7D-A79E-3B830BCC0CA4}"/>
               </a:ext>
             </a:extLst>
           </p:cNvPr>
@@ -19698,7 +21709,7 @@
           <p:cNvPr id="27" name="">
             <a:extLst xmlns:a="http://schemas.openxmlformats.org/drawingml/2006/main">
               <a:ext uri="{FF2B5EF4-FFF2-40B4-BE49-F238E27FC236}">
-                <a16:creationId xmlns:a16="http://schemas.microsoft.com/office/drawing/2014/main" id="{18481D8F-E447-49E0-BFE6-8CC4F8D691D5}"/>
+                <a16:creationId xmlns:a16="http://schemas.microsoft.com/office/drawing/2014/main" id="{7D629CBD-9143-46C4-8379-23C5609C124E}"/>
               </a:ext>
             </a:extLst>
           </p:cNvPr>
@@ -19748,7 +21759,7 @@
           <p:cNvPr id="28" name="">
             <a:extLst xmlns:a="http://schemas.openxmlformats.org/drawingml/2006/main">
               <a:ext uri="{FF2B5EF4-FFF2-40B4-BE49-F238E27FC236}">
-                <a16:creationId xmlns:a16="http://schemas.microsoft.com/office/drawing/2014/main" id="{0A3B8A0A-A72E-4A71-A4BE-DF813DCD54A1}"/>
+                <a16:creationId xmlns:a16="http://schemas.microsoft.com/office/drawing/2014/main" id="{749CF662-5625-444A-9B2B-0AF7B2B578B8}"/>
               </a:ext>
             </a:extLst>
           </p:cNvPr>
@@ -19781,7 +21792,7 @@
           <p:cNvPr id="29" name="">
             <a:extLst xmlns:a="http://schemas.openxmlformats.org/drawingml/2006/main">
               <a:ext uri="{FF2B5EF4-FFF2-40B4-BE49-F238E27FC236}">
-                <a16:creationId xmlns:a16="http://schemas.microsoft.com/office/drawing/2014/main" id="{37A0638B-3863-4E84-9D8F-B2343DC331A5}"/>
+                <a16:creationId xmlns:a16="http://schemas.microsoft.com/office/drawing/2014/main" id="{2C8D263A-5E3D-4DAB-89E8-4AE680D20787}"/>
               </a:ext>
             </a:extLst>
           </p:cNvPr>
@@ -19831,7 +21842,7 @@
           <p:cNvPr id="30" name="">
             <a:extLst xmlns:a="http://schemas.openxmlformats.org/drawingml/2006/main">
               <a:ext uri="{FF2B5EF4-FFF2-40B4-BE49-F238E27FC236}">
-                <a16:creationId xmlns:a16="http://schemas.microsoft.com/office/drawing/2014/main" id="{8F5CE252-BE70-479C-ACC0-3D3963BABA51}"/>
+                <a16:creationId xmlns:a16="http://schemas.microsoft.com/office/drawing/2014/main" id="{92C66B78-AD44-42AA-A5DC-EF915FD6A13E}"/>
               </a:ext>
             </a:extLst>
           </p:cNvPr>
@@ -19864,7 +21875,7 @@
           <p:cNvPr id="31" name="">
             <a:extLst xmlns:a="http://schemas.openxmlformats.org/drawingml/2006/main">
               <a:ext uri="{FF2B5EF4-FFF2-40B4-BE49-F238E27FC236}">
-                <a16:creationId xmlns:a16="http://schemas.microsoft.com/office/drawing/2014/main" id="{D140EC50-EE63-480C-A9B5-434E2023C45D}"/>
+                <a16:creationId xmlns:a16="http://schemas.microsoft.com/office/drawing/2014/main" id="{B39F4255-0DFE-4E82-8089-344977A59C76}"/>
               </a:ext>
             </a:extLst>
           </p:cNvPr>
@@ -19914,7 +21925,7 @@
           <p:cNvPr id="32" name="">
             <a:extLst xmlns:a="http://schemas.openxmlformats.org/drawingml/2006/main">
               <a:ext uri="{FF2B5EF4-FFF2-40B4-BE49-F238E27FC236}">
-                <a16:creationId xmlns:a16="http://schemas.microsoft.com/office/drawing/2014/main" id="{1F9FE49D-2B23-4CEF-B31D-A407C60BB981}"/>
+                <a16:creationId xmlns:a16="http://schemas.microsoft.com/office/drawing/2014/main" id="{F05F0A38-EE36-41CE-8567-2A78A135B539}"/>
               </a:ext>
             </a:extLst>
           </p:cNvPr>
@@ -19947,7 +21958,7 @@
           <p:cNvPr id="33" name="">
             <a:extLst xmlns:a="http://schemas.openxmlformats.org/drawingml/2006/main">
               <a:ext uri="{FF2B5EF4-FFF2-40B4-BE49-F238E27FC236}">
-                <a16:creationId xmlns:a16="http://schemas.microsoft.com/office/drawing/2014/main" id="{A157C66C-04EE-4BBD-ABC3-B5B6C170BC8D}"/>
+                <a16:creationId xmlns:a16="http://schemas.microsoft.com/office/drawing/2014/main" id="{90B8AE46-5CC4-45B7-9B5B-4102D92894F5}"/>
               </a:ext>
             </a:extLst>
           </p:cNvPr>
@@ -19997,7 +22008,7 @@
           <p:cNvPr id="34" name="">
             <a:extLst xmlns:a="http://schemas.openxmlformats.org/drawingml/2006/main">
               <a:ext uri="{FF2B5EF4-FFF2-40B4-BE49-F238E27FC236}">
-                <a16:creationId xmlns:a16="http://schemas.microsoft.com/office/drawing/2014/main" id="{48DB8ABF-3EBE-4F93-8BF5-38C9C683C996}"/>
+                <a16:creationId xmlns:a16="http://schemas.microsoft.com/office/drawing/2014/main" id="{5C261556-DB05-4CB7-8E14-B2522D8B1892}"/>
               </a:ext>
             </a:extLst>
           </p:cNvPr>
@@ -20030,7 +22041,7 @@
           <p:cNvPr id="35" name="">
             <a:extLst xmlns:a="http://schemas.openxmlformats.org/drawingml/2006/main">
               <a:ext uri="{FF2B5EF4-FFF2-40B4-BE49-F238E27FC236}">
-                <a16:creationId xmlns:a16="http://schemas.microsoft.com/office/drawing/2014/main" id="{94B01E2C-20CF-4965-A518-476888FFDF95}"/>
+                <a16:creationId xmlns:a16="http://schemas.microsoft.com/office/drawing/2014/main" id="{675C01FA-037C-4059-9774-8CE166B5EF54}"/>
               </a:ext>
             </a:extLst>
           </p:cNvPr>
@@ -20080,7 +22091,7 @@
           <p:cNvPr id="36" name="">
             <a:extLst xmlns:a="http://schemas.openxmlformats.org/drawingml/2006/main">
               <a:ext uri="{FF2B5EF4-FFF2-40B4-BE49-F238E27FC236}">
-                <a16:creationId xmlns:a16="http://schemas.microsoft.com/office/drawing/2014/main" id="{E94FD51A-47A5-4B18-AB3E-1A1C1A4FA834}"/>
+                <a16:creationId xmlns:a16="http://schemas.microsoft.com/office/drawing/2014/main" id="{51E02EAD-C20C-416F-BEBA-CD8584543353}"/>
               </a:ext>
             </a:extLst>
           </p:cNvPr>
@@ -20113,7 +22124,7 @@
           <p:cNvPr id="37" name="">
             <a:extLst xmlns:a="http://schemas.openxmlformats.org/drawingml/2006/main">
               <a:ext uri="{FF2B5EF4-FFF2-40B4-BE49-F238E27FC236}">
-                <a16:creationId xmlns:a16="http://schemas.microsoft.com/office/drawing/2014/main" id="{9D7C08CA-29D7-4585-BD56-961E365BC3EB}"/>
+                <a16:creationId xmlns:a16="http://schemas.microsoft.com/office/drawing/2014/main" id="{478AAF2C-0C84-43E9-9C3B-F953BBFD8DEC}"/>
               </a:ext>
             </a:extLst>
           </p:cNvPr>
@@ -20163,7 +22174,7 @@
           <p:cNvPr id="38" name="">
             <a:extLst xmlns:a="http://schemas.openxmlformats.org/drawingml/2006/main">
               <a:ext uri="{FF2B5EF4-FFF2-40B4-BE49-F238E27FC236}">
-                <a16:creationId xmlns:a16="http://schemas.microsoft.com/office/drawing/2014/main" id="{E04642E4-BCFE-4C5D-BD49-2F49EDF90CED}"/>
+                <a16:creationId xmlns:a16="http://schemas.microsoft.com/office/drawing/2014/main" id="{959D35CE-D7AC-4ADE-A020-00074542ACB5}"/>
               </a:ext>
             </a:extLst>
           </p:cNvPr>
@@ -20196,7 +22207,7 @@
           <p:cNvPr id="39" name="">
             <a:extLst xmlns:a="http://schemas.openxmlformats.org/drawingml/2006/main">
               <a:ext uri="{FF2B5EF4-FFF2-40B4-BE49-F238E27FC236}">
-                <a16:creationId xmlns:a16="http://schemas.microsoft.com/office/drawing/2014/main" id="{8B0B19F7-599B-429B-8CCA-0E2A5752941F}"/>
+                <a16:creationId xmlns:a16="http://schemas.microsoft.com/office/drawing/2014/main" id="{D97B560B-450D-4D63-B8AD-009E81A92371}"/>
               </a:ext>
             </a:extLst>
           </p:cNvPr>
@@ -20246,7 +22257,7 @@
           <p:cNvPr id="40" name="">
             <a:extLst xmlns:a="http://schemas.openxmlformats.org/drawingml/2006/main">
               <a:ext uri="{FF2B5EF4-FFF2-40B4-BE49-F238E27FC236}">
-                <a16:creationId xmlns:a16="http://schemas.microsoft.com/office/drawing/2014/main" id="{33CD7677-47F4-4C1C-B36A-CAEBAA2BD0AA}"/>
+                <a16:creationId xmlns:a16="http://schemas.microsoft.com/office/drawing/2014/main" id="{B5BA2926-CF04-4782-9A0E-623DC71622FF}"/>
               </a:ext>
             </a:extLst>
           </p:cNvPr>
@@ -20279,7 +22290,7 @@
           <p:cNvPr id="41" name="">
             <a:extLst xmlns:a="http://schemas.openxmlformats.org/drawingml/2006/main">
               <a:ext uri="{FF2B5EF4-FFF2-40B4-BE49-F238E27FC236}">
-                <a16:creationId xmlns:a16="http://schemas.microsoft.com/office/drawing/2014/main" id="{F8E1BB13-EB1E-43D7-924F-FA0B53DBA79A}"/>
+                <a16:creationId xmlns:a16="http://schemas.microsoft.com/office/drawing/2014/main" id="{9F1B22FA-0126-4698-AA02-7DDBCEA17661}"/>
               </a:ext>
             </a:extLst>
           </p:cNvPr>
@@ -20329,7 +22340,7 @@
           <p:cNvPr id="42" name="">
             <a:extLst xmlns:a="http://schemas.openxmlformats.org/drawingml/2006/main">
               <a:ext uri="{FF2B5EF4-FFF2-40B4-BE49-F238E27FC236}">
-                <a16:creationId xmlns:a16="http://schemas.microsoft.com/office/drawing/2014/main" id="{DC5D4444-62A6-4A1A-8FD5-A0655FF2B4C1}"/>
+                <a16:creationId xmlns:a16="http://schemas.microsoft.com/office/drawing/2014/main" id="{84721272-634E-4F85-A9A9-E547EC3F9D37}"/>
               </a:ext>
             </a:extLst>
           </p:cNvPr>
@@ -20362,7 +22373,7 @@
           <p:cNvPr id="43" name="">
             <a:extLst xmlns:a="http://schemas.openxmlformats.org/drawingml/2006/main">
               <a:ext uri="{FF2B5EF4-FFF2-40B4-BE49-F238E27FC236}">
-                <a16:creationId xmlns:a16="http://schemas.microsoft.com/office/drawing/2014/main" id="{E91E0AFB-8605-463C-9392-08EF402C7013}"/>
+                <a16:creationId xmlns:a16="http://schemas.microsoft.com/office/drawing/2014/main" id="{7EE04122-61A5-4A48-A37E-14EB164EBC81}"/>
               </a:ext>
             </a:extLst>
           </p:cNvPr>
@@ -20412,7 +22423,7 @@
           <p:cNvPr id="44" name="">
             <a:extLst xmlns:a="http://schemas.openxmlformats.org/drawingml/2006/main">
               <a:ext uri="{FF2B5EF4-FFF2-40B4-BE49-F238E27FC236}">
-                <a16:creationId xmlns:a16="http://schemas.microsoft.com/office/drawing/2014/main" id="{84DF26BC-6CFB-4051-A49F-45AA73E1CB52}"/>
+                <a16:creationId xmlns:a16="http://schemas.microsoft.com/office/drawing/2014/main" id="{DDEA9B41-1AB4-40B1-A6DB-08DCC8621A20}"/>
               </a:ext>
             </a:extLst>
           </p:cNvPr>
@@ -20445,7 +22456,7 @@
           <p:cNvPr id="45" name="">
             <a:extLst xmlns:a="http://schemas.openxmlformats.org/drawingml/2006/main">
               <a:ext uri="{FF2B5EF4-FFF2-40B4-BE49-F238E27FC236}">
-                <a16:creationId xmlns:a16="http://schemas.microsoft.com/office/drawing/2014/main" id="{C45BC1EF-9690-4D45-A6B7-1B1DF1C4BF76}"/>
+                <a16:creationId xmlns:a16="http://schemas.microsoft.com/office/drawing/2014/main" id="{A60AEADD-FA15-45AC-9D3D-57C180501D9A}"/>
               </a:ext>
             </a:extLst>
           </p:cNvPr>
@@ -20495,7 +22506,7 @@
           <p:cNvPr id="46" name="">
             <a:extLst xmlns:a="http://schemas.openxmlformats.org/drawingml/2006/main">
               <a:ext uri="{FF2B5EF4-FFF2-40B4-BE49-F238E27FC236}">
-                <a16:creationId xmlns:a16="http://schemas.microsoft.com/office/drawing/2014/main" id="{EE8049AC-DC32-4B9A-83C5-20680652A716}"/>
+                <a16:creationId xmlns:a16="http://schemas.microsoft.com/office/drawing/2014/main" id="{44BB14FF-211C-4936-B678-577E068C4C56}"/>
               </a:ext>
             </a:extLst>
           </p:cNvPr>
@@ -20528,7 +22539,7 @@
           <p:cNvPr id="47" name="">
             <a:extLst xmlns:a="http://schemas.openxmlformats.org/drawingml/2006/main">
               <a:ext uri="{FF2B5EF4-FFF2-40B4-BE49-F238E27FC236}">
-                <a16:creationId xmlns:a16="http://schemas.microsoft.com/office/drawing/2014/main" id="{46881BEA-708C-4322-8734-8B285793BB1A}"/>
+                <a16:creationId xmlns:a16="http://schemas.microsoft.com/office/drawing/2014/main" id="{20CBF4AD-61C0-4173-B3E7-443903A83845}"/>
               </a:ext>
             </a:extLst>
           </p:cNvPr>
@@ -20578,7 +22589,7 @@
           <p:cNvPr id="48" name="">
             <a:extLst xmlns:a="http://schemas.openxmlformats.org/drawingml/2006/main">
               <a:ext uri="{FF2B5EF4-FFF2-40B4-BE49-F238E27FC236}">
-                <a16:creationId xmlns:a16="http://schemas.microsoft.com/office/drawing/2014/main" id="{17AEF974-EFD4-43A3-A1B0-596285232B9D}"/>
+                <a16:creationId xmlns:a16="http://schemas.microsoft.com/office/drawing/2014/main" id="{666DE90D-0C12-4937-8D46-03782F6D87DD}"/>
               </a:ext>
             </a:extLst>
           </p:cNvPr>
@@ -20611,7 +22622,7 @@
           <p:cNvPr id="49" name="">
             <a:extLst xmlns:a="http://schemas.openxmlformats.org/drawingml/2006/main">
               <a:ext uri="{FF2B5EF4-FFF2-40B4-BE49-F238E27FC236}">
-                <a16:creationId xmlns:a16="http://schemas.microsoft.com/office/drawing/2014/main" id="{2D3BEC1A-0E6C-4EFC-B971-05C1E6E4499B}"/>
+                <a16:creationId xmlns:a16="http://schemas.microsoft.com/office/drawing/2014/main" id="{456E0713-E5B5-40AB-B61D-140422003FA1}"/>
               </a:ext>
             </a:extLst>
           </p:cNvPr>
@@ -20661,7 +22672,7 @@
           <p:cNvPr id="50" name="">
             <a:extLst xmlns:a="http://schemas.openxmlformats.org/drawingml/2006/main">
               <a:ext uri="{FF2B5EF4-FFF2-40B4-BE49-F238E27FC236}">
-                <a16:creationId xmlns:a16="http://schemas.microsoft.com/office/drawing/2014/main" id="{96D9AB1C-0F0B-4D1E-AA00-5CBE52F258D9}"/>
+                <a16:creationId xmlns:a16="http://schemas.microsoft.com/office/drawing/2014/main" id="{768E74D8-DC54-440E-9E7E-4635C66CCDF0}"/>
               </a:ext>
             </a:extLst>
           </p:cNvPr>
@@ -20694,7 +22705,7 @@
           <p:cNvPr id="51" name="">
             <a:extLst xmlns:a="http://schemas.openxmlformats.org/drawingml/2006/main">
               <a:ext uri="{FF2B5EF4-FFF2-40B4-BE49-F238E27FC236}">
-                <a16:creationId xmlns:a16="http://schemas.microsoft.com/office/drawing/2014/main" id="{7E3F13C6-FF72-48BF-A957-C7603BB6A9DB}"/>
+                <a16:creationId xmlns:a16="http://schemas.microsoft.com/office/drawing/2014/main" id="{75CB6D52-00CC-43C3-8CB2-C2B97972BD32}"/>
               </a:ext>
             </a:extLst>
           </p:cNvPr>
@@ -20744,7 +22755,7 @@
           <p:cNvPr id="52" name="">
             <a:extLst xmlns:a="http://schemas.openxmlformats.org/drawingml/2006/main">
               <a:ext uri="{FF2B5EF4-FFF2-40B4-BE49-F238E27FC236}">
-                <a16:creationId xmlns:a16="http://schemas.microsoft.com/office/drawing/2014/main" id="{3F68CA33-A1C1-4CE1-AC11-53ABA4D23071}"/>
+                <a16:creationId xmlns:a16="http://schemas.microsoft.com/office/drawing/2014/main" id="{DD8FD9AE-B544-431F-8554-0CAD8AA20C45}"/>
               </a:ext>
             </a:extLst>
           </p:cNvPr>
@@ -20777,7 +22788,7 @@
           <p:cNvPr id="53" name="">
             <a:extLst xmlns:a="http://schemas.openxmlformats.org/drawingml/2006/main">
               <a:ext uri="{FF2B5EF4-FFF2-40B4-BE49-F238E27FC236}">
-                <a16:creationId xmlns:a16="http://schemas.microsoft.com/office/drawing/2014/main" id="{9777D5AD-A628-41AA-B757-7303FB401EA6}"/>
+                <a16:creationId xmlns:a16="http://schemas.microsoft.com/office/drawing/2014/main" id="{C323FA2F-7F23-4070-84DA-8E8CF0CD0435}"/>
               </a:ext>
             </a:extLst>
           </p:cNvPr>
@@ -20827,7 +22838,7 @@
           <p:cNvPr id="54" name="">
             <a:extLst xmlns:a="http://schemas.openxmlformats.org/drawingml/2006/main">
               <a:ext uri="{FF2B5EF4-FFF2-40B4-BE49-F238E27FC236}">
-                <a16:creationId xmlns:a16="http://schemas.microsoft.com/office/drawing/2014/main" id="{3830840D-4DEA-4868-9428-D0136E44E129}"/>
+                <a16:creationId xmlns:a16="http://schemas.microsoft.com/office/drawing/2014/main" id="{25874A33-1955-463D-AE19-E5BDA2A0514E}"/>
               </a:ext>
             </a:extLst>
           </p:cNvPr>
@@ -20860,7 +22871,7 @@
           <p:cNvPr id="55" name="">
             <a:extLst xmlns:a="http://schemas.openxmlformats.org/drawingml/2006/main">
               <a:ext uri="{FF2B5EF4-FFF2-40B4-BE49-F238E27FC236}">
-                <a16:creationId xmlns:a16="http://schemas.microsoft.com/office/drawing/2014/main" id="{04FF7E74-3BF5-4C92-B348-B361F57C7E7D}"/>
+                <a16:creationId xmlns:a16="http://schemas.microsoft.com/office/drawing/2014/main" id="{82F175E7-8D8A-480F-B9A7-4582BAD7B502}"/>
               </a:ext>
             </a:extLst>
           </p:cNvPr>
@@ -20910,7 +22921,7 @@
           <p:cNvPr id="56" name="">
             <a:extLst xmlns:a="http://schemas.openxmlformats.org/drawingml/2006/main">
               <a:ext uri="{FF2B5EF4-FFF2-40B4-BE49-F238E27FC236}">
-                <a16:creationId xmlns:a16="http://schemas.microsoft.com/office/drawing/2014/main" id="{FE4C8279-B52C-4BAF-ACF5-0B99AA58D265}"/>
+                <a16:creationId xmlns:a16="http://schemas.microsoft.com/office/drawing/2014/main" id="{F64ABDDD-8AF8-45AF-B586-2B2449CABBF8}"/>
               </a:ext>
             </a:extLst>
           </p:cNvPr>
@@ -20943,7 +22954,7 @@
           <p:cNvPr id="57" name="">
             <a:extLst xmlns:a="http://schemas.openxmlformats.org/drawingml/2006/main">
               <a:ext uri="{FF2B5EF4-FFF2-40B4-BE49-F238E27FC236}">
-                <a16:creationId xmlns:a16="http://schemas.microsoft.com/office/drawing/2014/main" id="{68573545-8D4E-4B17-9D80-65D4AD00185B}"/>
+                <a16:creationId xmlns:a16="http://schemas.microsoft.com/office/drawing/2014/main" id="{65A94769-8458-47AB-B228-6C1BDDD3BCB4}"/>
               </a:ext>
             </a:extLst>
           </p:cNvPr>
@@ -20993,7 +23004,7 @@
           <p:cNvPr id="58" name="">
             <a:extLst xmlns:a="http://schemas.openxmlformats.org/drawingml/2006/main">
               <a:ext uri="{FF2B5EF4-FFF2-40B4-BE49-F238E27FC236}">
-                <a16:creationId xmlns:a16="http://schemas.microsoft.com/office/drawing/2014/main" id="{57F086BD-3B67-401A-8743-4CBFFBA1B728}"/>
+                <a16:creationId xmlns:a16="http://schemas.microsoft.com/office/drawing/2014/main" id="{47AF0B8C-4F97-46AB-B3E0-F67DF9AED44A}"/>
               </a:ext>
             </a:extLst>
           </p:cNvPr>
@@ -21026,7 +23037,7 @@
           <p:cNvPr id="59" name="">
             <a:extLst xmlns:a="http://schemas.openxmlformats.org/drawingml/2006/main">
               <a:ext uri="{FF2B5EF4-FFF2-40B4-BE49-F238E27FC236}">
-                <a16:creationId xmlns:a16="http://schemas.microsoft.com/office/drawing/2014/main" id="{D9216CA4-E7FE-418D-955B-63EB3ECB80A1}"/>
+                <a16:creationId xmlns:a16="http://schemas.microsoft.com/office/drawing/2014/main" id="{95E13A47-D976-4A29-9C1F-5A7B9DE962D0}"/>
               </a:ext>
             </a:extLst>
           </p:cNvPr>
@@ -21076,7 +23087,7 @@
           <p:cNvPr id="60" name="">
             <a:extLst xmlns:a="http://schemas.openxmlformats.org/drawingml/2006/main">
               <a:ext uri="{FF2B5EF4-FFF2-40B4-BE49-F238E27FC236}">
-                <a16:creationId xmlns:a16="http://schemas.microsoft.com/office/drawing/2014/main" id="{D36B6993-50D9-4C32-B561-1D8D140DE078}"/>
+                <a16:creationId xmlns:a16="http://schemas.microsoft.com/office/drawing/2014/main" id="{00E60C1F-7E11-4363-B0A5-77632E143EDC}"/>
               </a:ext>
             </a:extLst>
           </p:cNvPr>
@@ -21109,7 +23120,7 @@
           <p:cNvPr id="61" name="">
             <a:extLst xmlns:a="http://schemas.openxmlformats.org/drawingml/2006/main">
               <a:ext uri="{FF2B5EF4-FFF2-40B4-BE49-F238E27FC236}">
-                <a16:creationId xmlns:a16="http://schemas.microsoft.com/office/drawing/2014/main" id="{35C9BF8D-C4FB-42A3-957E-A686E9573BC6}"/>
+                <a16:creationId xmlns:a16="http://schemas.microsoft.com/office/drawing/2014/main" id="{E177BC4B-EFB9-4CEB-BCBF-50FBD7A8BAAF}"/>
               </a:ext>
             </a:extLst>
           </p:cNvPr>
@@ -21159,7 +23170,7 @@
           <p:cNvPr id="62" name="">
             <a:extLst xmlns:a="http://schemas.openxmlformats.org/drawingml/2006/main">
               <a:ext uri="{FF2B5EF4-FFF2-40B4-BE49-F238E27FC236}">
-                <a16:creationId xmlns:a16="http://schemas.microsoft.com/office/drawing/2014/main" id="{BF2A60CC-45FB-4209-A64E-973E5DB15E3A}"/>
+                <a16:creationId xmlns:a16="http://schemas.microsoft.com/office/drawing/2014/main" id="{6CC723BC-9388-4587-A950-FFCC4F6694E8}"/>
               </a:ext>
             </a:extLst>
           </p:cNvPr>
@@ -21192,7 +23203,7 @@
           <p:cNvPr id="63" name="">
             <a:extLst xmlns:a="http://schemas.openxmlformats.org/drawingml/2006/main">
               <a:ext uri="{FF2B5EF4-FFF2-40B4-BE49-F238E27FC236}">
-                <a16:creationId xmlns:a16="http://schemas.microsoft.com/office/drawing/2014/main" id="{71E9FD8E-C1E7-4C31-9295-C743ED8523FC}"/>
+                <a16:creationId xmlns:a16="http://schemas.microsoft.com/office/drawing/2014/main" id="{677110CB-1200-481E-AF23-5DA0D077638E}"/>
               </a:ext>
             </a:extLst>
           </p:cNvPr>
@@ -21242,7 +23253,7 @@
           <p:cNvPr id="64" name="">
             <a:extLst xmlns:a="http://schemas.openxmlformats.org/drawingml/2006/main">
               <a:ext uri="{FF2B5EF4-FFF2-40B4-BE49-F238E27FC236}">
-                <a16:creationId xmlns:a16="http://schemas.microsoft.com/office/drawing/2014/main" id="{1DFB2D20-781D-4525-A13A-5A23A94AA71D}"/>
+                <a16:creationId xmlns:a16="http://schemas.microsoft.com/office/drawing/2014/main" id="{858630E0-2A29-4788-AE76-2B7E95B5873F}"/>
               </a:ext>
             </a:extLst>
           </p:cNvPr>
@@ -21275,7 +23286,7 @@
           <p:cNvPr id="65" name="">
             <a:extLst xmlns:a="http://schemas.openxmlformats.org/drawingml/2006/main">
               <a:ext uri="{FF2B5EF4-FFF2-40B4-BE49-F238E27FC236}">
-                <a16:creationId xmlns:a16="http://schemas.microsoft.com/office/drawing/2014/main" id="{5106AC58-4C82-4CC0-9D8A-536028790D4E}"/>
+                <a16:creationId xmlns:a16="http://schemas.microsoft.com/office/drawing/2014/main" id="{4AC43E40-C635-42C8-9920-E2BA7B7E4FA2}"/>
               </a:ext>
             </a:extLst>
           </p:cNvPr>
@@ -21325,7 +23336,7 @@
           <p:cNvPr id="66" name="">
             <a:extLst xmlns:a="http://schemas.openxmlformats.org/drawingml/2006/main">
               <a:ext uri="{FF2B5EF4-FFF2-40B4-BE49-F238E27FC236}">
-                <a16:creationId xmlns:a16="http://schemas.microsoft.com/office/drawing/2014/main" id="{A9122D3D-000C-4D14-B7B7-BFCCD262A367}"/>
+                <a16:creationId xmlns:a16="http://schemas.microsoft.com/office/drawing/2014/main" id="{FF19B18F-CCD6-46C2-9F58-0A1C74AFF637}"/>
               </a:ext>
             </a:extLst>
           </p:cNvPr>
@@ -21358,7 +23369,7 @@
           <p:cNvPr id="67" name="">
             <a:extLst xmlns:a="http://schemas.openxmlformats.org/drawingml/2006/main">
               <a:ext uri="{FF2B5EF4-FFF2-40B4-BE49-F238E27FC236}">
-                <a16:creationId xmlns:a16="http://schemas.microsoft.com/office/drawing/2014/main" id="{6322F89F-3353-4ED1-8563-9488D8CD0E2C}"/>
+                <a16:creationId xmlns:a16="http://schemas.microsoft.com/office/drawing/2014/main" id="{48DA1523-FA6E-4E78-B342-545DDBCEB7FF}"/>
               </a:ext>
             </a:extLst>
           </p:cNvPr>
@@ -21408,7 +23419,7 @@
           <p:cNvPr id="68" name="">
             <a:extLst xmlns:a="http://schemas.openxmlformats.org/drawingml/2006/main">
               <a:ext uri="{FF2B5EF4-FFF2-40B4-BE49-F238E27FC236}">
-                <a16:creationId xmlns:a16="http://schemas.microsoft.com/office/drawing/2014/main" id="{024F7FC6-1539-42A3-ACDA-4BEEE72D5E9E}"/>
+                <a16:creationId xmlns:a16="http://schemas.microsoft.com/office/drawing/2014/main" id="{837F5814-156F-4F79-AA61-9EF18D23B01F}"/>
               </a:ext>
             </a:extLst>
           </p:cNvPr>
@@ -21441,7 +23452,7 @@
           <p:cNvPr id="69" name="">
             <a:extLst xmlns:a="http://schemas.openxmlformats.org/drawingml/2006/main">
               <a:ext uri="{FF2B5EF4-FFF2-40B4-BE49-F238E27FC236}">
-                <a16:creationId xmlns:a16="http://schemas.microsoft.com/office/drawing/2014/main" id="{A0FD008F-7D01-4FA8-81AF-220C60A32E8D}"/>
+                <a16:creationId xmlns:a16="http://schemas.microsoft.com/office/drawing/2014/main" id="{8F97E4F9-C5FD-4CA8-87E9-EAA1883D755A}"/>
               </a:ext>
             </a:extLst>
           </p:cNvPr>
@@ -21491,7 +23502,7 @@
           <p:cNvPr id="70" name="">
             <a:extLst xmlns:a="http://schemas.openxmlformats.org/drawingml/2006/main">
               <a:ext uri="{FF2B5EF4-FFF2-40B4-BE49-F238E27FC236}">
-                <a16:creationId xmlns:a16="http://schemas.microsoft.com/office/drawing/2014/main" id="{12A3CE43-07B6-4EC4-91B4-46B7DAE2F20B}"/>
+                <a16:creationId xmlns:a16="http://schemas.microsoft.com/office/drawing/2014/main" id="{2D0CAEB3-99EE-4B8C-B9F3-35BF2C43D235}"/>
               </a:ext>
             </a:extLst>
           </p:cNvPr>
@@ -21524,7 +23535,7 @@
           <p:cNvPr id="71" name="">
             <a:extLst xmlns:a="http://schemas.openxmlformats.org/drawingml/2006/main">
               <a:ext uri="{FF2B5EF4-FFF2-40B4-BE49-F238E27FC236}">
-                <a16:creationId xmlns:a16="http://schemas.microsoft.com/office/drawing/2014/main" id="{36077A26-B557-40CF-89F1-3263599D6BE7}"/>
+                <a16:creationId xmlns:a16="http://schemas.microsoft.com/office/drawing/2014/main" id="{F41E553F-7D84-4DDF-A502-240B3C68AC97}"/>
               </a:ext>
             </a:extLst>
           </p:cNvPr>
@@ -21574,7 +23585,7 @@
           <p:cNvPr id="72" name="">
             <a:extLst xmlns:a="http://schemas.openxmlformats.org/drawingml/2006/main">
               <a:ext uri="{FF2B5EF4-FFF2-40B4-BE49-F238E27FC236}">
-                <a16:creationId xmlns:a16="http://schemas.microsoft.com/office/drawing/2014/main" id="{595FCE40-2C8F-4799-AFCA-C3D4222C51D4}"/>
+                <a16:creationId xmlns:a16="http://schemas.microsoft.com/office/drawing/2014/main" id="{F0E97BC0-D519-4A30-BC8D-275286556B86}"/>
               </a:ext>
             </a:extLst>
           </p:cNvPr>
@@ -21607,7 +23618,7 @@
           <p:cNvPr id="73" name="">
             <a:extLst xmlns:a="http://schemas.openxmlformats.org/drawingml/2006/main">
               <a:ext uri="{FF2B5EF4-FFF2-40B4-BE49-F238E27FC236}">
-                <a16:creationId xmlns:a16="http://schemas.microsoft.com/office/drawing/2014/main" id="{A4F6982A-E4D6-4E18-BA84-FEAD08CDB6AB}"/>
+                <a16:creationId xmlns:a16="http://schemas.microsoft.com/office/drawing/2014/main" id="{E024CF13-0D0F-4D86-8DF1-FD09EA21FB15}"/>
               </a:ext>
             </a:extLst>
           </p:cNvPr>
@@ -21657,7 +23668,7 @@
           <p:cNvPr id="74" name="">
             <a:extLst xmlns:a="http://schemas.openxmlformats.org/drawingml/2006/main">
               <a:ext uri="{FF2B5EF4-FFF2-40B4-BE49-F238E27FC236}">
-                <a16:creationId xmlns:a16="http://schemas.microsoft.com/office/drawing/2014/main" id="{FA35F7B6-B10E-4CCE-A669-715428D441A2}"/>
+                <a16:creationId xmlns:a16="http://schemas.microsoft.com/office/drawing/2014/main" id="{A0617935-9143-49AD-9948-CEFA9C414EEE}"/>
               </a:ext>
             </a:extLst>
           </p:cNvPr>
@@ -21690,7 +23701,7 @@
           <p:cNvPr id="75" name="">
             <a:extLst xmlns:a="http://schemas.openxmlformats.org/drawingml/2006/main">
               <a:ext uri="{FF2B5EF4-FFF2-40B4-BE49-F238E27FC236}">
-                <a16:creationId xmlns:a16="http://schemas.microsoft.com/office/drawing/2014/main" id="{16A20761-7F00-49FD-B73C-2509446050E8}"/>
+                <a16:creationId xmlns:a16="http://schemas.microsoft.com/office/drawing/2014/main" id="{505B4B73-E899-4530-81EF-6C1A482B80C0}"/>
               </a:ext>
             </a:extLst>
           </p:cNvPr>
@@ -21740,7 +23751,7 @@
           <p:cNvPr id="76" name="">
             <a:extLst xmlns:a="http://schemas.openxmlformats.org/drawingml/2006/main">
               <a:ext uri="{FF2B5EF4-FFF2-40B4-BE49-F238E27FC236}">
-                <a16:creationId xmlns:a16="http://schemas.microsoft.com/office/drawing/2014/main" id="{879186F0-6243-4C8D-B00B-CEA1F859DB43}"/>
+                <a16:creationId xmlns:a16="http://schemas.microsoft.com/office/drawing/2014/main" id="{A23C698B-B26A-4F95-AF39-F9D4282DAF39}"/>
               </a:ext>
             </a:extLst>
           </p:cNvPr>
@@ -21773,7 +23784,7 @@
           <p:cNvPr id="77" name="">
             <a:extLst xmlns:a="http://schemas.openxmlformats.org/drawingml/2006/main">
               <a:ext uri="{FF2B5EF4-FFF2-40B4-BE49-F238E27FC236}">
-                <a16:creationId xmlns:a16="http://schemas.microsoft.com/office/drawing/2014/main" id="{FD7EB9CA-BC48-4A93-A256-E5EBBD5D30F7}"/>
+                <a16:creationId xmlns:a16="http://schemas.microsoft.com/office/drawing/2014/main" id="{B97BAF86-82E2-42BB-AF88-77016C9160DE}"/>
               </a:ext>
             </a:extLst>
           </p:cNvPr>
@@ -21823,7 +23834,7 @@
           <p:cNvPr id="78" name="">
             <a:extLst xmlns:a="http://schemas.openxmlformats.org/drawingml/2006/main">
               <a:ext uri="{FF2B5EF4-FFF2-40B4-BE49-F238E27FC236}">
-                <a16:creationId xmlns:a16="http://schemas.microsoft.com/office/drawing/2014/main" id="{6C269E9F-E79A-477A-9D9B-C42A77569DE2}"/>
+                <a16:creationId xmlns:a16="http://schemas.microsoft.com/office/drawing/2014/main" id="{A2FB21C8-DED1-4911-BC78-C9286C0B9DBE}"/>
               </a:ext>
             </a:extLst>
           </p:cNvPr>
@@ -21856,7 +23867,7 @@
           <p:cNvPr id="79" name="">
             <a:extLst xmlns:a="http://schemas.openxmlformats.org/drawingml/2006/main">
               <a:ext uri="{FF2B5EF4-FFF2-40B4-BE49-F238E27FC236}">
-                <a16:creationId xmlns:a16="http://schemas.microsoft.com/office/drawing/2014/main" id="{13C25F97-DB23-4DD2-A748-B42E75B81D15}"/>
+                <a16:creationId xmlns:a16="http://schemas.microsoft.com/office/drawing/2014/main" id="{268EC748-C733-40D0-A2D0-29191107804C}"/>
               </a:ext>
             </a:extLst>
           </p:cNvPr>
@@ -21906,7 +23917,7 @@
           <p:cNvPr id="80" name="">
             <a:extLst xmlns:a="http://schemas.openxmlformats.org/drawingml/2006/main">
               <a:ext uri="{FF2B5EF4-FFF2-40B4-BE49-F238E27FC236}">
-                <a16:creationId xmlns:a16="http://schemas.microsoft.com/office/drawing/2014/main" id="{58878484-BF62-4B80-B7DE-7F26A0101610}"/>
+                <a16:creationId xmlns:a16="http://schemas.microsoft.com/office/drawing/2014/main" id="{56AA640F-B1C8-4F30-8D9B-A4DCA0C66BE9}"/>
               </a:ext>
             </a:extLst>
           </p:cNvPr>
@@ -21939,7 +23950,7 @@
           <p:cNvPr id="81" name="">
             <a:extLst xmlns:a="http://schemas.openxmlformats.org/drawingml/2006/main">
               <a:ext uri="{FF2B5EF4-FFF2-40B4-BE49-F238E27FC236}">
-                <a16:creationId xmlns:a16="http://schemas.microsoft.com/office/drawing/2014/main" id="{5446BD89-D84C-443C-83C0-33C411CF1674}"/>
+                <a16:creationId xmlns:a16="http://schemas.microsoft.com/office/drawing/2014/main" id="{882447B6-D02C-4632-AFA7-8CBAC55DB3BC}"/>
               </a:ext>
             </a:extLst>
           </p:cNvPr>
@@ -21989,7 +24000,7 @@
           <p:cNvPr id="82" name="">
             <a:extLst xmlns:a="http://schemas.openxmlformats.org/drawingml/2006/main">
               <a:ext uri="{FF2B5EF4-FFF2-40B4-BE49-F238E27FC236}">
-                <a16:creationId xmlns:a16="http://schemas.microsoft.com/office/drawing/2014/main" id="{136359DD-ACA3-446C-992E-CD479E454D08}"/>
+                <a16:creationId xmlns:a16="http://schemas.microsoft.com/office/drawing/2014/main" id="{F39FED04-C52E-4E27-A017-3665D239C183}"/>
               </a:ext>
             </a:extLst>
           </p:cNvPr>
@@ -22022,7 +24033,7 @@
           <p:cNvPr id="83" name="">
             <a:extLst xmlns:a="http://schemas.openxmlformats.org/drawingml/2006/main">
               <a:ext uri="{FF2B5EF4-FFF2-40B4-BE49-F238E27FC236}">
-                <a16:creationId xmlns:a16="http://schemas.microsoft.com/office/drawing/2014/main" id="{9F7CB421-4DF6-40F8-AB5E-FDDDFC5F037C}"/>
+                <a16:creationId xmlns:a16="http://schemas.microsoft.com/office/drawing/2014/main" id="{D93B71A5-42D0-4889-A850-DDE29A2748CD}"/>
               </a:ext>
             </a:extLst>
           </p:cNvPr>
@@ -22072,7 +24083,7 @@
           <p:cNvPr id="84" name="">
             <a:extLst xmlns:a="http://schemas.openxmlformats.org/drawingml/2006/main">
               <a:ext uri="{FF2B5EF4-FFF2-40B4-BE49-F238E27FC236}">
-                <a16:creationId xmlns:a16="http://schemas.microsoft.com/office/drawing/2014/main" id="{C2A9C78B-606D-4E02-AEB7-08516CF711F1}"/>
+                <a16:creationId xmlns:a16="http://schemas.microsoft.com/office/drawing/2014/main" id="{EE571296-6395-4FD0-98FA-60BBD87F18EB}"/>
               </a:ext>
             </a:extLst>
           </p:cNvPr>
@@ -22105,7 +24116,7 @@
           <p:cNvPr id="85" name="">
             <a:extLst xmlns:a="http://schemas.openxmlformats.org/drawingml/2006/main">
               <a:ext uri="{FF2B5EF4-FFF2-40B4-BE49-F238E27FC236}">
-                <a16:creationId xmlns:a16="http://schemas.microsoft.com/office/drawing/2014/main" id="{E125AECF-8099-4A9E-B5E2-FEB16F9D3B75}"/>
+                <a16:creationId xmlns:a16="http://schemas.microsoft.com/office/drawing/2014/main" id="{9ED9061C-2F87-4999-A458-66E7A1F24B9D}"/>
               </a:ext>
             </a:extLst>
           </p:cNvPr>
@@ -22155,7 +24166,7 @@
           <p:cNvPr id="86" name="">
             <a:extLst xmlns:a="http://schemas.openxmlformats.org/drawingml/2006/main">
               <a:ext uri="{FF2B5EF4-FFF2-40B4-BE49-F238E27FC236}">
-                <a16:creationId xmlns:a16="http://schemas.microsoft.com/office/drawing/2014/main" id="{05E65064-7C3C-408C-AFF6-7F958DDCF55C}"/>
+                <a16:creationId xmlns:a16="http://schemas.microsoft.com/office/drawing/2014/main" id="{714F8DB7-3083-4486-9719-4BE8EAAEEF07}"/>
               </a:ext>
             </a:extLst>
           </p:cNvPr>
@@ -22188,7 +24199,7 @@
           <p:cNvPr id="87" name="">
             <a:extLst xmlns:a="http://schemas.openxmlformats.org/drawingml/2006/main">
               <a:ext uri="{FF2B5EF4-FFF2-40B4-BE49-F238E27FC236}">
-                <a16:creationId xmlns:a16="http://schemas.microsoft.com/office/drawing/2014/main" id="{9AE77664-7BAA-40E8-A015-688E68F97B02}"/>
+                <a16:creationId xmlns:a16="http://schemas.microsoft.com/office/drawing/2014/main" id="{FE9932FC-4BA3-43A5-9745-985DE0EBE3F3}"/>
               </a:ext>
             </a:extLst>
           </p:cNvPr>
@@ -22238,7 +24249,7 @@
           <p:cNvPr id="88" name="">
             <a:extLst xmlns:a="http://schemas.openxmlformats.org/drawingml/2006/main">
               <a:ext uri="{FF2B5EF4-FFF2-40B4-BE49-F238E27FC236}">
-                <a16:creationId xmlns:a16="http://schemas.microsoft.com/office/drawing/2014/main" id="{83E018DC-52CD-44CC-A9A4-1333ED48427F}"/>
+                <a16:creationId xmlns:a16="http://schemas.microsoft.com/office/drawing/2014/main" id="{97737E7C-8EB4-494E-9DF7-6EA8548F8C64}"/>
               </a:ext>
             </a:extLst>
           </p:cNvPr>
@@ -22271,7 +24282,7 @@
           <p:cNvPr id="89" name="">
             <a:extLst xmlns:a="http://schemas.openxmlformats.org/drawingml/2006/main">
               <a:ext uri="{FF2B5EF4-FFF2-40B4-BE49-F238E27FC236}">
-                <a16:creationId xmlns:a16="http://schemas.microsoft.com/office/drawing/2014/main" id="{D80515EE-E028-448B-B610-144026CA53F0}"/>
+                <a16:creationId xmlns:a16="http://schemas.microsoft.com/office/drawing/2014/main" id="{9854C1BE-DDFD-4C4E-A560-91454983B191}"/>
               </a:ext>
             </a:extLst>
           </p:cNvPr>
@@ -22321,7 +24332,7 @@
           <p:cNvPr id="90" name="">
             <a:extLst xmlns:a="http://schemas.openxmlformats.org/drawingml/2006/main">
               <a:ext uri="{FF2B5EF4-FFF2-40B4-BE49-F238E27FC236}">
-                <a16:creationId xmlns:a16="http://schemas.microsoft.com/office/drawing/2014/main" id="{9264EEC8-1B41-484F-B599-B5B822256834}"/>
+                <a16:creationId xmlns:a16="http://schemas.microsoft.com/office/drawing/2014/main" id="{32E31A7F-2797-4231-A60F-59C020CF719D}"/>
               </a:ext>
             </a:extLst>
           </p:cNvPr>
@@ -22371,7 +24382,7 @@
           <p:cNvPr id="91" name="">
             <a:extLst xmlns:a="http://schemas.openxmlformats.org/drawingml/2006/main">
               <a:ext uri="{FF2B5EF4-FFF2-40B4-BE49-F238E27FC236}">
-                <a16:creationId xmlns:a16="http://schemas.microsoft.com/office/drawing/2014/main" id="{8204FFA5-6E25-4DC5-8A57-E32FB7BCAF90}"/>
+                <a16:creationId xmlns:a16="http://schemas.microsoft.com/office/drawing/2014/main" id="{526F4F51-8837-46E0-954E-ECF88D8363AE}"/>
               </a:ext>
             </a:extLst>
           </p:cNvPr>
@@ -22419,7 +24430,7 @@
     </p:spTree>
     <p:extLst>
       <p:ext uri="{BB962C8B-B14F-4D97-AF65-F5344CB8AC3E}">
-        <p14:creationId xmlns:p14="http://schemas.microsoft.com/office/powerpoint/2010/main" val="1495947385"/>
+        <p14:creationId xmlns:p14="http://schemas.microsoft.com/office/powerpoint/2010/main" val="1664890423"/>
       </p:ext>
     </p:extLst>
   </p:cSld>
@@ -22450,7 +24461,7 @@
           <p:cNvPr id="1" name="">
             <a:extLst xmlns:a="http://schemas.openxmlformats.org/drawingml/2006/main">
               <a:ext uri="{FF2B5EF4-FFF2-40B4-BE49-F238E27FC236}">
-                <a16:creationId xmlns:a16="http://schemas.microsoft.com/office/drawing/2014/main" id="{C267674A-B9EB-4E8B-A201-02F3AE84A7BA}"/>
+                <a16:creationId xmlns:a16="http://schemas.microsoft.com/office/drawing/2014/main" id="{61909B29-4D92-4774-8CFE-D963F528A6CA}"/>
               </a:ext>
             </a:extLst>
           </p:cNvPr>
@@ -22500,7 +24511,7 @@
           <p:cNvPr id="2" name="">
             <a:extLst xmlns:a="http://schemas.openxmlformats.org/drawingml/2006/main">
               <a:ext uri="{FF2B5EF4-FFF2-40B4-BE49-F238E27FC236}">
-                <a16:creationId xmlns:a16="http://schemas.microsoft.com/office/drawing/2014/main" id="{D102F3AE-CD93-451F-9462-D6F129FD33D3}"/>
+                <a16:creationId xmlns:a16="http://schemas.microsoft.com/office/drawing/2014/main" id="{C66BC6F0-AEB2-495D-B217-7940EFE03C1F}"/>
               </a:ext>
             </a:extLst>
           </p:cNvPr>
@@ -22550,7 +24561,7 @@
           <p:cNvPr id="3" name="">
             <a:extLst xmlns:a="http://schemas.openxmlformats.org/drawingml/2006/main">
               <a:ext uri="{FF2B5EF4-FFF2-40B4-BE49-F238E27FC236}">
-                <a16:creationId xmlns:a16="http://schemas.microsoft.com/office/drawing/2014/main" id="{66903CE9-DDE4-4773-9184-0561A30E3A61}"/>
+                <a16:creationId xmlns:a16="http://schemas.microsoft.com/office/drawing/2014/main" id="{FF05E5FA-D7DE-4C50-91DB-944CB1353AC5}"/>
               </a:ext>
             </a:extLst>
           </p:cNvPr>
@@ -22583,7 +24594,7 @@
           <p:cNvPr id="4" name="">
             <a:extLst xmlns:a="http://schemas.openxmlformats.org/drawingml/2006/main">
               <a:ext uri="{FF2B5EF4-FFF2-40B4-BE49-F238E27FC236}">
-                <a16:creationId xmlns:a16="http://schemas.microsoft.com/office/drawing/2014/main" id="{574A5B3C-5CEE-4FDA-96B8-B84FEE15E07D}"/>
+                <a16:creationId xmlns:a16="http://schemas.microsoft.com/office/drawing/2014/main" id="{C3645BE8-5665-4B89-92B8-02E4FA00C51B}"/>
               </a:ext>
             </a:extLst>
           </p:cNvPr>
@@ -22633,7 +24644,7 @@
           <p:cNvPr id="5" name="">
             <a:extLst xmlns:a="http://schemas.openxmlformats.org/drawingml/2006/main">
               <a:ext uri="{FF2B5EF4-FFF2-40B4-BE49-F238E27FC236}">
-                <a16:creationId xmlns:a16="http://schemas.microsoft.com/office/drawing/2014/main" id="{5CB35195-5BC7-4629-9C74-5EB8D1AE9274}"/>
+                <a16:creationId xmlns:a16="http://schemas.microsoft.com/office/drawing/2014/main" id="{6715E656-24E6-4210-A3CE-804BE1564071}"/>
               </a:ext>
             </a:extLst>
           </p:cNvPr>
@@ -22666,7 +24677,7 @@
           <p:cNvPr id="6" name="">
             <a:extLst xmlns:a="http://schemas.openxmlformats.org/drawingml/2006/main">
               <a:ext uri="{FF2B5EF4-FFF2-40B4-BE49-F238E27FC236}">
-                <a16:creationId xmlns:a16="http://schemas.microsoft.com/office/drawing/2014/main" id="{685F153A-AD3C-47D1-B016-0B4A74D6A78C}"/>
+                <a16:creationId xmlns:a16="http://schemas.microsoft.com/office/drawing/2014/main" id="{23F19FA1-429B-4A78-B9D5-82BF1E278591}"/>
               </a:ext>
             </a:extLst>
           </p:cNvPr>
@@ -22716,7 +24727,7 @@
           <p:cNvPr id="7" name="">
             <a:extLst xmlns:a="http://schemas.openxmlformats.org/drawingml/2006/main">
               <a:ext uri="{FF2B5EF4-FFF2-40B4-BE49-F238E27FC236}">
-                <a16:creationId xmlns:a16="http://schemas.microsoft.com/office/drawing/2014/main" id="{46F08405-D72E-4655-9242-479831055CE2}"/>
+                <a16:creationId xmlns:a16="http://schemas.microsoft.com/office/drawing/2014/main" id="{4B6E0F07-7C20-4C25-915A-B0FF984249C6}"/>
               </a:ext>
             </a:extLst>
           </p:cNvPr>
@@ -22766,7 +24777,7 @@
           <p:cNvPr id="8" name="">
             <a:extLst xmlns:a="http://schemas.openxmlformats.org/drawingml/2006/main">
               <a:ext uri="{FF2B5EF4-FFF2-40B4-BE49-F238E27FC236}">
-                <a16:creationId xmlns:a16="http://schemas.microsoft.com/office/drawing/2014/main" id="{D4C9F22A-C1A4-48B8-9167-A71C7E9F0A4C}"/>
+                <a16:creationId xmlns:a16="http://schemas.microsoft.com/office/drawing/2014/main" id="{B3C745B8-1137-4261-A815-F166C9E9380E}"/>
               </a:ext>
             </a:extLst>
           </p:cNvPr>
@@ -22816,7 +24827,7 @@
           <p:cNvPr id="9" name="">
             <a:extLst xmlns:a="http://schemas.openxmlformats.org/drawingml/2006/main">
               <a:ext uri="{FF2B5EF4-FFF2-40B4-BE49-F238E27FC236}">
-                <a16:creationId xmlns:a16="http://schemas.microsoft.com/office/drawing/2014/main" id="{6D965092-CD89-4C5F-ADB0-8CB5527667BE}"/>
+                <a16:creationId xmlns:a16="http://schemas.microsoft.com/office/drawing/2014/main" id="{17C42DD6-C549-4D97-8FC0-2E81B6B07D01}"/>
               </a:ext>
             </a:extLst>
           </p:cNvPr>
@@ -22866,7 +24877,7 @@
           <p:cNvPr id="10" name="">
             <a:extLst xmlns:a="http://schemas.openxmlformats.org/drawingml/2006/main">
               <a:ext uri="{FF2B5EF4-FFF2-40B4-BE49-F238E27FC236}">
-                <a16:creationId xmlns:a16="http://schemas.microsoft.com/office/drawing/2014/main" id="{4098B626-751E-4F1F-A407-809851DC7251}"/>
+                <a16:creationId xmlns:a16="http://schemas.microsoft.com/office/drawing/2014/main" id="{F7A57CAE-275F-44E3-9ABD-BB8799A41F9C}"/>
               </a:ext>
             </a:extLst>
           </p:cNvPr>
@@ -22899,7 +24910,7 @@
           <p:cNvPr id="11" name="">
             <a:extLst xmlns:a="http://schemas.openxmlformats.or